--- a/Project-3/presentation.pptx
+++ b/Project-3/presentation.pptx
@@ -11,6 +11,7 @@
     <p:sldId id="259" r:id="rId5"/>
     <p:sldId id="260" r:id="rId6"/>
     <p:sldId id="261" r:id="rId7"/>
+    <p:sldId id="262" r:id="rId8"/>
   </p:sldIdLst>
   <p:sldSz cx="9144000" cy="5143500" type="screen16x9"/>
   <p:notesSz cx="6858000" cy="9144000"/>
@@ -3220,7 +3221,7 @@
             </a:pPr>
             <a:r>
               <a:rPr/>
-              <a:t>title: “Redwood Analytics Project 3” format: pptx execute: echo: false —</a:t>
+              <a:t>title: “Redwood Analytics Project 3” format: pptx echo: false —</a:t>
             </a:r>
           </a:p>
         </p:txBody>
@@ -3267,30 +3268,7 @@
             </a:pPr>
             <a:r>
               <a:rPr/>
-              <a:t>Domain Expert</a:t>
-            </a:r>
-          </a:p>
-        </p:txBody>
-      </p:sp>
-      <p:sp>
-        <p:nvSpPr>
-          <p:cNvPr id="3" name="Content Placeholder 2"/>
-          <p:cNvSpPr>
-            <a:spLocks noGrp="1"/>
-          </p:cNvSpPr>
-          <p:nvPr>
-            <p:ph idx="1"/>
-          </p:nvPr>
-        </p:nvSpPr>
-        <p:spPr/>
-        <p:txBody>
-          <a:bodyPr/>
-          <a:lstStyle/>
-          <a:p>
-            <a:pPr lvl="0"/>
-            <a:r>
-              <a:rPr/>
-              <a:t>Test</a:t>
+              <a:t>Domain Expert 1</a:t>
             </a:r>
           </a:p>
         </p:txBody>
@@ -3337,7 +3315,30 @@
             </a:pPr>
             <a:r>
               <a:rPr/>
-              <a:t>Project Manager</a:t>
+              <a:t>Domain Expert 2</a:t>
+            </a:r>
+          </a:p>
+        </p:txBody>
+      </p:sp>
+      <p:sp>
+        <p:nvSpPr>
+          <p:cNvPr id="3" name="Content Placeholder 2"/>
+          <p:cNvSpPr>
+            <a:spLocks noGrp="1"/>
+          </p:cNvSpPr>
+          <p:nvPr>
+            <p:ph idx="1"/>
+          </p:nvPr>
+        </p:nvSpPr>
+        <p:spPr/>
+        <p:txBody>
+          <a:bodyPr/>
+          <a:lstStyle/>
+          <a:p>
+            <a:pPr lvl="0"/>
+            <a:r>
+              <a:rPr/>
+              <a:t>Test</a:t>
             </a:r>
           </a:p>
         </p:txBody>
@@ -3384,7 +3385,7 @@
             </a:pPr>
             <a:r>
               <a:rPr/>
-              <a:t>Technical Lead</a:t>
+              <a:t>Project Manager</a:t>
             </a:r>
           </a:p>
         </p:txBody>
@@ -3395,6 +3396,53 @@
 </file>
 
 <file path=ppt/slides/slide6.xml><?xml version="1.0" encoding="utf-8"?>
+<p:sld xmlns:a="http://schemas.openxmlformats.org/drawingml/2006/main" xmlns:r="http://schemas.openxmlformats.org/officeDocument/2006/relationships" xmlns:p="http://schemas.openxmlformats.org/presentationml/2006/main">
+  <p:cSld>
+    <p:spTree>
+      <p:nvGrpSpPr>
+        <p:cNvPr id="1" name=""/>
+        <p:cNvGrpSpPr/>
+        <p:nvPr/>
+      </p:nvGrpSpPr>
+      <p:grpSpPr>
+        <a:xfrm>
+          <a:off x="0" y="0"/>
+          <a:ext cx="0" cy="0"/>
+          <a:chOff x="0" y="0"/>
+          <a:chExt cx="0" cy="0"/>
+        </a:xfrm>
+      </p:grpSpPr>
+      <p:sp>
+        <p:nvSpPr>
+          <p:cNvPr id="2" name="Title 1"/>
+          <p:cNvSpPr>
+            <a:spLocks noGrp="1"/>
+          </p:cNvSpPr>
+          <p:nvPr>
+            <p:ph type="title"/>
+          </p:nvPr>
+        </p:nvSpPr>
+        <p:spPr/>
+        <p:txBody>
+          <a:bodyPr/>
+          <a:lstStyle/>
+          <a:p>
+            <a:pPr lvl="0" indent="0" marL="0">
+              <a:buNone/>
+            </a:pPr>
+            <a:r>
+              <a:rPr/>
+              <a:t>Technical Lead</a:t>
+            </a:r>
+          </a:p>
+        </p:txBody>
+      </p:sp>
+    </p:spTree>
+  </p:cSld>
+</p:sld>
+</file>
+
+<file path=ppt/slides/slide7.xml><?xml version="1.0" encoding="utf-8"?>
 <p:sld xmlns:a="http://schemas.openxmlformats.org/drawingml/2006/main" xmlns:r="http://schemas.openxmlformats.org/officeDocument/2006/relationships" xmlns:p="http://schemas.openxmlformats.org/presentationml/2006/main">
   <p:cSld>
     <p:spTree>

--- a/Project-3/presentation.pptx
+++ b/Project-3/presentation.pptx
@@ -12,6 +12,10 @@
     <p:sldId id="260" r:id="rId6"/>
     <p:sldId id="261" r:id="rId7"/>
     <p:sldId id="262" r:id="rId8"/>
+    <p:sldId id="263" r:id="rId9"/>
+    <p:sldId id="264" r:id="rId10"/>
+    <p:sldId id="265" r:id="rId11"/>
+    <p:sldId id="266" r:id="rId12"/>
   </p:sldIdLst>
   <p:sldSz cx="9144000" cy="5143500" type="screen16x9"/>
   <p:notesSz cx="6858000" cy="9144000"/>
@@ -3159,6 +3163,100 @@
 </p:sld>
 </file>
 
+<file path=ppt/slides/slide10.xml><?xml version="1.0" encoding="utf-8"?>
+<p:sld xmlns:a="http://schemas.openxmlformats.org/drawingml/2006/main" xmlns:r="http://schemas.openxmlformats.org/officeDocument/2006/relationships" xmlns:p="http://schemas.openxmlformats.org/presentationml/2006/main">
+  <p:cSld>
+    <p:spTree>
+      <p:nvGrpSpPr>
+        <p:cNvPr id="1" name=""/>
+        <p:cNvGrpSpPr/>
+        <p:nvPr/>
+      </p:nvGrpSpPr>
+      <p:grpSpPr>
+        <a:xfrm>
+          <a:off x="0" y="0"/>
+          <a:ext cx="0" cy="0"/>
+          <a:chOff x="0" y="0"/>
+          <a:chExt cx="0" cy="0"/>
+        </a:xfrm>
+      </p:grpSpPr>
+      <p:sp>
+        <p:nvSpPr>
+          <p:cNvPr id="2" name="Title 1"/>
+          <p:cNvSpPr>
+            <a:spLocks noGrp="1"/>
+          </p:cNvSpPr>
+          <p:nvPr>
+            <p:ph type="title"/>
+          </p:nvPr>
+        </p:nvSpPr>
+        <p:spPr/>
+        <p:txBody>
+          <a:bodyPr/>
+          <a:lstStyle/>
+          <a:p>
+            <a:pPr lvl="0" indent="0" marL="0">
+              <a:buNone/>
+            </a:pPr>
+            <a:r>
+              <a:rPr/>
+              <a:t>Technical Lead</a:t>
+            </a:r>
+          </a:p>
+        </p:txBody>
+      </p:sp>
+    </p:spTree>
+  </p:cSld>
+</p:sld>
+</file>
+
+<file path=ppt/slides/slide11.xml><?xml version="1.0" encoding="utf-8"?>
+<p:sld xmlns:a="http://schemas.openxmlformats.org/drawingml/2006/main" xmlns:r="http://schemas.openxmlformats.org/officeDocument/2006/relationships" xmlns:p="http://schemas.openxmlformats.org/presentationml/2006/main">
+  <p:cSld>
+    <p:spTree>
+      <p:nvGrpSpPr>
+        <p:cNvPr id="1" name=""/>
+        <p:cNvGrpSpPr/>
+        <p:nvPr/>
+      </p:nvGrpSpPr>
+      <p:grpSpPr>
+        <a:xfrm>
+          <a:off x="0" y="0"/>
+          <a:ext cx="0" cy="0"/>
+          <a:chOff x="0" y="0"/>
+          <a:chExt cx="0" cy="0"/>
+        </a:xfrm>
+      </p:grpSpPr>
+      <p:sp>
+        <p:nvSpPr>
+          <p:cNvPr id="2" name="Title 1"/>
+          <p:cNvSpPr>
+            <a:spLocks noGrp="1"/>
+          </p:cNvSpPr>
+          <p:nvPr>
+            <p:ph type="title"/>
+          </p:nvPr>
+        </p:nvSpPr>
+        <p:spPr/>
+        <p:txBody>
+          <a:bodyPr/>
+          <a:lstStyle/>
+          <a:p>
+            <a:pPr lvl="0" indent="0" marL="0">
+              <a:buNone/>
+            </a:pPr>
+            <a:r>
+              <a:rPr/>
+              <a:t>Quality Assurance</a:t>
+            </a:r>
+          </a:p>
+        </p:txBody>
+      </p:sp>
+    </p:spTree>
+  </p:cSld>
+</p:sld>
+</file>
+
 <file path=ppt/slides/slide2.xml><?xml version="1.0" encoding="utf-8"?>
 <p:sld xmlns:a="http://schemas.openxmlformats.org/drawingml/2006/main" xmlns:r="http://schemas.openxmlformats.org/officeDocument/2006/relationships" xmlns:p="http://schemas.openxmlformats.org/presentationml/2006/main">
   <p:cSld>
@@ -3196,32 +3294,7 @@
             </a:pPr>
             <a:r>
               <a:rPr/>
-              <a:t># Redwood Analytics Project 3</a:t>
-            </a:r>
-          </a:p>
-        </p:txBody>
-      </p:sp>
-      <p:sp>
-        <p:nvSpPr>
-          <p:cNvPr id="3" name="Content Placeholder 2"/>
-          <p:cNvSpPr>
-            <a:spLocks noGrp="1"/>
-          </p:cNvSpPr>
-          <p:nvPr>
-            <p:ph idx="1"/>
-          </p:nvPr>
-        </p:nvSpPr>
-        <p:spPr/>
-        <p:txBody>
-          <a:bodyPr/>
-          <a:lstStyle/>
-          <a:p>
-            <a:pPr lvl="0" indent="0" marL="0">
-              <a:buNone/>
-            </a:pPr>
-            <a:r>
-              <a:rPr/>
-              <a:t>title: “Redwood Analytics Project 3” format: pptx echo: false —</a:t>
+              <a:t>Redwood Analytics Project 3</a:t>
             </a:r>
           </a:p>
         </p:txBody>
@@ -3268,7 +3341,74 @@
             </a:pPr>
             <a:r>
               <a:rPr/>
-              <a:t>Domain Expert 1</a:t>
+              <a:t>Data Dictionary</a:t>
+            </a:r>
+          </a:p>
+        </p:txBody>
+      </p:sp>
+      <p:sp>
+        <p:nvSpPr>
+          <p:cNvPr id="3" name="Content Placeholder 2"/>
+          <p:cNvSpPr>
+            <a:spLocks noGrp="1"/>
+          </p:cNvSpPr>
+          <p:nvPr>
+            <p:ph idx="1"/>
+          </p:nvPr>
+        </p:nvSpPr>
+        <p:spPr/>
+        <p:txBody>
+          <a:bodyPr/>
+          <a:lstStyle/>
+          <a:p>
+            <a:pPr lvl="0"/>
+            <a:r>
+              <a:rPr/>
+              <a:t>UNITS</a:t>
+            </a:r>
+          </a:p>
+          <a:p>
+            <a:pPr lvl="0"/>
+            <a:r>
+              <a:rPr/>
+              <a:t>SPCD (Species Code): A numeric code which unqiuely identifies each tree species as specifed by the FIA (Forest Inventory and Analysis) species coding system. Each FIA species code corresponds uniquely to a scientific and common name. (Official definition: FIA species code.)</a:t>
+            </a:r>
+          </a:p>
+          <a:p>
+            <a:pPr lvl="0"/>
+            <a:r>
+              <a:rPr/>
+              <a:t>DO_BH (Diameter at Breast Height [Outside Bark]): Diameter of the tree stem measured at breast height (4.5 feet or 1.37 meters above ground) including bark. This is the standard foresty measurement “DBH (outside bark)” and is the primary size variable used in nearly all allometric biomass models.</a:t>
+            </a:r>
+          </a:p>
+          <a:p>
+            <a:pPr lvl="0"/>
+            <a:r>
+              <a:rPr/>
+              <a:t>HT_TOT (Total Tree Height): The total height of the tree measured from ground level to the top of the crown. Used as a second size metric in volume and biomass modeling.</a:t>
+            </a:r>
+          </a:p>
+          <a:p>
+            <a:pPr lvl="0"/>
+            <a:r>
+              <a:rPr/>
+              <a:t>TT_DW_CRM (Total Tree Dry Biomass): The total above-ground dry weight of the tree (includes stem wood, stem bark, branches, folliage). This value comes from destructive sampling: the tree was felled, seperated into componenets, oven-dried, and weighed. This variable serves as the response variable (“target”) from biomass prediction.</a:t>
+            </a:r>
+          </a:p>
+          <a:p>
+            <a:pPr lvl="0"/>
+            <a:r>
+              <a:rPr/>
+              <a:t>COMMON_NAME: The corresponding string common name for the tree species for a FIA SPCD code.</a:t>
+            </a:r>
+          </a:p>
+          <a:p>
+            <a:pPr lvl="0" indent="0" marL="0">
+              <a:buNone/>
+            </a:pPr>
+            <a:r>
+              <a:rPr/>
+              <a:t>#Domain Expert 2</a:t>
             </a:r>
           </a:p>
         </p:txBody>
@@ -3315,34 +3455,41 @@
             </a:pPr>
             <a:r>
               <a:rPr/>
-              <a:t>Domain Expert 2</a:t>
-            </a:r>
-          </a:p>
-        </p:txBody>
-      </p:sp>
-      <p:sp>
-        <p:nvSpPr>
-          <p:cNvPr id="3" name="Content Placeholder 2"/>
-          <p:cNvSpPr>
-            <a:spLocks noGrp="1"/>
-          </p:cNvSpPr>
-          <p:nvPr>
-            <p:ph idx="1"/>
-          </p:nvPr>
-        </p:nvSpPr>
-        <p:spPr/>
-        <p:txBody>
-          <a:bodyPr/>
-          <a:lstStyle/>
-          <a:p>
-            <a:pPr lvl="0"/>
-            <a:r>
-              <a:rPr/>
-              <a:t>Test</a:t>
-            </a:r>
-          </a:p>
-        </p:txBody>
-      </p:sp>
+              <a:t>Univariate Visualizations</a:t>
+            </a:r>
+          </a:p>
+        </p:txBody>
+      </p:sp>
+      <p:pic>
+        <p:nvPicPr>
+          <p:cNvPr descr="presentation_files/figure-pptx/cell-3-output-1.png" id="0" name="Picture 1"/>
+          <p:cNvPicPr>
+            <a:picLocks noGrp="1" noChangeAspect="1"/>
+          </p:cNvPicPr>
+          <p:nvPr/>
+        </p:nvPicPr>
+        <p:blipFill>
+          <a:blip r:embed="rId2"/>
+          <a:stretch>
+            <a:fillRect/>
+          </a:stretch>
+        </p:blipFill>
+        <p:spPr bwMode="auto">
+          <a:xfrm>
+            <a:off x="1346200" y="1193800"/>
+            <a:ext cx="6451600" cy="3390900"/>
+          </a:xfrm>
+          <a:prstGeom prst="rect">
+            <a:avLst/>
+          </a:prstGeom>
+          <a:noFill/>
+          <a:ln w="9525">
+            <a:noFill/>
+            <a:headEnd/>
+            <a:tailEnd/>
+          </a:ln>
+        </p:spPr>
+      </p:pic>
     </p:spTree>
   </p:cSld>
 </p:sld>
@@ -3385,11 +3532,41 @@
             </a:pPr>
             <a:r>
               <a:rPr/>
-              <a:t>Project Manager</a:t>
-            </a:r>
-          </a:p>
-        </p:txBody>
-      </p:sp>
+              <a:t>Bivariate Visualizations</a:t>
+            </a:r>
+          </a:p>
+        </p:txBody>
+      </p:sp>
+      <p:pic>
+        <p:nvPicPr>
+          <p:cNvPr descr="presentation_files/figure-pptx/cell-4-output-1.png" id="0" name="Picture 1"/>
+          <p:cNvPicPr>
+            <a:picLocks noGrp="1" noChangeAspect="1"/>
+          </p:cNvPicPr>
+          <p:nvPr/>
+        </p:nvPicPr>
+        <p:blipFill>
+          <a:blip r:embed="rId2"/>
+          <a:stretch>
+            <a:fillRect/>
+          </a:stretch>
+        </p:blipFill>
+        <p:spPr bwMode="auto">
+          <a:xfrm>
+            <a:off x="1397000" y="1193800"/>
+            <a:ext cx="6350000" cy="3390900"/>
+          </a:xfrm>
+          <a:prstGeom prst="rect">
+            <a:avLst/>
+          </a:prstGeom>
+          <a:noFill/>
+          <a:ln w="9525">
+            <a:noFill/>
+            <a:headEnd/>
+            <a:tailEnd/>
+          </a:ln>
+        </p:spPr>
+      </p:pic>
     </p:spTree>
   </p:cSld>
 </p:sld>
@@ -3432,11 +3609,41 @@
             </a:pPr>
             <a:r>
               <a:rPr/>
-              <a:t>Technical Lead</a:t>
-            </a:r>
-          </a:p>
-        </p:txBody>
-      </p:sp>
+              <a:t>Additional Visualizations</a:t>
+            </a:r>
+          </a:p>
+        </p:txBody>
+      </p:sp>
+      <p:pic>
+        <p:nvPicPr>
+          <p:cNvPr descr="presentation_files/figure-pptx/cell-5-output-1.png" id="0" name="Picture 1"/>
+          <p:cNvPicPr>
+            <a:picLocks noGrp="1" noChangeAspect="1"/>
+          </p:cNvPicPr>
+          <p:nvPr/>
+        </p:nvPicPr>
+        <p:blipFill>
+          <a:blip r:embed="rId2"/>
+          <a:stretch>
+            <a:fillRect/>
+          </a:stretch>
+        </p:blipFill>
+        <p:spPr bwMode="auto">
+          <a:xfrm>
+            <a:off x="1155700" y="1193800"/>
+            <a:ext cx="6832600" cy="3390900"/>
+          </a:xfrm>
+          <a:prstGeom prst="rect">
+            <a:avLst/>
+          </a:prstGeom>
+          <a:noFill/>
+          <a:ln w="9525">
+            <a:noFill/>
+            <a:headEnd/>
+            <a:tailEnd/>
+          </a:ln>
+        </p:spPr>
+      </p:pic>
     </p:spTree>
   </p:cSld>
 </p:sld>
@@ -3479,7 +3686,131 @@
             </a:pPr>
             <a:r>
               <a:rPr/>
-              <a:t>Quality Assurance</a:t>
+              <a:t>Additional Visualizations</a:t>
+            </a:r>
+          </a:p>
+        </p:txBody>
+      </p:sp>
+      <p:pic>
+        <p:nvPicPr>
+          <p:cNvPr descr="presentation_files/figure-pptx/cell-6-output-1.png" id="0" name="Picture 1"/>
+          <p:cNvPicPr>
+            <a:picLocks noGrp="1" noChangeAspect="1"/>
+          </p:cNvPicPr>
+          <p:nvPr/>
+        </p:nvPicPr>
+        <p:blipFill>
+          <a:blip r:embed="rId2"/>
+          <a:stretch>
+            <a:fillRect/>
+          </a:stretch>
+        </p:blipFill>
+        <p:spPr bwMode="auto">
+          <a:xfrm>
+            <a:off x="1295400" y="1193800"/>
+            <a:ext cx="6553200" cy="3390900"/>
+          </a:xfrm>
+          <a:prstGeom prst="rect">
+            <a:avLst/>
+          </a:prstGeom>
+          <a:noFill/>
+          <a:ln w="9525">
+            <a:noFill/>
+            <a:headEnd/>
+            <a:tailEnd/>
+          </a:ln>
+        </p:spPr>
+      </p:pic>
+    </p:spTree>
+  </p:cSld>
+</p:sld>
+</file>
+
+<file path=ppt/slides/slide8.xml><?xml version="1.0" encoding="utf-8"?>
+<p:sld xmlns:a="http://schemas.openxmlformats.org/drawingml/2006/main" xmlns:r="http://schemas.openxmlformats.org/officeDocument/2006/relationships" xmlns:p="http://schemas.openxmlformats.org/presentationml/2006/main">
+  <p:cSld>
+    <p:spTree>
+      <p:nvGrpSpPr>
+        <p:cNvPr id="1" name=""/>
+        <p:cNvGrpSpPr/>
+        <p:nvPr/>
+      </p:nvGrpSpPr>
+      <p:grpSpPr>
+        <a:xfrm>
+          <a:off x="0" y="0"/>
+          <a:ext cx="0" cy="0"/>
+          <a:chOff x="0" y="0"/>
+          <a:chExt cx="0" cy="0"/>
+        </a:xfrm>
+      </p:grpSpPr>
+      <p:sp>
+        <p:nvSpPr>
+          <p:cNvPr id="2" name="Title 1"/>
+          <p:cNvSpPr>
+            <a:spLocks noGrp="1"/>
+          </p:cNvSpPr>
+          <p:nvPr>
+            <p:ph type="title"/>
+          </p:nvPr>
+        </p:nvSpPr>
+        <p:spPr/>
+        <p:txBody>
+          <a:bodyPr/>
+          <a:lstStyle/>
+          <a:p>
+            <a:pPr lvl="0" indent="0" marL="0">
+              <a:buNone/>
+            </a:pPr>
+            <a:r>
+              <a:rPr/>
+              <a:t>Domain Expert 3 (Explain the inputs and settings for the best model)</a:t>
+            </a:r>
+          </a:p>
+        </p:txBody>
+      </p:sp>
+    </p:spTree>
+  </p:cSld>
+</p:sld>
+</file>
+
+<file path=ppt/slides/slide9.xml><?xml version="1.0" encoding="utf-8"?>
+<p:sld xmlns:a="http://schemas.openxmlformats.org/drawingml/2006/main" xmlns:r="http://schemas.openxmlformats.org/officeDocument/2006/relationships" xmlns:p="http://schemas.openxmlformats.org/presentationml/2006/main">
+  <p:cSld>
+    <p:spTree>
+      <p:nvGrpSpPr>
+        <p:cNvPr id="1" name=""/>
+        <p:cNvGrpSpPr/>
+        <p:nvPr/>
+      </p:nvGrpSpPr>
+      <p:grpSpPr>
+        <a:xfrm>
+          <a:off x="0" y="0"/>
+          <a:ext cx="0" cy="0"/>
+          <a:chOff x="0" y="0"/>
+          <a:chExt cx="0" cy="0"/>
+        </a:xfrm>
+      </p:grpSpPr>
+      <p:sp>
+        <p:nvSpPr>
+          <p:cNvPr id="2" name="Title 1"/>
+          <p:cNvSpPr>
+            <a:spLocks noGrp="1"/>
+          </p:cNvSpPr>
+          <p:nvPr>
+            <p:ph type="title"/>
+          </p:nvPr>
+        </p:nvSpPr>
+        <p:spPr/>
+        <p:txBody>
+          <a:bodyPr/>
+          <a:lstStyle/>
+          <a:p>
+            <a:pPr lvl="0" indent="0" marL="0">
+              <a:buNone/>
+            </a:pPr>
+            <a:r>
+              <a:rPr/>
+              <a:t>Project Manager</a:t>
             </a:r>
           </a:p>
         </p:txBody>

--- a/Project-3/presentation.pptx
+++ b/Project-3/presentation.pptx
@@ -3364,51 +3364,28 @@
             <a:pPr lvl="0"/>
             <a:r>
               <a:rPr/>
-              <a:t>UNITS</a:t>
+              <a:t>SPCD (Species Code): A numeric code which unqiuely identifies each tree species as specifed by the FIA (Forest Inventory and Analysis) species coding system. Each FIA species code corresponds uniquely to a scientific and common name. (Official definition: FIA species code.)</a:t>
             </a:r>
           </a:p>
           <a:p>
             <a:pPr lvl="0"/>
             <a:r>
               <a:rPr/>
-              <a:t>SPCD (Species Code): A numeric code which unqiuely identifies each tree species as specifed by the FIA (Forest Inventory and Analysis) species coding system. Each FIA species code corresponds uniquely to a scientific and common name. (Official definition: FIA species code.)</a:t>
+              <a:t>DO_BH (Diameter at Breast Height [Outside Bark]): Diameter of the tree stem measured at breast height (4.5 feet or 1.37 meters above ground) including bark. This is the standard foresty measurement “DBH (outside bark)” and is the primary size variable used in nearly all allometric biomass models. This is measured in inches.</a:t>
             </a:r>
           </a:p>
           <a:p>
             <a:pPr lvl="0"/>
             <a:r>
               <a:rPr/>
-              <a:t>DO_BH (Diameter at Breast Height [Outside Bark]): Diameter of the tree stem measured at breast height (4.5 feet or 1.37 meters above ground) including bark. This is the standard foresty measurement “DBH (outside bark)” and is the primary size variable used in nearly all allometric biomass models.</a:t>
+              <a:t>HT_TOT (Total Tree Height): The total height of the tree measured from ground level to the top of the crown. Used as a second size metric in volume and biomass modeling.This is measured in feet.</a:t>
             </a:r>
           </a:p>
           <a:p>
             <a:pPr lvl="0"/>
             <a:r>
               <a:rPr/>
-              <a:t>HT_TOT (Total Tree Height): The total height of the tree measured from ground level to the top of the crown. Used as a second size metric in volume and biomass modeling.</a:t>
-            </a:r>
-          </a:p>
-          <a:p>
-            <a:pPr lvl="0"/>
-            <a:r>
-              <a:rPr/>
-              <a:t>TT_DW_CRM (Total Tree Dry Biomass): The total above-ground dry weight of the tree (includes stem wood, stem bark, branches, folliage). This value comes from destructive sampling: the tree was felled, seperated into componenets, oven-dried, and weighed. This variable serves as the response variable (“target”) from biomass prediction.</a:t>
-            </a:r>
-          </a:p>
-          <a:p>
-            <a:pPr lvl="0"/>
-            <a:r>
-              <a:rPr/>
-              <a:t>COMMON_NAME: The corresponding string common name for the tree species for a FIA SPCD code.</a:t>
-            </a:r>
-          </a:p>
-          <a:p>
-            <a:pPr lvl="0" indent="0" marL="0">
-              <a:buNone/>
-            </a:pPr>
-            <a:r>
-              <a:rPr/>
-              <a:t>#Domain Expert 2</a:t>
+              <a:t>NEED UNITS STILL TT_DW_CRM (Total Tree Dry Biomass): The total above-ground dry weight of the tree (includes stem wood, stem bark, branches, folliage). This value comes from destructive sampling: the tree was felled, seperated into componenets, oven-dried, and weighed. This variable serves as the response variable (“target”) from biomass prediction.</a:t>
             </a:r>
           </a:p>
         </p:txBody>

--- a/Project-3/presentation.pptx
+++ b/Project-3/presentation.pptx
@@ -3385,7 +3385,7 @@
             <a:pPr lvl="0"/>
             <a:r>
               <a:rPr/>
-              <a:t>NEED UNITS STILL TT_DW_CRM (Total Tree Dry Biomass): The total above-ground dry weight of the tree (includes stem wood, stem bark, branches, folliage). This value comes from destructive sampling: the tree was felled, seperated into componenets, oven-dried, and weighed. This variable serves as the response variable (“target”) from biomass prediction.</a:t>
+              <a:t>NEED UNITS (likely KG) STILL TT_DW_CRM (Total Tree Dry Biomass): The total above-ground dry weight of the tree (includes stem wood, stem bark, branches, folliage). This value comes from destructive sampling: the tree was felled, seperated into componenets, oven-dried, and weighed. This variable serves as the response variable (“target”) from biomass prediction.</a:t>
             </a:r>
           </a:p>
         </p:txBody>

--- a/Project-3/presentation.pptx
+++ b/Project-3/presentation.pptx
@@ -16,6 +16,12 @@
     <p:sldId id="264" r:id="rId10"/>
     <p:sldId id="265" r:id="rId11"/>
     <p:sldId id="266" r:id="rId12"/>
+    <p:sldId id="267" r:id="rId13"/>
+    <p:sldId id="268" r:id="rId14"/>
+    <p:sldId id="269" r:id="rId15"/>
+    <p:sldId id="270" r:id="rId16"/>
+    <p:sldId id="271" r:id="rId17"/>
+    <p:sldId id="272" r:id="rId18"/>
   </p:sldIdLst>
   <p:sldSz cx="9144000" cy="5143500" type="screen16x9"/>
   <p:notesSz cx="6858000" cy="9144000"/>
@@ -3125,7 +3131,7 @@
             </a:pPr>
             <a:r>
               <a:rPr/>
-              <a:t>Redwood Analytics Project 3</a:t>
+              <a:t>Redwood Analytics Project 3: Predicting Tree Biomass</a:t>
             </a:r>
           </a:p>
         </p:txBody>
@@ -3153,6 +3159,10 @@
             <a:pPr lvl="0" indent="0" marL="0">
               <a:buNone/>
             </a:pPr>
+            <a:r>
+              <a:rPr/>
+              <a:t>By Evan Blem, Dean Callahan, Zach Griffiths, and Jaiden Roe</a:t>
+            </a:r>
             <a:br/>
             <a:br/>
           </a:p>
@@ -3200,7 +3210,111 @@
             </a:pPr>
             <a:r>
               <a:rPr/>
-              <a:t>Technical Lead</a:t>
+              <a:t>Model Domain Information</a:t>
+            </a:r>
+          </a:p>
+        </p:txBody>
+      </p:sp>
+      <p:sp>
+        <p:nvSpPr>
+          <p:cNvPr id="3" name="Content Placeholder 2"/>
+          <p:cNvSpPr>
+            <a:spLocks noGrp="1"/>
+          </p:cNvSpPr>
+          <p:nvPr>
+            <p:ph idx="1"/>
+          </p:nvPr>
+        </p:nvSpPr>
+        <p:spPr/>
+        <p:txBody>
+          <a:bodyPr/>
+          <a:lstStyle/>
+          <a:p>
+            <a:pPr lvl="0" indent="0" marL="0">
+              <a:spcBef>
+                <a:spcPts val="3000"/>
+              </a:spcBef>
+              <a:buNone/>
+            </a:pPr>
+            <a:r>
+              <a:rPr b="1"/>
+              <a:t>Model Inputs &amp; Domains:</a:t>
+            </a:r>
+          </a:p>
+          <a:p>
+            <a:pPr lvl="0"/>
+            <a:r>
+              <a:rPr b="1"/>
+              <a:t>SPCD:</a:t>
+            </a:r>
+            <a:r>
+              <a:rPr/>
+              <a:t> FIA species code (categorical). Only includes species in the full dataset with a count greater than 100.</a:t>
+            </a:r>
+          </a:p>
+          <a:p>
+            <a:pPr lvl="0"/>
+            <a:r>
+              <a:rPr b="1"/>
+              <a:t>DO_BH:</a:t>
+            </a:r>
+            <a:r>
+              <a:rPr/>
+              <a:t> Diameter, measured in </a:t>
+            </a:r>
+            <a:r>
+              <a:rPr b="1"/>
+              <a:t>inches</a:t>
+            </a:r>
+            <a:r>
+              <a:rPr/>
+              <a:t>. Valid Range: 1.0-255.9 inches (based on training data min and max)</a:t>
+            </a:r>
+          </a:p>
+          <a:p>
+            <a:pPr lvl="0"/>
+            <a:r>
+              <a:rPr b="1"/>
+              <a:t>HT_TOT:</a:t>
+            </a:r>
+            <a:r>
+              <a:rPr/>
+              <a:t> Height, measured in </a:t>
+            </a:r>
+            <a:r>
+              <a:rPr b="1"/>
+              <a:t>feet</a:t>
+            </a:r>
+            <a:r>
+              <a:rPr/>
+              <a:t>. Valid Range: 2.5-370.5 feet</a:t>
+            </a:r>
+          </a:p>
+          <a:p>
+            <a:pPr lvl="0" indent="0" marL="0">
+              <a:spcBef>
+                <a:spcPts val="3000"/>
+              </a:spcBef>
+              <a:buNone/>
+            </a:pPr>
+            <a:r>
+              <a:rPr b="1"/>
+              <a:t>Output:</a:t>
+            </a:r>
+          </a:p>
+          <a:p>
+            <a:pPr lvl="0"/>
+            <a:r>
+              <a:rPr b="1"/>
+              <a:t>TT_DW_CRM</a:t>
+            </a:r>
+            <a:r>
+              <a:rPr/>
+              <a:t>: Total above-ground dry biomass in </a:t>
+            </a:r>
+            <a:r>
+              <a:rPr b="1"/>
+              <a:t>kilograms</a:t>
             </a:r>
           </a:p>
         </p:txBody>
@@ -3247,6 +3361,2912 @@
             </a:pPr>
             <a:r>
               <a:rPr/>
+              <a:t>Model Limitations:</a:t>
+            </a:r>
+          </a:p>
+        </p:txBody>
+      </p:sp>
+      <p:sp>
+        <p:nvSpPr>
+          <p:cNvPr id="3" name="Content Placeholder 2"/>
+          <p:cNvSpPr>
+            <a:spLocks noGrp="1"/>
+          </p:cNvSpPr>
+          <p:nvPr>
+            <p:ph idx="1"/>
+          </p:nvPr>
+        </p:nvSpPr>
+        <p:spPr/>
+        <p:txBody>
+          <a:bodyPr/>
+          <a:lstStyle/>
+          <a:p>
+            <a:pPr lvl="0"/>
+            <a:r>
+              <a:rPr b="1"/>
+              <a:t>Species limitations</a:t>
+            </a:r>
+            <a:r>
+              <a:rPr/>
+              <a:t>: Model won’t work for less frequent species or species that don’t appear at all in the dataset</a:t>
+            </a:r>
+          </a:p>
+          <a:p>
+            <a:pPr lvl="0"/>
+            <a:r>
+              <a:rPr b="1"/>
+              <a:t>Effectiveness varies based on species</a:t>
+            </a:r>
+            <a:r>
+              <a:rPr/>
+              <a:t>: Some species it performs well on others it performs poorly on: RMSLE of 0.0234800 for loblolly pine vs RMSLE of 0.713023 for pecan</a:t>
+            </a:r>
+          </a:p>
+          <a:p>
+            <a:pPr lvl="0"/>
+            <a:r>
+              <a:rPr b="1"/>
+              <a:t>k=3</a:t>
+            </a:r>
+            <a:r>
+              <a:rPr/>
+              <a:t>: Lower k value may lead to overfitting of data due to potential outliers and noise</a:t>
+            </a:r>
+          </a:p>
+        </p:txBody>
+      </p:sp>
+    </p:spTree>
+  </p:cSld>
+</p:sld>
+</file>
+
+<file path=ppt/slides/slide12.xml><?xml version="1.0" encoding="utf-8"?>
+<p:sld xmlns:a="http://schemas.openxmlformats.org/drawingml/2006/main" xmlns:r="http://schemas.openxmlformats.org/officeDocument/2006/relationships" xmlns:p="http://schemas.openxmlformats.org/presentationml/2006/main">
+  <p:cSld>
+    <p:spTree>
+      <p:nvGrpSpPr>
+        <p:cNvPr id="1" name=""/>
+        <p:cNvGrpSpPr/>
+        <p:nvPr/>
+      </p:nvGrpSpPr>
+      <p:grpSpPr>
+        <a:xfrm>
+          <a:off x="0" y="0"/>
+          <a:ext cx="0" cy="0"/>
+          <a:chOff x="0" y="0"/>
+          <a:chExt cx="0" cy="0"/>
+        </a:xfrm>
+      </p:grpSpPr>
+      <p:sp>
+        <p:nvSpPr>
+          <p:cNvPr id="2" name="Title 1"/>
+          <p:cNvSpPr>
+            <a:spLocks noGrp="1"/>
+          </p:cNvSpPr>
+          <p:nvPr>
+            <p:ph type="title"/>
+          </p:nvPr>
+        </p:nvSpPr>
+        <p:spPr/>
+        <p:txBody>
+          <a:bodyPr/>
+          <a:lstStyle/>
+          <a:p>
+            <a:pPr lvl="0" indent="0" marL="0">
+              <a:buNone/>
+            </a:pPr>
+            <a:r>
+              <a:rPr/>
+              <a:t>Performance Metric</a:t>
+            </a:r>
+          </a:p>
+        </p:txBody>
+      </p:sp>
+      <p:sp>
+        <p:nvSpPr>
+          <p:cNvPr id="3" name="Content Placeholder 2"/>
+          <p:cNvSpPr>
+            <a:spLocks noGrp="1"/>
+          </p:cNvSpPr>
+          <p:nvPr>
+            <p:ph idx="1"/>
+          </p:nvPr>
+        </p:nvSpPr>
+        <p:spPr/>
+        <p:txBody>
+          <a:bodyPr/>
+          <a:lstStyle/>
+          <a:p>
+            <a:pPr lvl="0" indent="0" marL="0">
+              <a:buNone/>
+            </a:pPr>
+            <a:r>
+              <a:rPr/>
+              <a:t>The Performance metric we choose is Root Mean Square Logarithmic Error(RMSLE), because when we were looking at the dataset of the biomass of different kinds of tree species, we saw that some species have more data than other species so the assume that the data is skewed</a:t>
+            </a:r>
+          </a:p>
+        </p:txBody>
+      </p:sp>
+    </p:spTree>
+  </p:cSld>
+</p:sld>
+</file>
+
+<file path=ppt/slides/slide13.xml><?xml version="1.0" encoding="utf-8"?>
+<p:sld xmlns:a="http://schemas.openxmlformats.org/drawingml/2006/main" xmlns:r="http://schemas.openxmlformats.org/officeDocument/2006/relationships" xmlns:p="http://schemas.openxmlformats.org/presentationml/2006/main">
+  <p:cSld>
+    <p:spTree>
+      <p:nvGrpSpPr>
+        <p:cNvPr id="1" name=""/>
+        <p:cNvGrpSpPr/>
+        <p:nvPr/>
+      </p:nvGrpSpPr>
+      <p:grpSpPr>
+        <a:xfrm>
+          <a:off x="0" y="0"/>
+          <a:ext cx="0" cy="0"/>
+          <a:chOff x="0" y="0"/>
+          <a:chExt cx="0" cy="0"/>
+        </a:xfrm>
+      </p:grpSpPr>
+      <p:sp>
+        <p:nvSpPr>
+          <p:cNvPr id="2" name="Title 1"/>
+          <p:cNvSpPr>
+            <a:spLocks noGrp="1"/>
+          </p:cNvSpPr>
+          <p:nvPr>
+            <p:ph type="title"/>
+          </p:nvPr>
+        </p:nvSpPr>
+        <p:spPr/>
+        <p:txBody>
+          <a:bodyPr/>
+          <a:lstStyle/>
+          <a:p>
+            <a:pPr lvl="0" indent="0" marL="0">
+              <a:buNone/>
+            </a:pPr>
+            <a:r>
+              <a:rPr/>
+              <a:t>Model</a:t>
+            </a:r>
+          </a:p>
+        </p:txBody>
+      </p:sp>
+      <p:graphicFrame>
+        <p:nvGraphicFramePr>
+          <p:cNvPr id="6" name="Content Placeholder 5"/>
+          <p:cNvGraphicFramePr>
+            <a:graphicFrameLocks noGrp="1"/>
+          </p:cNvGraphicFramePr>
+          <p:nvPr>
+            <p:ph idx="1"/>
+          </p:nvPr>
+        </p:nvGraphicFramePr>
+        <p:xfrm>
+          <a:off x="457200" y="1193800"/>
+          <a:ext cx="8229600" cy="3390900"/>
+        </p:xfrm>
+        <a:graphic>
+          <a:graphicData uri="http://schemas.openxmlformats.org/drawingml/2006/table">
+            <a:tbl>
+              <a:tblPr firstRow="1" bandRow="1">
+                <a:tableStyleId>{5C22544A-7EE6-4342-B048-85BDC9FD1C3A}</a:tableStyleId>
+              </a:tblPr>
+              <a:tblGrid>
+                <a:gridCol w="1371600"/>
+                <a:gridCol w="1371600"/>
+                <a:gridCol w="1371600"/>
+                <a:gridCol w="1371600"/>
+                <a:gridCol w="1371600"/>
+                <a:gridCol w="1371600"/>
+              </a:tblGrid>
+              <a:tr h="0">
+                <a:tc>
+                  <a:txBody>
+                    <a:bodyPr/>
+                    <a:lstStyle/>
+                    <a:p>
+                      <a:endParaRPr/>
+                    </a:p>
+                  </a:txBody>
+                  <a:tcPr/>
+                </a:tc>
+                <a:tc>
+                  <a:txBody>
+                    <a:bodyPr/>
+                    <a:lstStyle/>
+                    <a:p>
+                      <a:pPr lvl="0" indent="0" marL="0">
+                        <a:buNone/>
+                      </a:pPr>
+                      <a:r>
+                        <a:rPr/>
+                        <a:t>Species</a:t>
+                      </a:r>
+                    </a:p>
+                  </a:txBody>
+                  <a:tcPr/>
+                </a:tc>
+                <a:tc>
+                  <a:txBody>
+                    <a:bodyPr/>
+                    <a:lstStyle/>
+                    <a:p>
+                      <a:pPr lvl="0" indent="0" marL="0">
+                        <a:buNone/>
+                      </a:pPr>
+                      <a:r>
+                        <a:rPr/>
+                        <a:t>k</a:t>
+                      </a:r>
+                    </a:p>
+                  </a:txBody>
+                  <a:tcPr/>
+                </a:tc>
+                <a:tc>
+                  <a:txBody>
+                    <a:bodyPr/>
+                    <a:lstStyle/>
+                    <a:p>
+                      <a:pPr lvl="0" indent="0" marL="0">
+                        <a:buNone/>
+                      </a:pPr>
+                      <a:r>
+                        <a:rPr/>
+                        <a:t>RMSE</a:t>
+                      </a:r>
+                    </a:p>
+                  </a:txBody>
+                  <a:tcPr/>
+                </a:tc>
+                <a:tc>
+                  <a:txBody>
+                    <a:bodyPr/>
+                    <a:lstStyle/>
+                    <a:p>
+                      <a:pPr lvl="0" indent="0" marL="0">
+                        <a:buNone/>
+                      </a:pPr>
+                      <a:r>
+                        <a:rPr/>
+                        <a:t>MAE</a:t>
+                      </a:r>
+                    </a:p>
+                  </a:txBody>
+                  <a:tcPr/>
+                </a:tc>
+                <a:tc>
+                  <a:txBody>
+                    <a:bodyPr/>
+                    <a:lstStyle/>
+                    <a:p>
+                      <a:pPr lvl="0" indent="0" marL="0">
+                        <a:buNone/>
+                      </a:pPr>
+                      <a:r>
+                        <a:rPr/>
+                        <a:t>RMSLE</a:t>
+                      </a:r>
+                    </a:p>
+                  </a:txBody>
+                  <a:tcPr/>
+                </a:tc>
+              </a:tr>
+              <a:tr h="0">
+                <a:tc>
+                  <a:txBody>
+                    <a:bodyPr/>
+                    <a:lstStyle/>
+                    <a:p>
+                      <a:pPr lvl="0" indent="0" marL="0">
+                        <a:buNone/>
+                      </a:pPr>
+                      <a:r>
+                        <a:rPr/>
+                        <a:t>0</a:t>
+                      </a:r>
+                    </a:p>
+                  </a:txBody>
+                </a:tc>
+                <a:tc>
+                  <a:txBody>
+                    <a:bodyPr/>
+                    <a:lstStyle/>
+                    <a:p>
+                      <a:pPr lvl="0" indent="0" marL="0">
+                        <a:buNone/>
+                      </a:pPr>
+                      <a:r>
+                        <a:rPr/>
+                        <a:t>balsam fir</a:t>
+                      </a:r>
+                    </a:p>
+                  </a:txBody>
+                </a:tc>
+                <a:tc>
+                  <a:txBody>
+                    <a:bodyPr/>
+                    <a:lstStyle/>
+                    <a:p>
+                      <a:pPr lvl="0" indent="0" marL="0">
+                        <a:buNone/>
+                      </a:pPr>
+                      <a:r>
+                        <a:rPr/>
+                        <a:t>2</a:t>
+                      </a:r>
+                    </a:p>
+                  </a:txBody>
+                </a:tc>
+                <a:tc>
+                  <a:txBody>
+                    <a:bodyPr/>
+                    <a:lstStyle/>
+                    <a:p>
+                      <a:pPr lvl="0" indent="0" marL="0">
+                        <a:buNone/>
+                      </a:pPr>
+                      <a:r>
+                        <a:rPr/>
+                        <a:t>125.825473</a:t>
+                      </a:r>
+                    </a:p>
+                  </a:txBody>
+                </a:tc>
+                <a:tc>
+                  <a:txBody>
+                    <a:bodyPr/>
+                    <a:lstStyle/>
+                    <a:p>
+                      <a:pPr lvl="0" indent="0" marL="0">
+                        <a:buNone/>
+                      </a:pPr>
+                      <a:r>
+                        <a:rPr/>
+                        <a:t>34.801913</a:t>
+                      </a:r>
+                    </a:p>
+                  </a:txBody>
+                </a:tc>
+                <a:tc>
+                  <a:txBody>
+                    <a:bodyPr/>
+                    <a:lstStyle/>
+                    <a:p>
+                      <a:pPr lvl="0" indent="0" marL="0">
+                        <a:buNone/>
+                      </a:pPr>
+                      <a:r>
+                        <a:rPr/>
+                        <a:t>0.119574</a:t>
+                      </a:r>
+                    </a:p>
+                  </a:txBody>
+                </a:tc>
+              </a:tr>
+              <a:tr h="0">
+                <a:tc>
+                  <a:txBody>
+                    <a:bodyPr/>
+                    <a:lstStyle/>
+                    <a:p>
+                      <a:pPr lvl="0" indent="0" marL="0">
+                        <a:buNone/>
+                      </a:pPr>
+                      <a:r>
+                        <a:rPr/>
+                        <a:t>1</a:t>
+                      </a:r>
+                    </a:p>
+                  </a:txBody>
+                </a:tc>
+                <a:tc>
+                  <a:txBody>
+                    <a:bodyPr/>
+                    <a:lstStyle/>
+                    <a:p>
+                      <a:pPr lvl="0" indent="0" marL="0">
+                        <a:buNone/>
+                      </a:pPr>
+                      <a:r>
+                        <a:rPr/>
+                        <a:t>balsam fir</a:t>
+                      </a:r>
+                    </a:p>
+                  </a:txBody>
+                </a:tc>
+                <a:tc>
+                  <a:txBody>
+                    <a:bodyPr/>
+                    <a:lstStyle/>
+                    <a:p>
+                      <a:pPr lvl="0" indent="0" marL="0">
+                        <a:buNone/>
+                      </a:pPr>
+                      <a:r>
+                        <a:rPr/>
+                        <a:t>3</a:t>
+                      </a:r>
+                    </a:p>
+                  </a:txBody>
+                </a:tc>
+                <a:tc>
+                  <a:txBody>
+                    <a:bodyPr/>
+                    <a:lstStyle/>
+                    <a:p>
+                      <a:pPr lvl="0" indent="0" marL="0">
+                        <a:buNone/>
+                      </a:pPr>
+                      <a:r>
+                        <a:rPr/>
+                        <a:t>129.651479</a:t>
+                      </a:r>
+                    </a:p>
+                  </a:txBody>
+                </a:tc>
+                <a:tc>
+                  <a:txBody>
+                    <a:bodyPr/>
+                    <a:lstStyle/>
+                    <a:p>
+                      <a:pPr lvl="0" indent="0" marL="0">
+                        <a:buNone/>
+                      </a:pPr>
+                      <a:r>
+                        <a:rPr/>
+                        <a:t>36.646493</a:t>
+                      </a:r>
+                    </a:p>
+                  </a:txBody>
+                </a:tc>
+                <a:tc>
+                  <a:txBody>
+                    <a:bodyPr/>
+                    <a:lstStyle/>
+                    <a:p>
+                      <a:pPr lvl="0" indent="0" marL="0">
+                        <a:buNone/>
+                      </a:pPr>
+                      <a:r>
+                        <a:rPr/>
+                        <a:t>0.123724</a:t>
+                      </a:r>
+                    </a:p>
+                  </a:txBody>
+                </a:tc>
+              </a:tr>
+              <a:tr h="0">
+                <a:tc>
+                  <a:txBody>
+                    <a:bodyPr/>
+                    <a:lstStyle/>
+                    <a:p>
+                      <a:pPr lvl="0" indent="0" marL="0">
+                        <a:buNone/>
+                      </a:pPr>
+                      <a:r>
+                        <a:rPr/>
+                        <a:t>2</a:t>
+                      </a:r>
+                    </a:p>
+                  </a:txBody>
+                </a:tc>
+                <a:tc>
+                  <a:txBody>
+                    <a:bodyPr/>
+                    <a:lstStyle/>
+                    <a:p>
+                      <a:pPr lvl="0" indent="0" marL="0">
+                        <a:buNone/>
+                      </a:pPr>
+                      <a:r>
+                        <a:rPr/>
+                        <a:t>balsam fir</a:t>
+                      </a:r>
+                    </a:p>
+                  </a:txBody>
+                </a:tc>
+                <a:tc>
+                  <a:txBody>
+                    <a:bodyPr/>
+                    <a:lstStyle/>
+                    <a:p>
+                      <a:pPr lvl="0" indent="0" marL="0">
+                        <a:buNone/>
+                      </a:pPr>
+                      <a:r>
+                        <a:rPr/>
+                        <a:t>4</a:t>
+                      </a:r>
+                    </a:p>
+                  </a:txBody>
+                </a:tc>
+                <a:tc>
+                  <a:txBody>
+                    <a:bodyPr/>
+                    <a:lstStyle/>
+                    <a:p>
+                      <a:pPr lvl="0" indent="0" marL="0">
+                        <a:buNone/>
+                      </a:pPr>
+                      <a:r>
+                        <a:rPr/>
+                        <a:t>134.599829</a:t>
+                      </a:r>
+                    </a:p>
+                  </a:txBody>
+                </a:tc>
+                <a:tc>
+                  <a:txBody>
+                    <a:bodyPr/>
+                    <a:lstStyle/>
+                    <a:p>
+                      <a:pPr lvl="0" indent="0" marL="0">
+                        <a:buNone/>
+                      </a:pPr>
+                      <a:r>
+                        <a:rPr/>
+                        <a:t>38.884870</a:t>
+                      </a:r>
+                    </a:p>
+                  </a:txBody>
+                </a:tc>
+                <a:tc>
+                  <a:txBody>
+                    <a:bodyPr/>
+                    <a:lstStyle/>
+                    <a:p>
+                      <a:pPr lvl="0" indent="0" marL="0">
+                        <a:buNone/>
+                      </a:pPr>
+                      <a:r>
+                        <a:rPr/>
+                        <a:t>0.133858</a:t>
+                      </a:r>
+                    </a:p>
+                  </a:txBody>
+                </a:tc>
+              </a:tr>
+              <a:tr h="0">
+                <a:tc>
+                  <a:txBody>
+                    <a:bodyPr/>
+                    <a:lstStyle/>
+                    <a:p>
+                      <a:pPr lvl="0" indent="0" marL="0">
+                        <a:buNone/>
+                      </a:pPr>
+                      <a:r>
+                        <a:rPr/>
+                        <a:t>3</a:t>
+                      </a:r>
+                    </a:p>
+                  </a:txBody>
+                </a:tc>
+                <a:tc>
+                  <a:txBody>
+                    <a:bodyPr/>
+                    <a:lstStyle/>
+                    <a:p>
+                      <a:pPr lvl="0" indent="0" marL="0">
+                        <a:buNone/>
+                      </a:pPr>
+                      <a:r>
+                        <a:rPr/>
+                        <a:t>balsam fir</a:t>
+                      </a:r>
+                    </a:p>
+                  </a:txBody>
+                </a:tc>
+                <a:tc>
+                  <a:txBody>
+                    <a:bodyPr/>
+                    <a:lstStyle/>
+                    <a:p>
+                      <a:pPr lvl="0" indent="0" marL="0">
+                        <a:buNone/>
+                      </a:pPr>
+                      <a:r>
+                        <a:rPr/>
+                        <a:t>5</a:t>
+                      </a:r>
+                    </a:p>
+                  </a:txBody>
+                </a:tc>
+                <a:tc>
+                  <a:txBody>
+                    <a:bodyPr/>
+                    <a:lstStyle/>
+                    <a:p>
+                      <a:pPr lvl="0" indent="0" marL="0">
+                        <a:buNone/>
+                      </a:pPr>
+                      <a:r>
+                        <a:rPr/>
+                        <a:t>145.003601</a:t>
+                      </a:r>
+                    </a:p>
+                  </a:txBody>
+                </a:tc>
+                <a:tc>
+                  <a:txBody>
+                    <a:bodyPr/>
+                    <a:lstStyle/>
+                    <a:p>
+                      <a:pPr lvl="0" indent="0" marL="0">
+                        <a:buNone/>
+                      </a:pPr>
+                      <a:r>
+                        <a:rPr/>
+                        <a:t>41.209530</a:t>
+                      </a:r>
+                    </a:p>
+                  </a:txBody>
+                </a:tc>
+                <a:tc>
+                  <a:txBody>
+                    <a:bodyPr/>
+                    <a:lstStyle/>
+                    <a:p>
+                      <a:pPr lvl="0" indent="0" marL="0">
+                        <a:buNone/>
+                      </a:pPr>
+                      <a:r>
+                        <a:rPr/>
+                        <a:t>0.144063</a:t>
+                      </a:r>
+                    </a:p>
+                  </a:txBody>
+                </a:tc>
+              </a:tr>
+              <a:tr h="0">
+                <a:tc>
+                  <a:txBody>
+                    <a:bodyPr/>
+                    <a:lstStyle/>
+                    <a:p>
+                      <a:pPr lvl="0" indent="0" marL="0">
+                        <a:buNone/>
+                      </a:pPr>
+                      <a:r>
+                        <a:rPr/>
+                        <a:t>4</a:t>
+                      </a:r>
+                    </a:p>
+                  </a:txBody>
+                </a:tc>
+                <a:tc>
+                  <a:txBody>
+                    <a:bodyPr/>
+                    <a:lstStyle/>
+                    <a:p>
+                      <a:pPr lvl="0" indent="0" marL="0">
+                        <a:buNone/>
+                      </a:pPr>
+                      <a:r>
+                        <a:rPr/>
+                        <a:t>balsam fir</a:t>
+                      </a:r>
+                    </a:p>
+                  </a:txBody>
+                </a:tc>
+                <a:tc>
+                  <a:txBody>
+                    <a:bodyPr/>
+                    <a:lstStyle/>
+                    <a:p>
+                      <a:pPr lvl="0" indent="0" marL="0">
+                        <a:buNone/>
+                      </a:pPr>
+                      <a:r>
+                        <a:rPr/>
+                        <a:t>6</a:t>
+                      </a:r>
+                    </a:p>
+                  </a:txBody>
+                </a:tc>
+                <a:tc>
+                  <a:txBody>
+                    <a:bodyPr/>
+                    <a:lstStyle/>
+                    <a:p>
+                      <a:pPr lvl="0" indent="0" marL="0">
+                        <a:buNone/>
+                      </a:pPr>
+                      <a:r>
+                        <a:rPr/>
+                        <a:t>147.451321</a:t>
+                      </a:r>
+                    </a:p>
+                  </a:txBody>
+                </a:tc>
+                <a:tc>
+                  <a:txBody>
+                    <a:bodyPr/>
+                    <a:lstStyle/>
+                    <a:p>
+                      <a:pPr lvl="0" indent="0" marL="0">
+                        <a:buNone/>
+                      </a:pPr>
+                      <a:r>
+                        <a:rPr/>
+                        <a:t>40.791681</a:t>
+                      </a:r>
+                    </a:p>
+                  </a:txBody>
+                </a:tc>
+                <a:tc>
+                  <a:txBody>
+                    <a:bodyPr/>
+                    <a:lstStyle/>
+                    <a:p>
+                      <a:pPr lvl="0" indent="0" marL="0">
+                        <a:buNone/>
+                      </a:pPr>
+                      <a:r>
+                        <a:rPr/>
+                        <a:t>0.142862</a:t>
+                      </a:r>
+                    </a:p>
+                  </a:txBody>
+                </a:tc>
+              </a:tr>
+              <a:tr h="0">
+                <a:tc>
+                  <a:txBody>
+                    <a:bodyPr/>
+                    <a:lstStyle/>
+                    <a:p>
+                      <a:pPr lvl="0" indent="0" marL="0">
+                        <a:buNone/>
+                      </a:pPr>
+                      <a:r>
+                        <a:rPr/>
+                        <a:t>...</a:t>
+                      </a:r>
+                    </a:p>
+                  </a:txBody>
+                </a:tc>
+                <a:tc>
+                  <a:txBody>
+                    <a:bodyPr/>
+                    <a:lstStyle/>
+                    <a:p>
+                      <a:pPr lvl="0" indent="0" marL="0">
+                        <a:buNone/>
+                      </a:pPr>
+                      <a:r>
+                        <a:rPr/>
+                        <a:t>...</a:t>
+                      </a:r>
+                    </a:p>
+                  </a:txBody>
+                </a:tc>
+                <a:tc>
+                  <a:txBody>
+                    <a:bodyPr/>
+                    <a:lstStyle/>
+                    <a:p>
+                      <a:pPr lvl="0" indent="0" marL="0">
+                        <a:buNone/>
+                      </a:pPr>
+                      <a:r>
+                        <a:rPr/>
+                        <a:t>...</a:t>
+                      </a:r>
+                    </a:p>
+                  </a:txBody>
+                </a:tc>
+                <a:tc>
+                  <a:txBody>
+                    <a:bodyPr/>
+                    <a:lstStyle/>
+                    <a:p>
+                      <a:pPr lvl="0" indent="0" marL="0">
+                        <a:buNone/>
+                      </a:pPr>
+                      <a:r>
+                        <a:rPr/>
+                        <a:t>...</a:t>
+                      </a:r>
+                    </a:p>
+                  </a:txBody>
+                </a:tc>
+                <a:tc>
+                  <a:txBody>
+                    <a:bodyPr/>
+                    <a:lstStyle/>
+                    <a:p>
+                      <a:pPr lvl="0" indent="0" marL="0">
+                        <a:buNone/>
+                      </a:pPr>
+                      <a:r>
+                        <a:rPr/>
+                        <a:t>...</a:t>
+                      </a:r>
+                    </a:p>
+                  </a:txBody>
+                </a:tc>
+                <a:tc>
+                  <a:txBody>
+                    <a:bodyPr/>
+                    <a:lstStyle/>
+                    <a:p>
+                      <a:pPr lvl="0" indent="0" marL="0">
+                        <a:buNone/>
+                      </a:pPr>
+                      <a:r>
+                        <a:rPr/>
+                        <a:t>...</a:t>
+                      </a:r>
+                    </a:p>
+                  </a:txBody>
+                </a:tc>
+              </a:tr>
+              <a:tr h="0">
+                <a:tc>
+                  <a:txBody>
+                    <a:bodyPr/>
+                    <a:lstStyle/>
+                    <a:p>
+                      <a:pPr lvl="0" indent="0" marL="0">
+                        <a:buNone/>
+                      </a:pPr>
+                      <a:r>
+                        <a:rPr/>
+                        <a:t>895</a:t>
+                      </a:r>
+                    </a:p>
+                  </a:txBody>
+                </a:tc>
+                <a:tc>
+                  <a:txBody>
+                    <a:bodyPr/>
+                    <a:lstStyle/>
+                    <a:p>
+                      <a:pPr lvl="0" indent="0" marL="0">
+                        <a:buNone/>
+                      </a:pPr>
+                      <a:r>
+                        <a:rPr/>
+                        <a:t>sugarberry</a:t>
+                      </a:r>
+                    </a:p>
+                  </a:txBody>
+                </a:tc>
+                <a:tc>
+                  <a:txBody>
+                    <a:bodyPr/>
+                    <a:lstStyle/>
+                    <a:p>
+                      <a:pPr lvl="0" indent="0" marL="0">
+                        <a:buNone/>
+                      </a:pPr>
+                      <a:r>
+                        <a:rPr/>
+                        <a:t>6</a:t>
+                      </a:r>
+                    </a:p>
+                  </a:txBody>
+                </a:tc>
+                <a:tc>
+                  <a:txBody>
+                    <a:bodyPr/>
+                    <a:lstStyle/>
+                    <a:p>
+                      <a:pPr lvl="0" indent="0" marL="0">
+                        <a:buNone/>
+                      </a:pPr>
+                      <a:r>
+                        <a:rPr/>
+                        <a:t>32.431052</a:t>
+                      </a:r>
+                    </a:p>
+                  </a:txBody>
+                </a:tc>
+                <a:tc>
+                  <a:txBody>
+                    <a:bodyPr/>
+                    <a:lstStyle/>
+                    <a:p>
+                      <a:pPr lvl="0" indent="0" marL="0">
+                        <a:buNone/>
+                      </a:pPr>
+                      <a:r>
+                        <a:rPr/>
+                        <a:t>20.969306</a:t>
+                      </a:r>
+                    </a:p>
+                  </a:txBody>
+                </a:tc>
+                <a:tc>
+                  <a:txBody>
+                    <a:bodyPr/>
+                    <a:lstStyle/>
+                    <a:p>
+                      <a:pPr lvl="0" indent="0" marL="0">
+                        <a:buNone/>
+                      </a:pPr>
+                      <a:r>
+                        <a:rPr/>
+                        <a:t>0.565727</a:t>
+                      </a:r>
+                    </a:p>
+                  </a:txBody>
+                </a:tc>
+              </a:tr>
+              <a:tr h="0">
+                <a:tc>
+                  <a:txBody>
+                    <a:bodyPr/>
+                    <a:lstStyle/>
+                    <a:p>
+                      <a:pPr lvl="0" indent="0" marL="0">
+                        <a:buNone/>
+                      </a:pPr>
+                      <a:r>
+                        <a:rPr/>
+                        <a:t>896</a:t>
+                      </a:r>
+                    </a:p>
+                  </a:txBody>
+                </a:tc>
+                <a:tc>
+                  <a:txBody>
+                    <a:bodyPr/>
+                    <a:lstStyle/>
+                    <a:p>
+                      <a:pPr lvl="0" indent="0" marL="0">
+                        <a:buNone/>
+                      </a:pPr>
+                      <a:r>
+                        <a:rPr/>
+                        <a:t>sugarberry</a:t>
+                      </a:r>
+                    </a:p>
+                  </a:txBody>
+                </a:tc>
+                <a:tc>
+                  <a:txBody>
+                    <a:bodyPr/>
+                    <a:lstStyle/>
+                    <a:p>
+                      <a:pPr lvl="0" indent="0" marL="0">
+                        <a:buNone/>
+                      </a:pPr>
+                      <a:r>
+                        <a:rPr/>
+                        <a:t>7</a:t>
+                      </a:r>
+                    </a:p>
+                  </a:txBody>
+                </a:tc>
+                <a:tc>
+                  <a:txBody>
+                    <a:bodyPr/>
+                    <a:lstStyle/>
+                    <a:p>
+                      <a:pPr lvl="0" indent="0" marL="0">
+                        <a:buNone/>
+                      </a:pPr>
+                      <a:r>
+                        <a:rPr/>
+                        <a:t>37.324259</a:t>
+                      </a:r>
+                    </a:p>
+                  </a:txBody>
+                </a:tc>
+                <a:tc>
+                  <a:txBody>
+                    <a:bodyPr/>
+                    <a:lstStyle/>
+                    <a:p>
+                      <a:pPr lvl="0" indent="0" marL="0">
+                        <a:buNone/>
+                      </a:pPr>
+                      <a:r>
+                        <a:rPr/>
+                        <a:t>25.037024</a:t>
+                      </a:r>
+                    </a:p>
+                  </a:txBody>
+                </a:tc>
+                <a:tc>
+                  <a:txBody>
+                    <a:bodyPr/>
+                    <a:lstStyle/>
+                    <a:p>
+                      <a:pPr lvl="0" indent="0" marL="0">
+                        <a:buNone/>
+                      </a:pPr>
+                      <a:r>
+                        <a:rPr/>
+                        <a:t>0.637629</a:t>
+                      </a:r>
+                    </a:p>
+                  </a:txBody>
+                </a:tc>
+              </a:tr>
+              <a:tr h="0">
+                <a:tc>
+                  <a:txBody>
+                    <a:bodyPr/>
+                    <a:lstStyle/>
+                    <a:p>
+                      <a:pPr lvl="0" indent="0" marL="0">
+                        <a:buNone/>
+                      </a:pPr>
+                      <a:r>
+                        <a:rPr/>
+                        <a:t>897</a:t>
+                      </a:r>
+                    </a:p>
+                  </a:txBody>
+                </a:tc>
+                <a:tc>
+                  <a:txBody>
+                    <a:bodyPr/>
+                    <a:lstStyle/>
+                    <a:p>
+                      <a:pPr lvl="0" indent="0" marL="0">
+                        <a:buNone/>
+                      </a:pPr>
+                      <a:r>
+                        <a:rPr/>
+                        <a:t>sugarberry</a:t>
+                      </a:r>
+                    </a:p>
+                  </a:txBody>
+                </a:tc>
+                <a:tc>
+                  <a:txBody>
+                    <a:bodyPr/>
+                    <a:lstStyle/>
+                    <a:p>
+                      <a:pPr lvl="0" indent="0" marL="0">
+                        <a:buNone/>
+                      </a:pPr>
+                      <a:r>
+                        <a:rPr/>
+                        <a:t>8</a:t>
+                      </a:r>
+                    </a:p>
+                  </a:txBody>
+                </a:tc>
+                <a:tc>
+                  <a:txBody>
+                    <a:bodyPr/>
+                    <a:lstStyle/>
+                    <a:p>
+                      <a:pPr lvl="0" indent="0" marL="0">
+                        <a:buNone/>
+                      </a:pPr>
+                      <a:r>
+                        <a:rPr/>
+                        <a:t>38.144756</a:t>
+                      </a:r>
+                    </a:p>
+                  </a:txBody>
+                </a:tc>
+                <a:tc>
+                  <a:txBody>
+                    <a:bodyPr/>
+                    <a:lstStyle/>
+                    <a:p>
+                      <a:pPr lvl="0" indent="0" marL="0">
+                        <a:buNone/>
+                      </a:pPr>
+                      <a:r>
+                        <a:rPr/>
+                        <a:t>26.680208</a:t>
+                      </a:r>
+                    </a:p>
+                  </a:txBody>
+                </a:tc>
+                <a:tc>
+                  <a:txBody>
+                    <a:bodyPr/>
+                    <a:lstStyle/>
+                    <a:p>
+                      <a:pPr lvl="0" indent="0" marL="0">
+                        <a:buNone/>
+                      </a:pPr>
+                      <a:r>
+                        <a:rPr/>
+                        <a:t>0.665159</a:t>
+                      </a:r>
+                    </a:p>
+                  </a:txBody>
+                </a:tc>
+              </a:tr>
+              <a:tr h="0">
+                <a:tc>
+                  <a:txBody>
+                    <a:bodyPr/>
+                    <a:lstStyle/>
+                    <a:p>
+                      <a:pPr lvl="0" indent="0" marL="0">
+                        <a:buNone/>
+                      </a:pPr>
+                      <a:r>
+                        <a:rPr/>
+                        <a:t>898</a:t>
+                      </a:r>
+                    </a:p>
+                  </a:txBody>
+                </a:tc>
+                <a:tc>
+                  <a:txBody>
+                    <a:bodyPr/>
+                    <a:lstStyle/>
+                    <a:p>
+                      <a:pPr lvl="0" indent="0" marL="0">
+                        <a:buNone/>
+                      </a:pPr>
+                      <a:r>
+                        <a:rPr/>
+                        <a:t>sugarberry</a:t>
+                      </a:r>
+                    </a:p>
+                  </a:txBody>
+                </a:tc>
+                <a:tc>
+                  <a:txBody>
+                    <a:bodyPr/>
+                    <a:lstStyle/>
+                    <a:p>
+                      <a:pPr lvl="0" indent="0" marL="0">
+                        <a:buNone/>
+                      </a:pPr>
+                      <a:r>
+                        <a:rPr/>
+                        <a:t>9</a:t>
+                      </a:r>
+                    </a:p>
+                  </a:txBody>
+                </a:tc>
+                <a:tc>
+                  <a:txBody>
+                    <a:bodyPr/>
+                    <a:lstStyle/>
+                    <a:p>
+                      <a:pPr lvl="0" indent="0" marL="0">
+                        <a:buNone/>
+                      </a:pPr>
+                      <a:r>
+                        <a:rPr/>
+                        <a:t>36.853245</a:t>
+                      </a:r>
+                    </a:p>
+                  </a:txBody>
+                </a:tc>
+                <a:tc>
+                  <a:txBody>
+                    <a:bodyPr/>
+                    <a:lstStyle/>
+                    <a:p>
+                      <a:pPr lvl="0" indent="0" marL="0">
+                        <a:buNone/>
+                      </a:pPr>
+                      <a:r>
+                        <a:rPr/>
+                        <a:t>21.021667</a:t>
+                      </a:r>
+                    </a:p>
+                  </a:txBody>
+                </a:tc>
+                <a:tc>
+                  <a:txBody>
+                    <a:bodyPr/>
+                    <a:lstStyle/>
+                    <a:p>
+                      <a:pPr lvl="0" indent="0" marL="0">
+                        <a:buNone/>
+                      </a:pPr>
+                      <a:r>
+                        <a:rPr/>
+                        <a:t>0.685162</a:t>
+                      </a:r>
+                    </a:p>
+                  </a:txBody>
+                </a:tc>
+              </a:tr>
+              <a:tr h="0">
+                <a:tc>
+                  <a:txBody>
+                    <a:bodyPr/>
+                    <a:lstStyle/>
+                    <a:p>
+                      <a:pPr lvl="0" indent="0" marL="0">
+                        <a:buNone/>
+                      </a:pPr>
+                      <a:r>
+                        <a:rPr/>
+                        <a:t>899</a:t>
+                      </a:r>
+                    </a:p>
+                  </a:txBody>
+                </a:tc>
+                <a:tc>
+                  <a:txBody>
+                    <a:bodyPr/>
+                    <a:lstStyle/>
+                    <a:p>
+                      <a:pPr lvl="0" indent="0" marL="0">
+                        <a:buNone/>
+                      </a:pPr>
+                      <a:r>
+                        <a:rPr/>
+                        <a:t>sugarberry</a:t>
+                      </a:r>
+                    </a:p>
+                  </a:txBody>
+                </a:tc>
+                <a:tc>
+                  <a:txBody>
+                    <a:bodyPr/>
+                    <a:lstStyle/>
+                    <a:p>
+                      <a:pPr lvl="0" indent="0" marL="0">
+                        <a:buNone/>
+                      </a:pPr>
+                      <a:r>
+                        <a:rPr/>
+                        <a:t>10</a:t>
+                      </a:r>
+                    </a:p>
+                  </a:txBody>
+                </a:tc>
+                <a:tc>
+                  <a:txBody>
+                    <a:bodyPr/>
+                    <a:lstStyle/>
+                    <a:p>
+                      <a:pPr lvl="0" indent="0" marL="0">
+                        <a:buNone/>
+                      </a:pPr>
+                      <a:r>
+                        <a:rPr/>
+                        <a:t>40.091106</a:t>
+                      </a:r>
+                    </a:p>
+                  </a:txBody>
+                </a:tc>
+                <a:tc>
+                  <a:txBody>
+                    <a:bodyPr/>
+                    <a:lstStyle/>
+                    <a:p>
+                      <a:pPr lvl="0" indent="0" marL="0">
+                        <a:buNone/>
+                      </a:pPr>
+                      <a:r>
+                        <a:rPr/>
+                        <a:t>23.172083</a:t>
+                      </a:r>
+                    </a:p>
+                  </a:txBody>
+                </a:tc>
+                <a:tc>
+                  <a:txBody>
+                    <a:bodyPr/>
+                    <a:lstStyle/>
+                    <a:p>
+                      <a:pPr lvl="0" indent="0" marL="0">
+                        <a:buNone/>
+                      </a:pPr>
+                      <a:r>
+                        <a:rPr/>
+                        <a:t>0.677519</a:t>
+                      </a:r>
+                    </a:p>
+                  </a:txBody>
+                </a:tc>
+              </a:tr>
+            </a:tbl>
+          </a:graphicData>
+        </a:graphic>
+      </p:graphicFrame>
+    </p:spTree>
+  </p:cSld>
+</p:sld>
+</file>
+
+<file path=ppt/slides/slide14.xml><?xml version="1.0" encoding="utf-8"?>
+<p:sld xmlns:a="http://schemas.openxmlformats.org/drawingml/2006/main" xmlns:r="http://schemas.openxmlformats.org/officeDocument/2006/relationships" xmlns:p="http://schemas.openxmlformats.org/presentationml/2006/main">
+  <p:cSld>
+    <p:spTree>
+      <p:nvGrpSpPr>
+        <p:cNvPr id="1" name=""/>
+        <p:cNvGrpSpPr/>
+        <p:nvPr/>
+      </p:nvGrpSpPr>
+      <p:grpSpPr>
+        <a:xfrm>
+          <a:off x="0" y="0"/>
+          <a:ext cx="0" cy="0"/>
+          <a:chOff x="0" y="0"/>
+          <a:chExt cx="0" cy="0"/>
+        </a:xfrm>
+      </p:grpSpPr>
+      <p:sp>
+        <p:nvSpPr>
+          <p:cNvPr id="2" name="Title 1"/>
+          <p:cNvSpPr>
+            <a:spLocks noGrp="1"/>
+          </p:cNvSpPr>
+          <p:nvPr>
+            <p:ph type="title"/>
+          </p:nvPr>
+        </p:nvSpPr>
+        <p:spPr>
+          <a:xfrm>
+            <a:off x="457201" y="204787"/>
+            <a:ext cx="3008313" cy="871538"/>
+          </a:xfrm>
+        </p:spPr>
+        <p:txBody>
+          <a:bodyPr/>
+          <a:lstStyle/>
+          <a:p>
+            <a:pPr lvl="0" indent="0" marL="0">
+              <a:buNone/>
+            </a:pPr>
+            <a:r>
+              <a:rPr/>
+              <a:t>Technical Lead</a:t>
+            </a:r>
+          </a:p>
+        </p:txBody>
+      </p:sp>
+      <p:sp>
+        <p:nvSpPr>
+          <p:cNvPr id="4" name="Text Placeholder 3"/>
+          <p:cNvSpPr>
+            <a:spLocks noGrp="1"/>
+          </p:cNvSpPr>
+          <p:nvPr>
+            <p:ph idx="2" sz="half" type="body"/>
+          </p:nvPr>
+        </p:nvSpPr>
+        <p:spPr/>
+        <p:txBody>
+          <a:bodyPr/>
+          <a:lstStyle/>
+          <a:p>
+            <a:pPr lvl="0" indent="0" marL="0">
+              <a:buNone/>
+            </a:pPr>
+            <a:r>
+              <a:rPr/>
+              <a:t>Tree Measurement Data:</a:t>
+            </a:r>
+          </a:p>
+        </p:txBody>
+      </p:sp>
+      <p:graphicFrame>
+        <p:nvGraphicFramePr>
+          <p:cNvPr id="6" name="Content Placeholder 5"/>
+          <p:cNvGraphicFramePr>
+            <a:graphicFrameLocks noGrp="1"/>
+          </p:cNvGraphicFramePr>
+          <p:nvPr>
+            <p:ph idx="1"/>
+          </p:nvPr>
+        </p:nvGraphicFramePr>
+        <p:xfrm>
+          <a:off x="3568700" y="203200"/>
+          <a:ext cx="5105400" cy="4381500"/>
+        </p:xfrm>
+        <a:graphic>
+          <a:graphicData uri="http://schemas.openxmlformats.org/drawingml/2006/table">
+            <a:tbl>
+              <a:tblPr firstRow="1" bandRow="1">
+                <a:tableStyleId>{5C22544A-7EE6-4342-B048-85BDC9FD1C3A}</a:tableStyleId>
+              </a:tblPr>
+              <a:tblGrid>
+                <a:gridCol w="1016000"/>
+                <a:gridCol w="1016000"/>
+                <a:gridCol w="1016000"/>
+                <a:gridCol w="1016000"/>
+                <a:gridCol w="1016000"/>
+              </a:tblGrid>
+              <a:tr h="0">
+                <a:tc>
+                  <a:txBody>
+                    <a:bodyPr/>
+                    <a:lstStyle/>
+                    <a:p>
+                      <a:endParaRPr/>
+                    </a:p>
+                  </a:txBody>
+                  <a:tcPr/>
+                </a:tc>
+                <a:tc>
+                  <a:txBody>
+                    <a:bodyPr/>
+                    <a:lstStyle/>
+                    <a:p>
+                      <a:pPr lvl="0" indent="0" marL="0">
+                        <a:buNone/>
+                      </a:pPr>
+                      <a:r>
+                        <a:rPr/>
+                        <a:t>SPCD</a:t>
+                      </a:r>
+                    </a:p>
+                  </a:txBody>
+                  <a:tcPr/>
+                </a:tc>
+                <a:tc>
+                  <a:txBody>
+                    <a:bodyPr/>
+                    <a:lstStyle/>
+                    <a:p>
+                      <a:pPr lvl="0" indent="0" marL="0">
+                        <a:buNone/>
+                      </a:pPr>
+                      <a:r>
+                        <a:rPr/>
+                        <a:t>DO_BH</a:t>
+                      </a:r>
+                    </a:p>
+                  </a:txBody>
+                  <a:tcPr/>
+                </a:tc>
+                <a:tc>
+                  <a:txBody>
+                    <a:bodyPr/>
+                    <a:lstStyle/>
+                    <a:p>
+                      <a:pPr lvl="0" indent="0" marL="0">
+                        <a:buNone/>
+                      </a:pPr>
+                      <a:r>
+                        <a:rPr/>
+                        <a:t>HT_TOT</a:t>
+                      </a:r>
+                    </a:p>
+                  </a:txBody>
+                  <a:tcPr/>
+                </a:tc>
+                <a:tc>
+                  <a:txBody>
+                    <a:bodyPr/>
+                    <a:lstStyle/>
+                    <a:p>
+                      <a:pPr lvl="0" indent="0" marL="0">
+                        <a:buNone/>
+                      </a:pPr>
+                      <a:r>
+                        <a:rPr/>
+                        <a:t>TT_DW_CRM</a:t>
+                      </a:r>
+                    </a:p>
+                  </a:txBody>
+                  <a:tcPr/>
+                </a:tc>
+              </a:tr>
+              <a:tr h="0">
+                <a:tc>
+                  <a:txBody>
+                    <a:bodyPr/>
+                    <a:lstStyle/>
+                    <a:p>
+                      <a:pPr lvl="0" indent="0" marL="0">
+                        <a:buNone/>
+                      </a:pPr>
+                      <a:r>
+                        <a:rPr/>
+                        <a:t>0</a:t>
+                      </a:r>
+                    </a:p>
+                  </a:txBody>
+                </a:tc>
+                <a:tc>
+                  <a:txBody>
+                    <a:bodyPr/>
+                    <a:lstStyle/>
+                    <a:p>
+                      <a:pPr lvl="0" indent="0" marL="0">
+                        <a:buNone/>
+                      </a:pPr>
+                      <a:r>
+                        <a:rPr/>
+                        <a:t>12</a:t>
+                      </a:r>
+                    </a:p>
+                  </a:txBody>
+                </a:tc>
+                <a:tc>
+                  <a:txBody>
+                    <a:bodyPr/>
+                    <a:lstStyle/>
+                    <a:p>
+                      <a:pPr lvl="0" indent="0" marL="0">
+                        <a:buNone/>
+                      </a:pPr>
+                      <a:r>
+                        <a:rPr/>
+                        <a:t>7.5</a:t>
+                      </a:r>
+                    </a:p>
+                  </a:txBody>
+                </a:tc>
+                <a:tc>
+                  <a:txBody>
+                    <a:bodyPr/>
+                    <a:lstStyle/>
+                    <a:p>
+                      <a:pPr lvl="0" indent="0" marL="0">
+                        <a:buNone/>
+                      </a:pPr>
+                      <a:r>
+                        <a:rPr/>
+                        <a:t>45.2</a:t>
+                      </a:r>
+                    </a:p>
+                  </a:txBody>
+                </a:tc>
+                <a:tc>
+                  <a:txBody>
+                    <a:bodyPr/>
+                    <a:lstStyle/>
+                    <a:p>
+                      <a:pPr lvl="0" indent="0" marL="0">
+                        <a:buNone/>
+                      </a:pPr>
+                      <a:r>
+                        <a:rPr/>
+                        <a:t>178.86</a:t>
+                      </a:r>
+                    </a:p>
+                  </a:txBody>
+                </a:tc>
+              </a:tr>
+              <a:tr h="0">
+                <a:tc>
+                  <a:txBody>
+                    <a:bodyPr/>
+                    <a:lstStyle/>
+                    <a:p>
+                      <a:pPr lvl="0" indent="0" marL="0">
+                        <a:buNone/>
+                      </a:pPr>
+                      <a:r>
+                        <a:rPr/>
+                        <a:t>1</a:t>
+                      </a:r>
+                    </a:p>
+                  </a:txBody>
+                </a:tc>
+                <a:tc>
+                  <a:txBody>
+                    <a:bodyPr/>
+                    <a:lstStyle/>
+                    <a:p>
+                      <a:pPr lvl="0" indent="0" marL="0">
+                        <a:buNone/>
+                      </a:pPr>
+                      <a:r>
+                        <a:rPr/>
+                        <a:t>12</a:t>
+                      </a:r>
+                    </a:p>
+                  </a:txBody>
+                </a:tc>
+                <a:tc>
+                  <a:txBody>
+                    <a:bodyPr/>
+                    <a:lstStyle/>
+                    <a:p>
+                      <a:pPr lvl="0" indent="0" marL="0">
+                        <a:buNone/>
+                      </a:pPr>
+                      <a:r>
+                        <a:rPr/>
+                        <a:t>9.3</a:t>
+                      </a:r>
+                    </a:p>
+                  </a:txBody>
+                </a:tc>
+                <a:tc>
+                  <a:txBody>
+                    <a:bodyPr/>
+                    <a:lstStyle/>
+                    <a:p>
+                      <a:pPr lvl="0" indent="0" marL="0">
+                        <a:buNone/>
+                      </a:pPr>
+                      <a:r>
+                        <a:rPr/>
+                        <a:t>62.7</a:t>
+                      </a:r>
+                    </a:p>
+                  </a:txBody>
+                </a:tc>
+                <a:tc>
+                  <a:txBody>
+                    <a:bodyPr/>
+                    <a:lstStyle/>
+                    <a:p>
+                      <a:pPr lvl="0" indent="0" marL="0">
+                        <a:buNone/>
+                      </a:pPr>
+                      <a:r>
+                        <a:rPr/>
+                        <a:t>323.46</a:t>
+                      </a:r>
+                    </a:p>
+                  </a:txBody>
+                </a:tc>
+              </a:tr>
+              <a:tr h="0">
+                <a:tc>
+                  <a:txBody>
+                    <a:bodyPr/>
+                    <a:lstStyle/>
+                    <a:p>
+                      <a:pPr lvl="0" indent="0" marL="0">
+                        <a:buNone/>
+                      </a:pPr>
+                      <a:r>
+                        <a:rPr/>
+                        <a:t>2</a:t>
+                      </a:r>
+                    </a:p>
+                  </a:txBody>
+                </a:tc>
+                <a:tc>
+                  <a:txBody>
+                    <a:bodyPr/>
+                    <a:lstStyle/>
+                    <a:p>
+                      <a:pPr lvl="0" indent="0" marL="0">
+                        <a:buNone/>
+                      </a:pPr>
+                      <a:r>
+                        <a:rPr/>
+                        <a:t>12</a:t>
+                      </a:r>
+                    </a:p>
+                  </a:txBody>
+                </a:tc>
+                <a:tc>
+                  <a:txBody>
+                    <a:bodyPr/>
+                    <a:lstStyle/>
+                    <a:p>
+                      <a:pPr lvl="0" indent="0" marL="0">
+                        <a:buNone/>
+                      </a:pPr>
+                      <a:r>
+                        <a:rPr/>
+                        <a:t>9.7</a:t>
+                      </a:r>
+                    </a:p>
+                  </a:txBody>
+                </a:tc>
+                <a:tc>
+                  <a:txBody>
+                    <a:bodyPr/>
+                    <a:lstStyle/>
+                    <a:p>
+                      <a:pPr lvl="0" indent="0" marL="0">
+                        <a:buNone/>
+                      </a:pPr>
+                      <a:r>
+                        <a:rPr/>
+                        <a:t>56.7</a:t>
+                      </a:r>
+                    </a:p>
+                  </a:txBody>
+                </a:tc>
+                <a:tc>
+                  <a:txBody>
+                    <a:bodyPr/>
+                    <a:lstStyle/>
+                    <a:p>
+                      <a:pPr lvl="0" indent="0" marL="0">
+                        <a:buNone/>
+                      </a:pPr>
+                      <a:r>
+                        <a:rPr/>
+                        <a:t>342.47</a:t>
+                      </a:r>
+                    </a:p>
+                  </a:txBody>
+                </a:tc>
+              </a:tr>
+              <a:tr h="0">
+                <a:tc>
+                  <a:txBody>
+                    <a:bodyPr/>
+                    <a:lstStyle/>
+                    <a:p>
+                      <a:pPr lvl="0" indent="0" marL="0">
+                        <a:buNone/>
+                      </a:pPr>
+                      <a:r>
+                        <a:rPr/>
+                        <a:t>3</a:t>
+                      </a:r>
+                    </a:p>
+                  </a:txBody>
+                </a:tc>
+                <a:tc>
+                  <a:txBody>
+                    <a:bodyPr/>
+                    <a:lstStyle/>
+                    <a:p>
+                      <a:pPr lvl="0" indent="0" marL="0">
+                        <a:buNone/>
+                      </a:pPr>
+                      <a:r>
+                        <a:rPr/>
+                        <a:t>12</a:t>
+                      </a:r>
+                    </a:p>
+                  </a:txBody>
+                </a:tc>
+                <a:tc>
+                  <a:txBody>
+                    <a:bodyPr/>
+                    <a:lstStyle/>
+                    <a:p>
+                      <a:pPr lvl="0" indent="0" marL="0">
+                        <a:buNone/>
+                      </a:pPr>
+                      <a:r>
+                        <a:rPr/>
+                        <a:t>11.4</a:t>
+                      </a:r>
+                    </a:p>
+                  </a:txBody>
+                </a:tc>
+                <a:tc>
+                  <a:txBody>
+                    <a:bodyPr/>
+                    <a:lstStyle/>
+                    <a:p>
+                      <a:pPr lvl="0" indent="0" marL="0">
+                        <a:buNone/>
+                      </a:pPr>
+                      <a:r>
+                        <a:rPr/>
+                        <a:t>66.1</a:t>
+                      </a:r>
+                    </a:p>
+                  </a:txBody>
+                </a:tc>
+                <a:tc>
+                  <a:txBody>
+                    <a:bodyPr/>
+                    <a:lstStyle/>
+                    <a:p>
+                      <a:pPr lvl="0" indent="0" marL="0">
+                        <a:buNone/>
+                      </a:pPr>
+                      <a:r>
+                        <a:rPr/>
+                        <a:t>499.35</a:t>
+                      </a:r>
+                    </a:p>
+                  </a:txBody>
+                </a:tc>
+              </a:tr>
+              <a:tr h="0">
+                <a:tc>
+                  <a:txBody>
+                    <a:bodyPr/>
+                    <a:lstStyle/>
+                    <a:p>
+                      <a:pPr lvl="0" indent="0" marL="0">
+                        <a:buNone/>
+                      </a:pPr>
+                      <a:r>
+                        <a:rPr/>
+                        <a:t>4</a:t>
+                      </a:r>
+                    </a:p>
+                  </a:txBody>
+                </a:tc>
+                <a:tc>
+                  <a:txBody>
+                    <a:bodyPr/>
+                    <a:lstStyle/>
+                    <a:p>
+                      <a:pPr lvl="0" indent="0" marL="0">
+                        <a:buNone/>
+                      </a:pPr>
+                      <a:r>
+                        <a:rPr/>
+                        <a:t>12</a:t>
+                      </a:r>
+                    </a:p>
+                  </a:txBody>
+                </a:tc>
+                <a:tc>
+                  <a:txBody>
+                    <a:bodyPr/>
+                    <a:lstStyle/>
+                    <a:p>
+                      <a:pPr lvl="0" indent="0" marL="0">
+                        <a:buNone/>
+                      </a:pPr>
+                      <a:r>
+                        <a:rPr/>
+                        <a:t>6.4</a:t>
+                      </a:r>
+                    </a:p>
+                  </a:txBody>
+                </a:tc>
+                <a:tc>
+                  <a:txBody>
+                    <a:bodyPr/>
+                    <a:lstStyle/>
+                    <a:p>
+                      <a:pPr lvl="0" indent="0" marL="0">
+                        <a:buNone/>
+                      </a:pPr>
+                      <a:r>
+                        <a:rPr/>
+                        <a:t>51.8</a:t>
+                      </a:r>
+                    </a:p>
+                  </a:txBody>
+                </a:tc>
+                <a:tc>
+                  <a:txBody>
+                    <a:bodyPr/>
+                    <a:lstStyle/>
+                    <a:p>
+                      <a:pPr lvl="0" indent="0" marL="0">
+                        <a:buNone/>
+                      </a:pPr>
+                      <a:r>
+                        <a:rPr/>
+                        <a:t>113.92</a:t>
+                      </a:r>
+                    </a:p>
+                  </a:txBody>
+                </a:tc>
+              </a:tr>
+            </a:tbl>
+          </a:graphicData>
+        </a:graphic>
+      </p:graphicFrame>
+    </p:spTree>
+  </p:cSld>
+</p:sld>
+</file>
+
+<file path=ppt/slides/slide15.xml><?xml version="1.0" encoding="utf-8"?>
+<p:sld xmlns:a="http://schemas.openxmlformats.org/drawingml/2006/main" xmlns:r="http://schemas.openxmlformats.org/officeDocument/2006/relationships" xmlns:p="http://schemas.openxmlformats.org/presentationml/2006/main">
+  <p:cSld>
+    <p:spTree>
+      <p:nvGrpSpPr>
+        <p:cNvPr id="1" name=""/>
+        <p:cNvGrpSpPr/>
+        <p:nvPr/>
+      </p:nvGrpSpPr>
+      <p:grpSpPr>
+        <a:xfrm>
+          <a:off x="0" y="0"/>
+          <a:ext cx="0" cy="0"/>
+          <a:chOff x="0" y="0"/>
+          <a:chExt cx="0" cy="0"/>
+        </a:xfrm>
+      </p:grpSpPr>
+      <p:sp>
+        <p:nvSpPr>
+          <p:cNvPr id="2" name="Title 1"/>
+          <p:cNvSpPr>
+            <a:spLocks noGrp="1"/>
+          </p:cNvSpPr>
+          <p:nvPr>
+            <p:ph type="title"/>
+          </p:nvPr>
+        </p:nvSpPr>
+        <p:spPr/>
+        <p:txBody>
+          <a:bodyPr/>
+          <a:lstStyle/>
+          <a:p>
+            <a:pPr lvl="0" indent="0" marL="0">
+              <a:buNone/>
+            </a:pPr>
+            <a:r>
+              <a:rPr/>
+              <a:t>Tree Species Name Data:</a:t>
+            </a:r>
+          </a:p>
+        </p:txBody>
+      </p:sp>
+      <p:graphicFrame>
+        <p:nvGraphicFramePr>
+          <p:cNvPr id="6" name="Content Placeholder 5"/>
+          <p:cNvGraphicFramePr>
+            <a:graphicFrameLocks noGrp="1"/>
+          </p:cNvGraphicFramePr>
+          <p:nvPr>
+            <p:ph idx="1"/>
+          </p:nvPr>
+        </p:nvGraphicFramePr>
+        <p:xfrm>
+          <a:off x="457200" y="1193800"/>
+          <a:ext cx="8229600" cy="3390900"/>
+        </p:xfrm>
+        <a:graphic>
+          <a:graphicData uri="http://schemas.openxmlformats.org/drawingml/2006/table">
+            <a:tbl>
+              <a:tblPr firstRow="1" bandRow="1">
+                <a:tableStyleId>{5C22544A-7EE6-4342-B048-85BDC9FD1C3A}</a:tableStyleId>
+              </a:tblPr>
+              <a:tblGrid>
+                <a:gridCol w="2743200"/>
+                <a:gridCol w="2743200"/>
+                <a:gridCol w="2743200"/>
+              </a:tblGrid>
+              <a:tr h="0">
+                <a:tc>
+                  <a:txBody>
+                    <a:bodyPr/>
+                    <a:lstStyle/>
+                    <a:p>
+                      <a:endParaRPr/>
+                    </a:p>
+                  </a:txBody>
+                  <a:tcPr/>
+                </a:tc>
+                <a:tc>
+                  <a:txBody>
+                    <a:bodyPr/>
+                    <a:lstStyle/>
+                    <a:p>
+                      <a:pPr lvl="0" indent="0" marL="0">
+                        <a:buNone/>
+                      </a:pPr>
+                      <a:r>
+                        <a:rPr/>
+                        <a:t>SPCD</a:t>
+                      </a:r>
+                    </a:p>
+                  </a:txBody>
+                  <a:tcPr/>
+                </a:tc>
+                <a:tc>
+                  <a:txBody>
+                    <a:bodyPr/>
+                    <a:lstStyle/>
+                    <a:p>
+                      <a:pPr lvl="0" indent="0" marL="0">
+                        <a:buNone/>
+                      </a:pPr>
+                      <a:r>
+                        <a:rPr/>
+                        <a:t>COMMON_NAME</a:t>
+                      </a:r>
+                    </a:p>
+                  </a:txBody>
+                  <a:tcPr/>
+                </a:tc>
+              </a:tr>
+              <a:tr h="0">
+                <a:tc>
+                  <a:txBody>
+                    <a:bodyPr/>
+                    <a:lstStyle/>
+                    <a:p>
+                      <a:pPr lvl="0" indent="0" marL="0">
+                        <a:buNone/>
+                      </a:pPr>
+                      <a:r>
+                        <a:rPr/>
+                        <a:t>0</a:t>
+                      </a:r>
+                    </a:p>
+                  </a:txBody>
+                </a:tc>
+                <a:tc>
+                  <a:txBody>
+                    <a:bodyPr/>
+                    <a:lstStyle/>
+                    <a:p>
+                      <a:pPr lvl="0" indent="0" marL="0">
+                        <a:buNone/>
+                      </a:pPr>
+                      <a:r>
+                        <a:rPr/>
+                        <a:t>10</a:t>
+                      </a:r>
+                    </a:p>
+                  </a:txBody>
+                </a:tc>
+                <a:tc>
+                  <a:txBody>
+                    <a:bodyPr/>
+                    <a:lstStyle/>
+                    <a:p>
+                      <a:pPr lvl="0" indent="0" marL="0">
+                        <a:buNone/>
+                      </a:pPr>
+                      <a:r>
+                        <a:rPr/>
+                        <a:t>fir spp.</a:t>
+                      </a:r>
+                    </a:p>
+                  </a:txBody>
+                </a:tc>
+              </a:tr>
+              <a:tr h="0">
+                <a:tc>
+                  <a:txBody>
+                    <a:bodyPr/>
+                    <a:lstStyle/>
+                    <a:p>
+                      <a:pPr lvl="0" indent="0" marL="0">
+                        <a:buNone/>
+                      </a:pPr>
+                      <a:r>
+                        <a:rPr/>
+                        <a:t>1</a:t>
+                      </a:r>
+                    </a:p>
+                  </a:txBody>
+                </a:tc>
+                <a:tc>
+                  <a:txBody>
+                    <a:bodyPr/>
+                    <a:lstStyle/>
+                    <a:p>
+                      <a:pPr lvl="0" indent="0" marL="0">
+                        <a:buNone/>
+                      </a:pPr>
+                      <a:r>
+                        <a:rPr/>
+                        <a:t>11</a:t>
+                      </a:r>
+                    </a:p>
+                  </a:txBody>
+                </a:tc>
+                <a:tc>
+                  <a:txBody>
+                    <a:bodyPr/>
+                    <a:lstStyle/>
+                    <a:p>
+                      <a:pPr lvl="0" indent="0" marL="0">
+                        <a:buNone/>
+                      </a:pPr>
+                      <a:r>
+                        <a:rPr/>
+                        <a:t>Pacific silver fir</a:t>
+                      </a:r>
+                    </a:p>
+                  </a:txBody>
+                </a:tc>
+              </a:tr>
+              <a:tr h="0">
+                <a:tc>
+                  <a:txBody>
+                    <a:bodyPr/>
+                    <a:lstStyle/>
+                    <a:p>
+                      <a:pPr lvl="0" indent="0" marL="0">
+                        <a:buNone/>
+                      </a:pPr>
+                      <a:r>
+                        <a:rPr/>
+                        <a:t>2</a:t>
+                      </a:r>
+                    </a:p>
+                  </a:txBody>
+                </a:tc>
+                <a:tc>
+                  <a:txBody>
+                    <a:bodyPr/>
+                    <a:lstStyle/>
+                    <a:p>
+                      <a:pPr lvl="0" indent="0" marL="0">
+                        <a:buNone/>
+                      </a:pPr>
+                      <a:r>
+                        <a:rPr/>
+                        <a:t>12</a:t>
+                      </a:r>
+                    </a:p>
+                  </a:txBody>
+                </a:tc>
+                <a:tc>
+                  <a:txBody>
+                    <a:bodyPr/>
+                    <a:lstStyle/>
+                    <a:p>
+                      <a:pPr lvl="0" indent="0" marL="0">
+                        <a:buNone/>
+                      </a:pPr>
+                      <a:r>
+                        <a:rPr/>
+                        <a:t>balsam fir</a:t>
+                      </a:r>
+                    </a:p>
+                  </a:txBody>
+                </a:tc>
+              </a:tr>
+              <a:tr h="0">
+                <a:tc>
+                  <a:txBody>
+                    <a:bodyPr/>
+                    <a:lstStyle/>
+                    <a:p>
+                      <a:pPr lvl="0" indent="0" marL="0">
+                        <a:buNone/>
+                      </a:pPr>
+                      <a:r>
+                        <a:rPr/>
+                        <a:t>3</a:t>
+                      </a:r>
+                    </a:p>
+                  </a:txBody>
+                </a:tc>
+                <a:tc>
+                  <a:txBody>
+                    <a:bodyPr/>
+                    <a:lstStyle/>
+                    <a:p>
+                      <a:pPr lvl="0" indent="0" marL="0">
+                        <a:buNone/>
+                      </a:pPr>
+                      <a:r>
+                        <a:rPr/>
+                        <a:t>14</a:t>
+                      </a:r>
+                    </a:p>
+                  </a:txBody>
+                </a:tc>
+                <a:tc>
+                  <a:txBody>
+                    <a:bodyPr/>
+                    <a:lstStyle/>
+                    <a:p>
+                      <a:pPr lvl="0" indent="0" marL="0">
+                        <a:buNone/>
+                      </a:pPr>
+                      <a:r>
+                        <a:rPr/>
+                        <a:t>Santa Lucia or bristlecone fir</a:t>
+                      </a:r>
+                    </a:p>
+                  </a:txBody>
+                </a:tc>
+              </a:tr>
+              <a:tr h="0">
+                <a:tc>
+                  <a:txBody>
+                    <a:bodyPr/>
+                    <a:lstStyle/>
+                    <a:p>
+                      <a:pPr lvl="0" indent="0" marL="0">
+                        <a:buNone/>
+                      </a:pPr>
+                      <a:r>
+                        <a:rPr/>
+                        <a:t>4</a:t>
+                      </a:r>
+                    </a:p>
+                  </a:txBody>
+                </a:tc>
+                <a:tc>
+                  <a:txBody>
+                    <a:bodyPr/>
+                    <a:lstStyle/>
+                    <a:p>
+                      <a:pPr lvl="0" indent="0" marL="0">
+                        <a:buNone/>
+                      </a:pPr>
+                      <a:r>
+                        <a:rPr/>
+                        <a:t>15</a:t>
+                      </a:r>
+                    </a:p>
+                  </a:txBody>
+                </a:tc>
+                <a:tc>
+                  <a:txBody>
+                    <a:bodyPr/>
+                    <a:lstStyle/>
+                    <a:p>
+                      <a:pPr lvl="0" indent="0" marL="0">
+                        <a:buNone/>
+                      </a:pPr>
+                      <a:r>
+                        <a:rPr/>
+                        <a:t>white fir</a:t>
+                      </a:r>
+                    </a:p>
+                  </a:txBody>
+                </a:tc>
+              </a:tr>
+            </a:tbl>
+          </a:graphicData>
+        </a:graphic>
+      </p:graphicFrame>
+    </p:spTree>
+  </p:cSld>
+</p:sld>
+</file>
+
+<file path=ppt/slides/slide16.xml><?xml version="1.0" encoding="utf-8"?>
+<p:sld xmlns:a="http://schemas.openxmlformats.org/drawingml/2006/main" xmlns:r="http://schemas.openxmlformats.org/officeDocument/2006/relationships" xmlns:p="http://schemas.openxmlformats.org/presentationml/2006/main">
+  <p:cSld>
+    <p:spTree>
+      <p:nvGrpSpPr>
+        <p:cNvPr id="1" name=""/>
+        <p:cNvGrpSpPr/>
+        <p:nvPr/>
+      </p:nvGrpSpPr>
+      <p:grpSpPr>
+        <a:xfrm>
+          <a:off x="0" y="0"/>
+          <a:ext cx="0" cy="0"/>
+          <a:chOff x="0" y="0"/>
+          <a:chExt cx="0" cy="0"/>
+        </a:xfrm>
+      </p:grpSpPr>
+      <p:sp>
+        <p:nvSpPr>
+          <p:cNvPr id="2" name="Title 1"/>
+          <p:cNvSpPr>
+            <a:spLocks noGrp="1"/>
+          </p:cNvSpPr>
+          <p:nvPr>
+            <p:ph type="title"/>
+          </p:nvPr>
+        </p:nvSpPr>
+        <p:spPr/>
+        <p:txBody>
+          <a:bodyPr/>
+          <a:lstStyle/>
+          <a:p>
+            <a:pPr lvl="0" indent="0" marL="0">
+              <a:buNone/>
+            </a:pPr>
+            <a:r>
+              <a:rPr/>
+              <a:t>Combined Dataset (species mapped onto bigger dataset):</a:t>
+            </a:r>
+          </a:p>
+        </p:txBody>
+      </p:sp>
+      <p:graphicFrame>
+        <p:nvGraphicFramePr>
+          <p:cNvPr id="6" name="Content Placeholder 5"/>
+          <p:cNvGraphicFramePr>
+            <a:graphicFrameLocks noGrp="1"/>
+          </p:cNvGraphicFramePr>
+          <p:nvPr>
+            <p:ph idx="1"/>
+          </p:nvPr>
+        </p:nvGraphicFramePr>
+        <p:xfrm>
+          <a:off x="457200" y="1193800"/>
+          <a:ext cx="8229600" cy="3390900"/>
+        </p:xfrm>
+        <a:graphic>
+          <a:graphicData uri="http://schemas.openxmlformats.org/drawingml/2006/table">
+            <a:tbl>
+              <a:tblPr firstRow="1" bandRow="1">
+                <a:tableStyleId>{5C22544A-7EE6-4342-B048-85BDC9FD1C3A}</a:tableStyleId>
+              </a:tblPr>
+              <a:tblGrid>
+                <a:gridCol w="1371600"/>
+                <a:gridCol w="1371600"/>
+                <a:gridCol w="1371600"/>
+                <a:gridCol w="1371600"/>
+                <a:gridCol w="1371600"/>
+                <a:gridCol w="1371600"/>
+              </a:tblGrid>
+              <a:tr h="0">
+                <a:tc>
+                  <a:txBody>
+                    <a:bodyPr/>
+                    <a:lstStyle/>
+                    <a:p>
+                      <a:endParaRPr/>
+                    </a:p>
+                  </a:txBody>
+                  <a:tcPr/>
+                </a:tc>
+                <a:tc>
+                  <a:txBody>
+                    <a:bodyPr/>
+                    <a:lstStyle/>
+                    <a:p>
+                      <a:pPr lvl="0" indent="0" marL="0">
+                        <a:buNone/>
+                      </a:pPr>
+                      <a:r>
+                        <a:rPr/>
+                        <a:t>SPCD</a:t>
+                      </a:r>
+                    </a:p>
+                  </a:txBody>
+                  <a:tcPr/>
+                </a:tc>
+                <a:tc>
+                  <a:txBody>
+                    <a:bodyPr/>
+                    <a:lstStyle/>
+                    <a:p>
+                      <a:pPr lvl="0" indent="0" marL="0">
+                        <a:buNone/>
+                      </a:pPr>
+                      <a:r>
+                        <a:rPr/>
+                        <a:t>DO_BH</a:t>
+                      </a:r>
+                    </a:p>
+                  </a:txBody>
+                  <a:tcPr/>
+                </a:tc>
+                <a:tc>
+                  <a:txBody>
+                    <a:bodyPr/>
+                    <a:lstStyle/>
+                    <a:p>
+                      <a:pPr lvl="0" indent="0" marL="0">
+                        <a:buNone/>
+                      </a:pPr>
+                      <a:r>
+                        <a:rPr/>
+                        <a:t>HT_TOT</a:t>
+                      </a:r>
+                    </a:p>
+                  </a:txBody>
+                  <a:tcPr/>
+                </a:tc>
+                <a:tc>
+                  <a:txBody>
+                    <a:bodyPr/>
+                    <a:lstStyle/>
+                    <a:p>
+                      <a:pPr lvl="0" indent="0" marL="0">
+                        <a:buNone/>
+                      </a:pPr>
+                      <a:r>
+                        <a:rPr/>
+                        <a:t>TT_DW_CRM</a:t>
+                      </a:r>
+                    </a:p>
+                  </a:txBody>
+                  <a:tcPr/>
+                </a:tc>
+                <a:tc>
+                  <a:txBody>
+                    <a:bodyPr/>
+                    <a:lstStyle/>
+                    <a:p>
+                      <a:pPr lvl="0" indent="0" marL="0">
+                        <a:buNone/>
+                      </a:pPr>
+                      <a:r>
+                        <a:rPr/>
+                        <a:t>COMMON_NAME</a:t>
+                      </a:r>
+                    </a:p>
+                  </a:txBody>
+                  <a:tcPr/>
+                </a:tc>
+              </a:tr>
+              <a:tr h="0">
+                <a:tc>
+                  <a:txBody>
+                    <a:bodyPr/>
+                    <a:lstStyle/>
+                    <a:p>
+                      <a:pPr lvl="0" indent="0" marL="0">
+                        <a:buNone/>
+                      </a:pPr>
+                      <a:r>
+                        <a:rPr/>
+                        <a:t>0</a:t>
+                      </a:r>
+                    </a:p>
+                  </a:txBody>
+                </a:tc>
+                <a:tc>
+                  <a:txBody>
+                    <a:bodyPr/>
+                    <a:lstStyle/>
+                    <a:p>
+                      <a:pPr lvl="0" indent="0" marL="0">
+                        <a:buNone/>
+                      </a:pPr>
+                      <a:r>
+                        <a:rPr/>
+                        <a:t>12</a:t>
+                      </a:r>
+                    </a:p>
+                  </a:txBody>
+                </a:tc>
+                <a:tc>
+                  <a:txBody>
+                    <a:bodyPr/>
+                    <a:lstStyle/>
+                    <a:p>
+                      <a:pPr lvl="0" indent="0" marL="0">
+                        <a:buNone/>
+                      </a:pPr>
+                      <a:r>
+                        <a:rPr/>
+                        <a:t>7.5</a:t>
+                      </a:r>
+                    </a:p>
+                  </a:txBody>
+                </a:tc>
+                <a:tc>
+                  <a:txBody>
+                    <a:bodyPr/>
+                    <a:lstStyle/>
+                    <a:p>
+                      <a:pPr lvl="0" indent="0" marL="0">
+                        <a:buNone/>
+                      </a:pPr>
+                      <a:r>
+                        <a:rPr/>
+                        <a:t>45.2</a:t>
+                      </a:r>
+                    </a:p>
+                  </a:txBody>
+                </a:tc>
+                <a:tc>
+                  <a:txBody>
+                    <a:bodyPr/>
+                    <a:lstStyle/>
+                    <a:p>
+                      <a:pPr lvl="0" indent="0" marL="0">
+                        <a:buNone/>
+                      </a:pPr>
+                      <a:r>
+                        <a:rPr/>
+                        <a:t>178.86</a:t>
+                      </a:r>
+                    </a:p>
+                  </a:txBody>
+                </a:tc>
+                <a:tc>
+                  <a:txBody>
+                    <a:bodyPr/>
+                    <a:lstStyle/>
+                    <a:p>
+                      <a:pPr lvl="0" indent="0" marL="0">
+                        <a:buNone/>
+                      </a:pPr>
+                      <a:r>
+                        <a:rPr/>
+                        <a:t>balsam fir</a:t>
+                      </a:r>
+                    </a:p>
+                  </a:txBody>
+                </a:tc>
+              </a:tr>
+              <a:tr h="0">
+                <a:tc>
+                  <a:txBody>
+                    <a:bodyPr/>
+                    <a:lstStyle/>
+                    <a:p>
+                      <a:pPr lvl="0" indent="0" marL="0">
+                        <a:buNone/>
+                      </a:pPr>
+                      <a:r>
+                        <a:rPr/>
+                        <a:t>1</a:t>
+                      </a:r>
+                    </a:p>
+                  </a:txBody>
+                </a:tc>
+                <a:tc>
+                  <a:txBody>
+                    <a:bodyPr/>
+                    <a:lstStyle/>
+                    <a:p>
+                      <a:pPr lvl="0" indent="0" marL="0">
+                        <a:buNone/>
+                      </a:pPr>
+                      <a:r>
+                        <a:rPr/>
+                        <a:t>12</a:t>
+                      </a:r>
+                    </a:p>
+                  </a:txBody>
+                </a:tc>
+                <a:tc>
+                  <a:txBody>
+                    <a:bodyPr/>
+                    <a:lstStyle/>
+                    <a:p>
+                      <a:pPr lvl="0" indent="0" marL="0">
+                        <a:buNone/>
+                      </a:pPr>
+                      <a:r>
+                        <a:rPr/>
+                        <a:t>9.3</a:t>
+                      </a:r>
+                    </a:p>
+                  </a:txBody>
+                </a:tc>
+                <a:tc>
+                  <a:txBody>
+                    <a:bodyPr/>
+                    <a:lstStyle/>
+                    <a:p>
+                      <a:pPr lvl="0" indent="0" marL="0">
+                        <a:buNone/>
+                      </a:pPr>
+                      <a:r>
+                        <a:rPr/>
+                        <a:t>62.7</a:t>
+                      </a:r>
+                    </a:p>
+                  </a:txBody>
+                </a:tc>
+                <a:tc>
+                  <a:txBody>
+                    <a:bodyPr/>
+                    <a:lstStyle/>
+                    <a:p>
+                      <a:pPr lvl="0" indent="0" marL="0">
+                        <a:buNone/>
+                      </a:pPr>
+                      <a:r>
+                        <a:rPr/>
+                        <a:t>323.46</a:t>
+                      </a:r>
+                    </a:p>
+                  </a:txBody>
+                </a:tc>
+                <a:tc>
+                  <a:txBody>
+                    <a:bodyPr/>
+                    <a:lstStyle/>
+                    <a:p>
+                      <a:pPr lvl="0" indent="0" marL="0">
+                        <a:buNone/>
+                      </a:pPr>
+                      <a:r>
+                        <a:rPr/>
+                        <a:t>balsam fir</a:t>
+                      </a:r>
+                    </a:p>
+                  </a:txBody>
+                </a:tc>
+              </a:tr>
+              <a:tr h="0">
+                <a:tc>
+                  <a:txBody>
+                    <a:bodyPr/>
+                    <a:lstStyle/>
+                    <a:p>
+                      <a:pPr lvl="0" indent="0" marL="0">
+                        <a:buNone/>
+                      </a:pPr>
+                      <a:r>
+                        <a:rPr/>
+                        <a:t>2</a:t>
+                      </a:r>
+                    </a:p>
+                  </a:txBody>
+                </a:tc>
+                <a:tc>
+                  <a:txBody>
+                    <a:bodyPr/>
+                    <a:lstStyle/>
+                    <a:p>
+                      <a:pPr lvl="0" indent="0" marL="0">
+                        <a:buNone/>
+                      </a:pPr>
+                      <a:r>
+                        <a:rPr/>
+                        <a:t>12</a:t>
+                      </a:r>
+                    </a:p>
+                  </a:txBody>
+                </a:tc>
+                <a:tc>
+                  <a:txBody>
+                    <a:bodyPr/>
+                    <a:lstStyle/>
+                    <a:p>
+                      <a:pPr lvl="0" indent="0" marL="0">
+                        <a:buNone/>
+                      </a:pPr>
+                      <a:r>
+                        <a:rPr/>
+                        <a:t>9.7</a:t>
+                      </a:r>
+                    </a:p>
+                  </a:txBody>
+                </a:tc>
+                <a:tc>
+                  <a:txBody>
+                    <a:bodyPr/>
+                    <a:lstStyle/>
+                    <a:p>
+                      <a:pPr lvl="0" indent="0" marL="0">
+                        <a:buNone/>
+                      </a:pPr>
+                      <a:r>
+                        <a:rPr/>
+                        <a:t>56.7</a:t>
+                      </a:r>
+                    </a:p>
+                  </a:txBody>
+                </a:tc>
+                <a:tc>
+                  <a:txBody>
+                    <a:bodyPr/>
+                    <a:lstStyle/>
+                    <a:p>
+                      <a:pPr lvl="0" indent="0" marL="0">
+                        <a:buNone/>
+                      </a:pPr>
+                      <a:r>
+                        <a:rPr/>
+                        <a:t>342.47</a:t>
+                      </a:r>
+                    </a:p>
+                  </a:txBody>
+                </a:tc>
+                <a:tc>
+                  <a:txBody>
+                    <a:bodyPr/>
+                    <a:lstStyle/>
+                    <a:p>
+                      <a:pPr lvl="0" indent="0" marL="0">
+                        <a:buNone/>
+                      </a:pPr>
+                      <a:r>
+                        <a:rPr/>
+                        <a:t>balsam fir</a:t>
+                      </a:r>
+                    </a:p>
+                  </a:txBody>
+                </a:tc>
+              </a:tr>
+              <a:tr h="0">
+                <a:tc>
+                  <a:txBody>
+                    <a:bodyPr/>
+                    <a:lstStyle/>
+                    <a:p>
+                      <a:pPr lvl="0" indent="0" marL="0">
+                        <a:buNone/>
+                      </a:pPr>
+                      <a:r>
+                        <a:rPr/>
+                        <a:t>3</a:t>
+                      </a:r>
+                    </a:p>
+                  </a:txBody>
+                </a:tc>
+                <a:tc>
+                  <a:txBody>
+                    <a:bodyPr/>
+                    <a:lstStyle/>
+                    <a:p>
+                      <a:pPr lvl="0" indent="0" marL="0">
+                        <a:buNone/>
+                      </a:pPr>
+                      <a:r>
+                        <a:rPr/>
+                        <a:t>12</a:t>
+                      </a:r>
+                    </a:p>
+                  </a:txBody>
+                </a:tc>
+                <a:tc>
+                  <a:txBody>
+                    <a:bodyPr/>
+                    <a:lstStyle/>
+                    <a:p>
+                      <a:pPr lvl="0" indent="0" marL="0">
+                        <a:buNone/>
+                      </a:pPr>
+                      <a:r>
+                        <a:rPr/>
+                        <a:t>11.4</a:t>
+                      </a:r>
+                    </a:p>
+                  </a:txBody>
+                </a:tc>
+                <a:tc>
+                  <a:txBody>
+                    <a:bodyPr/>
+                    <a:lstStyle/>
+                    <a:p>
+                      <a:pPr lvl="0" indent="0" marL="0">
+                        <a:buNone/>
+                      </a:pPr>
+                      <a:r>
+                        <a:rPr/>
+                        <a:t>66.1</a:t>
+                      </a:r>
+                    </a:p>
+                  </a:txBody>
+                </a:tc>
+                <a:tc>
+                  <a:txBody>
+                    <a:bodyPr/>
+                    <a:lstStyle/>
+                    <a:p>
+                      <a:pPr lvl="0" indent="0" marL="0">
+                        <a:buNone/>
+                      </a:pPr>
+                      <a:r>
+                        <a:rPr/>
+                        <a:t>499.35</a:t>
+                      </a:r>
+                    </a:p>
+                  </a:txBody>
+                </a:tc>
+                <a:tc>
+                  <a:txBody>
+                    <a:bodyPr/>
+                    <a:lstStyle/>
+                    <a:p>
+                      <a:pPr lvl="0" indent="0" marL="0">
+                        <a:buNone/>
+                      </a:pPr>
+                      <a:r>
+                        <a:rPr/>
+                        <a:t>balsam fir</a:t>
+                      </a:r>
+                    </a:p>
+                  </a:txBody>
+                </a:tc>
+              </a:tr>
+              <a:tr h="0">
+                <a:tc>
+                  <a:txBody>
+                    <a:bodyPr/>
+                    <a:lstStyle/>
+                    <a:p>
+                      <a:pPr lvl="0" indent="0" marL="0">
+                        <a:buNone/>
+                      </a:pPr>
+                      <a:r>
+                        <a:rPr/>
+                        <a:t>4</a:t>
+                      </a:r>
+                    </a:p>
+                  </a:txBody>
+                </a:tc>
+                <a:tc>
+                  <a:txBody>
+                    <a:bodyPr/>
+                    <a:lstStyle/>
+                    <a:p>
+                      <a:pPr lvl="0" indent="0" marL="0">
+                        <a:buNone/>
+                      </a:pPr>
+                      <a:r>
+                        <a:rPr/>
+                        <a:t>12</a:t>
+                      </a:r>
+                    </a:p>
+                  </a:txBody>
+                </a:tc>
+                <a:tc>
+                  <a:txBody>
+                    <a:bodyPr/>
+                    <a:lstStyle/>
+                    <a:p>
+                      <a:pPr lvl="0" indent="0" marL="0">
+                        <a:buNone/>
+                      </a:pPr>
+                      <a:r>
+                        <a:rPr/>
+                        <a:t>6.4</a:t>
+                      </a:r>
+                    </a:p>
+                  </a:txBody>
+                </a:tc>
+                <a:tc>
+                  <a:txBody>
+                    <a:bodyPr/>
+                    <a:lstStyle/>
+                    <a:p>
+                      <a:pPr lvl="0" indent="0" marL="0">
+                        <a:buNone/>
+                      </a:pPr>
+                      <a:r>
+                        <a:rPr/>
+                        <a:t>51.8</a:t>
+                      </a:r>
+                    </a:p>
+                  </a:txBody>
+                </a:tc>
+                <a:tc>
+                  <a:txBody>
+                    <a:bodyPr/>
+                    <a:lstStyle/>
+                    <a:p>
+                      <a:pPr lvl="0" indent="0" marL="0">
+                        <a:buNone/>
+                      </a:pPr>
+                      <a:r>
+                        <a:rPr/>
+                        <a:t>113.92</a:t>
+                      </a:r>
+                    </a:p>
+                  </a:txBody>
+                </a:tc>
+                <a:tc>
+                  <a:txBody>
+                    <a:bodyPr/>
+                    <a:lstStyle/>
+                    <a:p>
+                      <a:pPr lvl="0" indent="0" marL="0">
+                        <a:buNone/>
+                      </a:pPr>
+                      <a:r>
+                        <a:rPr/>
+                        <a:t>balsam fir</a:t>
+                      </a:r>
+                    </a:p>
+                  </a:txBody>
+                </a:tc>
+              </a:tr>
+            </a:tbl>
+          </a:graphicData>
+        </a:graphic>
+      </p:graphicFrame>
+    </p:spTree>
+  </p:cSld>
+</p:sld>
+</file>
+
+<file path=ppt/slides/slide17.xml><?xml version="1.0" encoding="utf-8"?>
+<p:sld xmlns:a="http://schemas.openxmlformats.org/drawingml/2006/main" xmlns:r="http://schemas.openxmlformats.org/officeDocument/2006/relationships" xmlns:p="http://schemas.openxmlformats.org/presentationml/2006/main">
+  <p:cSld>
+    <p:spTree>
+      <p:nvGrpSpPr>
+        <p:cNvPr id="1" name=""/>
+        <p:cNvGrpSpPr/>
+        <p:nvPr/>
+      </p:nvGrpSpPr>
+      <p:grpSpPr>
+        <a:xfrm>
+          <a:off x="0" y="0"/>
+          <a:ext cx="0" cy="0"/>
+          <a:chOff x="0" y="0"/>
+          <a:chExt cx="0" cy="0"/>
+        </a:xfrm>
+      </p:grpSpPr>
+      <p:sp>
+        <p:nvSpPr>
+          <p:cNvPr id="2" name="Title 1"/>
+          <p:cNvSpPr>
+            <a:spLocks noGrp="1"/>
+          </p:cNvSpPr>
+          <p:nvPr>
+            <p:ph type="title"/>
+          </p:nvPr>
+        </p:nvSpPr>
+        <p:spPr/>
+        <p:txBody>
+          <a:bodyPr/>
+          <a:lstStyle/>
+          <a:p>
+            <a:pPr lvl="0" indent="0" marL="0">
+              <a:buNone/>
+            </a:pPr>
+            <a:r>
+              <a:rPr/>
               <a:t>Quality Assurance</a:t>
             </a:r>
           </a:p>
@@ -3294,7 +6314,45 @@
             </a:pPr>
             <a:r>
               <a:rPr/>
-              <a:t>Redwood Analytics Project 3</a:t>
+              <a:t>Data Dictionary</a:t>
+            </a:r>
+          </a:p>
+        </p:txBody>
+      </p:sp>
+      <p:sp>
+        <p:nvSpPr>
+          <p:cNvPr id="3" name="Content Placeholder 2"/>
+          <p:cNvSpPr>
+            <a:spLocks noGrp="1"/>
+          </p:cNvSpPr>
+          <p:nvPr>
+            <p:ph idx="1"/>
+          </p:nvPr>
+        </p:nvSpPr>
+        <p:spPr/>
+        <p:txBody>
+          <a:bodyPr/>
+          <a:lstStyle/>
+          <a:p>
+            <a:pPr lvl="0"/>
+            <a:r>
+              <a:rPr/>
+              <a:t>SPCD (FIA Species Code): A numeric code which unqiuely identifies each tree species and corresponds to a scientific and common name for the tree as specified by the FIA (Forest Inventory and Analysis) species coding system.</a:t>
+            </a:r>
+          </a:p>
+          <a:p>
+            <a:pPr lvl="0"/>
+            <a:r>
+              <a:rPr/>
+              <a:t>DO_BH (Diameter at Breast Height): Diameter of the tree stem measured at breast height (4.5 feet or 1.37 meters above ground) including bark. This is the standard foresty measurement “DBH (outside bark)” and is the primary size variable used in nearly all allometric biomass models. This is measured in </a:t>
+            </a:r>
+            <a:r>
+              <a:rPr b="1"/>
+              <a:t>inches</a:t>
+            </a:r>
+            <a:r>
+              <a:rPr/>
+              <a:t>.</a:t>
             </a:r>
           </a:p>
         </p:txBody>
@@ -3341,7 +6399,7 @@
             </a:pPr>
             <a:r>
               <a:rPr/>
-              <a:t>Data Dictionary</a:t>
+              <a:t>Data Dictionary Continued</a:t>
             </a:r>
           </a:p>
         </p:txBody>
@@ -3364,28 +6422,30 @@
             <a:pPr lvl="0"/>
             <a:r>
               <a:rPr/>
-              <a:t>SPCD (Species Code): A numeric code which unqiuely identifies each tree species as specifed by the FIA (Forest Inventory and Analysis) species coding system. Each FIA species code corresponds uniquely to a scientific and common name. (Official definition: FIA species code.)</a:t>
+              <a:t>HT_TOT (Total Tree Height): The total height of the tree measured from ground level to the top of the crown. Used as a second size metric in volume and biomass modeling. This is measured in </a:t>
+            </a:r>
+            <a:r>
+              <a:rPr b="1"/>
+              <a:t>feet</a:t>
+            </a:r>
+            <a:r>
+              <a:rPr/>
+              <a:t>.</a:t>
             </a:r>
           </a:p>
           <a:p>
             <a:pPr lvl="0"/>
             <a:r>
               <a:rPr/>
-              <a:t>DO_BH (Diameter at Breast Height [Outside Bark]): Diameter of the tree stem measured at breast height (4.5 feet or 1.37 meters above ground) including bark. This is the standard foresty measurement “DBH (outside bark)” and is the primary size variable used in nearly all allometric biomass models. This is measured in inches.</a:t>
-            </a:r>
-          </a:p>
-          <a:p>
-            <a:pPr lvl="0"/>
+              <a:t>TT_DW_CRM (Total Tree Dry Biomass): The total above-ground dry weight of the tree (includes stem wood, stem bark, branches, folliage). The value comes from destructive sampling: the tree was felled, separated into componenets, oven-dried, and weighed. This variable serves as the target variable from biomass prediction. Measured in </a:t>
+            </a:r>
+            <a:r>
+              <a:rPr b="1"/>
+              <a:t>kilograms</a:t>
+            </a:r>
             <a:r>
               <a:rPr/>
-              <a:t>HT_TOT (Total Tree Height): The total height of the tree measured from ground level to the top of the crown. Used as a second size metric in volume and biomass modeling.This is measured in feet.</a:t>
-            </a:r>
-          </a:p>
-          <a:p>
-            <a:pPr lvl="0"/>
-            <a:r>
-              <a:rPr/>
-              <a:t>NEED UNITS (likely KG) STILL TT_DW_CRM (Total Tree Dry Biomass): The total above-ground dry weight of the tree (includes stem wood, stem bark, branches, folliage). This value comes from destructive sampling: the tree was felled, seperated into componenets, oven-dried, and weighed. This variable serves as the response variable (“target”) from biomass prediction.</a:t>
+              <a:t>.</a:t>
             </a:r>
           </a:p>
         </p:txBody>
@@ -3499,51 +6559,787 @@
             <p:ph type="title"/>
           </p:nvPr>
         </p:nvSpPr>
+        <p:spPr>
+          <a:xfrm>
+            <a:off x="457201" y="204787"/>
+            <a:ext cx="3008313" cy="871538"/>
+          </a:xfrm>
+        </p:spPr>
+        <p:txBody>
+          <a:bodyPr/>
+          <a:lstStyle/>
+          <a:p>
+            <a:pPr lvl="0" indent="0" marL="0">
+              <a:buNone/>
+            </a:pPr>
+            <a:r>
+              <a:rPr/>
+              <a:t>Data Summaries</a:t>
+            </a:r>
+          </a:p>
+        </p:txBody>
+      </p:sp>
+      <p:sp>
+        <p:nvSpPr>
+          <p:cNvPr id="4" name="Text Placeholder 3"/>
+          <p:cNvSpPr>
+            <a:spLocks noGrp="1"/>
+          </p:cNvSpPr>
+          <p:nvPr>
+            <p:ph idx="2" sz="half" type="body"/>
+          </p:nvPr>
+        </p:nvSpPr>
         <p:spPr/>
         <p:txBody>
           <a:bodyPr/>
           <a:lstStyle/>
           <a:p>
-            <a:pPr lvl="0" indent="0" marL="0">
+            <a:pPr lvl="0" indent="0">
               <a:buNone/>
             </a:pPr>
             <a:r>
-              <a:rPr/>
-              <a:t>Bivariate Visualizations</a:t>
+              <a:rPr>
+                <a:latin typeface="Courier"/>
+              </a:rPr>
+              <a:t>COMMON_NAME
+loblolly pine     20140
+slash pine         8006
+Douglas-fir        7322
+ponderosa pine     5609
+shortleaf pine     5599
+longleaf pine      4949
+white oak          3955
+sweetgum           3494
+yellow-poplar      3372
+red maple          3109
+Name: count, dtype: int64</a:t>
             </a:r>
           </a:p>
         </p:txBody>
       </p:sp>
-      <p:pic>
-        <p:nvPicPr>
-          <p:cNvPr descr="presentation_files/figure-pptx/cell-4-output-1.png" id="0" name="Picture 1"/>
-          <p:cNvPicPr>
-            <a:picLocks noGrp="1" noChangeAspect="1"/>
-          </p:cNvPicPr>
-          <p:nvPr/>
-        </p:nvPicPr>
-        <p:blipFill>
-          <a:blip r:embed="rId2"/>
-          <a:stretch>
-            <a:fillRect/>
-          </a:stretch>
-        </p:blipFill>
-        <p:spPr bwMode="auto">
-          <a:xfrm>
-            <a:off x="1397000" y="1193800"/>
-            <a:ext cx="6350000" cy="3390900"/>
-          </a:xfrm>
-          <a:prstGeom prst="rect">
-            <a:avLst/>
-          </a:prstGeom>
-          <a:noFill/>
-          <a:ln w="9525">
-            <a:noFill/>
-            <a:headEnd/>
-            <a:tailEnd/>
-          </a:ln>
-        </p:spPr>
-      </p:pic>
+      <p:graphicFrame>
+        <p:nvGraphicFramePr>
+          <p:cNvPr id="6" name="Content Placeholder 5"/>
+          <p:cNvGraphicFramePr>
+            <a:graphicFrameLocks noGrp="1"/>
+          </p:cNvGraphicFramePr>
+          <p:nvPr>
+            <p:ph idx="1"/>
+          </p:nvPr>
+        </p:nvGraphicFramePr>
+        <p:xfrm>
+          <a:off x="3568700" y="203200"/>
+          <a:ext cx="5105400" cy="4381500"/>
+        </p:xfrm>
+        <a:graphic>
+          <a:graphicData uri="http://schemas.openxmlformats.org/drawingml/2006/table">
+            <a:tbl>
+              <a:tblPr firstRow="1" bandRow="1">
+                <a:tableStyleId>{5C22544A-7EE6-4342-B048-85BDC9FD1C3A}</a:tableStyleId>
+              </a:tblPr>
+              <a:tblGrid>
+                <a:gridCol w="1016000"/>
+                <a:gridCol w="1016000"/>
+                <a:gridCol w="1016000"/>
+                <a:gridCol w="1016000"/>
+                <a:gridCol w="1016000"/>
+              </a:tblGrid>
+              <a:tr h="0">
+                <a:tc>
+                  <a:txBody>
+                    <a:bodyPr/>
+                    <a:lstStyle/>
+                    <a:p>
+                      <a:endParaRPr/>
+                    </a:p>
+                  </a:txBody>
+                  <a:tcPr/>
+                </a:tc>
+                <a:tc>
+                  <a:txBody>
+                    <a:bodyPr/>
+                    <a:lstStyle/>
+                    <a:p>
+                      <a:pPr lvl="0" indent="0" marL="0">
+                        <a:buNone/>
+                      </a:pPr>
+                      <a:r>
+                        <a:rPr/>
+                        <a:t>SPCD</a:t>
+                      </a:r>
+                    </a:p>
+                  </a:txBody>
+                  <a:tcPr/>
+                </a:tc>
+                <a:tc>
+                  <a:txBody>
+                    <a:bodyPr/>
+                    <a:lstStyle/>
+                    <a:p>
+                      <a:pPr lvl="0" indent="0" marL="0">
+                        <a:buNone/>
+                      </a:pPr>
+                      <a:r>
+                        <a:rPr/>
+                        <a:t>DO_BH</a:t>
+                      </a:r>
+                    </a:p>
+                  </a:txBody>
+                  <a:tcPr/>
+                </a:tc>
+                <a:tc>
+                  <a:txBody>
+                    <a:bodyPr/>
+                    <a:lstStyle/>
+                    <a:p>
+                      <a:pPr lvl="0" indent="0" marL="0">
+                        <a:buNone/>
+                      </a:pPr>
+                      <a:r>
+                        <a:rPr/>
+                        <a:t>HT_TOT</a:t>
+                      </a:r>
+                    </a:p>
+                  </a:txBody>
+                  <a:tcPr/>
+                </a:tc>
+                <a:tc>
+                  <a:txBody>
+                    <a:bodyPr/>
+                    <a:lstStyle/>
+                    <a:p>
+                      <a:pPr lvl="0" indent="0" marL="0">
+                        <a:buNone/>
+                      </a:pPr>
+                      <a:r>
+                        <a:rPr/>
+                        <a:t>TT_DW_CRM</a:t>
+                      </a:r>
+                    </a:p>
+                  </a:txBody>
+                  <a:tcPr/>
+                </a:tc>
+              </a:tr>
+              <a:tr h="0">
+                <a:tc>
+                  <a:txBody>
+                    <a:bodyPr/>
+                    <a:lstStyle/>
+                    <a:p>
+                      <a:pPr lvl="0" indent="0" marL="0">
+                        <a:buNone/>
+                      </a:pPr>
+                      <a:r>
+                        <a:rPr/>
+                        <a:t>count</a:t>
+                      </a:r>
+                    </a:p>
+                  </a:txBody>
+                </a:tc>
+                <a:tc>
+                  <a:txBody>
+                    <a:bodyPr/>
+                    <a:lstStyle/>
+                    <a:p>
+                      <a:pPr lvl="0" indent="0" marL="0">
+                        <a:buNone/>
+                      </a:pPr>
+                      <a:r>
+                        <a:rPr/>
+                        <a:t>137079.000000</a:t>
+                      </a:r>
+                    </a:p>
+                  </a:txBody>
+                </a:tc>
+                <a:tc>
+                  <a:txBody>
+                    <a:bodyPr/>
+                    <a:lstStyle/>
+                    <a:p>
+                      <a:pPr lvl="0" indent="0" marL="0">
+                        <a:buNone/>
+                      </a:pPr>
+                      <a:r>
+                        <a:rPr/>
+                        <a:t>137079.000000</a:t>
+                      </a:r>
+                    </a:p>
+                  </a:txBody>
+                </a:tc>
+                <a:tc>
+                  <a:txBody>
+                    <a:bodyPr/>
+                    <a:lstStyle/>
+                    <a:p>
+                      <a:pPr lvl="0" indent="0" marL="0">
+                        <a:buNone/>
+                      </a:pPr>
+                      <a:r>
+                        <a:rPr/>
+                        <a:t>137079.000000</a:t>
+                      </a:r>
+                    </a:p>
+                  </a:txBody>
+                </a:tc>
+                <a:tc>
+                  <a:txBody>
+                    <a:bodyPr/>
+                    <a:lstStyle/>
+                    <a:p>
+                      <a:pPr lvl="0" indent="0" marL="0">
+                        <a:buNone/>
+                      </a:pPr>
+                      <a:r>
+                        <a:rPr/>
+                        <a:t>1.370790e+05</a:t>
+                      </a:r>
+                    </a:p>
+                  </a:txBody>
+                </a:tc>
+              </a:tr>
+              <a:tr h="0">
+                <a:tc>
+                  <a:txBody>
+                    <a:bodyPr/>
+                    <a:lstStyle/>
+                    <a:p>
+                      <a:pPr lvl="0" indent="0" marL="0">
+                        <a:buNone/>
+                      </a:pPr>
+                      <a:r>
+                        <a:rPr/>
+                        <a:t>mean</a:t>
+                      </a:r>
+                    </a:p>
+                  </a:txBody>
+                </a:tc>
+                <a:tc>
+                  <a:txBody>
+                    <a:bodyPr/>
+                    <a:lstStyle/>
+                    <a:p>
+                      <a:pPr lvl="0" indent="0" marL="0">
+                        <a:buNone/>
+                      </a:pPr>
+                      <a:r>
+                        <a:rPr/>
+                        <a:t>341.054465</a:t>
+                      </a:r>
+                    </a:p>
+                  </a:txBody>
+                </a:tc>
+                <a:tc>
+                  <a:txBody>
+                    <a:bodyPr/>
+                    <a:lstStyle/>
+                    <a:p>
+                      <a:pPr lvl="0" indent="0" marL="0">
+                        <a:buNone/>
+                      </a:pPr>
+                      <a:r>
+                        <a:rPr/>
+                        <a:t>11.104809</a:t>
+                      </a:r>
+                    </a:p>
+                  </a:txBody>
+                </a:tc>
+                <a:tc>
+                  <a:txBody>
+                    <a:bodyPr/>
+                    <a:lstStyle/>
+                    <a:p>
+                      <a:pPr lvl="0" indent="0" marL="0">
+                        <a:buNone/>
+                      </a:pPr>
+                      <a:r>
+                        <a:rPr/>
+                        <a:t>62.081565</a:t>
+                      </a:r>
+                    </a:p>
+                  </a:txBody>
+                </a:tc>
+                <a:tc>
+                  <a:txBody>
+                    <a:bodyPr/>
+                    <a:lstStyle/>
+                    <a:p>
+                      <a:pPr lvl="0" indent="0" marL="0">
+                        <a:buNone/>
+                      </a:pPr>
+                      <a:r>
+                        <a:rPr/>
+                        <a:t>1.530719e+03</a:t>
+                      </a:r>
+                    </a:p>
+                  </a:txBody>
+                </a:tc>
+              </a:tr>
+              <a:tr h="0">
+                <a:tc>
+                  <a:txBody>
+                    <a:bodyPr/>
+                    <a:lstStyle/>
+                    <a:p>
+                      <a:pPr lvl="0" indent="0" marL="0">
+                        <a:buNone/>
+                      </a:pPr>
+                      <a:r>
+                        <a:rPr/>
+                        <a:t>std</a:t>
+                      </a:r>
+                    </a:p>
+                  </a:txBody>
+                </a:tc>
+                <a:tc>
+                  <a:txBody>
+                    <a:bodyPr/>
+                    <a:lstStyle/>
+                    <a:p>
+                      <a:pPr lvl="0" indent="0" marL="0">
+                        <a:buNone/>
+                      </a:pPr>
+                      <a:r>
+                        <a:rPr/>
+                        <a:t>341.609599</a:t>
+                      </a:r>
+                    </a:p>
+                  </a:txBody>
+                </a:tc>
+                <a:tc>
+                  <a:txBody>
+                    <a:bodyPr/>
+                    <a:lstStyle/>
+                    <a:p>
+                      <a:pPr lvl="0" indent="0" marL="0">
+                        <a:buNone/>
+                      </a:pPr>
+                      <a:r>
+                        <a:rPr/>
+                        <a:t>8.046896</a:t>
+                      </a:r>
+                    </a:p>
+                  </a:txBody>
+                </a:tc>
+                <a:tc>
+                  <a:txBody>
+                    <a:bodyPr/>
+                    <a:lstStyle/>
+                    <a:p>
+                      <a:pPr lvl="0" indent="0" marL="0">
+                        <a:buNone/>
+                      </a:pPr>
+                      <a:r>
+                        <a:rPr/>
+                        <a:t>25.834963</a:t>
+                      </a:r>
+                    </a:p>
+                  </a:txBody>
+                </a:tc>
+                <a:tc>
+                  <a:txBody>
+                    <a:bodyPr/>
+                    <a:lstStyle/>
+                    <a:p>
+                      <a:pPr lvl="0" indent="0" marL="0">
+                        <a:buNone/>
+                      </a:pPr>
+                      <a:r>
+                        <a:rPr/>
+                        <a:t>1.698299e+04</a:t>
+                      </a:r>
+                    </a:p>
+                  </a:txBody>
+                </a:tc>
+              </a:tr>
+              <a:tr h="0">
+                <a:tc>
+                  <a:txBody>
+                    <a:bodyPr/>
+                    <a:lstStyle/>
+                    <a:p>
+                      <a:pPr lvl="0" indent="0" marL="0">
+                        <a:buNone/>
+                      </a:pPr>
+                      <a:r>
+                        <a:rPr/>
+                        <a:t>min</a:t>
+                      </a:r>
+                    </a:p>
+                  </a:txBody>
+                </a:tc>
+                <a:tc>
+                  <a:txBody>
+                    <a:bodyPr/>
+                    <a:lstStyle/>
+                    <a:p>
+                      <a:pPr lvl="0" indent="0" marL="0">
+                        <a:buNone/>
+                      </a:pPr>
+                      <a:r>
+                        <a:rPr/>
+                        <a:t>10.000000</a:t>
+                      </a:r>
+                    </a:p>
+                  </a:txBody>
+                </a:tc>
+                <a:tc>
+                  <a:txBody>
+                    <a:bodyPr/>
+                    <a:lstStyle/>
+                    <a:p>
+                      <a:pPr lvl="0" indent="0" marL="0">
+                        <a:buNone/>
+                      </a:pPr>
+                      <a:r>
+                        <a:rPr/>
+                        <a:t>1.000000</a:t>
+                      </a:r>
+                    </a:p>
+                  </a:txBody>
+                </a:tc>
+                <a:tc>
+                  <a:txBody>
+                    <a:bodyPr/>
+                    <a:lstStyle/>
+                    <a:p>
+                      <a:pPr lvl="0" indent="0" marL="0">
+                        <a:buNone/>
+                      </a:pPr>
+                      <a:r>
+                        <a:rPr/>
+                        <a:t>1.400000</a:t>
+                      </a:r>
+                    </a:p>
+                  </a:txBody>
+                </a:tc>
+                <a:tc>
+                  <a:txBody>
+                    <a:bodyPr/>
+                    <a:lstStyle/>
+                    <a:p>
+                      <a:pPr lvl="0" indent="0" marL="0">
+                        <a:buNone/>
+                      </a:pPr>
+                      <a:r>
+                        <a:rPr/>
+                        <a:t>1.020000e+00</a:t>
+                      </a:r>
+                    </a:p>
+                  </a:txBody>
+                </a:tc>
+              </a:tr>
+              <a:tr h="0">
+                <a:tc>
+                  <a:txBody>
+                    <a:bodyPr/>
+                    <a:lstStyle/>
+                    <a:p>
+                      <a:pPr lvl="0" indent="0" marL="0">
+                        <a:buNone/>
+                      </a:pPr>
+                      <a:r>
+                        <a:rPr/>
+                        <a:t>25%</a:t>
+                      </a:r>
+                    </a:p>
+                  </a:txBody>
+                </a:tc>
+                <a:tc>
+                  <a:txBody>
+                    <a:bodyPr/>
+                    <a:lstStyle/>
+                    <a:p>
+                      <a:pPr lvl="0" indent="0" marL="0">
+                        <a:buNone/>
+                      </a:pPr>
+                      <a:r>
+                        <a:rPr/>
+                        <a:t>121.000000</a:t>
+                      </a:r>
+                    </a:p>
+                  </a:txBody>
+                </a:tc>
+                <a:tc>
+                  <a:txBody>
+                    <a:bodyPr/>
+                    <a:lstStyle/>
+                    <a:p>
+                      <a:pPr lvl="0" indent="0" marL="0">
+                        <a:buNone/>
+                      </a:pPr>
+                      <a:r>
+                        <a:rPr/>
+                        <a:t>6.500000</a:t>
+                      </a:r>
+                    </a:p>
+                  </a:txBody>
+                </a:tc>
+                <a:tc>
+                  <a:txBody>
+                    <a:bodyPr/>
+                    <a:lstStyle/>
+                    <a:p>
+                      <a:pPr lvl="0" indent="0" marL="0">
+                        <a:buNone/>
+                      </a:pPr>
+                      <a:r>
+                        <a:rPr/>
+                        <a:t>45.000000</a:t>
+                      </a:r>
+                    </a:p>
+                  </a:txBody>
+                </a:tc>
+                <a:tc>
+                  <a:txBody>
+                    <a:bodyPr/>
+                    <a:lstStyle/>
+                    <a:p>
+                      <a:pPr lvl="0" indent="0" marL="0">
+                        <a:buNone/>
+                      </a:pPr>
+                      <a:r>
+                        <a:rPr/>
+                        <a:t>1.689850e+02</a:t>
+                      </a:r>
+                    </a:p>
+                  </a:txBody>
+                </a:tc>
+              </a:tr>
+              <a:tr h="0">
+                <a:tc>
+                  <a:txBody>
+                    <a:bodyPr/>
+                    <a:lstStyle/>
+                    <a:p>
+                      <a:pPr lvl="0" indent="0" marL="0">
+                        <a:buNone/>
+                      </a:pPr>
+                      <a:r>
+                        <a:rPr/>
+                        <a:t>50%</a:t>
+                      </a:r>
+                    </a:p>
+                  </a:txBody>
+                </a:tc>
+                <a:tc>
+                  <a:txBody>
+                    <a:bodyPr/>
+                    <a:lstStyle/>
+                    <a:p>
+                      <a:pPr lvl="0" indent="0" marL="0">
+                        <a:buNone/>
+                      </a:pPr>
+                      <a:r>
+                        <a:rPr/>
+                        <a:t>132.000000</a:t>
+                      </a:r>
+                    </a:p>
+                  </a:txBody>
+                </a:tc>
+                <a:tc>
+                  <a:txBody>
+                    <a:bodyPr/>
+                    <a:lstStyle/>
+                    <a:p>
+                      <a:pPr lvl="0" indent="0" marL="0">
+                        <a:buNone/>
+                      </a:pPr>
+                      <a:r>
+                        <a:rPr/>
+                        <a:t>9.900000</a:t>
+                      </a:r>
+                    </a:p>
+                  </a:txBody>
+                </a:tc>
+                <a:tc>
+                  <a:txBody>
+                    <a:bodyPr/>
+                    <a:lstStyle/>
+                    <a:p>
+                      <a:pPr lvl="0" indent="0" marL="0">
+                        <a:buNone/>
+                      </a:pPr>
+                      <a:r>
+                        <a:rPr/>
+                        <a:t>61.100000</a:t>
+                      </a:r>
+                    </a:p>
+                  </a:txBody>
+                </a:tc>
+                <a:tc>
+                  <a:txBody>
+                    <a:bodyPr/>
+                    <a:lstStyle/>
+                    <a:p>
+                      <a:pPr lvl="0" indent="0" marL="0">
+                        <a:buNone/>
+                      </a:pPr>
+                      <a:r>
+                        <a:rPr/>
+                        <a:t>5.276000e+02</a:t>
+                      </a:r>
+                    </a:p>
+                  </a:txBody>
+                </a:tc>
+              </a:tr>
+              <a:tr h="0">
+                <a:tc>
+                  <a:txBody>
+                    <a:bodyPr/>
+                    <a:lstStyle/>
+                    <a:p>
+                      <a:pPr lvl="0" indent="0" marL="0">
+                        <a:buNone/>
+                      </a:pPr>
+                      <a:r>
+                        <a:rPr/>
+                        <a:t>75%</a:t>
+                      </a:r>
+                    </a:p>
+                  </a:txBody>
+                </a:tc>
+                <a:tc>
+                  <a:txBody>
+                    <a:bodyPr/>
+                    <a:lstStyle/>
+                    <a:p>
+                      <a:pPr lvl="0" indent="0" marL="0">
+                        <a:buNone/>
+                      </a:pPr>
+                      <a:r>
+                        <a:rPr/>
+                        <a:t>611.000000</a:t>
+                      </a:r>
+                    </a:p>
+                  </a:txBody>
+                </a:tc>
+                <a:tc>
+                  <a:txBody>
+                    <a:bodyPr/>
+                    <a:lstStyle/>
+                    <a:p>
+                      <a:pPr lvl="0" indent="0" marL="0">
+                        <a:buNone/>
+                      </a:pPr>
+                      <a:r>
+                        <a:rPr/>
+                        <a:t>14.300000</a:t>
+                      </a:r>
+                    </a:p>
+                  </a:txBody>
+                </a:tc>
+                <a:tc>
+                  <a:txBody>
+                    <a:bodyPr/>
+                    <a:lstStyle/>
+                    <a:p>
+                      <a:pPr lvl="0" indent="0" marL="0">
+                        <a:buNone/>
+                      </a:pPr>
+                      <a:r>
+                        <a:rPr/>
+                        <a:t>76.700000</a:t>
+                      </a:r>
+                    </a:p>
+                  </a:txBody>
+                </a:tc>
+                <a:tc>
+                  <a:txBody>
+                    <a:bodyPr/>
+                    <a:lstStyle/>
+                    <a:p>
+                      <a:pPr lvl="0" indent="0" marL="0">
+                        <a:buNone/>
+                      </a:pPr>
+                      <a:r>
+                        <a:rPr/>
+                        <a:t>1.352070e+03</a:t>
+                      </a:r>
+                    </a:p>
+                  </a:txBody>
+                </a:tc>
+              </a:tr>
+              <a:tr h="0">
+                <a:tc>
+                  <a:txBody>
+                    <a:bodyPr/>
+                    <a:lstStyle/>
+                    <a:p>
+                      <a:pPr lvl="0" indent="0" marL="0">
+                        <a:buNone/>
+                      </a:pPr>
+                      <a:r>
+                        <a:rPr/>
+                        <a:t>max</a:t>
+                      </a:r>
+                    </a:p>
+                  </a:txBody>
+                </a:tc>
+                <a:tc>
+                  <a:txBody>
+                    <a:bodyPr/>
+                    <a:lstStyle/>
+                    <a:p>
+                      <a:pPr lvl="0" indent="0" marL="0">
+                        <a:buNone/>
+                      </a:pPr>
+                      <a:r>
+                        <a:rPr/>
+                        <a:t>8768.000000</a:t>
+                      </a:r>
+                    </a:p>
+                  </a:txBody>
+                </a:tc>
+                <a:tc>
+                  <a:txBody>
+                    <a:bodyPr/>
+                    <a:lstStyle/>
+                    <a:p>
+                      <a:pPr lvl="0" indent="0" marL="0">
+                        <a:buNone/>
+                      </a:pPr>
+                      <a:r>
+                        <a:rPr/>
+                        <a:t>334.900000</a:t>
+                      </a:r>
+                    </a:p>
+                  </a:txBody>
+                </a:tc>
+                <a:tc>
+                  <a:txBody>
+                    <a:bodyPr/>
+                    <a:lstStyle/>
+                    <a:p>
+                      <a:pPr lvl="0" indent="0" marL="0">
+                        <a:buNone/>
+                      </a:pPr>
+                      <a:r>
+                        <a:rPr/>
+                        <a:t>379.300000</a:t>
+                      </a:r>
+                    </a:p>
+                  </a:txBody>
+                </a:tc>
+                <a:tc>
+                  <a:txBody>
+                    <a:bodyPr/>
+                    <a:lstStyle/>
+                    <a:p>
+                      <a:pPr lvl="0" indent="0" marL="0">
+                        <a:buNone/>
+                      </a:pPr>
+                      <a:r>
+                        <a:rPr/>
+                        <a:t>1.385886e+06</a:t>
+                      </a:r>
+                    </a:p>
+                  </a:txBody>
+                </a:tc>
+              </a:tr>
+            </a:tbl>
+          </a:graphicData>
+        </a:graphic>
+      </p:graphicFrame>
     </p:spTree>
   </p:cSld>
 </p:sld>
@@ -3586,41 +7382,765 @@
             </a:pPr>
             <a:r>
               <a:rPr/>
-              <a:t>Additional Visualizations</a:t>
+              <a:t>Data Summaries</a:t>
             </a:r>
           </a:p>
         </p:txBody>
       </p:sp>
-      <p:pic>
-        <p:nvPicPr>
-          <p:cNvPr descr="presentation_files/figure-pptx/cell-5-output-1.png" id="0" name="Picture 1"/>
-          <p:cNvPicPr>
-            <a:picLocks noGrp="1" noChangeAspect="1"/>
-          </p:cNvPicPr>
-          <p:nvPr/>
-        </p:nvPicPr>
-        <p:blipFill>
-          <a:blip r:embed="rId2"/>
-          <a:stretch>
-            <a:fillRect/>
-          </a:stretch>
-        </p:blipFill>
-        <p:spPr bwMode="auto">
-          <a:xfrm>
-            <a:off x="1155700" y="1193800"/>
-            <a:ext cx="6832600" cy="3390900"/>
-          </a:xfrm>
-          <a:prstGeom prst="rect">
-            <a:avLst/>
-          </a:prstGeom>
-          <a:noFill/>
-          <a:ln w="9525">
-            <a:noFill/>
-            <a:headEnd/>
-            <a:tailEnd/>
-          </a:ln>
-        </p:spPr>
-      </p:pic>
+      <p:graphicFrame>
+        <p:nvGraphicFramePr>
+          <p:cNvPr id="6" name="Content Placeholder 5"/>
+          <p:cNvGraphicFramePr>
+            <a:graphicFrameLocks noGrp="1"/>
+          </p:cNvGraphicFramePr>
+          <p:nvPr>
+            <p:ph idx="1"/>
+          </p:nvPr>
+        </p:nvGraphicFramePr>
+        <p:xfrm>
+          <a:off x="457200" y="1193800"/>
+          <a:ext cx="8229600" cy="3390900"/>
+        </p:xfrm>
+        <a:graphic>
+          <a:graphicData uri="http://schemas.openxmlformats.org/drawingml/2006/table">
+            <a:tbl>
+              <a:tblPr firstRow="1" bandRow="1">
+                <a:tableStyleId>{5C22544A-7EE6-4342-B048-85BDC9FD1C3A}</a:tableStyleId>
+              </a:tblPr>
+              <a:tblGrid>
+                <a:gridCol w="2057400"/>
+                <a:gridCol w="2057400"/>
+                <a:gridCol w="2057400"/>
+                <a:gridCol w="2057400"/>
+              </a:tblGrid>
+              <a:tr h="0">
+                <a:tc>
+                  <a:txBody>
+                    <a:bodyPr/>
+                    <a:lstStyle/>
+                    <a:p>
+                      <a:endParaRPr/>
+                    </a:p>
+                  </a:txBody>
+                  <a:tcPr/>
+                </a:tc>
+                <a:tc>
+                  <a:txBody>
+                    <a:bodyPr/>
+                    <a:lstStyle/>
+                    <a:p>
+                      <a:pPr lvl="0" indent="0" marL="0">
+                        <a:buNone/>
+                      </a:pPr>
+                      <a:r>
+                        <a:rPr/>
+                        <a:t>HT_TOT</a:t>
+                      </a:r>
+                    </a:p>
+                  </a:txBody>
+                  <a:tcPr/>
+                </a:tc>
+                <a:tc>
+                  <a:txBody>
+                    <a:bodyPr/>
+                    <a:lstStyle/>
+                    <a:p>
+                      <a:pPr lvl="0" indent="0" marL="0">
+                        <a:buNone/>
+                      </a:pPr>
+                      <a:r>
+                        <a:rPr/>
+                        <a:t>DO_BH</a:t>
+                      </a:r>
+                    </a:p>
+                  </a:txBody>
+                  <a:tcPr/>
+                </a:tc>
+                <a:tc>
+                  <a:txBody>
+                    <a:bodyPr/>
+                    <a:lstStyle/>
+                    <a:p>
+                      <a:pPr lvl="0" indent="0" marL="0">
+                        <a:buNone/>
+                      </a:pPr>
+                      <a:r>
+                        <a:rPr/>
+                        <a:t>TT_DW_CRM</a:t>
+                      </a:r>
+                    </a:p>
+                  </a:txBody>
+                  <a:tcPr/>
+                </a:tc>
+              </a:tr>
+              <a:tr h="0">
+                <a:tc>
+                  <a:txBody>
+                    <a:bodyPr/>
+                    <a:lstStyle/>
+                    <a:p>
+                      <a:pPr lvl="0" indent="0" marL="0">
+                        <a:buNone/>
+                      </a:pPr>
+                      <a:r>
+                        <a:rPr/>
+                        <a:t>COMMON_NAME</a:t>
+                      </a:r>
+                    </a:p>
+                  </a:txBody>
+                </a:tc>
+                <a:tc>
+                  <a:txBody>
+                    <a:bodyPr/>
+                    <a:lstStyle/>
+                    <a:p>
+                      <a:endParaRPr/>
+                    </a:p>
+                  </a:txBody>
+                </a:tc>
+                <a:tc>
+                  <a:txBody>
+                    <a:bodyPr/>
+                    <a:lstStyle/>
+                    <a:p>
+                      <a:endParaRPr/>
+                    </a:p>
+                  </a:txBody>
+                </a:tc>
+                <a:tc>
+                  <a:txBody>
+                    <a:bodyPr/>
+                    <a:lstStyle/>
+                    <a:p>
+                      <a:endParaRPr/>
+                    </a:p>
+                  </a:txBody>
+                </a:tc>
+              </a:tr>
+              <a:tr h="0">
+                <a:tc>
+                  <a:txBody>
+                    <a:bodyPr/>
+                    <a:lstStyle/>
+                    <a:p>
+                      <a:pPr lvl="0" indent="0" marL="0">
+                        <a:buNone/>
+                      </a:pPr>
+                      <a:r>
+                        <a:rPr/>
+                        <a:t>Alaska yellow-cedar</a:t>
+                      </a:r>
+                    </a:p>
+                  </a:txBody>
+                </a:tc>
+                <a:tc>
+                  <a:txBody>
+                    <a:bodyPr/>
+                    <a:lstStyle/>
+                    <a:p>
+                      <a:pPr lvl="0" indent="0" marL="0">
+                        <a:buNone/>
+                      </a:pPr>
+                      <a:r>
+                        <a:rPr/>
+                        <a:t>75.11</a:t>
+                      </a:r>
+                    </a:p>
+                  </a:txBody>
+                </a:tc>
+                <a:tc>
+                  <a:txBody>
+                    <a:bodyPr/>
+                    <a:lstStyle/>
+                    <a:p>
+                      <a:pPr lvl="0" indent="0" marL="0">
+                        <a:buNone/>
+                      </a:pPr>
+                      <a:r>
+                        <a:rPr/>
+                        <a:t>14.19</a:t>
+                      </a:r>
+                    </a:p>
+                  </a:txBody>
+                </a:tc>
+                <a:tc>
+                  <a:txBody>
+                    <a:bodyPr/>
+                    <a:lstStyle/>
+                    <a:p>
+                      <a:pPr lvl="0" indent="0" marL="0">
+                        <a:buNone/>
+                      </a:pPr>
+                      <a:r>
+                        <a:rPr/>
+                        <a:t>1873.10</a:t>
+                      </a:r>
+                    </a:p>
+                  </a:txBody>
+                </a:tc>
+              </a:tr>
+              <a:tr h="0">
+                <a:tc>
+                  <a:txBody>
+                    <a:bodyPr/>
+                    <a:lstStyle/>
+                    <a:p>
+                      <a:pPr lvl="0" indent="0" marL="0">
+                        <a:buNone/>
+                      </a:pPr>
+                      <a:r>
+                        <a:rPr/>
+                        <a:t>American basswood</a:t>
+                      </a:r>
+                    </a:p>
+                  </a:txBody>
+                </a:tc>
+                <a:tc>
+                  <a:txBody>
+                    <a:bodyPr/>
+                    <a:lstStyle/>
+                    <a:p>
+                      <a:pPr lvl="0" indent="0" marL="0">
+                        <a:buNone/>
+                      </a:pPr>
+                      <a:r>
+                        <a:rPr/>
+                        <a:t>70.87</a:t>
+                      </a:r>
+                    </a:p>
+                  </a:txBody>
+                </a:tc>
+                <a:tc>
+                  <a:txBody>
+                    <a:bodyPr/>
+                    <a:lstStyle/>
+                    <a:p>
+                      <a:pPr lvl="0" indent="0" marL="0">
+                        <a:buNone/>
+                      </a:pPr>
+                      <a:r>
+                        <a:rPr/>
+                        <a:t>11.84</a:t>
+                      </a:r>
+                    </a:p>
+                  </a:txBody>
+                </a:tc>
+                <a:tc>
+                  <a:txBody>
+                    <a:bodyPr/>
+                    <a:lstStyle/>
+                    <a:p>
+                      <a:pPr lvl="0" indent="0" marL="0">
+                        <a:buNone/>
+                      </a:pPr>
+                      <a:r>
+                        <a:rPr/>
+                        <a:t>821.54</a:t>
+                      </a:r>
+                    </a:p>
+                  </a:txBody>
+                </a:tc>
+              </a:tr>
+              <a:tr h="0">
+                <a:tc>
+                  <a:txBody>
+                    <a:bodyPr/>
+                    <a:lstStyle/>
+                    <a:p>
+                      <a:pPr lvl="0" indent="0" marL="0">
+                        <a:buNone/>
+                      </a:pPr>
+                      <a:r>
+                        <a:rPr/>
+                        <a:t>American beech</a:t>
+                      </a:r>
+                    </a:p>
+                  </a:txBody>
+                </a:tc>
+                <a:tc>
+                  <a:txBody>
+                    <a:bodyPr/>
+                    <a:lstStyle/>
+                    <a:p>
+                      <a:pPr lvl="0" indent="0" marL="0">
+                        <a:buNone/>
+                      </a:pPr>
+                      <a:r>
+                        <a:rPr/>
+                        <a:t>68.84</a:t>
+                      </a:r>
+                    </a:p>
+                  </a:txBody>
+                </a:tc>
+                <a:tc>
+                  <a:txBody>
+                    <a:bodyPr/>
+                    <a:lstStyle/>
+                    <a:p>
+                      <a:pPr lvl="0" indent="0" marL="0">
+                        <a:buNone/>
+                      </a:pPr>
+                      <a:r>
+                        <a:rPr/>
+                        <a:t>13.39</a:t>
+                      </a:r>
+                    </a:p>
+                  </a:txBody>
+                </a:tc>
+                <a:tc>
+                  <a:txBody>
+                    <a:bodyPr/>
+                    <a:lstStyle/>
+                    <a:p>
+                      <a:pPr lvl="0" indent="0" marL="0">
+                        <a:buNone/>
+                      </a:pPr>
+                      <a:r>
+                        <a:rPr/>
+                        <a:t>1867.46</a:t>
+                      </a:r>
+                    </a:p>
+                  </a:txBody>
+                </a:tc>
+              </a:tr>
+              <a:tr h="0">
+                <a:tc>
+                  <a:txBody>
+                    <a:bodyPr/>
+                    <a:lstStyle/>
+                    <a:p>
+                      <a:pPr lvl="0" indent="0" marL="0">
+                        <a:buNone/>
+                      </a:pPr>
+                      <a:r>
+                        <a:rPr/>
+                        <a:t>American chestnut</a:t>
+                      </a:r>
+                    </a:p>
+                  </a:txBody>
+                </a:tc>
+                <a:tc>
+                  <a:txBody>
+                    <a:bodyPr/>
+                    <a:lstStyle/>
+                    <a:p>
+                      <a:pPr lvl="0" indent="0" marL="0">
+                        <a:buNone/>
+                      </a:pPr>
+                      <a:r>
+                        <a:rPr/>
+                        <a:t>51.01</a:t>
+                      </a:r>
+                    </a:p>
+                  </a:txBody>
+                </a:tc>
+                <a:tc>
+                  <a:txBody>
+                    <a:bodyPr/>
+                    <a:lstStyle/>
+                    <a:p>
+                      <a:pPr lvl="0" indent="0" marL="0">
+                        <a:buNone/>
+                      </a:pPr>
+                      <a:r>
+                        <a:rPr/>
+                        <a:t>7.21</a:t>
+                      </a:r>
+                    </a:p>
+                  </a:txBody>
+                </a:tc>
+                <a:tc>
+                  <a:txBody>
+                    <a:bodyPr/>
+                    <a:lstStyle/>
+                    <a:p>
+                      <a:pPr lvl="0" indent="0" marL="0">
+                        <a:buNone/>
+                      </a:pPr>
+                      <a:r>
+                        <a:rPr/>
+                        <a:t>249.15</a:t>
+                      </a:r>
+                    </a:p>
+                  </a:txBody>
+                </a:tc>
+              </a:tr>
+              <a:tr h="0">
+                <a:tc>
+                  <a:txBody>
+                    <a:bodyPr/>
+                    <a:lstStyle/>
+                    <a:p>
+                      <a:pPr lvl="0" indent="0" marL="0">
+                        <a:buNone/>
+                      </a:pPr>
+                      <a:r>
+                        <a:rPr/>
+                        <a:t>American elm</a:t>
+                      </a:r>
+                    </a:p>
+                  </a:txBody>
+                </a:tc>
+                <a:tc>
+                  <a:txBody>
+                    <a:bodyPr/>
+                    <a:lstStyle/>
+                    <a:p>
+                      <a:pPr lvl="0" indent="0" marL="0">
+                        <a:buNone/>
+                      </a:pPr>
+                      <a:r>
+                        <a:rPr/>
+                        <a:t>54.26</a:t>
+                      </a:r>
+                    </a:p>
+                  </a:txBody>
+                </a:tc>
+                <a:tc>
+                  <a:txBody>
+                    <a:bodyPr/>
+                    <a:lstStyle/>
+                    <a:p>
+                      <a:pPr lvl="0" indent="0" marL="0">
+                        <a:buNone/>
+                      </a:pPr>
+                      <a:r>
+                        <a:rPr/>
+                        <a:t>9.15</a:t>
+                      </a:r>
+                    </a:p>
+                  </a:txBody>
+                </a:tc>
+                <a:tc>
+                  <a:txBody>
+                    <a:bodyPr/>
+                    <a:lstStyle/>
+                    <a:p>
+                      <a:pPr lvl="0" indent="0" marL="0">
+                        <a:buNone/>
+                      </a:pPr>
+                      <a:r>
+                        <a:rPr/>
+                        <a:t>515.40</a:t>
+                      </a:r>
+                    </a:p>
+                  </a:txBody>
+                </a:tc>
+              </a:tr>
+              <a:tr h="0">
+                <a:tc>
+                  <a:txBody>
+                    <a:bodyPr/>
+                    <a:lstStyle/>
+                    <a:p>
+                      <a:pPr lvl="0" indent="0" marL="0">
+                        <a:buNone/>
+                      </a:pPr>
+                      <a:r>
+                        <a:rPr/>
+                        <a:t>American holly</a:t>
+                      </a:r>
+                    </a:p>
+                  </a:txBody>
+                </a:tc>
+                <a:tc>
+                  <a:txBody>
+                    <a:bodyPr/>
+                    <a:lstStyle/>
+                    <a:p>
+                      <a:pPr lvl="0" indent="0" marL="0">
+                        <a:buNone/>
+                      </a:pPr>
+                      <a:r>
+                        <a:rPr/>
+                        <a:t>31.10</a:t>
+                      </a:r>
+                    </a:p>
+                  </a:txBody>
+                </a:tc>
+                <a:tc>
+                  <a:txBody>
+                    <a:bodyPr/>
+                    <a:lstStyle/>
+                    <a:p>
+                      <a:pPr lvl="0" indent="0" marL="0">
+                        <a:buNone/>
+                      </a:pPr>
+                      <a:r>
+                        <a:rPr/>
+                        <a:t>6.09</a:t>
+                      </a:r>
+                    </a:p>
+                  </a:txBody>
+                </a:tc>
+                <a:tc>
+                  <a:txBody>
+                    <a:bodyPr/>
+                    <a:lstStyle/>
+                    <a:p>
+                      <a:pPr lvl="0" indent="0" marL="0">
+                        <a:buNone/>
+                      </a:pPr>
+                      <a:r>
+                        <a:rPr/>
+                        <a:t>242.32</a:t>
+                      </a:r>
+                    </a:p>
+                  </a:txBody>
+                </a:tc>
+              </a:tr>
+              <a:tr h="0">
+                <a:tc>
+                  <a:txBody>
+                    <a:bodyPr/>
+                    <a:lstStyle/>
+                    <a:p>
+                      <a:pPr lvl="0" indent="0" marL="0">
+                        <a:buNone/>
+                      </a:pPr>
+                      <a:r>
+                        <a:rPr/>
+                        <a:t>American hornbeam, musclewood</a:t>
+                      </a:r>
+                    </a:p>
+                  </a:txBody>
+                </a:tc>
+                <a:tc>
+                  <a:txBody>
+                    <a:bodyPr/>
+                    <a:lstStyle/>
+                    <a:p>
+                      <a:pPr lvl="0" indent="0" marL="0">
+                        <a:buNone/>
+                      </a:pPr>
+                      <a:r>
+                        <a:rPr/>
+                        <a:t>31.87</a:t>
+                      </a:r>
+                    </a:p>
+                  </a:txBody>
+                </a:tc>
+                <a:tc>
+                  <a:txBody>
+                    <a:bodyPr/>
+                    <a:lstStyle/>
+                    <a:p>
+                      <a:pPr lvl="0" indent="0" marL="0">
+                        <a:buNone/>
+                      </a:pPr>
+                      <a:r>
+                        <a:rPr/>
+                        <a:t>2.82</a:t>
+                      </a:r>
+                    </a:p>
+                  </a:txBody>
+                </a:tc>
+                <a:tc>
+                  <a:txBody>
+                    <a:bodyPr/>
+                    <a:lstStyle/>
+                    <a:p>
+                      <a:pPr lvl="0" indent="0" marL="0">
+                        <a:buNone/>
+                      </a:pPr>
+                      <a:r>
+                        <a:rPr/>
+                        <a:t>40.72</a:t>
+                      </a:r>
+                    </a:p>
+                  </a:txBody>
+                </a:tc>
+              </a:tr>
+              <a:tr h="0">
+                <a:tc>
+                  <a:txBody>
+                    <a:bodyPr/>
+                    <a:lstStyle/>
+                    <a:p>
+                      <a:pPr lvl="0" indent="0" marL="0">
+                        <a:buNone/>
+                      </a:pPr>
+                      <a:r>
+                        <a:rPr/>
+                        <a:t>American mountain-ash</a:t>
+                      </a:r>
+                    </a:p>
+                  </a:txBody>
+                </a:tc>
+                <a:tc>
+                  <a:txBody>
+                    <a:bodyPr/>
+                    <a:lstStyle/>
+                    <a:p>
+                      <a:pPr lvl="0" indent="0" marL="0">
+                        <a:buNone/>
+                      </a:pPr>
+                      <a:r>
+                        <a:rPr/>
+                        <a:t>32.59</a:t>
+                      </a:r>
+                    </a:p>
+                  </a:txBody>
+                </a:tc>
+                <a:tc>
+                  <a:txBody>
+                    <a:bodyPr/>
+                    <a:lstStyle/>
+                    <a:p>
+                      <a:pPr lvl="0" indent="0" marL="0">
+                        <a:buNone/>
+                      </a:pPr>
+                      <a:r>
+                        <a:rPr/>
+                        <a:t>5.53</a:t>
+                      </a:r>
+                    </a:p>
+                  </a:txBody>
+                </a:tc>
+                <a:tc>
+                  <a:txBody>
+                    <a:bodyPr/>
+                    <a:lstStyle/>
+                    <a:p>
+                      <a:pPr lvl="0" indent="0" marL="0">
+                        <a:buNone/>
+                      </a:pPr>
+                      <a:r>
+                        <a:rPr/>
+                        <a:t>114.80</a:t>
+                      </a:r>
+                    </a:p>
+                  </a:txBody>
+                </a:tc>
+              </a:tr>
+              <a:tr h="0">
+                <a:tc>
+                  <a:txBody>
+                    <a:bodyPr/>
+                    <a:lstStyle/>
+                    <a:p>
+                      <a:pPr lvl="0" indent="0" marL="0">
+                        <a:buNone/>
+                      </a:pPr>
+                      <a:r>
+                        <a:rPr/>
+                        <a:t>American sycamore</a:t>
+                      </a:r>
+                    </a:p>
+                  </a:txBody>
+                </a:tc>
+                <a:tc>
+                  <a:txBody>
+                    <a:bodyPr/>
+                    <a:lstStyle/>
+                    <a:p>
+                      <a:pPr lvl="0" indent="0" marL="0">
+                        <a:buNone/>
+                      </a:pPr>
+                      <a:r>
+                        <a:rPr/>
+                        <a:t>77.29</a:t>
+                      </a:r>
+                    </a:p>
+                  </a:txBody>
+                </a:tc>
+                <a:tc>
+                  <a:txBody>
+                    <a:bodyPr/>
+                    <a:lstStyle/>
+                    <a:p>
+                      <a:pPr lvl="0" indent="0" marL="0">
+                        <a:buNone/>
+                      </a:pPr>
+                      <a:r>
+                        <a:rPr/>
+                        <a:t>13.40</a:t>
+                      </a:r>
+                    </a:p>
+                  </a:txBody>
+                </a:tc>
+                <a:tc>
+                  <a:txBody>
+                    <a:bodyPr/>
+                    <a:lstStyle/>
+                    <a:p>
+                      <a:pPr lvl="0" indent="0" marL="0">
+                        <a:buNone/>
+                      </a:pPr>
+                      <a:r>
+                        <a:rPr/>
+                        <a:t>1383.72</a:t>
+                      </a:r>
+                    </a:p>
+                  </a:txBody>
+                </a:tc>
+              </a:tr>
+              <a:tr h="0">
+                <a:tc>
+                  <a:txBody>
+                    <a:bodyPr/>
+                    <a:lstStyle/>
+                    <a:p>
+                      <a:pPr lvl="0" indent="0" marL="0">
+                        <a:buNone/>
+                      </a:pPr>
+                      <a:r>
+                        <a:rPr/>
+                        <a:t>Atlantic white-cedar</a:t>
+                      </a:r>
+                    </a:p>
+                  </a:txBody>
+                </a:tc>
+                <a:tc>
+                  <a:txBody>
+                    <a:bodyPr/>
+                    <a:lstStyle/>
+                    <a:p>
+                      <a:pPr lvl="0" indent="0" marL="0">
+                        <a:buNone/>
+                      </a:pPr>
+                      <a:r>
+                        <a:rPr/>
+                        <a:t>51.62</a:t>
+                      </a:r>
+                    </a:p>
+                  </a:txBody>
+                </a:tc>
+                <a:tc>
+                  <a:txBody>
+                    <a:bodyPr/>
+                    <a:lstStyle/>
+                    <a:p>
+                      <a:pPr lvl="0" indent="0" marL="0">
+                        <a:buNone/>
+                      </a:pPr>
+                      <a:r>
+                        <a:rPr/>
+                        <a:t>8.90</a:t>
+                      </a:r>
+                    </a:p>
+                  </a:txBody>
+                </a:tc>
+                <a:tc>
+                  <a:txBody>
+                    <a:bodyPr/>
+                    <a:lstStyle/>
+                    <a:p>
+                      <a:pPr lvl="0" indent="0" marL="0">
+                        <a:buNone/>
+                      </a:pPr>
+                      <a:r>
+                        <a:rPr/>
+                        <a:t>352.23</a:t>
+                      </a:r>
+                    </a:p>
+                  </a:txBody>
+                </a:tc>
+              </a:tr>
+            </a:tbl>
+          </a:graphicData>
+        </a:graphic>
+      </p:graphicFrame>
     </p:spTree>
   </p:cSld>
 </p:sld>
@@ -3663,7 +8183,7 @@
             </a:pPr>
             <a:r>
               <a:rPr/>
-              <a:t>Additional Visualizations</a:t>
+              <a:t>Bivariate Visualizations</a:t>
             </a:r>
           </a:p>
         </p:txBody>
@@ -3684,8 +8204,8 @@
         </p:blipFill>
         <p:spPr bwMode="auto">
           <a:xfrm>
-            <a:off x="1295400" y="1193800"/>
-            <a:ext cx="6553200" cy="3390900"/>
+            <a:off x="1397000" y="1193800"/>
+            <a:ext cx="6350000" cy="3390900"/>
           </a:xfrm>
           <a:prstGeom prst="rect">
             <a:avLst/>
@@ -3740,11 +8260,41 @@
             </a:pPr>
             <a:r>
               <a:rPr/>
-              <a:t>Domain Expert 3 (Explain the inputs and settings for the best model)</a:t>
+              <a:t>Additional Visualizations</a:t>
             </a:r>
           </a:p>
         </p:txBody>
       </p:sp>
+      <p:pic>
+        <p:nvPicPr>
+          <p:cNvPr descr="presentation_files/figure-pptx/cell-7-output-1.png" id="0" name="Picture 1"/>
+          <p:cNvPicPr>
+            <a:picLocks noGrp="1" noChangeAspect="1"/>
+          </p:cNvPicPr>
+          <p:nvPr/>
+        </p:nvPicPr>
+        <p:blipFill>
+          <a:blip r:embed="rId2"/>
+          <a:stretch>
+            <a:fillRect/>
+          </a:stretch>
+        </p:blipFill>
+        <p:spPr bwMode="auto">
+          <a:xfrm>
+            <a:off x="1155700" y="1193800"/>
+            <a:ext cx="6832600" cy="3390900"/>
+          </a:xfrm>
+          <a:prstGeom prst="rect">
+            <a:avLst/>
+          </a:prstGeom>
+          <a:noFill/>
+          <a:ln w="9525">
+            <a:noFill/>
+            <a:headEnd/>
+            <a:tailEnd/>
+          </a:ln>
+        </p:spPr>
+      </p:pic>
     </p:spTree>
   </p:cSld>
 </p:sld>
@@ -3787,11 +8337,41 @@
             </a:pPr>
             <a:r>
               <a:rPr/>
-              <a:t>Project Manager</a:t>
+              <a:t>Visualization Containing all 4 Variables</a:t>
             </a:r>
           </a:p>
         </p:txBody>
       </p:sp>
+      <p:pic>
+        <p:nvPicPr>
+          <p:cNvPr descr="presentation_files/figure-pptx/cell-8-output-1.png" id="0" name="Picture 1"/>
+          <p:cNvPicPr>
+            <a:picLocks noGrp="1" noChangeAspect="1"/>
+          </p:cNvPicPr>
+          <p:nvPr/>
+        </p:nvPicPr>
+        <p:blipFill>
+          <a:blip r:embed="rId2"/>
+          <a:stretch>
+            <a:fillRect/>
+          </a:stretch>
+        </p:blipFill>
+        <p:spPr bwMode="auto">
+          <a:xfrm>
+            <a:off x="1435100" y="1193800"/>
+            <a:ext cx="6273800" cy="3390900"/>
+          </a:xfrm>
+          <a:prstGeom prst="rect">
+            <a:avLst/>
+          </a:prstGeom>
+          <a:noFill/>
+          <a:ln w="9525">
+            <a:noFill/>
+            <a:headEnd/>
+            <a:tailEnd/>
+          </a:ln>
+        </p:spPr>
+      </p:pic>
     </p:spTree>
   </p:cSld>
 </p:sld>

--- a/Project-3/presentation.pptx
+++ b/Project-3/presentation.pptx
@@ -22,6 +22,7 @@
     <p:sldId id="270" r:id="rId16"/>
     <p:sldId id="271" r:id="rId17"/>
     <p:sldId id="272" r:id="rId18"/>
+    <p:sldId id="273" r:id="rId19"/>
   </p:sldIdLst>
   <p:sldSz cx="9144000" cy="5143500" type="screen16x9"/>
   <p:notesSz cx="6858000" cy="9144000"/>
@@ -4737,12 +4738,31 @@
           <a:bodyPr/>
           <a:lstStyle/>
           <a:p>
-            <a:pPr lvl="0" indent="0" marL="0">
-              <a:buNone/>
-            </a:pPr>
+            <a:pPr lvl="0"/>
             <a:r>
               <a:rPr/>
-              <a:t>Tree Measurement Data:</a:t>
+              <a:t>Split and filtering methods</a:t>
+            </a:r>
+          </a:p>
+          <a:p>
+            <a:pPr lvl="0"/>
+            <a:r>
+              <a:rPr/>
+              <a:t>Feature engineering (what worked and what didn’t)</a:t>
+            </a:r>
+          </a:p>
+          <a:p>
+            <a:pPr lvl="0"/>
+            <a:r>
+              <a:rPr/>
+              <a:t>Tuning k for the best model</a:t>
+            </a:r>
+          </a:p>
+          <a:p>
+            <a:pPr lvl="0"/>
+            <a:r>
+              <a:rPr/>
+              <a:t>The final “best” model and error # Tree Measurement Data:</a:t>
             </a:r>
           </a:p>
         </p:txBody>
@@ -6231,6 +6251,637 @@
 </file>
 
 <file path=ppt/slides/slide17.xml><?xml version="1.0" encoding="utf-8"?>
+<p:sld xmlns:a="http://schemas.openxmlformats.org/drawingml/2006/main" xmlns:r="http://schemas.openxmlformats.org/officeDocument/2006/relationships" xmlns:p="http://schemas.openxmlformats.org/presentationml/2006/main">
+  <p:cSld>
+    <p:spTree>
+      <p:nvGrpSpPr>
+        <p:cNvPr id="1" name=""/>
+        <p:cNvGrpSpPr/>
+        <p:nvPr/>
+      </p:nvGrpSpPr>
+      <p:grpSpPr>
+        <a:xfrm>
+          <a:off x="0" y="0"/>
+          <a:ext cx="0" cy="0"/>
+          <a:chOff x="0" y="0"/>
+          <a:chExt cx="0" cy="0"/>
+        </a:xfrm>
+      </p:grpSpPr>
+      <p:sp>
+        <p:nvSpPr>
+          <p:cNvPr id="2" name="Title 1"/>
+          <p:cNvSpPr>
+            <a:spLocks noGrp="1"/>
+          </p:cNvSpPr>
+          <p:nvPr>
+            <p:ph type="title"/>
+          </p:nvPr>
+        </p:nvSpPr>
+        <p:spPr/>
+        <p:txBody>
+          <a:bodyPr/>
+          <a:lstStyle/>
+          <a:p>
+            <a:pPr lvl="0" indent="0" marL="0">
+              <a:buNone/>
+            </a:pPr>
+            <a:r>
+              <a:rPr/>
+              <a:t>Filtered data</a:t>
+            </a:r>
+          </a:p>
+        </p:txBody>
+      </p:sp>
+      <p:graphicFrame>
+        <p:nvGraphicFramePr>
+          <p:cNvPr id="6" name="Content Placeholder 5"/>
+          <p:cNvGraphicFramePr>
+            <a:graphicFrameLocks noGrp="1"/>
+          </p:cNvGraphicFramePr>
+          <p:nvPr>
+            <p:ph idx="1"/>
+          </p:nvPr>
+        </p:nvGraphicFramePr>
+        <p:xfrm>
+          <a:off x="457200" y="1193800"/>
+          <a:ext cx="8229600" cy="3390900"/>
+        </p:xfrm>
+        <a:graphic>
+          <a:graphicData uri="http://schemas.openxmlformats.org/drawingml/2006/table">
+            <a:tbl>
+              <a:tblPr firstRow="1" bandRow="1">
+                <a:tableStyleId>{5C22544A-7EE6-4342-B048-85BDC9FD1C3A}</a:tableStyleId>
+              </a:tblPr>
+              <a:tblGrid>
+                <a:gridCol w="1371600"/>
+                <a:gridCol w="1371600"/>
+                <a:gridCol w="1371600"/>
+                <a:gridCol w="1371600"/>
+                <a:gridCol w="1371600"/>
+                <a:gridCol w="1371600"/>
+              </a:tblGrid>
+              <a:tr h="0">
+                <a:tc>
+                  <a:txBody>
+                    <a:bodyPr/>
+                    <a:lstStyle/>
+                    <a:p>
+                      <a:endParaRPr/>
+                    </a:p>
+                  </a:txBody>
+                  <a:tcPr/>
+                </a:tc>
+                <a:tc>
+                  <a:txBody>
+                    <a:bodyPr/>
+                    <a:lstStyle/>
+                    <a:p>
+                      <a:pPr lvl="0" indent="0" marL="0">
+                        <a:buNone/>
+                      </a:pPr>
+                      <a:r>
+                        <a:rPr/>
+                        <a:t>SPCD</a:t>
+                      </a:r>
+                    </a:p>
+                  </a:txBody>
+                  <a:tcPr/>
+                </a:tc>
+                <a:tc>
+                  <a:txBody>
+                    <a:bodyPr/>
+                    <a:lstStyle/>
+                    <a:p>
+                      <a:pPr lvl="0" indent="0" marL="0">
+                        <a:buNone/>
+                      </a:pPr>
+                      <a:r>
+                        <a:rPr/>
+                        <a:t>DO_BH</a:t>
+                      </a:r>
+                    </a:p>
+                  </a:txBody>
+                  <a:tcPr/>
+                </a:tc>
+                <a:tc>
+                  <a:txBody>
+                    <a:bodyPr/>
+                    <a:lstStyle/>
+                    <a:p>
+                      <a:pPr lvl="0" indent="0" marL="0">
+                        <a:buNone/>
+                      </a:pPr>
+                      <a:r>
+                        <a:rPr/>
+                        <a:t>HT_TOT</a:t>
+                      </a:r>
+                    </a:p>
+                  </a:txBody>
+                  <a:tcPr/>
+                </a:tc>
+                <a:tc>
+                  <a:txBody>
+                    <a:bodyPr/>
+                    <a:lstStyle/>
+                    <a:p>
+                      <a:pPr lvl="0" indent="0" marL="0">
+                        <a:buNone/>
+                      </a:pPr>
+                      <a:r>
+                        <a:rPr/>
+                        <a:t>TT_DW_CRM</a:t>
+                      </a:r>
+                    </a:p>
+                  </a:txBody>
+                  <a:tcPr/>
+                </a:tc>
+                <a:tc>
+                  <a:txBody>
+                    <a:bodyPr/>
+                    <a:lstStyle/>
+                    <a:p>
+                      <a:pPr lvl="0" indent="0" marL="0">
+                        <a:buNone/>
+                      </a:pPr>
+                      <a:r>
+                        <a:rPr/>
+                        <a:t>COMMON_NAME</a:t>
+                      </a:r>
+                    </a:p>
+                  </a:txBody>
+                  <a:tcPr/>
+                </a:tc>
+              </a:tr>
+              <a:tr h="0">
+                <a:tc>
+                  <a:txBody>
+                    <a:bodyPr/>
+                    <a:lstStyle/>
+                    <a:p>
+                      <a:pPr lvl="0" indent="0" marL="0">
+                        <a:buNone/>
+                      </a:pPr>
+                      <a:r>
+                        <a:rPr/>
+                        <a:t>0</a:t>
+                      </a:r>
+                    </a:p>
+                  </a:txBody>
+                </a:tc>
+                <a:tc>
+                  <a:txBody>
+                    <a:bodyPr/>
+                    <a:lstStyle/>
+                    <a:p>
+                      <a:pPr lvl="0" indent="0" marL="0">
+                        <a:buNone/>
+                      </a:pPr>
+                      <a:r>
+                        <a:rPr/>
+                        <a:t>12</a:t>
+                      </a:r>
+                    </a:p>
+                  </a:txBody>
+                </a:tc>
+                <a:tc>
+                  <a:txBody>
+                    <a:bodyPr/>
+                    <a:lstStyle/>
+                    <a:p>
+                      <a:pPr lvl="0" indent="0" marL="0">
+                        <a:buNone/>
+                      </a:pPr>
+                      <a:r>
+                        <a:rPr/>
+                        <a:t>7.5</a:t>
+                      </a:r>
+                    </a:p>
+                  </a:txBody>
+                </a:tc>
+                <a:tc>
+                  <a:txBody>
+                    <a:bodyPr/>
+                    <a:lstStyle/>
+                    <a:p>
+                      <a:pPr lvl="0" indent="0" marL="0">
+                        <a:buNone/>
+                      </a:pPr>
+                      <a:r>
+                        <a:rPr/>
+                        <a:t>45.2</a:t>
+                      </a:r>
+                    </a:p>
+                  </a:txBody>
+                </a:tc>
+                <a:tc>
+                  <a:txBody>
+                    <a:bodyPr/>
+                    <a:lstStyle/>
+                    <a:p>
+                      <a:pPr lvl="0" indent="0" marL="0">
+                        <a:buNone/>
+                      </a:pPr>
+                      <a:r>
+                        <a:rPr/>
+                        <a:t>178.86</a:t>
+                      </a:r>
+                    </a:p>
+                  </a:txBody>
+                </a:tc>
+                <a:tc>
+                  <a:txBody>
+                    <a:bodyPr/>
+                    <a:lstStyle/>
+                    <a:p>
+                      <a:pPr lvl="0" indent="0" marL="0">
+                        <a:buNone/>
+                      </a:pPr>
+                      <a:r>
+                        <a:rPr/>
+                        <a:t>balsam fir</a:t>
+                      </a:r>
+                    </a:p>
+                  </a:txBody>
+                </a:tc>
+              </a:tr>
+              <a:tr h="0">
+                <a:tc>
+                  <a:txBody>
+                    <a:bodyPr/>
+                    <a:lstStyle/>
+                    <a:p>
+                      <a:pPr lvl="0" indent="0" marL="0">
+                        <a:buNone/>
+                      </a:pPr>
+                      <a:r>
+                        <a:rPr/>
+                        <a:t>1</a:t>
+                      </a:r>
+                    </a:p>
+                  </a:txBody>
+                </a:tc>
+                <a:tc>
+                  <a:txBody>
+                    <a:bodyPr/>
+                    <a:lstStyle/>
+                    <a:p>
+                      <a:pPr lvl="0" indent="0" marL="0">
+                        <a:buNone/>
+                      </a:pPr>
+                      <a:r>
+                        <a:rPr/>
+                        <a:t>12</a:t>
+                      </a:r>
+                    </a:p>
+                  </a:txBody>
+                </a:tc>
+                <a:tc>
+                  <a:txBody>
+                    <a:bodyPr/>
+                    <a:lstStyle/>
+                    <a:p>
+                      <a:pPr lvl="0" indent="0" marL="0">
+                        <a:buNone/>
+                      </a:pPr>
+                      <a:r>
+                        <a:rPr/>
+                        <a:t>9.3</a:t>
+                      </a:r>
+                    </a:p>
+                  </a:txBody>
+                </a:tc>
+                <a:tc>
+                  <a:txBody>
+                    <a:bodyPr/>
+                    <a:lstStyle/>
+                    <a:p>
+                      <a:pPr lvl="0" indent="0" marL="0">
+                        <a:buNone/>
+                      </a:pPr>
+                      <a:r>
+                        <a:rPr/>
+                        <a:t>62.7</a:t>
+                      </a:r>
+                    </a:p>
+                  </a:txBody>
+                </a:tc>
+                <a:tc>
+                  <a:txBody>
+                    <a:bodyPr/>
+                    <a:lstStyle/>
+                    <a:p>
+                      <a:pPr lvl="0" indent="0" marL="0">
+                        <a:buNone/>
+                      </a:pPr>
+                      <a:r>
+                        <a:rPr/>
+                        <a:t>323.46</a:t>
+                      </a:r>
+                    </a:p>
+                  </a:txBody>
+                </a:tc>
+                <a:tc>
+                  <a:txBody>
+                    <a:bodyPr/>
+                    <a:lstStyle/>
+                    <a:p>
+                      <a:pPr lvl="0" indent="0" marL="0">
+                        <a:buNone/>
+                      </a:pPr>
+                      <a:r>
+                        <a:rPr/>
+                        <a:t>balsam fir</a:t>
+                      </a:r>
+                    </a:p>
+                  </a:txBody>
+                </a:tc>
+              </a:tr>
+              <a:tr h="0">
+                <a:tc>
+                  <a:txBody>
+                    <a:bodyPr/>
+                    <a:lstStyle/>
+                    <a:p>
+                      <a:pPr lvl="0" indent="0" marL="0">
+                        <a:buNone/>
+                      </a:pPr>
+                      <a:r>
+                        <a:rPr/>
+                        <a:t>2</a:t>
+                      </a:r>
+                    </a:p>
+                  </a:txBody>
+                </a:tc>
+                <a:tc>
+                  <a:txBody>
+                    <a:bodyPr/>
+                    <a:lstStyle/>
+                    <a:p>
+                      <a:pPr lvl="0" indent="0" marL="0">
+                        <a:buNone/>
+                      </a:pPr>
+                      <a:r>
+                        <a:rPr/>
+                        <a:t>12</a:t>
+                      </a:r>
+                    </a:p>
+                  </a:txBody>
+                </a:tc>
+                <a:tc>
+                  <a:txBody>
+                    <a:bodyPr/>
+                    <a:lstStyle/>
+                    <a:p>
+                      <a:pPr lvl="0" indent="0" marL="0">
+                        <a:buNone/>
+                      </a:pPr>
+                      <a:r>
+                        <a:rPr/>
+                        <a:t>9.7</a:t>
+                      </a:r>
+                    </a:p>
+                  </a:txBody>
+                </a:tc>
+                <a:tc>
+                  <a:txBody>
+                    <a:bodyPr/>
+                    <a:lstStyle/>
+                    <a:p>
+                      <a:pPr lvl="0" indent="0" marL="0">
+                        <a:buNone/>
+                      </a:pPr>
+                      <a:r>
+                        <a:rPr/>
+                        <a:t>56.7</a:t>
+                      </a:r>
+                    </a:p>
+                  </a:txBody>
+                </a:tc>
+                <a:tc>
+                  <a:txBody>
+                    <a:bodyPr/>
+                    <a:lstStyle/>
+                    <a:p>
+                      <a:pPr lvl="0" indent="0" marL="0">
+                        <a:buNone/>
+                      </a:pPr>
+                      <a:r>
+                        <a:rPr/>
+                        <a:t>342.47</a:t>
+                      </a:r>
+                    </a:p>
+                  </a:txBody>
+                </a:tc>
+                <a:tc>
+                  <a:txBody>
+                    <a:bodyPr/>
+                    <a:lstStyle/>
+                    <a:p>
+                      <a:pPr lvl="0" indent="0" marL="0">
+                        <a:buNone/>
+                      </a:pPr>
+                      <a:r>
+                        <a:rPr/>
+                        <a:t>balsam fir</a:t>
+                      </a:r>
+                    </a:p>
+                  </a:txBody>
+                </a:tc>
+              </a:tr>
+              <a:tr h="0">
+                <a:tc>
+                  <a:txBody>
+                    <a:bodyPr/>
+                    <a:lstStyle/>
+                    <a:p>
+                      <a:pPr lvl="0" indent="0" marL="0">
+                        <a:buNone/>
+                      </a:pPr>
+                      <a:r>
+                        <a:rPr/>
+                        <a:t>3</a:t>
+                      </a:r>
+                    </a:p>
+                  </a:txBody>
+                </a:tc>
+                <a:tc>
+                  <a:txBody>
+                    <a:bodyPr/>
+                    <a:lstStyle/>
+                    <a:p>
+                      <a:pPr lvl="0" indent="0" marL="0">
+                        <a:buNone/>
+                      </a:pPr>
+                      <a:r>
+                        <a:rPr/>
+                        <a:t>12</a:t>
+                      </a:r>
+                    </a:p>
+                  </a:txBody>
+                </a:tc>
+                <a:tc>
+                  <a:txBody>
+                    <a:bodyPr/>
+                    <a:lstStyle/>
+                    <a:p>
+                      <a:pPr lvl="0" indent="0" marL="0">
+                        <a:buNone/>
+                      </a:pPr>
+                      <a:r>
+                        <a:rPr/>
+                        <a:t>11.4</a:t>
+                      </a:r>
+                    </a:p>
+                  </a:txBody>
+                </a:tc>
+                <a:tc>
+                  <a:txBody>
+                    <a:bodyPr/>
+                    <a:lstStyle/>
+                    <a:p>
+                      <a:pPr lvl="0" indent="0" marL="0">
+                        <a:buNone/>
+                      </a:pPr>
+                      <a:r>
+                        <a:rPr/>
+                        <a:t>66.1</a:t>
+                      </a:r>
+                    </a:p>
+                  </a:txBody>
+                </a:tc>
+                <a:tc>
+                  <a:txBody>
+                    <a:bodyPr/>
+                    <a:lstStyle/>
+                    <a:p>
+                      <a:pPr lvl="0" indent="0" marL="0">
+                        <a:buNone/>
+                      </a:pPr>
+                      <a:r>
+                        <a:rPr/>
+                        <a:t>499.35</a:t>
+                      </a:r>
+                    </a:p>
+                  </a:txBody>
+                </a:tc>
+                <a:tc>
+                  <a:txBody>
+                    <a:bodyPr/>
+                    <a:lstStyle/>
+                    <a:p>
+                      <a:pPr lvl="0" indent="0" marL="0">
+                        <a:buNone/>
+                      </a:pPr>
+                      <a:r>
+                        <a:rPr/>
+                        <a:t>balsam fir</a:t>
+                      </a:r>
+                    </a:p>
+                  </a:txBody>
+                </a:tc>
+              </a:tr>
+              <a:tr h="0">
+                <a:tc>
+                  <a:txBody>
+                    <a:bodyPr/>
+                    <a:lstStyle/>
+                    <a:p>
+                      <a:pPr lvl="0" indent="0" marL="0">
+                        <a:buNone/>
+                      </a:pPr>
+                      <a:r>
+                        <a:rPr/>
+                        <a:t>4</a:t>
+                      </a:r>
+                    </a:p>
+                  </a:txBody>
+                </a:tc>
+                <a:tc>
+                  <a:txBody>
+                    <a:bodyPr/>
+                    <a:lstStyle/>
+                    <a:p>
+                      <a:pPr lvl="0" indent="0" marL="0">
+                        <a:buNone/>
+                      </a:pPr>
+                      <a:r>
+                        <a:rPr/>
+                        <a:t>12</a:t>
+                      </a:r>
+                    </a:p>
+                  </a:txBody>
+                </a:tc>
+                <a:tc>
+                  <a:txBody>
+                    <a:bodyPr/>
+                    <a:lstStyle/>
+                    <a:p>
+                      <a:pPr lvl="0" indent="0" marL="0">
+                        <a:buNone/>
+                      </a:pPr>
+                      <a:r>
+                        <a:rPr/>
+                        <a:t>6.4</a:t>
+                      </a:r>
+                    </a:p>
+                  </a:txBody>
+                </a:tc>
+                <a:tc>
+                  <a:txBody>
+                    <a:bodyPr/>
+                    <a:lstStyle/>
+                    <a:p>
+                      <a:pPr lvl="0" indent="0" marL="0">
+                        <a:buNone/>
+                      </a:pPr>
+                      <a:r>
+                        <a:rPr/>
+                        <a:t>51.8</a:t>
+                      </a:r>
+                    </a:p>
+                  </a:txBody>
+                </a:tc>
+                <a:tc>
+                  <a:txBody>
+                    <a:bodyPr/>
+                    <a:lstStyle/>
+                    <a:p>
+                      <a:pPr lvl="0" indent="0" marL="0">
+                        <a:buNone/>
+                      </a:pPr>
+                      <a:r>
+                        <a:rPr/>
+                        <a:t>113.92</a:t>
+                      </a:r>
+                    </a:p>
+                  </a:txBody>
+                </a:tc>
+                <a:tc>
+                  <a:txBody>
+                    <a:bodyPr/>
+                    <a:lstStyle/>
+                    <a:p>
+                      <a:pPr lvl="0" indent="0" marL="0">
+                        <a:buNone/>
+                      </a:pPr>
+                      <a:r>
+                        <a:rPr/>
+                        <a:t>balsam fir</a:t>
+                      </a:r>
+                    </a:p>
+                  </a:txBody>
+                </a:tc>
+              </a:tr>
+            </a:tbl>
+          </a:graphicData>
+        </a:graphic>
+      </p:graphicFrame>
+    </p:spTree>
+  </p:cSld>
+</p:sld>
+</file>
+
+<file path=ppt/slides/slide18.xml><?xml version="1.0" encoding="utf-8"?>
 <p:sld xmlns:a="http://schemas.openxmlformats.org/drawingml/2006/main" xmlns:r="http://schemas.openxmlformats.org/officeDocument/2006/relationships" xmlns:p="http://schemas.openxmlformats.org/presentationml/2006/main">
   <p:cSld>
     <p:spTree>

--- a/Project-3/presentation.pptx
+++ b/Project-3/presentation.pptx
@@ -22,6 +22,8 @@
     <p:sldId id="270" r:id="rId16"/>
     <p:sldId id="271" r:id="rId17"/>
     <p:sldId id="272" r:id="rId18"/>
+    <p:sldId id="273" r:id="rId19"/>
+    <p:sldId id="274" r:id="rId20"/>
   </p:sldIdLst>
   <p:sldSz cx="9144000" cy="5143500" type="screen16x9"/>
   <p:notesSz cx="6858000" cy="9144000"/>
@@ -3457,7 +3459,7 @@
             </a:pPr>
             <a:r>
               <a:rPr/>
-              <a:t>Performance Metric</a:t>
+              <a:t>Insights</a:t>
             </a:r>
           </a:p>
         </p:txBody>
@@ -3477,12 +3479,17 @@
           <a:bodyPr/>
           <a:lstStyle/>
           <a:p>
-            <a:pPr lvl="0" indent="0" marL="0">
-              <a:buNone/>
-            </a:pPr>
+            <a:pPr lvl="0"/>
             <a:r>
               <a:rPr/>
-              <a:t>The Performance metric we choose is Root Mean Square Logarithmic Error(RMSLE), because when we were looking at the dataset of the biomass of different kinds of tree species, we saw that some species have more data than other species so the assume that the data is skewed</a:t>
+              <a:t>When predicting tree biomass, employ the performance metric root mean square logarithmic error since biomass data varies greatly, ranging from tiny saplings to enormous unc trees, some trees having exponential growth.</a:t>
+            </a:r>
+          </a:p>
+          <a:p>
+            <a:pPr lvl="0"/>
+            <a:r>
+              <a:rPr/>
+              <a:t>We chose kNN regression over linear regression because, according to science, most UNC trees grow exponentially, which makes us think that kNN regression would be more accurate than linear regression.</a:t>
             </a:r>
           </a:p>
         </p:txBody>
@@ -3529,1147 +3536,45 @@
             </a:pPr>
             <a:r>
               <a:rPr/>
-              <a:t>Model</a:t>
+              <a:t>Performance Metric</a:t>
             </a:r>
           </a:p>
         </p:txBody>
       </p:sp>
-      <p:graphicFrame>
-        <p:nvGraphicFramePr>
-          <p:cNvPr id="6" name="Content Placeholder 5"/>
-          <p:cNvGraphicFramePr>
-            <a:graphicFrameLocks noGrp="1"/>
-          </p:cNvGraphicFramePr>
+      <p:sp>
+        <p:nvSpPr>
+          <p:cNvPr id="3" name="Content Placeholder 2"/>
+          <p:cNvSpPr>
+            <a:spLocks noGrp="1"/>
+          </p:cNvSpPr>
           <p:nvPr>
             <p:ph idx="1"/>
           </p:nvPr>
-        </p:nvGraphicFramePr>
-        <p:xfrm>
-          <a:off x="457200" y="1193800"/>
-          <a:ext cx="8229600" cy="3390900"/>
-        </p:xfrm>
-        <a:graphic>
-          <a:graphicData uri="http://schemas.openxmlformats.org/drawingml/2006/table">
-            <a:tbl>
-              <a:tblPr firstRow="1" bandRow="1">
-                <a:tableStyleId>{5C22544A-7EE6-4342-B048-85BDC9FD1C3A}</a:tableStyleId>
-              </a:tblPr>
-              <a:tblGrid>
-                <a:gridCol w="1371600"/>
-                <a:gridCol w="1371600"/>
-                <a:gridCol w="1371600"/>
-                <a:gridCol w="1371600"/>
-                <a:gridCol w="1371600"/>
-                <a:gridCol w="1371600"/>
-              </a:tblGrid>
-              <a:tr h="0">
-                <a:tc>
-                  <a:txBody>
-                    <a:bodyPr/>
-                    <a:lstStyle/>
-                    <a:p>
-                      <a:endParaRPr/>
-                    </a:p>
-                  </a:txBody>
-                  <a:tcPr/>
-                </a:tc>
-                <a:tc>
-                  <a:txBody>
-                    <a:bodyPr/>
-                    <a:lstStyle/>
-                    <a:p>
-                      <a:pPr lvl="0" indent="0" marL="0">
-                        <a:buNone/>
-                      </a:pPr>
-                      <a:r>
-                        <a:rPr/>
-                        <a:t>Species</a:t>
-                      </a:r>
-                    </a:p>
-                  </a:txBody>
-                  <a:tcPr/>
-                </a:tc>
-                <a:tc>
-                  <a:txBody>
-                    <a:bodyPr/>
-                    <a:lstStyle/>
-                    <a:p>
-                      <a:pPr lvl="0" indent="0" marL="0">
-                        <a:buNone/>
-                      </a:pPr>
-                      <a:r>
-                        <a:rPr/>
-                        <a:t>k</a:t>
-                      </a:r>
-                    </a:p>
-                  </a:txBody>
-                  <a:tcPr/>
-                </a:tc>
-                <a:tc>
-                  <a:txBody>
-                    <a:bodyPr/>
-                    <a:lstStyle/>
-                    <a:p>
-                      <a:pPr lvl="0" indent="0" marL="0">
-                        <a:buNone/>
-                      </a:pPr>
-                      <a:r>
-                        <a:rPr/>
-                        <a:t>RMSE</a:t>
-                      </a:r>
-                    </a:p>
-                  </a:txBody>
-                  <a:tcPr/>
-                </a:tc>
-                <a:tc>
-                  <a:txBody>
-                    <a:bodyPr/>
-                    <a:lstStyle/>
-                    <a:p>
-                      <a:pPr lvl="0" indent="0" marL="0">
-                        <a:buNone/>
-                      </a:pPr>
-                      <a:r>
-                        <a:rPr/>
-                        <a:t>MAE</a:t>
-                      </a:r>
-                    </a:p>
-                  </a:txBody>
-                  <a:tcPr/>
-                </a:tc>
-                <a:tc>
-                  <a:txBody>
-                    <a:bodyPr/>
-                    <a:lstStyle/>
-                    <a:p>
-                      <a:pPr lvl="0" indent="0" marL="0">
-                        <a:buNone/>
-                      </a:pPr>
-                      <a:r>
-                        <a:rPr/>
-                        <a:t>RMSLE</a:t>
-                      </a:r>
-                    </a:p>
-                  </a:txBody>
-                  <a:tcPr/>
-                </a:tc>
-              </a:tr>
-              <a:tr h="0">
-                <a:tc>
-                  <a:txBody>
-                    <a:bodyPr/>
-                    <a:lstStyle/>
-                    <a:p>
-                      <a:pPr lvl="0" indent="0" marL="0">
-                        <a:buNone/>
-                      </a:pPr>
-                      <a:r>
-                        <a:rPr/>
-                        <a:t>0</a:t>
-                      </a:r>
-                    </a:p>
-                  </a:txBody>
-                </a:tc>
-                <a:tc>
-                  <a:txBody>
-                    <a:bodyPr/>
-                    <a:lstStyle/>
-                    <a:p>
-                      <a:pPr lvl="0" indent="0" marL="0">
-                        <a:buNone/>
-                      </a:pPr>
-                      <a:r>
-                        <a:rPr/>
-                        <a:t>balsam fir</a:t>
-                      </a:r>
-                    </a:p>
-                  </a:txBody>
-                </a:tc>
-                <a:tc>
-                  <a:txBody>
-                    <a:bodyPr/>
-                    <a:lstStyle/>
-                    <a:p>
-                      <a:pPr lvl="0" indent="0" marL="0">
-                        <a:buNone/>
-                      </a:pPr>
-                      <a:r>
-                        <a:rPr/>
-                        <a:t>2</a:t>
-                      </a:r>
-                    </a:p>
-                  </a:txBody>
-                </a:tc>
-                <a:tc>
-                  <a:txBody>
-                    <a:bodyPr/>
-                    <a:lstStyle/>
-                    <a:p>
-                      <a:pPr lvl="0" indent="0" marL="0">
-                        <a:buNone/>
-                      </a:pPr>
-                      <a:r>
-                        <a:rPr/>
-                        <a:t>125.825473</a:t>
-                      </a:r>
-                    </a:p>
-                  </a:txBody>
-                </a:tc>
-                <a:tc>
-                  <a:txBody>
-                    <a:bodyPr/>
-                    <a:lstStyle/>
-                    <a:p>
-                      <a:pPr lvl="0" indent="0" marL="0">
-                        <a:buNone/>
-                      </a:pPr>
-                      <a:r>
-                        <a:rPr/>
-                        <a:t>34.801913</a:t>
-                      </a:r>
-                    </a:p>
-                  </a:txBody>
-                </a:tc>
-                <a:tc>
-                  <a:txBody>
-                    <a:bodyPr/>
-                    <a:lstStyle/>
-                    <a:p>
-                      <a:pPr lvl="0" indent="0" marL="0">
-                        <a:buNone/>
-                      </a:pPr>
-                      <a:r>
-                        <a:rPr/>
-                        <a:t>0.119574</a:t>
-                      </a:r>
-                    </a:p>
-                  </a:txBody>
-                </a:tc>
-              </a:tr>
-              <a:tr h="0">
-                <a:tc>
-                  <a:txBody>
-                    <a:bodyPr/>
-                    <a:lstStyle/>
-                    <a:p>
-                      <a:pPr lvl="0" indent="0" marL="0">
-                        <a:buNone/>
-                      </a:pPr>
-                      <a:r>
-                        <a:rPr/>
-                        <a:t>1</a:t>
-                      </a:r>
-                    </a:p>
-                  </a:txBody>
-                </a:tc>
-                <a:tc>
-                  <a:txBody>
-                    <a:bodyPr/>
-                    <a:lstStyle/>
-                    <a:p>
-                      <a:pPr lvl="0" indent="0" marL="0">
-                        <a:buNone/>
-                      </a:pPr>
-                      <a:r>
-                        <a:rPr/>
-                        <a:t>balsam fir</a:t>
-                      </a:r>
-                    </a:p>
-                  </a:txBody>
-                </a:tc>
-                <a:tc>
-                  <a:txBody>
-                    <a:bodyPr/>
-                    <a:lstStyle/>
-                    <a:p>
-                      <a:pPr lvl="0" indent="0" marL="0">
-                        <a:buNone/>
-                      </a:pPr>
-                      <a:r>
-                        <a:rPr/>
-                        <a:t>3</a:t>
-                      </a:r>
-                    </a:p>
-                  </a:txBody>
-                </a:tc>
-                <a:tc>
-                  <a:txBody>
-                    <a:bodyPr/>
-                    <a:lstStyle/>
-                    <a:p>
-                      <a:pPr lvl="0" indent="0" marL="0">
-                        <a:buNone/>
-                      </a:pPr>
-                      <a:r>
-                        <a:rPr/>
-                        <a:t>129.651479</a:t>
-                      </a:r>
-                    </a:p>
-                  </a:txBody>
-                </a:tc>
-                <a:tc>
-                  <a:txBody>
-                    <a:bodyPr/>
-                    <a:lstStyle/>
-                    <a:p>
-                      <a:pPr lvl="0" indent="0" marL="0">
-                        <a:buNone/>
-                      </a:pPr>
-                      <a:r>
-                        <a:rPr/>
-                        <a:t>36.646493</a:t>
-                      </a:r>
-                    </a:p>
-                  </a:txBody>
-                </a:tc>
-                <a:tc>
-                  <a:txBody>
-                    <a:bodyPr/>
-                    <a:lstStyle/>
-                    <a:p>
-                      <a:pPr lvl="0" indent="0" marL="0">
-                        <a:buNone/>
-                      </a:pPr>
-                      <a:r>
-                        <a:rPr/>
-                        <a:t>0.123724</a:t>
-                      </a:r>
-                    </a:p>
-                  </a:txBody>
-                </a:tc>
-              </a:tr>
-              <a:tr h="0">
-                <a:tc>
-                  <a:txBody>
-                    <a:bodyPr/>
-                    <a:lstStyle/>
-                    <a:p>
-                      <a:pPr lvl="0" indent="0" marL="0">
-                        <a:buNone/>
-                      </a:pPr>
-                      <a:r>
-                        <a:rPr/>
-                        <a:t>2</a:t>
-                      </a:r>
-                    </a:p>
-                  </a:txBody>
-                </a:tc>
-                <a:tc>
-                  <a:txBody>
-                    <a:bodyPr/>
-                    <a:lstStyle/>
-                    <a:p>
-                      <a:pPr lvl="0" indent="0" marL="0">
-                        <a:buNone/>
-                      </a:pPr>
-                      <a:r>
-                        <a:rPr/>
-                        <a:t>balsam fir</a:t>
-                      </a:r>
-                    </a:p>
-                  </a:txBody>
-                </a:tc>
-                <a:tc>
-                  <a:txBody>
-                    <a:bodyPr/>
-                    <a:lstStyle/>
-                    <a:p>
-                      <a:pPr lvl="0" indent="0" marL="0">
-                        <a:buNone/>
-                      </a:pPr>
-                      <a:r>
-                        <a:rPr/>
-                        <a:t>4</a:t>
-                      </a:r>
-                    </a:p>
-                  </a:txBody>
-                </a:tc>
-                <a:tc>
-                  <a:txBody>
-                    <a:bodyPr/>
-                    <a:lstStyle/>
-                    <a:p>
-                      <a:pPr lvl="0" indent="0" marL="0">
-                        <a:buNone/>
-                      </a:pPr>
-                      <a:r>
-                        <a:rPr/>
-                        <a:t>134.599829</a:t>
-                      </a:r>
-                    </a:p>
-                  </a:txBody>
-                </a:tc>
-                <a:tc>
-                  <a:txBody>
-                    <a:bodyPr/>
-                    <a:lstStyle/>
-                    <a:p>
-                      <a:pPr lvl="0" indent="0" marL="0">
-                        <a:buNone/>
-                      </a:pPr>
-                      <a:r>
-                        <a:rPr/>
-                        <a:t>38.884870</a:t>
-                      </a:r>
-                    </a:p>
-                  </a:txBody>
-                </a:tc>
-                <a:tc>
-                  <a:txBody>
-                    <a:bodyPr/>
-                    <a:lstStyle/>
-                    <a:p>
-                      <a:pPr lvl="0" indent="0" marL="0">
-                        <a:buNone/>
-                      </a:pPr>
-                      <a:r>
-                        <a:rPr/>
-                        <a:t>0.133858</a:t>
-                      </a:r>
-                    </a:p>
-                  </a:txBody>
-                </a:tc>
-              </a:tr>
-              <a:tr h="0">
-                <a:tc>
-                  <a:txBody>
-                    <a:bodyPr/>
-                    <a:lstStyle/>
-                    <a:p>
-                      <a:pPr lvl="0" indent="0" marL="0">
-                        <a:buNone/>
-                      </a:pPr>
-                      <a:r>
-                        <a:rPr/>
-                        <a:t>3</a:t>
-                      </a:r>
-                    </a:p>
-                  </a:txBody>
-                </a:tc>
-                <a:tc>
-                  <a:txBody>
-                    <a:bodyPr/>
-                    <a:lstStyle/>
-                    <a:p>
-                      <a:pPr lvl="0" indent="0" marL="0">
-                        <a:buNone/>
-                      </a:pPr>
-                      <a:r>
-                        <a:rPr/>
-                        <a:t>balsam fir</a:t>
-                      </a:r>
-                    </a:p>
-                  </a:txBody>
-                </a:tc>
-                <a:tc>
-                  <a:txBody>
-                    <a:bodyPr/>
-                    <a:lstStyle/>
-                    <a:p>
-                      <a:pPr lvl="0" indent="0" marL="0">
-                        <a:buNone/>
-                      </a:pPr>
-                      <a:r>
-                        <a:rPr/>
-                        <a:t>5</a:t>
-                      </a:r>
-                    </a:p>
-                  </a:txBody>
-                </a:tc>
-                <a:tc>
-                  <a:txBody>
-                    <a:bodyPr/>
-                    <a:lstStyle/>
-                    <a:p>
-                      <a:pPr lvl="0" indent="0" marL="0">
-                        <a:buNone/>
-                      </a:pPr>
-                      <a:r>
-                        <a:rPr/>
-                        <a:t>145.003601</a:t>
-                      </a:r>
-                    </a:p>
-                  </a:txBody>
-                </a:tc>
-                <a:tc>
-                  <a:txBody>
-                    <a:bodyPr/>
-                    <a:lstStyle/>
-                    <a:p>
-                      <a:pPr lvl="0" indent="0" marL="0">
-                        <a:buNone/>
-                      </a:pPr>
-                      <a:r>
-                        <a:rPr/>
-                        <a:t>41.209530</a:t>
-                      </a:r>
-                    </a:p>
-                  </a:txBody>
-                </a:tc>
-                <a:tc>
-                  <a:txBody>
-                    <a:bodyPr/>
-                    <a:lstStyle/>
-                    <a:p>
-                      <a:pPr lvl="0" indent="0" marL="0">
-                        <a:buNone/>
-                      </a:pPr>
-                      <a:r>
-                        <a:rPr/>
-                        <a:t>0.144063</a:t>
-                      </a:r>
-                    </a:p>
-                  </a:txBody>
-                </a:tc>
-              </a:tr>
-              <a:tr h="0">
-                <a:tc>
-                  <a:txBody>
-                    <a:bodyPr/>
-                    <a:lstStyle/>
-                    <a:p>
-                      <a:pPr lvl="0" indent="0" marL="0">
-                        <a:buNone/>
-                      </a:pPr>
-                      <a:r>
-                        <a:rPr/>
-                        <a:t>4</a:t>
-                      </a:r>
-                    </a:p>
-                  </a:txBody>
-                </a:tc>
-                <a:tc>
-                  <a:txBody>
-                    <a:bodyPr/>
-                    <a:lstStyle/>
-                    <a:p>
-                      <a:pPr lvl="0" indent="0" marL="0">
-                        <a:buNone/>
-                      </a:pPr>
-                      <a:r>
-                        <a:rPr/>
-                        <a:t>balsam fir</a:t>
-                      </a:r>
-                    </a:p>
-                  </a:txBody>
-                </a:tc>
-                <a:tc>
-                  <a:txBody>
-                    <a:bodyPr/>
-                    <a:lstStyle/>
-                    <a:p>
-                      <a:pPr lvl="0" indent="0" marL="0">
-                        <a:buNone/>
-                      </a:pPr>
-                      <a:r>
-                        <a:rPr/>
-                        <a:t>6</a:t>
-                      </a:r>
-                    </a:p>
-                  </a:txBody>
-                </a:tc>
-                <a:tc>
-                  <a:txBody>
-                    <a:bodyPr/>
-                    <a:lstStyle/>
-                    <a:p>
-                      <a:pPr lvl="0" indent="0" marL="0">
-                        <a:buNone/>
-                      </a:pPr>
-                      <a:r>
-                        <a:rPr/>
-                        <a:t>147.451321</a:t>
-                      </a:r>
-                    </a:p>
-                  </a:txBody>
-                </a:tc>
-                <a:tc>
-                  <a:txBody>
-                    <a:bodyPr/>
-                    <a:lstStyle/>
-                    <a:p>
-                      <a:pPr lvl="0" indent="0" marL="0">
-                        <a:buNone/>
-                      </a:pPr>
-                      <a:r>
-                        <a:rPr/>
-                        <a:t>40.791681</a:t>
-                      </a:r>
-                    </a:p>
-                  </a:txBody>
-                </a:tc>
-                <a:tc>
-                  <a:txBody>
-                    <a:bodyPr/>
-                    <a:lstStyle/>
-                    <a:p>
-                      <a:pPr lvl="0" indent="0" marL="0">
-                        <a:buNone/>
-                      </a:pPr>
-                      <a:r>
-                        <a:rPr/>
-                        <a:t>0.142862</a:t>
-                      </a:r>
-                    </a:p>
-                  </a:txBody>
-                </a:tc>
-              </a:tr>
-              <a:tr h="0">
-                <a:tc>
-                  <a:txBody>
-                    <a:bodyPr/>
-                    <a:lstStyle/>
-                    <a:p>
-                      <a:pPr lvl="0" indent="0" marL="0">
-                        <a:buNone/>
-                      </a:pPr>
-                      <a:r>
-                        <a:rPr/>
-                        <a:t>...</a:t>
-                      </a:r>
-                    </a:p>
-                  </a:txBody>
-                </a:tc>
-                <a:tc>
-                  <a:txBody>
-                    <a:bodyPr/>
-                    <a:lstStyle/>
-                    <a:p>
-                      <a:pPr lvl="0" indent="0" marL="0">
-                        <a:buNone/>
-                      </a:pPr>
-                      <a:r>
-                        <a:rPr/>
-                        <a:t>...</a:t>
-                      </a:r>
-                    </a:p>
-                  </a:txBody>
-                </a:tc>
-                <a:tc>
-                  <a:txBody>
-                    <a:bodyPr/>
-                    <a:lstStyle/>
-                    <a:p>
-                      <a:pPr lvl="0" indent="0" marL="0">
-                        <a:buNone/>
-                      </a:pPr>
-                      <a:r>
-                        <a:rPr/>
-                        <a:t>...</a:t>
-                      </a:r>
-                    </a:p>
-                  </a:txBody>
-                </a:tc>
-                <a:tc>
-                  <a:txBody>
-                    <a:bodyPr/>
-                    <a:lstStyle/>
-                    <a:p>
-                      <a:pPr lvl="0" indent="0" marL="0">
-                        <a:buNone/>
-                      </a:pPr>
-                      <a:r>
-                        <a:rPr/>
-                        <a:t>...</a:t>
-                      </a:r>
-                    </a:p>
-                  </a:txBody>
-                </a:tc>
-                <a:tc>
-                  <a:txBody>
-                    <a:bodyPr/>
-                    <a:lstStyle/>
-                    <a:p>
-                      <a:pPr lvl="0" indent="0" marL="0">
-                        <a:buNone/>
-                      </a:pPr>
-                      <a:r>
-                        <a:rPr/>
-                        <a:t>...</a:t>
-                      </a:r>
-                    </a:p>
-                  </a:txBody>
-                </a:tc>
-                <a:tc>
-                  <a:txBody>
-                    <a:bodyPr/>
-                    <a:lstStyle/>
-                    <a:p>
-                      <a:pPr lvl="0" indent="0" marL="0">
-                        <a:buNone/>
-                      </a:pPr>
-                      <a:r>
-                        <a:rPr/>
-                        <a:t>...</a:t>
-                      </a:r>
-                    </a:p>
-                  </a:txBody>
-                </a:tc>
-              </a:tr>
-              <a:tr h="0">
-                <a:tc>
-                  <a:txBody>
-                    <a:bodyPr/>
-                    <a:lstStyle/>
-                    <a:p>
-                      <a:pPr lvl="0" indent="0" marL="0">
-                        <a:buNone/>
-                      </a:pPr>
-                      <a:r>
-                        <a:rPr/>
-                        <a:t>895</a:t>
-                      </a:r>
-                    </a:p>
-                  </a:txBody>
-                </a:tc>
-                <a:tc>
-                  <a:txBody>
-                    <a:bodyPr/>
-                    <a:lstStyle/>
-                    <a:p>
-                      <a:pPr lvl="0" indent="0" marL="0">
-                        <a:buNone/>
-                      </a:pPr>
-                      <a:r>
-                        <a:rPr/>
-                        <a:t>sugarberry</a:t>
-                      </a:r>
-                    </a:p>
-                  </a:txBody>
-                </a:tc>
-                <a:tc>
-                  <a:txBody>
-                    <a:bodyPr/>
-                    <a:lstStyle/>
-                    <a:p>
-                      <a:pPr lvl="0" indent="0" marL="0">
-                        <a:buNone/>
-                      </a:pPr>
-                      <a:r>
-                        <a:rPr/>
-                        <a:t>6</a:t>
-                      </a:r>
-                    </a:p>
-                  </a:txBody>
-                </a:tc>
-                <a:tc>
-                  <a:txBody>
-                    <a:bodyPr/>
-                    <a:lstStyle/>
-                    <a:p>
-                      <a:pPr lvl="0" indent="0" marL="0">
-                        <a:buNone/>
-                      </a:pPr>
-                      <a:r>
-                        <a:rPr/>
-                        <a:t>32.431052</a:t>
-                      </a:r>
-                    </a:p>
-                  </a:txBody>
-                </a:tc>
-                <a:tc>
-                  <a:txBody>
-                    <a:bodyPr/>
-                    <a:lstStyle/>
-                    <a:p>
-                      <a:pPr lvl="0" indent="0" marL="0">
-                        <a:buNone/>
-                      </a:pPr>
-                      <a:r>
-                        <a:rPr/>
-                        <a:t>20.969306</a:t>
-                      </a:r>
-                    </a:p>
-                  </a:txBody>
-                </a:tc>
-                <a:tc>
-                  <a:txBody>
-                    <a:bodyPr/>
-                    <a:lstStyle/>
-                    <a:p>
-                      <a:pPr lvl="0" indent="0" marL="0">
-                        <a:buNone/>
-                      </a:pPr>
-                      <a:r>
-                        <a:rPr/>
-                        <a:t>0.565727</a:t>
-                      </a:r>
-                    </a:p>
-                  </a:txBody>
-                </a:tc>
-              </a:tr>
-              <a:tr h="0">
-                <a:tc>
-                  <a:txBody>
-                    <a:bodyPr/>
-                    <a:lstStyle/>
-                    <a:p>
-                      <a:pPr lvl="0" indent="0" marL="0">
-                        <a:buNone/>
-                      </a:pPr>
-                      <a:r>
-                        <a:rPr/>
-                        <a:t>896</a:t>
-                      </a:r>
-                    </a:p>
-                  </a:txBody>
-                </a:tc>
-                <a:tc>
-                  <a:txBody>
-                    <a:bodyPr/>
-                    <a:lstStyle/>
-                    <a:p>
-                      <a:pPr lvl="0" indent="0" marL="0">
-                        <a:buNone/>
-                      </a:pPr>
-                      <a:r>
-                        <a:rPr/>
-                        <a:t>sugarberry</a:t>
-                      </a:r>
-                    </a:p>
-                  </a:txBody>
-                </a:tc>
-                <a:tc>
-                  <a:txBody>
-                    <a:bodyPr/>
-                    <a:lstStyle/>
-                    <a:p>
-                      <a:pPr lvl="0" indent="0" marL="0">
-                        <a:buNone/>
-                      </a:pPr>
-                      <a:r>
-                        <a:rPr/>
-                        <a:t>7</a:t>
-                      </a:r>
-                    </a:p>
-                  </a:txBody>
-                </a:tc>
-                <a:tc>
-                  <a:txBody>
-                    <a:bodyPr/>
-                    <a:lstStyle/>
-                    <a:p>
-                      <a:pPr lvl="0" indent="0" marL="0">
-                        <a:buNone/>
-                      </a:pPr>
-                      <a:r>
-                        <a:rPr/>
-                        <a:t>37.324259</a:t>
-                      </a:r>
-                    </a:p>
-                  </a:txBody>
-                </a:tc>
-                <a:tc>
-                  <a:txBody>
-                    <a:bodyPr/>
-                    <a:lstStyle/>
-                    <a:p>
-                      <a:pPr lvl="0" indent="0" marL="0">
-                        <a:buNone/>
-                      </a:pPr>
-                      <a:r>
-                        <a:rPr/>
-                        <a:t>25.037024</a:t>
-                      </a:r>
-                    </a:p>
-                  </a:txBody>
-                </a:tc>
-                <a:tc>
-                  <a:txBody>
-                    <a:bodyPr/>
-                    <a:lstStyle/>
-                    <a:p>
-                      <a:pPr lvl="0" indent="0" marL="0">
-                        <a:buNone/>
-                      </a:pPr>
-                      <a:r>
-                        <a:rPr/>
-                        <a:t>0.637629</a:t>
-                      </a:r>
-                    </a:p>
-                  </a:txBody>
-                </a:tc>
-              </a:tr>
-              <a:tr h="0">
-                <a:tc>
-                  <a:txBody>
-                    <a:bodyPr/>
-                    <a:lstStyle/>
-                    <a:p>
-                      <a:pPr lvl="0" indent="0" marL="0">
-                        <a:buNone/>
-                      </a:pPr>
-                      <a:r>
-                        <a:rPr/>
-                        <a:t>897</a:t>
-                      </a:r>
-                    </a:p>
-                  </a:txBody>
-                </a:tc>
-                <a:tc>
-                  <a:txBody>
-                    <a:bodyPr/>
-                    <a:lstStyle/>
-                    <a:p>
-                      <a:pPr lvl="0" indent="0" marL="0">
-                        <a:buNone/>
-                      </a:pPr>
-                      <a:r>
-                        <a:rPr/>
-                        <a:t>sugarberry</a:t>
-                      </a:r>
-                    </a:p>
-                  </a:txBody>
-                </a:tc>
-                <a:tc>
-                  <a:txBody>
-                    <a:bodyPr/>
-                    <a:lstStyle/>
-                    <a:p>
-                      <a:pPr lvl="0" indent="0" marL="0">
-                        <a:buNone/>
-                      </a:pPr>
-                      <a:r>
-                        <a:rPr/>
-                        <a:t>8</a:t>
-                      </a:r>
-                    </a:p>
-                  </a:txBody>
-                </a:tc>
-                <a:tc>
-                  <a:txBody>
-                    <a:bodyPr/>
-                    <a:lstStyle/>
-                    <a:p>
-                      <a:pPr lvl="0" indent="0" marL="0">
-                        <a:buNone/>
-                      </a:pPr>
-                      <a:r>
-                        <a:rPr/>
-                        <a:t>38.144756</a:t>
-                      </a:r>
-                    </a:p>
-                  </a:txBody>
-                </a:tc>
-                <a:tc>
-                  <a:txBody>
-                    <a:bodyPr/>
-                    <a:lstStyle/>
-                    <a:p>
-                      <a:pPr lvl="0" indent="0" marL="0">
-                        <a:buNone/>
-                      </a:pPr>
-                      <a:r>
-                        <a:rPr/>
-                        <a:t>26.680208</a:t>
-                      </a:r>
-                    </a:p>
-                  </a:txBody>
-                </a:tc>
-                <a:tc>
-                  <a:txBody>
-                    <a:bodyPr/>
-                    <a:lstStyle/>
-                    <a:p>
-                      <a:pPr lvl="0" indent="0" marL="0">
-                        <a:buNone/>
-                      </a:pPr>
-                      <a:r>
-                        <a:rPr/>
-                        <a:t>0.665159</a:t>
-                      </a:r>
-                    </a:p>
-                  </a:txBody>
-                </a:tc>
-              </a:tr>
-              <a:tr h="0">
-                <a:tc>
-                  <a:txBody>
-                    <a:bodyPr/>
-                    <a:lstStyle/>
-                    <a:p>
-                      <a:pPr lvl="0" indent="0" marL="0">
-                        <a:buNone/>
-                      </a:pPr>
-                      <a:r>
-                        <a:rPr/>
-                        <a:t>898</a:t>
-                      </a:r>
-                    </a:p>
-                  </a:txBody>
-                </a:tc>
-                <a:tc>
-                  <a:txBody>
-                    <a:bodyPr/>
-                    <a:lstStyle/>
-                    <a:p>
-                      <a:pPr lvl="0" indent="0" marL="0">
-                        <a:buNone/>
-                      </a:pPr>
-                      <a:r>
-                        <a:rPr/>
-                        <a:t>sugarberry</a:t>
-                      </a:r>
-                    </a:p>
-                  </a:txBody>
-                </a:tc>
-                <a:tc>
-                  <a:txBody>
-                    <a:bodyPr/>
-                    <a:lstStyle/>
-                    <a:p>
-                      <a:pPr lvl="0" indent="0" marL="0">
-                        <a:buNone/>
-                      </a:pPr>
-                      <a:r>
-                        <a:rPr/>
-                        <a:t>9</a:t>
-                      </a:r>
-                    </a:p>
-                  </a:txBody>
-                </a:tc>
-                <a:tc>
-                  <a:txBody>
-                    <a:bodyPr/>
-                    <a:lstStyle/>
-                    <a:p>
-                      <a:pPr lvl="0" indent="0" marL="0">
-                        <a:buNone/>
-                      </a:pPr>
-                      <a:r>
-                        <a:rPr/>
-                        <a:t>36.853245</a:t>
-                      </a:r>
-                    </a:p>
-                  </a:txBody>
-                </a:tc>
-                <a:tc>
-                  <a:txBody>
-                    <a:bodyPr/>
-                    <a:lstStyle/>
-                    <a:p>
-                      <a:pPr lvl="0" indent="0" marL="0">
-                        <a:buNone/>
-                      </a:pPr>
-                      <a:r>
-                        <a:rPr/>
-                        <a:t>21.021667</a:t>
-                      </a:r>
-                    </a:p>
-                  </a:txBody>
-                </a:tc>
-                <a:tc>
-                  <a:txBody>
-                    <a:bodyPr/>
-                    <a:lstStyle/>
-                    <a:p>
-                      <a:pPr lvl="0" indent="0" marL="0">
-                        <a:buNone/>
-                      </a:pPr>
-                      <a:r>
-                        <a:rPr/>
-                        <a:t>0.685162</a:t>
-                      </a:r>
-                    </a:p>
-                  </a:txBody>
-                </a:tc>
-              </a:tr>
-              <a:tr h="0">
-                <a:tc>
-                  <a:txBody>
-                    <a:bodyPr/>
-                    <a:lstStyle/>
-                    <a:p>
-                      <a:pPr lvl="0" indent="0" marL="0">
-                        <a:buNone/>
-                      </a:pPr>
-                      <a:r>
-                        <a:rPr/>
-                        <a:t>899</a:t>
-                      </a:r>
-                    </a:p>
-                  </a:txBody>
-                </a:tc>
-                <a:tc>
-                  <a:txBody>
-                    <a:bodyPr/>
-                    <a:lstStyle/>
-                    <a:p>
-                      <a:pPr lvl="0" indent="0" marL="0">
-                        <a:buNone/>
-                      </a:pPr>
-                      <a:r>
-                        <a:rPr/>
-                        <a:t>sugarberry</a:t>
-                      </a:r>
-                    </a:p>
-                  </a:txBody>
-                </a:tc>
-                <a:tc>
-                  <a:txBody>
-                    <a:bodyPr/>
-                    <a:lstStyle/>
-                    <a:p>
-                      <a:pPr lvl="0" indent="0" marL="0">
-                        <a:buNone/>
-                      </a:pPr>
-                      <a:r>
-                        <a:rPr/>
-                        <a:t>10</a:t>
-                      </a:r>
-                    </a:p>
-                  </a:txBody>
-                </a:tc>
-                <a:tc>
-                  <a:txBody>
-                    <a:bodyPr/>
-                    <a:lstStyle/>
-                    <a:p>
-                      <a:pPr lvl="0" indent="0" marL="0">
-                        <a:buNone/>
-                      </a:pPr>
-                      <a:r>
-                        <a:rPr/>
-                        <a:t>40.091106</a:t>
-                      </a:r>
-                    </a:p>
-                  </a:txBody>
-                </a:tc>
-                <a:tc>
-                  <a:txBody>
-                    <a:bodyPr/>
-                    <a:lstStyle/>
-                    <a:p>
-                      <a:pPr lvl="0" indent="0" marL="0">
-                        <a:buNone/>
-                      </a:pPr>
-                      <a:r>
-                        <a:rPr/>
-                        <a:t>23.172083</a:t>
-                      </a:r>
-                    </a:p>
-                  </a:txBody>
-                </a:tc>
-                <a:tc>
-                  <a:txBody>
-                    <a:bodyPr/>
-                    <a:lstStyle/>
-                    <a:p>
-                      <a:pPr lvl="0" indent="0" marL="0">
-                        <a:buNone/>
-                      </a:pPr>
-                      <a:r>
-                        <a:rPr/>
-                        <a:t>0.677519</a:t>
-                      </a:r>
-                    </a:p>
-                  </a:txBody>
-                </a:tc>
-              </a:tr>
-            </a:tbl>
-          </a:graphicData>
-        </a:graphic>
-      </p:graphicFrame>
+        </p:nvSpPr>
+        <p:spPr/>
+        <p:txBody>
+          <a:bodyPr/>
+          <a:lstStyle/>
+          <a:p>
+            <a:pPr lvl="0"/>
+            <a:r>
+              <a:rPr b="1"/>
+              <a:t>RMSLE over RMSE</a:t>
+            </a:r>
+            <a:r>
+              <a:rPr/>
+              <a:t>: focuses on percentage errors, making it fair to both small and large trees, unlike RMSE, which we believe penalizes errors on big trees. Fitting biomass estimations where scale matters more than absolute error.</a:t>
+            </a:r>
+          </a:p>
+          <a:p>
+            <a:pPr lvl="0"/>
+            <a:r>
+              <a:rPr/>
+              <a:t>By prioritizing percentage errors, RMSLE provides a more balanced evaluation that considers the unique characteristics of tree biomass data.</a:t>
+            </a:r>
+          </a:p>
+        </p:txBody>
+      </p:sp>
     </p:spTree>
   </p:cSld>
 </p:sld>
@@ -4702,36 +3607,6 @@
             <p:ph type="title"/>
           </p:nvPr>
         </p:nvSpPr>
-        <p:spPr>
-          <a:xfrm>
-            <a:off x="457201" y="204787"/>
-            <a:ext cx="3008313" cy="871538"/>
-          </a:xfrm>
-        </p:spPr>
-        <p:txBody>
-          <a:bodyPr/>
-          <a:lstStyle/>
-          <a:p>
-            <a:pPr lvl="0" indent="0" marL="0">
-              <a:buNone/>
-            </a:pPr>
-            <a:r>
-              <a:rPr/>
-              <a:t>Technical Lead</a:t>
-            </a:r>
-          </a:p>
-        </p:txBody>
-      </p:sp>
-      <p:sp>
-        <p:nvSpPr>
-          <p:cNvPr id="4" name="Text Placeholder 3"/>
-          <p:cNvSpPr>
-            <a:spLocks noGrp="1"/>
-          </p:cNvSpPr>
-          <p:nvPr>
-            <p:ph idx="2" sz="half" type="body"/>
-          </p:nvPr>
-        </p:nvSpPr>
         <p:spPr/>
         <p:txBody>
           <a:bodyPr/>
@@ -4742,7 +3617,7 @@
             </a:pPr>
             <a:r>
               <a:rPr/>
-              <a:t>Tree Measurement Data:</a:t>
+              <a:t>Model</a:t>
             </a:r>
           </a:p>
         </p:txBody>
@@ -4758,8 +3633,8 @@
           </p:nvPr>
         </p:nvGraphicFramePr>
         <p:xfrm>
-          <a:off x="3568700" y="203200"/>
-          <a:ext cx="5105400" cy="4381500"/>
+          <a:off x="457200" y="1193800"/>
+          <a:ext cx="8229600" cy="3390900"/>
         </p:xfrm>
         <a:graphic>
           <a:graphicData uri="http://schemas.openxmlformats.org/drawingml/2006/table">
@@ -4768,11 +3643,12 @@
                 <a:tableStyleId>{5C22544A-7EE6-4342-B048-85BDC9FD1C3A}</a:tableStyleId>
               </a:tblPr>
               <a:tblGrid>
-                <a:gridCol w="1016000"/>
-                <a:gridCol w="1016000"/>
-                <a:gridCol w="1016000"/>
-                <a:gridCol w="1016000"/>
-                <a:gridCol w="1016000"/>
+                <a:gridCol w="1371600"/>
+                <a:gridCol w="1371600"/>
+                <a:gridCol w="1371600"/>
+                <a:gridCol w="1371600"/>
+                <a:gridCol w="1371600"/>
+                <a:gridCol w="1371600"/>
               </a:tblGrid>
               <a:tr h="0">
                 <a:tc>
@@ -4795,7 +3671,7 @@
                       </a:pPr>
                       <a:r>
                         <a:rPr/>
-                        <a:t>SPCD</a:t>
+                        <a:t>Species</a:t>
                       </a:r>
                     </a:p>
                   </a:txBody>
@@ -4811,7 +3687,7 @@
                       </a:pPr>
                       <a:r>
                         <a:rPr/>
-                        <a:t>DO_BH</a:t>
+                        <a:t>k</a:t>
                       </a:r>
                     </a:p>
                   </a:txBody>
@@ -4827,7 +3703,7 @@
                       </a:pPr>
                       <a:r>
                         <a:rPr/>
-                        <a:t>HT_TOT</a:t>
+                        <a:t>RMSE</a:t>
                       </a:r>
                     </a:p>
                   </a:txBody>
@@ -4843,7 +3719,23 @@
                       </a:pPr>
                       <a:r>
                         <a:rPr/>
-                        <a:t>TT_DW_CRM</a:t>
+                        <a:t>MAE</a:t>
+                      </a:r>
+                    </a:p>
+                  </a:txBody>
+                  <a:tcPr/>
+                </a:tc>
+                <a:tc>
+                  <a:txBody>
+                    <a:bodyPr/>
+                    <a:lstStyle/>
+                    <a:p>
+                      <a:pPr lvl="0" indent="0" marL="0">
+                        <a:buNone/>
+                      </a:pPr>
+                      <a:r>
+                        <a:rPr/>
+                        <a:t>RMSLE</a:t>
                       </a:r>
                     </a:p>
                   </a:txBody>
@@ -4876,52 +3768,67 @@
                       </a:pPr>
                       <a:r>
                         <a:rPr/>
-                        <a:t>12</a:t>
-                      </a:r>
-                    </a:p>
-                  </a:txBody>
-                </a:tc>
-                <a:tc>
-                  <a:txBody>
-                    <a:bodyPr/>
-                    <a:lstStyle/>
-                    <a:p>
-                      <a:pPr lvl="0" indent="0" marL="0">
-                        <a:buNone/>
-                      </a:pPr>
-                      <a:r>
-                        <a:rPr/>
-                        <a:t>7.5</a:t>
-                      </a:r>
-                    </a:p>
-                  </a:txBody>
-                </a:tc>
-                <a:tc>
-                  <a:txBody>
-                    <a:bodyPr/>
-                    <a:lstStyle/>
-                    <a:p>
-                      <a:pPr lvl="0" indent="0" marL="0">
-                        <a:buNone/>
-                      </a:pPr>
-                      <a:r>
-                        <a:rPr/>
-                        <a:t>45.2</a:t>
-                      </a:r>
-                    </a:p>
-                  </a:txBody>
-                </a:tc>
-                <a:tc>
-                  <a:txBody>
-                    <a:bodyPr/>
-                    <a:lstStyle/>
-                    <a:p>
-                      <a:pPr lvl="0" indent="0" marL="0">
-                        <a:buNone/>
-                      </a:pPr>
-                      <a:r>
-                        <a:rPr/>
-                        <a:t>178.86</a:t>
+                        <a:t>balsam fir</a:t>
+                      </a:r>
+                    </a:p>
+                  </a:txBody>
+                </a:tc>
+                <a:tc>
+                  <a:txBody>
+                    <a:bodyPr/>
+                    <a:lstStyle/>
+                    <a:p>
+                      <a:pPr lvl="0" indent="0" marL="0">
+                        <a:buNone/>
+                      </a:pPr>
+                      <a:r>
+                        <a:rPr/>
+                        <a:t>2</a:t>
+                      </a:r>
+                    </a:p>
+                  </a:txBody>
+                </a:tc>
+                <a:tc>
+                  <a:txBody>
+                    <a:bodyPr/>
+                    <a:lstStyle/>
+                    <a:p>
+                      <a:pPr lvl="0" indent="0" marL="0">
+                        <a:buNone/>
+                      </a:pPr>
+                      <a:r>
+                        <a:rPr/>
+                        <a:t>125.827396</a:t>
+                      </a:r>
+                    </a:p>
+                  </a:txBody>
+                </a:tc>
+                <a:tc>
+                  <a:txBody>
+                    <a:bodyPr/>
+                    <a:lstStyle/>
+                    <a:p>
+                      <a:pPr lvl="0" indent="0" marL="0">
+                        <a:buNone/>
+                      </a:pPr>
+                      <a:r>
+                        <a:rPr/>
+                        <a:t>34.820565</a:t>
+                      </a:r>
+                    </a:p>
+                  </a:txBody>
+                </a:tc>
+                <a:tc>
+                  <a:txBody>
+                    <a:bodyPr/>
+                    <a:lstStyle/>
+                    <a:p>
+                      <a:pPr lvl="0" indent="0" marL="0">
+                        <a:buNone/>
+                      </a:pPr>
+                      <a:r>
+                        <a:rPr/>
+                        <a:t>0.119617</a:t>
                       </a:r>
                     </a:p>
                   </a:txBody>
@@ -4953,52 +3860,67 @@
                       </a:pPr>
                       <a:r>
                         <a:rPr/>
-                        <a:t>12</a:t>
-                      </a:r>
-                    </a:p>
-                  </a:txBody>
-                </a:tc>
-                <a:tc>
-                  <a:txBody>
-                    <a:bodyPr/>
-                    <a:lstStyle/>
-                    <a:p>
-                      <a:pPr lvl="0" indent="0" marL="0">
-                        <a:buNone/>
-                      </a:pPr>
-                      <a:r>
-                        <a:rPr/>
-                        <a:t>9.3</a:t>
-                      </a:r>
-                    </a:p>
-                  </a:txBody>
-                </a:tc>
-                <a:tc>
-                  <a:txBody>
-                    <a:bodyPr/>
-                    <a:lstStyle/>
-                    <a:p>
-                      <a:pPr lvl="0" indent="0" marL="0">
-                        <a:buNone/>
-                      </a:pPr>
-                      <a:r>
-                        <a:rPr/>
-                        <a:t>62.7</a:t>
-                      </a:r>
-                    </a:p>
-                  </a:txBody>
-                </a:tc>
-                <a:tc>
-                  <a:txBody>
-                    <a:bodyPr/>
-                    <a:lstStyle/>
-                    <a:p>
-                      <a:pPr lvl="0" indent="0" marL="0">
-                        <a:buNone/>
-                      </a:pPr>
-                      <a:r>
-                        <a:rPr/>
-                        <a:t>323.46</a:t>
+                        <a:t>balsam fir</a:t>
+                      </a:r>
+                    </a:p>
+                  </a:txBody>
+                </a:tc>
+                <a:tc>
+                  <a:txBody>
+                    <a:bodyPr/>
+                    <a:lstStyle/>
+                    <a:p>
+                      <a:pPr lvl="0" indent="0" marL="0">
+                        <a:buNone/>
+                      </a:pPr>
+                      <a:r>
+                        <a:rPr/>
+                        <a:t>3</a:t>
+                      </a:r>
+                    </a:p>
+                  </a:txBody>
+                </a:tc>
+                <a:tc>
+                  <a:txBody>
+                    <a:bodyPr/>
+                    <a:lstStyle/>
+                    <a:p>
+                      <a:pPr lvl="0" indent="0" marL="0">
+                        <a:buNone/>
+                      </a:pPr>
+                      <a:r>
+                        <a:rPr/>
+                        <a:t>129.650855</a:t>
+                      </a:r>
+                    </a:p>
+                  </a:txBody>
+                </a:tc>
+                <a:tc>
+                  <a:txBody>
+                    <a:bodyPr/>
+                    <a:lstStyle/>
+                    <a:p>
+                      <a:pPr lvl="0" indent="0" marL="0">
+                        <a:buNone/>
+                      </a:pPr>
+                      <a:r>
+                        <a:rPr/>
+                        <a:t>36.628377</a:t>
+                      </a:r>
+                    </a:p>
+                  </a:txBody>
+                </a:tc>
+                <a:tc>
+                  <a:txBody>
+                    <a:bodyPr/>
+                    <a:lstStyle/>
+                    <a:p>
+                      <a:pPr lvl="0" indent="0" marL="0">
+                        <a:buNone/>
+                      </a:pPr>
+                      <a:r>
+                        <a:rPr/>
+                        <a:t>0.123679</a:t>
                       </a:r>
                     </a:p>
                   </a:txBody>
@@ -5030,52 +3952,67 @@
                       </a:pPr>
                       <a:r>
                         <a:rPr/>
-                        <a:t>12</a:t>
-                      </a:r>
-                    </a:p>
-                  </a:txBody>
-                </a:tc>
-                <a:tc>
-                  <a:txBody>
-                    <a:bodyPr/>
-                    <a:lstStyle/>
-                    <a:p>
-                      <a:pPr lvl="0" indent="0" marL="0">
-                        <a:buNone/>
-                      </a:pPr>
-                      <a:r>
-                        <a:rPr/>
-                        <a:t>9.7</a:t>
-                      </a:r>
-                    </a:p>
-                  </a:txBody>
-                </a:tc>
-                <a:tc>
-                  <a:txBody>
-                    <a:bodyPr/>
-                    <a:lstStyle/>
-                    <a:p>
-                      <a:pPr lvl="0" indent="0" marL="0">
-                        <a:buNone/>
-                      </a:pPr>
-                      <a:r>
-                        <a:rPr/>
-                        <a:t>56.7</a:t>
-                      </a:r>
-                    </a:p>
-                  </a:txBody>
-                </a:tc>
-                <a:tc>
-                  <a:txBody>
-                    <a:bodyPr/>
-                    <a:lstStyle/>
-                    <a:p>
-                      <a:pPr lvl="0" indent="0" marL="0">
-                        <a:buNone/>
-                      </a:pPr>
-                      <a:r>
-                        <a:rPr/>
-                        <a:t>342.47</a:t>
+                        <a:t>balsam fir</a:t>
+                      </a:r>
+                    </a:p>
+                  </a:txBody>
+                </a:tc>
+                <a:tc>
+                  <a:txBody>
+                    <a:bodyPr/>
+                    <a:lstStyle/>
+                    <a:p>
+                      <a:pPr lvl="0" indent="0" marL="0">
+                        <a:buNone/>
+                      </a:pPr>
+                      <a:r>
+                        <a:rPr/>
+                        <a:t>4</a:t>
+                      </a:r>
+                    </a:p>
+                  </a:txBody>
+                </a:tc>
+                <a:tc>
+                  <a:txBody>
+                    <a:bodyPr/>
+                    <a:lstStyle/>
+                    <a:p>
+                      <a:pPr lvl="0" indent="0" marL="0">
+                        <a:buNone/>
+                      </a:pPr>
+                      <a:r>
+                        <a:rPr/>
+                        <a:t>134.599829</a:t>
+                      </a:r>
+                    </a:p>
+                  </a:txBody>
+                </a:tc>
+                <a:tc>
+                  <a:txBody>
+                    <a:bodyPr/>
+                    <a:lstStyle/>
+                    <a:p>
+                      <a:pPr lvl="0" indent="0" marL="0">
+                        <a:buNone/>
+                      </a:pPr>
+                      <a:r>
+                        <a:rPr/>
+                        <a:t>38.884870</a:t>
+                      </a:r>
+                    </a:p>
+                  </a:txBody>
+                </a:tc>
+                <a:tc>
+                  <a:txBody>
+                    <a:bodyPr/>
+                    <a:lstStyle/>
+                    <a:p>
+                      <a:pPr lvl="0" indent="0" marL="0">
+                        <a:buNone/>
+                      </a:pPr>
+                      <a:r>
+                        <a:rPr/>
+                        <a:t>0.133858</a:t>
                       </a:r>
                     </a:p>
                   </a:txBody>
@@ -5107,52 +4044,67 @@
                       </a:pPr>
                       <a:r>
                         <a:rPr/>
-                        <a:t>12</a:t>
-                      </a:r>
-                    </a:p>
-                  </a:txBody>
-                </a:tc>
-                <a:tc>
-                  <a:txBody>
-                    <a:bodyPr/>
-                    <a:lstStyle/>
-                    <a:p>
-                      <a:pPr lvl="0" indent="0" marL="0">
-                        <a:buNone/>
-                      </a:pPr>
-                      <a:r>
-                        <a:rPr/>
-                        <a:t>11.4</a:t>
-                      </a:r>
-                    </a:p>
-                  </a:txBody>
-                </a:tc>
-                <a:tc>
-                  <a:txBody>
-                    <a:bodyPr/>
-                    <a:lstStyle/>
-                    <a:p>
-                      <a:pPr lvl="0" indent="0" marL="0">
-                        <a:buNone/>
-                      </a:pPr>
-                      <a:r>
-                        <a:rPr/>
-                        <a:t>66.1</a:t>
-                      </a:r>
-                    </a:p>
-                  </a:txBody>
-                </a:tc>
-                <a:tc>
-                  <a:txBody>
-                    <a:bodyPr/>
-                    <a:lstStyle/>
-                    <a:p>
-                      <a:pPr lvl="0" indent="0" marL="0">
-                        <a:buNone/>
-                      </a:pPr>
-                      <a:r>
-                        <a:rPr/>
-                        <a:t>499.35</a:t>
+                        <a:t>balsam fir</a:t>
+                      </a:r>
+                    </a:p>
+                  </a:txBody>
+                </a:tc>
+                <a:tc>
+                  <a:txBody>
+                    <a:bodyPr/>
+                    <a:lstStyle/>
+                    <a:p>
+                      <a:pPr lvl="0" indent="0" marL="0">
+                        <a:buNone/>
+                      </a:pPr>
+                      <a:r>
+                        <a:rPr/>
+                        <a:t>5</a:t>
+                      </a:r>
+                    </a:p>
+                  </a:txBody>
+                </a:tc>
+                <a:tc>
+                  <a:txBody>
+                    <a:bodyPr/>
+                    <a:lstStyle/>
+                    <a:p>
+                      <a:pPr lvl="0" indent="0" marL="0">
+                        <a:buNone/>
+                      </a:pPr>
+                      <a:r>
+                        <a:rPr/>
+                        <a:t>145.002852</a:t>
+                      </a:r>
+                    </a:p>
+                  </a:txBody>
+                </a:tc>
+                <a:tc>
+                  <a:txBody>
+                    <a:bodyPr/>
+                    <a:lstStyle/>
+                    <a:p>
+                      <a:pPr lvl="0" indent="0" marL="0">
+                        <a:buNone/>
+                      </a:pPr>
+                      <a:r>
+                        <a:rPr/>
+                        <a:t>41.168470</a:t>
+                      </a:r>
+                    </a:p>
+                  </a:txBody>
+                </a:tc>
+                <a:tc>
+                  <a:txBody>
+                    <a:bodyPr/>
+                    <a:lstStyle/>
+                    <a:p>
+                      <a:pPr lvl="0" indent="0" marL="0">
+                        <a:buNone/>
+                      </a:pPr>
+                      <a:r>
+                        <a:rPr/>
+                        <a:t>0.144052</a:t>
                       </a:r>
                     </a:p>
                   </a:txBody>
@@ -5184,52 +4136,619 @@
                       </a:pPr>
                       <a:r>
                         <a:rPr/>
-                        <a:t>12</a:t>
-                      </a:r>
-                    </a:p>
-                  </a:txBody>
-                </a:tc>
-                <a:tc>
-                  <a:txBody>
-                    <a:bodyPr/>
-                    <a:lstStyle/>
-                    <a:p>
-                      <a:pPr lvl="0" indent="0" marL="0">
-                        <a:buNone/>
-                      </a:pPr>
-                      <a:r>
-                        <a:rPr/>
-                        <a:t>6.4</a:t>
-                      </a:r>
-                    </a:p>
-                  </a:txBody>
-                </a:tc>
-                <a:tc>
-                  <a:txBody>
-                    <a:bodyPr/>
-                    <a:lstStyle/>
-                    <a:p>
-                      <a:pPr lvl="0" indent="0" marL="0">
-                        <a:buNone/>
-                      </a:pPr>
-                      <a:r>
-                        <a:rPr/>
-                        <a:t>51.8</a:t>
-                      </a:r>
-                    </a:p>
-                  </a:txBody>
-                </a:tc>
-                <a:tc>
-                  <a:txBody>
-                    <a:bodyPr/>
-                    <a:lstStyle/>
-                    <a:p>
-                      <a:pPr lvl="0" indent="0" marL="0">
-                        <a:buNone/>
-                      </a:pPr>
-                      <a:r>
-                        <a:rPr/>
-                        <a:t>113.92</a:t>
+                        <a:t>balsam fir</a:t>
+                      </a:r>
+                    </a:p>
+                  </a:txBody>
+                </a:tc>
+                <a:tc>
+                  <a:txBody>
+                    <a:bodyPr/>
+                    <a:lstStyle/>
+                    <a:p>
+                      <a:pPr lvl="0" indent="0" marL="0">
+                        <a:buNone/>
+                      </a:pPr>
+                      <a:r>
+                        <a:rPr/>
+                        <a:t>6</a:t>
+                      </a:r>
+                    </a:p>
+                  </a:txBody>
+                </a:tc>
+                <a:tc>
+                  <a:txBody>
+                    <a:bodyPr/>
+                    <a:lstStyle/>
+                    <a:p>
+                      <a:pPr lvl="0" indent="0" marL="0">
+                        <a:buNone/>
+                      </a:pPr>
+                      <a:r>
+                        <a:rPr/>
+                        <a:t>147.449208</a:t>
+                      </a:r>
+                    </a:p>
+                  </a:txBody>
+                </a:tc>
+                <a:tc>
+                  <a:txBody>
+                    <a:bodyPr/>
+                    <a:lstStyle/>
+                    <a:p>
+                      <a:pPr lvl="0" indent="0" marL="0">
+                        <a:buNone/>
+                      </a:pPr>
+                      <a:r>
+                        <a:rPr/>
+                        <a:t>40.728609</a:t>
+                      </a:r>
+                    </a:p>
+                  </a:txBody>
+                </a:tc>
+                <a:tc>
+                  <a:txBody>
+                    <a:bodyPr/>
+                    <a:lstStyle/>
+                    <a:p>
+                      <a:pPr lvl="0" indent="0" marL="0">
+                        <a:buNone/>
+                      </a:pPr>
+                      <a:r>
+                        <a:rPr/>
+                        <a:t>0.142813</a:t>
+                      </a:r>
+                    </a:p>
+                  </a:txBody>
+                </a:tc>
+              </a:tr>
+              <a:tr h="0">
+                <a:tc>
+                  <a:txBody>
+                    <a:bodyPr/>
+                    <a:lstStyle/>
+                    <a:p>
+                      <a:pPr lvl="0" indent="0" marL="0">
+                        <a:buNone/>
+                      </a:pPr>
+                      <a:r>
+                        <a:rPr/>
+                        <a:t>...</a:t>
+                      </a:r>
+                    </a:p>
+                  </a:txBody>
+                </a:tc>
+                <a:tc>
+                  <a:txBody>
+                    <a:bodyPr/>
+                    <a:lstStyle/>
+                    <a:p>
+                      <a:pPr lvl="0" indent="0" marL="0">
+                        <a:buNone/>
+                      </a:pPr>
+                      <a:r>
+                        <a:rPr/>
+                        <a:t>...</a:t>
+                      </a:r>
+                    </a:p>
+                  </a:txBody>
+                </a:tc>
+                <a:tc>
+                  <a:txBody>
+                    <a:bodyPr/>
+                    <a:lstStyle/>
+                    <a:p>
+                      <a:pPr lvl="0" indent="0" marL="0">
+                        <a:buNone/>
+                      </a:pPr>
+                      <a:r>
+                        <a:rPr/>
+                        <a:t>...</a:t>
+                      </a:r>
+                    </a:p>
+                  </a:txBody>
+                </a:tc>
+                <a:tc>
+                  <a:txBody>
+                    <a:bodyPr/>
+                    <a:lstStyle/>
+                    <a:p>
+                      <a:pPr lvl="0" indent="0" marL="0">
+                        <a:buNone/>
+                      </a:pPr>
+                      <a:r>
+                        <a:rPr/>
+                        <a:t>...</a:t>
+                      </a:r>
+                    </a:p>
+                  </a:txBody>
+                </a:tc>
+                <a:tc>
+                  <a:txBody>
+                    <a:bodyPr/>
+                    <a:lstStyle/>
+                    <a:p>
+                      <a:pPr lvl="0" indent="0" marL="0">
+                        <a:buNone/>
+                      </a:pPr>
+                      <a:r>
+                        <a:rPr/>
+                        <a:t>...</a:t>
+                      </a:r>
+                    </a:p>
+                  </a:txBody>
+                </a:tc>
+                <a:tc>
+                  <a:txBody>
+                    <a:bodyPr/>
+                    <a:lstStyle/>
+                    <a:p>
+                      <a:pPr lvl="0" indent="0" marL="0">
+                        <a:buNone/>
+                      </a:pPr>
+                      <a:r>
+                        <a:rPr/>
+                        <a:t>...</a:t>
+                      </a:r>
+                    </a:p>
+                  </a:txBody>
+                </a:tc>
+              </a:tr>
+              <a:tr h="0">
+                <a:tc>
+                  <a:txBody>
+                    <a:bodyPr/>
+                    <a:lstStyle/>
+                    <a:p>
+                      <a:pPr lvl="0" indent="0" marL="0">
+                        <a:buNone/>
+                      </a:pPr>
+                      <a:r>
+                        <a:rPr/>
+                        <a:t>895</a:t>
+                      </a:r>
+                    </a:p>
+                  </a:txBody>
+                </a:tc>
+                <a:tc>
+                  <a:txBody>
+                    <a:bodyPr/>
+                    <a:lstStyle/>
+                    <a:p>
+                      <a:pPr lvl="0" indent="0" marL="0">
+                        <a:buNone/>
+                      </a:pPr>
+                      <a:r>
+                        <a:rPr/>
+                        <a:t>sugarberry</a:t>
+                      </a:r>
+                    </a:p>
+                  </a:txBody>
+                </a:tc>
+                <a:tc>
+                  <a:txBody>
+                    <a:bodyPr/>
+                    <a:lstStyle/>
+                    <a:p>
+                      <a:pPr lvl="0" indent="0" marL="0">
+                        <a:buNone/>
+                      </a:pPr>
+                      <a:r>
+                        <a:rPr/>
+                        <a:t>6</a:t>
+                      </a:r>
+                    </a:p>
+                  </a:txBody>
+                </a:tc>
+                <a:tc>
+                  <a:txBody>
+                    <a:bodyPr/>
+                    <a:lstStyle/>
+                    <a:p>
+                      <a:pPr lvl="0" indent="0" marL="0">
+                        <a:buNone/>
+                      </a:pPr>
+                      <a:r>
+                        <a:rPr/>
+                        <a:t>32.431052</a:t>
+                      </a:r>
+                    </a:p>
+                  </a:txBody>
+                </a:tc>
+                <a:tc>
+                  <a:txBody>
+                    <a:bodyPr/>
+                    <a:lstStyle/>
+                    <a:p>
+                      <a:pPr lvl="0" indent="0" marL="0">
+                        <a:buNone/>
+                      </a:pPr>
+                      <a:r>
+                        <a:rPr/>
+                        <a:t>20.969306</a:t>
+                      </a:r>
+                    </a:p>
+                  </a:txBody>
+                </a:tc>
+                <a:tc>
+                  <a:txBody>
+                    <a:bodyPr/>
+                    <a:lstStyle/>
+                    <a:p>
+                      <a:pPr lvl="0" indent="0" marL="0">
+                        <a:buNone/>
+                      </a:pPr>
+                      <a:r>
+                        <a:rPr/>
+                        <a:t>0.565727</a:t>
+                      </a:r>
+                    </a:p>
+                  </a:txBody>
+                </a:tc>
+              </a:tr>
+              <a:tr h="0">
+                <a:tc>
+                  <a:txBody>
+                    <a:bodyPr/>
+                    <a:lstStyle/>
+                    <a:p>
+                      <a:pPr lvl="0" indent="0" marL="0">
+                        <a:buNone/>
+                      </a:pPr>
+                      <a:r>
+                        <a:rPr/>
+                        <a:t>896</a:t>
+                      </a:r>
+                    </a:p>
+                  </a:txBody>
+                </a:tc>
+                <a:tc>
+                  <a:txBody>
+                    <a:bodyPr/>
+                    <a:lstStyle/>
+                    <a:p>
+                      <a:pPr lvl="0" indent="0" marL="0">
+                        <a:buNone/>
+                      </a:pPr>
+                      <a:r>
+                        <a:rPr/>
+                        <a:t>sugarberry</a:t>
+                      </a:r>
+                    </a:p>
+                  </a:txBody>
+                </a:tc>
+                <a:tc>
+                  <a:txBody>
+                    <a:bodyPr/>
+                    <a:lstStyle/>
+                    <a:p>
+                      <a:pPr lvl="0" indent="0" marL="0">
+                        <a:buNone/>
+                      </a:pPr>
+                      <a:r>
+                        <a:rPr/>
+                        <a:t>7</a:t>
+                      </a:r>
+                    </a:p>
+                  </a:txBody>
+                </a:tc>
+                <a:tc>
+                  <a:txBody>
+                    <a:bodyPr/>
+                    <a:lstStyle/>
+                    <a:p>
+                      <a:pPr lvl="0" indent="0" marL="0">
+                        <a:buNone/>
+                      </a:pPr>
+                      <a:r>
+                        <a:rPr/>
+                        <a:t>37.324259</a:t>
+                      </a:r>
+                    </a:p>
+                  </a:txBody>
+                </a:tc>
+                <a:tc>
+                  <a:txBody>
+                    <a:bodyPr/>
+                    <a:lstStyle/>
+                    <a:p>
+                      <a:pPr lvl="0" indent="0" marL="0">
+                        <a:buNone/>
+                      </a:pPr>
+                      <a:r>
+                        <a:rPr/>
+                        <a:t>25.037024</a:t>
+                      </a:r>
+                    </a:p>
+                  </a:txBody>
+                </a:tc>
+                <a:tc>
+                  <a:txBody>
+                    <a:bodyPr/>
+                    <a:lstStyle/>
+                    <a:p>
+                      <a:pPr lvl="0" indent="0" marL="0">
+                        <a:buNone/>
+                      </a:pPr>
+                      <a:r>
+                        <a:rPr/>
+                        <a:t>0.637629</a:t>
+                      </a:r>
+                    </a:p>
+                  </a:txBody>
+                </a:tc>
+              </a:tr>
+              <a:tr h="0">
+                <a:tc>
+                  <a:txBody>
+                    <a:bodyPr/>
+                    <a:lstStyle/>
+                    <a:p>
+                      <a:pPr lvl="0" indent="0" marL="0">
+                        <a:buNone/>
+                      </a:pPr>
+                      <a:r>
+                        <a:rPr/>
+                        <a:t>897</a:t>
+                      </a:r>
+                    </a:p>
+                  </a:txBody>
+                </a:tc>
+                <a:tc>
+                  <a:txBody>
+                    <a:bodyPr/>
+                    <a:lstStyle/>
+                    <a:p>
+                      <a:pPr lvl="0" indent="0" marL="0">
+                        <a:buNone/>
+                      </a:pPr>
+                      <a:r>
+                        <a:rPr/>
+                        <a:t>sugarberry</a:t>
+                      </a:r>
+                    </a:p>
+                  </a:txBody>
+                </a:tc>
+                <a:tc>
+                  <a:txBody>
+                    <a:bodyPr/>
+                    <a:lstStyle/>
+                    <a:p>
+                      <a:pPr lvl="0" indent="0" marL="0">
+                        <a:buNone/>
+                      </a:pPr>
+                      <a:r>
+                        <a:rPr/>
+                        <a:t>8</a:t>
+                      </a:r>
+                    </a:p>
+                  </a:txBody>
+                </a:tc>
+                <a:tc>
+                  <a:txBody>
+                    <a:bodyPr/>
+                    <a:lstStyle/>
+                    <a:p>
+                      <a:pPr lvl="0" indent="0" marL="0">
+                        <a:buNone/>
+                      </a:pPr>
+                      <a:r>
+                        <a:rPr/>
+                        <a:t>38.144756</a:t>
+                      </a:r>
+                    </a:p>
+                  </a:txBody>
+                </a:tc>
+                <a:tc>
+                  <a:txBody>
+                    <a:bodyPr/>
+                    <a:lstStyle/>
+                    <a:p>
+                      <a:pPr lvl="0" indent="0" marL="0">
+                        <a:buNone/>
+                      </a:pPr>
+                      <a:r>
+                        <a:rPr/>
+                        <a:t>26.680208</a:t>
+                      </a:r>
+                    </a:p>
+                  </a:txBody>
+                </a:tc>
+                <a:tc>
+                  <a:txBody>
+                    <a:bodyPr/>
+                    <a:lstStyle/>
+                    <a:p>
+                      <a:pPr lvl="0" indent="0" marL="0">
+                        <a:buNone/>
+                      </a:pPr>
+                      <a:r>
+                        <a:rPr/>
+                        <a:t>0.665159</a:t>
+                      </a:r>
+                    </a:p>
+                  </a:txBody>
+                </a:tc>
+              </a:tr>
+              <a:tr h="0">
+                <a:tc>
+                  <a:txBody>
+                    <a:bodyPr/>
+                    <a:lstStyle/>
+                    <a:p>
+                      <a:pPr lvl="0" indent="0" marL="0">
+                        <a:buNone/>
+                      </a:pPr>
+                      <a:r>
+                        <a:rPr/>
+                        <a:t>898</a:t>
+                      </a:r>
+                    </a:p>
+                  </a:txBody>
+                </a:tc>
+                <a:tc>
+                  <a:txBody>
+                    <a:bodyPr/>
+                    <a:lstStyle/>
+                    <a:p>
+                      <a:pPr lvl="0" indent="0" marL="0">
+                        <a:buNone/>
+                      </a:pPr>
+                      <a:r>
+                        <a:rPr/>
+                        <a:t>sugarberry</a:t>
+                      </a:r>
+                    </a:p>
+                  </a:txBody>
+                </a:tc>
+                <a:tc>
+                  <a:txBody>
+                    <a:bodyPr/>
+                    <a:lstStyle/>
+                    <a:p>
+                      <a:pPr lvl="0" indent="0" marL="0">
+                        <a:buNone/>
+                      </a:pPr>
+                      <a:r>
+                        <a:rPr/>
+                        <a:t>9</a:t>
+                      </a:r>
+                    </a:p>
+                  </a:txBody>
+                </a:tc>
+                <a:tc>
+                  <a:txBody>
+                    <a:bodyPr/>
+                    <a:lstStyle/>
+                    <a:p>
+                      <a:pPr lvl="0" indent="0" marL="0">
+                        <a:buNone/>
+                      </a:pPr>
+                      <a:r>
+                        <a:rPr/>
+                        <a:t>36.853245</a:t>
+                      </a:r>
+                    </a:p>
+                  </a:txBody>
+                </a:tc>
+                <a:tc>
+                  <a:txBody>
+                    <a:bodyPr/>
+                    <a:lstStyle/>
+                    <a:p>
+                      <a:pPr lvl="0" indent="0" marL="0">
+                        <a:buNone/>
+                      </a:pPr>
+                      <a:r>
+                        <a:rPr/>
+                        <a:t>21.021667</a:t>
+                      </a:r>
+                    </a:p>
+                  </a:txBody>
+                </a:tc>
+                <a:tc>
+                  <a:txBody>
+                    <a:bodyPr/>
+                    <a:lstStyle/>
+                    <a:p>
+                      <a:pPr lvl="0" indent="0" marL="0">
+                        <a:buNone/>
+                      </a:pPr>
+                      <a:r>
+                        <a:rPr/>
+                        <a:t>0.685162</a:t>
+                      </a:r>
+                    </a:p>
+                  </a:txBody>
+                </a:tc>
+              </a:tr>
+              <a:tr h="0">
+                <a:tc>
+                  <a:txBody>
+                    <a:bodyPr/>
+                    <a:lstStyle/>
+                    <a:p>
+                      <a:pPr lvl="0" indent="0" marL="0">
+                        <a:buNone/>
+                      </a:pPr>
+                      <a:r>
+                        <a:rPr/>
+                        <a:t>899</a:t>
+                      </a:r>
+                    </a:p>
+                  </a:txBody>
+                </a:tc>
+                <a:tc>
+                  <a:txBody>
+                    <a:bodyPr/>
+                    <a:lstStyle/>
+                    <a:p>
+                      <a:pPr lvl="0" indent="0" marL="0">
+                        <a:buNone/>
+                      </a:pPr>
+                      <a:r>
+                        <a:rPr/>
+                        <a:t>sugarberry</a:t>
+                      </a:r>
+                    </a:p>
+                  </a:txBody>
+                </a:tc>
+                <a:tc>
+                  <a:txBody>
+                    <a:bodyPr/>
+                    <a:lstStyle/>
+                    <a:p>
+                      <a:pPr lvl="0" indent="0" marL="0">
+                        <a:buNone/>
+                      </a:pPr>
+                      <a:r>
+                        <a:rPr/>
+                        <a:t>10</a:t>
+                      </a:r>
+                    </a:p>
+                  </a:txBody>
+                </a:tc>
+                <a:tc>
+                  <a:txBody>
+                    <a:bodyPr/>
+                    <a:lstStyle/>
+                    <a:p>
+                      <a:pPr lvl="0" indent="0" marL="0">
+                        <a:buNone/>
+                      </a:pPr>
+                      <a:r>
+                        <a:rPr/>
+                        <a:t>40.091106</a:t>
+                      </a:r>
+                    </a:p>
+                  </a:txBody>
+                </a:tc>
+                <a:tc>
+                  <a:txBody>
+                    <a:bodyPr/>
+                    <a:lstStyle/>
+                    <a:p>
+                      <a:pPr lvl="0" indent="0" marL="0">
+                        <a:buNone/>
+                      </a:pPr>
+                      <a:r>
+                        <a:rPr/>
+                        <a:t>23.172083</a:t>
+                      </a:r>
+                    </a:p>
+                  </a:txBody>
+                </a:tc>
+                <a:tc>
+                  <a:txBody>
+                    <a:bodyPr/>
+                    <a:lstStyle/>
+                    <a:p>
+                      <a:pPr lvl="0" indent="0" marL="0">
+                        <a:buNone/>
+                      </a:pPr>
+                      <a:r>
+                        <a:rPr/>
+                        <a:t>0.677519</a:t>
                       </a:r>
                     </a:p>
                   </a:txBody>
@@ -5271,17 +4790,66 @@
             <p:ph type="title"/>
           </p:nvPr>
         </p:nvSpPr>
+        <p:spPr>
+          <a:xfrm>
+            <a:off x="457201" y="204787"/>
+            <a:ext cx="3008313" cy="871538"/>
+          </a:xfrm>
+        </p:spPr>
+        <p:txBody>
+          <a:bodyPr/>
+          <a:lstStyle/>
+          <a:p>
+            <a:pPr lvl="0" indent="0" marL="0">
+              <a:buNone/>
+            </a:pPr>
+            <a:r>
+              <a:rPr/>
+              <a:t>Technical Lead</a:t>
+            </a:r>
+          </a:p>
+        </p:txBody>
+      </p:sp>
+      <p:sp>
+        <p:nvSpPr>
+          <p:cNvPr id="4" name="Text Placeholder 3"/>
+          <p:cNvSpPr>
+            <a:spLocks noGrp="1"/>
+          </p:cNvSpPr>
+          <p:nvPr>
+            <p:ph idx="2" sz="half" type="body"/>
+          </p:nvPr>
+        </p:nvSpPr>
         <p:spPr/>
         <p:txBody>
           <a:bodyPr/>
           <a:lstStyle/>
           <a:p>
-            <a:pPr lvl="0" indent="0" marL="0">
-              <a:buNone/>
-            </a:pPr>
+            <a:pPr lvl="0"/>
             <a:r>
               <a:rPr/>
-              <a:t>Tree Species Name Data:</a:t>
+              <a:t>Split and filtering methods</a:t>
+            </a:r>
+          </a:p>
+          <a:p>
+            <a:pPr lvl="0"/>
+            <a:r>
+              <a:rPr/>
+              <a:t>Feature engineering (what worked and what didn’t)</a:t>
+            </a:r>
+          </a:p>
+          <a:p>
+            <a:pPr lvl="0"/>
+            <a:r>
+              <a:rPr/>
+              <a:t>Tuning k for the best model</a:t>
+            </a:r>
+          </a:p>
+          <a:p>
+            <a:pPr lvl="0"/>
+            <a:r>
+              <a:rPr/>
+              <a:t>The final “best” model and error # Tree Measurement Data:</a:t>
             </a:r>
           </a:p>
         </p:txBody>
@@ -5297,8 +4865,8 @@
           </p:nvPr>
         </p:nvGraphicFramePr>
         <p:xfrm>
-          <a:off x="457200" y="1193800"/>
-          <a:ext cx="8229600" cy="3390900"/>
+          <a:off x="3568700" y="203200"/>
+          <a:ext cx="5105400" cy="4381500"/>
         </p:xfrm>
         <a:graphic>
           <a:graphicData uri="http://schemas.openxmlformats.org/drawingml/2006/table">
@@ -5307,9 +4875,11 @@
                 <a:tableStyleId>{5C22544A-7EE6-4342-B048-85BDC9FD1C3A}</a:tableStyleId>
               </a:tblPr>
               <a:tblGrid>
-                <a:gridCol w="2743200"/>
-                <a:gridCol w="2743200"/>
-                <a:gridCol w="2743200"/>
+                <a:gridCol w="1016000"/>
+                <a:gridCol w="1016000"/>
+                <a:gridCol w="1016000"/>
+                <a:gridCol w="1016000"/>
+                <a:gridCol w="1016000"/>
               </a:tblGrid>
               <a:tr h="0">
                 <a:tc>
@@ -5348,7 +4918,39 @@
                       </a:pPr>
                       <a:r>
                         <a:rPr/>
-                        <a:t>COMMON_NAME</a:t>
+                        <a:t>DO_BH</a:t>
+                      </a:r>
+                    </a:p>
+                  </a:txBody>
+                  <a:tcPr/>
+                </a:tc>
+                <a:tc>
+                  <a:txBody>
+                    <a:bodyPr/>
+                    <a:lstStyle/>
+                    <a:p>
+                      <a:pPr lvl="0" indent="0" marL="0">
+                        <a:buNone/>
+                      </a:pPr>
+                      <a:r>
+                        <a:rPr/>
+                        <a:t>HT_TOT</a:t>
+                      </a:r>
+                    </a:p>
+                  </a:txBody>
+                  <a:tcPr/>
+                </a:tc>
+                <a:tc>
+                  <a:txBody>
+                    <a:bodyPr/>
+                    <a:lstStyle/>
+                    <a:p>
+                      <a:pPr lvl="0" indent="0" marL="0">
+                        <a:buNone/>
+                      </a:pPr>
+                      <a:r>
+                        <a:rPr/>
+                        <a:t>TT_DW_CRM</a:t>
                       </a:r>
                     </a:p>
                   </a:txBody>
@@ -5381,22 +4983,52 @@
                       </a:pPr>
                       <a:r>
                         <a:rPr/>
-                        <a:t>10</a:t>
-                      </a:r>
-                    </a:p>
-                  </a:txBody>
-                </a:tc>
-                <a:tc>
-                  <a:txBody>
-                    <a:bodyPr/>
-                    <a:lstStyle/>
-                    <a:p>
-                      <a:pPr lvl="0" indent="0" marL="0">
-                        <a:buNone/>
-                      </a:pPr>
-                      <a:r>
-                        <a:rPr/>
-                        <a:t>fir spp.</a:t>
+                        <a:t>12</a:t>
+                      </a:r>
+                    </a:p>
+                  </a:txBody>
+                </a:tc>
+                <a:tc>
+                  <a:txBody>
+                    <a:bodyPr/>
+                    <a:lstStyle/>
+                    <a:p>
+                      <a:pPr lvl="0" indent="0" marL="0">
+                        <a:buNone/>
+                      </a:pPr>
+                      <a:r>
+                        <a:rPr/>
+                        <a:t>7.5</a:t>
+                      </a:r>
+                    </a:p>
+                  </a:txBody>
+                </a:tc>
+                <a:tc>
+                  <a:txBody>
+                    <a:bodyPr/>
+                    <a:lstStyle/>
+                    <a:p>
+                      <a:pPr lvl="0" indent="0" marL="0">
+                        <a:buNone/>
+                      </a:pPr>
+                      <a:r>
+                        <a:rPr/>
+                        <a:t>45.2</a:t>
+                      </a:r>
+                    </a:p>
+                  </a:txBody>
+                </a:tc>
+                <a:tc>
+                  <a:txBody>
+                    <a:bodyPr/>
+                    <a:lstStyle/>
+                    <a:p>
+                      <a:pPr lvl="0" indent="0" marL="0">
+                        <a:buNone/>
+                      </a:pPr>
+                      <a:r>
+                        <a:rPr/>
+                        <a:t>178.86</a:t>
                       </a:r>
                     </a:p>
                   </a:txBody>
@@ -5428,22 +5060,52 @@
                       </a:pPr>
                       <a:r>
                         <a:rPr/>
-                        <a:t>11</a:t>
-                      </a:r>
-                    </a:p>
-                  </a:txBody>
-                </a:tc>
-                <a:tc>
-                  <a:txBody>
-                    <a:bodyPr/>
-                    <a:lstStyle/>
-                    <a:p>
-                      <a:pPr lvl="0" indent="0" marL="0">
-                        <a:buNone/>
-                      </a:pPr>
-                      <a:r>
-                        <a:rPr/>
-                        <a:t>Pacific silver fir</a:t>
+                        <a:t>12</a:t>
+                      </a:r>
+                    </a:p>
+                  </a:txBody>
+                </a:tc>
+                <a:tc>
+                  <a:txBody>
+                    <a:bodyPr/>
+                    <a:lstStyle/>
+                    <a:p>
+                      <a:pPr lvl="0" indent="0" marL="0">
+                        <a:buNone/>
+                      </a:pPr>
+                      <a:r>
+                        <a:rPr/>
+                        <a:t>9.3</a:t>
+                      </a:r>
+                    </a:p>
+                  </a:txBody>
+                </a:tc>
+                <a:tc>
+                  <a:txBody>
+                    <a:bodyPr/>
+                    <a:lstStyle/>
+                    <a:p>
+                      <a:pPr lvl="0" indent="0" marL="0">
+                        <a:buNone/>
+                      </a:pPr>
+                      <a:r>
+                        <a:rPr/>
+                        <a:t>62.7</a:t>
+                      </a:r>
+                    </a:p>
+                  </a:txBody>
+                </a:tc>
+                <a:tc>
+                  <a:txBody>
+                    <a:bodyPr/>
+                    <a:lstStyle/>
+                    <a:p>
+                      <a:pPr lvl="0" indent="0" marL="0">
+                        <a:buNone/>
+                      </a:pPr>
+                      <a:r>
+                        <a:rPr/>
+                        <a:t>323.46</a:t>
                       </a:r>
                     </a:p>
                   </a:txBody>
@@ -5490,7 +5152,37 @@
                       </a:pPr>
                       <a:r>
                         <a:rPr/>
-                        <a:t>balsam fir</a:t>
+                        <a:t>9.7</a:t>
+                      </a:r>
+                    </a:p>
+                  </a:txBody>
+                </a:tc>
+                <a:tc>
+                  <a:txBody>
+                    <a:bodyPr/>
+                    <a:lstStyle/>
+                    <a:p>
+                      <a:pPr lvl="0" indent="0" marL="0">
+                        <a:buNone/>
+                      </a:pPr>
+                      <a:r>
+                        <a:rPr/>
+                        <a:t>56.7</a:t>
+                      </a:r>
+                    </a:p>
+                  </a:txBody>
+                </a:tc>
+                <a:tc>
+                  <a:txBody>
+                    <a:bodyPr/>
+                    <a:lstStyle/>
+                    <a:p>
+                      <a:pPr lvl="0" indent="0" marL="0">
+                        <a:buNone/>
+                      </a:pPr>
+                      <a:r>
+                        <a:rPr/>
+                        <a:t>342.47</a:t>
                       </a:r>
                     </a:p>
                   </a:txBody>
@@ -5522,22 +5214,52 @@
                       </a:pPr>
                       <a:r>
                         <a:rPr/>
-                        <a:t>14</a:t>
-                      </a:r>
-                    </a:p>
-                  </a:txBody>
-                </a:tc>
-                <a:tc>
-                  <a:txBody>
-                    <a:bodyPr/>
-                    <a:lstStyle/>
-                    <a:p>
-                      <a:pPr lvl="0" indent="0" marL="0">
-                        <a:buNone/>
-                      </a:pPr>
-                      <a:r>
-                        <a:rPr/>
-                        <a:t>Santa Lucia or bristlecone fir</a:t>
+                        <a:t>12</a:t>
+                      </a:r>
+                    </a:p>
+                  </a:txBody>
+                </a:tc>
+                <a:tc>
+                  <a:txBody>
+                    <a:bodyPr/>
+                    <a:lstStyle/>
+                    <a:p>
+                      <a:pPr lvl="0" indent="0" marL="0">
+                        <a:buNone/>
+                      </a:pPr>
+                      <a:r>
+                        <a:rPr/>
+                        <a:t>11.4</a:t>
+                      </a:r>
+                    </a:p>
+                  </a:txBody>
+                </a:tc>
+                <a:tc>
+                  <a:txBody>
+                    <a:bodyPr/>
+                    <a:lstStyle/>
+                    <a:p>
+                      <a:pPr lvl="0" indent="0" marL="0">
+                        <a:buNone/>
+                      </a:pPr>
+                      <a:r>
+                        <a:rPr/>
+                        <a:t>66.1</a:t>
+                      </a:r>
+                    </a:p>
+                  </a:txBody>
+                </a:tc>
+                <a:tc>
+                  <a:txBody>
+                    <a:bodyPr/>
+                    <a:lstStyle/>
+                    <a:p>
+                      <a:pPr lvl="0" indent="0" marL="0">
+                        <a:buNone/>
+                      </a:pPr>
+                      <a:r>
+                        <a:rPr/>
+                        <a:t>499.35</a:t>
                       </a:r>
                     </a:p>
                   </a:txBody>
@@ -5569,22 +5291,52 @@
                       </a:pPr>
                       <a:r>
                         <a:rPr/>
-                        <a:t>15</a:t>
-                      </a:r>
-                    </a:p>
-                  </a:txBody>
-                </a:tc>
-                <a:tc>
-                  <a:txBody>
-                    <a:bodyPr/>
-                    <a:lstStyle/>
-                    <a:p>
-                      <a:pPr lvl="0" indent="0" marL="0">
-                        <a:buNone/>
-                      </a:pPr>
-                      <a:r>
-                        <a:rPr/>
-                        <a:t>white fir</a:t>
+                        <a:t>12</a:t>
+                      </a:r>
+                    </a:p>
+                  </a:txBody>
+                </a:tc>
+                <a:tc>
+                  <a:txBody>
+                    <a:bodyPr/>
+                    <a:lstStyle/>
+                    <a:p>
+                      <a:pPr lvl="0" indent="0" marL="0">
+                        <a:buNone/>
+                      </a:pPr>
+                      <a:r>
+                        <a:rPr/>
+                        <a:t>6.4</a:t>
+                      </a:r>
+                    </a:p>
+                  </a:txBody>
+                </a:tc>
+                <a:tc>
+                  <a:txBody>
+                    <a:bodyPr/>
+                    <a:lstStyle/>
+                    <a:p>
+                      <a:pPr lvl="0" indent="0" marL="0">
+                        <a:buNone/>
+                      </a:pPr>
+                      <a:r>
+                        <a:rPr/>
+                        <a:t>51.8</a:t>
+                      </a:r>
+                    </a:p>
+                  </a:txBody>
+                </a:tc>
+                <a:tc>
+                  <a:txBody>
+                    <a:bodyPr/>
+                    <a:lstStyle/>
+                    <a:p>
+                      <a:pPr lvl="0" indent="0" marL="0">
+                        <a:buNone/>
+                      </a:pPr>
+                      <a:r>
+                        <a:rPr/>
+                        <a:t>113.92</a:t>
                       </a:r>
                     </a:p>
                   </a:txBody>
@@ -5636,6 +5388,361 @@
             </a:pPr>
             <a:r>
               <a:rPr/>
+              <a:t>Tree Species Name Data:</a:t>
+            </a:r>
+          </a:p>
+        </p:txBody>
+      </p:sp>
+      <p:graphicFrame>
+        <p:nvGraphicFramePr>
+          <p:cNvPr id="6" name="Content Placeholder 5"/>
+          <p:cNvGraphicFramePr>
+            <a:graphicFrameLocks noGrp="1"/>
+          </p:cNvGraphicFramePr>
+          <p:nvPr>
+            <p:ph idx="1"/>
+          </p:nvPr>
+        </p:nvGraphicFramePr>
+        <p:xfrm>
+          <a:off x="457200" y="1193800"/>
+          <a:ext cx="8229600" cy="3390900"/>
+        </p:xfrm>
+        <a:graphic>
+          <a:graphicData uri="http://schemas.openxmlformats.org/drawingml/2006/table">
+            <a:tbl>
+              <a:tblPr firstRow="1" bandRow="1">
+                <a:tableStyleId>{5C22544A-7EE6-4342-B048-85BDC9FD1C3A}</a:tableStyleId>
+              </a:tblPr>
+              <a:tblGrid>
+                <a:gridCol w="2743200"/>
+                <a:gridCol w="2743200"/>
+                <a:gridCol w="2743200"/>
+              </a:tblGrid>
+              <a:tr h="0">
+                <a:tc>
+                  <a:txBody>
+                    <a:bodyPr/>
+                    <a:lstStyle/>
+                    <a:p>
+                      <a:endParaRPr/>
+                    </a:p>
+                  </a:txBody>
+                  <a:tcPr/>
+                </a:tc>
+                <a:tc>
+                  <a:txBody>
+                    <a:bodyPr/>
+                    <a:lstStyle/>
+                    <a:p>
+                      <a:pPr lvl="0" indent="0" marL="0">
+                        <a:buNone/>
+                      </a:pPr>
+                      <a:r>
+                        <a:rPr/>
+                        <a:t>SPCD</a:t>
+                      </a:r>
+                    </a:p>
+                  </a:txBody>
+                  <a:tcPr/>
+                </a:tc>
+                <a:tc>
+                  <a:txBody>
+                    <a:bodyPr/>
+                    <a:lstStyle/>
+                    <a:p>
+                      <a:pPr lvl="0" indent="0" marL="0">
+                        <a:buNone/>
+                      </a:pPr>
+                      <a:r>
+                        <a:rPr/>
+                        <a:t>COMMON_NAME</a:t>
+                      </a:r>
+                    </a:p>
+                  </a:txBody>
+                  <a:tcPr/>
+                </a:tc>
+              </a:tr>
+              <a:tr h="0">
+                <a:tc>
+                  <a:txBody>
+                    <a:bodyPr/>
+                    <a:lstStyle/>
+                    <a:p>
+                      <a:pPr lvl="0" indent="0" marL="0">
+                        <a:buNone/>
+                      </a:pPr>
+                      <a:r>
+                        <a:rPr/>
+                        <a:t>0</a:t>
+                      </a:r>
+                    </a:p>
+                  </a:txBody>
+                </a:tc>
+                <a:tc>
+                  <a:txBody>
+                    <a:bodyPr/>
+                    <a:lstStyle/>
+                    <a:p>
+                      <a:pPr lvl="0" indent="0" marL="0">
+                        <a:buNone/>
+                      </a:pPr>
+                      <a:r>
+                        <a:rPr/>
+                        <a:t>10</a:t>
+                      </a:r>
+                    </a:p>
+                  </a:txBody>
+                </a:tc>
+                <a:tc>
+                  <a:txBody>
+                    <a:bodyPr/>
+                    <a:lstStyle/>
+                    <a:p>
+                      <a:pPr lvl="0" indent="0" marL="0">
+                        <a:buNone/>
+                      </a:pPr>
+                      <a:r>
+                        <a:rPr/>
+                        <a:t>fir spp.</a:t>
+                      </a:r>
+                    </a:p>
+                  </a:txBody>
+                </a:tc>
+              </a:tr>
+              <a:tr h="0">
+                <a:tc>
+                  <a:txBody>
+                    <a:bodyPr/>
+                    <a:lstStyle/>
+                    <a:p>
+                      <a:pPr lvl="0" indent="0" marL="0">
+                        <a:buNone/>
+                      </a:pPr>
+                      <a:r>
+                        <a:rPr/>
+                        <a:t>1</a:t>
+                      </a:r>
+                    </a:p>
+                  </a:txBody>
+                </a:tc>
+                <a:tc>
+                  <a:txBody>
+                    <a:bodyPr/>
+                    <a:lstStyle/>
+                    <a:p>
+                      <a:pPr lvl="0" indent="0" marL="0">
+                        <a:buNone/>
+                      </a:pPr>
+                      <a:r>
+                        <a:rPr/>
+                        <a:t>11</a:t>
+                      </a:r>
+                    </a:p>
+                  </a:txBody>
+                </a:tc>
+                <a:tc>
+                  <a:txBody>
+                    <a:bodyPr/>
+                    <a:lstStyle/>
+                    <a:p>
+                      <a:pPr lvl="0" indent="0" marL="0">
+                        <a:buNone/>
+                      </a:pPr>
+                      <a:r>
+                        <a:rPr/>
+                        <a:t>Pacific silver fir</a:t>
+                      </a:r>
+                    </a:p>
+                  </a:txBody>
+                </a:tc>
+              </a:tr>
+              <a:tr h="0">
+                <a:tc>
+                  <a:txBody>
+                    <a:bodyPr/>
+                    <a:lstStyle/>
+                    <a:p>
+                      <a:pPr lvl="0" indent="0" marL="0">
+                        <a:buNone/>
+                      </a:pPr>
+                      <a:r>
+                        <a:rPr/>
+                        <a:t>2</a:t>
+                      </a:r>
+                    </a:p>
+                  </a:txBody>
+                </a:tc>
+                <a:tc>
+                  <a:txBody>
+                    <a:bodyPr/>
+                    <a:lstStyle/>
+                    <a:p>
+                      <a:pPr lvl="0" indent="0" marL="0">
+                        <a:buNone/>
+                      </a:pPr>
+                      <a:r>
+                        <a:rPr/>
+                        <a:t>12</a:t>
+                      </a:r>
+                    </a:p>
+                  </a:txBody>
+                </a:tc>
+                <a:tc>
+                  <a:txBody>
+                    <a:bodyPr/>
+                    <a:lstStyle/>
+                    <a:p>
+                      <a:pPr lvl="0" indent="0" marL="0">
+                        <a:buNone/>
+                      </a:pPr>
+                      <a:r>
+                        <a:rPr/>
+                        <a:t>balsam fir</a:t>
+                      </a:r>
+                    </a:p>
+                  </a:txBody>
+                </a:tc>
+              </a:tr>
+              <a:tr h="0">
+                <a:tc>
+                  <a:txBody>
+                    <a:bodyPr/>
+                    <a:lstStyle/>
+                    <a:p>
+                      <a:pPr lvl="0" indent="0" marL="0">
+                        <a:buNone/>
+                      </a:pPr>
+                      <a:r>
+                        <a:rPr/>
+                        <a:t>3</a:t>
+                      </a:r>
+                    </a:p>
+                  </a:txBody>
+                </a:tc>
+                <a:tc>
+                  <a:txBody>
+                    <a:bodyPr/>
+                    <a:lstStyle/>
+                    <a:p>
+                      <a:pPr lvl="0" indent="0" marL="0">
+                        <a:buNone/>
+                      </a:pPr>
+                      <a:r>
+                        <a:rPr/>
+                        <a:t>14</a:t>
+                      </a:r>
+                    </a:p>
+                  </a:txBody>
+                </a:tc>
+                <a:tc>
+                  <a:txBody>
+                    <a:bodyPr/>
+                    <a:lstStyle/>
+                    <a:p>
+                      <a:pPr lvl="0" indent="0" marL="0">
+                        <a:buNone/>
+                      </a:pPr>
+                      <a:r>
+                        <a:rPr/>
+                        <a:t>Santa Lucia or bristlecone fir</a:t>
+                      </a:r>
+                    </a:p>
+                  </a:txBody>
+                </a:tc>
+              </a:tr>
+              <a:tr h="0">
+                <a:tc>
+                  <a:txBody>
+                    <a:bodyPr/>
+                    <a:lstStyle/>
+                    <a:p>
+                      <a:pPr lvl="0" indent="0" marL="0">
+                        <a:buNone/>
+                      </a:pPr>
+                      <a:r>
+                        <a:rPr/>
+                        <a:t>4</a:t>
+                      </a:r>
+                    </a:p>
+                  </a:txBody>
+                </a:tc>
+                <a:tc>
+                  <a:txBody>
+                    <a:bodyPr/>
+                    <a:lstStyle/>
+                    <a:p>
+                      <a:pPr lvl="0" indent="0" marL="0">
+                        <a:buNone/>
+                      </a:pPr>
+                      <a:r>
+                        <a:rPr/>
+                        <a:t>15</a:t>
+                      </a:r>
+                    </a:p>
+                  </a:txBody>
+                </a:tc>
+                <a:tc>
+                  <a:txBody>
+                    <a:bodyPr/>
+                    <a:lstStyle/>
+                    <a:p>
+                      <a:pPr lvl="0" indent="0" marL="0">
+                        <a:buNone/>
+                      </a:pPr>
+                      <a:r>
+                        <a:rPr/>
+                        <a:t>white fir</a:t>
+                      </a:r>
+                    </a:p>
+                  </a:txBody>
+                </a:tc>
+              </a:tr>
+            </a:tbl>
+          </a:graphicData>
+        </a:graphic>
+      </p:graphicFrame>
+    </p:spTree>
+  </p:cSld>
+</p:sld>
+</file>
+
+<file path=ppt/slides/slide17.xml><?xml version="1.0" encoding="utf-8"?>
+<p:sld xmlns:a="http://schemas.openxmlformats.org/drawingml/2006/main" xmlns:r="http://schemas.openxmlformats.org/officeDocument/2006/relationships" xmlns:p="http://schemas.openxmlformats.org/presentationml/2006/main">
+  <p:cSld>
+    <p:spTree>
+      <p:nvGrpSpPr>
+        <p:cNvPr id="1" name=""/>
+        <p:cNvGrpSpPr/>
+        <p:nvPr/>
+      </p:nvGrpSpPr>
+      <p:grpSpPr>
+        <a:xfrm>
+          <a:off x="0" y="0"/>
+          <a:ext cx="0" cy="0"/>
+          <a:chOff x="0" y="0"/>
+          <a:chExt cx="0" cy="0"/>
+        </a:xfrm>
+      </p:grpSpPr>
+      <p:sp>
+        <p:nvSpPr>
+          <p:cNvPr id="2" name="Title 1"/>
+          <p:cNvSpPr>
+            <a:spLocks noGrp="1"/>
+          </p:cNvSpPr>
+          <p:nvPr>
+            <p:ph type="title"/>
+          </p:nvPr>
+        </p:nvSpPr>
+        <p:spPr/>
+        <p:txBody>
+          <a:bodyPr/>
+          <a:lstStyle/>
+          <a:p>
+            <a:pPr lvl="0" indent="0" marL="0">
+              <a:buNone/>
+            </a:pPr>
+            <a:r>
+              <a:rPr/>
               <a:t>Combined Dataset (species mapped onto bigger dataset):</a:t>
             </a:r>
           </a:p>
@@ -6230,7 +6337,638 @@
 </p:sld>
 </file>
 
-<file path=ppt/slides/slide17.xml><?xml version="1.0" encoding="utf-8"?>
+<file path=ppt/slides/slide18.xml><?xml version="1.0" encoding="utf-8"?>
+<p:sld xmlns:a="http://schemas.openxmlformats.org/drawingml/2006/main" xmlns:r="http://schemas.openxmlformats.org/officeDocument/2006/relationships" xmlns:p="http://schemas.openxmlformats.org/presentationml/2006/main">
+  <p:cSld>
+    <p:spTree>
+      <p:nvGrpSpPr>
+        <p:cNvPr id="1" name=""/>
+        <p:cNvGrpSpPr/>
+        <p:nvPr/>
+      </p:nvGrpSpPr>
+      <p:grpSpPr>
+        <a:xfrm>
+          <a:off x="0" y="0"/>
+          <a:ext cx="0" cy="0"/>
+          <a:chOff x="0" y="0"/>
+          <a:chExt cx="0" cy="0"/>
+        </a:xfrm>
+      </p:grpSpPr>
+      <p:sp>
+        <p:nvSpPr>
+          <p:cNvPr id="2" name="Title 1"/>
+          <p:cNvSpPr>
+            <a:spLocks noGrp="1"/>
+          </p:cNvSpPr>
+          <p:nvPr>
+            <p:ph type="title"/>
+          </p:nvPr>
+        </p:nvSpPr>
+        <p:spPr/>
+        <p:txBody>
+          <a:bodyPr/>
+          <a:lstStyle/>
+          <a:p>
+            <a:pPr lvl="0" indent="0" marL="0">
+              <a:buNone/>
+            </a:pPr>
+            <a:r>
+              <a:rPr/>
+              <a:t>Filtered data</a:t>
+            </a:r>
+          </a:p>
+        </p:txBody>
+      </p:sp>
+      <p:graphicFrame>
+        <p:nvGraphicFramePr>
+          <p:cNvPr id="6" name="Content Placeholder 5"/>
+          <p:cNvGraphicFramePr>
+            <a:graphicFrameLocks noGrp="1"/>
+          </p:cNvGraphicFramePr>
+          <p:nvPr>
+            <p:ph idx="1"/>
+          </p:nvPr>
+        </p:nvGraphicFramePr>
+        <p:xfrm>
+          <a:off x="457200" y="1193800"/>
+          <a:ext cx="8229600" cy="3390900"/>
+        </p:xfrm>
+        <a:graphic>
+          <a:graphicData uri="http://schemas.openxmlformats.org/drawingml/2006/table">
+            <a:tbl>
+              <a:tblPr firstRow="1" bandRow="1">
+                <a:tableStyleId>{5C22544A-7EE6-4342-B048-85BDC9FD1C3A}</a:tableStyleId>
+              </a:tblPr>
+              <a:tblGrid>
+                <a:gridCol w="1371600"/>
+                <a:gridCol w="1371600"/>
+                <a:gridCol w="1371600"/>
+                <a:gridCol w="1371600"/>
+                <a:gridCol w="1371600"/>
+                <a:gridCol w="1371600"/>
+              </a:tblGrid>
+              <a:tr h="0">
+                <a:tc>
+                  <a:txBody>
+                    <a:bodyPr/>
+                    <a:lstStyle/>
+                    <a:p>
+                      <a:endParaRPr/>
+                    </a:p>
+                  </a:txBody>
+                  <a:tcPr/>
+                </a:tc>
+                <a:tc>
+                  <a:txBody>
+                    <a:bodyPr/>
+                    <a:lstStyle/>
+                    <a:p>
+                      <a:pPr lvl="0" indent="0" marL="0">
+                        <a:buNone/>
+                      </a:pPr>
+                      <a:r>
+                        <a:rPr/>
+                        <a:t>SPCD</a:t>
+                      </a:r>
+                    </a:p>
+                  </a:txBody>
+                  <a:tcPr/>
+                </a:tc>
+                <a:tc>
+                  <a:txBody>
+                    <a:bodyPr/>
+                    <a:lstStyle/>
+                    <a:p>
+                      <a:pPr lvl="0" indent="0" marL="0">
+                        <a:buNone/>
+                      </a:pPr>
+                      <a:r>
+                        <a:rPr/>
+                        <a:t>DO_BH</a:t>
+                      </a:r>
+                    </a:p>
+                  </a:txBody>
+                  <a:tcPr/>
+                </a:tc>
+                <a:tc>
+                  <a:txBody>
+                    <a:bodyPr/>
+                    <a:lstStyle/>
+                    <a:p>
+                      <a:pPr lvl="0" indent="0" marL="0">
+                        <a:buNone/>
+                      </a:pPr>
+                      <a:r>
+                        <a:rPr/>
+                        <a:t>HT_TOT</a:t>
+                      </a:r>
+                    </a:p>
+                  </a:txBody>
+                  <a:tcPr/>
+                </a:tc>
+                <a:tc>
+                  <a:txBody>
+                    <a:bodyPr/>
+                    <a:lstStyle/>
+                    <a:p>
+                      <a:pPr lvl="0" indent="0" marL="0">
+                        <a:buNone/>
+                      </a:pPr>
+                      <a:r>
+                        <a:rPr/>
+                        <a:t>TT_DW_CRM</a:t>
+                      </a:r>
+                    </a:p>
+                  </a:txBody>
+                  <a:tcPr/>
+                </a:tc>
+                <a:tc>
+                  <a:txBody>
+                    <a:bodyPr/>
+                    <a:lstStyle/>
+                    <a:p>
+                      <a:pPr lvl="0" indent="0" marL="0">
+                        <a:buNone/>
+                      </a:pPr>
+                      <a:r>
+                        <a:rPr/>
+                        <a:t>COMMON_NAME</a:t>
+                      </a:r>
+                    </a:p>
+                  </a:txBody>
+                  <a:tcPr/>
+                </a:tc>
+              </a:tr>
+              <a:tr h="0">
+                <a:tc>
+                  <a:txBody>
+                    <a:bodyPr/>
+                    <a:lstStyle/>
+                    <a:p>
+                      <a:pPr lvl="0" indent="0" marL="0">
+                        <a:buNone/>
+                      </a:pPr>
+                      <a:r>
+                        <a:rPr/>
+                        <a:t>0</a:t>
+                      </a:r>
+                    </a:p>
+                  </a:txBody>
+                </a:tc>
+                <a:tc>
+                  <a:txBody>
+                    <a:bodyPr/>
+                    <a:lstStyle/>
+                    <a:p>
+                      <a:pPr lvl="0" indent="0" marL="0">
+                        <a:buNone/>
+                      </a:pPr>
+                      <a:r>
+                        <a:rPr/>
+                        <a:t>12</a:t>
+                      </a:r>
+                    </a:p>
+                  </a:txBody>
+                </a:tc>
+                <a:tc>
+                  <a:txBody>
+                    <a:bodyPr/>
+                    <a:lstStyle/>
+                    <a:p>
+                      <a:pPr lvl="0" indent="0" marL="0">
+                        <a:buNone/>
+                      </a:pPr>
+                      <a:r>
+                        <a:rPr/>
+                        <a:t>7.5</a:t>
+                      </a:r>
+                    </a:p>
+                  </a:txBody>
+                </a:tc>
+                <a:tc>
+                  <a:txBody>
+                    <a:bodyPr/>
+                    <a:lstStyle/>
+                    <a:p>
+                      <a:pPr lvl="0" indent="0" marL="0">
+                        <a:buNone/>
+                      </a:pPr>
+                      <a:r>
+                        <a:rPr/>
+                        <a:t>45.2</a:t>
+                      </a:r>
+                    </a:p>
+                  </a:txBody>
+                </a:tc>
+                <a:tc>
+                  <a:txBody>
+                    <a:bodyPr/>
+                    <a:lstStyle/>
+                    <a:p>
+                      <a:pPr lvl="0" indent="0" marL="0">
+                        <a:buNone/>
+                      </a:pPr>
+                      <a:r>
+                        <a:rPr/>
+                        <a:t>178.86</a:t>
+                      </a:r>
+                    </a:p>
+                  </a:txBody>
+                </a:tc>
+                <a:tc>
+                  <a:txBody>
+                    <a:bodyPr/>
+                    <a:lstStyle/>
+                    <a:p>
+                      <a:pPr lvl="0" indent="0" marL="0">
+                        <a:buNone/>
+                      </a:pPr>
+                      <a:r>
+                        <a:rPr/>
+                        <a:t>balsam fir</a:t>
+                      </a:r>
+                    </a:p>
+                  </a:txBody>
+                </a:tc>
+              </a:tr>
+              <a:tr h="0">
+                <a:tc>
+                  <a:txBody>
+                    <a:bodyPr/>
+                    <a:lstStyle/>
+                    <a:p>
+                      <a:pPr lvl="0" indent="0" marL="0">
+                        <a:buNone/>
+                      </a:pPr>
+                      <a:r>
+                        <a:rPr/>
+                        <a:t>1</a:t>
+                      </a:r>
+                    </a:p>
+                  </a:txBody>
+                </a:tc>
+                <a:tc>
+                  <a:txBody>
+                    <a:bodyPr/>
+                    <a:lstStyle/>
+                    <a:p>
+                      <a:pPr lvl="0" indent="0" marL="0">
+                        <a:buNone/>
+                      </a:pPr>
+                      <a:r>
+                        <a:rPr/>
+                        <a:t>12</a:t>
+                      </a:r>
+                    </a:p>
+                  </a:txBody>
+                </a:tc>
+                <a:tc>
+                  <a:txBody>
+                    <a:bodyPr/>
+                    <a:lstStyle/>
+                    <a:p>
+                      <a:pPr lvl="0" indent="0" marL="0">
+                        <a:buNone/>
+                      </a:pPr>
+                      <a:r>
+                        <a:rPr/>
+                        <a:t>9.3</a:t>
+                      </a:r>
+                    </a:p>
+                  </a:txBody>
+                </a:tc>
+                <a:tc>
+                  <a:txBody>
+                    <a:bodyPr/>
+                    <a:lstStyle/>
+                    <a:p>
+                      <a:pPr lvl="0" indent="0" marL="0">
+                        <a:buNone/>
+                      </a:pPr>
+                      <a:r>
+                        <a:rPr/>
+                        <a:t>62.7</a:t>
+                      </a:r>
+                    </a:p>
+                  </a:txBody>
+                </a:tc>
+                <a:tc>
+                  <a:txBody>
+                    <a:bodyPr/>
+                    <a:lstStyle/>
+                    <a:p>
+                      <a:pPr lvl="0" indent="0" marL="0">
+                        <a:buNone/>
+                      </a:pPr>
+                      <a:r>
+                        <a:rPr/>
+                        <a:t>323.46</a:t>
+                      </a:r>
+                    </a:p>
+                  </a:txBody>
+                </a:tc>
+                <a:tc>
+                  <a:txBody>
+                    <a:bodyPr/>
+                    <a:lstStyle/>
+                    <a:p>
+                      <a:pPr lvl="0" indent="0" marL="0">
+                        <a:buNone/>
+                      </a:pPr>
+                      <a:r>
+                        <a:rPr/>
+                        <a:t>balsam fir</a:t>
+                      </a:r>
+                    </a:p>
+                  </a:txBody>
+                </a:tc>
+              </a:tr>
+              <a:tr h="0">
+                <a:tc>
+                  <a:txBody>
+                    <a:bodyPr/>
+                    <a:lstStyle/>
+                    <a:p>
+                      <a:pPr lvl="0" indent="0" marL="0">
+                        <a:buNone/>
+                      </a:pPr>
+                      <a:r>
+                        <a:rPr/>
+                        <a:t>2</a:t>
+                      </a:r>
+                    </a:p>
+                  </a:txBody>
+                </a:tc>
+                <a:tc>
+                  <a:txBody>
+                    <a:bodyPr/>
+                    <a:lstStyle/>
+                    <a:p>
+                      <a:pPr lvl="0" indent="0" marL="0">
+                        <a:buNone/>
+                      </a:pPr>
+                      <a:r>
+                        <a:rPr/>
+                        <a:t>12</a:t>
+                      </a:r>
+                    </a:p>
+                  </a:txBody>
+                </a:tc>
+                <a:tc>
+                  <a:txBody>
+                    <a:bodyPr/>
+                    <a:lstStyle/>
+                    <a:p>
+                      <a:pPr lvl="0" indent="0" marL="0">
+                        <a:buNone/>
+                      </a:pPr>
+                      <a:r>
+                        <a:rPr/>
+                        <a:t>9.7</a:t>
+                      </a:r>
+                    </a:p>
+                  </a:txBody>
+                </a:tc>
+                <a:tc>
+                  <a:txBody>
+                    <a:bodyPr/>
+                    <a:lstStyle/>
+                    <a:p>
+                      <a:pPr lvl="0" indent="0" marL="0">
+                        <a:buNone/>
+                      </a:pPr>
+                      <a:r>
+                        <a:rPr/>
+                        <a:t>56.7</a:t>
+                      </a:r>
+                    </a:p>
+                  </a:txBody>
+                </a:tc>
+                <a:tc>
+                  <a:txBody>
+                    <a:bodyPr/>
+                    <a:lstStyle/>
+                    <a:p>
+                      <a:pPr lvl="0" indent="0" marL="0">
+                        <a:buNone/>
+                      </a:pPr>
+                      <a:r>
+                        <a:rPr/>
+                        <a:t>342.47</a:t>
+                      </a:r>
+                    </a:p>
+                  </a:txBody>
+                </a:tc>
+                <a:tc>
+                  <a:txBody>
+                    <a:bodyPr/>
+                    <a:lstStyle/>
+                    <a:p>
+                      <a:pPr lvl="0" indent="0" marL="0">
+                        <a:buNone/>
+                      </a:pPr>
+                      <a:r>
+                        <a:rPr/>
+                        <a:t>balsam fir</a:t>
+                      </a:r>
+                    </a:p>
+                  </a:txBody>
+                </a:tc>
+              </a:tr>
+              <a:tr h="0">
+                <a:tc>
+                  <a:txBody>
+                    <a:bodyPr/>
+                    <a:lstStyle/>
+                    <a:p>
+                      <a:pPr lvl="0" indent="0" marL="0">
+                        <a:buNone/>
+                      </a:pPr>
+                      <a:r>
+                        <a:rPr/>
+                        <a:t>3</a:t>
+                      </a:r>
+                    </a:p>
+                  </a:txBody>
+                </a:tc>
+                <a:tc>
+                  <a:txBody>
+                    <a:bodyPr/>
+                    <a:lstStyle/>
+                    <a:p>
+                      <a:pPr lvl="0" indent="0" marL="0">
+                        <a:buNone/>
+                      </a:pPr>
+                      <a:r>
+                        <a:rPr/>
+                        <a:t>12</a:t>
+                      </a:r>
+                    </a:p>
+                  </a:txBody>
+                </a:tc>
+                <a:tc>
+                  <a:txBody>
+                    <a:bodyPr/>
+                    <a:lstStyle/>
+                    <a:p>
+                      <a:pPr lvl="0" indent="0" marL="0">
+                        <a:buNone/>
+                      </a:pPr>
+                      <a:r>
+                        <a:rPr/>
+                        <a:t>11.4</a:t>
+                      </a:r>
+                    </a:p>
+                  </a:txBody>
+                </a:tc>
+                <a:tc>
+                  <a:txBody>
+                    <a:bodyPr/>
+                    <a:lstStyle/>
+                    <a:p>
+                      <a:pPr lvl="0" indent="0" marL="0">
+                        <a:buNone/>
+                      </a:pPr>
+                      <a:r>
+                        <a:rPr/>
+                        <a:t>66.1</a:t>
+                      </a:r>
+                    </a:p>
+                  </a:txBody>
+                </a:tc>
+                <a:tc>
+                  <a:txBody>
+                    <a:bodyPr/>
+                    <a:lstStyle/>
+                    <a:p>
+                      <a:pPr lvl="0" indent="0" marL="0">
+                        <a:buNone/>
+                      </a:pPr>
+                      <a:r>
+                        <a:rPr/>
+                        <a:t>499.35</a:t>
+                      </a:r>
+                    </a:p>
+                  </a:txBody>
+                </a:tc>
+                <a:tc>
+                  <a:txBody>
+                    <a:bodyPr/>
+                    <a:lstStyle/>
+                    <a:p>
+                      <a:pPr lvl="0" indent="0" marL="0">
+                        <a:buNone/>
+                      </a:pPr>
+                      <a:r>
+                        <a:rPr/>
+                        <a:t>balsam fir</a:t>
+                      </a:r>
+                    </a:p>
+                  </a:txBody>
+                </a:tc>
+              </a:tr>
+              <a:tr h="0">
+                <a:tc>
+                  <a:txBody>
+                    <a:bodyPr/>
+                    <a:lstStyle/>
+                    <a:p>
+                      <a:pPr lvl="0" indent="0" marL="0">
+                        <a:buNone/>
+                      </a:pPr>
+                      <a:r>
+                        <a:rPr/>
+                        <a:t>4</a:t>
+                      </a:r>
+                    </a:p>
+                  </a:txBody>
+                </a:tc>
+                <a:tc>
+                  <a:txBody>
+                    <a:bodyPr/>
+                    <a:lstStyle/>
+                    <a:p>
+                      <a:pPr lvl="0" indent="0" marL="0">
+                        <a:buNone/>
+                      </a:pPr>
+                      <a:r>
+                        <a:rPr/>
+                        <a:t>12</a:t>
+                      </a:r>
+                    </a:p>
+                  </a:txBody>
+                </a:tc>
+                <a:tc>
+                  <a:txBody>
+                    <a:bodyPr/>
+                    <a:lstStyle/>
+                    <a:p>
+                      <a:pPr lvl="0" indent="0" marL="0">
+                        <a:buNone/>
+                      </a:pPr>
+                      <a:r>
+                        <a:rPr/>
+                        <a:t>6.4</a:t>
+                      </a:r>
+                    </a:p>
+                  </a:txBody>
+                </a:tc>
+                <a:tc>
+                  <a:txBody>
+                    <a:bodyPr/>
+                    <a:lstStyle/>
+                    <a:p>
+                      <a:pPr lvl="0" indent="0" marL="0">
+                        <a:buNone/>
+                      </a:pPr>
+                      <a:r>
+                        <a:rPr/>
+                        <a:t>51.8</a:t>
+                      </a:r>
+                    </a:p>
+                  </a:txBody>
+                </a:tc>
+                <a:tc>
+                  <a:txBody>
+                    <a:bodyPr/>
+                    <a:lstStyle/>
+                    <a:p>
+                      <a:pPr lvl="0" indent="0" marL="0">
+                        <a:buNone/>
+                      </a:pPr>
+                      <a:r>
+                        <a:rPr/>
+                        <a:t>113.92</a:t>
+                      </a:r>
+                    </a:p>
+                  </a:txBody>
+                </a:tc>
+                <a:tc>
+                  <a:txBody>
+                    <a:bodyPr/>
+                    <a:lstStyle/>
+                    <a:p>
+                      <a:pPr lvl="0" indent="0" marL="0">
+                        <a:buNone/>
+                      </a:pPr>
+                      <a:r>
+                        <a:rPr/>
+                        <a:t>balsam fir</a:t>
+                      </a:r>
+                    </a:p>
+                  </a:txBody>
+                </a:tc>
+              </a:tr>
+            </a:tbl>
+          </a:graphicData>
+        </a:graphic>
+      </p:graphicFrame>
+    </p:spTree>
+  </p:cSld>
+</p:sld>
+</file>
+
+<file path=ppt/slides/slide19.xml><?xml version="1.0" encoding="utf-8"?>
 <p:sld xmlns:a="http://schemas.openxmlformats.org/drawingml/2006/main" xmlns:r="http://schemas.openxmlformats.org/officeDocument/2006/relationships" xmlns:p="http://schemas.openxmlformats.org/presentationml/2006/main">
   <p:cSld>
     <p:spTree>

--- a/Project-3/presentation.pptx
+++ b/Project-3/presentation.pptx
@@ -23,6 +23,8 @@
     <p:sldId id="271" r:id="rId17"/>
     <p:sldId id="272" r:id="rId18"/>
     <p:sldId id="273" r:id="rId19"/>
+    <p:sldId id="274" r:id="rId20"/>
+    <p:sldId id="275" r:id="rId21"/>
   </p:sldIdLst>
   <p:sldSz cx="9144000" cy="5143500" type="screen16x9"/>
   <p:notesSz cx="6858000" cy="9144000"/>
@@ -3458,7 +3460,7 @@
             </a:pPr>
             <a:r>
               <a:rPr/>
-              <a:t>Performance Metric</a:t>
+              <a:t>Consultation</a:t>
             </a:r>
           </a:p>
         </p:txBody>
@@ -3478,12 +3480,17 @@
           <a:bodyPr/>
           <a:lstStyle/>
           <a:p>
-            <a:pPr lvl="0" indent="0" marL="0">
-              <a:buNone/>
-            </a:pPr>
+            <a:pPr lvl="0"/>
             <a:r>
               <a:rPr/>
-              <a:t>The Performance metric we choose is Root Mean Square Logarithmic Error(RMSLE), because when we were looking at the dataset of the biomass of different kinds of tree species, we saw that some species have more data than other species so the assume that the data is skewed</a:t>
+              <a:t>When predicting tree biomass, employ the performance metric root mean square logarithmic error since biomass data varies greatly, ranging from tiny saplings to enormous trees, majority of trees having exponential growth.</a:t>
+            </a:r>
+          </a:p>
+          <a:p>
+            <a:pPr lvl="0"/>
+            <a:r>
+              <a:rPr/>
+              <a:t>We chose kNN regression over linear regression because when looking at the graphs Dean presented, we saw that the tree diameter/height vs. biomass graphs all have exponential growth.</a:t>
             </a:r>
           </a:p>
         </p:txBody>
@@ -3530,1147 +3537,34 @@
             </a:pPr>
             <a:r>
               <a:rPr/>
-              <a:t>Model</a:t>
+              <a:t>Discussion with the group :3</a:t>
             </a:r>
           </a:p>
         </p:txBody>
       </p:sp>
-      <p:graphicFrame>
-        <p:nvGraphicFramePr>
-          <p:cNvPr id="6" name="Content Placeholder 5"/>
-          <p:cNvGraphicFramePr>
-            <a:graphicFrameLocks noGrp="1"/>
-          </p:cNvGraphicFramePr>
+      <p:sp>
+        <p:nvSpPr>
+          <p:cNvPr id="3" name="Content Placeholder 2"/>
+          <p:cNvSpPr>
+            <a:spLocks noGrp="1"/>
+          </p:cNvSpPr>
           <p:nvPr>
             <p:ph idx="1"/>
           </p:nvPr>
-        </p:nvGraphicFramePr>
-        <p:xfrm>
-          <a:off x="457200" y="1193800"/>
-          <a:ext cx="8229600" cy="3390900"/>
-        </p:xfrm>
-        <a:graphic>
-          <a:graphicData uri="http://schemas.openxmlformats.org/drawingml/2006/table">
-            <a:tbl>
-              <a:tblPr firstRow="1" bandRow="1">
-                <a:tableStyleId>{5C22544A-7EE6-4342-B048-85BDC9FD1C3A}</a:tableStyleId>
-              </a:tblPr>
-              <a:tblGrid>
-                <a:gridCol w="1371600"/>
-                <a:gridCol w="1371600"/>
-                <a:gridCol w="1371600"/>
-                <a:gridCol w="1371600"/>
-                <a:gridCol w="1371600"/>
-                <a:gridCol w="1371600"/>
-              </a:tblGrid>
-              <a:tr h="0">
-                <a:tc>
-                  <a:txBody>
-                    <a:bodyPr/>
-                    <a:lstStyle/>
-                    <a:p>
-                      <a:endParaRPr/>
-                    </a:p>
-                  </a:txBody>
-                  <a:tcPr/>
-                </a:tc>
-                <a:tc>
-                  <a:txBody>
-                    <a:bodyPr/>
-                    <a:lstStyle/>
-                    <a:p>
-                      <a:pPr lvl="0" indent="0" marL="0">
-                        <a:buNone/>
-                      </a:pPr>
-                      <a:r>
-                        <a:rPr/>
-                        <a:t>Species</a:t>
-                      </a:r>
-                    </a:p>
-                  </a:txBody>
-                  <a:tcPr/>
-                </a:tc>
-                <a:tc>
-                  <a:txBody>
-                    <a:bodyPr/>
-                    <a:lstStyle/>
-                    <a:p>
-                      <a:pPr lvl="0" indent="0" marL="0">
-                        <a:buNone/>
-                      </a:pPr>
-                      <a:r>
-                        <a:rPr/>
-                        <a:t>k</a:t>
-                      </a:r>
-                    </a:p>
-                  </a:txBody>
-                  <a:tcPr/>
-                </a:tc>
-                <a:tc>
-                  <a:txBody>
-                    <a:bodyPr/>
-                    <a:lstStyle/>
-                    <a:p>
-                      <a:pPr lvl="0" indent="0" marL="0">
-                        <a:buNone/>
-                      </a:pPr>
-                      <a:r>
-                        <a:rPr/>
-                        <a:t>RMSE</a:t>
-                      </a:r>
-                    </a:p>
-                  </a:txBody>
-                  <a:tcPr/>
-                </a:tc>
-                <a:tc>
-                  <a:txBody>
-                    <a:bodyPr/>
-                    <a:lstStyle/>
-                    <a:p>
-                      <a:pPr lvl="0" indent="0" marL="0">
-                        <a:buNone/>
-                      </a:pPr>
-                      <a:r>
-                        <a:rPr/>
-                        <a:t>MAE</a:t>
-                      </a:r>
-                    </a:p>
-                  </a:txBody>
-                  <a:tcPr/>
-                </a:tc>
-                <a:tc>
-                  <a:txBody>
-                    <a:bodyPr/>
-                    <a:lstStyle/>
-                    <a:p>
-                      <a:pPr lvl="0" indent="0" marL="0">
-                        <a:buNone/>
-                      </a:pPr>
-                      <a:r>
-                        <a:rPr/>
-                        <a:t>RMSLE</a:t>
-                      </a:r>
-                    </a:p>
-                  </a:txBody>
-                  <a:tcPr/>
-                </a:tc>
-              </a:tr>
-              <a:tr h="0">
-                <a:tc>
-                  <a:txBody>
-                    <a:bodyPr/>
-                    <a:lstStyle/>
-                    <a:p>
-                      <a:pPr lvl="0" indent="0" marL="0">
-                        <a:buNone/>
-                      </a:pPr>
-                      <a:r>
-                        <a:rPr/>
-                        <a:t>0</a:t>
-                      </a:r>
-                    </a:p>
-                  </a:txBody>
-                </a:tc>
-                <a:tc>
-                  <a:txBody>
-                    <a:bodyPr/>
-                    <a:lstStyle/>
-                    <a:p>
-                      <a:pPr lvl="0" indent="0" marL="0">
-                        <a:buNone/>
-                      </a:pPr>
-                      <a:r>
-                        <a:rPr/>
-                        <a:t>balsam fir</a:t>
-                      </a:r>
-                    </a:p>
-                  </a:txBody>
-                </a:tc>
-                <a:tc>
-                  <a:txBody>
-                    <a:bodyPr/>
-                    <a:lstStyle/>
-                    <a:p>
-                      <a:pPr lvl="0" indent="0" marL="0">
-                        <a:buNone/>
-                      </a:pPr>
-                      <a:r>
-                        <a:rPr/>
-                        <a:t>2</a:t>
-                      </a:r>
-                    </a:p>
-                  </a:txBody>
-                </a:tc>
-                <a:tc>
-                  <a:txBody>
-                    <a:bodyPr/>
-                    <a:lstStyle/>
-                    <a:p>
-                      <a:pPr lvl="0" indent="0" marL="0">
-                        <a:buNone/>
-                      </a:pPr>
-                      <a:r>
-                        <a:rPr/>
-                        <a:t>125.825473</a:t>
-                      </a:r>
-                    </a:p>
-                  </a:txBody>
-                </a:tc>
-                <a:tc>
-                  <a:txBody>
-                    <a:bodyPr/>
-                    <a:lstStyle/>
-                    <a:p>
-                      <a:pPr lvl="0" indent="0" marL="0">
-                        <a:buNone/>
-                      </a:pPr>
-                      <a:r>
-                        <a:rPr/>
-                        <a:t>34.801913</a:t>
-                      </a:r>
-                    </a:p>
-                  </a:txBody>
-                </a:tc>
-                <a:tc>
-                  <a:txBody>
-                    <a:bodyPr/>
-                    <a:lstStyle/>
-                    <a:p>
-                      <a:pPr lvl="0" indent="0" marL="0">
-                        <a:buNone/>
-                      </a:pPr>
-                      <a:r>
-                        <a:rPr/>
-                        <a:t>0.119574</a:t>
-                      </a:r>
-                    </a:p>
-                  </a:txBody>
-                </a:tc>
-              </a:tr>
-              <a:tr h="0">
-                <a:tc>
-                  <a:txBody>
-                    <a:bodyPr/>
-                    <a:lstStyle/>
-                    <a:p>
-                      <a:pPr lvl="0" indent="0" marL="0">
-                        <a:buNone/>
-                      </a:pPr>
-                      <a:r>
-                        <a:rPr/>
-                        <a:t>1</a:t>
-                      </a:r>
-                    </a:p>
-                  </a:txBody>
-                </a:tc>
-                <a:tc>
-                  <a:txBody>
-                    <a:bodyPr/>
-                    <a:lstStyle/>
-                    <a:p>
-                      <a:pPr lvl="0" indent="0" marL="0">
-                        <a:buNone/>
-                      </a:pPr>
-                      <a:r>
-                        <a:rPr/>
-                        <a:t>balsam fir</a:t>
-                      </a:r>
-                    </a:p>
-                  </a:txBody>
-                </a:tc>
-                <a:tc>
-                  <a:txBody>
-                    <a:bodyPr/>
-                    <a:lstStyle/>
-                    <a:p>
-                      <a:pPr lvl="0" indent="0" marL="0">
-                        <a:buNone/>
-                      </a:pPr>
-                      <a:r>
-                        <a:rPr/>
-                        <a:t>3</a:t>
-                      </a:r>
-                    </a:p>
-                  </a:txBody>
-                </a:tc>
-                <a:tc>
-                  <a:txBody>
-                    <a:bodyPr/>
-                    <a:lstStyle/>
-                    <a:p>
-                      <a:pPr lvl="0" indent="0" marL="0">
-                        <a:buNone/>
-                      </a:pPr>
-                      <a:r>
-                        <a:rPr/>
-                        <a:t>129.651479</a:t>
-                      </a:r>
-                    </a:p>
-                  </a:txBody>
-                </a:tc>
-                <a:tc>
-                  <a:txBody>
-                    <a:bodyPr/>
-                    <a:lstStyle/>
-                    <a:p>
-                      <a:pPr lvl="0" indent="0" marL="0">
-                        <a:buNone/>
-                      </a:pPr>
-                      <a:r>
-                        <a:rPr/>
-                        <a:t>36.646493</a:t>
-                      </a:r>
-                    </a:p>
-                  </a:txBody>
-                </a:tc>
-                <a:tc>
-                  <a:txBody>
-                    <a:bodyPr/>
-                    <a:lstStyle/>
-                    <a:p>
-                      <a:pPr lvl="0" indent="0" marL="0">
-                        <a:buNone/>
-                      </a:pPr>
-                      <a:r>
-                        <a:rPr/>
-                        <a:t>0.123724</a:t>
-                      </a:r>
-                    </a:p>
-                  </a:txBody>
-                </a:tc>
-              </a:tr>
-              <a:tr h="0">
-                <a:tc>
-                  <a:txBody>
-                    <a:bodyPr/>
-                    <a:lstStyle/>
-                    <a:p>
-                      <a:pPr lvl="0" indent="0" marL="0">
-                        <a:buNone/>
-                      </a:pPr>
-                      <a:r>
-                        <a:rPr/>
-                        <a:t>2</a:t>
-                      </a:r>
-                    </a:p>
-                  </a:txBody>
-                </a:tc>
-                <a:tc>
-                  <a:txBody>
-                    <a:bodyPr/>
-                    <a:lstStyle/>
-                    <a:p>
-                      <a:pPr lvl="0" indent="0" marL="0">
-                        <a:buNone/>
-                      </a:pPr>
-                      <a:r>
-                        <a:rPr/>
-                        <a:t>balsam fir</a:t>
-                      </a:r>
-                    </a:p>
-                  </a:txBody>
-                </a:tc>
-                <a:tc>
-                  <a:txBody>
-                    <a:bodyPr/>
-                    <a:lstStyle/>
-                    <a:p>
-                      <a:pPr lvl="0" indent="0" marL="0">
-                        <a:buNone/>
-                      </a:pPr>
-                      <a:r>
-                        <a:rPr/>
-                        <a:t>4</a:t>
-                      </a:r>
-                    </a:p>
-                  </a:txBody>
-                </a:tc>
-                <a:tc>
-                  <a:txBody>
-                    <a:bodyPr/>
-                    <a:lstStyle/>
-                    <a:p>
-                      <a:pPr lvl="0" indent="0" marL="0">
-                        <a:buNone/>
-                      </a:pPr>
-                      <a:r>
-                        <a:rPr/>
-                        <a:t>134.599829</a:t>
-                      </a:r>
-                    </a:p>
-                  </a:txBody>
-                </a:tc>
-                <a:tc>
-                  <a:txBody>
-                    <a:bodyPr/>
-                    <a:lstStyle/>
-                    <a:p>
-                      <a:pPr lvl="0" indent="0" marL="0">
-                        <a:buNone/>
-                      </a:pPr>
-                      <a:r>
-                        <a:rPr/>
-                        <a:t>38.884870</a:t>
-                      </a:r>
-                    </a:p>
-                  </a:txBody>
-                </a:tc>
-                <a:tc>
-                  <a:txBody>
-                    <a:bodyPr/>
-                    <a:lstStyle/>
-                    <a:p>
-                      <a:pPr lvl="0" indent="0" marL="0">
-                        <a:buNone/>
-                      </a:pPr>
-                      <a:r>
-                        <a:rPr/>
-                        <a:t>0.133858</a:t>
-                      </a:r>
-                    </a:p>
-                  </a:txBody>
-                </a:tc>
-              </a:tr>
-              <a:tr h="0">
-                <a:tc>
-                  <a:txBody>
-                    <a:bodyPr/>
-                    <a:lstStyle/>
-                    <a:p>
-                      <a:pPr lvl="0" indent="0" marL="0">
-                        <a:buNone/>
-                      </a:pPr>
-                      <a:r>
-                        <a:rPr/>
-                        <a:t>3</a:t>
-                      </a:r>
-                    </a:p>
-                  </a:txBody>
-                </a:tc>
-                <a:tc>
-                  <a:txBody>
-                    <a:bodyPr/>
-                    <a:lstStyle/>
-                    <a:p>
-                      <a:pPr lvl="0" indent="0" marL="0">
-                        <a:buNone/>
-                      </a:pPr>
-                      <a:r>
-                        <a:rPr/>
-                        <a:t>balsam fir</a:t>
-                      </a:r>
-                    </a:p>
-                  </a:txBody>
-                </a:tc>
-                <a:tc>
-                  <a:txBody>
-                    <a:bodyPr/>
-                    <a:lstStyle/>
-                    <a:p>
-                      <a:pPr lvl="0" indent="0" marL="0">
-                        <a:buNone/>
-                      </a:pPr>
-                      <a:r>
-                        <a:rPr/>
-                        <a:t>5</a:t>
-                      </a:r>
-                    </a:p>
-                  </a:txBody>
-                </a:tc>
-                <a:tc>
-                  <a:txBody>
-                    <a:bodyPr/>
-                    <a:lstStyle/>
-                    <a:p>
-                      <a:pPr lvl="0" indent="0" marL="0">
-                        <a:buNone/>
-                      </a:pPr>
-                      <a:r>
-                        <a:rPr/>
-                        <a:t>145.003601</a:t>
-                      </a:r>
-                    </a:p>
-                  </a:txBody>
-                </a:tc>
-                <a:tc>
-                  <a:txBody>
-                    <a:bodyPr/>
-                    <a:lstStyle/>
-                    <a:p>
-                      <a:pPr lvl="0" indent="0" marL="0">
-                        <a:buNone/>
-                      </a:pPr>
-                      <a:r>
-                        <a:rPr/>
-                        <a:t>41.209530</a:t>
-                      </a:r>
-                    </a:p>
-                  </a:txBody>
-                </a:tc>
-                <a:tc>
-                  <a:txBody>
-                    <a:bodyPr/>
-                    <a:lstStyle/>
-                    <a:p>
-                      <a:pPr lvl="0" indent="0" marL="0">
-                        <a:buNone/>
-                      </a:pPr>
-                      <a:r>
-                        <a:rPr/>
-                        <a:t>0.144063</a:t>
-                      </a:r>
-                    </a:p>
-                  </a:txBody>
-                </a:tc>
-              </a:tr>
-              <a:tr h="0">
-                <a:tc>
-                  <a:txBody>
-                    <a:bodyPr/>
-                    <a:lstStyle/>
-                    <a:p>
-                      <a:pPr lvl="0" indent="0" marL="0">
-                        <a:buNone/>
-                      </a:pPr>
-                      <a:r>
-                        <a:rPr/>
-                        <a:t>4</a:t>
-                      </a:r>
-                    </a:p>
-                  </a:txBody>
-                </a:tc>
-                <a:tc>
-                  <a:txBody>
-                    <a:bodyPr/>
-                    <a:lstStyle/>
-                    <a:p>
-                      <a:pPr lvl="0" indent="0" marL="0">
-                        <a:buNone/>
-                      </a:pPr>
-                      <a:r>
-                        <a:rPr/>
-                        <a:t>balsam fir</a:t>
-                      </a:r>
-                    </a:p>
-                  </a:txBody>
-                </a:tc>
-                <a:tc>
-                  <a:txBody>
-                    <a:bodyPr/>
-                    <a:lstStyle/>
-                    <a:p>
-                      <a:pPr lvl="0" indent="0" marL="0">
-                        <a:buNone/>
-                      </a:pPr>
-                      <a:r>
-                        <a:rPr/>
-                        <a:t>6</a:t>
-                      </a:r>
-                    </a:p>
-                  </a:txBody>
-                </a:tc>
-                <a:tc>
-                  <a:txBody>
-                    <a:bodyPr/>
-                    <a:lstStyle/>
-                    <a:p>
-                      <a:pPr lvl="0" indent="0" marL="0">
-                        <a:buNone/>
-                      </a:pPr>
-                      <a:r>
-                        <a:rPr/>
-                        <a:t>147.451321</a:t>
-                      </a:r>
-                    </a:p>
-                  </a:txBody>
-                </a:tc>
-                <a:tc>
-                  <a:txBody>
-                    <a:bodyPr/>
-                    <a:lstStyle/>
-                    <a:p>
-                      <a:pPr lvl="0" indent="0" marL="0">
-                        <a:buNone/>
-                      </a:pPr>
-                      <a:r>
-                        <a:rPr/>
-                        <a:t>40.791681</a:t>
-                      </a:r>
-                    </a:p>
-                  </a:txBody>
-                </a:tc>
-                <a:tc>
-                  <a:txBody>
-                    <a:bodyPr/>
-                    <a:lstStyle/>
-                    <a:p>
-                      <a:pPr lvl="0" indent="0" marL="0">
-                        <a:buNone/>
-                      </a:pPr>
-                      <a:r>
-                        <a:rPr/>
-                        <a:t>0.142862</a:t>
-                      </a:r>
-                    </a:p>
-                  </a:txBody>
-                </a:tc>
-              </a:tr>
-              <a:tr h="0">
-                <a:tc>
-                  <a:txBody>
-                    <a:bodyPr/>
-                    <a:lstStyle/>
-                    <a:p>
-                      <a:pPr lvl="0" indent="0" marL="0">
-                        <a:buNone/>
-                      </a:pPr>
-                      <a:r>
-                        <a:rPr/>
-                        <a:t>...</a:t>
-                      </a:r>
-                    </a:p>
-                  </a:txBody>
-                </a:tc>
-                <a:tc>
-                  <a:txBody>
-                    <a:bodyPr/>
-                    <a:lstStyle/>
-                    <a:p>
-                      <a:pPr lvl="0" indent="0" marL="0">
-                        <a:buNone/>
-                      </a:pPr>
-                      <a:r>
-                        <a:rPr/>
-                        <a:t>...</a:t>
-                      </a:r>
-                    </a:p>
-                  </a:txBody>
-                </a:tc>
-                <a:tc>
-                  <a:txBody>
-                    <a:bodyPr/>
-                    <a:lstStyle/>
-                    <a:p>
-                      <a:pPr lvl="0" indent="0" marL="0">
-                        <a:buNone/>
-                      </a:pPr>
-                      <a:r>
-                        <a:rPr/>
-                        <a:t>...</a:t>
-                      </a:r>
-                    </a:p>
-                  </a:txBody>
-                </a:tc>
-                <a:tc>
-                  <a:txBody>
-                    <a:bodyPr/>
-                    <a:lstStyle/>
-                    <a:p>
-                      <a:pPr lvl="0" indent="0" marL="0">
-                        <a:buNone/>
-                      </a:pPr>
-                      <a:r>
-                        <a:rPr/>
-                        <a:t>...</a:t>
-                      </a:r>
-                    </a:p>
-                  </a:txBody>
-                </a:tc>
-                <a:tc>
-                  <a:txBody>
-                    <a:bodyPr/>
-                    <a:lstStyle/>
-                    <a:p>
-                      <a:pPr lvl="0" indent="0" marL="0">
-                        <a:buNone/>
-                      </a:pPr>
-                      <a:r>
-                        <a:rPr/>
-                        <a:t>...</a:t>
-                      </a:r>
-                    </a:p>
-                  </a:txBody>
-                </a:tc>
-                <a:tc>
-                  <a:txBody>
-                    <a:bodyPr/>
-                    <a:lstStyle/>
-                    <a:p>
-                      <a:pPr lvl="0" indent="0" marL="0">
-                        <a:buNone/>
-                      </a:pPr>
-                      <a:r>
-                        <a:rPr/>
-                        <a:t>...</a:t>
-                      </a:r>
-                    </a:p>
-                  </a:txBody>
-                </a:tc>
-              </a:tr>
-              <a:tr h="0">
-                <a:tc>
-                  <a:txBody>
-                    <a:bodyPr/>
-                    <a:lstStyle/>
-                    <a:p>
-                      <a:pPr lvl="0" indent="0" marL="0">
-                        <a:buNone/>
-                      </a:pPr>
-                      <a:r>
-                        <a:rPr/>
-                        <a:t>895</a:t>
-                      </a:r>
-                    </a:p>
-                  </a:txBody>
-                </a:tc>
-                <a:tc>
-                  <a:txBody>
-                    <a:bodyPr/>
-                    <a:lstStyle/>
-                    <a:p>
-                      <a:pPr lvl="0" indent="0" marL="0">
-                        <a:buNone/>
-                      </a:pPr>
-                      <a:r>
-                        <a:rPr/>
-                        <a:t>sugarberry</a:t>
-                      </a:r>
-                    </a:p>
-                  </a:txBody>
-                </a:tc>
-                <a:tc>
-                  <a:txBody>
-                    <a:bodyPr/>
-                    <a:lstStyle/>
-                    <a:p>
-                      <a:pPr lvl="0" indent="0" marL="0">
-                        <a:buNone/>
-                      </a:pPr>
-                      <a:r>
-                        <a:rPr/>
-                        <a:t>6</a:t>
-                      </a:r>
-                    </a:p>
-                  </a:txBody>
-                </a:tc>
-                <a:tc>
-                  <a:txBody>
-                    <a:bodyPr/>
-                    <a:lstStyle/>
-                    <a:p>
-                      <a:pPr lvl="0" indent="0" marL="0">
-                        <a:buNone/>
-                      </a:pPr>
-                      <a:r>
-                        <a:rPr/>
-                        <a:t>32.431052</a:t>
-                      </a:r>
-                    </a:p>
-                  </a:txBody>
-                </a:tc>
-                <a:tc>
-                  <a:txBody>
-                    <a:bodyPr/>
-                    <a:lstStyle/>
-                    <a:p>
-                      <a:pPr lvl="0" indent="0" marL="0">
-                        <a:buNone/>
-                      </a:pPr>
-                      <a:r>
-                        <a:rPr/>
-                        <a:t>20.969306</a:t>
-                      </a:r>
-                    </a:p>
-                  </a:txBody>
-                </a:tc>
-                <a:tc>
-                  <a:txBody>
-                    <a:bodyPr/>
-                    <a:lstStyle/>
-                    <a:p>
-                      <a:pPr lvl="0" indent="0" marL="0">
-                        <a:buNone/>
-                      </a:pPr>
-                      <a:r>
-                        <a:rPr/>
-                        <a:t>0.565727</a:t>
-                      </a:r>
-                    </a:p>
-                  </a:txBody>
-                </a:tc>
-              </a:tr>
-              <a:tr h="0">
-                <a:tc>
-                  <a:txBody>
-                    <a:bodyPr/>
-                    <a:lstStyle/>
-                    <a:p>
-                      <a:pPr lvl="0" indent="0" marL="0">
-                        <a:buNone/>
-                      </a:pPr>
-                      <a:r>
-                        <a:rPr/>
-                        <a:t>896</a:t>
-                      </a:r>
-                    </a:p>
-                  </a:txBody>
-                </a:tc>
-                <a:tc>
-                  <a:txBody>
-                    <a:bodyPr/>
-                    <a:lstStyle/>
-                    <a:p>
-                      <a:pPr lvl="0" indent="0" marL="0">
-                        <a:buNone/>
-                      </a:pPr>
-                      <a:r>
-                        <a:rPr/>
-                        <a:t>sugarberry</a:t>
-                      </a:r>
-                    </a:p>
-                  </a:txBody>
-                </a:tc>
-                <a:tc>
-                  <a:txBody>
-                    <a:bodyPr/>
-                    <a:lstStyle/>
-                    <a:p>
-                      <a:pPr lvl="0" indent="0" marL="0">
-                        <a:buNone/>
-                      </a:pPr>
-                      <a:r>
-                        <a:rPr/>
-                        <a:t>7</a:t>
-                      </a:r>
-                    </a:p>
-                  </a:txBody>
-                </a:tc>
-                <a:tc>
-                  <a:txBody>
-                    <a:bodyPr/>
-                    <a:lstStyle/>
-                    <a:p>
-                      <a:pPr lvl="0" indent="0" marL="0">
-                        <a:buNone/>
-                      </a:pPr>
-                      <a:r>
-                        <a:rPr/>
-                        <a:t>37.324259</a:t>
-                      </a:r>
-                    </a:p>
-                  </a:txBody>
-                </a:tc>
-                <a:tc>
-                  <a:txBody>
-                    <a:bodyPr/>
-                    <a:lstStyle/>
-                    <a:p>
-                      <a:pPr lvl="0" indent="0" marL="0">
-                        <a:buNone/>
-                      </a:pPr>
-                      <a:r>
-                        <a:rPr/>
-                        <a:t>25.037024</a:t>
-                      </a:r>
-                    </a:p>
-                  </a:txBody>
-                </a:tc>
-                <a:tc>
-                  <a:txBody>
-                    <a:bodyPr/>
-                    <a:lstStyle/>
-                    <a:p>
-                      <a:pPr lvl="0" indent="0" marL="0">
-                        <a:buNone/>
-                      </a:pPr>
-                      <a:r>
-                        <a:rPr/>
-                        <a:t>0.637629</a:t>
-                      </a:r>
-                    </a:p>
-                  </a:txBody>
-                </a:tc>
-              </a:tr>
-              <a:tr h="0">
-                <a:tc>
-                  <a:txBody>
-                    <a:bodyPr/>
-                    <a:lstStyle/>
-                    <a:p>
-                      <a:pPr lvl="0" indent="0" marL="0">
-                        <a:buNone/>
-                      </a:pPr>
-                      <a:r>
-                        <a:rPr/>
-                        <a:t>897</a:t>
-                      </a:r>
-                    </a:p>
-                  </a:txBody>
-                </a:tc>
-                <a:tc>
-                  <a:txBody>
-                    <a:bodyPr/>
-                    <a:lstStyle/>
-                    <a:p>
-                      <a:pPr lvl="0" indent="0" marL="0">
-                        <a:buNone/>
-                      </a:pPr>
-                      <a:r>
-                        <a:rPr/>
-                        <a:t>sugarberry</a:t>
-                      </a:r>
-                    </a:p>
-                  </a:txBody>
-                </a:tc>
-                <a:tc>
-                  <a:txBody>
-                    <a:bodyPr/>
-                    <a:lstStyle/>
-                    <a:p>
-                      <a:pPr lvl="0" indent="0" marL="0">
-                        <a:buNone/>
-                      </a:pPr>
-                      <a:r>
-                        <a:rPr/>
-                        <a:t>8</a:t>
-                      </a:r>
-                    </a:p>
-                  </a:txBody>
-                </a:tc>
-                <a:tc>
-                  <a:txBody>
-                    <a:bodyPr/>
-                    <a:lstStyle/>
-                    <a:p>
-                      <a:pPr lvl="0" indent="0" marL="0">
-                        <a:buNone/>
-                      </a:pPr>
-                      <a:r>
-                        <a:rPr/>
-                        <a:t>38.144756</a:t>
-                      </a:r>
-                    </a:p>
-                  </a:txBody>
-                </a:tc>
-                <a:tc>
-                  <a:txBody>
-                    <a:bodyPr/>
-                    <a:lstStyle/>
-                    <a:p>
-                      <a:pPr lvl="0" indent="0" marL="0">
-                        <a:buNone/>
-                      </a:pPr>
-                      <a:r>
-                        <a:rPr/>
-                        <a:t>26.680208</a:t>
-                      </a:r>
-                    </a:p>
-                  </a:txBody>
-                </a:tc>
-                <a:tc>
-                  <a:txBody>
-                    <a:bodyPr/>
-                    <a:lstStyle/>
-                    <a:p>
-                      <a:pPr lvl="0" indent="0" marL="0">
-                        <a:buNone/>
-                      </a:pPr>
-                      <a:r>
-                        <a:rPr/>
-                        <a:t>0.665159</a:t>
-                      </a:r>
-                    </a:p>
-                  </a:txBody>
-                </a:tc>
-              </a:tr>
-              <a:tr h="0">
-                <a:tc>
-                  <a:txBody>
-                    <a:bodyPr/>
-                    <a:lstStyle/>
-                    <a:p>
-                      <a:pPr lvl="0" indent="0" marL="0">
-                        <a:buNone/>
-                      </a:pPr>
-                      <a:r>
-                        <a:rPr/>
-                        <a:t>898</a:t>
-                      </a:r>
-                    </a:p>
-                  </a:txBody>
-                </a:tc>
-                <a:tc>
-                  <a:txBody>
-                    <a:bodyPr/>
-                    <a:lstStyle/>
-                    <a:p>
-                      <a:pPr lvl="0" indent="0" marL="0">
-                        <a:buNone/>
-                      </a:pPr>
-                      <a:r>
-                        <a:rPr/>
-                        <a:t>sugarberry</a:t>
-                      </a:r>
-                    </a:p>
-                  </a:txBody>
-                </a:tc>
-                <a:tc>
-                  <a:txBody>
-                    <a:bodyPr/>
-                    <a:lstStyle/>
-                    <a:p>
-                      <a:pPr lvl="0" indent="0" marL="0">
-                        <a:buNone/>
-                      </a:pPr>
-                      <a:r>
-                        <a:rPr/>
-                        <a:t>9</a:t>
-                      </a:r>
-                    </a:p>
-                  </a:txBody>
-                </a:tc>
-                <a:tc>
-                  <a:txBody>
-                    <a:bodyPr/>
-                    <a:lstStyle/>
-                    <a:p>
-                      <a:pPr lvl="0" indent="0" marL="0">
-                        <a:buNone/>
-                      </a:pPr>
-                      <a:r>
-                        <a:rPr/>
-                        <a:t>36.853245</a:t>
-                      </a:r>
-                    </a:p>
-                  </a:txBody>
-                </a:tc>
-                <a:tc>
-                  <a:txBody>
-                    <a:bodyPr/>
-                    <a:lstStyle/>
-                    <a:p>
-                      <a:pPr lvl="0" indent="0" marL="0">
-                        <a:buNone/>
-                      </a:pPr>
-                      <a:r>
-                        <a:rPr/>
-                        <a:t>21.021667</a:t>
-                      </a:r>
-                    </a:p>
-                  </a:txBody>
-                </a:tc>
-                <a:tc>
-                  <a:txBody>
-                    <a:bodyPr/>
-                    <a:lstStyle/>
-                    <a:p>
-                      <a:pPr lvl="0" indent="0" marL="0">
-                        <a:buNone/>
-                      </a:pPr>
-                      <a:r>
-                        <a:rPr/>
-                        <a:t>0.685162</a:t>
-                      </a:r>
-                    </a:p>
-                  </a:txBody>
-                </a:tc>
-              </a:tr>
-              <a:tr h="0">
-                <a:tc>
-                  <a:txBody>
-                    <a:bodyPr/>
-                    <a:lstStyle/>
-                    <a:p>
-                      <a:pPr lvl="0" indent="0" marL="0">
-                        <a:buNone/>
-                      </a:pPr>
-                      <a:r>
-                        <a:rPr/>
-                        <a:t>899</a:t>
-                      </a:r>
-                    </a:p>
-                  </a:txBody>
-                </a:tc>
-                <a:tc>
-                  <a:txBody>
-                    <a:bodyPr/>
-                    <a:lstStyle/>
-                    <a:p>
-                      <a:pPr lvl="0" indent="0" marL="0">
-                        <a:buNone/>
-                      </a:pPr>
-                      <a:r>
-                        <a:rPr/>
-                        <a:t>sugarberry</a:t>
-                      </a:r>
-                    </a:p>
-                  </a:txBody>
-                </a:tc>
-                <a:tc>
-                  <a:txBody>
-                    <a:bodyPr/>
-                    <a:lstStyle/>
-                    <a:p>
-                      <a:pPr lvl="0" indent="0" marL="0">
-                        <a:buNone/>
-                      </a:pPr>
-                      <a:r>
-                        <a:rPr/>
-                        <a:t>10</a:t>
-                      </a:r>
-                    </a:p>
-                  </a:txBody>
-                </a:tc>
-                <a:tc>
-                  <a:txBody>
-                    <a:bodyPr/>
-                    <a:lstStyle/>
-                    <a:p>
-                      <a:pPr lvl="0" indent="0" marL="0">
-                        <a:buNone/>
-                      </a:pPr>
-                      <a:r>
-                        <a:rPr/>
-                        <a:t>40.091106</a:t>
-                      </a:r>
-                    </a:p>
-                  </a:txBody>
-                </a:tc>
-                <a:tc>
-                  <a:txBody>
-                    <a:bodyPr/>
-                    <a:lstStyle/>
-                    <a:p>
-                      <a:pPr lvl="0" indent="0" marL="0">
-                        <a:buNone/>
-                      </a:pPr>
-                      <a:r>
-                        <a:rPr/>
-                        <a:t>23.172083</a:t>
-                      </a:r>
-                    </a:p>
-                  </a:txBody>
-                </a:tc>
-                <a:tc>
-                  <a:txBody>
-                    <a:bodyPr/>
-                    <a:lstStyle/>
-                    <a:p>
-                      <a:pPr lvl="0" indent="0" marL="0">
-                        <a:buNone/>
-                      </a:pPr>
-                      <a:r>
-                        <a:rPr/>
-                        <a:t>0.677519</a:t>
-                      </a:r>
-                    </a:p>
-                  </a:txBody>
-                </a:tc>
-              </a:tr>
-            </a:tbl>
-          </a:graphicData>
-        </a:graphic>
-      </p:graphicFrame>
+        </p:nvSpPr>
+        <p:spPr/>
+        <p:txBody>
+          <a:bodyPr/>
+          <a:lstStyle/>
+          <a:p>
+            <a:pPr lvl="0"/>
+            <a:r>
+              <a:rPr/>
+              <a:t>When relations between biomass and trees diameter and height are complex and non linear, data is abundent, and the model needs to be adaptive with out maksing major changes in the model. kNN excels in capturing patterns and irregular patterns.</a:t>
+            </a:r>
+          </a:p>
+        </p:txBody>
+      </p:sp>
     </p:spTree>
   </p:cSld>
 </p:sld>
@@ -4703,12 +3597,7 @@
             <p:ph type="title"/>
           </p:nvPr>
         </p:nvSpPr>
-        <p:spPr>
-          <a:xfrm>
-            <a:off x="457201" y="204787"/>
-            <a:ext cx="3008313" cy="871538"/>
-          </a:xfrm>
-        </p:spPr>
+        <p:spPr/>
         <p:txBody>
           <a:bodyPr/>
           <a:lstStyle/>
@@ -4718,19 +3607,19 @@
             </a:pPr>
             <a:r>
               <a:rPr/>
-              <a:t>Technical Lead</a:t>
+              <a:t>Performance Metric</a:t>
             </a:r>
           </a:p>
         </p:txBody>
       </p:sp>
       <p:sp>
         <p:nvSpPr>
-          <p:cNvPr id="4" name="Text Placeholder 3"/>
+          <p:cNvPr id="3" name="Content Placeholder 2"/>
           <p:cNvSpPr>
             <a:spLocks noGrp="1"/>
           </p:cNvSpPr>
           <p:nvPr>
-            <p:ph idx="2" sz="half" type="body"/>
+            <p:ph idx="1"/>
           </p:nvPr>
         </p:nvSpPr>
         <p:spPr/>
@@ -4740,525 +3629,23 @@
           <a:p>
             <a:pPr lvl="0"/>
             <a:r>
+              <a:rPr b="1"/>
+              <a:t>RMSLE over RMSE</a:t>
+            </a:r>
+            <a:r>
               <a:rPr/>
-              <a:t>Split and filtering methods</a:t>
+              <a:t>: focuses on percentage errors, making it fair to both small and large trees, unlike RMSE, which we believe penalizes errors on big trees. Fitting biomass estimations where scale matters more than absolute error.</a:t>
             </a:r>
           </a:p>
           <a:p>
             <a:pPr lvl="0"/>
             <a:r>
               <a:rPr/>
-              <a:t>Feature engineering (what worked and what didn’t)</a:t>
-            </a:r>
-          </a:p>
-          <a:p>
-            <a:pPr lvl="0"/>
-            <a:r>
-              <a:rPr/>
-              <a:t>Tuning k for the best model</a:t>
-            </a:r>
-          </a:p>
-          <a:p>
-            <a:pPr lvl="0"/>
-            <a:r>
-              <a:rPr/>
-              <a:t>The final “best” model and error # Tree Measurement Data:</a:t>
+              <a:t>By prioritizing percentage errors, RMSLE provides a more balanced evaluation that considers the unique characteristics of tree biomass data.</a:t>
             </a:r>
           </a:p>
         </p:txBody>
       </p:sp>
-      <p:graphicFrame>
-        <p:nvGraphicFramePr>
-          <p:cNvPr id="6" name="Content Placeholder 5"/>
-          <p:cNvGraphicFramePr>
-            <a:graphicFrameLocks noGrp="1"/>
-          </p:cNvGraphicFramePr>
-          <p:nvPr>
-            <p:ph idx="1"/>
-          </p:nvPr>
-        </p:nvGraphicFramePr>
-        <p:xfrm>
-          <a:off x="3568700" y="203200"/>
-          <a:ext cx="5105400" cy="4381500"/>
-        </p:xfrm>
-        <a:graphic>
-          <a:graphicData uri="http://schemas.openxmlformats.org/drawingml/2006/table">
-            <a:tbl>
-              <a:tblPr firstRow="1" bandRow="1">
-                <a:tableStyleId>{5C22544A-7EE6-4342-B048-85BDC9FD1C3A}</a:tableStyleId>
-              </a:tblPr>
-              <a:tblGrid>
-                <a:gridCol w="1016000"/>
-                <a:gridCol w="1016000"/>
-                <a:gridCol w="1016000"/>
-                <a:gridCol w="1016000"/>
-                <a:gridCol w="1016000"/>
-              </a:tblGrid>
-              <a:tr h="0">
-                <a:tc>
-                  <a:txBody>
-                    <a:bodyPr/>
-                    <a:lstStyle/>
-                    <a:p>
-                      <a:endParaRPr/>
-                    </a:p>
-                  </a:txBody>
-                  <a:tcPr/>
-                </a:tc>
-                <a:tc>
-                  <a:txBody>
-                    <a:bodyPr/>
-                    <a:lstStyle/>
-                    <a:p>
-                      <a:pPr lvl="0" indent="0" marL="0">
-                        <a:buNone/>
-                      </a:pPr>
-                      <a:r>
-                        <a:rPr/>
-                        <a:t>SPCD</a:t>
-                      </a:r>
-                    </a:p>
-                  </a:txBody>
-                  <a:tcPr/>
-                </a:tc>
-                <a:tc>
-                  <a:txBody>
-                    <a:bodyPr/>
-                    <a:lstStyle/>
-                    <a:p>
-                      <a:pPr lvl="0" indent="0" marL="0">
-                        <a:buNone/>
-                      </a:pPr>
-                      <a:r>
-                        <a:rPr/>
-                        <a:t>DO_BH</a:t>
-                      </a:r>
-                    </a:p>
-                  </a:txBody>
-                  <a:tcPr/>
-                </a:tc>
-                <a:tc>
-                  <a:txBody>
-                    <a:bodyPr/>
-                    <a:lstStyle/>
-                    <a:p>
-                      <a:pPr lvl="0" indent="0" marL="0">
-                        <a:buNone/>
-                      </a:pPr>
-                      <a:r>
-                        <a:rPr/>
-                        <a:t>HT_TOT</a:t>
-                      </a:r>
-                    </a:p>
-                  </a:txBody>
-                  <a:tcPr/>
-                </a:tc>
-                <a:tc>
-                  <a:txBody>
-                    <a:bodyPr/>
-                    <a:lstStyle/>
-                    <a:p>
-                      <a:pPr lvl="0" indent="0" marL="0">
-                        <a:buNone/>
-                      </a:pPr>
-                      <a:r>
-                        <a:rPr/>
-                        <a:t>TT_DW_CRM</a:t>
-                      </a:r>
-                    </a:p>
-                  </a:txBody>
-                  <a:tcPr/>
-                </a:tc>
-              </a:tr>
-              <a:tr h="0">
-                <a:tc>
-                  <a:txBody>
-                    <a:bodyPr/>
-                    <a:lstStyle/>
-                    <a:p>
-                      <a:pPr lvl="0" indent="0" marL="0">
-                        <a:buNone/>
-                      </a:pPr>
-                      <a:r>
-                        <a:rPr/>
-                        <a:t>0</a:t>
-                      </a:r>
-                    </a:p>
-                  </a:txBody>
-                </a:tc>
-                <a:tc>
-                  <a:txBody>
-                    <a:bodyPr/>
-                    <a:lstStyle/>
-                    <a:p>
-                      <a:pPr lvl="0" indent="0" marL="0">
-                        <a:buNone/>
-                      </a:pPr>
-                      <a:r>
-                        <a:rPr/>
-                        <a:t>12</a:t>
-                      </a:r>
-                    </a:p>
-                  </a:txBody>
-                </a:tc>
-                <a:tc>
-                  <a:txBody>
-                    <a:bodyPr/>
-                    <a:lstStyle/>
-                    <a:p>
-                      <a:pPr lvl="0" indent="0" marL="0">
-                        <a:buNone/>
-                      </a:pPr>
-                      <a:r>
-                        <a:rPr/>
-                        <a:t>7.5</a:t>
-                      </a:r>
-                    </a:p>
-                  </a:txBody>
-                </a:tc>
-                <a:tc>
-                  <a:txBody>
-                    <a:bodyPr/>
-                    <a:lstStyle/>
-                    <a:p>
-                      <a:pPr lvl="0" indent="0" marL="0">
-                        <a:buNone/>
-                      </a:pPr>
-                      <a:r>
-                        <a:rPr/>
-                        <a:t>45.2</a:t>
-                      </a:r>
-                    </a:p>
-                  </a:txBody>
-                </a:tc>
-                <a:tc>
-                  <a:txBody>
-                    <a:bodyPr/>
-                    <a:lstStyle/>
-                    <a:p>
-                      <a:pPr lvl="0" indent="0" marL="0">
-                        <a:buNone/>
-                      </a:pPr>
-                      <a:r>
-                        <a:rPr/>
-                        <a:t>178.86</a:t>
-                      </a:r>
-                    </a:p>
-                  </a:txBody>
-                </a:tc>
-              </a:tr>
-              <a:tr h="0">
-                <a:tc>
-                  <a:txBody>
-                    <a:bodyPr/>
-                    <a:lstStyle/>
-                    <a:p>
-                      <a:pPr lvl="0" indent="0" marL="0">
-                        <a:buNone/>
-                      </a:pPr>
-                      <a:r>
-                        <a:rPr/>
-                        <a:t>1</a:t>
-                      </a:r>
-                    </a:p>
-                  </a:txBody>
-                </a:tc>
-                <a:tc>
-                  <a:txBody>
-                    <a:bodyPr/>
-                    <a:lstStyle/>
-                    <a:p>
-                      <a:pPr lvl="0" indent="0" marL="0">
-                        <a:buNone/>
-                      </a:pPr>
-                      <a:r>
-                        <a:rPr/>
-                        <a:t>12</a:t>
-                      </a:r>
-                    </a:p>
-                  </a:txBody>
-                </a:tc>
-                <a:tc>
-                  <a:txBody>
-                    <a:bodyPr/>
-                    <a:lstStyle/>
-                    <a:p>
-                      <a:pPr lvl="0" indent="0" marL="0">
-                        <a:buNone/>
-                      </a:pPr>
-                      <a:r>
-                        <a:rPr/>
-                        <a:t>9.3</a:t>
-                      </a:r>
-                    </a:p>
-                  </a:txBody>
-                </a:tc>
-                <a:tc>
-                  <a:txBody>
-                    <a:bodyPr/>
-                    <a:lstStyle/>
-                    <a:p>
-                      <a:pPr lvl="0" indent="0" marL="0">
-                        <a:buNone/>
-                      </a:pPr>
-                      <a:r>
-                        <a:rPr/>
-                        <a:t>62.7</a:t>
-                      </a:r>
-                    </a:p>
-                  </a:txBody>
-                </a:tc>
-                <a:tc>
-                  <a:txBody>
-                    <a:bodyPr/>
-                    <a:lstStyle/>
-                    <a:p>
-                      <a:pPr lvl="0" indent="0" marL="0">
-                        <a:buNone/>
-                      </a:pPr>
-                      <a:r>
-                        <a:rPr/>
-                        <a:t>323.46</a:t>
-                      </a:r>
-                    </a:p>
-                  </a:txBody>
-                </a:tc>
-              </a:tr>
-              <a:tr h="0">
-                <a:tc>
-                  <a:txBody>
-                    <a:bodyPr/>
-                    <a:lstStyle/>
-                    <a:p>
-                      <a:pPr lvl="0" indent="0" marL="0">
-                        <a:buNone/>
-                      </a:pPr>
-                      <a:r>
-                        <a:rPr/>
-                        <a:t>2</a:t>
-                      </a:r>
-                    </a:p>
-                  </a:txBody>
-                </a:tc>
-                <a:tc>
-                  <a:txBody>
-                    <a:bodyPr/>
-                    <a:lstStyle/>
-                    <a:p>
-                      <a:pPr lvl="0" indent="0" marL="0">
-                        <a:buNone/>
-                      </a:pPr>
-                      <a:r>
-                        <a:rPr/>
-                        <a:t>12</a:t>
-                      </a:r>
-                    </a:p>
-                  </a:txBody>
-                </a:tc>
-                <a:tc>
-                  <a:txBody>
-                    <a:bodyPr/>
-                    <a:lstStyle/>
-                    <a:p>
-                      <a:pPr lvl="0" indent="0" marL="0">
-                        <a:buNone/>
-                      </a:pPr>
-                      <a:r>
-                        <a:rPr/>
-                        <a:t>9.7</a:t>
-                      </a:r>
-                    </a:p>
-                  </a:txBody>
-                </a:tc>
-                <a:tc>
-                  <a:txBody>
-                    <a:bodyPr/>
-                    <a:lstStyle/>
-                    <a:p>
-                      <a:pPr lvl="0" indent="0" marL="0">
-                        <a:buNone/>
-                      </a:pPr>
-                      <a:r>
-                        <a:rPr/>
-                        <a:t>56.7</a:t>
-                      </a:r>
-                    </a:p>
-                  </a:txBody>
-                </a:tc>
-                <a:tc>
-                  <a:txBody>
-                    <a:bodyPr/>
-                    <a:lstStyle/>
-                    <a:p>
-                      <a:pPr lvl="0" indent="0" marL="0">
-                        <a:buNone/>
-                      </a:pPr>
-                      <a:r>
-                        <a:rPr/>
-                        <a:t>342.47</a:t>
-                      </a:r>
-                    </a:p>
-                  </a:txBody>
-                </a:tc>
-              </a:tr>
-              <a:tr h="0">
-                <a:tc>
-                  <a:txBody>
-                    <a:bodyPr/>
-                    <a:lstStyle/>
-                    <a:p>
-                      <a:pPr lvl="0" indent="0" marL="0">
-                        <a:buNone/>
-                      </a:pPr>
-                      <a:r>
-                        <a:rPr/>
-                        <a:t>3</a:t>
-                      </a:r>
-                    </a:p>
-                  </a:txBody>
-                </a:tc>
-                <a:tc>
-                  <a:txBody>
-                    <a:bodyPr/>
-                    <a:lstStyle/>
-                    <a:p>
-                      <a:pPr lvl="0" indent="0" marL="0">
-                        <a:buNone/>
-                      </a:pPr>
-                      <a:r>
-                        <a:rPr/>
-                        <a:t>12</a:t>
-                      </a:r>
-                    </a:p>
-                  </a:txBody>
-                </a:tc>
-                <a:tc>
-                  <a:txBody>
-                    <a:bodyPr/>
-                    <a:lstStyle/>
-                    <a:p>
-                      <a:pPr lvl="0" indent="0" marL="0">
-                        <a:buNone/>
-                      </a:pPr>
-                      <a:r>
-                        <a:rPr/>
-                        <a:t>11.4</a:t>
-                      </a:r>
-                    </a:p>
-                  </a:txBody>
-                </a:tc>
-                <a:tc>
-                  <a:txBody>
-                    <a:bodyPr/>
-                    <a:lstStyle/>
-                    <a:p>
-                      <a:pPr lvl="0" indent="0" marL="0">
-                        <a:buNone/>
-                      </a:pPr>
-                      <a:r>
-                        <a:rPr/>
-                        <a:t>66.1</a:t>
-                      </a:r>
-                    </a:p>
-                  </a:txBody>
-                </a:tc>
-                <a:tc>
-                  <a:txBody>
-                    <a:bodyPr/>
-                    <a:lstStyle/>
-                    <a:p>
-                      <a:pPr lvl="0" indent="0" marL="0">
-                        <a:buNone/>
-                      </a:pPr>
-                      <a:r>
-                        <a:rPr/>
-                        <a:t>499.35</a:t>
-                      </a:r>
-                    </a:p>
-                  </a:txBody>
-                </a:tc>
-              </a:tr>
-              <a:tr h="0">
-                <a:tc>
-                  <a:txBody>
-                    <a:bodyPr/>
-                    <a:lstStyle/>
-                    <a:p>
-                      <a:pPr lvl="0" indent="0" marL="0">
-                        <a:buNone/>
-                      </a:pPr>
-                      <a:r>
-                        <a:rPr/>
-                        <a:t>4</a:t>
-                      </a:r>
-                    </a:p>
-                  </a:txBody>
-                </a:tc>
-                <a:tc>
-                  <a:txBody>
-                    <a:bodyPr/>
-                    <a:lstStyle/>
-                    <a:p>
-                      <a:pPr lvl="0" indent="0" marL="0">
-                        <a:buNone/>
-                      </a:pPr>
-                      <a:r>
-                        <a:rPr/>
-                        <a:t>12</a:t>
-                      </a:r>
-                    </a:p>
-                  </a:txBody>
-                </a:tc>
-                <a:tc>
-                  <a:txBody>
-                    <a:bodyPr/>
-                    <a:lstStyle/>
-                    <a:p>
-                      <a:pPr lvl="0" indent="0" marL="0">
-                        <a:buNone/>
-                      </a:pPr>
-                      <a:r>
-                        <a:rPr/>
-                        <a:t>6.4</a:t>
-                      </a:r>
-                    </a:p>
-                  </a:txBody>
-                </a:tc>
-                <a:tc>
-                  <a:txBody>
-                    <a:bodyPr/>
-                    <a:lstStyle/>
-                    <a:p>
-                      <a:pPr lvl="0" indent="0" marL="0">
-                        <a:buNone/>
-                      </a:pPr>
-                      <a:r>
-                        <a:rPr/>
-                        <a:t>51.8</a:t>
-                      </a:r>
-                    </a:p>
-                  </a:txBody>
-                </a:tc>
-                <a:tc>
-                  <a:txBody>
-                    <a:bodyPr/>
-                    <a:lstStyle/>
-                    <a:p>
-                      <a:pPr lvl="0" indent="0" marL="0">
-                        <a:buNone/>
-                      </a:pPr>
-                      <a:r>
-                        <a:rPr/>
-                        <a:t>113.92</a:t>
-                      </a:r>
-                    </a:p>
-                  </a:txBody>
-                </a:tc>
-              </a:tr>
-            </a:tbl>
-          </a:graphicData>
-        </a:graphic>
-      </p:graphicFrame>
     </p:spTree>
   </p:cSld>
 </p:sld>
@@ -5301,7 +3688,7 @@
             </a:pPr>
             <a:r>
               <a:rPr/>
-              <a:t>Tree Species Name Data:</a:t>
+              <a:t>Model</a:t>
             </a:r>
           </a:p>
         </p:txBody>
@@ -5327,9 +3714,12 @@
                 <a:tableStyleId>{5C22544A-7EE6-4342-B048-85BDC9FD1C3A}</a:tableStyleId>
               </a:tblPr>
               <a:tblGrid>
-                <a:gridCol w="2743200"/>
-                <a:gridCol w="2743200"/>
-                <a:gridCol w="2743200"/>
+                <a:gridCol w="1371600"/>
+                <a:gridCol w="1371600"/>
+                <a:gridCol w="1371600"/>
+                <a:gridCol w="1371600"/>
+                <a:gridCol w="1371600"/>
+                <a:gridCol w="1371600"/>
               </a:tblGrid>
               <a:tr h="0">
                 <a:tc>
@@ -5352,7 +3742,7 @@
                       </a:pPr>
                       <a:r>
                         <a:rPr/>
-                        <a:t>SPCD</a:t>
+                        <a:t>Species</a:t>
                       </a:r>
                     </a:p>
                   </a:txBody>
@@ -5368,7 +3758,55 @@
                       </a:pPr>
                       <a:r>
                         <a:rPr/>
-                        <a:t>COMMON_NAME</a:t>
+                        <a:t>k</a:t>
+                      </a:r>
+                    </a:p>
+                  </a:txBody>
+                  <a:tcPr/>
+                </a:tc>
+                <a:tc>
+                  <a:txBody>
+                    <a:bodyPr/>
+                    <a:lstStyle/>
+                    <a:p>
+                      <a:pPr lvl="0" indent="0" marL="0">
+                        <a:buNone/>
+                      </a:pPr>
+                      <a:r>
+                        <a:rPr/>
+                        <a:t>RMSE</a:t>
+                      </a:r>
+                    </a:p>
+                  </a:txBody>
+                  <a:tcPr/>
+                </a:tc>
+                <a:tc>
+                  <a:txBody>
+                    <a:bodyPr/>
+                    <a:lstStyle/>
+                    <a:p>
+                      <a:pPr lvl="0" indent="0" marL="0">
+                        <a:buNone/>
+                      </a:pPr>
+                      <a:r>
+                        <a:rPr/>
+                        <a:t>MAE</a:t>
+                      </a:r>
+                    </a:p>
+                  </a:txBody>
+                  <a:tcPr/>
+                </a:tc>
+                <a:tc>
+                  <a:txBody>
+                    <a:bodyPr/>
+                    <a:lstStyle/>
+                    <a:p>
+                      <a:pPr lvl="0" indent="0" marL="0">
+                        <a:buNone/>
+                      </a:pPr>
+                      <a:r>
+                        <a:rPr/>
+                        <a:t>RMSLE</a:t>
                       </a:r>
                     </a:p>
                   </a:txBody>
@@ -5401,22 +3839,67 @@
                       </a:pPr>
                       <a:r>
                         <a:rPr/>
-                        <a:t>10</a:t>
-                      </a:r>
-                    </a:p>
-                  </a:txBody>
-                </a:tc>
-                <a:tc>
-                  <a:txBody>
-                    <a:bodyPr/>
-                    <a:lstStyle/>
-                    <a:p>
-                      <a:pPr lvl="0" indent="0" marL="0">
-                        <a:buNone/>
-                      </a:pPr>
-                      <a:r>
-                        <a:rPr/>
-                        <a:t>fir spp.</a:t>
+                        <a:t>balsam fir</a:t>
+                      </a:r>
+                    </a:p>
+                  </a:txBody>
+                </a:tc>
+                <a:tc>
+                  <a:txBody>
+                    <a:bodyPr/>
+                    <a:lstStyle/>
+                    <a:p>
+                      <a:pPr lvl="0" indent="0" marL="0">
+                        <a:buNone/>
+                      </a:pPr>
+                      <a:r>
+                        <a:rPr/>
+                        <a:t>2</a:t>
+                      </a:r>
+                    </a:p>
+                  </a:txBody>
+                </a:tc>
+                <a:tc>
+                  <a:txBody>
+                    <a:bodyPr/>
+                    <a:lstStyle/>
+                    <a:p>
+                      <a:pPr lvl="0" indent="0" marL="0">
+                        <a:buNone/>
+                      </a:pPr>
+                      <a:r>
+                        <a:rPr/>
+                        <a:t>125.827396</a:t>
+                      </a:r>
+                    </a:p>
+                  </a:txBody>
+                </a:tc>
+                <a:tc>
+                  <a:txBody>
+                    <a:bodyPr/>
+                    <a:lstStyle/>
+                    <a:p>
+                      <a:pPr lvl="0" indent="0" marL="0">
+                        <a:buNone/>
+                      </a:pPr>
+                      <a:r>
+                        <a:rPr/>
+                        <a:t>34.820565</a:t>
+                      </a:r>
+                    </a:p>
+                  </a:txBody>
+                </a:tc>
+                <a:tc>
+                  <a:txBody>
+                    <a:bodyPr/>
+                    <a:lstStyle/>
+                    <a:p>
+                      <a:pPr lvl="0" indent="0" marL="0">
+                        <a:buNone/>
+                      </a:pPr>
+                      <a:r>
+                        <a:rPr/>
+                        <a:t>0.119617</a:t>
                       </a:r>
                     </a:p>
                   </a:txBody>
@@ -5448,22 +3931,67 @@
                       </a:pPr>
                       <a:r>
                         <a:rPr/>
-                        <a:t>11</a:t>
-                      </a:r>
-                    </a:p>
-                  </a:txBody>
-                </a:tc>
-                <a:tc>
-                  <a:txBody>
-                    <a:bodyPr/>
-                    <a:lstStyle/>
-                    <a:p>
-                      <a:pPr lvl="0" indent="0" marL="0">
-                        <a:buNone/>
-                      </a:pPr>
-                      <a:r>
-                        <a:rPr/>
-                        <a:t>Pacific silver fir</a:t>
+                        <a:t>balsam fir</a:t>
+                      </a:r>
+                    </a:p>
+                  </a:txBody>
+                </a:tc>
+                <a:tc>
+                  <a:txBody>
+                    <a:bodyPr/>
+                    <a:lstStyle/>
+                    <a:p>
+                      <a:pPr lvl="0" indent="0" marL="0">
+                        <a:buNone/>
+                      </a:pPr>
+                      <a:r>
+                        <a:rPr/>
+                        <a:t>3</a:t>
+                      </a:r>
+                    </a:p>
+                  </a:txBody>
+                </a:tc>
+                <a:tc>
+                  <a:txBody>
+                    <a:bodyPr/>
+                    <a:lstStyle/>
+                    <a:p>
+                      <a:pPr lvl="0" indent="0" marL="0">
+                        <a:buNone/>
+                      </a:pPr>
+                      <a:r>
+                        <a:rPr/>
+                        <a:t>129.650855</a:t>
+                      </a:r>
+                    </a:p>
+                  </a:txBody>
+                </a:tc>
+                <a:tc>
+                  <a:txBody>
+                    <a:bodyPr/>
+                    <a:lstStyle/>
+                    <a:p>
+                      <a:pPr lvl="0" indent="0" marL="0">
+                        <a:buNone/>
+                      </a:pPr>
+                      <a:r>
+                        <a:rPr/>
+                        <a:t>36.628377</a:t>
+                      </a:r>
+                    </a:p>
+                  </a:txBody>
+                </a:tc>
+                <a:tc>
+                  <a:txBody>
+                    <a:bodyPr/>
+                    <a:lstStyle/>
+                    <a:p>
+                      <a:pPr lvl="0" indent="0" marL="0">
+                        <a:buNone/>
+                      </a:pPr>
+                      <a:r>
+                        <a:rPr/>
+                        <a:t>0.123679</a:t>
                       </a:r>
                     </a:p>
                   </a:txBody>
@@ -5495,22 +4023,67 @@
                       </a:pPr>
                       <a:r>
                         <a:rPr/>
-                        <a:t>12</a:t>
-                      </a:r>
-                    </a:p>
-                  </a:txBody>
-                </a:tc>
-                <a:tc>
-                  <a:txBody>
-                    <a:bodyPr/>
-                    <a:lstStyle/>
-                    <a:p>
-                      <a:pPr lvl="0" indent="0" marL="0">
-                        <a:buNone/>
-                      </a:pPr>
-                      <a:r>
-                        <a:rPr/>
                         <a:t>balsam fir</a:t>
+                      </a:r>
+                    </a:p>
+                  </a:txBody>
+                </a:tc>
+                <a:tc>
+                  <a:txBody>
+                    <a:bodyPr/>
+                    <a:lstStyle/>
+                    <a:p>
+                      <a:pPr lvl="0" indent="0" marL="0">
+                        <a:buNone/>
+                      </a:pPr>
+                      <a:r>
+                        <a:rPr/>
+                        <a:t>4</a:t>
+                      </a:r>
+                    </a:p>
+                  </a:txBody>
+                </a:tc>
+                <a:tc>
+                  <a:txBody>
+                    <a:bodyPr/>
+                    <a:lstStyle/>
+                    <a:p>
+                      <a:pPr lvl="0" indent="0" marL="0">
+                        <a:buNone/>
+                      </a:pPr>
+                      <a:r>
+                        <a:rPr/>
+                        <a:t>134.599829</a:t>
+                      </a:r>
+                    </a:p>
+                  </a:txBody>
+                </a:tc>
+                <a:tc>
+                  <a:txBody>
+                    <a:bodyPr/>
+                    <a:lstStyle/>
+                    <a:p>
+                      <a:pPr lvl="0" indent="0" marL="0">
+                        <a:buNone/>
+                      </a:pPr>
+                      <a:r>
+                        <a:rPr/>
+                        <a:t>38.884870</a:t>
+                      </a:r>
+                    </a:p>
+                  </a:txBody>
+                </a:tc>
+                <a:tc>
+                  <a:txBody>
+                    <a:bodyPr/>
+                    <a:lstStyle/>
+                    <a:p>
+                      <a:pPr lvl="0" indent="0" marL="0">
+                        <a:buNone/>
+                      </a:pPr>
+                      <a:r>
+                        <a:rPr/>
+                        <a:t>0.133858</a:t>
                       </a:r>
                     </a:p>
                   </a:txBody>
@@ -5542,22 +4115,67 @@
                       </a:pPr>
                       <a:r>
                         <a:rPr/>
-                        <a:t>14</a:t>
-                      </a:r>
-                    </a:p>
-                  </a:txBody>
-                </a:tc>
-                <a:tc>
-                  <a:txBody>
-                    <a:bodyPr/>
-                    <a:lstStyle/>
-                    <a:p>
-                      <a:pPr lvl="0" indent="0" marL="0">
-                        <a:buNone/>
-                      </a:pPr>
-                      <a:r>
-                        <a:rPr/>
-                        <a:t>Santa Lucia or bristlecone fir</a:t>
+                        <a:t>balsam fir</a:t>
+                      </a:r>
+                    </a:p>
+                  </a:txBody>
+                </a:tc>
+                <a:tc>
+                  <a:txBody>
+                    <a:bodyPr/>
+                    <a:lstStyle/>
+                    <a:p>
+                      <a:pPr lvl="0" indent="0" marL="0">
+                        <a:buNone/>
+                      </a:pPr>
+                      <a:r>
+                        <a:rPr/>
+                        <a:t>5</a:t>
+                      </a:r>
+                    </a:p>
+                  </a:txBody>
+                </a:tc>
+                <a:tc>
+                  <a:txBody>
+                    <a:bodyPr/>
+                    <a:lstStyle/>
+                    <a:p>
+                      <a:pPr lvl="0" indent="0" marL="0">
+                        <a:buNone/>
+                      </a:pPr>
+                      <a:r>
+                        <a:rPr/>
+                        <a:t>145.002852</a:t>
+                      </a:r>
+                    </a:p>
+                  </a:txBody>
+                </a:tc>
+                <a:tc>
+                  <a:txBody>
+                    <a:bodyPr/>
+                    <a:lstStyle/>
+                    <a:p>
+                      <a:pPr lvl="0" indent="0" marL="0">
+                        <a:buNone/>
+                      </a:pPr>
+                      <a:r>
+                        <a:rPr/>
+                        <a:t>41.168470</a:t>
+                      </a:r>
+                    </a:p>
+                  </a:txBody>
+                </a:tc>
+                <a:tc>
+                  <a:txBody>
+                    <a:bodyPr/>
+                    <a:lstStyle/>
+                    <a:p>
+                      <a:pPr lvl="0" indent="0" marL="0">
+                        <a:buNone/>
+                      </a:pPr>
+                      <a:r>
+                        <a:rPr/>
+                        <a:t>0.144052</a:t>
                       </a:r>
                     </a:p>
                   </a:txBody>
@@ -5589,22 +4207,619 @@
                       </a:pPr>
                       <a:r>
                         <a:rPr/>
-                        <a:t>15</a:t>
-                      </a:r>
-                    </a:p>
-                  </a:txBody>
-                </a:tc>
-                <a:tc>
-                  <a:txBody>
-                    <a:bodyPr/>
-                    <a:lstStyle/>
-                    <a:p>
-                      <a:pPr lvl="0" indent="0" marL="0">
-                        <a:buNone/>
-                      </a:pPr>
-                      <a:r>
-                        <a:rPr/>
-                        <a:t>white fir</a:t>
+                        <a:t>balsam fir</a:t>
+                      </a:r>
+                    </a:p>
+                  </a:txBody>
+                </a:tc>
+                <a:tc>
+                  <a:txBody>
+                    <a:bodyPr/>
+                    <a:lstStyle/>
+                    <a:p>
+                      <a:pPr lvl="0" indent="0" marL="0">
+                        <a:buNone/>
+                      </a:pPr>
+                      <a:r>
+                        <a:rPr/>
+                        <a:t>6</a:t>
+                      </a:r>
+                    </a:p>
+                  </a:txBody>
+                </a:tc>
+                <a:tc>
+                  <a:txBody>
+                    <a:bodyPr/>
+                    <a:lstStyle/>
+                    <a:p>
+                      <a:pPr lvl="0" indent="0" marL="0">
+                        <a:buNone/>
+                      </a:pPr>
+                      <a:r>
+                        <a:rPr/>
+                        <a:t>147.449208</a:t>
+                      </a:r>
+                    </a:p>
+                  </a:txBody>
+                </a:tc>
+                <a:tc>
+                  <a:txBody>
+                    <a:bodyPr/>
+                    <a:lstStyle/>
+                    <a:p>
+                      <a:pPr lvl="0" indent="0" marL="0">
+                        <a:buNone/>
+                      </a:pPr>
+                      <a:r>
+                        <a:rPr/>
+                        <a:t>40.728609</a:t>
+                      </a:r>
+                    </a:p>
+                  </a:txBody>
+                </a:tc>
+                <a:tc>
+                  <a:txBody>
+                    <a:bodyPr/>
+                    <a:lstStyle/>
+                    <a:p>
+                      <a:pPr lvl="0" indent="0" marL="0">
+                        <a:buNone/>
+                      </a:pPr>
+                      <a:r>
+                        <a:rPr/>
+                        <a:t>0.142813</a:t>
+                      </a:r>
+                    </a:p>
+                  </a:txBody>
+                </a:tc>
+              </a:tr>
+              <a:tr h="0">
+                <a:tc>
+                  <a:txBody>
+                    <a:bodyPr/>
+                    <a:lstStyle/>
+                    <a:p>
+                      <a:pPr lvl="0" indent="0" marL="0">
+                        <a:buNone/>
+                      </a:pPr>
+                      <a:r>
+                        <a:rPr/>
+                        <a:t>...</a:t>
+                      </a:r>
+                    </a:p>
+                  </a:txBody>
+                </a:tc>
+                <a:tc>
+                  <a:txBody>
+                    <a:bodyPr/>
+                    <a:lstStyle/>
+                    <a:p>
+                      <a:pPr lvl="0" indent="0" marL="0">
+                        <a:buNone/>
+                      </a:pPr>
+                      <a:r>
+                        <a:rPr/>
+                        <a:t>...</a:t>
+                      </a:r>
+                    </a:p>
+                  </a:txBody>
+                </a:tc>
+                <a:tc>
+                  <a:txBody>
+                    <a:bodyPr/>
+                    <a:lstStyle/>
+                    <a:p>
+                      <a:pPr lvl="0" indent="0" marL="0">
+                        <a:buNone/>
+                      </a:pPr>
+                      <a:r>
+                        <a:rPr/>
+                        <a:t>...</a:t>
+                      </a:r>
+                    </a:p>
+                  </a:txBody>
+                </a:tc>
+                <a:tc>
+                  <a:txBody>
+                    <a:bodyPr/>
+                    <a:lstStyle/>
+                    <a:p>
+                      <a:pPr lvl="0" indent="0" marL="0">
+                        <a:buNone/>
+                      </a:pPr>
+                      <a:r>
+                        <a:rPr/>
+                        <a:t>...</a:t>
+                      </a:r>
+                    </a:p>
+                  </a:txBody>
+                </a:tc>
+                <a:tc>
+                  <a:txBody>
+                    <a:bodyPr/>
+                    <a:lstStyle/>
+                    <a:p>
+                      <a:pPr lvl="0" indent="0" marL="0">
+                        <a:buNone/>
+                      </a:pPr>
+                      <a:r>
+                        <a:rPr/>
+                        <a:t>...</a:t>
+                      </a:r>
+                    </a:p>
+                  </a:txBody>
+                </a:tc>
+                <a:tc>
+                  <a:txBody>
+                    <a:bodyPr/>
+                    <a:lstStyle/>
+                    <a:p>
+                      <a:pPr lvl="0" indent="0" marL="0">
+                        <a:buNone/>
+                      </a:pPr>
+                      <a:r>
+                        <a:rPr/>
+                        <a:t>...</a:t>
+                      </a:r>
+                    </a:p>
+                  </a:txBody>
+                </a:tc>
+              </a:tr>
+              <a:tr h="0">
+                <a:tc>
+                  <a:txBody>
+                    <a:bodyPr/>
+                    <a:lstStyle/>
+                    <a:p>
+                      <a:pPr lvl="0" indent="0" marL="0">
+                        <a:buNone/>
+                      </a:pPr>
+                      <a:r>
+                        <a:rPr/>
+                        <a:t>895</a:t>
+                      </a:r>
+                    </a:p>
+                  </a:txBody>
+                </a:tc>
+                <a:tc>
+                  <a:txBody>
+                    <a:bodyPr/>
+                    <a:lstStyle/>
+                    <a:p>
+                      <a:pPr lvl="0" indent="0" marL="0">
+                        <a:buNone/>
+                      </a:pPr>
+                      <a:r>
+                        <a:rPr/>
+                        <a:t>sugarberry</a:t>
+                      </a:r>
+                    </a:p>
+                  </a:txBody>
+                </a:tc>
+                <a:tc>
+                  <a:txBody>
+                    <a:bodyPr/>
+                    <a:lstStyle/>
+                    <a:p>
+                      <a:pPr lvl="0" indent="0" marL="0">
+                        <a:buNone/>
+                      </a:pPr>
+                      <a:r>
+                        <a:rPr/>
+                        <a:t>6</a:t>
+                      </a:r>
+                    </a:p>
+                  </a:txBody>
+                </a:tc>
+                <a:tc>
+                  <a:txBody>
+                    <a:bodyPr/>
+                    <a:lstStyle/>
+                    <a:p>
+                      <a:pPr lvl="0" indent="0" marL="0">
+                        <a:buNone/>
+                      </a:pPr>
+                      <a:r>
+                        <a:rPr/>
+                        <a:t>32.431052</a:t>
+                      </a:r>
+                    </a:p>
+                  </a:txBody>
+                </a:tc>
+                <a:tc>
+                  <a:txBody>
+                    <a:bodyPr/>
+                    <a:lstStyle/>
+                    <a:p>
+                      <a:pPr lvl="0" indent="0" marL="0">
+                        <a:buNone/>
+                      </a:pPr>
+                      <a:r>
+                        <a:rPr/>
+                        <a:t>20.969306</a:t>
+                      </a:r>
+                    </a:p>
+                  </a:txBody>
+                </a:tc>
+                <a:tc>
+                  <a:txBody>
+                    <a:bodyPr/>
+                    <a:lstStyle/>
+                    <a:p>
+                      <a:pPr lvl="0" indent="0" marL="0">
+                        <a:buNone/>
+                      </a:pPr>
+                      <a:r>
+                        <a:rPr/>
+                        <a:t>0.565727</a:t>
+                      </a:r>
+                    </a:p>
+                  </a:txBody>
+                </a:tc>
+              </a:tr>
+              <a:tr h="0">
+                <a:tc>
+                  <a:txBody>
+                    <a:bodyPr/>
+                    <a:lstStyle/>
+                    <a:p>
+                      <a:pPr lvl="0" indent="0" marL="0">
+                        <a:buNone/>
+                      </a:pPr>
+                      <a:r>
+                        <a:rPr/>
+                        <a:t>896</a:t>
+                      </a:r>
+                    </a:p>
+                  </a:txBody>
+                </a:tc>
+                <a:tc>
+                  <a:txBody>
+                    <a:bodyPr/>
+                    <a:lstStyle/>
+                    <a:p>
+                      <a:pPr lvl="0" indent="0" marL="0">
+                        <a:buNone/>
+                      </a:pPr>
+                      <a:r>
+                        <a:rPr/>
+                        <a:t>sugarberry</a:t>
+                      </a:r>
+                    </a:p>
+                  </a:txBody>
+                </a:tc>
+                <a:tc>
+                  <a:txBody>
+                    <a:bodyPr/>
+                    <a:lstStyle/>
+                    <a:p>
+                      <a:pPr lvl="0" indent="0" marL="0">
+                        <a:buNone/>
+                      </a:pPr>
+                      <a:r>
+                        <a:rPr/>
+                        <a:t>7</a:t>
+                      </a:r>
+                    </a:p>
+                  </a:txBody>
+                </a:tc>
+                <a:tc>
+                  <a:txBody>
+                    <a:bodyPr/>
+                    <a:lstStyle/>
+                    <a:p>
+                      <a:pPr lvl="0" indent="0" marL="0">
+                        <a:buNone/>
+                      </a:pPr>
+                      <a:r>
+                        <a:rPr/>
+                        <a:t>37.324259</a:t>
+                      </a:r>
+                    </a:p>
+                  </a:txBody>
+                </a:tc>
+                <a:tc>
+                  <a:txBody>
+                    <a:bodyPr/>
+                    <a:lstStyle/>
+                    <a:p>
+                      <a:pPr lvl="0" indent="0" marL="0">
+                        <a:buNone/>
+                      </a:pPr>
+                      <a:r>
+                        <a:rPr/>
+                        <a:t>25.037024</a:t>
+                      </a:r>
+                    </a:p>
+                  </a:txBody>
+                </a:tc>
+                <a:tc>
+                  <a:txBody>
+                    <a:bodyPr/>
+                    <a:lstStyle/>
+                    <a:p>
+                      <a:pPr lvl="0" indent="0" marL="0">
+                        <a:buNone/>
+                      </a:pPr>
+                      <a:r>
+                        <a:rPr/>
+                        <a:t>0.637629</a:t>
+                      </a:r>
+                    </a:p>
+                  </a:txBody>
+                </a:tc>
+              </a:tr>
+              <a:tr h="0">
+                <a:tc>
+                  <a:txBody>
+                    <a:bodyPr/>
+                    <a:lstStyle/>
+                    <a:p>
+                      <a:pPr lvl="0" indent="0" marL="0">
+                        <a:buNone/>
+                      </a:pPr>
+                      <a:r>
+                        <a:rPr/>
+                        <a:t>897</a:t>
+                      </a:r>
+                    </a:p>
+                  </a:txBody>
+                </a:tc>
+                <a:tc>
+                  <a:txBody>
+                    <a:bodyPr/>
+                    <a:lstStyle/>
+                    <a:p>
+                      <a:pPr lvl="0" indent="0" marL="0">
+                        <a:buNone/>
+                      </a:pPr>
+                      <a:r>
+                        <a:rPr/>
+                        <a:t>sugarberry</a:t>
+                      </a:r>
+                    </a:p>
+                  </a:txBody>
+                </a:tc>
+                <a:tc>
+                  <a:txBody>
+                    <a:bodyPr/>
+                    <a:lstStyle/>
+                    <a:p>
+                      <a:pPr lvl="0" indent="0" marL="0">
+                        <a:buNone/>
+                      </a:pPr>
+                      <a:r>
+                        <a:rPr/>
+                        <a:t>8</a:t>
+                      </a:r>
+                    </a:p>
+                  </a:txBody>
+                </a:tc>
+                <a:tc>
+                  <a:txBody>
+                    <a:bodyPr/>
+                    <a:lstStyle/>
+                    <a:p>
+                      <a:pPr lvl="0" indent="0" marL="0">
+                        <a:buNone/>
+                      </a:pPr>
+                      <a:r>
+                        <a:rPr/>
+                        <a:t>38.144756</a:t>
+                      </a:r>
+                    </a:p>
+                  </a:txBody>
+                </a:tc>
+                <a:tc>
+                  <a:txBody>
+                    <a:bodyPr/>
+                    <a:lstStyle/>
+                    <a:p>
+                      <a:pPr lvl="0" indent="0" marL="0">
+                        <a:buNone/>
+                      </a:pPr>
+                      <a:r>
+                        <a:rPr/>
+                        <a:t>26.680208</a:t>
+                      </a:r>
+                    </a:p>
+                  </a:txBody>
+                </a:tc>
+                <a:tc>
+                  <a:txBody>
+                    <a:bodyPr/>
+                    <a:lstStyle/>
+                    <a:p>
+                      <a:pPr lvl="0" indent="0" marL="0">
+                        <a:buNone/>
+                      </a:pPr>
+                      <a:r>
+                        <a:rPr/>
+                        <a:t>0.665159</a:t>
+                      </a:r>
+                    </a:p>
+                  </a:txBody>
+                </a:tc>
+              </a:tr>
+              <a:tr h="0">
+                <a:tc>
+                  <a:txBody>
+                    <a:bodyPr/>
+                    <a:lstStyle/>
+                    <a:p>
+                      <a:pPr lvl="0" indent="0" marL="0">
+                        <a:buNone/>
+                      </a:pPr>
+                      <a:r>
+                        <a:rPr/>
+                        <a:t>898</a:t>
+                      </a:r>
+                    </a:p>
+                  </a:txBody>
+                </a:tc>
+                <a:tc>
+                  <a:txBody>
+                    <a:bodyPr/>
+                    <a:lstStyle/>
+                    <a:p>
+                      <a:pPr lvl="0" indent="0" marL="0">
+                        <a:buNone/>
+                      </a:pPr>
+                      <a:r>
+                        <a:rPr/>
+                        <a:t>sugarberry</a:t>
+                      </a:r>
+                    </a:p>
+                  </a:txBody>
+                </a:tc>
+                <a:tc>
+                  <a:txBody>
+                    <a:bodyPr/>
+                    <a:lstStyle/>
+                    <a:p>
+                      <a:pPr lvl="0" indent="0" marL="0">
+                        <a:buNone/>
+                      </a:pPr>
+                      <a:r>
+                        <a:rPr/>
+                        <a:t>9</a:t>
+                      </a:r>
+                    </a:p>
+                  </a:txBody>
+                </a:tc>
+                <a:tc>
+                  <a:txBody>
+                    <a:bodyPr/>
+                    <a:lstStyle/>
+                    <a:p>
+                      <a:pPr lvl="0" indent="0" marL="0">
+                        <a:buNone/>
+                      </a:pPr>
+                      <a:r>
+                        <a:rPr/>
+                        <a:t>36.853245</a:t>
+                      </a:r>
+                    </a:p>
+                  </a:txBody>
+                </a:tc>
+                <a:tc>
+                  <a:txBody>
+                    <a:bodyPr/>
+                    <a:lstStyle/>
+                    <a:p>
+                      <a:pPr lvl="0" indent="0" marL="0">
+                        <a:buNone/>
+                      </a:pPr>
+                      <a:r>
+                        <a:rPr/>
+                        <a:t>21.021667</a:t>
+                      </a:r>
+                    </a:p>
+                  </a:txBody>
+                </a:tc>
+                <a:tc>
+                  <a:txBody>
+                    <a:bodyPr/>
+                    <a:lstStyle/>
+                    <a:p>
+                      <a:pPr lvl="0" indent="0" marL="0">
+                        <a:buNone/>
+                      </a:pPr>
+                      <a:r>
+                        <a:rPr/>
+                        <a:t>0.685162</a:t>
+                      </a:r>
+                    </a:p>
+                  </a:txBody>
+                </a:tc>
+              </a:tr>
+              <a:tr h="0">
+                <a:tc>
+                  <a:txBody>
+                    <a:bodyPr/>
+                    <a:lstStyle/>
+                    <a:p>
+                      <a:pPr lvl="0" indent="0" marL="0">
+                        <a:buNone/>
+                      </a:pPr>
+                      <a:r>
+                        <a:rPr/>
+                        <a:t>899</a:t>
+                      </a:r>
+                    </a:p>
+                  </a:txBody>
+                </a:tc>
+                <a:tc>
+                  <a:txBody>
+                    <a:bodyPr/>
+                    <a:lstStyle/>
+                    <a:p>
+                      <a:pPr lvl="0" indent="0" marL="0">
+                        <a:buNone/>
+                      </a:pPr>
+                      <a:r>
+                        <a:rPr/>
+                        <a:t>sugarberry</a:t>
+                      </a:r>
+                    </a:p>
+                  </a:txBody>
+                </a:tc>
+                <a:tc>
+                  <a:txBody>
+                    <a:bodyPr/>
+                    <a:lstStyle/>
+                    <a:p>
+                      <a:pPr lvl="0" indent="0" marL="0">
+                        <a:buNone/>
+                      </a:pPr>
+                      <a:r>
+                        <a:rPr/>
+                        <a:t>10</a:t>
+                      </a:r>
+                    </a:p>
+                  </a:txBody>
+                </a:tc>
+                <a:tc>
+                  <a:txBody>
+                    <a:bodyPr/>
+                    <a:lstStyle/>
+                    <a:p>
+                      <a:pPr lvl="0" indent="0" marL="0">
+                        <a:buNone/>
+                      </a:pPr>
+                      <a:r>
+                        <a:rPr/>
+                        <a:t>40.091106</a:t>
+                      </a:r>
+                    </a:p>
+                  </a:txBody>
+                </a:tc>
+                <a:tc>
+                  <a:txBody>
+                    <a:bodyPr/>
+                    <a:lstStyle/>
+                    <a:p>
+                      <a:pPr lvl="0" indent="0" marL="0">
+                        <a:buNone/>
+                      </a:pPr>
+                      <a:r>
+                        <a:rPr/>
+                        <a:t>23.172083</a:t>
+                      </a:r>
+                    </a:p>
+                  </a:txBody>
+                </a:tc>
+                <a:tc>
+                  <a:txBody>
+                    <a:bodyPr/>
+                    <a:lstStyle/>
+                    <a:p>
+                      <a:pPr lvl="0" indent="0" marL="0">
+                        <a:buNone/>
+                      </a:pPr>
+                      <a:r>
+                        <a:rPr/>
+                        <a:t>0.677519</a:t>
                       </a:r>
                     </a:p>
                   </a:txBody>
@@ -5646,17 +4861,66 @@
             <p:ph type="title"/>
           </p:nvPr>
         </p:nvSpPr>
+        <p:spPr>
+          <a:xfrm>
+            <a:off x="457201" y="204787"/>
+            <a:ext cx="3008313" cy="871538"/>
+          </a:xfrm>
+        </p:spPr>
+        <p:txBody>
+          <a:bodyPr/>
+          <a:lstStyle/>
+          <a:p>
+            <a:pPr lvl="0" indent="0" marL="0">
+              <a:buNone/>
+            </a:pPr>
+            <a:r>
+              <a:rPr/>
+              <a:t>Technical Lead</a:t>
+            </a:r>
+          </a:p>
+        </p:txBody>
+      </p:sp>
+      <p:sp>
+        <p:nvSpPr>
+          <p:cNvPr id="4" name="Text Placeholder 3"/>
+          <p:cNvSpPr>
+            <a:spLocks noGrp="1"/>
+          </p:cNvSpPr>
+          <p:nvPr>
+            <p:ph idx="2" sz="half" type="body"/>
+          </p:nvPr>
+        </p:nvSpPr>
         <p:spPr/>
         <p:txBody>
           <a:bodyPr/>
           <a:lstStyle/>
           <a:p>
-            <a:pPr lvl="0" indent="0" marL="0">
-              <a:buNone/>
-            </a:pPr>
+            <a:pPr lvl="0"/>
             <a:r>
               <a:rPr/>
-              <a:t>Combined Dataset (species mapped onto bigger dataset):</a:t>
+              <a:t>Split and filtering methods</a:t>
+            </a:r>
+          </a:p>
+          <a:p>
+            <a:pPr lvl="0"/>
+            <a:r>
+              <a:rPr/>
+              <a:t>Feature engineering (what worked and what didn’t)</a:t>
+            </a:r>
+          </a:p>
+          <a:p>
+            <a:pPr lvl="0"/>
+            <a:r>
+              <a:rPr/>
+              <a:t>Tuning k for the best model</a:t>
+            </a:r>
+          </a:p>
+          <a:p>
+            <a:pPr lvl="0"/>
+            <a:r>
+              <a:rPr/>
+              <a:t>The final “best” model and error # Tree Measurement Data:</a:t>
             </a:r>
           </a:p>
         </p:txBody>
@@ -5672,8 +4936,8 @@
           </p:nvPr>
         </p:nvGraphicFramePr>
         <p:xfrm>
-          <a:off x="457200" y="1193800"/>
-          <a:ext cx="8229600" cy="3390900"/>
+          <a:off x="3568700" y="203200"/>
+          <a:ext cx="5105400" cy="4381500"/>
         </p:xfrm>
         <a:graphic>
           <a:graphicData uri="http://schemas.openxmlformats.org/drawingml/2006/table">
@@ -5682,12 +4946,11 @@
                 <a:tableStyleId>{5C22544A-7EE6-4342-B048-85BDC9FD1C3A}</a:tableStyleId>
               </a:tblPr>
               <a:tblGrid>
-                <a:gridCol w="1371600"/>
-                <a:gridCol w="1371600"/>
-                <a:gridCol w="1371600"/>
-                <a:gridCol w="1371600"/>
-                <a:gridCol w="1371600"/>
-                <a:gridCol w="1371600"/>
+                <a:gridCol w="1016000"/>
+                <a:gridCol w="1016000"/>
+                <a:gridCol w="1016000"/>
+                <a:gridCol w="1016000"/>
+                <a:gridCol w="1016000"/>
               </a:tblGrid>
               <a:tr h="0">
                 <a:tc>
@@ -5764,22 +5027,6 @@
                   </a:txBody>
                   <a:tcPr/>
                 </a:tc>
-                <a:tc>
-                  <a:txBody>
-                    <a:bodyPr/>
-                    <a:lstStyle/>
-                    <a:p>
-                      <a:pPr lvl="0" indent="0" marL="0">
-                        <a:buNone/>
-                      </a:pPr>
-                      <a:r>
-                        <a:rPr/>
-                        <a:t>COMMON_NAME</a:t>
-                      </a:r>
-                    </a:p>
-                  </a:txBody>
-                  <a:tcPr/>
-                </a:tc>
               </a:tr>
               <a:tr h="0">
                 <a:tc>
@@ -5857,21 +5104,6 @@
                     </a:p>
                   </a:txBody>
                 </a:tc>
-                <a:tc>
-                  <a:txBody>
-                    <a:bodyPr/>
-                    <a:lstStyle/>
-                    <a:p>
-                      <a:pPr lvl="0" indent="0" marL="0">
-                        <a:buNone/>
-                      </a:pPr>
-                      <a:r>
-                        <a:rPr/>
-                        <a:t>balsam fir</a:t>
-                      </a:r>
-                    </a:p>
-                  </a:txBody>
-                </a:tc>
               </a:tr>
               <a:tr h="0">
                 <a:tc>
@@ -5949,21 +5181,6 @@
                     </a:p>
                   </a:txBody>
                 </a:tc>
-                <a:tc>
-                  <a:txBody>
-                    <a:bodyPr/>
-                    <a:lstStyle/>
-                    <a:p>
-                      <a:pPr lvl="0" indent="0" marL="0">
-                        <a:buNone/>
-                      </a:pPr>
-                      <a:r>
-                        <a:rPr/>
-                        <a:t>balsam fir</a:t>
-                      </a:r>
-                    </a:p>
-                  </a:txBody>
-                </a:tc>
               </a:tr>
               <a:tr h="0">
                 <a:tc>
@@ -6041,21 +5258,6 @@
                     </a:p>
                   </a:txBody>
                 </a:tc>
-                <a:tc>
-                  <a:txBody>
-                    <a:bodyPr/>
-                    <a:lstStyle/>
-                    <a:p>
-                      <a:pPr lvl="0" indent="0" marL="0">
-                        <a:buNone/>
-                      </a:pPr>
-                      <a:r>
-                        <a:rPr/>
-                        <a:t>balsam fir</a:t>
-                      </a:r>
-                    </a:p>
-                  </a:txBody>
-                </a:tc>
               </a:tr>
               <a:tr h="0">
                 <a:tc>
@@ -6133,21 +5335,6 @@
                     </a:p>
                   </a:txBody>
                 </a:tc>
-                <a:tc>
-                  <a:txBody>
-                    <a:bodyPr/>
-                    <a:lstStyle/>
-                    <a:p>
-                      <a:pPr lvl="0" indent="0" marL="0">
-                        <a:buNone/>
-                      </a:pPr>
-                      <a:r>
-                        <a:rPr/>
-                        <a:t>balsam fir</a:t>
-                      </a:r>
-                    </a:p>
-                  </a:txBody>
-                </a:tc>
               </a:tr>
               <a:tr h="0">
                 <a:tc>
@@ -6221,21 +5408,6 @@
                       <a:r>
                         <a:rPr/>
                         <a:t>113.92</a:t>
-                      </a:r>
-                    </a:p>
-                  </a:txBody>
-                </a:tc>
-                <a:tc>
-                  <a:txBody>
-                    <a:bodyPr/>
-                    <a:lstStyle/>
-                    <a:p>
-                      <a:pPr lvl="0" indent="0" marL="0">
-                        <a:buNone/>
-                      </a:pPr>
-                      <a:r>
-                        <a:rPr/>
-                        <a:t>balsam fir</a:t>
                       </a:r>
                     </a:p>
                   </a:txBody>
@@ -6287,7 +5459,7 @@
             </a:pPr>
             <a:r>
               <a:rPr/>
-              <a:t>Filtered data</a:t>
+              <a:t>Tree Species Name Data:</a:t>
             </a:r>
           </a:p>
         </p:txBody>
@@ -6313,12 +5485,9 @@
                 <a:tableStyleId>{5C22544A-7EE6-4342-B048-85BDC9FD1C3A}</a:tableStyleId>
               </a:tblPr>
               <a:tblGrid>
-                <a:gridCol w="1371600"/>
-                <a:gridCol w="1371600"/>
-                <a:gridCol w="1371600"/>
-                <a:gridCol w="1371600"/>
-                <a:gridCol w="1371600"/>
-                <a:gridCol w="1371600"/>
+                <a:gridCol w="2743200"/>
+                <a:gridCol w="2743200"/>
+                <a:gridCol w="2743200"/>
               </a:tblGrid>
               <a:tr h="0">
                 <a:tc>
@@ -6357,54 +5526,6 @@
                       </a:pPr>
                       <a:r>
                         <a:rPr/>
-                        <a:t>DO_BH</a:t>
-                      </a:r>
-                    </a:p>
-                  </a:txBody>
-                  <a:tcPr/>
-                </a:tc>
-                <a:tc>
-                  <a:txBody>
-                    <a:bodyPr/>
-                    <a:lstStyle/>
-                    <a:p>
-                      <a:pPr lvl="0" indent="0" marL="0">
-                        <a:buNone/>
-                      </a:pPr>
-                      <a:r>
-                        <a:rPr/>
-                        <a:t>HT_TOT</a:t>
-                      </a:r>
-                    </a:p>
-                  </a:txBody>
-                  <a:tcPr/>
-                </a:tc>
-                <a:tc>
-                  <a:txBody>
-                    <a:bodyPr/>
-                    <a:lstStyle/>
-                    <a:p>
-                      <a:pPr lvl="0" indent="0" marL="0">
-                        <a:buNone/>
-                      </a:pPr>
-                      <a:r>
-                        <a:rPr/>
-                        <a:t>TT_DW_CRM</a:t>
-                      </a:r>
-                    </a:p>
-                  </a:txBody>
-                  <a:tcPr/>
-                </a:tc>
-                <a:tc>
-                  <a:txBody>
-                    <a:bodyPr/>
-                    <a:lstStyle/>
-                    <a:p>
-                      <a:pPr lvl="0" indent="0" marL="0">
-                        <a:buNone/>
-                      </a:pPr>
-                      <a:r>
-                        <a:rPr/>
                         <a:t>COMMON_NAME</a:t>
                       </a:r>
                     </a:p>
@@ -6438,67 +5559,22 @@
                       </a:pPr>
                       <a:r>
                         <a:rPr/>
-                        <a:t>12</a:t>
-                      </a:r>
-                    </a:p>
-                  </a:txBody>
-                </a:tc>
-                <a:tc>
-                  <a:txBody>
-                    <a:bodyPr/>
-                    <a:lstStyle/>
-                    <a:p>
-                      <a:pPr lvl="0" indent="0" marL="0">
-                        <a:buNone/>
-                      </a:pPr>
-                      <a:r>
-                        <a:rPr/>
-                        <a:t>7.5</a:t>
-                      </a:r>
-                    </a:p>
-                  </a:txBody>
-                </a:tc>
-                <a:tc>
-                  <a:txBody>
-                    <a:bodyPr/>
-                    <a:lstStyle/>
-                    <a:p>
-                      <a:pPr lvl="0" indent="0" marL="0">
-                        <a:buNone/>
-                      </a:pPr>
-                      <a:r>
-                        <a:rPr/>
-                        <a:t>45.2</a:t>
-                      </a:r>
-                    </a:p>
-                  </a:txBody>
-                </a:tc>
-                <a:tc>
-                  <a:txBody>
-                    <a:bodyPr/>
-                    <a:lstStyle/>
-                    <a:p>
-                      <a:pPr lvl="0" indent="0" marL="0">
-                        <a:buNone/>
-                      </a:pPr>
-                      <a:r>
-                        <a:rPr/>
-                        <a:t>178.86</a:t>
-                      </a:r>
-                    </a:p>
-                  </a:txBody>
-                </a:tc>
-                <a:tc>
-                  <a:txBody>
-                    <a:bodyPr/>
-                    <a:lstStyle/>
-                    <a:p>
-                      <a:pPr lvl="0" indent="0" marL="0">
-                        <a:buNone/>
-                      </a:pPr>
-                      <a:r>
-                        <a:rPr/>
-                        <a:t>balsam fir</a:t>
+                        <a:t>10</a:t>
+                      </a:r>
+                    </a:p>
+                  </a:txBody>
+                </a:tc>
+                <a:tc>
+                  <a:txBody>
+                    <a:bodyPr/>
+                    <a:lstStyle/>
+                    <a:p>
+                      <a:pPr lvl="0" indent="0" marL="0">
+                        <a:buNone/>
+                      </a:pPr>
+                      <a:r>
+                        <a:rPr/>
+                        <a:t>fir spp.</a:t>
                       </a:r>
                     </a:p>
                   </a:txBody>
@@ -6530,67 +5606,22 @@
                       </a:pPr>
                       <a:r>
                         <a:rPr/>
-                        <a:t>12</a:t>
-                      </a:r>
-                    </a:p>
-                  </a:txBody>
-                </a:tc>
-                <a:tc>
-                  <a:txBody>
-                    <a:bodyPr/>
-                    <a:lstStyle/>
-                    <a:p>
-                      <a:pPr lvl="0" indent="0" marL="0">
-                        <a:buNone/>
-                      </a:pPr>
-                      <a:r>
-                        <a:rPr/>
-                        <a:t>9.3</a:t>
-                      </a:r>
-                    </a:p>
-                  </a:txBody>
-                </a:tc>
-                <a:tc>
-                  <a:txBody>
-                    <a:bodyPr/>
-                    <a:lstStyle/>
-                    <a:p>
-                      <a:pPr lvl="0" indent="0" marL="0">
-                        <a:buNone/>
-                      </a:pPr>
-                      <a:r>
-                        <a:rPr/>
-                        <a:t>62.7</a:t>
-                      </a:r>
-                    </a:p>
-                  </a:txBody>
-                </a:tc>
-                <a:tc>
-                  <a:txBody>
-                    <a:bodyPr/>
-                    <a:lstStyle/>
-                    <a:p>
-                      <a:pPr lvl="0" indent="0" marL="0">
-                        <a:buNone/>
-                      </a:pPr>
-                      <a:r>
-                        <a:rPr/>
-                        <a:t>323.46</a:t>
-                      </a:r>
-                    </a:p>
-                  </a:txBody>
-                </a:tc>
-                <a:tc>
-                  <a:txBody>
-                    <a:bodyPr/>
-                    <a:lstStyle/>
-                    <a:p>
-                      <a:pPr lvl="0" indent="0" marL="0">
-                        <a:buNone/>
-                      </a:pPr>
-                      <a:r>
-                        <a:rPr/>
-                        <a:t>balsam fir</a:t>
+                        <a:t>11</a:t>
+                      </a:r>
+                    </a:p>
+                  </a:txBody>
+                </a:tc>
+                <a:tc>
+                  <a:txBody>
+                    <a:bodyPr/>
+                    <a:lstStyle/>
+                    <a:p>
+                      <a:pPr lvl="0" indent="0" marL="0">
+                        <a:buNone/>
+                      </a:pPr>
+                      <a:r>
+                        <a:rPr/>
+                        <a:t>Pacific silver fir</a:t>
                       </a:r>
                     </a:p>
                   </a:txBody>
@@ -6637,51 +5668,6 @@
                       </a:pPr>
                       <a:r>
                         <a:rPr/>
-                        <a:t>9.7</a:t>
-                      </a:r>
-                    </a:p>
-                  </a:txBody>
-                </a:tc>
-                <a:tc>
-                  <a:txBody>
-                    <a:bodyPr/>
-                    <a:lstStyle/>
-                    <a:p>
-                      <a:pPr lvl="0" indent="0" marL="0">
-                        <a:buNone/>
-                      </a:pPr>
-                      <a:r>
-                        <a:rPr/>
-                        <a:t>56.7</a:t>
-                      </a:r>
-                    </a:p>
-                  </a:txBody>
-                </a:tc>
-                <a:tc>
-                  <a:txBody>
-                    <a:bodyPr/>
-                    <a:lstStyle/>
-                    <a:p>
-                      <a:pPr lvl="0" indent="0" marL="0">
-                        <a:buNone/>
-                      </a:pPr>
-                      <a:r>
-                        <a:rPr/>
-                        <a:t>342.47</a:t>
-                      </a:r>
-                    </a:p>
-                  </a:txBody>
-                </a:tc>
-                <a:tc>
-                  <a:txBody>
-                    <a:bodyPr/>
-                    <a:lstStyle/>
-                    <a:p>
-                      <a:pPr lvl="0" indent="0" marL="0">
-                        <a:buNone/>
-                      </a:pPr>
-                      <a:r>
-                        <a:rPr/>
                         <a:t>balsam fir</a:t>
                       </a:r>
                     </a:p>
@@ -6714,67 +5700,22 @@
                       </a:pPr>
                       <a:r>
                         <a:rPr/>
-                        <a:t>12</a:t>
-                      </a:r>
-                    </a:p>
-                  </a:txBody>
-                </a:tc>
-                <a:tc>
-                  <a:txBody>
-                    <a:bodyPr/>
-                    <a:lstStyle/>
-                    <a:p>
-                      <a:pPr lvl="0" indent="0" marL="0">
-                        <a:buNone/>
-                      </a:pPr>
-                      <a:r>
-                        <a:rPr/>
-                        <a:t>11.4</a:t>
-                      </a:r>
-                    </a:p>
-                  </a:txBody>
-                </a:tc>
-                <a:tc>
-                  <a:txBody>
-                    <a:bodyPr/>
-                    <a:lstStyle/>
-                    <a:p>
-                      <a:pPr lvl="0" indent="0" marL="0">
-                        <a:buNone/>
-                      </a:pPr>
-                      <a:r>
-                        <a:rPr/>
-                        <a:t>66.1</a:t>
-                      </a:r>
-                    </a:p>
-                  </a:txBody>
-                </a:tc>
-                <a:tc>
-                  <a:txBody>
-                    <a:bodyPr/>
-                    <a:lstStyle/>
-                    <a:p>
-                      <a:pPr lvl="0" indent="0" marL="0">
-                        <a:buNone/>
-                      </a:pPr>
-                      <a:r>
-                        <a:rPr/>
-                        <a:t>499.35</a:t>
-                      </a:r>
-                    </a:p>
-                  </a:txBody>
-                </a:tc>
-                <a:tc>
-                  <a:txBody>
-                    <a:bodyPr/>
-                    <a:lstStyle/>
-                    <a:p>
-                      <a:pPr lvl="0" indent="0" marL="0">
-                        <a:buNone/>
-                      </a:pPr>
-                      <a:r>
-                        <a:rPr/>
-                        <a:t>balsam fir</a:t>
+                        <a:t>14</a:t>
+                      </a:r>
+                    </a:p>
+                  </a:txBody>
+                </a:tc>
+                <a:tc>
+                  <a:txBody>
+                    <a:bodyPr/>
+                    <a:lstStyle/>
+                    <a:p>
+                      <a:pPr lvl="0" indent="0" marL="0">
+                        <a:buNone/>
+                      </a:pPr>
+                      <a:r>
+                        <a:rPr/>
+                        <a:t>Santa Lucia or bristlecone fir</a:t>
                       </a:r>
                     </a:p>
                   </a:txBody>
@@ -6806,67 +5747,22 @@
                       </a:pPr>
                       <a:r>
                         <a:rPr/>
-                        <a:t>12</a:t>
-                      </a:r>
-                    </a:p>
-                  </a:txBody>
-                </a:tc>
-                <a:tc>
-                  <a:txBody>
-                    <a:bodyPr/>
-                    <a:lstStyle/>
-                    <a:p>
-                      <a:pPr lvl="0" indent="0" marL="0">
-                        <a:buNone/>
-                      </a:pPr>
-                      <a:r>
-                        <a:rPr/>
-                        <a:t>6.4</a:t>
-                      </a:r>
-                    </a:p>
-                  </a:txBody>
-                </a:tc>
-                <a:tc>
-                  <a:txBody>
-                    <a:bodyPr/>
-                    <a:lstStyle/>
-                    <a:p>
-                      <a:pPr lvl="0" indent="0" marL="0">
-                        <a:buNone/>
-                      </a:pPr>
-                      <a:r>
-                        <a:rPr/>
-                        <a:t>51.8</a:t>
-                      </a:r>
-                    </a:p>
-                  </a:txBody>
-                </a:tc>
-                <a:tc>
-                  <a:txBody>
-                    <a:bodyPr/>
-                    <a:lstStyle/>
-                    <a:p>
-                      <a:pPr lvl="0" indent="0" marL="0">
-                        <a:buNone/>
-                      </a:pPr>
-                      <a:r>
-                        <a:rPr/>
-                        <a:t>113.92</a:t>
-                      </a:r>
-                    </a:p>
-                  </a:txBody>
-                </a:tc>
-                <a:tc>
-                  <a:txBody>
-                    <a:bodyPr/>
-                    <a:lstStyle/>
-                    <a:p>
-                      <a:pPr lvl="0" indent="0" marL="0">
-                        <a:buNone/>
-                      </a:pPr>
-                      <a:r>
-                        <a:rPr/>
-                        <a:t>balsam fir</a:t>
+                        <a:t>15</a:t>
+                      </a:r>
+                    </a:p>
+                  </a:txBody>
+                </a:tc>
+                <a:tc>
+                  <a:txBody>
+                    <a:bodyPr/>
+                    <a:lstStyle/>
+                    <a:p>
+                      <a:pPr lvl="0" indent="0" marL="0">
+                        <a:buNone/>
+                      </a:pPr>
+                      <a:r>
+                        <a:rPr/>
+                        <a:t>white fir</a:t>
                       </a:r>
                     </a:p>
                   </a:txBody>
@@ -6918,11 +5814,1226 @@
             </a:pPr>
             <a:r>
               <a:rPr/>
-              <a:t>Quality Assurance</a:t>
+              <a:t>Combined Dataset (species mapped onto bigger dataset):</a:t>
             </a:r>
           </a:p>
         </p:txBody>
       </p:sp>
+      <p:graphicFrame>
+        <p:nvGraphicFramePr>
+          <p:cNvPr id="6" name="Content Placeholder 5"/>
+          <p:cNvGraphicFramePr>
+            <a:graphicFrameLocks noGrp="1"/>
+          </p:cNvGraphicFramePr>
+          <p:nvPr>
+            <p:ph idx="1"/>
+          </p:nvPr>
+        </p:nvGraphicFramePr>
+        <p:xfrm>
+          <a:off x="457200" y="1193800"/>
+          <a:ext cx="8229600" cy="3390900"/>
+        </p:xfrm>
+        <a:graphic>
+          <a:graphicData uri="http://schemas.openxmlformats.org/drawingml/2006/table">
+            <a:tbl>
+              <a:tblPr firstRow="1" bandRow="1">
+                <a:tableStyleId>{5C22544A-7EE6-4342-B048-85BDC9FD1C3A}</a:tableStyleId>
+              </a:tblPr>
+              <a:tblGrid>
+                <a:gridCol w="1371600"/>
+                <a:gridCol w="1371600"/>
+                <a:gridCol w="1371600"/>
+                <a:gridCol w="1371600"/>
+                <a:gridCol w="1371600"/>
+                <a:gridCol w="1371600"/>
+              </a:tblGrid>
+              <a:tr h="0">
+                <a:tc>
+                  <a:txBody>
+                    <a:bodyPr/>
+                    <a:lstStyle/>
+                    <a:p>
+                      <a:endParaRPr/>
+                    </a:p>
+                  </a:txBody>
+                  <a:tcPr/>
+                </a:tc>
+                <a:tc>
+                  <a:txBody>
+                    <a:bodyPr/>
+                    <a:lstStyle/>
+                    <a:p>
+                      <a:pPr lvl="0" indent="0" marL="0">
+                        <a:buNone/>
+                      </a:pPr>
+                      <a:r>
+                        <a:rPr/>
+                        <a:t>SPCD</a:t>
+                      </a:r>
+                    </a:p>
+                  </a:txBody>
+                  <a:tcPr/>
+                </a:tc>
+                <a:tc>
+                  <a:txBody>
+                    <a:bodyPr/>
+                    <a:lstStyle/>
+                    <a:p>
+                      <a:pPr lvl="0" indent="0" marL="0">
+                        <a:buNone/>
+                      </a:pPr>
+                      <a:r>
+                        <a:rPr/>
+                        <a:t>DO_BH</a:t>
+                      </a:r>
+                    </a:p>
+                  </a:txBody>
+                  <a:tcPr/>
+                </a:tc>
+                <a:tc>
+                  <a:txBody>
+                    <a:bodyPr/>
+                    <a:lstStyle/>
+                    <a:p>
+                      <a:pPr lvl="0" indent="0" marL="0">
+                        <a:buNone/>
+                      </a:pPr>
+                      <a:r>
+                        <a:rPr/>
+                        <a:t>HT_TOT</a:t>
+                      </a:r>
+                    </a:p>
+                  </a:txBody>
+                  <a:tcPr/>
+                </a:tc>
+                <a:tc>
+                  <a:txBody>
+                    <a:bodyPr/>
+                    <a:lstStyle/>
+                    <a:p>
+                      <a:pPr lvl="0" indent="0" marL="0">
+                        <a:buNone/>
+                      </a:pPr>
+                      <a:r>
+                        <a:rPr/>
+                        <a:t>TT_DW_CRM</a:t>
+                      </a:r>
+                    </a:p>
+                  </a:txBody>
+                  <a:tcPr/>
+                </a:tc>
+                <a:tc>
+                  <a:txBody>
+                    <a:bodyPr/>
+                    <a:lstStyle/>
+                    <a:p>
+                      <a:pPr lvl="0" indent="0" marL="0">
+                        <a:buNone/>
+                      </a:pPr>
+                      <a:r>
+                        <a:rPr/>
+                        <a:t>COMMON_NAME</a:t>
+                      </a:r>
+                    </a:p>
+                  </a:txBody>
+                  <a:tcPr/>
+                </a:tc>
+              </a:tr>
+              <a:tr h="0">
+                <a:tc>
+                  <a:txBody>
+                    <a:bodyPr/>
+                    <a:lstStyle/>
+                    <a:p>
+                      <a:pPr lvl="0" indent="0" marL="0">
+                        <a:buNone/>
+                      </a:pPr>
+                      <a:r>
+                        <a:rPr/>
+                        <a:t>0</a:t>
+                      </a:r>
+                    </a:p>
+                  </a:txBody>
+                </a:tc>
+                <a:tc>
+                  <a:txBody>
+                    <a:bodyPr/>
+                    <a:lstStyle/>
+                    <a:p>
+                      <a:pPr lvl="0" indent="0" marL="0">
+                        <a:buNone/>
+                      </a:pPr>
+                      <a:r>
+                        <a:rPr/>
+                        <a:t>12</a:t>
+                      </a:r>
+                    </a:p>
+                  </a:txBody>
+                </a:tc>
+                <a:tc>
+                  <a:txBody>
+                    <a:bodyPr/>
+                    <a:lstStyle/>
+                    <a:p>
+                      <a:pPr lvl="0" indent="0" marL="0">
+                        <a:buNone/>
+                      </a:pPr>
+                      <a:r>
+                        <a:rPr/>
+                        <a:t>7.5</a:t>
+                      </a:r>
+                    </a:p>
+                  </a:txBody>
+                </a:tc>
+                <a:tc>
+                  <a:txBody>
+                    <a:bodyPr/>
+                    <a:lstStyle/>
+                    <a:p>
+                      <a:pPr lvl="0" indent="0" marL="0">
+                        <a:buNone/>
+                      </a:pPr>
+                      <a:r>
+                        <a:rPr/>
+                        <a:t>45.2</a:t>
+                      </a:r>
+                    </a:p>
+                  </a:txBody>
+                </a:tc>
+                <a:tc>
+                  <a:txBody>
+                    <a:bodyPr/>
+                    <a:lstStyle/>
+                    <a:p>
+                      <a:pPr lvl="0" indent="0" marL="0">
+                        <a:buNone/>
+                      </a:pPr>
+                      <a:r>
+                        <a:rPr/>
+                        <a:t>178.86</a:t>
+                      </a:r>
+                    </a:p>
+                  </a:txBody>
+                </a:tc>
+                <a:tc>
+                  <a:txBody>
+                    <a:bodyPr/>
+                    <a:lstStyle/>
+                    <a:p>
+                      <a:pPr lvl="0" indent="0" marL="0">
+                        <a:buNone/>
+                      </a:pPr>
+                      <a:r>
+                        <a:rPr/>
+                        <a:t>balsam fir</a:t>
+                      </a:r>
+                    </a:p>
+                  </a:txBody>
+                </a:tc>
+              </a:tr>
+              <a:tr h="0">
+                <a:tc>
+                  <a:txBody>
+                    <a:bodyPr/>
+                    <a:lstStyle/>
+                    <a:p>
+                      <a:pPr lvl="0" indent="0" marL="0">
+                        <a:buNone/>
+                      </a:pPr>
+                      <a:r>
+                        <a:rPr/>
+                        <a:t>1</a:t>
+                      </a:r>
+                    </a:p>
+                  </a:txBody>
+                </a:tc>
+                <a:tc>
+                  <a:txBody>
+                    <a:bodyPr/>
+                    <a:lstStyle/>
+                    <a:p>
+                      <a:pPr lvl="0" indent="0" marL="0">
+                        <a:buNone/>
+                      </a:pPr>
+                      <a:r>
+                        <a:rPr/>
+                        <a:t>12</a:t>
+                      </a:r>
+                    </a:p>
+                  </a:txBody>
+                </a:tc>
+                <a:tc>
+                  <a:txBody>
+                    <a:bodyPr/>
+                    <a:lstStyle/>
+                    <a:p>
+                      <a:pPr lvl="0" indent="0" marL="0">
+                        <a:buNone/>
+                      </a:pPr>
+                      <a:r>
+                        <a:rPr/>
+                        <a:t>9.3</a:t>
+                      </a:r>
+                    </a:p>
+                  </a:txBody>
+                </a:tc>
+                <a:tc>
+                  <a:txBody>
+                    <a:bodyPr/>
+                    <a:lstStyle/>
+                    <a:p>
+                      <a:pPr lvl="0" indent="0" marL="0">
+                        <a:buNone/>
+                      </a:pPr>
+                      <a:r>
+                        <a:rPr/>
+                        <a:t>62.7</a:t>
+                      </a:r>
+                    </a:p>
+                  </a:txBody>
+                </a:tc>
+                <a:tc>
+                  <a:txBody>
+                    <a:bodyPr/>
+                    <a:lstStyle/>
+                    <a:p>
+                      <a:pPr lvl="0" indent="0" marL="0">
+                        <a:buNone/>
+                      </a:pPr>
+                      <a:r>
+                        <a:rPr/>
+                        <a:t>323.46</a:t>
+                      </a:r>
+                    </a:p>
+                  </a:txBody>
+                </a:tc>
+                <a:tc>
+                  <a:txBody>
+                    <a:bodyPr/>
+                    <a:lstStyle/>
+                    <a:p>
+                      <a:pPr lvl="0" indent="0" marL="0">
+                        <a:buNone/>
+                      </a:pPr>
+                      <a:r>
+                        <a:rPr/>
+                        <a:t>balsam fir</a:t>
+                      </a:r>
+                    </a:p>
+                  </a:txBody>
+                </a:tc>
+              </a:tr>
+              <a:tr h="0">
+                <a:tc>
+                  <a:txBody>
+                    <a:bodyPr/>
+                    <a:lstStyle/>
+                    <a:p>
+                      <a:pPr lvl="0" indent="0" marL="0">
+                        <a:buNone/>
+                      </a:pPr>
+                      <a:r>
+                        <a:rPr/>
+                        <a:t>2</a:t>
+                      </a:r>
+                    </a:p>
+                  </a:txBody>
+                </a:tc>
+                <a:tc>
+                  <a:txBody>
+                    <a:bodyPr/>
+                    <a:lstStyle/>
+                    <a:p>
+                      <a:pPr lvl="0" indent="0" marL="0">
+                        <a:buNone/>
+                      </a:pPr>
+                      <a:r>
+                        <a:rPr/>
+                        <a:t>12</a:t>
+                      </a:r>
+                    </a:p>
+                  </a:txBody>
+                </a:tc>
+                <a:tc>
+                  <a:txBody>
+                    <a:bodyPr/>
+                    <a:lstStyle/>
+                    <a:p>
+                      <a:pPr lvl="0" indent="0" marL="0">
+                        <a:buNone/>
+                      </a:pPr>
+                      <a:r>
+                        <a:rPr/>
+                        <a:t>9.7</a:t>
+                      </a:r>
+                    </a:p>
+                  </a:txBody>
+                </a:tc>
+                <a:tc>
+                  <a:txBody>
+                    <a:bodyPr/>
+                    <a:lstStyle/>
+                    <a:p>
+                      <a:pPr lvl="0" indent="0" marL="0">
+                        <a:buNone/>
+                      </a:pPr>
+                      <a:r>
+                        <a:rPr/>
+                        <a:t>56.7</a:t>
+                      </a:r>
+                    </a:p>
+                  </a:txBody>
+                </a:tc>
+                <a:tc>
+                  <a:txBody>
+                    <a:bodyPr/>
+                    <a:lstStyle/>
+                    <a:p>
+                      <a:pPr lvl="0" indent="0" marL="0">
+                        <a:buNone/>
+                      </a:pPr>
+                      <a:r>
+                        <a:rPr/>
+                        <a:t>342.47</a:t>
+                      </a:r>
+                    </a:p>
+                  </a:txBody>
+                </a:tc>
+                <a:tc>
+                  <a:txBody>
+                    <a:bodyPr/>
+                    <a:lstStyle/>
+                    <a:p>
+                      <a:pPr lvl="0" indent="0" marL="0">
+                        <a:buNone/>
+                      </a:pPr>
+                      <a:r>
+                        <a:rPr/>
+                        <a:t>balsam fir</a:t>
+                      </a:r>
+                    </a:p>
+                  </a:txBody>
+                </a:tc>
+              </a:tr>
+              <a:tr h="0">
+                <a:tc>
+                  <a:txBody>
+                    <a:bodyPr/>
+                    <a:lstStyle/>
+                    <a:p>
+                      <a:pPr lvl="0" indent="0" marL="0">
+                        <a:buNone/>
+                      </a:pPr>
+                      <a:r>
+                        <a:rPr/>
+                        <a:t>3</a:t>
+                      </a:r>
+                    </a:p>
+                  </a:txBody>
+                </a:tc>
+                <a:tc>
+                  <a:txBody>
+                    <a:bodyPr/>
+                    <a:lstStyle/>
+                    <a:p>
+                      <a:pPr lvl="0" indent="0" marL="0">
+                        <a:buNone/>
+                      </a:pPr>
+                      <a:r>
+                        <a:rPr/>
+                        <a:t>12</a:t>
+                      </a:r>
+                    </a:p>
+                  </a:txBody>
+                </a:tc>
+                <a:tc>
+                  <a:txBody>
+                    <a:bodyPr/>
+                    <a:lstStyle/>
+                    <a:p>
+                      <a:pPr lvl="0" indent="0" marL="0">
+                        <a:buNone/>
+                      </a:pPr>
+                      <a:r>
+                        <a:rPr/>
+                        <a:t>11.4</a:t>
+                      </a:r>
+                    </a:p>
+                  </a:txBody>
+                </a:tc>
+                <a:tc>
+                  <a:txBody>
+                    <a:bodyPr/>
+                    <a:lstStyle/>
+                    <a:p>
+                      <a:pPr lvl="0" indent="0" marL="0">
+                        <a:buNone/>
+                      </a:pPr>
+                      <a:r>
+                        <a:rPr/>
+                        <a:t>66.1</a:t>
+                      </a:r>
+                    </a:p>
+                  </a:txBody>
+                </a:tc>
+                <a:tc>
+                  <a:txBody>
+                    <a:bodyPr/>
+                    <a:lstStyle/>
+                    <a:p>
+                      <a:pPr lvl="0" indent="0" marL="0">
+                        <a:buNone/>
+                      </a:pPr>
+                      <a:r>
+                        <a:rPr/>
+                        <a:t>499.35</a:t>
+                      </a:r>
+                    </a:p>
+                  </a:txBody>
+                </a:tc>
+                <a:tc>
+                  <a:txBody>
+                    <a:bodyPr/>
+                    <a:lstStyle/>
+                    <a:p>
+                      <a:pPr lvl="0" indent="0" marL="0">
+                        <a:buNone/>
+                      </a:pPr>
+                      <a:r>
+                        <a:rPr/>
+                        <a:t>balsam fir</a:t>
+                      </a:r>
+                    </a:p>
+                  </a:txBody>
+                </a:tc>
+              </a:tr>
+              <a:tr h="0">
+                <a:tc>
+                  <a:txBody>
+                    <a:bodyPr/>
+                    <a:lstStyle/>
+                    <a:p>
+                      <a:pPr lvl="0" indent="0" marL="0">
+                        <a:buNone/>
+                      </a:pPr>
+                      <a:r>
+                        <a:rPr/>
+                        <a:t>4</a:t>
+                      </a:r>
+                    </a:p>
+                  </a:txBody>
+                </a:tc>
+                <a:tc>
+                  <a:txBody>
+                    <a:bodyPr/>
+                    <a:lstStyle/>
+                    <a:p>
+                      <a:pPr lvl="0" indent="0" marL="0">
+                        <a:buNone/>
+                      </a:pPr>
+                      <a:r>
+                        <a:rPr/>
+                        <a:t>12</a:t>
+                      </a:r>
+                    </a:p>
+                  </a:txBody>
+                </a:tc>
+                <a:tc>
+                  <a:txBody>
+                    <a:bodyPr/>
+                    <a:lstStyle/>
+                    <a:p>
+                      <a:pPr lvl="0" indent="0" marL="0">
+                        <a:buNone/>
+                      </a:pPr>
+                      <a:r>
+                        <a:rPr/>
+                        <a:t>6.4</a:t>
+                      </a:r>
+                    </a:p>
+                  </a:txBody>
+                </a:tc>
+                <a:tc>
+                  <a:txBody>
+                    <a:bodyPr/>
+                    <a:lstStyle/>
+                    <a:p>
+                      <a:pPr lvl="0" indent="0" marL="0">
+                        <a:buNone/>
+                      </a:pPr>
+                      <a:r>
+                        <a:rPr/>
+                        <a:t>51.8</a:t>
+                      </a:r>
+                    </a:p>
+                  </a:txBody>
+                </a:tc>
+                <a:tc>
+                  <a:txBody>
+                    <a:bodyPr/>
+                    <a:lstStyle/>
+                    <a:p>
+                      <a:pPr lvl="0" indent="0" marL="0">
+                        <a:buNone/>
+                      </a:pPr>
+                      <a:r>
+                        <a:rPr/>
+                        <a:t>113.92</a:t>
+                      </a:r>
+                    </a:p>
+                  </a:txBody>
+                </a:tc>
+                <a:tc>
+                  <a:txBody>
+                    <a:bodyPr/>
+                    <a:lstStyle/>
+                    <a:p>
+                      <a:pPr lvl="0" indent="0" marL="0">
+                        <a:buNone/>
+                      </a:pPr>
+                      <a:r>
+                        <a:rPr/>
+                        <a:t>balsam fir</a:t>
+                      </a:r>
+                    </a:p>
+                  </a:txBody>
+                </a:tc>
+              </a:tr>
+            </a:tbl>
+          </a:graphicData>
+        </a:graphic>
+      </p:graphicFrame>
+    </p:spTree>
+  </p:cSld>
+</p:sld>
+</file>
+
+<file path=ppt/slides/slide19.xml><?xml version="1.0" encoding="utf-8"?>
+<p:sld xmlns:a="http://schemas.openxmlformats.org/drawingml/2006/main" xmlns:r="http://schemas.openxmlformats.org/officeDocument/2006/relationships" xmlns:p="http://schemas.openxmlformats.org/presentationml/2006/main">
+  <p:cSld>
+    <p:spTree>
+      <p:nvGrpSpPr>
+        <p:cNvPr id="1" name=""/>
+        <p:cNvGrpSpPr/>
+        <p:nvPr/>
+      </p:nvGrpSpPr>
+      <p:grpSpPr>
+        <a:xfrm>
+          <a:off x="0" y="0"/>
+          <a:ext cx="0" cy="0"/>
+          <a:chOff x="0" y="0"/>
+          <a:chExt cx="0" cy="0"/>
+        </a:xfrm>
+      </p:grpSpPr>
+      <p:sp>
+        <p:nvSpPr>
+          <p:cNvPr id="2" name="Title 1"/>
+          <p:cNvSpPr>
+            <a:spLocks noGrp="1"/>
+          </p:cNvSpPr>
+          <p:nvPr>
+            <p:ph type="title"/>
+          </p:nvPr>
+        </p:nvSpPr>
+        <p:spPr/>
+        <p:txBody>
+          <a:bodyPr/>
+          <a:lstStyle/>
+          <a:p>
+            <a:pPr lvl="0" indent="0" marL="0">
+              <a:buNone/>
+            </a:pPr>
+            <a:r>
+              <a:rPr/>
+              <a:t>Filtered data</a:t>
+            </a:r>
+          </a:p>
+        </p:txBody>
+      </p:sp>
+      <p:graphicFrame>
+        <p:nvGraphicFramePr>
+          <p:cNvPr id="6" name="Content Placeholder 5"/>
+          <p:cNvGraphicFramePr>
+            <a:graphicFrameLocks noGrp="1"/>
+          </p:cNvGraphicFramePr>
+          <p:nvPr>
+            <p:ph idx="1"/>
+          </p:nvPr>
+        </p:nvGraphicFramePr>
+        <p:xfrm>
+          <a:off x="457200" y="1193800"/>
+          <a:ext cx="8229600" cy="3390900"/>
+        </p:xfrm>
+        <a:graphic>
+          <a:graphicData uri="http://schemas.openxmlformats.org/drawingml/2006/table">
+            <a:tbl>
+              <a:tblPr firstRow="1" bandRow="1">
+                <a:tableStyleId>{5C22544A-7EE6-4342-B048-85BDC9FD1C3A}</a:tableStyleId>
+              </a:tblPr>
+              <a:tblGrid>
+                <a:gridCol w="1371600"/>
+                <a:gridCol w="1371600"/>
+                <a:gridCol w="1371600"/>
+                <a:gridCol w="1371600"/>
+                <a:gridCol w="1371600"/>
+                <a:gridCol w="1371600"/>
+              </a:tblGrid>
+              <a:tr h="0">
+                <a:tc>
+                  <a:txBody>
+                    <a:bodyPr/>
+                    <a:lstStyle/>
+                    <a:p>
+                      <a:endParaRPr/>
+                    </a:p>
+                  </a:txBody>
+                  <a:tcPr/>
+                </a:tc>
+                <a:tc>
+                  <a:txBody>
+                    <a:bodyPr/>
+                    <a:lstStyle/>
+                    <a:p>
+                      <a:pPr lvl="0" indent="0" marL="0">
+                        <a:buNone/>
+                      </a:pPr>
+                      <a:r>
+                        <a:rPr/>
+                        <a:t>SPCD</a:t>
+                      </a:r>
+                    </a:p>
+                  </a:txBody>
+                  <a:tcPr/>
+                </a:tc>
+                <a:tc>
+                  <a:txBody>
+                    <a:bodyPr/>
+                    <a:lstStyle/>
+                    <a:p>
+                      <a:pPr lvl="0" indent="0" marL="0">
+                        <a:buNone/>
+                      </a:pPr>
+                      <a:r>
+                        <a:rPr/>
+                        <a:t>DO_BH</a:t>
+                      </a:r>
+                    </a:p>
+                  </a:txBody>
+                  <a:tcPr/>
+                </a:tc>
+                <a:tc>
+                  <a:txBody>
+                    <a:bodyPr/>
+                    <a:lstStyle/>
+                    <a:p>
+                      <a:pPr lvl="0" indent="0" marL="0">
+                        <a:buNone/>
+                      </a:pPr>
+                      <a:r>
+                        <a:rPr/>
+                        <a:t>HT_TOT</a:t>
+                      </a:r>
+                    </a:p>
+                  </a:txBody>
+                  <a:tcPr/>
+                </a:tc>
+                <a:tc>
+                  <a:txBody>
+                    <a:bodyPr/>
+                    <a:lstStyle/>
+                    <a:p>
+                      <a:pPr lvl="0" indent="0" marL="0">
+                        <a:buNone/>
+                      </a:pPr>
+                      <a:r>
+                        <a:rPr/>
+                        <a:t>TT_DW_CRM</a:t>
+                      </a:r>
+                    </a:p>
+                  </a:txBody>
+                  <a:tcPr/>
+                </a:tc>
+                <a:tc>
+                  <a:txBody>
+                    <a:bodyPr/>
+                    <a:lstStyle/>
+                    <a:p>
+                      <a:pPr lvl="0" indent="0" marL="0">
+                        <a:buNone/>
+                      </a:pPr>
+                      <a:r>
+                        <a:rPr/>
+                        <a:t>COMMON_NAME</a:t>
+                      </a:r>
+                    </a:p>
+                  </a:txBody>
+                  <a:tcPr/>
+                </a:tc>
+              </a:tr>
+              <a:tr h="0">
+                <a:tc>
+                  <a:txBody>
+                    <a:bodyPr/>
+                    <a:lstStyle/>
+                    <a:p>
+                      <a:pPr lvl="0" indent="0" marL="0">
+                        <a:buNone/>
+                      </a:pPr>
+                      <a:r>
+                        <a:rPr/>
+                        <a:t>0</a:t>
+                      </a:r>
+                    </a:p>
+                  </a:txBody>
+                </a:tc>
+                <a:tc>
+                  <a:txBody>
+                    <a:bodyPr/>
+                    <a:lstStyle/>
+                    <a:p>
+                      <a:pPr lvl="0" indent="0" marL="0">
+                        <a:buNone/>
+                      </a:pPr>
+                      <a:r>
+                        <a:rPr/>
+                        <a:t>12</a:t>
+                      </a:r>
+                    </a:p>
+                  </a:txBody>
+                </a:tc>
+                <a:tc>
+                  <a:txBody>
+                    <a:bodyPr/>
+                    <a:lstStyle/>
+                    <a:p>
+                      <a:pPr lvl="0" indent="0" marL="0">
+                        <a:buNone/>
+                      </a:pPr>
+                      <a:r>
+                        <a:rPr/>
+                        <a:t>7.5</a:t>
+                      </a:r>
+                    </a:p>
+                  </a:txBody>
+                </a:tc>
+                <a:tc>
+                  <a:txBody>
+                    <a:bodyPr/>
+                    <a:lstStyle/>
+                    <a:p>
+                      <a:pPr lvl="0" indent="0" marL="0">
+                        <a:buNone/>
+                      </a:pPr>
+                      <a:r>
+                        <a:rPr/>
+                        <a:t>45.2</a:t>
+                      </a:r>
+                    </a:p>
+                  </a:txBody>
+                </a:tc>
+                <a:tc>
+                  <a:txBody>
+                    <a:bodyPr/>
+                    <a:lstStyle/>
+                    <a:p>
+                      <a:pPr lvl="0" indent="0" marL="0">
+                        <a:buNone/>
+                      </a:pPr>
+                      <a:r>
+                        <a:rPr/>
+                        <a:t>178.86</a:t>
+                      </a:r>
+                    </a:p>
+                  </a:txBody>
+                </a:tc>
+                <a:tc>
+                  <a:txBody>
+                    <a:bodyPr/>
+                    <a:lstStyle/>
+                    <a:p>
+                      <a:pPr lvl="0" indent="0" marL="0">
+                        <a:buNone/>
+                      </a:pPr>
+                      <a:r>
+                        <a:rPr/>
+                        <a:t>balsam fir</a:t>
+                      </a:r>
+                    </a:p>
+                  </a:txBody>
+                </a:tc>
+              </a:tr>
+              <a:tr h="0">
+                <a:tc>
+                  <a:txBody>
+                    <a:bodyPr/>
+                    <a:lstStyle/>
+                    <a:p>
+                      <a:pPr lvl="0" indent="0" marL="0">
+                        <a:buNone/>
+                      </a:pPr>
+                      <a:r>
+                        <a:rPr/>
+                        <a:t>1</a:t>
+                      </a:r>
+                    </a:p>
+                  </a:txBody>
+                </a:tc>
+                <a:tc>
+                  <a:txBody>
+                    <a:bodyPr/>
+                    <a:lstStyle/>
+                    <a:p>
+                      <a:pPr lvl="0" indent="0" marL="0">
+                        <a:buNone/>
+                      </a:pPr>
+                      <a:r>
+                        <a:rPr/>
+                        <a:t>12</a:t>
+                      </a:r>
+                    </a:p>
+                  </a:txBody>
+                </a:tc>
+                <a:tc>
+                  <a:txBody>
+                    <a:bodyPr/>
+                    <a:lstStyle/>
+                    <a:p>
+                      <a:pPr lvl="0" indent="0" marL="0">
+                        <a:buNone/>
+                      </a:pPr>
+                      <a:r>
+                        <a:rPr/>
+                        <a:t>9.3</a:t>
+                      </a:r>
+                    </a:p>
+                  </a:txBody>
+                </a:tc>
+                <a:tc>
+                  <a:txBody>
+                    <a:bodyPr/>
+                    <a:lstStyle/>
+                    <a:p>
+                      <a:pPr lvl="0" indent="0" marL="0">
+                        <a:buNone/>
+                      </a:pPr>
+                      <a:r>
+                        <a:rPr/>
+                        <a:t>62.7</a:t>
+                      </a:r>
+                    </a:p>
+                  </a:txBody>
+                </a:tc>
+                <a:tc>
+                  <a:txBody>
+                    <a:bodyPr/>
+                    <a:lstStyle/>
+                    <a:p>
+                      <a:pPr lvl="0" indent="0" marL="0">
+                        <a:buNone/>
+                      </a:pPr>
+                      <a:r>
+                        <a:rPr/>
+                        <a:t>323.46</a:t>
+                      </a:r>
+                    </a:p>
+                  </a:txBody>
+                </a:tc>
+                <a:tc>
+                  <a:txBody>
+                    <a:bodyPr/>
+                    <a:lstStyle/>
+                    <a:p>
+                      <a:pPr lvl="0" indent="0" marL="0">
+                        <a:buNone/>
+                      </a:pPr>
+                      <a:r>
+                        <a:rPr/>
+                        <a:t>balsam fir</a:t>
+                      </a:r>
+                    </a:p>
+                  </a:txBody>
+                </a:tc>
+              </a:tr>
+              <a:tr h="0">
+                <a:tc>
+                  <a:txBody>
+                    <a:bodyPr/>
+                    <a:lstStyle/>
+                    <a:p>
+                      <a:pPr lvl="0" indent="0" marL="0">
+                        <a:buNone/>
+                      </a:pPr>
+                      <a:r>
+                        <a:rPr/>
+                        <a:t>2</a:t>
+                      </a:r>
+                    </a:p>
+                  </a:txBody>
+                </a:tc>
+                <a:tc>
+                  <a:txBody>
+                    <a:bodyPr/>
+                    <a:lstStyle/>
+                    <a:p>
+                      <a:pPr lvl="0" indent="0" marL="0">
+                        <a:buNone/>
+                      </a:pPr>
+                      <a:r>
+                        <a:rPr/>
+                        <a:t>12</a:t>
+                      </a:r>
+                    </a:p>
+                  </a:txBody>
+                </a:tc>
+                <a:tc>
+                  <a:txBody>
+                    <a:bodyPr/>
+                    <a:lstStyle/>
+                    <a:p>
+                      <a:pPr lvl="0" indent="0" marL="0">
+                        <a:buNone/>
+                      </a:pPr>
+                      <a:r>
+                        <a:rPr/>
+                        <a:t>9.7</a:t>
+                      </a:r>
+                    </a:p>
+                  </a:txBody>
+                </a:tc>
+                <a:tc>
+                  <a:txBody>
+                    <a:bodyPr/>
+                    <a:lstStyle/>
+                    <a:p>
+                      <a:pPr lvl="0" indent="0" marL="0">
+                        <a:buNone/>
+                      </a:pPr>
+                      <a:r>
+                        <a:rPr/>
+                        <a:t>56.7</a:t>
+                      </a:r>
+                    </a:p>
+                  </a:txBody>
+                </a:tc>
+                <a:tc>
+                  <a:txBody>
+                    <a:bodyPr/>
+                    <a:lstStyle/>
+                    <a:p>
+                      <a:pPr lvl="0" indent="0" marL="0">
+                        <a:buNone/>
+                      </a:pPr>
+                      <a:r>
+                        <a:rPr/>
+                        <a:t>342.47</a:t>
+                      </a:r>
+                    </a:p>
+                  </a:txBody>
+                </a:tc>
+                <a:tc>
+                  <a:txBody>
+                    <a:bodyPr/>
+                    <a:lstStyle/>
+                    <a:p>
+                      <a:pPr lvl="0" indent="0" marL="0">
+                        <a:buNone/>
+                      </a:pPr>
+                      <a:r>
+                        <a:rPr/>
+                        <a:t>balsam fir</a:t>
+                      </a:r>
+                    </a:p>
+                  </a:txBody>
+                </a:tc>
+              </a:tr>
+              <a:tr h="0">
+                <a:tc>
+                  <a:txBody>
+                    <a:bodyPr/>
+                    <a:lstStyle/>
+                    <a:p>
+                      <a:pPr lvl="0" indent="0" marL="0">
+                        <a:buNone/>
+                      </a:pPr>
+                      <a:r>
+                        <a:rPr/>
+                        <a:t>3</a:t>
+                      </a:r>
+                    </a:p>
+                  </a:txBody>
+                </a:tc>
+                <a:tc>
+                  <a:txBody>
+                    <a:bodyPr/>
+                    <a:lstStyle/>
+                    <a:p>
+                      <a:pPr lvl="0" indent="0" marL="0">
+                        <a:buNone/>
+                      </a:pPr>
+                      <a:r>
+                        <a:rPr/>
+                        <a:t>12</a:t>
+                      </a:r>
+                    </a:p>
+                  </a:txBody>
+                </a:tc>
+                <a:tc>
+                  <a:txBody>
+                    <a:bodyPr/>
+                    <a:lstStyle/>
+                    <a:p>
+                      <a:pPr lvl="0" indent="0" marL="0">
+                        <a:buNone/>
+                      </a:pPr>
+                      <a:r>
+                        <a:rPr/>
+                        <a:t>11.4</a:t>
+                      </a:r>
+                    </a:p>
+                  </a:txBody>
+                </a:tc>
+                <a:tc>
+                  <a:txBody>
+                    <a:bodyPr/>
+                    <a:lstStyle/>
+                    <a:p>
+                      <a:pPr lvl="0" indent="0" marL="0">
+                        <a:buNone/>
+                      </a:pPr>
+                      <a:r>
+                        <a:rPr/>
+                        <a:t>66.1</a:t>
+                      </a:r>
+                    </a:p>
+                  </a:txBody>
+                </a:tc>
+                <a:tc>
+                  <a:txBody>
+                    <a:bodyPr/>
+                    <a:lstStyle/>
+                    <a:p>
+                      <a:pPr lvl="0" indent="0" marL="0">
+                        <a:buNone/>
+                      </a:pPr>
+                      <a:r>
+                        <a:rPr/>
+                        <a:t>499.35</a:t>
+                      </a:r>
+                    </a:p>
+                  </a:txBody>
+                </a:tc>
+                <a:tc>
+                  <a:txBody>
+                    <a:bodyPr/>
+                    <a:lstStyle/>
+                    <a:p>
+                      <a:pPr lvl="0" indent="0" marL="0">
+                        <a:buNone/>
+                      </a:pPr>
+                      <a:r>
+                        <a:rPr/>
+                        <a:t>balsam fir</a:t>
+                      </a:r>
+                    </a:p>
+                  </a:txBody>
+                </a:tc>
+              </a:tr>
+              <a:tr h="0">
+                <a:tc>
+                  <a:txBody>
+                    <a:bodyPr/>
+                    <a:lstStyle/>
+                    <a:p>
+                      <a:pPr lvl="0" indent="0" marL="0">
+                        <a:buNone/>
+                      </a:pPr>
+                      <a:r>
+                        <a:rPr/>
+                        <a:t>4</a:t>
+                      </a:r>
+                    </a:p>
+                  </a:txBody>
+                </a:tc>
+                <a:tc>
+                  <a:txBody>
+                    <a:bodyPr/>
+                    <a:lstStyle/>
+                    <a:p>
+                      <a:pPr lvl="0" indent="0" marL="0">
+                        <a:buNone/>
+                      </a:pPr>
+                      <a:r>
+                        <a:rPr/>
+                        <a:t>12</a:t>
+                      </a:r>
+                    </a:p>
+                  </a:txBody>
+                </a:tc>
+                <a:tc>
+                  <a:txBody>
+                    <a:bodyPr/>
+                    <a:lstStyle/>
+                    <a:p>
+                      <a:pPr lvl="0" indent="0" marL="0">
+                        <a:buNone/>
+                      </a:pPr>
+                      <a:r>
+                        <a:rPr/>
+                        <a:t>6.4</a:t>
+                      </a:r>
+                    </a:p>
+                  </a:txBody>
+                </a:tc>
+                <a:tc>
+                  <a:txBody>
+                    <a:bodyPr/>
+                    <a:lstStyle/>
+                    <a:p>
+                      <a:pPr lvl="0" indent="0" marL="0">
+                        <a:buNone/>
+                      </a:pPr>
+                      <a:r>
+                        <a:rPr/>
+                        <a:t>51.8</a:t>
+                      </a:r>
+                    </a:p>
+                  </a:txBody>
+                </a:tc>
+                <a:tc>
+                  <a:txBody>
+                    <a:bodyPr/>
+                    <a:lstStyle/>
+                    <a:p>
+                      <a:pPr lvl="0" indent="0" marL="0">
+                        <a:buNone/>
+                      </a:pPr>
+                      <a:r>
+                        <a:rPr/>
+                        <a:t>113.92</a:t>
+                      </a:r>
+                    </a:p>
+                  </a:txBody>
+                </a:tc>
+                <a:tc>
+                  <a:txBody>
+                    <a:bodyPr/>
+                    <a:lstStyle/>
+                    <a:p>
+                      <a:pPr lvl="0" indent="0" marL="0">
+                        <a:buNone/>
+                      </a:pPr>
+                      <a:r>
+                        <a:rPr/>
+                        <a:t>balsam fir</a:t>
+                      </a:r>
+                    </a:p>
+                  </a:txBody>
+                </a:tc>
+              </a:tr>
+            </a:tbl>
+          </a:graphicData>
+        </a:graphic>
+      </p:graphicFrame>
     </p:spTree>
   </p:cSld>
 </p:sld>
@@ -7004,6 +7115,53 @@
             <a:r>
               <a:rPr/>
               <a:t>.</a:t>
+            </a:r>
+          </a:p>
+        </p:txBody>
+      </p:sp>
+    </p:spTree>
+  </p:cSld>
+</p:sld>
+</file>
+
+<file path=ppt/slides/slide20.xml><?xml version="1.0" encoding="utf-8"?>
+<p:sld xmlns:a="http://schemas.openxmlformats.org/drawingml/2006/main" xmlns:r="http://schemas.openxmlformats.org/officeDocument/2006/relationships" xmlns:p="http://schemas.openxmlformats.org/presentationml/2006/main">
+  <p:cSld>
+    <p:spTree>
+      <p:nvGrpSpPr>
+        <p:cNvPr id="1" name=""/>
+        <p:cNvGrpSpPr/>
+        <p:nvPr/>
+      </p:nvGrpSpPr>
+      <p:grpSpPr>
+        <a:xfrm>
+          <a:off x="0" y="0"/>
+          <a:ext cx="0" cy="0"/>
+          <a:chOff x="0" y="0"/>
+          <a:chExt cx="0" cy="0"/>
+        </a:xfrm>
+      </p:grpSpPr>
+      <p:sp>
+        <p:nvSpPr>
+          <p:cNvPr id="2" name="Title 1"/>
+          <p:cNvSpPr>
+            <a:spLocks noGrp="1"/>
+          </p:cNvSpPr>
+          <p:nvPr>
+            <p:ph type="title"/>
+          </p:nvPr>
+        </p:nvSpPr>
+        <p:spPr/>
+        <p:txBody>
+          <a:bodyPr/>
+          <a:lstStyle/>
+          <a:p>
+            <a:pPr lvl="0" indent="0" marL="0">
+              <a:buNone/>
+            </a:pPr>
+            <a:r>
+              <a:rPr/>
+              <a:t>Quality Assurance</a:t>
             </a:r>
           </a:p>
         </p:txBody>

--- a/Project-3/presentation.pptx
+++ b/Project-3/presentation.pptx
@@ -22,6 +22,9 @@
     <p:sldId id="270" r:id="rId16"/>
     <p:sldId id="271" r:id="rId17"/>
     <p:sldId id="272" r:id="rId18"/>
+    <p:sldId id="273" r:id="rId19"/>
+    <p:sldId id="274" r:id="rId20"/>
+    <p:sldId id="275" r:id="rId21"/>
   </p:sldIdLst>
   <p:sldSz cx="9144000" cy="5143500" type="screen16x9"/>
   <p:notesSz cx="6858000" cy="9144000"/>
@@ -3710,37 +3713,37 @@
                       </a:pPr>
                       <a:r>
                         <a:rPr/>
-                        <a:t>125.825473</a:t>
-                      </a:r>
-                    </a:p>
-                  </a:txBody>
-                </a:tc>
-                <a:tc>
-                  <a:txBody>
-                    <a:bodyPr/>
-                    <a:lstStyle/>
-                    <a:p>
-                      <a:pPr lvl="0" indent="0" marL="0">
-                        <a:buNone/>
-                      </a:pPr>
-                      <a:r>
-                        <a:rPr/>
-                        <a:t>34.801913</a:t>
-                      </a:r>
-                    </a:p>
-                  </a:txBody>
-                </a:tc>
-                <a:tc>
-                  <a:txBody>
-                    <a:bodyPr/>
-                    <a:lstStyle/>
-                    <a:p>
-                      <a:pPr lvl="0" indent="0" marL="0">
-                        <a:buNone/>
-                      </a:pPr>
-                      <a:r>
-                        <a:rPr/>
-                        <a:t>0.119574</a:t>
+                        <a:t>125.827396</a:t>
+                      </a:r>
+                    </a:p>
+                  </a:txBody>
+                </a:tc>
+                <a:tc>
+                  <a:txBody>
+                    <a:bodyPr/>
+                    <a:lstStyle/>
+                    <a:p>
+                      <a:pPr lvl="0" indent="0" marL="0">
+                        <a:buNone/>
+                      </a:pPr>
+                      <a:r>
+                        <a:rPr/>
+                        <a:t>34.820565</a:t>
+                      </a:r>
+                    </a:p>
+                  </a:txBody>
+                </a:tc>
+                <a:tc>
+                  <a:txBody>
+                    <a:bodyPr/>
+                    <a:lstStyle/>
+                    <a:p>
+                      <a:pPr lvl="0" indent="0" marL="0">
+                        <a:buNone/>
+                      </a:pPr>
+                      <a:r>
+                        <a:rPr/>
+                        <a:t>0.119617</a:t>
                       </a:r>
                     </a:p>
                   </a:txBody>
@@ -3802,37 +3805,37 @@
                       </a:pPr>
                       <a:r>
                         <a:rPr/>
-                        <a:t>129.651479</a:t>
-                      </a:r>
-                    </a:p>
-                  </a:txBody>
-                </a:tc>
-                <a:tc>
-                  <a:txBody>
-                    <a:bodyPr/>
-                    <a:lstStyle/>
-                    <a:p>
-                      <a:pPr lvl="0" indent="0" marL="0">
-                        <a:buNone/>
-                      </a:pPr>
-                      <a:r>
-                        <a:rPr/>
-                        <a:t>36.646493</a:t>
-                      </a:r>
-                    </a:p>
-                  </a:txBody>
-                </a:tc>
-                <a:tc>
-                  <a:txBody>
-                    <a:bodyPr/>
-                    <a:lstStyle/>
-                    <a:p>
-                      <a:pPr lvl="0" indent="0" marL="0">
-                        <a:buNone/>
-                      </a:pPr>
-                      <a:r>
-                        <a:rPr/>
-                        <a:t>0.123724</a:t>
+                        <a:t>129.650855</a:t>
+                      </a:r>
+                    </a:p>
+                  </a:txBody>
+                </a:tc>
+                <a:tc>
+                  <a:txBody>
+                    <a:bodyPr/>
+                    <a:lstStyle/>
+                    <a:p>
+                      <a:pPr lvl="0" indent="0" marL="0">
+                        <a:buNone/>
+                      </a:pPr>
+                      <a:r>
+                        <a:rPr/>
+                        <a:t>36.628377</a:t>
+                      </a:r>
+                    </a:p>
+                  </a:txBody>
+                </a:tc>
+                <a:tc>
+                  <a:txBody>
+                    <a:bodyPr/>
+                    <a:lstStyle/>
+                    <a:p>
+                      <a:pPr lvl="0" indent="0" marL="0">
+                        <a:buNone/>
+                      </a:pPr>
+                      <a:r>
+                        <a:rPr/>
+                        <a:t>0.123679</a:t>
                       </a:r>
                     </a:p>
                   </a:txBody>
@@ -3986,37 +3989,37 @@
                       </a:pPr>
                       <a:r>
                         <a:rPr/>
-                        <a:t>145.003601</a:t>
-                      </a:r>
-                    </a:p>
-                  </a:txBody>
-                </a:tc>
-                <a:tc>
-                  <a:txBody>
-                    <a:bodyPr/>
-                    <a:lstStyle/>
-                    <a:p>
-                      <a:pPr lvl="0" indent="0" marL="0">
-                        <a:buNone/>
-                      </a:pPr>
-                      <a:r>
-                        <a:rPr/>
-                        <a:t>41.209530</a:t>
-                      </a:r>
-                    </a:p>
-                  </a:txBody>
-                </a:tc>
-                <a:tc>
-                  <a:txBody>
-                    <a:bodyPr/>
-                    <a:lstStyle/>
-                    <a:p>
-                      <a:pPr lvl="0" indent="0" marL="0">
-                        <a:buNone/>
-                      </a:pPr>
-                      <a:r>
-                        <a:rPr/>
-                        <a:t>0.144063</a:t>
+                        <a:t>145.002852</a:t>
+                      </a:r>
+                    </a:p>
+                  </a:txBody>
+                </a:tc>
+                <a:tc>
+                  <a:txBody>
+                    <a:bodyPr/>
+                    <a:lstStyle/>
+                    <a:p>
+                      <a:pPr lvl="0" indent="0" marL="0">
+                        <a:buNone/>
+                      </a:pPr>
+                      <a:r>
+                        <a:rPr/>
+                        <a:t>41.168470</a:t>
+                      </a:r>
+                    </a:p>
+                  </a:txBody>
+                </a:tc>
+                <a:tc>
+                  <a:txBody>
+                    <a:bodyPr/>
+                    <a:lstStyle/>
+                    <a:p>
+                      <a:pPr lvl="0" indent="0" marL="0">
+                        <a:buNone/>
+                      </a:pPr>
+                      <a:r>
+                        <a:rPr/>
+                        <a:t>0.144052</a:t>
                       </a:r>
                     </a:p>
                   </a:txBody>
@@ -4078,37 +4081,37 @@
                       </a:pPr>
                       <a:r>
                         <a:rPr/>
-                        <a:t>147.451321</a:t>
-                      </a:r>
-                    </a:p>
-                  </a:txBody>
-                </a:tc>
-                <a:tc>
-                  <a:txBody>
-                    <a:bodyPr/>
-                    <a:lstStyle/>
-                    <a:p>
-                      <a:pPr lvl="0" indent="0" marL="0">
-                        <a:buNone/>
-                      </a:pPr>
-                      <a:r>
-                        <a:rPr/>
-                        <a:t>40.791681</a:t>
-                      </a:r>
-                    </a:p>
-                  </a:txBody>
-                </a:tc>
-                <a:tc>
-                  <a:txBody>
-                    <a:bodyPr/>
-                    <a:lstStyle/>
-                    <a:p>
-                      <a:pPr lvl="0" indent="0" marL="0">
-                        <a:buNone/>
-                      </a:pPr>
-                      <a:r>
-                        <a:rPr/>
-                        <a:t>0.142862</a:t>
+                        <a:t>147.449208</a:t>
+                      </a:r>
+                    </a:p>
+                  </a:txBody>
+                </a:tc>
+                <a:tc>
+                  <a:txBody>
+                    <a:bodyPr/>
+                    <a:lstStyle/>
+                    <a:p>
+                      <a:pPr lvl="0" indent="0" marL="0">
+                        <a:buNone/>
+                      </a:pPr>
+                      <a:r>
+                        <a:rPr/>
+                        <a:t>40.728609</a:t>
+                      </a:r>
+                    </a:p>
+                  </a:txBody>
+                </a:tc>
+                <a:tc>
+                  <a:txBody>
+                    <a:bodyPr/>
+                    <a:lstStyle/>
+                    <a:p>
+                      <a:pPr lvl="0" indent="0" marL="0">
+                        <a:buNone/>
+                      </a:pPr>
+                      <a:r>
+                        <a:rPr/>
+                        <a:t>0.142813</a:t>
                       </a:r>
                     </a:p>
                   </a:txBody>
@@ -4702,12 +4705,7 @@
             <p:ph type="title"/>
           </p:nvPr>
         </p:nvSpPr>
-        <p:spPr>
-          <a:xfrm>
-            <a:off x="457201" y="204787"/>
-            <a:ext cx="3008313" cy="871538"/>
-          </a:xfrm>
-        </p:spPr>
+        <p:spPr/>
         <p:txBody>
           <a:bodyPr/>
           <a:lstStyle/>
@@ -4724,12 +4722,12 @@
       </p:sp>
       <p:sp>
         <p:nvSpPr>
-          <p:cNvPr id="4" name="Text Placeholder 3"/>
-          <p:cNvSpPr>
-            <a:spLocks noGrp="1"/>
-          </p:cNvSpPr>
-          <p:nvPr>
-            <p:ph idx="2" sz="half" type="body"/>
+          <p:cNvPr id="3" name="Content Placeholder 2"/>
+          <p:cNvSpPr>
+            <a:spLocks noGrp="1"/>
+          </p:cNvSpPr>
+          <p:nvPr>
+            <p:ph idx="1"/>
           </p:nvPr>
         </p:nvSpPr>
         <p:spPr/>
@@ -4737,508 +4735,42 @@
           <a:bodyPr/>
           <a:lstStyle/>
           <a:p>
-            <a:pPr lvl="0" indent="0" marL="0">
-              <a:buNone/>
-            </a:pPr>
+            <a:pPr lvl="0"/>
             <a:r>
               <a:rPr/>
-              <a:t>Tree Measurement Data:</a:t>
-            </a:r>
-          </a:p>
-        </p:txBody>
-      </p:sp>
-      <p:graphicFrame>
-        <p:nvGraphicFramePr>
-          <p:cNvPr id="6" name="Content Placeholder 5"/>
-          <p:cNvGraphicFramePr>
-            <a:graphicFrameLocks noGrp="1"/>
-          </p:cNvGraphicFramePr>
-          <p:nvPr>
-            <p:ph idx="1"/>
-          </p:nvPr>
-        </p:nvGraphicFramePr>
-        <p:xfrm>
-          <a:off x="3568700" y="203200"/>
-          <a:ext cx="5105400" cy="4381500"/>
-        </p:xfrm>
-        <a:graphic>
-          <a:graphicData uri="http://schemas.openxmlformats.org/drawingml/2006/table">
-            <a:tbl>
-              <a:tblPr firstRow="1" bandRow="1">
-                <a:tableStyleId>{5C22544A-7EE6-4342-B048-85BDC9FD1C3A}</a:tableStyleId>
-              </a:tblPr>
-              <a:tblGrid>
-                <a:gridCol w="1016000"/>
-                <a:gridCol w="1016000"/>
-                <a:gridCol w="1016000"/>
-                <a:gridCol w="1016000"/>
-                <a:gridCol w="1016000"/>
-              </a:tblGrid>
-              <a:tr h="0">
-                <a:tc>
-                  <a:txBody>
-                    <a:bodyPr/>
-                    <a:lstStyle/>
-                    <a:p>
-                      <a:endParaRPr/>
-                    </a:p>
-                  </a:txBody>
-                  <a:tcPr/>
-                </a:tc>
-                <a:tc>
-                  <a:txBody>
-                    <a:bodyPr/>
-                    <a:lstStyle/>
-                    <a:p>
-                      <a:pPr lvl="0" indent="0" marL="0">
-                        <a:buNone/>
-                      </a:pPr>
-                      <a:r>
-                        <a:rPr/>
-                        <a:t>SPCD</a:t>
-                      </a:r>
-                    </a:p>
-                  </a:txBody>
-                  <a:tcPr/>
-                </a:tc>
-                <a:tc>
-                  <a:txBody>
-                    <a:bodyPr/>
-                    <a:lstStyle/>
-                    <a:p>
-                      <a:pPr lvl="0" indent="0" marL="0">
-                        <a:buNone/>
-                      </a:pPr>
-                      <a:r>
-                        <a:rPr/>
-                        <a:t>DO_BH</a:t>
-                      </a:r>
-                    </a:p>
-                  </a:txBody>
-                  <a:tcPr/>
-                </a:tc>
-                <a:tc>
-                  <a:txBody>
-                    <a:bodyPr/>
-                    <a:lstStyle/>
-                    <a:p>
-                      <a:pPr lvl="0" indent="0" marL="0">
-                        <a:buNone/>
-                      </a:pPr>
-                      <a:r>
-                        <a:rPr/>
-                        <a:t>HT_TOT</a:t>
-                      </a:r>
-                    </a:p>
-                  </a:txBody>
-                  <a:tcPr/>
-                </a:tc>
-                <a:tc>
-                  <a:txBody>
-                    <a:bodyPr/>
-                    <a:lstStyle/>
-                    <a:p>
-                      <a:pPr lvl="0" indent="0" marL="0">
-                        <a:buNone/>
-                      </a:pPr>
-                      <a:r>
-                        <a:rPr/>
-                        <a:t>TT_DW_CRM</a:t>
-                      </a:r>
-                    </a:p>
-                  </a:txBody>
-                  <a:tcPr/>
-                </a:tc>
-              </a:tr>
-              <a:tr h="0">
-                <a:tc>
-                  <a:txBody>
-                    <a:bodyPr/>
-                    <a:lstStyle/>
-                    <a:p>
-                      <a:pPr lvl="0" indent="0" marL="0">
-                        <a:buNone/>
-                      </a:pPr>
-                      <a:r>
-                        <a:rPr/>
-                        <a:t>0</a:t>
-                      </a:r>
-                    </a:p>
-                  </a:txBody>
-                </a:tc>
-                <a:tc>
-                  <a:txBody>
-                    <a:bodyPr/>
-                    <a:lstStyle/>
-                    <a:p>
-                      <a:pPr lvl="0" indent="0" marL="0">
-                        <a:buNone/>
-                      </a:pPr>
-                      <a:r>
-                        <a:rPr/>
-                        <a:t>12</a:t>
-                      </a:r>
-                    </a:p>
-                  </a:txBody>
-                </a:tc>
-                <a:tc>
-                  <a:txBody>
-                    <a:bodyPr/>
-                    <a:lstStyle/>
-                    <a:p>
-                      <a:pPr lvl="0" indent="0" marL="0">
-                        <a:buNone/>
-                      </a:pPr>
-                      <a:r>
-                        <a:rPr/>
-                        <a:t>7.5</a:t>
-                      </a:r>
-                    </a:p>
-                  </a:txBody>
-                </a:tc>
-                <a:tc>
-                  <a:txBody>
-                    <a:bodyPr/>
-                    <a:lstStyle/>
-                    <a:p>
-                      <a:pPr lvl="0" indent="0" marL="0">
-                        <a:buNone/>
-                      </a:pPr>
-                      <a:r>
-                        <a:rPr/>
-                        <a:t>45.2</a:t>
-                      </a:r>
-                    </a:p>
-                  </a:txBody>
-                </a:tc>
-                <a:tc>
-                  <a:txBody>
-                    <a:bodyPr/>
-                    <a:lstStyle/>
-                    <a:p>
-                      <a:pPr lvl="0" indent="0" marL="0">
-                        <a:buNone/>
-                      </a:pPr>
-                      <a:r>
-                        <a:rPr/>
-                        <a:t>178.86</a:t>
-                      </a:r>
-                    </a:p>
-                  </a:txBody>
-                </a:tc>
-              </a:tr>
-              <a:tr h="0">
-                <a:tc>
-                  <a:txBody>
-                    <a:bodyPr/>
-                    <a:lstStyle/>
-                    <a:p>
-                      <a:pPr lvl="0" indent="0" marL="0">
-                        <a:buNone/>
-                      </a:pPr>
-                      <a:r>
-                        <a:rPr/>
-                        <a:t>1</a:t>
-                      </a:r>
-                    </a:p>
-                  </a:txBody>
-                </a:tc>
-                <a:tc>
-                  <a:txBody>
-                    <a:bodyPr/>
-                    <a:lstStyle/>
-                    <a:p>
-                      <a:pPr lvl="0" indent="0" marL="0">
-                        <a:buNone/>
-                      </a:pPr>
-                      <a:r>
-                        <a:rPr/>
-                        <a:t>12</a:t>
-                      </a:r>
-                    </a:p>
-                  </a:txBody>
-                </a:tc>
-                <a:tc>
-                  <a:txBody>
-                    <a:bodyPr/>
-                    <a:lstStyle/>
-                    <a:p>
-                      <a:pPr lvl="0" indent="0" marL="0">
-                        <a:buNone/>
-                      </a:pPr>
-                      <a:r>
-                        <a:rPr/>
-                        <a:t>9.3</a:t>
-                      </a:r>
-                    </a:p>
-                  </a:txBody>
-                </a:tc>
-                <a:tc>
-                  <a:txBody>
-                    <a:bodyPr/>
-                    <a:lstStyle/>
-                    <a:p>
-                      <a:pPr lvl="0" indent="0" marL="0">
-                        <a:buNone/>
-                      </a:pPr>
-                      <a:r>
-                        <a:rPr/>
-                        <a:t>62.7</a:t>
-                      </a:r>
-                    </a:p>
-                  </a:txBody>
-                </a:tc>
-                <a:tc>
-                  <a:txBody>
-                    <a:bodyPr/>
-                    <a:lstStyle/>
-                    <a:p>
-                      <a:pPr lvl="0" indent="0" marL="0">
-                        <a:buNone/>
-                      </a:pPr>
-                      <a:r>
-                        <a:rPr/>
-                        <a:t>323.46</a:t>
-                      </a:r>
-                    </a:p>
-                  </a:txBody>
-                </a:tc>
-              </a:tr>
-              <a:tr h="0">
-                <a:tc>
-                  <a:txBody>
-                    <a:bodyPr/>
-                    <a:lstStyle/>
-                    <a:p>
-                      <a:pPr lvl="0" indent="0" marL="0">
-                        <a:buNone/>
-                      </a:pPr>
-                      <a:r>
-                        <a:rPr/>
-                        <a:t>2</a:t>
-                      </a:r>
-                    </a:p>
-                  </a:txBody>
-                </a:tc>
-                <a:tc>
-                  <a:txBody>
-                    <a:bodyPr/>
-                    <a:lstStyle/>
-                    <a:p>
-                      <a:pPr lvl="0" indent="0" marL="0">
-                        <a:buNone/>
-                      </a:pPr>
-                      <a:r>
-                        <a:rPr/>
-                        <a:t>12</a:t>
-                      </a:r>
-                    </a:p>
-                  </a:txBody>
-                </a:tc>
-                <a:tc>
-                  <a:txBody>
-                    <a:bodyPr/>
-                    <a:lstStyle/>
-                    <a:p>
-                      <a:pPr lvl="0" indent="0" marL="0">
-                        <a:buNone/>
-                      </a:pPr>
-                      <a:r>
-                        <a:rPr/>
-                        <a:t>9.7</a:t>
-                      </a:r>
-                    </a:p>
-                  </a:txBody>
-                </a:tc>
-                <a:tc>
-                  <a:txBody>
-                    <a:bodyPr/>
-                    <a:lstStyle/>
-                    <a:p>
-                      <a:pPr lvl="0" indent="0" marL="0">
-                        <a:buNone/>
-                      </a:pPr>
-                      <a:r>
-                        <a:rPr/>
-                        <a:t>56.7</a:t>
-                      </a:r>
-                    </a:p>
-                  </a:txBody>
-                </a:tc>
-                <a:tc>
-                  <a:txBody>
-                    <a:bodyPr/>
-                    <a:lstStyle/>
-                    <a:p>
-                      <a:pPr lvl="0" indent="0" marL="0">
-                        <a:buNone/>
-                      </a:pPr>
-                      <a:r>
-                        <a:rPr/>
-                        <a:t>342.47</a:t>
-                      </a:r>
-                    </a:p>
-                  </a:txBody>
-                </a:tc>
-              </a:tr>
-              <a:tr h="0">
-                <a:tc>
-                  <a:txBody>
-                    <a:bodyPr/>
-                    <a:lstStyle/>
-                    <a:p>
-                      <a:pPr lvl="0" indent="0" marL="0">
-                        <a:buNone/>
-                      </a:pPr>
-                      <a:r>
-                        <a:rPr/>
-                        <a:t>3</a:t>
-                      </a:r>
-                    </a:p>
-                  </a:txBody>
-                </a:tc>
-                <a:tc>
-                  <a:txBody>
-                    <a:bodyPr/>
-                    <a:lstStyle/>
-                    <a:p>
-                      <a:pPr lvl="0" indent="0" marL="0">
-                        <a:buNone/>
-                      </a:pPr>
-                      <a:r>
-                        <a:rPr/>
-                        <a:t>12</a:t>
-                      </a:r>
-                    </a:p>
-                  </a:txBody>
-                </a:tc>
-                <a:tc>
-                  <a:txBody>
-                    <a:bodyPr/>
-                    <a:lstStyle/>
-                    <a:p>
-                      <a:pPr lvl="0" indent="0" marL="0">
-                        <a:buNone/>
-                      </a:pPr>
-                      <a:r>
-                        <a:rPr/>
-                        <a:t>11.4</a:t>
-                      </a:r>
-                    </a:p>
-                  </a:txBody>
-                </a:tc>
-                <a:tc>
-                  <a:txBody>
-                    <a:bodyPr/>
-                    <a:lstStyle/>
-                    <a:p>
-                      <a:pPr lvl="0" indent="0" marL="0">
-                        <a:buNone/>
-                      </a:pPr>
-                      <a:r>
-                        <a:rPr/>
-                        <a:t>66.1</a:t>
-                      </a:r>
-                    </a:p>
-                  </a:txBody>
-                </a:tc>
-                <a:tc>
-                  <a:txBody>
-                    <a:bodyPr/>
-                    <a:lstStyle/>
-                    <a:p>
-                      <a:pPr lvl="0" indent="0" marL="0">
-                        <a:buNone/>
-                      </a:pPr>
-                      <a:r>
-                        <a:rPr/>
-                        <a:t>499.35</a:t>
-                      </a:r>
-                    </a:p>
-                  </a:txBody>
-                </a:tc>
-              </a:tr>
-              <a:tr h="0">
-                <a:tc>
-                  <a:txBody>
-                    <a:bodyPr/>
-                    <a:lstStyle/>
-                    <a:p>
-                      <a:pPr lvl="0" indent="0" marL="0">
-                        <a:buNone/>
-                      </a:pPr>
-                      <a:r>
-                        <a:rPr/>
-                        <a:t>4</a:t>
-                      </a:r>
-                    </a:p>
-                  </a:txBody>
-                </a:tc>
-                <a:tc>
-                  <a:txBody>
-                    <a:bodyPr/>
-                    <a:lstStyle/>
-                    <a:p>
-                      <a:pPr lvl="0" indent="0" marL="0">
-                        <a:buNone/>
-                      </a:pPr>
-                      <a:r>
-                        <a:rPr/>
-                        <a:t>12</a:t>
-                      </a:r>
-                    </a:p>
-                  </a:txBody>
-                </a:tc>
-                <a:tc>
-                  <a:txBody>
-                    <a:bodyPr/>
-                    <a:lstStyle/>
-                    <a:p>
-                      <a:pPr lvl="0" indent="0" marL="0">
-                        <a:buNone/>
-                      </a:pPr>
-                      <a:r>
-                        <a:rPr/>
-                        <a:t>6.4</a:t>
-                      </a:r>
-                    </a:p>
-                  </a:txBody>
-                </a:tc>
-                <a:tc>
-                  <a:txBody>
-                    <a:bodyPr/>
-                    <a:lstStyle/>
-                    <a:p>
-                      <a:pPr lvl="0" indent="0" marL="0">
-                        <a:buNone/>
-                      </a:pPr>
-                      <a:r>
-                        <a:rPr/>
-                        <a:t>51.8</a:t>
-                      </a:r>
-                    </a:p>
-                  </a:txBody>
-                </a:tc>
-                <a:tc>
-                  <a:txBody>
-                    <a:bodyPr/>
-                    <a:lstStyle/>
-                    <a:p>
-                      <a:pPr lvl="0" indent="0" marL="0">
-                        <a:buNone/>
-                      </a:pPr>
-                      <a:r>
-                        <a:rPr/>
-                        <a:t>113.92</a:t>
-                      </a:r>
-                    </a:p>
-                  </a:txBody>
-                </a:tc>
-              </a:tr>
-            </a:tbl>
-          </a:graphicData>
-        </a:graphic>
-      </p:graphicFrame>
+              <a:t>Overview of data manipulation</a:t>
+            </a:r>
+          </a:p>
+          <a:p>
+            <a:pPr lvl="0"/>
+            <a:r>
+              <a:rPr/>
+              <a:t>Split and filtering methods</a:t>
+            </a:r>
+          </a:p>
+          <a:p>
+            <a:pPr lvl="0"/>
+            <a:r>
+              <a:rPr/>
+              <a:t>Feature engineering (what worked and what didn’t)</a:t>
+            </a:r>
+          </a:p>
+          <a:p>
+            <a:pPr lvl="0"/>
+            <a:r>
+              <a:rPr/>
+              <a:t>Tuning k for the best model</a:t>
+            </a:r>
+          </a:p>
+          <a:p>
+            <a:pPr lvl="0"/>
+            <a:r>
+              <a:rPr/>
+              <a:t>The final “best” model and error</a:t>
+            </a:r>
+          </a:p>
+        </p:txBody>
+      </p:sp>
     </p:spTree>
   </p:cSld>
 </p:sld>
@@ -5281,7 +4813,7 @@
             </a:pPr>
             <a:r>
               <a:rPr/>
-              <a:t>Tree Species Name Data:</a:t>
+              <a:t>Tree Measurement Data:</a:t>
             </a:r>
           </a:p>
         </p:txBody>
@@ -5307,9 +4839,11 @@
                 <a:tableStyleId>{5C22544A-7EE6-4342-B048-85BDC9FD1C3A}</a:tableStyleId>
               </a:tblPr>
               <a:tblGrid>
-                <a:gridCol w="2743200"/>
-                <a:gridCol w="2743200"/>
-                <a:gridCol w="2743200"/>
+                <a:gridCol w="1638300"/>
+                <a:gridCol w="1638300"/>
+                <a:gridCol w="1638300"/>
+                <a:gridCol w="1638300"/>
+                <a:gridCol w="1638300"/>
               </a:tblGrid>
               <a:tr h="0">
                 <a:tc>
@@ -5348,7 +4882,39 @@
                       </a:pPr>
                       <a:r>
                         <a:rPr/>
-                        <a:t>COMMON_NAME</a:t>
+                        <a:t>DO_BH</a:t>
+                      </a:r>
+                    </a:p>
+                  </a:txBody>
+                  <a:tcPr/>
+                </a:tc>
+                <a:tc>
+                  <a:txBody>
+                    <a:bodyPr/>
+                    <a:lstStyle/>
+                    <a:p>
+                      <a:pPr lvl="0" indent="0" marL="0">
+                        <a:buNone/>
+                      </a:pPr>
+                      <a:r>
+                        <a:rPr/>
+                        <a:t>HT_TOT</a:t>
+                      </a:r>
+                    </a:p>
+                  </a:txBody>
+                  <a:tcPr/>
+                </a:tc>
+                <a:tc>
+                  <a:txBody>
+                    <a:bodyPr/>
+                    <a:lstStyle/>
+                    <a:p>
+                      <a:pPr lvl="0" indent="0" marL="0">
+                        <a:buNone/>
+                      </a:pPr>
+                      <a:r>
+                        <a:rPr/>
+                        <a:t>TT_DW_CRM</a:t>
                       </a:r>
                     </a:p>
                   </a:txBody>
@@ -5381,22 +4947,52 @@
                       </a:pPr>
                       <a:r>
                         <a:rPr/>
-                        <a:t>10</a:t>
-                      </a:r>
-                    </a:p>
-                  </a:txBody>
-                </a:tc>
-                <a:tc>
-                  <a:txBody>
-                    <a:bodyPr/>
-                    <a:lstStyle/>
-                    <a:p>
-                      <a:pPr lvl="0" indent="0" marL="0">
-                        <a:buNone/>
-                      </a:pPr>
-                      <a:r>
-                        <a:rPr/>
-                        <a:t>fir spp.</a:t>
+                        <a:t>12</a:t>
+                      </a:r>
+                    </a:p>
+                  </a:txBody>
+                </a:tc>
+                <a:tc>
+                  <a:txBody>
+                    <a:bodyPr/>
+                    <a:lstStyle/>
+                    <a:p>
+                      <a:pPr lvl="0" indent="0" marL="0">
+                        <a:buNone/>
+                      </a:pPr>
+                      <a:r>
+                        <a:rPr/>
+                        <a:t>7.5</a:t>
+                      </a:r>
+                    </a:p>
+                  </a:txBody>
+                </a:tc>
+                <a:tc>
+                  <a:txBody>
+                    <a:bodyPr/>
+                    <a:lstStyle/>
+                    <a:p>
+                      <a:pPr lvl="0" indent="0" marL="0">
+                        <a:buNone/>
+                      </a:pPr>
+                      <a:r>
+                        <a:rPr/>
+                        <a:t>45.2</a:t>
+                      </a:r>
+                    </a:p>
+                  </a:txBody>
+                </a:tc>
+                <a:tc>
+                  <a:txBody>
+                    <a:bodyPr/>
+                    <a:lstStyle/>
+                    <a:p>
+                      <a:pPr lvl="0" indent="0" marL="0">
+                        <a:buNone/>
+                      </a:pPr>
+                      <a:r>
+                        <a:rPr/>
+                        <a:t>178.86</a:t>
                       </a:r>
                     </a:p>
                   </a:txBody>
@@ -5428,22 +5024,52 @@
                       </a:pPr>
                       <a:r>
                         <a:rPr/>
-                        <a:t>11</a:t>
-                      </a:r>
-                    </a:p>
-                  </a:txBody>
-                </a:tc>
-                <a:tc>
-                  <a:txBody>
-                    <a:bodyPr/>
-                    <a:lstStyle/>
-                    <a:p>
-                      <a:pPr lvl="0" indent="0" marL="0">
-                        <a:buNone/>
-                      </a:pPr>
-                      <a:r>
-                        <a:rPr/>
-                        <a:t>Pacific silver fir</a:t>
+                        <a:t>12</a:t>
+                      </a:r>
+                    </a:p>
+                  </a:txBody>
+                </a:tc>
+                <a:tc>
+                  <a:txBody>
+                    <a:bodyPr/>
+                    <a:lstStyle/>
+                    <a:p>
+                      <a:pPr lvl="0" indent="0" marL="0">
+                        <a:buNone/>
+                      </a:pPr>
+                      <a:r>
+                        <a:rPr/>
+                        <a:t>9.3</a:t>
+                      </a:r>
+                    </a:p>
+                  </a:txBody>
+                </a:tc>
+                <a:tc>
+                  <a:txBody>
+                    <a:bodyPr/>
+                    <a:lstStyle/>
+                    <a:p>
+                      <a:pPr lvl="0" indent="0" marL="0">
+                        <a:buNone/>
+                      </a:pPr>
+                      <a:r>
+                        <a:rPr/>
+                        <a:t>62.7</a:t>
+                      </a:r>
+                    </a:p>
+                  </a:txBody>
+                </a:tc>
+                <a:tc>
+                  <a:txBody>
+                    <a:bodyPr/>
+                    <a:lstStyle/>
+                    <a:p>
+                      <a:pPr lvl="0" indent="0" marL="0">
+                        <a:buNone/>
+                      </a:pPr>
+                      <a:r>
+                        <a:rPr/>
+                        <a:t>323.46</a:t>
                       </a:r>
                     </a:p>
                   </a:txBody>
@@ -5490,7 +5116,37 @@
                       </a:pPr>
                       <a:r>
                         <a:rPr/>
-                        <a:t>balsam fir</a:t>
+                        <a:t>9.7</a:t>
+                      </a:r>
+                    </a:p>
+                  </a:txBody>
+                </a:tc>
+                <a:tc>
+                  <a:txBody>
+                    <a:bodyPr/>
+                    <a:lstStyle/>
+                    <a:p>
+                      <a:pPr lvl="0" indent="0" marL="0">
+                        <a:buNone/>
+                      </a:pPr>
+                      <a:r>
+                        <a:rPr/>
+                        <a:t>56.7</a:t>
+                      </a:r>
+                    </a:p>
+                  </a:txBody>
+                </a:tc>
+                <a:tc>
+                  <a:txBody>
+                    <a:bodyPr/>
+                    <a:lstStyle/>
+                    <a:p>
+                      <a:pPr lvl="0" indent="0" marL="0">
+                        <a:buNone/>
+                      </a:pPr>
+                      <a:r>
+                        <a:rPr/>
+                        <a:t>342.47</a:t>
                       </a:r>
                     </a:p>
                   </a:txBody>
@@ -5522,22 +5178,52 @@
                       </a:pPr>
                       <a:r>
                         <a:rPr/>
-                        <a:t>14</a:t>
-                      </a:r>
-                    </a:p>
-                  </a:txBody>
-                </a:tc>
-                <a:tc>
-                  <a:txBody>
-                    <a:bodyPr/>
-                    <a:lstStyle/>
-                    <a:p>
-                      <a:pPr lvl="0" indent="0" marL="0">
-                        <a:buNone/>
-                      </a:pPr>
-                      <a:r>
-                        <a:rPr/>
-                        <a:t>Santa Lucia or bristlecone fir</a:t>
+                        <a:t>12</a:t>
+                      </a:r>
+                    </a:p>
+                  </a:txBody>
+                </a:tc>
+                <a:tc>
+                  <a:txBody>
+                    <a:bodyPr/>
+                    <a:lstStyle/>
+                    <a:p>
+                      <a:pPr lvl="0" indent="0" marL="0">
+                        <a:buNone/>
+                      </a:pPr>
+                      <a:r>
+                        <a:rPr/>
+                        <a:t>11.4</a:t>
+                      </a:r>
+                    </a:p>
+                  </a:txBody>
+                </a:tc>
+                <a:tc>
+                  <a:txBody>
+                    <a:bodyPr/>
+                    <a:lstStyle/>
+                    <a:p>
+                      <a:pPr lvl="0" indent="0" marL="0">
+                        <a:buNone/>
+                      </a:pPr>
+                      <a:r>
+                        <a:rPr/>
+                        <a:t>66.1</a:t>
+                      </a:r>
+                    </a:p>
+                  </a:txBody>
+                </a:tc>
+                <a:tc>
+                  <a:txBody>
+                    <a:bodyPr/>
+                    <a:lstStyle/>
+                    <a:p>
+                      <a:pPr lvl="0" indent="0" marL="0">
+                        <a:buNone/>
+                      </a:pPr>
+                      <a:r>
+                        <a:rPr/>
+                        <a:t>499.35</a:t>
                       </a:r>
                     </a:p>
                   </a:txBody>
@@ -5569,22 +5255,52 @@
                       </a:pPr>
                       <a:r>
                         <a:rPr/>
-                        <a:t>15</a:t>
-                      </a:r>
-                    </a:p>
-                  </a:txBody>
-                </a:tc>
-                <a:tc>
-                  <a:txBody>
-                    <a:bodyPr/>
-                    <a:lstStyle/>
-                    <a:p>
-                      <a:pPr lvl="0" indent="0" marL="0">
-                        <a:buNone/>
-                      </a:pPr>
-                      <a:r>
-                        <a:rPr/>
-                        <a:t>white fir</a:t>
+                        <a:t>12</a:t>
+                      </a:r>
+                    </a:p>
+                  </a:txBody>
+                </a:tc>
+                <a:tc>
+                  <a:txBody>
+                    <a:bodyPr/>
+                    <a:lstStyle/>
+                    <a:p>
+                      <a:pPr lvl="0" indent="0" marL="0">
+                        <a:buNone/>
+                      </a:pPr>
+                      <a:r>
+                        <a:rPr/>
+                        <a:t>6.4</a:t>
+                      </a:r>
+                    </a:p>
+                  </a:txBody>
+                </a:tc>
+                <a:tc>
+                  <a:txBody>
+                    <a:bodyPr/>
+                    <a:lstStyle/>
+                    <a:p>
+                      <a:pPr lvl="0" indent="0" marL="0">
+                        <a:buNone/>
+                      </a:pPr>
+                      <a:r>
+                        <a:rPr/>
+                        <a:t>51.8</a:t>
+                      </a:r>
+                    </a:p>
+                  </a:txBody>
+                </a:tc>
+                <a:tc>
+                  <a:txBody>
+                    <a:bodyPr/>
+                    <a:lstStyle/>
+                    <a:p>
+                      <a:pPr lvl="0" indent="0" marL="0">
+                        <a:buNone/>
+                      </a:pPr>
+                      <a:r>
+                        <a:rPr/>
+                        <a:t>113.92</a:t>
                       </a:r>
                     </a:p>
                   </a:txBody>
@@ -5636,7 +5352,7 @@
             </a:pPr>
             <a:r>
               <a:rPr/>
-              <a:t>Combined Dataset (species mapped onto bigger dataset):</a:t>
+              <a:t>Tree Species Name Data:</a:t>
             </a:r>
           </a:p>
         </p:txBody>
@@ -5662,12 +5378,9 @@
                 <a:tableStyleId>{5C22544A-7EE6-4342-B048-85BDC9FD1C3A}</a:tableStyleId>
               </a:tblPr>
               <a:tblGrid>
-                <a:gridCol w="1371600"/>
-                <a:gridCol w="1371600"/>
-                <a:gridCol w="1371600"/>
-                <a:gridCol w="1371600"/>
-                <a:gridCol w="1371600"/>
-                <a:gridCol w="1371600"/>
+                <a:gridCol w="2743200"/>
+                <a:gridCol w="2743200"/>
+                <a:gridCol w="2743200"/>
               </a:tblGrid>
               <a:tr h="0">
                 <a:tc>
@@ -5706,54 +5419,6 @@
                       </a:pPr>
                       <a:r>
                         <a:rPr/>
-                        <a:t>DO_BH</a:t>
-                      </a:r>
-                    </a:p>
-                  </a:txBody>
-                  <a:tcPr/>
-                </a:tc>
-                <a:tc>
-                  <a:txBody>
-                    <a:bodyPr/>
-                    <a:lstStyle/>
-                    <a:p>
-                      <a:pPr lvl="0" indent="0" marL="0">
-                        <a:buNone/>
-                      </a:pPr>
-                      <a:r>
-                        <a:rPr/>
-                        <a:t>HT_TOT</a:t>
-                      </a:r>
-                    </a:p>
-                  </a:txBody>
-                  <a:tcPr/>
-                </a:tc>
-                <a:tc>
-                  <a:txBody>
-                    <a:bodyPr/>
-                    <a:lstStyle/>
-                    <a:p>
-                      <a:pPr lvl="0" indent="0" marL="0">
-                        <a:buNone/>
-                      </a:pPr>
-                      <a:r>
-                        <a:rPr/>
-                        <a:t>TT_DW_CRM</a:t>
-                      </a:r>
-                    </a:p>
-                  </a:txBody>
-                  <a:tcPr/>
-                </a:tc>
-                <a:tc>
-                  <a:txBody>
-                    <a:bodyPr/>
-                    <a:lstStyle/>
-                    <a:p>
-                      <a:pPr lvl="0" indent="0" marL="0">
-                        <a:buNone/>
-                      </a:pPr>
-                      <a:r>
-                        <a:rPr/>
                         <a:t>COMMON_NAME</a:t>
                       </a:r>
                     </a:p>
@@ -5787,67 +5452,22 @@
                       </a:pPr>
                       <a:r>
                         <a:rPr/>
-                        <a:t>12</a:t>
-                      </a:r>
-                    </a:p>
-                  </a:txBody>
-                </a:tc>
-                <a:tc>
-                  <a:txBody>
-                    <a:bodyPr/>
-                    <a:lstStyle/>
-                    <a:p>
-                      <a:pPr lvl="0" indent="0" marL="0">
-                        <a:buNone/>
-                      </a:pPr>
-                      <a:r>
-                        <a:rPr/>
-                        <a:t>7.5</a:t>
-                      </a:r>
-                    </a:p>
-                  </a:txBody>
-                </a:tc>
-                <a:tc>
-                  <a:txBody>
-                    <a:bodyPr/>
-                    <a:lstStyle/>
-                    <a:p>
-                      <a:pPr lvl="0" indent="0" marL="0">
-                        <a:buNone/>
-                      </a:pPr>
-                      <a:r>
-                        <a:rPr/>
-                        <a:t>45.2</a:t>
-                      </a:r>
-                    </a:p>
-                  </a:txBody>
-                </a:tc>
-                <a:tc>
-                  <a:txBody>
-                    <a:bodyPr/>
-                    <a:lstStyle/>
-                    <a:p>
-                      <a:pPr lvl="0" indent="0" marL="0">
-                        <a:buNone/>
-                      </a:pPr>
-                      <a:r>
-                        <a:rPr/>
-                        <a:t>178.86</a:t>
-                      </a:r>
-                    </a:p>
-                  </a:txBody>
-                </a:tc>
-                <a:tc>
-                  <a:txBody>
-                    <a:bodyPr/>
-                    <a:lstStyle/>
-                    <a:p>
-                      <a:pPr lvl="0" indent="0" marL="0">
-                        <a:buNone/>
-                      </a:pPr>
-                      <a:r>
-                        <a:rPr/>
-                        <a:t>balsam fir</a:t>
+                        <a:t>10</a:t>
+                      </a:r>
+                    </a:p>
+                  </a:txBody>
+                </a:tc>
+                <a:tc>
+                  <a:txBody>
+                    <a:bodyPr/>
+                    <a:lstStyle/>
+                    <a:p>
+                      <a:pPr lvl="0" indent="0" marL="0">
+                        <a:buNone/>
+                      </a:pPr>
+                      <a:r>
+                        <a:rPr/>
+                        <a:t>fir spp.</a:t>
                       </a:r>
                     </a:p>
                   </a:txBody>
@@ -5879,67 +5499,22 @@
                       </a:pPr>
                       <a:r>
                         <a:rPr/>
-                        <a:t>12</a:t>
-                      </a:r>
-                    </a:p>
-                  </a:txBody>
-                </a:tc>
-                <a:tc>
-                  <a:txBody>
-                    <a:bodyPr/>
-                    <a:lstStyle/>
-                    <a:p>
-                      <a:pPr lvl="0" indent="0" marL="0">
-                        <a:buNone/>
-                      </a:pPr>
-                      <a:r>
-                        <a:rPr/>
-                        <a:t>9.3</a:t>
-                      </a:r>
-                    </a:p>
-                  </a:txBody>
-                </a:tc>
-                <a:tc>
-                  <a:txBody>
-                    <a:bodyPr/>
-                    <a:lstStyle/>
-                    <a:p>
-                      <a:pPr lvl="0" indent="0" marL="0">
-                        <a:buNone/>
-                      </a:pPr>
-                      <a:r>
-                        <a:rPr/>
-                        <a:t>62.7</a:t>
-                      </a:r>
-                    </a:p>
-                  </a:txBody>
-                </a:tc>
-                <a:tc>
-                  <a:txBody>
-                    <a:bodyPr/>
-                    <a:lstStyle/>
-                    <a:p>
-                      <a:pPr lvl="0" indent="0" marL="0">
-                        <a:buNone/>
-                      </a:pPr>
-                      <a:r>
-                        <a:rPr/>
-                        <a:t>323.46</a:t>
-                      </a:r>
-                    </a:p>
-                  </a:txBody>
-                </a:tc>
-                <a:tc>
-                  <a:txBody>
-                    <a:bodyPr/>
-                    <a:lstStyle/>
-                    <a:p>
-                      <a:pPr lvl="0" indent="0" marL="0">
-                        <a:buNone/>
-                      </a:pPr>
-                      <a:r>
-                        <a:rPr/>
-                        <a:t>balsam fir</a:t>
+                        <a:t>11</a:t>
+                      </a:r>
+                    </a:p>
+                  </a:txBody>
+                </a:tc>
+                <a:tc>
+                  <a:txBody>
+                    <a:bodyPr/>
+                    <a:lstStyle/>
+                    <a:p>
+                      <a:pPr lvl="0" indent="0" marL="0">
+                        <a:buNone/>
+                      </a:pPr>
+                      <a:r>
+                        <a:rPr/>
+                        <a:t>Pacific silver fir</a:t>
                       </a:r>
                     </a:p>
                   </a:txBody>
@@ -5986,51 +5561,6 @@
                       </a:pPr>
                       <a:r>
                         <a:rPr/>
-                        <a:t>9.7</a:t>
-                      </a:r>
-                    </a:p>
-                  </a:txBody>
-                </a:tc>
-                <a:tc>
-                  <a:txBody>
-                    <a:bodyPr/>
-                    <a:lstStyle/>
-                    <a:p>
-                      <a:pPr lvl="0" indent="0" marL="0">
-                        <a:buNone/>
-                      </a:pPr>
-                      <a:r>
-                        <a:rPr/>
-                        <a:t>56.7</a:t>
-                      </a:r>
-                    </a:p>
-                  </a:txBody>
-                </a:tc>
-                <a:tc>
-                  <a:txBody>
-                    <a:bodyPr/>
-                    <a:lstStyle/>
-                    <a:p>
-                      <a:pPr lvl="0" indent="0" marL="0">
-                        <a:buNone/>
-                      </a:pPr>
-                      <a:r>
-                        <a:rPr/>
-                        <a:t>342.47</a:t>
-                      </a:r>
-                    </a:p>
-                  </a:txBody>
-                </a:tc>
-                <a:tc>
-                  <a:txBody>
-                    <a:bodyPr/>
-                    <a:lstStyle/>
-                    <a:p>
-                      <a:pPr lvl="0" indent="0" marL="0">
-                        <a:buNone/>
-                      </a:pPr>
-                      <a:r>
-                        <a:rPr/>
                         <a:t>balsam fir</a:t>
                       </a:r>
                     </a:p>
@@ -6063,67 +5593,22 @@
                       </a:pPr>
                       <a:r>
                         <a:rPr/>
-                        <a:t>12</a:t>
-                      </a:r>
-                    </a:p>
-                  </a:txBody>
-                </a:tc>
-                <a:tc>
-                  <a:txBody>
-                    <a:bodyPr/>
-                    <a:lstStyle/>
-                    <a:p>
-                      <a:pPr lvl="0" indent="0" marL="0">
-                        <a:buNone/>
-                      </a:pPr>
-                      <a:r>
-                        <a:rPr/>
-                        <a:t>11.4</a:t>
-                      </a:r>
-                    </a:p>
-                  </a:txBody>
-                </a:tc>
-                <a:tc>
-                  <a:txBody>
-                    <a:bodyPr/>
-                    <a:lstStyle/>
-                    <a:p>
-                      <a:pPr lvl="0" indent="0" marL="0">
-                        <a:buNone/>
-                      </a:pPr>
-                      <a:r>
-                        <a:rPr/>
-                        <a:t>66.1</a:t>
-                      </a:r>
-                    </a:p>
-                  </a:txBody>
-                </a:tc>
-                <a:tc>
-                  <a:txBody>
-                    <a:bodyPr/>
-                    <a:lstStyle/>
-                    <a:p>
-                      <a:pPr lvl="0" indent="0" marL="0">
-                        <a:buNone/>
-                      </a:pPr>
-                      <a:r>
-                        <a:rPr/>
-                        <a:t>499.35</a:t>
-                      </a:r>
-                    </a:p>
-                  </a:txBody>
-                </a:tc>
-                <a:tc>
-                  <a:txBody>
-                    <a:bodyPr/>
-                    <a:lstStyle/>
-                    <a:p>
-                      <a:pPr lvl="0" indent="0" marL="0">
-                        <a:buNone/>
-                      </a:pPr>
-                      <a:r>
-                        <a:rPr/>
-                        <a:t>balsam fir</a:t>
+                        <a:t>14</a:t>
+                      </a:r>
+                    </a:p>
+                  </a:txBody>
+                </a:tc>
+                <a:tc>
+                  <a:txBody>
+                    <a:bodyPr/>
+                    <a:lstStyle/>
+                    <a:p>
+                      <a:pPr lvl="0" indent="0" marL="0">
+                        <a:buNone/>
+                      </a:pPr>
+                      <a:r>
+                        <a:rPr/>
+                        <a:t>Santa Lucia or bristlecone fir</a:t>
                       </a:r>
                     </a:p>
                   </a:txBody>
@@ -6155,67 +5640,22 @@
                       </a:pPr>
                       <a:r>
                         <a:rPr/>
-                        <a:t>12</a:t>
-                      </a:r>
-                    </a:p>
-                  </a:txBody>
-                </a:tc>
-                <a:tc>
-                  <a:txBody>
-                    <a:bodyPr/>
-                    <a:lstStyle/>
-                    <a:p>
-                      <a:pPr lvl="0" indent="0" marL="0">
-                        <a:buNone/>
-                      </a:pPr>
-                      <a:r>
-                        <a:rPr/>
-                        <a:t>6.4</a:t>
-                      </a:r>
-                    </a:p>
-                  </a:txBody>
-                </a:tc>
-                <a:tc>
-                  <a:txBody>
-                    <a:bodyPr/>
-                    <a:lstStyle/>
-                    <a:p>
-                      <a:pPr lvl="0" indent="0" marL="0">
-                        <a:buNone/>
-                      </a:pPr>
-                      <a:r>
-                        <a:rPr/>
-                        <a:t>51.8</a:t>
-                      </a:r>
-                    </a:p>
-                  </a:txBody>
-                </a:tc>
-                <a:tc>
-                  <a:txBody>
-                    <a:bodyPr/>
-                    <a:lstStyle/>
-                    <a:p>
-                      <a:pPr lvl="0" indent="0" marL="0">
-                        <a:buNone/>
-                      </a:pPr>
-                      <a:r>
-                        <a:rPr/>
-                        <a:t>113.92</a:t>
-                      </a:r>
-                    </a:p>
-                  </a:txBody>
-                </a:tc>
-                <a:tc>
-                  <a:txBody>
-                    <a:bodyPr/>
-                    <a:lstStyle/>
-                    <a:p>
-                      <a:pPr lvl="0" indent="0" marL="0">
-                        <a:buNone/>
-                      </a:pPr>
-                      <a:r>
-                        <a:rPr/>
-                        <a:t>balsam fir</a:t>
+                        <a:t>15</a:t>
+                      </a:r>
+                    </a:p>
+                  </a:txBody>
+                </a:tc>
+                <a:tc>
+                  <a:txBody>
+                    <a:bodyPr/>
+                    <a:lstStyle/>
+                    <a:p>
+                      <a:pPr lvl="0" indent="0" marL="0">
+                        <a:buNone/>
+                      </a:pPr>
+                      <a:r>
+                        <a:rPr/>
+                        <a:t>white fir</a:t>
                       </a:r>
                     </a:p>
                   </a:txBody>
@@ -6267,7 +5707,751 @@
             </a:pPr>
             <a:r>
               <a:rPr/>
-              <a:t>Quality Assurance</a:t>
+              <a:t>Combined Dataset (species mapped onto bigger dataset):</a:t>
+            </a:r>
+          </a:p>
+        </p:txBody>
+      </p:sp>
+      <p:graphicFrame>
+        <p:nvGraphicFramePr>
+          <p:cNvPr id="6" name="Content Placeholder 5"/>
+          <p:cNvGraphicFramePr>
+            <a:graphicFrameLocks noGrp="1"/>
+          </p:cNvGraphicFramePr>
+          <p:nvPr>
+            <p:ph idx="1"/>
+          </p:nvPr>
+        </p:nvGraphicFramePr>
+        <p:xfrm>
+          <a:off x="457200" y="1193800"/>
+          <a:ext cx="8229600" cy="3390900"/>
+        </p:xfrm>
+        <a:graphic>
+          <a:graphicData uri="http://schemas.openxmlformats.org/drawingml/2006/table">
+            <a:tbl>
+              <a:tblPr firstRow="1" bandRow="1">
+                <a:tableStyleId>{5C22544A-7EE6-4342-B048-85BDC9FD1C3A}</a:tableStyleId>
+              </a:tblPr>
+              <a:tblGrid>
+                <a:gridCol w="1371600"/>
+                <a:gridCol w="1371600"/>
+                <a:gridCol w="1371600"/>
+                <a:gridCol w="1371600"/>
+                <a:gridCol w="1371600"/>
+                <a:gridCol w="1371600"/>
+              </a:tblGrid>
+              <a:tr h="0">
+                <a:tc>
+                  <a:txBody>
+                    <a:bodyPr/>
+                    <a:lstStyle/>
+                    <a:p>
+                      <a:endParaRPr/>
+                    </a:p>
+                  </a:txBody>
+                  <a:tcPr/>
+                </a:tc>
+                <a:tc>
+                  <a:txBody>
+                    <a:bodyPr/>
+                    <a:lstStyle/>
+                    <a:p>
+                      <a:pPr lvl="0" indent="0" marL="0">
+                        <a:buNone/>
+                      </a:pPr>
+                      <a:r>
+                        <a:rPr/>
+                        <a:t>SPCD</a:t>
+                      </a:r>
+                    </a:p>
+                  </a:txBody>
+                  <a:tcPr/>
+                </a:tc>
+                <a:tc>
+                  <a:txBody>
+                    <a:bodyPr/>
+                    <a:lstStyle/>
+                    <a:p>
+                      <a:pPr lvl="0" indent="0" marL="0">
+                        <a:buNone/>
+                      </a:pPr>
+                      <a:r>
+                        <a:rPr/>
+                        <a:t>DO_BH</a:t>
+                      </a:r>
+                    </a:p>
+                  </a:txBody>
+                  <a:tcPr/>
+                </a:tc>
+                <a:tc>
+                  <a:txBody>
+                    <a:bodyPr/>
+                    <a:lstStyle/>
+                    <a:p>
+                      <a:pPr lvl="0" indent="0" marL="0">
+                        <a:buNone/>
+                      </a:pPr>
+                      <a:r>
+                        <a:rPr/>
+                        <a:t>HT_TOT</a:t>
+                      </a:r>
+                    </a:p>
+                  </a:txBody>
+                  <a:tcPr/>
+                </a:tc>
+                <a:tc>
+                  <a:txBody>
+                    <a:bodyPr/>
+                    <a:lstStyle/>
+                    <a:p>
+                      <a:pPr lvl="0" indent="0" marL="0">
+                        <a:buNone/>
+                      </a:pPr>
+                      <a:r>
+                        <a:rPr/>
+                        <a:t>TT_DW_CRM</a:t>
+                      </a:r>
+                    </a:p>
+                  </a:txBody>
+                  <a:tcPr/>
+                </a:tc>
+                <a:tc>
+                  <a:txBody>
+                    <a:bodyPr/>
+                    <a:lstStyle/>
+                    <a:p>
+                      <a:pPr lvl="0" indent="0" marL="0">
+                        <a:buNone/>
+                      </a:pPr>
+                      <a:r>
+                        <a:rPr/>
+                        <a:t>COMMON_NAME</a:t>
+                      </a:r>
+                    </a:p>
+                  </a:txBody>
+                  <a:tcPr/>
+                </a:tc>
+              </a:tr>
+              <a:tr h="0">
+                <a:tc>
+                  <a:txBody>
+                    <a:bodyPr/>
+                    <a:lstStyle/>
+                    <a:p>
+                      <a:pPr lvl="0" indent="0" marL="0">
+                        <a:buNone/>
+                      </a:pPr>
+                      <a:r>
+                        <a:rPr/>
+                        <a:t>0</a:t>
+                      </a:r>
+                    </a:p>
+                  </a:txBody>
+                </a:tc>
+                <a:tc>
+                  <a:txBody>
+                    <a:bodyPr/>
+                    <a:lstStyle/>
+                    <a:p>
+                      <a:pPr lvl="0" indent="0" marL="0">
+                        <a:buNone/>
+                      </a:pPr>
+                      <a:r>
+                        <a:rPr/>
+                        <a:t>12</a:t>
+                      </a:r>
+                    </a:p>
+                  </a:txBody>
+                </a:tc>
+                <a:tc>
+                  <a:txBody>
+                    <a:bodyPr/>
+                    <a:lstStyle/>
+                    <a:p>
+                      <a:pPr lvl="0" indent="0" marL="0">
+                        <a:buNone/>
+                      </a:pPr>
+                      <a:r>
+                        <a:rPr/>
+                        <a:t>7.5</a:t>
+                      </a:r>
+                    </a:p>
+                  </a:txBody>
+                </a:tc>
+                <a:tc>
+                  <a:txBody>
+                    <a:bodyPr/>
+                    <a:lstStyle/>
+                    <a:p>
+                      <a:pPr lvl="0" indent="0" marL="0">
+                        <a:buNone/>
+                      </a:pPr>
+                      <a:r>
+                        <a:rPr/>
+                        <a:t>45.2</a:t>
+                      </a:r>
+                    </a:p>
+                  </a:txBody>
+                </a:tc>
+                <a:tc>
+                  <a:txBody>
+                    <a:bodyPr/>
+                    <a:lstStyle/>
+                    <a:p>
+                      <a:pPr lvl="0" indent="0" marL="0">
+                        <a:buNone/>
+                      </a:pPr>
+                      <a:r>
+                        <a:rPr/>
+                        <a:t>178.86</a:t>
+                      </a:r>
+                    </a:p>
+                  </a:txBody>
+                </a:tc>
+                <a:tc>
+                  <a:txBody>
+                    <a:bodyPr/>
+                    <a:lstStyle/>
+                    <a:p>
+                      <a:pPr lvl="0" indent="0" marL="0">
+                        <a:buNone/>
+                      </a:pPr>
+                      <a:r>
+                        <a:rPr/>
+                        <a:t>balsam fir</a:t>
+                      </a:r>
+                    </a:p>
+                  </a:txBody>
+                </a:tc>
+              </a:tr>
+              <a:tr h="0">
+                <a:tc>
+                  <a:txBody>
+                    <a:bodyPr/>
+                    <a:lstStyle/>
+                    <a:p>
+                      <a:pPr lvl="0" indent="0" marL="0">
+                        <a:buNone/>
+                      </a:pPr>
+                      <a:r>
+                        <a:rPr/>
+                        <a:t>1</a:t>
+                      </a:r>
+                    </a:p>
+                  </a:txBody>
+                </a:tc>
+                <a:tc>
+                  <a:txBody>
+                    <a:bodyPr/>
+                    <a:lstStyle/>
+                    <a:p>
+                      <a:pPr lvl="0" indent="0" marL="0">
+                        <a:buNone/>
+                      </a:pPr>
+                      <a:r>
+                        <a:rPr/>
+                        <a:t>12</a:t>
+                      </a:r>
+                    </a:p>
+                  </a:txBody>
+                </a:tc>
+                <a:tc>
+                  <a:txBody>
+                    <a:bodyPr/>
+                    <a:lstStyle/>
+                    <a:p>
+                      <a:pPr lvl="0" indent="0" marL="0">
+                        <a:buNone/>
+                      </a:pPr>
+                      <a:r>
+                        <a:rPr/>
+                        <a:t>9.3</a:t>
+                      </a:r>
+                    </a:p>
+                  </a:txBody>
+                </a:tc>
+                <a:tc>
+                  <a:txBody>
+                    <a:bodyPr/>
+                    <a:lstStyle/>
+                    <a:p>
+                      <a:pPr lvl="0" indent="0" marL="0">
+                        <a:buNone/>
+                      </a:pPr>
+                      <a:r>
+                        <a:rPr/>
+                        <a:t>62.7</a:t>
+                      </a:r>
+                    </a:p>
+                  </a:txBody>
+                </a:tc>
+                <a:tc>
+                  <a:txBody>
+                    <a:bodyPr/>
+                    <a:lstStyle/>
+                    <a:p>
+                      <a:pPr lvl="0" indent="0" marL="0">
+                        <a:buNone/>
+                      </a:pPr>
+                      <a:r>
+                        <a:rPr/>
+                        <a:t>323.46</a:t>
+                      </a:r>
+                    </a:p>
+                  </a:txBody>
+                </a:tc>
+                <a:tc>
+                  <a:txBody>
+                    <a:bodyPr/>
+                    <a:lstStyle/>
+                    <a:p>
+                      <a:pPr lvl="0" indent="0" marL="0">
+                        <a:buNone/>
+                      </a:pPr>
+                      <a:r>
+                        <a:rPr/>
+                        <a:t>balsam fir</a:t>
+                      </a:r>
+                    </a:p>
+                  </a:txBody>
+                </a:tc>
+              </a:tr>
+              <a:tr h="0">
+                <a:tc>
+                  <a:txBody>
+                    <a:bodyPr/>
+                    <a:lstStyle/>
+                    <a:p>
+                      <a:pPr lvl="0" indent="0" marL="0">
+                        <a:buNone/>
+                      </a:pPr>
+                      <a:r>
+                        <a:rPr/>
+                        <a:t>2</a:t>
+                      </a:r>
+                    </a:p>
+                  </a:txBody>
+                </a:tc>
+                <a:tc>
+                  <a:txBody>
+                    <a:bodyPr/>
+                    <a:lstStyle/>
+                    <a:p>
+                      <a:pPr lvl="0" indent="0" marL="0">
+                        <a:buNone/>
+                      </a:pPr>
+                      <a:r>
+                        <a:rPr/>
+                        <a:t>12</a:t>
+                      </a:r>
+                    </a:p>
+                  </a:txBody>
+                </a:tc>
+                <a:tc>
+                  <a:txBody>
+                    <a:bodyPr/>
+                    <a:lstStyle/>
+                    <a:p>
+                      <a:pPr lvl="0" indent="0" marL="0">
+                        <a:buNone/>
+                      </a:pPr>
+                      <a:r>
+                        <a:rPr/>
+                        <a:t>9.7</a:t>
+                      </a:r>
+                    </a:p>
+                  </a:txBody>
+                </a:tc>
+                <a:tc>
+                  <a:txBody>
+                    <a:bodyPr/>
+                    <a:lstStyle/>
+                    <a:p>
+                      <a:pPr lvl="0" indent="0" marL="0">
+                        <a:buNone/>
+                      </a:pPr>
+                      <a:r>
+                        <a:rPr/>
+                        <a:t>56.7</a:t>
+                      </a:r>
+                    </a:p>
+                  </a:txBody>
+                </a:tc>
+                <a:tc>
+                  <a:txBody>
+                    <a:bodyPr/>
+                    <a:lstStyle/>
+                    <a:p>
+                      <a:pPr lvl="0" indent="0" marL="0">
+                        <a:buNone/>
+                      </a:pPr>
+                      <a:r>
+                        <a:rPr/>
+                        <a:t>342.47</a:t>
+                      </a:r>
+                    </a:p>
+                  </a:txBody>
+                </a:tc>
+                <a:tc>
+                  <a:txBody>
+                    <a:bodyPr/>
+                    <a:lstStyle/>
+                    <a:p>
+                      <a:pPr lvl="0" indent="0" marL="0">
+                        <a:buNone/>
+                      </a:pPr>
+                      <a:r>
+                        <a:rPr/>
+                        <a:t>balsam fir</a:t>
+                      </a:r>
+                    </a:p>
+                  </a:txBody>
+                </a:tc>
+              </a:tr>
+              <a:tr h="0">
+                <a:tc>
+                  <a:txBody>
+                    <a:bodyPr/>
+                    <a:lstStyle/>
+                    <a:p>
+                      <a:pPr lvl="0" indent="0" marL="0">
+                        <a:buNone/>
+                      </a:pPr>
+                      <a:r>
+                        <a:rPr/>
+                        <a:t>3</a:t>
+                      </a:r>
+                    </a:p>
+                  </a:txBody>
+                </a:tc>
+                <a:tc>
+                  <a:txBody>
+                    <a:bodyPr/>
+                    <a:lstStyle/>
+                    <a:p>
+                      <a:pPr lvl="0" indent="0" marL="0">
+                        <a:buNone/>
+                      </a:pPr>
+                      <a:r>
+                        <a:rPr/>
+                        <a:t>12</a:t>
+                      </a:r>
+                    </a:p>
+                  </a:txBody>
+                </a:tc>
+                <a:tc>
+                  <a:txBody>
+                    <a:bodyPr/>
+                    <a:lstStyle/>
+                    <a:p>
+                      <a:pPr lvl="0" indent="0" marL="0">
+                        <a:buNone/>
+                      </a:pPr>
+                      <a:r>
+                        <a:rPr/>
+                        <a:t>11.4</a:t>
+                      </a:r>
+                    </a:p>
+                  </a:txBody>
+                </a:tc>
+                <a:tc>
+                  <a:txBody>
+                    <a:bodyPr/>
+                    <a:lstStyle/>
+                    <a:p>
+                      <a:pPr lvl="0" indent="0" marL="0">
+                        <a:buNone/>
+                      </a:pPr>
+                      <a:r>
+                        <a:rPr/>
+                        <a:t>66.1</a:t>
+                      </a:r>
+                    </a:p>
+                  </a:txBody>
+                </a:tc>
+                <a:tc>
+                  <a:txBody>
+                    <a:bodyPr/>
+                    <a:lstStyle/>
+                    <a:p>
+                      <a:pPr lvl="0" indent="0" marL="0">
+                        <a:buNone/>
+                      </a:pPr>
+                      <a:r>
+                        <a:rPr/>
+                        <a:t>499.35</a:t>
+                      </a:r>
+                    </a:p>
+                  </a:txBody>
+                </a:tc>
+                <a:tc>
+                  <a:txBody>
+                    <a:bodyPr/>
+                    <a:lstStyle/>
+                    <a:p>
+                      <a:pPr lvl="0" indent="0" marL="0">
+                        <a:buNone/>
+                      </a:pPr>
+                      <a:r>
+                        <a:rPr/>
+                        <a:t>balsam fir</a:t>
+                      </a:r>
+                    </a:p>
+                  </a:txBody>
+                </a:tc>
+              </a:tr>
+              <a:tr h="0">
+                <a:tc>
+                  <a:txBody>
+                    <a:bodyPr/>
+                    <a:lstStyle/>
+                    <a:p>
+                      <a:pPr lvl="0" indent="0" marL="0">
+                        <a:buNone/>
+                      </a:pPr>
+                      <a:r>
+                        <a:rPr/>
+                        <a:t>4</a:t>
+                      </a:r>
+                    </a:p>
+                  </a:txBody>
+                </a:tc>
+                <a:tc>
+                  <a:txBody>
+                    <a:bodyPr/>
+                    <a:lstStyle/>
+                    <a:p>
+                      <a:pPr lvl="0" indent="0" marL="0">
+                        <a:buNone/>
+                      </a:pPr>
+                      <a:r>
+                        <a:rPr/>
+                        <a:t>12</a:t>
+                      </a:r>
+                    </a:p>
+                  </a:txBody>
+                </a:tc>
+                <a:tc>
+                  <a:txBody>
+                    <a:bodyPr/>
+                    <a:lstStyle/>
+                    <a:p>
+                      <a:pPr lvl="0" indent="0" marL="0">
+                        <a:buNone/>
+                      </a:pPr>
+                      <a:r>
+                        <a:rPr/>
+                        <a:t>6.4</a:t>
+                      </a:r>
+                    </a:p>
+                  </a:txBody>
+                </a:tc>
+                <a:tc>
+                  <a:txBody>
+                    <a:bodyPr/>
+                    <a:lstStyle/>
+                    <a:p>
+                      <a:pPr lvl="0" indent="0" marL="0">
+                        <a:buNone/>
+                      </a:pPr>
+                      <a:r>
+                        <a:rPr/>
+                        <a:t>51.8</a:t>
+                      </a:r>
+                    </a:p>
+                  </a:txBody>
+                </a:tc>
+                <a:tc>
+                  <a:txBody>
+                    <a:bodyPr/>
+                    <a:lstStyle/>
+                    <a:p>
+                      <a:pPr lvl="0" indent="0" marL="0">
+                        <a:buNone/>
+                      </a:pPr>
+                      <a:r>
+                        <a:rPr/>
+                        <a:t>113.92</a:t>
+                      </a:r>
+                    </a:p>
+                  </a:txBody>
+                </a:tc>
+                <a:tc>
+                  <a:txBody>
+                    <a:bodyPr/>
+                    <a:lstStyle/>
+                    <a:p>
+                      <a:pPr lvl="0" indent="0" marL="0">
+                        <a:buNone/>
+                      </a:pPr>
+                      <a:r>
+                        <a:rPr/>
+                        <a:t>balsam fir</a:t>
+                      </a:r>
+                    </a:p>
+                  </a:txBody>
+                </a:tc>
+              </a:tr>
+            </a:tbl>
+          </a:graphicData>
+        </a:graphic>
+      </p:graphicFrame>
+    </p:spTree>
+  </p:cSld>
+</p:sld>
+</file>
+
+<file path=ppt/slides/slide18.xml><?xml version="1.0" encoding="utf-8"?>
+<p:sld xmlns:a="http://schemas.openxmlformats.org/drawingml/2006/main" xmlns:r="http://schemas.openxmlformats.org/officeDocument/2006/relationships" xmlns:p="http://schemas.openxmlformats.org/presentationml/2006/main">
+  <p:cSld>
+    <p:spTree>
+      <p:nvGrpSpPr>
+        <p:cNvPr id="1" name=""/>
+        <p:cNvGrpSpPr/>
+        <p:nvPr/>
+      </p:nvGrpSpPr>
+      <p:grpSpPr>
+        <a:xfrm>
+          <a:off x="0" y="0"/>
+          <a:ext cx="0" cy="0"/>
+          <a:chOff x="0" y="0"/>
+          <a:chExt cx="0" cy="0"/>
+        </a:xfrm>
+      </p:grpSpPr>
+      <p:sp>
+        <p:nvSpPr>
+          <p:cNvPr id="2" name="Title 1"/>
+          <p:cNvSpPr>
+            <a:spLocks noGrp="1"/>
+          </p:cNvSpPr>
+          <p:nvPr>
+            <p:ph type="title"/>
+          </p:nvPr>
+        </p:nvSpPr>
+        <p:spPr/>
+        <p:txBody>
+          <a:bodyPr/>
+          <a:lstStyle/>
+          <a:p>
+            <a:pPr lvl="0" indent="0" marL="0">
+              <a:buNone/>
+            </a:pPr>
+            <a:r>
+              <a:rPr/>
+              <a:t>Filtered data</a:t>
+            </a:r>
+          </a:p>
+        </p:txBody>
+      </p:sp>
+      <p:sp>
+        <p:nvSpPr>
+          <p:cNvPr id="3" name="Content Placeholder 2"/>
+          <p:cNvSpPr>
+            <a:spLocks noGrp="1"/>
+          </p:cNvSpPr>
+          <p:nvPr>
+            <p:ph idx="1"/>
+          </p:nvPr>
+        </p:nvSpPr>
+        <p:spPr/>
+        <p:txBody>
+          <a:bodyPr/>
+          <a:lstStyle/>
+          <a:p>
+            <a:pPr lvl="0" indent="0">
+              <a:buNone/>
+            </a:pPr>
+            <a:r>
+              <a:rPr>
+                <a:latin typeface="Courier"/>
+              </a:rPr>
+              <a:t>SPCD  DO_BH  HT_TOT  TT_DW_CRM  COMMON_NAME               
+111   5.0    39.0    69.03      slash pine                    14
+      5.3    39.0    82.00      slash pine                    13
+      7.0    50.0    223.34     slash pine                    13
+131   7.0    50.0    196.35     loblolly pine                 11
+111   5.2    35.0    66.34      slash pine                    11
+                                                              ..
+999   12.8   63.0    885.17     Other or unknown live tree     1
+      13.0   54.0    788.82     Other or unknown live tree     1
+      13.2   40.0    616.66     Other or unknown live tree     1
+      13.3   72.0    1074.07    Other or unknown live tree     1
+12    1.6    13.4    3.78       balsam fir                     1
+Name: count, Length: 115454, dtype: int64</a:t>
+            </a:r>
+          </a:p>
+        </p:txBody>
+      </p:sp>
+    </p:spTree>
+  </p:cSld>
+</p:sld>
+</file>
+
+<file path=ppt/slides/slide19.xml><?xml version="1.0" encoding="utf-8"?>
+<p:sld xmlns:a="http://schemas.openxmlformats.org/drawingml/2006/main" xmlns:r="http://schemas.openxmlformats.org/officeDocument/2006/relationships" xmlns:p="http://schemas.openxmlformats.org/presentationml/2006/main">
+  <p:cSld>
+    <p:spTree>
+      <p:nvGrpSpPr>
+        <p:cNvPr id="1" name=""/>
+        <p:cNvGrpSpPr/>
+        <p:nvPr/>
+      </p:nvGrpSpPr>
+      <p:grpSpPr>
+        <a:xfrm>
+          <a:off x="0" y="0"/>
+          <a:ext cx="0" cy="0"/>
+          <a:chOff x="0" y="0"/>
+          <a:chExt cx="0" cy="0"/>
+        </a:xfrm>
+      </p:grpSpPr>
+      <p:sp>
+        <p:nvSpPr>
+          <p:cNvPr id="2" name="Title 1"/>
+          <p:cNvSpPr>
+            <a:spLocks noGrp="1"/>
+          </p:cNvSpPr>
+          <p:nvPr>
+            <p:ph type="title"/>
+          </p:nvPr>
+        </p:nvSpPr>
+        <p:spPr/>
+        <p:txBody>
+          <a:bodyPr/>
+          <a:lstStyle/>
+          <a:p>
+            <a:pPr lvl="0" indent="0" marL="0">
+              <a:buNone/>
+            </a:pPr>
+            <a:r>
+              <a:rPr/>
+              <a:t>Base datset calculations:</a:t>
+            </a:r>
+          </a:p>
+        </p:txBody>
+      </p:sp>
+      <p:sp>
+        <p:nvSpPr>
+          <p:cNvPr id="3" name="Content Placeholder 2"/>
+          <p:cNvSpPr>
+            <a:spLocks noGrp="1"/>
+          </p:cNvSpPr>
+          <p:nvPr>
+            <p:ph idx="1"/>
+          </p:nvPr>
+        </p:nvSpPr>
+        <p:spPr/>
+        <p:txBody>
+          <a:bodyPr/>
+          <a:lstStyle/>
+          <a:p>
+            <a:pPr lvl="0" indent="0">
+              <a:buNone/>
+            </a:pPr>
+            <a:r>
+              <a:rPr>
+                <a:latin typeface="Courier"/>
+              </a:rPr>
+              <a:t>Average Root Mean Squared Log Error (RMSLE) for k 3: 0.15806802121296354</a:t>
             </a:r>
           </a:p>
         </p:txBody>
@@ -6353,6 +6537,53 @@
             <a:r>
               <a:rPr/>
               <a:t>.</a:t>
+            </a:r>
+          </a:p>
+        </p:txBody>
+      </p:sp>
+    </p:spTree>
+  </p:cSld>
+</p:sld>
+</file>
+
+<file path=ppt/slides/slide20.xml><?xml version="1.0" encoding="utf-8"?>
+<p:sld xmlns:a="http://schemas.openxmlformats.org/drawingml/2006/main" xmlns:r="http://schemas.openxmlformats.org/officeDocument/2006/relationships" xmlns:p="http://schemas.openxmlformats.org/presentationml/2006/main">
+  <p:cSld>
+    <p:spTree>
+      <p:nvGrpSpPr>
+        <p:cNvPr id="1" name=""/>
+        <p:cNvGrpSpPr/>
+        <p:nvPr/>
+      </p:nvGrpSpPr>
+      <p:grpSpPr>
+        <a:xfrm>
+          <a:off x="0" y="0"/>
+          <a:ext cx="0" cy="0"/>
+          <a:chOff x="0" y="0"/>
+          <a:chExt cx="0" cy="0"/>
+        </a:xfrm>
+      </p:grpSpPr>
+      <p:sp>
+        <p:nvSpPr>
+          <p:cNvPr id="2" name="Title 1"/>
+          <p:cNvSpPr>
+            <a:spLocks noGrp="1"/>
+          </p:cNvSpPr>
+          <p:nvPr>
+            <p:ph type="title"/>
+          </p:nvPr>
+        </p:nvSpPr>
+        <p:spPr/>
+        <p:txBody>
+          <a:bodyPr/>
+          <a:lstStyle/>
+          <a:p>
+            <a:pPr lvl="0" indent="0" marL="0">
+              <a:buNone/>
+            </a:pPr>
+            <a:r>
+              <a:rPr/>
+              <a:t>Quality Assurance</a:t>
             </a:r>
           </a:p>
         </p:txBody>

--- a/Project-3/presentation.pptx
+++ b/Project-3/presentation.pptx
@@ -3537,7 +3537,7 @@
             </a:pPr>
             <a:r>
               <a:rPr/>
-              <a:t>Discussion with the group :3</a:t>
+              <a:t>Consultation pt 2</a:t>
             </a:r>
           </a:p>
         </p:txBody>

--- a/Project-3/presentation.pptx
+++ b/Project-3/presentation.pptx
@@ -23,6 +23,7 @@
     <p:sldId id="271" r:id="rId17"/>
     <p:sldId id="272" r:id="rId18"/>
     <p:sldId id="273" r:id="rId19"/>
+    <p:sldId id="274" r:id="rId20"/>
   </p:sldIdLst>
   <p:sldSz cx="9144000" cy="5143500" type="screen16x9"/>
   <p:notesSz cx="6858000" cy="9144000"/>
@@ -3458,32 +3459,7 @@
             </a:pPr>
             <a:r>
               <a:rPr/>
-              <a:t>Performance Metric</a:t>
-            </a:r>
-          </a:p>
-        </p:txBody>
-      </p:sp>
-      <p:sp>
-        <p:nvSpPr>
-          <p:cNvPr id="3" name="Content Placeholder 2"/>
-          <p:cNvSpPr>
-            <a:spLocks noGrp="1"/>
-          </p:cNvSpPr>
-          <p:nvPr>
-            <p:ph idx="1"/>
-          </p:nvPr>
-        </p:nvSpPr>
-        <p:spPr/>
-        <p:txBody>
-          <a:bodyPr/>
-          <a:lstStyle/>
-          <a:p>
-            <a:pPr lvl="0" indent="0" marL="0">
-              <a:buNone/>
-            </a:pPr>
-            <a:r>
-              <a:rPr/>
-              <a:t>The Performance metric we choose is Root Mean Square Logarithmic Error(RMSLE), because when we were looking at the dataset of the biomass of different kinds of tree species, we saw that some species have more data than other species so the assume that the data is skewed</a:t>
+              <a:t>Consultation SERC scientist</a:t>
             </a:r>
           </a:p>
         </p:txBody>
@@ -3530,1147 +3506,36 @@
             </a:pPr>
             <a:r>
               <a:rPr/>
-              <a:t>Model</a:t>
+              <a:t>Performance Metric</a:t>
             </a:r>
           </a:p>
         </p:txBody>
       </p:sp>
-      <p:graphicFrame>
-        <p:nvGraphicFramePr>
-          <p:cNvPr id="6" name="Content Placeholder 5"/>
-          <p:cNvGraphicFramePr>
-            <a:graphicFrameLocks noGrp="1"/>
-          </p:cNvGraphicFramePr>
+      <p:sp>
+        <p:nvSpPr>
+          <p:cNvPr id="3" name="Content Placeholder 2"/>
+          <p:cNvSpPr>
+            <a:spLocks noGrp="1"/>
+          </p:cNvSpPr>
           <p:nvPr>
             <p:ph idx="1"/>
           </p:nvPr>
-        </p:nvGraphicFramePr>
-        <p:xfrm>
-          <a:off x="457200" y="1193800"/>
-          <a:ext cx="8229600" cy="3390900"/>
-        </p:xfrm>
-        <a:graphic>
-          <a:graphicData uri="http://schemas.openxmlformats.org/drawingml/2006/table">
-            <a:tbl>
-              <a:tblPr firstRow="1" bandRow="1">
-                <a:tableStyleId>{5C22544A-7EE6-4342-B048-85BDC9FD1C3A}</a:tableStyleId>
-              </a:tblPr>
-              <a:tblGrid>
-                <a:gridCol w="1371600"/>
-                <a:gridCol w="1371600"/>
-                <a:gridCol w="1371600"/>
-                <a:gridCol w="1371600"/>
-                <a:gridCol w="1371600"/>
-                <a:gridCol w="1371600"/>
-              </a:tblGrid>
-              <a:tr h="0">
-                <a:tc>
-                  <a:txBody>
-                    <a:bodyPr/>
-                    <a:lstStyle/>
-                    <a:p>
-                      <a:endParaRPr/>
-                    </a:p>
-                  </a:txBody>
-                  <a:tcPr/>
-                </a:tc>
-                <a:tc>
-                  <a:txBody>
-                    <a:bodyPr/>
-                    <a:lstStyle/>
-                    <a:p>
-                      <a:pPr lvl="0" indent="0" marL="0">
-                        <a:buNone/>
-                      </a:pPr>
-                      <a:r>
-                        <a:rPr/>
-                        <a:t>Species</a:t>
-                      </a:r>
-                    </a:p>
-                  </a:txBody>
-                  <a:tcPr/>
-                </a:tc>
-                <a:tc>
-                  <a:txBody>
-                    <a:bodyPr/>
-                    <a:lstStyle/>
-                    <a:p>
-                      <a:pPr lvl="0" indent="0" marL="0">
-                        <a:buNone/>
-                      </a:pPr>
-                      <a:r>
-                        <a:rPr/>
-                        <a:t>k</a:t>
-                      </a:r>
-                    </a:p>
-                  </a:txBody>
-                  <a:tcPr/>
-                </a:tc>
-                <a:tc>
-                  <a:txBody>
-                    <a:bodyPr/>
-                    <a:lstStyle/>
-                    <a:p>
-                      <a:pPr lvl="0" indent="0" marL="0">
-                        <a:buNone/>
-                      </a:pPr>
-                      <a:r>
-                        <a:rPr/>
-                        <a:t>RMSE</a:t>
-                      </a:r>
-                    </a:p>
-                  </a:txBody>
-                  <a:tcPr/>
-                </a:tc>
-                <a:tc>
-                  <a:txBody>
-                    <a:bodyPr/>
-                    <a:lstStyle/>
-                    <a:p>
-                      <a:pPr lvl="0" indent="0" marL="0">
-                        <a:buNone/>
-                      </a:pPr>
-                      <a:r>
-                        <a:rPr/>
-                        <a:t>MAE</a:t>
-                      </a:r>
-                    </a:p>
-                  </a:txBody>
-                  <a:tcPr/>
-                </a:tc>
-                <a:tc>
-                  <a:txBody>
-                    <a:bodyPr/>
-                    <a:lstStyle/>
-                    <a:p>
-                      <a:pPr lvl="0" indent="0" marL="0">
-                        <a:buNone/>
-                      </a:pPr>
-                      <a:r>
-                        <a:rPr/>
-                        <a:t>RMSLE</a:t>
-                      </a:r>
-                    </a:p>
-                  </a:txBody>
-                  <a:tcPr/>
-                </a:tc>
-              </a:tr>
-              <a:tr h="0">
-                <a:tc>
-                  <a:txBody>
-                    <a:bodyPr/>
-                    <a:lstStyle/>
-                    <a:p>
-                      <a:pPr lvl="0" indent="0" marL="0">
-                        <a:buNone/>
-                      </a:pPr>
-                      <a:r>
-                        <a:rPr/>
-                        <a:t>0</a:t>
-                      </a:r>
-                    </a:p>
-                  </a:txBody>
-                </a:tc>
-                <a:tc>
-                  <a:txBody>
-                    <a:bodyPr/>
-                    <a:lstStyle/>
-                    <a:p>
-                      <a:pPr lvl="0" indent="0" marL="0">
-                        <a:buNone/>
-                      </a:pPr>
-                      <a:r>
-                        <a:rPr/>
-                        <a:t>balsam fir</a:t>
-                      </a:r>
-                    </a:p>
-                  </a:txBody>
-                </a:tc>
-                <a:tc>
-                  <a:txBody>
-                    <a:bodyPr/>
-                    <a:lstStyle/>
-                    <a:p>
-                      <a:pPr lvl="0" indent="0" marL="0">
-                        <a:buNone/>
-                      </a:pPr>
-                      <a:r>
-                        <a:rPr/>
-                        <a:t>2</a:t>
-                      </a:r>
-                    </a:p>
-                  </a:txBody>
-                </a:tc>
-                <a:tc>
-                  <a:txBody>
-                    <a:bodyPr/>
-                    <a:lstStyle/>
-                    <a:p>
-                      <a:pPr lvl="0" indent="0" marL="0">
-                        <a:buNone/>
-                      </a:pPr>
-                      <a:r>
-                        <a:rPr/>
-                        <a:t>125.825473</a:t>
-                      </a:r>
-                    </a:p>
-                  </a:txBody>
-                </a:tc>
-                <a:tc>
-                  <a:txBody>
-                    <a:bodyPr/>
-                    <a:lstStyle/>
-                    <a:p>
-                      <a:pPr lvl="0" indent="0" marL="0">
-                        <a:buNone/>
-                      </a:pPr>
-                      <a:r>
-                        <a:rPr/>
-                        <a:t>34.801913</a:t>
-                      </a:r>
-                    </a:p>
-                  </a:txBody>
-                </a:tc>
-                <a:tc>
-                  <a:txBody>
-                    <a:bodyPr/>
-                    <a:lstStyle/>
-                    <a:p>
-                      <a:pPr lvl="0" indent="0" marL="0">
-                        <a:buNone/>
-                      </a:pPr>
-                      <a:r>
-                        <a:rPr/>
-                        <a:t>0.119574</a:t>
-                      </a:r>
-                    </a:p>
-                  </a:txBody>
-                </a:tc>
-              </a:tr>
-              <a:tr h="0">
-                <a:tc>
-                  <a:txBody>
-                    <a:bodyPr/>
-                    <a:lstStyle/>
-                    <a:p>
-                      <a:pPr lvl="0" indent="0" marL="0">
-                        <a:buNone/>
-                      </a:pPr>
-                      <a:r>
-                        <a:rPr/>
-                        <a:t>1</a:t>
-                      </a:r>
-                    </a:p>
-                  </a:txBody>
-                </a:tc>
-                <a:tc>
-                  <a:txBody>
-                    <a:bodyPr/>
-                    <a:lstStyle/>
-                    <a:p>
-                      <a:pPr lvl="0" indent="0" marL="0">
-                        <a:buNone/>
-                      </a:pPr>
-                      <a:r>
-                        <a:rPr/>
-                        <a:t>balsam fir</a:t>
-                      </a:r>
-                    </a:p>
-                  </a:txBody>
-                </a:tc>
-                <a:tc>
-                  <a:txBody>
-                    <a:bodyPr/>
-                    <a:lstStyle/>
-                    <a:p>
-                      <a:pPr lvl="0" indent="0" marL="0">
-                        <a:buNone/>
-                      </a:pPr>
-                      <a:r>
-                        <a:rPr/>
-                        <a:t>3</a:t>
-                      </a:r>
-                    </a:p>
-                  </a:txBody>
-                </a:tc>
-                <a:tc>
-                  <a:txBody>
-                    <a:bodyPr/>
-                    <a:lstStyle/>
-                    <a:p>
-                      <a:pPr lvl="0" indent="0" marL="0">
-                        <a:buNone/>
-                      </a:pPr>
-                      <a:r>
-                        <a:rPr/>
-                        <a:t>129.651479</a:t>
-                      </a:r>
-                    </a:p>
-                  </a:txBody>
-                </a:tc>
-                <a:tc>
-                  <a:txBody>
-                    <a:bodyPr/>
-                    <a:lstStyle/>
-                    <a:p>
-                      <a:pPr lvl="0" indent="0" marL="0">
-                        <a:buNone/>
-                      </a:pPr>
-                      <a:r>
-                        <a:rPr/>
-                        <a:t>36.646493</a:t>
-                      </a:r>
-                    </a:p>
-                  </a:txBody>
-                </a:tc>
-                <a:tc>
-                  <a:txBody>
-                    <a:bodyPr/>
-                    <a:lstStyle/>
-                    <a:p>
-                      <a:pPr lvl="0" indent="0" marL="0">
-                        <a:buNone/>
-                      </a:pPr>
-                      <a:r>
-                        <a:rPr/>
-                        <a:t>0.123724</a:t>
-                      </a:r>
-                    </a:p>
-                  </a:txBody>
-                </a:tc>
-              </a:tr>
-              <a:tr h="0">
-                <a:tc>
-                  <a:txBody>
-                    <a:bodyPr/>
-                    <a:lstStyle/>
-                    <a:p>
-                      <a:pPr lvl="0" indent="0" marL="0">
-                        <a:buNone/>
-                      </a:pPr>
-                      <a:r>
-                        <a:rPr/>
-                        <a:t>2</a:t>
-                      </a:r>
-                    </a:p>
-                  </a:txBody>
-                </a:tc>
-                <a:tc>
-                  <a:txBody>
-                    <a:bodyPr/>
-                    <a:lstStyle/>
-                    <a:p>
-                      <a:pPr lvl="0" indent="0" marL="0">
-                        <a:buNone/>
-                      </a:pPr>
-                      <a:r>
-                        <a:rPr/>
-                        <a:t>balsam fir</a:t>
-                      </a:r>
-                    </a:p>
-                  </a:txBody>
-                </a:tc>
-                <a:tc>
-                  <a:txBody>
-                    <a:bodyPr/>
-                    <a:lstStyle/>
-                    <a:p>
-                      <a:pPr lvl="0" indent="0" marL="0">
-                        <a:buNone/>
-                      </a:pPr>
-                      <a:r>
-                        <a:rPr/>
-                        <a:t>4</a:t>
-                      </a:r>
-                    </a:p>
-                  </a:txBody>
-                </a:tc>
-                <a:tc>
-                  <a:txBody>
-                    <a:bodyPr/>
-                    <a:lstStyle/>
-                    <a:p>
-                      <a:pPr lvl="0" indent="0" marL="0">
-                        <a:buNone/>
-                      </a:pPr>
-                      <a:r>
-                        <a:rPr/>
-                        <a:t>134.599829</a:t>
-                      </a:r>
-                    </a:p>
-                  </a:txBody>
-                </a:tc>
-                <a:tc>
-                  <a:txBody>
-                    <a:bodyPr/>
-                    <a:lstStyle/>
-                    <a:p>
-                      <a:pPr lvl="0" indent="0" marL="0">
-                        <a:buNone/>
-                      </a:pPr>
-                      <a:r>
-                        <a:rPr/>
-                        <a:t>38.884870</a:t>
-                      </a:r>
-                    </a:p>
-                  </a:txBody>
-                </a:tc>
-                <a:tc>
-                  <a:txBody>
-                    <a:bodyPr/>
-                    <a:lstStyle/>
-                    <a:p>
-                      <a:pPr lvl="0" indent="0" marL="0">
-                        <a:buNone/>
-                      </a:pPr>
-                      <a:r>
-                        <a:rPr/>
-                        <a:t>0.133858</a:t>
-                      </a:r>
-                    </a:p>
-                  </a:txBody>
-                </a:tc>
-              </a:tr>
-              <a:tr h="0">
-                <a:tc>
-                  <a:txBody>
-                    <a:bodyPr/>
-                    <a:lstStyle/>
-                    <a:p>
-                      <a:pPr lvl="0" indent="0" marL="0">
-                        <a:buNone/>
-                      </a:pPr>
-                      <a:r>
-                        <a:rPr/>
-                        <a:t>3</a:t>
-                      </a:r>
-                    </a:p>
-                  </a:txBody>
-                </a:tc>
-                <a:tc>
-                  <a:txBody>
-                    <a:bodyPr/>
-                    <a:lstStyle/>
-                    <a:p>
-                      <a:pPr lvl="0" indent="0" marL="0">
-                        <a:buNone/>
-                      </a:pPr>
-                      <a:r>
-                        <a:rPr/>
-                        <a:t>balsam fir</a:t>
-                      </a:r>
-                    </a:p>
-                  </a:txBody>
-                </a:tc>
-                <a:tc>
-                  <a:txBody>
-                    <a:bodyPr/>
-                    <a:lstStyle/>
-                    <a:p>
-                      <a:pPr lvl="0" indent="0" marL="0">
-                        <a:buNone/>
-                      </a:pPr>
-                      <a:r>
-                        <a:rPr/>
-                        <a:t>5</a:t>
-                      </a:r>
-                    </a:p>
-                  </a:txBody>
-                </a:tc>
-                <a:tc>
-                  <a:txBody>
-                    <a:bodyPr/>
-                    <a:lstStyle/>
-                    <a:p>
-                      <a:pPr lvl="0" indent="0" marL="0">
-                        <a:buNone/>
-                      </a:pPr>
-                      <a:r>
-                        <a:rPr/>
-                        <a:t>145.003601</a:t>
-                      </a:r>
-                    </a:p>
-                  </a:txBody>
-                </a:tc>
-                <a:tc>
-                  <a:txBody>
-                    <a:bodyPr/>
-                    <a:lstStyle/>
-                    <a:p>
-                      <a:pPr lvl="0" indent="0" marL="0">
-                        <a:buNone/>
-                      </a:pPr>
-                      <a:r>
-                        <a:rPr/>
-                        <a:t>41.209530</a:t>
-                      </a:r>
-                    </a:p>
-                  </a:txBody>
-                </a:tc>
-                <a:tc>
-                  <a:txBody>
-                    <a:bodyPr/>
-                    <a:lstStyle/>
-                    <a:p>
-                      <a:pPr lvl="0" indent="0" marL="0">
-                        <a:buNone/>
-                      </a:pPr>
-                      <a:r>
-                        <a:rPr/>
-                        <a:t>0.144063</a:t>
-                      </a:r>
-                    </a:p>
-                  </a:txBody>
-                </a:tc>
-              </a:tr>
-              <a:tr h="0">
-                <a:tc>
-                  <a:txBody>
-                    <a:bodyPr/>
-                    <a:lstStyle/>
-                    <a:p>
-                      <a:pPr lvl="0" indent="0" marL="0">
-                        <a:buNone/>
-                      </a:pPr>
-                      <a:r>
-                        <a:rPr/>
-                        <a:t>4</a:t>
-                      </a:r>
-                    </a:p>
-                  </a:txBody>
-                </a:tc>
-                <a:tc>
-                  <a:txBody>
-                    <a:bodyPr/>
-                    <a:lstStyle/>
-                    <a:p>
-                      <a:pPr lvl="0" indent="0" marL="0">
-                        <a:buNone/>
-                      </a:pPr>
-                      <a:r>
-                        <a:rPr/>
-                        <a:t>balsam fir</a:t>
-                      </a:r>
-                    </a:p>
-                  </a:txBody>
-                </a:tc>
-                <a:tc>
-                  <a:txBody>
-                    <a:bodyPr/>
-                    <a:lstStyle/>
-                    <a:p>
-                      <a:pPr lvl="0" indent="0" marL="0">
-                        <a:buNone/>
-                      </a:pPr>
-                      <a:r>
-                        <a:rPr/>
-                        <a:t>6</a:t>
-                      </a:r>
-                    </a:p>
-                  </a:txBody>
-                </a:tc>
-                <a:tc>
-                  <a:txBody>
-                    <a:bodyPr/>
-                    <a:lstStyle/>
-                    <a:p>
-                      <a:pPr lvl="0" indent="0" marL="0">
-                        <a:buNone/>
-                      </a:pPr>
-                      <a:r>
-                        <a:rPr/>
-                        <a:t>147.451321</a:t>
-                      </a:r>
-                    </a:p>
-                  </a:txBody>
-                </a:tc>
-                <a:tc>
-                  <a:txBody>
-                    <a:bodyPr/>
-                    <a:lstStyle/>
-                    <a:p>
-                      <a:pPr lvl="0" indent="0" marL="0">
-                        <a:buNone/>
-                      </a:pPr>
-                      <a:r>
-                        <a:rPr/>
-                        <a:t>40.791681</a:t>
-                      </a:r>
-                    </a:p>
-                  </a:txBody>
-                </a:tc>
-                <a:tc>
-                  <a:txBody>
-                    <a:bodyPr/>
-                    <a:lstStyle/>
-                    <a:p>
-                      <a:pPr lvl="0" indent="0" marL="0">
-                        <a:buNone/>
-                      </a:pPr>
-                      <a:r>
-                        <a:rPr/>
-                        <a:t>0.142862</a:t>
-                      </a:r>
-                    </a:p>
-                  </a:txBody>
-                </a:tc>
-              </a:tr>
-              <a:tr h="0">
-                <a:tc>
-                  <a:txBody>
-                    <a:bodyPr/>
-                    <a:lstStyle/>
-                    <a:p>
-                      <a:pPr lvl="0" indent="0" marL="0">
-                        <a:buNone/>
-                      </a:pPr>
-                      <a:r>
-                        <a:rPr/>
-                        <a:t>...</a:t>
-                      </a:r>
-                    </a:p>
-                  </a:txBody>
-                </a:tc>
-                <a:tc>
-                  <a:txBody>
-                    <a:bodyPr/>
-                    <a:lstStyle/>
-                    <a:p>
-                      <a:pPr lvl="0" indent="0" marL="0">
-                        <a:buNone/>
-                      </a:pPr>
-                      <a:r>
-                        <a:rPr/>
-                        <a:t>...</a:t>
-                      </a:r>
-                    </a:p>
-                  </a:txBody>
-                </a:tc>
-                <a:tc>
-                  <a:txBody>
-                    <a:bodyPr/>
-                    <a:lstStyle/>
-                    <a:p>
-                      <a:pPr lvl="0" indent="0" marL="0">
-                        <a:buNone/>
-                      </a:pPr>
-                      <a:r>
-                        <a:rPr/>
-                        <a:t>...</a:t>
-                      </a:r>
-                    </a:p>
-                  </a:txBody>
-                </a:tc>
-                <a:tc>
-                  <a:txBody>
-                    <a:bodyPr/>
-                    <a:lstStyle/>
-                    <a:p>
-                      <a:pPr lvl="0" indent="0" marL="0">
-                        <a:buNone/>
-                      </a:pPr>
-                      <a:r>
-                        <a:rPr/>
-                        <a:t>...</a:t>
-                      </a:r>
-                    </a:p>
-                  </a:txBody>
-                </a:tc>
-                <a:tc>
-                  <a:txBody>
-                    <a:bodyPr/>
-                    <a:lstStyle/>
-                    <a:p>
-                      <a:pPr lvl="0" indent="0" marL="0">
-                        <a:buNone/>
-                      </a:pPr>
-                      <a:r>
-                        <a:rPr/>
-                        <a:t>...</a:t>
-                      </a:r>
-                    </a:p>
-                  </a:txBody>
-                </a:tc>
-                <a:tc>
-                  <a:txBody>
-                    <a:bodyPr/>
-                    <a:lstStyle/>
-                    <a:p>
-                      <a:pPr lvl="0" indent="0" marL="0">
-                        <a:buNone/>
-                      </a:pPr>
-                      <a:r>
-                        <a:rPr/>
-                        <a:t>...</a:t>
-                      </a:r>
-                    </a:p>
-                  </a:txBody>
-                </a:tc>
-              </a:tr>
-              <a:tr h="0">
-                <a:tc>
-                  <a:txBody>
-                    <a:bodyPr/>
-                    <a:lstStyle/>
-                    <a:p>
-                      <a:pPr lvl="0" indent="0" marL="0">
-                        <a:buNone/>
-                      </a:pPr>
-                      <a:r>
-                        <a:rPr/>
-                        <a:t>895</a:t>
-                      </a:r>
-                    </a:p>
-                  </a:txBody>
-                </a:tc>
-                <a:tc>
-                  <a:txBody>
-                    <a:bodyPr/>
-                    <a:lstStyle/>
-                    <a:p>
-                      <a:pPr lvl="0" indent="0" marL="0">
-                        <a:buNone/>
-                      </a:pPr>
-                      <a:r>
-                        <a:rPr/>
-                        <a:t>sugarberry</a:t>
-                      </a:r>
-                    </a:p>
-                  </a:txBody>
-                </a:tc>
-                <a:tc>
-                  <a:txBody>
-                    <a:bodyPr/>
-                    <a:lstStyle/>
-                    <a:p>
-                      <a:pPr lvl="0" indent="0" marL="0">
-                        <a:buNone/>
-                      </a:pPr>
-                      <a:r>
-                        <a:rPr/>
-                        <a:t>6</a:t>
-                      </a:r>
-                    </a:p>
-                  </a:txBody>
-                </a:tc>
-                <a:tc>
-                  <a:txBody>
-                    <a:bodyPr/>
-                    <a:lstStyle/>
-                    <a:p>
-                      <a:pPr lvl="0" indent="0" marL="0">
-                        <a:buNone/>
-                      </a:pPr>
-                      <a:r>
-                        <a:rPr/>
-                        <a:t>32.431052</a:t>
-                      </a:r>
-                    </a:p>
-                  </a:txBody>
-                </a:tc>
-                <a:tc>
-                  <a:txBody>
-                    <a:bodyPr/>
-                    <a:lstStyle/>
-                    <a:p>
-                      <a:pPr lvl="0" indent="0" marL="0">
-                        <a:buNone/>
-                      </a:pPr>
-                      <a:r>
-                        <a:rPr/>
-                        <a:t>20.969306</a:t>
-                      </a:r>
-                    </a:p>
-                  </a:txBody>
-                </a:tc>
-                <a:tc>
-                  <a:txBody>
-                    <a:bodyPr/>
-                    <a:lstStyle/>
-                    <a:p>
-                      <a:pPr lvl="0" indent="0" marL="0">
-                        <a:buNone/>
-                      </a:pPr>
-                      <a:r>
-                        <a:rPr/>
-                        <a:t>0.565727</a:t>
-                      </a:r>
-                    </a:p>
-                  </a:txBody>
-                </a:tc>
-              </a:tr>
-              <a:tr h="0">
-                <a:tc>
-                  <a:txBody>
-                    <a:bodyPr/>
-                    <a:lstStyle/>
-                    <a:p>
-                      <a:pPr lvl="0" indent="0" marL="0">
-                        <a:buNone/>
-                      </a:pPr>
-                      <a:r>
-                        <a:rPr/>
-                        <a:t>896</a:t>
-                      </a:r>
-                    </a:p>
-                  </a:txBody>
-                </a:tc>
-                <a:tc>
-                  <a:txBody>
-                    <a:bodyPr/>
-                    <a:lstStyle/>
-                    <a:p>
-                      <a:pPr lvl="0" indent="0" marL="0">
-                        <a:buNone/>
-                      </a:pPr>
-                      <a:r>
-                        <a:rPr/>
-                        <a:t>sugarberry</a:t>
-                      </a:r>
-                    </a:p>
-                  </a:txBody>
-                </a:tc>
-                <a:tc>
-                  <a:txBody>
-                    <a:bodyPr/>
-                    <a:lstStyle/>
-                    <a:p>
-                      <a:pPr lvl="0" indent="0" marL="0">
-                        <a:buNone/>
-                      </a:pPr>
-                      <a:r>
-                        <a:rPr/>
-                        <a:t>7</a:t>
-                      </a:r>
-                    </a:p>
-                  </a:txBody>
-                </a:tc>
-                <a:tc>
-                  <a:txBody>
-                    <a:bodyPr/>
-                    <a:lstStyle/>
-                    <a:p>
-                      <a:pPr lvl="0" indent="0" marL="0">
-                        <a:buNone/>
-                      </a:pPr>
-                      <a:r>
-                        <a:rPr/>
-                        <a:t>37.324259</a:t>
-                      </a:r>
-                    </a:p>
-                  </a:txBody>
-                </a:tc>
-                <a:tc>
-                  <a:txBody>
-                    <a:bodyPr/>
-                    <a:lstStyle/>
-                    <a:p>
-                      <a:pPr lvl="0" indent="0" marL="0">
-                        <a:buNone/>
-                      </a:pPr>
-                      <a:r>
-                        <a:rPr/>
-                        <a:t>25.037024</a:t>
-                      </a:r>
-                    </a:p>
-                  </a:txBody>
-                </a:tc>
-                <a:tc>
-                  <a:txBody>
-                    <a:bodyPr/>
-                    <a:lstStyle/>
-                    <a:p>
-                      <a:pPr lvl="0" indent="0" marL="0">
-                        <a:buNone/>
-                      </a:pPr>
-                      <a:r>
-                        <a:rPr/>
-                        <a:t>0.637629</a:t>
-                      </a:r>
-                    </a:p>
-                  </a:txBody>
-                </a:tc>
-              </a:tr>
-              <a:tr h="0">
-                <a:tc>
-                  <a:txBody>
-                    <a:bodyPr/>
-                    <a:lstStyle/>
-                    <a:p>
-                      <a:pPr lvl="0" indent="0" marL="0">
-                        <a:buNone/>
-                      </a:pPr>
-                      <a:r>
-                        <a:rPr/>
-                        <a:t>897</a:t>
-                      </a:r>
-                    </a:p>
-                  </a:txBody>
-                </a:tc>
-                <a:tc>
-                  <a:txBody>
-                    <a:bodyPr/>
-                    <a:lstStyle/>
-                    <a:p>
-                      <a:pPr lvl="0" indent="0" marL="0">
-                        <a:buNone/>
-                      </a:pPr>
-                      <a:r>
-                        <a:rPr/>
-                        <a:t>sugarberry</a:t>
-                      </a:r>
-                    </a:p>
-                  </a:txBody>
-                </a:tc>
-                <a:tc>
-                  <a:txBody>
-                    <a:bodyPr/>
-                    <a:lstStyle/>
-                    <a:p>
-                      <a:pPr lvl="0" indent="0" marL="0">
-                        <a:buNone/>
-                      </a:pPr>
-                      <a:r>
-                        <a:rPr/>
-                        <a:t>8</a:t>
-                      </a:r>
-                    </a:p>
-                  </a:txBody>
-                </a:tc>
-                <a:tc>
-                  <a:txBody>
-                    <a:bodyPr/>
-                    <a:lstStyle/>
-                    <a:p>
-                      <a:pPr lvl="0" indent="0" marL="0">
-                        <a:buNone/>
-                      </a:pPr>
-                      <a:r>
-                        <a:rPr/>
-                        <a:t>38.144756</a:t>
-                      </a:r>
-                    </a:p>
-                  </a:txBody>
-                </a:tc>
-                <a:tc>
-                  <a:txBody>
-                    <a:bodyPr/>
-                    <a:lstStyle/>
-                    <a:p>
-                      <a:pPr lvl="0" indent="0" marL="0">
-                        <a:buNone/>
-                      </a:pPr>
-                      <a:r>
-                        <a:rPr/>
-                        <a:t>26.680208</a:t>
-                      </a:r>
-                    </a:p>
-                  </a:txBody>
-                </a:tc>
-                <a:tc>
-                  <a:txBody>
-                    <a:bodyPr/>
-                    <a:lstStyle/>
-                    <a:p>
-                      <a:pPr lvl="0" indent="0" marL="0">
-                        <a:buNone/>
-                      </a:pPr>
-                      <a:r>
-                        <a:rPr/>
-                        <a:t>0.665159</a:t>
-                      </a:r>
-                    </a:p>
-                  </a:txBody>
-                </a:tc>
-              </a:tr>
-              <a:tr h="0">
-                <a:tc>
-                  <a:txBody>
-                    <a:bodyPr/>
-                    <a:lstStyle/>
-                    <a:p>
-                      <a:pPr lvl="0" indent="0" marL="0">
-                        <a:buNone/>
-                      </a:pPr>
-                      <a:r>
-                        <a:rPr/>
-                        <a:t>898</a:t>
-                      </a:r>
-                    </a:p>
-                  </a:txBody>
-                </a:tc>
-                <a:tc>
-                  <a:txBody>
-                    <a:bodyPr/>
-                    <a:lstStyle/>
-                    <a:p>
-                      <a:pPr lvl="0" indent="0" marL="0">
-                        <a:buNone/>
-                      </a:pPr>
-                      <a:r>
-                        <a:rPr/>
-                        <a:t>sugarberry</a:t>
-                      </a:r>
-                    </a:p>
-                  </a:txBody>
-                </a:tc>
-                <a:tc>
-                  <a:txBody>
-                    <a:bodyPr/>
-                    <a:lstStyle/>
-                    <a:p>
-                      <a:pPr lvl="0" indent="0" marL="0">
-                        <a:buNone/>
-                      </a:pPr>
-                      <a:r>
-                        <a:rPr/>
-                        <a:t>9</a:t>
-                      </a:r>
-                    </a:p>
-                  </a:txBody>
-                </a:tc>
-                <a:tc>
-                  <a:txBody>
-                    <a:bodyPr/>
-                    <a:lstStyle/>
-                    <a:p>
-                      <a:pPr lvl="0" indent="0" marL="0">
-                        <a:buNone/>
-                      </a:pPr>
-                      <a:r>
-                        <a:rPr/>
-                        <a:t>36.853245</a:t>
-                      </a:r>
-                    </a:p>
-                  </a:txBody>
-                </a:tc>
-                <a:tc>
-                  <a:txBody>
-                    <a:bodyPr/>
-                    <a:lstStyle/>
-                    <a:p>
-                      <a:pPr lvl="0" indent="0" marL="0">
-                        <a:buNone/>
-                      </a:pPr>
-                      <a:r>
-                        <a:rPr/>
-                        <a:t>21.021667</a:t>
-                      </a:r>
-                    </a:p>
-                  </a:txBody>
-                </a:tc>
-                <a:tc>
-                  <a:txBody>
-                    <a:bodyPr/>
-                    <a:lstStyle/>
-                    <a:p>
-                      <a:pPr lvl="0" indent="0" marL="0">
-                        <a:buNone/>
-                      </a:pPr>
-                      <a:r>
-                        <a:rPr/>
-                        <a:t>0.685162</a:t>
-                      </a:r>
-                    </a:p>
-                  </a:txBody>
-                </a:tc>
-              </a:tr>
-              <a:tr h="0">
-                <a:tc>
-                  <a:txBody>
-                    <a:bodyPr/>
-                    <a:lstStyle/>
-                    <a:p>
-                      <a:pPr lvl="0" indent="0" marL="0">
-                        <a:buNone/>
-                      </a:pPr>
-                      <a:r>
-                        <a:rPr/>
-                        <a:t>899</a:t>
-                      </a:r>
-                    </a:p>
-                  </a:txBody>
-                </a:tc>
-                <a:tc>
-                  <a:txBody>
-                    <a:bodyPr/>
-                    <a:lstStyle/>
-                    <a:p>
-                      <a:pPr lvl="0" indent="0" marL="0">
-                        <a:buNone/>
-                      </a:pPr>
-                      <a:r>
-                        <a:rPr/>
-                        <a:t>sugarberry</a:t>
-                      </a:r>
-                    </a:p>
-                  </a:txBody>
-                </a:tc>
-                <a:tc>
-                  <a:txBody>
-                    <a:bodyPr/>
-                    <a:lstStyle/>
-                    <a:p>
-                      <a:pPr lvl="0" indent="0" marL="0">
-                        <a:buNone/>
-                      </a:pPr>
-                      <a:r>
-                        <a:rPr/>
-                        <a:t>10</a:t>
-                      </a:r>
-                    </a:p>
-                  </a:txBody>
-                </a:tc>
-                <a:tc>
-                  <a:txBody>
-                    <a:bodyPr/>
-                    <a:lstStyle/>
-                    <a:p>
-                      <a:pPr lvl="0" indent="0" marL="0">
-                        <a:buNone/>
-                      </a:pPr>
-                      <a:r>
-                        <a:rPr/>
-                        <a:t>40.091106</a:t>
-                      </a:r>
-                    </a:p>
-                  </a:txBody>
-                </a:tc>
-                <a:tc>
-                  <a:txBody>
-                    <a:bodyPr/>
-                    <a:lstStyle/>
-                    <a:p>
-                      <a:pPr lvl="0" indent="0" marL="0">
-                        <a:buNone/>
-                      </a:pPr>
-                      <a:r>
-                        <a:rPr/>
-                        <a:t>23.172083</a:t>
-                      </a:r>
-                    </a:p>
-                  </a:txBody>
-                </a:tc>
-                <a:tc>
-                  <a:txBody>
-                    <a:bodyPr/>
-                    <a:lstStyle/>
-                    <a:p>
-                      <a:pPr lvl="0" indent="0" marL="0">
-                        <a:buNone/>
-                      </a:pPr>
-                      <a:r>
-                        <a:rPr/>
-                        <a:t>0.677519</a:t>
-                      </a:r>
-                    </a:p>
-                  </a:txBody>
-                </a:tc>
-              </a:tr>
-            </a:tbl>
-          </a:graphicData>
-        </a:graphic>
-      </p:graphicFrame>
+        </p:nvSpPr>
+        <p:spPr/>
+        <p:txBody>
+          <a:bodyPr/>
+          <a:lstStyle/>
+          <a:p>
+            <a:pPr lvl="0" indent="0" marL="0">
+              <a:buNone/>
+            </a:pPr>
+            <a:r>
+              <a:rPr/>
+              <a:t>When predicting tree biomass, employ the performance metric root mean square logarithmic error since biomass data varies greatly, ranging from tiny saplings to enormous grandpa trees, some trees having exponential growth. RMSLE focuses on percentage errors, making it fair to both small and large trees, unlike RMSE, which we believe penalizes errors on big trees. Fitting biomass estimations where scale matters more than absolute error. This metric is particularly useful in accurately assessing the predictive performance of models when dealing with such diverse ranges of tree sizes. By prioritizing percentage errors, RMSLE provides a more balanced evaluation that considers the unique characteristics of tree biomass data.</a:t>
+            </a:r>
+          </a:p>
+        </p:txBody>
+      </p:sp>
     </p:spTree>
   </p:cSld>
 </p:sld>
@@ -4703,66 +3568,17 @@
             <p:ph type="title"/>
           </p:nvPr>
         </p:nvSpPr>
-        <p:spPr>
-          <a:xfrm>
-            <a:off x="457201" y="204787"/>
-            <a:ext cx="3008313" cy="871538"/>
-          </a:xfrm>
-        </p:spPr>
-        <p:txBody>
-          <a:bodyPr/>
-          <a:lstStyle/>
-          <a:p>
-            <a:pPr lvl="0" indent="0" marL="0">
-              <a:buNone/>
-            </a:pPr>
-            <a:r>
-              <a:rPr/>
-              <a:t>Technical Lead</a:t>
-            </a:r>
-          </a:p>
-        </p:txBody>
-      </p:sp>
-      <p:sp>
-        <p:nvSpPr>
-          <p:cNvPr id="4" name="Text Placeholder 3"/>
-          <p:cNvSpPr>
-            <a:spLocks noGrp="1"/>
-          </p:cNvSpPr>
-          <p:nvPr>
-            <p:ph idx="2" sz="half" type="body"/>
-          </p:nvPr>
-        </p:nvSpPr>
         <p:spPr/>
         <p:txBody>
           <a:bodyPr/>
           <a:lstStyle/>
           <a:p>
-            <a:pPr lvl="0"/>
+            <a:pPr lvl="0" indent="0" marL="0">
+              <a:buNone/>
+            </a:pPr>
             <a:r>
               <a:rPr/>
-              <a:t>Split and filtering methods</a:t>
-            </a:r>
-          </a:p>
-          <a:p>
-            <a:pPr lvl="0"/>
-            <a:r>
-              <a:rPr/>
-              <a:t>Feature engineering (what worked and what didn’t)</a:t>
-            </a:r>
-          </a:p>
-          <a:p>
-            <a:pPr lvl="0"/>
-            <a:r>
-              <a:rPr/>
-              <a:t>Tuning k for the best model</a:t>
-            </a:r>
-          </a:p>
-          <a:p>
-            <a:pPr lvl="0"/>
-            <a:r>
-              <a:rPr/>
-              <a:t>The final “best” model and error # Tree Measurement Data:</a:t>
+              <a:t>Model</a:t>
             </a:r>
           </a:p>
         </p:txBody>
@@ -4778,8 +3594,8 @@
           </p:nvPr>
         </p:nvGraphicFramePr>
         <p:xfrm>
-          <a:off x="3568700" y="203200"/>
-          <a:ext cx="5105400" cy="4381500"/>
+          <a:off x="457200" y="1193800"/>
+          <a:ext cx="8229600" cy="3390900"/>
         </p:xfrm>
         <a:graphic>
           <a:graphicData uri="http://schemas.openxmlformats.org/drawingml/2006/table">
@@ -4788,11 +3604,12 @@
                 <a:tableStyleId>{5C22544A-7EE6-4342-B048-85BDC9FD1C3A}</a:tableStyleId>
               </a:tblPr>
               <a:tblGrid>
-                <a:gridCol w="1016000"/>
-                <a:gridCol w="1016000"/>
-                <a:gridCol w="1016000"/>
-                <a:gridCol w="1016000"/>
-                <a:gridCol w="1016000"/>
+                <a:gridCol w="1371600"/>
+                <a:gridCol w="1371600"/>
+                <a:gridCol w="1371600"/>
+                <a:gridCol w="1371600"/>
+                <a:gridCol w="1371600"/>
+                <a:gridCol w="1371600"/>
               </a:tblGrid>
               <a:tr h="0">
                 <a:tc>
@@ -4815,7 +3632,7 @@
                       </a:pPr>
                       <a:r>
                         <a:rPr/>
-                        <a:t>SPCD</a:t>
+                        <a:t>Species</a:t>
                       </a:r>
                     </a:p>
                   </a:txBody>
@@ -4831,7 +3648,7 @@
                       </a:pPr>
                       <a:r>
                         <a:rPr/>
-                        <a:t>DO_BH</a:t>
+                        <a:t>k</a:t>
                       </a:r>
                     </a:p>
                   </a:txBody>
@@ -4847,7 +3664,7 @@
                       </a:pPr>
                       <a:r>
                         <a:rPr/>
-                        <a:t>HT_TOT</a:t>
+                        <a:t>RMSE</a:t>
                       </a:r>
                     </a:p>
                   </a:txBody>
@@ -4863,7 +3680,23 @@
                       </a:pPr>
                       <a:r>
                         <a:rPr/>
-                        <a:t>TT_DW_CRM</a:t>
+                        <a:t>MAE</a:t>
+                      </a:r>
+                    </a:p>
+                  </a:txBody>
+                  <a:tcPr/>
+                </a:tc>
+                <a:tc>
+                  <a:txBody>
+                    <a:bodyPr/>
+                    <a:lstStyle/>
+                    <a:p>
+                      <a:pPr lvl="0" indent="0" marL="0">
+                        <a:buNone/>
+                      </a:pPr>
+                      <a:r>
+                        <a:rPr/>
+                        <a:t>RMSLE</a:t>
                       </a:r>
                     </a:p>
                   </a:txBody>
@@ -4896,52 +3729,67 @@
                       </a:pPr>
                       <a:r>
                         <a:rPr/>
-                        <a:t>12</a:t>
-                      </a:r>
-                    </a:p>
-                  </a:txBody>
-                </a:tc>
-                <a:tc>
-                  <a:txBody>
-                    <a:bodyPr/>
-                    <a:lstStyle/>
-                    <a:p>
-                      <a:pPr lvl="0" indent="0" marL="0">
-                        <a:buNone/>
-                      </a:pPr>
-                      <a:r>
-                        <a:rPr/>
-                        <a:t>7.5</a:t>
-                      </a:r>
-                    </a:p>
-                  </a:txBody>
-                </a:tc>
-                <a:tc>
-                  <a:txBody>
-                    <a:bodyPr/>
-                    <a:lstStyle/>
-                    <a:p>
-                      <a:pPr lvl="0" indent="0" marL="0">
-                        <a:buNone/>
-                      </a:pPr>
-                      <a:r>
-                        <a:rPr/>
-                        <a:t>45.2</a:t>
-                      </a:r>
-                    </a:p>
-                  </a:txBody>
-                </a:tc>
-                <a:tc>
-                  <a:txBody>
-                    <a:bodyPr/>
-                    <a:lstStyle/>
-                    <a:p>
-                      <a:pPr lvl="0" indent="0" marL="0">
-                        <a:buNone/>
-                      </a:pPr>
-                      <a:r>
-                        <a:rPr/>
-                        <a:t>178.86</a:t>
+                        <a:t>balsam fir</a:t>
+                      </a:r>
+                    </a:p>
+                  </a:txBody>
+                </a:tc>
+                <a:tc>
+                  <a:txBody>
+                    <a:bodyPr/>
+                    <a:lstStyle/>
+                    <a:p>
+                      <a:pPr lvl="0" indent="0" marL="0">
+                        <a:buNone/>
+                      </a:pPr>
+                      <a:r>
+                        <a:rPr/>
+                        <a:t>2</a:t>
+                      </a:r>
+                    </a:p>
+                  </a:txBody>
+                </a:tc>
+                <a:tc>
+                  <a:txBody>
+                    <a:bodyPr/>
+                    <a:lstStyle/>
+                    <a:p>
+                      <a:pPr lvl="0" indent="0" marL="0">
+                        <a:buNone/>
+                      </a:pPr>
+                      <a:r>
+                        <a:rPr/>
+                        <a:t>125.825473</a:t>
+                      </a:r>
+                    </a:p>
+                  </a:txBody>
+                </a:tc>
+                <a:tc>
+                  <a:txBody>
+                    <a:bodyPr/>
+                    <a:lstStyle/>
+                    <a:p>
+                      <a:pPr lvl="0" indent="0" marL="0">
+                        <a:buNone/>
+                      </a:pPr>
+                      <a:r>
+                        <a:rPr/>
+                        <a:t>34.801913</a:t>
+                      </a:r>
+                    </a:p>
+                  </a:txBody>
+                </a:tc>
+                <a:tc>
+                  <a:txBody>
+                    <a:bodyPr/>
+                    <a:lstStyle/>
+                    <a:p>
+                      <a:pPr lvl="0" indent="0" marL="0">
+                        <a:buNone/>
+                      </a:pPr>
+                      <a:r>
+                        <a:rPr/>
+                        <a:t>0.119574</a:t>
                       </a:r>
                     </a:p>
                   </a:txBody>
@@ -4973,52 +3821,67 @@
                       </a:pPr>
                       <a:r>
                         <a:rPr/>
-                        <a:t>12</a:t>
-                      </a:r>
-                    </a:p>
-                  </a:txBody>
-                </a:tc>
-                <a:tc>
-                  <a:txBody>
-                    <a:bodyPr/>
-                    <a:lstStyle/>
-                    <a:p>
-                      <a:pPr lvl="0" indent="0" marL="0">
-                        <a:buNone/>
-                      </a:pPr>
-                      <a:r>
-                        <a:rPr/>
-                        <a:t>9.3</a:t>
-                      </a:r>
-                    </a:p>
-                  </a:txBody>
-                </a:tc>
-                <a:tc>
-                  <a:txBody>
-                    <a:bodyPr/>
-                    <a:lstStyle/>
-                    <a:p>
-                      <a:pPr lvl="0" indent="0" marL="0">
-                        <a:buNone/>
-                      </a:pPr>
-                      <a:r>
-                        <a:rPr/>
-                        <a:t>62.7</a:t>
-                      </a:r>
-                    </a:p>
-                  </a:txBody>
-                </a:tc>
-                <a:tc>
-                  <a:txBody>
-                    <a:bodyPr/>
-                    <a:lstStyle/>
-                    <a:p>
-                      <a:pPr lvl="0" indent="0" marL="0">
-                        <a:buNone/>
-                      </a:pPr>
-                      <a:r>
-                        <a:rPr/>
-                        <a:t>323.46</a:t>
+                        <a:t>balsam fir</a:t>
+                      </a:r>
+                    </a:p>
+                  </a:txBody>
+                </a:tc>
+                <a:tc>
+                  <a:txBody>
+                    <a:bodyPr/>
+                    <a:lstStyle/>
+                    <a:p>
+                      <a:pPr lvl="0" indent="0" marL="0">
+                        <a:buNone/>
+                      </a:pPr>
+                      <a:r>
+                        <a:rPr/>
+                        <a:t>3</a:t>
+                      </a:r>
+                    </a:p>
+                  </a:txBody>
+                </a:tc>
+                <a:tc>
+                  <a:txBody>
+                    <a:bodyPr/>
+                    <a:lstStyle/>
+                    <a:p>
+                      <a:pPr lvl="0" indent="0" marL="0">
+                        <a:buNone/>
+                      </a:pPr>
+                      <a:r>
+                        <a:rPr/>
+                        <a:t>129.651479</a:t>
+                      </a:r>
+                    </a:p>
+                  </a:txBody>
+                </a:tc>
+                <a:tc>
+                  <a:txBody>
+                    <a:bodyPr/>
+                    <a:lstStyle/>
+                    <a:p>
+                      <a:pPr lvl="0" indent="0" marL="0">
+                        <a:buNone/>
+                      </a:pPr>
+                      <a:r>
+                        <a:rPr/>
+                        <a:t>36.646493</a:t>
+                      </a:r>
+                    </a:p>
+                  </a:txBody>
+                </a:tc>
+                <a:tc>
+                  <a:txBody>
+                    <a:bodyPr/>
+                    <a:lstStyle/>
+                    <a:p>
+                      <a:pPr lvl="0" indent="0" marL="0">
+                        <a:buNone/>
+                      </a:pPr>
+                      <a:r>
+                        <a:rPr/>
+                        <a:t>0.123724</a:t>
                       </a:r>
                     </a:p>
                   </a:txBody>
@@ -5050,52 +3913,67 @@
                       </a:pPr>
                       <a:r>
                         <a:rPr/>
-                        <a:t>12</a:t>
-                      </a:r>
-                    </a:p>
-                  </a:txBody>
-                </a:tc>
-                <a:tc>
-                  <a:txBody>
-                    <a:bodyPr/>
-                    <a:lstStyle/>
-                    <a:p>
-                      <a:pPr lvl="0" indent="0" marL="0">
-                        <a:buNone/>
-                      </a:pPr>
-                      <a:r>
-                        <a:rPr/>
-                        <a:t>9.7</a:t>
-                      </a:r>
-                    </a:p>
-                  </a:txBody>
-                </a:tc>
-                <a:tc>
-                  <a:txBody>
-                    <a:bodyPr/>
-                    <a:lstStyle/>
-                    <a:p>
-                      <a:pPr lvl="0" indent="0" marL="0">
-                        <a:buNone/>
-                      </a:pPr>
-                      <a:r>
-                        <a:rPr/>
-                        <a:t>56.7</a:t>
-                      </a:r>
-                    </a:p>
-                  </a:txBody>
-                </a:tc>
-                <a:tc>
-                  <a:txBody>
-                    <a:bodyPr/>
-                    <a:lstStyle/>
-                    <a:p>
-                      <a:pPr lvl="0" indent="0" marL="0">
-                        <a:buNone/>
-                      </a:pPr>
-                      <a:r>
-                        <a:rPr/>
-                        <a:t>342.47</a:t>
+                        <a:t>balsam fir</a:t>
+                      </a:r>
+                    </a:p>
+                  </a:txBody>
+                </a:tc>
+                <a:tc>
+                  <a:txBody>
+                    <a:bodyPr/>
+                    <a:lstStyle/>
+                    <a:p>
+                      <a:pPr lvl="0" indent="0" marL="0">
+                        <a:buNone/>
+                      </a:pPr>
+                      <a:r>
+                        <a:rPr/>
+                        <a:t>4</a:t>
+                      </a:r>
+                    </a:p>
+                  </a:txBody>
+                </a:tc>
+                <a:tc>
+                  <a:txBody>
+                    <a:bodyPr/>
+                    <a:lstStyle/>
+                    <a:p>
+                      <a:pPr lvl="0" indent="0" marL="0">
+                        <a:buNone/>
+                      </a:pPr>
+                      <a:r>
+                        <a:rPr/>
+                        <a:t>134.599829</a:t>
+                      </a:r>
+                    </a:p>
+                  </a:txBody>
+                </a:tc>
+                <a:tc>
+                  <a:txBody>
+                    <a:bodyPr/>
+                    <a:lstStyle/>
+                    <a:p>
+                      <a:pPr lvl="0" indent="0" marL="0">
+                        <a:buNone/>
+                      </a:pPr>
+                      <a:r>
+                        <a:rPr/>
+                        <a:t>38.884870</a:t>
+                      </a:r>
+                    </a:p>
+                  </a:txBody>
+                </a:tc>
+                <a:tc>
+                  <a:txBody>
+                    <a:bodyPr/>
+                    <a:lstStyle/>
+                    <a:p>
+                      <a:pPr lvl="0" indent="0" marL="0">
+                        <a:buNone/>
+                      </a:pPr>
+                      <a:r>
+                        <a:rPr/>
+                        <a:t>0.133858</a:t>
                       </a:r>
                     </a:p>
                   </a:txBody>
@@ -5127,52 +4005,67 @@
                       </a:pPr>
                       <a:r>
                         <a:rPr/>
-                        <a:t>12</a:t>
-                      </a:r>
-                    </a:p>
-                  </a:txBody>
-                </a:tc>
-                <a:tc>
-                  <a:txBody>
-                    <a:bodyPr/>
-                    <a:lstStyle/>
-                    <a:p>
-                      <a:pPr lvl="0" indent="0" marL="0">
-                        <a:buNone/>
-                      </a:pPr>
-                      <a:r>
-                        <a:rPr/>
-                        <a:t>11.4</a:t>
-                      </a:r>
-                    </a:p>
-                  </a:txBody>
-                </a:tc>
-                <a:tc>
-                  <a:txBody>
-                    <a:bodyPr/>
-                    <a:lstStyle/>
-                    <a:p>
-                      <a:pPr lvl="0" indent="0" marL="0">
-                        <a:buNone/>
-                      </a:pPr>
-                      <a:r>
-                        <a:rPr/>
-                        <a:t>66.1</a:t>
-                      </a:r>
-                    </a:p>
-                  </a:txBody>
-                </a:tc>
-                <a:tc>
-                  <a:txBody>
-                    <a:bodyPr/>
-                    <a:lstStyle/>
-                    <a:p>
-                      <a:pPr lvl="0" indent="0" marL="0">
-                        <a:buNone/>
-                      </a:pPr>
-                      <a:r>
-                        <a:rPr/>
-                        <a:t>499.35</a:t>
+                        <a:t>balsam fir</a:t>
+                      </a:r>
+                    </a:p>
+                  </a:txBody>
+                </a:tc>
+                <a:tc>
+                  <a:txBody>
+                    <a:bodyPr/>
+                    <a:lstStyle/>
+                    <a:p>
+                      <a:pPr lvl="0" indent="0" marL="0">
+                        <a:buNone/>
+                      </a:pPr>
+                      <a:r>
+                        <a:rPr/>
+                        <a:t>5</a:t>
+                      </a:r>
+                    </a:p>
+                  </a:txBody>
+                </a:tc>
+                <a:tc>
+                  <a:txBody>
+                    <a:bodyPr/>
+                    <a:lstStyle/>
+                    <a:p>
+                      <a:pPr lvl="0" indent="0" marL="0">
+                        <a:buNone/>
+                      </a:pPr>
+                      <a:r>
+                        <a:rPr/>
+                        <a:t>145.003601</a:t>
+                      </a:r>
+                    </a:p>
+                  </a:txBody>
+                </a:tc>
+                <a:tc>
+                  <a:txBody>
+                    <a:bodyPr/>
+                    <a:lstStyle/>
+                    <a:p>
+                      <a:pPr lvl="0" indent="0" marL="0">
+                        <a:buNone/>
+                      </a:pPr>
+                      <a:r>
+                        <a:rPr/>
+                        <a:t>41.209530</a:t>
+                      </a:r>
+                    </a:p>
+                  </a:txBody>
+                </a:tc>
+                <a:tc>
+                  <a:txBody>
+                    <a:bodyPr/>
+                    <a:lstStyle/>
+                    <a:p>
+                      <a:pPr lvl="0" indent="0" marL="0">
+                        <a:buNone/>
+                      </a:pPr>
+                      <a:r>
+                        <a:rPr/>
+                        <a:t>0.144063</a:t>
                       </a:r>
                     </a:p>
                   </a:txBody>
@@ -5204,52 +4097,619 @@
                       </a:pPr>
                       <a:r>
                         <a:rPr/>
-                        <a:t>12</a:t>
-                      </a:r>
-                    </a:p>
-                  </a:txBody>
-                </a:tc>
-                <a:tc>
-                  <a:txBody>
-                    <a:bodyPr/>
-                    <a:lstStyle/>
-                    <a:p>
-                      <a:pPr lvl="0" indent="0" marL="0">
-                        <a:buNone/>
-                      </a:pPr>
-                      <a:r>
-                        <a:rPr/>
-                        <a:t>6.4</a:t>
-                      </a:r>
-                    </a:p>
-                  </a:txBody>
-                </a:tc>
-                <a:tc>
-                  <a:txBody>
-                    <a:bodyPr/>
-                    <a:lstStyle/>
-                    <a:p>
-                      <a:pPr lvl="0" indent="0" marL="0">
-                        <a:buNone/>
-                      </a:pPr>
-                      <a:r>
-                        <a:rPr/>
-                        <a:t>51.8</a:t>
-                      </a:r>
-                    </a:p>
-                  </a:txBody>
-                </a:tc>
-                <a:tc>
-                  <a:txBody>
-                    <a:bodyPr/>
-                    <a:lstStyle/>
-                    <a:p>
-                      <a:pPr lvl="0" indent="0" marL="0">
-                        <a:buNone/>
-                      </a:pPr>
-                      <a:r>
-                        <a:rPr/>
-                        <a:t>113.92</a:t>
+                        <a:t>balsam fir</a:t>
+                      </a:r>
+                    </a:p>
+                  </a:txBody>
+                </a:tc>
+                <a:tc>
+                  <a:txBody>
+                    <a:bodyPr/>
+                    <a:lstStyle/>
+                    <a:p>
+                      <a:pPr lvl="0" indent="0" marL="0">
+                        <a:buNone/>
+                      </a:pPr>
+                      <a:r>
+                        <a:rPr/>
+                        <a:t>6</a:t>
+                      </a:r>
+                    </a:p>
+                  </a:txBody>
+                </a:tc>
+                <a:tc>
+                  <a:txBody>
+                    <a:bodyPr/>
+                    <a:lstStyle/>
+                    <a:p>
+                      <a:pPr lvl="0" indent="0" marL="0">
+                        <a:buNone/>
+                      </a:pPr>
+                      <a:r>
+                        <a:rPr/>
+                        <a:t>147.451321</a:t>
+                      </a:r>
+                    </a:p>
+                  </a:txBody>
+                </a:tc>
+                <a:tc>
+                  <a:txBody>
+                    <a:bodyPr/>
+                    <a:lstStyle/>
+                    <a:p>
+                      <a:pPr lvl="0" indent="0" marL="0">
+                        <a:buNone/>
+                      </a:pPr>
+                      <a:r>
+                        <a:rPr/>
+                        <a:t>40.791681</a:t>
+                      </a:r>
+                    </a:p>
+                  </a:txBody>
+                </a:tc>
+                <a:tc>
+                  <a:txBody>
+                    <a:bodyPr/>
+                    <a:lstStyle/>
+                    <a:p>
+                      <a:pPr lvl="0" indent="0" marL="0">
+                        <a:buNone/>
+                      </a:pPr>
+                      <a:r>
+                        <a:rPr/>
+                        <a:t>0.142862</a:t>
+                      </a:r>
+                    </a:p>
+                  </a:txBody>
+                </a:tc>
+              </a:tr>
+              <a:tr h="0">
+                <a:tc>
+                  <a:txBody>
+                    <a:bodyPr/>
+                    <a:lstStyle/>
+                    <a:p>
+                      <a:pPr lvl="0" indent="0" marL="0">
+                        <a:buNone/>
+                      </a:pPr>
+                      <a:r>
+                        <a:rPr/>
+                        <a:t>...</a:t>
+                      </a:r>
+                    </a:p>
+                  </a:txBody>
+                </a:tc>
+                <a:tc>
+                  <a:txBody>
+                    <a:bodyPr/>
+                    <a:lstStyle/>
+                    <a:p>
+                      <a:pPr lvl="0" indent="0" marL="0">
+                        <a:buNone/>
+                      </a:pPr>
+                      <a:r>
+                        <a:rPr/>
+                        <a:t>...</a:t>
+                      </a:r>
+                    </a:p>
+                  </a:txBody>
+                </a:tc>
+                <a:tc>
+                  <a:txBody>
+                    <a:bodyPr/>
+                    <a:lstStyle/>
+                    <a:p>
+                      <a:pPr lvl="0" indent="0" marL="0">
+                        <a:buNone/>
+                      </a:pPr>
+                      <a:r>
+                        <a:rPr/>
+                        <a:t>...</a:t>
+                      </a:r>
+                    </a:p>
+                  </a:txBody>
+                </a:tc>
+                <a:tc>
+                  <a:txBody>
+                    <a:bodyPr/>
+                    <a:lstStyle/>
+                    <a:p>
+                      <a:pPr lvl="0" indent="0" marL="0">
+                        <a:buNone/>
+                      </a:pPr>
+                      <a:r>
+                        <a:rPr/>
+                        <a:t>...</a:t>
+                      </a:r>
+                    </a:p>
+                  </a:txBody>
+                </a:tc>
+                <a:tc>
+                  <a:txBody>
+                    <a:bodyPr/>
+                    <a:lstStyle/>
+                    <a:p>
+                      <a:pPr lvl="0" indent="0" marL="0">
+                        <a:buNone/>
+                      </a:pPr>
+                      <a:r>
+                        <a:rPr/>
+                        <a:t>...</a:t>
+                      </a:r>
+                    </a:p>
+                  </a:txBody>
+                </a:tc>
+                <a:tc>
+                  <a:txBody>
+                    <a:bodyPr/>
+                    <a:lstStyle/>
+                    <a:p>
+                      <a:pPr lvl="0" indent="0" marL="0">
+                        <a:buNone/>
+                      </a:pPr>
+                      <a:r>
+                        <a:rPr/>
+                        <a:t>...</a:t>
+                      </a:r>
+                    </a:p>
+                  </a:txBody>
+                </a:tc>
+              </a:tr>
+              <a:tr h="0">
+                <a:tc>
+                  <a:txBody>
+                    <a:bodyPr/>
+                    <a:lstStyle/>
+                    <a:p>
+                      <a:pPr lvl="0" indent="0" marL="0">
+                        <a:buNone/>
+                      </a:pPr>
+                      <a:r>
+                        <a:rPr/>
+                        <a:t>895</a:t>
+                      </a:r>
+                    </a:p>
+                  </a:txBody>
+                </a:tc>
+                <a:tc>
+                  <a:txBody>
+                    <a:bodyPr/>
+                    <a:lstStyle/>
+                    <a:p>
+                      <a:pPr lvl="0" indent="0" marL="0">
+                        <a:buNone/>
+                      </a:pPr>
+                      <a:r>
+                        <a:rPr/>
+                        <a:t>sugarberry</a:t>
+                      </a:r>
+                    </a:p>
+                  </a:txBody>
+                </a:tc>
+                <a:tc>
+                  <a:txBody>
+                    <a:bodyPr/>
+                    <a:lstStyle/>
+                    <a:p>
+                      <a:pPr lvl="0" indent="0" marL="0">
+                        <a:buNone/>
+                      </a:pPr>
+                      <a:r>
+                        <a:rPr/>
+                        <a:t>6</a:t>
+                      </a:r>
+                    </a:p>
+                  </a:txBody>
+                </a:tc>
+                <a:tc>
+                  <a:txBody>
+                    <a:bodyPr/>
+                    <a:lstStyle/>
+                    <a:p>
+                      <a:pPr lvl="0" indent="0" marL="0">
+                        <a:buNone/>
+                      </a:pPr>
+                      <a:r>
+                        <a:rPr/>
+                        <a:t>32.431052</a:t>
+                      </a:r>
+                    </a:p>
+                  </a:txBody>
+                </a:tc>
+                <a:tc>
+                  <a:txBody>
+                    <a:bodyPr/>
+                    <a:lstStyle/>
+                    <a:p>
+                      <a:pPr lvl="0" indent="0" marL="0">
+                        <a:buNone/>
+                      </a:pPr>
+                      <a:r>
+                        <a:rPr/>
+                        <a:t>20.969306</a:t>
+                      </a:r>
+                    </a:p>
+                  </a:txBody>
+                </a:tc>
+                <a:tc>
+                  <a:txBody>
+                    <a:bodyPr/>
+                    <a:lstStyle/>
+                    <a:p>
+                      <a:pPr lvl="0" indent="0" marL="0">
+                        <a:buNone/>
+                      </a:pPr>
+                      <a:r>
+                        <a:rPr/>
+                        <a:t>0.565727</a:t>
+                      </a:r>
+                    </a:p>
+                  </a:txBody>
+                </a:tc>
+              </a:tr>
+              <a:tr h="0">
+                <a:tc>
+                  <a:txBody>
+                    <a:bodyPr/>
+                    <a:lstStyle/>
+                    <a:p>
+                      <a:pPr lvl="0" indent="0" marL="0">
+                        <a:buNone/>
+                      </a:pPr>
+                      <a:r>
+                        <a:rPr/>
+                        <a:t>896</a:t>
+                      </a:r>
+                    </a:p>
+                  </a:txBody>
+                </a:tc>
+                <a:tc>
+                  <a:txBody>
+                    <a:bodyPr/>
+                    <a:lstStyle/>
+                    <a:p>
+                      <a:pPr lvl="0" indent="0" marL="0">
+                        <a:buNone/>
+                      </a:pPr>
+                      <a:r>
+                        <a:rPr/>
+                        <a:t>sugarberry</a:t>
+                      </a:r>
+                    </a:p>
+                  </a:txBody>
+                </a:tc>
+                <a:tc>
+                  <a:txBody>
+                    <a:bodyPr/>
+                    <a:lstStyle/>
+                    <a:p>
+                      <a:pPr lvl="0" indent="0" marL="0">
+                        <a:buNone/>
+                      </a:pPr>
+                      <a:r>
+                        <a:rPr/>
+                        <a:t>7</a:t>
+                      </a:r>
+                    </a:p>
+                  </a:txBody>
+                </a:tc>
+                <a:tc>
+                  <a:txBody>
+                    <a:bodyPr/>
+                    <a:lstStyle/>
+                    <a:p>
+                      <a:pPr lvl="0" indent="0" marL="0">
+                        <a:buNone/>
+                      </a:pPr>
+                      <a:r>
+                        <a:rPr/>
+                        <a:t>37.324259</a:t>
+                      </a:r>
+                    </a:p>
+                  </a:txBody>
+                </a:tc>
+                <a:tc>
+                  <a:txBody>
+                    <a:bodyPr/>
+                    <a:lstStyle/>
+                    <a:p>
+                      <a:pPr lvl="0" indent="0" marL="0">
+                        <a:buNone/>
+                      </a:pPr>
+                      <a:r>
+                        <a:rPr/>
+                        <a:t>25.037024</a:t>
+                      </a:r>
+                    </a:p>
+                  </a:txBody>
+                </a:tc>
+                <a:tc>
+                  <a:txBody>
+                    <a:bodyPr/>
+                    <a:lstStyle/>
+                    <a:p>
+                      <a:pPr lvl="0" indent="0" marL="0">
+                        <a:buNone/>
+                      </a:pPr>
+                      <a:r>
+                        <a:rPr/>
+                        <a:t>0.637629</a:t>
+                      </a:r>
+                    </a:p>
+                  </a:txBody>
+                </a:tc>
+              </a:tr>
+              <a:tr h="0">
+                <a:tc>
+                  <a:txBody>
+                    <a:bodyPr/>
+                    <a:lstStyle/>
+                    <a:p>
+                      <a:pPr lvl="0" indent="0" marL="0">
+                        <a:buNone/>
+                      </a:pPr>
+                      <a:r>
+                        <a:rPr/>
+                        <a:t>897</a:t>
+                      </a:r>
+                    </a:p>
+                  </a:txBody>
+                </a:tc>
+                <a:tc>
+                  <a:txBody>
+                    <a:bodyPr/>
+                    <a:lstStyle/>
+                    <a:p>
+                      <a:pPr lvl="0" indent="0" marL="0">
+                        <a:buNone/>
+                      </a:pPr>
+                      <a:r>
+                        <a:rPr/>
+                        <a:t>sugarberry</a:t>
+                      </a:r>
+                    </a:p>
+                  </a:txBody>
+                </a:tc>
+                <a:tc>
+                  <a:txBody>
+                    <a:bodyPr/>
+                    <a:lstStyle/>
+                    <a:p>
+                      <a:pPr lvl="0" indent="0" marL="0">
+                        <a:buNone/>
+                      </a:pPr>
+                      <a:r>
+                        <a:rPr/>
+                        <a:t>8</a:t>
+                      </a:r>
+                    </a:p>
+                  </a:txBody>
+                </a:tc>
+                <a:tc>
+                  <a:txBody>
+                    <a:bodyPr/>
+                    <a:lstStyle/>
+                    <a:p>
+                      <a:pPr lvl="0" indent="0" marL="0">
+                        <a:buNone/>
+                      </a:pPr>
+                      <a:r>
+                        <a:rPr/>
+                        <a:t>38.144756</a:t>
+                      </a:r>
+                    </a:p>
+                  </a:txBody>
+                </a:tc>
+                <a:tc>
+                  <a:txBody>
+                    <a:bodyPr/>
+                    <a:lstStyle/>
+                    <a:p>
+                      <a:pPr lvl="0" indent="0" marL="0">
+                        <a:buNone/>
+                      </a:pPr>
+                      <a:r>
+                        <a:rPr/>
+                        <a:t>26.680208</a:t>
+                      </a:r>
+                    </a:p>
+                  </a:txBody>
+                </a:tc>
+                <a:tc>
+                  <a:txBody>
+                    <a:bodyPr/>
+                    <a:lstStyle/>
+                    <a:p>
+                      <a:pPr lvl="0" indent="0" marL="0">
+                        <a:buNone/>
+                      </a:pPr>
+                      <a:r>
+                        <a:rPr/>
+                        <a:t>0.665159</a:t>
+                      </a:r>
+                    </a:p>
+                  </a:txBody>
+                </a:tc>
+              </a:tr>
+              <a:tr h="0">
+                <a:tc>
+                  <a:txBody>
+                    <a:bodyPr/>
+                    <a:lstStyle/>
+                    <a:p>
+                      <a:pPr lvl="0" indent="0" marL="0">
+                        <a:buNone/>
+                      </a:pPr>
+                      <a:r>
+                        <a:rPr/>
+                        <a:t>898</a:t>
+                      </a:r>
+                    </a:p>
+                  </a:txBody>
+                </a:tc>
+                <a:tc>
+                  <a:txBody>
+                    <a:bodyPr/>
+                    <a:lstStyle/>
+                    <a:p>
+                      <a:pPr lvl="0" indent="0" marL="0">
+                        <a:buNone/>
+                      </a:pPr>
+                      <a:r>
+                        <a:rPr/>
+                        <a:t>sugarberry</a:t>
+                      </a:r>
+                    </a:p>
+                  </a:txBody>
+                </a:tc>
+                <a:tc>
+                  <a:txBody>
+                    <a:bodyPr/>
+                    <a:lstStyle/>
+                    <a:p>
+                      <a:pPr lvl="0" indent="0" marL="0">
+                        <a:buNone/>
+                      </a:pPr>
+                      <a:r>
+                        <a:rPr/>
+                        <a:t>9</a:t>
+                      </a:r>
+                    </a:p>
+                  </a:txBody>
+                </a:tc>
+                <a:tc>
+                  <a:txBody>
+                    <a:bodyPr/>
+                    <a:lstStyle/>
+                    <a:p>
+                      <a:pPr lvl="0" indent="0" marL="0">
+                        <a:buNone/>
+                      </a:pPr>
+                      <a:r>
+                        <a:rPr/>
+                        <a:t>36.853245</a:t>
+                      </a:r>
+                    </a:p>
+                  </a:txBody>
+                </a:tc>
+                <a:tc>
+                  <a:txBody>
+                    <a:bodyPr/>
+                    <a:lstStyle/>
+                    <a:p>
+                      <a:pPr lvl="0" indent="0" marL="0">
+                        <a:buNone/>
+                      </a:pPr>
+                      <a:r>
+                        <a:rPr/>
+                        <a:t>21.021667</a:t>
+                      </a:r>
+                    </a:p>
+                  </a:txBody>
+                </a:tc>
+                <a:tc>
+                  <a:txBody>
+                    <a:bodyPr/>
+                    <a:lstStyle/>
+                    <a:p>
+                      <a:pPr lvl="0" indent="0" marL="0">
+                        <a:buNone/>
+                      </a:pPr>
+                      <a:r>
+                        <a:rPr/>
+                        <a:t>0.685162</a:t>
+                      </a:r>
+                    </a:p>
+                  </a:txBody>
+                </a:tc>
+              </a:tr>
+              <a:tr h="0">
+                <a:tc>
+                  <a:txBody>
+                    <a:bodyPr/>
+                    <a:lstStyle/>
+                    <a:p>
+                      <a:pPr lvl="0" indent="0" marL="0">
+                        <a:buNone/>
+                      </a:pPr>
+                      <a:r>
+                        <a:rPr/>
+                        <a:t>899</a:t>
+                      </a:r>
+                    </a:p>
+                  </a:txBody>
+                </a:tc>
+                <a:tc>
+                  <a:txBody>
+                    <a:bodyPr/>
+                    <a:lstStyle/>
+                    <a:p>
+                      <a:pPr lvl="0" indent="0" marL="0">
+                        <a:buNone/>
+                      </a:pPr>
+                      <a:r>
+                        <a:rPr/>
+                        <a:t>sugarberry</a:t>
+                      </a:r>
+                    </a:p>
+                  </a:txBody>
+                </a:tc>
+                <a:tc>
+                  <a:txBody>
+                    <a:bodyPr/>
+                    <a:lstStyle/>
+                    <a:p>
+                      <a:pPr lvl="0" indent="0" marL="0">
+                        <a:buNone/>
+                      </a:pPr>
+                      <a:r>
+                        <a:rPr/>
+                        <a:t>10</a:t>
+                      </a:r>
+                    </a:p>
+                  </a:txBody>
+                </a:tc>
+                <a:tc>
+                  <a:txBody>
+                    <a:bodyPr/>
+                    <a:lstStyle/>
+                    <a:p>
+                      <a:pPr lvl="0" indent="0" marL="0">
+                        <a:buNone/>
+                      </a:pPr>
+                      <a:r>
+                        <a:rPr/>
+                        <a:t>40.091106</a:t>
+                      </a:r>
+                    </a:p>
+                  </a:txBody>
+                </a:tc>
+                <a:tc>
+                  <a:txBody>
+                    <a:bodyPr/>
+                    <a:lstStyle/>
+                    <a:p>
+                      <a:pPr lvl="0" indent="0" marL="0">
+                        <a:buNone/>
+                      </a:pPr>
+                      <a:r>
+                        <a:rPr/>
+                        <a:t>23.172083</a:t>
+                      </a:r>
+                    </a:p>
+                  </a:txBody>
+                </a:tc>
+                <a:tc>
+                  <a:txBody>
+                    <a:bodyPr/>
+                    <a:lstStyle/>
+                    <a:p>
+                      <a:pPr lvl="0" indent="0" marL="0">
+                        <a:buNone/>
+                      </a:pPr>
+                      <a:r>
+                        <a:rPr/>
+                        <a:t>0.677519</a:t>
                       </a:r>
                     </a:p>
                   </a:txBody>
@@ -5291,17 +4751,66 @@
             <p:ph type="title"/>
           </p:nvPr>
         </p:nvSpPr>
+        <p:spPr>
+          <a:xfrm>
+            <a:off x="457201" y="204787"/>
+            <a:ext cx="3008313" cy="871538"/>
+          </a:xfrm>
+        </p:spPr>
+        <p:txBody>
+          <a:bodyPr/>
+          <a:lstStyle/>
+          <a:p>
+            <a:pPr lvl="0" indent="0" marL="0">
+              <a:buNone/>
+            </a:pPr>
+            <a:r>
+              <a:rPr/>
+              <a:t>Technical Lead</a:t>
+            </a:r>
+          </a:p>
+        </p:txBody>
+      </p:sp>
+      <p:sp>
+        <p:nvSpPr>
+          <p:cNvPr id="4" name="Text Placeholder 3"/>
+          <p:cNvSpPr>
+            <a:spLocks noGrp="1"/>
+          </p:cNvSpPr>
+          <p:nvPr>
+            <p:ph idx="2" sz="half" type="body"/>
+          </p:nvPr>
+        </p:nvSpPr>
         <p:spPr/>
         <p:txBody>
           <a:bodyPr/>
           <a:lstStyle/>
           <a:p>
-            <a:pPr lvl="0" indent="0" marL="0">
-              <a:buNone/>
-            </a:pPr>
+            <a:pPr lvl="0"/>
             <a:r>
               <a:rPr/>
-              <a:t>Tree Species Name Data:</a:t>
+              <a:t>Split and filtering methods</a:t>
+            </a:r>
+          </a:p>
+          <a:p>
+            <a:pPr lvl="0"/>
+            <a:r>
+              <a:rPr/>
+              <a:t>Feature engineering (what worked and what didn’t)</a:t>
+            </a:r>
+          </a:p>
+          <a:p>
+            <a:pPr lvl="0"/>
+            <a:r>
+              <a:rPr/>
+              <a:t>Tuning k for the best model</a:t>
+            </a:r>
+          </a:p>
+          <a:p>
+            <a:pPr lvl="0"/>
+            <a:r>
+              <a:rPr/>
+              <a:t>The final “best” model and error # Tree Measurement Data:</a:t>
             </a:r>
           </a:p>
         </p:txBody>
@@ -5317,8 +4826,8 @@
           </p:nvPr>
         </p:nvGraphicFramePr>
         <p:xfrm>
-          <a:off x="457200" y="1193800"/>
-          <a:ext cx="8229600" cy="3390900"/>
+          <a:off x="3568700" y="203200"/>
+          <a:ext cx="5105400" cy="4381500"/>
         </p:xfrm>
         <a:graphic>
           <a:graphicData uri="http://schemas.openxmlformats.org/drawingml/2006/table">
@@ -5327,9 +4836,11 @@
                 <a:tableStyleId>{5C22544A-7EE6-4342-B048-85BDC9FD1C3A}</a:tableStyleId>
               </a:tblPr>
               <a:tblGrid>
-                <a:gridCol w="2743200"/>
-                <a:gridCol w="2743200"/>
-                <a:gridCol w="2743200"/>
+                <a:gridCol w="1016000"/>
+                <a:gridCol w="1016000"/>
+                <a:gridCol w="1016000"/>
+                <a:gridCol w="1016000"/>
+                <a:gridCol w="1016000"/>
               </a:tblGrid>
               <a:tr h="0">
                 <a:tc>
@@ -5368,7 +4879,39 @@
                       </a:pPr>
                       <a:r>
                         <a:rPr/>
-                        <a:t>COMMON_NAME</a:t>
+                        <a:t>DO_BH</a:t>
+                      </a:r>
+                    </a:p>
+                  </a:txBody>
+                  <a:tcPr/>
+                </a:tc>
+                <a:tc>
+                  <a:txBody>
+                    <a:bodyPr/>
+                    <a:lstStyle/>
+                    <a:p>
+                      <a:pPr lvl="0" indent="0" marL="0">
+                        <a:buNone/>
+                      </a:pPr>
+                      <a:r>
+                        <a:rPr/>
+                        <a:t>HT_TOT</a:t>
+                      </a:r>
+                    </a:p>
+                  </a:txBody>
+                  <a:tcPr/>
+                </a:tc>
+                <a:tc>
+                  <a:txBody>
+                    <a:bodyPr/>
+                    <a:lstStyle/>
+                    <a:p>
+                      <a:pPr lvl="0" indent="0" marL="0">
+                        <a:buNone/>
+                      </a:pPr>
+                      <a:r>
+                        <a:rPr/>
+                        <a:t>TT_DW_CRM</a:t>
                       </a:r>
                     </a:p>
                   </a:txBody>
@@ -5401,22 +4944,52 @@
                       </a:pPr>
                       <a:r>
                         <a:rPr/>
-                        <a:t>10</a:t>
-                      </a:r>
-                    </a:p>
-                  </a:txBody>
-                </a:tc>
-                <a:tc>
-                  <a:txBody>
-                    <a:bodyPr/>
-                    <a:lstStyle/>
-                    <a:p>
-                      <a:pPr lvl="0" indent="0" marL="0">
-                        <a:buNone/>
-                      </a:pPr>
-                      <a:r>
-                        <a:rPr/>
-                        <a:t>fir spp.</a:t>
+                        <a:t>12</a:t>
+                      </a:r>
+                    </a:p>
+                  </a:txBody>
+                </a:tc>
+                <a:tc>
+                  <a:txBody>
+                    <a:bodyPr/>
+                    <a:lstStyle/>
+                    <a:p>
+                      <a:pPr lvl="0" indent="0" marL="0">
+                        <a:buNone/>
+                      </a:pPr>
+                      <a:r>
+                        <a:rPr/>
+                        <a:t>7.5</a:t>
+                      </a:r>
+                    </a:p>
+                  </a:txBody>
+                </a:tc>
+                <a:tc>
+                  <a:txBody>
+                    <a:bodyPr/>
+                    <a:lstStyle/>
+                    <a:p>
+                      <a:pPr lvl="0" indent="0" marL="0">
+                        <a:buNone/>
+                      </a:pPr>
+                      <a:r>
+                        <a:rPr/>
+                        <a:t>45.2</a:t>
+                      </a:r>
+                    </a:p>
+                  </a:txBody>
+                </a:tc>
+                <a:tc>
+                  <a:txBody>
+                    <a:bodyPr/>
+                    <a:lstStyle/>
+                    <a:p>
+                      <a:pPr lvl="0" indent="0" marL="0">
+                        <a:buNone/>
+                      </a:pPr>
+                      <a:r>
+                        <a:rPr/>
+                        <a:t>178.86</a:t>
                       </a:r>
                     </a:p>
                   </a:txBody>
@@ -5448,22 +5021,52 @@
                       </a:pPr>
                       <a:r>
                         <a:rPr/>
-                        <a:t>11</a:t>
-                      </a:r>
-                    </a:p>
-                  </a:txBody>
-                </a:tc>
-                <a:tc>
-                  <a:txBody>
-                    <a:bodyPr/>
-                    <a:lstStyle/>
-                    <a:p>
-                      <a:pPr lvl="0" indent="0" marL="0">
-                        <a:buNone/>
-                      </a:pPr>
-                      <a:r>
-                        <a:rPr/>
-                        <a:t>Pacific silver fir</a:t>
+                        <a:t>12</a:t>
+                      </a:r>
+                    </a:p>
+                  </a:txBody>
+                </a:tc>
+                <a:tc>
+                  <a:txBody>
+                    <a:bodyPr/>
+                    <a:lstStyle/>
+                    <a:p>
+                      <a:pPr lvl="0" indent="0" marL="0">
+                        <a:buNone/>
+                      </a:pPr>
+                      <a:r>
+                        <a:rPr/>
+                        <a:t>9.3</a:t>
+                      </a:r>
+                    </a:p>
+                  </a:txBody>
+                </a:tc>
+                <a:tc>
+                  <a:txBody>
+                    <a:bodyPr/>
+                    <a:lstStyle/>
+                    <a:p>
+                      <a:pPr lvl="0" indent="0" marL="0">
+                        <a:buNone/>
+                      </a:pPr>
+                      <a:r>
+                        <a:rPr/>
+                        <a:t>62.7</a:t>
+                      </a:r>
+                    </a:p>
+                  </a:txBody>
+                </a:tc>
+                <a:tc>
+                  <a:txBody>
+                    <a:bodyPr/>
+                    <a:lstStyle/>
+                    <a:p>
+                      <a:pPr lvl="0" indent="0" marL="0">
+                        <a:buNone/>
+                      </a:pPr>
+                      <a:r>
+                        <a:rPr/>
+                        <a:t>323.46</a:t>
                       </a:r>
                     </a:p>
                   </a:txBody>
@@ -5510,7 +5113,37 @@
                       </a:pPr>
                       <a:r>
                         <a:rPr/>
-                        <a:t>balsam fir</a:t>
+                        <a:t>9.7</a:t>
+                      </a:r>
+                    </a:p>
+                  </a:txBody>
+                </a:tc>
+                <a:tc>
+                  <a:txBody>
+                    <a:bodyPr/>
+                    <a:lstStyle/>
+                    <a:p>
+                      <a:pPr lvl="0" indent="0" marL="0">
+                        <a:buNone/>
+                      </a:pPr>
+                      <a:r>
+                        <a:rPr/>
+                        <a:t>56.7</a:t>
+                      </a:r>
+                    </a:p>
+                  </a:txBody>
+                </a:tc>
+                <a:tc>
+                  <a:txBody>
+                    <a:bodyPr/>
+                    <a:lstStyle/>
+                    <a:p>
+                      <a:pPr lvl="0" indent="0" marL="0">
+                        <a:buNone/>
+                      </a:pPr>
+                      <a:r>
+                        <a:rPr/>
+                        <a:t>342.47</a:t>
                       </a:r>
                     </a:p>
                   </a:txBody>
@@ -5542,22 +5175,52 @@
                       </a:pPr>
                       <a:r>
                         <a:rPr/>
-                        <a:t>14</a:t>
-                      </a:r>
-                    </a:p>
-                  </a:txBody>
-                </a:tc>
-                <a:tc>
-                  <a:txBody>
-                    <a:bodyPr/>
-                    <a:lstStyle/>
-                    <a:p>
-                      <a:pPr lvl="0" indent="0" marL="0">
-                        <a:buNone/>
-                      </a:pPr>
-                      <a:r>
-                        <a:rPr/>
-                        <a:t>Santa Lucia or bristlecone fir</a:t>
+                        <a:t>12</a:t>
+                      </a:r>
+                    </a:p>
+                  </a:txBody>
+                </a:tc>
+                <a:tc>
+                  <a:txBody>
+                    <a:bodyPr/>
+                    <a:lstStyle/>
+                    <a:p>
+                      <a:pPr lvl="0" indent="0" marL="0">
+                        <a:buNone/>
+                      </a:pPr>
+                      <a:r>
+                        <a:rPr/>
+                        <a:t>11.4</a:t>
+                      </a:r>
+                    </a:p>
+                  </a:txBody>
+                </a:tc>
+                <a:tc>
+                  <a:txBody>
+                    <a:bodyPr/>
+                    <a:lstStyle/>
+                    <a:p>
+                      <a:pPr lvl="0" indent="0" marL="0">
+                        <a:buNone/>
+                      </a:pPr>
+                      <a:r>
+                        <a:rPr/>
+                        <a:t>66.1</a:t>
+                      </a:r>
+                    </a:p>
+                  </a:txBody>
+                </a:tc>
+                <a:tc>
+                  <a:txBody>
+                    <a:bodyPr/>
+                    <a:lstStyle/>
+                    <a:p>
+                      <a:pPr lvl="0" indent="0" marL="0">
+                        <a:buNone/>
+                      </a:pPr>
+                      <a:r>
+                        <a:rPr/>
+                        <a:t>499.35</a:t>
                       </a:r>
                     </a:p>
                   </a:txBody>
@@ -5589,22 +5252,52 @@
                       </a:pPr>
                       <a:r>
                         <a:rPr/>
-                        <a:t>15</a:t>
-                      </a:r>
-                    </a:p>
-                  </a:txBody>
-                </a:tc>
-                <a:tc>
-                  <a:txBody>
-                    <a:bodyPr/>
-                    <a:lstStyle/>
-                    <a:p>
-                      <a:pPr lvl="0" indent="0" marL="0">
-                        <a:buNone/>
-                      </a:pPr>
-                      <a:r>
-                        <a:rPr/>
-                        <a:t>white fir</a:t>
+                        <a:t>12</a:t>
+                      </a:r>
+                    </a:p>
+                  </a:txBody>
+                </a:tc>
+                <a:tc>
+                  <a:txBody>
+                    <a:bodyPr/>
+                    <a:lstStyle/>
+                    <a:p>
+                      <a:pPr lvl="0" indent="0" marL="0">
+                        <a:buNone/>
+                      </a:pPr>
+                      <a:r>
+                        <a:rPr/>
+                        <a:t>6.4</a:t>
+                      </a:r>
+                    </a:p>
+                  </a:txBody>
+                </a:tc>
+                <a:tc>
+                  <a:txBody>
+                    <a:bodyPr/>
+                    <a:lstStyle/>
+                    <a:p>
+                      <a:pPr lvl="0" indent="0" marL="0">
+                        <a:buNone/>
+                      </a:pPr>
+                      <a:r>
+                        <a:rPr/>
+                        <a:t>51.8</a:t>
+                      </a:r>
+                    </a:p>
+                  </a:txBody>
+                </a:tc>
+                <a:tc>
+                  <a:txBody>
+                    <a:bodyPr/>
+                    <a:lstStyle/>
+                    <a:p>
+                      <a:pPr lvl="0" indent="0" marL="0">
+                        <a:buNone/>
+                      </a:pPr>
+                      <a:r>
+                        <a:rPr/>
+                        <a:t>113.92</a:t>
                       </a:r>
                     </a:p>
                   </a:txBody>
@@ -5656,7 +5349,7 @@
             </a:pPr>
             <a:r>
               <a:rPr/>
-              <a:t>Combined Dataset (species mapped onto bigger dataset):</a:t>
+              <a:t>Tree Species Name Data:</a:t>
             </a:r>
           </a:p>
         </p:txBody>
@@ -5682,12 +5375,9 @@
                 <a:tableStyleId>{5C22544A-7EE6-4342-B048-85BDC9FD1C3A}</a:tableStyleId>
               </a:tblPr>
               <a:tblGrid>
-                <a:gridCol w="1371600"/>
-                <a:gridCol w="1371600"/>
-                <a:gridCol w="1371600"/>
-                <a:gridCol w="1371600"/>
-                <a:gridCol w="1371600"/>
-                <a:gridCol w="1371600"/>
+                <a:gridCol w="2743200"/>
+                <a:gridCol w="2743200"/>
+                <a:gridCol w="2743200"/>
               </a:tblGrid>
               <a:tr h="0">
                 <a:tc>
@@ -5726,54 +5416,6 @@
                       </a:pPr>
                       <a:r>
                         <a:rPr/>
-                        <a:t>DO_BH</a:t>
-                      </a:r>
-                    </a:p>
-                  </a:txBody>
-                  <a:tcPr/>
-                </a:tc>
-                <a:tc>
-                  <a:txBody>
-                    <a:bodyPr/>
-                    <a:lstStyle/>
-                    <a:p>
-                      <a:pPr lvl="0" indent="0" marL="0">
-                        <a:buNone/>
-                      </a:pPr>
-                      <a:r>
-                        <a:rPr/>
-                        <a:t>HT_TOT</a:t>
-                      </a:r>
-                    </a:p>
-                  </a:txBody>
-                  <a:tcPr/>
-                </a:tc>
-                <a:tc>
-                  <a:txBody>
-                    <a:bodyPr/>
-                    <a:lstStyle/>
-                    <a:p>
-                      <a:pPr lvl="0" indent="0" marL="0">
-                        <a:buNone/>
-                      </a:pPr>
-                      <a:r>
-                        <a:rPr/>
-                        <a:t>TT_DW_CRM</a:t>
-                      </a:r>
-                    </a:p>
-                  </a:txBody>
-                  <a:tcPr/>
-                </a:tc>
-                <a:tc>
-                  <a:txBody>
-                    <a:bodyPr/>
-                    <a:lstStyle/>
-                    <a:p>
-                      <a:pPr lvl="0" indent="0" marL="0">
-                        <a:buNone/>
-                      </a:pPr>
-                      <a:r>
-                        <a:rPr/>
                         <a:t>COMMON_NAME</a:t>
                       </a:r>
                     </a:p>
@@ -5807,67 +5449,22 @@
                       </a:pPr>
                       <a:r>
                         <a:rPr/>
-                        <a:t>12</a:t>
-                      </a:r>
-                    </a:p>
-                  </a:txBody>
-                </a:tc>
-                <a:tc>
-                  <a:txBody>
-                    <a:bodyPr/>
-                    <a:lstStyle/>
-                    <a:p>
-                      <a:pPr lvl="0" indent="0" marL="0">
-                        <a:buNone/>
-                      </a:pPr>
-                      <a:r>
-                        <a:rPr/>
-                        <a:t>7.5</a:t>
-                      </a:r>
-                    </a:p>
-                  </a:txBody>
-                </a:tc>
-                <a:tc>
-                  <a:txBody>
-                    <a:bodyPr/>
-                    <a:lstStyle/>
-                    <a:p>
-                      <a:pPr lvl="0" indent="0" marL="0">
-                        <a:buNone/>
-                      </a:pPr>
-                      <a:r>
-                        <a:rPr/>
-                        <a:t>45.2</a:t>
-                      </a:r>
-                    </a:p>
-                  </a:txBody>
-                </a:tc>
-                <a:tc>
-                  <a:txBody>
-                    <a:bodyPr/>
-                    <a:lstStyle/>
-                    <a:p>
-                      <a:pPr lvl="0" indent="0" marL="0">
-                        <a:buNone/>
-                      </a:pPr>
-                      <a:r>
-                        <a:rPr/>
-                        <a:t>178.86</a:t>
-                      </a:r>
-                    </a:p>
-                  </a:txBody>
-                </a:tc>
-                <a:tc>
-                  <a:txBody>
-                    <a:bodyPr/>
-                    <a:lstStyle/>
-                    <a:p>
-                      <a:pPr lvl="0" indent="0" marL="0">
-                        <a:buNone/>
-                      </a:pPr>
-                      <a:r>
-                        <a:rPr/>
-                        <a:t>balsam fir</a:t>
+                        <a:t>10</a:t>
+                      </a:r>
+                    </a:p>
+                  </a:txBody>
+                </a:tc>
+                <a:tc>
+                  <a:txBody>
+                    <a:bodyPr/>
+                    <a:lstStyle/>
+                    <a:p>
+                      <a:pPr lvl="0" indent="0" marL="0">
+                        <a:buNone/>
+                      </a:pPr>
+                      <a:r>
+                        <a:rPr/>
+                        <a:t>fir spp.</a:t>
                       </a:r>
                     </a:p>
                   </a:txBody>
@@ -5899,67 +5496,22 @@
                       </a:pPr>
                       <a:r>
                         <a:rPr/>
-                        <a:t>12</a:t>
-                      </a:r>
-                    </a:p>
-                  </a:txBody>
-                </a:tc>
-                <a:tc>
-                  <a:txBody>
-                    <a:bodyPr/>
-                    <a:lstStyle/>
-                    <a:p>
-                      <a:pPr lvl="0" indent="0" marL="0">
-                        <a:buNone/>
-                      </a:pPr>
-                      <a:r>
-                        <a:rPr/>
-                        <a:t>9.3</a:t>
-                      </a:r>
-                    </a:p>
-                  </a:txBody>
-                </a:tc>
-                <a:tc>
-                  <a:txBody>
-                    <a:bodyPr/>
-                    <a:lstStyle/>
-                    <a:p>
-                      <a:pPr lvl="0" indent="0" marL="0">
-                        <a:buNone/>
-                      </a:pPr>
-                      <a:r>
-                        <a:rPr/>
-                        <a:t>62.7</a:t>
-                      </a:r>
-                    </a:p>
-                  </a:txBody>
-                </a:tc>
-                <a:tc>
-                  <a:txBody>
-                    <a:bodyPr/>
-                    <a:lstStyle/>
-                    <a:p>
-                      <a:pPr lvl="0" indent="0" marL="0">
-                        <a:buNone/>
-                      </a:pPr>
-                      <a:r>
-                        <a:rPr/>
-                        <a:t>323.46</a:t>
-                      </a:r>
-                    </a:p>
-                  </a:txBody>
-                </a:tc>
-                <a:tc>
-                  <a:txBody>
-                    <a:bodyPr/>
-                    <a:lstStyle/>
-                    <a:p>
-                      <a:pPr lvl="0" indent="0" marL="0">
-                        <a:buNone/>
-                      </a:pPr>
-                      <a:r>
-                        <a:rPr/>
-                        <a:t>balsam fir</a:t>
+                        <a:t>11</a:t>
+                      </a:r>
+                    </a:p>
+                  </a:txBody>
+                </a:tc>
+                <a:tc>
+                  <a:txBody>
+                    <a:bodyPr/>
+                    <a:lstStyle/>
+                    <a:p>
+                      <a:pPr lvl="0" indent="0" marL="0">
+                        <a:buNone/>
+                      </a:pPr>
+                      <a:r>
+                        <a:rPr/>
+                        <a:t>Pacific silver fir</a:t>
                       </a:r>
                     </a:p>
                   </a:txBody>
@@ -6006,51 +5558,6 @@
                       </a:pPr>
                       <a:r>
                         <a:rPr/>
-                        <a:t>9.7</a:t>
-                      </a:r>
-                    </a:p>
-                  </a:txBody>
-                </a:tc>
-                <a:tc>
-                  <a:txBody>
-                    <a:bodyPr/>
-                    <a:lstStyle/>
-                    <a:p>
-                      <a:pPr lvl="0" indent="0" marL="0">
-                        <a:buNone/>
-                      </a:pPr>
-                      <a:r>
-                        <a:rPr/>
-                        <a:t>56.7</a:t>
-                      </a:r>
-                    </a:p>
-                  </a:txBody>
-                </a:tc>
-                <a:tc>
-                  <a:txBody>
-                    <a:bodyPr/>
-                    <a:lstStyle/>
-                    <a:p>
-                      <a:pPr lvl="0" indent="0" marL="0">
-                        <a:buNone/>
-                      </a:pPr>
-                      <a:r>
-                        <a:rPr/>
-                        <a:t>342.47</a:t>
-                      </a:r>
-                    </a:p>
-                  </a:txBody>
-                </a:tc>
-                <a:tc>
-                  <a:txBody>
-                    <a:bodyPr/>
-                    <a:lstStyle/>
-                    <a:p>
-                      <a:pPr lvl="0" indent="0" marL="0">
-                        <a:buNone/>
-                      </a:pPr>
-                      <a:r>
-                        <a:rPr/>
                         <a:t>balsam fir</a:t>
                       </a:r>
                     </a:p>
@@ -6083,67 +5590,22 @@
                       </a:pPr>
                       <a:r>
                         <a:rPr/>
-                        <a:t>12</a:t>
-                      </a:r>
-                    </a:p>
-                  </a:txBody>
-                </a:tc>
-                <a:tc>
-                  <a:txBody>
-                    <a:bodyPr/>
-                    <a:lstStyle/>
-                    <a:p>
-                      <a:pPr lvl="0" indent="0" marL="0">
-                        <a:buNone/>
-                      </a:pPr>
-                      <a:r>
-                        <a:rPr/>
-                        <a:t>11.4</a:t>
-                      </a:r>
-                    </a:p>
-                  </a:txBody>
-                </a:tc>
-                <a:tc>
-                  <a:txBody>
-                    <a:bodyPr/>
-                    <a:lstStyle/>
-                    <a:p>
-                      <a:pPr lvl="0" indent="0" marL="0">
-                        <a:buNone/>
-                      </a:pPr>
-                      <a:r>
-                        <a:rPr/>
-                        <a:t>66.1</a:t>
-                      </a:r>
-                    </a:p>
-                  </a:txBody>
-                </a:tc>
-                <a:tc>
-                  <a:txBody>
-                    <a:bodyPr/>
-                    <a:lstStyle/>
-                    <a:p>
-                      <a:pPr lvl="0" indent="0" marL="0">
-                        <a:buNone/>
-                      </a:pPr>
-                      <a:r>
-                        <a:rPr/>
-                        <a:t>499.35</a:t>
-                      </a:r>
-                    </a:p>
-                  </a:txBody>
-                </a:tc>
-                <a:tc>
-                  <a:txBody>
-                    <a:bodyPr/>
-                    <a:lstStyle/>
-                    <a:p>
-                      <a:pPr lvl="0" indent="0" marL="0">
-                        <a:buNone/>
-                      </a:pPr>
-                      <a:r>
-                        <a:rPr/>
-                        <a:t>balsam fir</a:t>
+                        <a:t>14</a:t>
+                      </a:r>
+                    </a:p>
+                  </a:txBody>
+                </a:tc>
+                <a:tc>
+                  <a:txBody>
+                    <a:bodyPr/>
+                    <a:lstStyle/>
+                    <a:p>
+                      <a:pPr lvl="0" indent="0" marL="0">
+                        <a:buNone/>
+                      </a:pPr>
+                      <a:r>
+                        <a:rPr/>
+                        <a:t>Santa Lucia or bristlecone fir</a:t>
                       </a:r>
                     </a:p>
                   </a:txBody>
@@ -6175,67 +5637,22 @@
                       </a:pPr>
                       <a:r>
                         <a:rPr/>
-                        <a:t>12</a:t>
-                      </a:r>
-                    </a:p>
-                  </a:txBody>
-                </a:tc>
-                <a:tc>
-                  <a:txBody>
-                    <a:bodyPr/>
-                    <a:lstStyle/>
-                    <a:p>
-                      <a:pPr lvl="0" indent="0" marL="0">
-                        <a:buNone/>
-                      </a:pPr>
-                      <a:r>
-                        <a:rPr/>
-                        <a:t>6.4</a:t>
-                      </a:r>
-                    </a:p>
-                  </a:txBody>
-                </a:tc>
-                <a:tc>
-                  <a:txBody>
-                    <a:bodyPr/>
-                    <a:lstStyle/>
-                    <a:p>
-                      <a:pPr lvl="0" indent="0" marL="0">
-                        <a:buNone/>
-                      </a:pPr>
-                      <a:r>
-                        <a:rPr/>
-                        <a:t>51.8</a:t>
-                      </a:r>
-                    </a:p>
-                  </a:txBody>
-                </a:tc>
-                <a:tc>
-                  <a:txBody>
-                    <a:bodyPr/>
-                    <a:lstStyle/>
-                    <a:p>
-                      <a:pPr lvl="0" indent="0" marL="0">
-                        <a:buNone/>
-                      </a:pPr>
-                      <a:r>
-                        <a:rPr/>
-                        <a:t>113.92</a:t>
-                      </a:r>
-                    </a:p>
-                  </a:txBody>
-                </a:tc>
-                <a:tc>
-                  <a:txBody>
-                    <a:bodyPr/>
-                    <a:lstStyle/>
-                    <a:p>
-                      <a:pPr lvl="0" indent="0" marL="0">
-                        <a:buNone/>
-                      </a:pPr>
-                      <a:r>
-                        <a:rPr/>
-                        <a:t>balsam fir</a:t>
+                        <a:t>15</a:t>
+                      </a:r>
+                    </a:p>
+                  </a:txBody>
+                </a:tc>
+                <a:tc>
+                  <a:txBody>
+                    <a:bodyPr/>
+                    <a:lstStyle/>
+                    <a:p>
+                      <a:pPr lvl="0" indent="0" marL="0">
+                        <a:buNone/>
+                      </a:pPr>
+                      <a:r>
+                        <a:rPr/>
+                        <a:t>white fir</a:t>
                       </a:r>
                     </a:p>
                   </a:txBody>
@@ -6287,7 +5704,7 @@
             </a:pPr>
             <a:r>
               <a:rPr/>
-              <a:t>Filtered data</a:t>
+              <a:t>Combined Dataset (species mapped onto bigger dataset):</a:t>
             </a:r>
           </a:p>
         </p:txBody>
@@ -6882,6 +6299,637 @@
 </file>
 
 <file path=ppt/slides/slide18.xml><?xml version="1.0" encoding="utf-8"?>
+<p:sld xmlns:a="http://schemas.openxmlformats.org/drawingml/2006/main" xmlns:r="http://schemas.openxmlformats.org/officeDocument/2006/relationships" xmlns:p="http://schemas.openxmlformats.org/presentationml/2006/main">
+  <p:cSld>
+    <p:spTree>
+      <p:nvGrpSpPr>
+        <p:cNvPr id="1" name=""/>
+        <p:cNvGrpSpPr/>
+        <p:nvPr/>
+      </p:nvGrpSpPr>
+      <p:grpSpPr>
+        <a:xfrm>
+          <a:off x="0" y="0"/>
+          <a:ext cx="0" cy="0"/>
+          <a:chOff x="0" y="0"/>
+          <a:chExt cx="0" cy="0"/>
+        </a:xfrm>
+      </p:grpSpPr>
+      <p:sp>
+        <p:nvSpPr>
+          <p:cNvPr id="2" name="Title 1"/>
+          <p:cNvSpPr>
+            <a:spLocks noGrp="1"/>
+          </p:cNvSpPr>
+          <p:nvPr>
+            <p:ph type="title"/>
+          </p:nvPr>
+        </p:nvSpPr>
+        <p:spPr/>
+        <p:txBody>
+          <a:bodyPr/>
+          <a:lstStyle/>
+          <a:p>
+            <a:pPr lvl="0" indent="0" marL="0">
+              <a:buNone/>
+            </a:pPr>
+            <a:r>
+              <a:rPr/>
+              <a:t>Filtered data</a:t>
+            </a:r>
+          </a:p>
+        </p:txBody>
+      </p:sp>
+      <p:graphicFrame>
+        <p:nvGraphicFramePr>
+          <p:cNvPr id="6" name="Content Placeholder 5"/>
+          <p:cNvGraphicFramePr>
+            <a:graphicFrameLocks noGrp="1"/>
+          </p:cNvGraphicFramePr>
+          <p:nvPr>
+            <p:ph idx="1"/>
+          </p:nvPr>
+        </p:nvGraphicFramePr>
+        <p:xfrm>
+          <a:off x="457200" y="1193800"/>
+          <a:ext cx="8229600" cy="3390900"/>
+        </p:xfrm>
+        <a:graphic>
+          <a:graphicData uri="http://schemas.openxmlformats.org/drawingml/2006/table">
+            <a:tbl>
+              <a:tblPr firstRow="1" bandRow="1">
+                <a:tableStyleId>{5C22544A-7EE6-4342-B048-85BDC9FD1C3A}</a:tableStyleId>
+              </a:tblPr>
+              <a:tblGrid>
+                <a:gridCol w="1371600"/>
+                <a:gridCol w="1371600"/>
+                <a:gridCol w="1371600"/>
+                <a:gridCol w="1371600"/>
+                <a:gridCol w="1371600"/>
+                <a:gridCol w="1371600"/>
+              </a:tblGrid>
+              <a:tr h="0">
+                <a:tc>
+                  <a:txBody>
+                    <a:bodyPr/>
+                    <a:lstStyle/>
+                    <a:p>
+                      <a:endParaRPr/>
+                    </a:p>
+                  </a:txBody>
+                  <a:tcPr/>
+                </a:tc>
+                <a:tc>
+                  <a:txBody>
+                    <a:bodyPr/>
+                    <a:lstStyle/>
+                    <a:p>
+                      <a:pPr lvl="0" indent="0" marL="0">
+                        <a:buNone/>
+                      </a:pPr>
+                      <a:r>
+                        <a:rPr/>
+                        <a:t>SPCD</a:t>
+                      </a:r>
+                    </a:p>
+                  </a:txBody>
+                  <a:tcPr/>
+                </a:tc>
+                <a:tc>
+                  <a:txBody>
+                    <a:bodyPr/>
+                    <a:lstStyle/>
+                    <a:p>
+                      <a:pPr lvl="0" indent="0" marL="0">
+                        <a:buNone/>
+                      </a:pPr>
+                      <a:r>
+                        <a:rPr/>
+                        <a:t>DO_BH</a:t>
+                      </a:r>
+                    </a:p>
+                  </a:txBody>
+                  <a:tcPr/>
+                </a:tc>
+                <a:tc>
+                  <a:txBody>
+                    <a:bodyPr/>
+                    <a:lstStyle/>
+                    <a:p>
+                      <a:pPr lvl="0" indent="0" marL="0">
+                        <a:buNone/>
+                      </a:pPr>
+                      <a:r>
+                        <a:rPr/>
+                        <a:t>HT_TOT</a:t>
+                      </a:r>
+                    </a:p>
+                  </a:txBody>
+                  <a:tcPr/>
+                </a:tc>
+                <a:tc>
+                  <a:txBody>
+                    <a:bodyPr/>
+                    <a:lstStyle/>
+                    <a:p>
+                      <a:pPr lvl="0" indent="0" marL="0">
+                        <a:buNone/>
+                      </a:pPr>
+                      <a:r>
+                        <a:rPr/>
+                        <a:t>TT_DW_CRM</a:t>
+                      </a:r>
+                    </a:p>
+                  </a:txBody>
+                  <a:tcPr/>
+                </a:tc>
+                <a:tc>
+                  <a:txBody>
+                    <a:bodyPr/>
+                    <a:lstStyle/>
+                    <a:p>
+                      <a:pPr lvl="0" indent="0" marL="0">
+                        <a:buNone/>
+                      </a:pPr>
+                      <a:r>
+                        <a:rPr/>
+                        <a:t>COMMON_NAME</a:t>
+                      </a:r>
+                    </a:p>
+                  </a:txBody>
+                  <a:tcPr/>
+                </a:tc>
+              </a:tr>
+              <a:tr h="0">
+                <a:tc>
+                  <a:txBody>
+                    <a:bodyPr/>
+                    <a:lstStyle/>
+                    <a:p>
+                      <a:pPr lvl="0" indent="0" marL="0">
+                        <a:buNone/>
+                      </a:pPr>
+                      <a:r>
+                        <a:rPr/>
+                        <a:t>0</a:t>
+                      </a:r>
+                    </a:p>
+                  </a:txBody>
+                </a:tc>
+                <a:tc>
+                  <a:txBody>
+                    <a:bodyPr/>
+                    <a:lstStyle/>
+                    <a:p>
+                      <a:pPr lvl="0" indent="0" marL="0">
+                        <a:buNone/>
+                      </a:pPr>
+                      <a:r>
+                        <a:rPr/>
+                        <a:t>12</a:t>
+                      </a:r>
+                    </a:p>
+                  </a:txBody>
+                </a:tc>
+                <a:tc>
+                  <a:txBody>
+                    <a:bodyPr/>
+                    <a:lstStyle/>
+                    <a:p>
+                      <a:pPr lvl="0" indent="0" marL="0">
+                        <a:buNone/>
+                      </a:pPr>
+                      <a:r>
+                        <a:rPr/>
+                        <a:t>7.5</a:t>
+                      </a:r>
+                    </a:p>
+                  </a:txBody>
+                </a:tc>
+                <a:tc>
+                  <a:txBody>
+                    <a:bodyPr/>
+                    <a:lstStyle/>
+                    <a:p>
+                      <a:pPr lvl="0" indent="0" marL="0">
+                        <a:buNone/>
+                      </a:pPr>
+                      <a:r>
+                        <a:rPr/>
+                        <a:t>45.2</a:t>
+                      </a:r>
+                    </a:p>
+                  </a:txBody>
+                </a:tc>
+                <a:tc>
+                  <a:txBody>
+                    <a:bodyPr/>
+                    <a:lstStyle/>
+                    <a:p>
+                      <a:pPr lvl="0" indent="0" marL="0">
+                        <a:buNone/>
+                      </a:pPr>
+                      <a:r>
+                        <a:rPr/>
+                        <a:t>178.86</a:t>
+                      </a:r>
+                    </a:p>
+                  </a:txBody>
+                </a:tc>
+                <a:tc>
+                  <a:txBody>
+                    <a:bodyPr/>
+                    <a:lstStyle/>
+                    <a:p>
+                      <a:pPr lvl="0" indent="0" marL="0">
+                        <a:buNone/>
+                      </a:pPr>
+                      <a:r>
+                        <a:rPr/>
+                        <a:t>balsam fir</a:t>
+                      </a:r>
+                    </a:p>
+                  </a:txBody>
+                </a:tc>
+              </a:tr>
+              <a:tr h="0">
+                <a:tc>
+                  <a:txBody>
+                    <a:bodyPr/>
+                    <a:lstStyle/>
+                    <a:p>
+                      <a:pPr lvl="0" indent="0" marL="0">
+                        <a:buNone/>
+                      </a:pPr>
+                      <a:r>
+                        <a:rPr/>
+                        <a:t>1</a:t>
+                      </a:r>
+                    </a:p>
+                  </a:txBody>
+                </a:tc>
+                <a:tc>
+                  <a:txBody>
+                    <a:bodyPr/>
+                    <a:lstStyle/>
+                    <a:p>
+                      <a:pPr lvl="0" indent="0" marL="0">
+                        <a:buNone/>
+                      </a:pPr>
+                      <a:r>
+                        <a:rPr/>
+                        <a:t>12</a:t>
+                      </a:r>
+                    </a:p>
+                  </a:txBody>
+                </a:tc>
+                <a:tc>
+                  <a:txBody>
+                    <a:bodyPr/>
+                    <a:lstStyle/>
+                    <a:p>
+                      <a:pPr lvl="0" indent="0" marL="0">
+                        <a:buNone/>
+                      </a:pPr>
+                      <a:r>
+                        <a:rPr/>
+                        <a:t>9.3</a:t>
+                      </a:r>
+                    </a:p>
+                  </a:txBody>
+                </a:tc>
+                <a:tc>
+                  <a:txBody>
+                    <a:bodyPr/>
+                    <a:lstStyle/>
+                    <a:p>
+                      <a:pPr lvl="0" indent="0" marL="0">
+                        <a:buNone/>
+                      </a:pPr>
+                      <a:r>
+                        <a:rPr/>
+                        <a:t>62.7</a:t>
+                      </a:r>
+                    </a:p>
+                  </a:txBody>
+                </a:tc>
+                <a:tc>
+                  <a:txBody>
+                    <a:bodyPr/>
+                    <a:lstStyle/>
+                    <a:p>
+                      <a:pPr lvl="0" indent="0" marL="0">
+                        <a:buNone/>
+                      </a:pPr>
+                      <a:r>
+                        <a:rPr/>
+                        <a:t>323.46</a:t>
+                      </a:r>
+                    </a:p>
+                  </a:txBody>
+                </a:tc>
+                <a:tc>
+                  <a:txBody>
+                    <a:bodyPr/>
+                    <a:lstStyle/>
+                    <a:p>
+                      <a:pPr lvl="0" indent="0" marL="0">
+                        <a:buNone/>
+                      </a:pPr>
+                      <a:r>
+                        <a:rPr/>
+                        <a:t>balsam fir</a:t>
+                      </a:r>
+                    </a:p>
+                  </a:txBody>
+                </a:tc>
+              </a:tr>
+              <a:tr h="0">
+                <a:tc>
+                  <a:txBody>
+                    <a:bodyPr/>
+                    <a:lstStyle/>
+                    <a:p>
+                      <a:pPr lvl="0" indent="0" marL="0">
+                        <a:buNone/>
+                      </a:pPr>
+                      <a:r>
+                        <a:rPr/>
+                        <a:t>2</a:t>
+                      </a:r>
+                    </a:p>
+                  </a:txBody>
+                </a:tc>
+                <a:tc>
+                  <a:txBody>
+                    <a:bodyPr/>
+                    <a:lstStyle/>
+                    <a:p>
+                      <a:pPr lvl="0" indent="0" marL="0">
+                        <a:buNone/>
+                      </a:pPr>
+                      <a:r>
+                        <a:rPr/>
+                        <a:t>12</a:t>
+                      </a:r>
+                    </a:p>
+                  </a:txBody>
+                </a:tc>
+                <a:tc>
+                  <a:txBody>
+                    <a:bodyPr/>
+                    <a:lstStyle/>
+                    <a:p>
+                      <a:pPr lvl="0" indent="0" marL="0">
+                        <a:buNone/>
+                      </a:pPr>
+                      <a:r>
+                        <a:rPr/>
+                        <a:t>9.7</a:t>
+                      </a:r>
+                    </a:p>
+                  </a:txBody>
+                </a:tc>
+                <a:tc>
+                  <a:txBody>
+                    <a:bodyPr/>
+                    <a:lstStyle/>
+                    <a:p>
+                      <a:pPr lvl="0" indent="0" marL="0">
+                        <a:buNone/>
+                      </a:pPr>
+                      <a:r>
+                        <a:rPr/>
+                        <a:t>56.7</a:t>
+                      </a:r>
+                    </a:p>
+                  </a:txBody>
+                </a:tc>
+                <a:tc>
+                  <a:txBody>
+                    <a:bodyPr/>
+                    <a:lstStyle/>
+                    <a:p>
+                      <a:pPr lvl="0" indent="0" marL="0">
+                        <a:buNone/>
+                      </a:pPr>
+                      <a:r>
+                        <a:rPr/>
+                        <a:t>342.47</a:t>
+                      </a:r>
+                    </a:p>
+                  </a:txBody>
+                </a:tc>
+                <a:tc>
+                  <a:txBody>
+                    <a:bodyPr/>
+                    <a:lstStyle/>
+                    <a:p>
+                      <a:pPr lvl="0" indent="0" marL="0">
+                        <a:buNone/>
+                      </a:pPr>
+                      <a:r>
+                        <a:rPr/>
+                        <a:t>balsam fir</a:t>
+                      </a:r>
+                    </a:p>
+                  </a:txBody>
+                </a:tc>
+              </a:tr>
+              <a:tr h="0">
+                <a:tc>
+                  <a:txBody>
+                    <a:bodyPr/>
+                    <a:lstStyle/>
+                    <a:p>
+                      <a:pPr lvl="0" indent="0" marL="0">
+                        <a:buNone/>
+                      </a:pPr>
+                      <a:r>
+                        <a:rPr/>
+                        <a:t>3</a:t>
+                      </a:r>
+                    </a:p>
+                  </a:txBody>
+                </a:tc>
+                <a:tc>
+                  <a:txBody>
+                    <a:bodyPr/>
+                    <a:lstStyle/>
+                    <a:p>
+                      <a:pPr lvl="0" indent="0" marL="0">
+                        <a:buNone/>
+                      </a:pPr>
+                      <a:r>
+                        <a:rPr/>
+                        <a:t>12</a:t>
+                      </a:r>
+                    </a:p>
+                  </a:txBody>
+                </a:tc>
+                <a:tc>
+                  <a:txBody>
+                    <a:bodyPr/>
+                    <a:lstStyle/>
+                    <a:p>
+                      <a:pPr lvl="0" indent="0" marL="0">
+                        <a:buNone/>
+                      </a:pPr>
+                      <a:r>
+                        <a:rPr/>
+                        <a:t>11.4</a:t>
+                      </a:r>
+                    </a:p>
+                  </a:txBody>
+                </a:tc>
+                <a:tc>
+                  <a:txBody>
+                    <a:bodyPr/>
+                    <a:lstStyle/>
+                    <a:p>
+                      <a:pPr lvl="0" indent="0" marL="0">
+                        <a:buNone/>
+                      </a:pPr>
+                      <a:r>
+                        <a:rPr/>
+                        <a:t>66.1</a:t>
+                      </a:r>
+                    </a:p>
+                  </a:txBody>
+                </a:tc>
+                <a:tc>
+                  <a:txBody>
+                    <a:bodyPr/>
+                    <a:lstStyle/>
+                    <a:p>
+                      <a:pPr lvl="0" indent="0" marL="0">
+                        <a:buNone/>
+                      </a:pPr>
+                      <a:r>
+                        <a:rPr/>
+                        <a:t>499.35</a:t>
+                      </a:r>
+                    </a:p>
+                  </a:txBody>
+                </a:tc>
+                <a:tc>
+                  <a:txBody>
+                    <a:bodyPr/>
+                    <a:lstStyle/>
+                    <a:p>
+                      <a:pPr lvl="0" indent="0" marL="0">
+                        <a:buNone/>
+                      </a:pPr>
+                      <a:r>
+                        <a:rPr/>
+                        <a:t>balsam fir</a:t>
+                      </a:r>
+                    </a:p>
+                  </a:txBody>
+                </a:tc>
+              </a:tr>
+              <a:tr h="0">
+                <a:tc>
+                  <a:txBody>
+                    <a:bodyPr/>
+                    <a:lstStyle/>
+                    <a:p>
+                      <a:pPr lvl="0" indent="0" marL="0">
+                        <a:buNone/>
+                      </a:pPr>
+                      <a:r>
+                        <a:rPr/>
+                        <a:t>4</a:t>
+                      </a:r>
+                    </a:p>
+                  </a:txBody>
+                </a:tc>
+                <a:tc>
+                  <a:txBody>
+                    <a:bodyPr/>
+                    <a:lstStyle/>
+                    <a:p>
+                      <a:pPr lvl="0" indent="0" marL="0">
+                        <a:buNone/>
+                      </a:pPr>
+                      <a:r>
+                        <a:rPr/>
+                        <a:t>12</a:t>
+                      </a:r>
+                    </a:p>
+                  </a:txBody>
+                </a:tc>
+                <a:tc>
+                  <a:txBody>
+                    <a:bodyPr/>
+                    <a:lstStyle/>
+                    <a:p>
+                      <a:pPr lvl="0" indent="0" marL="0">
+                        <a:buNone/>
+                      </a:pPr>
+                      <a:r>
+                        <a:rPr/>
+                        <a:t>6.4</a:t>
+                      </a:r>
+                    </a:p>
+                  </a:txBody>
+                </a:tc>
+                <a:tc>
+                  <a:txBody>
+                    <a:bodyPr/>
+                    <a:lstStyle/>
+                    <a:p>
+                      <a:pPr lvl="0" indent="0" marL="0">
+                        <a:buNone/>
+                      </a:pPr>
+                      <a:r>
+                        <a:rPr/>
+                        <a:t>51.8</a:t>
+                      </a:r>
+                    </a:p>
+                  </a:txBody>
+                </a:tc>
+                <a:tc>
+                  <a:txBody>
+                    <a:bodyPr/>
+                    <a:lstStyle/>
+                    <a:p>
+                      <a:pPr lvl="0" indent="0" marL="0">
+                        <a:buNone/>
+                      </a:pPr>
+                      <a:r>
+                        <a:rPr/>
+                        <a:t>113.92</a:t>
+                      </a:r>
+                    </a:p>
+                  </a:txBody>
+                </a:tc>
+                <a:tc>
+                  <a:txBody>
+                    <a:bodyPr/>
+                    <a:lstStyle/>
+                    <a:p>
+                      <a:pPr lvl="0" indent="0" marL="0">
+                        <a:buNone/>
+                      </a:pPr>
+                      <a:r>
+                        <a:rPr/>
+                        <a:t>balsam fir</a:t>
+                      </a:r>
+                    </a:p>
+                  </a:txBody>
+                </a:tc>
+              </a:tr>
+            </a:tbl>
+          </a:graphicData>
+        </a:graphic>
+      </p:graphicFrame>
+    </p:spTree>
+  </p:cSld>
+</p:sld>
+</file>
+
+<file path=ppt/slides/slide19.xml><?xml version="1.0" encoding="utf-8"?>
 <p:sld xmlns:a="http://schemas.openxmlformats.org/drawingml/2006/main" xmlns:r="http://schemas.openxmlformats.org/officeDocument/2006/relationships" xmlns:p="http://schemas.openxmlformats.org/presentationml/2006/main">
   <p:cSld>
     <p:spTree>

--- a/Project-3/presentation.pptx
+++ b/Project-3/presentation.pptx
@@ -25,6 +25,7 @@
     <p:sldId id="273" r:id="rId19"/>
     <p:sldId id="274" r:id="rId20"/>
     <p:sldId id="275" r:id="rId21"/>
+    <p:sldId id="276" r:id="rId22"/>
   </p:sldIdLst>
   <p:sldSz cx="9144000" cy="5143500" type="screen16x9"/>
   <p:notesSz cx="6858000" cy="9144000"/>
@@ -3460,7 +3461,7 @@
             </a:pPr>
             <a:r>
               <a:rPr/>
-              <a:t>Performance Metric</a:t>
+              <a:t>Consultation</a:t>
             </a:r>
           </a:p>
         </p:txBody>
@@ -3480,12 +3481,17 @@
           <a:bodyPr/>
           <a:lstStyle/>
           <a:p>
-            <a:pPr lvl="0" indent="0" marL="0">
-              <a:buNone/>
-            </a:pPr>
+            <a:pPr lvl="0"/>
             <a:r>
               <a:rPr/>
-              <a:t>The Performance metric we choose is Root Mean Square Logarithmic Error(RMSLE), because when we were looking at the dataset of the biomass of different kinds of tree species, we saw that some species have more data than other species so the assume that the data is skewed</a:t>
+              <a:t>We choose kNN regression over linear regression because when looking at the graphs Dean made, we saw that the tree diameter/height vs. biomass graphs all have exponential growth.</a:t>
+            </a:r>
+          </a:p>
+          <a:p>
+            <a:pPr lvl="0"/>
+            <a:r>
+              <a:rPr/>
+              <a:t>When relations between biomass and trees’ diameter and height are complex and nonlinear, data is abundant, and the model needs to be adaptive without making major changes in the model. kNN excels in capturing patterns and irregular patterns.</a:t>
             </a:r>
           </a:p>
         </p:txBody>
@@ -3532,1147 +3538,45 @@
             </a:pPr>
             <a:r>
               <a:rPr/>
-              <a:t>Model</a:t>
+              <a:t>Performance Metric</a:t>
             </a:r>
           </a:p>
         </p:txBody>
       </p:sp>
-      <p:graphicFrame>
-        <p:nvGraphicFramePr>
-          <p:cNvPr id="6" name="Content Placeholder 5"/>
-          <p:cNvGraphicFramePr>
-            <a:graphicFrameLocks noGrp="1"/>
-          </p:cNvGraphicFramePr>
+      <p:sp>
+        <p:nvSpPr>
+          <p:cNvPr id="3" name="Content Placeholder 2"/>
+          <p:cNvSpPr>
+            <a:spLocks noGrp="1"/>
+          </p:cNvSpPr>
           <p:nvPr>
             <p:ph idx="1"/>
           </p:nvPr>
-        </p:nvGraphicFramePr>
-        <p:xfrm>
-          <a:off x="457200" y="1193800"/>
-          <a:ext cx="8229600" cy="3390900"/>
-        </p:xfrm>
-        <a:graphic>
-          <a:graphicData uri="http://schemas.openxmlformats.org/drawingml/2006/table">
-            <a:tbl>
-              <a:tblPr firstRow="1" bandRow="1">
-                <a:tableStyleId>{5C22544A-7EE6-4342-B048-85BDC9FD1C3A}</a:tableStyleId>
-              </a:tblPr>
-              <a:tblGrid>
-                <a:gridCol w="1371600"/>
-                <a:gridCol w="1371600"/>
-                <a:gridCol w="1371600"/>
-                <a:gridCol w="1371600"/>
-                <a:gridCol w="1371600"/>
-                <a:gridCol w="1371600"/>
-              </a:tblGrid>
-              <a:tr h="0">
-                <a:tc>
-                  <a:txBody>
-                    <a:bodyPr/>
-                    <a:lstStyle/>
-                    <a:p>
-                      <a:endParaRPr/>
-                    </a:p>
-                  </a:txBody>
-                  <a:tcPr/>
-                </a:tc>
-                <a:tc>
-                  <a:txBody>
-                    <a:bodyPr/>
-                    <a:lstStyle/>
-                    <a:p>
-                      <a:pPr lvl="0" indent="0" marL="0">
-                        <a:buNone/>
-                      </a:pPr>
-                      <a:r>
-                        <a:rPr/>
-                        <a:t>Species</a:t>
-                      </a:r>
-                    </a:p>
-                  </a:txBody>
-                  <a:tcPr/>
-                </a:tc>
-                <a:tc>
-                  <a:txBody>
-                    <a:bodyPr/>
-                    <a:lstStyle/>
-                    <a:p>
-                      <a:pPr lvl="0" indent="0" marL="0">
-                        <a:buNone/>
-                      </a:pPr>
-                      <a:r>
-                        <a:rPr/>
-                        <a:t>k</a:t>
-                      </a:r>
-                    </a:p>
-                  </a:txBody>
-                  <a:tcPr/>
-                </a:tc>
-                <a:tc>
-                  <a:txBody>
-                    <a:bodyPr/>
-                    <a:lstStyle/>
-                    <a:p>
-                      <a:pPr lvl="0" indent="0" marL="0">
-                        <a:buNone/>
-                      </a:pPr>
-                      <a:r>
-                        <a:rPr/>
-                        <a:t>RMSE</a:t>
-                      </a:r>
-                    </a:p>
-                  </a:txBody>
-                  <a:tcPr/>
-                </a:tc>
-                <a:tc>
-                  <a:txBody>
-                    <a:bodyPr/>
-                    <a:lstStyle/>
-                    <a:p>
-                      <a:pPr lvl="0" indent="0" marL="0">
-                        <a:buNone/>
-                      </a:pPr>
-                      <a:r>
-                        <a:rPr/>
-                        <a:t>MAE</a:t>
-                      </a:r>
-                    </a:p>
-                  </a:txBody>
-                  <a:tcPr/>
-                </a:tc>
-                <a:tc>
-                  <a:txBody>
-                    <a:bodyPr/>
-                    <a:lstStyle/>
-                    <a:p>
-                      <a:pPr lvl="0" indent="0" marL="0">
-                        <a:buNone/>
-                      </a:pPr>
-                      <a:r>
-                        <a:rPr/>
-                        <a:t>RMSLE</a:t>
-                      </a:r>
-                    </a:p>
-                  </a:txBody>
-                  <a:tcPr/>
-                </a:tc>
-              </a:tr>
-              <a:tr h="0">
-                <a:tc>
-                  <a:txBody>
-                    <a:bodyPr/>
-                    <a:lstStyle/>
-                    <a:p>
-                      <a:pPr lvl="0" indent="0" marL="0">
-                        <a:buNone/>
-                      </a:pPr>
-                      <a:r>
-                        <a:rPr/>
-                        <a:t>0</a:t>
-                      </a:r>
-                    </a:p>
-                  </a:txBody>
-                </a:tc>
-                <a:tc>
-                  <a:txBody>
-                    <a:bodyPr/>
-                    <a:lstStyle/>
-                    <a:p>
-                      <a:pPr lvl="0" indent="0" marL="0">
-                        <a:buNone/>
-                      </a:pPr>
-                      <a:r>
-                        <a:rPr/>
-                        <a:t>balsam fir</a:t>
-                      </a:r>
-                    </a:p>
-                  </a:txBody>
-                </a:tc>
-                <a:tc>
-                  <a:txBody>
-                    <a:bodyPr/>
-                    <a:lstStyle/>
-                    <a:p>
-                      <a:pPr lvl="0" indent="0" marL="0">
-                        <a:buNone/>
-                      </a:pPr>
-                      <a:r>
-                        <a:rPr/>
-                        <a:t>2</a:t>
-                      </a:r>
-                    </a:p>
-                  </a:txBody>
-                </a:tc>
-                <a:tc>
-                  <a:txBody>
-                    <a:bodyPr/>
-                    <a:lstStyle/>
-                    <a:p>
-                      <a:pPr lvl="0" indent="0" marL="0">
-                        <a:buNone/>
-                      </a:pPr>
-                      <a:r>
-                        <a:rPr/>
-                        <a:t>125.827396</a:t>
-                      </a:r>
-                    </a:p>
-                  </a:txBody>
-                </a:tc>
-                <a:tc>
-                  <a:txBody>
-                    <a:bodyPr/>
-                    <a:lstStyle/>
-                    <a:p>
-                      <a:pPr lvl="0" indent="0" marL="0">
-                        <a:buNone/>
-                      </a:pPr>
-                      <a:r>
-                        <a:rPr/>
-                        <a:t>34.820565</a:t>
-                      </a:r>
-                    </a:p>
-                  </a:txBody>
-                </a:tc>
-                <a:tc>
-                  <a:txBody>
-                    <a:bodyPr/>
-                    <a:lstStyle/>
-                    <a:p>
-                      <a:pPr lvl="0" indent="0" marL="0">
-                        <a:buNone/>
-                      </a:pPr>
-                      <a:r>
-                        <a:rPr/>
-                        <a:t>0.119617</a:t>
-                      </a:r>
-                    </a:p>
-                  </a:txBody>
-                </a:tc>
-              </a:tr>
-              <a:tr h="0">
-                <a:tc>
-                  <a:txBody>
-                    <a:bodyPr/>
-                    <a:lstStyle/>
-                    <a:p>
-                      <a:pPr lvl="0" indent="0" marL="0">
-                        <a:buNone/>
-                      </a:pPr>
-                      <a:r>
-                        <a:rPr/>
-                        <a:t>1</a:t>
-                      </a:r>
-                    </a:p>
-                  </a:txBody>
-                </a:tc>
-                <a:tc>
-                  <a:txBody>
-                    <a:bodyPr/>
-                    <a:lstStyle/>
-                    <a:p>
-                      <a:pPr lvl="0" indent="0" marL="0">
-                        <a:buNone/>
-                      </a:pPr>
-                      <a:r>
-                        <a:rPr/>
-                        <a:t>balsam fir</a:t>
-                      </a:r>
-                    </a:p>
-                  </a:txBody>
-                </a:tc>
-                <a:tc>
-                  <a:txBody>
-                    <a:bodyPr/>
-                    <a:lstStyle/>
-                    <a:p>
-                      <a:pPr lvl="0" indent="0" marL="0">
-                        <a:buNone/>
-                      </a:pPr>
-                      <a:r>
-                        <a:rPr/>
-                        <a:t>3</a:t>
-                      </a:r>
-                    </a:p>
-                  </a:txBody>
-                </a:tc>
-                <a:tc>
-                  <a:txBody>
-                    <a:bodyPr/>
-                    <a:lstStyle/>
-                    <a:p>
-                      <a:pPr lvl="0" indent="0" marL="0">
-                        <a:buNone/>
-                      </a:pPr>
-                      <a:r>
-                        <a:rPr/>
-                        <a:t>129.650855</a:t>
-                      </a:r>
-                    </a:p>
-                  </a:txBody>
-                </a:tc>
-                <a:tc>
-                  <a:txBody>
-                    <a:bodyPr/>
-                    <a:lstStyle/>
-                    <a:p>
-                      <a:pPr lvl="0" indent="0" marL="0">
-                        <a:buNone/>
-                      </a:pPr>
-                      <a:r>
-                        <a:rPr/>
-                        <a:t>36.628377</a:t>
-                      </a:r>
-                    </a:p>
-                  </a:txBody>
-                </a:tc>
-                <a:tc>
-                  <a:txBody>
-                    <a:bodyPr/>
-                    <a:lstStyle/>
-                    <a:p>
-                      <a:pPr lvl="0" indent="0" marL="0">
-                        <a:buNone/>
-                      </a:pPr>
-                      <a:r>
-                        <a:rPr/>
-                        <a:t>0.123679</a:t>
-                      </a:r>
-                    </a:p>
-                  </a:txBody>
-                </a:tc>
-              </a:tr>
-              <a:tr h="0">
-                <a:tc>
-                  <a:txBody>
-                    <a:bodyPr/>
-                    <a:lstStyle/>
-                    <a:p>
-                      <a:pPr lvl="0" indent="0" marL="0">
-                        <a:buNone/>
-                      </a:pPr>
-                      <a:r>
-                        <a:rPr/>
-                        <a:t>2</a:t>
-                      </a:r>
-                    </a:p>
-                  </a:txBody>
-                </a:tc>
-                <a:tc>
-                  <a:txBody>
-                    <a:bodyPr/>
-                    <a:lstStyle/>
-                    <a:p>
-                      <a:pPr lvl="0" indent="0" marL="0">
-                        <a:buNone/>
-                      </a:pPr>
-                      <a:r>
-                        <a:rPr/>
-                        <a:t>balsam fir</a:t>
-                      </a:r>
-                    </a:p>
-                  </a:txBody>
-                </a:tc>
-                <a:tc>
-                  <a:txBody>
-                    <a:bodyPr/>
-                    <a:lstStyle/>
-                    <a:p>
-                      <a:pPr lvl="0" indent="0" marL="0">
-                        <a:buNone/>
-                      </a:pPr>
-                      <a:r>
-                        <a:rPr/>
-                        <a:t>4</a:t>
-                      </a:r>
-                    </a:p>
-                  </a:txBody>
-                </a:tc>
-                <a:tc>
-                  <a:txBody>
-                    <a:bodyPr/>
-                    <a:lstStyle/>
-                    <a:p>
-                      <a:pPr lvl="0" indent="0" marL="0">
-                        <a:buNone/>
-                      </a:pPr>
-                      <a:r>
-                        <a:rPr/>
-                        <a:t>134.599829</a:t>
-                      </a:r>
-                    </a:p>
-                  </a:txBody>
-                </a:tc>
-                <a:tc>
-                  <a:txBody>
-                    <a:bodyPr/>
-                    <a:lstStyle/>
-                    <a:p>
-                      <a:pPr lvl="0" indent="0" marL="0">
-                        <a:buNone/>
-                      </a:pPr>
-                      <a:r>
-                        <a:rPr/>
-                        <a:t>38.884870</a:t>
-                      </a:r>
-                    </a:p>
-                  </a:txBody>
-                </a:tc>
-                <a:tc>
-                  <a:txBody>
-                    <a:bodyPr/>
-                    <a:lstStyle/>
-                    <a:p>
-                      <a:pPr lvl="0" indent="0" marL="0">
-                        <a:buNone/>
-                      </a:pPr>
-                      <a:r>
-                        <a:rPr/>
-                        <a:t>0.133858</a:t>
-                      </a:r>
-                    </a:p>
-                  </a:txBody>
-                </a:tc>
-              </a:tr>
-              <a:tr h="0">
-                <a:tc>
-                  <a:txBody>
-                    <a:bodyPr/>
-                    <a:lstStyle/>
-                    <a:p>
-                      <a:pPr lvl="0" indent="0" marL="0">
-                        <a:buNone/>
-                      </a:pPr>
-                      <a:r>
-                        <a:rPr/>
-                        <a:t>3</a:t>
-                      </a:r>
-                    </a:p>
-                  </a:txBody>
-                </a:tc>
-                <a:tc>
-                  <a:txBody>
-                    <a:bodyPr/>
-                    <a:lstStyle/>
-                    <a:p>
-                      <a:pPr lvl="0" indent="0" marL="0">
-                        <a:buNone/>
-                      </a:pPr>
-                      <a:r>
-                        <a:rPr/>
-                        <a:t>balsam fir</a:t>
-                      </a:r>
-                    </a:p>
-                  </a:txBody>
-                </a:tc>
-                <a:tc>
-                  <a:txBody>
-                    <a:bodyPr/>
-                    <a:lstStyle/>
-                    <a:p>
-                      <a:pPr lvl="0" indent="0" marL="0">
-                        <a:buNone/>
-                      </a:pPr>
-                      <a:r>
-                        <a:rPr/>
-                        <a:t>5</a:t>
-                      </a:r>
-                    </a:p>
-                  </a:txBody>
-                </a:tc>
-                <a:tc>
-                  <a:txBody>
-                    <a:bodyPr/>
-                    <a:lstStyle/>
-                    <a:p>
-                      <a:pPr lvl="0" indent="0" marL="0">
-                        <a:buNone/>
-                      </a:pPr>
-                      <a:r>
-                        <a:rPr/>
-                        <a:t>145.002852</a:t>
-                      </a:r>
-                    </a:p>
-                  </a:txBody>
-                </a:tc>
-                <a:tc>
-                  <a:txBody>
-                    <a:bodyPr/>
-                    <a:lstStyle/>
-                    <a:p>
-                      <a:pPr lvl="0" indent="0" marL="0">
-                        <a:buNone/>
-                      </a:pPr>
-                      <a:r>
-                        <a:rPr/>
-                        <a:t>41.168470</a:t>
-                      </a:r>
-                    </a:p>
-                  </a:txBody>
-                </a:tc>
-                <a:tc>
-                  <a:txBody>
-                    <a:bodyPr/>
-                    <a:lstStyle/>
-                    <a:p>
-                      <a:pPr lvl="0" indent="0" marL="0">
-                        <a:buNone/>
-                      </a:pPr>
-                      <a:r>
-                        <a:rPr/>
-                        <a:t>0.144052</a:t>
-                      </a:r>
-                    </a:p>
-                  </a:txBody>
-                </a:tc>
-              </a:tr>
-              <a:tr h="0">
-                <a:tc>
-                  <a:txBody>
-                    <a:bodyPr/>
-                    <a:lstStyle/>
-                    <a:p>
-                      <a:pPr lvl="0" indent="0" marL="0">
-                        <a:buNone/>
-                      </a:pPr>
-                      <a:r>
-                        <a:rPr/>
-                        <a:t>4</a:t>
-                      </a:r>
-                    </a:p>
-                  </a:txBody>
-                </a:tc>
-                <a:tc>
-                  <a:txBody>
-                    <a:bodyPr/>
-                    <a:lstStyle/>
-                    <a:p>
-                      <a:pPr lvl="0" indent="0" marL="0">
-                        <a:buNone/>
-                      </a:pPr>
-                      <a:r>
-                        <a:rPr/>
-                        <a:t>balsam fir</a:t>
-                      </a:r>
-                    </a:p>
-                  </a:txBody>
-                </a:tc>
-                <a:tc>
-                  <a:txBody>
-                    <a:bodyPr/>
-                    <a:lstStyle/>
-                    <a:p>
-                      <a:pPr lvl="0" indent="0" marL="0">
-                        <a:buNone/>
-                      </a:pPr>
-                      <a:r>
-                        <a:rPr/>
-                        <a:t>6</a:t>
-                      </a:r>
-                    </a:p>
-                  </a:txBody>
-                </a:tc>
-                <a:tc>
-                  <a:txBody>
-                    <a:bodyPr/>
-                    <a:lstStyle/>
-                    <a:p>
-                      <a:pPr lvl="0" indent="0" marL="0">
-                        <a:buNone/>
-                      </a:pPr>
-                      <a:r>
-                        <a:rPr/>
-                        <a:t>147.449208</a:t>
-                      </a:r>
-                    </a:p>
-                  </a:txBody>
-                </a:tc>
-                <a:tc>
-                  <a:txBody>
-                    <a:bodyPr/>
-                    <a:lstStyle/>
-                    <a:p>
-                      <a:pPr lvl="0" indent="0" marL="0">
-                        <a:buNone/>
-                      </a:pPr>
-                      <a:r>
-                        <a:rPr/>
-                        <a:t>40.728609</a:t>
-                      </a:r>
-                    </a:p>
-                  </a:txBody>
-                </a:tc>
-                <a:tc>
-                  <a:txBody>
-                    <a:bodyPr/>
-                    <a:lstStyle/>
-                    <a:p>
-                      <a:pPr lvl="0" indent="0" marL="0">
-                        <a:buNone/>
-                      </a:pPr>
-                      <a:r>
-                        <a:rPr/>
-                        <a:t>0.142813</a:t>
-                      </a:r>
-                    </a:p>
-                  </a:txBody>
-                </a:tc>
-              </a:tr>
-              <a:tr h="0">
-                <a:tc>
-                  <a:txBody>
-                    <a:bodyPr/>
-                    <a:lstStyle/>
-                    <a:p>
-                      <a:pPr lvl="0" indent="0" marL="0">
-                        <a:buNone/>
-                      </a:pPr>
-                      <a:r>
-                        <a:rPr/>
-                        <a:t>...</a:t>
-                      </a:r>
-                    </a:p>
-                  </a:txBody>
-                </a:tc>
-                <a:tc>
-                  <a:txBody>
-                    <a:bodyPr/>
-                    <a:lstStyle/>
-                    <a:p>
-                      <a:pPr lvl="0" indent="0" marL="0">
-                        <a:buNone/>
-                      </a:pPr>
-                      <a:r>
-                        <a:rPr/>
-                        <a:t>...</a:t>
-                      </a:r>
-                    </a:p>
-                  </a:txBody>
-                </a:tc>
-                <a:tc>
-                  <a:txBody>
-                    <a:bodyPr/>
-                    <a:lstStyle/>
-                    <a:p>
-                      <a:pPr lvl="0" indent="0" marL="0">
-                        <a:buNone/>
-                      </a:pPr>
-                      <a:r>
-                        <a:rPr/>
-                        <a:t>...</a:t>
-                      </a:r>
-                    </a:p>
-                  </a:txBody>
-                </a:tc>
-                <a:tc>
-                  <a:txBody>
-                    <a:bodyPr/>
-                    <a:lstStyle/>
-                    <a:p>
-                      <a:pPr lvl="0" indent="0" marL="0">
-                        <a:buNone/>
-                      </a:pPr>
-                      <a:r>
-                        <a:rPr/>
-                        <a:t>...</a:t>
-                      </a:r>
-                    </a:p>
-                  </a:txBody>
-                </a:tc>
-                <a:tc>
-                  <a:txBody>
-                    <a:bodyPr/>
-                    <a:lstStyle/>
-                    <a:p>
-                      <a:pPr lvl="0" indent="0" marL="0">
-                        <a:buNone/>
-                      </a:pPr>
-                      <a:r>
-                        <a:rPr/>
-                        <a:t>...</a:t>
-                      </a:r>
-                    </a:p>
-                  </a:txBody>
-                </a:tc>
-                <a:tc>
-                  <a:txBody>
-                    <a:bodyPr/>
-                    <a:lstStyle/>
-                    <a:p>
-                      <a:pPr lvl="0" indent="0" marL="0">
-                        <a:buNone/>
-                      </a:pPr>
-                      <a:r>
-                        <a:rPr/>
-                        <a:t>...</a:t>
-                      </a:r>
-                    </a:p>
-                  </a:txBody>
-                </a:tc>
-              </a:tr>
-              <a:tr h="0">
-                <a:tc>
-                  <a:txBody>
-                    <a:bodyPr/>
-                    <a:lstStyle/>
-                    <a:p>
-                      <a:pPr lvl="0" indent="0" marL="0">
-                        <a:buNone/>
-                      </a:pPr>
-                      <a:r>
-                        <a:rPr/>
-                        <a:t>895</a:t>
-                      </a:r>
-                    </a:p>
-                  </a:txBody>
-                </a:tc>
-                <a:tc>
-                  <a:txBody>
-                    <a:bodyPr/>
-                    <a:lstStyle/>
-                    <a:p>
-                      <a:pPr lvl="0" indent="0" marL="0">
-                        <a:buNone/>
-                      </a:pPr>
-                      <a:r>
-                        <a:rPr/>
-                        <a:t>sugarberry</a:t>
-                      </a:r>
-                    </a:p>
-                  </a:txBody>
-                </a:tc>
-                <a:tc>
-                  <a:txBody>
-                    <a:bodyPr/>
-                    <a:lstStyle/>
-                    <a:p>
-                      <a:pPr lvl="0" indent="0" marL="0">
-                        <a:buNone/>
-                      </a:pPr>
-                      <a:r>
-                        <a:rPr/>
-                        <a:t>6</a:t>
-                      </a:r>
-                    </a:p>
-                  </a:txBody>
-                </a:tc>
-                <a:tc>
-                  <a:txBody>
-                    <a:bodyPr/>
-                    <a:lstStyle/>
-                    <a:p>
-                      <a:pPr lvl="0" indent="0" marL="0">
-                        <a:buNone/>
-                      </a:pPr>
-                      <a:r>
-                        <a:rPr/>
-                        <a:t>32.431052</a:t>
-                      </a:r>
-                    </a:p>
-                  </a:txBody>
-                </a:tc>
-                <a:tc>
-                  <a:txBody>
-                    <a:bodyPr/>
-                    <a:lstStyle/>
-                    <a:p>
-                      <a:pPr lvl="0" indent="0" marL="0">
-                        <a:buNone/>
-                      </a:pPr>
-                      <a:r>
-                        <a:rPr/>
-                        <a:t>20.969306</a:t>
-                      </a:r>
-                    </a:p>
-                  </a:txBody>
-                </a:tc>
-                <a:tc>
-                  <a:txBody>
-                    <a:bodyPr/>
-                    <a:lstStyle/>
-                    <a:p>
-                      <a:pPr lvl="0" indent="0" marL="0">
-                        <a:buNone/>
-                      </a:pPr>
-                      <a:r>
-                        <a:rPr/>
-                        <a:t>0.565727</a:t>
-                      </a:r>
-                    </a:p>
-                  </a:txBody>
-                </a:tc>
-              </a:tr>
-              <a:tr h="0">
-                <a:tc>
-                  <a:txBody>
-                    <a:bodyPr/>
-                    <a:lstStyle/>
-                    <a:p>
-                      <a:pPr lvl="0" indent="0" marL="0">
-                        <a:buNone/>
-                      </a:pPr>
-                      <a:r>
-                        <a:rPr/>
-                        <a:t>896</a:t>
-                      </a:r>
-                    </a:p>
-                  </a:txBody>
-                </a:tc>
-                <a:tc>
-                  <a:txBody>
-                    <a:bodyPr/>
-                    <a:lstStyle/>
-                    <a:p>
-                      <a:pPr lvl="0" indent="0" marL="0">
-                        <a:buNone/>
-                      </a:pPr>
-                      <a:r>
-                        <a:rPr/>
-                        <a:t>sugarberry</a:t>
-                      </a:r>
-                    </a:p>
-                  </a:txBody>
-                </a:tc>
-                <a:tc>
-                  <a:txBody>
-                    <a:bodyPr/>
-                    <a:lstStyle/>
-                    <a:p>
-                      <a:pPr lvl="0" indent="0" marL="0">
-                        <a:buNone/>
-                      </a:pPr>
-                      <a:r>
-                        <a:rPr/>
-                        <a:t>7</a:t>
-                      </a:r>
-                    </a:p>
-                  </a:txBody>
-                </a:tc>
-                <a:tc>
-                  <a:txBody>
-                    <a:bodyPr/>
-                    <a:lstStyle/>
-                    <a:p>
-                      <a:pPr lvl="0" indent="0" marL="0">
-                        <a:buNone/>
-                      </a:pPr>
-                      <a:r>
-                        <a:rPr/>
-                        <a:t>37.324259</a:t>
-                      </a:r>
-                    </a:p>
-                  </a:txBody>
-                </a:tc>
-                <a:tc>
-                  <a:txBody>
-                    <a:bodyPr/>
-                    <a:lstStyle/>
-                    <a:p>
-                      <a:pPr lvl="0" indent="0" marL="0">
-                        <a:buNone/>
-                      </a:pPr>
-                      <a:r>
-                        <a:rPr/>
-                        <a:t>25.037024</a:t>
-                      </a:r>
-                    </a:p>
-                  </a:txBody>
-                </a:tc>
-                <a:tc>
-                  <a:txBody>
-                    <a:bodyPr/>
-                    <a:lstStyle/>
-                    <a:p>
-                      <a:pPr lvl="0" indent="0" marL="0">
-                        <a:buNone/>
-                      </a:pPr>
-                      <a:r>
-                        <a:rPr/>
-                        <a:t>0.637629</a:t>
-                      </a:r>
-                    </a:p>
-                  </a:txBody>
-                </a:tc>
-              </a:tr>
-              <a:tr h="0">
-                <a:tc>
-                  <a:txBody>
-                    <a:bodyPr/>
-                    <a:lstStyle/>
-                    <a:p>
-                      <a:pPr lvl="0" indent="0" marL="0">
-                        <a:buNone/>
-                      </a:pPr>
-                      <a:r>
-                        <a:rPr/>
-                        <a:t>897</a:t>
-                      </a:r>
-                    </a:p>
-                  </a:txBody>
-                </a:tc>
-                <a:tc>
-                  <a:txBody>
-                    <a:bodyPr/>
-                    <a:lstStyle/>
-                    <a:p>
-                      <a:pPr lvl="0" indent="0" marL="0">
-                        <a:buNone/>
-                      </a:pPr>
-                      <a:r>
-                        <a:rPr/>
-                        <a:t>sugarberry</a:t>
-                      </a:r>
-                    </a:p>
-                  </a:txBody>
-                </a:tc>
-                <a:tc>
-                  <a:txBody>
-                    <a:bodyPr/>
-                    <a:lstStyle/>
-                    <a:p>
-                      <a:pPr lvl="0" indent="0" marL="0">
-                        <a:buNone/>
-                      </a:pPr>
-                      <a:r>
-                        <a:rPr/>
-                        <a:t>8</a:t>
-                      </a:r>
-                    </a:p>
-                  </a:txBody>
-                </a:tc>
-                <a:tc>
-                  <a:txBody>
-                    <a:bodyPr/>
-                    <a:lstStyle/>
-                    <a:p>
-                      <a:pPr lvl="0" indent="0" marL="0">
-                        <a:buNone/>
-                      </a:pPr>
-                      <a:r>
-                        <a:rPr/>
-                        <a:t>38.144756</a:t>
-                      </a:r>
-                    </a:p>
-                  </a:txBody>
-                </a:tc>
-                <a:tc>
-                  <a:txBody>
-                    <a:bodyPr/>
-                    <a:lstStyle/>
-                    <a:p>
-                      <a:pPr lvl="0" indent="0" marL="0">
-                        <a:buNone/>
-                      </a:pPr>
-                      <a:r>
-                        <a:rPr/>
-                        <a:t>26.680208</a:t>
-                      </a:r>
-                    </a:p>
-                  </a:txBody>
-                </a:tc>
-                <a:tc>
-                  <a:txBody>
-                    <a:bodyPr/>
-                    <a:lstStyle/>
-                    <a:p>
-                      <a:pPr lvl="0" indent="0" marL="0">
-                        <a:buNone/>
-                      </a:pPr>
-                      <a:r>
-                        <a:rPr/>
-                        <a:t>0.665159</a:t>
-                      </a:r>
-                    </a:p>
-                  </a:txBody>
-                </a:tc>
-              </a:tr>
-              <a:tr h="0">
-                <a:tc>
-                  <a:txBody>
-                    <a:bodyPr/>
-                    <a:lstStyle/>
-                    <a:p>
-                      <a:pPr lvl="0" indent="0" marL="0">
-                        <a:buNone/>
-                      </a:pPr>
-                      <a:r>
-                        <a:rPr/>
-                        <a:t>898</a:t>
-                      </a:r>
-                    </a:p>
-                  </a:txBody>
-                </a:tc>
-                <a:tc>
-                  <a:txBody>
-                    <a:bodyPr/>
-                    <a:lstStyle/>
-                    <a:p>
-                      <a:pPr lvl="0" indent="0" marL="0">
-                        <a:buNone/>
-                      </a:pPr>
-                      <a:r>
-                        <a:rPr/>
-                        <a:t>sugarberry</a:t>
-                      </a:r>
-                    </a:p>
-                  </a:txBody>
-                </a:tc>
-                <a:tc>
-                  <a:txBody>
-                    <a:bodyPr/>
-                    <a:lstStyle/>
-                    <a:p>
-                      <a:pPr lvl="0" indent="0" marL="0">
-                        <a:buNone/>
-                      </a:pPr>
-                      <a:r>
-                        <a:rPr/>
-                        <a:t>9</a:t>
-                      </a:r>
-                    </a:p>
-                  </a:txBody>
-                </a:tc>
-                <a:tc>
-                  <a:txBody>
-                    <a:bodyPr/>
-                    <a:lstStyle/>
-                    <a:p>
-                      <a:pPr lvl="0" indent="0" marL="0">
-                        <a:buNone/>
-                      </a:pPr>
-                      <a:r>
-                        <a:rPr/>
-                        <a:t>36.853245</a:t>
-                      </a:r>
-                    </a:p>
-                  </a:txBody>
-                </a:tc>
-                <a:tc>
-                  <a:txBody>
-                    <a:bodyPr/>
-                    <a:lstStyle/>
-                    <a:p>
-                      <a:pPr lvl="0" indent="0" marL="0">
-                        <a:buNone/>
-                      </a:pPr>
-                      <a:r>
-                        <a:rPr/>
-                        <a:t>21.021667</a:t>
-                      </a:r>
-                    </a:p>
-                  </a:txBody>
-                </a:tc>
-                <a:tc>
-                  <a:txBody>
-                    <a:bodyPr/>
-                    <a:lstStyle/>
-                    <a:p>
-                      <a:pPr lvl="0" indent="0" marL="0">
-                        <a:buNone/>
-                      </a:pPr>
-                      <a:r>
-                        <a:rPr/>
-                        <a:t>0.685162</a:t>
-                      </a:r>
-                    </a:p>
-                  </a:txBody>
-                </a:tc>
-              </a:tr>
-              <a:tr h="0">
-                <a:tc>
-                  <a:txBody>
-                    <a:bodyPr/>
-                    <a:lstStyle/>
-                    <a:p>
-                      <a:pPr lvl="0" indent="0" marL="0">
-                        <a:buNone/>
-                      </a:pPr>
-                      <a:r>
-                        <a:rPr/>
-                        <a:t>899</a:t>
-                      </a:r>
-                    </a:p>
-                  </a:txBody>
-                </a:tc>
-                <a:tc>
-                  <a:txBody>
-                    <a:bodyPr/>
-                    <a:lstStyle/>
-                    <a:p>
-                      <a:pPr lvl="0" indent="0" marL="0">
-                        <a:buNone/>
-                      </a:pPr>
-                      <a:r>
-                        <a:rPr/>
-                        <a:t>sugarberry</a:t>
-                      </a:r>
-                    </a:p>
-                  </a:txBody>
-                </a:tc>
-                <a:tc>
-                  <a:txBody>
-                    <a:bodyPr/>
-                    <a:lstStyle/>
-                    <a:p>
-                      <a:pPr lvl="0" indent="0" marL="0">
-                        <a:buNone/>
-                      </a:pPr>
-                      <a:r>
-                        <a:rPr/>
-                        <a:t>10</a:t>
-                      </a:r>
-                    </a:p>
-                  </a:txBody>
-                </a:tc>
-                <a:tc>
-                  <a:txBody>
-                    <a:bodyPr/>
-                    <a:lstStyle/>
-                    <a:p>
-                      <a:pPr lvl="0" indent="0" marL="0">
-                        <a:buNone/>
-                      </a:pPr>
-                      <a:r>
-                        <a:rPr/>
-                        <a:t>40.091106</a:t>
-                      </a:r>
-                    </a:p>
-                  </a:txBody>
-                </a:tc>
-                <a:tc>
-                  <a:txBody>
-                    <a:bodyPr/>
-                    <a:lstStyle/>
-                    <a:p>
-                      <a:pPr lvl="0" indent="0" marL="0">
-                        <a:buNone/>
-                      </a:pPr>
-                      <a:r>
-                        <a:rPr/>
-                        <a:t>23.172083</a:t>
-                      </a:r>
-                    </a:p>
-                  </a:txBody>
-                </a:tc>
-                <a:tc>
-                  <a:txBody>
-                    <a:bodyPr/>
-                    <a:lstStyle/>
-                    <a:p>
-                      <a:pPr lvl="0" indent="0" marL="0">
-                        <a:buNone/>
-                      </a:pPr>
-                      <a:r>
-                        <a:rPr/>
-                        <a:t>0.677519</a:t>
-                      </a:r>
-                    </a:p>
-                  </a:txBody>
-                </a:tc>
-              </a:tr>
-            </a:tbl>
-          </a:graphicData>
-        </a:graphic>
-      </p:graphicFrame>
+        </p:nvSpPr>
+        <p:spPr/>
+        <p:txBody>
+          <a:bodyPr/>
+          <a:lstStyle/>
+          <a:p>
+            <a:pPr lvl="0"/>
+            <a:r>
+              <a:rPr/>
+              <a:t>When predicting tree biomass, we chose Root Mean Square Logarithmic Error for our performance metric since biomass data varies greatly, ranging from tiny saplings to enormous trees, and trees have exponential growth.</a:t>
+            </a:r>
+          </a:p>
+          <a:p>
+            <a:pPr lvl="0"/>
+            <a:r>
+              <a:rPr b="1"/>
+              <a:t>RMSLE over RMSE</a:t>
+            </a:r>
+            <a:r>
+              <a:rPr/>
+              <a:t>: focuses on percentage errors, making it fair to both small and large trees, unlike RMSE, which we believe penalizes errors on big trees. Fitting biomass estimations where scale matters more than absolute error. RMSLE provides a more balanced evaluation that considers the unique characteristics of tree biomass data.</a:t>
+            </a:r>
+          </a:p>
+        </p:txBody>
+      </p:sp>
     </p:spTree>
   </p:cSld>
 </p:sld>
@@ -4715,62 +3619,1147 @@
             </a:pPr>
             <a:r>
               <a:rPr/>
-              <a:t>Technical Lead</a:t>
+              <a:t>Project Manager Model</a:t>
             </a:r>
           </a:p>
         </p:txBody>
       </p:sp>
-      <p:sp>
-        <p:nvSpPr>
-          <p:cNvPr id="3" name="Content Placeholder 2"/>
-          <p:cNvSpPr>
-            <a:spLocks noGrp="1"/>
-          </p:cNvSpPr>
+      <p:graphicFrame>
+        <p:nvGraphicFramePr>
+          <p:cNvPr id="6" name="Content Placeholder 5"/>
+          <p:cNvGraphicFramePr>
+            <a:graphicFrameLocks noGrp="1"/>
+          </p:cNvGraphicFramePr>
           <p:nvPr>
             <p:ph idx="1"/>
           </p:nvPr>
-        </p:nvSpPr>
-        <p:spPr/>
-        <p:txBody>
-          <a:bodyPr/>
-          <a:lstStyle/>
-          <a:p>
-            <a:pPr lvl="0"/>
-            <a:r>
-              <a:rPr/>
-              <a:t>Overview of data manipulation</a:t>
-            </a:r>
-          </a:p>
-          <a:p>
-            <a:pPr lvl="0"/>
-            <a:r>
-              <a:rPr/>
-              <a:t>Split and filtering methods</a:t>
-            </a:r>
-          </a:p>
-          <a:p>
-            <a:pPr lvl="0"/>
-            <a:r>
-              <a:rPr/>
-              <a:t>Feature engineering (what worked and what didn’t)</a:t>
-            </a:r>
-          </a:p>
-          <a:p>
-            <a:pPr lvl="0"/>
-            <a:r>
-              <a:rPr/>
-              <a:t>Tuning k for the best model</a:t>
-            </a:r>
-          </a:p>
-          <a:p>
-            <a:pPr lvl="0"/>
-            <a:r>
-              <a:rPr/>
-              <a:t>The final “best” model and error</a:t>
-            </a:r>
-          </a:p>
-        </p:txBody>
-      </p:sp>
+        </p:nvGraphicFramePr>
+        <p:xfrm>
+          <a:off x="457200" y="1193800"/>
+          <a:ext cx="8229600" cy="3390900"/>
+        </p:xfrm>
+        <a:graphic>
+          <a:graphicData uri="http://schemas.openxmlformats.org/drawingml/2006/table">
+            <a:tbl>
+              <a:tblPr firstRow="1" bandRow="1">
+                <a:tableStyleId>{5C22544A-7EE6-4342-B048-85BDC9FD1C3A}</a:tableStyleId>
+              </a:tblPr>
+              <a:tblGrid>
+                <a:gridCol w="1371600"/>
+                <a:gridCol w="1371600"/>
+                <a:gridCol w="1371600"/>
+                <a:gridCol w="1371600"/>
+                <a:gridCol w="1371600"/>
+                <a:gridCol w="1371600"/>
+              </a:tblGrid>
+              <a:tr h="0">
+                <a:tc>
+                  <a:txBody>
+                    <a:bodyPr/>
+                    <a:lstStyle/>
+                    <a:p>
+                      <a:endParaRPr/>
+                    </a:p>
+                  </a:txBody>
+                  <a:tcPr/>
+                </a:tc>
+                <a:tc>
+                  <a:txBody>
+                    <a:bodyPr/>
+                    <a:lstStyle/>
+                    <a:p>
+                      <a:pPr lvl="0" indent="0" marL="0">
+                        <a:buNone/>
+                      </a:pPr>
+                      <a:r>
+                        <a:rPr/>
+                        <a:t>Species</a:t>
+                      </a:r>
+                    </a:p>
+                  </a:txBody>
+                  <a:tcPr/>
+                </a:tc>
+                <a:tc>
+                  <a:txBody>
+                    <a:bodyPr/>
+                    <a:lstStyle/>
+                    <a:p>
+                      <a:pPr lvl="0" indent="0" marL="0">
+                        <a:buNone/>
+                      </a:pPr>
+                      <a:r>
+                        <a:rPr/>
+                        <a:t>k</a:t>
+                      </a:r>
+                    </a:p>
+                  </a:txBody>
+                  <a:tcPr/>
+                </a:tc>
+                <a:tc>
+                  <a:txBody>
+                    <a:bodyPr/>
+                    <a:lstStyle/>
+                    <a:p>
+                      <a:pPr lvl="0" indent="0" marL="0">
+                        <a:buNone/>
+                      </a:pPr>
+                      <a:r>
+                        <a:rPr/>
+                        <a:t>RMSE</a:t>
+                      </a:r>
+                    </a:p>
+                  </a:txBody>
+                  <a:tcPr/>
+                </a:tc>
+                <a:tc>
+                  <a:txBody>
+                    <a:bodyPr/>
+                    <a:lstStyle/>
+                    <a:p>
+                      <a:pPr lvl="0" indent="0" marL="0">
+                        <a:buNone/>
+                      </a:pPr>
+                      <a:r>
+                        <a:rPr/>
+                        <a:t>MAE</a:t>
+                      </a:r>
+                    </a:p>
+                  </a:txBody>
+                  <a:tcPr/>
+                </a:tc>
+                <a:tc>
+                  <a:txBody>
+                    <a:bodyPr/>
+                    <a:lstStyle/>
+                    <a:p>
+                      <a:pPr lvl="0" indent="0" marL="0">
+                        <a:buNone/>
+                      </a:pPr>
+                      <a:r>
+                        <a:rPr/>
+                        <a:t>RMSLE</a:t>
+                      </a:r>
+                    </a:p>
+                  </a:txBody>
+                  <a:tcPr/>
+                </a:tc>
+              </a:tr>
+              <a:tr h="0">
+                <a:tc>
+                  <a:txBody>
+                    <a:bodyPr/>
+                    <a:lstStyle/>
+                    <a:p>
+                      <a:pPr lvl="0" indent="0" marL="0">
+                        <a:buNone/>
+                      </a:pPr>
+                      <a:r>
+                        <a:rPr/>
+                        <a:t>0</a:t>
+                      </a:r>
+                    </a:p>
+                  </a:txBody>
+                </a:tc>
+                <a:tc>
+                  <a:txBody>
+                    <a:bodyPr/>
+                    <a:lstStyle/>
+                    <a:p>
+                      <a:pPr lvl="0" indent="0" marL="0">
+                        <a:buNone/>
+                      </a:pPr>
+                      <a:r>
+                        <a:rPr/>
+                        <a:t>balsam fir</a:t>
+                      </a:r>
+                    </a:p>
+                  </a:txBody>
+                </a:tc>
+                <a:tc>
+                  <a:txBody>
+                    <a:bodyPr/>
+                    <a:lstStyle/>
+                    <a:p>
+                      <a:pPr lvl="0" indent="0" marL="0">
+                        <a:buNone/>
+                      </a:pPr>
+                      <a:r>
+                        <a:rPr/>
+                        <a:t>2</a:t>
+                      </a:r>
+                    </a:p>
+                  </a:txBody>
+                </a:tc>
+                <a:tc>
+                  <a:txBody>
+                    <a:bodyPr/>
+                    <a:lstStyle/>
+                    <a:p>
+                      <a:pPr lvl="0" indent="0" marL="0">
+                        <a:buNone/>
+                      </a:pPr>
+                      <a:r>
+                        <a:rPr/>
+                        <a:t>125.827396</a:t>
+                      </a:r>
+                    </a:p>
+                  </a:txBody>
+                </a:tc>
+                <a:tc>
+                  <a:txBody>
+                    <a:bodyPr/>
+                    <a:lstStyle/>
+                    <a:p>
+                      <a:pPr lvl="0" indent="0" marL="0">
+                        <a:buNone/>
+                      </a:pPr>
+                      <a:r>
+                        <a:rPr/>
+                        <a:t>34.820565</a:t>
+                      </a:r>
+                    </a:p>
+                  </a:txBody>
+                </a:tc>
+                <a:tc>
+                  <a:txBody>
+                    <a:bodyPr/>
+                    <a:lstStyle/>
+                    <a:p>
+                      <a:pPr lvl="0" indent="0" marL="0">
+                        <a:buNone/>
+                      </a:pPr>
+                      <a:r>
+                        <a:rPr/>
+                        <a:t>0.119617</a:t>
+                      </a:r>
+                    </a:p>
+                  </a:txBody>
+                </a:tc>
+              </a:tr>
+              <a:tr h="0">
+                <a:tc>
+                  <a:txBody>
+                    <a:bodyPr/>
+                    <a:lstStyle/>
+                    <a:p>
+                      <a:pPr lvl="0" indent="0" marL="0">
+                        <a:buNone/>
+                      </a:pPr>
+                      <a:r>
+                        <a:rPr/>
+                        <a:t>1</a:t>
+                      </a:r>
+                    </a:p>
+                  </a:txBody>
+                </a:tc>
+                <a:tc>
+                  <a:txBody>
+                    <a:bodyPr/>
+                    <a:lstStyle/>
+                    <a:p>
+                      <a:pPr lvl="0" indent="0" marL="0">
+                        <a:buNone/>
+                      </a:pPr>
+                      <a:r>
+                        <a:rPr/>
+                        <a:t>balsam fir</a:t>
+                      </a:r>
+                    </a:p>
+                  </a:txBody>
+                </a:tc>
+                <a:tc>
+                  <a:txBody>
+                    <a:bodyPr/>
+                    <a:lstStyle/>
+                    <a:p>
+                      <a:pPr lvl="0" indent="0" marL="0">
+                        <a:buNone/>
+                      </a:pPr>
+                      <a:r>
+                        <a:rPr/>
+                        <a:t>3</a:t>
+                      </a:r>
+                    </a:p>
+                  </a:txBody>
+                </a:tc>
+                <a:tc>
+                  <a:txBody>
+                    <a:bodyPr/>
+                    <a:lstStyle/>
+                    <a:p>
+                      <a:pPr lvl="0" indent="0" marL="0">
+                        <a:buNone/>
+                      </a:pPr>
+                      <a:r>
+                        <a:rPr/>
+                        <a:t>129.650855</a:t>
+                      </a:r>
+                    </a:p>
+                  </a:txBody>
+                </a:tc>
+                <a:tc>
+                  <a:txBody>
+                    <a:bodyPr/>
+                    <a:lstStyle/>
+                    <a:p>
+                      <a:pPr lvl="0" indent="0" marL="0">
+                        <a:buNone/>
+                      </a:pPr>
+                      <a:r>
+                        <a:rPr/>
+                        <a:t>36.628377</a:t>
+                      </a:r>
+                    </a:p>
+                  </a:txBody>
+                </a:tc>
+                <a:tc>
+                  <a:txBody>
+                    <a:bodyPr/>
+                    <a:lstStyle/>
+                    <a:p>
+                      <a:pPr lvl="0" indent="0" marL="0">
+                        <a:buNone/>
+                      </a:pPr>
+                      <a:r>
+                        <a:rPr/>
+                        <a:t>0.123679</a:t>
+                      </a:r>
+                    </a:p>
+                  </a:txBody>
+                </a:tc>
+              </a:tr>
+              <a:tr h="0">
+                <a:tc>
+                  <a:txBody>
+                    <a:bodyPr/>
+                    <a:lstStyle/>
+                    <a:p>
+                      <a:pPr lvl="0" indent="0" marL="0">
+                        <a:buNone/>
+                      </a:pPr>
+                      <a:r>
+                        <a:rPr/>
+                        <a:t>2</a:t>
+                      </a:r>
+                    </a:p>
+                  </a:txBody>
+                </a:tc>
+                <a:tc>
+                  <a:txBody>
+                    <a:bodyPr/>
+                    <a:lstStyle/>
+                    <a:p>
+                      <a:pPr lvl="0" indent="0" marL="0">
+                        <a:buNone/>
+                      </a:pPr>
+                      <a:r>
+                        <a:rPr/>
+                        <a:t>balsam fir</a:t>
+                      </a:r>
+                    </a:p>
+                  </a:txBody>
+                </a:tc>
+                <a:tc>
+                  <a:txBody>
+                    <a:bodyPr/>
+                    <a:lstStyle/>
+                    <a:p>
+                      <a:pPr lvl="0" indent="0" marL="0">
+                        <a:buNone/>
+                      </a:pPr>
+                      <a:r>
+                        <a:rPr/>
+                        <a:t>4</a:t>
+                      </a:r>
+                    </a:p>
+                  </a:txBody>
+                </a:tc>
+                <a:tc>
+                  <a:txBody>
+                    <a:bodyPr/>
+                    <a:lstStyle/>
+                    <a:p>
+                      <a:pPr lvl="0" indent="0" marL="0">
+                        <a:buNone/>
+                      </a:pPr>
+                      <a:r>
+                        <a:rPr/>
+                        <a:t>134.599829</a:t>
+                      </a:r>
+                    </a:p>
+                  </a:txBody>
+                </a:tc>
+                <a:tc>
+                  <a:txBody>
+                    <a:bodyPr/>
+                    <a:lstStyle/>
+                    <a:p>
+                      <a:pPr lvl="0" indent="0" marL="0">
+                        <a:buNone/>
+                      </a:pPr>
+                      <a:r>
+                        <a:rPr/>
+                        <a:t>38.884870</a:t>
+                      </a:r>
+                    </a:p>
+                  </a:txBody>
+                </a:tc>
+                <a:tc>
+                  <a:txBody>
+                    <a:bodyPr/>
+                    <a:lstStyle/>
+                    <a:p>
+                      <a:pPr lvl="0" indent="0" marL="0">
+                        <a:buNone/>
+                      </a:pPr>
+                      <a:r>
+                        <a:rPr/>
+                        <a:t>0.133858</a:t>
+                      </a:r>
+                    </a:p>
+                  </a:txBody>
+                </a:tc>
+              </a:tr>
+              <a:tr h="0">
+                <a:tc>
+                  <a:txBody>
+                    <a:bodyPr/>
+                    <a:lstStyle/>
+                    <a:p>
+                      <a:pPr lvl="0" indent="0" marL="0">
+                        <a:buNone/>
+                      </a:pPr>
+                      <a:r>
+                        <a:rPr/>
+                        <a:t>3</a:t>
+                      </a:r>
+                    </a:p>
+                  </a:txBody>
+                </a:tc>
+                <a:tc>
+                  <a:txBody>
+                    <a:bodyPr/>
+                    <a:lstStyle/>
+                    <a:p>
+                      <a:pPr lvl="0" indent="0" marL="0">
+                        <a:buNone/>
+                      </a:pPr>
+                      <a:r>
+                        <a:rPr/>
+                        <a:t>balsam fir</a:t>
+                      </a:r>
+                    </a:p>
+                  </a:txBody>
+                </a:tc>
+                <a:tc>
+                  <a:txBody>
+                    <a:bodyPr/>
+                    <a:lstStyle/>
+                    <a:p>
+                      <a:pPr lvl="0" indent="0" marL="0">
+                        <a:buNone/>
+                      </a:pPr>
+                      <a:r>
+                        <a:rPr/>
+                        <a:t>5</a:t>
+                      </a:r>
+                    </a:p>
+                  </a:txBody>
+                </a:tc>
+                <a:tc>
+                  <a:txBody>
+                    <a:bodyPr/>
+                    <a:lstStyle/>
+                    <a:p>
+                      <a:pPr lvl="0" indent="0" marL="0">
+                        <a:buNone/>
+                      </a:pPr>
+                      <a:r>
+                        <a:rPr/>
+                        <a:t>145.002852</a:t>
+                      </a:r>
+                    </a:p>
+                  </a:txBody>
+                </a:tc>
+                <a:tc>
+                  <a:txBody>
+                    <a:bodyPr/>
+                    <a:lstStyle/>
+                    <a:p>
+                      <a:pPr lvl="0" indent="0" marL="0">
+                        <a:buNone/>
+                      </a:pPr>
+                      <a:r>
+                        <a:rPr/>
+                        <a:t>41.168470</a:t>
+                      </a:r>
+                    </a:p>
+                  </a:txBody>
+                </a:tc>
+                <a:tc>
+                  <a:txBody>
+                    <a:bodyPr/>
+                    <a:lstStyle/>
+                    <a:p>
+                      <a:pPr lvl="0" indent="0" marL="0">
+                        <a:buNone/>
+                      </a:pPr>
+                      <a:r>
+                        <a:rPr/>
+                        <a:t>0.144052</a:t>
+                      </a:r>
+                    </a:p>
+                  </a:txBody>
+                </a:tc>
+              </a:tr>
+              <a:tr h="0">
+                <a:tc>
+                  <a:txBody>
+                    <a:bodyPr/>
+                    <a:lstStyle/>
+                    <a:p>
+                      <a:pPr lvl="0" indent="0" marL="0">
+                        <a:buNone/>
+                      </a:pPr>
+                      <a:r>
+                        <a:rPr/>
+                        <a:t>4</a:t>
+                      </a:r>
+                    </a:p>
+                  </a:txBody>
+                </a:tc>
+                <a:tc>
+                  <a:txBody>
+                    <a:bodyPr/>
+                    <a:lstStyle/>
+                    <a:p>
+                      <a:pPr lvl="0" indent="0" marL="0">
+                        <a:buNone/>
+                      </a:pPr>
+                      <a:r>
+                        <a:rPr/>
+                        <a:t>balsam fir</a:t>
+                      </a:r>
+                    </a:p>
+                  </a:txBody>
+                </a:tc>
+                <a:tc>
+                  <a:txBody>
+                    <a:bodyPr/>
+                    <a:lstStyle/>
+                    <a:p>
+                      <a:pPr lvl="0" indent="0" marL="0">
+                        <a:buNone/>
+                      </a:pPr>
+                      <a:r>
+                        <a:rPr/>
+                        <a:t>6</a:t>
+                      </a:r>
+                    </a:p>
+                  </a:txBody>
+                </a:tc>
+                <a:tc>
+                  <a:txBody>
+                    <a:bodyPr/>
+                    <a:lstStyle/>
+                    <a:p>
+                      <a:pPr lvl="0" indent="0" marL="0">
+                        <a:buNone/>
+                      </a:pPr>
+                      <a:r>
+                        <a:rPr/>
+                        <a:t>147.449208</a:t>
+                      </a:r>
+                    </a:p>
+                  </a:txBody>
+                </a:tc>
+                <a:tc>
+                  <a:txBody>
+                    <a:bodyPr/>
+                    <a:lstStyle/>
+                    <a:p>
+                      <a:pPr lvl="0" indent="0" marL="0">
+                        <a:buNone/>
+                      </a:pPr>
+                      <a:r>
+                        <a:rPr/>
+                        <a:t>40.728609</a:t>
+                      </a:r>
+                    </a:p>
+                  </a:txBody>
+                </a:tc>
+                <a:tc>
+                  <a:txBody>
+                    <a:bodyPr/>
+                    <a:lstStyle/>
+                    <a:p>
+                      <a:pPr lvl="0" indent="0" marL="0">
+                        <a:buNone/>
+                      </a:pPr>
+                      <a:r>
+                        <a:rPr/>
+                        <a:t>0.142813</a:t>
+                      </a:r>
+                    </a:p>
+                  </a:txBody>
+                </a:tc>
+              </a:tr>
+              <a:tr h="0">
+                <a:tc>
+                  <a:txBody>
+                    <a:bodyPr/>
+                    <a:lstStyle/>
+                    <a:p>
+                      <a:pPr lvl="0" indent="0" marL="0">
+                        <a:buNone/>
+                      </a:pPr>
+                      <a:r>
+                        <a:rPr/>
+                        <a:t>...</a:t>
+                      </a:r>
+                    </a:p>
+                  </a:txBody>
+                </a:tc>
+                <a:tc>
+                  <a:txBody>
+                    <a:bodyPr/>
+                    <a:lstStyle/>
+                    <a:p>
+                      <a:pPr lvl="0" indent="0" marL="0">
+                        <a:buNone/>
+                      </a:pPr>
+                      <a:r>
+                        <a:rPr/>
+                        <a:t>...</a:t>
+                      </a:r>
+                    </a:p>
+                  </a:txBody>
+                </a:tc>
+                <a:tc>
+                  <a:txBody>
+                    <a:bodyPr/>
+                    <a:lstStyle/>
+                    <a:p>
+                      <a:pPr lvl="0" indent="0" marL="0">
+                        <a:buNone/>
+                      </a:pPr>
+                      <a:r>
+                        <a:rPr/>
+                        <a:t>...</a:t>
+                      </a:r>
+                    </a:p>
+                  </a:txBody>
+                </a:tc>
+                <a:tc>
+                  <a:txBody>
+                    <a:bodyPr/>
+                    <a:lstStyle/>
+                    <a:p>
+                      <a:pPr lvl="0" indent="0" marL="0">
+                        <a:buNone/>
+                      </a:pPr>
+                      <a:r>
+                        <a:rPr/>
+                        <a:t>...</a:t>
+                      </a:r>
+                    </a:p>
+                  </a:txBody>
+                </a:tc>
+                <a:tc>
+                  <a:txBody>
+                    <a:bodyPr/>
+                    <a:lstStyle/>
+                    <a:p>
+                      <a:pPr lvl="0" indent="0" marL="0">
+                        <a:buNone/>
+                      </a:pPr>
+                      <a:r>
+                        <a:rPr/>
+                        <a:t>...</a:t>
+                      </a:r>
+                    </a:p>
+                  </a:txBody>
+                </a:tc>
+                <a:tc>
+                  <a:txBody>
+                    <a:bodyPr/>
+                    <a:lstStyle/>
+                    <a:p>
+                      <a:pPr lvl="0" indent="0" marL="0">
+                        <a:buNone/>
+                      </a:pPr>
+                      <a:r>
+                        <a:rPr/>
+                        <a:t>...</a:t>
+                      </a:r>
+                    </a:p>
+                  </a:txBody>
+                </a:tc>
+              </a:tr>
+              <a:tr h="0">
+                <a:tc>
+                  <a:txBody>
+                    <a:bodyPr/>
+                    <a:lstStyle/>
+                    <a:p>
+                      <a:pPr lvl="0" indent="0" marL="0">
+                        <a:buNone/>
+                      </a:pPr>
+                      <a:r>
+                        <a:rPr/>
+                        <a:t>895</a:t>
+                      </a:r>
+                    </a:p>
+                  </a:txBody>
+                </a:tc>
+                <a:tc>
+                  <a:txBody>
+                    <a:bodyPr/>
+                    <a:lstStyle/>
+                    <a:p>
+                      <a:pPr lvl="0" indent="0" marL="0">
+                        <a:buNone/>
+                      </a:pPr>
+                      <a:r>
+                        <a:rPr/>
+                        <a:t>sugarberry</a:t>
+                      </a:r>
+                    </a:p>
+                  </a:txBody>
+                </a:tc>
+                <a:tc>
+                  <a:txBody>
+                    <a:bodyPr/>
+                    <a:lstStyle/>
+                    <a:p>
+                      <a:pPr lvl="0" indent="0" marL="0">
+                        <a:buNone/>
+                      </a:pPr>
+                      <a:r>
+                        <a:rPr/>
+                        <a:t>6</a:t>
+                      </a:r>
+                    </a:p>
+                  </a:txBody>
+                </a:tc>
+                <a:tc>
+                  <a:txBody>
+                    <a:bodyPr/>
+                    <a:lstStyle/>
+                    <a:p>
+                      <a:pPr lvl="0" indent="0" marL="0">
+                        <a:buNone/>
+                      </a:pPr>
+                      <a:r>
+                        <a:rPr/>
+                        <a:t>32.431052</a:t>
+                      </a:r>
+                    </a:p>
+                  </a:txBody>
+                </a:tc>
+                <a:tc>
+                  <a:txBody>
+                    <a:bodyPr/>
+                    <a:lstStyle/>
+                    <a:p>
+                      <a:pPr lvl="0" indent="0" marL="0">
+                        <a:buNone/>
+                      </a:pPr>
+                      <a:r>
+                        <a:rPr/>
+                        <a:t>20.969306</a:t>
+                      </a:r>
+                    </a:p>
+                  </a:txBody>
+                </a:tc>
+                <a:tc>
+                  <a:txBody>
+                    <a:bodyPr/>
+                    <a:lstStyle/>
+                    <a:p>
+                      <a:pPr lvl="0" indent="0" marL="0">
+                        <a:buNone/>
+                      </a:pPr>
+                      <a:r>
+                        <a:rPr/>
+                        <a:t>0.565727</a:t>
+                      </a:r>
+                    </a:p>
+                  </a:txBody>
+                </a:tc>
+              </a:tr>
+              <a:tr h="0">
+                <a:tc>
+                  <a:txBody>
+                    <a:bodyPr/>
+                    <a:lstStyle/>
+                    <a:p>
+                      <a:pPr lvl="0" indent="0" marL="0">
+                        <a:buNone/>
+                      </a:pPr>
+                      <a:r>
+                        <a:rPr/>
+                        <a:t>896</a:t>
+                      </a:r>
+                    </a:p>
+                  </a:txBody>
+                </a:tc>
+                <a:tc>
+                  <a:txBody>
+                    <a:bodyPr/>
+                    <a:lstStyle/>
+                    <a:p>
+                      <a:pPr lvl="0" indent="0" marL="0">
+                        <a:buNone/>
+                      </a:pPr>
+                      <a:r>
+                        <a:rPr/>
+                        <a:t>sugarberry</a:t>
+                      </a:r>
+                    </a:p>
+                  </a:txBody>
+                </a:tc>
+                <a:tc>
+                  <a:txBody>
+                    <a:bodyPr/>
+                    <a:lstStyle/>
+                    <a:p>
+                      <a:pPr lvl="0" indent="0" marL="0">
+                        <a:buNone/>
+                      </a:pPr>
+                      <a:r>
+                        <a:rPr/>
+                        <a:t>7</a:t>
+                      </a:r>
+                    </a:p>
+                  </a:txBody>
+                </a:tc>
+                <a:tc>
+                  <a:txBody>
+                    <a:bodyPr/>
+                    <a:lstStyle/>
+                    <a:p>
+                      <a:pPr lvl="0" indent="0" marL="0">
+                        <a:buNone/>
+                      </a:pPr>
+                      <a:r>
+                        <a:rPr/>
+                        <a:t>37.324259</a:t>
+                      </a:r>
+                    </a:p>
+                  </a:txBody>
+                </a:tc>
+                <a:tc>
+                  <a:txBody>
+                    <a:bodyPr/>
+                    <a:lstStyle/>
+                    <a:p>
+                      <a:pPr lvl="0" indent="0" marL="0">
+                        <a:buNone/>
+                      </a:pPr>
+                      <a:r>
+                        <a:rPr/>
+                        <a:t>25.037024</a:t>
+                      </a:r>
+                    </a:p>
+                  </a:txBody>
+                </a:tc>
+                <a:tc>
+                  <a:txBody>
+                    <a:bodyPr/>
+                    <a:lstStyle/>
+                    <a:p>
+                      <a:pPr lvl="0" indent="0" marL="0">
+                        <a:buNone/>
+                      </a:pPr>
+                      <a:r>
+                        <a:rPr/>
+                        <a:t>0.637629</a:t>
+                      </a:r>
+                    </a:p>
+                  </a:txBody>
+                </a:tc>
+              </a:tr>
+              <a:tr h="0">
+                <a:tc>
+                  <a:txBody>
+                    <a:bodyPr/>
+                    <a:lstStyle/>
+                    <a:p>
+                      <a:pPr lvl="0" indent="0" marL="0">
+                        <a:buNone/>
+                      </a:pPr>
+                      <a:r>
+                        <a:rPr/>
+                        <a:t>897</a:t>
+                      </a:r>
+                    </a:p>
+                  </a:txBody>
+                </a:tc>
+                <a:tc>
+                  <a:txBody>
+                    <a:bodyPr/>
+                    <a:lstStyle/>
+                    <a:p>
+                      <a:pPr lvl="0" indent="0" marL="0">
+                        <a:buNone/>
+                      </a:pPr>
+                      <a:r>
+                        <a:rPr/>
+                        <a:t>sugarberry</a:t>
+                      </a:r>
+                    </a:p>
+                  </a:txBody>
+                </a:tc>
+                <a:tc>
+                  <a:txBody>
+                    <a:bodyPr/>
+                    <a:lstStyle/>
+                    <a:p>
+                      <a:pPr lvl="0" indent="0" marL="0">
+                        <a:buNone/>
+                      </a:pPr>
+                      <a:r>
+                        <a:rPr/>
+                        <a:t>8</a:t>
+                      </a:r>
+                    </a:p>
+                  </a:txBody>
+                </a:tc>
+                <a:tc>
+                  <a:txBody>
+                    <a:bodyPr/>
+                    <a:lstStyle/>
+                    <a:p>
+                      <a:pPr lvl="0" indent="0" marL="0">
+                        <a:buNone/>
+                      </a:pPr>
+                      <a:r>
+                        <a:rPr/>
+                        <a:t>38.144756</a:t>
+                      </a:r>
+                    </a:p>
+                  </a:txBody>
+                </a:tc>
+                <a:tc>
+                  <a:txBody>
+                    <a:bodyPr/>
+                    <a:lstStyle/>
+                    <a:p>
+                      <a:pPr lvl="0" indent="0" marL="0">
+                        <a:buNone/>
+                      </a:pPr>
+                      <a:r>
+                        <a:rPr/>
+                        <a:t>26.680208</a:t>
+                      </a:r>
+                    </a:p>
+                  </a:txBody>
+                </a:tc>
+                <a:tc>
+                  <a:txBody>
+                    <a:bodyPr/>
+                    <a:lstStyle/>
+                    <a:p>
+                      <a:pPr lvl="0" indent="0" marL="0">
+                        <a:buNone/>
+                      </a:pPr>
+                      <a:r>
+                        <a:rPr/>
+                        <a:t>0.665159</a:t>
+                      </a:r>
+                    </a:p>
+                  </a:txBody>
+                </a:tc>
+              </a:tr>
+              <a:tr h="0">
+                <a:tc>
+                  <a:txBody>
+                    <a:bodyPr/>
+                    <a:lstStyle/>
+                    <a:p>
+                      <a:pPr lvl="0" indent="0" marL="0">
+                        <a:buNone/>
+                      </a:pPr>
+                      <a:r>
+                        <a:rPr/>
+                        <a:t>898</a:t>
+                      </a:r>
+                    </a:p>
+                  </a:txBody>
+                </a:tc>
+                <a:tc>
+                  <a:txBody>
+                    <a:bodyPr/>
+                    <a:lstStyle/>
+                    <a:p>
+                      <a:pPr lvl="0" indent="0" marL="0">
+                        <a:buNone/>
+                      </a:pPr>
+                      <a:r>
+                        <a:rPr/>
+                        <a:t>sugarberry</a:t>
+                      </a:r>
+                    </a:p>
+                  </a:txBody>
+                </a:tc>
+                <a:tc>
+                  <a:txBody>
+                    <a:bodyPr/>
+                    <a:lstStyle/>
+                    <a:p>
+                      <a:pPr lvl="0" indent="0" marL="0">
+                        <a:buNone/>
+                      </a:pPr>
+                      <a:r>
+                        <a:rPr/>
+                        <a:t>9</a:t>
+                      </a:r>
+                    </a:p>
+                  </a:txBody>
+                </a:tc>
+                <a:tc>
+                  <a:txBody>
+                    <a:bodyPr/>
+                    <a:lstStyle/>
+                    <a:p>
+                      <a:pPr lvl="0" indent="0" marL="0">
+                        <a:buNone/>
+                      </a:pPr>
+                      <a:r>
+                        <a:rPr/>
+                        <a:t>36.853245</a:t>
+                      </a:r>
+                    </a:p>
+                  </a:txBody>
+                </a:tc>
+                <a:tc>
+                  <a:txBody>
+                    <a:bodyPr/>
+                    <a:lstStyle/>
+                    <a:p>
+                      <a:pPr lvl="0" indent="0" marL="0">
+                        <a:buNone/>
+                      </a:pPr>
+                      <a:r>
+                        <a:rPr/>
+                        <a:t>21.021667</a:t>
+                      </a:r>
+                    </a:p>
+                  </a:txBody>
+                </a:tc>
+                <a:tc>
+                  <a:txBody>
+                    <a:bodyPr/>
+                    <a:lstStyle/>
+                    <a:p>
+                      <a:pPr lvl="0" indent="0" marL="0">
+                        <a:buNone/>
+                      </a:pPr>
+                      <a:r>
+                        <a:rPr/>
+                        <a:t>0.685162</a:t>
+                      </a:r>
+                    </a:p>
+                  </a:txBody>
+                </a:tc>
+              </a:tr>
+              <a:tr h="0">
+                <a:tc>
+                  <a:txBody>
+                    <a:bodyPr/>
+                    <a:lstStyle/>
+                    <a:p>
+                      <a:pPr lvl="0" indent="0" marL="0">
+                        <a:buNone/>
+                      </a:pPr>
+                      <a:r>
+                        <a:rPr/>
+                        <a:t>899</a:t>
+                      </a:r>
+                    </a:p>
+                  </a:txBody>
+                </a:tc>
+                <a:tc>
+                  <a:txBody>
+                    <a:bodyPr/>
+                    <a:lstStyle/>
+                    <a:p>
+                      <a:pPr lvl="0" indent="0" marL="0">
+                        <a:buNone/>
+                      </a:pPr>
+                      <a:r>
+                        <a:rPr/>
+                        <a:t>sugarberry</a:t>
+                      </a:r>
+                    </a:p>
+                  </a:txBody>
+                </a:tc>
+                <a:tc>
+                  <a:txBody>
+                    <a:bodyPr/>
+                    <a:lstStyle/>
+                    <a:p>
+                      <a:pPr lvl="0" indent="0" marL="0">
+                        <a:buNone/>
+                      </a:pPr>
+                      <a:r>
+                        <a:rPr/>
+                        <a:t>10</a:t>
+                      </a:r>
+                    </a:p>
+                  </a:txBody>
+                </a:tc>
+                <a:tc>
+                  <a:txBody>
+                    <a:bodyPr/>
+                    <a:lstStyle/>
+                    <a:p>
+                      <a:pPr lvl="0" indent="0" marL="0">
+                        <a:buNone/>
+                      </a:pPr>
+                      <a:r>
+                        <a:rPr/>
+                        <a:t>40.091106</a:t>
+                      </a:r>
+                    </a:p>
+                  </a:txBody>
+                </a:tc>
+                <a:tc>
+                  <a:txBody>
+                    <a:bodyPr/>
+                    <a:lstStyle/>
+                    <a:p>
+                      <a:pPr lvl="0" indent="0" marL="0">
+                        <a:buNone/>
+                      </a:pPr>
+                      <a:r>
+                        <a:rPr/>
+                        <a:t>23.172083</a:t>
+                      </a:r>
+                    </a:p>
+                  </a:txBody>
+                </a:tc>
+                <a:tc>
+                  <a:txBody>
+                    <a:bodyPr/>
+                    <a:lstStyle/>
+                    <a:p>
+                      <a:pPr lvl="0" indent="0" marL="0">
+                        <a:buNone/>
+                      </a:pPr>
+                      <a:r>
+                        <a:rPr/>
+                        <a:t>0.677519</a:t>
+                      </a:r>
+                    </a:p>
+                  </a:txBody>
+                </a:tc>
+              </a:tr>
+            </a:tbl>
+          </a:graphicData>
+        </a:graphic>
+      </p:graphicFrame>
     </p:spTree>
   </p:cSld>
 </p:sld>
@@ -4813,503 +4802,62 @@
             </a:pPr>
             <a:r>
               <a:rPr/>
-              <a:t>Tree Measurement Data:</a:t>
+              <a:t>Technical Lead</a:t>
             </a:r>
           </a:p>
         </p:txBody>
       </p:sp>
-      <p:graphicFrame>
-        <p:nvGraphicFramePr>
-          <p:cNvPr id="6" name="Content Placeholder 5"/>
-          <p:cNvGraphicFramePr>
-            <a:graphicFrameLocks noGrp="1"/>
-          </p:cNvGraphicFramePr>
+      <p:sp>
+        <p:nvSpPr>
+          <p:cNvPr id="3" name="Content Placeholder 2"/>
+          <p:cNvSpPr>
+            <a:spLocks noGrp="1"/>
+          </p:cNvSpPr>
           <p:nvPr>
             <p:ph idx="1"/>
           </p:nvPr>
-        </p:nvGraphicFramePr>
-        <p:xfrm>
-          <a:off x="457200" y="1193800"/>
-          <a:ext cx="8229600" cy="3390900"/>
-        </p:xfrm>
-        <a:graphic>
-          <a:graphicData uri="http://schemas.openxmlformats.org/drawingml/2006/table">
-            <a:tbl>
-              <a:tblPr firstRow="1" bandRow="1">
-                <a:tableStyleId>{5C22544A-7EE6-4342-B048-85BDC9FD1C3A}</a:tableStyleId>
-              </a:tblPr>
-              <a:tblGrid>
-                <a:gridCol w="1638300"/>
-                <a:gridCol w="1638300"/>
-                <a:gridCol w="1638300"/>
-                <a:gridCol w="1638300"/>
-                <a:gridCol w="1638300"/>
-              </a:tblGrid>
-              <a:tr h="0">
-                <a:tc>
-                  <a:txBody>
-                    <a:bodyPr/>
-                    <a:lstStyle/>
-                    <a:p>
-                      <a:endParaRPr/>
-                    </a:p>
-                  </a:txBody>
-                  <a:tcPr/>
-                </a:tc>
-                <a:tc>
-                  <a:txBody>
-                    <a:bodyPr/>
-                    <a:lstStyle/>
-                    <a:p>
-                      <a:pPr lvl="0" indent="0" marL="0">
-                        <a:buNone/>
-                      </a:pPr>
-                      <a:r>
-                        <a:rPr/>
-                        <a:t>SPCD</a:t>
-                      </a:r>
-                    </a:p>
-                  </a:txBody>
-                  <a:tcPr/>
-                </a:tc>
-                <a:tc>
-                  <a:txBody>
-                    <a:bodyPr/>
-                    <a:lstStyle/>
-                    <a:p>
-                      <a:pPr lvl="0" indent="0" marL="0">
-                        <a:buNone/>
-                      </a:pPr>
-                      <a:r>
-                        <a:rPr/>
-                        <a:t>DO_BH</a:t>
-                      </a:r>
-                    </a:p>
-                  </a:txBody>
-                  <a:tcPr/>
-                </a:tc>
-                <a:tc>
-                  <a:txBody>
-                    <a:bodyPr/>
-                    <a:lstStyle/>
-                    <a:p>
-                      <a:pPr lvl="0" indent="0" marL="0">
-                        <a:buNone/>
-                      </a:pPr>
-                      <a:r>
-                        <a:rPr/>
-                        <a:t>HT_TOT</a:t>
-                      </a:r>
-                    </a:p>
-                  </a:txBody>
-                  <a:tcPr/>
-                </a:tc>
-                <a:tc>
-                  <a:txBody>
-                    <a:bodyPr/>
-                    <a:lstStyle/>
-                    <a:p>
-                      <a:pPr lvl="0" indent="0" marL="0">
-                        <a:buNone/>
-                      </a:pPr>
-                      <a:r>
-                        <a:rPr/>
-                        <a:t>TT_DW_CRM</a:t>
-                      </a:r>
-                    </a:p>
-                  </a:txBody>
-                  <a:tcPr/>
-                </a:tc>
-              </a:tr>
-              <a:tr h="0">
-                <a:tc>
-                  <a:txBody>
-                    <a:bodyPr/>
-                    <a:lstStyle/>
-                    <a:p>
-                      <a:pPr lvl="0" indent="0" marL="0">
-                        <a:buNone/>
-                      </a:pPr>
-                      <a:r>
-                        <a:rPr/>
-                        <a:t>0</a:t>
-                      </a:r>
-                    </a:p>
-                  </a:txBody>
-                </a:tc>
-                <a:tc>
-                  <a:txBody>
-                    <a:bodyPr/>
-                    <a:lstStyle/>
-                    <a:p>
-                      <a:pPr lvl="0" indent="0" marL="0">
-                        <a:buNone/>
-                      </a:pPr>
-                      <a:r>
-                        <a:rPr/>
-                        <a:t>12</a:t>
-                      </a:r>
-                    </a:p>
-                  </a:txBody>
-                </a:tc>
-                <a:tc>
-                  <a:txBody>
-                    <a:bodyPr/>
-                    <a:lstStyle/>
-                    <a:p>
-                      <a:pPr lvl="0" indent="0" marL="0">
-                        <a:buNone/>
-                      </a:pPr>
-                      <a:r>
-                        <a:rPr/>
-                        <a:t>7.5</a:t>
-                      </a:r>
-                    </a:p>
-                  </a:txBody>
-                </a:tc>
-                <a:tc>
-                  <a:txBody>
-                    <a:bodyPr/>
-                    <a:lstStyle/>
-                    <a:p>
-                      <a:pPr lvl="0" indent="0" marL="0">
-                        <a:buNone/>
-                      </a:pPr>
-                      <a:r>
-                        <a:rPr/>
-                        <a:t>45.2</a:t>
-                      </a:r>
-                    </a:p>
-                  </a:txBody>
-                </a:tc>
-                <a:tc>
-                  <a:txBody>
-                    <a:bodyPr/>
-                    <a:lstStyle/>
-                    <a:p>
-                      <a:pPr lvl="0" indent="0" marL="0">
-                        <a:buNone/>
-                      </a:pPr>
-                      <a:r>
-                        <a:rPr/>
-                        <a:t>178.86</a:t>
-                      </a:r>
-                    </a:p>
-                  </a:txBody>
-                </a:tc>
-              </a:tr>
-              <a:tr h="0">
-                <a:tc>
-                  <a:txBody>
-                    <a:bodyPr/>
-                    <a:lstStyle/>
-                    <a:p>
-                      <a:pPr lvl="0" indent="0" marL="0">
-                        <a:buNone/>
-                      </a:pPr>
-                      <a:r>
-                        <a:rPr/>
-                        <a:t>1</a:t>
-                      </a:r>
-                    </a:p>
-                  </a:txBody>
-                </a:tc>
-                <a:tc>
-                  <a:txBody>
-                    <a:bodyPr/>
-                    <a:lstStyle/>
-                    <a:p>
-                      <a:pPr lvl="0" indent="0" marL="0">
-                        <a:buNone/>
-                      </a:pPr>
-                      <a:r>
-                        <a:rPr/>
-                        <a:t>12</a:t>
-                      </a:r>
-                    </a:p>
-                  </a:txBody>
-                </a:tc>
-                <a:tc>
-                  <a:txBody>
-                    <a:bodyPr/>
-                    <a:lstStyle/>
-                    <a:p>
-                      <a:pPr lvl="0" indent="0" marL="0">
-                        <a:buNone/>
-                      </a:pPr>
-                      <a:r>
-                        <a:rPr/>
-                        <a:t>9.3</a:t>
-                      </a:r>
-                    </a:p>
-                  </a:txBody>
-                </a:tc>
-                <a:tc>
-                  <a:txBody>
-                    <a:bodyPr/>
-                    <a:lstStyle/>
-                    <a:p>
-                      <a:pPr lvl="0" indent="0" marL="0">
-                        <a:buNone/>
-                      </a:pPr>
-                      <a:r>
-                        <a:rPr/>
-                        <a:t>62.7</a:t>
-                      </a:r>
-                    </a:p>
-                  </a:txBody>
-                </a:tc>
-                <a:tc>
-                  <a:txBody>
-                    <a:bodyPr/>
-                    <a:lstStyle/>
-                    <a:p>
-                      <a:pPr lvl="0" indent="0" marL="0">
-                        <a:buNone/>
-                      </a:pPr>
-                      <a:r>
-                        <a:rPr/>
-                        <a:t>323.46</a:t>
-                      </a:r>
-                    </a:p>
-                  </a:txBody>
-                </a:tc>
-              </a:tr>
-              <a:tr h="0">
-                <a:tc>
-                  <a:txBody>
-                    <a:bodyPr/>
-                    <a:lstStyle/>
-                    <a:p>
-                      <a:pPr lvl="0" indent="0" marL="0">
-                        <a:buNone/>
-                      </a:pPr>
-                      <a:r>
-                        <a:rPr/>
-                        <a:t>2</a:t>
-                      </a:r>
-                    </a:p>
-                  </a:txBody>
-                </a:tc>
-                <a:tc>
-                  <a:txBody>
-                    <a:bodyPr/>
-                    <a:lstStyle/>
-                    <a:p>
-                      <a:pPr lvl="0" indent="0" marL="0">
-                        <a:buNone/>
-                      </a:pPr>
-                      <a:r>
-                        <a:rPr/>
-                        <a:t>12</a:t>
-                      </a:r>
-                    </a:p>
-                  </a:txBody>
-                </a:tc>
-                <a:tc>
-                  <a:txBody>
-                    <a:bodyPr/>
-                    <a:lstStyle/>
-                    <a:p>
-                      <a:pPr lvl="0" indent="0" marL="0">
-                        <a:buNone/>
-                      </a:pPr>
-                      <a:r>
-                        <a:rPr/>
-                        <a:t>9.7</a:t>
-                      </a:r>
-                    </a:p>
-                  </a:txBody>
-                </a:tc>
-                <a:tc>
-                  <a:txBody>
-                    <a:bodyPr/>
-                    <a:lstStyle/>
-                    <a:p>
-                      <a:pPr lvl="0" indent="0" marL="0">
-                        <a:buNone/>
-                      </a:pPr>
-                      <a:r>
-                        <a:rPr/>
-                        <a:t>56.7</a:t>
-                      </a:r>
-                    </a:p>
-                  </a:txBody>
-                </a:tc>
-                <a:tc>
-                  <a:txBody>
-                    <a:bodyPr/>
-                    <a:lstStyle/>
-                    <a:p>
-                      <a:pPr lvl="0" indent="0" marL="0">
-                        <a:buNone/>
-                      </a:pPr>
-                      <a:r>
-                        <a:rPr/>
-                        <a:t>342.47</a:t>
-                      </a:r>
-                    </a:p>
-                  </a:txBody>
-                </a:tc>
-              </a:tr>
-              <a:tr h="0">
-                <a:tc>
-                  <a:txBody>
-                    <a:bodyPr/>
-                    <a:lstStyle/>
-                    <a:p>
-                      <a:pPr lvl="0" indent="0" marL="0">
-                        <a:buNone/>
-                      </a:pPr>
-                      <a:r>
-                        <a:rPr/>
-                        <a:t>3</a:t>
-                      </a:r>
-                    </a:p>
-                  </a:txBody>
-                </a:tc>
-                <a:tc>
-                  <a:txBody>
-                    <a:bodyPr/>
-                    <a:lstStyle/>
-                    <a:p>
-                      <a:pPr lvl="0" indent="0" marL="0">
-                        <a:buNone/>
-                      </a:pPr>
-                      <a:r>
-                        <a:rPr/>
-                        <a:t>12</a:t>
-                      </a:r>
-                    </a:p>
-                  </a:txBody>
-                </a:tc>
-                <a:tc>
-                  <a:txBody>
-                    <a:bodyPr/>
-                    <a:lstStyle/>
-                    <a:p>
-                      <a:pPr lvl="0" indent="0" marL="0">
-                        <a:buNone/>
-                      </a:pPr>
-                      <a:r>
-                        <a:rPr/>
-                        <a:t>11.4</a:t>
-                      </a:r>
-                    </a:p>
-                  </a:txBody>
-                </a:tc>
-                <a:tc>
-                  <a:txBody>
-                    <a:bodyPr/>
-                    <a:lstStyle/>
-                    <a:p>
-                      <a:pPr lvl="0" indent="0" marL="0">
-                        <a:buNone/>
-                      </a:pPr>
-                      <a:r>
-                        <a:rPr/>
-                        <a:t>66.1</a:t>
-                      </a:r>
-                    </a:p>
-                  </a:txBody>
-                </a:tc>
-                <a:tc>
-                  <a:txBody>
-                    <a:bodyPr/>
-                    <a:lstStyle/>
-                    <a:p>
-                      <a:pPr lvl="0" indent="0" marL="0">
-                        <a:buNone/>
-                      </a:pPr>
-                      <a:r>
-                        <a:rPr/>
-                        <a:t>499.35</a:t>
-                      </a:r>
-                    </a:p>
-                  </a:txBody>
-                </a:tc>
-              </a:tr>
-              <a:tr h="0">
-                <a:tc>
-                  <a:txBody>
-                    <a:bodyPr/>
-                    <a:lstStyle/>
-                    <a:p>
-                      <a:pPr lvl="0" indent="0" marL="0">
-                        <a:buNone/>
-                      </a:pPr>
-                      <a:r>
-                        <a:rPr/>
-                        <a:t>4</a:t>
-                      </a:r>
-                    </a:p>
-                  </a:txBody>
-                </a:tc>
-                <a:tc>
-                  <a:txBody>
-                    <a:bodyPr/>
-                    <a:lstStyle/>
-                    <a:p>
-                      <a:pPr lvl="0" indent="0" marL="0">
-                        <a:buNone/>
-                      </a:pPr>
-                      <a:r>
-                        <a:rPr/>
-                        <a:t>12</a:t>
-                      </a:r>
-                    </a:p>
-                  </a:txBody>
-                </a:tc>
-                <a:tc>
-                  <a:txBody>
-                    <a:bodyPr/>
-                    <a:lstStyle/>
-                    <a:p>
-                      <a:pPr lvl="0" indent="0" marL="0">
-                        <a:buNone/>
-                      </a:pPr>
-                      <a:r>
-                        <a:rPr/>
-                        <a:t>6.4</a:t>
-                      </a:r>
-                    </a:p>
-                  </a:txBody>
-                </a:tc>
-                <a:tc>
-                  <a:txBody>
-                    <a:bodyPr/>
-                    <a:lstStyle/>
-                    <a:p>
-                      <a:pPr lvl="0" indent="0" marL="0">
-                        <a:buNone/>
-                      </a:pPr>
-                      <a:r>
-                        <a:rPr/>
-                        <a:t>51.8</a:t>
-                      </a:r>
-                    </a:p>
-                  </a:txBody>
-                </a:tc>
-                <a:tc>
-                  <a:txBody>
-                    <a:bodyPr/>
-                    <a:lstStyle/>
-                    <a:p>
-                      <a:pPr lvl="0" indent="0" marL="0">
-                        <a:buNone/>
-                      </a:pPr>
-                      <a:r>
-                        <a:rPr/>
-                        <a:t>113.92</a:t>
-                      </a:r>
-                    </a:p>
-                  </a:txBody>
-                </a:tc>
-              </a:tr>
-            </a:tbl>
-          </a:graphicData>
-        </a:graphic>
-      </p:graphicFrame>
+        </p:nvSpPr>
+        <p:spPr/>
+        <p:txBody>
+          <a:bodyPr/>
+          <a:lstStyle/>
+          <a:p>
+            <a:pPr lvl="0"/>
+            <a:r>
+              <a:rPr/>
+              <a:t>Overview of data manipulation</a:t>
+            </a:r>
+          </a:p>
+          <a:p>
+            <a:pPr lvl="0"/>
+            <a:r>
+              <a:rPr/>
+              <a:t>Split and filtering methods</a:t>
+            </a:r>
+          </a:p>
+          <a:p>
+            <a:pPr lvl="0"/>
+            <a:r>
+              <a:rPr/>
+              <a:t>Feature engineering (what worked and what didn’t)</a:t>
+            </a:r>
+          </a:p>
+          <a:p>
+            <a:pPr lvl="0"/>
+            <a:r>
+              <a:rPr/>
+              <a:t>Tuning k for the best model</a:t>
+            </a:r>
+          </a:p>
+          <a:p>
+            <a:pPr lvl="0"/>
+            <a:r>
+              <a:rPr/>
+              <a:t>The final “best” model and error</a:t>
+            </a:r>
+          </a:p>
+        </p:txBody>
+      </p:sp>
     </p:spTree>
   </p:cSld>
 </p:sld>
@@ -5352,7 +4900,7 @@
             </a:pPr>
             <a:r>
               <a:rPr/>
-              <a:t>Tree Species Name Data:</a:t>
+              <a:t>Tree Measurement Data:</a:t>
             </a:r>
           </a:p>
         </p:txBody>
@@ -5378,9 +4926,11 @@
                 <a:tableStyleId>{5C22544A-7EE6-4342-B048-85BDC9FD1C3A}</a:tableStyleId>
               </a:tblPr>
               <a:tblGrid>
-                <a:gridCol w="2743200"/>
-                <a:gridCol w="2743200"/>
-                <a:gridCol w="2743200"/>
+                <a:gridCol w="1638300"/>
+                <a:gridCol w="1638300"/>
+                <a:gridCol w="1638300"/>
+                <a:gridCol w="1638300"/>
+                <a:gridCol w="1638300"/>
               </a:tblGrid>
               <a:tr h="0">
                 <a:tc>
@@ -5419,7 +4969,39 @@
                       </a:pPr>
                       <a:r>
                         <a:rPr/>
-                        <a:t>COMMON_NAME</a:t>
+                        <a:t>DO_BH</a:t>
+                      </a:r>
+                    </a:p>
+                  </a:txBody>
+                  <a:tcPr/>
+                </a:tc>
+                <a:tc>
+                  <a:txBody>
+                    <a:bodyPr/>
+                    <a:lstStyle/>
+                    <a:p>
+                      <a:pPr lvl="0" indent="0" marL="0">
+                        <a:buNone/>
+                      </a:pPr>
+                      <a:r>
+                        <a:rPr/>
+                        <a:t>HT_TOT</a:t>
+                      </a:r>
+                    </a:p>
+                  </a:txBody>
+                  <a:tcPr/>
+                </a:tc>
+                <a:tc>
+                  <a:txBody>
+                    <a:bodyPr/>
+                    <a:lstStyle/>
+                    <a:p>
+                      <a:pPr lvl="0" indent="0" marL="0">
+                        <a:buNone/>
+                      </a:pPr>
+                      <a:r>
+                        <a:rPr/>
+                        <a:t>TT_DW_CRM</a:t>
                       </a:r>
                     </a:p>
                   </a:txBody>
@@ -5452,22 +5034,52 @@
                       </a:pPr>
                       <a:r>
                         <a:rPr/>
-                        <a:t>10</a:t>
-                      </a:r>
-                    </a:p>
-                  </a:txBody>
-                </a:tc>
-                <a:tc>
-                  <a:txBody>
-                    <a:bodyPr/>
-                    <a:lstStyle/>
-                    <a:p>
-                      <a:pPr lvl="0" indent="0" marL="0">
-                        <a:buNone/>
-                      </a:pPr>
-                      <a:r>
-                        <a:rPr/>
-                        <a:t>fir spp.</a:t>
+                        <a:t>12</a:t>
+                      </a:r>
+                    </a:p>
+                  </a:txBody>
+                </a:tc>
+                <a:tc>
+                  <a:txBody>
+                    <a:bodyPr/>
+                    <a:lstStyle/>
+                    <a:p>
+                      <a:pPr lvl="0" indent="0" marL="0">
+                        <a:buNone/>
+                      </a:pPr>
+                      <a:r>
+                        <a:rPr/>
+                        <a:t>7.5</a:t>
+                      </a:r>
+                    </a:p>
+                  </a:txBody>
+                </a:tc>
+                <a:tc>
+                  <a:txBody>
+                    <a:bodyPr/>
+                    <a:lstStyle/>
+                    <a:p>
+                      <a:pPr lvl="0" indent="0" marL="0">
+                        <a:buNone/>
+                      </a:pPr>
+                      <a:r>
+                        <a:rPr/>
+                        <a:t>45.2</a:t>
+                      </a:r>
+                    </a:p>
+                  </a:txBody>
+                </a:tc>
+                <a:tc>
+                  <a:txBody>
+                    <a:bodyPr/>
+                    <a:lstStyle/>
+                    <a:p>
+                      <a:pPr lvl="0" indent="0" marL="0">
+                        <a:buNone/>
+                      </a:pPr>
+                      <a:r>
+                        <a:rPr/>
+                        <a:t>178.86</a:t>
                       </a:r>
                     </a:p>
                   </a:txBody>
@@ -5499,22 +5111,52 @@
                       </a:pPr>
                       <a:r>
                         <a:rPr/>
-                        <a:t>11</a:t>
-                      </a:r>
-                    </a:p>
-                  </a:txBody>
-                </a:tc>
-                <a:tc>
-                  <a:txBody>
-                    <a:bodyPr/>
-                    <a:lstStyle/>
-                    <a:p>
-                      <a:pPr lvl="0" indent="0" marL="0">
-                        <a:buNone/>
-                      </a:pPr>
-                      <a:r>
-                        <a:rPr/>
-                        <a:t>Pacific silver fir</a:t>
+                        <a:t>12</a:t>
+                      </a:r>
+                    </a:p>
+                  </a:txBody>
+                </a:tc>
+                <a:tc>
+                  <a:txBody>
+                    <a:bodyPr/>
+                    <a:lstStyle/>
+                    <a:p>
+                      <a:pPr lvl="0" indent="0" marL="0">
+                        <a:buNone/>
+                      </a:pPr>
+                      <a:r>
+                        <a:rPr/>
+                        <a:t>9.3</a:t>
+                      </a:r>
+                    </a:p>
+                  </a:txBody>
+                </a:tc>
+                <a:tc>
+                  <a:txBody>
+                    <a:bodyPr/>
+                    <a:lstStyle/>
+                    <a:p>
+                      <a:pPr lvl="0" indent="0" marL="0">
+                        <a:buNone/>
+                      </a:pPr>
+                      <a:r>
+                        <a:rPr/>
+                        <a:t>62.7</a:t>
+                      </a:r>
+                    </a:p>
+                  </a:txBody>
+                </a:tc>
+                <a:tc>
+                  <a:txBody>
+                    <a:bodyPr/>
+                    <a:lstStyle/>
+                    <a:p>
+                      <a:pPr lvl="0" indent="0" marL="0">
+                        <a:buNone/>
+                      </a:pPr>
+                      <a:r>
+                        <a:rPr/>
+                        <a:t>323.46</a:t>
                       </a:r>
                     </a:p>
                   </a:txBody>
@@ -5561,7 +5203,37 @@
                       </a:pPr>
                       <a:r>
                         <a:rPr/>
-                        <a:t>balsam fir</a:t>
+                        <a:t>9.7</a:t>
+                      </a:r>
+                    </a:p>
+                  </a:txBody>
+                </a:tc>
+                <a:tc>
+                  <a:txBody>
+                    <a:bodyPr/>
+                    <a:lstStyle/>
+                    <a:p>
+                      <a:pPr lvl="0" indent="0" marL="0">
+                        <a:buNone/>
+                      </a:pPr>
+                      <a:r>
+                        <a:rPr/>
+                        <a:t>56.7</a:t>
+                      </a:r>
+                    </a:p>
+                  </a:txBody>
+                </a:tc>
+                <a:tc>
+                  <a:txBody>
+                    <a:bodyPr/>
+                    <a:lstStyle/>
+                    <a:p>
+                      <a:pPr lvl="0" indent="0" marL="0">
+                        <a:buNone/>
+                      </a:pPr>
+                      <a:r>
+                        <a:rPr/>
+                        <a:t>342.47</a:t>
                       </a:r>
                     </a:p>
                   </a:txBody>
@@ -5593,22 +5265,52 @@
                       </a:pPr>
                       <a:r>
                         <a:rPr/>
-                        <a:t>14</a:t>
-                      </a:r>
-                    </a:p>
-                  </a:txBody>
-                </a:tc>
-                <a:tc>
-                  <a:txBody>
-                    <a:bodyPr/>
-                    <a:lstStyle/>
-                    <a:p>
-                      <a:pPr lvl="0" indent="0" marL="0">
-                        <a:buNone/>
-                      </a:pPr>
-                      <a:r>
-                        <a:rPr/>
-                        <a:t>Santa Lucia or bristlecone fir</a:t>
+                        <a:t>12</a:t>
+                      </a:r>
+                    </a:p>
+                  </a:txBody>
+                </a:tc>
+                <a:tc>
+                  <a:txBody>
+                    <a:bodyPr/>
+                    <a:lstStyle/>
+                    <a:p>
+                      <a:pPr lvl="0" indent="0" marL="0">
+                        <a:buNone/>
+                      </a:pPr>
+                      <a:r>
+                        <a:rPr/>
+                        <a:t>11.4</a:t>
+                      </a:r>
+                    </a:p>
+                  </a:txBody>
+                </a:tc>
+                <a:tc>
+                  <a:txBody>
+                    <a:bodyPr/>
+                    <a:lstStyle/>
+                    <a:p>
+                      <a:pPr lvl="0" indent="0" marL="0">
+                        <a:buNone/>
+                      </a:pPr>
+                      <a:r>
+                        <a:rPr/>
+                        <a:t>66.1</a:t>
+                      </a:r>
+                    </a:p>
+                  </a:txBody>
+                </a:tc>
+                <a:tc>
+                  <a:txBody>
+                    <a:bodyPr/>
+                    <a:lstStyle/>
+                    <a:p>
+                      <a:pPr lvl="0" indent="0" marL="0">
+                        <a:buNone/>
+                      </a:pPr>
+                      <a:r>
+                        <a:rPr/>
+                        <a:t>499.35</a:t>
                       </a:r>
                     </a:p>
                   </a:txBody>
@@ -5640,22 +5342,52 @@
                       </a:pPr>
                       <a:r>
                         <a:rPr/>
-                        <a:t>15</a:t>
-                      </a:r>
-                    </a:p>
-                  </a:txBody>
-                </a:tc>
-                <a:tc>
-                  <a:txBody>
-                    <a:bodyPr/>
-                    <a:lstStyle/>
-                    <a:p>
-                      <a:pPr lvl="0" indent="0" marL="0">
-                        <a:buNone/>
-                      </a:pPr>
-                      <a:r>
-                        <a:rPr/>
-                        <a:t>white fir</a:t>
+                        <a:t>12</a:t>
+                      </a:r>
+                    </a:p>
+                  </a:txBody>
+                </a:tc>
+                <a:tc>
+                  <a:txBody>
+                    <a:bodyPr/>
+                    <a:lstStyle/>
+                    <a:p>
+                      <a:pPr lvl="0" indent="0" marL="0">
+                        <a:buNone/>
+                      </a:pPr>
+                      <a:r>
+                        <a:rPr/>
+                        <a:t>6.4</a:t>
+                      </a:r>
+                    </a:p>
+                  </a:txBody>
+                </a:tc>
+                <a:tc>
+                  <a:txBody>
+                    <a:bodyPr/>
+                    <a:lstStyle/>
+                    <a:p>
+                      <a:pPr lvl="0" indent="0" marL="0">
+                        <a:buNone/>
+                      </a:pPr>
+                      <a:r>
+                        <a:rPr/>
+                        <a:t>51.8</a:t>
+                      </a:r>
+                    </a:p>
+                  </a:txBody>
+                </a:tc>
+                <a:tc>
+                  <a:txBody>
+                    <a:bodyPr/>
+                    <a:lstStyle/>
+                    <a:p>
+                      <a:pPr lvl="0" indent="0" marL="0">
+                        <a:buNone/>
+                      </a:pPr>
+                      <a:r>
+                        <a:rPr/>
+                        <a:t>113.92</a:t>
                       </a:r>
                     </a:p>
                   </a:txBody>
@@ -5707,7 +5439,7 @@
             </a:pPr>
             <a:r>
               <a:rPr/>
-              <a:t>Combined Dataset (species mapped onto bigger dataset):</a:t>
+              <a:t>Tree Species Name Data:</a:t>
             </a:r>
           </a:p>
         </p:txBody>
@@ -5733,12 +5465,9 @@
                 <a:tableStyleId>{5C22544A-7EE6-4342-B048-85BDC9FD1C3A}</a:tableStyleId>
               </a:tblPr>
               <a:tblGrid>
-                <a:gridCol w="1371600"/>
-                <a:gridCol w="1371600"/>
-                <a:gridCol w="1371600"/>
-                <a:gridCol w="1371600"/>
-                <a:gridCol w="1371600"/>
-                <a:gridCol w="1371600"/>
+                <a:gridCol w="2743200"/>
+                <a:gridCol w="2743200"/>
+                <a:gridCol w="2743200"/>
               </a:tblGrid>
               <a:tr h="0">
                 <a:tc>
@@ -5777,54 +5506,6 @@
                       </a:pPr>
                       <a:r>
                         <a:rPr/>
-                        <a:t>DO_BH</a:t>
-                      </a:r>
-                    </a:p>
-                  </a:txBody>
-                  <a:tcPr/>
-                </a:tc>
-                <a:tc>
-                  <a:txBody>
-                    <a:bodyPr/>
-                    <a:lstStyle/>
-                    <a:p>
-                      <a:pPr lvl="0" indent="0" marL="0">
-                        <a:buNone/>
-                      </a:pPr>
-                      <a:r>
-                        <a:rPr/>
-                        <a:t>HT_TOT</a:t>
-                      </a:r>
-                    </a:p>
-                  </a:txBody>
-                  <a:tcPr/>
-                </a:tc>
-                <a:tc>
-                  <a:txBody>
-                    <a:bodyPr/>
-                    <a:lstStyle/>
-                    <a:p>
-                      <a:pPr lvl="0" indent="0" marL="0">
-                        <a:buNone/>
-                      </a:pPr>
-                      <a:r>
-                        <a:rPr/>
-                        <a:t>TT_DW_CRM</a:t>
-                      </a:r>
-                    </a:p>
-                  </a:txBody>
-                  <a:tcPr/>
-                </a:tc>
-                <a:tc>
-                  <a:txBody>
-                    <a:bodyPr/>
-                    <a:lstStyle/>
-                    <a:p>
-                      <a:pPr lvl="0" indent="0" marL="0">
-                        <a:buNone/>
-                      </a:pPr>
-                      <a:r>
-                        <a:rPr/>
                         <a:t>COMMON_NAME</a:t>
                       </a:r>
                     </a:p>
@@ -5858,67 +5539,22 @@
                       </a:pPr>
                       <a:r>
                         <a:rPr/>
-                        <a:t>12</a:t>
-                      </a:r>
-                    </a:p>
-                  </a:txBody>
-                </a:tc>
-                <a:tc>
-                  <a:txBody>
-                    <a:bodyPr/>
-                    <a:lstStyle/>
-                    <a:p>
-                      <a:pPr lvl="0" indent="0" marL="0">
-                        <a:buNone/>
-                      </a:pPr>
-                      <a:r>
-                        <a:rPr/>
-                        <a:t>7.5</a:t>
-                      </a:r>
-                    </a:p>
-                  </a:txBody>
-                </a:tc>
-                <a:tc>
-                  <a:txBody>
-                    <a:bodyPr/>
-                    <a:lstStyle/>
-                    <a:p>
-                      <a:pPr lvl="0" indent="0" marL="0">
-                        <a:buNone/>
-                      </a:pPr>
-                      <a:r>
-                        <a:rPr/>
-                        <a:t>45.2</a:t>
-                      </a:r>
-                    </a:p>
-                  </a:txBody>
-                </a:tc>
-                <a:tc>
-                  <a:txBody>
-                    <a:bodyPr/>
-                    <a:lstStyle/>
-                    <a:p>
-                      <a:pPr lvl="0" indent="0" marL="0">
-                        <a:buNone/>
-                      </a:pPr>
-                      <a:r>
-                        <a:rPr/>
-                        <a:t>178.86</a:t>
-                      </a:r>
-                    </a:p>
-                  </a:txBody>
-                </a:tc>
-                <a:tc>
-                  <a:txBody>
-                    <a:bodyPr/>
-                    <a:lstStyle/>
-                    <a:p>
-                      <a:pPr lvl="0" indent="0" marL="0">
-                        <a:buNone/>
-                      </a:pPr>
-                      <a:r>
-                        <a:rPr/>
-                        <a:t>balsam fir</a:t>
+                        <a:t>10</a:t>
+                      </a:r>
+                    </a:p>
+                  </a:txBody>
+                </a:tc>
+                <a:tc>
+                  <a:txBody>
+                    <a:bodyPr/>
+                    <a:lstStyle/>
+                    <a:p>
+                      <a:pPr lvl="0" indent="0" marL="0">
+                        <a:buNone/>
+                      </a:pPr>
+                      <a:r>
+                        <a:rPr/>
+                        <a:t>fir spp.</a:t>
                       </a:r>
                     </a:p>
                   </a:txBody>
@@ -5950,67 +5586,22 @@
                       </a:pPr>
                       <a:r>
                         <a:rPr/>
-                        <a:t>12</a:t>
-                      </a:r>
-                    </a:p>
-                  </a:txBody>
-                </a:tc>
-                <a:tc>
-                  <a:txBody>
-                    <a:bodyPr/>
-                    <a:lstStyle/>
-                    <a:p>
-                      <a:pPr lvl="0" indent="0" marL="0">
-                        <a:buNone/>
-                      </a:pPr>
-                      <a:r>
-                        <a:rPr/>
-                        <a:t>9.3</a:t>
-                      </a:r>
-                    </a:p>
-                  </a:txBody>
-                </a:tc>
-                <a:tc>
-                  <a:txBody>
-                    <a:bodyPr/>
-                    <a:lstStyle/>
-                    <a:p>
-                      <a:pPr lvl="0" indent="0" marL="0">
-                        <a:buNone/>
-                      </a:pPr>
-                      <a:r>
-                        <a:rPr/>
-                        <a:t>62.7</a:t>
-                      </a:r>
-                    </a:p>
-                  </a:txBody>
-                </a:tc>
-                <a:tc>
-                  <a:txBody>
-                    <a:bodyPr/>
-                    <a:lstStyle/>
-                    <a:p>
-                      <a:pPr lvl="0" indent="0" marL="0">
-                        <a:buNone/>
-                      </a:pPr>
-                      <a:r>
-                        <a:rPr/>
-                        <a:t>323.46</a:t>
-                      </a:r>
-                    </a:p>
-                  </a:txBody>
-                </a:tc>
-                <a:tc>
-                  <a:txBody>
-                    <a:bodyPr/>
-                    <a:lstStyle/>
-                    <a:p>
-                      <a:pPr lvl="0" indent="0" marL="0">
-                        <a:buNone/>
-                      </a:pPr>
-                      <a:r>
-                        <a:rPr/>
-                        <a:t>balsam fir</a:t>
+                        <a:t>11</a:t>
+                      </a:r>
+                    </a:p>
+                  </a:txBody>
+                </a:tc>
+                <a:tc>
+                  <a:txBody>
+                    <a:bodyPr/>
+                    <a:lstStyle/>
+                    <a:p>
+                      <a:pPr lvl="0" indent="0" marL="0">
+                        <a:buNone/>
+                      </a:pPr>
+                      <a:r>
+                        <a:rPr/>
+                        <a:t>Pacific silver fir</a:t>
                       </a:r>
                     </a:p>
                   </a:txBody>
@@ -6057,51 +5648,6 @@
                       </a:pPr>
                       <a:r>
                         <a:rPr/>
-                        <a:t>9.7</a:t>
-                      </a:r>
-                    </a:p>
-                  </a:txBody>
-                </a:tc>
-                <a:tc>
-                  <a:txBody>
-                    <a:bodyPr/>
-                    <a:lstStyle/>
-                    <a:p>
-                      <a:pPr lvl="0" indent="0" marL="0">
-                        <a:buNone/>
-                      </a:pPr>
-                      <a:r>
-                        <a:rPr/>
-                        <a:t>56.7</a:t>
-                      </a:r>
-                    </a:p>
-                  </a:txBody>
-                </a:tc>
-                <a:tc>
-                  <a:txBody>
-                    <a:bodyPr/>
-                    <a:lstStyle/>
-                    <a:p>
-                      <a:pPr lvl="0" indent="0" marL="0">
-                        <a:buNone/>
-                      </a:pPr>
-                      <a:r>
-                        <a:rPr/>
-                        <a:t>342.47</a:t>
-                      </a:r>
-                    </a:p>
-                  </a:txBody>
-                </a:tc>
-                <a:tc>
-                  <a:txBody>
-                    <a:bodyPr/>
-                    <a:lstStyle/>
-                    <a:p>
-                      <a:pPr lvl="0" indent="0" marL="0">
-                        <a:buNone/>
-                      </a:pPr>
-                      <a:r>
-                        <a:rPr/>
                         <a:t>balsam fir</a:t>
                       </a:r>
                     </a:p>
@@ -6134,67 +5680,22 @@
                       </a:pPr>
                       <a:r>
                         <a:rPr/>
-                        <a:t>12</a:t>
-                      </a:r>
-                    </a:p>
-                  </a:txBody>
-                </a:tc>
-                <a:tc>
-                  <a:txBody>
-                    <a:bodyPr/>
-                    <a:lstStyle/>
-                    <a:p>
-                      <a:pPr lvl="0" indent="0" marL="0">
-                        <a:buNone/>
-                      </a:pPr>
-                      <a:r>
-                        <a:rPr/>
-                        <a:t>11.4</a:t>
-                      </a:r>
-                    </a:p>
-                  </a:txBody>
-                </a:tc>
-                <a:tc>
-                  <a:txBody>
-                    <a:bodyPr/>
-                    <a:lstStyle/>
-                    <a:p>
-                      <a:pPr lvl="0" indent="0" marL="0">
-                        <a:buNone/>
-                      </a:pPr>
-                      <a:r>
-                        <a:rPr/>
-                        <a:t>66.1</a:t>
-                      </a:r>
-                    </a:p>
-                  </a:txBody>
-                </a:tc>
-                <a:tc>
-                  <a:txBody>
-                    <a:bodyPr/>
-                    <a:lstStyle/>
-                    <a:p>
-                      <a:pPr lvl="0" indent="0" marL="0">
-                        <a:buNone/>
-                      </a:pPr>
-                      <a:r>
-                        <a:rPr/>
-                        <a:t>499.35</a:t>
-                      </a:r>
-                    </a:p>
-                  </a:txBody>
-                </a:tc>
-                <a:tc>
-                  <a:txBody>
-                    <a:bodyPr/>
-                    <a:lstStyle/>
-                    <a:p>
-                      <a:pPr lvl="0" indent="0" marL="0">
-                        <a:buNone/>
-                      </a:pPr>
-                      <a:r>
-                        <a:rPr/>
-                        <a:t>balsam fir</a:t>
+                        <a:t>14</a:t>
+                      </a:r>
+                    </a:p>
+                  </a:txBody>
+                </a:tc>
+                <a:tc>
+                  <a:txBody>
+                    <a:bodyPr/>
+                    <a:lstStyle/>
+                    <a:p>
+                      <a:pPr lvl="0" indent="0" marL="0">
+                        <a:buNone/>
+                      </a:pPr>
+                      <a:r>
+                        <a:rPr/>
+                        <a:t>Santa Lucia or bristlecone fir</a:t>
                       </a:r>
                     </a:p>
                   </a:txBody>
@@ -6226,67 +5727,22 @@
                       </a:pPr>
                       <a:r>
                         <a:rPr/>
-                        <a:t>12</a:t>
-                      </a:r>
-                    </a:p>
-                  </a:txBody>
-                </a:tc>
-                <a:tc>
-                  <a:txBody>
-                    <a:bodyPr/>
-                    <a:lstStyle/>
-                    <a:p>
-                      <a:pPr lvl="0" indent="0" marL="0">
-                        <a:buNone/>
-                      </a:pPr>
-                      <a:r>
-                        <a:rPr/>
-                        <a:t>6.4</a:t>
-                      </a:r>
-                    </a:p>
-                  </a:txBody>
-                </a:tc>
-                <a:tc>
-                  <a:txBody>
-                    <a:bodyPr/>
-                    <a:lstStyle/>
-                    <a:p>
-                      <a:pPr lvl="0" indent="0" marL="0">
-                        <a:buNone/>
-                      </a:pPr>
-                      <a:r>
-                        <a:rPr/>
-                        <a:t>51.8</a:t>
-                      </a:r>
-                    </a:p>
-                  </a:txBody>
-                </a:tc>
-                <a:tc>
-                  <a:txBody>
-                    <a:bodyPr/>
-                    <a:lstStyle/>
-                    <a:p>
-                      <a:pPr lvl="0" indent="0" marL="0">
-                        <a:buNone/>
-                      </a:pPr>
-                      <a:r>
-                        <a:rPr/>
-                        <a:t>113.92</a:t>
-                      </a:r>
-                    </a:p>
-                  </a:txBody>
-                </a:tc>
-                <a:tc>
-                  <a:txBody>
-                    <a:bodyPr/>
-                    <a:lstStyle/>
-                    <a:p>
-                      <a:pPr lvl="0" indent="0" marL="0">
-                        <a:buNone/>
-                      </a:pPr>
-                      <a:r>
-                        <a:rPr/>
-                        <a:t>balsam fir</a:t>
+                        <a:t>15</a:t>
+                      </a:r>
+                    </a:p>
+                  </a:txBody>
+                </a:tc>
+                <a:tc>
+                  <a:txBody>
+                    <a:bodyPr/>
+                    <a:lstStyle/>
+                    <a:p>
+                      <a:pPr lvl="0" indent="0" marL="0">
+                        <a:buNone/>
+                      </a:pPr>
+                      <a:r>
+                        <a:rPr/>
+                        <a:t>white fir</a:t>
                       </a:r>
                     </a:p>
                   </a:txBody>
@@ -6338,50 +5794,595 @@
             </a:pPr>
             <a:r>
               <a:rPr/>
-              <a:t>Filtered data</a:t>
+              <a:t>Combined Dataset (species mapped onto bigger dataset):</a:t>
             </a:r>
           </a:p>
         </p:txBody>
       </p:sp>
-      <p:sp>
-        <p:nvSpPr>
-          <p:cNvPr id="3" name="Content Placeholder 2"/>
-          <p:cNvSpPr>
-            <a:spLocks noGrp="1"/>
-          </p:cNvSpPr>
+      <p:graphicFrame>
+        <p:nvGraphicFramePr>
+          <p:cNvPr id="6" name="Content Placeholder 5"/>
+          <p:cNvGraphicFramePr>
+            <a:graphicFrameLocks noGrp="1"/>
+          </p:cNvGraphicFramePr>
           <p:nvPr>
             <p:ph idx="1"/>
           </p:nvPr>
-        </p:nvSpPr>
-        <p:spPr/>
-        <p:txBody>
-          <a:bodyPr/>
-          <a:lstStyle/>
-          <a:p>
-            <a:pPr lvl="0" indent="0">
-              <a:buNone/>
-            </a:pPr>
-            <a:r>
-              <a:rPr>
-                <a:latin typeface="Courier"/>
-              </a:rPr>
-              <a:t>SPCD  DO_BH  HT_TOT  TT_DW_CRM  COMMON_NAME               
-111   5.0    39.0    69.03      slash pine                    14
-      5.3    39.0    82.00      slash pine                    13
-      7.0    50.0    223.34     slash pine                    13
-131   7.0    50.0    196.35     loblolly pine                 11
-111   5.2    35.0    66.34      slash pine                    11
-                                                              ..
-999   12.8   63.0    885.17     Other or unknown live tree     1
-      13.0   54.0    788.82     Other or unknown live tree     1
-      13.2   40.0    616.66     Other or unknown live tree     1
-      13.3   72.0    1074.07    Other or unknown live tree     1
-12    1.6    13.4    3.78       balsam fir                     1
-Name: count, Length: 115454, dtype: int64</a:t>
-            </a:r>
-          </a:p>
-        </p:txBody>
-      </p:sp>
+        </p:nvGraphicFramePr>
+        <p:xfrm>
+          <a:off x="457200" y="1193800"/>
+          <a:ext cx="8229600" cy="3390900"/>
+        </p:xfrm>
+        <a:graphic>
+          <a:graphicData uri="http://schemas.openxmlformats.org/drawingml/2006/table">
+            <a:tbl>
+              <a:tblPr firstRow="1" bandRow="1">
+                <a:tableStyleId>{5C22544A-7EE6-4342-B048-85BDC9FD1C3A}</a:tableStyleId>
+              </a:tblPr>
+              <a:tblGrid>
+                <a:gridCol w="1371600"/>
+                <a:gridCol w="1371600"/>
+                <a:gridCol w="1371600"/>
+                <a:gridCol w="1371600"/>
+                <a:gridCol w="1371600"/>
+                <a:gridCol w="1371600"/>
+              </a:tblGrid>
+              <a:tr h="0">
+                <a:tc>
+                  <a:txBody>
+                    <a:bodyPr/>
+                    <a:lstStyle/>
+                    <a:p>
+                      <a:endParaRPr/>
+                    </a:p>
+                  </a:txBody>
+                  <a:tcPr/>
+                </a:tc>
+                <a:tc>
+                  <a:txBody>
+                    <a:bodyPr/>
+                    <a:lstStyle/>
+                    <a:p>
+                      <a:pPr lvl="0" indent="0" marL="0">
+                        <a:buNone/>
+                      </a:pPr>
+                      <a:r>
+                        <a:rPr/>
+                        <a:t>SPCD</a:t>
+                      </a:r>
+                    </a:p>
+                  </a:txBody>
+                  <a:tcPr/>
+                </a:tc>
+                <a:tc>
+                  <a:txBody>
+                    <a:bodyPr/>
+                    <a:lstStyle/>
+                    <a:p>
+                      <a:pPr lvl="0" indent="0" marL="0">
+                        <a:buNone/>
+                      </a:pPr>
+                      <a:r>
+                        <a:rPr/>
+                        <a:t>DO_BH</a:t>
+                      </a:r>
+                    </a:p>
+                  </a:txBody>
+                  <a:tcPr/>
+                </a:tc>
+                <a:tc>
+                  <a:txBody>
+                    <a:bodyPr/>
+                    <a:lstStyle/>
+                    <a:p>
+                      <a:pPr lvl="0" indent="0" marL="0">
+                        <a:buNone/>
+                      </a:pPr>
+                      <a:r>
+                        <a:rPr/>
+                        <a:t>HT_TOT</a:t>
+                      </a:r>
+                    </a:p>
+                  </a:txBody>
+                  <a:tcPr/>
+                </a:tc>
+                <a:tc>
+                  <a:txBody>
+                    <a:bodyPr/>
+                    <a:lstStyle/>
+                    <a:p>
+                      <a:pPr lvl="0" indent="0" marL="0">
+                        <a:buNone/>
+                      </a:pPr>
+                      <a:r>
+                        <a:rPr/>
+                        <a:t>TT_DW_CRM</a:t>
+                      </a:r>
+                    </a:p>
+                  </a:txBody>
+                  <a:tcPr/>
+                </a:tc>
+                <a:tc>
+                  <a:txBody>
+                    <a:bodyPr/>
+                    <a:lstStyle/>
+                    <a:p>
+                      <a:pPr lvl="0" indent="0" marL="0">
+                        <a:buNone/>
+                      </a:pPr>
+                      <a:r>
+                        <a:rPr/>
+                        <a:t>COMMON_NAME</a:t>
+                      </a:r>
+                    </a:p>
+                  </a:txBody>
+                  <a:tcPr/>
+                </a:tc>
+              </a:tr>
+              <a:tr h="0">
+                <a:tc>
+                  <a:txBody>
+                    <a:bodyPr/>
+                    <a:lstStyle/>
+                    <a:p>
+                      <a:pPr lvl="0" indent="0" marL="0">
+                        <a:buNone/>
+                      </a:pPr>
+                      <a:r>
+                        <a:rPr/>
+                        <a:t>0</a:t>
+                      </a:r>
+                    </a:p>
+                  </a:txBody>
+                </a:tc>
+                <a:tc>
+                  <a:txBody>
+                    <a:bodyPr/>
+                    <a:lstStyle/>
+                    <a:p>
+                      <a:pPr lvl="0" indent="0" marL="0">
+                        <a:buNone/>
+                      </a:pPr>
+                      <a:r>
+                        <a:rPr/>
+                        <a:t>12</a:t>
+                      </a:r>
+                    </a:p>
+                  </a:txBody>
+                </a:tc>
+                <a:tc>
+                  <a:txBody>
+                    <a:bodyPr/>
+                    <a:lstStyle/>
+                    <a:p>
+                      <a:pPr lvl="0" indent="0" marL="0">
+                        <a:buNone/>
+                      </a:pPr>
+                      <a:r>
+                        <a:rPr/>
+                        <a:t>7.5</a:t>
+                      </a:r>
+                    </a:p>
+                  </a:txBody>
+                </a:tc>
+                <a:tc>
+                  <a:txBody>
+                    <a:bodyPr/>
+                    <a:lstStyle/>
+                    <a:p>
+                      <a:pPr lvl="0" indent="0" marL="0">
+                        <a:buNone/>
+                      </a:pPr>
+                      <a:r>
+                        <a:rPr/>
+                        <a:t>45.2</a:t>
+                      </a:r>
+                    </a:p>
+                  </a:txBody>
+                </a:tc>
+                <a:tc>
+                  <a:txBody>
+                    <a:bodyPr/>
+                    <a:lstStyle/>
+                    <a:p>
+                      <a:pPr lvl="0" indent="0" marL="0">
+                        <a:buNone/>
+                      </a:pPr>
+                      <a:r>
+                        <a:rPr/>
+                        <a:t>178.86</a:t>
+                      </a:r>
+                    </a:p>
+                  </a:txBody>
+                </a:tc>
+                <a:tc>
+                  <a:txBody>
+                    <a:bodyPr/>
+                    <a:lstStyle/>
+                    <a:p>
+                      <a:pPr lvl="0" indent="0" marL="0">
+                        <a:buNone/>
+                      </a:pPr>
+                      <a:r>
+                        <a:rPr/>
+                        <a:t>balsam fir</a:t>
+                      </a:r>
+                    </a:p>
+                  </a:txBody>
+                </a:tc>
+              </a:tr>
+              <a:tr h="0">
+                <a:tc>
+                  <a:txBody>
+                    <a:bodyPr/>
+                    <a:lstStyle/>
+                    <a:p>
+                      <a:pPr lvl="0" indent="0" marL="0">
+                        <a:buNone/>
+                      </a:pPr>
+                      <a:r>
+                        <a:rPr/>
+                        <a:t>1</a:t>
+                      </a:r>
+                    </a:p>
+                  </a:txBody>
+                </a:tc>
+                <a:tc>
+                  <a:txBody>
+                    <a:bodyPr/>
+                    <a:lstStyle/>
+                    <a:p>
+                      <a:pPr lvl="0" indent="0" marL="0">
+                        <a:buNone/>
+                      </a:pPr>
+                      <a:r>
+                        <a:rPr/>
+                        <a:t>12</a:t>
+                      </a:r>
+                    </a:p>
+                  </a:txBody>
+                </a:tc>
+                <a:tc>
+                  <a:txBody>
+                    <a:bodyPr/>
+                    <a:lstStyle/>
+                    <a:p>
+                      <a:pPr lvl="0" indent="0" marL="0">
+                        <a:buNone/>
+                      </a:pPr>
+                      <a:r>
+                        <a:rPr/>
+                        <a:t>9.3</a:t>
+                      </a:r>
+                    </a:p>
+                  </a:txBody>
+                </a:tc>
+                <a:tc>
+                  <a:txBody>
+                    <a:bodyPr/>
+                    <a:lstStyle/>
+                    <a:p>
+                      <a:pPr lvl="0" indent="0" marL="0">
+                        <a:buNone/>
+                      </a:pPr>
+                      <a:r>
+                        <a:rPr/>
+                        <a:t>62.7</a:t>
+                      </a:r>
+                    </a:p>
+                  </a:txBody>
+                </a:tc>
+                <a:tc>
+                  <a:txBody>
+                    <a:bodyPr/>
+                    <a:lstStyle/>
+                    <a:p>
+                      <a:pPr lvl="0" indent="0" marL="0">
+                        <a:buNone/>
+                      </a:pPr>
+                      <a:r>
+                        <a:rPr/>
+                        <a:t>323.46</a:t>
+                      </a:r>
+                    </a:p>
+                  </a:txBody>
+                </a:tc>
+                <a:tc>
+                  <a:txBody>
+                    <a:bodyPr/>
+                    <a:lstStyle/>
+                    <a:p>
+                      <a:pPr lvl="0" indent="0" marL="0">
+                        <a:buNone/>
+                      </a:pPr>
+                      <a:r>
+                        <a:rPr/>
+                        <a:t>balsam fir</a:t>
+                      </a:r>
+                    </a:p>
+                  </a:txBody>
+                </a:tc>
+              </a:tr>
+              <a:tr h="0">
+                <a:tc>
+                  <a:txBody>
+                    <a:bodyPr/>
+                    <a:lstStyle/>
+                    <a:p>
+                      <a:pPr lvl="0" indent="0" marL="0">
+                        <a:buNone/>
+                      </a:pPr>
+                      <a:r>
+                        <a:rPr/>
+                        <a:t>2</a:t>
+                      </a:r>
+                    </a:p>
+                  </a:txBody>
+                </a:tc>
+                <a:tc>
+                  <a:txBody>
+                    <a:bodyPr/>
+                    <a:lstStyle/>
+                    <a:p>
+                      <a:pPr lvl="0" indent="0" marL="0">
+                        <a:buNone/>
+                      </a:pPr>
+                      <a:r>
+                        <a:rPr/>
+                        <a:t>12</a:t>
+                      </a:r>
+                    </a:p>
+                  </a:txBody>
+                </a:tc>
+                <a:tc>
+                  <a:txBody>
+                    <a:bodyPr/>
+                    <a:lstStyle/>
+                    <a:p>
+                      <a:pPr lvl="0" indent="0" marL="0">
+                        <a:buNone/>
+                      </a:pPr>
+                      <a:r>
+                        <a:rPr/>
+                        <a:t>9.7</a:t>
+                      </a:r>
+                    </a:p>
+                  </a:txBody>
+                </a:tc>
+                <a:tc>
+                  <a:txBody>
+                    <a:bodyPr/>
+                    <a:lstStyle/>
+                    <a:p>
+                      <a:pPr lvl="0" indent="0" marL="0">
+                        <a:buNone/>
+                      </a:pPr>
+                      <a:r>
+                        <a:rPr/>
+                        <a:t>56.7</a:t>
+                      </a:r>
+                    </a:p>
+                  </a:txBody>
+                </a:tc>
+                <a:tc>
+                  <a:txBody>
+                    <a:bodyPr/>
+                    <a:lstStyle/>
+                    <a:p>
+                      <a:pPr lvl="0" indent="0" marL="0">
+                        <a:buNone/>
+                      </a:pPr>
+                      <a:r>
+                        <a:rPr/>
+                        <a:t>342.47</a:t>
+                      </a:r>
+                    </a:p>
+                  </a:txBody>
+                </a:tc>
+                <a:tc>
+                  <a:txBody>
+                    <a:bodyPr/>
+                    <a:lstStyle/>
+                    <a:p>
+                      <a:pPr lvl="0" indent="0" marL="0">
+                        <a:buNone/>
+                      </a:pPr>
+                      <a:r>
+                        <a:rPr/>
+                        <a:t>balsam fir</a:t>
+                      </a:r>
+                    </a:p>
+                  </a:txBody>
+                </a:tc>
+              </a:tr>
+              <a:tr h="0">
+                <a:tc>
+                  <a:txBody>
+                    <a:bodyPr/>
+                    <a:lstStyle/>
+                    <a:p>
+                      <a:pPr lvl="0" indent="0" marL="0">
+                        <a:buNone/>
+                      </a:pPr>
+                      <a:r>
+                        <a:rPr/>
+                        <a:t>3</a:t>
+                      </a:r>
+                    </a:p>
+                  </a:txBody>
+                </a:tc>
+                <a:tc>
+                  <a:txBody>
+                    <a:bodyPr/>
+                    <a:lstStyle/>
+                    <a:p>
+                      <a:pPr lvl="0" indent="0" marL="0">
+                        <a:buNone/>
+                      </a:pPr>
+                      <a:r>
+                        <a:rPr/>
+                        <a:t>12</a:t>
+                      </a:r>
+                    </a:p>
+                  </a:txBody>
+                </a:tc>
+                <a:tc>
+                  <a:txBody>
+                    <a:bodyPr/>
+                    <a:lstStyle/>
+                    <a:p>
+                      <a:pPr lvl="0" indent="0" marL="0">
+                        <a:buNone/>
+                      </a:pPr>
+                      <a:r>
+                        <a:rPr/>
+                        <a:t>11.4</a:t>
+                      </a:r>
+                    </a:p>
+                  </a:txBody>
+                </a:tc>
+                <a:tc>
+                  <a:txBody>
+                    <a:bodyPr/>
+                    <a:lstStyle/>
+                    <a:p>
+                      <a:pPr lvl="0" indent="0" marL="0">
+                        <a:buNone/>
+                      </a:pPr>
+                      <a:r>
+                        <a:rPr/>
+                        <a:t>66.1</a:t>
+                      </a:r>
+                    </a:p>
+                  </a:txBody>
+                </a:tc>
+                <a:tc>
+                  <a:txBody>
+                    <a:bodyPr/>
+                    <a:lstStyle/>
+                    <a:p>
+                      <a:pPr lvl="0" indent="0" marL="0">
+                        <a:buNone/>
+                      </a:pPr>
+                      <a:r>
+                        <a:rPr/>
+                        <a:t>499.35</a:t>
+                      </a:r>
+                    </a:p>
+                  </a:txBody>
+                </a:tc>
+                <a:tc>
+                  <a:txBody>
+                    <a:bodyPr/>
+                    <a:lstStyle/>
+                    <a:p>
+                      <a:pPr lvl="0" indent="0" marL="0">
+                        <a:buNone/>
+                      </a:pPr>
+                      <a:r>
+                        <a:rPr/>
+                        <a:t>balsam fir</a:t>
+                      </a:r>
+                    </a:p>
+                  </a:txBody>
+                </a:tc>
+              </a:tr>
+              <a:tr h="0">
+                <a:tc>
+                  <a:txBody>
+                    <a:bodyPr/>
+                    <a:lstStyle/>
+                    <a:p>
+                      <a:pPr lvl="0" indent="0" marL="0">
+                        <a:buNone/>
+                      </a:pPr>
+                      <a:r>
+                        <a:rPr/>
+                        <a:t>4</a:t>
+                      </a:r>
+                    </a:p>
+                  </a:txBody>
+                </a:tc>
+                <a:tc>
+                  <a:txBody>
+                    <a:bodyPr/>
+                    <a:lstStyle/>
+                    <a:p>
+                      <a:pPr lvl="0" indent="0" marL="0">
+                        <a:buNone/>
+                      </a:pPr>
+                      <a:r>
+                        <a:rPr/>
+                        <a:t>12</a:t>
+                      </a:r>
+                    </a:p>
+                  </a:txBody>
+                </a:tc>
+                <a:tc>
+                  <a:txBody>
+                    <a:bodyPr/>
+                    <a:lstStyle/>
+                    <a:p>
+                      <a:pPr lvl="0" indent="0" marL="0">
+                        <a:buNone/>
+                      </a:pPr>
+                      <a:r>
+                        <a:rPr/>
+                        <a:t>6.4</a:t>
+                      </a:r>
+                    </a:p>
+                  </a:txBody>
+                </a:tc>
+                <a:tc>
+                  <a:txBody>
+                    <a:bodyPr/>
+                    <a:lstStyle/>
+                    <a:p>
+                      <a:pPr lvl="0" indent="0" marL="0">
+                        <a:buNone/>
+                      </a:pPr>
+                      <a:r>
+                        <a:rPr/>
+                        <a:t>51.8</a:t>
+                      </a:r>
+                    </a:p>
+                  </a:txBody>
+                </a:tc>
+                <a:tc>
+                  <a:txBody>
+                    <a:bodyPr/>
+                    <a:lstStyle/>
+                    <a:p>
+                      <a:pPr lvl="0" indent="0" marL="0">
+                        <a:buNone/>
+                      </a:pPr>
+                      <a:r>
+                        <a:rPr/>
+                        <a:t>113.92</a:t>
+                      </a:r>
+                    </a:p>
+                  </a:txBody>
+                </a:tc>
+                <a:tc>
+                  <a:txBody>
+                    <a:bodyPr/>
+                    <a:lstStyle/>
+                    <a:p>
+                      <a:pPr lvl="0" indent="0" marL="0">
+                        <a:buNone/>
+                      </a:pPr>
+                      <a:r>
+                        <a:rPr/>
+                        <a:t>balsam fir</a:t>
+                      </a:r>
+                    </a:p>
+                  </a:txBody>
+                </a:tc>
+              </a:tr>
+            </a:tbl>
+          </a:graphicData>
+        </a:graphic>
+      </p:graphicFrame>
     </p:spTree>
   </p:cSld>
 </p:sld>
@@ -6424,38 +6425,1147 @@
             </a:pPr>
             <a:r>
               <a:rPr/>
-              <a:t>Base datset calculations:</a:t>
+              <a:t>Filtered data (minimum 100 data points)</a:t>
             </a:r>
           </a:p>
         </p:txBody>
       </p:sp>
-      <p:sp>
-        <p:nvSpPr>
-          <p:cNvPr id="3" name="Content Placeholder 2"/>
-          <p:cNvSpPr>
-            <a:spLocks noGrp="1"/>
-          </p:cNvSpPr>
+      <p:graphicFrame>
+        <p:nvGraphicFramePr>
+          <p:cNvPr id="6" name="Content Placeholder 5"/>
+          <p:cNvGraphicFramePr>
+            <a:graphicFrameLocks noGrp="1"/>
+          </p:cNvGraphicFramePr>
           <p:nvPr>
             <p:ph idx="1"/>
           </p:nvPr>
-        </p:nvSpPr>
-        <p:spPr/>
-        <p:txBody>
-          <a:bodyPr/>
-          <a:lstStyle/>
-          <a:p>
-            <a:pPr lvl="0" indent="0">
-              <a:buNone/>
-            </a:pPr>
-            <a:r>
-              <a:rPr>
-                <a:latin typeface="Courier"/>
-              </a:rPr>
-              <a:t>Average Root Mean Squared Log Error (RMSLE) for k 3: 0.15806802121296354</a:t>
-            </a:r>
-          </a:p>
-        </p:txBody>
-      </p:sp>
+        </p:nvGraphicFramePr>
+        <p:xfrm>
+          <a:off x="457200" y="1193800"/>
+          <a:ext cx="8229600" cy="3390900"/>
+        </p:xfrm>
+        <a:graphic>
+          <a:graphicData uri="http://schemas.openxmlformats.org/drawingml/2006/table">
+            <a:tbl>
+              <a:tblPr firstRow="1" bandRow="1">
+                <a:tableStyleId>{5C22544A-7EE6-4342-B048-85BDC9FD1C3A}</a:tableStyleId>
+              </a:tblPr>
+              <a:tblGrid>
+                <a:gridCol w="1371600"/>
+                <a:gridCol w="1371600"/>
+                <a:gridCol w="1371600"/>
+                <a:gridCol w="1371600"/>
+                <a:gridCol w="1371600"/>
+                <a:gridCol w="1371600"/>
+              </a:tblGrid>
+              <a:tr h="0">
+                <a:tc>
+                  <a:txBody>
+                    <a:bodyPr/>
+                    <a:lstStyle/>
+                    <a:p>
+                      <a:endParaRPr/>
+                    </a:p>
+                  </a:txBody>
+                  <a:tcPr/>
+                </a:tc>
+                <a:tc>
+                  <a:txBody>
+                    <a:bodyPr/>
+                    <a:lstStyle/>
+                    <a:p>
+                      <a:pPr lvl="0" indent="0" marL="0">
+                        <a:buNone/>
+                      </a:pPr>
+                      <a:r>
+                        <a:rPr/>
+                        <a:t>SPCD</a:t>
+                      </a:r>
+                    </a:p>
+                  </a:txBody>
+                  <a:tcPr/>
+                </a:tc>
+                <a:tc>
+                  <a:txBody>
+                    <a:bodyPr/>
+                    <a:lstStyle/>
+                    <a:p>
+                      <a:pPr lvl="0" indent="0" marL="0">
+                        <a:buNone/>
+                      </a:pPr>
+                      <a:r>
+                        <a:rPr/>
+                        <a:t>DO_BH</a:t>
+                      </a:r>
+                    </a:p>
+                  </a:txBody>
+                  <a:tcPr/>
+                </a:tc>
+                <a:tc>
+                  <a:txBody>
+                    <a:bodyPr/>
+                    <a:lstStyle/>
+                    <a:p>
+                      <a:pPr lvl="0" indent="0" marL="0">
+                        <a:buNone/>
+                      </a:pPr>
+                      <a:r>
+                        <a:rPr/>
+                        <a:t>HT_TOT</a:t>
+                      </a:r>
+                    </a:p>
+                  </a:txBody>
+                  <a:tcPr/>
+                </a:tc>
+                <a:tc>
+                  <a:txBody>
+                    <a:bodyPr/>
+                    <a:lstStyle/>
+                    <a:p>
+                      <a:pPr lvl="0" indent="0" marL="0">
+                        <a:buNone/>
+                      </a:pPr>
+                      <a:r>
+                        <a:rPr/>
+                        <a:t>TT_DW_CRM</a:t>
+                      </a:r>
+                    </a:p>
+                  </a:txBody>
+                  <a:tcPr/>
+                </a:tc>
+                <a:tc>
+                  <a:txBody>
+                    <a:bodyPr/>
+                    <a:lstStyle/>
+                    <a:p>
+                      <a:pPr lvl="0" indent="0" marL="0">
+                        <a:buNone/>
+                      </a:pPr>
+                      <a:r>
+                        <a:rPr/>
+                        <a:t>COMMON_NAME</a:t>
+                      </a:r>
+                    </a:p>
+                  </a:txBody>
+                  <a:tcPr/>
+                </a:tc>
+              </a:tr>
+              <a:tr h="0">
+                <a:tc>
+                  <a:txBody>
+                    <a:bodyPr/>
+                    <a:lstStyle/>
+                    <a:p>
+                      <a:pPr lvl="0" indent="0" marL="0">
+                        <a:buNone/>
+                      </a:pPr>
+                      <a:r>
+                        <a:rPr/>
+                        <a:t>0</a:t>
+                      </a:r>
+                    </a:p>
+                  </a:txBody>
+                </a:tc>
+                <a:tc>
+                  <a:txBody>
+                    <a:bodyPr/>
+                    <a:lstStyle/>
+                    <a:p>
+                      <a:pPr lvl="0" indent="0" marL="0">
+                        <a:buNone/>
+                      </a:pPr>
+                      <a:r>
+                        <a:rPr/>
+                        <a:t>12</a:t>
+                      </a:r>
+                    </a:p>
+                  </a:txBody>
+                </a:tc>
+                <a:tc>
+                  <a:txBody>
+                    <a:bodyPr/>
+                    <a:lstStyle/>
+                    <a:p>
+                      <a:pPr lvl="0" indent="0" marL="0">
+                        <a:buNone/>
+                      </a:pPr>
+                      <a:r>
+                        <a:rPr/>
+                        <a:t>7.5</a:t>
+                      </a:r>
+                    </a:p>
+                  </a:txBody>
+                </a:tc>
+                <a:tc>
+                  <a:txBody>
+                    <a:bodyPr/>
+                    <a:lstStyle/>
+                    <a:p>
+                      <a:pPr lvl="0" indent="0" marL="0">
+                        <a:buNone/>
+                      </a:pPr>
+                      <a:r>
+                        <a:rPr/>
+                        <a:t>45.2</a:t>
+                      </a:r>
+                    </a:p>
+                  </a:txBody>
+                </a:tc>
+                <a:tc>
+                  <a:txBody>
+                    <a:bodyPr/>
+                    <a:lstStyle/>
+                    <a:p>
+                      <a:pPr lvl="0" indent="0" marL="0">
+                        <a:buNone/>
+                      </a:pPr>
+                      <a:r>
+                        <a:rPr/>
+                        <a:t>178.86</a:t>
+                      </a:r>
+                    </a:p>
+                  </a:txBody>
+                </a:tc>
+                <a:tc>
+                  <a:txBody>
+                    <a:bodyPr/>
+                    <a:lstStyle/>
+                    <a:p>
+                      <a:pPr lvl="0" indent="0" marL="0">
+                        <a:buNone/>
+                      </a:pPr>
+                      <a:r>
+                        <a:rPr/>
+                        <a:t>balsam fir</a:t>
+                      </a:r>
+                    </a:p>
+                  </a:txBody>
+                </a:tc>
+              </a:tr>
+              <a:tr h="0">
+                <a:tc>
+                  <a:txBody>
+                    <a:bodyPr/>
+                    <a:lstStyle/>
+                    <a:p>
+                      <a:pPr lvl="0" indent="0" marL="0">
+                        <a:buNone/>
+                      </a:pPr>
+                      <a:r>
+                        <a:rPr/>
+                        <a:t>1</a:t>
+                      </a:r>
+                    </a:p>
+                  </a:txBody>
+                </a:tc>
+                <a:tc>
+                  <a:txBody>
+                    <a:bodyPr/>
+                    <a:lstStyle/>
+                    <a:p>
+                      <a:pPr lvl="0" indent="0" marL="0">
+                        <a:buNone/>
+                      </a:pPr>
+                      <a:r>
+                        <a:rPr/>
+                        <a:t>12</a:t>
+                      </a:r>
+                    </a:p>
+                  </a:txBody>
+                </a:tc>
+                <a:tc>
+                  <a:txBody>
+                    <a:bodyPr/>
+                    <a:lstStyle/>
+                    <a:p>
+                      <a:pPr lvl="0" indent="0" marL="0">
+                        <a:buNone/>
+                      </a:pPr>
+                      <a:r>
+                        <a:rPr/>
+                        <a:t>9.3</a:t>
+                      </a:r>
+                    </a:p>
+                  </a:txBody>
+                </a:tc>
+                <a:tc>
+                  <a:txBody>
+                    <a:bodyPr/>
+                    <a:lstStyle/>
+                    <a:p>
+                      <a:pPr lvl="0" indent="0" marL="0">
+                        <a:buNone/>
+                      </a:pPr>
+                      <a:r>
+                        <a:rPr/>
+                        <a:t>62.7</a:t>
+                      </a:r>
+                    </a:p>
+                  </a:txBody>
+                </a:tc>
+                <a:tc>
+                  <a:txBody>
+                    <a:bodyPr/>
+                    <a:lstStyle/>
+                    <a:p>
+                      <a:pPr lvl="0" indent="0" marL="0">
+                        <a:buNone/>
+                      </a:pPr>
+                      <a:r>
+                        <a:rPr/>
+                        <a:t>323.46</a:t>
+                      </a:r>
+                    </a:p>
+                  </a:txBody>
+                </a:tc>
+                <a:tc>
+                  <a:txBody>
+                    <a:bodyPr/>
+                    <a:lstStyle/>
+                    <a:p>
+                      <a:pPr lvl="0" indent="0" marL="0">
+                        <a:buNone/>
+                      </a:pPr>
+                      <a:r>
+                        <a:rPr/>
+                        <a:t>balsam fir</a:t>
+                      </a:r>
+                    </a:p>
+                  </a:txBody>
+                </a:tc>
+              </a:tr>
+              <a:tr h="0">
+                <a:tc>
+                  <a:txBody>
+                    <a:bodyPr/>
+                    <a:lstStyle/>
+                    <a:p>
+                      <a:pPr lvl="0" indent="0" marL="0">
+                        <a:buNone/>
+                      </a:pPr>
+                      <a:r>
+                        <a:rPr/>
+                        <a:t>2</a:t>
+                      </a:r>
+                    </a:p>
+                  </a:txBody>
+                </a:tc>
+                <a:tc>
+                  <a:txBody>
+                    <a:bodyPr/>
+                    <a:lstStyle/>
+                    <a:p>
+                      <a:pPr lvl="0" indent="0" marL="0">
+                        <a:buNone/>
+                      </a:pPr>
+                      <a:r>
+                        <a:rPr/>
+                        <a:t>12</a:t>
+                      </a:r>
+                    </a:p>
+                  </a:txBody>
+                </a:tc>
+                <a:tc>
+                  <a:txBody>
+                    <a:bodyPr/>
+                    <a:lstStyle/>
+                    <a:p>
+                      <a:pPr lvl="0" indent="0" marL="0">
+                        <a:buNone/>
+                      </a:pPr>
+                      <a:r>
+                        <a:rPr/>
+                        <a:t>9.7</a:t>
+                      </a:r>
+                    </a:p>
+                  </a:txBody>
+                </a:tc>
+                <a:tc>
+                  <a:txBody>
+                    <a:bodyPr/>
+                    <a:lstStyle/>
+                    <a:p>
+                      <a:pPr lvl="0" indent="0" marL="0">
+                        <a:buNone/>
+                      </a:pPr>
+                      <a:r>
+                        <a:rPr/>
+                        <a:t>56.7</a:t>
+                      </a:r>
+                    </a:p>
+                  </a:txBody>
+                </a:tc>
+                <a:tc>
+                  <a:txBody>
+                    <a:bodyPr/>
+                    <a:lstStyle/>
+                    <a:p>
+                      <a:pPr lvl="0" indent="0" marL="0">
+                        <a:buNone/>
+                      </a:pPr>
+                      <a:r>
+                        <a:rPr/>
+                        <a:t>342.47</a:t>
+                      </a:r>
+                    </a:p>
+                  </a:txBody>
+                </a:tc>
+                <a:tc>
+                  <a:txBody>
+                    <a:bodyPr/>
+                    <a:lstStyle/>
+                    <a:p>
+                      <a:pPr lvl="0" indent="0" marL="0">
+                        <a:buNone/>
+                      </a:pPr>
+                      <a:r>
+                        <a:rPr/>
+                        <a:t>balsam fir</a:t>
+                      </a:r>
+                    </a:p>
+                  </a:txBody>
+                </a:tc>
+              </a:tr>
+              <a:tr h="0">
+                <a:tc>
+                  <a:txBody>
+                    <a:bodyPr/>
+                    <a:lstStyle/>
+                    <a:p>
+                      <a:pPr lvl="0" indent="0" marL="0">
+                        <a:buNone/>
+                      </a:pPr>
+                      <a:r>
+                        <a:rPr/>
+                        <a:t>3</a:t>
+                      </a:r>
+                    </a:p>
+                  </a:txBody>
+                </a:tc>
+                <a:tc>
+                  <a:txBody>
+                    <a:bodyPr/>
+                    <a:lstStyle/>
+                    <a:p>
+                      <a:pPr lvl="0" indent="0" marL="0">
+                        <a:buNone/>
+                      </a:pPr>
+                      <a:r>
+                        <a:rPr/>
+                        <a:t>12</a:t>
+                      </a:r>
+                    </a:p>
+                  </a:txBody>
+                </a:tc>
+                <a:tc>
+                  <a:txBody>
+                    <a:bodyPr/>
+                    <a:lstStyle/>
+                    <a:p>
+                      <a:pPr lvl="0" indent="0" marL="0">
+                        <a:buNone/>
+                      </a:pPr>
+                      <a:r>
+                        <a:rPr/>
+                        <a:t>11.4</a:t>
+                      </a:r>
+                    </a:p>
+                  </a:txBody>
+                </a:tc>
+                <a:tc>
+                  <a:txBody>
+                    <a:bodyPr/>
+                    <a:lstStyle/>
+                    <a:p>
+                      <a:pPr lvl="0" indent="0" marL="0">
+                        <a:buNone/>
+                      </a:pPr>
+                      <a:r>
+                        <a:rPr/>
+                        <a:t>66.1</a:t>
+                      </a:r>
+                    </a:p>
+                  </a:txBody>
+                </a:tc>
+                <a:tc>
+                  <a:txBody>
+                    <a:bodyPr/>
+                    <a:lstStyle/>
+                    <a:p>
+                      <a:pPr lvl="0" indent="0" marL="0">
+                        <a:buNone/>
+                      </a:pPr>
+                      <a:r>
+                        <a:rPr/>
+                        <a:t>499.35</a:t>
+                      </a:r>
+                    </a:p>
+                  </a:txBody>
+                </a:tc>
+                <a:tc>
+                  <a:txBody>
+                    <a:bodyPr/>
+                    <a:lstStyle/>
+                    <a:p>
+                      <a:pPr lvl="0" indent="0" marL="0">
+                        <a:buNone/>
+                      </a:pPr>
+                      <a:r>
+                        <a:rPr/>
+                        <a:t>balsam fir</a:t>
+                      </a:r>
+                    </a:p>
+                  </a:txBody>
+                </a:tc>
+              </a:tr>
+              <a:tr h="0">
+                <a:tc>
+                  <a:txBody>
+                    <a:bodyPr/>
+                    <a:lstStyle/>
+                    <a:p>
+                      <a:pPr lvl="0" indent="0" marL="0">
+                        <a:buNone/>
+                      </a:pPr>
+                      <a:r>
+                        <a:rPr/>
+                        <a:t>4</a:t>
+                      </a:r>
+                    </a:p>
+                  </a:txBody>
+                </a:tc>
+                <a:tc>
+                  <a:txBody>
+                    <a:bodyPr/>
+                    <a:lstStyle/>
+                    <a:p>
+                      <a:pPr lvl="0" indent="0" marL="0">
+                        <a:buNone/>
+                      </a:pPr>
+                      <a:r>
+                        <a:rPr/>
+                        <a:t>12</a:t>
+                      </a:r>
+                    </a:p>
+                  </a:txBody>
+                </a:tc>
+                <a:tc>
+                  <a:txBody>
+                    <a:bodyPr/>
+                    <a:lstStyle/>
+                    <a:p>
+                      <a:pPr lvl="0" indent="0" marL="0">
+                        <a:buNone/>
+                      </a:pPr>
+                      <a:r>
+                        <a:rPr/>
+                        <a:t>6.4</a:t>
+                      </a:r>
+                    </a:p>
+                  </a:txBody>
+                </a:tc>
+                <a:tc>
+                  <a:txBody>
+                    <a:bodyPr/>
+                    <a:lstStyle/>
+                    <a:p>
+                      <a:pPr lvl="0" indent="0" marL="0">
+                        <a:buNone/>
+                      </a:pPr>
+                      <a:r>
+                        <a:rPr/>
+                        <a:t>51.8</a:t>
+                      </a:r>
+                    </a:p>
+                  </a:txBody>
+                </a:tc>
+                <a:tc>
+                  <a:txBody>
+                    <a:bodyPr/>
+                    <a:lstStyle/>
+                    <a:p>
+                      <a:pPr lvl="0" indent="0" marL="0">
+                        <a:buNone/>
+                      </a:pPr>
+                      <a:r>
+                        <a:rPr/>
+                        <a:t>113.92</a:t>
+                      </a:r>
+                    </a:p>
+                  </a:txBody>
+                </a:tc>
+                <a:tc>
+                  <a:txBody>
+                    <a:bodyPr/>
+                    <a:lstStyle/>
+                    <a:p>
+                      <a:pPr lvl="0" indent="0" marL="0">
+                        <a:buNone/>
+                      </a:pPr>
+                      <a:r>
+                        <a:rPr/>
+                        <a:t>balsam fir</a:t>
+                      </a:r>
+                    </a:p>
+                  </a:txBody>
+                </a:tc>
+              </a:tr>
+              <a:tr h="0">
+                <a:tc>
+                  <a:txBody>
+                    <a:bodyPr/>
+                    <a:lstStyle/>
+                    <a:p>
+                      <a:pPr lvl="0" indent="0" marL="0">
+                        <a:buNone/>
+                      </a:pPr>
+                      <a:r>
+                        <a:rPr/>
+                        <a:t>...</a:t>
+                      </a:r>
+                    </a:p>
+                  </a:txBody>
+                </a:tc>
+                <a:tc>
+                  <a:txBody>
+                    <a:bodyPr/>
+                    <a:lstStyle/>
+                    <a:p>
+                      <a:pPr lvl="0" indent="0" marL="0">
+                        <a:buNone/>
+                      </a:pPr>
+                      <a:r>
+                        <a:rPr/>
+                        <a:t>...</a:t>
+                      </a:r>
+                    </a:p>
+                  </a:txBody>
+                </a:tc>
+                <a:tc>
+                  <a:txBody>
+                    <a:bodyPr/>
+                    <a:lstStyle/>
+                    <a:p>
+                      <a:pPr lvl="0" indent="0" marL="0">
+                        <a:buNone/>
+                      </a:pPr>
+                      <a:r>
+                        <a:rPr/>
+                        <a:t>...</a:t>
+                      </a:r>
+                    </a:p>
+                  </a:txBody>
+                </a:tc>
+                <a:tc>
+                  <a:txBody>
+                    <a:bodyPr/>
+                    <a:lstStyle/>
+                    <a:p>
+                      <a:pPr lvl="0" indent="0" marL="0">
+                        <a:buNone/>
+                      </a:pPr>
+                      <a:r>
+                        <a:rPr/>
+                        <a:t>...</a:t>
+                      </a:r>
+                    </a:p>
+                  </a:txBody>
+                </a:tc>
+                <a:tc>
+                  <a:txBody>
+                    <a:bodyPr/>
+                    <a:lstStyle/>
+                    <a:p>
+                      <a:pPr lvl="0" indent="0" marL="0">
+                        <a:buNone/>
+                      </a:pPr>
+                      <a:r>
+                        <a:rPr/>
+                        <a:t>...</a:t>
+                      </a:r>
+                    </a:p>
+                  </a:txBody>
+                </a:tc>
+                <a:tc>
+                  <a:txBody>
+                    <a:bodyPr/>
+                    <a:lstStyle/>
+                    <a:p>
+                      <a:pPr lvl="0" indent="0" marL="0">
+                        <a:buNone/>
+                      </a:pPr>
+                      <a:r>
+                        <a:rPr/>
+                        <a:t>...</a:t>
+                      </a:r>
+                    </a:p>
+                  </a:txBody>
+                </a:tc>
+              </a:tr>
+              <a:tr h="0">
+                <a:tc>
+                  <a:txBody>
+                    <a:bodyPr/>
+                    <a:lstStyle/>
+                    <a:p>
+                      <a:pPr lvl="0" indent="0" marL="0">
+                        <a:buNone/>
+                      </a:pPr>
+                      <a:r>
+                        <a:rPr/>
+                        <a:t>137035</a:t>
+                      </a:r>
+                    </a:p>
+                  </a:txBody>
+                </a:tc>
+                <a:tc>
+                  <a:txBody>
+                    <a:bodyPr/>
+                    <a:lstStyle/>
+                    <a:p>
+                      <a:pPr lvl="0" indent="0" marL="0">
+                        <a:buNone/>
+                      </a:pPr>
+                      <a:r>
+                        <a:rPr/>
+                        <a:t>691</a:t>
+                      </a:r>
+                    </a:p>
+                  </a:txBody>
+                </a:tc>
+                <a:tc>
+                  <a:txBody>
+                    <a:bodyPr/>
+                    <a:lstStyle/>
+                    <a:p>
+                      <a:pPr lvl="0" indent="0" marL="0">
+                        <a:buNone/>
+                      </a:pPr>
+                      <a:r>
+                        <a:rPr/>
+                        <a:t>3.7</a:t>
+                      </a:r>
+                    </a:p>
+                  </a:txBody>
+                </a:tc>
+                <a:tc>
+                  <a:txBody>
+                    <a:bodyPr/>
+                    <a:lstStyle/>
+                    <a:p>
+                      <a:pPr lvl="0" indent="0" marL="0">
+                        <a:buNone/>
+                      </a:pPr>
+                      <a:r>
+                        <a:rPr/>
+                        <a:t>25.4</a:t>
+                      </a:r>
+                    </a:p>
+                  </a:txBody>
+                </a:tc>
+                <a:tc>
+                  <a:txBody>
+                    <a:bodyPr/>
+                    <a:lstStyle/>
+                    <a:p>
+                      <a:pPr lvl="0" indent="0" marL="0">
+                        <a:buNone/>
+                      </a:pPr>
+                      <a:r>
+                        <a:rPr/>
+                        <a:t>40.76</a:t>
+                      </a:r>
+                    </a:p>
+                  </a:txBody>
+                </a:tc>
+                <a:tc>
+                  <a:txBody>
+                    <a:bodyPr/>
+                    <a:lstStyle/>
+                    <a:p>
+                      <a:pPr lvl="0" indent="0" marL="0">
+                        <a:buNone/>
+                      </a:pPr>
+                      <a:r>
+                        <a:rPr/>
+                        <a:t>water tupelo</a:t>
+                      </a:r>
+                    </a:p>
+                  </a:txBody>
+                </a:tc>
+              </a:tr>
+              <a:tr h="0">
+                <a:tc>
+                  <a:txBody>
+                    <a:bodyPr/>
+                    <a:lstStyle/>
+                    <a:p>
+                      <a:pPr lvl="0" indent="0" marL="0">
+                        <a:buNone/>
+                      </a:pPr>
+                      <a:r>
+                        <a:rPr/>
+                        <a:t>137036</a:t>
+                      </a:r>
+                    </a:p>
+                  </a:txBody>
+                </a:tc>
+                <a:tc>
+                  <a:txBody>
+                    <a:bodyPr/>
+                    <a:lstStyle/>
+                    <a:p>
+                      <a:pPr lvl="0" indent="0" marL="0">
+                        <a:buNone/>
+                      </a:pPr>
+                      <a:r>
+                        <a:rPr/>
+                        <a:t>691</a:t>
+                      </a:r>
+                    </a:p>
+                  </a:txBody>
+                </a:tc>
+                <a:tc>
+                  <a:txBody>
+                    <a:bodyPr/>
+                    <a:lstStyle/>
+                    <a:p>
+                      <a:pPr lvl="0" indent="0" marL="0">
+                        <a:buNone/>
+                      </a:pPr>
+                      <a:r>
+                        <a:rPr/>
+                        <a:t>3.2</a:t>
+                      </a:r>
+                    </a:p>
+                  </a:txBody>
+                </a:tc>
+                <a:tc>
+                  <a:txBody>
+                    <a:bodyPr/>
+                    <a:lstStyle/>
+                    <a:p>
+                      <a:pPr lvl="0" indent="0" marL="0">
+                        <a:buNone/>
+                      </a:pPr>
+                      <a:r>
+                        <a:rPr/>
+                        <a:t>28.8</a:t>
+                      </a:r>
+                    </a:p>
+                  </a:txBody>
+                </a:tc>
+                <a:tc>
+                  <a:txBody>
+                    <a:bodyPr/>
+                    <a:lstStyle/>
+                    <a:p>
+                      <a:pPr lvl="0" indent="0" marL="0">
+                        <a:buNone/>
+                      </a:pPr>
+                      <a:r>
+                        <a:rPr/>
+                        <a:t>28.44</a:t>
+                      </a:r>
+                    </a:p>
+                  </a:txBody>
+                </a:tc>
+                <a:tc>
+                  <a:txBody>
+                    <a:bodyPr/>
+                    <a:lstStyle/>
+                    <a:p>
+                      <a:pPr lvl="0" indent="0" marL="0">
+                        <a:buNone/>
+                      </a:pPr>
+                      <a:r>
+                        <a:rPr/>
+                        <a:t>water tupelo</a:t>
+                      </a:r>
+                    </a:p>
+                  </a:txBody>
+                </a:tc>
+              </a:tr>
+              <a:tr h="0">
+                <a:tc>
+                  <a:txBody>
+                    <a:bodyPr/>
+                    <a:lstStyle/>
+                    <a:p>
+                      <a:pPr lvl="0" indent="0" marL="0">
+                        <a:buNone/>
+                      </a:pPr>
+                      <a:r>
+                        <a:rPr/>
+                        <a:t>137037</a:t>
+                      </a:r>
+                    </a:p>
+                  </a:txBody>
+                </a:tc>
+                <a:tc>
+                  <a:txBody>
+                    <a:bodyPr/>
+                    <a:lstStyle/>
+                    <a:p>
+                      <a:pPr lvl="0" indent="0" marL="0">
+                        <a:buNone/>
+                      </a:pPr>
+                      <a:r>
+                        <a:rPr/>
+                        <a:t>691</a:t>
+                      </a:r>
+                    </a:p>
+                  </a:txBody>
+                </a:tc>
+                <a:tc>
+                  <a:txBody>
+                    <a:bodyPr/>
+                    <a:lstStyle/>
+                    <a:p>
+                      <a:pPr lvl="0" indent="0" marL="0">
+                        <a:buNone/>
+                      </a:pPr>
+                      <a:r>
+                        <a:rPr/>
+                        <a:t>4.7</a:t>
+                      </a:r>
+                    </a:p>
+                  </a:txBody>
+                </a:tc>
+                <a:tc>
+                  <a:txBody>
+                    <a:bodyPr/>
+                    <a:lstStyle/>
+                    <a:p>
+                      <a:pPr lvl="0" indent="0" marL="0">
+                        <a:buNone/>
+                      </a:pPr>
+                      <a:r>
+                        <a:rPr/>
+                        <a:t>31.4</a:t>
+                      </a:r>
+                    </a:p>
+                  </a:txBody>
+                </a:tc>
+                <a:tc>
+                  <a:txBody>
+                    <a:bodyPr/>
+                    <a:lstStyle/>
+                    <a:p>
+                      <a:pPr lvl="0" indent="0" marL="0">
+                        <a:buNone/>
+                      </a:pPr>
+                      <a:r>
+                        <a:rPr/>
+                        <a:t>73.78</a:t>
+                      </a:r>
+                    </a:p>
+                  </a:txBody>
+                </a:tc>
+                <a:tc>
+                  <a:txBody>
+                    <a:bodyPr/>
+                    <a:lstStyle/>
+                    <a:p>
+                      <a:pPr lvl="0" indent="0" marL="0">
+                        <a:buNone/>
+                      </a:pPr>
+                      <a:r>
+                        <a:rPr/>
+                        <a:t>water tupelo</a:t>
+                      </a:r>
+                    </a:p>
+                  </a:txBody>
+                </a:tc>
+              </a:tr>
+              <a:tr h="0">
+                <a:tc>
+                  <a:txBody>
+                    <a:bodyPr/>
+                    <a:lstStyle/>
+                    <a:p>
+                      <a:pPr lvl="0" indent="0" marL="0">
+                        <a:buNone/>
+                      </a:pPr>
+                      <a:r>
+                        <a:rPr/>
+                        <a:t>137038</a:t>
+                      </a:r>
+                    </a:p>
+                  </a:txBody>
+                </a:tc>
+                <a:tc>
+                  <a:txBody>
+                    <a:bodyPr/>
+                    <a:lstStyle/>
+                    <a:p>
+                      <a:pPr lvl="0" indent="0" marL="0">
+                        <a:buNone/>
+                      </a:pPr>
+                      <a:r>
+                        <a:rPr/>
+                        <a:t>691</a:t>
+                      </a:r>
+                    </a:p>
+                  </a:txBody>
+                </a:tc>
+                <a:tc>
+                  <a:txBody>
+                    <a:bodyPr/>
+                    <a:lstStyle/>
+                    <a:p>
+                      <a:pPr lvl="0" indent="0" marL="0">
+                        <a:buNone/>
+                      </a:pPr>
+                      <a:r>
+                        <a:rPr/>
+                        <a:t>4.4</a:t>
+                      </a:r>
+                    </a:p>
+                  </a:txBody>
+                </a:tc>
+                <a:tc>
+                  <a:txBody>
+                    <a:bodyPr/>
+                    <a:lstStyle/>
+                    <a:p>
+                      <a:pPr lvl="0" indent="0" marL="0">
+                        <a:buNone/>
+                      </a:pPr>
+                      <a:r>
+                        <a:rPr/>
+                        <a:t>26.9</a:t>
+                      </a:r>
+                    </a:p>
+                  </a:txBody>
+                </a:tc>
+                <a:tc>
+                  <a:txBody>
+                    <a:bodyPr/>
+                    <a:lstStyle/>
+                    <a:p>
+                      <a:pPr lvl="0" indent="0" marL="0">
+                        <a:buNone/>
+                      </a:pPr>
+                      <a:r>
+                        <a:rPr/>
+                        <a:t>62.64</a:t>
+                      </a:r>
+                    </a:p>
+                  </a:txBody>
+                </a:tc>
+                <a:tc>
+                  <a:txBody>
+                    <a:bodyPr/>
+                    <a:lstStyle/>
+                    <a:p>
+                      <a:pPr lvl="0" indent="0" marL="0">
+                        <a:buNone/>
+                      </a:pPr>
+                      <a:r>
+                        <a:rPr/>
+                        <a:t>water tupelo</a:t>
+                      </a:r>
+                    </a:p>
+                  </a:txBody>
+                </a:tc>
+              </a:tr>
+              <a:tr h="0">
+                <a:tc>
+                  <a:txBody>
+                    <a:bodyPr/>
+                    <a:lstStyle/>
+                    <a:p>
+                      <a:pPr lvl="0" indent="0" marL="0">
+                        <a:buNone/>
+                      </a:pPr>
+                      <a:r>
+                        <a:rPr/>
+                        <a:t>137039</a:t>
+                      </a:r>
+                    </a:p>
+                  </a:txBody>
+                </a:tc>
+                <a:tc>
+                  <a:txBody>
+                    <a:bodyPr/>
+                    <a:lstStyle/>
+                    <a:p>
+                      <a:pPr lvl="0" indent="0" marL="0">
+                        <a:buNone/>
+                      </a:pPr>
+                      <a:r>
+                        <a:rPr/>
+                        <a:t>691</a:t>
+                      </a:r>
+                    </a:p>
+                  </a:txBody>
+                </a:tc>
+                <a:tc>
+                  <a:txBody>
+                    <a:bodyPr/>
+                    <a:lstStyle/>
+                    <a:p>
+                      <a:pPr lvl="0" indent="0" marL="0">
+                        <a:buNone/>
+                      </a:pPr>
+                      <a:r>
+                        <a:rPr/>
+                        <a:t>4.2</a:t>
+                      </a:r>
+                    </a:p>
+                  </a:txBody>
+                </a:tc>
+                <a:tc>
+                  <a:txBody>
+                    <a:bodyPr/>
+                    <a:lstStyle/>
+                    <a:p>
+                      <a:pPr lvl="0" indent="0" marL="0">
+                        <a:buNone/>
+                      </a:pPr>
+                      <a:r>
+                        <a:rPr/>
+                        <a:t>28.1</a:t>
+                      </a:r>
+                    </a:p>
+                  </a:txBody>
+                </a:tc>
+                <a:tc>
+                  <a:txBody>
+                    <a:bodyPr/>
+                    <a:lstStyle/>
+                    <a:p>
+                      <a:pPr lvl="0" indent="0" marL="0">
+                        <a:buNone/>
+                      </a:pPr>
+                      <a:r>
+                        <a:rPr/>
+                        <a:t>55.82</a:t>
+                      </a:r>
+                    </a:p>
+                  </a:txBody>
+                </a:tc>
+                <a:tc>
+                  <a:txBody>
+                    <a:bodyPr/>
+                    <a:lstStyle/>
+                    <a:p>
+                      <a:pPr lvl="0" indent="0" marL="0">
+                        <a:buNone/>
+                      </a:pPr>
+                      <a:r>
+                        <a:rPr/>
+                        <a:t>water tupelo</a:t>
+                      </a:r>
+                    </a:p>
+                  </a:txBody>
+                </a:tc>
+              </a:tr>
+            </a:tbl>
+          </a:graphicData>
+        </a:graphic>
+      </p:graphicFrame>
     </p:spTree>
   </p:cSld>
 </p:sld>
@@ -6547,6 +7657,80 @@
 </file>
 
 <file path=ppt/slides/slide20.xml><?xml version="1.0" encoding="utf-8"?>
+<p:sld xmlns:a="http://schemas.openxmlformats.org/drawingml/2006/main" xmlns:r="http://schemas.openxmlformats.org/officeDocument/2006/relationships" xmlns:p="http://schemas.openxmlformats.org/presentationml/2006/main">
+  <p:cSld>
+    <p:spTree>
+      <p:nvGrpSpPr>
+        <p:cNvPr id="1" name=""/>
+        <p:cNvGrpSpPr/>
+        <p:nvPr/>
+      </p:nvGrpSpPr>
+      <p:grpSpPr>
+        <a:xfrm>
+          <a:off x="0" y="0"/>
+          <a:ext cx="0" cy="0"/>
+          <a:chOff x="0" y="0"/>
+          <a:chExt cx="0" cy="0"/>
+        </a:xfrm>
+      </p:grpSpPr>
+      <p:sp>
+        <p:nvSpPr>
+          <p:cNvPr id="2" name="Title 1"/>
+          <p:cNvSpPr>
+            <a:spLocks noGrp="1"/>
+          </p:cNvSpPr>
+          <p:nvPr>
+            <p:ph type="title"/>
+          </p:nvPr>
+        </p:nvSpPr>
+        <p:spPr/>
+        <p:txBody>
+          <a:bodyPr/>
+          <a:lstStyle/>
+          <a:p>
+            <a:pPr lvl="0" indent="0" marL="0">
+              <a:buNone/>
+            </a:pPr>
+            <a:r>
+              <a:rPr/>
+              <a:t>Base datset calculations:</a:t>
+            </a:r>
+          </a:p>
+        </p:txBody>
+      </p:sp>
+      <p:sp>
+        <p:nvSpPr>
+          <p:cNvPr id="3" name="Content Placeholder 2"/>
+          <p:cNvSpPr>
+            <a:spLocks noGrp="1"/>
+          </p:cNvSpPr>
+          <p:nvPr>
+            <p:ph idx="1"/>
+          </p:nvPr>
+        </p:nvSpPr>
+        <p:spPr/>
+        <p:txBody>
+          <a:bodyPr/>
+          <a:lstStyle/>
+          <a:p>
+            <a:pPr lvl="0" indent="0">
+              <a:buNone/>
+            </a:pPr>
+            <a:r>
+              <a:rPr>
+                <a:latin typeface="Courier"/>
+              </a:rPr>
+              <a:t>Average Root Mean Squared Log Error (RMSLE) for k = 3: 0.15806802121296354</a:t>
+            </a:r>
+          </a:p>
+        </p:txBody>
+      </p:sp>
+    </p:spTree>
+  </p:cSld>
+</p:sld>
+</file>
+
+<file path=ppt/slides/slide21.xml><?xml version="1.0" encoding="utf-8"?>
 <p:sld xmlns:a="http://schemas.openxmlformats.org/drawingml/2006/main" xmlns:r="http://schemas.openxmlformats.org/officeDocument/2006/relationships" xmlns:p="http://schemas.openxmlformats.org/presentationml/2006/main">
   <p:cSld>
     <p:spTree>

--- a/Project-3/presentation.pptx
+++ b/Project-3/presentation.pptx
@@ -24,6 +24,9 @@
     <p:sldId id="272" r:id="rId18"/>
     <p:sldId id="273" r:id="rId19"/>
     <p:sldId id="274" r:id="rId20"/>
+    <p:sldId id="275" r:id="rId21"/>
+    <p:sldId id="276" r:id="rId22"/>
+    <p:sldId id="277" r:id="rId23"/>
   </p:sldIdLst>
   <p:sldSz cx="9144000" cy="5143500" type="screen16x9"/>
   <p:notesSz cx="6858000" cy="9144000"/>
@@ -3459,7 +3462,37 @@
             </a:pPr>
             <a:r>
               <a:rPr/>
-              <a:t>Consultation SERC scientist</a:t>
+              <a:t>Consultation</a:t>
+            </a:r>
+          </a:p>
+        </p:txBody>
+      </p:sp>
+      <p:sp>
+        <p:nvSpPr>
+          <p:cNvPr id="3" name="Content Placeholder 2"/>
+          <p:cNvSpPr>
+            <a:spLocks noGrp="1"/>
+          </p:cNvSpPr>
+          <p:nvPr>
+            <p:ph idx="1"/>
+          </p:nvPr>
+        </p:nvSpPr>
+        <p:spPr/>
+        <p:txBody>
+          <a:bodyPr/>
+          <a:lstStyle/>
+          <a:p>
+            <a:pPr lvl="0"/>
+            <a:r>
+              <a:rPr/>
+              <a:t>We choose kNN regression over linear regression because when looking at the graphs Dean made, we saw that the tree diameter/height vs. biomass graphs all have exponential growth.</a:t>
+            </a:r>
+          </a:p>
+          <a:p>
+            <a:pPr lvl="0"/>
+            <a:r>
+              <a:rPr/>
+              <a:t>When relations between biomass and trees’ diameter and height are complex and nonlinear, data is abundant, and the model needs to be adaptive without making major changes in the model. kNN excels in capturing patterns and irregular patterns.</a:t>
             </a:r>
           </a:p>
         </p:txBody>
@@ -3526,12 +3559,21 @@
           <a:bodyPr/>
           <a:lstStyle/>
           <a:p>
-            <a:pPr lvl="0" indent="0" marL="0">
-              <a:buNone/>
-            </a:pPr>
+            <a:pPr lvl="0"/>
             <a:r>
               <a:rPr/>
-              <a:t>When predicting tree biomass, employ the performance metric root mean square logarithmic error since biomass data varies greatly, ranging from tiny saplings to enormous grandpa trees, some trees having exponential growth. RMSLE focuses on percentage errors, making it fair to both small and large trees, unlike RMSE, which we believe penalizes errors on big trees. Fitting biomass estimations where scale matters more than absolute error. This metric is particularly useful in accurately assessing the predictive performance of models when dealing with such diverse ranges of tree sizes. By prioritizing percentage errors, RMSLE provides a more balanced evaluation that considers the unique characteristics of tree biomass data.</a:t>
+              <a:t>When predicting tree biomass, we chose Root Mean Square Logarithmic Error for our performance metric since biomass data varies greatly, ranging from tiny saplings to enormous trees, and trees have exponential growth.</a:t>
+            </a:r>
+          </a:p>
+          <a:p>
+            <a:pPr lvl="0"/>
+            <a:r>
+              <a:rPr b="1"/>
+              <a:t>RMSLE over RMSE</a:t>
+            </a:r>
+            <a:r>
+              <a:rPr/>
+              <a:t>: focuses on percentage errors, making it fair to both small and large trees, unlike RMSE, which we believe penalizes errors on big trees. Fitting biomass estimations where scale matters more than absolute error. RMSLE provides a more balanced evaluation that considers the unique characteristics of tree biomass data.</a:t>
             </a:r>
           </a:p>
         </p:txBody>
@@ -3578,7 +3620,7 @@
             </a:pPr>
             <a:r>
               <a:rPr/>
-              <a:t>Model</a:t>
+              <a:t>Project Manager Model</a:t>
             </a:r>
           </a:p>
         </p:txBody>
@@ -3759,37 +3801,37 @@
                       </a:pPr>
                       <a:r>
                         <a:rPr/>
-                        <a:t>125.825473</a:t>
-                      </a:r>
-                    </a:p>
-                  </a:txBody>
-                </a:tc>
-                <a:tc>
-                  <a:txBody>
-                    <a:bodyPr/>
-                    <a:lstStyle/>
-                    <a:p>
-                      <a:pPr lvl="0" indent="0" marL="0">
-                        <a:buNone/>
-                      </a:pPr>
-                      <a:r>
-                        <a:rPr/>
-                        <a:t>34.801913</a:t>
-                      </a:r>
-                    </a:p>
-                  </a:txBody>
-                </a:tc>
-                <a:tc>
-                  <a:txBody>
-                    <a:bodyPr/>
-                    <a:lstStyle/>
-                    <a:p>
-                      <a:pPr lvl="0" indent="0" marL="0">
-                        <a:buNone/>
-                      </a:pPr>
-                      <a:r>
-                        <a:rPr/>
-                        <a:t>0.119574</a:t>
+                        <a:t>125.827396</a:t>
+                      </a:r>
+                    </a:p>
+                  </a:txBody>
+                </a:tc>
+                <a:tc>
+                  <a:txBody>
+                    <a:bodyPr/>
+                    <a:lstStyle/>
+                    <a:p>
+                      <a:pPr lvl="0" indent="0" marL="0">
+                        <a:buNone/>
+                      </a:pPr>
+                      <a:r>
+                        <a:rPr/>
+                        <a:t>34.820565</a:t>
+                      </a:r>
+                    </a:p>
+                  </a:txBody>
+                </a:tc>
+                <a:tc>
+                  <a:txBody>
+                    <a:bodyPr/>
+                    <a:lstStyle/>
+                    <a:p>
+                      <a:pPr lvl="0" indent="0" marL="0">
+                        <a:buNone/>
+                      </a:pPr>
+                      <a:r>
+                        <a:rPr/>
+                        <a:t>0.119617</a:t>
                       </a:r>
                     </a:p>
                   </a:txBody>
@@ -3851,37 +3893,37 @@
                       </a:pPr>
                       <a:r>
                         <a:rPr/>
-                        <a:t>129.651479</a:t>
-                      </a:r>
-                    </a:p>
-                  </a:txBody>
-                </a:tc>
-                <a:tc>
-                  <a:txBody>
-                    <a:bodyPr/>
-                    <a:lstStyle/>
-                    <a:p>
-                      <a:pPr lvl="0" indent="0" marL="0">
-                        <a:buNone/>
-                      </a:pPr>
-                      <a:r>
-                        <a:rPr/>
-                        <a:t>36.646493</a:t>
-                      </a:r>
-                    </a:p>
-                  </a:txBody>
-                </a:tc>
-                <a:tc>
-                  <a:txBody>
-                    <a:bodyPr/>
-                    <a:lstStyle/>
-                    <a:p>
-                      <a:pPr lvl="0" indent="0" marL="0">
-                        <a:buNone/>
-                      </a:pPr>
-                      <a:r>
-                        <a:rPr/>
-                        <a:t>0.123724</a:t>
+                        <a:t>129.650855</a:t>
+                      </a:r>
+                    </a:p>
+                  </a:txBody>
+                </a:tc>
+                <a:tc>
+                  <a:txBody>
+                    <a:bodyPr/>
+                    <a:lstStyle/>
+                    <a:p>
+                      <a:pPr lvl="0" indent="0" marL="0">
+                        <a:buNone/>
+                      </a:pPr>
+                      <a:r>
+                        <a:rPr/>
+                        <a:t>36.628377</a:t>
+                      </a:r>
+                    </a:p>
+                  </a:txBody>
+                </a:tc>
+                <a:tc>
+                  <a:txBody>
+                    <a:bodyPr/>
+                    <a:lstStyle/>
+                    <a:p>
+                      <a:pPr lvl="0" indent="0" marL="0">
+                        <a:buNone/>
+                      </a:pPr>
+                      <a:r>
+                        <a:rPr/>
+                        <a:t>0.123679</a:t>
                       </a:r>
                     </a:p>
                   </a:txBody>
@@ -4035,37 +4077,37 @@
                       </a:pPr>
                       <a:r>
                         <a:rPr/>
-                        <a:t>145.003601</a:t>
-                      </a:r>
-                    </a:p>
-                  </a:txBody>
-                </a:tc>
-                <a:tc>
-                  <a:txBody>
-                    <a:bodyPr/>
-                    <a:lstStyle/>
-                    <a:p>
-                      <a:pPr lvl="0" indent="0" marL="0">
-                        <a:buNone/>
-                      </a:pPr>
-                      <a:r>
-                        <a:rPr/>
-                        <a:t>41.209530</a:t>
-                      </a:r>
-                    </a:p>
-                  </a:txBody>
-                </a:tc>
-                <a:tc>
-                  <a:txBody>
-                    <a:bodyPr/>
-                    <a:lstStyle/>
-                    <a:p>
-                      <a:pPr lvl="0" indent="0" marL="0">
-                        <a:buNone/>
-                      </a:pPr>
-                      <a:r>
-                        <a:rPr/>
-                        <a:t>0.144063</a:t>
+                        <a:t>145.002852</a:t>
+                      </a:r>
+                    </a:p>
+                  </a:txBody>
+                </a:tc>
+                <a:tc>
+                  <a:txBody>
+                    <a:bodyPr/>
+                    <a:lstStyle/>
+                    <a:p>
+                      <a:pPr lvl="0" indent="0" marL="0">
+                        <a:buNone/>
+                      </a:pPr>
+                      <a:r>
+                        <a:rPr/>
+                        <a:t>41.168470</a:t>
+                      </a:r>
+                    </a:p>
+                  </a:txBody>
+                </a:tc>
+                <a:tc>
+                  <a:txBody>
+                    <a:bodyPr/>
+                    <a:lstStyle/>
+                    <a:p>
+                      <a:pPr lvl="0" indent="0" marL="0">
+                        <a:buNone/>
+                      </a:pPr>
+                      <a:r>
+                        <a:rPr/>
+                        <a:t>0.144052</a:t>
                       </a:r>
                     </a:p>
                   </a:txBody>
@@ -4127,37 +4169,37 @@
                       </a:pPr>
                       <a:r>
                         <a:rPr/>
-                        <a:t>147.451321</a:t>
-                      </a:r>
-                    </a:p>
-                  </a:txBody>
-                </a:tc>
-                <a:tc>
-                  <a:txBody>
-                    <a:bodyPr/>
-                    <a:lstStyle/>
-                    <a:p>
-                      <a:pPr lvl="0" indent="0" marL="0">
-                        <a:buNone/>
-                      </a:pPr>
-                      <a:r>
-                        <a:rPr/>
-                        <a:t>40.791681</a:t>
-                      </a:r>
-                    </a:p>
-                  </a:txBody>
-                </a:tc>
-                <a:tc>
-                  <a:txBody>
-                    <a:bodyPr/>
-                    <a:lstStyle/>
-                    <a:p>
-                      <a:pPr lvl="0" indent="0" marL="0">
-                        <a:buNone/>
-                      </a:pPr>
-                      <a:r>
-                        <a:rPr/>
-                        <a:t>0.142862</a:t>
+                        <a:t>147.449208</a:t>
+                      </a:r>
+                    </a:p>
+                  </a:txBody>
+                </a:tc>
+                <a:tc>
+                  <a:txBody>
+                    <a:bodyPr/>
+                    <a:lstStyle/>
+                    <a:p>
+                      <a:pPr lvl="0" indent="0" marL="0">
+                        <a:buNone/>
+                      </a:pPr>
+                      <a:r>
+                        <a:rPr/>
+                        <a:t>40.728609</a:t>
+                      </a:r>
+                    </a:p>
+                  </a:txBody>
+                </a:tc>
+                <a:tc>
+                  <a:txBody>
+                    <a:bodyPr/>
+                    <a:lstStyle/>
+                    <a:p>
+                      <a:pPr lvl="0" indent="0" marL="0">
+                        <a:buNone/>
+                      </a:pPr>
+                      <a:r>
+                        <a:rPr/>
+                        <a:t>0.142813</a:t>
                       </a:r>
                     </a:p>
                   </a:txBody>
@@ -4174,82 +4216,82 @@
                       </a:pPr>
                       <a:r>
                         <a:rPr/>
-                        <a:t>...</a:t>
-                      </a:r>
-                    </a:p>
-                  </a:txBody>
-                </a:tc>
-                <a:tc>
-                  <a:txBody>
-                    <a:bodyPr/>
-                    <a:lstStyle/>
-                    <a:p>
-                      <a:pPr lvl="0" indent="0" marL="0">
-                        <a:buNone/>
-                      </a:pPr>
-                      <a:r>
-                        <a:rPr/>
-                        <a:t>...</a:t>
-                      </a:r>
-                    </a:p>
-                  </a:txBody>
-                </a:tc>
-                <a:tc>
-                  <a:txBody>
-                    <a:bodyPr/>
-                    <a:lstStyle/>
-                    <a:p>
-                      <a:pPr lvl="0" indent="0" marL="0">
-                        <a:buNone/>
-                      </a:pPr>
-                      <a:r>
-                        <a:rPr/>
-                        <a:t>...</a:t>
-                      </a:r>
-                    </a:p>
-                  </a:txBody>
-                </a:tc>
-                <a:tc>
-                  <a:txBody>
-                    <a:bodyPr/>
-                    <a:lstStyle/>
-                    <a:p>
-                      <a:pPr lvl="0" indent="0" marL="0">
-                        <a:buNone/>
-                      </a:pPr>
-                      <a:r>
-                        <a:rPr/>
-                        <a:t>...</a:t>
-                      </a:r>
-                    </a:p>
-                  </a:txBody>
-                </a:tc>
-                <a:tc>
-                  <a:txBody>
-                    <a:bodyPr/>
-                    <a:lstStyle/>
-                    <a:p>
-                      <a:pPr lvl="0" indent="0" marL="0">
-                        <a:buNone/>
-                      </a:pPr>
-                      <a:r>
-                        <a:rPr/>
-                        <a:t>...</a:t>
-                      </a:r>
-                    </a:p>
-                  </a:txBody>
-                </a:tc>
-                <a:tc>
-                  <a:txBody>
-                    <a:bodyPr/>
-                    <a:lstStyle/>
-                    <a:p>
-                      <a:pPr lvl="0" indent="0" marL="0">
-                        <a:buNone/>
-                      </a:pPr>
-                      <a:r>
-                        <a:rPr/>
-                        <a:t>...</a:t>
+                        <a:t>5</a:t>
+                      </a:r>
+                    </a:p>
+                  </a:txBody>
+                </a:tc>
+                <a:tc>
+                  <a:txBody>
+                    <a:bodyPr/>
+                    <a:lstStyle/>
+                    <a:p>
+                      <a:pPr lvl="0" indent="0" marL="0">
+                        <a:buNone/>
+                      </a:pPr>
+                      <a:r>
+                        <a:rPr/>
+                        <a:t>balsam fir</a:t>
+                      </a:r>
+                    </a:p>
+                  </a:txBody>
+                </a:tc>
+                <a:tc>
+                  <a:txBody>
+                    <a:bodyPr/>
+                    <a:lstStyle/>
+                    <a:p>
+                      <a:pPr lvl="0" indent="0" marL="0">
+                        <a:buNone/>
+                      </a:pPr>
+                      <a:r>
+                        <a:rPr/>
+                        <a:t>7</a:t>
+                      </a:r>
+                    </a:p>
+                  </a:txBody>
+                </a:tc>
+                <a:tc>
+                  <a:txBody>
+                    <a:bodyPr/>
+                    <a:lstStyle/>
+                    <a:p>
+                      <a:pPr lvl="0" indent="0" marL="0">
+                        <a:buNone/>
+                      </a:pPr>
+                      <a:r>
+                        <a:rPr/>
+                        <a:t>153.474421</a:t>
+                      </a:r>
+                    </a:p>
+                  </a:txBody>
+                </a:tc>
+                <a:tc>
+                  <a:txBody>
+                    <a:bodyPr/>
+                    <a:lstStyle/>
+                    <a:p>
+                      <a:pPr lvl="0" indent="0" marL="0">
+                        <a:buNone/>
+                      </a:pPr>
+                      <a:r>
+                        <a:rPr/>
+                        <a:t>42.215118</a:t>
+                      </a:r>
+                    </a:p>
+                  </a:txBody>
+                </a:tc>
+                <a:tc>
+                  <a:txBody>
+                    <a:bodyPr/>
+                    <a:lstStyle/>
+                    <a:p>
+                      <a:pPr lvl="0" indent="0" marL="0">
+                        <a:buNone/>
+                      </a:pPr>
+                      <a:r>
+                        <a:rPr/>
+                        <a:t>0.149516</a:t>
                       </a:r>
                     </a:p>
                   </a:txBody>
@@ -4266,36 +4308,6 @@
                       </a:pPr>
                       <a:r>
                         <a:rPr/>
-                        <a:t>895</a:t>
-                      </a:r>
-                    </a:p>
-                  </a:txBody>
-                </a:tc>
-                <a:tc>
-                  <a:txBody>
-                    <a:bodyPr/>
-                    <a:lstStyle/>
-                    <a:p>
-                      <a:pPr lvl="0" indent="0" marL="0">
-                        <a:buNone/>
-                      </a:pPr>
-                      <a:r>
-                        <a:rPr/>
-                        <a:t>sugarberry</a:t>
-                      </a:r>
-                    </a:p>
-                  </a:txBody>
-                </a:tc>
-                <a:tc>
-                  <a:txBody>
-                    <a:bodyPr/>
-                    <a:lstStyle/>
-                    <a:p>
-                      <a:pPr lvl="0" indent="0" marL="0">
-                        <a:buNone/>
-                      </a:pPr>
-                      <a:r>
-                        <a:rPr/>
                         <a:t>6</a:t>
                       </a:r>
                     </a:p>
@@ -4311,37 +4323,67 @@
                       </a:pPr>
                       <a:r>
                         <a:rPr/>
-                        <a:t>32.431052</a:t>
-                      </a:r>
-                    </a:p>
-                  </a:txBody>
-                </a:tc>
-                <a:tc>
-                  <a:txBody>
-                    <a:bodyPr/>
-                    <a:lstStyle/>
-                    <a:p>
-                      <a:pPr lvl="0" indent="0" marL="0">
-                        <a:buNone/>
-                      </a:pPr>
-                      <a:r>
-                        <a:rPr/>
-                        <a:t>20.969306</a:t>
-                      </a:r>
-                    </a:p>
-                  </a:txBody>
-                </a:tc>
-                <a:tc>
-                  <a:txBody>
-                    <a:bodyPr/>
-                    <a:lstStyle/>
-                    <a:p>
-                      <a:pPr lvl="0" indent="0" marL="0">
-                        <a:buNone/>
-                      </a:pPr>
-                      <a:r>
-                        <a:rPr/>
-                        <a:t>0.565727</a:t>
+                        <a:t>balsam fir</a:t>
+                      </a:r>
+                    </a:p>
+                  </a:txBody>
+                </a:tc>
+                <a:tc>
+                  <a:txBody>
+                    <a:bodyPr/>
+                    <a:lstStyle/>
+                    <a:p>
+                      <a:pPr lvl="0" indent="0" marL="0">
+                        <a:buNone/>
+                      </a:pPr>
+                      <a:r>
+                        <a:rPr/>
+                        <a:t>8</a:t>
+                      </a:r>
+                    </a:p>
+                  </a:txBody>
+                </a:tc>
+                <a:tc>
+                  <a:txBody>
+                    <a:bodyPr/>
+                    <a:lstStyle/>
+                    <a:p>
+                      <a:pPr lvl="0" indent="0" marL="0">
+                        <a:buNone/>
+                      </a:pPr>
+                      <a:r>
+                        <a:rPr/>
+                        <a:t>156.768710</a:t>
+                      </a:r>
+                    </a:p>
+                  </a:txBody>
+                </a:tc>
+                <a:tc>
+                  <a:txBody>
+                    <a:bodyPr/>
+                    <a:lstStyle/>
+                    <a:p>
+                      <a:pPr lvl="0" indent="0" marL="0">
+                        <a:buNone/>
+                      </a:pPr>
+                      <a:r>
+                        <a:rPr/>
+                        <a:t>43.559217</a:t>
+                      </a:r>
+                    </a:p>
+                  </a:txBody>
+                </a:tc>
+                <a:tc>
+                  <a:txBody>
+                    <a:bodyPr/>
+                    <a:lstStyle/>
+                    <a:p>
+                      <a:pPr lvl="0" indent="0" marL="0">
+                        <a:buNone/>
+                      </a:pPr>
+                      <a:r>
+                        <a:rPr/>
+                        <a:t>0.154670</a:t>
                       </a:r>
                     </a:p>
                   </a:txBody>
@@ -4358,36 +4400,6 @@
                       </a:pPr>
                       <a:r>
                         <a:rPr/>
-                        <a:t>896</a:t>
-                      </a:r>
-                    </a:p>
-                  </a:txBody>
-                </a:tc>
-                <a:tc>
-                  <a:txBody>
-                    <a:bodyPr/>
-                    <a:lstStyle/>
-                    <a:p>
-                      <a:pPr lvl="0" indent="0" marL="0">
-                        <a:buNone/>
-                      </a:pPr>
-                      <a:r>
-                        <a:rPr/>
-                        <a:t>sugarberry</a:t>
-                      </a:r>
-                    </a:p>
-                  </a:txBody>
-                </a:tc>
-                <a:tc>
-                  <a:txBody>
-                    <a:bodyPr/>
-                    <a:lstStyle/>
-                    <a:p>
-                      <a:pPr lvl="0" indent="0" marL="0">
-                        <a:buNone/>
-                      </a:pPr>
-                      <a:r>
-                        <a:rPr/>
                         <a:t>7</a:t>
                       </a:r>
                     </a:p>
@@ -4403,37 +4415,67 @@
                       </a:pPr>
                       <a:r>
                         <a:rPr/>
-                        <a:t>37.324259</a:t>
-                      </a:r>
-                    </a:p>
-                  </a:txBody>
-                </a:tc>
-                <a:tc>
-                  <a:txBody>
-                    <a:bodyPr/>
-                    <a:lstStyle/>
-                    <a:p>
-                      <a:pPr lvl="0" indent="0" marL="0">
-                        <a:buNone/>
-                      </a:pPr>
-                      <a:r>
-                        <a:rPr/>
-                        <a:t>25.037024</a:t>
-                      </a:r>
-                    </a:p>
-                  </a:txBody>
-                </a:tc>
-                <a:tc>
-                  <a:txBody>
-                    <a:bodyPr/>
-                    <a:lstStyle/>
-                    <a:p>
-                      <a:pPr lvl="0" indent="0" marL="0">
-                        <a:buNone/>
-                      </a:pPr>
-                      <a:r>
-                        <a:rPr/>
-                        <a:t>0.637629</a:t>
+                        <a:t>balsam fir</a:t>
+                      </a:r>
+                    </a:p>
+                  </a:txBody>
+                </a:tc>
+                <a:tc>
+                  <a:txBody>
+                    <a:bodyPr/>
+                    <a:lstStyle/>
+                    <a:p>
+                      <a:pPr lvl="0" indent="0" marL="0">
+                        <a:buNone/>
+                      </a:pPr>
+                      <a:r>
+                        <a:rPr/>
+                        <a:t>9</a:t>
+                      </a:r>
+                    </a:p>
+                  </a:txBody>
+                </a:tc>
+                <a:tc>
+                  <a:txBody>
+                    <a:bodyPr/>
+                    <a:lstStyle/>
+                    <a:p>
+                      <a:pPr lvl="0" indent="0" marL="0">
+                        <a:buNone/>
+                      </a:pPr>
+                      <a:r>
+                        <a:rPr/>
+                        <a:t>161.016214</a:t>
+                      </a:r>
+                    </a:p>
+                  </a:txBody>
+                </a:tc>
+                <a:tc>
+                  <a:txBody>
+                    <a:bodyPr/>
+                    <a:lstStyle/>
+                    <a:p>
+                      <a:pPr lvl="0" indent="0" marL="0">
+                        <a:buNone/>
+                      </a:pPr>
+                      <a:r>
+                        <a:rPr/>
+                        <a:t>44.751469</a:t>
+                      </a:r>
+                    </a:p>
+                  </a:txBody>
+                </a:tc>
+                <a:tc>
+                  <a:txBody>
+                    <a:bodyPr/>
+                    <a:lstStyle/>
+                    <a:p>
+                      <a:pPr lvl="0" indent="0" marL="0">
+                        <a:buNone/>
+                      </a:pPr>
+                      <a:r>
+                        <a:rPr/>
+                        <a:t>0.160504</a:t>
                       </a:r>
                     </a:p>
                   </a:txBody>
@@ -4450,36 +4492,6 @@
                       </a:pPr>
                       <a:r>
                         <a:rPr/>
-                        <a:t>897</a:t>
-                      </a:r>
-                    </a:p>
-                  </a:txBody>
-                </a:tc>
-                <a:tc>
-                  <a:txBody>
-                    <a:bodyPr/>
-                    <a:lstStyle/>
-                    <a:p>
-                      <a:pPr lvl="0" indent="0" marL="0">
-                        <a:buNone/>
-                      </a:pPr>
-                      <a:r>
-                        <a:rPr/>
-                        <a:t>sugarberry</a:t>
-                      </a:r>
-                    </a:p>
-                  </a:txBody>
-                </a:tc>
-                <a:tc>
-                  <a:txBody>
-                    <a:bodyPr/>
-                    <a:lstStyle/>
-                    <a:p>
-                      <a:pPr lvl="0" indent="0" marL="0">
-                        <a:buNone/>
-                      </a:pPr>
-                      <a:r>
-                        <a:rPr/>
                         <a:t>8</a:t>
                       </a:r>
                     </a:p>
@@ -4495,161 +4507,7 @@
                       </a:pPr>
                       <a:r>
                         <a:rPr/>
-                        <a:t>38.144756</a:t>
-                      </a:r>
-                    </a:p>
-                  </a:txBody>
-                </a:tc>
-                <a:tc>
-                  <a:txBody>
-                    <a:bodyPr/>
-                    <a:lstStyle/>
-                    <a:p>
-                      <a:pPr lvl="0" indent="0" marL="0">
-                        <a:buNone/>
-                      </a:pPr>
-                      <a:r>
-                        <a:rPr/>
-                        <a:t>26.680208</a:t>
-                      </a:r>
-                    </a:p>
-                  </a:txBody>
-                </a:tc>
-                <a:tc>
-                  <a:txBody>
-                    <a:bodyPr/>
-                    <a:lstStyle/>
-                    <a:p>
-                      <a:pPr lvl="0" indent="0" marL="0">
-                        <a:buNone/>
-                      </a:pPr>
-                      <a:r>
-                        <a:rPr/>
-                        <a:t>0.665159</a:t>
-                      </a:r>
-                    </a:p>
-                  </a:txBody>
-                </a:tc>
-              </a:tr>
-              <a:tr h="0">
-                <a:tc>
-                  <a:txBody>
-                    <a:bodyPr/>
-                    <a:lstStyle/>
-                    <a:p>
-                      <a:pPr lvl="0" indent="0" marL="0">
-                        <a:buNone/>
-                      </a:pPr>
-                      <a:r>
-                        <a:rPr/>
-                        <a:t>898</a:t>
-                      </a:r>
-                    </a:p>
-                  </a:txBody>
-                </a:tc>
-                <a:tc>
-                  <a:txBody>
-                    <a:bodyPr/>
-                    <a:lstStyle/>
-                    <a:p>
-                      <a:pPr lvl="0" indent="0" marL="0">
-                        <a:buNone/>
-                      </a:pPr>
-                      <a:r>
-                        <a:rPr/>
-                        <a:t>sugarberry</a:t>
-                      </a:r>
-                    </a:p>
-                  </a:txBody>
-                </a:tc>
-                <a:tc>
-                  <a:txBody>
-                    <a:bodyPr/>
-                    <a:lstStyle/>
-                    <a:p>
-                      <a:pPr lvl="0" indent="0" marL="0">
-                        <a:buNone/>
-                      </a:pPr>
-                      <a:r>
-                        <a:rPr/>
-                        <a:t>9</a:t>
-                      </a:r>
-                    </a:p>
-                  </a:txBody>
-                </a:tc>
-                <a:tc>
-                  <a:txBody>
-                    <a:bodyPr/>
-                    <a:lstStyle/>
-                    <a:p>
-                      <a:pPr lvl="0" indent="0" marL="0">
-                        <a:buNone/>
-                      </a:pPr>
-                      <a:r>
-                        <a:rPr/>
-                        <a:t>36.853245</a:t>
-                      </a:r>
-                    </a:p>
-                  </a:txBody>
-                </a:tc>
-                <a:tc>
-                  <a:txBody>
-                    <a:bodyPr/>
-                    <a:lstStyle/>
-                    <a:p>
-                      <a:pPr lvl="0" indent="0" marL="0">
-                        <a:buNone/>
-                      </a:pPr>
-                      <a:r>
-                        <a:rPr/>
-                        <a:t>21.021667</a:t>
-                      </a:r>
-                    </a:p>
-                  </a:txBody>
-                </a:tc>
-                <a:tc>
-                  <a:txBody>
-                    <a:bodyPr/>
-                    <a:lstStyle/>
-                    <a:p>
-                      <a:pPr lvl="0" indent="0" marL="0">
-                        <a:buNone/>
-                      </a:pPr>
-                      <a:r>
-                        <a:rPr/>
-                        <a:t>0.685162</a:t>
-                      </a:r>
-                    </a:p>
-                  </a:txBody>
-                </a:tc>
-              </a:tr>
-              <a:tr h="0">
-                <a:tc>
-                  <a:txBody>
-                    <a:bodyPr/>
-                    <a:lstStyle/>
-                    <a:p>
-                      <a:pPr lvl="0" indent="0" marL="0">
-                        <a:buNone/>
-                      </a:pPr>
-                      <a:r>
-                        <a:rPr/>
-                        <a:t>899</a:t>
-                      </a:r>
-                    </a:p>
-                  </a:txBody>
-                </a:tc>
-                <a:tc>
-                  <a:txBody>
-                    <a:bodyPr/>
-                    <a:lstStyle/>
-                    <a:p>
-                      <a:pPr lvl="0" indent="0" marL="0">
-                        <a:buNone/>
-                      </a:pPr>
-                      <a:r>
-                        <a:rPr/>
-                        <a:t>sugarberry</a:t>
+                        <a:t>balsam fir</a:t>
                       </a:r>
                     </a:p>
                   </a:txBody>
@@ -4679,37 +4537,37 @@
                       </a:pPr>
                       <a:r>
                         <a:rPr/>
-                        <a:t>40.091106</a:t>
-                      </a:r>
-                    </a:p>
-                  </a:txBody>
-                </a:tc>
-                <a:tc>
-                  <a:txBody>
-                    <a:bodyPr/>
-                    <a:lstStyle/>
-                    <a:p>
-                      <a:pPr lvl="0" indent="0" marL="0">
-                        <a:buNone/>
-                      </a:pPr>
-                      <a:r>
-                        <a:rPr/>
-                        <a:t>23.172083</a:t>
-                      </a:r>
-                    </a:p>
-                  </a:txBody>
-                </a:tc>
-                <a:tc>
-                  <a:txBody>
-                    <a:bodyPr/>
-                    <a:lstStyle/>
-                    <a:p>
-                      <a:pPr lvl="0" indent="0" marL="0">
-                        <a:buNone/>
-                      </a:pPr>
-                      <a:r>
-                        <a:rPr/>
-                        <a:t>0.677519</a:t>
+                        <a:t>157.999921</a:t>
+                      </a:r>
+                    </a:p>
+                  </a:txBody>
+                </a:tc>
+                <a:tc>
+                  <a:txBody>
+                    <a:bodyPr/>
+                    <a:lstStyle/>
+                    <a:p>
+                      <a:pPr lvl="0" indent="0" marL="0">
+                        <a:buNone/>
+                      </a:pPr>
+                      <a:r>
+                        <a:rPr/>
+                        <a:t>44.694861</a:t>
+                      </a:r>
+                    </a:p>
+                  </a:txBody>
+                </a:tc>
+                <a:tc>
+                  <a:txBody>
+                    <a:bodyPr/>
+                    <a:lstStyle/>
+                    <a:p>
+                      <a:pPr lvl="0" indent="0" marL="0">
+                        <a:buNone/>
+                      </a:pPr>
+                      <a:r>
+                        <a:rPr/>
+                        <a:t>0.160057</a:t>
                       </a:r>
                     </a:p>
                   </a:txBody>
@@ -4751,12 +4609,7 @@
             <p:ph type="title"/>
           </p:nvPr>
         </p:nvSpPr>
-        <p:spPr>
-          <a:xfrm>
-            <a:off x="457201" y="204787"/>
-            <a:ext cx="3008313" cy="871538"/>
-          </a:xfrm>
-        </p:spPr>
+        <p:spPr/>
         <p:txBody>
           <a:bodyPr/>
           <a:lstStyle/>
@@ -4766,19 +4619,19 @@
             </a:pPr>
             <a:r>
               <a:rPr/>
-              <a:t>Technical Lead</a:t>
+              <a:t>Average Root Mean Square Logarithmic Error</a:t>
             </a:r>
           </a:p>
         </p:txBody>
       </p:sp>
       <p:sp>
         <p:nvSpPr>
-          <p:cNvPr id="4" name="Text Placeholder 3"/>
+          <p:cNvPr id="3" name="Content Placeholder 2"/>
           <p:cNvSpPr>
             <a:spLocks noGrp="1"/>
           </p:cNvSpPr>
           <p:nvPr>
-            <p:ph idx="2" sz="half" type="body"/>
+            <p:ph idx="1"/>
           </p:nvPr>
         </p:nvSpPr>
         <p:spPr/>
@@ -4786,527 +4639,27 @@
           <a:bodyPr/>
           <a:lstStyle/>
           <a:p>
-            <a:pPr lvl="0"/>
-            <a:r>
-              <a:rPr/>
-              <a:t>Split and filtering methods</a:t>
-            </a:r>
-          </a:p>
-          <a:p>
-            <a:pPr lvl="0"/>
-            <a:r>
-              <a:rPr/>
-              <a:t>Feature engineering (what worked and what didn’t)</a:t>
-            </a:r>
-          </a:p>
-          <a:p>
-            <a:pPr lvl="0"/>
-            <a:r>
-              <a:rPr/>
-              <a:t>Tuning k for the best model</a:t>
-            </a:r>
-          </a:p>
-          <a:p>
-            <a:pPr lvl="0"/>
-            <a:r>
-              <a:rPr/>
-              <a:t>The final “best” model and error # Tree Measurement Data:</a:t>
+            <a:pPr lvl="0" indent="0">
+              <a:buNone/>
+            </a:pPr>
+            <a:r>
+              <a:rPr>
+                <a:latin typeface="Courier"/>
+              </a:rPr>
+              <a:t>    k  Avg_RMSLE
+0   2   0.152783
+1   3   0.158068
+2   4   0.162118
+3   5   0.168001
+4   6   0.174249
+5   7   0.180282
+6   8   0.185071
+7   9   0.190148
+8  10   0.196831</a:t>
             </a:r>
           </a:p>
         </p:txBody>
       </p:sp>
-      <p:graphicFrame>
-        <p:nvGraphicFramePr>
-          <p:cNvPr id="6" name="Content Placeholder 5"/>
-          <p:cNvGraphicFramePr>
-            <a:graphicFrameLocks noGrp="1"/>
-          </p:cNvGraphicFramePr>
-          <p:nvPr>
-            <p:ph idx="1"/>
-          </p:nvPr>
-        </p:nvGraphicFramePr>
-        <p:xfrm>
-          <a:off x="3568700" y="203200"/>
-          <a:ext cx="5105400" cy="4381500"/>
-        </p:xfrm>
-        <a:graphic>
-          <a:graphicData uri="http://schemas.openxmlformats.org/drawingml/2006/table">
-            <a:tbl>
-              <a:tblPr firstRow="1" bandRow="1">
-                <a:tableStyleId>{5C22544A-7EE6-4342-B048-85BDC9FD1C3A}</a:tableStyleId>
-              </a:tblPr>
-              <a:tblGrid>
-                <a:gridCol w="1016000"/>
-                <a:gridCol w="1016000"/>
-                <a:gridCol w="1016000"/>
-                <a:gridCol w="1016000"/>
-                <a:gridCol w="1016000"/>
-              </a:tblGrid>
-              <a:tr h="0">
-                <a:tc>
-                  <a:txBody>
-                    <a:bodyPr/>
-                    <a:lstStyle/>
-                    <a:p>
-                      <a:endParaRPr/>
-                    </a:p>
-                  </a:txBody>
-                  <a:tcPr/>
-                </a:tc>
-                <a:tc>
-                  <a:txBody>
-                    <a:bodyPr/>
-                    <a:lstStyle/>
-                    <a:p>
-                      <a:pPr lvl="0" indent="0" marL="0">
-                        <a:buNone/>
-                      </a:pPr>
-                      <a:r>
-                        <a:rPr/>
-                        <a:t>SPCD</a:t>
-                      </a:r>
-                    </a:p>
-                  </a:txBody>
-                  <a:tcPr/>
-                </a:tc>
-                <a:tc>
-                  <a:txBody>
-                    <a:bodyPr/>
-                    <a:lstStyle/>
-                    <a:p>
-                      <a:pPr lvl="0" indent="0" marL="0">
-                        <a:buNone/>
-                      </a:pPr>
-                      <a:r>
-                        <a:rPr/>
-                        <a:t>DO_BH</a:t>
-                      </a:r>
-                    </a:p>
-                  </a:txBody>
-                  <a:tcPr/>
-                </a:tc>
-                <a:tc>
-                  <a:txBody>
-                    <a:bodyPr/>
-                    <a:lstStyle/>
-                    <a:p>
-                      <a:pPr lvl="0" indent="0" marL="0">
-                        <a:buNone/>
-                      </a:pPr>
-                      <a:r>
-                        <a:rPr/>
-                        <a:t>HT_TOT</a:t>
-                      </a:r>
-                    </a:p>
-                  </a:txBody>
-                  <a:tcPr/>
-                </a:tc>
-                <a:tc>
-                  <a:txBody>
-                    <a:bodyPr/>
-                    <a:lstStyle/>
-                    <a:p>
-                      <a:pPr lvl="0" indent="0" marL="0">
-                        <a:buNone/>
-                      </a:pPr>
-                      <a:r>
-                        <a:rPr/>
-                        <a:t>TT_DW_CRM</a:t>
-                      </a:r>
-                    </a:p>
-                  </a:txBody>
-                  <a:tcPr/>
-                </a:tc>
-              </a:tr>
-              <a:tr h="0">
-                <a:tc>
-                  <a:txBody>
-                    <a:bodyPr/>
-                    <a:lstStyle/>
-                    <a:p>
-                      <a:pPr lvl="0" indent="0" marL="0">
-                        <a:buNone/>
-                      </a:pPr>
-                      <a:r>
-                        <a:rPr/>
-                        <a:t>0</a:t>
-                      </a:r>
-                    </a:p>
-                  </a:txBody>
-                </a:tc>
-                <a:tc>
-                  <a:txBody>
-                    <a:bodyPr/>
-                    <a:lstStyle/>
-                    <a:p>
-                      <a:pPr lvl="0" indent="0" marL="0">
-                        <a:buNone/>
-                      </a:pPr>
-                      <a:r>
-                        <a:rPr/>
-                        <a:t>12</a:t>
-                      </a:r>
-                    </a:p>
-                  </a:txBody>
-                </a:tc>
-                <a:tc>
-                  <a:txBody>
-                    <a:bodyPr/>
-                    <a:lstStyle/>
-                    <a:p>
-                      <a:pPr lvl="0" indent="0" marL="0">
-                        <a:buNone/>
-                      </a:pPr>
-                      <a:r>
-                        <a:rPr/>
-                        <a:t>7.5</a:t>
-                      </a:r>
-                    </a:p>
-                  </a:txBody>
-                </a:tc>
-                <a:tc>
-                  <a:txBody>
-                    <a:bodyPr/>
-                    <a:lstStyle/>
-                    <a:p>
-                      <a:pPr lvl="0" indent="0" marL="0">
-                        <a:buNone/>
-                      </a:pPr>
-                      <a:r>
-                        <a:rPr/>
-                        <a:t>45.2</a:t>
-                      </a:r>
-                    </a:p>
-                  </a:txBody>
-                </a:tc>
-                <a:tc>
-                  <a:txBody>
-                    <a:bodyPr/>
-                    <a:lstStyle/>
-                    <a:p>
-                      <a:pPr lvl="0" indent="0" marL="0">
-                        <a:buNone/>
-                      </a:pPr>
-                      <a:r>
-                        <a:rPr/>
-                        <a:t>178.86</a:t>
-                      </a:r>
-                    </a:p>
-                  </a:txBody>
-                </a:tc>
-              </a:tr>
-              <a:tr h="0">
-                <a:tc>
-                  <a:txBody>
-                    <a:bodyPr/>
-                    <a:lstStyle/>
-                    <a:p>
-                      <a:pPr lvl="0" indent="0" marL="0">
-                        <a:buNone/>
-                      </a:pPr>
-                      <a:r>
-                        <a:rPr/>
-                        <a:t>1</a:t>
-                      </a:r>
-                    </a:p>
-                  </a:txBody>
-                </a:tc>
-                <a:tc>
-                  <a:txBody>
-                    <a:bodyPr/>
-                    <a:lstStyle/>
-                    <a:p>
-                      <a:pPr lvl="0" indent="0" marL="0">
-                        <a:buNone/>
-                      </a:pPr>
-                      <a:r>
-                        <a:rPr/>
-                        <a:t>12</a:t>
-                      </a:r>
-                    </a:p>
-                  </a:txBody>
-                </a:tc>
-                <a:tc>
-                  <a:txBody>
-                    <a:bodyPr/>
-                    <a:lstStyle/>
-                    <a:p>
-                      <a:pPr lvl="0" indent="0" marL="0">
-                        <a:buNone/>
-                      </a:pPr>
-                      <a:r>
-                        <a:rPr/>
-                        <a:t>9.3</a:t>
-                      </a:r>
-                    </a:p>
-                  </a:txBody>
-                </a:tc>
-                <a:tc>
-                  <a:txBody>
-                    <a:bodyPr/>
-                    <a:lstStyle/>
-                    <a:p>
-                      <a:pPr lvl="0" indent="0" marL="0">
-                        <a:buNone/>
-                      </a:pPr>
-                      <a:r>
-                        <a:rPr/>
-                        <a:t>62.7</a:t>
-                      </a:r>
-                    </a:p>
-                  </a:txBody>
-                </a:tc>
-                <a:tc>
-                  <a:txBody>
-                    <a:bodyPr/>
-                    <a:lstStyle/>
-                    <a:p>
-                      <a:pPr lvl="0" indent="0" marL="0">
-                        <a:buNone/>
-                      </a:pPr>
-                      <a:r>
-                        <a:rPr/>
-                        <a:t>323.46</a:t>
-                      </a:r>
-                    </a:p>
-                  </a:txBody>
-                </a:tc>
-              </a:tr>
-              <a:tr h="0">
-                <a:tc>
-                  <a:txBody>
-                    <a:bodyPr/>
-                    <a:lstStyle/>
-                    <a:p>
-                      <a:pPr lvl="0" indent="0" marL="0">
-                        <a:buNone/>
-                      </a:pPr>
-                      <a:r>
-                        <a:rPr/>
-                        <a:t>2</a:t>
-                      </a:r>
-                    </a:p>
-                  </a:txBody>
-                </a:tc>
-                <a:tc>
-                  <a:txBody>
-                    <a:bodyPr/>
-                    <a:lstStyle/>
-                    <a:p>
-                      <a:pPr lvl="0" indent="0" marL="0">
-                        <a:buNone/>
-                      </a:pPr>
-                      <a:r>
-                        <a:rPr/>
-                        <a:t>12</a:t>
-                      </a:r>
-                    </a:p>
-                  </a:txBody>
-                </a:tc>
-                <a:tc>
-                  <a:txBody>
-                    <a:bodyPr/>
-                    <a:lstStyle/>
-                    <a:p>
-                      <a:pPr lvl="0" indent="0" marL="0">
-                        <a:buNone/>
-                      </a:pPr>
-                      <a:r>
-                        <a:rPr/>
-                        <a:t>9.7</a:t>
-                      </a:r>
-                    </a:p>
-                  </a:txBody>
-                </a:tc>
-                <a:tc>
-                  <a:txBody>
-                    <a:bodyPr/>
-                    <a:lstStyle/>
-                    <a:p>
-                      <a:pPr lvl="0" indent="0" marL="0">
-                        <a:buNone/>
-                      </a:pPr>
-                      <a:r>
-                        <a:rPr/>
-                        <a:t>56.7</a:t>
-                      </a:r>
-                    </a:p>
-                  </a:txBody>
-                </a:tc>
-                <a:tc>
-                  <a:txBody>
-                    <a:bodyPr/>
-                    <a:lstStyle/>
-                    <a:p>
-                      <a:pPr lvl="0" indent="0" marL="0">
-                        <a:buNone/>
-                      </a:pPr>
-                      <a:r>
-                        <a:rPr/>
-                        <a:t>342.47</a:t>
-                      </a:r>
-                    </a:p>
-                  </a:txBody>
-                </a:tc>
-              </a:tr>
-              <a:tr h="0">
-                <a:tc>
-                  <a:txBody>
-                    <a:bodyPr/>
-                    <a:lstStyle/>
-                    <a:p>
-                      <a:pPr lvl="0" indent="0" marL="0">
-                        <a:buNone/>
-                      </a:pPr>
-                      <a:r>
-                        <a:rPr/>
-                        <a:t>3</a:t>
-                      </a:r>
-                    </a:p>
-                  </a:txBody>
-                </a:tc>
-                <a:tc>
-                  <a:txBody>
-                    <a:bodyPr/>
-                    <a:lstStyle/>
-                    <a:p>
-                      <a:pPr lvl="0" indent="0" marL="0">
-                        <a:buNone/>
-                      </a:pPr>
-                      <a:r>
-                        <a:rPr/>
-                        <a:t>12</a:t>
-                      </a:r>
-                    </a:p>
-                  </a:txBody>
-                </a:tc>
-                <a:tc>
-                  <a:txBody>
-                    <a:bodyPr/>
-                    <a:lstStyle/>
-                    <a:p>
-                      <a:pPr lvl="0" indent="0" marL="0">
-                        <a:buNone/>
-                      </a:pPr>
-                      <a:r>
-                        <a:rPr/>
-                        <a:t>11.4</a:t>
-                      </a:r>
-                    </a:p>
-                  </a:txBody>
-                </a:tc>
-                <a:tc>
-                  <a:txBody>
-                    <a:bodyPr/>
-                    <a:lstStyle/>
-                    <a:p>
-                      <a:pPr lvl="0" indent="0" marL="0">
-                        <a:buNone/>
-                      </a:pPr>
-                      <a:r>
-                        <a:rPr/>
-                        <a:t>66.1</a:t>
-                      </a:r>
-                    </a:p>
-                  </a:txBody>
-                </a:tc>
-                <a:tc>
-                  <a:txBody>
-                    <a:bodyPr/>
-                    <a:lstStyle/>
-                    <a:p>
-                      <a:pPr lvl="0" indent="0" marL="0">
-                        <a:buNone/>
-                      </a:pPr>
-                      <a:r>
-                        <a:rPr/>
-                        <a:t>499.35</a:t>
-                      </a:r>
-                    </a:p>
-                  </a:txBody>
-                </a:tc>
-              </a:tr>
-              <a:tr h="0">
-                <a:tc>
-                  <a:txBody>
-                    <a:bodyPr/>
-                    <a:lstStyle/>
-                    <a:p>
-                      <a:pPr lvl="0" indent="0" marL="0">
-                        <a:buNone/>
-                      </a:pPr>
-                      <a:r>
-                        <a:rPr/>
-                        <a:t>4</a:t>
-                      </a:r>
-                    </a:p>
-                  </a:txBody>
-                </a:tc>
-                <a:tc>
-                  <a:txBody>
-                    <a:bodyPr/>
-                    <a:lstStyle/>
-                    <a:p>
-                      <a:pPr lvl="0" indent="0" marL="0">
-                        <a:buNone/>
-                      </a:pPr>
-                      <a:r>
-                        <a:rPr/>
-                        <a:t>12</a:t>
-                      </a:r>
-                    </a:p>
-                  </a:txBody>
-                </a:tc>
-                <a:tc>
-                  <a:txBody>
-                    <a:bodyPr/>
-                    <a:lstStyle/>
-                    <a:p>
-                      <a:pPr lvl="0" indent="0" marL="0">
-                        <a:buNone/>
-                      </a:pPr>
-                      <a:r>
-                        <a:rPr/>
-                        <a:t>6.4</a:t>
-                      </a:r>
-                    </a:p>
-                  </a:txBody>
-                </a:tc>
-                <a:tc>
-                  <a:txBody>
-                    <a:bodyPr/>
-                    <a:lstStyle/>
-                    <a:p>
-                      <a:pPr lvl="0" indent="0" marL="0">
-                        <a:buNone/>
-                      </a:pPr>
-                      <a:r>
-                        <a:rPr/>
-                        <a:t>51.8</a:t>
-                      </a:r>
-                    </a:p>
-                  </a:txBody>
-                </a:tc>
-                <a:tc>
-                  <a:txBody>
-                    <a:bodyPr/>
-                    <a:lstStyle/>
-                    <a:p>
-                      <a:pPr lvl="0" indent="0" marL="0">
-                        <a:buNone/>
-                      </a:pPr>
-                      <a:r>
-                        <a:rPr/>
-                        <a:t>113.92</a:t>
-                      </a:r>
-                    </a:p>
-                  </a:txBody>
-                </a:tc>
-              </a:tr>
-            </a:tbl>
-          </a:graphicData>
-        </a:graphic>
-      </p:graphicFrame>
     </p:spTree>
   </p:cSld>
 </p:sld>
@@ -5349,319 +4702,62 @@
             </a:pPr>
             <a:r>
               <a:rPr/>
-              <a:t>Tree Species Name Data:</a:t>
+              <a:t>Technical Lead</a:t>
             </a:r>
           </a:p>
         </p:txBody>
       </p:sp>
-      <p:graphicFrame>
-        <p:nvGraphicFramePr>
-          <p:cNvPr id="6" name="Content Placeholder 5"/>
-          <p:cNvGraphicFramePr>
-            <a:graphicFrameLocks noGrp="1"/>
-          </p:cNvGraphicFramePr>
+      <p:sp>
+        <p:nvSpPr>
+          <p:cNvPr id="3" name="Content Placeholder 2"/>
+          <p:cNvSpPr>
+            <a:spLocks noGrp="1"/>
+          </p:cNvSpPr>
           <p:nvPr>
             <p:ph idx="1"/>
           </p:nvPr>
-        </p:nvGraphicFramePr>
-        <p:xfrm>
-          <a:off x="457200" y="1193800"/>
-          <a:ext cx="8229600" cy="3390900"/>
-        </p:xfrm>
-        <a:graphic>
-          <a:graphicData uri="http://schemas.openxmlformats.org/drawingml/2006/table">
-            <a:tbl>
-              <a:tblPr firstRow="1" bandRow="1">
-                <a:tableStyleId>{5C22544A-7EE6-4342-B048-85BDC9FD1C3A}</a:tableStyleId>
-              </a:tblPr>
-              <a:tblGrid>
-                <a:gridCol w="2743200"/>
-                <a:gridCol w="2743200"/>
-                <a:gridCol w="2743200"/>
-              </a:tblGrid>
-              <a:tr h="0">
-                <a:tc>
-                  <a:txBody>
-                    <a:bodyPr/>
-                    <a:lstStyle/>
-                    <a:p>
-                      <a:endParaRPr/>
-                    </a:p>
-                  </a:txBody>
-                  <a:tcPr/>
-                </a:tc>
-                <a:tc>
-                  <a:txBody>
-                    <a:bodyPr/>
-                    <a:lstStyle/>
-                    <a:p>
-                      <a:pPr lvl="0" indent="0" marL="0">
-                        <a:buNone/>
-                      </a:pPr>
-                      <a:r>
-                        <a:rPr/>
-                        <a:t>SPCD</a:t>
-                      </a:r>
-                    </a:p>
-                  </a:txBody>
-                  <a:tcPr/>
-                </a:tc>
-                <a:tc>
-                  <a:txBody>
-                    <a:bodyPr/>
-                    <a:lstStyle/>
-                    <a:p>
-                      <a:pPr lvl="0" indent="0" marL="0">
-                        <a:buNone/>
-                      </a:pPr>
-                      <a:r>
-                        <a:rPr/>
-                        <a:t>COMMON_NAME</a:t>
-                      </a:r>
-                    </a:p>
-                  </a:txBody>
-                  <a:tcPr/>
-                </a:tc>
-              </a:tr>
-              <a:tr h="0">
-                <a:tc>
-                  <a:txBody>
-                    <a:bodyPr/>
-                    <a:lstStyle/>
-                    <a:p>
-                      <a:pPr lvl="0" indent="0" marL="0">
-                        <a:buNone/>
-                      </a:pPr>
-                      <a:r>
-                        <a:rPr/>
-                        <a:t>0</a:t>
-                      </a:r>
-                    </a:p>
-                  </a:txBody>
-                </a:tc>
-                <a:tc>
-                  <a:txBody>
-                    <a:bodyPr/>
-                    <a:lstStyle/>
-                    <a:p>
-                      <a:pPr lvl="0" indent="0" marL="0">
-                        <a:buNone/>
-                      </a:pPr>
-                      <a:r>
-                        <a:rPr/>
-                        <a:t>10</a:t>
-                      </a:r>
-                    </a:p>
-                  </a:txBody>
-                </a:tc>
-                <a:tc>
-                  <a:txBody>
-                    <a:bodyPr/>
-                    <a:lstStyle/>
-                    <a:p>
-                      <a:pPr lvl="0" indent="0" marL="0">
-                        <a:buNone/>
-                      </a:pPr>
-                      <a:r>
-                        <a:rPr/>
-                        <a:t>fir spp.</a:t>
-                      </a:r>
-                    </a:p>
-                  </a:txBody>
-                </a:tc>
-              </a:tr>
-              <a:tr h="0">
-                <a:tc>
-                  <a:txBody>
-                    <a:bodyPr/>
-                    <a:lstStyle/>
-                    <a:p>
-                      <a:pPr lvl="0" indent="0" marL="0">
-                        <a:buNone/>
-                      </a:pPr>
-                      <a:r>
-                        <a:rPr/>
-                        <a:t>1</a:t>
-                      </a:r>
-                    </a:p>
-                  </a:txBody>
-                </a:tc>
-                <a:tc>
-                  <a:txBody>
-                    <a:bodyPr/>
-                    <a:lstStyle/>
-                    <a:p>
-                      <a:pPr lvl="0" indent="0" marL="0">
-                        <a:buNone/>
-                      </a:pPr>
-                      <a:r>
-                        <a:rPr/>
-                        <a:t>11</a:t>
-                      </a:r>
-                    </a:p>
-                  </a:txBody>
-                </a:tc>
-                <a:tc>
-                  <a:txBody>
-                    <a:bodyPr/>
-                    <a:lstStyle/>
-                    <a:p>
-                      <a:pPr lvl="0" indent="0" marL="0">
-                        <a:buNone/>
-                      </a:pPr>
-                      <a:r>
-                        <a:rPr/>
-                        <a:t>Pacific silver fir</a:t>
-                      </a:r>
-                    </a:p>
-                  </a:txBody>
-                </a:tc>
-              </a:tr>
-              <a:tr h="0">
-                <a:tc>
-                  <a:txBody>
-                    <a:bodyPr/>
-                    <a:lstStyle/>
-                    <a:p>
-                      <a:pPr lvl="0" indent="0" marL="0">
-                        <a:buNone/>
-                      </a:pPr>
-                      <a:r>
-                        <a:rPr/>
-                        <a:t>2</a:t>
-                      </a:r>
-                    </a:p>
-                  </a:txBody>
-                </a:tc>
-                <a:tc>
-                  <a:txBody>
-                    <a:bodyPr/>
-                    <a:lstStyle/>
-                    <a:p>
-                      <a:pPr lvl="0" indent="0" marL="0">
-                        <a:buNone/>
-                      </a:pPr>
-                      <a:r>
-                        <a:rPr/>
-                        <a:t>12</a:t>
-                      </a:r>
-                    </a:p>
-                  </a:txBody>
-                </a:tc>
-                <a:tc>
-                  <a:txBody>
-                    <a:bodyPr/>
-                    <a:lstStyle/>
-                    <a:p>
-                      <a:pPr lvl="0" indent="0" marL="0">
-                        <a:buNone/>
-                      </a:pPr>
-                      <a:r>
-                        <a:rPr/>
-                        <a:t>balsam fir</a:t>
-                      </a:r>
-                    </a:p>
-                  </a:txBody>
-                </a:tc>
-              </a:tr>
-              <a:tr h="0">
-                <a:tc>
-                  <a:txBody>
-                    <a:bodyPr/>
-                    <a:lstStyle/>
-                    <a:p>
-                      <a:pPr lvl="0" indent="0" marL="0">
-                        <a:buNone/>
-                      </a:pPr>
-                      <a:r>
-                        <a:rPr/>
-                        <a:t>3</a:t>
-                      </a:r>
-                    </a:p>
-                  </a:txBody>
-                </a:tc>
-                <a:tc>
-                  <a:txBody>
-                    <a:bodyPr/>
-                    <a:lstStyle/>
-                    <a:p>
-                      <a:pPr lvl="0" indent="0" marL="0">
-                        <a:buNone/>
-                      </a:pPr>
-                      <a:r>
-                        <a:rPr/>
-                        <a:t>14</a:t>
-                      </a:r>
-                    </a:p>
-                  </a:txBody>
-                </a:tc>
-                <a:tc>
-                  <a:txBody>
-                    <a:bodyPr/>
-                    <a:lstStyle/>
-                    <a:p>
-                      <a:pPr lvl="0" indent="0" marL="0">
-                        <a:buNone/>
-                      </a:pPr>
-                      <a:r>
-                        <a:rPr/>
-                        <a:t>Santa Lucia or bristlecone fir</a:t>
-                      </a:r>
-                    </a:p>
-                  </a:txBody>
-                </a:tc>
-              </a:tr>
-              <a:tr h="0">
-                <a:tc>
-                  <a:txBody>
-                    <a:bodyPr/>
-                    <a:lstStyle/>
-                    <a:p>
-                      <a:pPr lvl="0" indent="0" marL="0">
-                        <a:buNone/>
-                      </a:pPr>
-                      <a:r>
-                        <a:rPr/>
-                        <a:t>4</a:t>
-                      </a:r>
-                    </a:p>
-                  </a:txBody>
-                </a:tc>
-                <a:tc>
-                  <a:txBody>
-                    <a:bodyPr/>
-                    <a:lstStyle/>
-                    <a:p>
-                      <a:pPr lvl="0" indent="0" marL="0">
-                        <a:buNone/>
-                      </a:pPr>
-                      <a:r>
-                        <a:rPr/>
-                        <a:t>15</a:t>
-                      </a:r>
-                    </a:p>
-                  </a:txBody>
-                </a:tc>
-                <a:tc>
-                  <a:txBody>
-                    <a:bodyPr/>
-                    <a:lstStyle/>
-                    <a:p>
-                      <a:pPr lvl="0" indent="0" marL="0">
-                        <a:buNone/>
-                      </a:pPr>
-                      <a:r>
-                        <a:rPr/>
-                        <a:t>white fir</a:t>
-                      </a:r>
-                    </a:p>
-                  </a:txBody>
-                </a:tc>
-              </a:tr>
-            </a:tbl>
-          </a:graphicData>
-        </a:graphic>
-      </p:graphicFrame>
+        </p:nvSpPr>
+        <p:spPr/>
+        <p:txBody>
+          <a:bodyPr/>
+          <a:lstStyle/>
+          <a:p>
+            <a:pPr lvl="0"/>
+            <a:r>
+              <a:rPr/>
+              <a:t>Overview of data manipulation</a:t>
+            </a:r>
+          </a:p>
+          <a:p>
+            <a:pPr lvl="0"/>
+            <a:r>
+              <a:rPr/>
+              <a:t>Split and filtering methods</a:t>
+            </a:r>
+          </a:p>
+          <a:p>
+            <a:pPr lvl="0"/>
+            <a:r>
+              <a:rPr/>
+              <a:t>Feature engineering (what worked and what didn’t)</a:t>
+            </a:r>
+          </a:p>
+          <a:p>
+            <a:pPr lvl="0"/>
+            <a:r>
+              <a:rPr/>
+              <a:t>Tuning k for the best model</a:t>
+            </a:r>
+          </a:p>
+          <a:p>
+            <a:pPr lvl="0"/>
+            <a:r>
+              <a:rPr/>
+              <a:t>The final “best” model and error</a:t>
+            </a:r>
+          </a:p>
+        </p:txBody>
+      </p:sp>
     </p:spTree>
   </p:cSld>
 </p:sld>
@@ -5704,7 +4800,7 @@
             </a:pPr>
             <a:r>
               <a:rPr/>
-              <a:t>Combined Dataset (species mapped onto bigger dataset):</a:t>
+              <a:t>Tree Measurement Data:</a:t>
             </a:r>
           </a:p>
         </p:txBody>
@@ -5730,12 +4826,11 @@
                 <a:tableStyleId>{5C22544A-7EE6-4342-B048-85BDC9FD1C3A}</a:tableStyleId>
               </a:tblPr>
               <a:tblGrid>
-                <a:gridCol w="1371600"/>
-                <a:gridCol w="1371600"/>
-                <a:gridCol w="1371600"/>
-                <a:gridCol w="1371600"/>
-                <a:gridCol w="1371600"/>
-                <a:gridCol w="1371600"/>
+                <a:gridCol w="1638300"/>
+                <a:gridCol w="1638300"/>
+                <a:gridCol w="1638300"/>
+                <a:gridCol w="1638300"/>
+                <a:gridCol w="1638300"/>
               </a:tblGrid>
               <a:tr h="0">
                 <a:tc>
@@ -5812,22 +4907,6 @@
                   </a:txBody>
                   <a:tcPr/>
                 </a:tc>
-                <a:tc>
-                  <a:txBody>
-                    <a:bodyPr/>
-                    <a:lstStyle/>
-                    <a:p>
-                      <a:pPr lvl="0" indent="0" marL="0">
-                        <a:buNone/>
-                      </a:pPr>
-                      <a:r>
-                        <a:rPr/>
-                        <a:t>COMMON_NAME</a:t>
-                      </a:r>
-                    </a:p>
-                  </a:txBody>
-                  <a:tcPr/>
-                </a:tc>
               </a:tr>
               <a:tr h="0">
                 <a:tc>
@@ -5905,21 +4984,6 @@
                     </a:p>
                   </a:txBody>
                 </a:tc>
-                <a:tc>
-                  <a:txBody>
-                    <a:bodyPr/>
-                    <a:lstStyle/>
-                    <a:p>
-                      <a:pPr lvl="0" indent="0" marL="0">
-                        <a:buNone/>
-                      </a:pPr>
-                      <a:r>
-                        <a:rPr/>
-                        <a:t>balsam fir</a:t>
-                      </a:r>
-                    </a:p>
-                  </a:txBody>
-                </a:tc>
               </a:tr>
               <a:tr h="0">
                 <a:tc>
@@ -5997,21 +5061,6 @@
                     </a:p>
                   </a:txBody>
                 </a:tc>
-                <a:tc>
-                  <a:txBody>
-                    <a:bodyPr/>
-                    <a:lstStyle/>
-                    <a:p>
-                      <a:pPr lvl="0" indent="0" marL="0">
-                        <a:buNone/>
-                      </a:pPr>
-                      <a:r>
-                        <a:rPr/>
-                        <a:t>balsam fir</a:t>
-                      </a:r>
-                    </a:p>
-                  </a:txBody>
-                </a:tc>
               </a:tr>
               <a:tr h="0">
                 <a:tc>
@@ -6089,21 +5138,6 @@
                     </a:p>
                   </a:txBody>
                 </a:tc>
-                <a:tc>
-                  <a:txBody>
-                    <a:bodyPr/>
-                    <a:lstStyle/>
-                    <a:p>
-                      <a:pPr lvl="0" indent="0" marL="0">
-                        <a:buNone/>
-                      </a:pPr>
-                      <a:r>
-                        <a:rPr/>
-                        <a:t>balsam fir</a:t>
-                      </a:r>
-                    </a:p>
-                  </a:txBody>
-                </a:tc>
               </a:tr>
               <a:tr h="0">
                 <a:tc>
@@ -6181,21 +5215,6 @@
                     </a:p>
                   </a:txBody>
                 </a:tc>
-                <a:tc>
-                  <a:txBody>
-                    <a:bodyPr/>
-                    <a:lstStyle/>
-                    <a:p>
-                      <a:pPr lvl="0" indent="0" marL="0">
-                        <a:buNone/>
-                      </a:pPr>
-                      <a:r>
-                        <a:rPr/>
-                        <a:t>balsam fir</a:t>
-                      </a:r>
-                    </a:p>
-                  </a:txBody>
-                </a:tc>
               </a:tr>
               <a:tr h="0">
                 <a:tc>
@@ -6269,21 +5288,6 @@
                       <a:r>
                         <a:rPr/>
                         <a:t>113.92</a:t>
-                      </a:r>
-                    </a:p>
-                  </a:txBody>
-                </a:tc>
-                <a:tc>
-                  <a:txBody>
-                    <a:bodyPr/>
-                    <a:lstStyle/>
-                    <a:p>
-                      <a:pPr lvl="0" indent="0" marL="0">
-                        <a:buNone/>
-                      </a:pPr>
-                      <a:r>
-                        <a:rPr/>
-                        <a:t>balsam fir</a:t>
                       </a:r>
                     </a:p>
                   </a:txBody>
@@ -6335,7 +5339,7 @@
             </a:pPr>
             <a:r>
               <a:rPr/>
-              <a:t>Filtered data</a:t>
+              <a:t>Tree Species Name Data:</a:t>
             </a:r>
           </a:p>
         </p:txBody>
@@ -6361,12 +5365,9 @@
                 <a:tableStyleId>{5C22544A-7EE6-4342-B048-85BDC9FD1C3A}</a:tableStyleId>
               </a:tblPr>
               <a:tblGrid>
-                <a:gridCol w="1371600"/>
-                <a:gridCol w="1371600"/>
-                <a:gridCol w="1371600"/>
-                <a:gridCol w="1371600"/>
-                <a:gridCol w="1371600"/>
-                <a:gridCol w="1371600"/>
+                <a:gridCol w="2743200"/>
+                <a:gridCol w="2743200"/>
+                <a:gridCol w="2743200"/>
               </a:tblGrid>
               <a:tr h="0">
                 <a:tc>
@@ -6405,54 +5406,6 @@
                       </a:pPr>
                       <a:r>
                         <a:rPr/>
-                        <a:t>DO_BH</a:t>
-                      </a:r>
-                    </a:p>
-                  </a:txBody>
-                  <a:tcPr/>
-                </a:tc>
-                <a:tc>
-                  <a:txBody>
-                    <a:bodyPr/>
-                    <a:lstStyle/>
-                    <a:p>
-                      <a:pPr lvl="0" indent="0" marL="0">
-                        <a:buNone/>
-                      </a:pPr>
-                      <a:r>
-                        <a:rPr/>
-                        <a:t>HT_TOT</a:t>
-                      </a:r>
-                    </a:p>
-                  </a:txBody>
-                  <a:tcPr/>
-                </a:tc>
-                <a:tc>
-                  <a:txBody>
-                    <a:bodyPr/>
-                    <a:lstStyle/>
-                    <a:p>
-                      <a:pPr lvl="0" indent="0" marL="0">
-                        <a:buNone/>
-                      </a:pPr>
-                      <a:r>
-                        <a:rPr/>
-                        <a:t>TT_DW_CRM</a:t>
-                      </a:r>
-                    </a:p>
-                  </a:txBody>
-                  <a:tcPr/>
-                </a:tc>
-                <a:tc>
-                  <a:txBody>
-                    <a:bodyPr/>
-                    <a:lstStyle/>
-                    <a:p>
-                      <a:pPr lvl="0" indent="0" marL="0">
-                        <a:buNone/>
-                      </a:pPr>
-                      <a:r>
-                        <a:rPr/>
                         <a:t>COMMON_NAME</a:t>
                       </a:r>
                     </a:p>
@@ -6486,67 +5439,22 @@
                       </a:pPr>
                       <a:r>
                         <a:rPr/>
-                        <a:t>12</a:t>
-                      </a:r>
-                    </a:p>
-                  </a:txBody>
-                </a:tc>
-                <a:tc>
-                  <a:txBody>
-                    <a:bodyPr/>
-                    <a:lstStyle/>
-                    <a:p>
-                      <a:pPr lvl="0" indent="0" marL="0">
-                        <a:buNone/>
-                      </a:pPr>
-                      <a:r>
-                        <a:rPr/>
-                        <a:t>7.5</a:t>
-                      </a:r>
-                    </a:p>
-                  </a:txBody>
-                </a:tc>
-                <a:tc>
-                  <a:txBody>
-                    <a:bodyPr/>
-                    <a:lstStyle/>
-                    <a:p>
-                      <a:pPr lvl="0" indent="0" marL="0">
-                        <a:buNone/>
-                      </a:pPr>
-                      <a:r>
-                        <a:rPr/>
-                        <a:t>45.2</a:t>
-                      </a:r>
-                    </a:p>
-                  </a:txBody>
-                </a:tc>
-                <a:tc>
-                  <a:txBody>
-                    <a:bodyPr/>
-                    <a:lstStyle/>
-                    <a:p>
-                      <a:pPr lvl="0" indent="0" marL="0">
-                        <a:buNone/>
-                      </a:pPr>
-                      <a:r>
-                        <a:rPr/>
-                        <a:t>178.86</a:t>
-                      </a:r>
-                    </a:p>
-                  </a:txBody>
-                </a:tc>
-                <a:tc>
-                  <a:txBody>
-                    <a:bodyPr/>
-                    <a:lstStyle/>
-                    <a:p>
-                      <a:pPr lvl="0" indent="0" marL="0">
-                        <a:buNone/>
-                      </a:pPr>
-                      <a:r>
-                        <a:rPr/>
-                        <a:t>balsam fir</a:t>
+                        <a:t>10</a:t>
+                      </a:r>
+                    </a:p>
+                  </a:txBody>
+                </a:tc>
+                <a:tc>
+                  <a:txBody>
+                    <a:bodyPr/>
+                    <a:lstStyle/>
+                    <a:p>
+                      <a:pPr lvl="0" indent="0" marL="0">
+                        <a:buNone/>
+                      </a:pPr>
+                      <a:r>
+                        <a:rPr/>
+                        <a:t>fir spp.</a:t>
                       </a:r>
                     </a:p>
                   </a:txBody>
@@ -6578,67 +5486,22 @@
                       </a:pPr>
                       <a:r>
                         <a:rPr/>
-                        <a:t>12</a:t>
-                      </a:r>
-                    </a:p>
-                  </a:txBody>
-                </a:tc>
-                <a:tc>
-                  <a:txBody>
-                    <a:bodyPr/>
-                    <a:lstStyle/>
-                    <a:p>
-                      <a:pPr lvl="0" indent="0" marL="0">
-                        <a:buNone/>
-                      </a:pPr>
-                      <a:r>
-                        <a:rPr/>
-                        <a:t>9.3</a:t>
-                      </a:r>
-                    </a:p>
-                  </a:txBody>
-                </a:tc>
-                <a:tc>
-                  <a:txBody>
-                    <a:bodyPr/>
-                    <a:lstStyle/>
-                    <a:p>
-                      <a:pPr lvl="0" indent="0" marL="0">
-                        <a:buNone/>
-                      </a:pPr>
-                      <a:r>
-                        <a:rPr/>
-                        <a:t>62.7</a:t>
-                      </a:r>
-                    </a:p>
-                  </a:txBody>
-                </a:tc>
-                <a:tc>
-                  <a:txBody>
-                    <a:bodyPr/>
-                    <a:lstStyle/>
-                    <a:p>
-                      <a:pPr lvl="0" indent="0" marL="0">
-                        <a:buNone/>
-                      </a:pPr>
-                      <a:r>
-                        <a:rPr/>
-                        <a:t>323.46</a:t>
-                      </a:r>
-                    </a:p>
-                  </a:txBody>
-                </a:tc>
-                <a:tc>
-                  <a:txBody>
-                    <a:bodyPr/>
-                    <a:lstStyle/>
-                    <a:p>
-                      <a:pPr lvl="0" indent="0" marL="0">
-                        <a:buNone/>
-                      </a:pPr>
-                      <a:r>
-                        <a:rPr/>
-                        <a:t>balsam fir</a:t>
+                        <a:t>11</a:t>
+                      </a:r>
+                    </a:p>
+                  </a:txBody>
+                </a:tc>
+                <a:tc>
+                  <a:txBody>
+                    <a:bodyPr/>
+                    <a:lstStyle/>
+                    <a:p>
+                      <a:pPr lvl="0" indent="0" marL="0">
+                        <a:buNone/>
+                      </a:pPr>
+                      <a:r>
+                        <a:rPr/>
+                        <a:t>Pacific silver fir</a:t>
                       </a:r>
                     </a:p>
                   </a:txBody>
@@ -6685,51 +5548,6 @@
                       </a:pPr>
                       <a:r>
                         <a:rPr/>
-                        <a:t>9.7</a:t>
-                      </a:r>
-                    </a:p>
-                  </a:txBody>
-                </a:tc>
-                <a:tc>
-                  <a:txBody>
-                    <a:bodyPr/>
-                    <a:lstStyle/>
-                    <a:p>
-                      <a:pPr lvl="0" indent="0" marL="0">
-                        <a:buNone/>
-                      </a:pPr>
-                      <a:r>
-                        <a:rPr/>
-                        <a:t>56.7</a:t>
-                      </a:r>
-                    </a:p>
-                  </a:txBody>
-                </a:tc>
-                <a:tc>
-                  <a:txBody>
-                    <a:bodyPr/>
-                    <a:lstStyle/>
-                    <a:p>
-                      <a:pPr lvl="0" indent="0" marL="0">
-                        <a:buNone/>
-                      </a:pPr>
-                      <a:r>
-                        <a:rPr/>
-                        <a:t>342.47</a:t>
-                      </a:r>
-                    </a:p>
-                  </a:txBody>
-                </a:tc>
-                <a:tc>
-                  <a:txBody>
-                    <a:bodyPr/>
-                    <a:lstStyle/>
-                    <a:p>
-                      <a:pPr lvl="0" indent="0" marL="0">
-                        <a:buNone/>
-                      </a:pPr>
-                      <a:r>
-                        <a:rPr/>
                         <a:t>balsam fir</a:t>
                       </a:r>
                     </a:p>
@@ -6762,67 +5580,22 @@
                       </a:pPr>
                       <a:r>
                         <a:rPr/>
-                        <a:t>12</a:t>
-                      </a:r>
-                    </a:p>
-                  </a:txBody>
-                </a:tc>
-                <a:tc>
-                  <a:txBody>
-                    <a:bodyPr/>
-                    <a:lstStyle/>
-                    <a:p>
-                      <a:pPr lvl="0" indent="0" marL="0">
-                        <a:buNone/>
-                      </a:pPr>
-                      <a:r>
-                        <a:rPr/>
-                        <a:t>11.4</a:t>
-                      </a:r>
-                    </a:p>
-                  </a:txBody>
-                </a:tc>
-                <a:tc>
-                  <a:txBody>
-                    <a:bodyPr/>
-                    <a:lstStyle/>
-                    <a:p>
-                      <a:pPr lvl="0" indent="0" marL="0">
-                        <a:buNone/>
-                      </a:pPr>
-                      <a:r>
-                        <a:rPr/>
-                        <a:t>66.1</a:t>
-                      </a:r>
-                    </a:p>
-                  </a:txBody>
-                </a:tc>
-                <a:tc>
-                  <a:txBody>
-                    <a:bodyPr/>
-                    <a:lstStyle/>
-                    <a:p>
-                      <a:pPr lvl="0" indent="0" marL="0">
-                        <a:buNone/>
-                      </a:pPr>
-                      <a:r>
-                        <a:rPr/>
-                        <a:t>499.35</a:t>
-                      </a:r>
-                    </a:p>
-                  </a:txBody>
-                </a:tc>
-                <a:tc>
-                  <a:txBody>
-                    <a:bodyPr/>
-                    <a:lstStyle/>
-                    <a:p>
-                      <a:pPr lvl="0" indent="0" marL="0">
-                        <a:buNone/>
-                      </a:pPr>
-                      <a:r>
-                        <a:rPr/>
-                        <a:t>balsam fir</a:t>
+                        <a:t>14</a:t>
+                      </a:r>
+                    </a:p>
+                  </a:txBody>
+                </a:tc>
+                <a:tc>
+                  <a:txBody>
+                    <a:bodyPr/>
+                    <a:lstStyle/>
+                    <a:p>
+                      <a:pPr lvl="0" indent="0" marL="0">
+                        <a:buNone/>
+                      </a:pPr>
+                      <a:r>
+                        <a:rPr/>
+                        <a:t>Santa Lucia or bristlecone fir</a:t>
                       </a:r>
                     </a:p>
                   </a:txBody>
@@ -6854,67 +5627,22 @@
                       </a:pPr>
                       <a:r>
                         <a:rPr/>
-                        <a:t>12</a:t>
-                      </a:r>
-                    </a:p>
-                  </a:txBody>
-                </a:tc>
-                <a:tc>
-                  <a:txBody>
-                    <a:bodyPr/>
-                    <a:lstStyle/>
-                    <a:p>
-                      <a:pPr lvl="0" indent="0" marL="0">
-                        <a:buNone/>
-                      </a:pPr>
-                      <a:r>
-                        <a:rPr/>
-                        <a:t>6.4</a:t>
-                      </a:r>
-                    </a:p>
-                  </a:txBody>
-                </a:tc>
-                <a:tc>
-                  <a:txBody>
-                    <a:bodyPr/>
-                    <a:lstStyle/>
-                    <a:p>
-                      <a:pPr lvl="0" indent="0" marL="0">
-                        <a:buNone/>
-                      </a:pPr>
-                      <a:r>
-                        <a:rPr/>
-                        <a:t>51.8</a:t>
-                      </a:r>
-                    </a:p>
-                  </a:txBody>
-                </a:tc>
-                <a:tc>
-                  <a:txBody>
-                    <a:bodyPr/>
-                    <a:lstStyle/>
-                    <a:p>
-                      <a:pPr lvl="0" indent="0" marL="0">
-                        <a:buNone/>
-                      </a:pPr>
-                      <a:r>
-                        <a:rPr/>
-                        <a:t>113.92</a:t>
-                      </a:r>
-                    </a:p>
-                  </a:txBody>
-                </a:tc>
-                <a:tc>
-                  <a:txBody>
-                    <a:bodyPr/>
-                    <a:lstStyle/>
-                    <a:p>
-                      <a:pPr lvl="0" indent="0" marL="0">
-                        <a:buNone/>
-                      </a:pPr>
-                      <a:r>
-                        <a:rPr/>
-                        <a:t>balsam fir</a:t>
+                        <a:t>15</a:t>
+                      </a:r>
+                    </a:p>
+                  </a:txBody>
+                </a:tc>
+                <a:tc>
+                  <a:txBody>
+                    <a:bodyPr/>
+                    <a:lstStyle/>
+                    <a:p>
+                      <a:pPr lvl="0" indent="0" marL="0">
+                        <a:buNone/>
+                      </a:pPr>
+                      <a:r>
+                        <a:rPr/>
+                        <a:t>white fir</a:t>
                       </a:r>
                     </a:p>
                   </a:txBody>
@@ -6966,11 +5694,595 @@
             </a:pPr>
             <a:r>
               <a:rPr/>
-              <a:t>Quality Assurance</a:t>
+              <a:t>Combined Dataset (species mapped onto bigger dataset):</a:t>
             </a:r>
           </a:p>
         </p:txBody>
       </p:sp>
+      <p:graphicFrame>
+        <p:nvGraphicFramePr>
+          <p:cNvPr id="6" name="Content Placeholder 5"/>
+          <p:cNvGraphicFramePr>
+            <a:graphicFrameLocks noGrp="1"/>
+          </p:cNvGraphicFramePr>
+          <p:nvPr>
+            <p:ph idx="1"/>
+          </p:nvPr>
+        </p:nvGraphicFramePr>
+        <p:xfrm>
+          <a:off x="457200" y="1193800"/>
+          <a:ext cx="8229600" cy="3390900"/>
+        </p:xfrm>
+        <a:graphic>
+          <a:graphicData uri="http://schemas.openxmlformats.org/drawingml/2006/table">
+            <a:tbl>
+              <a:tblPr firstRow="1" bandRow="1">
+                <a:tableStyleId>{5C22544A-7EE6-4342-B048-85BDC9FD1C3A}</a:tableStyleId>
+              </a:tblPr>
+              <a:tblGrid>
+                <a:gridCol w="1371600"/>
+                <a:gridCol w="1371600"/>
+                <a:gridCol w="1371600"/>
+                <a:gridCol w="1371600"/>
+                <a:gridCol w="1371600"/>
+                <a:gridCol w="1371600"/>
+              </a:tblGrid>
+              <a:tr h="0">
+                <a:tc>
+                  <a:txBody>
+                    <a:bodyPr/>
+                    <a:lstStyle/>
+                    <a:p>
+                      <a:endParaRPr/>
+                    </a:p>
+                  </a:txBody>
+                  <a:tcPr/>
+                </a:tc>
+                <a:tc>
+                  <a:txBody>
+                    <a:bodyPr/>
+                    <a:lstStyle/>
+                    <a:p>
+                      <a:pPr lvl="0" indent="0" marL="0">
+                        <a:buNone/>
+                      </a:pPr>
+                      <a:r>
+                        <a:rPr/>
+                        <a:t>SPCD</a:t>
+                      </a:r>
+                    </a:p>
+                  </a:txBody>
+                  <a:tcPr/>
+                </a:tc>
+                <a:tc>
+                  <a:txBody>
+                    <a:bodyPr/>
+                    <a:lstStyle/>
+                    <a:p>
+                      <a:pPr lvl="0" indent="0" marL="0">
+                        <a:buNone/>
+                      </a:pPr>
+                      <a:r>
+                        <a:rPr/>
+                        <a:t>DO_BH</a:t>
+                      </a:r>
+                    </a:p>
+                  </a:txBody>
+                  <a:tcPr/>
+                </a:tc>
+                <a:tc>
+                  <a:txBody>
+                    <a:bodyPr/>
+                    <a:lstStyle/>
+                    <a:p>
+                      <a:pPr lvl="0" indent="0" marL="0">
+                        <a:buNone/>
+                      </a:pPr>
+                      <a:r>
+                        <a:rPr/>
+                        <a:t>HT_TOT</a:t>
+                      </a:r>
+                    </a:p>
+                  </a:txBody>
+                  <a:tcPr/>
+                </a:tc>
+                <a:tc>
+                  <a:txBody>
+                    <a:bodyPr/>
+                    <a:lstStyle/>
+                    <a:p>
+                      <a:pPr lvl="0" indent="0" marL="0">
+                        <a:buNone/>
+                      </a:pPr>
+                      <a:r>
+                        <a:rPr/>
+                        <a:t>TT_DW_CRM</a:t>
+                      </a:r>
+                    </a:p>
+                  </a:txBody>
+                  <a:tcPr/>
+                </a:tc>
+                <a:tc>
+                  <a:txBody>
+                    <a:bodyPr/>
+                    <a:lstStyle/>
+                    <a:p>
+                      <a:pPr lvl="0" indent="0" marL="0">
+                        <a:buNone/>
+                      </a:pPr>
+                      <a:r>
+                        <a:rPr/>
+                        <a:t>COMMON_NAME</a:t>
+                      </a:r>
+                    </a:p>
+                  </a:txBody>
+                  <a:tcPr/>
+                </a:tc>
+              </a:tr>
+              <a:tr h="0">
+                <a:tc>
+                  <a:txBody>
+                    <a:bodyPr/>
+                    <a:lstStyle/>
+                    <a:p>
+                      <a:pPr lvl="0" indent="0" marL="0">
+                        <a:buNone/>
+                      </a:pPr>
+                      <a:r>
+                        <a:rPr/>
+                        <a:t>0</a:t>
+                      </a:r>
+                    </a:p>
+                  </a:txBody>
+                </a:tc>
+                <a:tc>
+                  <a:txBody>
+                    <a:bodyPr/>
+                    <a:lstStyle/>
+                    <a:p>
+                      <a:pPr lvl="0" indent="0" marL="0">
+                        <a:buNone/>
+                      </a:pPr>
+                      <a:r>
+                        <a:rPr/>
+                        <a:t>12</a:t>
+                      </a:r>
+                    </a:p>
+                  </a:txBody>
+                </a:tc>
+                <a:tc>
+                  <a:txBody>
+                    <a:bodyPr/>
+                    <a:lstStyle/>
+                    <a:p>
+                      <a:pPr lvl="0" indent="0" marL="0">
+                        <a:buNone/>
+                      </a:pPr>
+                      <a:r>
+                        <a:rPr/>
+                        <a:t>7.5</a:t>
+                      </a:r>
+                    </a:p>
+                  </a:txBody>
+                </a:tc>
+                <a:tc>
+                  <a:txBody>
+                    <a:bodyPr/>
+                    <a:lstStyle/>
+                    <a:p>
+                      <a:pPr lvl="0" indent="0" marL="0">
+                        <a:buNone/>
+                      </a:pPr>
+                      <a:r>
+                        <a:rPr/>
+                        <a:t>45.2</a:t>
+                      </a:r>
+                    </a:p>
+                  </a:txBody>
+                </a:tc>
+                <a:tc>
+                  <a:txBody>
+                    <a:bodyPr/>
+                    <a:lstStyle/>
+                    <a:p>
+                      <a:pPr lvl="0" indent="0" marL="0">
+                        <a:buNone/>
+                      </a:pPr>
+                      <a:r>
+                        <a:rPr/>
+                        <a:t>178.86</a:t>
+                      </a:r>
+                    </a:p>
+                  </a:txBody>
+                </a:tc>
+                <a:tc>
+                  <a:txBody>
+                    <a:bodyPr/>
+                    <a:lstStyle/>
+                    <a:p>
+                      <a:pPr lvl="0" indent="0" marL="0">
+                        <a:buNone/>
+                      </a:pPr>
+                      <a:r>
+                        <a:rPr/>
+                        <a:t>balsam fir</a:t>
+                      </a:r>
+                    </a:p>
+                  </a:txBody>
+                </a:tc>
+              </a:tr>
+              <a:tr h="0">
+                <a:tc>
+                  <a:txBody>
+                    <a:bodyPr/>
+                    <a:lstStyle/>
+                    <a:p>
+                      <a:pPr lvl="0" indent="0" marL="0">
+                        <a:buNone/>
+                      </a:pPr>
+                      <a:r>
+                        <a:rPr/>
+                        <a:t>1</a:t>
+                      </a:r>
+                    </a:p>
+                  </a:txBody>
+                </a:tc>
+                <a:tc>
+                  <a:txBody>
+                    <a:bodyPr/>
+                    <a:lstStyle/>
+                    <a:p>
+                      <a:pPr lvl="0" indent="0" marL="0">
+                        <a:buNone/>
+                      </a:pPr>
+                      <a:r>
+                        <a:rPr/>
+                        <a:t>12</a:t>
+                      </a:r>
+                    </a:p>
+                  </a:txBody>
+                </a:tc>
+                <a:tc>
+                  <a:txBody>
+                    <a:bodyPr/>
+                    <a:lstStyle/>
+                    <a:p>
+                      <a:pPr lvl="0" indent="0" marL="0">
+                        <a:buNone/>
+                      </a:pPr>
+                      <a:r>
+                        <a:rPr/>
+                        <a:t>9.3</a:t>
+                      </a:r>
+                    </a:p>
+                  </a:txBody>
+                </a:tc>
+                <a:tc>
+                  <a:txBody>
+                    <a:bodyPr/>
+                    <a:lstStyle/>
+                    <a:p>
+                      <a:pPr lvl="0" indent="0" marL="0">
+                        <a:buNone/>
+                      </a:pPr>
+                      <a:r>
+                        <a:rPr/>
+                        <a:t>62.7</a:t>
+                      </a:r>
+                    </a:p>
+                  </a:txBody>
+                </a:tc>
+                <a:tc>
+                  <a:txBody>
+                    <a:bodyPr/>
+                    <a:lstStyle/>
+                    <a:p>
+                      <a:pPr lvl="0" indent="0" marL="0">
+                        <a:buNone/>
+                      </a:pPr>
+                      <a:r>
+                        <a:rPr/>
+                        <a:t>323.46</a:t>
+                      </a:r>
+                    </a:p>
+                  </a:txBody>
+                </a:tc>
+                <a:tc>
+                  <a:txBody>
+                    <a:bodyPr/>
+                    <a:lstStyle/>
+                    <a:p>
+                      <a:pPr lvl="0" indent="0" marL="0">
+                        <a:buNone/>
+                      </a:pPr>
+                      <a:r>
+                        <a:rPr/>
+                        <a:t>balsam fir</a:t>
+                      </a:r>
+                    </a:p>
+                  </a:txBody>
+                </a:tc>
+              </a:tr>
+              <a:tr h="0">
+                <a:tc>
+                  <a:txBody>
+                    <a:bodyPr/>
+                    <a:lstStyle/>
+                    <a:p>
+                      <a:pPr lvl="0" indent="0" marL="0">
+                        <a:buNone/>
+                      </a:pPr>
+                      <a:r>
+                        <a:rPr/>
+                        <a:t>2</a:t>
+                      </a:r>
+                    </a:p>
+                  </a:txBody>
+                </a:tc>
+                <a:tc>
+                  <a:txBody>
+                    <a:bodyPr/>
+                    <a:lstStyle/>
+                    <a:p>
+                      <a:pPr lvl="0" indent="0" marL="0">
+                        <a:buNone/>
+                      </a:pPr>
+                      <a:r>
+                        <a:rPr/>
+                        <a:t>12</a:t>
+                      </a:r>
+                    </a:p>
+                  </a:txBody>
+                </a:tc>
+                <a:tc>
+                  <a:txBody>
+                    <a:bodyPr/>
+                    <a:lstStyle/>
+                    <a:p>
+                      <a:pPr lvl="0" indent="0" marL="0">
+                        <a:buNone/>
+                      </a:pPr>
+                      <a:r>
+                        <a:rPr/>
+                        <a:t>9.7</a:t>
+                      </a:r>
+                    </a:p>
+                  </a:txBody>
+                </a:tc>
+                <a:tc>
+                  <a:txBody>
+                    <a:bodyPr/>
+                    <a:lstStyle/>
+                    <a:p>
+                      <a:pPr lvl="0" indent="0" marL="0">
+                        <a:buNone/>
+                      </a:pPr>
+                      <a:r>
+                        <a:rPr/>
+                        <a:t>56.7</a:t>
+                      </a:r>
+                    </a:p>
+                  </a:txBody>
+                </a:tc>
+                <a:tc>
+                  <a:txBody>
+                    <a:bodyPr/>
+                    <a:lstStyle/>
+                    <a:p>
+                      <a:pPr lvl="0" indent="0" marL="0">
+                        <a:buNone/>
+                      </a:pPr>
+                      <a:r>
+                        <a:rPr/>
+                        <a:t>342.47</a:t>
+                      </a:r>
+                    </a:p>
+                  </a:txBody>
+                </a:tc>
+                <a:tc>
+                  <a:txBody>
+                    <a:bodyPr/>
+                    <a:lstStyle/>
+                    <a:p>
+                      <a:pPr lvl="0" indent="0" marL="0">
+                        <a:buNone/>
+                      </a:pPr>
+                      <a:r>
+                        <a:rPr/>
+                        <a:t>balsam fir</a:t>
+                      </a:r>
+                    </a:p>
+                  </a:txBody>
+                </a:tc>
+              </a:tr>
+              <a:tr h="0">
+                <a:tc>
+                  <a:txBody>
+                    <a:bodyPr/>
+                    <a:lstStyle/>
+                    <a:p>
+                      <a:pPr lvl="0" indent="0" marL="0">
+                        <a:buNone/>
+                      </a:pPr>
+                      <a:r>
+                        <a:rPr/>
+                        <a:t>3</a:t>
+                      </a:r>
+                    </a:p>
+                  </a:txBody>
+                </a:tc>
+                <a:tc>
+                  <a:txBody>
+                    <a:bodyPr/>
+                    <a:lstStyle/>
+                    <a:p>
+                      <a:pPr lvl="0" indent="0" marL="0">
+                        <a:buNone/>
+                      </a:pPr>
+                      <a:r>
+                        <a:rPr/>
+                        <a:t>12</a:t>
+                      </a:r>
+                    </a:p>
+                  </a:txBody>
+                </a:tc>
+                <a:tc>
+                  <a:txBody>
+                    <a:bodyPr/>
+                    <a:lstStyle/>
+                    <a:p>
+                      <a:pPr lvl="0" indent="0" marL="0">
+                        <a:buNone/>
+                      </a:pPr>
+                      <a:r>
+                        <a:rPr/>
+                        <a:t>11.4</a:t>
+                      </a:r>
+                    </a:p>
+                  </a:txBody>
+                </a:tc>
+                <a:tc>
+                  <a:txBody>
+                    <a:bodyPr/>
+                    <a:lstStyle/>
+                    <a:p>
+                      <a:pPr lvl="0" indent="0" marL="0">
+                        <a:buNone/>
+                      </a:pPr>
+                      <a:r>
+                        <a:rPr/>
+                        <a:t>66.1</a:t>
+                      </a:r>
+                    </a:p>
+                  </a:txBody>
+                </a:tc>
+                <a:tc>
+                  <a:txBody>
+                    <a:bodyPr/>
+                    <a:lstStyle/>
+                    <a:p>
+                      <a:pPr lvl="0" indent="0" marL="0">
+                        <a:buNone/>
+                      </a:pPr>
+                      <a:r>
+                        <a:rPr/>
+                        <a:t>499.35</a:t>
+                      </a:r>
+                    </a:p>
+                  </a:txBody>
+                </a:tc>
+                <a:tc>
+                  <a:txBody>
+                    <a:bodyPr/>
+                    <a:lstStyle/>
+                    <a:p>
+                      <a:pPr lvl="0" indent="0" marL="0">
+                        <a:buNone/>
+                      </a:pPr>
+                      <a:r>
+                        <a:rPr/>
+                        <a:t>balsam fir</a:t>
+                      </a:r>
+                    </a:p>
+                  </a:txBody>
+                </a:tc>
+              </a:tr>
+              <a:tr h="0">
+                <a:tc>
+                  <a:txBody>
+                    <a:bodyPr/>
+                    <a:lstStyle/>
+                    <a:p>
+                      <a:pPr lvl="0" indent="0" marL="0">
+                        <a:buNone/>
+                      </a:pPr>
+                      <a:r>
+                        <a:rPr/>
+                        <a:t>4</a:t>
+                      </a:r>
+                    </a:p>
+                  </a:txBody>
+                </a:tc>
+                <a:tc>
+                  <a:txBody>
+                    <a:bodyPr/>
+                    <a:lstStyle/>
+                    <a:p>
+                      <a:pPr lvl="0" indent="0" marL="0">
+                        <a:buNone/>
+                      </a:pPr>
+                      <a:r>
+                        <a:rPr/>
+                        <a:t>12</a:t>
+                      </a:r>
+                    </a:p>
+                  </a:txBody>
+                </a:tc>
+                <a:tc>
+                  <a:txBody>
+                    <a:bodyPr/>
+                    <a:lstStyle/>
+                    <a:p>
+                      <a:pPr lvl="0" indent="0" marL="0">
+                        <a:buNone/>
+                      </a:pPr>
+                      <a:r>
+                        <a:rPr/>
+                        <a:t>6.4</a:t>
+                      </a:r>
+                    </a:p>
+                  </a:txBody>
+                </a:tc>
+                <a:tc>
+                  <a:txBody>
+                    <a:bodyPr/>
+                    <a:lstStyle/>
+                    <a:p>
+                      <a:pPr lvl="0" indent="0" marL="0">
+                        <a:buNone/>
+                      </a:pPr>
+                      <a:r>
+                        <a:rPr/>
+                        <a:t>51.8</a:t>
+                      </a:r>
+                    </a:p>
+                  </a:txBody>
+                </a:tc>
+                <a:tc>
+                  <a:txBody>
+                    <a:bodyPr/>
+                    <a:lstStyle/>
+                    <a:p>
+                      <a:pPr lvl="0" indent="0" marL="0">
+                        <a:buNone/>
+                      </a:pPr>
+                      <a:r>
+                        <a:rPr/>
+                        <a:t>113.92</a:t>
+                      </a:r>
+                    </a:p>
+                  </a:txBody>
+                </a:tc>
+                <a:tc>
+                  <a:txBody>
+                    <a:bodyPr/>
+                    <a:lstStyle/>
+                    <a:p>
+                      <a:pPr lvl="0" indent="0" marL="0">
+                        <a:buNone/>
+                      </a:pPr>
+                      <a:r>
+                        <a:rPr/>
+                        <a:t>balsam fir</a:t>
+                      </a:r>
+                    </a:p>
+                  </a:txBody>
+                </a:tc>
+              </a:tr>
+            </a:tbl>
+          </a:graphicData>
+        </a:graphic>
+      </p:graphicFrame>
     </p:spTree>
   </p:cSld>
 </p:sld>
@@ -7052,6 +6364,1310 @@
             <a:r>
               <a:rPr/>
               <a:t>.</a:t>
+            </a:r>
+          </a:p>
+        </p:txBody>
+      </p:sp>
+    </p:spTree>
+  </p:cSld>
+</p:sld>
+</file>
+
+<file path=ppt/slides/slide20.xml><?xml version="1.0" encoding="utf-8"?>
+<p:sld xmlns:a="http://schemas.openxmlformats.org/drawingml/2006/main" xmlns:r="http://schemas.openxmlformats.org/officeDocument/2006/relationships" xmlns:p="http://schemas.openxmlformats.org/presentationml/2006/main">
+  <p:cSld>
+    <p:spTree>
+      <p:nvGrpSpPr>
+        <p:cNvPr id="1" name=""/>
+        <p:cNvGrpSpPr/>
+        <p:nvPr/>
+      </p:nvGrpSpPr>
+      <p:grpSpPr>
+        <a:xfrm>
+          <a:off x="0" y="0"/>
+          <a:ext cx="0" cy="0"/>
+          <a:chOff x="0" y="0"/>
+          <a:chExt cx="0" cy="0"/>
+        </a:xfrm>
+      </p:grpSpPr>
+      <p:sp>
+        <p:nvSpPr>
+          <p:cNvPr id="2" name="Title 1"/>
+          <p:cNvSpPr>
+            <a:spLocks noGrp="1"/>
+          </p:cNvSpPr>
+          <p:nvPr>
+            <p:ph type="title"/>
+          </p:nvPr>
+        </p:nvSpPr>
+        <p:spPr/>
+        <p:txBody>
+          <a:bodyPr/>
+          <a:lstStyle/>
+          <a:p>
+            <a:pPr lvl="0" indent="0" marL="0">
+              <a:buNone/>
+            </a:pPr>
+            <a:r>
+              <a:rPr/>
+              <a:t>Filtered data (minimum 100 data points)</a:t>
+            </a:r>
+          </a:p>
+        </p:txBody>
+      </p:sp>
+      <p:graphicFrame>
+        <p:nvGraphicFramePr>
+          <p:cNvPr id="6" name="Content Placeholder 5"/>
+          <p:cNvGraphicFramePr>
+            <a:graphicFrameLocks noGrp="1"/>
+          </p:cNvGraphicFramePr>
+          <p:nvPr>
+            <p:ph idx="1"/>
+          </p:nvPr>
+        </p:nvGraphicFramePr>
+        <p:xfrm>
+          <a:off x="457200" y="1193800"/>
+          <a:ext cx="8229600" cy="3390900"/>
+        </p:xfrm>
+        <a:graphic>
+          <a:graphicData uri="http://schemas.openxmlformats.org/drawingml/2006/table">
+            <a:tbl>
+              <a:tblPr firstRow="1" bandRow="1">
+                <a:tableStyleId>{5C22544A-7EE6-4342-B048-85BDC9FD1C3A}</a:tableStyleId>
+              </a:tblPr>
+              <a:tblGrid>
+                <a:gridCol w="1371600"/>
+                <a:gridCol w="1371600"/>
+                <a:gridCol w="1371600"/>
+                <a:gridCol w="1371600"/>
+                <a:gridCol w="1371600"/>
+                <a:gridCol w="1371600"/>
+              </a:tblGrid>
+              <a:tr h="0">
+                <a:tc>
+                  <a:txBody>
+                    <a:bodyPr/>
+                    <a:lstStyle/>
+                    <a:p>
+                      <a:endParaRPr/>
+                    </a:p>
+                  </a:txBody>
+                  <a:tcPr/>
+                </a:tc>
+                <a:tc>
+                  <a:txBody>
+                    <a:bodyPr/>
+                    <a:lstStyle/>
+                    <a:p>
+                      <a:pPr lvl="0" indent="0" marL="0">
+                        <a:buNone/>
+                      </a:pPr>
+                      <a:r>
+                        <a:rPr/>
+                        <a:t>SPCD</a:t>
+                      </a:r>
+                    </a:p>
+                  </a:txBody>
+                  <a:tcPr/>
+                </a:tc>
+                <a:tc>
+                  <a:txBody>
+                    <a:bodyPr/>
+                    <a:lstStyle/>
+                    <a:p>
+                      <a:pPr lvl="0" indent="0" marL="0">
+                        <a:buNone/>
+                      </a:pPr>
+                      <a:r>
+                        <a:rPr/>
+                        <a:t>DO_BH</a:t>
+                      </a:r>
+                    </a:p>
+                  </a:txBody>
+                  <a:tcPr/>
+                </a:tc>
+                <a:tc>
+                  <a:txBody>
+                    <a:bodyPr/>
+                    <a:lstStyle/>
+                    <a:p>
+                      <a:pPr lvl="0" indent="0" marL="0">
+                        <a:buNone/>
+                      </a:pPr>
+                      <a:r>
+                        <a:rPr/>
+                        <a:t>HT_TOT</a:t>
+                      </a:r>
+                    </a:p>
+                  </a:txBody>
+                  <a:tcPr/>
+                </a:tc>
+                <a:tc>
+                  <a:txBody>
+                    <a:bodyPr/>
+                    <a:lstStyle/>
+                    <a:p>
+                      <a:pPr lvl="0" indent="0" marL="0">
+                        <a:buNone/>
+                      </a:pPr>
+                      <a:r>
+                        <a:rPr/>
+                        <a:t>TT_DW_CRM</a:t>
+                      </a:r>
+                    </a:p>
+                  </a:txBody>
+                  <a:tcPr/>
+                </a:tc>
+                <a:tc>
+                  <a:txBody>
+                    <a:bodyPr/>
+                    <a:lstStyle/>
+                    <a:p>
+                      <a:pPr lvl="0" indent="0" marL="0">
+                        <a:buNone/>
+                      </a:pPr>
+                      <a:r>
+                        <a:rPr/>
+                        <a:t>COMMON_NAME</a:t>
+                      </a:r>
+                    </a:p>
+                  </a:txBody>
+                  <a:tcPr/>
+                </a:tc>
+              </a:tr>
+              <a:tr h="0">
+                <a:tc>
+                  <a:txBody>
+                    <a:bodyPr/>
+                    <a:lstStyle/>
+                    <a:p>
+                      <a:pPr lvl="0" indent="0" marL="0">
+                        <a:buNone/>
+                      </a:pPr>
+                      <a:r>
+                        <a:rPr/>
+                        <a:t>0</a:t>
+                      </a:r>
+                    </a:p>
+                  </a:txBody>
+                </a:tc>
+                <a:tc>
+                  <a:txBody>
+                    <a:bodyPr/>
+                    <a:lstStyle/>
+                    <a:p>
+                      <a:pPr lvl="0" indent="0" marL="0">
+                        <a:buNone/>
+                      </a:pPr>
+                      <a:r>
+                        <a:rPr/>
+                        <a:t>12</a:t>
+                      </a:r>
+                    </a:p>
+                  </a:txBody>
+                </a:tc>
+                <a:tc>
+                  <a:txBody>
+                    <a:bodyPr/>
+                    <a:lstStyle/>
+                    <a:p>
+                      <a:pPr lvl="0" indent="0" marL="0">
+                        <a:buNone/>
+                      </a:pPr>
+                      <a:r>
+                        <a:rPr/>
+                        <a:t>7.5</a:t>
+                      </a:r>
+                    </a:p>
+                  </a:txBody>
+                </a:tc>
+                <a:tc>
+                  <a:txBody>
+                    <a:bodyPr/>
+                    <a:lstStyle/>
+                    <a:p>
+                      <a:pPr lvl="0" indent="0" marL="0">
+                        <a:buNone/>
+                      </a:pPr>
+                      <a:r>
+                        <a:rPr/>
+                        <a:t>45.2</a:t>
+                      </a:r>
+                    </a:p>
+                  </a:txBody>
+                </a:tc>
+                <a:tc>
+                  <a:txBody>
+                    <a:bodyPr/>
+                    <a:lstStyle/>
+                    <a:p>
+                      <a:pPr lvl="0" indent="0" marL="0">
+                        <a:buNone/>
+                      </a:pPr>
+                      <a:r>
+                        <a:rPr/>
+                        <a:t>178.86</a:t>
+                      </a:r>
+                    </a:p>
+                  </a:txBody>
+                </a:tc>
+                <a:tc>
+                  <a:txBody>
+                    <a:bodyPr/>
+                    <a:lstStyle/>
+                    <a:p>
+                      <a:pPr lvl="0" indent="0" marL="0">
+                        <a:buNone/>
+                      </a:pPr>
+                      <a:r>
+                        <a:rPr/>
+                        <a:t>balsam fir</a:t>
+                      </a:r>
+                    </a:p>
+                  </a:txBody>
+                </a:tc>
+              </a:tr>
+              <a:tr h="0">
+                <a:tc>
+                  <a:txBody>
+                    <a:bodyPr/>
+                    <a:lstStyle/>
+                    <a:p>
+                      <a:pPr lvl="0" indent="0" marL="0">
+                        <a:buNone/>
+                      </a:pPr>
+                      <a:r>
+                        <a:rPr/>
+                        <a:t>1</a:t>
+                      </a:r>
+                    </a:p>
+                  </a:txBody>
+                </a:tc>
+                <a:tc>
+                  <a:txBody>
+                    <a:bodyPr/>
+                    <a:lstStyle/>
+                    <a:p>
+                      <a:pPr lvl="0" indent="0" marL="0">
+                        <a:buNone/>
+                      </a:pPr>
+                      <a:r>
+                        <a:rPr/>
+                        <a:t>12</a:t>
+                      </a:r>
+                    </a:p>
+                  </a:txBody>
+                </a:tc>
+                <a:tc>
+                  <a:txBody>
+                    <a:bodyPr/>
+                    <a:lstStyle/>
+                    <a:p>
+                      <a:pPr lvl="0" indent="0" marL="0">
+                        <a:buNone/>
+                      </a:pPr>
+                      <a:r>
+                        <a:rPr/>
+                        <a:t>9.3</a:t>
+                      </a:r>
+                    </a:p>
+                  </a:txBody>
+                </a:tc>
+                <a:tc>
+                  <a:txBody>
+                    <a:bodyPr/>
+                    <a:lstStyle/>
+                    <a:p>
+                      <a:pPr lvl="0" indent="0" marL="0">
+                        <a:buNone/>
+                      </a:pPr>
+                      <a:r>
+                        <a:rPr/>
+                        <a:t>62.7</a:t>
+                      </a:r>
+                    </a:p>
+                  </a:txBody>
+                </a:tc>
+                <a:tc>
+                  <a:txBody>
+                    <a:bodyPr/>
+                    <a:lstStyle/>
+                    <a:p>
+                      <a:pPr lvl="0" indent="0" marL="0">
+                        <a:buNone/>
+                      </a:pPr>
+                      <a:r>
+                        <a:rPr/>
+                        <a:t>323.46</a:t>
+                      </a:r>
+                    </a:p>
+                  </a:txBody>
+                </a:tc>
+                <a:tc>
+                  <a:txBody>
+                    <a:bodyPr/>
+                    <a:lstStyle/>
+                    <a:p>
+                      <a:pPr lvl="0" indent="0" marL="0">
+                        <a:buNone/>
+                      </a:pPr>
+                      <a:r>
+                        <a:rPr/>
+                        <a:t>balsam fir</a:t>
+                      </a:r>
+                    </a:p>
+                  </a:txBody>
+                </a:tc>
+              </a:tr>
+              <a:tr h="0">
+                <a:tc>
+                  <a:txBody>
+                    <a:bodyPr/>
+                    <a:lstStyle/>
+                    <a:p>
+                      <a:pPr lvl="0" indent="0" marL="0">
+                        <a:buNone/>
+                      </a:pPr>
+                      <a:r>
+                        <a:rPr/>
+                        <a:t>2</a:t>
+                      </a:r>
+                    </a:p>
+                  </a:txBody>
+                </a:tc>
+                <a:tc>
+                  <a:txBody>
+                    <a:bodyPr/>
+                    <a:lstStyle/>
+                    <a:p>
+                      <a:pPr lvl="0" indent="0" marL="0">
+                        <a:buNone/>
+                      </a:pPr>
+                      <a:r>
+                        <a:rPr/>
+                        <a:t>12</a:t>
+                      </a:r>
+                    </a:p>
+                  </a:txBody>
+                </a:tc>
+                <a:tc>
+                  <a:txBody>
+                    <a:bodyPr/>
+                    <a:lstStyle/>
+                    <a:p>
+                      <a:pPr lvl="0" indent="0" marL="0">
+                        <a:buNone/>
+                      </a:pPr>
+                      <a:r>
+                        <a:rPr/>
+                        <a:t>9.7</a:t>
+                      </a:r>
+                    </a:p>
+                  </a:txBody>
+                </a:tc>
+                <a:tc>
+                  <a:txBody>
+                    <a:bodyPr/>
+                    <a:lstStyle/>
+                    <a:p>
+                      <a:pPr lvl="0" indent="0" marL="0">
+                        <a:buNone/>
+                      </a:pPr>
+                      <a:r>
+                        <a:rPr/>
+                        <a:t>56.7</a:t>
+                      </a:r>
+                    </a:p>
+                  </a:txBody>
+                </a:tc>
+                <a:tc>
+                  <a:txBody>
+                    <a:bodyPr/>
+                    <a:lstStyle/>
+                    <a:p>
+                      <a:pPr lvl="0" indent="0" marL="0">
+                        <a:buNone/>
+                      </a:pPr>
+                      <a:r>
+                        <a:rPr/>
+                        <a:t>342.47</a:t>
+                      </a:r>
+                    </a:p>
+                  </a:txBody>
+                </a:tc>
+                <a:tc>
+                  <a:txBody>
+                    <a:bodyPr/>
+                    <a:lstStyle/>
+                    <a:p>
+                      <a:pPr lvl="0" indent="0" marL="0">
+                        <a:buNone/>
+                      </a:pPr>
+                      <a:r>
+                        <a:rPr/>
+                        <a:t>balsam fir</a:t>
+                      </a:r>
+                    </a:p>
+                  </a:txBody>
+                </a:tc>
+              </a:tr>
+              <a:tr h="0">
+                <a:tc>
+                  <a:txBody>
+                    <a:bodyPr/>
+                    <a:lstStyle/>
+                    <a:p>
+                      <a:pPr lvl="0" indent="0" marL="0">
+                        <a:buNone/>
+                      </a:pPr>
+                      <a:r>
+                        <a:rPr/>
+                        <a:t>3</a:t>
+                      </a:r>
+                    </a:p>
+                  </a:txBody>
+                </a:tc>
+                <a:tc>
+                  <a:txBody>
+                    <a:bodyPr/>
+                    <a:lstStyle/>
+                    <a:p>
+                      <a:pPr lvl="0" indent="0" marL="0">
+                        <a:buNone/>
+                      </a:pPr>
+                      <a:r>
+                        <a:rPr/>
+                        <a:t>12</a:t>
+                      </a:r>
+                    </a:p>
+                  </a:txBody>
+                </a:tc>
+                <a:tc>
+                  <a:txBody>
+                    <a:bodyPr/>
+                    <a:lstStyle/>
+                    <a:p>
+                      <a:pPr lvl="0" indent="0" marL="0">
+                        <a:buNone/>
+                      </a:pPr>
+                      <a:r>
+                        <a:rPr/>
+                        <a:t>11.4</a:t>
+                      </a:r>
+                    </a:p>
+                  </a:txBody>
+                </a:tc>
+                <a:tc>
+                  <a:txBody>
+                    <a:bodyPr/>
+                    <a:lstStyle/>
+                    <a:p>
+                      <a:pPr lvl="0" indent="0" marL="0">
+                        <a:buNone/>
+                      </a:pPr>
+                      <a:r>
+                        <a:rPr/>
+                        <a:t>66.1</a:t>
+                      </a:r>
+                    </a:p>
+                  </a:txBody>
+                </a:tc>
+                <a:tc>
+                  <a:txBody>
+                    <a:bodyPr/>
+                    <a:lstStyle/>
+                    <a:p>
+                      <a:pPr lvl="0" indent="0" marL="0">
+                        <a:buNone/>
+                      </a:pPr>
+                      <a:r>
+                        <a:rPr/>
+                        <a:t>499.35</a:t>
+                      </a:r>
+                    </a:p>
+                  </a:txBody>
+                </a:tc>
+                <a:tc>
+                  <a:txBody>
+                    <a:bodyPr/>
+                    <a:lstStyle/>
+                    <a:p>
+                      <a:pPr lvl="0" indent="0" marL="0">
+                        <a:buNone/>
+                      </a:pPr>
+                      <a:r>
+                        <a:rPr/>
+                        <a:t>balsam fir</a:t>
+                      </a:r>
+                    </a:p>
+                  </a:txBody>
+                </a:tc>
+              </a:tr>
+              <a:tr h="0">
+                <a:tc>
+                  <a:txBody>
+                    <a:bodyPr/>
+                    <a:lstStyle/>
+                    <a:p>
+                      <a:pPr lvl="0" indent="0" marL="0">
+                        <a:buNone/>
+                      </a:pPr>
+                      <a:r>
+                        <a:rPr/>
+                        <a:t>4</a:t>
+                      </a:r>
+                    </a:p>
+                  </a:txBody>
+                </a:tc>
+                <a:tc>
+                  <a:txBody>
+                    <a:bodyPr/>
+                    <a:lstStyle/>
+                    <a:p>
+                      <a:pPr lvl="0" indent="0" marL="0">
+                        <a:buNone/>
+                      </a:pPr>
+                      <a:r>
+                        <a:rPr/>
+                        <a:t>12</a:t>
+                      </a:r>
+                    </a:p>
+                  </a:txBody>
+                </a:tc>
+                <a:tc>
+                  <a:txBody>
+                    <a:bodyPr/>
+                    <a:lstStyle/>
+                    <a:p>
+                      <a:pPr lvl="0" indent="0" marL="0">
+                        <a:buNone/>
+                      </a:pPr>
+                      <a:r>
+                        <a:rPr/>
+                        <a:t>6.4</a:t>
+                      </a:r>
+                    </a:p>
+                  </a:txBody>
+                </a:tc>
+                <a:tc>
+                  <a:txBody>
+                    <a:bodyPr/>
+                    <a:lstStyle/>
+                    <a:p>
+                      <a:pPr lvl="0" indent="0" marL="0">
+                        <a:buNone/>
+                      </a:pPr>
+                      <a:r>
+                        <a:rPr/>
+                        <a:t>51.8</a:t>
+                      </a:r>
+                    </a:p>
+                  </a:txBody>
+                </a:tc>
+                <a:tc>
+                  <a:txBody>
+                    <a:bodyPr/>
+                    <a:lstStyle/>
+                    <a:p>
+                      <a:pPr lvl="0" indent="0" marL="0">
+                        <a:buNone/>
+                      </a:pPr>
+                      <a:r>
+                        <a:rPr/>
+                        <a:t>113.92</a:t>
+                      </a:r>
+                    </a:p>
+                  </a:txBody>
+                </a:tc>
+                <a:tc>
+                  <a:txBody>
+                    <a:bodyPr/>
+                    <a:lstStyle/>
+                    <a:p>
+                      <a:pPr lvl="0" indent="0" marL="0">
+                        <a:buNone/>
+                      </a:pPr>
+                      <a:r>
+                        <a:rPr/>
+                        <a:t>balsam fir</a:t>
+                      </a:r>
+                    </a:p>
+                  </a:txBody>
+                </a:tc>
+              </a:tr>
+              <a:tr h="0">
+                <a:tc>
+                  <a:txBody>
+                    <a:bodyPr/>
+                    <a:lstStyle/>
+                    <a:p>
+                      <a:pPr lvl="0" indent="0" marL="0">
+                        <a:buNone/>
+                      </a:pPr>
+                      <a:r>
+                        <a:rPr/>
+                        <a:t>...</a:t>
+                      </a:r>
+                    </a:p>
+                  </a:txBody>
+                </a:tc>
+                <a:tc>
+                  <a:txBody>
+                    <a:bodyPr/>
+                    <a:lstStyle/>
+                    <a:p>
+                      <a:pPr lvl="0" indent="0" marL="0">
+                        <a:buNone/>
+                      </a:pPr>
+                      <a:r>
+                        <a:rPr/>
+                        <a:t>...</a:t>
+                      </a:r>
+                    </a:p>
+                  </a:txBody>
+                </a:tc>
+                <a:tc>
+                  <a:txBody>
+                    <a:bodyPr/>
+                    <a:lstStyle/>
+                    <a:p>
+                      <a:pPr lvl="0" indent="0" marL="0">
+                        <a:buNone/>
+                      </a:pPr>
+                      <a:r>
+                        <a:rPr/>
+                        <a:t>...</a:t>
+                      </a:r>
+                    </a:p>
+                  </a:txBody>
+                </a:tc>
+                <a:tc>
+                  <a:txBody>
+                    <a:bodyPr/>
+                    <a:lstStyle/>
+                    <a:p>
+                      <a:pPr lvl="0" indent="0" marL="0">
+                        <a:buNone/>
+                      </a:pPr>
+                      <a:r>
+                        <a:rPr/>
+                        <a:t>...</a:t>
+                      </a:r>
+                    </a:p>
+                  </a:txBody>
+                </a:tc>
+                <a:tc>
+                  <a:txBody>
+                    <a:bodyPr/>
+                    <a:lstStyle/>
+                    <a:p>
+                      <a:pPr lvl="0" indent="0" marL="0">
+                        <a:buNone/>
+                      </a:pPr>
+                      <a:r>
+                        <a:rPr/>
+                        <a:t>...</a:t>
+                      </a:r>
+                    </a:p>
+                  </a:txBody>
+                </a:tc>
+                <a:tc>
+                  <a:txBody>
+                    <a:bodyPr/>
+                    <a:lstStyle/>
+                    <a:p>
+                      <a:pPr lvl="0" indent="0" marL="0">
+                        <a:buNone/>
+                      </a:pPr>
+                      <a:r>
+                        <a:rPr/>
+                        <a:t>...</a:t>
+                      </a:r>
+                    </a:p>
+                  </a:txBody>
+                </a:tc>
+              </a:tr>
+              <a:tr h="0">
+                <a:tc>
+                  <a:txBody>
+                    <a:bodyPr/>
+                    <a:lstStyle/>
+                    <a:p>
+                      <a:pPr lvl="0" indent="0" marL="0">
+                        <a:buNone/>
+                      </a:pPr>
+                      <a:r>
+                        <a:rPr/>
+                        <a:t>137035</a:t>
+                      </a:r>
+                    </a:p>
+                  </a:txBody>
+                </a:tc>
+                <a:tc>
+                  <a:txBody>
+                    <a:bodyPr/>
+                    <a:lstStyle/>
+                    <a:p>
+                      <a:pPr lvl="0" indent="0" marL="0">
+                        <a:buNone/>
+                      </a:pPr>
+                      <a:r>
+                        <a:rPr/>
+                        <a:t>691</a:t>
+                      </a:r>
+                    </a:p>
+                  </a:txBody>
+                </a:tc>
+                <a:tc>
+                  <a:txBody>
+                    <a:bodyPr/>
+                    <a:lstStyle/>
+                    <a:p>
+                      <a:pPr lvl="0" indent="0" marL="0">
+                        <a:buNone/>
+                      </a:pPr>
+                      <a:r>
+                        <a:rPr/>
+                        <a:t>3.7</a:t>
+                      </a:r>
+                    </a:p>
+                  </a:txBody>
+                </a:tc>
+                <a:tc>
+                  <a:txBody>
+                    <a:bodyPr/>
+                    <a:lstStyle/>
+                    <a:p>
+                      <a:pPr lvl="0" indent="0" marL="0">
+                        <a:buNone/>
+                      </a:pPr>
+                      <a:r>
+                        <a:rPr/>
+                        <a:t>25.4</a:t>
+                      </a:r>
+                    </a:p>
+                  </a:txBody>
+                </a:tc>
+                <a:tc>
+                  <a:txBody>
+                    <a:bodyPr/>
+                    <a:lstStyle/>
+                    <a:p>
+                      <a:pPr lvl="0" indent="0" marL="0">
+                        <a:buNone/>
+                      </a:pPr>
+                      <a:r>
+                        <a:rPr/>
+                        <a:t>40.76</a:t>
+                      </a:r>
+                    </a:p>
+                  </a:txBody>
+                </a:tc>
+                <a:tc>
+                  <a:txBody>
+                    <a:bodyPr/>
+                    <a:lstStyle/>
+                    <a:p>
+                      <a:pPr lvl="0" indent="0" marL="0">
+                        <a:buNone/>
+                      </a:pPr>
+                      <a:r>
+                        <a:rPr/>
+                        <a:t>water tupelo</a:t>
+                      </a:r>
+                    </a:p>
+                  </a:txBody>
+                </a:tc>
+              </a:tr>
+              <a:tr h="0">
+                <a:tc>
+                  <a:txBody>
+                    <a:bodyPr/>
+                    <a:lstStyle/>
+                    <a:p>
+                      <a:pPr lvl="0" indent="0" marL="0">
+                        <a:buNone/>
+                      </a:pPr>
+                      <a:r>
+                        <a:rPr/>
+                        <a:t>137036</a:t>
+                      </a:r>
+                    </a:p>
+                  </a:txBody>
+                </a:tc>
+                <a:tc>
+                  <a:txBody>
+                    <a:bodyPr/>
+                    <a:lstStyle/>
+                    <a:p>
+                      <a:pPr lvl="0" indent="0" marL="0">
+                        <a:buNone/>
+                      </a:pPr>
+                      <a:r>
+                        <a:rPr/>
+                        <a:t>691</a:t>
+                      </a:r>
+                    </a:p>
+                  </a:txBody>
+                </a:tc>
+                <a:tc>
+                  <a:txBody>
+                    <a:bodyPr/>
+                    <a:lstStyle/>
+                    <a:p>
+                      <a:pPr lvl="0" indent="0" marL="0">
+                        <a:buNone/>
+                      </a:pPr>
+                      <a:r>
+                        <a:rPr/>
+                        <a:t>3.2</a:t>
+                      </a:r>
+                    </a:p>
+                  </a:txBody>
+                </a:tc>
+                <a:tc>
+                  <a:txBody>
+                    <a:bodyPr/>
+                    <a:lstStyle/>
+                    <a:p>
+                      <a:pPr lvl="0" indent="0" marL="0">
+                        <a:buNone/>
+                      </a:pPr>
+                      <a:r>
+                        <a:rPr/>
+                        <a:t>28.8</a:t>
+                      </a:r>
+                    </a:p>
+                  </a:txBody>
+                </a:tc>
+                <a:tc>
+                  <a:txBody>
+                    <a:bodyPr/>
+                    <a:lstStyle/>
+                    <a:p>
+                      <a:pPr lvl="0" indent="0" marL="0">
+                        <a:buNone/>
+                      </a:pPr>
+                      <a:r>
+                        <a:rPr/>
+                        <a:t>28.44</a:t>
+                      </a:r>
+                    </a:p>
+                  </a:txBody>
+                </a:tc>
+                <a:tc>
+                  <a:txBody>
+                    <a:bodyPr/>
+                    <a:lstStyle/>
+                    <a:p>
+                      <a:pPr lvl="0" indent="0" marL="0">
+                        <a:buNone/>
+                      </a:pPr>
+                      <a:r>
+                        <a:rPr/>
+                        <a:t>water tupelo</a:t>
+                      </a:r>
+                    </a:p>
+                  </a:txBody>
+                </a:tc>
+              </a:tr>
+              <a:tr h="0">
+                <a:tc>
+                  <a:txBody>
+                    <a:bodyPr/>
+                    <a:lstStyle/>
+                    <a:p>
+                      <a:pPr lvl="0" indent="0" marL="0">
+                        <a:buNone/>
+                      </a:pPr>
+                      <a:r>
+                        <a:rPr/>
+                        <a:t>137037</a:t>
+                      </a:r>
+                    </a:p>
+                  </a:txBody>
+                </a:tc>
+                <a:tc>
+                  <a:txBody>
+                    <a:bodyPr/>
+                    <a:lstStyle/>
+                    <a:p>
+                      <a:pPr lvl="0" indent="0" marL="0">
+                        <a:buNone/>
+                      </a:pPr>
+                      <a:r>
+                        <a:rPr/>
+                        <a:t>691</a:t>
+                      </a:r>
+                    </a:p>
+                  </a:txBody>
+                </a:tc>
+                <a:tc>
+                  <a:txBody>
+                    <a:bodyPr/>
+                    <a:lstStyle/>
+                    <a:p>
+                      <a:pPr lvl="0" indent="0" marL="0">
+                        <a:buNone/>
+                      </a:pPr>
+                      <a:r>
+                        <a:rPr/>
+                        <a:t>4.7</a:t>
+                      </a:r>
+                    </a:p>
+                  </a:txBody>
+                </a:tc>
+                <a:tc>
+                  <a:txBody>
+                    <a:bodyPr/>
+                    <a:lstStyle/>
+                    <a:p>
+                      <a:pPr lvl="0" indent="0" marL="0">
+                        <a:buNone/>
+                      </a:pPr>
+                      <a:r>
+                        <a:rPr/>
+                        <a:t>31.4</a:t>
+                      </a:r>
+                    </a:p>
+                  </a:txBody>
+                </a:tc>
+                <a:tc>
+                  <a:txBody>
+                    <a:bodyPr/>
+                    <a:lstStyle/>
+                    <a:p>
+                      <a:pPr lvl="0" indent="0" marL="0">
+                        <a:buNone/>
+                      </a:pPr>
+                      <a:r>
+                        <a:rPr/>
+                        <a:t>73.78</a:t>
+                      </a:r>
+                    </a:p>
+                  </a:txBody>
+                </a:tc>
+                <a:tc>
+                  <a:txBody>
+                    <a:bodyPr/>
+                    <a:lstStyle/>
+                    <a:p>
+                      <a:pPr lvl="0" indent="0" marL="0">
+                        <a:buNone/>
+                      </a:pPr>
+                      <a:r>
+                        <a:rPr/>
+                        <a:t>water tupelo</a:t>
+                      </a:r>
+                    </a:p>
+                  </a:txBody>
+                </a:tc>
+              </a:tr>
+              <a:tr h="0">
+                <a:tc>
+                  <a:txBody>
+                    <a:bodyPr/>
+                    <a:lstStyle/>
+                    <a:p>
+                      <a:pPr lvl="0" indent="0" marL="0">
+                        <a:buNone/>
+                      </a:pPr>
+                      <a:r>
+                        <a:rPr/>
+                        <a:t>137038</a:t>
+                      </a:r>
+                    </a:p>
+                  </a:txBody>
+                </a:tc>
+                <a:tc>
+                  <a:txBody>
+                    <a:bodyPr/>
+                    <a:lstStyle/>
+                    <a:p>
+                      <a:pPr lvl="0" indent="0" marL="0">
+                        <a:buNone/>
+                      </a:pPr>
+                      <a:r>
+                        <a:rPr/>
+                        <a:t>691</a:t>
+                      </a:r>
+                    </a:p>
+                  </a:txBody>
+                </a:tc>
+                <a:tc>
+                  <a:txBody>
+                    <a:bodyPr/>
+                    <a:lstStyle/>
+                    <a:p>
+                      <a:pPr lvl="0" indent="0" marL="0">
+                        <a:buNone/>
+                      </a:pPr>
+                      <a:r>
+                        <a:rPr/>
+                        <a:t>4.4</a:t>
+                      </a:r>
+                    </a:p>
+                  </a:txBody>
+                </a:tc>
+                <a:tc>
+                  <a:txBody>
+                    <a:bodyPr/>
+                    <a:lstStyle/>
+                    <a:p>
+                      <a:pPr lvl="0" indent="0" marL="0">
+                        <a:buNone/>
+                      </a:pPr>
+                      <a:r>
+                        <a:rPr/>
+                        <a:t>26.9</a:t>
+                      </a:r>
+                    </a:p>
+                  </a:txBody>
+                </a:tc>
+                <a:tc>
+                  <a:txBody>
+                    <a:bodyPr/>
+                    <a:lstStyle/>
+                    <a:p>
+                      <a:pPr lvl="0" indent="0" marL="0">
+                        <a:buNone/>
+                      </a:pPr>
+                      <a:r>
+                        <a:rPr/>
+                        <a:t>62.64</a:t>
+                      </a:r>
+                    </a:p>
+                  </a:txBody>
+                </a:tc>
+                <a:tc>
+                  <a:txBody>
+                    <a:bodyPr/>
+                    <a:lstStyle/>
+                    <a:p>
+                      <a:pPr lvl="0" indent="0" marL="0">
+                        <a:buNone/>
+                      </a:pPr>
+                      <a:r>
+                        <a:rPr/>
+                        <a:t>water tupelo</a:t>
+                      </a:r>
+                    </a:p>
+                  </a:txBody>
+                </a:tc>
+              </a:tr>
+              <a:tr h="0">
+                <a:tc>
+                  <a:txBody>
+                    <a:bodyPr/>
+                    <a:lstStyle/>
+                    <a:p>
+                      <a:pPr lvl="0" indent="0" marL="0">
+                        <a:buNone/>
+                      </a:pPr>
+                      <a:r>
+                        <a:rPr/>
+                        <a:t>137039</a:t>
+                      </a:r>
+                    </a:p>
+                  </a:txBody>
+                </a:tc>
+                <a:tc>
+                  <a:txBody>
+                    <a:bodyPr/>
+                    <a:lstStyle/>
+                    <a:p>
+                      <a:pPr lvl="0" indent="0" marL="0">
+                        <a:buNone/>
+                      </a:pPr>
+                      <a:r>
+                        <a:rPr/>
+                        <a:t>691</a:t>
+                      </a:r>
+                    </a:p>
+                  </a:txBody>
+                </a:tc>
+                <a:tc>
+                  <a:txBody>
+                    <a:bodyPr/>
+                    <a:lstStyle/>
+                    <a:p>
+                      <a:pPr lvl="0" indent="0" marL="0">
+                        <a:buNone/>
+                      </a:pPr>
+                      <a:r>
+                        <a:rPr/>
+                        <a:t>4.2</a:t>
+                      </a:r>
+                    </a:p>
+                  </a:txBody>
+                </a:tc>
+                <a:tc>
+                  <a:txBody>
+                    <a:bodyPr/>
+                    <a:lstStyle/>
+                    <a:p>
+                      <a:pPr lvl="0" indent="0" marL="0">
+                        <a:buNone/>
+                      </a:pPr>
+                      <a:r>
+                        <a:rPr/>
+                        <a:t>28.1</a:t>
+                      </a:r>
+                    </a:p>
+                  </a:txBody>
+                </a:tc>
+                <a:tc>
+                  <a:txBody>
+                    <a:bodyPr/>
+                    <a:lstStyle/>
+                    <a:p>
+                      <a:pPr lvl="0" indent="0" marL="0">
+                        <a:buNone/>
+                      </a:pPr>
+                      <a:r>
+                        <a:rPr/>
+                        <a:t>55.82</a:t>
+                      </a:r>
+                    </a:p>
+                  </a:txBody>
+                </a:tc>
+                <a:tc>
+                  <a:txBody>
+                    <a:bodyPr/>
+                    <a:lstStyle/>
+                    <a:p>
+                      <a:pPr lvl="0" indent="0" marL="0">
+                        <a:buNone/>
+                      </a:pPr>
+                      <a:r>
+                        <a:rPr/>
+                        <a:t>water tupelo</a:t>
+                      </a:r>
+                    </a:p>
+                  </a:txBody>
+                </a:tc>
+              </a:tr>
+            </a:tbl>
+          </a:graphicData>
+        </a:graphic>
+      </p:graphicFrame>
+    </p:spTree>
+  </p:cSld>
+</p:sld>
+</file>
+
+<file path=ppt/slides/slide21.xml><?xml version="1.0" encoding="utf-8"?>
+<p:sld xmlns:a="http://schemas.openxmlformats.org/drawingml/2006/main" xmlns:r="http://schemas.openxmlformats.org/officeDocument/2006/relationships" xmlns:p="http://schemas.openxmlformats.org/presentationml/2006/main">
+  <p:cSld>
+    <p:spTree>
+      <p:nvGrpSpPr>
+        <p:cNvPr id="1" name=""/>
+        <p:cNvGrpSpPr/>
+        <p:nvPr/>
+      </p:nvGrpSpPr>
+      <p:grpSpPr>
+        <a:xfrm>
+          <a:off x="0" y="0"/>
+          <a:ext cx="0" cy="0"/>
+          <a:chOff x="0" y="0"/>
+          <a:chExt cx="0" cy="0"/>
+        </a:xfrm>
+      </p:grpSpPr>
+      <p:sp>
+        <p:nvSpPr>
+          <p:cNvPr id="2" name="Title 1"/>
+          <p:cNvSpPr>
+            <a:spLocks noGrp="1"/>
+          </p:cNvSpPr>
+          <p:nvPr>
+            <p:ph type="title"/>
+          </p:nvPr>
+        </p:nvSpPr>
+        <p:spPr/>
+        <p:txBody>
+          <a:bodyPr/>
+          <a:lstStyle/>
+          <a:p>
+            <a:pPr lvl="0" indent="0" marL="0">
+              <a:buNone/>
+            </a:pPr>
+            <a:r>
+              <a:rPr/>
+              <a:t>Base datset calculations:</a:t>
+            </a:r>
+          </a:p>
+        </p:txBody>
+      </p:sp>
+      <p:sp>
+        <p:nvSpPr>
+          <p:cNvPr id="3" name="Content Placeholder 2"/>
+          <p:cNvSpPr>
+            <a:spLocks noGrp="1"/>
+          </p:cNvSpPr>
+          <p:nvPr>
+            <p:ph idx="1"/>
+          </p:nvPr>
+        </p:nvSpPr>
+        <p:spPr/>
+        <p:txBody>
+          <a:bodyPr/>
+          <a:lstStyle/>
+          <a:p>
+            <a:pPr lvl="0" indent="0">
+              <a:buNone/>
+            </a:pPr>
+            <a:r>
+              <a:rPr>
+                <a:latin typeface="Courier"/>
+              </a:rPr>
+              <a:t>Average Root Mean Squared Log Error (RMSLE) for k = 3: 0.15806802121296354</a:t>
+            </a:r>
+          </a:p>
+        </p:txBody>
+      </p:sp>
+    </p:spTree>
+  </p:cSld>
+</p:sld>
+</file>
+
+<file path=ppt/slides/slide22.xml><?xml version="1.0" encoding="utf-8"?>
+<p:sld xmlns:a="http://schemas.openxmlformats.org/drawingml/2006/main" xmlns:r="http://schemas.openxmlformats.org/officeDocument/2006/relationships" xmlns:p="http://schemas.openxmlformats.org/presentationml/2006/main">
+  <p:cSld>
+    <p:spTree>
+      <p:nvGrpSpPr>
+        <p:cNvPr id="1" name=""/>
+        <p:cNvGrpSpPr/>
+        <p:nvPr/>
+      </p:nvGrpSpPr>
+      <p:grpSpPr>
+        <a:xfrm>
+          <a:off x="0" y="0"/>
+          <a:ext cx="0" cy="0"/>
+          <a:chOff x="0" y="0"/>
+          <a:chExt cx="0" cy="0"/>
+        </a:xfrm>
+      </p:grpSpPr>
+      <p:sp>
+        <p:nvSpPr>
+          <p:cNvPr id="2" name="Title 1"/>
+          <p:cNvSpPr>
+            <a:spLocks noGrp="1"/>
+          </p:cNvSpPr>
+          <p:nvPr>
+            <p:ph type="title"/>
+          </p:nvPr>
+        </p:nvSpPr>
+        <p:spPr/>
+        <p:txBody>
+          <a:bodyPr/>
+          <a:lstStyle/>
+          <a:p>
+            <a:pPr lvl="0" indent="0" marL="0">
+              <a:buNone/>
+            </a:pPr>
+            <a:r>
+              <a:rPr/>
+              <a:t>Quality Assurance</a:t>
             </a:r>
           </a:p>
         </p:txBody>

--- a/Project-3/presentation.pptx
+++ b/Project-3/presentation.pptx
@@ -25,6 +25,10 @@
     <p:sldId id="273" r:id="rId19"/>
     <p:sldId id="274" r:id="rId20"/>
     <p:sldId id="275" r:id="rId21"/>
+    <p:sldId id="276" r:id="rId22"/>
+    <p:sldId id="277" r:id="rId23"/>
+    <p:sldId id="278" r:id="rId24"/>
+    <p:sldId id="279" r:id="rId25"/>
   </p:sldIdLst>
   <p:sldSz cx="9144000" cy="5143500" type="screen16x9"/>
   <p:notesSz cx="6858000" cy="9144000"/>
@@ -3460,7 +3464,7 @@
             </a:pPr>
             <a:r>
               <a:rPr/>
-              <a:t>Performance Metric</a:t>
+              <a:t>Consultation</a:t>
             </a:r>
           </a:p>
         </p:txBody>
@@ -3480,12 +3484,17 @@
           <a:bodyPr/>
           <a:lstStyle/>
           <a:p>
-            <a:pPr lvl="0" indent="0" marL="0">
-              <a:buNone/>
-            </a:pPr>
+            <a:pPr lvl="0"/>
             <a:r>
               <a:rPr/>
-              <a:t>The Performance metric we choose is Root Mean Square Logarithmic Error(RMSLE), because when we were looking at the dataset of the biomass of different kinds of tree species, we saw that some species have more data than other species so the assume that the data is skewed</a:t>
+              <a:t>When predicting tree biomass, employ the performance metric root mean square logarithmic error since biomass data varies greatly, ranging from tiny saplings to enormous trees, majority of trees having exponential growth.</a:t>
+            </a:r>
+          </a:p>
+          <a:p>
+            <a:pPr lvl="0"/>
+            <a:r>
+              <a:rPr/>
+              <a:t>We chose kNN regression over linear regression because when looking at the graphs Dean presented, we saw that the tree diameter/height vs. biomass graphs all have exponential growth.</a:t>
             </a:r>
           </a:p>
         </p:txBody>
@@ -3532,1147 +3541,34 @@
             </a:pPr>
             <a:r>
               <a:rPr/>
-              <a:t>Model</a:t>
+              <a:t>Consultation pt 2</a:t>
             </a:r>
           </a:p>
         </p:txBody>
       </p:sp>
-      <p:graphicFrame>
-        <p:nvGraphicFramePr>
-          <p:cNvPr id="6" name="Content Placeholder 5"/>
-          <p:cNvGraphicFramePr>
-            <a:graphicFrameLocks noGrp="1"/>
-          </p:cNvGraphicFramePr>
+      <p:sp>
+        <p:nvSpPr>
+          <p:cNvPr id="3" name="Content Placeholder 2"/>
+          <p:cNvSpPr>
+            <a:spLocks noGrp="1"/>
+          </p:cNvSpPr>
           <p:nvPr>
             <p:ph idx="1"/>
           </p:nvPr>
-        </p:nvGraphicFramePr>
-        <p:xfrm>
-          <a:off x="457200" y="1193800"/>
-          <a:ext cx="8229600" cy="3390900"/>
-        </p:xfrm>
-        <a:graphic>
-          <a:graphicData uri="http://schemas.openxmlformats.org/drawingml/2006/table">
-            <a:tbl>
-              <a:tblPr firstRow="1" bandRow="1">
-                <a:tableStyleId>{5C22544A-7EE6-4342-B048-85BDC9FD1C3A}</a:tableStyleId>
-              </a:tblPr>
-              <a:tblGrid>
-                <a:gridCol w="1371600"/>
-                <a:gridCol w="1371600"/>
-                <a:gridCol w="1371600"/>
-                <a:gridCol w="1371600"/>
-                <a:gridCol w="1371600"/>
-                <a:gridCol w="1371600"/>
-              </a:tblGrid>
-              <a:tr h="0">
-                <a:tc>
-                  <a:txBody>
-                    <a:bodyPr/>
-                    <a:lstStyle/>
-                    <a:p>
-                      <a:endParaRPr/>
-                    </a:p>
-                  </a:txBody>
-                  <a:tcPr/>
-                </a:tc>
-                <a:tc>
-                  <a:txBody>
-                    <a:bodyPr/>
-                    <a:lstStyle/>
-                    <a:p>
-                      <a:pPr lvl="0" indent="0" marL="0">
-                        <a:buNone/>
-                      </a:pPr>
-                      <a:r>
-                        <a:rPr/>
-                        <a:t>Species</a:t>
-                      </a:r>
-                    </a:p>
-                  </a:txBody>
-                  <a:tcPr/>
-                </a:tc>
-                <a:tc>
-                  <a:txBody>
-                    <a:bodyPr/>
-                    <a:lstStyle/>
-                    <a:p>
-                      <a:pPr lvl="0" indent="0" marL="0">
-                        <a:buNone/>
-                      </a:pPr>
-                      <a:r>
-                        <a:rPr/>
-                        <a:t>k</a:t>
-                      </a:r>
-                    </a:p>
-                  </a:txBody>
-                  <a:tcPr/>
-                </a:tc>
-                <a:tc>
-                  <a:txBody>
-                    <a:bodyPr/>
-                    <a:lstStyle/>
-                    <a:p>
-                      <a:pPr lvl="0" indent="0" marL="0">
-                        <a:buNone/>
-                      </a:pPr>
-                      <a:r>
-                        <a:rPr/>
-                        <a:t>RMSE</a:t>
-                      </a:r>
-                    </a:p>
-                  </a:txBody>
-                  <a:tcPr/>
-                </a:tc>
-                <a:tc>
-                  <a:txBody>
-                    <a:bodyPr/>
-                    <a:lstStyle/>
-                    <a:p>
-                      <a:pPr lvl="0" indent="0" marL="0">
-                        <a:buNone/>
-                      </a:pPr>
-                      <a:r>
-                        <a:rPr/>
-                        <a:t>MAE</a:t>
-                      </a:r>
-                    </a:p>
-                  </a:txBody>
-                  <a:tcPr/>
-                </a:tc>
-                <a:tc>
-                  <a:txBody>
-                    <a:bodyPr/>
-                    <a:lstStyle/>
-                    <a:p>
-                      <a:pPr lvl="0" indent="0" marL="0">
-                        <a:buNone/>
-                      </a:pPr>
-                      <a:r>
-                        <a:rPr/>
-                        <a:t>RMSLE</a:t>
-                      </a:r>
-                    </a:p>
-                  </a:txBody>
-                  <a:tcPr/>
-                </a:tc>
-              </a:tr>
-              <a:tr h="0">
-                <a:tc>
-                  <a:txBody>
-                    <a:bodyPr/>
-                    <a:lstStyle/>
-                    <a:p>
-                      <a:pPr lvl="0" indent="0" marL="0">
-                        <a:buNone/>
-                      </a:pPr>
-                      <a:r>
-                        <a:rPr/>
-                        <a:t>0</a:t>
-                      </a:r>
-                    </a:p>
-                  </a:txBody>
-                </a:tc>
-                <a:tc>
-                  <a:txBody>
-                    <a:bodyPr/>
-                    <a:lstStyle/>
-                    <a:p>
-                      <a:pPr lvl="0" indent="0" marL="0">
-                        <a:buNone/>
-                      </a:pPr>
-                      <a:r>
-                        <a:rPr/>
-                        <a:t>balsam fir</a:t>
-                      </a:r>
-                    </a:p>
-                  </a:txBody>
-                </a:tc>
-                <a:tc>
-                  <a:txBody>
-                    <a:bodyPr/>
-                    <a:lstStyle/>
-                    <a:p>
-                      <a:pPr lvl="0" indent="0" marL="0">
-                        <a:buNone/>
-                      </a:pPr>
-                      <a:r>
-                        <a:rPr/>
-                        <a:t>2</a:t>
-                      </a:r>
-                    </a:p>
-                  </a:txBody>
-                </a:tc>
-                <a:tc>
-                  <a:txBody>
-                    <a:bodyPr/>
-                    <a:lstStyle/>
-                    <a:p>
-                      <a:pPr lvl="0" indent="0" marL="0">
-                        <a:buNone/>
-                      </a:pPr>
-                      <a:r>
-                        <a:rPr/>
-                        <a:t>125.827396</a:t>
-                      </a:r>
-                    </a:p>
-                  </a:txBody>
-                </a:tc>
-                <a:tc>
-                  <a:txBody>
-                    <a:bodyPr/>
-                    <a:lstStyle/>
-                    <a:p>
-                      <a:pPr lvl="0" indent="0" marL="0">
-                        <a:buNone/>
-                      </a:pPr>
-                      <a:r>
-                        <a:rPr/>
-                        <a:t>34.820565</a:t>
-                      </a:r>
-                    </a:p>
-                  </a:txBody>
-                </a:tc>
-                <a:tc>
-                  <a:txBody>
-                    <a:bodyPr/>
-                    <a:lstStyle/>
-                    <a:p>
-                      <a:pPr lvl="0" indent="0" marL="0">
-                        <a:buNone/>
-                      </a:pPr>
-                      <a:r>
-                        <a:rPr/>
-                        <a:t>0.119617</a:t>
-                      </a:r>
-                    </a:p>
-                  </a:txBody>
-                </a:tc>
-              </a:tr>
-              <a:tr h="0">
-                <a:tc>
-                  <a:txBody>
-                    <a:bodyPr/>
-                    <a:lstStyle/>
-                    <a:p>
-                      <a:pPr lvl="0" indent="0" marL="0">
-                        <a:buNone/>
-                      </a:pPr>
-                      <a:r>
-                        <a:rPr/>
-                        <a:t>1</a:t>
-                      </a:r>
-                    </a:p>
-                  </a:txBody>
-                </a:tc>
-                <a:tc>
-                  <a:txBody>
-                    <a:bodyPr/>
-                    <a:lstStyle/>
-                    <a:p>
-                      <a:pPr lvl="0" indent="0" marL="0">
-                        <a:buNone/>
-                      </a:pPr>
-                      <a:r>
-                        <a:rPr/>
-                        <a:t>balsam fir</a:t>
-                      </a:r>
-                    </a:p>
-                  </a:txBody>
-                </a:tc>
-                <a:tc>
-                  <a:txBody>
-                    <a:bodyPr/>
-                    <a:lstStyle/>
-                    <a:p>
-                      <a:pPr lvl="0" indent="0" marL="0">
-                        <a:buNone/>
-                      </a:pPr>
-                      <a:r>
-                        <a:rPr/>
-                        <a:t>3</a:t>
-                      </a:r>
-                    </a:p>
-                  </a:txBody>
-                </a:tc>
-                <a:tc>
-                  <a:txBody>
-                    <a:bodyPr/>
-                    <a:lstStyle/>
-                    <a:p>
-                      <a:pPr lvl="0" indent="0" marL="0">
-                        <a:buNone/>
-                      </a:pPr>
-                      <a:r>
-                        <a:rPr/>
-                        <a:t>129.650855</a:t>
-                      </a:r>
-                    </a:p>
-                  </a:txBody>
-                </a:tc>
-                <a:tc>
-                  <a:txBody>
-                    <a:bodyPr/>
-                    <a:lstStyle/>
-                    <a:p>
-                      <a:pPr lvl="0" indent="0" marL="0">
-                        <a:buNone/>
-                      </a:pPr>
-                      <a:r>
-                        <a:rPr/>
-                        <a:t>36.628377</a:t>
-                      </a:r>
-                    </a:p>
-                  </a:txBody>
-                </a:tc>
-                <a:tc>
-                  <a:txBody>
-                    <a:bodyPr/>
-                    <a:lstStyle/>
-                    <a:p>
-                      <a:pPr lvl="0" indent="0" marL="0">
-                        <a:buNone/>
-                      </a:pPr>
-                      <a:r>
-                        <a:rPr/>
-                        <a:t>0.123679</a:t>
-                      </a:r>
-                    </a:p>
-                  </a:txBody>
-                </a:tc>
-              </a:tr>
-              <a:tr h="0">
-                <a:tc>
-                  <a:txBody>
-                    <a:bodyPr/>
-                    <a:lstStyle/>
-                    <a:p>
-                      <a:pPr lvl="0" indent="0" marL="0">
-                        <a:buNone/>
-                      </a:pPr>
-                      <a:r>
-                        <a:rPr/>
-                        <a:t>2</a:t>
-                      </a:r>
-                    </a:p>
-                  </a:txBody>
-                </a:tc>
-                <a:tc>
-                  <a:txBody>
-                    <a:bodyPr/>
-                    <a:lstStyle/>
-                    <a:p>
-                      <a:pPr lvl="0" indent="0" marL="0">
-                        <a:buNone/>
-                      </a:pPr>
-                      <a:r>
-                        <a:rPr/>
-                        <a:t>balsam fir</a:t>
-                      </a:r>
-                    </a:p>
-                  </a:txBody>
-                </a:tc>
-                <a:tc>
-                  <a:txBody>
-                    <a:bodyPr/>
-                    <a:lstStyle/>
-                    <a:p>
-                      <a:pPr lvl="0" indent="0" marL="0">
-                        <a:buNone/>
-                      </a:pPr>
-                      <a:r>
-                        <a:rPr/>
-                        <a:t>4</a:t>
-                      </a:r>
-                    </a:p>
-                  </a:txBody>
-                </a:tc>
-                <a:tc>
-                  <a:txBody>
-                    <a:bodyPr/>
-                    <a:lstStyle/>
-                    <a:p>
-                      <a:pPr lvl="0" indent="0" marL="0">
-                        <a:buNone/>
-                      </a:pPr>
-                      <a:r>
-                        <a:rPr/>
-                        <a:t>134.599829</a:t>
-                      </a:r>
-                    </a:p>
-                  </a:txBody>
-                </a:tc>
-                <a:tc>
-                  <a:txBody>
-                    <a:bodyPr/>
-                    <a:lstStyle/>
-                    <a:p>
-                      <a:pPr lvl="0" indent="0" marL="0">
-                        <a:buNone/>
-                      </a:pPr>
-                      <a:r>
-                        <a:rPr/>
-                        <a:t>38.884870</a:t>
-                      </a:r>
-                    </a:p>
-                  </a:txBody>
-                </a:tc>
-                <a:tc>
-                  <a:txBody>
-                    <a:bodyPr/>
-                    <a:lstStyle/>
-                    <a:p>
-                      <a:pPr lvl="0" indent="0" marL="0">
-                        <a:buNone/>
-                      </a:pPr>
-                      <a:r>
-                        <a:rPr/>
-                        <a:t>0.133858</a:t>
-                      </a:r>
-                    </a:p>
-                  </a:txBody>
-                </a:tc>
-              </a:tr>
-              <a:tr h="0">
-                <a:tc>
-                  <a:txBody>
-                    <a:bodyPr/>
-                    <a:lstStyle/>
-                    <a:p>
-                      <a:pPr lvl="0" indent="0" marL="0">
-                        <a:buNone/>
-                      </a:pPr>
-                      <a:r>
-                        <a:rPr/>
-                        <a:t>3</a:t>
-                      </a:r>
-                    </a:p>
-                  </a:txBody>
-                </a:tc>
-                <a:tc>
-                  <a:txBody>
-                    <a:bodyPr/>
-                    <a:lstStyle/>
-                    <a:p>
-                      <a:pPr lvl="0" indent="0" marL="0">
-                        <a:buNone/>
-                      </a:pPr>
-                      <a:r>
-                        <a:rPr/>
-                        <a:t>balsam fir</a:t>
-                      </a:r>
-                    </a:p>
-                  </a:txBody>
-                </a:tc>
-                <a:tc>
-                  <a:txBody>
-                    <a:bodyPr/>
-                    <a:lstStyle/>
-                    <a:p>
-                      <a:pPr lvl="0" indent="0" marL="0">
-                        <a:buNone/>
-                      </a:pPr>
-                      <a:r>
-                        <a:rPr/>
-                        <a:t>5</a:t>
-                      </a:r>
-                    </a:p>
-                  </a:txBody>
-                </a:tc>
-                <a:tc>
-                  <a:txBody>
-                    <a:bodyPr/>
-                    <a:lstStyle/>
-                    <a:p>
-                      <a:pPr lvl="0" indent="0" marL="0">
-                        <a:buNone/>
-                      </a:pPr>
-                      <a:r>
-                        <a:rPr/>
-                        <a:t>145.002852</a:t>
-                      </a:r>
-                    </a:p>
-                  </a:txBody>
-                </a:tc>
-                <a:tc>
-                  <a:txBody>
-                    <a:bodyPr/>
-                    <a:lstStyle/>
-                    <a:p>
-                      <a:pPr lvl="0" indent="0" marL="0">
-                        <a:buNone/>
-                      </a:pPr>
-                      <a:r>
-                        <a:rPr/>
-                        <a:t>41.168470</a:t>
-                      </a:r>
-                    </a:p>
-                  </a:txBody>
-                </a:tc>
-                <a:tc>
-                  <a:txBody>
-                    <a:bodyPr/>
-                    <a:lstStyle/>
-                    <a:p>
-                      <a:pPr lvl="0" indent="0" marL="0">
-                        <a:buNone/>
-                      </a:pPr>
-                      <a:r>
-                        <a:rPr/>
-                        <a:t>0.144052</a:t>
-                      </a:r>
-                    </a:p>
-                  </a:txBody>
-                </a:tc>
-              </a:tr>
-              <a:tr h="0">
-                <a:tc>
-                  <a:txBody>
-                    <a:bodyPr/>
-                    <a:lstStyle/>
-                    <a:p>
-                      <a:pPr lvl="0" indent="0" marL="0">
-                        <a:buNone/>
-                      </a:pPr>
-                      <a:r>
-                        <a:rPr/>
-                        <a:t>4</a:t>
-                      </a:r>
-                    </a:p>
-                  </a:txBody>
-                </a:tc>
-                <a:tc>
-                  <a:txBody>
-                    <a:bodyPr/>
-                    <a:lstStyle/>
-                    <a:p>
-                      <a:pPr lvl="0" indent="0" marL="0">
-                        <a:buNone/>
-                      </a:pPr>
-                      <a:r>
-                        <a:rPr/>
-                        <a:t>balsam fir</a:t>
-                      </a:r>
-                    </a:p>
-                  </a:txBody>
-                </a:tc>
-                <a:tc>
-                  <a:txBody>
-                    <a:bodyPr/>
-                    <a:lstStyle/>
-                    <a:p>
-                      <a:pPr lvl="0" indent="0" marL="0">
-                        <a:buNone/>
-                      </a:pPr>
-                      <a:r>
-                        <a:rPr/>
-                        <a:t>6</a:t>
-                      </a:r>
-                    </a:p>
-                  </a:txBody>
-                </a:tc>
-                <a:tc>
-                  <a:txBody>
-                    <a:bodyPr/>
-                    <a:lstStyle/>
-                    <a:p>
-                      <a:pPr lvl="0" indent="0" marL="0">
-                        <a:buNone/>
-                      </a:pPr>
-                      <a:r>
-                        <a:rPr/>
-                        <a:t>147.449208</a:t>
-                      </a:r>
-                    </a:p>
-                  </a:txBody>
-                </a:tc>
-                <a:tc>
-                  <a:txBody>
-                    <a:bodyPr/>
-                    <a:lstStyle/>
-                    <a:p>
-                      <a:pPr lvl="0" indent="0" marL="0">
-                        <a:buNone/>
-                      </a:pPr>
-                      <a:r>
-                        <a:rPr/>
-                        <a:t>40.728609</a:t>
-                      </a:r>
-                    </a:p>
-                  </a:txBody>
-                </a:tc>
-                <a:tc>
-                  <a:txBody>
-                    <a:bodyPr/>
-                    <a:lstStyle/>
-                    <a:p>
-                      <a:pPr lvl="0" indent="0" marL="0">
-                        <a:buNone/>
-                      </a:pPr>
-                      <a:r>
-                        <a:rPr/>
-                        <a:t>0.142813</a:t>
-                      </a:r>
-                    </a:p>
-                  </a:txBody>
-                </a:tc>
-              </a:tr>
-              <a:tr h="0">
-                <a:tc>
-                  <a:txBody>
-                    <a:bodyPr/>
-                    <a:lstStyle/>
-                    <a:p>
-                      <a:pPr lvl="0" indent="0" marL="0">
-                        <a:buNone/>
-                      </a:pPr>
-                      <a:r>
-                        <a:rPr/>
-                        <a:t>...</a:t>
-                      </a:r>
-                    </a:p>
-                  </a:txBody>
-                </a:tc>
-                <a:tc>
-                  <a:txBody>
-                    <a:bodyPr/>
-                    <a:lstStyle/>
-                    <a:p>
-                      <a:pPr lvl="0" indent="0" marL="0">
-                        <a:buNone/>
-                      </a:pPr>
-                      <a:r>
-                        <a:rPr/>
-                        <a:t>...</a:t>
-                      </a:r>
-                    </a:p>
-                  </a:txBody>
-                </a:tc>
-                <a:tc>
-                  <a:txBody>
-                    <a:bodyPr/>
-                    <a:lstStyle/>
-                    <a:p>
-                      <a:pPr lvl="0" indent="0" marL="0">
-                        <a:buNone/>
-                      </a:pPr>
-                      <a:r>
-                        <a:rPr/>
-                        <a:t>...</a:t>
-                      </a:r>
-                    </a:p>
-                  </a:txBody>
-                </a:tc>
-                <a:tc>
-                  <a:txBody>
-                    <a:bodyPr/>
-                    <a:lstStyle/>
-                    <a:p>
-                      <a:pPr lvl="0" indent="0" marL="0">
-                        <a:buNone/>
-                      </a:pPr>
-                      <a:r>
-                        <a:rPr/>
-                        <a:t>...</a:t>
-                      </a:r>
-                    </a:p>
-                  </a:txBody>
-                </a:tc>
-                <a:tc>
-                  <a:txBody>
-                    <a:bodyPr/>
-                    <a:lstStyle/>
-                    <a:p>
-                      <a:pPr lvl="0" indent="0" marL="0">
-                        <a:buNone/>
-                      </a:pPr>
-                      <a:r>
-                        <a:rPr/>
-                        <a:t>...</a:t>
-                      </a:r>
-                    </a:p>
-                  </a:txBody>
-                </a:tc>
-                <a:tc>
-                  <a:txBody>
-                    <a:bodyPr/>
-                    <a:lstStyle/>
-                    <a:p>
-                      <a:pPr lvl="0" indent="0" marL="0">
-                        <a:buNone/>
-                      </a:pPr>
-                      <a:r>
-                        <a:rPr/>
-                        <a:t>...</a:t>
-                      </a:r>
-                    </a:p>
-                  </a:txBody>
-                </a:tc>
-              </a:tr>
-              <a:tr h="0">
-                <a:tc>
-                  <a:txBody>
-                    <a:bodyPr/>
-                    <a:lstStyle/>
-                    <a:p>
-                      <a:pPr lvl="0" indent="0" marL="0">
-                        <a:buNone/>
-                      </a:pPr>
-                      <a:r>
-                        <a:rPr/>
-                        <a:t>895</a:t>
-                      </a:r>
-                    </a:p>
-                  </a:txBody>
-                </a:tc>
-                <a:tc>
-                  <a:txBody>
-                    <a:bodyPr/>
-                    <a:lstStyle/>
-                    <a:p>
-                      <a:pPr lvl="0" indent="0" marL="0">
-                        <a:buNone/>
-                      </a:pPr>
-                      <a:r>
-                        <a:rPr/>
-                        <a:t>sugarberry</a:t>
-                      </a:r>
-                    </a:p>
-                  </a:txBody>
-                </a:tc>
-                <a:tc>
-                  <a:txBody>
-                    <a:bodyPr/>
-                    <a:lstStyle/>
-                    <a:p>
-                      <a:pPr lvl="0" indent="0" marL="0">
-                        <a:buNone/>
-                      </a:pPr>
-                      <a:r>
-                        <a:rPr/>
-                        <a:t>6</a:t>
-                      </a:r>
-                    </a:p>
-                  </a:txBody>
-                </a:tc>
-                <a:tc>
-                  <a:txBody>
-                    <a:bodyPr/>
-                    <a:lstStyle/>
-                    <a:p>
-                      <a:pPr lvl="0" indent="0" marL="0">
-                        <a:buNone/>
-                      </a:pPr>
-                      <a:r>
-                        <a:rPr/>
-                        <a:t>32.431052</a:t>
-                      </a:r>
-                    </a:p>
-                  </a:txBody>
-                </a:tc>
-                <a:tc>
-                  <a:txBody>
-                    <a:bodyPr/>
-                    <a:lstStyle/>
-                    <a:p>
-                      <a:pPr lvl="0" indent="0" marL="0">
-                        <a:buNone/>
-                      </a:pPr>
-                      <a:r>
-                        <a:rPr/>
-                        <a:t>20.969306</a:t>
-                      </a:r>
-                    </a:p>
-                  </a:txBody>
-                </a:tc>
-                <a:tc>
-                  <a:txBody>
-                    <a:bodyPr/>
-                    <a:lstStyle/>
-                    <a:p>
-                      <a:pPr lvl="0" indent="0" marL="0">
-                        <a:buNone/>
-                      </a:pPr>
-                      <a:r>
-                        <a:rPr/>
-                        <a:t>0.565727</a:t>
-                      </a:r>
-                    </a:p>
-                  </a:txBody>
-                </a:tc>
-              </a:tr>
-              <a:tr h="0">
-                <a:tc>
-                  <a:txBody>
-                    <a:bodyPr/>
-                    <a:lstStyle/>
-                    <a:p>
-                      <a:pPr lvl="0" indent="0" marL="0">
-                        <a:buNone/>
-                      </a:pPr>
-                      <a:r>
-                        <a:rPr/>
-                        <a:t>896</a:t>
-                      </a:r>
-                    </a:p>
-                  </a:txBody>
-                </a:tc>
-                <a:tc>
-                  <a:txBody>
-                    <a:bodyPr/>
-                    <a:lstStyle/>
-                    <a:p>
-                      <a:pPr lvl="0" indent="0" marL="0">
-                        <a:buNone/>
-                      </a:pPr>
-                      <a:r>
-                        <a:rPr/>
-                        <a:t>sugarberry</a:t>
-                      </a:r>
-                    </a:p>
-                  </a:txBody>
-                </a:tc>
-                <a:tc>
-                  <a:txBody>
-                    <a:bodyPr/>
-                    <a:lstStyle/>
-                    <a:p>
-                      <a:pPr lvl="0" indent="0" marL="0">
-                        <a:buNone/>
-                      </a:pPr>
-                      <a:r>
-                        <a:rPr/>
-                        <a:t>7</a:t>
-                      </a:r>
-                    </a:p>
-                  </a:txBody>
-                </a:tc>
-                <a:tc>
-                  <a:txBody>
-                    <a:bodyPr/>
-                    <a:lstStyle/>
-                    <a:p>
-                      <a:pPr lvl="0" indent="0" marL="0">
-                        <a:buNone/>
-                      </a:pPr>
-                      <a:r>
-                        <a:rPr/>
-                        <a:t>37.324259</a:t>
-                      </a:r>
-                    </a:p>
-                  </a:txBody>
-                </a:tc>
-                <a:tc>
-                  <a:txBody>
-                    <a:bodyPr/>
-                    <a:lstStyle/>
-                    <a:p>
-                      <a:pPr lvl="0" indent="0" marL="0">
-                        <a:buNone/>
-                      </a:pPr>
-                      <a:r>
-                        <a:rPr/>
-                        <a:t>25.037024</a:t>
-                      </a:r>
-                    </a:p>
-                  </a:txBody>
-                </a:tc>
-                <a:tc>
-                  <a:txBody>
-                    <a:bodyPr/>
-                    <a:lstStyle/>
-                    <a:p>
-                      <a:pPr lvl="0" indent="0" marL="0">
-                        <a:buNone/>
-                      </a:pPr>
-                      <a:r>
-                        <a:rPr/>
-                        <a:t>0.637629</a:t>
-                      </a:r>
-                    </a:p>
-                  </a:txBody>
-                </a:tc>
-              </a:tr>
-              <a:tr h="0">
-                <a:tc>
-                  <a:txBody>
-                    <a:bodyPr/>
-                    <a:lstStyle/>
-                    <a:p>
-                      <a:pPr lvl="0" indent="0" marL="0">
-                        <a:buNone/>
-                      </a:pPr>
-                      <a:r>
-                        <a:rPr/>
-                        <a:t>897</a:t>
-                      </a:r>
-                    </a:p>
-                  </a:txBody>
-                </a:tc>
-                <a:tc>
-                  <a:txBody>
-                    <a:bodyPr/>
-                    <a:lstStyle/>
-                    <a:p>
-                      <a:pPr lvl="0" indent="0" marL="0">
-                        <a:buNone/>
-                      </a:pPr>
-                      <a:r>
-                        <a:rPr/>
-                        <a:t>sugarberry</a:t>
-                      </a:r>
-                    </a:p>
-                  </a:txBody>
-                </a:tc>
-                <a:tc>
-                  <a:txBody>
-                    <a:bodyPr/>
-                    <a:lstStyle/>
-                    <a:p>
-                      <a:pPr lvl="0" indent="0" marL="0">
-                        <a:buNone/>
-                      </a:pPr>
-                      <a:r>
-                        <a:rPr/>
-                        <a:t>8</a:t>
-                      </a:r>
-                    </a:p>
-                  </a:txBody>
-                </a:tc>
-                <a:tc>
-                  <a:txBody>
-                    <a:bodyPr/>
-                    <a:lstStyle/>
-                    <a:p>
-                      <a:pPr lvl="0" indent="0" marL="0">
-                        <a:buNone/>
-                      </a:pPr>
-                      <a:r>
-                        <a:rPr/>
-                        <a:t>38.144756</a:t>
-                      </a:r>
-                    </a:p>
-                  </a:txBody>
-                </a:tc>
-                <a:tc>
-                  <a:txBody>
-                    <a:bodyPr/>
-                    <a:lstStyle/>
-                    <a:p>
-                      <a:pPr lvl="0" indent="0" marL="0">
-                        <a:buNone/>
-                      </a:pPr>
-                      <a:r>
-                        <a:rPr/>
-                        <a:t>26.680208</a:t>
-                      </a:r>
-                    </a:p>
-                  </a:txBody>
-                </a:tc>
-                <a:tc>
-                  <a:txBody>
-                    <a:bodyPr/>
-                    <a:lstStyle/>
-                    <a:p>
-                      <a:pPr lvl="0" indent="0" marL="0">
-                        <a:buNone/>
-                      </a:pPr>
-                      <a:r>
-                        <a:rPr/>
-                        <a:t>0.665159</a:t>
-                      </a:r>
-                    </a:p>
-                  </a:txBody>
-                </a:tc>
-              </a:tr>
-              <a:tr h="0">
-                <a:tc>
-                  <a:txBody>
-                    <a:bodyPr/>
-                    <a:lstStyle/>
-                    <a:p>
-                      <a:pPr lvl="0" indent="0" marL="0">
-                        <a:buNone/>
-                      </a:pPr>
-                      <a:r>
-                        <a:rPr/>
-                        <a:t>898</a:t>
-                      </a:r>
-                    </a:p>
-                  </a:txBody>
-                </a:tc>
-                <a:tc>
-                  <a:txBody>
-                    <a:bodyPr/>
-                    <a:lstStyle/>
-                    <a:p>
-                      <a:pPr lvl="0" indent="0" marL="0">
-                        <a:buNone/>
-                      </a:pPr>
-                      <a:r>
-                        <a:rPr/>
-                        <a:t>sugarberry</a:t>
-                      </a:r>
-                    </a:p>
-                  </a:txBody>
-                </a:tc>
-                <a:tc>
-                  <a:txBody>
-                    <a:bodyPr/>
-                    <a:lstStyle/>
-                    <a:p>
-                      <a:pPr lvl="0" indent="0" marL="0">
-                        <a:buNone/>
-                      </a:pPr>
-                      <a:r>
-                        <a:rPr/>
-                        <a:t>9</a:t>
-                      </a:r>
-                    </a:p>
-                  </a:txBody>
-                </a:tc>
-                <a:tc>
-                  <a:txBody>
-                    <a:bodyPr/>
-                    <a:lstStyle/>
-                    <a:p>
-                      <a:pPr lvl="0" indent="0" marL="0">
-                        <a:buNone/>
-                      </a:pPr>
-                      <a:r>
-                        <a:rPr/>
-                        <a:t>36.853245</a:t>
-                      </a:r>
-                    </a:p>
-                  </a:txBody>
-                </a:tc>
-                <a:tc>
-                  <a:txBody>
-                    <a:bodyPr/>
-                    <a:lstStyle/>
-                    <a:p>
-                      <a:pPr lvl="0" indent="0" marL="0">
-                        <a:buNone/>
-                      </a:pPr>
-                      <a:r>
-                        <a:rPr/>
-                        <a:t>21.021667</a:t>
-                      </a:r>
-                    </a:p>
-                  </a:txBody>
-                </a:tc>
-                <a:tc>
-                  <a:txBody>
-                    <a:bodyPr/>
-                    <a:lstStyle/>
-                    <a:p>
-                      <a:pPr lvl="0" indent="0" marL="0">
-                        <a:buNone/>
-                      </a:pPr>
-                      <a:r>
-                        <a:rPr/>
-                        <a:t>0.685162</a:t>
-                      </a:r>
-                    </a:p>
-                  </a:txBody>
-                </a:tc>
-              </a:tr>
-              <a:tr h="0">
-                <a:tc>
-                  <a:txBody>
-                    <a:bodyPr/>
-                    <a:lstStyle/>
-                    <a:p>
-                      <a:pPr lvl="0" indent="0" marL="0">
-                        <a:buNone/>
-                      </a:pPr>
-                      <a:r>
-                        <a:rPr/>
-                        <a:t>899</a:t>
-                      </a:r>
-                    </a:p>
-                  </a:txBody>
-                </a:tc>
-                <a:tc>
-                  <a:txBody>
-                    <a:bodyPr/>
-                    <a:lstStyle/>
-                    <a:p>
-                      <a:pPr lvl="0" indent="0" marL="0">
-                        <a:buNone/>
-                      </a:pPr>
-                      <a:r>
-                        <a:rPr/>
-                        <a:t>sugarberry</a:t>
-                      </a:r>
-                    </a:p>
-                  </a:txBody>
-                </a:tc>
-                <a:tc>
-                  <a:txBody>
-                    <a:bodyPr/>
-                    <a:lstStyle/>
-                    <a:p>
-                      <a:pPr lvl="0" indent="0" marL="0">
-                        <a:buNone/>
-                      </a:pPr>
-                      <a:r>
-                        <a:rPr/>
-                        <a:t>10</a:t>
-                      </a:r>
-                    </a:p>
-                  </a:txBody>
-                </a:tc>
-                <a:tc>
-                  <a:txBody>
-                    <a:bodyPr/>
-                    <a:lstStyle/>
-                    <a:p>
-                      <a:pPr lvl="0" indent="0" marL="0">
-                        <a:buNone/>
-                      </a:pPr>
-                      <a:r>
-                        <a:rPr/>
-                        <a:t>40.091106</a:t>
-                      </a:r>
-                    </a:p>
-                  </a:txBody>
-                </a:tc>
-                <a:tc>
-                  <a:txBody>
-                    <a:bodyPr/>
-                    <a:lstStyle/>
-                    <a:p>
-                      <a:pPr lvl="0" indent="0" marL="0">
-                        <a:buNone/>
-                      </a:pPr>
-                      <a:r>
-                        <a:rPr/>
-                        <a:t>23.172083</a:t>
-                      </a:r>
-                    </a:p>
-                  </a:txBody>
-                </a:tc>
-                <a:tc>
-                  <a:txBody>
-                    <a:bodyPr/>
-                    <a:lstStyle/>
-                    <a:p>
-                      <a:pPr lvl="0" indent="0" marL="0">
-                        <a:buNone/>
-                      </a:pPr>
-                      <a:r>
-                        <a:rPr/>
-                        <a:t>0.677519</a:t>
-                      </a:r>
-                    </a:p>
-                  </a:txBody>
-                </a:tc>
-              </a:tr>
-            </a:tbl>
-          </a:graphicData>
-        </a:graphic>
-      </p:graphicFrame>
+        </p:nvSpPr>
+        <p:spPr/>
+        <p:txBody>
+          <a:bodyPr/>
+          <a:lstStyle/>
+          <a:p>
+            <a:pPr lvl="0"/>
+            <a:r>
+              <a:rPr/>
+              <a:t>When relations between biomass and trees diameter and height are complex and non linear, data is abundent, and the model needs to be adaptive with out maksing major changes in the model. kNN excels in capturing patterns and irregular patterns.</a:t>
+            </a:r>
+          </a:p>
+        </p:txBody>
+      </p:sp>
     </p:spTree>
   </p:cSld>
 </p:sld>
@@ -4715,7 +3611,7 @@
             </a:pPr>
             <a:r>
               <a:rPr/>
-              <a:t>Technical Lead</a:t>
+              <a:t>Performance Metric</a:t>
             </a:r>
           </a:p>
         </p:txBody>
@@ -4737,36 +3633,19 @@
           <a:p>
             <a:pPr lvl="0"/>
             <a:r>
+              <a:rPr b="1"/>
+              <a:t>RMSLE over RMSE</a:t>
+            </a:r>
+            <a:r>
               <a:rPr/>
-              <a:t>Overview of data manipulation</a:t>
+              <a:t>: focuses on percentage errors, making it fair to both small and large trees, unlike RMSE, which we believe penalizes errors on big trees. Fitting biomass estimations where scale matters more than absolute error.</a:t>
             </a:r>
           </a:p>
           <a:p>
             <a:pPr lvl="0"/>
             <a:r>
               <a:rPr/>
-              <a:t>Split and filtering methods</a:t>
-            </a:r>
-          </a:p>
-          <a:p>
-            <a:pPr lvl="0"/>
-            <a:r>
-              <a:rPr/>
-              <a:t>Feature engineering (what worked and what didn’t)</a:t>
-            </a:r>
-          </a:p>
-          <a:p>
-            <a:pPr lvl="0"/>
-            <a:r>
-              <a:rPr/>
-              <a:t>Tuning k for the best model</a:t>
-            </a:r>
-          </a:p>
-          <a:p>
-            <a:pPr lvl="0"/>
-            <a:r>
-              <a:rPr/>
-              <a:t>The final “best” model and error</a:t>
+              <a:t>By prioritizing percentage errors, RMSLE provides a more balanced evaluation that considers the unique characteristics of tree biomass data.</a:t>
             </a:r>
           </a:p>
         </p:txBody>
@@ -4813,7 +3692,7 @@
             </a:pPr>
             <a:r>
               <a:rPr/>
-              <a:t>Tree Measurement Data:</a:t>
+              <a:t>Model</a:t>
             </a:r>
           </a:p>
         </p:txBody>
@@ -4839,11 +3718,12 @@
                 <a:tableStyleId>{5C22544A-7EE6-4342-B048-85BDC9FD1C3A}</a:tableStyleId>
               </a:tblPr>
               <a:tblGrid>
-                <a:gridCol w="1638300"/>
-                <a:gridCol w="1638300"/>
-                <a:gridCol w="1638300"/>
-                <a:gridCol w="1638300"/>
-                <a:gridCol w="1638300"/>
+                <a:gridCol w="1371600"/>
+                <a:gridCol w="1371600"/>
+                <a:gridCol w="1371600"/>
+                <a:gridCol w="1371600"/>
+                <a:gridCol w="1371600"/>
+                <a:gridCol w="1371600"/>
               </a:tblGrid>
               <a:tr h="0">
                 <a:tc>
@@ -4866,7 +3746,7 @@
                       </a:pPr>
                       <a:r>
                         <a:rPr/>
-                        <a:t>SPCD</a:t>
+                        <a:t>Species</a:t>
                       </a:r>
                     </a:p>
                   </a:txBody>
@@ -4882,7 +3762,7 @@
                       </a:pPr>
                       <a:r>
                         <a:rPr/>
-                        <a:t>DO_BH</a:t>
+                        <a:t>k</a:t>
                       </a:r>
                     </a:p>
                   </a:txBody>
@@ -4898,7 +3778,7 @@
                       </a:pPr>
                       <a:r>
                         <a:rPr/>
-                        <a:t>HT_TOT</a:t>
+                        <a:t>RMSE</a:t>
                       </a:r>
                     </a:p>
                   </a:txBody>
@@ -4914,7 +3794,23 @@
                       </a:pPr>
                       <a:r>
                         <a:rPr/>
-                        <a:t>TT_DW_CRM</a:t>
+                        <a:t>MAE</a:t>
+                      </a:r>
+                    </a:p>
+                  </a:txBody>
+                  <a:tcPr/>
+                </a:tc>
+                <a:tc>
+                  <a:txBody>
+                    <a:bodyPr/>
+                    <a:lstStyle/>
+                    <a:p>
+                      <a:pPr lvl="0" indent="0" marL="0">
+                        <a:buNone/>
+                      </a:pPr>
+                      <a:r>
+                        <a:rPr/>
+                        <a:t>RMSLE</a:t>
                       </a:r>
                     </a:p>
                   </a:txBody>
@@ -4947,52 +3843,67 @@
                       </a:pPr>
                       <a:r>
                         <a:rPr/>
-                        <a:t>12</a:t>
-                      </a:r>
-                    </a:p>
-                  </a:txBody>
-                </a:tc>
-                <a:tc>
-                  <a:txBody>
-                    <a:bodyPr/>
-                    <a:lstStyle/>
-                    <a:p>
-                      <a:pPr lvl="0" indent="0" marL="0">
-                        <a:buNone/>
-                      </a:pPr>
-                      <a:r>
-                        <a:rPr/>
-                        <a:t>7.5</a:t>
-                      </a:r>
-                    </a:p>
-                  </a:txBody>
-                </a:tc>
-                <a:tc>
-                  <a:txBody>
-                    <a:bodyPr/>
-                    <a:lstStyle/>
-                    <a:p>
-                      <a:pPr lvl="0" indent="0" marL="0">
-                        <a:buNone/>
-                      </a:pPr>
-                      <a:r>
-                        <a:rPr/>
-                        <a:t>45.2</a:t>
-                      </a:r>
-                    </a:p>
-                  </a:txBody>
-                </a:tc>
-                <a:tc>
-                  <a:txBody>
-                    <a:bodyPr/>
-                    <a:lstStyle/>
-                    <a:p>
-                      <a:pPr lvl="0" indent="0" marL="0">
-                        <a:buNone/>
-                      </a:pPr>
-                      <a:r>
-                        <a:rPr/>
-                        <a:t>178.86</a:t>
+                        <a:t>balsam fir</a:t>
+                      </a:r>
+                    </a:p>
+                  </a:txBody>
+                </a:tc>
+                <a:tc>
+                  <a:txBody>
+                    <a:bodyPr/>
+                    <a:lstStyle/>
+                    <a:p>
+                      <a:pPr lvl="0" indent="0" marL="0">
+                        <a:buNone/>
+                      </a:pPr>
+                      <a:r>
+                        <a:rPr/>
+                        <a:t>2</a:t>
+                      </a:r>
+                    </a:p>
+                  </a:txBody>
+                </a:tc>
+                <a:tc>
+                  <a:txBody>
+                    <a:bodyPr/>
+                    <a:lstStyle/>
+                    <a:p>
+                      <a:pPr lvl="0" indent="0" marL="0">
+                        <a:buNone/>
+                      </a:pPr>
+                      <a:r>
+                        <a:rPr/>
+                        <a:t>125.827396</a:t>
+                      </a:r>
+                    </a:p>
+                  </a:txBody>
+                </a:tc>
+                <a:tc>
+                  <a:txBody>
+                    <a:bodyPr/>
+                    <a:lstStyle/>
+                    <a:p>
+                      <a:pPr lvl="0" indent="0" marL="0">
+                        <a:buNone/>
+                      </a:pPr>
+                      <a:r>
+                        <a:rPr/>
+                        <a:t>34.820565</a:t>
+                      </a:r>
+                    </a:p>
+                  </a:txBody>
+                </a:tc>
+                <a:tc>
+                  <a:txBody>
+                    <a:bodyPr/>
+                    <a:lstStyle/>
+                    <a:p>
+                      <a:pPr lvl="0" indent="0" marL="0">
+                        <a:buNone/>
+                      </a:pPr>
+                      <a:r>
+                        <a:rPr/>
+                        <a:t>0.119617</a:t>
                       </a:r>
                     </a:p>
                   </a:txBody>
@@ -5024,52 +3935,67 @@
                       </a:pPr>
                       <a:r>
                         <a:rPr/>
-                        <a:t>12</a:t>
-                      </a:r>
-                    </a:p>
-                  </a:txBody>
-                </a:tc>
-                <a:tc>
-                  <a:txBody>
-                    <a:bodyPr/>
-                    <a:lstStyle/>
-                    <a:p>
-                      <a:pPr lvl="0" indent="0" marL="0">
-                        <a:buNone/>
-                      </a:pPr>
-                      <a:r>
-                        <a:rPr/>
-                        <a:t>9.3</a:t>
-                      </a:r>
-                    </a:p>
-                  </a:txBody>
-                </a:tc>
-                <a:tc>
-                  <a:txBody>
-                    <a:bodyPr/>
-                    <a:lstStyle/>
-                    <a:p>
-                      <a:pPr lvl="0" indent="0" marL="0">
-                        <a:buNone/>
-                      </a:pPr>
-                      <a:r>
-                        <a:rPr/>
-                        <a:t>62.7</a:t>
-                      </a:r>
-                    </a:p>
-                  </a:txBody>
-                </a:tc>
-                <a:tc>
-                  <a:txBody>
-                    <a:bodyPr/>
-                    <a:lstStyle/>
-                    <a:p>
-                      <a:pPr lvl="0" indent="0" marL="0">
-                        <a:buNone/>
-                      </a:pPr>
-                      <a:r>
-                        <a:rPr/>
-                        <a:t>323.46</a:t>
+                        <a:t>balsam fir</a:t>
+                      </a:r>
+                    </a:p>
+                  </a:txBody>
+                </a:tc>
+                <a:tc>
+                  <a:txBody>
+                    <a:bodyPr/>
+                    <a:lstStyle/>
+                    <a:p>
+                      <a:pPr lvl="0" indent="0" marL="0">
+                        <a:buNone/>
+                      </a:pPr>
+                      <a:r>
+                        <a:rPr/>
+                        <a:t>3</a:t>
+                      </a:r>
+                    </a:p>
+                  </a:txBody>
+                </a:tc>
+                <a:tc>
+                  <a:txBody>
+                    <a:bodyPr/>
+                    <a:lstStyle/>
+                    <a:p>
+                      <a:pPr lvl="0" indent="0" marL="0">
+                        <a:buNone/>
+                      </a:pPr>
+                      <a:r>
+                        <a:rPr/>
+                        <a:t>129.650855</a:t>
+                      </a:r>
+                    </a:p>
+                  </a:txBody>
+                </a:tc>
+                <a:tc>
+                  <a:txBody>
+                    <a:bodyPr/>
+                    <a:lstStyle/>
+                    <a:p>
+                      <a:pPr lvl="0" indent="0" marL="0">
+                        <a:buNone/>
+                      </a:pPr>
+                      <a:r>
+                        <a:rPr/>
+                        <a:t>36.628377</a:t>
+                      </a:r>
+                    </a:p>
+                  </a:txBody>
+                </a:tc>
+                <a:tc>
+                  <a:txBody>
+                    <a:bodyPr/>
+                    <a:lstStyle/>
+                    <a:p>
+                      <a:pPr lvl="0" indent="0" marL="0">
+                        <a:buNone/>
+                      </a:pPr>
+                      <a:r>
+                        <a:rPr/>
+                        <a:t>0.123679</a:t>
                       </a:r>
                     </a:p>
                   </a:txBody>
@@ -5101,52 +4027,67 @@
                       </a:pPr>
                       <a:r>
                         <a:rPr/>
-                        <a:t>12</a:t>
-                      </a:r>
-                    </a:p>
-                  </a:txBody>
-                </a:tc>
-                <a:tc>
-                  <a:txBody>
-                    <a:bodyPr/>
-                    <a:lstStyle/>
-                    <a:p>
-                      <a:pPr lvl="0" indent="0" marL="0">
-                        <a:buNone/>
-                      </a:pPr>
-                      <a:r>
-                        <a:rPr/>
-                        <a:t>9.7</a:t>
-                      </a:r>
-                    </a:p>
-                  </a:txBody>
-                </a:tc>
-                <a:tc>
-                  <a:txBody>
-                    <a:bodyPr/>
-                    <a:lstStyle/>
-                    <a:p>
-                      <a:pPr lvl="0" indent="0" marL="0">
-                        <a:buNone/>
-                      </a:pPr>
-                      <a:r>
-                        <a:rPr/>
-                        <a:t>56.7</a:t>
-                      </a:r>
-                    </a:p>
-                  </a:txBody>
-                </a:tc>
-                <a:tc>
-                  <a:txBody>
-                    <a:bodyPr/>
-                    <a:lstStyle/>
-                    <a:p>
-                      <a:pPr lvl="0" indent="0" marL="0">
-                        <a:buNone/>
-                      </a:pPr>
-                      <a:r>
-                        <a:rPr/>
-                        <a:t>342.47</a:t>
+                        <a:t>balsam fir</a:t>
+                      </a:r>
+                    </a:p>
+                  </a:txBody>
+                </a:tc>
+                <a:tc>
+                  <a:txBody>
+                    <a:bodyPr/>
+                    <a:lstStyle/>
+                    <a:p>
+                      <a:pPr lvl="0" indent="0" marL="0">
+                        <a:buNone/>
+                      </a:pPr>
+                      <a:r>
+                        <a:rPr/>
+                        <a:t>4</a:t>
+                      </a:r>
+                    </a:p>
+                  </a:txBody>
+                </a:tc>
+                <a:tc>
+                  <a:txBody>
+                    <a:bodyPr/>
+                    <a:lstStyle/>
+                    <a:p>
+                      <a:pPr lvl="0" indent="0" marL="0">
+                        <a:buNone/>
+                      </a:pPr>
+                      <a:r>
+                        <a:rPr/>
+                        <a:t>134.599829</a:t>
+                      </a:r>
+                    </a:p>
+                  </a:txBody>
+                </a:tc>
+                <a:tc>
+                  <a:txBody>
+                    <a:bodyPr/>
+                    <a:lstStyle/>
+                    <a:p>
+                      <a:pPr lvl="0" indent="0" marL="0">
+                        <a:buNone/>
+                      </a:pPr>
+                      <a:r>
+                        <a:rPr/>
+                        <a:t>38.884870</a:t>
+                      </a:r>
+                    </a:p>
+                  </a:txBody>
+                </a:tc>
+                <a:tc>
+                  <a:txBody>
+                    <a:bodyPr/>
+                    <a:lstStyle/>
+                    <a:p>
+                      <a:pPr lvl="0" indent="0" marL="0">
+                        <a:buNone/>
+                      </a:pPr>
+                      <a:r>
+                        <a:rPr/>
+                        <a:t>0.133858</a:t>
                       </a:r>
                     </a:p>
                   </a:txBody>
@@ -5178,52 +4119,67 @@
                       </a:pPr>
                       <a:r>
                         <a:rPr/>
-                        <a:t>12</a:t>
-                      </a:r>
-                    </a:p>
-                  </a:txBody>
-                </a:tc>
-                <a:tc>
-                  <a:txBody>
-                    <a:bodyPr/>
-                    <a:lstStyle/>
-                    <a:p>
-                      <a:pPr lvl="0" indent="0" marL="0">
-                        <a:buNone/>
-                      </a:pPr>
-                      <a:r>
-                        <a:rPr/>
-                        <a:t>11.4</a:t>
-                      </a:r>
-                    </a:p>
-                  </a:txBody>
-                </a:tc>
-                <a:tc>
-                  <a:txBody>
-                    <a:bodyPr/>
-                    <a:lstStyle/>
-                    <a:p>
-                      <a:pPr lvl="0" indent="0" marL="0">
-                        <a:buNone/>
-                      </a:pPr>
-                      <a:r>
-                        <a:rPr/>
-                        <a:t>66.1</a:t>
-                      </a:r>
-                    </a:p>
-                  </a:txBody>
-                </a:tc>
-                <a:tc>
-                  <a:txBody>
-                    <a:bodyPr/>
-                    <a:lstStyle/>
-                    <a:p>
-                      <a:pPr lvl="0" indent="0" marL="0">
-                        <a:buNone/>
-                      </a:pPr>
-                      <a:r>
-                        <a:rPr/>
-                        <a:t>499.35</a:t>
+                        <a:t>balsam fir</a:t>
+                      </a:r>
+                    </a:p>
+                  </a:txBody>
+                </a:tc>
+                <a:tc>
+                  <a:txBody>
+                    <a:bodyPr/>
+                    <a:lstStyle/>
+                    <a:p>
+                      <a:pPr lvl="0" indent="0" marL="0">
+                        <a:buNone/>
+                      </a:pPr>
+                      <a:r>
+                        <a:rPr/>
+                        <a:t>5</a:t>
+                      </a:r>
+                    </a:p>
+                  </a:txBody>
+                </a:tc>
+                <a:tc>
+                  <a:txBody>
+                    <a:bodyPr/>
+                    <a:lstStyle/>
+                    <a:p>
+                      <a:pPr lvl="0" indent="0" marL="0">
+                        <a:buNone/>
+                      </a:pPr>
+                      <a:r>
+                        <a:rPr/>
+                        <a:t>145.002852</a:t>
+                      </a:r>
+                    </a:p>
+                  </a:txBody>
+                </a:tc>
+                <a:tc>
+                  <a:txBody>
+                    <a:bodyPr/>
+                    <a:lstStyle/>
+                    <a:p>
+                      <a:pPr lvl="0" indent="0" marL="0">
+                        <a:buNone/>
+                      </a:pPr>
+                      <a:r>
+                        <a:rPr/>
+                        <a:t>41.168470</a:t>
+                      </a:r>
+                    </a:p>
+                  </a:txBody>
+                </a:tc>
+                <a:tc>
+                  <a:txBody>
+                    <a:bodyPr/>
+                    <a:lstStyle/>
+                    <a:p>
+                      <a:pPr lvl="0" indent="0" marL="0">
+                        <a:buNone/>
+                      </a:pPr>
+                      <a:r>
+                        <a:rPr/>
+                        <a:t>0.144052</a:t>
                       </a:r>
                     </a:p>
                   </a:txBody>
@@ -5255,52 +4211,619 @@
                       </a:pPr>
                       <a:r>
                         <a:rPr/>
-                        <a:t>12</a:t>
-                      </a:r>
-                    </a:p>
-                  </a:txBody>
-                </a:tc>
-                <a:tc>
-                  <a:txBody>
-                    <a:bodyPr/>
-                    <a:lstStyle/>
-                    <a:p>
-                      <a:pPr lvl="0" indent="0" marL="0">
-                        <a:buNone/>
-                      </a:pPr>
-                      <a:r>
-                        <a:rPr/>
-                        <a:t>6.4</a:t>
-                      </a:r>
-                    </a:p>
-                  </a:txBody>
-                </a:tc>
-                <a:tc>
-                  <a:txBody>
-                    <a:bodyPr/>
-                    <a:lstStyle/>
-                    <a:p>
-                      <a:pPr lvl="0" indent="0" marL="0">
-                        <a:buNone/>
-                      </a:pPr>
-                      <a:r>
-                        <a:rPr/>
-                        <a:t>51.8</a:t>
-                      </a:r>
-                    </a:p>
-                  </a:txBody>
-                </a:tc>
-                <a:tc>
-                  <a:txBody>
-                    <a:bodyPr/>
-                    <a:lstStyle/>
-                    <a:p>
-                      <a:pPr lvl="0" indent="0" marL="0">
-                        <a:buNone/>
-                      </a:pPr>
-                      <a:r>
-                        <a:rPr/>
-                        <a:t>113.92</a:t>
+                        <a:t>balsam fir</a:t>
+                      </a:r>
+                    </a:p>
+                  </a:txBody>
+                </a:tc>
+                <a:tc>
+                  <a:txBody>
+                    <a:bodyPr/>
+                    <a:lstStyle/>
+                    <a:p>
+                      <a:pPr lvl="0" indent="0" marL="0">
+                        <a:buNone/>
+                      </a:pPr>
+                      <a:r>
+                        <a:rPr/>
+                        <a:t>6</a:t>
+                      </a:r>
+                    </a:p>
+                  </a:txBody>
+                </a:tc>
+                <a:tc>
+                  <a:txBody>
+                    <a:bodyPr/>
+                    <a:lstStyle/>
+                    <a:p>
+                      <a:pPr lvl="0" indent="0" marL="0">
+                        <a:buNone/>
+                      </a:pPr>
+                      <a:r>
+                        <a:rPr/>
+                        <a:t>147.449208</a:t>
+                      </a:r>
+                    </a:p>
+                  </a:txBody>
+                </a:tc>
+                <a:tc>
+                  <a:txBody>
+                    <a:bodyPr/>
+                    <a:lstStyle/>
+                    <a:p>
+                      <a:pPr lvl="0" indent="0" marL="0">
+                        <a:buNone/>
+                      </a:pPr>
+                      <a:r>
+                        <a:rPr/>
+                        <a:t>40.728609</a:t>
+                      </a:r>
+                    </a:p>
+                  </a:txBody>
+                </a:tc>
+                <a:tc>
+                  <a:txBody>
+                    <a:bodyPr/>
+                    <a:lstStyle/>
+                    <a:p>
+                      <a:pPr lvl="0" indent="0" marL="0">
+                        <a:buNone/>
+                      </a:pPr>
+                      <a:r>
+                        <a:rPr/>
+                        <a:t>0.142813</a:t>
+                      </a:r>
+                    </a:p>
+                  </a:txBody>
+                </a:tc>
+              </a:tr>
+              <a:tr h="0">
+                <a:tc>
+                  <a:txBody>
+                    <a:bodyPr/>
+                    <a:lstStyle/>
+                    <a:p>
+                      <a:pPr lvl="0" indent="0" marL="0">
+                        <a:buNone/>
+                      </a:pPr>
+                      <a:r>
+                        <a:rPr/>
+                        <a:t>...</a:t>
+                      </a:r>
+                    </a:p>
+                  </a:txBody>
+                </a:tc>
+                <a:tc>
+                  <a:txBody>
+                    <a:bodyPr/>
+                    <a:lstStyle/>
+                    <a:p>
+                      <a:pPr lvl="0" indent="0" marL="0">
+                        <a:buNone/>
+                      </a:pPr>
+                      <a:r>
+                        <a:rPr/>
+                        <a:t>...</a:t>
+                      </a:r>
+                    </a:p>
+                  </a:txBody>
+                </a:tc>
+                <a:tc>
+                  <a:txBody>
+                    <a:bodyPr/>
+                    <a:lstStyle/>
+                    <a:p>
+                      <a:pPr lvl="0" indent="0" marL="0">
+                        <a:buNone/>
+                      </a:pPr>
+                      <a:r>
+                        <a:rPr/>
+                        <a:t>...</a:t>
+                      </a:r>
+                    </a:p>
+                  </a:txBody>
+                </a:tc>
+                <a:tc>
+                  <a:txBody>
+                    <a:bodyPr/>
+                    <a:lstStyle/>
+                    <a:p>
+                      <a:pPr lvl="0" indent="0" marL="0">
+                        <a:buNone/>
+                      </a:pPr>
+                      <a:r>
+                        <a:rPr/>
+                        <a:t>...</a:t>
+                      </a:r>
+                    </a:p>
+                  </a:txBody>
+                </a:tc>
+                <a:tc>
+                  <a:txBody>
+                    <a:bodyPr/>
+                    <a:lstStyle/>
+                    <a:p>
+                      <a:pPr lvl="0" indent="0" marL="0">
+                        <a:buNone/>
+                      </a:pPr>
+                      <a:r>
+                        <a:rPr/>
+                        <a:t>...</a:t>
+                      </a:r>
+                    </a:p>
+                  </a:txBody>
+                </a:tc>
+                <a:tc>
+                  <a:txBody>
+                    <a:bodyPr/>
+                    <a:lstStyle/>
+                    <a:p>
+                      <a:pPr lvl="0" indent="0" marL="0">
+                        <a:buNone/>
+                      </a:pPr>
+                      <a:r>
+                        <a:rPr/>
+                        <a:t>...</a:t>
+                      </a:r>
+                    </a:p>
+                  </a:txBody>
+                </a:tc>
+              </a:tr>
+              <a:tr h="0">
+                <a:tc>
+                  <a:txBody>
+                    <a:bodyPr/>
+                    <a:lstStyle/>
+                    <a:p>
+                      <a:pPr lvl="0" indent="0" marL="0">
+                        <a:buNone/>
+                      </a:pPr>
+                      <a:r>
+                        <a:rPr/>
+                        <a:t>895</a:t>
+                      </a:r>
+                    </a:p>
+                  </a:txBody>
+                </a:tc>
+                <a:tc>
+                  <a:txBody>
+                    <a:bodyPr/>
+                    <a:lstStyle/>
+                    <a:p>
+                      <a:pPr lvl="0" indent="0" marL="0">
+                        <a:buNone/>
+                      </a:pPr>
+                      <a:r>
+                        <a:rPr/>
+                        <a:t>sugarberry</a:t>
+                      </a:r>
+                    </a:p>
+                  </a:txBody>
+                </a:tc>
+                <a:tc>
+                  <a:txBody>
+                    <a:bodyPr/>
+                    <a:lstStyle/>
+                    <a:p>
+                      <a:pPr lvl="0" indent="0" marL="0">
+                        <a:buNone/>
+                      </a:pPr>
+                      <a:r>
+                        <a:rPr/>
+                        <a:t>6</a:t>
+                      </a:r>
+                    </a:p>
+                  </a:txBody>
+                </a:tc>
+                <a:tc>
+                  <a:txBody>
+                    <a:bodyPr/>
+                    <a:lstStyle/>
+                    <a:p>
+                      <a:pPr lvl="0" indent="0" marL="0">
+                        <a:buNone/>
+                      </a:pPr>
+                      <a:r>
+                        <a:rPr/>
+                        <a:t>32.431052</a:t>
+                      </a:r>
+                    </a:p>
+                  </a:txBody>
+                </a:tc>
+                <a:tc>
+                  <a:txBody>
+                    <a:bodyPr/>
+                    <a:lstStyle/>
+                    <a:p>
+                      <a:pPr lvl="0" indent="0" marL="0">
+                        <a:buNone/>
+                      </a:pPr>
+                      <a:r>
+                        <a:rPr/>
+                        <a:t>20.969306</a:t>
+                      </a:r>
+                    </a:p>
+                  </a:txBody>
+                </a:tc>
+                <a:tc>
+                  <a:txBody>
+                    <a:bodyPr/>
+                    <a:lstStyle/>
+                    <a:p>
+                      <a:pPr lvl="0" indent="0" marL="0">
+                        <a:buNone/>
+                      </a:pPr>
+                      <a:r>
+                        <a:rPr/>
+                        <a:t>0.565727</a:t>
+                      </a:r>
+                    </a:p>
+                  </a:txBody>
+                </a:tc>
+              </a:tr>
+              <a:tr h="0">
+                <a:tc>
+                  <a:txBody>
+                    <a:bodyPr/>
+                    <a:lstStyle/>
+                    <a:p>
+                      <a:pPr lvl="0" indent="0" marL="0">
+                        <a:buNone/>
+                      </a:pPr>
+                      <a:r>
+                        <a:rPr/>
+                        <a:t>896</a:t>
+                      </a:r>
+                    </a:p>
+                  </a:txBody>
+                </a:tc>
+                <a:tc>
+                  <a:txBody>
+                    <a:bodyPr/>
+                    <a:lstStyle/>
+                    <a:p>
+                      <a:pPr lvl="0" indent="0" marL="0">
+                        <a:buNone/>
+                      </a:pPr>
+                      <a:r>
+                        <a:rPr/>
+                        <a:t>sugarberry</a:t>
+                      </a:r>
+                    </a:p>
+                  </a:txBody>
+                </a:tc>
+                <a:tc>
+                  <a:txBody>
+                    <a:bodyPr/>
+                    <a:lstStyle/>
+                    <a:p>
+                      <a:pPr lvl="0" indent="0" marL="0">
+                        <a:buNone/>
+                      </a:pPr>
+                      <a:r>
+                        <a:rPr/>
+                        <a:t>7</a:t>
+                      </a:r>
+                    </a:p>
+                  </a:txBody>
+                </a:tc>
+                <a:tc>
+                  <a:txBody>
+                    <a:bodyPr/>
+                    <a:lstStyle/>
+                    <a:p>
+                      <a:pPr lvl="0" indent="0" marL="0">
+                        <a:buNone/>
+                      </a:pPr>
+                      <a:r>
+                        <a:rPr/>
+                        <a:t>37.324259</a:t>
+                      </a:r>
+                    </a:p>
+                  </a:txBody>
+                </a:tc>
+                <a:tc>
+                  <a:txBody>
+                    <a:bodyPr/>
+                    <a:lstStyle/>
+                    <a:p>
+                      <a:pPr lvl="0" indent="0" marL="0">
+                        <a:buNone/>
+                      </a:pPr>
+                      <a:r>
+                        <a:rPr/>
+                        <a:t>25.037024</a:t>
+                      </a:r>
+                    </a:p>
+                  </a:txBody>
+                </a:tc>
+                <a:tc>
+                  <a:txBody>
+                    <a:bodyPr/>
+                    <a:lstStyle/>
+                    <a:p>
+                      <a:pPr lvl="0" indent="0" marL="0">
+                        <a:buNone/>
+                      </a:pPr>
+                      <a:r>
+                        <a:rPr/>
+                        <a:t>0.637629</a:t>
+                      </a:r>
+                    </a:p>
+                  </a:txBody>
+                </a:tc>
+              </a:tr>
+              <a:tr h="0">
+                <a:tc>
+                  <a:txBody>
+                    <a:bodyPr/>
+                    <a:lstStyle/>
+                    <a:p>
+                      <a:pPr lvl="0" indent="0" marL="0">
+                        <a:buNone/>
+                      </a:pPr>
+                      <a:r>
+                        <a:rPr/>
+                        <a:t>897</a:t>
+                      </a:r>
+                    </a:p>
+                  </a:txBody>
+                </a:tc>
+                <a:tc>
+                  <a:txBody>
+                    <a:bodyPr/>
+                    <a:lstStyle/>
+                    <a:p>
+                      <a:pPr lvl="0" indent="0" marL="0">
+                        <a:buNone/>
+                      </a:pPr>
+                      <a:r>
+                        <a:rPr/>
+                        <a:t>sugarberry</a:t>
+                      </a:r>
+                    </a:p>
+                  </a:txBody>
+                </a:tc>
+                <a:tc>
+                  <a:txBody>
+                    <a:bodyPr/>
+                    <a:lstStyle/>
+                    <a:p>
+                      <a:pPr lvl="0" indent="0" marL="0">
+                        <a:buNone/>
+                      </a:pPr>
+                      <a:r>
+                        <a:rPr/>
+                        <a:t>8</a:t>
+                      </a:r>
+                    </a:p>
+                  </a:txBody>
+                </a:tc>
+                <a:tc>
+                  <a:txBody>
+                    <a:bodyPr/>
+                    <a:lstStyle/>
+                    <a:p>
+                      <a:pPr lvl="0" indent="0" marL="0">
+                        <a:buNone/>
+                      </a:pPr>
+                      <a:r>
+                        <a:rPr/>
+                        <a:t>38.144756</a:t>
+                      </a:r>
+                    </a:p>
+                  </a:txBody>
+                </a:tc>
+                <a:tc>
+                  <a:txBody>
+                    <a:bodyPr/>
+                    <a:lstStyle/>
+                    <a:p>
+                      <a:pPr lvl="0" indent="0" marL="0">
+                        <a:buNone/>
+                      </a:pPr>
+                      <a:r>
+                        <a:rPr/>
+                        <a:t>26.680208</a:t>
+                      </a:r>
+                    </a:p>
+                  </a:txBody>
+                </a:tc>
+                <a:tc>
+                  <a:txBody>
+                    <a:bodyPr/>
+                    <a:lstStyle/>
+                    <a:p>
+                      <a:pPr lvl="0" indent="0" marL="0">
+                        <a:buNone/>
+                      </a:pPr>
+                      <a:r>
+                        <a:rPr/>
+                        <a:t>0.665159</a:t>
+                      </a:r>
+                    </a:p>
+                  </a:txBody>
+                </a:tc>
+              </a:tr>
+              <a:tr h="0">
+                <a:tc>
+                  <a:txBody>
+                    <a:bodyPr/>
+                    <a:lstStyle/>
+                    <a:p>
+                      <a:pPr lvl="0" indent="0" marL="0">
+                        <a:buNone/>
+                      </a:pPr>
+                      <a:r>
+                        <a:rPr/>
+                        <a:t>898</a:t>
+                      </a:r>
+                    </a:p>
+                  </a:txBody>
+                </a:tc>
+                <a:tc>
+                  <a:txBody>
+                    <a:bodyPr/>
+                    <a:lstStyle/>
+                    <a:p>
+                      <a:pPr lvl="0" indent="0" marL="0">
+                        <a:buNone/>
+                      </a:pPr>
+                      <a:r>
+                        <a:rPr/>
+                        <a:t>sugarberry</a:t>
+                      </a:r>
+                    </a:p>
+                  </a:txBody>
+                </a:tc>
+                <a:tc>
+                  <a:txBody>
+                    <a:bodyPr/>
+                    <a:lstStyle/>
+                    <a:p>
+                      <a:pPr lvl="0" indent="0" marL="0">
+                        <a:buNone/>
+                      </a:pPr>
+                      <a:r>
+                        <a:rPr/>
+                        <a:t>9</a:t>
+                      </a:r>
+                    </a:p>
+                  </a:txBody>
+                </a:tc>
+                <a:tc>
+                  <a:txBody>
+                    <a:bodyPr/>
+                    <a:lstStyle/>
+                    <a:p>
+                      <a:pPr lvl="0" indent="0" marL="0">
+                        <a:buNone/>
+                      </a:pPr>
+                      <a:r>
+                        <a:rPr/>
+                        <a:t>36.853245</a:t>
+                      </a:r>
+                    </a:p>
+                  </a:txBody>
+                </a:tc>
+                <a:tc>
+                  <a:txBody>
+                    <a:bodyPr/>
+                    <a:lstStyle/>
+                    <a:p>
+                      <a:pPr lvl="0" indent="0" marL="0">
+                        <a:buNone/>
+                      </a:pPr>
+                      <a:r>
+                        <a:rPr/>
+                        <a:t>21.021667</a:t>
+                      </a:r>
+                    </a:p>
+                  </a:txBody>
+                </a:tc>
+                <a:tc>
+                  <a:txBody>
+                    <a:bodyPr/>
+                    <a:lstStyle/>
+                    <a:p>
+                      <a:pPr lvl="0" indent="0" marL="0">
+                        <a:buNone/>
+                      </a:pPr>
+                      <a:r>
+                        <a:rPr/>
+                        <a:t>0.685162</a:t>
+                      </a:r>
+                    </a:p>
+                  </a:txBody>
+                </a:tc>
+              </a:tr>
+              <a:tr h="0">
+                <a:tc>
+                  <a:txBody>
+                    <a:bodyPr/>
+                    <a:lstStyle/>
+                    <a:p>
+                      <a:pPr lvl="0" indent="0" marL="0">
+                        <a:buNone/>
+                      </a:pPr>
+                      <a:r>
+                        <a:rPr/>
+                        <a:t>899</a:t>
+                      </a:r>
+                    </a:p>
+                  </a:txBody>
+                </a:tc>
+                <a:tc>
+                  <a:txBody>
+                    <a:bodyPr/>
+                    <a:lstStyle/>
+                    <a:p>
+                      <a:pPr lvl="0" indent="0" marL="0">
+                        <a:buNone/>
+                      </a:pPr>
+                      <a:r>
+                        <a:rPr/>
+                        <a:t>sugarberry</a:t>
+                      </a:r>
+                    </a:p>
+                  </a:txBody>
+                </a:tc>
+                <a:tc>
+                  <a:txBody>
+                    <a:bodyPr/>
+                    <a:lstStyle/>
+                    <a:p>
+                      <a:pPr lvl="0" indent="0" marL="0">
+                        <a:buNone/>
+                      </a:pPr>
+                      <a:r>
+                        <a:rPr/>
+                        <a:t>10</a:t>
+                      </a:r>
+                    </a:p>
+                  </a:txBody>
+                </a:tc>
+                <a:tc>
+                  <a:txBody>
+                    <a:bodyPr/>
+                    <a:lstStyle/>
+                    <a:p>
+                      <a:pPr lvl="0" indent="0" marL="0">
+                        <a:buNone/>
+                      </a:pPr>
+                      <a:r>
+                        <a:rPr/>
+                        <a:t>40.091106</a:t>
+                      </a:r>
+                    </a:p>
+                  </a:txBody>
+                </a:tc>
+                <a:tc>
+                  <a:txBody>
+                    <a:bodyPr/>
+                    <a:lstStyle/>
+                    <a:p>
+                      <a:pPr lvl="0" indent="0" marL="0">
+                        <a:buNone/>
+                      </a:pPr>
+                      <a:r>
+                        <a:rPr/>
+                        <a:t>23.172083</a:t>
+                      </a:r>
+                    </a:p>
+                  </a:txBody>
+                </a:tc>
+                <a:tc>
+                  <a:txBody>
+                    <a:bodyPr/>
+                    <a:lstStyle/>
+                    <a:p>
+                      <a:pPr lvl="0" indent="0" marL="0">
+                        <a:buNone/>
+                      </a:pPr>
+                      <a:r>
+                        <a:rPr/>
+                        <a:t>0.677519</a:t>
                       </a:r>
                     </a:p>
                   </a:txBody>
@@ -5352,319 +4875,62 @@
             </a:pPr>
             <a:r>
               <a:rPr/>
-              <a:t>Tree Species Name Data:</a:t>
+              <a:t>Technical Lead</a:t>
             </a:r>
           </a:p>
         </p:txBody>
       </p:sp>
-      <p:graphicFrame>
-        <p:nvGraphicFramePr>
-          <p:cNvPr id="6" name="Content Placeholder 5"/>
-          <p:cNvGraphicFramePr>
-            <a:graphicFrameLocks noGrp="1"/>
-          </p:cNvGraphicFramePr>
+      <p:sp>
+        <p:nvSpPr>
+          <p:cNvPr id="3" name="Content Placeholder 2"/>
+          <p:cNvSpPr>
+            <a:spLocks noGrp="1"/>
+          </p:cNvSpPr>
           <p:nvPr>
             <p:ph idx="1"/>
           </p:nvPr>
-        </p:nvGraphicFramePr>
-        <p:xfrm>
-          <a:off x="457200" y="1193800"/>
-          <a:ext cx="8229600" cy="3390900"/>
-        </p:xfrm>
-        <a:graphic>
-          <a:graphicData uri="http://schemas.openxmlformats.org/drawingml/2006/table">
-            <a:tbl>
-              <a:tblPr firstRow="1" bandRow="1">
-                <a:tableStyleId>{5C22544A-7EE6-4342-B048-85BDC9FD1C3A}</a:tableStyleId>
-              </a:tblPr>
-              <a:tblGrid>
-                <a:gridCol w="2743200"/>
-                <a:gridCol w="2743200"/>
-                <a:gridCol w="2743200"/>
-              </a:tblGrid>
-              <a:tr h="0">
-                <a:tc>
-                  <a:txBody>
-                    <a:bodyPr/>
-                    <a:lstStyle/>
-                    <a:p>
-                      <a:endParaRPr/>
-                    </a:p>
-                  </a:txBody>
-                  <a:tcPr/>
-                </a:tc>
-                <a:tc>
-                  <a:txBody>
-                    <a:bodyPr/>
-                    <a:lstStyle/>
-                    <a:p>
-                      <a:pPr lvl="0" indent="0" marL="0">
-                        <a:buNone/>
-                      </a:pPr>
-                      <a:r>
-                        <a:rPr/>
-                        <a:t>SPCD</a:t>
-                      </a:r>
-                    </a:p>
-                  </a:txBody>
-                  <a:tcPr/>
-                </a:tc>
-                <a:tc>
-                  <a:txBody>
-                    <a:bodyPr/>
-                    <a:lstStyle/>
-                    <a:p>
-                      <a:pPr lvl="0" indent="0" marL="0">
-                        <a:buNone/>
-                      </a:pPr>
-                      <a:r>
-                        <a:rPr/>
-                        <a:t>COMMON_NAME</a:t>
-                      </a:r>
-                    </a:p>
-                  </a:txBody>
-                  <a:tcPr/>
-                </a:tc>
-              </a:tr>
-              <a:tr h="0">
-                <a:tc>
-                  <a:txBody>
-                    <a:bodyPr/>
-                    <a:lstStyle/>
-                    <a:p>
-                      <a:pPr lvl="0" indent="0" marL="0">
-                        <a:buNone/>
-                      </a:pPr>
-                      <a:r>
-                        <a:rPr/>
-                        <a:t>0</a:t>
-                      </a:r>
-                    </a:p>
-                  </a:txBody>
-                </a:tc>
-                <a:tc>
-                  <a:txBody>
-                    <a:bodyPr/>
-                    <a:lstStyle/>
-                    <a:p>
-                      <a:pPr lvl="0" indent="0" marL="0">
-                        <a:buNone/>
-                      </a:pPr>
-                      <a:r>
-                        <a:rPr/>
-                        <a:t>10</a:t>
-                      </a:r>
-                    </a:p>
-                  </a:txBody>
-                </a:tc>
-                <a:tc>
-                  <a:txBody>
-                    <a:bodyPr/>
-                    <a:lstStyle/>
-                    <a:p>
-                      <a:pPr lvl="0" indent="0" marL="0">
-                        <a:buNone/>
-                      </a:pPr>
-                      <a:r>
-                        <a:rPr/>
-                        <a:t>fir spp.</a:t>
-                      </a:r>
-                    </a:p>
-                  </a:txBody>
-                </a:tc>
-              </a:tr>
-              <a:tr h="0">
-                <a:tc>
-                  <a:txBody>
-                    <a:bodyPr/>
-                    <a:lstStyle/>
-                    <a:p>
-                      <a:pPr lvl="0" indent="0" marL="0">
-                        <a:buNone/>
-                      </a:pPr>
-                      <a:r>
-                        <a:rPr/>
-                        <a:t>1</a:t>
-                      </a:r>
-                    </a:p>
-                  </a:txBody>
-                </a:tc>
-                <a:tc>
-                  <a:txBody>
-                    <a:bodyPr/>
-                    <a:lstStyle/>
-                    <a:p>
-                      <a:pPr lvl="0" indent="0" marL="0">
-                        <a:buNone/>
-                      </a:pPr>
-                      <a:r>
-                        <a:rPr/>
-                        <a:t>11</a:t>
-                      </a:r>
-                    </a:p>
-                  </a:txBody>
-                </a:tc>
-                <a:tc>
-                  <a:txBody>
-                    <a:bodyPr/>
-                    <a:lstStyle/>
-                    <a:p>
-                      <a:pPr lvl="0" indent="0" marL="0">
-                        <a:buNone/>
-                      </a:pPr>
-                      <a:r>
-                        <a:rPr/>
-                        <a:t>Pacific silver fir</a:t>
-                      </a:r>
-                    </a:p>
-                  </a:txBody>
-                </a:tc>
-              </a:tr>
-              <a:tr h="0">
-                <a:tc>
-                  <a:txBody>
-                    <a:bodyPr/>
-                    <a:lstStyle/>
-                    <a:p>
-                      <a:pPr lvl="0" indent="0" marL="0">
-                        <a:buNone/>
-                      </a:pPr>
-                      <a:r>
-                        <a:rPr/>
-                        <a:t>2</a:t>
-                      </a:r>
-                    </a:p>
-                  </a:txBody>
-                </a:tc>
-                <a:tc>
-                  <a:txBody>
-                    <a:bodyPr/>
-                    <a:lstStyle/>
-                    <a:p>
-                      <a:pPr lvl="0" indent="0" marL="0">
-                        <a:buNone/>
-                      </a:pPr>
-                      <a:r>
-                        <a:rPr/>
-                        <a:t>12</a:t>
-                      </a:r>
-                    </a:p>
-                  </a:txBody>
-                </a:tc>
-                <a:tc>
-                  <a:txBody>
-                    <a:bodyPr/>
-                    <a:lstStyle/>
-                    <a:p>
-                      <a:pPr lvl="0" indent="0" marL="0">
-                        <a:buNone/>
-                      </a:pPr>
-                      <a:r>
-                        <a:rPr/>
-                        <a:t>balsam fir</a:t>
-                      </a:r>
-                    </a:p>
-                  </a:txBody>
-                </a:tc>
-              </a:tr>
-              <a:tr h="0">
-                <a:tc>
-                  <a:txBody>
-                    <a:bodyPr/>
-                    <a:lstStyle/>
-                    <a:p>
-                      <a:pPr lvl="0" indent="0" marL="0">
-                        <a:buNone/>
-                      </a:pPr>
-                      <a:r>
-                        <a:rPr/>
-                        <a:t>3</a:t>
-                      </a:r>
-                    </a:p>
-                  </a:txBody>
-                </a:tc>
-                <a:tc>
-                  <a:txBody>
-                    <a:bodyPr/>
-                    <a:lstStyle/>
-                    <a:p>
-                      <a:pPr lvl="0" indent="0" marL="0">
-                        <a:buNone/>
-                      </a:pPr>
-                      <a:r>
-                        <a:rPr/>
-                        <a:t>14</a:t>
-                      </a:r>
-                    </a:p>
-                  </a:txBody>
-                </a:tc>
-                <a:tc>
-                  <a:txBody>
-                    <a:bodyPr/>
-                    <a:lstStyle/>
-                    <a:p>
-                      <a:pPr lvl="0" indent="0" marL="0">
-                        <a:buNone/>
-                      </a:pPr>
-                      <a:r>
-                        <a:rPr/>
-                        <a:t>Santa Lucia or bristlecone fir</a:t>
-                      </a:r>
-                    </a:p>
-                  </a:txBody>
-                </a:tc>
-              </a:tr>
-              <a:tr h="0">
-                <a:tc>
-                  <a:txBody>
-                    <a:bodyPr/>
-                    <a:lstStyle/>
-                    <a:p>
-                      <a:pPr lvl="0" indent="0" marL="0">
-                        <a:buNone/>
-                      </a:pPr>
-                      <a:r>
-                        <a:rPr/>
-                        <a:t>4</a:t>
-                      </a:r>
-                    </a:p>
-                  </a:txBody>
-                </a:tc>
-                <a:tc>
-                  <a:txBody>
-                    <a:bodyPr/>
-                    <a:lstStyle/>
-                    <a:p>
-                      <a:pPr lvl="0" indent="0" marL="0">
-                        <a:buNone/>
-                      </a:pPr>
-                      <a:r>
-                        <a:rPr/>
-                        <a:t>15</a:t>
-                      </a:r>
-                    </a:p>
-                  </a:txBody>
-                </a:tc>
-                <a:tc>
-                  <a:txBody>
-                    <a:bodyPr/>
-                    <a:lstStyle/>
-                    <a:p>
-                      <a:pPr lvl="0" indent="0" marL="0">
-                        <a:buNone/>
-                      </a:pPr>
-                      <a:r>
-                        <a:rPr/>
-                        <a:t>white fir</a:t>
-                      </a:r>
-                    </a:p>
-                  </a:txBody>
-                </a:tc>
-              </a:tr>
-            </a:tbl>
-          </a:graphicData>
-        </a:graphic>
-      </p:graphicFrame>
+        </p:nvSpPr>
+        <p:spPr/>
+        <p:txBody>
+          <a:bodyPr/>
+          <a:lstStyle/>
+          <a:p>
+            <a:pPr lvl="0"/>
+            <a:r>
+              <a:rPr/>
+              <a:t>Overview of data manipulation</a:t>
+            </a:r>
+          </a:p>
+          <a:p>
+            <a:pPr lvl="0"/>
+            <a:r>
+              <a:rPr/>
+              <a:t>Split and filtering methods</a:t>
+            </a:r>
+          </a:p>
+          <a:p>
+            <a:pPr lvl="0"/>
+            <a:r>
+              <a:rPr/>
+              <a:t>Tuning k for the best model</a:t>
+            </a:r>
+          </a:p>
+          <a:p>
+            <a:pPr lvl="0"/>
+            <a:r>
+              <a:rPr/>
+              <a:t>Feature engineering (what worked and what didn’t)</a:t>
+            </a:r>
+          </a:p>
+          <a:p>
+            <a:pPr lvl="0"/>
+            <a:r>
+              <a:rPr/>
+              <a:t>The final “best” model and error</a:t>
+            </a:r>
+          </a:p>
+        </p:txBody>
+      </p:sp>
     </p:spTree>
   </p:cSld>
 </p:sld>
@@ -5707,7 +4973,7 @@
             </a:pPr>
             <a:r>
               <a:rPr/>
-              <a:t>Combined Dataset (species mapped onto bigger dataset):</a:t>
+              <a:t>Tree Measurement Data:</a:t>
             </a:r>
           </a:p>
         </p:txBody>
@@ -5733,12 +4999,11 @@
                 <a:tableStyleId>{5C22544A-7EE6-4342-B048-85BDC9FD1C3A}</a:tableStyleId>
               </a:tblPr>
               <a:tblGrid>
-                <a:gridCol w="1371600"/>
-                <a:gridCol w="1371600"/>
-                <a:gridCol w="1371600"/>
-                <a:gridCol w="1371600"/>
-                <a:gridCol w="1371600"/>
-                <a:gridCol w="1371600"/>
+                <a:gridCol w="1638300"/>
+                <a:gridCol w="1638300"/>
+                <a:gridCol w="1638300"/>
+                <a:gridCol w="1638300"/>
+                <a:gridCol w="1638300"/>
               </a:tblGrid>
               <a:tr h="0">
                 <a:tc>
@@ -5815,22 +5080,6 @@
                   </a:txBody>
                   <a:tcPr/>
                 </a:tc>
-                <a:tc>
-                  <a:txBody>
-                    <a:bodyPr/>
-                    <a:lstStyle/>
-                    <a:p>
-                      <a:pPr lvl="0" indent="0" marL="0">
-                        <a:buNone/>
-                      </a:pPr>
-                      <a:r>
-                        <a:rPr/>
-                        <a:t>COMMON_NAME</a:t>
-                      </a:r>
-                    </a:p>
-                  </a:txBody>
-                  <a:tcPr/>
-                </a:tc>
               </a:tr>
               <a:tr h="0">
                 <a:tc>
@@ -5908,21 +5157,6 @@
                     </a:p>
                   </a:txBody>
                 </a:tc>
-                <a:tc>
-                  <a:txBody>
-                    <a:bodyPr/>
-                    <a:lstStyle/>
-                    <a:p>
-                      <a:pPr lvl="0" indent="0" marL="0">
-                        <a:buNone/>
-                      </a:pPr>
-                      <a:r>
-                        <a:rPr/>
-                        <a:t>balsam fir</a:t>
-                      </a:r>
-                    </a:p>
-                  </a:txBody>
-                </a:tc>
               </a:tr>
               <a:tr h="0">
                 <a:tc>
@@ -6000,21 +5234,6 @@
                     </a:p>
                   </a:txBody>
                 </a:tc>
-                <a:tc>
-                  <a:txBody>
-                    <a:bodyPr/>
-                    <a:lstStyle/>
-                    <a:p>
-                      <a:pPr lvl="0" indent="0" marL="0">
-                        <a:buNone/>
-                      </a:pPr>
-                      <a:r>
-                        <a:rPr/>
-                        <a:t>balsam fir</a:t>
-                      </a:r>
-                    </a:p>
-                  </a:txBody>
-                </a:tc>
               </a:tr>
               <a:tr h="0">
                 <a:tc>
@@ -6092,21 +5311,6 @@
                     </a:p>
                   </a:txBody>
                 </a:tc>
-                <a:tc>
-                  <a:txBody>
-                    <a:bodyPr/>
-                    <a:lstStyle/>
-                    <a:p>
-                      <a:pPr lvl="0" indent="0" marL="0">
-                        <a:buNone/>
-                      </a:pPr>
-                      <a:r>
-                        <a:rPr/>
-                        <a:t>balsam fir</a:t>
-                      </a:r>
-                    </a:p>
-                  </a:txBody>
-                </a:tc>
               </a:tr>
               <a:tr h="0">
                 <a:tc>
@@ -6184,21 +5388,6 @@
                     </a:p>
                   </a:txBody>
                 </a:tc>
-                <a:tc>
-                  <a:txBody>
-                    <a:bodyPr/>
-                    <a:lstStyle/>
-                    <a:p>
-                      <a:pPr lvl="0" indent="0" marL="0">
-                        <a:buNone/>
-                      </a:pPr>
-                      <a:r>
-                        <a:rPr/>
-                        <a:t>balsam fir</a:t>
-                      </a:r>
-                    </a:p>
-                  </a:txBody>
-                </a:tc>
               </a:tr>
               <a:tr h="0">
                 <a:tc>
@@ -6272,21 +5461,6 @@
                       <a:r>
                         <a:rPr/>
                         <a:t>113.92</a:t>
-                      </a:r>
-                    </a:p>
-                  </a:txBody>
-                </a:tc>
-                <a:tc>
-                  <a:txBody>
-                    <a:bodyPr/>
-                    <a:lstStyle/>
-                    <a:p>
-                      <a:pPr lvl="0" indent="0" marL="0">
-                        <a:buNone/>
-                      </a:pPr>
-                      <a:r>
-                        <a:rPr/>
-                        <a:t>balsam fir</a:t>
                       </a:r>
                     </a:p>
                   </a:txBody>
@@ -6338,50 +5512,319 @@
             </a:pPr>
             <a:r>
               <a:rPr/>
-              <a:t>Filtered data</a:t>
+              <a:t>Tree Species Name Data:</a:t>
             </a:r>
           </a:p>
         </p:txBody>
       </p:sp>
-      <p:sp>
-        <p:nvSpPr>
-          <p:cNvPr id="3" name="Content Placeholder 2"/>
-          <p:cNvSpPr>
-            <a:spLocks noGrp="1"/>
-          </p:cNvSpPr>
+      <p:graphicFrame>
+        <p:nvGraphicFramePr>
+          <p:cNvPr id="6" name="Content Placeholder 5"/>
+          <p:cNvGraphicFramePr>
+            <a:graphicFrameLocks noGrp="1"/>
+          </p:cNvGraphicFramePr>
           <p:nvPr>
             <p:ph idx="1"/>
           </p:nvPr>
-        </p:nvSpPr>
-        <p:spPr/>
-        <p:txBody>
-          <a:bodyPr/>
-          <a:lstStyle/>
-          <a:p>
-            <a:pPr lvl="0" indent="0">
-              <a:buNone/>
-            </a:pPr>
-            <a:r>
-              <a:rPr>
-                <a:latin typeface="Courier"/>
-              </a:rPr>
-              <a:t>SPCD  DO_BH  HT_TOT  TT_DW_CRM  COMMON_NAME               
-111   5.0    39.0    69.03      slash pine                    14
-      5.3    39.0    82.00      slash pine                    13
-      7.0    50.0    223.34     slash pine                    13
-131   7.0    50.0    196.35     loblolly pine                 11
-111   5.2    35.0    66.34      slash pine                    11
-                                                              ..
-999   12.8   63.0    885.17     Other or unknown live tree     1
-      13.0   54.0    788.82     Other or unknown live tree     1
-      13.2   40.0    616.66     Other or unknown live tree     1
-      13.3   72.0    1074.07    Other or unknown live tree     1
-12    1.6    13.4    3.78       balsam fir                     1
-Name: count, Length: 115454, dtype: int64</a:t>
-            </a:r>
-          </a:p>
-        </p:txBody>
-      </p:sp>
+        </p:nvGraphicFramePr>
+        <p:xfrm>
+          <a:off x="457200" y="1193800"/>
+          <a:ext cx="8229600" cy="3390900"/>
+        </p:xfrm>
+        <a:graphic>
+          <a:graphicData uri="http://schemas.openxmlformats.org/drawingml/2006/table">
+            <a:tbl>
+              <a:tblPr firstRow="1" bandRow="1">
+                <a:tableStyleId>{5C22544A-7EE6-4342-B048-85BDC9FD1C3A}</a:tableStyleId>
+              </a:tblPr>
+              <a:tblGrid>
+                <a:gridCol w="2743200"/>
+                <a:gridCol w="2743200"/>
+                <a:gridCol w="2743200"/>
+              </a:tblGrid>
+              <a:tr h="0">
+                <a:tc>
+                  <a:txBody>
+                    <a:bodyPr/>
+                    <a:lstStyle/>
+                    <a:p>
+                      <a:endParaRPr/>
+                    </a:p>
+                  </a:txBody>
+                  <a:tcPr/>
+                </a:tc>
+                <a:tc>
+                  <a:txBody>
+                    <a:bodyPr/>
+                    <a:lstStyle/>
+                    <a:p>
+                      <a:pPr lvl="0" indent="0" marL="0">
+                        <a:buNone/>
+                      </a:pPr>
+                      <a:r>
+                        <a:rPr/>
+                        <a:t>SPCD</a:t>
+                      </a:r>
+                    </a:p>
+                  </a:txBody>
+                  <a:tcPr/>
+                </a:tc>
+                <a:tc>
+                  <a:txBody>
+                    <a:bodyPr/>
+                    <a:lstStyle/>
+                    <a:p>
+                      <a:pPr lvl="0" indent="0" marL="0">
+                        <a:buNone/>
+                      </a:pPr>
+                      <a:r>
+                        <a:rPr/>
+                        <a:t>COMMON_NAME</a:t>
+                      </a:r>
+                    </a:p>
+                  </a:txBody>
+                  <a:tcPr/>
+                </a:tc>
+              </a:tr>
+              <a:tr h="0">
+                <a:tc>
+                  <a:txBody>
+                    <a:bodyPr/>
+                    <a:lstStyle/>
+                    <a:p>
+                      <a:pPr lvl="0" indent="0" marL="0">
+                        <a:buNone/>
+                      </a:pPr>
+                      <a:r>
+                        <a:rPr/>
+                        <a:t>0</a:t>
+                      </a:r>
+                    </a:p>
+                  </a:txBody>
+                </a:tc>
+                <a:tc>
+                  <a:txBody>
+                    <a:bodyPr/>
+                    <a:lstStyle/>
+                    <a:p>
+                      <a:pPr lvl="0" indent="0" marL="0">
+                        <a:buNone/>
+                      </a:pPr>
+                      <a:r>
+                        <a:rPr/>
+                        <a:t>10</a:t>
+                      </a:r>
+                    </a:p>
+                  </a:txBody>
+                </a:tc>
+                <a:tc>
+                  <a:txBody>
+                    <a:bodyPr/>
+                    <a:lstStyle/>
+                    <a:p>
+                      <a:pPr lvl="0" indent="0" marL="0">
+                        <a:buNone/>
+                      </a:pPr>
+                      <a:r>
+                        <a:rPr/>
+                        <a:t>fir spp.</a:t>
+                      </a:r>
+                    </a:p>
+                  </a:txBody>
+                </a:tc>
+              </a:tr>
+              <a:tr h="0">
+                <a:tc>
+                  <a:txBody>
+                    <a:bodyPr/>
+                    <a:lstStyle/>
+                    <a:p>
+                      <a:pPr lvl="0" indent="0" marL="0">
+                        <a:buNone/>
+                      </a:pPr>
+                      <a:r>
+                        <a:rPr/>
+                        <a:t>1</a:t>
+                      </a:r>
+                    </a:p>
+                  </a:txBody>
+                </a:tc>
+                <a:tc>
+                  <a:txBody>
+                    <a:bodyPr/>
+                    <a:lstStyle/>
+                    <a:p>
+                      <a:pPr lvl="0" indent="0" marL="0">
+                        <a:buNone/>
+                      </a:pPr>
+                      <a:r>
+                        <a:rPr/>
+                        <a:t>11</a:t>
+                      </a:r>
+                    </a:p>
+                  </a:txBody>
+                </a:tc>
+                <a:tc>
+                  <a:txBody>
+                    <a:bodyPr/>
+                    <a:lstStyle/>
+                    <a:p>
+                      <a:pPr lvl="0" indent="0" marL="0">
+                        <a:buNone/>
+                      </a:pPr>
+                      <a:r>
+                        <a:rPr/>
+                        <a:t>Pacific silver fir</a:t>
+                      </a:r>
+                    </a:p>
+                  </a:txBody>
+                </a:tc>
+              </a:tr>
+              <a:tr h="0">
+                <a:tc>
+                  <a:txBody>
+                    <a:bodyPr/>
+                    <a:lstStyle/>
+                    <a:p>
+                      <a:pPr lvl="0" indent="0" marL="0">
+                        <a:buNone/>
+                      </a:pPr>
+                      <a:r>
+                        <a:rPr/>
+                        <a:t>2</a:t>
+                      </a:r>
+                    </a:p>
+                  </a:txBody>
+                </a:tc>
+                <a:tc>
+                  <a:txBody>
+                    <a:bodyPr/>
+                    <a:lstStyle/>
+                    <a:p>
+                      <a:pPr lvl="0" indent="0" marL="0">
+                        <a:buNone/>
+                      </a:pPr>
+                      <a:r>
+                        <a:rPr/>
+                        <a:t>12</a:t>
+                      </a:r>
+                    </a:p>
+                  </a:txBody>
+                </a:tc>
+                <a:tc>
+                  <a:txBody>
+                    <a:bodyPr/>
+                    <a:lstStyle/>
+                    <a:p>
+                      <a:pPr lvl="0" indent="0" marL="0">
+                        <a:buNone/>
+                      </a:pPr>
+                      <a:r>
+                        <a:rPr/>
+                        <a:t>balsam fir</a:t>
+                      </a:r>
+                    </a:p>
+                  </a:txBody>
+                </a:tc>
+              </a:tr>
+              <a:tr h="0">
+                <a:tc>
+                  <a:txBody>
+                    <a:bodyPr/>
+                    <a:lstStyle/>
+                    <a:p>
+                      <a:pPr lvl="0" indent="0" marL="0">
+                        <a:buNone/>
+                      </a:pPr>
+                      <a:r>
+                        <a:rPr/>
+                        <a:t>3</a:t>
+                      </a:r>
+                    </a:p>
+                  </a:txBody>
+                </a:tc>
+                <a:tc>
+                  <a:txBody>
+                    <a:bodyPr/>
+                    <a:lstStyle/>
+                    <a:p>
+                      <a:pPr lvl="0" indent="0" marL="0">
+                        <a:buNone/>
+                      </a:pPr>
+                      <a:r>
+                        <a:rPr/>
+                        <a:t>14</a:t>
+                      </a:r>
+                    </a:p>
+                  </a:txBody>
+                </a:tc>
+                <a:tc>
+                  <a:txBody>
+                    <a:bodyPr/>
+                    <a:lstStyle/>
+                    <a:p>
+                      <a:pPr lvl="0" indent="0" marL="0">
+                        <a:buNone/>
+                      </a:pPr>
+                      <a:r>
+                        <a:rPr/>
+                        <a:t>Santa Lucia or bristlecone fir</a:t>
+                      </a:r>
+                    </a:p>
+                  </a:txBody>
+                </a:tc>
+              </a:tr>
+              <a:tr h="0">
+                <a:tc>
+                  <a:txBody>
+                    <a:bodyPr/>
+                    <a:lstStyle/>
+                    <a:p>
+                      <a:pPr lvl="0" indent="0" marL="0">
+                        <a:buNone/>
+                      </a:pPr>
+                      <a:r>
+                        <a:rPr/>
+                        <a:t>4</a:t>
+                      </a:r>
+                    </a:p>
+                  </a:txBody>
+                </a:tc>
+                <a:tc>
+                  <a:txBody>
+                    <a:bodyPr/>
+                    <a:lstStyle/>
+                    <a:p>
+                      <a:pPr lvl="0" indent="0" marL="0">
+                        <a:buNone/>
+                      </a:pPr>
+                      <a:r>
+                        <a:rPr/>
+                        <a:t>15</a:t>
+                      </a:r>
+                    </a:p>
+                  </a:txBody>
+                </a:tc>
+                <a:tc>
+                  <a:txBody>
+                    <a:bodyPr/>
+                    <a:lstStyle/>
+                    <a:p>
+                      <a:pPr lvl="0" indent="0" marL="0">
+                        <a:buNone/>
+                      </a:pPr>
+                      <a:r>
+                        <a:rPr/>
+                        <a:t>white fir</a:t>
+                      </a:r>
+                    </a:p>
+                  </a:txBody>
+                </a:tc>
+              </a:tr>
+            </a:tbl>
+          </a:graphicData>
+        </a:graphic>
+      </p:graphicFrame>
     </p:spTree>
   </p:cSld>
 </p:sld>
@@ -6424,38 +5867,595 @@
             </a:pPr>
             <a:r>
               <a:rPr/>
-              <a:t>Base datset calculations:</a:t>
+              <a:t>Combined Dataset (species mapped onto bigger dataset):</a:t>
             </a:r>
           </a:p>
         </p:txBody>
       </p:sp>
-      <p:sp>
-        <p:nvSpPr>
-          <p:cNvPr id="3" name="Content Placeholder 2"/>
-          <p:cNvSpPr>
-            <a:spLocks noGrp="1"/>
-          </p:cNvSpPr>
+      <p:graphicFrame>
+        <p:nvGraphicFramePr>
+          <p:cNvPr id="6" name="Content Placeholder 5"/>
+          <p:cNvGraphicFramePr>
+            <a:graphicFrameLocks noGrp="1"/>
+          </p:cNvGraphicFramePr>
           <p:nvPr>
             <p:ph idx="1"/>
           </p:nvPr>
-        </p:nvSpPr>
-        <p:spPr/>
-        <p:txBody>
-          <a:bodyPr/>
-          <a:lstStyle/>
-          <a:p>
-            <a:pPr lvl="0" indent="0">
-              <a:buNone/>
-            </a:pPr>
-            <a:r>
-              <a:rPr>
-                <a:latin typeface="Courier"/>
-              </a:rPr>
-              <a:t>Average Root Mean Squared Log Error (RMSLE) for k 3: 0.15806802121296354</a:t>
-            </a:r>
-          </a:p>
-        </p:txBody>
-      </p:sp>
+        </p:nvGraphicFramePr>
+        <p:xfrm>
+          <a:off x="457200" y="1193800"/>
+          <a:ext cx="8229600" cy="3390900"/>
+        </p:xfrm>
+        <a:graphic>
+          <a:graphicData uri="http://schemas.openxmlformats.org/drawingml/2006/table">
+            <a:tbl>
+              <a:tblPr firstRow="1" bandRow="1">
+                <a:tableStyleId>{5C22544A-7EE6-4342-B048-85BDC9FD1C3A}</a:tableStyleId>
+              </a:tblPr>
+              <a:tblGrid>
+                <a:gridCol w="1371600"/>
+                <a:gridCol w="1371600"/>
+                <a:gridCol w="1371600"/>
+                <a:gridCol w="1371600"/>
+                <a:gridCol w="1371600"/>
+                <a:gridCol w="1371600"/>
+              </a:tblGrid>
+              <a:tr h="0">
+                <a:tc>
+                  <a:txBody>
+                    <a:bodyPr/>
+                    <a:lstStyle/>
+                    <a:p>
+                      <a:endParaRPr/>
+                    </a:p>
+                  </a:txBody>
+                  <a:tcPr/>
+                </a:tc>
+                <a:tc>
+                  <a:txBody>
+                    <a:bodyPr/>
+                    <a:lstStyle/>
+                    <a:p>
+                      <a:pPr lvl="0" indent="0" marL="0">
+                        <a:buNone/>
+                      </a:pPr>
+                      <a:r>
+                        <a:rPr/>
+                        <a:t>SPCD</a:t>
+                      </a:r>
+                    </a:p>
+                  </a:txBody>
+                  <a:tcPr/>
+                </a:tc>
+                <a:tc>
+                  <a:txBody>
+                    <a:bodyPr/>
+                    <a:lstStyle/>
+                    <a:p>
+                      <a:pPr lvl="0" indent="0" marL="0">
+                        <a:buNone/>
+                      </a:pPr>
+                      <a:r>
+                        <a:rPr/>
+                        <a:t>DO_BH</a:t>
+                      </a:r>
+                    </a:p>
+                  </a:txBody>
+                  <a:tcPr/>
+                </a:tc>
+                <a:tc>
+                  <a:txBody>
+                    <a:bodyPr/>
+                    <a:lstStyle/>
+                    <a:p>
+                      <a:pPr lvl="0" indent="0" marL="0">
+                        <a:buNone/>
+                      </a:pPr>
+                      <a:r>
+                        <a:rPr/>
+                        <a:t>HT_TOT</a:t>
+                      </a:r>
+                    </a:p>
+                  </a:txBody>
+                  <a:tcPr/>
+                </a:tc>
+                <a:tc>
+                  <a:txBody>
+                    <a:bodyPr/>
+                    <a:lstStyle/>
+                    <a:p>
+                      <a:pPr lvl="0" indent="0" marL="0">
+                        <a:buNone/>
+                      </a:pPr>
+                      <a:r>
+                        <a:rPr/>
+                        <a:t>TT_DW_CRM</a:t>
+                      </a:r>
+                    </a:p>
+                  </a:txBody>
+                  <a:tcPr/>
+                </a:tc>
+                <a:tc>
+                  <a:txBody>
+                    <a:bodyPr/>
+                    <a:lstStyle/>
+                    <a:p>
+                      <a:pPr lvl="0" indent="0" marL="0">
+                        <a:buNone/>
+                      </a:pPr>
+                      <a:r>
+                        <a:rPr/>
+                        <a:t>COMMON_NAME</a:t>
+                      </a:r>
+                    </a:p>
+                  </a:txBody>
+                  <a:tcPr/>
+                </a:tc>
+              </a:tr>
+              <a:tr h="0">
+                <a:tc>
+                  <a:txBody>
+                    <a:bodyPr/>
+                    <a:lstStyle/>
+                    <a:p>
+                      <a:pPr lvl="0" indent="0" marL="0">
+                        <a:buNone/>
+                      </a:pPr>
+                      <a:r>
+                        <a:rPr/>
+                        <a:t>0</a:t>
+                      </a:r>
+                    </a:p>
+                  </a:txBody>
+                </a:tc>
+                <a:tc>
+                  <a:txBody>
+                    <a:bodyPr/>
+                    <a:lstStyle/>
+                    <a:p>
+                      <a:pPr lvl="0" indent="0" marL="0">
+                        <a:buNone/>
+                      </a:pPr>
+                      <a:r>
+                        <a:rPr/>
+                        <a:t>12</a:t>
+                      </a:r>
+                    </a:p>
+                  </a:txBody>
+                </a:tc>
+                <a:tc>
+                  <a:txBody>
+                    <a:bodyPr/>
+                    <a:lstStyle/>
+                    <a:p>
+                      <a:pPr lvl="0" indent="0" marL="0">
+                        <a:buNone/>
+                      </a:pPr>
+                      <a:r>
+                        <a:rPr/>
+                        <a:t>7.5</a:t>
+                      </a:r>
+                    </a:p>
+                  </a:txBody>
+                </a:tc>
+                <a:tc>
+                  <a:txBody>
+                    <a:bodyPr/>
+                    <a:lstStyle/>
+                    <a:p>
+                      <a:pPr lvl="0" indent="0" marL="0">
+                        <a:buNone/>
+                      </a:pPr>
+                      <a:r>
+                        <a:rPr/>
+                        <a:t>45.2</a:t>
+                      </a:r>
+                    </a:p>
+                  </a:txBody>
+                </a:tc>
+                <a:tc>
+                  <a:txBody>
+                    <a:bodyPr/>
+                    <a:lstStyle/>
+                    <a:p>
+                      <a:pPr lvl="0" indent="0" marL="0">
+                        <a:buNone/>
+                      </a:pPr>
+                      <a:r>
+                        <a:rPr/>
+                        <a:t>178.86</a:t>
+                      </a:r>
+                    </a:p>
+                  </a:txBody>
+                </a:tc>
+                <a:tc>
+                  <a:txBody>
+                    <a:bodyPr/>
+                    <a:lstStyle/>
+                    <a:p>
+                      <a:pPr lvl="0" indent="0" marL="0">
+                        <a:buNone/>
+                      </a:pPr>
+                      <a:r>
+                        <a:rPr/>
+                        <a:t>balsam fir</a:t>
+                      </a:r>
+                    </a:p>
+                  </a:txBody>
+                </a:tc>
+              </a:tr>
+              <a:tr h="0">
+                <a:tc>
+                  <a:txBody>
+                    <a:bodyPr/>
+                    <a:lstStyle/>
+                    <a:p>
+                      <a:pPr lvl="0" indent="0" marL="0">
+                        <a:buNone/>
+                      </a:pPr>
+                      <a:r>
+                        <a:rPr/>
+                        <a:t>1</a:t>
+                      </a:r>
+                    </a:p>
+                  </a:txBody>
+                </a:tc>
+                <a:tc>
+                  <a:txBody>
+                    <a:bodyPr/>
+                    <a:lstStyle/>
+                    <a:p>
+                      <a:pPr lvl="0" indent="0" marL="0">
+                        <a:buNone/>
+                      </a:pPr>
+                      <a:r>
+                        <a:rPr/>
+                        <a:t>12</a:t>
+                      </a:r>
+                    </a:p>
+                  </a:txBody>
+                </a:tc>
+                <a:tc>
+                  <a:txBody>
+                    <a:bodyPr/>
+                    <a:lstStyle/>
+                    <a:p>
+                      <a:pPr lvl="0" indent="0" marL="0">
+                        <a:buNone/>
+                      </a:pPr>
+                      <a:r>
+                        <a:rPr/>
+                        <a:t>9.3</a:t>
+                      </a:r>
+                    </a:p>
+                  </a:txBody>
+                </a:tc>
+                <a:tc>
+                  <a:txBody>
+                    <a:bodyPr/>
+                    <a:lstStyle/>
+                    <a:p>
+                      <a:pPr lvl="0" indent="0" marL="0">
+                        <a:buNone/>
+                      </a:pPr>
+                      <a:r>
+                        <a:rPr/>
+                        <a:t>62.7</a:t>
+                      </a:r>
+                    </a:p>
+                  </a:txBody>
+                </a:tc>
+                <a:tc>
+                  <a:txBody>
+                    <a:bodyPr/>
+                    <a:lstStyle/>
+                    <a:p>
+                      <a:pPr lvl="0" indent="0" marL="0">
+                        <a:buNone/>
+                      </a:pPr>
+                      <a:r>
+                        <a:rPr/>
+                        <a:t>323.46</a:t>
+                      </a:r>
+                    </a:p>
+                  </a:txBody>
+                </a:tc>
+                <a:tc>
+                  <a:txBody>
+                    <a:bodyPr/>
+                    <a:lstStyle/>
+                    <a:p>
+                      <a:pPr lvl="0" indent="0" marL="0">
+                        <a:buNone/>
+                      </a:pPr>
+                      <a:r>
+                        <a:rPr/>
+                        <a:t>balsam fir</a:t>
+                      </a:r>
+                    </a:p>
+                  </a:txBody>
+                </a:tc>
+              </a:tr>
+              <a:tr h="0">
+                <a:tc>
+                  <a:txBody>
+                    <a:bodyPr/>
+                    <a:lstStyle/>
+                    <a:p>
+                      <a:pPr lvl="0" indent="0" marL="0">
+                        <a:buNone/>
+                      </a:pPr>
+                      <a:r>
+                        <a:rPr/>
+                        <a:t>2</a:t>
+                      </a:r>
+                    </a:p>
+                  </a:txBody>
+                </a:tc>
+                <a:tc>
+                  <a:txBody>
+                    <a:bodyPr/>
+                    <a:lstStyle/>
+                    <a:p>
+                      <a:pPr lvl="0" indent="0" marL="0">
+                        <a:buNone/>
+                      </a:pPr>
+                      <a:r>
+                        <a:rPr/>
+                        <a:t>12</a:t>
+                      </a:r>
+                    </a:p>
+                  </a:txBody>
+                </a:tc>
+                <a:tc>
+                  <a:txBody>
+                    <a:bodyPr/>
+                    <a:lstStyle/>
+                    <a:p>
+                      <a:pPr lvl="0" indent="0" marL="0">
+                        <a:buNone/>
+                      </a:pPr>
+                      <a:r>
+                        <a:rPr/>
+                        <a:t>9.7</a:t>
+                      </a:r>
+                    </a:p>
+                  </a:txBody>
+                </a:tc>
+                <a:tc>
+                  <a:txBody>
+                    <a:bodyPr/>
+                    <a:lstStyle/>
+                    <a:p>
+                      <a:pPr lvl="0" indent="0" marL="0">
+                        <a:buNone/>
+                      </a:pPr>
+                      <a:r>
+                        <a:rPr/>
+                        <a:t>56.7</a:t>
+                      </a:r>
+                    </a:p>
+                  </a:txBody>
+                </a:tc>
+                <a:tc>
+                  <a:txBody>
+                    <a:bodyPr/>
+                    <a:lstStyle/>
+                    <a:p>
+                      <a:pPr lvl="0" indent="0" marL="0">
+                        <a:buNone/>
+                      </a:pPr>
+                      <a:r>
+                        <a:rPr/>
+                        <a:t>342.47</a:t>
+                      </a:r>
+                    </a:p>
+                  </a:txBody>
+                </a:tc>
+                <a:tc>
+                  <a:txBody>
+                    <a:bodyPr/>
+                    <a:lstStyle/>
+                    <a:p>
+                      <a:pPr lvl="0" indent="0" marL="0">
+                        <a:buNone/>
+                      </a:pPr>
+                      <a:r>
+                        <a:rPr/>
+                        <a:t>balsam fir</a:t>
+                      </a:r>
+                    </a:p>
+                  </a:txBody>
+                </a:tc>
+              </a:tr>
+              <a:tr h="0">
+                <a:tc>
+                  <a:txBody>
+                    <a:bodyPr/>
+                    <a:lstStyle/>
+                    <a:p>
+                      <a:pPr lvl="0" indent="0" marL="0">
+                        <a:buNone/>
+                      </a:pPr>
+                      <a:r>
+                        <a:rPr/>
+                        <a:t>3</a:t>
+                      </a:r>
+                    </a:p>
+                  </a:txBody>
+                </a:tc>
+                <a:tc>
+                  <a:txBody>
+                    <a:bodyPr/>
+                    <a:lstStyle/>
+                    <a:p>
+                      <a:pPr lvl="0" indent="0" marL="0">
+                        <a:buNone/>
+                      </a:pPr>
+                      <a:r>
+                        <a:rPr/>
+                        <a:t>12</a:t>
+                      </a:r>
+                    </a:p>
+                  </a:txBody>
+                </a:tc>
+                <a:tc>
+                  <a:txBody>
+                    <a:bodyPr/>
+                    <a:lstStyle/>
+                    <a:p>
+                      <a:pPr lvl="0" indent="0" marL="0">
+                        <a:buNone/>
+                      </a:pPr>
+                      <a:r>
+                        <a:rPr/>
+                        <a:t>11.4</a:t>
+                      </a:r>
+                    </a:p>
+                  </a:txBody>
+                </a:tc>
+                <a:tc>
+                  <a:txBody>
+                    <a:bodyPr/>
+                    <a:lstStyle/>
+                    <a:p>
+                      <a:pPr lvl="0" indent="0" marL="0">
+                        <a:buNone/>
+                      </a:pPr>
+                      <a:r>
+                        <a:rPr/>
+                        <a:t>66.1</a:t>
+                      </a:r>
+                    </a:p>
+                  </a:txBody>
+                </a:tc>
+                <a:tc>
+                  <a:txBody>
+                    <a:bodyPr/>
+                    <a:lstStyle/>
+                    <a:p>
+                      <a:pPr lvl="0" indent="0" marL="0">
+                        <a:buNone/>
+                      </a:pPr>
+                      <a:r>
+                        <a:rPr/>
+                        <a:t>499.35</a:t>
+                      </a:r>
+                    </a:p>
+                  </a:txBody>
+                </a:tc>
+                <a:tc>
+                  <a:txBody>
+                    <a:bodyPr/>
+                    <a:lstStyle/>
+                    <a:p>
+                      <a:pPr lvl="0" indent="0" marL="0">
+                        <a:buNone/>
+                      </a:pPr>
+                      <a:r>
+                        <a:rPr/>
+                        <a:t>balsam fir</a:t>
+                      </a:r>
+                    </a:p>
+                  </a:txBody>
+                </a:tc>
+              </a:tr>
+              <a:tr h="0">
+                <a:tc>
+                  <a:txBody>
+                    <a:bodyPr/>
+                    <a:lstStyle/>
+                    <a:p>
+                      <a:pPr lvl="0" indent="0" marL="0">
+                        <a:buNone/>
+                      </a:pPr>
+                      <a:r>
+                        <a:rPr/>
+                        <a:t>4</a:t>
+                      </a:r>
+                    </a:p>
+                  </a:txBody>
+                </a:tc>
+                <a:tc>
+                  <a:txBody>
+                    <a:bodyPr/>
+                    <a:lstStyle/>
+                    <a:p>
+                      <a:pPr lvl="0" indent="0" marL="0">
+                        <a:buNone/>
+                      </a:pPr>
+                      <a:r>
+                        <a:rPr/>
+                        <a:t>12</a:t>
+                      </a:r>
+                    </a:p>
+                  </a:txBody>
+                </a:tc>
+                <a:tc>
+                  <a:txBody>
+                    <a:bodyPr/>
+                    <a:lstStyle/>
+                    <a:p>
+                      <a:pPr lvl="0" indent="0" marL="0">
+                        <a:buNone/>
+                      </a:pPr>
+                      <a:r>
+                        <a:rPr/>
+                        <a:t>6.4</a:t>
+                      </a:r>
+                    </a:p>
+                  </a:txBody>
+                </a:tc>
+                <a:tc>
+                  <a:txBody>
+                    <a:bodyPr/>
+                    <a:lstStyle/>
+                    <a:p>
+                      <a:pPr lvl="0" indent="0" marL="0">
+                        <a:buNone/>
+                      </a:pPr>
+                      <a:r>
+                        <a:rPr/>
+                        <a:t>51.8</a:t>
+                      </a:r>
+                    </a:p>
+                  </a:txBody>
+                </a:tc>
+                <a:tc>
+                  <a:txBody>
+                    <a:bodyPr/>
+                    <a:lstStyle/>
+                    <a:p>
+                      <a:pPr lvl="0" indent="0" marL="0">
+                        <a:buNone/>
+                      </a:pPr>
+                      <a:r>
+                        <a:rPr/>
+                        <a:t>113.92</a:t>
+                      </a:r>
+                    </a:p>
+                  </a:txBody>
+                </a:tc>
+                <a:tc>
+                  <a:txBody>
+                    <a:bodyPr/>
+                    <a:lstStyle/>
+                    <a:p>
+                      <a:pPr lvl="0" indent="0" marL="0">
+                        <a:buNone/>
+                      </a:pPr>
+                      <a:r>
+                        <a:rPr/>
+                        <a:t>balsam fir</a:t>
+                      </a:r>
+                    </a:p>
+                  </a:txBody>
+                </a:tc>
+              </a:tr>
+            </a:tbl>
+          </a:graphicData>
+        </a:graphic>
+      </p:graphicFrame>
     </p:spTree>
   </p:cSld>
 </p:sld>
@@ -6547,6 +6547,2262 @@
 </file>
 
 <file path=ppt/slides/slide20.xml><?xml version="1.0" encoding="utf-8"?>
+<p:sld xmlns:a="http://schemas.openxmlformats.org/drawingml/2006/main" xmlns:r="http://schemas.openxmlformats.org/officeDocument/2006/relationships" xmlns:p="http://schemas.openxmlformats.org/presentationml/2006/main">
+  <p:cSld>
+    <p:spTree>
+      <p:nvGrpSpPr>
+        <p:cNvPr id="1" name=""/>
+        <p:cNvGrpSpPr/>
+        <p:nvPr/>
+      </p:nvGrpSpPr>
+      <p:grpSpPr>
+        <a:xfrm>
+          <a:off x="0" y="0"/>
+          <a:ext cx="0" cy="0"/>
+          <a:chOff x="0" y="0"/>
+          <a:chExt cx="0" cy="0"/>
+        </a:xfrm>
+      </p:grpSpPr>
+      <p:sp>
+        <p:nvSpPr>
+          <p:cNvPr id="2" name="Title 1"/>
+          <p:cNvSpPr>
+            <a:spLocks noGrp="1"/>
+          </p:cNvSpPr>
+          <p:nvPr>
+            <p:ph type="title"/>
+          </p:nvPr>
+        </p:nvSpPr>
+        <p:spPr/>
+        <p:txBody>
+          <a:bodyPr/>
+          <a:lstStyle/>
+          <a:p>
+            <a:pPr lvl="0" indent="0" marL="0">
+              <a:buNone/>
+            </a:pPr>
+            <a:r>
+              <a:rPr/>
+              <a:t>Filtered data (minimum 100 data points)</a:t>
+            </a:r>
+          </a:p>
+        </p:txBody>
+      </p:sp>
+      <p:graphicFrame>
+        <p:nvGraphicFramePr>
+          <p:cNvPr id="6" name="Content Placeholder 5"/>
+          <p:cNvGraphicFramePr>
+            <a:graphicFrameLocks noGrp="1"/>
+          </p:cNvGraphicFramePr>
+          <p:nvPr>
+            <p:ph idx="1"/>
+          </p:nvPr>
+        </p:nvGraphicFramePr>
+        <p:xfrm>
+          <a:off x="457200" y="1193800"/>
+          <a:ext cx="8229600" cy="3390900"/>
+        </p:xfrm>
+        <a:graphic>
+          <a:graphicData uri="http://schemas.openxmlformats.org/drawingml/2006/table">
+            <a:tbl>
+              <a:tblPr firstRow="1" bandRow="1">
+                <a:tableStyleId>{5C22544A-7EE6-4342-B048-85BDC9FD1C3A}</a:tableStyleId>
+              </a:tblPr>
+              <a:tblGrid>
+                <a:gridCol w="1371600"/>
+                <a:gridCol w="1371600"/>
+                <a:gridCol w="1371600"/>
+                <a:gridCol w="1371600"/>
+                <a:gridCol w="1371600"/>
+                <a:gridCol w="1371600"/>
+              </a:tblGrid>
+              <a:tr h="0">
+                <a:tc>
+                  <a:txBody>
+                    <a:bodyPr/>
+                    <a:lstStyle/>
+                    <a:p>
+                      <a:endParaRPr/>
+                    </a:p>
+                  </a:txBody>
+                  <a:tcPr/>
+                </a:tc>
+                <a:tc>
+                  <a:txBody>
+                    <a:bodyPr/>
+                    <a:lstStyle/>
+                    <a:p>
+                      <a:pPr lvl="0" indent="0" marL="0">
+                        <a:buNone/>
+                      </a:pPr>
+                      <a:r>
+                        <a:rPr/>
+                        <a:t>SPCD</a:t>
+                      </a:r>
+                    </a:p>
+                  </a:txBody>
+                  <a:tcPr/>
+                </a:tc>
+                <a:tc>
+                  <a:txBody>
+                    <a:bodyPr/>
+                    <a:lstStyle/>
+                    <a:p>
+                      <a:pPr lvl="0" indent="0" marL="0">
+                        <a:buNone/>
+                      </a:pPr>
+                      <a:r>
+                        <a:rPr/>
+                        <a:t>DO_BH</a:t>
+                      </a:r>
+                    </a:p>
+                  </a:txBody>
+                  <a:tcPr/>
+                </a:tc>
+                <a:tc>
+                  <a:txBody>
+                    <a:bodyPr/>
+                    <a:lstStyle/>
+                    <a:p>
+                      <a:pPr lvl="0" indent="0" marL="0">
+                        <a:buNone/>
+                      </a:pPr>
+                      <a:r>
+                        <a:rPr/>
+                        <a:t>HT_TOT</a:t>
+                      </a:r>
+                    </a:p>
+                  </a:txBody>
+                  <a:tcPr/>
+                </a:tc>
+                <a:tc>
+                  <a:txBody>
+                    <a:bodyPr/>
+                    <a:lstStyle/>
+                    <a:p>
+                      <a:pPr lvl="0" indent="0" marL="0">
+                        <a:buNone/>
+                      </a:pPr>
+                      <a:r>
+                        <a:rPr/>
+                        <a:t>TT_DW_CRM</a:t>
+                      </a:r>
+                    </a:p>
+                  </a:txBody>
+                  <a:tcPr/>
+                </a:tc>
+                <a:tc>
+                  <a:txBody>
+                    <a:bodyPr/>
+                    <a:lstStyle/>
+                    <a:p>
+                      <a:pPr lvl="0" indent="0" marL="0">
+                        <a:buNone/>
+                      </a:pPr>
+                      <a:r>
+                        <a:rPr/>
+                        <a:t>COMMON_NAME</a:t>
+                      </a:r>
+                    </a:p>
+                  </a:txBody>
+                  <a:tcPr/>
+                </a:tc>
+              </a:tr>
+              <a:tr h="0">
+                <a:tc>
+                  <a:txBody>
+                    <a:bodyPr/>
+                    <a:lstStyle/>
+                    <a:p>
+                      <a:pPr lvl="0" indent="0" marL="0">
+                        <a:buNone/>
+                      </a:pPr>
+                      <a:r>
+                        <a:rPr/>
+                        <a:t>0</a:t>
+                      </a:r>
+                    </a:p>
+                  </a:txBody>
+                </a:tc>
+                <a:tc>
+                  <a:txBody>
+                    <a:bodyPr/>
+                    <a:lstStyle/>
+                    <a:p>
+                      <a:pPr lvl="0" indent="0" marL="0">
+                        <a:buNone/>
+                      </a:pPr>
+                      <a:r>
+                        <a:rPr/>
+                        <a:t>12</a:t>
+                      </a:r>
+                    </a:p>
+                  </a:txBody>
+                </a:tc>
+                <a:tc>
+                  <a:txBody>
+                    <a:bodyPr/>
+                    <a:lstStyle/>
+                    <a:p>
+                      <a:pPr lvl="0" indent="0" marL="0">
+                        <a:buNone/>
+                      </a:pPr>
+                      <a:r>
+                        <a:rPr/>
+                        <a:t>7.5</a:t>
+                      </a:r>
+                    </a:p>
+                  </a:txBody>
+                </a:tc>
+                <a:tc>
+                  <a:txBody>
+                    <a:bodyPr/>
+                    <a:lstStyle/>
+                    <a:p>
+                      <a:pPr lvl="0" indent="0" marL="0">
+                        <a:buNone/>
+                      </a:pPr>
+                      <a:r>
+                        <a:rPr/>
+                        <a:t>45.2</a:t>
+                      </a:r>
+                    </a:p>
+                  </a:txBody>
+                </a:tc>
+                <a:tc>
+                  <a:txBody>
+                    <a:bodyPr/>
+                    <a:lstStyle/>
+                    <a:p>
+                      <a:pPr lvl="0" indent="0" marL="0">
+                        <a:buNone/>
+                      </a:pPr>
+                      <a:r>
+                        <a:rPr/>
+                        <a:t>178.86</a:t>
+                      </a:r>
+                    </a:p>
+                  </a:txBody>
+                </a:tc>
+                <a:tc>
+                  <a:txBody>
+                    <a:bodyPr/>
+                    <a:lstStyle/>
+                    <a:p>
+                      <a:pPr lvl="0" indent="0" marL="0">
+                        <a:buNone/>
+                      </a:pPr>
+                      <a:r>
+                        <a:rPr/>
+                        <a:t>balsam fir</a:t>
+                      </a:r>
+                    </a:p>
+                  </a:txBody>
+                </a:tc>
+              </a:tr>
+              <a:tr h="0">
+                <a:tc>
+                  <a:txBody>
+                    <a:bodyPr/>
+                    <a:lstStyle/>
+                    <a:p>
+                      <a:pPr lvl="0" indent="0" marL="0">
+                        <a:buNone/>
+                      </a:pPr>
+                      <a:r>
+                        <a:rPr/>
+                        <a:t>1</a:t>
+                      </a:r>
+                    </a:p>
+                  </a:txBody>
+                </a:tc>
+                <a:tc>
+                  <a:txBody>
+                    <a:bodyPr/>
+                    <a:lstStyle/>
+                    <a:p>
+                      <a:pPr lvl="0" indent="0" marL="0">
+                        <a:buNone/>
+                      </a:pPr>
+                      <a:r>
+                        <a:rPr/>
+                        <a:t>12</a:t>
+                      </a:r>
+                    </a:p>
+                  </a:txBody>
+                </a:tc>
+                <a:tc>
+                  <a:txBody>
+                    <a:bodyPr/>
+                    <a:lstStyle/>
+                    <a:p>
+                      <a:pPr lvl="0" indent="0" marL="0">
+                        <a:buNone/>
+                      </a:pPr>
+                      <a:r>
+                        <a:rPr/>
+                        <a:t>9.3</a:t>
+                      </a:r>
+                    </a:p>
+                  </a:txBody>
+                </a:tc>
+                <a:tc>
+                  <a:txBody>
+                    <a:bodyPr/>
+                    <a:lstStyle/>
+                    <a:p>
+                      <a:pPr lvl="0" indent="0" marL="0">
+                        <a:buNone/>
+                      </a:pPr>
+                      <a:r>
+                        <a:rPr/>
+                        <a:t>62.7</a:t>
+                      </a:r>
+                    </a:p>
+                  </a:txBody>
+                </a:tc>
+                <a:tc>
+                  <a:txBody>
+                    <a:bodyPr/>
+                    <a:lstStyle/>
+                    <a:p>
+                      <a:pPr lvl="0" indent="0" marL="0">
+                        <a:buNone/>
+                      </a:pPr>
+                      <a:r>
+                        <a:rPr/>
+                        <a:t>323.46</a:t>
+                      </a:r>
+                    </a:p>
+                  </a:txBody>
+                </a:tc>
+                <a:tc>
+                  <a:txBody>
+                    <a:bodyPr/>
+                    <a:lstStyle/>
+                    <a:p>
+                      <a:pPr lvl="0" indent="0" marL="0">
+                        <a:buNone/>
+                      </a:pPr>
+                      <a:r>
+                        <a:rPr/>
+                        <a:t>balsam fir</a:t>
+                      </a:r>
+                    </a:p>
+                  </a:txBody>
+                </a:tc>
+              </a:tr>
+              <a:tr h="0">
+                <a:tc>
+                  <a:txBody>
+                    <a:bodyPr/>
+                    <a:lstStyle/>
+                    <a:p>
+                      <a:pPr lvl="0" indent="0" marL="0">
+                        <a:buNone/>
+                      </a:pPr>
+                      <a:r>
+                        <a:rPr/>
+                        <a:t>2</a:t>
+                      </a:r>
+                    </a:p>
+                  </a:txBody>
+                </a:tc>
+                <a:tc>
+                  <a:txBody>
+                    <a:bodyPr/>
+                    <a:lstStyle/>
+                    <a:p>
+                      <a:pPr lvl="0" indent="0" marL="0">
+                        <a:buNone/>
+                      </a:pPr>
+                      <a:r>
+                        <a:rPr/>
+                        <a:t>12</a:t>
+                      </a:r>
+                    </a:p>
+                  </a:txBody>
+                </a:tc>
+                <a:tc>
+                  <a:txBody>
+                    <a:bodyPr/>
+                    <a:lstStyle/>
+                    <a:p>
+                      <a:pPr lvl="0" indent="0" marL="0">
+                        <a:buNone/>
+                      </a:pPr>
+                      <a:r>
+                        <a:rPr/>
+                        <a:t>9.7</a:t>
+                      </a:r>
+                    </a:p>
+                  </a:txBody>
+                </a:tc>
+                <a:tc>
+                  <a:txBody>
+                    <a:bodyPr/>
+                    <a:lstStyle/>
+                    <a:p>
+                      <a:pPr lvl="0" indent="0" marL="0">
+                        <a:buNone/>
+                      </a:pPr>
+                      <a:r>
+                        <a:rPr/>
+                        <a:t>56.7</a:t>
+                      </a:r>
+                    </a:p>
+                  </a:txBody>
+                </a:tc>
+                <a:tc>
+                  <a:txBody>
+                    <a:bodyPr/>
+                    <a:lstStyle/>
+                    <a:p>
+                      <a:pPr lvl="0" indent="0" marL="0">
+                        <a:buNone/>
+                      </a:pPr>
+                      <a:r>
+                        <a:rPr/>
+                        <a:t>342.47</a:t>
+                      </a:r>
+                    </a:p>
+                  </a:txBody>
+                </a:tc>
+                <a:tc>
+                  <a:txBody>
+                    <a:bodyPr/>
+                    <a:lstStyle/>
+                    <a:p>
+                      <a:pPr lvl="0" indent="0" marL="0">
+                        <a:buNone/>
+                      </a:pPr>
+                      <a:r>
+                        <a:rPr/>
+                        <a:t>balsam fir</a:t>
+                      </a:r>
+                    </a:p>
+                  </a:txBody>
+                </a:tc>
+              </a:tr>
+              <a:tr h="0">
+                <a:tc>
+                  <a:txBody>
+                    <a:bodyPr/>
+                    <a:lstStyle/>
+                    <a:p>
+                      <a:pPr lvl="0" indent="0" marL="0">
+                        <a:buNone/>
+                      </a:pPr>
+                      <a:r>
+                        <a:rPr/>
+                        <a:t>3</a:t>
+                      </a:r>
+                    </a:p>
+                  </a:txBody>
+                </a:tc>
+                <a:tc>
+                  <a:txBody>
+                    <a:bodyPr/>
+                    <a:lstStyle/>
+                    <a:p>
+                      <a:pPr lvl="0" indent="0" marL="0">
+                        <a:buNone/>
+                      </a:pPr>
+                      <a:r>
+                        <a:rPr/>
+                        <a:t>12</a:t>
+                      </a:r>
+                    </a:p>
+                  </a:txBody>
+                </a:tc>
+                <a:tc>
+                  <a:txBody>
+                    <a:bodyPr/>
+                    <a:lstStyle/>
+                    <a:p>
+                      <a:pPr lvl="0" indent="0" marL="0">
+                        <a:buNone/>
+                      </a:pPr>
+                      <a:r>
+                        <a:rPr/>
+                        <a:t>11.4</a:t>
+                      </a:r>
+                    </a:p>
+                  </a:txBody>
+                </a:tc>
+                <a:tc>
+                  <a:txBody>
+                    <a:bodyPr/>
+                    <a:lstStyle/>
+                    <a:p>
+                      <a:pPr lvl="0" indent="0" marL="0">
+                        <a:buNone/>
+                      </a:pPr>
+                      <a:r>
+                        <a:rPr/>
+                        <a:t>66.1</a:t>
+                      </a:r>
+                    </a:p>
+                  </a:txBody>
+                </a:tc>
+                <a:tc>
+                  <a:txBody>
+                    <a:bodyPr/>
+                    <a:lstStyle/>
+                    <a:p>
+                      <a:pPr lvl="0" indent="0" marL="0">
+                        <a:buNone/>
+                      </a:pPr>
+                      <a:r>
+                        <a:rPr/>
+                        <a:t>499.35</a:t>
+                      </a:r>
+                    </a:p>
+                  </a:txBody>
+                </a:tc>
+                <a:tc>
+                  <a:txBody>
+                    <a:bodyPr/>
+                    <a:lstStyle/>
+                    <a:p>
+                      <a:pPr lvl="0" indent="0" marL="0">
+                        <a:buNone/>
+                      </a:pPr>
+                      <a:r>
+                        <a:rPr/>
+                        <a:t>balsam fir</a:t>
+                      </a:r>
+                    </a:p>
+                  </a:txBody>
+                </a:tc>
+              </a:tr>
+              <a:tr h="0">
+                <a:tc>
+                  <a:txBody>
+                    <a:bodyPr/>
+                    <a:lstStyle/>
+                    <a:p>
+                      <a:pPr lvl="0" indent="0" marL="0">
+                        <a:buNone/>
+                      </a:pPr>
+                      <a:r>
+                        <a:rPr/>
+                        <a:t>4</a:t>
+                      </a:r>
+                    </a:p>
+                  </a:txBody>
+                </a:tc>
+                <a:tc>
+                  <a:txBody>
+                    <a:bodyPr/>
+                    <a:lstStyle/>
+                    <a:p>
+                      <a:pPr lvl="0" indent="0" marL="0">
+                        <a:buNone/>
+                      </a:pPr>
+                      <a:r>
+                        <a:rPr/>
+                        <a:t>12</a:t>
+                      </a:r>
+                    </a:p>
+                  </a:txBody>
+                </a:tc>
+                <a:tc>
+                  <a:txBody>
+                    <a:bodyPr/>
+                    <a:lstStyle/>
+                    <a:p>
+                      <a:pPr lvl="0" indent="0" marL="0">
+                        <a:buNone/>
+                      </a:pPr>
+                      <a:r>
+                        <a:rPr/>
+                        <a:t>6.4</a:t>
+                      </a:r>
+                    </a:p>
+                  </a:txBody>
+                </a:tc>
+                <a:tc>
+                  <a:txBody>
+                    <a:bodyPr/>
+                    <a:lstStyle/>
+                    <a:p>
+                      <a:pPr lvl="0" indent="0" marL="0">
+                        <a:buNone/>
+                      </a:pPr>
+                      <a:r>
+                        <a:rPr/>
+                        <a:t>51.8</a:t>
+                      </a:r>
+                    </a:p>
+                  </a:txBody>
+                </a:tc>
+                <a:tc>
+                  <a:txBody>
+                    <a:bodyPr/>
+                    <a:lstStyle/>
+                    <a:p>
+                      <a:pPr lvl="0" indent="0" marL="0">
+                        <a:buNone/>
+                      </a:pPr>
+                      <a:r>
+                        <a:rPr/>
+                        <a:t>113.92</a:t>
+                      </a:r>
+                    </a:p>
+                  </a:txBody>
+                </a:tc>
+                <a:tc>
+                  <a:txBody>
+                    <a:bodyPr/>
+                    <a:lstStyle/>
+                    <a:p>
+                      <a:pPr lvl="0" indent="0" marL="0">
+                        <a:buNone/>
+                      </a:pPr>
+                      <a:r>
+                        <a:rPr/>
+                        <a:t>balsam fir</a:t>
+                      </a:r>
+                    </a:p>
+                  </a:txBody>
+                </a:tc>
+              </a:tr>
+              <a:tr h="0">
+                <a:tc>
+                  <a:txBody>
+                    <a:bodyPr/>
+                    <a:lstStyle/>
+                    <a:p>
+                      <a:pPr lvl="0" indent="0" marL="0">
+                        <a:buNone/>
+                      </a:pPr>
+                      <a:r>
+                        <a:rPr/>
+                        <a:t>...</a:t>
+                      </a:r>
+                    </a:p>
+                  </a:txBody>
+                </a:tc>
+                <a:tc>
+                  <a:txBody>
+                    <a:bodyPr/>
+                    <a:lstStyle/>
+                    <a:p>
+                      <a:pPr lvl="0" indent="0" marL="0">
+                        <a:buNone/>
+                      </a:pPr>
+                      <a:r>
+                        <a:rPr/>
+                        <a:t>...</a:t>
+                      </a:r>
+                    </a:p>
+                  </a:txBody>
+                </a:tc>
+                <a:tc>
+                  <a:txBody>
+                    <a:bodyPr/>
+                    <a:lstStyle/>
+                    <a:p>
+                      <a:pPr lvl="0" indent="0" marL="0">
+                        <a:buNone/>
+                      </a:pPr>
+                      <a:r>
+                        <a:rPr/>
+                        <a:t>...</a:t>
+                      </a:r>
+                    </a:p>
+                  </a:txBody>
+                </a:tc>
+                <a:tc>
+                  <a:txBody>
+                    <a:bodyPr/>
+                    <a:lstStyle/>
+                    <a:p>
+                      <a:pPr lvl="0" indent="0" marL="0">
+                        <a:buNone/>
+                      </a:pPr>
+                      <a:r>
+                        <a:rPr/>
+                        <a:t>...</a:t>
+                      </a:r>
+                    </a:p>
+                  </a:txBody>
+                </a:tc>
+                <a:tc>
+                  <a:txBody>
+                    <a:bodyPr/>
+                    <a:lstStyle/>
+                    <a:p>
+                      <a:pPr lvl="0" indent="0" marL="0">
+                        <a:buNone/>
+                      </a:pPr>
+                      <a:r>
+                        <a:rPr/>
+                        <a:t>...</a:t>
+                      </a:r>
+                    </a:p>
+                  </a:txBody>
+                </a:tc>
+                <a:tc>
+                  <a:txBody>
+                    <a:bodyPr/>
+                    <a:lstStyle/>
+                    <a:p>
+                      <a:pPr lvl="0" indent="0" marL="0">
+                        <a:buNone/>
+                      </a:pPr>
+                      <a:r>
+                        <a:rPr/>
+                        <a:t>...</a:t>
+                      </a:r>
+                    </a:p>
+                  </a:txBody>
+                </a:tc>
+              </a:tr>
+              <a:tr h="0">
+                <a:tc>
+                  <a:txBody>
+                    <a:bodyPr/>
+                    <a:lstStyle/>
+                    <a:p>
+                      <a:pPr lvl="0" indent="0" marL="0">
+                        <a:buNone/>
+                      </a:pPr>
+                      <a:r>
+                        <a:rPr/>
+                        <a:t>137035</a:t>
+                      </a:r>
+                    </a:p>
+                  </a:txBody>
+                </a:tc>
+                <a:tc>
+                  <a:txBody>
+                    <a:bodyPr/>
+                    <a:lstStyle/>
+                    <a:p>
+                      <a:pPr lvl="0" indent="0" marL="0">
+                        <a:buNone/>
+                      </a:pPr>
+                      <a:r>
+                        <a:rPr/>
+                        <a:t>691</a:t>
+                      </a:r>
+                    </a:p>
+                  </a:txBody>
+                </a:tc>
+                <a:tc>
+                  <a:txBody>
+                    <a:bodyPr/>
+                    <a:lstStyle/>
+                    <a:p>
+                      <a:pPr lvl="0" indent="0" marL="0">
+                        <a:buNone/>
+                      </a:pPr>
+                      <a:r>
+                        <a:rPr/>
+                        <a:t>3.7</a:t>
+                      </a:r>
+                    </a:p>
+                  </a:txBody>
+                </a:tc>
+                <a:tc>
+                  <a:txBody>
+                    <a:bodyPr/>
+                    <a:lstStyle/>
+                    <a:p>
+                      <a:pPr lvl="0" indent="0" marL="0">
+                        <a:buNone/>
+                      </a:pPr>
+                      <a:r>
+                        <a:rPr/>
+                        <a:t>25.4</a:t>
+                      </a:r>
+                    </a:p>
+                  </a:txBody>
+                </a:tc>
+                <a:tc>
+                  <a:txBody>
+                    <a:bodyPr/>
+                    <a:lstStyle/>
+                    <a:p>
+                      <a:pPr lvl="0" indent="0" marL="0">
+                        <a:buNone/>
+                      </a:pPr>
+                      <a:r>
+                        <a:rPr/>
+                        <a:t>40.76</a:t>
+                      </a:r>
+                    </a:p>
+                  </a:txBody>
+                </a:tc>
+                <a:tc>
+                  <a:txBody>
+                    <a:bodyPr/>
+                    <a:lstStyle/>
+                    <a:p>
+                      <a:pPr lvl="0" indent="0" marL="0">
+                        <a:buNone/>
+                      </a:pPr>
+                      <a:r>
+                        <a:rPr/>
+                        <a:t>water tupelo</a:t>
+                      </a:r>
+                    </a:p>
+                  </a:txBody>
+                </a:tc>
+              </a:tr>
+              <a:tr h="0">
+                <a:tc>
+                  <a:txBody>
+                    <a:bodyPr/>
+                    <a:lstStyle/>
+                    <a:p>
+                      <a:pPr lvl="0" indent="0" marL="0">
+                        <a:buNone/>
+                      </a:pPr>
+                      <a:r>
+                        <a:rPr/>
+                        <a:t>137036</a:t>
+                      </a:r>
+                    </a:p>
+                  </a:txBody>
+                </a:tc>
+                <a:tc>
+                  <a:txBody>
+                    <a:bodyPr/>
+                    <a:lstStyle/>
+                    <a:p>
+                      <a:pPr lvl="0" indent="0" marL="0">
+                        <a:buNone/>
+                      </a:pPr>
+                      <a:r>
+                        <a:rPr/>
+                        <a:t>691</a:t>
+                      </a:r>
+                    </a:p>
+                  </a:txBody>
+                </a:tc>
+                <a:tc>
+                  <a:txBody>
+                    <a:bodyPr/>
+                    <a:lstStyle/>
+                    <a:p>
+                      <a:pPr lvl="0" indent="0" marL="0">
+                        <a:buNone/>
+                      </a:pPr>
+                      <a:r>
+                        <a:rPr/>
+                        <a:t>3.2</a:t>
+                      </a:r>
+                    </a:p>
+                  </a:txBody>
+                </a:tc>
+                <a:tc>
+                  <a:txBody>
+                    <a:bodyPr/>
+                    <a:lstStyle/>
+                    <a:p>
+                      <a:pPr lvl="0" indent="0" marL="0">
+                        <a:buNone/>
+                      </a:pPr>
+                      <a:r>
+                        <a:rPr/>
+                        <a:t>28.8</a:t>
+                      </a:r>
+                    </a:p>
+                  </a:txBody>
+                </a:tc>
+                <a:tc>
+                  <a:txBody>
+                    <a:bodyPr/>
+                    <a:lstStyle/>
+                    <a:p>
+                      <a:pPr lvl="0" indent="0" marL="0">
+                        <a:buNone/>
+                      </a:pPr>
+                      <a:r>
+                        <a:rPr/>
+                        <a:t>28.44</a:t>
+                      </a:r>
+                    </a:p>
+                  </a:txBody>
+                </a:tc>
+                <a:tc>
+                  <a:txBody>
+                    <a:bodyPr/>
+                    <a:lstStyle/>
+                    <a:p>
+                      <a:pPr lvl="0" indent="0" marL="0">
+                        <a:buNone/>
+                      </a:pPr>
+                      <a:r>
+                        <a:rPr/>
+                        <a:t>water tupelo</a:t>
+                      </a:r>
+                    </a:p>
+                  </a:txBody>
+                </a:tc>
+              </a:tr>
+              <a:tr h="0">
+                <a:tc>
+                  <a:txBody>
+                    <a:bodyPr/>
+                    <a:lstStyle/>
+                    <a:p>
+                      <a:pPr lvl="0" indent="0" marL="0">
+                        <a:buNone/>
+                      </a:pPr>
+                      <a:r>
+                        <a:rPr/>
+                        <a:t>137037</a:t>
+                      </a:r>
+                    </a:p>
+                  </a:txBody>
+                </a:tc>
+                <a:tc>
+                  <a:txBody>
+                    <a:bodyPr/>
+                    <a:lstStyle/>
+                    <a:p>
+                      <a:pPr lvl="0" indent="0" marL="0">
+                        <a:buNone/>
+                      </a:pPr>
+                      <a:r>
+                        <a:rPr/>
+                        <a:t>691</a:t>
+                      </a:r>
+                    </a:p>
+                  </a:txBody>
+                </a:tc>
+                <a:tc>
+                  <a:txBody>
+                    <a:bodyPr/>
+                    <a:lstStyle/>
+                    <a:p>
+                      <a:pPr lvl="0" indent="0" marL="0">
+                        <a:buNone/>
+                      </a:pPr>
+                      <a:r>
+                        <a:rPr/>
+                        <a:t>4.7</a:t>
+                      </a:r>
+                    </a:p>
+                  </a:txBody>
+                </a:tc>
+                <a:tc>
+                  <a:txBody>
+                    <a:bodyPr/>
+                    <a:lstStyle/>
+                    <a:p>
+                      <a:pPr lvl="0" indent="0" marL="0">
+                        <a:buNone/>
+                      </a:pPr>
+                      <a:r>
+                        <a:rPr/>
+                        <a:t>31.4</a:t>
+                      </a:r>
+                    </a:p>
+                  </a:txBody>
+                </a:tc>
+                <a:tc>
+                  <a:txBody>
+                    <a:bodyPr/>
+                    <a:lstStyle/>
+                    <a:p>
+                      <a:pPr lvl="0" indent="0" marL="0">
+                        <a:buNone/>
+                      </a:pPr>
+                      <a:r>
+                        <a:rPr/>
+                        <a:t>73.78</a:t>
+                      </a:r>
+                    </a:p>
+                  </a:txBody>
+                </a:tc>
+                <a:tc>
+                  <a:txBody>
+                    <a:bodyPr/>
+                    <a:lstStyle/>
+                    <a:p>
+                      <a:pPr lvl="0" indent="0" marL="0">
+                        <a:buNone/>
+                      </a:pPr>
+                      <a:r>
+                        <a:rPr/>
+                        <a:t>water tupelo</a:t>
+                      </a:r>
+                    </a:p>
+                  </a:txBody>
+                </a:tc>
+              </a:tr>
+              <a:tr h="0">
+                <a:tc>
+                  <a:txBody>
+                    <a:bodyPr/>
+                    <a:lstStyle/>
+                    <a:p>
+                      <a:pPr lvl="0" indent="0" marL="0">
+                        <a:buNone/>
+                      </a:pPr>
+                      <a:r>
+                        <a:rPr/>
+                        <a:t>137038</a:t>
+                      </a:r>
+                    </a:p>
+                  </a:txBody>
+                </a:tc>
+                <a:tc>
+                  <a:txBody>
+                    <a:bodyPr/>
+                    <a:lstStyle/>
+                    <a:p>
+                      <a:pPr lvl="0" indent="0" marL="0">
+                        <a:buNone/>
+                      </a:pPr>
+                      <a:r>
+                        <a:rPr/>
+                        <a:t>691</a:t>
+                      </a:r>
+                    </a:p>
+                  </a:txBody>
+                </a:tc>
+                <a:tc>
+                  <a:txBody>
+                    <a:bodyPr/>
+                    <a:lstStyle/>
+                    <a:p>
+                      <a:pPr lvl="0" indent="0" marL="0">
+                        <a:buNone/>
+                      </a:pPr>
+                      <a:r>
+                        <a:rPr/>
+                        <a:t>4.4</a:t>
+                      </a:r>
+                    </a:p>
+                  </a:txBody>
+                </a:tc>
+                <a:tc>
+                  <a:txBody>
+                    <a:bodyPr/>
+                    <a:lstStyle/>
+                    <a:p>
+                      <a:pPr lvl="0" indent="0" marL="0">
+                        <a:buNone/>
+                      </a:pPr>
+                      <a:r>
+                        <a:rPr/>
+                        <a:t>26.9</a:t>
+                      </a:r>
+                    </a:p>
+                  </a:txBody>
+                </a:tc>
+                <a:tc>
+                  <a:txBody>
+                    <a:bodyPr/>
+                    <a:lstStyle/>
+                    <a:p>
+                      <a:pPr lvl="0" indent="0" marL="0">
+                        <a:buNone/>
+                      </a:pPr>
+                      <a:r>
+                        <a:rPr/>
+                        <a:t>62.64</a:t>
+                      </a:r>
+                    </a:p>
+                  </a:txBody>
+                </a:tc>
+                <a:tc>
+                  <a:txBody>
+                    <a:bodyPr/>
+                    <a:lstStyle/>
+                    <a:p>
+                      <a:pPr lvl="0" indent="0" marL="0">
+                        <a:buNone/>
+                      </a:pPr>
+                      <a:r>
+                        <a:rPr/>
+                        <a:t>water tupelo</a:t>
+                      </a:r>
+                    </a:p>
+                  </a:txBody>
+                </a:tc>
+              </a:tr>
+              <a:tr h="0">
+                <a:tc>
+                  <a:txBody>
+                    <a:bodyPr/>
+                    <a:lstStyle/>
+                    <a:p>
+                      <a:pPr lvl="0" indent="0" marL="0">
+                        <a:buNone/>
+                      </a:pPr>
+                      <a:r>
+                        <a:rPr/>
+                        <a:t>137039</a:t>
+                      </a:r>
+                    </a:p>
+                  </a:txBody>
+                </a:tc>
+                <a:tc>
+                  <a:txBody>
+                    <a:bodyPr/>
+                    <a:lstStyle/>
+                    <a:p>
+                      <a:pPr lvl="0" indent="0" marL="0">
+                        <a:buNone/>
+                      </a:pPr>
+                      <a:r>
+                        <a:rPr/>
+                        <a:t>691</a:t>
+                      </a:r>
+                    </a:p>
+                  </a:txBody>
+                </a:tc>
+                <a:tc>
+                  <a:txBody>
+                    <a:bodyPr/>
+                    <a:lstStyle/>
+                    <a:p>
+                      <a:pPr lvl="0" indent="0" marL="0">
+                        <a:buNone/>
+                      </a:pPr>
+                      <a:r>
+                        <a:rPr/>
+                        <a:t>4.2</a:t>
+                      </a:r>
+                    </a:p>
+                  </a:txBody>
+                </a:tc>
+                <a:tc>
+                  <a:txBody>
+                    <a:bodyPr/>
+                    <a:lstStyle/>
+                    <a:p>
+                      <a:pPr lvl="0" indent="0" marL="0">
+                        <a:buNone/>
+                      </a:pPr>
+                      <a:r>
+                        <a:rPr/>
+                        <a:t>28.1</a:t>
+                      </a:r>
+                    </a:p>
+                  </a:txBody>
+                </a:tc>
+                <a:tc>
+                  <a:txBody>
+                    <a:bodyPr/>
+                    <a:lstStyle/>
+                    <a:p>
+                      <a:pPr lvl="0" indent="0" marL="0">
+                        <a:buNone/>
+                      </a:pPr>
+                      <a:r>
+                        <a:rPr/>
+                        <a:t>55.82</a:t>
+                      </a:r>
+                    </a:p>
+                  </a:txBody>
+                </a:tc>
+                <a:tc>
+                  <a:txBody>
+                    <a:bodyPr/>
+                    <a:lstStyle/>
+                    <a:p>
+                      <a:pPr lvl="0" indent="0" marL="0">
+                        <a:buNone/>
+                      </a:pPr>
+                      <a:r>
+                        <a:rPr/>
+                        <a:t>water tupelo</a:t>
+                      </a:r>
+                    </a:p>
+                  </a:txBody>
+                </a:tc>
+              </a:tr>
+            </a:tbl>
+          </a:graphicData>
+        </a:graphic>
+      </p:graphicFrame>
+    </p:spTree>
+  </p:cSld>
+</p:sld>
+</file>
+
+<file path=ppt/slides/slide21.xml><?xml version="1.0" encoding="utf-8"?>
+<p:sld xmlns:a="http://schemas.openxmlformats.org/drawingml/2006/main" xmlns:r="http://schemas.openxmlformats.org/officeDocument/2006/relationships" xmlns:p="http://schemas.openxmlformats.org/presentationml/2006/main">
+  <p:cSld>
+    <p:spTree>
+      <p:nvGrpSpPr>
+        <p:cNvPr id="1" name=""/>
+        <p:cNvGrpSpPr/>
+        <p:nvPr/>
+      </p:nvGrpSpPr>
+      <p:grpSpPr>
+        <a:xfrm>
+          <a:off x="0" y="0"/>
+          <a:ext cx="0" cy="0"/>
+          <a:chOff x="0" y="0"/>
+          <a:chExt cx="0" cy="0"/>
+        </a:xfrm>
+      </p:grpSpPr>
+      <p:sp>
+        <p:nvSpPr>
+          <p:cNvPr id="2" name="Title 1"/>
+          <p:cNvSpPr>
+            <a:spLocks noGrp="1"/>
+          </p:cNvSpPr>
+          <p:nvPr>
+            <p:ph type="title"/>
+          </p:nvPr>
+        </p:nvSpPr>
+        <p:spPr/>
+        <p:txBody>
+          <a:bodyPr/>
+          <a:lstStyle/>
+          <a:p>
+            <a:pPr lvl="0" indent="0" marL="0">
+              <a:buNone/>
+            </a:pPr>
+            <a:r>
+              <a:rPr/>
+              <a:t>Testing k values</a:t>
+            </a:r>
+          </a:p>
+        </p:txBody>
+      </p:sp>
+      <p:sp>
+        <p:nvSpPr>
+          <p:cNvPr id="3" name="Content Placeholder 2"/>
+          <p:cNvSpPr>
+            <a:spLocks noGrp="1"/>
+          </p:cNvSpPr>
+          <p:nvPr>
+            <p:ph idx="1"/>
+          </p:nvPr>
+        </p:nvSpPr>
+        <p:spPr/>
+        <p:txBody>
+          <a:bodyPr/>
+          <a:lstStyle/>
+          <a:p>
+            <a:pPr lvl="0" indent="0">
+              <a:buNone/>
+            </a:pPr>
+            <a:r>
+              <a:rPr>
+                <a:latin typeface="Courier"/>
+              </a:rPr>
+              <a:t>Average Root Mean Squared Log Error (RMSLE) for k = 3: 0.15806802121296354
+Average Root Mean Squared Log Error (RMSLE) for k = 4: 0.16211832525051928
+Average Root Mean Squared Log Error (RMSLE) for k = 5: 0.16800130283205583
+Average Root Mean Squared Log Error (RMSLE) for k = 6: 0.1742492363008993
+Average Root Mean Squared Log Error (RMSLE) for k = 7: 0.18028213163724163</a:t>
+            </a:r>
+          </a:p>
+        </p:txBody>
+      </p:sp>
+    </p:spTree>
+  </p:cSld>
+</p:sld>
+</file>
+
+<file path=ppt/slides/slide22.xml><?xml version="1.0" encoding="utf-8"?>
+<p:sld xmlns:a="http://schemas.openxmlformats.org/drawingml/2006/main" xmlns:r="http://schemas.openxmlformats.org/officeDocument/2006/relationships" xmlns:p="http://schemas.openxmlformats.org/presentationml/2006/main">
+  <p:cSld>
+    <p:spTree>
+      <p:nvGrpSpPr>
+        <p:cNvPr id="1" name=""/>
+        <p:cNvGrpSpPr/>
+        <p:nvPr/>
+      </p:nvGrpSpPr>
+      <p:grpSpPr>
+        <a:xfrm>
+          <a:off x="0" y="0"/>
+          <a:ext cx="0" cy="0"/>
+          <a:chOff x="0" y="0"/>
+          <a:chExt cx="0" cy="0"/>
+        </a:xfrm>
+      </p:grpSpPr>
+      <p:sp>
+        <p:nvSpPr>
+          <p:cNvPr id="2" name="Title 1"/>
+          <p:cNvSpPr>
+            <a:spLocks noGrp="1"/>
+          </p:cNvSpPr>
+          <p:nvPr>
+            <p:ph type="title"/>
+          </p:nvPr>
+        </p:nvSpPr>
+        <p:spPr/>
+        <p:txBody>
+          <a:bodyPr/>
+          <a:lstStyle/>
+          <a:p>
+            <a:pPr lvl="0" indent="0" marL="0">
+              <a:buNone/>
+            </a:pPr>
+            <a:r>
+              <a:rPr/>
+              <a:t>Adding features</a:t>
+            </a:r>
+          </a:p>
+        </p:txBody>
+      </p:sp>
+      <p:graphicFrame>
+        <p:nvGraphicFramePr>
+          <p:cNvPr id="6" name="Content Placeholder 5"/>
+          <p:cNvGraphicFramePr>
+            <a:graphicFrameLocks noGrp="1"/>
+          </p:cNvGraphicFramePr>
+          <p:nvPr>
+            <p:ph idx="1"/>
+          </p:nvPr>
+        </p:nvGraphicFramePr>
+        <p:xfrm>
+          <a:off x="457200" y="1193800"/>
+          <a:ext cx="8229600" cy="3390900"/>
+        </p:xfrm>
+        <a:graphic>
+          <a:graphicData uri="http://schemas.openxmlformats.org/drawingml/2006/table">
+            <a:tbl>
+              <a:tblPr firstRow="1" bandRow="1">
+                <a:tableStyleId>{5C22544A-7EE6-4342-B048-85BDC9FD1C3A}</a:tableStyleId>
+              </a:tblPr>
+              <a:tblGrid>
+                <a:gridCol w="914400"/>
+                <a:gridCol w="914400"/>
+                <a:gridCol w="914400"/>
+                <a:gridCol w="914400"/>
+                <a:gridCol w="914400"/>
+                <a:gridCol w="914400"/>
+                <a:gridCol w="914400"/>
+                <a:gridCol w="914400"/>
+                <a:gridCol w="914400"/>
+              </a:tblGrid>
+              <a:tr h="0">
+                <a:tc>
+                  <a:txBody>
+                    <a:bodyPr/>
+                    <a:lstStyle/>
+                    <a:p>
+                      <a:endParaRPr/>
+                    </a:p>
+                  </a:txBody>
+                  <a:tcPr/>
+                </a:tc>
+                <a:tc>
+                  <a:txBody>
+                    <a:bodyPr/>
+                    <a:lstStyle/>
+                    <a:p>
+                      <a:pPr lvl="0" indent="0" marL="0">
+                        <a:buNone/>
+                      </a:pPr>
+                      <a:r>
+                        <a:rPr/>
+                        <a:t>SPCD</a:t>
+                      </a:r>
+                    </a:p>
+                  </a:txBody>
+                  <a:tcPr/>
+                </a:tc>
+                <a:tc>
+                  <a:txBody>
+                    <a:bodyPr/>
+                    <a:lstStyle/>
+                    <a:p>
+                      <a:pPr lvl="0" indent="0" marL="0">
+                        <a:buNone/>
+                      </a:pPr>
+                      <a:r>
+                        <a:rPr/>
+                        <a:t>DO_BH</a:t>
+                      </a:r>
+                    </a:p>
+                  </a:txBody>
+                  <a:tcPr/>
+                </a:tc>
+                <a:tc>
+                  <a:txBody>
+                    <a:bodyPr/>
+                    <a:lstStyle/>
+                    <a:p>
+                      <a:pPr lvl="0" indent="0" marL="0">
+                        <a:buNone/>
+                      </a:pPr>
+                      <a:r>
+                        <a:rPr/>
+                        <a:t>HT_TOT</a:t>
+                      </a:r>
+                    </a:p>
+                  </a:txBody>
+                  <a:tcPr/>
+                </a:tc>
+                <a:tc>
+                  <a:txBody>
+                    <a:bodyPr/>
+                    <a:lstStyle/>
+                    <a:p>
+                      <a:pPr lvl="0" indent="0" marL="0">
+                        <a:buNone/>
+                      </a:pPr>
+                      <a:r>
+                        <a:rPr/>
+                        <a:t>TT_DW_CRM</a:t>
+                      </a:r>
+                    </a:p>
+                  </a:txBody>
+                  <a:tcPr/>
+                </a:tc>
+                <a:tc>
+                  <a:txBody>
+                    <a:bodyPr/>
+                    <a:lstStyle/>
+                    <a:p>
+                      <a:pPr lvl="0" indent="0" marL="0">
+                        <a:buNone/>
+                      </a:pPr>
+                      <a:r>
+                        <a:rPr/>
+                        <a:t>COMMON_NAME</a:t>
+                      </a:r>
+                    </a:p>
+                  </a:txBody>
+                  <a:tcPr/>
+                </a:tc>
+                <a:tc>
+                  <a:txBody>
+                    <a:bodyPr/>
+                    <a:lstStyle/>
+                    <a:p>
+                      <a:pPr lvl="0" indent="0" marL="0">
+                        <a:buNone/>
+                      </a:pPr>
+                      <a:r>
+                        <a:rPr/>
+                        <a:t>VOLUME</a:t>
+                      </a:r>
+                    </a:p>
+                  </a:txBody>
+                  <a:tcPr/>
+                </a:tc>
+                <a:tc>
+                  <a:txBody>
+                    <a:bodyPr/>
+                    <a:lstStyle/>
+                    <a:p>
+                      <a:pPr lvl="0" indent="0" marL="0">
+                        <a:buNone/>
+                      </a:pPr>
+                      <a:r>
+                        <a:rPr/>
+                        <a:t>H_D_INT</a:t>
+                      </a:r>
+                    </a:p>
+                  </a:txBody>
+                  <a:tcPr/>
+                </a:tc>
+                <a:tc>
+                  <a:txBody>
+                    <a:bodyPr/>
+                    <a:lstStyle/>
+                    <a:p>
+                      <a:pPr lvl="0" indent="0" marL="0">
+                        <a:buNone/>
+                      </a:pPr>
+                      <a:r>
+                        <a:rPr/>
+                        <a:t>H_SQUARED</a:t>
+                      </a:r>
+                    </a:p>
+                  </a:txBody>
+                  <a:tcPr/>
+                </a:tc>
+              </a:tr>
+              <a:tr h="0">
+                <a:tc>
+                  <a:txBody>
+                    <a:bodyPr/>
+                    <a:lstStyle/>
+                    <a:p>
+                      <a:pPr lvl="0" indent="0" marL="0">
+                        <a:buNone/>
+                      </a:pPr>
+                      <a:r>
+                        <a:rPr/>
+                        <a:t>0</a:t>
+                      </a:r>
+                    </a:p>
+                  </a:txBody>
+                </a:tc>
+                <a:tc>
+                  <a:txBody>
+                    <a:bodyPr/>
+                    <a:lstStyle/>
+                    <a:p>
+                      <a:pPr lvl="0" indent="0" marL="0">
+                        <a:buNone/>
+                      </a:pPr>
+                      <a:r>
+                        <a:rPr/>
+                        <a:t>12</a:t>
+                      </a:r>
+                    </a:p>
+                  </a:txBody>
+                </a:tc>
+                <a:tc>
+                  <a:txBody>
+                    <a:bodyPr/>
+                    <a:lstStyle/>
+                    <a:p>
+                      <a:pPr lvl="0" indent="0" marL="0">
+                        <a:buNone/>
+                      </a:pPr>
+                      <a:r>
+                        <a:rPr/>
+                        <a:t>7.5</a:t>
+                      </a:r>
+                    </a:p>
+                  </a:txBody>
+                </a:tc>
+                <a:tc>
+                  <a:txBody>
+                    <a:bodyPr/>
+                    <a:lstStyle/>
+                    <a:p>
+                      <a:pPr lvl="0" indent="0" marL="0">
+                        <a:buNone/>
+                      </a:pPr>
+                      <a:r>
+                        <a:rPr/>
+                        <a:t>45.2</a:t>
+                      </a:r>
+                    </a:p>
+                  </a:txBody>
+                </a:tc>
+                <a:tc>
+                  <a:txBody>
+                    <a:bodyPr/>
+                    <a:lstStyle/>
+                    <a:p>
+                      <a:pPr lvl="0" indent="0" marL="0">
+                        <a:buNone/>
+                      </a:pPr>
+                      <a:r>
+                        <a:rPr/>
+                        <a:t>178.86</a:t>
+                      </a:r>
+                    </a:p>
+                  </a:txBody>
+                </a:tc>
+                <a:tc>
+                  <a:txBody>
+                    <a:bodyPr/>
+                    <a:lstStyle/>
+                    <a:p>
+                      <a:pPr lvl="0" indent="0" marL="0">
+                        <a:buNone/>
+                      </a:pPr>
+                      <a:r>
+                        <a:rPr/>
+                        <a:t>balsam fir</a:t>
+                      </a:r>
+                    </a:p>
+                  </a:txBody>
+                </a:tc>
+                <a:tc>
+                  <a:txBody>
+                    <a:bodyPr/>
+                    <a:lstStyle/>
+                    <a:p>
+                      <a:pPr lvl="0" indent="0" marL="0">
+                        <a:buNone/>
+                      </a:pPr>
+                      <a:r>
+                        <a:rPr/>
+                        <a:t>1996.873144</a:t>
+                      </a:r>
+                    </a:p>
+                  </a:txBody>
+                </a:tc>
+                <a:tc>
+                  <a:txBody>
+                    <a:bodyPr/>
+                    <a:lstStyle/>
+                    <a:p>
+                      <a:pPr lvl="0" indent="0" marL="0">
+                        <a:buNone/>
+                      </a:pPr>
+                      <a:r>
+                        <a:rPr/>
+                        <a:t>339.00</a:t>
+                      </a:r>
+                    </a:p>
+                  </a:txBody>
+                </a:tc>
+                <a:tc>
+                  <a:txBody>
+                    <a:bodyPr/>
+                    <a:lstStyle/>
+                    <a:p>
+                      <a:pPr lvl="0" indent="0" marL="0">
+                        <a:buNone/>
+                      </a:pPr>
+                      <a:r>
+                        <a:rPr/>
+                        <a:t>2043.04</a:t>
+                      </a:r>
+                    </a:p>
+                  </a:txBody>
+                </a:tc>
+              </a:tr>
+              <a:tr h="0">
+                <a:tc>
+                  <a:txBody>
+                    <a:bodyPr/>
+                    <a:lstStyle/>
+                    <a:p>
+                      <a:pPr lvl="0" indent="0" marL="0">
+                        <a:buNone/>
+                      </a:pPr>
+                      <a:r>
+                        <a:rPr/>
+                        <a:t>1</a:t>
+                      </a:r>
+                    </a:p>
+                  </a:txBody>
+                </a:tc>
+                <a:tc>
+                  <a:txBody>
+                    <a:bodyPr/>
+                    <a:lstStyle/>
+                    <a:p>
+                      <a:pPr lvl="0" indent="0" marL="0">
+                        <a:buNone/>
+                      </a:pPr>
+                      <a:r>
+                        <a:rPr/>
+                        <a:t>12</a:t>
+                      </a:r>
+                    </a:p>
+                  </a:txBody>
+                </a:tc>
+                <a:tc>
+                  <a:txBody>
+                    <a:bodyPr/>
+                    <a:lstStyle/>
+                    <a:p>
+                      <a:pPr lvl="0" indent="0" marL="0">
+                        <a:buNone/>
+                      </a:pPr>
+                      <a:r>
+                        <a:rPr/>
+                        <a:t>9.3</a:t>
+                      </a:r>
+                    </a:p>
+                  </a:txBody>
+                </a:tc>
+                <a:tc>
+                  <a:txBody>
+                    <a:bodyPr/>
+                    <a:lstStyle/>
+                    <a:p>
+                      <a:pPr lvl="0" indent="0" marL="0">
+                        <a:buNone/>
+                      </a:pPr>
+                      <a:r>
+                        <a:rPr/>
+                        <a:t>62.7</a:t>
+                      </a:r>
+                    </a:p>
+                  </a:txBody>
+                </a:tc>
+                <a:tc>
+                  <a:txBody>
+                    <a:bodyPr/>
+                    <a:lstStyle/>
+                    <a:p>
+                      <a:pPr lvl="0" indent="0" marL="0">
+                        <a:buNone/>
+                      </a:pPr>
+                      <a:r>
+                        <a:rPr/>
+                        <a:t>323.46</a:t>
+                      </a:r>
+                    </a:p>
+                  </a:txBody>
+                </a:tc>
+                <a:tc>
+                  <a:txBody>
+                    <a:bodyPr/>
+                    <a:lstStyle/>
+                    <a:p>
+                      <a:pPr lvl="0" indent="0" marL="0">
+                        <a:buNone/>
+                      </a:pPr>
+                      <a:r>
+                        <a:rPr/>
+                        <a:t>balsam fir</a:t>
+                      </a:r>
+                    </a:p>
+                  </a:txBody>
+                </a:tc>
+                <a:tc>
+                  <a:txBody>
+                    <a:bodyPr/>
+                    <a:lstStyle/>
+                    <a:p>
+                      <a:pPr lvl="0" indent="0" marL="0">
+                        <a:buNone/>
+                      </a:pPr>
+                      <a:r>
+                        <a:rPr/>
+                        <a:t>4259.150167</a:t>
+                      </a:r>
+                    </a:p>
+                  </a:txBody>
+                </a:tc>
+                <a:tc>
+                  <a:txBody>
+                    <a:bodyPr/>
+                    <a:lstStyle/>
+                    <a:p>
+                      <a:pPr lvl="0" indent="0" marL="0">
+                        <a:buNone/>
+                      </a:pPr>
+                      <a:r>
+                        <a:rPr/>
+                        <a:t>583.11</a:t>
+                      </a:r>
+                    </a:p>
+                  </a:txBody>
+                </a:tc>
+                <a:tc>
+                  <a:txBody>
+                    <a:bodyPr/>
+                    <a:lstStyle/>
+                    <a:p>
+                      <a:pPr lvl="0" indent="0" marL="0">
+                        <a:buNone/>
+                      </a:pPr>
+                      <a:r>
+                        <a:rPr/>
+                        <a:t>3931.29</a:t>
+                      </a:r>
+                    </a:p>
+                  </a:txBody>
+                </a:tc>
+              </a:tr>
+              <a:tr h="0">
+                <a:tc>
+                  <a:txBody>
+                    <a:bodyPr/>
+                    <a:lstStyle/>
+                    <a:p>
+                      <a:pPr lvl="0" indent="0" marL="0">
+                        <a:buNone/>
+                      </a:pPr>
+                      <a:r>
+                        <a:rPr/>
+                        <a:t>2</a:t>
+                      </a:r>
+                    </a:p>
+                  </a:txBody>
+                </a:tc>
+                <a:tc>
+                  <a:txBody>
+                    <a:bodyPr/>
+                    <a:lstStyle/>
+                    <a:p>
+                      <a:pPr lvl="0" indent="0" marL="0">
+                        <a:buNone/>
+                      </a:pPr>
+                      <a:r>
+                        <a:rPr/>
+                        <a:t>12</a:t>
+                      </a:r>
+                    </a:p>
+                  </a:txBody>
+                </a:tc>
+                <a:tc>
+                  <a:txBody>
+                    <a:bodyPr/>
+                    <a:lstStyle/>
+                    <a:p>
+                      <a:pPr lvl="0" indent="0" marL="0">
+                        <a:buNone/>
+                      </a:pPr>
+                      <a:r>
+                        <a:rPr/>
+                        <a:t>9.7</a:t>
+                      </a:r>
+                    </a:p>
+                  </a:txBody>
+                </a:tc>
+                <a:tc>
+                  <a:txBody>
+                    <a:bodyPr/>
+                    <a:lstStyle/>
+                    <a:p>
+                      <a:pPr lvl="0" indent="0" marL="0">
+                        <a:buNone/>
+                      </a:pPr>
+                      <a:r>
+                        <a:rPr/>
+                        <a:t>56.7</a:t>
+                      </a:r>
+                    </a:p>
+                  </a:txBody>
+                </a:tc>
+                <a:tc>
+                  <a:txBody>
+                    <a:bodyPr/>
+                    <a:lstStyle/>
+                    <a:p>
+                      <a:pPr lvl="0" indent="0" marL="0">
+                        <a:buNone/>
+                      </a:pPr>
+                      <a:r>
+                        <a:rPr/>
+                        <a:t>342.47</a:t>
+                      </a:r>
+                    </a:p>
+                  </a:txBody>
+                </a:tc>
+                <a:tc>
+                  <a:txBody>
+                    <a:bodyPr/>
+                    <a:lstStyle/>
+                    <a:p>
+                      <a:pPr lvl="0" indent="0" marL="0">
+                        <a:buNone/>
+                      </a:pPr>
+                      <a:r>
+                        <a:rPr/>
+                        <a:t>balsam fir</a:t>
+                      </a:r>
+                    </a:p>
+                  </a:txBody>
+                </a:tc>
+                <a:tc>
+                  <a:txBody>
+                    <a:bodyPr/>
+                    <a:lstStyle/>
+                    <a:p>
+                      <a:pPr lvl="0" indent="0" marL="0">
+                        <a:buNone/>
+                      </a:pPr>
+                      <a:r>
+                        <a:rPr/>
+                        <a:t>4190.019479</a:t>
+                      </a:r>
+                    </a:p>
+                  </a:txBody>
+                </a:tc>
+                <a:tc>
+                  <a:txBody>
+                    <a:bodyPr/>
+                    <a:lstStyle/>
+                    <a:p>
+                      <a:pPr lvl="0" indent="0" marL="0">
+                        <a:buNone/>
+                      </a:pPr>
+                      <a:r>
+                        <a:rPr/>
+                        <a:t>549.99</a:t>
+                      </a:r>
+                    </a:p>
+                  </a:txBody>
+                </a:tc>
+                <a:tc>
+                  <a:txBody>
+                    <a:bodyPr/>
+                    <a:lstStyle/>
+                    <a:p>
+                      <a:pPr lvl="0" indent="0" marL="0">
+                        <a:buNone/>
+                      </a:pPr>
+                      <a:r>
+                        <a:rPr/>
+                        <a:t>3214.89</a:t>
+                      </a:r>
+                    </a:p>
+                  </a:txBody>
+                </a:tc>
+              </a:tr>
+              <a:tr h="0">
+                <a:tc>
+                  <a:txBody>
+                    <a:bodyPr/>
+                    <a:lstStyle/>
+                    <a:p>
+                      <a:pPr lvl="0" indent="0" marL="0">
+                        <a:buNone/>
+                      </a:pPr>
+                      <a:r>
+                        <a:rPr/>
+                        <a:t>3</a:t>
+                      </a:r>
+                    </a:p>
+                  </a:txBody>
+                </a:tc>
+                <a:tc>
+                  <a:txBody>
+                    <a:bodyPr/>
+                    <a:lstStyle/>
+                    <a:p>
+                      <a:pPr lvl="0" indent="0" marL="0">
+                        <a:buNone/>
+                      </a:pPr>
+                      <a:r>
+                        <a:rPr/>
+                        <a:t>12</a:t>
+                      </a:r>
+                    </a:p>
+                  </a:txBody>
+                </a:tc>
+                <a:tc>
+                  <a:txBody>
+                    <a:bodyPr/>
+                    <a:lstStyle/>
+                    <a:p>
+                      <a:pPr lvl="0" indent="0" marL="0">
+                        <a:buNone/>
+                      </a:pPr>
+                      <a:r>
+                        <a:rPr/>
+                        <a:t>11.4</a:t>
+                      </a:r>
+                    </a:p>
+                  </a:txBody>
+                </a:tc>
+                <a:tc>
+                  <a:txBody>
+                    <a:bodyPr/>
+                    <a:lstStyle/>
+                    <a:p>
+                      <a:pPr lvl="0" indent="0" marL="0">
+                        <a:buNone/>
+                      </a:pPr>
+                      <a:r>
+                        <a:rPr/>
+                        <a:t>66.1</a:t>
+                      </a:r>
+                    </a:p>
+                  </a:txBody>
+                </a:tc>
+                <a:tc>
+                  <a:txBody>
+                    <a:bodyPr/>
+                    <a:lstStyle/>
+                    <a:p>
+                      <a:pPr lvl="0" indent="0" marL="0">
+                        <a:buNone/>
+                      </a:pPr>
+                      <a:r>
+                        <a:rPr/>
+                        <a:t>499.35</a:t>
+                      </a:r>
+                    </a:p>
+                  </a:txBody>
+                </a:tc>
+                <a:tc>
+                  <a:txBody>
+                    <a:bodyPr/>
+                    <a:lstStyle/>
+                    <a:p>
+                      <a:pPr lvl="0" indent="0" marL="0">
+                        <a:buNone/>
+                      </a:pPr>
+                      <a:r>
+                        <a:rPr/>
+                        <a:t>balsam fir</a:t>
+                      </a:r>
+                    </a:p>
+                  </a:txBody>
+                </a:tc>
+                <a:tc>
+                  <a:txBody>
+                    <a:bodyPr/>
+                    <a:lstStyle/>
+                    <a:p>
+                      <a:pPr lvl="0" indent="0" marL="0">
+                        <a:buNone/>
+                      </a:pPr>
+                      <a:r>
+                        <a:rPr/>
+                        <a:t>6746.844127</a:t>
+                      </a:r>
+                    </a:p>
+                  </a:txBody>
+                </a:tc>
+                <a:tc>
+                  <a:txBody>
+                    <a:bodyPr/>
+                    <a:lstStyle/>
+                    <a:p>
+                      <a:pPr lvl="0" indent="0" marL="0">
+                        <a:buNone/>
+                      </a:pPr>
+                      <a:r>
+                        <a:rPr/>
+                        <a:t>753.54</a:t>
+                      </a:r>
+                    </a:p>
+                  </a:txBody>
+                </a:tc>
+                <a:tc>
+                  <a:txBody>
+                    <a:bodyPr/>
+                    <a:lstStyle/>
+                    <a:p>
+                      <a:pPr lvl="0" indent="0" marL="0">
+                        <a:buNone/>
+                      </a:pPr>
+                      <a:r>
+                        <a:rPr/>
+                        <a:t>4369.21</a:t>
+                      </a:r>
+                    </a:p>
+                  </a:txBody>
+                </a:tc>
+              </a:tr>
+              <a:tr h="0">
+                <a:tc>
+                  <a:txBody>
+                    <a:bodyPr/>
+                    <a:lstStyle/>
+                    <a:p>
+                      <a:pPr lvl="0" indent="0" marL="0">
+                        <a:buNone/>
+                      </a:pPr>
+                      <a:r>
+                        <a:rPr/>
+                        <a:t>4</a:t>
+                      </a:r>
+                    </a:p>
+                  </a:txBody>
+                </a:tc>
+                <a:tc>
+                  <a:txBody>
+                    <a:bodyPr/>
+                    <a:lstStyle/>
+                    <a:p>
+                      <a:pPr lvl="0" indent="0" marL="0">
+                        <a:buNone/>
+                      </a:pPr>
+                      <a:r>
+                        <a:rPr/>
+                        <a:t>12</a:t>
+                      </a:r>
+                    </a:p>
+                  </a:txBody>
+                </a:tc>
+                <a:tc>
+                  <a:txBody>
+                    <a:bodyPr/>
+                    <a:lstStyle/>
+                    <a:p>
+                      <a:pPr lvl="0" indent="0" marL="0">
+                        <a:buNone/>
+                      </a:pPr>
+                      <a:r>
+                        <a:rPr/>
+                        <a:t>6.4</a:t>
+                      </a:r>
+                    </a:p>
+                  </a:txBody>
+                </a:tc>
+                <a:tc>
+                  <a:txBody>
+                    <a:bodyPr/>
+                    <a:lstStyle/>
+                    <a:p>
+                      <a:pPr lvl="0" indent="0" marL="0">
+                        <a:buNone/>
+                      </a:pPr>
+                      <a:r>
+                        <a:rPr/>
+                        <a:t>51.8</a:t>
+                      </a:r>
+                    </a:p>
+                  </a:txBody>
+                </a:tc>
+                <a:tc>
+                  <a:txBody>
+                    <a:bodyPr/>
+                    <a:lstStyle/>
+                    <a:p>
+                      <a:pPr lvl="0" indent="0" marL="0">
+                        <a:buNone/>
+                      </a:pPr>
+                      <a:r>
+                        <a:rPr/>
+                        <a:t>113.92</a:t>
+                      </a:r>
+                    </a:p>
+                  </a:txBody>
+                </a:tc>
+                <a:tc>
+                  <a:txBody>
+                    <a:bodyPr/>
+                    <a:lstStyle/>
+                    <a:p>
+                      <a:pPr lvl="0" indent="0" marL="0">
+                        <a:buNone/>
+                      </a:pPr>
+                      <a:r>
+                        <a:rPr/>
+                        <a:t>balsam fir</a:t>
+                      </a:r>
+                    </a:p>
+                  </a:txBody>
+                </a:tc>
+                <a:tc>
+                  <a:txBody>
+                    <a:bodyPr/>
+                    <a:lstStyle/>
+                    <a:p>
+                      <a:pPr lvl="0" indent="0" marL="0">
+                        <a:buNone/>
+                      </a:pPr>
+                      <a:r>
+                        <a:rPr/>
+                        <a:t>1666.399867</a:t>
+                      </a:r>
+                    </a:p>
+                  </a:txBody>
+                </a:tc>
+                <a:tc>
+                  <a:txBody>
+                    <a:bodyPr/>
+                    <a:lstStyle/>
+                    <a:p>
+                      <a:pPr lvl="0" indent="0" marL="0">
+                        <a:buNone/>
+                      </a:pPr>
+                      <a:r>
+                        <a:rPr/>
+                        <a:t>331.52</a:t>
+                      </a:r>
+                    </a:p>
+                  </a:txBody>
+                </a:tc>
+                <a:tc>
+                  <a:txBody>
+                    <a:bodyPr/>
+                    <a:lstStyle/>
+                    <a:p>
+                      <a:pPr lvl="0" indent="0" marL="0">
+                        <a:buNone/>
+                      </a:pPr>
+                      <a:r>
+                        <a:rPr/>
+                        <a:t>2683.24</a:t>
+                      </a:r>
+                    </a:p>
+                  </a:txBody>
+                </a:tc>
+              </a:tr>
+            </a:tbl>
+          </a:graphicData>
+        </a:graphic>
+      </p:graphicFrame>
+    </p:spTree>
+  </p:cSld>
+</p:sld>
+</file>
+
+<file path=ppt/slides/slide23.xml><?xml version="1.0" encoding="utf-8"?>
+<p:sld xmlns:a="http://schemas.openxmlformats.org/drawingml/2006/main" xmlns:r="http://schemas.openxmlformats.org/officeDocument/2006/relationships" xmlns:p="http://schemas.openxmlformats.org/presentationml/2006/main">
+  <p:cSld>
+    <p:spTree>
+      <p:nvGrpSpPr>
+        <p:cNvPr id="1" name=""/>
+        <p:cNvGrpSpPr/>
+        <p:nvPr/>
+      </p:nvGrpSpPr>
+      <p:grpSpPr>
+        <a:xfrm>
+          <a:off x="0" y="0"/>
+          <a:ext cx="0" cy="0"/>
+          <a:chOff x="0" y="0"/>
+          <a:chExt cx="0" cy="0"/>
+        </a:xfrm>
+      </p:grpSpPr>
+      <p:sp>
+        <p:nvSpPr>
+          <p:cNvPr id="2" name="Title 1"/>
+          <p:cNvSpPr>
+            <a:spLocks noGrp="1"/>
+          </p:cNvSpPr>
+          <p:nvPr>
+            <p:ph type="title"/>
+          </p:nvPr>
+        </p:nvSpPr>
+        <p:spPr/>
+        <p:txBody>
+          <a:bodyPr/>
+          <a:lstStyle/>
+          <a:p>
+            <a:pPr lvl="0" indent="0" marL="0">
+              <a:buNone/>
+            </a:pPr>
+            <a:r>
+              <a:rPr/>
+              <a:t>Testing and comparing models</a:t>
+            </a:r>
+          </a:p>
+        </p:txBody>
+      </p:sp>
+      <p:sp>
+        <p:nvSpPr>
+          <p:cNvPr id="3" name="Content Placeholder 2"/>
+          <p:cNvSpPr>
+            <a:spLocks noGrp="1"/>
+          </p:cNvSpPr>
+          <p:nvPr>
+            <p:ph idx="1"/>
+          </p:nvPr>
+        </p:nvSpPr>
+        <p:spPr/>
+        <p:txBody>
+          <a:bodyPr/>
+          <a:lstStyle/>
+          <a:p>
+            <a:pPr lvl="0" indent="0" marL="0">
+              <a:buNone/>
+            </a:pPr>
+            <a:r>
+              <a:rPr/>
+              <a:t>Height interaction</a:t>
+            </a:r>
+          </a:p>
+          <a:p>
+            <a:pPr lvl="0" indent="0">
+              <a:buNone/>
+            </a:pPr>
+            <a:r>
+              <a:rPr>
+                <a:latin typeface="Courier"/>
+              </a:rPr>
+              <a:t>Height squared:
+Average RMSLE for k = 3: 0.5285519115388194
+Height and diameter interaction:
+Average RMSLE for k = 3: 0.8338320265770989
+Volume of cylinder feature:
+Average RMSLE for k = 3: 0.7418555665720403</a:t>
+            </a:r>
+          </a:p>
+        </p:txBody>
+      </p:sp>
+    </p:spTree>
+  </p:cSld>
+</p:sld>
+</file>
+
+<file path=ppt/slides/slide24.xml><?xml version="1.0" encoding="utf-8"?>
 <p:sld xmlns:a="http://schemas.openxmlformats.org/drawingml/2006/main" xmlns:r="http://schemas.openxmlformats.org/officeDocument/2006/relationships" xmlns:p="http://schemas.openxmlformats.org/presentationml/2006/main">
   <p:cSld>
     <p:spTree>

--- a/Project-3/presentation.pptx
+++ b/Project-3/presentation.pptx
@@ -3487,14 +3487,14 @@
             <a:pPr lvl="0"/>
             <a:r>
               <a:rPr/>
-              <a:t>When predicting tree biomass, employ the performance metric root mean square logarithmic error since biomass data varies greatly, ranging from tiny saplings to enormous trees, majority of trees having exponential growth.</a:t>
+              <a:t>We choose kNN regression over linear regression because when looking at the graphs Dean made, we saw that the tree diameter/height vs. biomass graphs all have exponential growth.</a:t>
             </a:r>
           </a:p>
           <a:p>
             <a:pPr lvl="0"/>
             <a:r>
               <a:rPr/>
-              <a:t>We chose kNN regression over linear regression because when looking at the graphs Dean presented, we saw that the tree diameter/height vs. biomass graphs all have exponential growth.</a:t>
+              <a:t>When relations between biomass and trees’ diameter and height are complex and nonlinear, data is abundant, and the model needs to be adaptive without making major changes in the model. kNN excels in capturing patterns and irregular patterns.</a:t>
             </a:r>
           </a:p>
         </p:txBody>
@@ -3541,7 +3541,7 @@
             </a:pPr>
             <a:r>
               <a:rPr/>
-              <a:t>Consultation pt 2</a:t>
+              <a:t>Performance Metric</a:t>
             </a:r>
           </a:p>
         </p:txBody>
@@ -3564,7 +3564,18 @@
             <a:pPr lvl="0"/>
             <a:r>
               <a:rPr/>
-              <a:t>When relations between biomass and trees diameter and height are complex and non linear, data is abundent, and the model needs to be adaptive with out maksing major changes in the model. kNN excels in capturing patterns and irregular patterns.</a:t>
+              <a:t>When predicting tree biomass, we chose Root Mean Square Logarithmic Error for our performance metric since biomass data varies greatly, ranging from tiny saplings to enormous trees, and trees have exponential growth.</a:t>
+            </a:r>
+          </a:p>
+          <a:p>
+            <a:pPr lvl="0"/>
+            <a:r>
+              <a:rPr b="1"/>
+              <a:t>RMSLE over RMSE</a:t>
+            </a:r>
+            <a:r>
+              <a:rPr/>
+              <a:t>: focuses on percentage errors, making it fair to both small and large trees, unlike RMSE, which we believe penalizes errors on big trees. Fitting biomass estimations where scale matters more than absolute error. RMSLE provides a more balanced evaluation that considers the unique characteristics of tree biomass data.</a:t>
             </a:r>
           </a:p>
         </p:txBody>
@@ -3611,45 +3622,963 @@
             </a:pPr>
             <a:r>
               <a:rPr/>
-              <a:t>Performance Metric</a:t>
+              <a:t>Project Manager Model</a:t>
             </a:r>
           </a:p>
         </p:txBody>
       </p:sp>
-      <p:sp>
-        <p:nvSpPr>
-          <p:cNvPr id="3" name="Content Placeholder 2"/>
-          <p:cNvSpPr>
-            <a:spLocks noGrp="1"/>
-          </p:cNvSpPr>
+      <p:graphicFrame>
+        <p:nvGraphicFramePr>
+          <p:cNvPr id="6" name="Content Placeholder 5"/>
+          <p:cNvGraphicFramePr>
+            <a:graphicFrameLocks noGrp="1"/>
+          </p:cNvGraphicFramePr>
           <p:nvPr>
             <p:ph idx="1"/>
           </p:nvPr>
-        </p:nvSpPr>
-        <p:spPr/>
-        <p:txBody>
-          <a:bodyPr/>
-          <a:lstStyle/>
-          <a:p>
-            <a:pPr lvl="0"/>
-            <a:r>
-              <a:rPr b="1"/>
-              <a:t>RMSLE over RMSE</a:t>
-            </a:r>
-            <a:r>
-              <a:rPr/>
-              <a:t>: focuses on percentage errors, making it fair to both small and large trees, unlike RMSE, which we believe penalizes errors on big trees. Fitting biomass estimations where scale matters more than absolute error.</a:t>
-            </a:r>
-          </a:p>
-          <a:p>
-            <a:pPr lvl="0"/>
-            <a:r>
-              <a:rPr/>
-              <a:t>By prioritizing percentage errors, RMSLE provides a more balanced evaluation that considers the unique characteristics of tree biomass data.</a:t>
-            </a:r>
-          </a:p>
-        </p:txBody>
-      </p:sp>
+        </p:nvGraphicFramePr>
+        <p:xfrm>
+          <a:off x="457200" y="1193800"/>
+          <a:ext cx="8229600" cy="3390900"/>
+        </p:xfrm>
+        <a:graphic>
+          <a:graphicData uri="http://schemas.openxmlformats.org/drawingml/2006/table">
+            <a:tbl>
+              <a:tblPr firstRow="1" bandRow="1">
+                <a:tableStyleId>{5C22544A-7EE6-4342-B048-85BDC9FD1C3A}</a:tableStyleId>
+              </a:tblPr>
+              <a:tblGrid>
+                <a:gridCol w="1371600"/>
+                <a:gridCol w="1371600"/>
+                <a:gridCol w="1371600"/>
+                <a:gridCol w="1371600"/>
+                <a:gridCol w="1371600"/>
+                <a:gridCol w="1371600"/>
+              </a:tblGrid>
+              <a:tr h="0">
+                <a:tc>
+                  <a:txBody>
+                    <a:bodyPr/>
+                    <a:lstStyle/>
+                    <a:p>
+                      <a:endParaRPr/>
+                    </a:p>
+                  </a:txBody>
+                  <a:tcPr/>
+                </a:tc>
+                <a:tc>
+                  <a:txBody>
+                    <a:bodyPr/>
+                    <a:lstStyle/>
+                    <a:p>
+                      <a:pPr lvl="0" indent="0" marL="0">
+                        <a:buNone/>
+                      </a:pPr>
+                      <a:r>
+                        <a:rPr/>
+                        <a:t>Species</a:t>
+                      </a:r>
+                    </a:p>
+                  </a:txBody>
+                  <a:tcPr/>
+                </a:tc>
+                <a:tc>
+                  <a:txBody>
+                    <a:bodyPr/>
+                    <a:lstStyle/>
+                    <a:p>
+                      <a:pPr lvl="0" indent="0" marL="0">
+                        <a:buNone/>
+                      </a:pPr>
+                      <a:r>
+                        <a:rPr/>
+                        <a:t>k</a:t>
+                      </a:r>
+                    </a:p>
+                  </a:txBody>
+                  <a:tcPr/>
+                </a:tc>
+                <a:tc>
+                  <a:txBody>
+                    <a:bodyPr/>
+                    <a:lstStyle/>
+                    <a:p>
+                      <a:pPr lvl="0" indent="0" marL="0">
+                        <a:buNone/>
+                      </a:pPr>
+                      <a:r>
+                        <a:rPr/>
+                        <a:t>RMSE</a:t>
+                      </a:r>
+                    </a:p>
+                  </a:txBody>
+                  <a:tcPr/>
+                </a:tc>
+                <a:tc>
+                  <a:txBody>
+                    <a:bodyPr/>
+                    <a:lstStyle/>
+                    <a:p>
+                      <a:pPr lvl="0" indent="0" marL="0">
+                        <a:buNone/>
+                      </a:pPr>
+                      <a:r>
+                        <a:rPr/>
+                        <a:t>MAE</a:t>
+                      </a:r>
+                    </a:p>
+                  </a:txBody>
+                  <a:tcPr/>
+                </a:tc>
+                <a:tc>
+                  <a:txBody>
+                    <a:bodyPr/>
+                    <a:lstStyle/>
+                    <a:p>
+                      <a:pPr lvl="0" indent="0" marL="0">
+                        <a:buNone/>
+                      </a:pPr>
+                      <a:r>
+                        <a:rPr/>
+                        <a:t>RMSLE</a:t>
+                      </a:r>
+                    </a:p>
+                  </a:txBody>
+                  <a:tcPr/>
+                </a:tc>
+              </a:tr>
+              <a:tr h="0">
+                <a:tc>
+                  <a:txBody>
+                    <a:bodyPr/>
+                    <a:lstStyle/>
+                    <a:p>
+                      <a:pPr lvl="0" indent="0" marL="0">
+                        <a:buNone/>
+                      </a:pPr>
+                      <a:r>
+                        <a:rPr/>
+                        <a:t>0</a:t>
+                      </a:r>
+                    </a:p>
+                  </a:txBody>
+                </a:tc>
+                <a:tc>
+                  <a:txBody>
+                    <a:bodyPr/>
+                    <a:lstStyle/>
+                    <a:p>
+                      <a:pPr lvl="0" indent="0" marL="0">
+                        <a:buNone/>
+                      </a:pPr>
+                      <a:r>
+                        <a:rPr/>
+                        <a:t>balsam fir</a:t>
+                      </a:r>
+                    </a:p>
+                  </a:txBody>
+                </a:tc>
+                <a:tc>
+                  <a:txBody>
+                    <a:bodyPr/>
+                    <a:lstStyle/>
+                    <a:p>
+                      <a:pPr lvl="0" indent="0" marL="0">
+                        <a:buNone/>
+                      </a:pPr>
+                      <a:r>
+                        <a:rPr/>
+                        <a:t>2</a:t>
+                      </a:r>
+                    </a:p>
+                  </a:txBody>
+                </a:tc>
+                <a:tc>
+                  <a:txBody>
+                    <a:bodyPr/>
+                    <a:lstStyle/>
+                    <a:p>
+                      <a:pPr lvl="0" indent="0" marL="0">
+                        <a:buNone/>
+                      </a:pPr>
+                      <a:r>
+                        <a:rPr/>
+                        <a:t>125.827396</a:t>
+                      </a:r>
+                    </a:p>
+                  </a:txBody>
+                </a:tc>
+                <a:tc>
+                  <a:txBody>
+                    <a:bodyPr/>
+                    <a:lstStyle/>
+                    <a:p>
+                      <a:pPr lvl="0" indent="0" marL="0">
+                        <a:buNone/>
+                      </a:pPr>
+                      <a:r>
+                        <a:rPr/>
+                        <a:t>34.820565</a:t>
+                      </a:r>
+                    </a:p>
+                  </a:txBody>
+                </a:tc>
+                <a:tc>
+                  <a:txBody>
+                    <a:bodyPr/>
+                    <a:lstStyle/>
+                    <a:p>
+                      <a:pPr lvl="0" indent="0" marL="0">
+                        <a:buNone/>
+                      </a:pPr>
+                      <a:r>
+                        <a:rPr/>
+                        <a:t>0.119617</a:t>
+                      </a:r>
+                    </a:p>
+                  </a:txBody>
+                </a:tc>
+              </a:tr>
+              <a:tr h="0">
+                <a:tc>
+                  <a:txBody>
+                    <a:bodyPr/>
+                    <a:lstStyle/>
+                    <a:p>
+                      <a:pPr lvl="0" indent="0" marL="0">
+                        <a:buNone/>
+                      </a:pPr>
+                      <a:r>
+                        <a:rPr/>
+                        <a:t>1</a:t>
+                      </a:r>
+                    </a:p>
+                  </a:txBody>
+                </a:tc>
+                <a:tc>
+                  <a:txBody>
+                    <a:bodyPr/>
+                    <a:lstStyle/>
+                    <a:p>
+                      <a:pPr lvl="0" indent="0" marL="0">
+                        <a:buNone/>
+                      </a:pPr>
+                      <a:r>
+                        <a:rPr/>
+                        <a:t>balsam fir</a:t>
+                      </a:r>
+                    </a:p>
+                  </a:txBody>
+                </a:tc>
+                <a:tc>
+                  <a:txBody>
+                    <a:bodyPr/>
+                    <a:lstStyle/>
+                    <a:p>
+                      <a:pPr lvl="0" indent="0" marL="0">
+                        <a:buNone/>
+                      </a:pPr>
+                      <a:r>
+                        <a:rPr/>
+                        <a:t>3</a:t>
+                      </a:r>
+                    </a:p>
+                  </a:txBody>
+                </a:tc>
+                <a:tc>
+                  <a:txBody>
+                    <a:bodyPr/>
+                    <a:lstStyle/>
+                    <a:p>
+                      <a:pPr lvl="0" indent="0" marL="0">
+                        <a:buNone/>
+                      </a:pPr>
+                      <a:r>
+                        <a:rPr/>
+                        <a:t>129.650855</a:t>
+                      </a:r>
+                    </a:p>
+                  </a:txBody>
+                </a:tc>
+                <a:tc>
+                  <a:txBody>
+                    <a:bodyPr/>
+                    <a:lstStyle/>
+                    <a:p>
+                      <a:pPr lvl="0" indent="0" marL="0">
+                        <a:buNone/>
+                      </a:pPr>
+                      <a:r>
+                        <a:rPr/>
+                        <a:t>36.628377</a:t>
+                      </a:r>
+                    </a:p>
+                  </a:txBody>
+                </a:tc>
+                <a:tc>
+                  <a:txBody>
+                    <a:bodyPr/>
+                    <a:lstStyle/>
+                    <a:p>
+                      <a:pPr lvl="0" indent="0" marL="0">
+                        <a:buNone/>
+                      </a:pPr>
+                      <a:r>
+                        <a:rPr/>
+                        <a:t>0.123679</a:t>
+                      </a:r>
+                    </a:p>
+                  </a:txBody>
+                </a:tc>
+              </a:tr>
+              <a:tr h="0">
+                <a:tc>
+                  <a:txBody>
+                    <a:bodyPr/>
+                    <a:lstStyle/>
+                    <a:p>
+                      <a:pPr lvl="0" indent="0" marL="0">
+                        <a:buNone/>
+                      </a:pPr>
+                      <a:r>
+                        <a:rPr/>
+                        <a:t>2</a:t>
+                      </a:r>
+                    </a:p>
+                  </a:txBody>
+                </a:tc>
+                <a:tc>
+                  <a:txBody>
+                    <a:bodyPr/>
+                    <a:lstStyle/>
+                    <a:p>
+                      <a:pPr lvl="0" indent="0" marL="0">
+                        <a:buNone/>
+                      </a:pPr>
+                      <a:r>
+                        <a:rPr/>
+                        <a:t>balsam fir</a:t>
+                      </a:r>
+                    </a:p>
+                  </a:txBody>
+                </a:tc>
+                <a:tc>
+                  <a:txBody>
+                    <a:bodyPr/>
+                    <a:lstStyle/>
+                    <a:p>
+                      <a:pPr lvl="0" indent="0" marL="0">
+                        <a:buNone/>
+                      </a:pPr>
+                      <a:r>
+                        <a:rPr/>
+                        <a:t>4</a:t>
+                      </a:r>
+                    </a:p>
+                  </a:txBody>
+                </a:tc>
+                <a:tc>
+                  <a:txBody>
+                    <a:bodyPr/>
+                    <a:lstStyle/>
+                    <a:p>
+                      <a:pPr lvl="0" indent="0" marL="0">
+                        <a:buNone/>
+                      </a:pPr>
+                      <a:r>
+                        <a:rPr/>
+                        <a:t>134.599829</a:t>
+                      </a:r>
+                    </a:p>
+                  </a:txBody>
+                </a:tc>
+                <a:tc>
+                  <a:txBody>
+                    <a:bodyPr/>
+                    <a:lstStyle/>
+                    <a:p>
+                      <a:pPr lvl="0" indent="0" marL="0">
+                        <a:buNone/>
+                      </a:pPr>
+                      <a:r>
+                        <a:rPr/>
+                        <a:t>38.884870</a:t>
+                      </a:r>
+                    </a:p>
+                  </a:txBody>
+                </a:tc>
+                <a:tc>
+                  <a:txBody>
+                    <a:bodyPr/>
+                    <a:lstStyle/>
+                    <a:p>
+                      <a:pPr lvl="0" indent="0" marL="0">
+                        <a:buNone/>
+                      </a:pPr>
+                      <a:r>
+                        <a:rPr/>
+                        <a:t>0.133858</a:t>
+                      </a:r>
+                    </a:p>
+                  </a:txBody>
+                </a:tc>
+              </a:tr>
+              <a:tr h="0">
+                <a:tc>
+                  <a:txBody>
+                    <a:bodyPr/>
+                    <a:lstStyle/>
+                    <a:p>
+                      <a:pPr lvl="0" indent="0" marL="0">
+                        <a:buNone/>
+                      </a:pPr>
+                      <a:r>
+                        <a:rPr/>
+                        <a:t>3</a:t>
+                      </a:r>
+                    </a:p>
+                  </a:txBody>
+                </a:tc>
+                <a:tc>
+                  <a:txBody>
+                    <a:bodyPr/>
+                    <a:lstStyle/>
+                    <a:p>
+                      <a:pPr lvl="0" indent="0" marL="0">
+                        <a:buNone/>
+                      </a:pPr>
+                      <a:r>
+                        <a:rPr/>
+                        <a:t>balsam fir</a:t>
+                      </a:r>
+                    </a:p>
+                  </a:txBody>
+                </a:tc>
+                <a:tc>
+                  <a:txBody>
+                    <a:bodyPr/>
+                    <a:lstStyle/>
+                    <a:p>
+                      <a:pPr lvl="0" indent="0" marL="0">
+                        <a:buNone/>
+                      </a:pPr>
+                      <a:r>
+                        <a:rPr/>
+                        <a:t>5</a:t>
+                      </a:r>
+                    </a:p>
+                  </a:txBody>
+                </a:tc>
+                <a:tc>
+                  <a:txBody>
+                    <a:bodyPr/>
+                    <a:lstStyle/>
+                    <a:p>
+                      <a:pPr lvl="0" indent="0" marL="0">
+                        <a:buNone/>
+                      </a:pPr>
+                      <a:r>
+                        <a:rPr/>
+                        <a:t>145.002852</a:t>
+                      </a:r>
+                    </a:p>
+                  </a:txBody>
+                </a:tc>
+                <a:tc>
+                  <a:txBody>
+                    <a:bodyPr/>
+                    <a:lstStyle/>
+                    <a:p>
+                      <a:pPr lvl="0" indent="0" marL="0">
+                        <a:buNone/>
+                      </a:pPr>
+                      <a:r>
+                        <a:rPr/>
+                        <a:t>41.168470</a:t>
+                      </a:r>
+                    </a:p>
+                  </a:txBody>
+                </a:tc>
+                <a:tc>
+                  <a:txBody>
+                    <a:bodyPr/>
+                    <a:lstStyle/>
+                    <a:p>
+                      <a:pPr lvl="0" indent="0" marL="0">
+                        <a:buNone/>
+                      </a:pPr>
+                      <a:r>
+                        <a:rPr/>
+                        <a:t>0.144052</a:t>
+                      </a:r>
+                    </a:p>
+                  </a:txBody>
+                </a:tc>
+              </a:tr>
+              <a:tr h="0">
+                <a:tc>
+                  <a:txBody>
+                    <a:bodyPr/>
+                    <a:lstStyle/>
+                    <a:p>
+                      <a:pPr lvl="0" indent="0" marL="0">
+                        <a:buNone/>
+                      </a:pPr>
+                      <a:r>
+                        <a:rPr/>
+                        <a:t>4</a:t>
+                      </a:r>
+                    </a:p>
+                  </a:txBody>
+                </a:tc>
+                <a:tc>
+                  <a:txBody>
+                    <a:bodyPr/>
+                    <a:lstStyle/>
+                    <a:p>
+                      <a:pPr lvl="0" indent="0" marL="0">
+                        <a:buNone/>
+                      </a:pPr>
+                      <a:r>
+                        <a:rPr/>
+                        <a:t>balsam fir</a:t>
+                      </a:r>
+                    </a:p>
+                  </a:txBody>
+                </a:tc>
+                <a:tc>
+                  <a:txBody>
+                    <a:bodyPr/>
+                    <a:lstStyle/>
+                    <a:p>
+                      <a:pPr lvl="0" indent="0" marL="0">
+                        <a:buNone/>
+                      </a:pPr>
+                      <a:r>
+                        <a:rPr/>
+                        <a:t>6</a:t>
+                      </a:r>
+                    </a:p>
+                  </a:txBody>
+                </a:tc>
+                <a:tc>
+                  <a:txBody>
+                    <a:bodyPr/>
+                    <a:lstStyle/>
+                    <a:p>
+                      <a:pPr lvl="0" indent="0" marL="0">
+                        <a:buNone/>
+                      </a:pPr>
+                      <a:r>
+                        <a:rPr/>
+                        <a:t>147.449208</a:t>
+                      </a:r>
+                    </a:p>
+                  </a:txBody>
+                </a:tc>
+                <a:tc>
+                  <a:txBody>
+                    <a:bodyPr/>
+                    <a:lstStyle/>
+                    <a:p>
+                      <a:pPr lvl="0" indent="0" marL="0">
+                        <a:buNone/>
+                      </a:pPr>
+                      <a:r>
+                        <a:rPr/>
+                        <a:t>40.728609</a:t>
+                      </a:r>
+                    </a:p>
+                  </a:txBody>
+                </a:tc>
+                <a:tc>
+                  <a:txBody>
+                    <a:bodyPr/>
+                    <a:lstStyle/>
+                    <a:p>
+                      <a:pPr lvl="0" indent="0" marL="0">
+                        <a:buNone/>
+                      </a:pPr>
+                      <a:r>
+                        <a:rPr/>
+                        <a:t>0.142813</a:t>
+                      </a:r>
+                    </a:p>
+                  </a:txBody>
+                </a:tc>
+              </a:tr>
+              <a:tr h="0">
+                <a:tc>
+                  <a:txBody>
+                    <a:bodyPr/>
+                    <a:lstStyle/>
+                    <a:p>
+                      <a:pPr lvl="0" indent="0" marL="0">
+                        <a:buNone/>
+                      </a:pPr>
+                      <a:r>
+                        <a:rPr/>
+                        <a:t>5</a:t>
+                      </a:r>
+                    </a:p>
+                  </a:txBody>
+                </a:tc>
+                <a:tc>
+                  <a:txBody>
+                    <a:bodyPr/>
+                    <a:lstStyle/>
+                    <a:p>
+                      <a:pPr lvl="0" indent="0" marL="0">
+                        <a:buNone/>
+                      </a:pPr>
+                      <a:r>
+                        <a:rPr/>
+                        <a:t>balsam fir</a:t>
+                      </a:r>
+                    </a:p>
+                  </a:txBody>
+                </a:tc>
+                <a:tc>
+                  <a:txBody>
+                    <a:bodyPr/>
+                    <a:lstStyle/>
+                    <a:p>
+                      <a:pPr lvl="0" indent="0" marL="0">
+                        <a:buNone/>
+                      </a:pPr>
+                      <a:r>
+                        <a:rPr/>
+                        <a:t>7</a:t>
+                      </a:r>
+                    </a:p>
+                  </a:txBody>
+                </a:tc>
+                <a:tc>
+                  <a:txBody>
+                    <a:bodyPr/>
+                    <a:lstStyle/>
+                    <a:p>
+                      <a:pPr lvl="0" indent="0" marL="0">
+                        <a:buNone/>
+                      </a:pPr>
+                      <a:r>
+                        <a:rPr/>
+                        <a:t>153.474421</a:t>
+                      </a:r>
+                    </a:p>
+                  </a:txBody>
+                </a:tc>
+                <a:tc>
+                  <a:txBody>
+                    <a:bodyPr/>
+                    <a:lstStyle/>
+                    <a:p>
+                      <a:pPr lvl="0" indent="0" marL="0">
+                        <a:buNone/>
+                      </a:pPr>
+                      <a:r>
+                        <a:rPr/>
+                        <a:t>42.215118</a:t>
+                      </a:r>
+                    </a:p>
+                  </a:txBody>
+                </a:tc>
+                <a:tc>
+                  <a:txBody>
+                    <a:bodyPr/>
+                    <a:lstStyle/>
+                    <a:p>
+                      <a:pPr lvl="0" indent="0" marL="0">
+                        <a:buNone/>
+                      </a:pPr>
+                      <a:r>
+                        <a:rPr/>
+                        <a:t>0.149516</a:t>
+                      </a:r>
+                    </a:p>
+                  </a:txBody>
+                </a:tc>
+              </a:tr>
+              <a:tr h="0">
+                <a:tc>
+                  <a:txBody>
+                    <a:bodyPr/>
+                    <a:lstStyle/>
+                    <a:p>
+                      <a:pPr lvl="0" indent="0" marL="0">
+                        <a:buNone/>
+                      </a:pPr>
+                      <a:r>
+                        <a:rPr/>
+                        <a:t>6</a:t>
+                      </a:r>
+                    </a:p>
+                  </a:txBody>
+                </a:tc>
+                <a:tc>
+                  <a:txBody>
+                    <a:bodyPr/>
+                    <a:lstStyle/>
+                    <a:p>
+                      <a:pPr lvl="0" indent="0" marL="0">
+                        <a:buNone/>
+                      </a:pPr>
+                      <a:r>
+                        <a:rPr/>
+                        <a:t>balsam fir</a:t>
+                      </a:r>
+                    </a:p>
+                  </a:txBody>
+                </a:tc>
+                <a:tc>
+                  <a:txBody>
+                    <a:bodyPr/>
+                    <a:lstStyle/>
+                    <a:p>
+                      <a:pPr lvl="0" indent="0" marL="0">
+                        <a:buNone/>
+                      </a:pPr>
+                      <a:r>
+                        <a:rPr/>
+                        <a:t>8</a:t>
+                      </a:r>
+                    </a:p>
+                  </a:txBody>
+                </a:tc>
+                <a:tc>
+                  <a:txBody>
+                    <a:bodyPr/>
+                    <a:lstStyle/>
+                    <a:p>
+                      <a:pPr lvl="0" indent="0" marL="0">
+                        <a:buNone/>
+                      </a:pPr>
+                      <a:r>
+                        <a:rPr/>
+                        <a:t>156.768710</a:t>
+                      </a:r>
+                    </a:p>
+                  </a:txBody>
+                </a:tc>
+                <a:tc>
+                  <a:txBody>
+                    <a:bodyPr/>
+                    <a:lstStyle/>
+                    <a:p>
+                      <a:pPr lvl="0" indent="0" marL="0">
+                        <a:buNone/>
+                      </a:pPr>
+                      <a:r>
+                        <a:rPr/>
+                        <a:t>43.559217</a:t>
+                      </a:r>
+                    </a:p>
+                  </a:txBody>
+                </a:tc>
+                <a:tc>
+                  <a:txBody>
+                    <a:bodyPr/>
+                    <a:lstStyle/>
+                    <a:p>
+                      <a:pPr lvl="0" indent="0" marL="0">
+                        <a:buNone/>
+                      </a:pPr>
+                      <a:r>
+                        <a:rPr/>
+                        <a:t>0.154670</a:t>
+                      </a:r>
+                    </a:p>
+                  </a:txBody>
+                </a:tc>
+              </a:tr>
+              <a:tr h="0">
+                <a:tc>
+                  <a:txBody>
+                    <a:bodyPr/>
+                    <a:lstStyle/>
+                    <a:p>
+                      <a:pPr lvl="0" indent="0" marL="0">
+                        <a:buNone/>
+                      </a:pPr>
+                      <a:r>
+                        <a:rPr/>
+                        <a:t>7</a:t>
+                      </a:r>
+                    </a:p>
+                  </a:txBody>
+                </a:tc>
+                <a:tc>
+                  <a:txBody>
+                    <a:bodyPr/>
+                    <a:lstStyle/>
+                    <a:p>
+                      <a:pPr lvl="0" indent="0" marL="0">
+                        <a:buNone/>
+                      </a:pPr>
+                      <a:r>
+                        <a:rPr/>
+                        <a:t>balsam fir</a:t>
+                      </a:r>
+                    </a:p>
+                  </a:txBody>
+                </a:tc>
+                <a:tc>
+                  <a:txBody>
+                    <a:bodyPr/>
+                    <a:lstStyle/>
+                    <a:p>
+                      <a:pPr lvl="0" indent="0" marL="0">
+                        <a:buNone/>
+                      </a:pPr>
+                      <a:r>
+                        <a:rPr/>
+                        <a:t>9</a:t>
+                      </a:r>
+                    </a:p>
+                  </a:txBody>
+                </a:tc>
+                <a:tc>
+                  <a:txBody>
+                    <a:bodyPr/>
+                    <a:lstStyle/>
+                    <a:p>
+                      <a:pPr lvl="0" indent="0" marL="0">
+                        <a:buNone/>
+                      </a:pPr>
+                      <a:r>
+                        <a:rPr/>
+                        <a:t>161.016214</a:t>
+                      </a:r>
+                    </a:p>
+                  </a:txBody>
+                </a:tc>
+                <a:tc>
+                  <a:txBody>
+                    <a:bodyPr/>
+                    <a:lstStyle/>
+                    <a:p>
+                      <a:pPr lvl="0" indent="0" marL="0">
+                        <a:buNone/>
+                      </a:pPr>
+                      <a:r>
+                        <a:rPr/>
+                        <a:t>44.751469</a:t>
+                      </a:r>
+                    </a:p>
+                  </a:txBody>
+                </a:tc>
+                <a:tc>
+                  <a:txBody>
+                    <a:bodyPr/>
+                    <a:lstStyle/>
+                    <a:p>
+                      <a:pPr lvl="0" indent="0" marL="0">
+                        <a:buNone/>
+                      </a:pPr>
+                      <a:r>
+                        <a:rPr/>
+                        <a:t>0.160504</a:t>
+                      </a:r>
+                    </a:p>
+                  </a:txBody>
+                </a:tc>
+              </a:tr>
+              <a:tr h="0">
+                <a:tc>
+                  <a:txBody>
+                    <a:bodyPr/>
+                    <a:lstStyle/>
+                    <a:p>
+                      <a:pPr lvl="0" indent="0" marL="0">
+                        <a:buNone/>
+                      </a:pPr>
+                      <a:r>
+                        <a:rPr/>
+                        <a:t>8</a:t>
+                      </a:r>
+                    </a:p>
+                  </a:txBody>
+                </a:tc>
+                <a:tc>
+                  <a:txBody>
+                    <a:bodyPr/>
+                    <a:lstStyle/>
+                    <a:p>
+                      <a:pPr lvl="0" indent="0" marL="0">
+                        <a:buNone/>
+                      </a:pPr>
+                      <a:r>
+                        <a:rPr/>
+                        <a:t>balsam fir</a:t>
+                      </a:r>
+                    </a:p>
+                  </a:txBody>
+                </a:tc>
+                <a:tc>
+                  <a:txBody>
+                    <a:bodyPr/>
+                    <a:lstStyle/>
+                    <a:p>
+                      <a:pPr lvl="0" indent="0" marL="0">
+                        <a:buNone/>
+                      </a:pPr>
+                      <a:r>
+                        <a:rPr/>
+                        <a:t>10</a:t>
+                      </a:r>
+                    </a:p>
+                  </a:txBody>
+                </a:tc>
+                <a:tc>
+                  <a:txBody>
+                    <a:bodyPr/>
+                    <a:lstStyle/>
+                    <a:p>
+                      <a:pPr lvl="0" indent="0" marL="0">
+                        <a:buNone/>
+                      </a:pPr>
+                      <a:r>
+                        <a:rPr/>
+                        <a:t>157.999921</a:t>
+                      </a:r>
+                    </a:p>
+                  </a:txBody>
+                </a:tc>
+                <a:tc>
+                  <a:txBody>
+                    <a:bodyPr/>
+                    <a:lstStyle/>
+                    <a:p>
+                      <a:pPr lvl="0" indent="0" marL="0">
+                        <a:buNone/>
+                      </a:pPr>
+                      <a:r>
+                        <a:rPr/>
+                        <a:t>44.694861</a:t>
+                      </a:r>
+                    </a:p>
+                  </a:txBody>
+                </a:tc>
+                <a:tc>
+                  <a:txBody>
+                    <a:bodyPr/>
+                    <a:lstStyle/>
+                    <a:p>
+                      <a:pPr lvl="0" indent="0" marL="0">
+                        <a:buNone/>
+                      </a:pPr>
+                      <a:r>
+                        <a:rPr/>
+                        <a:t>0.160057</a:t>
+                      </a:r>
+                    </a:p>
+                  </a:txBody>
+                </a:tc>
+              </a:tr>
+            </a:tbl>
+          </a:graphicData>
+        </a:graphic>
+      </p:graphicFrame>
     </p:spTree>
   </p:cSld>
 </p:sld>
@@ -3692,1147 +4621,47 @@
             </a:pPr>
             <a:r>
               <a:rPr/>
-              <a:t>Model</a:t>
+              <a:t>Average Root Mean Square Logarithmic Error</a:t>
             </a:r>
           </a:p>
         </p:txBody>
       </p:sp>
-      <p:graphicFrame>
-        <p:nvGraphicFramePr>
-          <p:cNvPr id="6" name="Content Placeholder 5"/>
-          <p:cNvGraphicFramePr>
-            <a:graphicFrameLocks noGrp="1"/>
-          </p:cNvGraphicFramePr>
+      <p:sp>
+        <p:nvSpPr>
+          <p:cNvPr id="3" name="Content Placeholder 2"/>
+          <p:cNvSpPr>
+            <a:spLocks noGrp="1"/>
+          </p:cNvSpPr>
           <p:nvPr>
             <p:ph idx="1"/>
           </p:nvPr>
-        </p:nvGraphicFramePr>
-        <p:xfrm>
-          <a:off x="457200" y="1193800"/>
-          <a:ext cx="8229600" cy="3390900"/>
-        </p:xfrm>
-        <a:graphic>
-          <a:graphicData uri="http://schemas.openxmlformats.org/drawingml/2006/table">
-            <a:tbl>
-              <a:tblPr firstRow="1" bandRow="1">
-                <a:tableStyleId>{5C22544A-7EE6-4342-B048-85BDC9FD1C3A}</a:tableStyleId>
-              </a:tblPr>
-              <a:tblGrid>
-                <a:gridCol w="1371600"/>
-                <a:gridCol w="1371600"/>
-                <a:gridCol w="1371600"/>
-                <a:gridCol w="1371600"/>
-                <a:gridCol w="1371600"/>
-                <a:gridCol w="1371600"/>
-              </a:tblGrid>
-              <a:tr h="0">
-                <a:tc>
-                  <a:txBody>
-                    <a:bodyPr/>
-                    <a:lstStyle/>
-                    <a:p>
-                      <a:endParaRPr/>
-                    </a:p>
-                  </a:txBody>
-                  <a:tcPr/>
-                </a:tc>
-                <a:tc>
-                  <a:txBody>
-                    <a:bodyPr/>
-                    <a:lstStyle/>
-                    <a:p>
-                      <a:pPr lvl="0" indent="0" marL="0">
-                        <a:buNone/>
-                      </a:pPr>
-                      <a:r>
-                        <a:rPr/>
-                        <a:t>Species</a:t>
-                      </a:r>
-                    </a:p>
-                  </a:txBody>
-                  <a:tcPr/>
-                </a:tc>
-                <a:tc>
-                  <a:txBody>
-                    <a:bodyPr/>
-                    <a:lstStyle/>
-                    <a:p>
-                      <a:pPr lvl="0" indent="0" marL="0">
-                        <a:buNone/>
-                      </a:pPr>
-                      <a:r>
-                        <a:rPr/>
-                        <a:t>k</a:t>
-                      </a:r>
-                    </a:p>
-                  </a:txBody>
-                  <a:tcPr/>
-                </a:tc>
-                <a:tc>
-                  <a:txBody>
-                    <a:bodyPr/>
-                    <a:lstStyle/>
-                    <a:p>
-                      <a:pPr lvl="0" indent="0" marL="0">
-                        <a:buNone/>
-                      </a:pPr>
-                      <a:r>
-                        <a:rPr/>
-                        <a:t>RMSE</a:t>
-                      </a:r>
-                    </a:p>
-                  </a:txBody>
-                  <a:tcPr/>
-                </a:tc>
-                <a:tc>
-                  <a:txBody>
-                    <a:bodyPr/>
-                    <a:lstStyle/>
-                    <a:p>
-                      <a:pPr lvl="0" indent="0" marL="0">
-                        <a:buNone/>
-                      </a:pPr>
-                      <a:r>
-                        <a:rPr/>
-                        <a:t>MAE</a:t>
-                      </a:r>
-                    </a:p>
-                  </a:txBody>
-                  <a:tcPr/>
-                </a:tc>
-                <a:tc>
-                  <a:txBody>
-                    <a:bodyPr/>
-                    <a:lstStyle/>
-                    <a:p>
-                      <a:pPr lvl="0" indent="0" marL="0">
-                        <a:buNone/>
-                      </a:pPr>
-                      <a:r>
-                        <a:rPr/>
-                        <a:t>RMSLE</a:t>
-                      </a:r>
-                    </a:p>
-                  </a:txBody>
-                  <a:tcPr/>
-                </a:tc>
-              </a:tr>
-              <a:tr h="0">
-                <a:tc>
-                  <a:txBody>
-                    <a:bodyPr/>
-                    <a:lstStyle/>
-                    <a:p>
-                      <a:pPr lvl="0" indent="0" marL="0">
-                        <a:buNone/>
-                      </a:pPr>
-                      <a:r>
-                        <a:rPr/>
-                        <a:t>0</a:t>
-                      </a:r>
-                    </a:p>
-                  </a:txBody>
-                </a:tc>
-                <a:tc>
-                  <a:txBody>
-                    <a:bodyPr/>
-                    <a:lstStyle/>
-                    <a:p>
-                      <a:pPr lvl="0" indent="0" marL="0">
-                        <a:buNone/>
-                      </a:pPr>
-                      <a:r>
-                        <a:rPr/>
-                        <a:t>balsam fir</a:t>
-                      </a:r>
-                    </a:p>
-                  </a:txBody>
-                </a:tc>
-                <a:tc>
-                  <a:txBody>
-                    <a:bodyPr/>
-                    <a:lstStyle/>
-                    <a:p>
-                      <a:pPr lvl="0" indent="0" marL="0">
-                        <a:buNone/>
-                      </a:pPr>
-                      <a:r>
-                        <a:rPr/>
-                        <a:t>2</a:t>
-                      </a:r>
-                    </a:p>
-                  </a:txBody>
-                </a:tc>
-                <a:tc>
-                  <a:txBody>
-                    <a:bodyPr/>
-                    <a:lstStyle/>
-                    <a:p>
-                      <a:pPr lvl="0" indent="0" marL="0">
-                        <a:buNone/>
-                      </a:pPr>
-                      <a:r>
-                        <a:rPr/>
-                        <a:t>125.827396</a:t>
-                      </a:r>
-                    </a:p>
-                  </a:txBody>
-                </a:tc>
-                <a:tc>
-                  <a:txBody>
-                    <a:bodyPr/>
-                    <a:lstStyle/>
-                    <a:p>
-                      <a:pPr lvl="0" indent="0" marL="0">
-                        <a:buNone/>
-                      </a:pPr>
-                      <a:r>
-                        <a:rPr/>
-                        <a:t>34.820565</a:t>
-                      </a:r>
-                    </a:p>
-                  </a:txBody>
-                </a:tc>
-                <a:tc>
-                  <a:txBody>
-                    <a:bodyPr/>
-                    <a:lstStyle/>
-                    <a:p>
-                      <a:pPr lvl="0" indent="0" marL="0">
-                        <a:buNone/>
-                      </a:pPr>
-                      <a:r>
-                        <a:rPr/>
-                        <a:t>0.119617</a:t>
-                      </a:r>
-                    </a:p>
-                  </a:txBody>
-                </a:tc>
-              </a:tr>
-              <a:tr h="0">
-                <a:tc>
-                  <a:txBody>
-                    <a:bodyPr/>
-                    <a:lstStyle/>
-                    <a:p>
-                      <a:pPr lvl="0" indent="0" marL="0">
-                        <a:buNone/>
-                      </a:pPr>
-                      <a:r>
-                        <a:rPr/>
-                        <a:t>1</a:t>
-                      </a:r>
-                    </a:p>
-                  </a:txBody>
-                </a:tc>
-                <a:tc>
-                  <a:txBody>
-                    <a:bodyPr/>
-                    <a:lstStyle/>
-                    <a:p>
-                      <a:pPr lvl="0" indent="0" marL="0">
-                        <a:buNone/>
-                      </a:pPr>
-                      <a:r>
-                        <a:rPr/>
-                        <a:t>balsam fir</a:t>
-                      </a:r>
-                    </a:p>
-                  </a:txBody>
-                </a:tc>
-                <a:tc>
-                  <a:txBody>
-                    <a:bodyPr/>
-                    <a:lstStyle/>
-                    <a:p>
-                      <a:pPr lvl="0" indent="0" marL="0">
-                        <a:buNone/>
-                      </a:pPr>
-                      <a:r>
-                        <a:rPr/>
-                        <a:t>3</a:t>
-                      </a:r>
-                    </a:p>
-                  </a:txBody>
-                </a:tc>
-                <a:tc>
-                  <a:txBody>
-                    <a:bodyPr/>
-                    <a:lstStyle/>
-                    <a:p>
-                      <a:pPr lvl="0" indent="0" marL="0">
-                        <a:buNone/>
-                      </a:pPr>
-                      <a:r>
-                        <a:rPr/>
-                        <a:t>129.650855</a:t>
-                      </a:r>
-                    </a:p>
-                  </a:txBody>
-                </a:tc>
-                <a:tc>
-                  <a:txBody>
-                    <a:bodyPr/>
-                    <a:lstStyle/>
-                    <a:p>
-                      <a:pPr lvl="0" indent="0" marL="0">
-                        <a:buNone/>
-                      </a:pPr>
-                      <a:r>
-                        <a:rPr/>
-                        <a:t>36.628377</a:t>
-                      </a:r>
-                    </a:p>
-                  </a:txBody>
-                </a:tc>
-                <a:tc>
-                  <a:txBody>
-                    <a:bodyPr/>
-                    <a:lstStyle/>
-                    <a:p>
-                      <a:pPr lvl="0" indent="0" marL="0">
-                        <a:buNone/>
-                      </a:pPr>
-                      <a:r>
-                        <a:rPr/>
-                        <a:t>0.123679</a:t>
-                      </a:r>
-                    </a:p>
-                  </a:txBody>
-                </a:tc>
-              </a:tr>
-              <a:tr h="0">
-                <a:tc>
-                  <a:txBody>
-                    <a:bodyPr/>
-                    <a:lstStyle/>
-                    <a:p>
-                      <a:pPr lvl="0" indent="0" marL="0">
-                        <a:buNone/>
-                      </a:pPr>
-                      <a:r>
-                        <a:rPr/>
-                        <a:t>2</a:t>
-                      </a:r>
-                    </a:p>
-                  </a:txBody>
-                </a:tc>
-                <a:tc>
-                  <a:txBody>
-                    <a:bodyPr/>
-                    <a:lstStyle/>
-                    <a:p>
-                      <a:pPr lvl="0" indent="0" marL="0">
-                        <a:buNone/>
-                      </a:pPr>
-                      <a:r>
-                        <a:rPr/>
-                        <a:t>balsam fir</a:t>
-                      </a:r>
-                    </a:p>
-                  </a:txBody>
-                </a:tc>
-                <a:tc>
-                  <a:txBody>
-                    <a:bodyPr/>
-                    <a:lstStyle/>
-                    <a:p>
-                      <a:pPr lvl="0" indent="0" marL="0">
-                        <a:buNone/>
-                      </a:pPr>
-                      <a:r>
-                        <a:rPr/>
-                        <a:t>4</a:t>
-                      </a:r>
-                    </a:p>
-                  </a:txBody>
-                </a:tc>
-                <a:tc>
-                  <a:txBody>
-                    <a:bodyPr/>
-                    <a:lstStyle/>
-                    <a:p>
-                      <a:pPr lvl="0" indent="0" marL="0">
-                        <a:buNone/>
-                      </a:pPr>
-                      <a:r>
-                        <a:rPr/>
-                        <a:t>134.599829</a:t>
-                      </a:r>
-                    </a:p>
-                  </a:txBody>
-                </a:tc>
-                <a:tc>
-                  <a:txBody>
-                    <a:bodyPr/>
-                    <a:lstStyle/>
-                    <a:p>
-                      <a:pPr lvl="0" indent="0" marL="0">
-                        <a:buNone/>
-                      </a:pPr>
-                      <a:r>
-                        <a:rPr/>
-                        <a:t>38.884870</a:t>
-                      </a:r>
-                    </a:p>
-                  </a:txBody>
-                </a:tc>
-                <a:tc>
-                  <a:txBody>
-                    <a:bodyPr/>
-                    <a:lstStyle/>
-                    <a:p>
-                      <a:pPr lvl="0" indent="0" marL="0">
-                        <a:buNone/>
-                      </a:pPr>
-                      <a:r>
-                        <a:rPr/>
-                        <a:t>0.133858</a:t>
-                      </a:r>
-                    </a:p>
-                  </a:txBody>
-                </a:tc>
-              </a:tr>
-              <a:tr h="0">
-                <a:tc>
-                  <a:txBody>
-                    <a:bodyPr/>
-                    <a:lstStyle/>
-                    <a:p>
-                      <a:pPr lvl="0" indent="0" marL="0">
-                        <a:buNone/>
-                      </a:pPr>
-                      <a:r>
-                        <a:rPr/>
-                        <a:t>3</a:t>
-                      </a:r>
-                    </a:p>
-                  </a:txBody>
-                </a:tc>
-                <a:tc>
-                  <a:txBody>
-                    <a:bodyPr/>
-                    <a:lstStyle/>
-                    <a:p>
-                      <a:pPr lvl="0" indent="0" marL="0">
-                        <a:buNone/>
-                      </a:pPr>
-                      <a:r>
-                        <a:rPr/>
-                        <a:t>balsam fir</a:t>
-                      </a:r>
-                    </a:p>
-                  </a:txBody>
-                </a:tc>
-                <a:tc>
-                  <a:txBody>
-                    <a:bodyPr/>
-                    <a:lstStyle/>
-                    <a:p>
-                      <a:pPr lvl="0" indent="0" marL="0">
-                        <a:buNone/>
-                      </a:pPr>
-                      <a:r>
-                        <a:rPr/>
-                        <a:t>5</a:t>
-                      </a:r>
-                    </a:p>
-                  </a:txBody>
-                </a:tc>
-                <a:tc>
-                  <a:txBody>
-                    <a:bodyPr/>
-                    <a:lstStyle/>
-                    <a:p>
-                      <a:pPr lvl="0" indent="0" marL="0">
-                        <a:buNone/>
-                      </a:pPr>
-                      <a:r>
-                        <a:rPr/>
-                        <a:t>145.002852</a:t>
-                      </a:r>
-                    </a:p>
-                  </a:txBody>
-                </a:tc>
-                <a:tc>
-                  <a:txBody>
-                    <a:bodyPr/>
-                    <a:lstStyle/>
-                    <a:p>
-                      <a:pPr lvl="0" indent="0" marL="0">
-                        <a:buNone/>
-                      </a:pPr>
-                      <a:r>
-                        <a:rPr/>
-                        <a:t>41.168470</a:t>
-                      </a:r>
-                    </a:p>
-                  </a:txBody>
-                </a:tc>
-                <a:tc>
-                  <a:txBody>
-                    <a:bodyPr/>
-                    <a:lstStyle/>
-                    <a:p>
-                      <a:pPr lvl="0" indent="0" marL="0">
-                        <a:buNone/>
-                      </a:pPr>
-                      <a:r>
-                        <a:rPr/>
-                        <a:t>0.144052</a:t>
-                      </a:r>
-                    </a:p>
-                  </a:txBody>
-                </a:tc>
-              </a:tr>
-              <a:tr h="0">
-                <a:tc>
-                  <a:txBody>
-                    <a:bodyPr/>
-                    <a:lstStyle/>
-                    <a:p>
-                      <a:pPr lvl="0" indent="0" marL="0">
-                        <a:buNone/>
-                      </a:pPr>
-                      <a:r>
-                        <a:rPr/>
-                        <a:t>4</a:t>
-                      </a:r>
-                    </a:p>
-                  </a:txBody>
-                </a:tc>
-                <a:tc>
-                  <a:txBody>
-                    <a:bodyPr/>
-                    <a:lstStyle/>
-                    <a:p>
-                      <a:pPr lvl="0" indent="0" marL="0">
-                        <a:buNone/>
-                      </a:pPr>
-                      <a:r>
-                        <a:rPr/>
-                        <a:t>balsam fir</a:t>
-                      </a:r>
-                    </a:p>
-                  </a:txBody>
-                </a:tc>
-                <a:tc>
-                  <a:txBody>
-                    <a:bodyPr/>
-                    <a:lstStyle/>
-                    <a:p>
-                      <a:pPr lvl="0" indent="0" marL="0">
-                        <a:buNone/>
-                      </a:pPr>
-                      <a:r>
-                        <a:rPr/>
-                        <a:t>6</a:t>
-                      </a:r>
-                    </a:p>
-                  </a:txBody>
-                </a:tc>
-                <a:tc>
-                  <a:txBody>
-                    <a:bodyPr/>
-                    <a:lstStyle/>
-                    <a:p>
-                      <a:pPr lvl="0" indent="0" marL="0">
-                        <a:buNone/>
-                      </a:pPr>
-                      <a:r>
-                        <a:rPr/>
-                        <a:t>147.449208</a:t>
-                      </a:r>
-                    </a:p>
-                  </a:txBody>
-                </a:tc>
-                <a:tc>
-                  <a:txBody>
-                    <a:bodyPr/>
-                    <a:lstStyle/>
-                    <a:p>
-                      <a:pPr lvl="0" indent="0" marL="0">
-                        <a:buNone/>
-                      </a:pPr>
-                      <a:r>
-                        <a:rPr/>
-                        <a:t>40.728609</a:t>
-                      </a:r>
-                    </a:p>
-                  </a:txBody>
-                </a:tc>
-                <a:tc>
-                  <a:txBody>
-                    <a:bodyPr/>
-                    <a:lstStyle/>
-                    <a:p>
-                      <a:pPr lvl="0" indent="0" marL="0">
-                        <a:buNone/>
-                      </a:pPr>
-                      <a:r>
-                        <a:rPr/>
-                        <a:t>0.142813</a:t>
-                      </a:r>
-                    </a:p>
-                  </a:txBody>
-                </a:tc>
-              </a:tr>
-              <a:tr h="0">
-                <a:tc>
-                  <a:txBody>
-                    <a:bodyPr/>
-                    <a:lstStyle/>
-                    <a:p>
-                      <a:pPr lvl="0" indent="0" marL="0">
-                        <a:buNone/>
-                      </a:pPr>
-                      <a:r>
-                        <a:rPr/>
-                        <a:t>...</a:t>
-                      </a:r>
-                    </a:p>
-                  </a:txBody>
-                </a:tc>
-                <a:tc>
-                  <a:txBody>
-                    <a:bodyPr/>
-                    <a:lstStyle/>
-                    <a:p>
-                      <a:pPr lvl="0" indent="0" marL="0">
-                        <a:buNone/>
-                      </a:pPr>
-                      <a:r>
-                        <a:rPr/>
-                        <a:t>...</a:t>
-                      </a:r>
-                    </a:p>
-                  </a:txBody>
-                </a:tc>
-                <a:tc>
-                  <a:txBody>
-                    <a:bodyPr/>
-                    <a:lstStyle/>
-                    <a:p>
-                      <a:pPr lvl="0" indent="0" marL="0">
-                        <a:buNone/>
-                      </a:pPr>
-                      <a:r>
-                        <a:rPr/>
-                        <a:t>...</a:t>
-                      </a:r>
-                    </a:p>
-                  </a:txBody>
-                </a:tc>
-                <a:tc>
-                  <a:txBody>
-                    <a:bodyPr/>
-                    <a:lstStyle/>
-                    <a:p>
-                      <a:pPr lvl="0" indent="0" marL="0">
-                        <a:buNone/>
-                      </a:pPr>
-                      <a:r>
-                        <a:rPr/>
-                        <a:t>...</a:t>
-                      </a:r>
-                    </a:p>
-                  </a:txBody>
-                </a:tc>
-                <a:tc>
-                  <a:txBody>
-                    <a:bodyPr/>
-                    <a:lstStyle/>
-                    <a:p>
-                      <a:pPr lvl="0" indent="0" marL="0">
-                        <a:buNone/>
-                      </a:pPr>
-                      <a:r>
-                        <a:rPr/>
-                        <a:t>...</a:t>
-                      </a:r>
-                    </a:p>
-                  </a:txBody>
-                </a:tc>
-                <a:tc>
-                  <a:txBody>
-                    <a:bodyPr/>
-                    <a:lstStyle/>
-                    <a:p>
-                      <a:pPr lvl="0" indent="0" marL="0">
-                        <a:buNone/>
-                      </a:pPr>
-                      <a:r>
-                        <a:rPr/>
-                        <a:t>...</a:t>
-                      </a:r>
-                    </a:p>
-                  </a:txBody>
-                </a:tc>
-              </a:tr>
-              <a:tr h="0">
-                <a:tc>
-                  <a:txBody>
-                    <a:bodyPr/>
-                    <a:lstStyle/>
-                    <a:p>
-                      <a:pPr lvl="0" indent="0" marL="0">
-                        <a:buNone/>
-                      </a:pPr>
-                      <a:r>
-                        <a:rPr/>
-                        <a:t>895</a:t>
-                      </a:r>
-                    </a:p>
-                  </a:txBody>
-                </a:tc>
-                <a:tc>
-                  <a:txBody>
-                    <a:bodyPr/>
-                    <a:lstStyle/>
-                    <a:p>
-                      <a:pPr lvl="0" indent="0" marL="0">
-                        <a:buNone/>
-                      </a:pPr>
-                      <a:r>
-                        <a:rPr/>
-                        <a:t>sugarberry</a:t>
-                      </a:r>
-                    </a:p>
-                  </a:txBody>
-                </a:tc>
-                <a:tc>
-                  <a:txBody>
-                    <a:bodyPr/>
-                    <a:lstStyle/>
-                    <a:p>
-                      <a:pPr lvl="0" indent="0" marL="0">
-                        <a:buNone/>
-                      </a:pPr>
-                      <a:r>
-                        <a:rPr/>
-                        <a:t>6</a:t>
-                      </a:r>
-                    </a:p>
-                  </a:txBody>
-                </a:tc>
-                <a:tc>
-                  <a:txBody>
-                    <a:bodyPr/>
-                    <a:lstStyle/>
-                    <a:p>
-                      <a:pPr lvl="0" indent="0" marL="0">
-                        <a:buNone/>
-                      </a:pPr>
-                      <a:r>
-                        <a:rPr/>
-                        <a:t>32.431052</a:t>
-                      </a:r>
-                    </a:p>
-                  </a:txBody>
-                </a:tc>
-                <a:tc>
-                  <a:txBody>
-                    <a:bodyPr/>
-                    <a:lstStyle/>
-                    <a:p>
-                      <a:pPr lvl="0" indent="0" marL="0">
-                        <a:buNone/>
-                      </a:pPr>
-                      <a:r>
-                        <a:rPr/>
-                        <a:t>20.969306</a:t>
-                      </a:r>
-                    </a:p>
-                  </a:txBody>
-                </a:tc>
-                <a:tc>
-                  <a:txBody>
-                    <a:bodyPr/>
-                    <a:lstStyle/>
-                    <a:p>
-                      <a:pPr lvl="0" indent="0" marL="0">
-                        <a:buNone/>
-                      </a:pPr>
-                      <a:r>
-                        <a:rPr/>
-                        <a:t>0.565727</a:t>
-                      </a:r>
-                    </a:p>
-                  </a:txBody>
-                </a:tc>
-              </a:tr>
-              <a:tr h="0">
-                <a:tc>
-                  <a:txBody>
-                    <a:bodyPr/>
-                    <a:lstStyle/>
-                    <a:p>
-                      <a:pPr lvl="0" indent="0" marL="0">
-                        <a:buNone/>
-                      </a:pPr>
-                      <a:r>
-                        <a:rPr/>
-                        <a:t>896</a:t>
-                      </a:r>
-                    </a:p>
-                  </a:txBody>
-                </a:tc>
-                <a:tc>
-                  <a:txBody>
-                    <a:bodyPr/>
-                    <a:lstStyle/>
-                    <a:p>
-                      <a:pPr lvl="0" indent="0" marL="0">
-                        <a:buNone/>
-                      </a:pPr>
-                      <a:r>
-                        <a:rPr/>
-                        <a:t>sugarberry</a:t>
-                      </a:r>
-                    </a:p>
-                  </a:txBody>
-                </a:tc>
-                <a:tc>
-                  <a:txBody>
-                    <a:bodyPr/>
-                    <a:lstStyle/>
-                    <a:p>
-                      <a:pPr lvl="0" indent="0" marL="0">
-                        <a:buNone/>
-                      </a:pPr>
-                      <a:r>
-                        <a:rPr/>
-                        <a:t>7</a:t>
-                      </a:r>
-                    </a:p>
-                  </a:txBody>
-                </a:tc>
-                <a:tc>
-                  <a:txBody>
-                    <a:bodyPr/>
-                    <a:lstStyle/>
-                    <a:p>
-                      <a:pPr lvl="0" indent="0" marL="0">
-                        <a:buNone/>
-                      </a:pPr>
-                      <a:r>
-                        <a:rPr/>
-                        <a:t>37.324259</a:t>
-                      </a:r>
-                    </a:p>
-                  </a:txBody>
-                </a:tc>
-                <a:tc>
-                  <a:txBody>
-                    <a:bodyPr/>
-                    <a:lstStyle/>
-                    <a:p>
-                      <a:pPr lvl="0" indent="0" marL="0">
-                        <a:buNone/>
-                      </a:pPr>
-                      <a:r>
-                        <a:rPr/>
-                        <a:t>25.037024</a:t>
-                      </a:r>
-                    </a:p>
-                  </a:txBody>
-                </a:tc>
-                <a:tc>
-                  <a:txBody>
-                    <a:bodyPr/>
-                    <a:lstStyle/>
-                    <a:p>
-                      <a:pPr lvl="0" indent="0" marL="0">
-                        <a:buNone/>
-                      </a:pPr>
-                      <a:r>
-                        <a:rPr/>
-                        <a:t>0.637629</a:t>
-                      </a:r>
-                    </a:p>
-                  </a:txBody>
-                </a:tc>
-              </a:tr>
-              <a:tr h="0">
-                <a:tc>
-                  <a:txBody>
-                    <a:bodyPr/>
-                    <a:lstStyle/>
-                    <a:p>
-                      <a:pPr lvl="0" indent="0" marL="0">
-                        <a:buNone/>
-                      </a:pPr>
-                      <a:r>
-                        <a:rPr/>
-                        <a:t>897</a:t>
-                      </a:r>
-                    </a:p>
-                  </a:txBody>
-                </a:tc>
-                <a:tc>
-                  <a:txBody>
-                    <a:bodyPr/>
-                    <a:lstStyle/>
-                    <a:p>
-                      <a:pPr lvl="0" indent="0" marL="0">
-                        <a:buNone/>
-                      </a:pPr>
-                      <a:r>
-                        <a:rPr/>
-                        <a:t>sugarberry</a:t>
-                      </a:r>
-                    </a:p>
-                  </a:txBody>
-                </a:tc>
-                <a:tc>
-                  <a:txBody>
-                    <a:bodyPr/>
-                    <a:lstStyle/>
-                    <a:p>
-                      <a:pPr lvl="0" indent="0" marL="0">
-                        <a:buNone/>
-                      </a:pPr>
-                      <a:r>
-                        <a:rPr/>
-                        <a:t>8</a:t>
-                      </a:r>
-                    </a:p>
-                  </a:txBody>
-                </a:tc>
-                <a:tc>
-                  <a:txBody>
-                    <a:bodyPr/>
-                    <a:lstStyle/>
-                    <a:p>
-                      <a:pPr lvl="0" indent="0" marL="0">
-                        <a:buNone/>
-                      </a:pPr>
-                      <a:r>
-                        <a:rPr/>
-                        <a:t>38.144756</a:t>
-                      </a:r>
-                    </a:p>
-                  </a:txBody>
-                </a:tc>
-                <a:tc>
-                  <a:txBody>
-                    <a:bodyPr/>
-                    <a:lstStyle/>
-                    <a:p>
-                      <a:pPr lvl="0" indent="0" marL="0">
-                        <a:buNone/>
-                      </a:pPr>
-                      <a:r>
-                        <a:rPr/>
-                        <a:t>26.680208</a:t>
-                      </a:r>
-                    </a:p>
-                  </a:txBody>
-                </a:tc>
-                <a:tc>
-                  <a:txBody>
-                    <a:bodyPr/>
-                    <a:lstStyle/>
-                    <a:p>
-                      <a:pPr lvl="0" indent="0" marL="0">
-                        <a:buNone/>
-                      </a:pPr>
-                      <a:r>
-                        <a:rPr/>
-                        <a:t>0.665159</a:t>
-                      </a:r>
-                    </a:p>
-                  </a:txBody>
-                </a:tc>
-              </a:tr>
-              <a:tr h="0">
-                <a:tc>
-                  <a:txBody>
-                    <a:bodyPr/>
-                    <a:lstStyle/>
-                    <a:p>
-                      <a:pPr lvl="0" indent="0" marL="0">
-                        <a:buNone/>
-                      </a:pPr>
-                      <a:r>
-                        <a:rPr/>
-                        <a:t>898</a:t>
-                      </a:r>
-                    </a:p>
-                  </a:txBody>
-                </a:tc>
-                <a:tc>
-                  <a:txBody>
-                    <a:bodyPr/>
-                    <a:lstStyle/>
-                    <a:p>
-                      <a:pPr lvl="0" indent="0" marL="0">
-                        <a:buNone/>
-                      </a:pPr>
-                      <a:r>
-                        <a:rPr/>
-                        <a:t>sugarberry</a:t>
-                      </a:r>
-                    </a:p>
-                  </a:txBody>
-                </a:tc>
-                <a:tc>
-                  <a:txBody>
-                    <a:bodyPr/>
-                    <a:lstStyle/>
-                    <a:p>
-                      <a:pPr lvl="0" indent="0" marL="0">
-                        <a:buNone/>
-                      </a:pPr>
-                      <a:r>
-                        <a:rPr/>
-                        <a:t>9</a:t>
-                      </a:r>
-                    </a:p>
-                  </a:txBody>
-                </a:tc>
-                <a:tc>
-                  <a:txBody>
-                    <a:bodyPr/>
-                    <a:lstStyle/>
-                    <a:p>
-                      <a:pPr lvl="0" indent="0" marL="0">
-                        <a:buNone/>
-                      </a:pPr>
-                      <a:r>
-                        <a:rPr/>
-                        <a:t>36.853245</a:t>
-                      </a:r>
-                    </a:p>
-                  </a:txBody>
-                </a:tc>
-                <a:tc>
-                  <a:txBody>
-                    <a:bodyPr/>
-                    <a:lstStyle/>
-                    <a:p>
-                      <a:pPr lvl="0" indent="0" marL="0">
-                        <a:buNone/>
-                      </a:pPr>
-                      <a:r>
-                        <a:rPr/>
-                        <a:t>21.021667</a:t>
-                      </a:r>
-                    </a:p>
-                  </a:txBody>
-                </a:tc>
-                <a:tc>
-                  <a:txBody>
-                    <a:bodyPr/>
-                    <a:lstStyle/>
-                    <a:p>
-                      <a:pPr lvl="0" indent="0" marL="0">
-                        <a:buNone/>
-                      </a:pPr>
-                      <a:r>
-                        <a:rPr/>
-                        <a:t>0.685162</a:t>
-                      </a:r>
-                    </a:p>
-                  </a:txBody>
-                </a:tc>
-              </a:tr>
-              <a:tr h="0">
-                <a:tc>
-                  <a:txBody>
-                    <a:bodyPr/>
-                    <a:lstStyle/>
-                    <a:p>
-                      <a:pPr lvl="0" indent="0" marL="0">
-                        <a:buNone/>
-                      </a:pPr>
-                      <a:r>
-                        <a:rPr/>
-                        <a:t>899</a:t>
-                      </a:r>
-                    </a:p>
-                  </a:txBody>
-                </a:tc>
-                <a:tc>
-                  <a:txBody>
-                    <a:bodyPr/>
-                    <a:lstStyle/>
-                    <a:p>
-                      <a:pPr lvl="0" indent="0" marL="0">
-                        <a:buNone/>
-                      </a:pPr>
-                      <a:r>
-                        <a:rPr/>
-                        <a:t>sugarberry</a:t>
-                      </a:r>
-                    </a:p>
-                  </a:txBody>
-                </a:tc>
-                <a:tc>
-                  <a:txBody>
-                    <a:bodyPr/>
-                    <a:lstStyle/>
-                    <a:p>
-                      <a:pPr lvl="0" indent="0" marL="0">
-                        <a:buNone/>
-                      </a:pPr>
-                      <a:r>
-                        <a:rPr/>
-                        <a:t>10</a:t>
-                      </a:r>
-                    </a:p>
-                  </a:txBody>
-                </a:tc>
-                <a:tc>
-                  <a:txBody>
-                    <a:bodyPr/>
-                    <a:lstStyle/>
-                    <a:p>
-                      <a:pPr lvl="0" indent="0" marL="0">
-                        <a:buNone/>
-                      </a:pPr>
-                      <a:r>
-                        <a:rPr/>
-                        <a:t>40.091106</a:t>
-                      </a:r>
-                    </a:p>
-                  </a:txBody>
-                </a:tc>
-                <a:tc>
-                  <a:txBody>
-                    <a:bodyPr/>
-                    <a:lstStyle/>
-                    <a:p>
-                      <a:pPr lvl="0" indent="0" marL="0">
-                        <a:buNone/>
-                      </a:pPr>
-                      <a:r>
-                        <a:rPr/>
-                        <a:t>23.172083</a:t>
-                      </a:r>
-                    </a:p>
-                  </a:txBody>
-                </a:tc>
-                <a:tc>
-                  <a:txBody>
-                    <a:bodyPr/>
-                    <a:lstStyle/>
-                    <a:p>
-                      <a:pPr lvl="0" indent="0" marL="0">
-                        <a:buNone/>
-                      </a:pPr>
-                      <a:r>
-                        <a:rPr/>
-                        <a:t>0.677519</a:t>
-                      </a:r>
-                    </a:p>
-                  </a:txBody>
-                </a:tc>
-              </a:tr>
-            </a:tbl>
-          </a:graphicData>
-        </a:graphic>
-      </p:graphicFrame>
+        </p:nvSpPr>
+        <p:spPr/>
+        <p:txBody>
+          <a:bodyPr/>
+          <a:lstStyle/>
+          <a:p>
+            <a:pPr lvl="0" indent="0">
+              <a:buNone/>
+            </a:pPr>
+            <a:r>
+              <a:rPr>
+                <a:latin typeface="Courier"/>
+              </a:rPr>
+              <a:t>    k  Avg_RMSLE
+0   2   0.152783
+1   3   0.158068
+2   4   0.162118
+3   5   0.168001
+4   6   0.174249
+5   7   0.180282
+6   8   0.185071
+7   9   0.190148
+8  10   0.196831</a:t>
+            </a:r>
+          </a:p>
+        </p:txBody>
+      </p:sp>
     </p:spTree>
   </p:cSld>
 </p:sld>
@@ -5461,6 +5290,468 @@
                       <a:r>
                         <a:rPr/>
                         <a:t>113.92</a:t>
+                      </a:r>
+                    </a:p>
+                  </a:txBody>
+                </a:tc>
+              </a:tr>
+              <a:tr h="0">
+                <a:tc>
+                  <a:txBody>
+                    <a:bodyPr/>
+                    <a:lstStyle/>
+                    <a:p>
+                      <a:pPr lvl="0" indent="0" marL="0">
+                        <a:buNone/>
+                      </a:pPr>
+                      <a:r>
+                        <a:rPr/>
+                        <a:t>...</a:t>
+                      </a:r>
+                    </a:p>
+                  </a:txBody>
+                </a:tc>
+                <a:tc>
+                  <a:txBody>
+                    <a:bodyPr/>
+                    <a:lstStyle/>
+                    <a:p>
+                      <a:pPr lvl="0" indent="0" marL="0">
+                        <a:buNone/>
+                      </a:pPr>
+                      <a:r>
+                        <a:rPr/>
+                        <a:t>...</a:t>
+                      </a:r>
+                    </a:p>
+                  </a:txBody>
+                </a:tc>
+                <a:tc>
+                  <a:txBody>
+                    <a:bodyPr/>
+                    <a:lstStyle/>
+                    <a:p>
+                      <a:pPr lvl="0" indent="0" marL="0">
+                        <a:buNone/>
+                      </a:pPr>
+                      <a:r>
+                        <a:rPr/>
+                        <a:t>...</a:t>
+                      </a:r>
+                    </a:p>
+                  </a:txBody>
+                </a:tc>
+                <a:tc>
+                  <a:txBody>
+                    <a:bodyPr/>
+                    <a:lstStyle/>
+                    <a:p>
+                      <a:pPr lvl="0" indent="0" marL="0">
+                        <a:buNone/>
+                      </a:pPr>
+                      <a:r>
+                        <a:rPr/>
+                        <a:t>...</a:t>
+                      </a:r>
+                    </a:p>
+                  </a:txBody>
+                </a:tc>
+                <a:tc>
+                  <a:txBody>
+                    <a:bodyPr/>
+                    <a:lstStyle/>
+                    <a:p>
+                      <a:pPr lvl="0" indent="0" marL="0">
+                        <a:buNone/>
+                      </a:pPr>
+                      <a:r>
+                        <a:rPr/>
+                        <a:t>...</a:t>
+                      </a:r>
+                    </a:p>
+                  </a:txBody>
+                </a:tc>
+              </a:tr>
+              <a:tr h="0">
+                <a:tc>
+                  <a:txBody>
+                    <a:bodyPr/>
+                    <a:lstStyle/>
+                    <a:p>
+                      <a:pPr lvl="0" indent="0" marL="0">
+                        <a:buNone/>
+                      </a:pPr>
+                      <a:r>
+                        <a:rPr/>
+                        <a:t>137074</a:t>
+                      </a:r>
+                    </a:p>
+                  </a:txBody>
+                </a:tc>
+                <a:tc>
+                  <a:txBody>
+                    <a:bodyPr/>
+                    <a:lstStyle/>
+                    <a:p>
+                      <a:pPr lvl="0" indent="0" marL="0">
+                        <a:buNone/>
+                      </a:pPr>
+                      <a:r>
+                        <a:rPr/>
+                        <a:t>922</a:t>
+                      </a:r>
+                    </a:p>
+                  </a:txBody>
+                </a:tc>
+                <a:tc>
+                  <a:txBody>
+                    <a:bodyPr/>
+                    <a:lstStyle/>
+                    <a:p>
+                      <a:pPr lvl="0" indent="0" marL="0">
+                        <a:buNone/>
+                      </a:pPr>
+                      <a:r>
+                        <a:rPr/>
+                        <a:t>2.5</a:t>
+                      </a:r>
+                    </a:p>
+                  </a:txBody>
+                </a:tc>
+                <a:tc>
+                  <a:txBody>
+                    <a:bodyPr/>
+                    <a:lstStyle/>
+                    <a:p>
+                      <a:pPr lvl="0" indent="0" marL="0">
+                        <a:buNone/>
+                      </a:pPr>
+                      <a:r>
+                        <a:rPr/>
+                        <a:t>24.8</a:t>
+                      </a:r>
+                    </a:p>
+                  </a:txBody>
+                </a:tc>
+                <a:tc>
+                  <a:txBody>
+                    <a:bodyPr/>
+                    <a:lstStyle/>
+                    <a:p>
+                      <a:pPr lvl="0" indent="0" marL="0">
+                        <a:buNone/>
+                      </a:pPr>
+                      <a:r>
+                        <a:rPr/>
+                        <a:t>15.98</a:t>
+                      </a:r>
+                    </a:p>
+                  </a:txBody>
+                </a:tc>
+              </a:tr>
+              <a:tr h="0">
+                <a:tc>
+                  <a:txBody>
+                    <a:bodyPr/>
+                    <a:lstStyle/>
+                    <a:p>
+                      <a:pPr lvl="0" indent="0" marL="0">
+                        <a:buNone/>
+                      </a:pPr>
+                      <a:r>
+                        <a:rPr/>
+                        <a:t>137075</a:t>
+                      </a:r>
+                    </a:p>
+                  </a:txBody>
+                </a:tc>
+                <a:tc>
+                  <a:txBody>
+                    <a:bodyPr/>
+                    <a:lstStyle/>
+                    <a:p>
+                      <a:pPr lvl="0" indent="0" marL="0">
+                        <a:buNone/>
+                      </a:pPr>
+                      <a:r>
+                        <a:rPr/>
+                        <a:t>922</a:t>
+                      </a:r>
+                    </a:p>
+                  </a:txBody>
+                </a:tc>
+                <a:tc>
+                  <a:txBody>
+                    <a:bodyPr/>
+                    <a:lstStyle/>
+                    <a:p>
+                      <a:pPr lvl="0" indent="0" marL="0">
+                        <a:buNone/>
+                      </a:pPr>
+                      <a:r>
+                        <a:rPr/>
+                        <a:t>3.7</a:t>
+                      </a:r>
+                    </a:p>
+                  </a:txBody>
+                </a:tc>
+                <a:tc>
+                  <a:txBody>
+                    <a:bodyPr/>
+                    <a:lstStyle/>
+                    <a:p>
+                      <a:pPr lvl="0" indent="0" marL="0">
+                        <a:buNone/>
+                      </a:pPr>
+                      <a:r>
+                        <a:rPr/>
+                        <a:t>23.7</a:t>
+                      </a:r>
+                    </a:p>
+                  </a:txBody>
+                </a:tc>
+                <a:tc>
+                  <a:txBody>
+                    <a:bodyPr/>
+                    <a:lstStyle/>
+                    <a:p>
+                      <a:pPr lvl="0" indent="0" marL="0">
+                        <a:buNone/>
+                      </a:pPr>
+                      <a:r>
+                        <a:rPr/>
+                        <a:t>40.62</a:t>
+                      </a:r>
+                    </a:p>
+                  </a:txBody>
+                </a:tc>
+              </a:tr>
+              <a:tr h="0">
+                <a:tc>
+                  <a:txBody>
+                    <a:bodyPr/>
+                    <a:lstStyle/>
+                    <a:p>
+                      <a:pPr lvl="0" indent="0" marL="0">
+                        <a:buNone/>
+                      </a:pPr>
+                      <a:r>
+                        <a:rPr/>
+                        <a:t>137076</a:t>
+                      </a:r>
+                    </a:p>
+                  </a:txBody>
+                </a:tc>
+                <a:tc>
+                  <a:txBody>
+                    <a:bodyPr/>
+                    <a:lstStyle/>
+                    <a:p>
+                      <a:pPr lvl="0" indent="0" marL="0">
+                        <a:buNone/>
+                      </a:pPr>
+                      <a:r>
+                        <a:rPr/>
+                        <a:t>922</a:t>
+                      </a:r>
+                    </a:p>
+                  </a:txBody>
+                </a:tc>
+                <a:tc>
+                  <a:txBody>
+                    <a:bodyPr/>
+                    <a:lstStyle/>
+                    <a:p>
+                      <a:pPr lvl="0" indent="0" marL="0">
+                        <a:buNone/>
+                      </a:pPr>
+                      <a:r>
+                        <a:rPr/>
+                        <a:t>2.9</a:t>
+                      </a:r>
+                    </a:p>
+                  </a:txBody>
+                </a:tc>
+                <a:tc>
+                  <a:txBody>
+                    <a:bodyPr/>
+                    <a:lstStyle/>
+                    <a:p>
+                      <a:pPr lvl="0" indent="0" marL="0">
+                        <a:buNone/>
+                      </a:pPr>
+                      <a:r>
+                        <a:rPr/>
+                        <a:t>30.9</a:t>
+                      </a:r>
+                    </a:p>
+                  </a:txBody>
+                </a:tc>
+                <a:tc>
+                  <a:txBody>
+                    <a:bodyPr/>
+                    <a:lstStyle/>
+                    <a:p>
+                      <a:pPr lvl="0" indent="0" marL="0">
+                        <a:buNone/>
+                      </a:pPr>
+                      <a:r>
+                        <a:rPr/>
+                        <a:t>22.74</a:t>
+                      </a:r>
+                    </a:p>
+                  </a:txBody>
+                </a:tc>
+              </a:tr>
+              <a:tr h="0">
+                <a:tc>
+                  <a:txBody>
+                    <a:bodyPr/>
+                    <a:lstStyle/>
+                    <a:p>
+                      <a:pPr lvl="0" indent="0" marL="0">
+                        <a:buNone/>
+                      </a:pPr>
+                      <a:r>
+                        <a:rPr/>
+                        <a:t>137077</a:t>
+                      </a:r>
+                    </a:p>
+                  </a:txBody>
+                </a:tc>
+                <a:tc>
+                  <a:txBody>
+                    <a:bodyPr/>
+                    <a:lstStyle/>
+                    <a:p>
+                      <a:pPr lvl="0" indent="0" marL="0">
+                        <a:buNone/>
+                      </a:pPr>
+                      <a:r>
+                        <a:rPr/>
+                        <a:t>922</a:t>
+                      </a:r>
+                    </a:p>
+                  </a:txBody>
+                </a:tc>
+                <a:tc>
+                  <a:txBody>
+                    <a:bodyPr/>
+                    <a:lstStyle/>
+                    <a:p>
+                      <a:pPr lvl="0" indent="0" marL="0">
+                        <a:buNone/>
+                      </a:pPr>
+                      <a:r>
+                        <a:rPr/>
+                        <a:t>5.6</a:t>
+                      </a:r>
+                    </a:p>
+                  </a:txBody>
+                </a:tc>
+                <a:tc>
+                  <a:txBody>
+                    <a:bodyPr/>
+                    <a:lstStyle/>
+                    <a:p>
+                      <a:pPr lvl="0" indent="0" marL="0">
+                        <a:buNone/>
+                      </a:pPr>
+                      <a:r>
+                        <a:rPr/>
+                        <a:t>40.0</a:t>
+                      </a:r>
+                    </a:p>
+                  </a:txBody>
+                </a:tc>
+                <a:tc>
+                  <a:txBody>
+                    <a:bodyPr/>
+                    <a:lstStyle/>
+                    <a:p>
+                      <a:pPr lvl="0" indent="0" marL="0">
+                        <a:buNone/>
+                      </a:pPr>
+                      <a:r>
+                        <a:rPr/>
+                        <a:t>87.79</a:t>
+                      </a:r>
+                    </a:p>
+                  </a:txBody>
+                </a:tc>
+              </a:tr>
+              <a:tr h="0">
+                <a:tc>
+                  <a:txBody>
+                    <a:bodyPr/>
+                    <a:lstStyle/>
+                    <a:p>
+                      <a:pPr lvl="0" indent="0" marL="0">
+                        <a:buNone/>
+                      </a:pPr>
+                      <a:r>
+                        <a:rPr/>
+                        <a:t>137078</a:t>
+                      </a:r>
+                    </a:p>
+                  </a:txBody>
+                </a:tc>
+                <a:tc>
+                  <a:txBody>
+                    <a:bodyPr/>
+                    <a:lstStyle/>
+                    <a:p>
+                      <a:pPr lvl="0" indent="0" marL="0">
+                        <a:buNone/>
+                      </a:pPr>
+                      <a:r>
+                        <a:rPr/>
+                        <a:t>922</a:t>
+                      </a:r>
+                    </a:p>
+                  </a:txBody>
+                </a:tc>
+                <a:tc>
+                  <a:txBody>
+                    <a:bodyPr/>
+                    <a:lstStyle/>
+                    <a:p>
+                      <a:pPr lvl="0" indent="0" marL="0">
+                        <a:buNone/>
+                      </a:pPr>
+                      <a:r>
+                        <a:rPr/>
+                        <a:t>1.9</a:t>
+                      </a:r>
+                    </a:p>
+                  </a:txBody>
+                </a:tc>
+                <a:tc>
+                  <a:txBody>
+                    <a:bodyPr/>
+                    <a:lstStyle/>
+                    <a:p>
+                      <a:pPr lvl="0" indent="0" marL="0">
+                        <a:buNone/>
+                      </a:pPr>
+                      <a:r>
+                        <a:rPr/>
+                        <a:t>25.1</a:t>
+                      </a:r>
+                    </a:p>
+                  </a:txBody>
+                </a:tc>
+                <a:tc>
+                  <a:txBody>
+                    <a:bodyPr/>
+                    <a:lstStyle/>
+                    <a:p>
+                      <a:pPr lvl="0" indent="0" marL="0">
+                        <a:buNone/>
+                      </a:pPr>
+                      <a:r>
+                        <a:rPr/>
+                        <a:t>8.33</a:t>
                       </a:r>
                     </a:p>
                   </a:txBody>
@@ -5821,6 +6112,288 @@
                   </a:txBody>
                 </a:tc>
               </a:tr>
+              <a:tr h="0">
+                <a:tc>
+                  <a:txBody>
+                    <a:bodyPr/>
+                    <a:lstStyle/>
+                    <a:p>
+                      <a:pPr lvl="0" indent="0" marL="0">
+                        <a:buNone/>
+                      </a:pPr>
+                      <a:r>
+                        <a:rPr/>
+                        <a:t>...</a:t>
+                      </a:r>
+                    </a:p>
+                  </a:txBody>
+                </a:tc>
+                <a:tc>
+                  <a:txBody>
+                    <a:bodyPr/>
+                    <a:lstStyle/>
+                    <a:p>
+                      <a:pPr lvl="0" indent="0" marL="0">
+                        <a:buNone/>
+                      </a:pPr>
+                      <a:r>
+                        <a:rPr/>
+                        <a:t>...</a:t>
+                      </a:r>
+                    </a:p>
+                  </a:txBody>
+                </a:tc>
+                <a:tc>
+                  <a:txBody>
+                    <a:bodyPr/>
+                    <a:lstStyle/>
+                    <a:p>
+                      <a:pPr lvl="0" indent="0" marL="0">
+                        <a:buNone/>
+                      </a:pPr>
+                      <a:r>
+                        <a:rPr/>
+                        <a:t>...</a:t>
+                      </a:r>
+                    </a:p>
+                  </a:txBody>
+                </a:tc>
+              </a:tr>
+              <a:tr h="0">
+                <a:tc>
+                  <a:txBody>
+                    <a:bodyPr/>
+                    <a:lstStyle/>
+                    <a:p>
+                      <a:pPr lvl="0" indent="0" marL="0">
+                        <a:buNone/>
+                      </a:pPr>
+                      <a:r>
+                        <a:rPr/>
+                        <a:t>453</a:t>
+                      </a:r>
+                    </a:p>
+                  </a:txBody>
+                </a:tc>
+                <a:tc>
+                  <a:txBody>
+                    <a:bodyPr/>
+                    <a:lstStyle/>
+                    <a:p>
+                      <a:pPr lvl="0" indent="0" marL="0">
+                        <a:buNone/>
+                      </a:pPr>
+                      <a:r>
+                        <a:rPr/>
+                        <a:t>995</a:t>
+                      </a:r>
+                    </a:p>
+                  </a:txBody>
+                </a:tc>
+                <a:tc>
+                  <a:txBody>
+                    <a:bodyPr/>
+                    <a:lstStyle/>
+                    <a:p>
+                      <a:pPr lvl="0" indent="0" marL="0">
+                        <a:buNone/>
+                      </a:pPr>
+                      <a:r>
+                        <a:rPr/>
+                        <a:t>tungoil tree</a:t>
+                      </a:r>
+                    </a:p>
+                  </a:txBody>
+                </a:tc>
+              </a:tr>
+              <a:tr h="0">
+                <a:tc>
+                  <a:txBody>
+                    <a:bodyPr/>
+                    <a:lstStyle/>
+                    <a:p>
+                      <a:pPr lvl="0" indent="0" marL="0">
+                        <a:buNone/>
+                      </a:pPr>
+                      <a:r>
+                        <a:rPr/>
+                        <a:t>454</a:t>
+                      </a:r>
+                    </a:p>
+                  </a:txBody>
+                </a:tc>
+                <a:tc>
+                  <a:txBody>
+                    <a:bodyPr/>
+                    <a:lstStyle/>
+                    <a:p>
+                      <a:pPr lvl="0" indent="0" marL="0">
+                        <a:buNone/>
+                      </a:pPr>
+                      <a:r>
+                        <a:rPr/>
+                        <a:t>996</a:t>
+                      </a:r>
+                    </a:p>
+                  </a:txBody>
+                </a:tc>
+                <a:tc>
+                  <a:txBody>
+                    <a:bodyPr/>
+                    <a:lstStyle/>
+                    <a:p>
+                      <a:pPr lvl="0" indent="0" marL="0">
+                        <a:buNone/>
+                      </a:pPr>
+                      <a:r>
+                        <a:rPr/>
+                        <a:t>smoketree</a:t>
+                      </a:r>
+                    </a:p>
+                  </a:txBody>
+                </a:tc>
+              </a:tr>
+              <a:tr h="0">
+                <a:tc>
+                  <a:txBody>
+                    <a:bodyPr/>
+                    <a:lstStyle/>
+                    <a:p>
+                      <a:pPr lvl="0" indent="0" marL="0">
+                        <a:buNone/>
+                      </a:pPr>
+                      <a:r>
+                        <a:rPr/>
+                        <a:t>455</a:t>
+                      </a:r>
+                    </a:p>
+                  </a:txBody>
+                </a:tc>
+                <a:tc>
+                  <a:txBody>
+                    <a:bodyPr/>
+                    <a:lstStyle/>
+                    <a:p>
+                      <a:pPr lvl="0" indent="0" marL="0">
+                        <a:buNone/>
+                      </a:pPr>
+                      <a:r>
+                        <a:rPr/>
+                        <a:t>997</a:t>
+                      </a:r>
+                    </a:p>
+                  </a:txBody>
+                </a:tc>
+                <a:tc>
+                  <a:txBody>
+                    <a:bodyPr/>
+                    <a:lstStyle/>
+                    <a:p>
+                      <a:pPr lvl="0" indent="0" marL="0">
+                        <a:buNone/>
+                      </a:pPr>
+                      <a:r>
+                        <a:rPr/>
+                        <a:t>Russian-olive</a:t>
+                      </a:r>
+                    </a:p>
+                  </a:txBody>
+                </a:tc>
+              </a:tr>
+              <a:tr h="0">
+                <a:tc>
+                  <a:txBody>
+                    <a:bodyPr/>
+                    <a:lstStyle/>
+                    <a:p>
+                      <a:pPr lvl="0" indent="0" marL="0">
+                        <a:buNone/>
+                      </a:pPr>
+                      <a:r>
+                        <a:rPr/>
+                        <a:t>456</a:t>
+                      </a:r>
+                    </a:p>
+                  </a:txBody>
+                </a:tc>
+                <a:tc>
+                  <a:txBody>
+                    <a:bodyPr/>
+                    <a:lstStyle/>
+                    <a:p>
+                      <a:pPr lvl="0" indent="0" marL="0">
+                        <a:buNone/>
+                      </a:pPr>
+                      <a:r>
+                        <a:rPr/>
+                        <a:t>998</a:t>
+                      </a:r>
+                    </a:p>
+                  </a:txBody>
+                </a:tc>
+                <a:tc>
+                  <a:txBody>
+                    <a:bodyPr/>
+                    <a:lstStyle/>
+                    <a:p>
+                      <a:pPr lvl="0" indent="0" marL="0">
+                        <a:buNone/>
+                      </a:pPr>
+                      <a:r>
+                        <a:rPr/>
+                        <a:t>Unknown dead hardwood</a:t>
+                      </a:r>
+                    </a:p>
+                  </a:txBody>
+                </a:tc>
+              </a:tr>
+              <a:tr h="0">
+                <a:tc>
+                  <a:txBody>
+                    <a:bodyPr/>
+                    <a:lstStyle/>
+                    <a:p>
+                      <a:pPr lvl="0" indent="0" marL="0">
+                        <a:buNone/>
+                      </a:pPr>
+                      <a:r>
+                        <a:rPr/>
+                        <a:t>457</a:t>
+                      </a:r>
+                    </a:p>
+                  </a:txBody>
+                </a:tc>
+                <a:tc>
+                  <a:txBody>
+                    <a:bodyPr/>
+                    <a:lstStyle/>
+                    <a:p>
+                      <a:pPr lvl="0" indent="0" marL="0">
+                        <a:buNone/>
+                      </a:pPr>
+                      <a:r>
+                        <a:rPr/>
+                        <a:t>999</a:t>
+                      </a:r>
+                    </a:p>
+                  </a:txBody>
+                </a:tc>
+                <a:tc>
+                  <a:txBody>
+                    <a:bodyPr/>
+                    <a:lstStyle/>
+                    <a:p>
+                      <a:pPr lvl="0" indent="0" marL="0">
+                        <a:buNone/>
+                      </a:pPr>
+                      <a:r>
+                        <a:rPr/>
+                        <a:t>Other or unknown live tree</a:t>
+                      </a:r>
+                    </a:p>
+                  </a:txBody>
+                </a:tc>
+              </a:tr>
             </a:tbl>
           </a:graphicData>
         </a:graphic>
@@ -6447,6 +7020,558 @@
                       <a:r>
                         <a:rPr/>
                         <a:t>balsam fir</a:t>
+                      </a:r>
+                    </a:p>
+                  </a:txBody>
+                </a:tc>
+              </a:tr>
+              <a:tr h="0">
+                <a:tc>
+                  <a:txBody>
+                    <a:bodyPr/>
+                    <a:lstStyle/>
+                    <a:p>
+                      <a:pPr lvl="0" indent="0" marL="0">
+                        <a:buNone/>
+                      </a:pPr>
+                      <a:r>
+                        <a:rPr/>
+                        <a:t>...</a:t>
+                      </a:r>
+                    </a:p>
+                  </a:txBody>
+                </a:tc>
+                <a:tc>
+                  <a:txBody>
+                    <a:bodyPr/>
+                    <a:lstStyle/>
+                    <a:p>
+                      <a:pPr lvl="0" indent="0" marL="0">
+                        <a:buNone/>
+                      </a:pPr>
+                      <a:r>
+                        <a:rPr/>
+                        <a:t>...</a:t>
+                      </a:r>
+                    </a:p>
+                  </a:txBody>
+                </a:tc>
+                <a:tc>
+                  <a:txBody>
+                    <a:bodyPr/>
+                    <a:lstStyle/>
+                    <a:p>
+                      <a:pPr lvl="0" indent="0" marL="0">
+                        <a:buNone/>
+                      </a:pPr>
+                      <a:r>
+                        <a:rPr/>
+                        <a:t>...</a:t>
+                      </a:r>
+                    </a:p>
+                  </a:txBody>
+                </a:tc>
+                <a:tc>
+                  <a:txBody>
+                    <a:bodyPr/>
+                    <a:lstStyle/>
+                    <a:p>
+                      <a:pPr lvl="0" indent="0" marL="0">
+                        <a:buNone/>
+                      </a:pPr>
+                      <a:r>
+                        <a:rPr/>
+                        <a:t>...</a:t>
+                      </a:r>
+                    </a:p>
+                  </a:txBody>
+                </a:tc>
+                <a:tc>
+                  <a:txBody>
+                    <a:bodyPr/>
+                    <a:lstStyle/>
+                    <a:p>
+                      <a:pPr lvl="0" indent="0" marL="0">
+                        <a:buNone/>
+                      </a:pPr>
+                      <a:r>
+                        <a:rPr/>
+                        <a:t>...</a:t>
+                      </a:r>
+                    </a:p>
+                  </a:txBody>
+                </a:tc>
+                <a:tc>
+                  <a:txBody>
+                    <a:bodyPr/>
+                    <a:lstStyle/>
+                    <a:p>
+                      <a:pPr lvl="0" indent="0" marL="0">
+                        <a:buNone/>
+                      </a:pPr>
+                      <a:r>
+                        <a:rPr/>
+                        <a:t>...</a:t>
+                      </a:r>
+                    </a:p>
+                  </a:txBody>
+                </a:tc>
+              </a:tr>
+              <a:tr h="0">
+                <a:tc>
+                  <a:txBody>
+                    <a:bodyPr/>
+                    <a:lstStyle/>
+                    <a:p>
+                      <a:pPr lvl="0" indent="0" marL="0">
+                        <a:buNone/>
+                      </a:pPr>
+                      <a:r>
+                        <a:rPr/>
+                        <a:t>137074</a:t>
+                      </a:r>
+                    </a:p>
+                  </a:txBody>
+                </a:tc>
+                <a:tc>
+                  <a:txBody>
+                    <a:bodyPr/>
+                    <a:lstStyle/>
+                    <a:p>
+                      <a:pPr lvl="0" indent="0" marL="0">
+                        <a:buNone/>
+                      </a:pPr>
+                      <a:r>
+                        <a:rPr/>
+                        <a:t>922</a:t>
+                      </a:r>
+                    </a:p>
+                  </a:txBody>
+                </a:tc>
+                <a:tc>
+                  <a:txBody>
+                    <a:bodyPr/>
+                    <a:lstStyle/>
+                    <a:p>
+                      <a:pPr lvl="0" indent="0" marL="0">
+                        <a:buNone/>
+                      </a:pPr>
+                      <a:r>
+                        <a:rPr/>
+                        <a:t>2.5</a:t>
+                      </a:r>
+                    </a:p>
+                  </a:txBody>
+                </a:tc>
+                <a:tc>
+                  <a:txBody>
+                    <a:bodyPr/>
+                    <a:lstStyle/>
+                    <a:p>
+                      <a:pPr lvl="0" indent="0" marL="0">
+                        <a:buNone/>
+                      </a:pPr>
+                      <a:r>
+                        <a:rPr/>
+                        <a:t>24.8</a:t>
+                      </a:r>
+                    </a:p>
+                  </a:txBody>
+                </a:tc>
+                <a:tc>
+                  <a:txBody>
+                    <a:bodyPr/>
+                    <a:lstStyle/>
+                    <a:p>
+                      <a:pPr lvl="0" indent="0" marL="0">
+                        <a:buNone/>
+                      </a:pPr>
+                      <a:r>
+                        <a:rPr/>
+                        <a:t>15.98</a:t>
+                      </a:r>
+                    </a:p>
+                  </a:txBody>
+                </a:tc>
+                <a:tc>
+                  <a:txBody>
+                    <a:bodyPr/>
+                    <a:lstStyle/>
+                    <a:p>
+                      <a:pPr lvl="0" indent="0" marL="0">
+                        <a:buNone/>
+                      </a:pPr>
+                      <a:r>
+                        <a:rPr/>
+                        <a:t>black willow</a:t>
+                      </a:r>
+                    </a:p>
+                  </a:txBody>
+                </a:tc>
+              </a:tr>
+              <a:tr h="0">
+                <a:tc>
+                  <a:txBody>
+                    <a:bodyPr/>
+                    <a:lstStyle/>
+                    <a:p>
+                      <a:pPr lvl="0" indent="0" marL="0">
+                        <a:buNone/>
+                      </a:pPr>
+                      <a:r>
+                        <a:rPr/>
+                        <a:t>137075</a:t>
+                      </a:r>
+                    </a:p>
+                  </a:txBody>
+                </a:tc>
+                <a:tc>
+                  <a:txBody>
+                    <a:bodyPr/>
+                    <a:lstStyle/>
+                    <a:p>
+                      <a:pPr lvl="0" indent="0" marL="0">
+                        <a:buNone/>
+                      </a:pPr>
+                      <a:r>
+                        <a:rPr/>
+                        <a:t>922</a:t>
+                      </a:r>
+                    </a:p>
+                  </a:txBody>
+                </a:tc>
+                <a:tc>
+                  <a:txBody>
+                    <a:bodyPr/>
+                    <a:lstStyle/>
+                    <a:p>
+                      <a:pPr lvl="0" indent="0" marL="0">
+                        <a:buNone/>
+                      </a:pPr>
+                      <a:r>
+                        <a:rPr/>
+                        <a:t>3.7</a:t>
+                      </a:r>
+                    </a:p>
+                  </a:txBody>
+                </a:tc>
+                <a:tc>
+                  <a:txBody>
+                    <a:bodyPr/>
+                    <a:lstStyle/>
+                    <a:p>
+                      <a:pPr lvl="0" indent="0" marL="0">
+                        <a:buNone/>
+                      </a:pPr>
+                      <a:r>
+                        <a:rPr/>
+                        <a:t>23.7</a:t>
+                      </a:r>
+                    </a:p>
+                  </a:txBody>
+                </a:tc>
+                <a:tc>
+                  <a:txBody>
+                    <a:bodyPr/>
+                    <a:lstStyle/>
+                    <a:p>
+                      <a:pPr lvl="0" indent="0" marL="0">
+                        <a:buNone/>
+                      </a:pPr>
+                      <a:r>
+                        <a:rPr/>
+                        <a:t>40.62</a:t>
+                      </a:r>
+                    </a:p>
+                  </a:txBody>
+                </a:tc>
+                <a:tc>
+                  <a:txBody>
+                    <a:bodyPr/>
+                    <a:lstStyle/>
+                    <a:p>
+                      <a:pPr lvl="0" indent="0" marL="0">
+                        <a:buNone/>
+                      </a:pPr>
+                      <a:r>
+                        <a:rPr/>
+                        <a:t>black willow</a:t>
+                      </a:r>
+                    </a:p>
+                  </a:txBody>
+                </a:tc>
+              </a:tr>
+              <a:tr h="0">
+                <a:tc>
+                  <a:txBody>
+                    <a:bodyPr/>
+                    <a:lstStyle/>
+                    <a:p>
+                      <a:pPr lvl="0" indent="0" marL="0">
+                        <a:buNone/>
+                      </a:pPr>
+                      <a:r>
+                        <a:rPr/>
+                        <a:t>137076</a:t>
+                      </a:r>
+                    </a:p>
+                  </a:txBody>
+                </a:tc>
+                <a:tc>
+                  <a:txBody>
+                    <a:bodyPr/>
+                    <a:lstStyle/>
+                    <a:p>
+                      <a:pPr lvl="0" indent="0" marL="0">
+                        <a:buNone/>
+                      </a:pPr>
+                      <a:r>
+                        <a:rPr/>
+                        <a:t>922</a:t>
+                      </a:r>
+                    </a:p>
+                  </a:txBody>
+                </a:tc>
+                <a:tc>
+                  <a:txBody>
+                    <a:bodyPr/>
+                    <a:lstStyle/>
+                    <a:p>
+                      <a:pPr lvl="0" indent="0" marL="0">
+                        <a:buNone/>
+                      </a:pPr>
+                      <a:r>
+                        <a:rPr/>
+                        <a:t>2.9</a:t>
+                      </a:r>
+                    </a:p>
+                  </a:txBody>
+                </a:tc>
+                <a:tc>
+                  <a:txBody>
+                    <a:bodyPr/>
+                    <a:lstStyle/>
+                    <a:p>
+                      <a:pPr lvl="0" indent="0" marL="0">
+                        <a:buNone/>
+                      </a:pPr>
+                      <a:r>
+                        <a:rPr/>
+                        <a:t>30.9</a:t>
+                      </a:r>
+                    </a:p>
+                  </a:txBody>
+                </a:tc>
+                <a:tc>
+                  <a:txBody>
+                    <a:bodyPr/>
+                    <a:lstStyle/>
+                    <a:p>
+                      <a:pPr lvl="0" indent="0" marL="0">
+                        <a:buNone/>
+                      </a:pPr>
+                      <a:r>
+                        <a:rPr/>
+                        <a:t>22.74</a:t>
+                      </a:r>
+                    </a:p>
+                  </a:txBody>
+                </a:tc>
+                <a:tc>
+                  <a:txBody>
+                    <a:bodyPr/>
+                    <a:lstStyle/>
+                    <a:p>
+                      <a:pPr lvl="0" indent="0" marL="0">
+                        <a:buNone/>
+                      </a:pPr>
+                      <a:r>
+                        <a:rPr/>
+                        <a:t>black willow</a:t>
+                      </a:r>
+                    </a:p>
+                  </a:txBody>
+                </a:tc>
+              </a:tr>
+              <a:tr h="0">
+                <a:tc>
+                  <a:txBody>
+                    <a:bodyPr/>
+                    <a:lstStyle/>
+                    <a:p>
+                      <a:pPr lvl="0" indent="0" marL="0">
+                        <a:buNone/>
+                      </a:pPr>
+                      <a:r>
+                        <a:rPr/>
+                        <a:t>137077</a:t>
+                      </a:r>
+                    </a:p>
+                  </a:txBody>
+                </a:tc>
+                <a:tc>
+                  <a:txBody>
+                    <a:bodyPr/>
+                    <a:lstStyle/>
+                    <a:p>
+                      <a:pPr lvl="0" indent="0" marL="0">
+                        <a:buNone/>
+                      </a:pPr>
+                      <a:r>
+                        <a:rPr/>
+                        <a:t>922</a:t>
+                      </a:r>
+                    </a:p>
+                  </a:txBody>
+                </a:tc>
+                <a:tc>
+                  <a:txBody>
+                    <a:bodyPr/>
+                    <a:lstStyle/>
+                    <a:p>
+                      <a:pPr lvl="0" indent="0" marL="0">
+                        <a:buNone/>
+                      </a:pPr>
+                      <a:r>
+                        <a:rPr/>
+                        <a:t>5.6</a:t>
+                      </a:r>
+                    </a:p>
+                  </a:txBody>
+                </a:tc>
+                <a:tc>
+                  <a:txBody>
+                    <a:bodyPr/>
+                    <a:lstStyle/>
+                    <a:p>
+                      <a:pPr lvl="0" indent="0" marL="0">
+                        <a:buNone/>
+                      </a:pPr>
+                      <a:r>
+                        <a:rPr/>
+                        <a:t>40.0</a:t>
+                      </a:r>
+                    </a:p>
+                  </a:txBody>
+                </a:tc>
+                <a:tc>
+                  <a:txBody>
+                    <a:bodyPr/>
+                    <a:lstStyle/>
+                    <a:p>
+                      <a:pPr lvl="0" indent="0" marL="0">
+                        <a:buNone/>
+                      </a:pPr>
+                      <a:r>
+                        <a:rPr/>
+                        <a:t>87.79</a:t>
+                      </a:r>
+                    </a:p>
+                  </a:txBody>
+                </a:tc>
+                <a:tc>
+                  <a:txBody>
+                    <a:bodyPr/>
+                    <a:lstStyle/>
+                    <a:p>
+                      <a:pPr lvl="0" indent="0" marL="0">
+                        <a:buNone/>
+                      </a:pPr>
+                      <a:r>
+                        <a:rPr/>
+                        <a:t>black willow</a:t>
+                      </a:r>
+                    </a:p>
+                  </a:txBody>
+                </a:tc>
+              </a:tr>
+              <a:tr h="0">
+                <a:tc>
+                  <a:txBody>
+                    <a:bodyPr/>
+                    <a:lstStyle/>
+                    <a:p>
+                      <a:pPr lvl="0" indent="0" marL="0">
+                        <a:buNone/>
+                      </a:pPr>
+                      <a:r>
+                        <a:rPr/>
+                        <a:t>137078</a:t>
+                      </a:r>
+                    </a:p>
+                  </a:txBody>
+                </a:tc>
+                <a:tc>
+                  <a:txBody>
+                    <a:bodyPr/>
+                    <a:lstStyle/>
+                    <a:p>
+                      <a:pPr lvl="0" indent="0" marL="0">
+                        <a:buNone/>
+                      </a:pPr>
+                      <a:r>
+                        <a:rPr/>
+                        <a:t>922</a:t>
+                      </a:r>
+                    </a:p>
+                  </a:txBody>
+                </a:tc>
+                <a:tc>
+                  <a:txBody>
+                    <a:bodyPr/>
+                    <a:lstStyle/>
+                    <a:p>
+                      <a:pPr lvl="0" indent="0" marL="0">
+                        <a:buNone/>
+                      </a:pPr>
+                      <a:r>
+                        <a:rPr/>
+                        <a:t>1.9</a:t>
+                      </a:r>
+                    </a:p>
+                  </a:txBody>
+                </a:tc>
+                <a:tc>
+                  <a:txBody>
+                    <a:bodyPr/>
+                    <a:lstStyle/>
+                    <a:p>
+                      <a:pPr lvl="0" indent="0" marL="0">
+                        <a:buNone/>
+                      </a:pPr>
+                      <a:r>
+                        <a:rPr/>
+                        <a:t>25.1</a:t>
+                      </a:r>
+                    </a:p>
+                  </a:txBody>
+                </a:tc>
+                <a:tc>
+                  <a:txBody>
+                    <a:bodyPr/>
+                    <a:lstStyle/>
+                    <a:p>
+                      <a:pPr lvl="0" indent="0" marL="0">
+                        <a:buNone/>
+                      </a:pPr>
+                      <a:r>
+                        <a:rPr/>
+                        <a:t>8.33</a:t>
+                      </a:r>
+                    </a:p>
+                  </a:txBody>
+                </a:tc>
+                <a:tc>
+                  <a:txBody>
+                    <a:bodyPr/>
+                    <a:lstStyle/>
+                    <a:p>
+                      <a:pPr lvl="0" indent="0" marL="0">
+                        <a:buNone/>
+                      </a:pPr>
+                      <a:r>
+                        <a:rPr/>
+                        <a:t>black willow</a:t>
                       </a:r>
                     </a:p>
                   </a:txBody>
@@ -7793,11 +8918,11 @@
               <a:rPr>
                 <a:latin typeface="Courier"/>
               </a:rPr>
-              <a:t>Average Root Mean Squared Log Error (RMSLE) for k = 3: 0.15806802121296354
-Average Root Mean Squared Log Error (RMSLE) for k = 4: 0.16211832525051928
-Average Root Mean Squared Log Error (RMSLE) for k = 5: 0.16800130283205583
-Average Root Mean Squared Log Error (RMSLE) for k = 6: 0.1742492363008993
-Average Root Mean Squared Log Error (RMSLE) for k = 7: 0.18028213163724163</a:t>
+              <a:t>Average (RMSLE) for k = 3: 0.15806802121296354
+Average (RMSLE) for k = 4: 0.16211832525051928
+Average (RMSLE) for k = 5: 0.16800130283205583
+Average (RMSLE) for k = 6: 0.1742492363008993
+Average (RMSLE) for k = 7: 0.18028213163724163</a:t>
             </a:r>
           </a:p>
         </p:txBody>
@@ -8700,6 +9825,828 @@
                       <a:r>
                         <a:rPr/>
                         <a:t>2683.24</a:t>
+                      </a:r>
+                    </a:p>
+                  </a:txBody>
+                </a:tc>
+              </a:tr>
+              <a:tr h="0">
+                <a:tc>
+                  <a:txBody>
+                    <a:bodyPr/>
+                    <a:lstStyle/>
+                    <a:p>
+                      <a:pPr lvl="0" indent="0" marL="0">
+                        <a:buNone/>
+                      </a:pPr>
+                      <a:r>
+                        <a:rPr/>
+                        <a:t>...</a:t>
+                      </a:r>
+                    </a:p>
+                  </a:txBody>
+                </a:tc>
+                <a:tc>
+                  <a:txBody>
+                    <a:bodyPr/>
+                    <a:lstStyle/>
+                    <a:p>
+                      <a:pPr lvl="0" indent="0" marL="0">
+                        <a:buNone/>
+                      </a:pPr>
+                      <a:r>
+                        <a:rPr/>
+                        <a:t>...</a:t>
+                      </a:r>
+                    </a:p>
+                  </a:txBody>
+                </a:tc>
+                <a:tc>
+                  <a:txBody>
+                    <a:bodyPr/>
+                    <a:lstStyle/>
+                    <a:p>
+                      <a:pPr lvl="0" indent="0" marL="0">
+                        <a:buNone/>
+                      </a:pPr>
+                      <a:r>
+                        <a:rPr/>
+                        <a:t>...</a:t>
+                      </a:r>
+                    </a:p>
+                  </a:txBody>
+                </a:tc>
+                <a:tc>
+                  <a:txBody>
+                    <a:bodyPr/>
+                    <a:lstStyle/>
+                    <a:p>
+                      <a:pPr lvl="0" indent="0" marL="0">
+                        <a:buNone/>
+                      </a:pPr>
+                      <a:r>
+                        <a:rPr/>
+                        <a:t>...</a:t>
+                      </a:r>
+                    </a:p>
+                  </a:txBody>
+                </a:tc>
+                <a:tc>
+                  <a:txBody>
+                    <a:bodyPr/>
+                    <a:lstStyle/>
+                    <a:p>
+                      <a:pPr lvl="0" indent="0" marL="0">
+                        <a:buNone/>
+                      </a:pPr>
+                      <a:r>
+                        <a:rPr/>
+                        <a:t>...</a:t>
+                      </a:r>
+                    </a:p>
+                  </a:txBody>
+                </a:tc>
+                <a:tc>
+                  <a:txBody>
+                    <a:bodyPr/>
+                    <a:lstStyle/>
+                    <a:p>
+                      <a:pPr lvl="0" indent="0" marL="0">
+                        <a:buNone/>
+                      </a:pPr>
+                      <a:r>
+                        <a:rPr/>
+                        <a:t>...</a:t>
+                      </a:r>
+                    </a:p>
+                  </a:txBody>
+                </a:tc>
+                <a:tc>
+                  <a:txBody>
+                    <a:bodyPr/>
+                    <a:lstStyle/>
+                    <a:p>
+                      <a:pPr lvl="0" indent="0" marL="0">
+                        <a:buNone/>
+                      </a:pPr>
+                      <a:r>
+                        <a:rPr/>
+                        <a:t>...</a:t>
+                      </a:r>
+                    </a:p>
+                  </a:txBody>
+                </a:tc>
+                <a:tc>
+                  <a:txBody>
+                    <a:bodyPr/>
+                    <a:lstStyle/>
+                    <a:p>
+                      <a:pPr lvl="0" indent="0" marL="0">
+                        <a:buNone/>
+                      </a:pPr>
+                      <a:r>
+                        <a:rPr/>
+                        <a:t>...</a:t>
+                      </a:r>
+                    </a:p>
+                  </a:txBody>
+                </a:tc>
+                <a:tc>
+                  <a:txBody>
+                    <a:bodyPr/>
+                    <a:lstStyle/>
+                    <a:p>
+                      <a:pPr lvl="0" indent="0" marL="0">
+                        <a:buNone/>
+                      </a:pPr>
+                      <a:r>
+                        <a:rPr/>
+                        <a:t>...</a:t>
+                      </a:r>
+                    </a:p>
+                  </a:txBody>
+                </a:tc>
+              </a:tr>
+              <a:tr h="0">
+                <a:tc>
+                  <a:txBody>
+                    <a:bodyPr/>
+                    <a:lstStyle/>
+                    <a:p>
+                      <a:pPr lvl="0" indent="0" marL="0">
+                        <a:buNone/>
+                      </a:pPr>
+                      <a:r>
+                        <a:rPr/>
+                        <a:t>107641</a:t>
+                      </a:r>
+                    </a:p>
+                  </a:txBody>
+                </a:tc>
+                <a:tc>
+                  <a:txBody>
+                    <a:bodyPr/>
+                    <a:lstStyle/>
+                    <a:p>
+                      <a:pPr lvl="0" indent="0" marL="0">
+                        <a:buNone/>
+                      </a:pPr>
+                      <a:r>
+                        <a:rPr/>
+                        <a:t>461</a:t>
+                      </a:r>
+                    </a:p>
+                  </a:txBody>
+                </a:tc>
+                <a:tc>
+                  <a:txBody>
+                    <a:bodyPr/>
+                    <a:lstStyle/>
+                    <a:p>
+                      <a:pPr lvl="0" indent="0" marL="0">
+                        <a:buNone/>
+                      </a:pPr>
+                      <a:r>
+                        <a:rPr/>
+                        <a:t>17.5</a:t>
+                      </a:r>
+                    </a:p>
+                  </a:txBody>
+                </a:tc>
+                <a:tc>
+                  <a:txBody>
+                    <a:bodyPr/>
+                    <a:lstStyle/>
+                    <a:p>
+                      <a:pPr lvl="0" indent="0" marL="0">
+                        <a:buNone/>
+                      </a:pPr>
+                      <a:r>
+                        <a:rPr/>
+                        <a:t>87.4</a:t>
+                      </a:r>
+                    </a:p>
+                  </a:txBody>
+                </a:tc>
+                <a:tc>
+                  <a:txBody>
+                    <a:bodyPr/>
+                    <a:lstStyle/>
+                    <a:p>
+                      <a:pPr lvl="0" indent="0" marL="0">
+                        <a:buNone/>
+                      </a:pPr>
+                      <a:r>
+                        <a:rPr/>
+                        <a:t>2042.09</a:t>
+                      </a:r>
+                    </a:p>
+                  </a:txBody>
+                </a:tc>
+                <a:tc>
+                  <a:txBody>
+                    <a:bodyPr/>
+                    <a:lstStyle/>
+                    <a:p>
+                      <a:pPr lvl="0" indent="0" marL="0">
+                        <a:buNone/>
+                      </a:pPr>
+                      <a:r>
+                        <a:rPr/>
+                        <a:t>sugarberry</a:t>
+                      </a:r>
+                    </a:p>
+                  </a:txBody>
+                </a:tc>
+                <a:tc>
+                  <a:txBody>
+                    <a:bodyPr/>
+                    <a:lstStyle/>
+                    <a:p>
+                      <a:pPr lvl="0" indent="0" marL="0">
+                        <a:buNone/>
+                      </a:pPr>
+                      <a:r>
+                        <a:rPr/>
+                        <a:t>21022.145834</a:t>
+                      </a:r>
+                    </a:p>
+                  </a:txBody>
+                </a:tc>
+                <a:tc>
+                  <a:txBody>
+                    <a:bodyPr/>
+                    <a:lstStyle/>
+                    <a:p>
+                      <a:pPr lvl="0" indent="0" marL="0">
+                        <a:buNone/>
+                      </a:pPr>
+                      <a:r>
+                        <a:rPr/>
+                        <a:t>1529.50</a:t>
+                      </a:r>
+                    </a:p>
+                  </a:txBody>
+                </a:tc>
+                <a:tc>
+                  <a:txBody>
+                    <a:bodyPr/>
+                    <a:lstStyle/>
+                    <a:p>
+                      <a:pPr lvl="0" indent="0" marL="0">
+                        <a:buNone/>
+                      </a:pPr>
+                      <a:r>
+                        <a:rPr/>
+                        <a:t>7638.76</a:t>
+                      </a:r>
+                    </a:p>
+                  </a:txBody>
+                </a:tc>
+              </a:tr>
+              <a:tr h="0">
+                <a:tc>
+                  <a:txBody>
+                    <a:bodyPr/>
+                    <a:lstStyle/>
+                    <a:p>
+                      <a:pPr lvl="0" indent="0" marL="0">
+                        <a:buNone/>
+                      </a:pPr>
+                      <a:r>
+                        <a:rPr/>
+                        <a:t>107642</a:t>
+                      </a:r>
+                    </a:p>
+                  </a:txBody>
+                </a:tc>
+                <a:tc>
+                  <a:txBody>
+                    <a:bodyPr/>
+                    <a:lstStyle/>
+                    <a:p>
+                      <a:pPr lvl="0" indent="0" marL="0">
+                        <a:buNone/>
+                      </a:pPr>
+                      <a:r>
+                        <a:rPr/>
+                        <a:t>461</a:t>
+                      </a:r>
+                    </a:p>
+                  </a:txBody>
+                </a:tc>
+                <a:tc>
+                  <a:txBody>
+                    <a:bodyPr/>
+                    <a:lstStyle/>
+                    <a:p>
+                      <a:pPr lvl="0" indent="0" marL="0">
+                        <a:buNone/>
+                      </a:pPr>
+                      <a:r>
+                        <a:rPr/>
+                        <a:t>10.0</a:t>
+                      </a:r>
+                    </a:p>
+                  </a:txBody>
+                </a:tc>
+                <a:tc>
+                  <a:txBody>
+                    <a:bodyPr/>
+                    <a:lstStyle/>
+                    <a:p>
+                      <a:pPr lvl="0" indent="0" marL="0">
+                        <a:buNone/>
+                      </a:pPr>
+                      <a:r>
+                        <a:rPr/>
+                        <a:t>66.5</a:t>
+                      </a:r>
+                    </a:p>
+                  </a:txBody>
+                </a:tc>
+                <a:tc>
+                  <a:txBody>
+                    <a:bodyPr/>
+                    <a:lstStyle/>
+                    <a:p>
+                      <a:pPr lvl="0" indent="0" marL="0">
+                        <a:buNone/>
+                      </a:pPr>
+                      <a:r>
+                        <a:rPr/>
+                        <a:t>565.80</a:t>
+                      </a:r>
+                    </a:p>
+                  </a:txBody>
+                </a:tc>
+                <a:tc>
+                  <a:txBody>
+                    <a:bodyPr/>
+                    <a:lstStyle/>
+                    <a:p>
+                      <a:pPr lvl="0" indent="0" marL="0">
+                        <a:buNone/>
+                      </a:pPr>
+                      <a:r>
+                        <a:rPr/>
+                        <a:t>sugarberry</a:t>
+                      </a:r>
+                    </a:p>
+                  </a:txBody>
+                </a:tc>
+                <a:tc>
+                  <a:txBody>
+                    <a:bodyPr/>
+                    <a:lstStyle/>
+                    <a:p>
+                      <a:pPr lvl="0" indent="0" marL="0">
+                        <a:buNone/>
+                      </a:pPr>
+                      <a:r>
+                        <a:rPr/>
+                        <a:t>5222.893375</a:t>
+                      </a:r>
+                    </a:p>
+                  </a:txBody>
+                </a:tc>
+                <a:tc>
+                  <a:txBody>
+                    <a:bodyPr/>
+                    <a:lstStyle/>
+                    <a:p>
+                      <a:pPr lvl="0" indent="0" marL="0">
+                        <a:buNone/>
+                      </a:pPr>
+                      <a:r>
+                        <a:rPr/>
+                        <a:t>665.00</a:t>
+                      </a:r>
+                    </a:p>
+                  </a:txBody>
+                </a:tc>
+                <a:tc>
+                  <a:txBody>
+                    <a:bodyPr/>
+                    <a:lstStyle/>
+                    <a:p>
+                      <a:pPr lvl="0" indent="0" marL="0">
+                        <a:buNone/>
+                      </a:pPr>
+                      <a:r>
+                        <a:rPr/>
+                        <a:t>4422.25</a:t>
+                      </a:r>
+                    </a:p>
+                  </a:txBody>
+                </a:tc>
+              </a:tr>
+              <a:tr h="0">
+                <a:tc>
+                  <a:txBody>
+                    <a:bodyPr/>
+                    <a:lstStyle/>
+                    <a:p>
+                      <a:pPr lvl="0" indent="0" marL="0">
+                        <a:buNone/>
+                      </a:pPr>
+                      <a:r>
+                        <a:rPr/>
+                        <a:t>107643</a:t>
+                      </a:r>
+                    </a:p>
+                  </a:txBody>
+                </a:tc>
+                <a:tc>
+                  <a:txBody>
+                    <a:bodyPr/>
+                    <a:lstStyle/>
+                    <a:p>
+                      <a:pPr lvl="0" indent="0" marL="0">
+                        <a:buNone/>
+                      </a:pPr>
+                      <a:r>
+                        <a:rPr/>
+                        <a:t>461</a:t>
+                      </a:r>
+                    </a:p>
+                  </a:txBody>
+                </a:tc>
+                <a:tc>
+                  <a:txBody>
+                    <a:bodyPr/>
+                    <a:lstStyle/>
+                    <a:p>
+                      <a:pPr lvl="0" indent="0" marL="0">
+                        <a:buNone/>
+                      </a:pPr>
+                      <a:r>
+                        <a:rPr/>
+                        <a:t>6.2</a:t>
+                      </a:r>
+                    </a:p>
+                  </a:txBody>
+                </a:tc>
+                <a:tc>
+                  <a:txBody>
+                    <a:bodyPr/>
+                    <a:lstStyle/>
+                    <a:p>
+                      <a:pPr lvl="0" indent="0" marL="0">
+                        <a:buNone/>
+                      </a:pPr>
+                      <a:r>
+                        <a:rPr/>
+                        <a:t>54.2</a:t>
+                      </a:r>
+                    </a:p>
+                  </a:txBody>
+                </a:tc>
+                <a:tc>
+                  <a:txBody>
+                    <a:bodyPr/>
+                    <a:lstStyle/>
+                    <a:p>
+                      <a:pPr lvl="0" indent="0" marL="0">
+                        <a:buNone/>
+                      </a:pPr>
+                      <a:r>
+                        <a:rPr/>
+                        <a:t>191.04</a:t>
+                      </a:r>
+                    </a:p>
+                  </a:txBody>
+                </a:tc>
+                <a:tc>
+                  <a:txBody>
+                    <a:bodyPr/>
+                    <a:lstStyle/>
+                    <a:p>
+                      <a:pPr lvl="0" indent="0" marL="0">
+                        <a:buNone/>
+                      </a:pPr>
+                      <a:r>
+                        <a:rPr/>
+                        <a:t>sugarberry</a:t>
+                      </a:r>
+                    </a:p>
+                  </a:txBody>
+                </a:tc>
+                <a:tc>
+                  <a:txBody>
+                    <a:bodyPr/>
+                    <a:lstStyle/>
+                    <a:p>
+                      <a:pPr lvl="0" indent="0" marL="0">
+                        <a:buNone/>
+                      </a:pPr>
+                      <a:r>
+                        <a:rPr/>
+                        <a:t>1636.334851</a:t>
+                      </a:r>
+                    </a:p>
+                  </a:txBody>
+                </a:tc>
+                <a:tc>
+                  <a:txBody>
+                    <a:bodyPr/>
+                    <a:lstStyle/>
+                    <a:p>
+                      <a:pPr lvl="0" indent="0" marL="0">
+                        <a:buNone/>
+                      </a:pPr>
+                      <a:r>
+                        <a:rPr/>
+                        <a:t>336.04</a:t>
+                      </a:r>
+                    </a:p>
+                  </a:txBody>
+                </a:tc>
+                <a:tc>
+                  <a:txBody>
+                    <a:bodyPr/>
+                    <a:lstStyle/>
+                    <a:p>
+                      <a:pPr lvl="0" indent="0" marL="0">
+                        <a:buNone/>
+                      </a:pPr>
+                      <a:r>
+                        <a:rPr/>
+                        <a:t>2937.64</a:t>
+                      </a:r>
+                    </a:p>
+                  </a:txBody>
+                </a:tc>
+              </a:tr>
+              <a:tr h="0">
+                <a:tc>
+                  <a:txBody>
+                    <a:bodyPr/>
+                    <a:lstStyle/>
+                    <a:p>
+                      <a:pPr lvl="0" indent="0" marL="0">
+                        <a:buNone/>
+                      </a:pPr>
+                      <a:r>
+                        <a:rPr/>
+                        <a:t>107644</a:t>
+                      </a:r>
+                    </a:p>
+                  </a:txBody>
+                </a:tc>
+                <a:tc>
+                  <a:txBody>
+                    <a:bodyPr/>
+                    <a:lstStyle/>
+                    <a:p>
+                      <a:pPr lvl="0" indent="0" marL="0">
+                        <a:buNone/>
+                      </a:pPr>
+                      <a:r>
+                        <a:rPr/>
+                        <a:t>461</a:t>
+                      </a:r>
+                    </a:p>
+                  </a:txBody>
+                </a:tc>
+                <a:tc>
+                  <a:txBody>
+                    <a:bodyPr/>
+                    <a:lstStyle/>
+                    <a:p>
+                      <a:pPr lvl="0" indent="0" marL="0">
+                        <a:buNone/>
+                      </a:pPr>
+                      <a:r>
+                        <a:rPr/>
+                        <a:t>16.0</a:t>
+                      </a:r>
+                    </a:p>
+                  </a:txBody>
+                </a:tc>
+                <a:tc>
+                  <a:txBody>
+                    <a:bodyPr/>
+                    <a:lstStyle/>
+                    <a:p>
+                      <a:pPr lvl="0" indent="0" marL="0">
+                        <a:buNone/>
+                      </a:pPr>
+                      <a:r>
+                        <a:rPr/>
+                        <a:t>82.5</a:t>
+                      </a:r>
+                    </a:p>
+                  </a:txBody>
+                </a:tc>
+                <a:tc>
+                  <a:txBody>
+                    <a:bodyPr/>
+                    <a:lstStyle/>
+                    <a:p>
+                      <a:pPr lvl="0" indent="0" marL="0">
+                        <a:buNone/>
+                      </a:pPr>
+                      <a:r>
+                        <a:rPr/>
+                        <a:t>1632.64</a:t>
+                      </a:r>
+                    </a:p>
+                  </a:txBody>
+                </a:tc>
+                <a:tc>
+                  <a:txBody>
+                    <a:bodyPr/>
+                    <a:lstStyle/>
+                    <a:p>
+                      <a:pPr lvl="0" indent="0" marL="0">
+                        <a:buNone/>
+                      </a:pPr>
+                      <a:r>
+                        <a:rPr/>
+                        <a:t>sugarberry</a:t>
+                      </a:r>
+                    </a:p>
+                  </a:txBody>
+                </a:tc>
+                <a:tc>
+                  <a:txBody>
+                    <a:bodyPr/>
+                    <a:lstStyle/>
+                    <a:p>
+                      <a:pPr lvl="0" indent="0" marL="0">
+                        <a:buNone/>
+                      </a:pPr>
+                      <a:r>
+                        <a:rPr/>
+                        <a:t>16587.595200</a:t>
+                      </a:r>
+                    </a:p>
+                  </a:txBody>
+                </a:tc>
+                <a:tc>
+                  <a:txBody>
+                    <a:bodyPr/>
+                    <a:lstStyle/>
+                    <a:p>
+                      <a:pPr lvl="0" indent="0" marL="0">
+                        <a:buNone/>
+                      </a:pPr>
+                      <a:r>
+                        <a:rPr/>
+                        <a:t>1320.00</a:t>
+                      </a:r>
+                    </a:p>
+                  </a:txBody>
+                </a:tc>
+                <a:tc>
+                  <a:txBody>
+                    <a:bodyPr/>
+                    <a:lstStyle/>
+                    <a:p>
+                      <a:pPr lvl="0" indent="0" marL="0">
+                        <a:buNone/>
+                      </a:pPr>
+                      <a:r>
+                        <a:rPr/>
+                        <a:t>6806.25</a:t>
+                      </a:r>
+                    </a:p>
+                  </a:txBody>
+                </a:tc>
+              </a:tr>
+              <a:tr h="0">
+                <a:tc>
+                  <a:txBody>
+                    <a:bodyPr/>
+                    <a:lstStyle/>
+                    <a:p>
+                      <a:pPr lvl="0" indent="0" marL="0">
+                        <a:buNone/>
+                      </a:pPr>
+                      <a:r>
+                        <a:rPr/>
+                        <a:t>107645</a:t>
+                      </a:r>
+                    </a:p>
+                  </a:txBody>
+                </a:tc>
+                <a:tc>
+                  <a:txBody>
+                    <a:bodyPr/>
+                    <a:lstStyle/>
+                    <a:p>
+                      <a:pPr lvl="0" indent="0" marL="0">
+                        <a:buNone/>
+                      </a:pPr>
+                      <a:r>
+                        <a:rPr/>
+                        <a:t>461</a:t>
+                      </a:r>
+                    </a:p>
+                  </a:txBody>
+                </a:tc>
+                <a:tc>
+                  <a:txBody>
+                    <a:bodyPr/>
+                    <a:lstStyle/>
+                    <a:p>
+                      <a:pPr lvl="0" indent="0" marL="0">
+                        <a:buNone/>
+                      </a:pPr>
+                      <a:r>
+                        <a:rPr/>
+                        <a:t>16.7</a:t>
+                      </a:r>
+                    </a:p>
+                  </a:txBody>
+                </a:tc>
+                <a:tc>
+                  <a:txBody>
+                    <a:bodyPr/>
+                    <a:lstStyle/>
+                    <a:p>
+                      <a:pPr lvl="0" indent="0" marL="0">
+                        <a:buNone/>
+                      </a:pPr>
+                      <a:r>
+                        <a:rPr/>
+                        <a:t>76.5</a:t>
+                      </a:r>
+                    </a:p>
+                  </a:txBody>
+                </a:tc>
+                <a:tc>
+                  <a:txBody>
+                    <a:bodyPr/>
+                    <a:lstStyle/>
+                    <a:p>
+                      <a:pPr lvl="0" indent="0" marL="0">
+                        <a:buNone/>
+                      </a:pPr>
+                      <a:r>
+                        <a:rPr/>
+                        <a:t>1644.66</a:t>
+                      </a:r>
+                    </a:p>
+                  </a:txBody>
+                </a:tc>
+                <a:tc>
+                  <a:txBody>
+                    <a:bodyPr/>
+                    <a:lstStyle/>
+                    <a:p>
+                      <a:pPr lvl="0" indent="0" marL="0">
+                        <a:buNone/>
+                      </a:pPr>
+                      <a:r>
+                        <a:rPr/>
+                        <a:t>sugarberry</a:t>
+                      </a:r>
+                    </a:p>
+                  </a:txBody>
+                </a:tc>
+                <a:tc>
+                  <a:txBody>
+                    <a:bodyPr/>
+                    <a:lstStyle/>
+                    <a:p>
+                      <a:pPr lvl="0" indent="0" marL="0">
+                        <a:buNone/>
+                      </a:pPr>
+                      <a:r>
+                        <a:rPr/>
+                        <a:t>16756.522421</a:t>
+                      </a:r>
+                    </a:p>
+                  </a:txBody>
+                </a:tc>
+                <a:tc>
+                  <a:txBody>
+                    <a:bodyPr/>
+                    <a:lstStyle/>
+                    <a:p>
+                      <a:pPr lvl="0" indent="0" marL="0">
+                        <a:buNone/>
+                      </a:pPr>
+                      <a:r>
+                        <a:rPr/>
+                        <a:t>1277.55</a:t>
+                      </a:r>
+                    </a:p>
+                  </a:txBody>
+                </a:tc>
+                <a:tc>
+                  <a:txBody>
+                    <a:bodyPr/>
+                    <a:lstStyle/>
+                    <a:p>
+                      <a:pPr lvl="0" indent="0" marL="0">
+                        <a:buNone/>
+                      </a:pPr>
+                      <a:r>
+                        <a:rPr/>
+                        <a:t>5852.25</a:t>
                       </a:r>
                     </a:p>
                   </a:txBody>
@@ -8771,15 +10718,6 @@
           <a:bodyPr/>
           <a:lstStyle/>
           <a:p>
-            <a:pPr lvl="0" indent="0" marL="0">
-              <a:buNone/>
-            </a:pPr>
-            <a:r>
-              <a:rPr/>
-              <a:t>Height interaction</a:t>
-            </a:r>
-          </a:p>
-          <a:p>
             <a:pPr lvl="0" indent="0">
               <a:buNone/>
             </a:pPr>
@@ -8787,12 +10725,9 @@
               <a:rPr>
                 <a:latin typeface="Courier"/>
               </a:rPr>
-              <a:t>Height squared:
-Average RMSLE for k = 3: 0.5285519115388194
-Height and diameter interaction:
-Average RMSLE for k = 3: 0.8338320265770989
-Volume of cylinder feature:
-Average RMSLE for k = 3: 0.7418555665720403</a:t>
+              <a:t>Height squared average RMSLE: 0.17184054030163723
+Height * diameter interacion average RMSLE: 0.15621420330928676
+Volume feature average RMSLE: 0.1554593982967315</a:t>
             </a:r>
           </a:p>
         </p:txBody>

--- a/Project-3/presentation.pptx
+++ b/Project-3/presentation.pptx
@@ -24,6 +24,9 @@
     <p:sldId id="272" r:id="rId18"/>
     <p:sldId id="273" r:id="rId19"/>
     <p:sldId id="274" r:id="rId20"/>
+    <p:sldId id="275" r:id="rId21"/>
+    <p:sldId id="276" r:id="rId22"/>
+    <p:sldId id="277" r:id="rId23"/>
   </p:sldIdLst>
   <p:sldSz cx="9144000" cy="5143500" type="screen16x9"/>
   <p:notesSz cx="6858000" cy="9144000"/>
@@ -3459,7 +3462,37 @@
             </a:pPr>
             <a:r>
               <a:rPr/>
-              <a:t>Consultation SERC scientist</a:t>
+              <a:t>Consultation</a:t>
+            </a:r>
+          </a:p>
+        </p:txBody>
+      </p:sp>
+      <p:sp>
+        <p:nvSpPr>
+          <p:cNvPr id="3" name="Content Placeholder 2"/>
+          <p:cNvSpPr>
+            <a:spLocks noGrp="1"/>
+          </p:cNvSpPr>
+          <p:nvPr>
+            <p:ph idx="1"/>
+          </p:nvPr>
+        </p:nvSpPr>
+        <p:spPr/>
+        <p:txBody>
+          <a:bodyPr/>
+          <a:lstStyle/>
+          <a:p>
+            <a:pPr lvl="0"/>
+            <a:r>
+              <a:rPr/>
+              <a:t>When predicting tree biomass, employ the performance metric root mean square logarithmic error since biomass data varies greatly, ranging from tiny saplings to enormous trees, majority of trees having exponential growth.</a:t>
+            </a:r>
+          </a:p>
+          <a:p>
+            <a:pPr lvl="0"/>
+            <a:r>
+              <a:rPr/>
+              <a:t>We chose kNN regression over linear regression because when looking at the graphs Dean presented, we saw that the tree diameter/height vs. biomass graphs all have exponential growth.</a:t>
             </a:r>
           </a:p>
         </p:txBody>
@@ -3506,7 +3539,7 @@
             </a:pPr>
             <a:r>
               <a:rPr/>
-              <a:t>Performance Metric</a:t>
+              <a:t>Consultation pt 2</a:t>
             </a:r>
           </a:p>
         </p:txBody>
@@ -3526,12 +3559,10 @@
           <a:bodyPr/>
           <a:lstStyle/>
           <a:p>
-            <a:pPr lvl="0" indent="0" marL="0">
-              <a:buNone/>
-            </a:pPr>
+            <a:pPr lvl="0"/>
             <a:r>
               <a:rPr/>
-              <a:t>When predicting tree biomass, employ the performance metric root mean square logarithmic error since biomass data varies greatly, ranging from tiny saplings to enormous grandpa trees, some trees having exponential growth. RMSLE focuses on percentage errors, making it fair to both small and large trees, unlike RMSE, which we believe penalizes errors on big trees. Fitting biomass estimations where scale matters more than absolute error. This metric is particularly useful in accurately assessing the predictive performance of models when dealing with such diverse ranges of tree sizes. By prioritizing percentage errors, RMSLE provides a more balanced evaluation that considers the unique characteristics of tree biomass data.</a:t>
+              <a:t>When relations between biomass and trees diameter and height are complex and non linear, data is abundent, and the model needs to be adaptive with out maksing major changes in the model. kNN excels in capturing patterns and irregular patterns.</a:t>
             </a:r>
           </a:p>
         </p:txBody>
@@ -3578,1147 +3609,45 @@
             </a:pPr>
             <a:r>
               <a:rPr/>
-              <a:t>Model</a:t>
+              <a:t>Performance Metric</a:t>
             </a:r>
           </a:p>
         </p:txBody>
       </p:sp>
-      <p:graphicFrame>
-        <p:nvGraphicFramePr>
-          <p:cNvPr id="6" name="Content Placeholder 5"/>
-          <p:cNvGraphicFramePr>
-            <a:graphicFrameLocks noGrp="1"/>
-          </p:cNvGraphicFramePr>
+      <p:sp>
+        <p:nvSpPr>
+          <p:cNvPr id="3" name="Content Placeholder 2"/>
+          <p:cNvSpPr>
+            <a:spLocks noGrp="1"/>
+          </p:cNvSpPr>
           <p:nvPr>
             <p:ph idx="1"/>
           </p:nvPr>
-        </p:nvGraphicFramePr>
-        <p:xfrm>
-          <a:off x="457200" y="1193800"/>
-          <a:ext cx="8229600" cy="3390900"/>
-        </p:xfrm>
-        <a:graphic>
-          <a:graphicData uri="http://schemas.openxmlformats.org/drawingml/2006/table">
-            <a:tbl>
-              <a:tblPr firstRow="1" bandRow="1">
-                <a:tableStyleId>{5C22544A-7EE6-4342-B048-85BDC9FD1C3A}</a:tableStyleId>
-              </a:tblPr>
-              <a:tblGrid>
-                <a:gridCol w="1371600"/>
-                <a:gridCol w="1371600"/>
-                <a:gridCol w="1371600"/>
-                <a:gridCol w="1371600"/>
-                <a:gridCol w="1371600"/>
-                <a:gridCol w="1371600"/>
-              </a:tblGrid>
-              <a:tr h="0">
-                <a:tc>
-                  <a:txBody>
-                    <a:bodyPr/>
-                    <a:lstStyle/>
-                    <a:p>
-                      <a:endParaRPr/>
-                    </a:p>
-                  </a:txBody>
-                  <a:tcPr/>
-                </a:tc>
-                <a:tc>
-                  <a:txBody>
-                    <a:bodyPr/>
-                    <a:lstStyle/>
-                    <a:p>
-                      <a:pPr lvl="0" indent="0" marL="0">
-                        <a:buNone/>
-                      </a:pPr>
-                      <a:r>
-                        <a:rPr/>
-                        <a:t>Species</a:t>
-                      </a:r>
-                    </a:p>
-                  </a:txBody>
-                  <a:tcPr/>
-                </a:tc>
-                <a:tc>
-                  <a:txBody>
-                    <a:bodyPr/>
-                    <a:lstStyle/>
-                    <a:p>
-                      <a:pPr lvl="0" indent="0" marL="0">
-                        <a:buNone/>
-                      </a:pPr>
-                      <a:r>
-                        <a:rPr/>
-                        <a:t>k</a:t>
-                      </a:r>
-                    </a:p>
-                  </a:txBody>
-                  <a:tcPr/>
-                </a:tc>
-                <a:tc>
-                  <a:txBody>
-                    <a:bodyPr/>
-                    <a:lstStyle/>
-                    <a:p>
-                      <a:pPr lvl="0" indent="0" marL="0">
-                        <a:buNone/>
-                      </a:pPr>
-                      <a:r>
-                        <a:rPr/>
-                        <a:t>RMSE</a:t>
-                      </a:r>
-                    </a:p>
-                  </a:txBody>
-                  <a:tcPr/>
-                </a:tc>
-                <a:tc>
-                  <a:txBody>
-                    <a:bodyPr/>
-                    <a:lstStyle/>
-                    <a:p>
-                      <a:pPr lvl="0" indent="0" marL="0">
-                        <a:buNone/>
-                      </a:pPr>
-                      <a:r>
-                        <a:rPr/>
-                        <a:t>MAE</a:t>
-                      </a:r>
-                    </a:p>
-                  </a:txBody>
-                  <a:tcPr/>
-                </a:tc>
-                <a:tc>
-                  <a:txBody>
-                    <a:bodyPr/>
-                    <a:lstStyle/>
-                    <a:p>
-                      <a:pPr lvl="0" indent="0" marL="0">
-                        <a:buNone/>
-                      </a:pPr>
-                      <a:r>
-                        <a:rPr/>
-                        <a:t>RMSLE</a:t>
-                      </a:r>
-                    </a:p>
-                  </a:txBody>
-                  <a:tcPr/>
-                </a:tc>
-              </a:tr>
-              <a:tr h="0">
-                <a:tc>
-                  <a:txBody>
-                    <a:bodyPr/>
-                    <a:lstStyle/>
-                    <a:p>
-                      <a:pPr lvl="0" indent="0" marL="0">
-                        <a:buNone/>
-                      </a:pPr>
-                      <a:r>
-                        <a:rPr/>
-                        <a:t>0</a:t>
-                      </a:r>
-                    </a:p>
-                  </a:txBody>
-                </a:tc>
-                <a:tc>
-                  <a:txBody>
-                    <a:bodyPr/>
-                    <a:lstStyle/>
-                    <a:p>
-                      <a:pPr lvl="0" indent="0" marL="0">
-                        <a:buNone/>
-                      </a:pPr>
-                      <a:r>
-                        <a:rPr/>
-                        <a:t>balsam fir</a:t>
-                      </a:r>
-                    </a:p>
-                  </a:txBody>
-                </a:tc>
-                <a:tc>
-                  <a:txBody>
-                    <a:bodyPr/>
-                    <a:lstStyle/>
-                    <a:p>
-                      <a:pPr lvl="0" indent="0" marL="0">
-                        <a:buNone/>
-                      </a:pPr>
-                      <a:r>
-                        <a:rPr/>
-                        <a:t>2</a:t>
-                      </a:r>
-                    </a:p>
-                  </a:txBody>
-                </a:tc>
-                <a:tc>
-                  <a:txBody>
-                    <a:bodyPr/>
-                    <a:lstStyle/>
-                    <a:p>
-                      <a:pPr lvl="0" indent="0" marL="0">
-                        <a:buNone/>
-                      </a:pPr>
-                      <a:r>
-                        <a:rPr/>
-                        <a:t>125.825473</a:t>
-                      </a:r>
-                    </a:p>
-                  </a:txBody>
-                </a:tc>
-                <a:tc>
-                  <a:txBody>
-                    <a:bodyPr/>
-                    <a:lstStyle/>
-                    <a:p>
-                      <a:pPr lvl="0" indent="0" marL="0">
-                        <a:buNone/>
-                      </a:pPr>
-                      <a:r>
-                        <a:rPr/>
-                        <a:t>34.801913</a:t>
-                      </a:r>
-                    </a:p>
-                  </a:txBody>
-                </a:tc>
-                <a:tc>
-                  <a:txBody>
-                    <a:bodyPr/>
-                    <a:lstStyle/>
-                    <a:p>
-                      <a:pPr lvl="0" indent="0" marL="0">
-                        <a:buNone/>
-                      </a:pPr>
-                      <a:r>
-                        <a:rPr/>
-                        <a:t>0.119574</a:t>
-                      </a:r>
-                    </a:p>
-                  </a:txBody>
-                </a:tc>
-              </a:tr>
-              <a:tr h="0">
-                <a:tc>
-                  <a:txBody>
-                    <a:bodyPr/>
-                    <a:lstStyle/>
-                    <a:p>
-                      <a:pPr lvl="0" indent="0" marL="0">
-                        <a:buNone/>
-                      </a:pPr>
-                      <a:r>
-                        <a:rPr/>
-                        <a:t>1</a:t>
-                      </a:r>
-                    </a:p>
-                  </a:txBody>
-                </a:tc>
-                <a:tc>
-                  <a:txBody>
-                    <a:bodyPr/>
-                    <a:lstStyle/>
-                    <a:p>
-                      <a:pPr lvl="0" indent="0" marL="0">
-                        <a:buNone/>
-                      </a:pPr>
-                      <a:r>
-                        <a:rPr/>
-                        <a:t>balsam fir</a:t>
-                      </a:r>
-                    </a:p>
-                  </a:txBody>
-                </a:tc>
-                <a:tc>
-                  <a:txBody>
-                    <a:bodyPr/>
-                    <a:lstStyle/>
-                    <a:p>
-                      <a:pPr lvl="0" indent="0" marL="0">
-                        <a:buNone/>
-                      </a:pPr>
-                      <a:r>
-                        <a:rPr/>
-                        <a:t>3</a:t>
-                      </a:r>
-                    </a:p>
-                  </a:txBody>
-                </a:tc>
-                <a:tc>
-                  <a:txBody>
-                    <a:bodyPr/>
-                    <a:lstStyle/>
-                    <a:p>
-                      <a:pPr lvl="0" indent="0" marL="0">
-                        <a:buNone/>
-                      </a:pPr>
-                      <a:r>
-                        <a:rPr/>
-                        <a:t>129.651479</a:t>
-                      </a:r>
-                    </a:p>
-                  </a:txBody>
-                </a:tc>
-                <a:tc>
-                  <a:txBody>
-                    <a:bodyPr/>
-                    <a:lstStyle/>
-                    <a:p>
-                      <a:pPr lvl="0" indent="0" marL="0">
-                        <a:buNone/>
-                      </a:pPr>
-                      <a:r>
-                        <a:rPr/>
-                        <a:t>36.646493</a:t>
-                      </a:r>
-                    </a:p>
-                  </a:txBody>
-                </a:tc>
-                <a:tc>
-                  <a:txBody>
-                    <a:bodyPr/>
-                    <a:lstStyle/>
-                    <a:p>
-                      <a:pPr lvl="0" indent="0" marL="0">
-                        <a:buNone/>
-                      </a:pPr>
-                      <a:r>
-                        <a:rPr/>
-                        <a:t>0.123724</a:t>
-                      </a:r>
-                    </a:p>
-                  </a:txBody>
-                </a:tc>
-              </a:tr>
-              <a:tr h="0">
-                <a:tc>
-                  <a:txBody>
-                    <a:bodyPr/>
-                    <a:lstStyle/>
-                    <a:p>
-                      <a:pPr lvl="0" indent="0" marL="0">
-                        <a:buNone/>
-                      </a:pPr>
-                      <a:r>
-                        <a:rPr/>
-                        <a:t>2</a:t>
-                      </a:r>
-                    </a:p>
-                  </a:txBody>
-                </a:tc>
-                <a:tc>
-                  <a:txBody>
-                    <a:bodyPr/>
-                    <a:lstStyle/>
-                    <a:p>
-                      <a:pPr lvl="0" indent="0" marL="0">
-                        <a:buNone/>
-                      </a:pPr>
-                      <a:r>
-                        <a:rPr/>
-                        <a:t>balsam fir</a:t>
-                      </a:r>
-                    </a:p>
-                  </a:txBody>
-                </a:tc>
-                <a:tc>
-                  <a:txBody>
-                    <a:bodyPr/>
-                    <a:lstStyle/>
-                    <a:p>
-                      <a:pPr lvl="0" indent="0" marL="0">
-                        <a:buNone/>
-                      </a:pPr>
-                      <a:r>
-                        <a:rPr/>
-                        <a:t>4</a:t>
-                      </a:r>
-                    </a:p>
-                  </a:txBody>
-                </a:tc>
-                <a:tc>
-                  <a:txBody>
-                    <a:bodyPr/>
-                    <a:lstStyle/>
-                    <a:p>
-                      <a:pPr lvl="0" indent="0" marL="0">
-                        <a:buNone/>
-                      </a:pPr>
-                      <a:r>
-                        <a:rPr/>
-                        <a:t>134.599829</a:t>
-                      </a:r>
-                    </a:p>
-                  </a:txBody>
-                </a:tc>
-                <a:tc>
-                  <a:txBody>
-                    <a:bodyPr/>
-                    <a:lstStyle/>
-                    <a:p>
-                      <a:pPr lvl="0" indent="0" marL="0">
-                        <a:buNone/>
-                      </a:pPr>
-                      <a:r>
-                        <a:rPr/>
-                        <a:t>38.884870</a:t>
-                      </a:r>
-                    </a:p>
-                  </a:txBody>
-                </a:tc>
-                <a:tc>
-                  <a:txBody>
-                    <a:bodyPr/>
-                    <a:lstStyle/>
-                    <a:p>
-                      <a:pPr lvl="0" indent="0" marL="0">
-                        <a:buNone/>
-                      </a:pPr>
-                      <a:r>
-                        <a:rPr/>
-                        <a:t>0.133858</a:t>
-                      </a:r>
-                    </a:p>
-                  </a:txBody>
-                </a:tc>
-              </a:tr>
-              <a:tr h="0">
-                <a:tc>
-                  <a:txBody>
-                    <a:bodyPr/>
-                    <a:lstStyle/>
-                    <a:p>
-                      <a:pPr lvl="0" indent="0" marL="0">
-                        <a:buNone/>
-                      </a:pPr>
-                      <a:r>
-                        <a:rPr/>
-                        <a:t>3</a:t>
-                      </a:r>
-                    </a:p>
-                  </a:txBody>
-                </a:tc>
-                <a:tc>
-                  <a:txBody>
-                    <a:bodyPr/>
-                    <a:lstStyle/>
-                    <a:p>
-                      <a:pPr lvl="0" indent="0" marL="0">
-                        <a:buNone/>
-                      </a:pPr>
-                      <a:r>
-                        <a:rPr/>
-                        <a:t>balsam fir</a:t>
-                      </a:r>
-                    </a:p>
-                  </a:txBody>
-                </a:tc>
-                <a:tc>
-                  <a:txBody>
-                    <a:bodyPr/>
-                    <a:lstStyle/>
-                    <a:p>
-                      <a:pPr lvl="0" indent="0" marL="0">
-                        <a:buNone/>
-                      </a:pPr>
-                      <a:r>
-                        <a:rPr/>
-                        <a:t>5</a:t>
-                      </a:r>
-                    </a:p>
-                  </a:txBody>
-                </a:tc>
-                <a:tc>
-                  <a:txBody>
-                    <a:bodyPr/>
-                    <a:lstStyle/>
-                    <a:p>
-                      <a:pPr lvl="0" indent="0" marL="0">
-                        <a:buNone/>
-                      </a:pPr>
-                      <a:r>
-                        <a:rPr/>
-                        <a:t>145.003601</a:t>
-                      </a:r>
-                    </a:p>
-                  </a:txBody>
-                </a:tc>
-                <a:tc>
-                  <a:txBody>
-                    <a:bodyPr/>
-                    <a:lstStyle/>
-                    <a:p>
-                      <a:pPr lvl="0" indent="0" marL="0">
-                        <a:buNone/>
-                      </a:pPr>
-                      <a:r>
-                        <a:rPr/>
-                        <a:t>41.209530</a:t>
-                      </a:r>
-                    </a:p>
-                  </a:txBody>
-                </a:tc>
-                <a:tc>
-                  <a:txBody>
-                    <a:bodyPr/>
-                    <a:lstStyle/>
-                    <a:p>
-                      <a:pPr lvl="0" indent="0" marL="0">
-                        <a:buNone/>
-                      </a:pPr>
-                      <a:r>
-                        <a:rPr/>
-                        <a:t>0.144063</a:t>
-                      </a:r>
-                    </a:p>
-                  </a:txBody>
-                </a:tc>
-              </a:tr>
-              <a:tr h="0">
-                <a:tc>
-                  <a:txBody>
-                    <a:bodyPr/>
-                    <a:lstStyle/>
-                    <a:p>
-                      <a:pPr lvl="0" indent="0" marL="0">
-                        <a:buNone/>
-                      </a:pPr>
-                      <a:r>
-                        <a:rPr/>
-                        <a:t>4</a:t>
-                      </a:r>
-                    </a:p>
-                  </a:txBody>
-                </a:tc>
-                <a:tc>
-                  <a:txBody>
-                    <a:bodyPr/>
-                    <a:lstStyle/>
-                    <a:p>
-                      <a:pPr lvl="0" indent="0" marL="0">
-                        <a:buNone/>
-                      </a:pPr>
-                      <a:r>
-                        <a:rPr/>
-                        <a:t>balsam fir</a:t>
-                      </a:r>
-                    </a:p>
-                  </a:txBody>
-                </a:tc>
-                <a:tc>
-                  <a:txBody>
-                    <a:bodyPr/>
-                    <a:lstStyle/>
-                    <a:p>
-                      <a:pPr lvl="0" indent="0" marL="0">
-                        <a:buNone/>
-                      </a:pPr>
-                      <a:r>
-                        <a:rPr/>
-                        <a:t>6</a:t>
-                      </a:r>
-                    </a:p>
-                  </a:txBody>
-                </a:tc>
-                <a:tc>
-                  <a:txBody>
-                    <a:bodyPr/>
-                    <a:lstStyle/>
-                    <a:p>
-                      <a:pPr lvl="0" indent="0" marL="0">
-                        <a:buNone/>
-                      </a:pPr>
-                      <a:r>
-                        <a:rPr/>
-                        <a:t>147.451321</a:t>
-                      </a:r>
-                    </a:p>
-                  </a:txBody>
-                </a:tc>
-                <a:tc>
-                  <a:txBody>
-                    <a:bodyPr/>
-                    <a:lstStyle/>
-                    <a:p>
-                      <a:pPr lvl="0" indent="0" marL="0">
-                        <a:buNone/>
-                      </a:pPr>
-                      <a:r>
-                        <a:rPr/>
-                        <a:t>40.791681</a:t>
-                      </a:r>
-                    </a:p>
-                  </a:txBody>
-                </a:tc>
-                <a:tc>
-                  <a:txBody>
-                    <a:bodyPr/>
-                    <a:lstStyle/>
-                    <a:p>
-                      <a:pPr lvl="0" indent="0" marL="0">
-                        <a:buNone/>
-                      </a:pPr>
-                      <a:r>
-                        <a:rPr/>
-                        <a:t>0.142862</a:t>
-                      </a:r>
-                    </a:p>
-                  </a:txBody>
-                </a:tc>
-              </a:tr>
-              <a:tr h="0">
-                <a:tc>
-                  <a:txBody>
-                    <a:bodyPr/>
-                    <a:lstStyle/>
-                    <a:p>
-                      <a:pPr lvl="0" indent="0" marL="0">
-                        <a:buNone/>
-                      </a:pPr>
-                      <a:r>
-                        <a:rPr/>
-                        <a:t>...</a:t>
-                      </a:r>
-                    </a:p>
-                  </a:txBody>
-                </a:tc>
-                <a:tc>
-                  <a:txBody>
-                    <a:bodyPr/>
-                    <a:lstStyle/>
-                    <a:p>
-                      <a:pPr lvl="0" indent="0" marL="0">
-                        <a:buNone/>
-                      </a:pPr>
-                      <a:r>
-                        <a:rPr/>
-                        <a:t>...</a:t>
-                      </a:r>
-                    </a:p>
-                  </a:txBody>
-                </a:tc>
-                <a:tc>
-                  <a:txBody>
-                    <a:bodyPr/>
-                    <a:lstStyle/>
-                    <a:p>
-                      <a:pPr lvl="0" indent="0" marL="0">
-                        <a:buNone/>
-                      </a:pPr>
-                      <a:r>
-                        <a:rPr/>
-                        <a:t>...</a:t>
-                      </a:r>
-                    </a:p>
-                  </a:txBody>
-                </a:tc>
-                <a:tc>
-                  <a:txBody>
-                    <a:bodyPr/>
-                    <a:lstStyle/>
-                    <a:p>
-                      <a:pPr lvl="0" indent="0" marL="0">
-                        <a:buNone/>
-                      </a:pPr>
-                      <a:r>
-                        <a:rPr/>
-                        <a:t>...</a:t>
-                      </a:r>
-                    </a:p>
-                  </a:txBody>
-                </a:tc>
-                <a:tc>
-                  <a:txBody>
-                    <a:bodyPr/>
-                    <a:lstStyle/>
-                    <a:p>
-                      <a:pPr lvl="0" indent="0" marL="0">
-                        <a:buNone/>
-                      </a:pPr>
-                      <a:r>
-                        <a:rPr/>
-                        <a:t>...</a:t>
-                      </a:r>
-                    </a:p>
-                  </a:txBody>
-                </a:tc>
-                <a:tc>
-                  <a:txBody>
-                    <a:bodyPr/>
-                    <a:lstStyle/>
-                    <a:p>
-                      <a:pPr lvl="0" indent="0" marL="0">
-                        <a:buNone/>
-                      </a:pPr>
-                      <a:r>
-                        <a:rPr/>
-                        <a:t>...</a:t>
-                      </a:r>
-                    </a:p>
-                  </a:txBody>
-                </a:tc>
-              </a:tr>
-              <a:tr h="0">
-                <a:tc>
-                  <a:txBody>
-                    <a:bodyPr/>
-                    <a:lstStyle/>
-                    <a:p>
-                      <a:pPr lvl="0" indent="0" marL="0">
-                        <a:buNone/>
-                      </a:pPr>
-                      <a:r>
-                        <a:rPr/>
-                        <a:t>895</a:t>
-                      </a:r>
-                    </a:p>
-                  </a:txBody>
-                </a:tc>
-                <a:tc>
-                  <a:txBody>
-                    <a:bodyPr/>
-                    <a:lstStyle/>
-                    <a:p>
-                      <a:pPr lvl="0" indent="0" marL="0">
-                        <a:buNone/>
-                      </a:pPr>
-                      <a:r>
-                        <a:rPr/>
-                        <a:t>sugarberry</a:t>
-                      </a:r>
-                    </a:p>
-                  </a:txBody>
-                </a:tc>
-                <a:tc>
-                  <a:txBody>
-                    <a:bodyPr/>
-                    <a:lstStyle/>
-                    <a:p>
-                      <a:pPr lvl="0" indent="0" marL="0">
-                        <a:buNone/>
-                      </a:pPr>
-                      <a:r>
-                        <a:rPr/>
-                        <a:t>6</a:t>
-                      </a:r>
-                    </a:p>
-                  </a:txBody>
-                </a:tc>
-                <a:tc>
-                  <a:txBody>
-                    <a:bodyPr/>
-                    <a:lstStyle/>
-                    <a:p>
-                      <a:pPr lvl="0" indent="0" marL="0">
-                        <a:buNone/>
-                      </a:pPr>
-                      <a:r>
-                        <a:rPr/>
-                        <a:t>32.431052</a:t>
-                      </a:r>
-                    </a:p>
-                  </a:txBody>
-                </a:tc>
-                <a:tc>
-                  <a:txBody>
-                    <a:bodyPr/>
-                    <a:lstStyle/>
-                    <a:p>
-                      <a:pPr lvl="0" indent="0" marL="0">
-                        <a:buNone/>
-                      </a:pPr>
-                      <a:r>
-                        <a:rPr/>
-                        <a:t>20.969306</a:t>
-                      </a:r>
-                    </a:p>
-                  </a:txBody>
-                </a:tc>
-                <a:tc>
-                  <a:txBody>
-                    <a:bodyPr/>
-                    <a:lstStyle/>
-                    <a:p>
-                      <a:pPr lvl="0" indent="0" marL="0">
-                        <a:buNone/>
-                      </a:pPr>
-                      <a:r>
-                        <a:rPr/>
-                        <a:t>0.565727</a:t>
-                      </a:r>
-                    </a:p>
-                  </a:txBody>
-                </a:tc>
-              </a:tr>
-              <a:tr h="0">
-                <a:tc>
-                  <a:txBody>
-                    <a:bodyPr/>
-                    <a:lstStyle/>
-                    <a:p>
-                      <a:pPr lvl="0" indent="0" marL="0">
-                        <a:buNone/>
-                      </a:pPr>
-                      <a:r>
-                        <a:rPr/>
-                        <a:t>896</a:t>
-                      </a:r>
-                    </a:p>
-                  </a:txBody>
-                </a:tc>
-                <a:tc>
-                  <a:txBody>
-                    <a:bodyPr/>
-                    <a:lstStyle/>
-                    <a:p>
-                      <a:pPr lvl="0" indent="0" marL="0">
-                        <a:buNone/>
-                      </a:pPr>
-                      <a:r>
-                        <a:rPr/>
-                        <a:t>sugarberry</a:t>
-                      </a:r>
-                    </a:p>
-                  </a:txBody>
-                </a:tc>
-                <a:tc>
-                  <a:txBody>
-                    <a:bodyPr/>
-                    <a:lstStyle/>
-                    <a:p>
-                      <a:pPr lvl="0" indent="0" marL="0">
-                        <a:buNone/>
-                      </a:pPr>
-                      <a:r>
-                        <a:rPr/>
-                        <a:t>7</a:t>
-                      </a:r>
-                    </a:p>
-                  </a:txBody>
-                </a:tc>
-                <a:tc>
-                  <a:txBody>
-                    <a:bodyPr/>
-                    <a:lstStyle/>
-                    <a:p>
-                      <a:pPr lvl="0" indent="0" marL="0">
-                        <a:buNone/>
-                      </a:pPr>
-                      <a:r>
-                        <a:rPr/>
-                        <a:t>37.324259</a:t>
-                      </a:r>
-                    </a:p>
-                  </a:txBody>
-                </a:tc>
-                <a:tc>
-                  <a:txBody>
-                    <a:bodyPr/>
-                    <a:lstStyle/>
-                    <a:p>
-                      <a:pPr lvl="0" indent="0" marL="0">
-                        <a:buNone/>
-                      </a:pPr>
-                      <a:r>
-                        <a:rPr/>
-                        <a:t>25.037024</a:t>
-                      </a:r>
-                    </a:p>
-                  </a:txBody>
-                </a:tc>
-                <a:tc>
-                  <a:txBody>
-                    <a:bodyPr/>
-                    <a:lstStyle/>
-                    <a:p>
-                      <a:pPr lvl="0" indent="0" marL="0">
-                        <a:buNone/>
-                      </a:pPr>
-                      <a:r>
-                        <a:rPr/>
-                        <a:t>0.637629</a:t>
-                      </a:r>
-                    </a:p>
-                  </a:txBody>
-                </a:tc>
-              </a:tr>
-              <a:tr h="0">
-                <a:tc>
-                  <a:txBody>
-                    <a:bodyPr/>
-                    <a:lstStyle/>
-                    <a:p>
-                      <a:pPr lvl="0" indent="0" marL="0">
-                        <a:buNone/>
-                      </a:pPr>
-                      <a:r>
-                        <a:rPr/>
-                        <a:t>897</a:t>
-                      </a:r>
-                    </a:p>
-                  </a:txBody>
-                </a:tc>
-                <a:tc>
-                  <a:txBody>
-                    <a:bodyPr/>
-                    <a:lstStyle/>
-                    <a:p>
-                      <a:pPr lvl="0" indent="0" marL="0">
-                        <a:buNone/>
-                      </a:pPr>
-                      <a:r>
-                        <a:rPr/>
-                        <a:t>sugarberry</a:t>
-                      </a:r>
-                    </a:p>
-                  </a:txBody>
-                </a:tc>
-                <a:tc>
-                  <a:txBody>
-                    <a:bodyPr/>
-                    <a:lstStyle/>
-                    <a:p>
-                      <a:pPr lvl="0" indent="0" marL="0">
-                        <a:buNone/>
-                      </a:pPr>
-                      <a:r>
-                        <a:rPr/>
-                        <a:t>8</a:t>
-                      </a:r>
-                    </a:p>
-                  </a:txBody>
-                </a:tc>
-                <a:tc>
-                  <a:txBody>
-                    <a:bodyPr/>
-                    <a:lstStyle/>
-                    <a:p>
-                      <a:pPr lvl="0" indent="0" marL="0">
-                        <a:buNone/>
-                      </a:pPr>
-                      <a:r>
-                        <a:rPr/>
-                        <a:t>38.144756</a:t>
-                      </a:r>
-                    </a:p>
-                  </a:txBody>
-                </a:tc>
-                <a:tc>
-                  <a:txBody>
-                    <a:bodyPr/>
-                    <a:lstStyle/>
-                    <a:p>
-                      <a:pPr lvl="0" indent="0" marL="0">
-                        <a:buNone/>
-                      </a:pPr>
-                      <a:r>
-                        <a:rPr/>
-                        <a:t>26.680208</a:t>
-                      </a:r>
-                    </a:p>
-                  </a:txBody>
-                </a:tc>
-                <a:tc>
-                  <a:txBody>
-                    <a:bodyPr/>
-                    <a:lstStyle/>
-                    <a:p>
-                      <a:pPr lvl="0" indent="0" marL="0">
-                        <a:buNone/>
-                      </a:pPr>
-                      <a:r>
-                        <a:rPr/>
-                        <a:t>0.665159</a:t>
-                      </a:r>
-                    </a:p>
-                  </a:txBody>
-                </a:tc>
-              </a:tr>
-              <a:tr h="0">
-                <a:tc>
-                  <a:txBody>
-                    <a:bodyPr/>
-                    <a:lstStyle/>
-                    <a:p>
-                      <a:pPr lvl="0" indent="0" marL="0">
-                        <a:buNone/>
-                      </a:pPr>
-                      <a:r>
-                        <a:rPr/>
-                        <a:t>898</a:t>
-                      </a:r>
-                    </a:p>
-                  </a:txBody>
-                </a:tc>
-                <a:tc>
-                  <a:txBody>
-                    <a:bodyPr/>
-                    <a:lstStyle/>
-                    <a:p>
-                      <a:pPr lvl="0" indent="0" marL="0">
-                        <a:buNone/>
-                      </a:pPr>
-                      <a:r>
-                        <a:rPr/>
-                        <a:t>sugarberry</a:t>
-                      </a:r>
-                    </a:p>
-                  </a:txBody>
-                </a:tc>
-                <a:tc>
-                  <a:txBody>
-                    <a:bodyPr/>
-                    <a:lstStyle/>
-                    <a:p>
-                      <a:pPr lvl="0" indent="0" marL="0">
-                        <a:buNone/>
-                      </a:pPr>
-                      <a:r>
-                        <a:rPr/>
-                        <a:t>9</a:t>
-                      </a:r>
-                    </a:p>
-                  </a:txBody>
-                </a:tc>
-                <a:tc>
-                  <a:txBody>
-                    <a:bodyPr/>
-                    <a:lstStyle/>
-                    <a:p>
-                      <a:pPr lvl="0" indent="0" marL="0">
-                        <a:buNone/>
-                      </a:pPr>
-                      <a:r>
-                        <a:rPr/>
-                        <a:t>36.853245</a:t>
-                      </a:r>
-                    </a:p>
-                  </a:txBody>
-                </a:tc>
-                <a:tc>
-                  <a:txBody>
-                    <a:bodyPr/>
-                    <a:lstStyle/>
-                    <a:p>
-                      <a:pPr lvl="0" indent="0" marL="0">
-                        <a:buNone/>
-                      </a:pPr>
-                      <a:r>
-                        <a:rPr/>
-                        <a:t>21.021667</a:t>
-                      </a:r>
-                    </a:p>
-                  </a:txBody>
-                </a:tc>
-                <a:tc>
-                  <a:txBody>
-                    <a:bodyPr/>
-                    <a:lstStyle/>
-                    <a:p>
-                      <a:pPr lvl="0" indent="0" marL="0">
-                        <a:buNone/>
-                      </a:pPr>
-                      <a:r>
-                        <a:rPr/>
-                        <a:t>0.685162</a:t>
-                      </a:r>
-                    </a:p>
-                  </a:txBody>
-                </a:tc>
-              </a:tr>
-              <a:tr h="0">
-                <a:tc>
-                  <a:txBody>
-                    <a:bodyPr/>
-                    <a:lstStyle/>
-                    <a:p>
-                      <a:pPr lvl="0" indent="0" marL="0">
-                        <a:buNone/>
-                      </a:pPr>
-                      <a:r>
-                        <a:rPr/>
-                        <a:t>899</a:t>
-                      </a:r>
-                    </a:p>
-                  </a:txBody>
-                </a:tc>
-                <a:tc>
-                  <a:txBody>
-                    <a:bodyPr/>
-                    <a:lstStyle/>
-                    <a:p>
-                      <a:pPr lvl="0" indent="0" marL="0">
-                        <a:buNone/>
-                      </a:pPr>
-                      <a:r>
-                        <a:rPr/>
-                        <a:t>sugarberry</a:t>
-                      </a:r>
-                    </a:p>
-                  </a:txBody>
-                </a:tc>
-                <a:tc>
-                  <a:txBody>
-                    <a:bodyPr/>
-                    <a:lstStyle/>
-                    <a:p>
-                      <a:pPr lvl="0" indent="0" marL="0">
-                        <a:buNone/>
-                      </a:pPr>
-                      <a:r>
-                        <a:rPr/>
-                        <a:t>10</a:t>
-                      </a:r>
-                    </a:p>
-                  </a:txBody>
-                </a:tc>
-                <a:tc>
-                  <a:txBody>
-                    <a:bodyPr/>
-                    <a:lstStyle/>
-                    <a:p>
-                      <a:pPr lvl="0" indent="0" marL="0">
-                        <a:buNone/>
-                      </a:pPr>
-                      <a:r>
-                        <a:rPr/>
-                        <a:t>40.091106</a:t>
-                      </a:r>
-                    </a:p>
-                  </a:txBody>
-                </a:tc>
-                <a:tc>
-                  <a:txBody>
-                    <a:bodyPr/>
-                    <a:lstStyle/>
-                    <a:p>
-                      <a:pPr lvl="0" indent="0" marL="0">
-                        <a:buNone/>
-                      </a:pPr>
-                      <a:r>
-                        <a:rPr/>
-                        <a:t>23.172083</a:t>
-                      </a:r>
-                    </a:p>
-                  </a:txBody>
-                </a:tc>
-                <a:tc>
-                  <a:txBody>
-                    <a:bodyPr/>
-                    <a:lstStyle/>
-                    <a:p>
-                      <a:pPr lvl="0" indent="0" marL="0">
-                        <a:buNone/>
-                      </a:pPr>
-                      <a:r>
-                        <a:rPr/>
-                        <a:t>0.677519</a:t>
-                      </a:r>
-                    </a:p>
-                  </a:txBody>
-                </a:tc>
-              </a:tr>
-            </a:tbl>
-          </a:graphicData>
-        </a:graphic>
-      </p:graphicFrame>
+        </p:nvSpPr>
+        <p:spPr/>
+        <p:txBody>
+          <a:bodyPr/>
+          <a:lstStyle/>
+          <a:p>
+            <a:pPr lvl="0"/>
+            <a:r>
+              <a:rPr b="1"/>
+              <a:t>RMSLE over RMSE</a:t>
+            </a:r>
+            <a:r>
+              <a:rPr/>
+              <a:t>: focuses on percentage errors, making it fair to both small and large trees, unlike RMSE, which we believe penalizes errors on big trees. Fitting biomass estimations where scale matters more than absolute error.</a:t>
+            </a:r>
+          </a:p>
+          <a:p>
+            <a:pPr lvl="0"/>
+            <a:r>
+              <a:rPr/>
+              <a:t>By prioritizing percentage errors, RMSLE provides a more balanced evaluation that considers the unique characteristics of tree biomass data.</a:t>
+            </a:r>
+          </a:p>
+        </p:txBody>
+      </p:sp>
     </p:spTree>
   </p:cSld>
 </p:sld>
@@ -4751,66 +3680,17 @@
             <p:ph type="title"/>
           </p:nvPr>
         </p:nvSpPr>
-        <p:spPr>
-          <a:xfrm>
-            <a:off x="457201" y="204787"/>
-            <a:ext cx="3008313" cy="871538"/>
-          </a:xfrm>
-        </p:spPr>
-        <p:txBody>
-          <a:bodyPr/>
-          <a:lstStyle/>
-          <a:p>
-            <a:pPr lvl="0" indent="0" marL="0">
-              <a:buNone/>
-            </a:pPr>
-            <a:r>
-              <a:rPr/>
-              <a:t>Technical Lead</a:t>
-            </a:r>
-          </a:p>
-        </p:txBody>
-      </p:sp>
-      <p:sp>
-        <p:nvSpPr>
-          <p:cNvPr id="4" name="Text Placeholder 3"/>
-          <p:cNvSpPr>
-            <a:spLocks noGrp="1"/>
-          </p:cNvSpPr>
-          <p:nvPr>
-            <p:ph idx="2" sz="half" type="body"/>
-          </p:nvPr>
-        </p:nvSpPr>
         <p:spPr/>
         <p:txBody>
           <a:bodyPr/>
           <a:lstStyle/>
           <a:p>
-            <a:pPr lvl="0"/>
+            <a:pPr lvl="0" indent="0" marL="0">
+              <a:buNone/>
+            </a:pPr>
             <a:r>
               <a:rPr/>
-              <a:t>Split and filtering methods</a:t>
-            </a:r>
-          </a:p>
-          <a:p>
-            <a:pPr lvl="0"/>
-            <a:r>
-              <a:rPr/>
-              <a:t>Feature engineering (what worked and what didn’t)</a:t>
-            </a:r>
-          </a:p>
-          <a:p>
-            <a:pPr lvl="0"/>
-            <a:r>
-              <a:rPr/>
-              <a:t>Tuning k for the best model</a:t>
-            </a:r>
-          </a:p>
-          <a:p>
-            <a:pPr lvl="0"/>
-            <a:r>
-              <a:rPr/>
-              <a:t>The final “best” model and error # Tree Measurement Data:</a:t>
+              <a:t>Model</a:t>
             </a:r>
           </a:p>
         </p:txBody>
@@ -4826,8 +3706,8 @@
           </p:nvPr>
         </p:nvGraphicFramePr>
         <p:xfrm>
-          <a:off x="3568700" y="203200"/>
-          <a:ext cx="5105400" cy="4381500"/>
+          <a:off x="457200" y="1193800"/>
+          <a:ext cx="8229600" cy="3390900"/>
         </p:xfrm>
         <a:graphic>
           <a:graphicData uri="http://schemas.openxmlformats.org/drawingml/2006/table">
@@ -4836,11 +3716,12 @@
                 <a:tableStyleId>{5C22544A-7EE6-4342-B048-85BDC9FD1C3A}</a:tableStyleId>
               </a:tblPr>
               <a:tblGrid>
-                <a:gridCol w="1016000"/>
-                <a:gridCol w="1016000"/>
-                <a:gridCol w="1016000"/>
-                <a:gridCol w="1016000"/>
-                <a:gridCol w="1016000"/>
+                <a:gridCol w="1371600"/>
+                <a:gridCol w="1371600"/>
+                <a:gridCol w="1371600"/>
+                <a:gridCol w="1371600"/>
+                <a:gridCol w="1371600"/>
+                <a:gridCol w="1371600"/>
               </a:tblGrid>
               <a:tr h="0">
                 <a:tc>
@@ -4863,7 +3744,7 @@
                       </a:pPr>
                       <a:r>
                         <a:rPr/>
-                        <a:t>SPCD</a:t>
+                        <a:t>Species</a:t>
                       </a:r>
                     </a:p>
                   </a:txBody>
@@ -4879,7 +3760,7 @@
                       </a:pPr>
                       <a:r>
                         <a:rPr/>
-                        <a:t>DO_BH</a:t>
+                        <a:t>k</a:t>
                       </a:r>
                     </a:p>
                   </a:txBody>
@@ -4895,7 +3776,7 @@
                       </a:pPr>
                       <a:r>
                         <a:rPr/>
-                        <a:t>HT_TOT</a:t>
+                        <a:t>RMSE</a:t>
                       </a:r>
                     </a:p>
                   </a:txBody>
@@ -4911,7 +3792,23 @@
                       </a:pPr>
                       <a:r>
                         <a:rPr/>
-                        <a:t>TT_DW_CRM</a:t>
+                        <a:t>MAE</a:t>
+                      </a:r>
+                    </a:p>
+                  </a:txBody>
+                  <a:tcPr/>
+                </a:tc>
+                <a:tc>
+                  <a:txBody>
+                    <a:bodyPr/>
+                    <a:lstStyle/>
+                    <a:p>
+                      <a:pPr lvl="0" indent="0" marL="0">
+                        <a:buNone/>
+                      </a:pPr>
+                      <a:r>
+                        <a:rPr/>
+                        <a:t>RMSLE</a:t>
                       </a:r>
                     </a:p>
                   </a:txBody>
@@ -4944,52 +3841,67 @@
                       </a:pPr>
                       <a:r>
                         <a:rPr/>
-                        <a:t>12</a:t>
-                      </a:r>
-                    </a:p>
-                  </a:txBody>
-                </a:tc>
-                <a:tc>
-                  <a:txBody>
-                    <a:bodyPr/>
-                    <a:lstStyle/>
-                    <a:p>
-                      <a:pPr lvl="0" indent="0" marL="0">
-                        <a:buNone/>
-                      </a:pPr>
-                      <a:r>
-                        <a:rPr/>
-                        <a:t>7.5</a:t>
-                      </a:r>
-                    </a:p>
-                  </a:txBody>
-                </a:tc>
-                <a:tc>
-                  <a:txBody>
-                    <a:bodyPr/>
-                    <a:lstStyle/>
-                    <a:p>
-                      <a:pPr lvl="0" indent="0" marL="0">
-                        <a:buNone/>
-                      </a:pPr>
-                      <a:r>
-                        <a:rPr/>
-                        <a:t>45.2</a:t>
-                      </a:r>
-                    </a:p>
-                  </a:txBody>
-                </a:tc>
-                <a:tc>
-                  <a:txBody>
-                    <a:bodyPr/>
-                    <a:lstStyle/>
-                    <a:p>
-                      <a:pPr lvl="0" indent="0" marL="0">
-                        <a:buNone/>
-                      </a:pPr>
-                      <a:r>
-                        <a:rPr/>
-                        <a:t>178.86</a:t>
+                        <a:t>balsam fir</a:t>
+                      </a:r>
+                    </a:p>
+                  </a:txBody>
+                </a:tc>
+                <a:tc>
+                  <a:txBody>
+                    <a:bodyPr/>
+                    <a:lstStyle/>
+                    <a:p>
+                      <a:pPr lvl="0" indent="0" marL="0">
+                        <a:buNone/>
+                      </a:pPr>
+                      <a:r>
+                        <a:rPr/>
+                        <a:t>2</a:t>
+                      </a:r>
+                    </a:p>
+                  </a:txBody>
+                </a:tc>
+                <a:tc>
+                  <a:txBody>
+                    <a:bodyPr/>
+                    <a:lstStyle/>
+                    <a:p>
+                      <a:pPr lvl="0" indent="0" marL="0">
+                        <a:buNone/>
+                      </a:pPr>
+                      <a:r>
+                        <a:rPr/>
+                        <a:t>125.825473</a:t>
+                      </a:r>
+                    </a:p>
+                  </a:txBody>
+                </a:tc>
+                <a:tc>
+                  <a:txBody>
+                    <a:bodyPr/>
+                    <a:lstStyle/>
+                    <a:p>
+                      <a:pPr lvl="0" indent="0" marL="0">
+                        <a:buNone/>
+                      </a:pPr>
+                      <a:r>
+                        <a:rPr/>
+                        <a:t>34.801913</a:t>
+                      </a:r>
+                    </a:p>
+                  </a:txBody>
+                </a:tc>
+                <a:tc>
+                  <a:txBody>
+                    <a:bodyPr/>
+                    <a:lstStyle/>
+                    <a:p>
+                      <a:pPr lvl="0" indent="0" marL="0">
+                        <a:buNone/>
+                      </a:pPr>
+                      <a:r>
+                        <a:rPr/>
+                        <a:t>0.119574</a:t>
                       </a:r>
                     </a:p>
                   </a:txBody>
@@ -5021,52 +3933,67 @@
                       </a:pPr>
                       <a:r>
                         <a:rPr/>
-                        <a:t>12</a:t>
-                      </a:r>
-                    </a:p>
-                  </a:txBody>
-                </a:tc>
-                <a:tc>
-                  <a:txBody>
-                    <a:bodyPr/>
-                    <a:lstStyle/>
-                    <a:p>
-                      <a:pPr lvl="0" indent="0" marL="0">
-                        <a:buNone/>
-                      </a:pPr>
-                      <a:r>
-                        <a:rPr/>
-                        <a:t>9.3</a:t>
-                      </a:r>
-                    </a:p>
-                  </a:txBody>
-                </a:tc>
-                <a:tc>
-                  <a:txBody>
-                    <a:bodyPr/>
-                    <a:lstStyle/>
-                    <a:p>
-                      <a:pPr lvl="0" indent="0" marL="0">
-                        <a:buNone/>
-                      </a:pPr>
-                      <a:r>
-                        <a:rPr/>
-                        <a:t>62.7</a:t>
-                      </a:r>
-                    </a:p>
-                  </a:txBody>
-                </a:tc>
-                <a:tc>
-                  <a:txBody>
-                    <a:bodyPr/>
-                    <a:lstStyle/>
-                    <a:p>
-                      <a:pPr lvl="0" indent="0" marL="0">
-                        <a:buNone/>
-                      </a:pPr>
-                      <a:r>
-                        <a:rPr/>
-                        <a:t>323.46</a:t>
+                        <a:t>balsam fir</a:t>
+                      </a:r>
+                    </a:p>
+                  </a:txBody>
+                </a:tc>
+                <a:tc>
+                  <a:txBody>
+                    <a:bodyPr/>
+                    <a:lstStyle/>
+                    <a:p>
+                      <a:pPr lvl="0" indent="0" marL="0">
+                        <a:buNone/>
+                      </a:pPr>
+                      <a:r>
+                        <a:rPr/>
+                        <a:t>3</a:t>
+                      </a:r>
+                    </a:p>
+                  </a:txBody>
+                </a:tc>
+                <a:tc>
+                  <a:txBody>
+                    <a:bodyPr/>
+                    <a:lstStyle/>
+                    <a:p>
+                      <a:pPr lvl="0" indent="0" marL="0">
+                        <a:buNone/>
+                      </a:pPr>
+                      <a:r>
+                        <a:rPr/>
+                        <a:t>129.651479</a:t>
+                      </a:r>
+                    </a:p>
+                  </a:txBody>
+                </a:tc>
+                <a:tc>
+                  <a:txBody>
+                    <a:bodyPr/>
+                    <a:lstStyle/>
+                    <a:p>
+                      <a:pPr lvl="0" indent="0" marL="0">
+                        <a:buNone/>
+                      </a:pPr>
+                      <a:r>
+                        <a:rPr/>
+                        <a:t>36.646493</a:t>
+                      </a:r>
+                    </a:p>
+                  </a:txBody>
+                </a:tc>
+                <a:tc>
+                  <a:txBody>
+                    <a:bodyPr/>
+                    <a:lstStyle/>
+                    <a:p>
+                      <a:pPr lvl="0" indent="0" marL="0">
+                        <a:buNone/>
+                      </a:pPr>
+                      <a:r>
+                        <a:rPr/>
+                        <a:t>0.123724</a:t>
                       </a:r>
                     </a:p>
                   </a:txBody>
@@ -5098,52 +4025,67 @@
                       </a:pPr>
                       <a:r>
                         <a:rPr/>
-                        <a:t>12</a:t>
-                      </a:r>
-                    </a:p>
-                  </a:txBody>
-                </a:tc>
-                <a:tc>
-                  <a:txBody>
-                    <a:bodyPr/>
-                    <a:lstStyle/>
-                    <a:p>
-                      <a:pPr lvl="0" indent="0" marL="0">
-                        <a:buNone/>
-                      </a:pPr>
-                      <a:r>
-                        <a:rPr/>
-                        <a:t>9.7</a:t>
-                      </a:r>
-                    </a:p>
-                  </a:txBody>
-                </a:tc>
-                <a:tc>
-                  <a:txBody>
-                    <a:bodyPr/>
-                    <a:lstStyle/>
-                    <a:p>
-                      <a:pPr lvl="0" indent="0" marL="0">
-                        <a:buNone/>
-                      </a:pPr>
-                      <a:r>
-                        <a:rPr/>
-                        <a:t>56.7</a:t>
-                      </a:r>
-                    </a:p>
-                  </a:txBody>
-                </a:tc>
-                <a:tc>
-                  <a:txBody>
-                    <a:bodyPr/>
-                    <a:lstStyle/>
-                    <a:p>
-                      <a:pPr lvl="0" indent="0" marL="0">
-                        <a:buNone/>
-                      </a:pPr>
-                      <a:r>
-                        <a:rPr/>
-                        <a:t>342.47</a:t>
+                        <a:t>balsam fir</a:t>
+                      </a:r>
+                    </a:p>
+                  </a:txBody>
+                </a:tc>
+                <a:tc>
+                  <a:txBody>
+                    <a:bodyPr/>
+                    <a:lstStyle/>
+                    <a:p>
+                      <a:pPr lvl="0" indent="0" marL="0">
+                        <a:buNone/>
+                      </a:pPr>
+                      <a:r>
+                        <a:rPr/>
+                        <a:t>4</a:t>
+                      </a:r>
+                    </a:p>
+                  </a:txBody>
+                </a:tc>
+                <a:tc>
+                  <a:txBody>
+                    <a:bodyPr/>
+                    <a:lstStyle/>
+                    <a:p>
+                      <a:pPr lvl="0" indent="0" marL="0">
+                        <a:buNone/>
+                      </a:pPr>
+                      <a:r>
+                        <a:rPr/>
+                        <a:t>134.599829</a:t>
+                      </a:r>
+                    </a:p>
+                  </a:txBody>
+                </a:tc>
+                <a:tc>
+                  <a:txBody>
+                    <a:bodyPr/>
+                    <a:lstStyle/>
+                    <a:p>
+                      <a:pPr lvl="0" indent="0" marL="0">
+                        <a:buNone/>
+                      </a:pPr>
+                      <a:r>
+                        <a:rPr/>
+                        <a:t>38.884870</a:t>
+                      </a:r>
+                    </a:p>
+                  </a:txBody>
+                </a:tc>
+                <a:tc>
+                  <a:txBody>
+                    <a:bodyPr/>
+                    <a:lstStyle/>
+                    <a:p>
+                      <a:pPr lvl="0" indent="0" marL="0">
+                        <a:buNone/>
+                      </a:pPr>
+                      <a:r>
+                        <a:rPr/>
+                        <a:t>0.133858</a:t>
                       </a:r>
                     </a:p>
                   </a:txBody>
@@ -5175,52 +4117,67 @@
                       </a:pPr>
                       <a:r>
                         <a:rPr/>
-                        <a:t>12</a:t>
-                      </a:r>
-                    </a:p>
-                  </a:txBody>
-                </a:tc>
-                <a:tc>
-                  <a:txBody>
-                    <a:bodyPr/>
-                    <a:lstStyle/>
-                    <a:p>
-                      <a:pPr lvl="0" indent="0" marL="0">
-                        <a:buNone/>
-                      </a:pPr>
-                      <a:r>
-                        <a:rPr/>
-                        <a:t>11.4</a:t>
-                      </a:r>
-                    </a:p>
-                  </a:txBody>
-                </a:tc>
-                <a:tc>
-                  <a:txBody>
-                    <a:bodyPr/>
-                    <a:lstStyle/>
-                    <a:p>
-                      <a:pPr lvl="0" indent="0" marL="0">
-                        <a:buNone/>
-                      </a:pPr>
-                      <a:r>
-                        <a:rPr/>
-                        <a:t>66.1</a:t>
-                      </a:r>
-                    </a:p>
-                  </a:txBody>
-                </a:tc>
-                <a:tc>
-                  <a:txBody>
-                    <a:bodyPr/>
-                    <a:lstStyle/>
-                    <a:p>
-                      <a:pPr lvl="0" indent="0" marL="0">
-                        <a:buNone/>
-                      </a:pPr>
-                      <a:r>
-                        <a:rPr/>
-                        <a:t>499.35</a:t>
+                        <a:t>balsam fir</a:t>
+                      </a:r>
+                    </a:p>
+                  </a:txBody>
+                </a:tc>
+                <a:tc>
+                  <a:txBody>
+                    <a:bodyPr/>
+                    <a:lstStyle/>
+                    <a:p>
+                      <a:pPr lvl="0" indent="0" marL="0">
+                        <a:buNone/>
+                      </a:pPr>
+                      <a:r>
+                        <a:rPr/>
+                        <a:t>5</a:t>
+                      </a:r>
+                    </a:p>
+                  </a:txBody>
+                </a:tc>
+                <a:tc>
+                  <a:txBody>
+                    <a:bodyPr/>
+                    <a:lstStyle/>
+                    <a:p>
+                      <a:pPr lvl="0" indent="0" marL="0">
+                        <a:buNone/>
+                      </a:pPr>
+                      <a:r>
+                        <a:rPr/>
+                        <a:t>145.003601</a:t>
+                      </a:r>
+                    </a:p>
+                  </a:txBody>
+                </a:tc>
+                <a:tc>
+                  <a:txBody>
+                    <a:bodyPr/>
+                    <a:lstStyle/>
+                    <a:p>
+                      <a:pPr lvl="0" indent="0" marL="0">
+                        <a:buNone/>
+                      </a:pPr>
+                      <a:r>
+                        <a:rPr/>
+                        <a:t>41.209530</a:t>
+                      </a:r>
+                    </a:p>
+                  </a:txBody>
+                </a:tc>
+                <a:tc>
+                  <a:txBody>
+                    <a:bodyPr/>
+                    <a:lstStyle/>
+                    <a:p>
+                      <a:pPr lvl="0" indent="0" marL="0">
+                        <a:buNone/>
+                      </a:pPr>
+                      <a:r>
+                        <a:rPr/>
+                        <a:t>0.144063</a:t>
                       </a:r>
                     </a:p>
                   </a:txBody>
@@ -5252,52 +4209,619 @@
                       </a:pPr>
                       <a:r>
                         <a:rPr/>
-                        <a:t>12</a:t>
-                      </a:r>
-                    </a:p>
-                  </a:txBody>
-                </a:tc>
-                <a:tc>
-                  <a:txBody>
-                    <a:bodyPr/>
-                    <a:lstStyle/>
-                    <a:p>
-                      <a:pPr lvl="0" indent="0" marL="0">
-                        <a:buNone/>
-                      </a:pPr>
-                      <a:r>
-                        <a:rPr/>
-                        <a:t>6.4</a:t>
-                      </a:r>
-                    </a:p>
-                  </a:txBody>
-                </a:tc>
-                <a:tc>
-                  <a:txBody>
-                    <a:bodyPr/>
-                    <a:lstStyle/>
-                    <a:p>
-                      <a:pPr lvl="0" indent="0" marL="0">
-                        <a:buNone/>
-                      </a:pPr>
-                      <a:r>
-                        <a:rPr/>
-                        <a:t>51.8</a:t>
-                      </a:r>
-                    </a:p>
-                  </a:txBody>
-                </a:tc>
-                <a:tc>
-                  <a:txBody>
-                    <a:bodyPr/>
-                    <a:lstStyle/>
-                    <a:p>
-                      <a:pPr lvl="0" indent="0" marL="0">
-                        <a:buNone/>
-                      </a:pPr>
-                      <a:r>
-                        <a:rPr/>
-                        <a:t>113.92</a:t>
+                        <a:t>balsam fir</a:t>
+                      </a:r>
+                    </a:p>
+                  </a:txBody>
+                </a:tc>
+                <a:tc>
+                  <a:txBody>
+                    <a:bodyPr/>
+                    <a:lstStyle/>
+                    <a:p>
+                      <a:pPr lvl="0" indent="0" marL="0">
+                        <a:buNone/>
+                      </a:pPr>
+                      <a:r>
+                        <a:rPr/>
+                        <a:t>6</a:t>
+                      </a:r>
+                    </a:p>
+                  </a:txBody>
+                </a:tc>
+                <a:tc>
+                  <a:txBody>
+                    <a:bodyPr/>
+                    <a:lstStyle/>
+                    <a:p>
+                      <a:pPr lvl="0" indent="0" marL="0">
+                        <a:buNone/>
+                      </a:pPr>
+                      <a:r>
+                        <a:rPr/>
+                        <a:t>147.451321</a:t>
+                      </a:r>
+                    </a:p>
+                  </a:txBody>
+                </a:tc>
+                <a:tc>
+                  <a:txBody>
+                    <a:bodyPr/>
+                    <a:lstStyle/>
+                    <a:p>
+                      <a:pPr lvl="0" indent="0" marL="0">
+                        <a:buNone/>
+                      </a:pPr>
+                      <a:r>
+                        <a:rPr/>
+                        <a:t>40.791681</a:t>
+                      </a:r>
+                    </a:p>
+                  </a:txBody>
+                </a:tc>
+                <a:tc>
+                  <a:txBody>
+                    <a:bodyPr/>
+                    <a:lstStyle/>
+                    <a:p>
+                      <a:pPr lvl="0" indent="0" marL="0">
+                        <a:buNone/>
+                      </a:pPr>
+                      <a:r>
+                        <a:rPr/>
+                        <a:t>0.142862</a:t>
+                      </a:r>
+                    </a:p>
+                  </a:txBody>
+                </a:tc>
+              </a:tr>
+              <a:tr h="0">
+                <a:tc>
+                  <a:txBody>
+                    <a:bodyPr/>
+                    <a:lstStyle/>
+                    <a:p>
+                      <a:pPr lvl="0" indent="0" marL="0">
+                        <a:buNone/>
+                      </a:pPr>
+                      <a:r>
+                        <a:rPr/>
+                        <a:t>...</a:t>
+                      </a:r>
+                    </a:p>
+                  </a:txBody>
+                </a:tc>
+                <a:tc>
+                  <a:txBody>
+                    <a:bodyPr/>
+                    <a:lstStyle/>
+                    <a:p>
+                      <a:pPr lvl="0" indent="0" marL="0">
+                        <a:buNone/>
+                      </a:pPr>
+                      <a:r>
+                        <a:rPr/>
+                        <a:t>...</a:t>
+                      </a:r>
+                    </a:p>
+                  </a:txBody>
+                </a:tc>
+                <a:tc>
+                  <a:txBody>
+                    <a:bodyPr/>
+                    <a:lstStyle/>
+                    <a:p>
+                      <a:pPr lvl="0" indent="0" marL="0">
+                        <a:buNone/>
+                      </a:pPr>
+                      <a:r>
+                        <a:rPr/>
+                        <a:t>...</a:t>
+                      </a:r>
+                    </a:p>
+                  </a:txBody>
+                </a:tc>
+                <a:tc>
+                  <a:txBody>
+                    <a:bodyPr/>
+                    <a:lstStyle/>
+                    <a:p>
+                      <a:pPr lvl="0" indent="0" marL="0">
+                        <a:buNone/>
+                      </a:pPr>
+                      <a:r>
+                        <a:rPr/>
+                        <a:t>...</a:t>
+                      </a:r>
+                    </a:p>
+                  </a:txBody>
+                </a:tc>
+                <a:tc>
+                  <a:txBody>
+                    <a:bodyPr/>
+                    <a:lstStyle/>
+                    <a:p>
+                      <a:pPr lvl="0" indent="0" marL="0">
+                        <a:buNone/>
+                      </a:pPr>
+                      <a:r>
+                        <a:rPr/>
+                        <a:t>...</a:t>
+                      </a:r>
+                    </a:p>
+                  </a:txBody>
+                </a:tc>
+                <a:tc>
+                  <a:txBody>
+                    <a:bodyPr/>
+                    <a:lstStyle/>
+                    <a:p>
+                      <a:pPr lvl="0" indent="0" marL="0">
+                        <a:buNone/>
+                      </a:pPr>
+                      <a:r>
+                        <a:rPr/>
+                        <a:t>...</a:t>
+                      </a:r>
+                    </a:p>
+                  </a:txBody>
+                </a:tc>
+              </a:tr>
+              <a:tr h="0">
+                <a:tc>
+                  <a:txBody>
+                    <a:bodyPr/>
+                    <a:lstStyle/>
+                    <a:p>
+                      <a:pPr lvl="0" indent="0" marL="0">
+                        <a:buNone/>
+                      </a:pPr>
+                      <a:r>
+                        <a:rPr/>
+                        <a:t>895</a:t>
+                      </a:r>
+                    </a:p>
+                  </a:txBody>
+                </a:tc>
+                <a:tc>
+                  <a:txBody>
+                    <a:bodyPr/>
+                    <a:lstStyle/>
+                    <a:p>
+                      <a:pPr lvl="0" indent="0" marL="0">
+                        <a:buNone/>
+                      </a:pPr>
+                      <a:r>
+                        <a:rPr/>
+                        <a:t>sugarberry</a:t>
+                      </a:r>
+                    </a:p>
+                  </a:txBody>
+                </a:tc>
+                <a:tc>
+                  <a:txBody>
+                    <a:bodyPr/>
+                    <a:lstStyle/>
+                    <a:p>
+                      <a:pPr lvl="0" indent="0" marL="0">
+                        <a:buNone/>
+                      </a:pPr>
+                      <a:r>
+                        <a:rPr/>
+                        <a:t>6</a:t>
+                      </a:r>
+                    </a:p>
+                  </a:txBody>
+                </a:tc>
+                <a:tc>
+                  <a:txBody>
+                    <a:bodyPr/>
+                    <a:lstStyle/>
+                    <a:p>
+                      <a:pPr lvl="0" indent="0" marL="0">
+                        <a:buNone/>
+                      </a:pPr>
+                      <a:r>
+                        <a:rPr/>
+                        <a:t>32.431052</a:t>
+                      </a:r>
+                    </a:p>
+                  </a:txBody>
+                </a:tc>
+                <a:tc>
+                  <a:txBody>
+                    <a:bodyPr/>
+                    <a:lstStyle/>
+                    <a:p>
+                      <a:pPr lvl="0" indent="0" marL="0">
+                        <a:buNone/>
+                      </a:pPr>
+                      <a:r>
+                        <a:rPr/>
+                        <a:t>20.969306</a:t>
+                      </a:r>
+                    </a:p>
+                  </a:txBody>
+                </a:tc>
+                <a:tc>
+                  <a:txBody>
+                    <a:bodyPr/>
+                    <a:lstStyle/>
+                    <a:p>
+                      <a:pPr lvl="0" indent="0" marL="0">
+                        <a:buNone/>
+                      </a:pPr>
+                      <a:r>
+                        <a:rPr/>
+                        <a:t>0.565727</a:t>
+                      </a:r>
+                    </a:p>
+                  </a:txBody>
+                </a:tc>
+              </a:tr>
+              <a:tr h="0">
+                <a:tc>
+                  <a:txBody>
+                    <a:bodyPr/>
+                    <a:lstStyle/>
+                    <a:p>
+                      <a:pPr lvl="0" indent="0" marL="0">
+                        <a:buNone/>
+                      </a:pPr>
+                      <a:r>
+                        <a:rPr/>
+                        <a:t>896</a:t>
+                      </a:r>
+                    </a:p>
+                  </a:txBody>
+                </a:tc>
+                <a:tc>
+                  <a:txBody>
+                    <a:bodyPr/>
+                    <a:lstStyle/>
+                    <a:p>
+                      <a:pPr lvl="0" indent="0" marL="0">
+                        <a:buNone/>
+                      </a:pPr>
+                      <a:r>
+                        <a:rPr/>
+                        <a:t>sugarberry</a:t>
+                      </a:r>
+                    </a:p>
+                  </a:txBody>
+                </a:tc>
+                <a:tc>
+                  <a:txBody>
+                    <a:bodyPr/>
+                    <a:lstStyle/>
+                    <a:p>
+                      <a:pPr lvl="0" indent="0" marL="0">
+                        <a:buNone/>
+                      </a:pPr>
+                      <a:r>
+                        <a:rPr/>
+                        <a:t>7</a:t>
+                      </a:r>
+                    </a:p>
+                  </a:txBody>
+                </a:tc>
+                <a:tc>
+                  <a:txBody>
+                    <a:bodyPr/>
+                    <a:lstStyle/>
+                    <a:p>
+                      <a:pPr lvl="0" indent="0" marL="0">
+                        <a:buNone/>
+                      </a:pPr>
+                      <a:r>
+                        <a:rPr/>
+                        <a:t>37.324259</a:t>
+                      </a:r>
+                    </a:p>
+                  </a:txBody>
+                </a:tc>
+                <a:tc>
+                  <a:txBody>
+                    <a:bodyPr/>
+                    <a:lstStyle/>
+                    <a:p>
+                      <a:pPr lvl="0" indent="0" marL="0">
+                        <a:buNone/>
+                      </a:pPr>
+                      <a:r>
+                        <a:rPr/>
+                        <a:t>25.037024</a:t>
+                      </a:r>
+                    </a:p>
+                  </a:txBody>
+                </a:tc>
+                <a:tc>
+                  <a:txBody>
+                    <a:bodyPr/>
+                    <a:lstStyle/>
+                    <a:p>
+                      <a:pPr lvl="0" indent="0" marL="0">
+                        <a:buNone/>
+                      </a:pPr>
+                      <a:r>
+                        <a:rPr/>
+                        <a:t>0.637629</a:t>
+                      </a:r>
+                    </a:p>
+                  </a:txBody>
+                </a:tc>
+              </a:tr>
+              <a:tr h="0">
+                <a:tc>
+                  <a:txBody>
+                    <a:bodyPr/>
+                    <a:lstStyle/>
+                    <a:p>
+                      <a:pPr lvl="0" indent="0" marL="0">
+                        <a:buNone/>
+                      </a:pPr>
+                      <a:r>
+                        <a:rPr/>
+                        <a:t>897</a:t>
+                      </a:r>
+                    </a:p>
+                  </a:txBody>
+                </a:tc>
+                <a:tc>
+                  <a:txBody>
+                    <a:bodyPr/>
+                    <a:lstStyle/>
+                    <a:p>
+                      <a:pPr lvl="0" indent="0" marL="0">
+                        <a:buNone/>
+                      </a:pPr>
+                      <a:r>
+                        <a:rPr/>
+                        <a:t>sugarberry</a:t>
+                      </a:r>
+                    </a:p>
+                  </a:txBody>
+                </a:tc>
+                <a:tc>
+                  <a:txBody>
+                    <a:bodyPr/>
+                    <a:lstStyle/>
+                    <a:p>
+                      <a:pPr lvl="0" indent="0" marL="0">
+                        <a:buNone/>
+                      </a:pPr>
+                      <a:r>
+                        <a:rPr/>
+                        <a:t>8</a:t>
+                      </a:r>
+                    </a:p>
+                  </a:txBody>
+                </a:tc>
+                <a:tc>
+                  <a:txBody>
+                    <a:bodyPr/>
+                    <a:lstStyle/>
+                    <a:p>
+                      <a:pPr lvl="0" indent="0" marL="0">
+                        <a:buNone/>
+                      </a:pPr>
+                      <a:r>
+                        <a:rPr/>
+                        <a:t>38.144756</a:t>
+                      </a:r>
+                    </a:p>
+                  </a:txBody>
+                </a:tc>
+                <a:tc>
+                  <a:txBody>
+                    <a:bodyPr/>
+                    <a:lstStyle/>
+                    <a:p>
+                      <a:pPr lvl="0" indent="0" marL="0">
+                        <a:buNone/>
+                      </a:pPr>
+                      <a:r>
+                        <a:rPr/>
+                        <a:t>26.680208</a:t>
+                      </a:r>
+                    </a:p>
+                  </a:txBody>
+                </a:tc>
+                <a:tc>
+                  <a:txBody>
+                    <a:bodyPr/>
+                    <a:lstStyle/>
+                    <a:p>
+                      <a:pPr lvl="0" indent="0" marL="0">
+                        <a:buNone/>
+                      </a:pPr>
+                      <a:r>
+                        <a:rPr/>
+                        <a:t>0.665159</a:t>
+                      </a:r>
+                    </a:p>
+                  </a:txBody>
+                </a:tc>
+              </a:tr>
+              <a:tr h="0">
+                <a:tc>
+                  <a:txBody>
+                    <a:bodyPr/>
+                    <a:lstStyle/>
+                    <a:p>
+                      <a:pPr lvl="0" indent="0" marL="0">
+                        <a:buNone/>
+                      </a:pPr>
+                      <a:r>
+                        <a:rPr/>
+                        <a:t>898</a:t>
+                      </a:r>
+                    </a:p>
+                  </a:txBody>
+                </a:tc>
+                <a:tc>
+                  <a:txBody>
+                    <a:bodyPr/>
+                    <a:lstStyle/>
+                    <a:p>
+                      <a:pPr lvl="0" indent="0" marL="0">
+                        <a:buNone/>
+                      </a:pPr>
+                      <a:r>
+                        <a:rPr/>
+                        <a:t>sugarberry</a:t>
+                      </a:r>
+                    </a:p>
+                  </a:txBody>
+                </a:tc>
+                <a:tc>
+                  <a:txBody>
+                    <a:bodyPr/>
+                    <a:lstStyle/>
+                    <a:p>
+                      <a:pPr lvl="0" indent="0" marL="0">
+                        <a:buNone/>
+                      </a:pPr>
+                      <a:r>
+                        <a:rPr/>
+                        <a:t>9</a:t>
+                      </a:r>
+                    </a:p>
+                  </a:txBody>
+                </a:tc>
+                <a:tc>
+                  <a:txBody>
+                    <a:bodyPr/>
+                    <a:lstStyle/>
+                    <a:p>
+                      <a:pPr lvl="0" indent="0" marL="0">
+                        <a:buNone/>
+                      </a:pPr>
+                      <a:r>
+                        <a:rPr/>
+                        <a:t>36.853245</a:t>
+                      </a:r>
+                    </a:p>
+                  </a:txBody>
+                </a:tc>
+                <a:tc>
+                  <a:txBody>
+                    <a:bodyPr/>
+                    <a:lstStyle/>
+                    <a:p>
+                      <a:pPr lvl="0" indent="0" marL="0">
+                        <a:buNone/>
+                      </a:pPr>
+                      <a:r>
+                        <a:rPr/>
+                        <a:t>21.021667</a:t>
+                      </a:r>
+                    </a:p>
+                  </a:txBody>
+                </a:tc>
+                <a:tc>
+                  <a:txBody>
+                    <a:bodyPr/>
+                    <a:lstStyle/>
+                    <a:p>
+                      <a:pPr lvl="0" indent="0" marL="0">
+                        <a:buNone/>
+                      </a:pPr>
+                      <a:r>
+                        <a:rPr/>
+                        <a:t>0.685162</a:t>
+                      </a:r>
+                    </a:p>
+                  </a:txBody>
+                </a:tc>
+              </a:tr>
+              <a:tr h="0">
+                <a:tc>
+                  <a:txBody>
+                    <a:bodyPr/>
+                    <a:lstStyle/>
+                    <a:p>
+                      <a:pPr lvl="0" indent="0" marL="0">
+                        <a:buNone/>
+                      </a:pPr>
+                      <a:r>
+                        <a:rPr/>
+                        <a:t>899</a:t>
+                      </a:r>
+                    </a:p>
+                  </a:txBody>
+                </a:tc>
+                <a:tc>
+                  <a:txBody>
+                    <a:bodyPr/>
+                    <a:lstStyle/>
+                    <a:p>
+                      <a:pPr lvl="0" indent="0" marL="0">
+                        <a:buNone/>
+                      </a:pPr>
+                      <a:r>
+                        <a:rPr/>
+                        <a:t>sugarberry</a:t>
+                      </a:r>
+                    </a:p>
+                  </a:txBody>
+                </a:tc>
+                <a:tc>
+                  <a:txBody>
+                    <a:bodyPr/>
+                    <a:lstStyle/>
+                    <a:p>
+                      <a:pPr lvl="0" indent="0" marL="0">
+                        <a:buNone/>
+                      </a:pPr>
+                      <a:r>
+                        <a:rPr/>
+                        <a:t>10</a:t>
+                      </a:r>
+                    </a:p>
+                  </a:txBody>
+                </a:tc>
+                <a:tc>
+                  <a:txBody>
+                    <a:bodyPr/>
+                    <a:lstStyle/>
+                    <a:p>
+                      <a:pPr lvl="0" indent="0" marL="0">
+                        <a:buNone/>
+                      </a:pPr>
+                      <a:r>
+                        <a:rPr/>
+                        <a:t>40.091106</a:t>
+                      </a:r>
+                    </a:p>
+                  </a:txBody>
+                </a:tc>
+                <a:tc>
+                  <a:txBody>
+                    <a:bodyPr/>
+                    <a:lstStyle/>
+                    <a:p>
+                      <a:pPr lvl="0" indent="0" marL="0">
+                        <a:buNone/>
+                      </a:pPr>
+                      <a:r>
+                        <a:rPr/>
+                        <a:t>23.172083</a:t>
+                      </a:r>
+                    </a:p>
+                  </a:txBody>
+                </a:tc>
+                <a:tc>
+                  <a:txBody>
+                    <a:bodyPr/>
+                    <a:lstStyle/>
+                    <a:p>
+                      <a:pPr lvl="0" indent="0" marL="0">
+                        <a:buNone/>
+                      </a:pPr>
+                      <a:r>
+                        <a:rPr/>
+                        <a:t>0.677519</a:t>
                       </a:r>
                     </a:p>
                   </a:txBody>
@@ -5349,319 +4873,62 @@
             </a:pPr>
             <a:r>
               <a:rPr/>
-              <a:t>Tree Species Name Data:</a:t>
+              <a:t>Technical Lead</a:t>
             </a:r>
           </a:p>
         </p:txBody>
       </p:sp>
-      <p:graphicFrame>
-        <p:nvGraphicFramePr>
-          <p:cNvPr id="6" name="Content Placeholder 5"/>
-          <p:cNvGraphicFramePr>
-            <a:graphicFrameLocks noGrp="1"/>
-          </p:cNvGraphicFramePr>
+      <p:sp>
+        <p:nvSpPr>
+          <p:cNvPr id="3" name="Content Placeholder 2"/>
+          <p:cNvSpPr>
+            <a:spLocks noGrp="1"/>
+          </p:cNvSpPr>
           <p:nvPr>
             <p:ph idx="1"/>
           </p:nvPr>
-        </p:nvGraphicFramePr>
-        <p:xfrm>
-          <a:off x="457200" y="1193800"/>
-          <a:ext cx="8229600" cy="3390900"/>
-        </p:xfrm>
-        <a:graphic>
-          <a:graphicData uri="http://schemas.openxmlformats.org/drawingml/2006/table">
-            <a:tbl>
-              <a:tblPr firstRow="1" bandRow="1">
-                <a:tableStyleId>{5C22544A-7EE6-4342-B048-85BDC9FD1C3A}</a:tableStyleId>
-              </a:tblPr>
-              <a:tblGrid>
-                <a:gridCol w="2743200"/>
-                <a:gridCol w="2743200"/>
-                <a:gridCol w="2743200"/>
-              </a:tblGrid>
-              <a:tr h="0">
-                <a:tc>
-                  <a:txBody>
-                    <a:bodyPr/>
-                    <a:lstStyle/>
-                    <a:p>
-                      <a:endParaRPr/>
-                    </a:p>
-                  </a:txBody>
-                  <a:tcPr/>
-                </a:tc>
-                <a:tc>
-                  <a:txBody>
-                    <a:bodyPr/>
-                    <a:lstStyle/>
-                    <a:p>
-                      <a:pPr lvl="0" indent="0" marL="0">
-                        <a:buNone/>
-                      </a:pPr>
-                      <a:r>
-                        <a:rPr/>
-                        <a:t>SPCD</a:t>
-                      </a:r>
-                    </a:p>
-                  </a:txBody>
-                  <a:tcPr/>
-                </a:tc>
-                <a:tc>
-                  <a:txBody>
-                    <a:bodyPr/>
-                    <a:lstStyle/>
-                    <a:p>
-                      <a:pPr lvl="0" indent="0" marL="0">
-                        <a:buNone/>
-                      </a:pPr>
-                      <a:r>
-                        <a:rPr/>
-                        <a:t>COMMON_NAME</a:t>
-                      </a:r>
-                    </a:p>
-                  </a:txBody>
-                  <a:tcPr/>
-                </a:tc>
-              </a:tr>
-              <a:tr h="0">
-                <a:tc>
-                  <a:txBody>
-                    <a:bodyPr/>
-                    <a:lstStyle/>
-                    <a:p>
-                      <a:pPr lvl="0" indent="0" marL="0">
-                        <a:buNone/>
-                      </a:pPr>
-                      <a:r>
-                        <a:rPr/>
-                        <a:t>0</a:t>
-                      </a:r>
-                    </a:p>
-                  </a:txBody>
-                </a:tc>
-                <a:tc>
-                  <a:txBody>
-                    <a:bodyPr/>
-                    <a:lstStyle/>
-                    <a:p>
-                      <a:pPr lvl="0" indent="0" marL="0">
-                        <a:buNone/>
-                      </a:pPr>
-                      <a:r>
-                        <a:rPr/>
-                        <a:t>10</a:t>
-                      </a:r>
-                    </a:p>
-                  </a:txBody>
-                </a:tc>
-                <a:tc>
-                  <a:txBody>
-                    <a:bodyPr/>
-                    <a:lstStyle/>
-                    <a:p>
-                      <a:pPr lvl="0" indent="0" marL="0">
-                        <a:buNone/>
-                      </a:pPr>
-                      <a:r>
-                        <a:rPr/>
-                        <a:t>fir spp.</a:t>
-                      </a:r>
-                    </a:p>
-                  </a:txBody>
-                </a:tc>
-              </a:tr>
-              <a:tr h="0">
-                <a:tc>
-                  <a:txBody>
-                    <a:bodyPr/>
-                    <a:lstStyle/>
-                    <a:p>
-                      <a:pPr lvl="0" indent="0" marL="0">
-                        <a:buNone/>
-                      </a:pPr>
-                      <a:r>
-                        <a:rPr/>
-                        <a:t>1</a:t>
-                      </a:r>
-                    </a:p>
-                  </a:txBody>
-                </a:tc>
-                <a:tc>
-                  <a:txBody>
-                    <a:bodyPr/>
-                    <a:lstStyle/>
-                    <a:p>
-                      <a:pPr lvl="0" indent="0" marL="0">
-                        <a:buNone/>
-                      </a:pPr>
-                      <a:r>
-                        <a:rPr/>
-                        <a:t>11</a:t>
-                      </a:r>
-                    </a:p>
-                  </a:txBody>
-                </a:tc>
-                <a:tc>
-                  <a:txBody>
-                    <a:bodyPr/>
-                    <a:lstStyle/>
-                    <a:p>
-                      <a:pPr lvl="0" indent="0" marL="0">
-                        <a:buNone/>
-                      </a:pPr>
-                      <a:r>
-                        <a:rPr/>
-                        <a:t>Pacific silver fir</a:t>
-                      </a:r>
-                    </a:p>
-                  </a:txBody>
-                </a:tc>
-              </a:tr>
-              <a:tr h="0">
-                <a:tc>
-                  <a:txBody>
-                    <a:bodyPr/>
-                    <a:lstStyle/>
-                    <a:p>
-                      <a:pPr lvl="0" indent="0" marL="0">
-                        <a:buNone/>
-                      </a:pPr>
-                      <a:r>
-                        <a:rPr/>
-                        <a:t>2</a:t>
-                      </a:r>
-                    </a:p>
-                  </a:txBody>
-                </a:tc>
-                <a:tc>
-                  <a:txBody>
-                    <a:bodyPr/>
-                    <a:lstStyle/>
-                    <a:p>
-                      <a:pPr lvl="0" indent="0" marL="0">
-                        <a:buNone/>
-                      </a:pPr>
-                      <a:r>
-                        <a:rPr/>
-                        <a:t>12</a:t>
-                      </a:r>
-                    </a:p>
-                  </a:txBody>
-                </a:tc>
-                <a:tc>
-                  <a:txBody>
-                    <a:bodyPr/>
-                    <a:lstStyle/>
-                    <a:p>
-                      <a:pPr lvl="0" indent="0" marL="0">
-                        <a:buNone/>
-                      </a:pPr>
-                      <a:r>
-                        <a:rPr/>
-                        <a:t>balsam fir</a:t>
-                      </a:r>
-                    </a:p>
-                  </a:txBody>
-                </a:tc>
-              </a:tr>
-              <a:tr h="0">
-                <a:tc>
-                  <a:txBody>
-                    <a:bodyPr/>
-                    <a:lstStyle/>
-                    <a:p>
-                      <a:pPr lvl="0" indent="0" marL="0">
-                        <a:buNone/>
-                      </a:pPr>
-                      <a:r>
-                        <a:rPr/>
-                        <a:t>3</a:t>
-                      </a:r>
-                    </a:p>
-                  </a:txBody>
-                </a:tc>
-                <a:tc>
-                  <a:txBody>
-                    <a:bodyPr/>
-                    <a:lstStyle/>
-                    <a:p>
-                      <a:pPr lvl="0" indent="0" marL="0">
-                        <a:buNone/>
-                      </a:pPr>
-                      <a:r>
-                        <a:rPr/>
-                        <a:t>14</a:t>
-                      </a:r>
-                    </a:p>
-                  </a:txBody>
-                </a:tc>
-                <a:tc>
-                  <a:txBody>
-                    <a:bodyPr/>
-                    <a:lstStyle/>
-                    <a:p>
-                      <a:pPr lvl="0" indent="0" marL="0">
-                        <a:buNone/>
-                      </a:pPr>
-                      <a:r>
-                        <a:rPr/>
-                        <a:t>Santa Lucia or bristlecone fir</a:t>
-                      </a:r>
-                    </a:p>
-                  </a:txBody>
-                </a:tc>
-              </a:tr>
-              <a:tr h="0">
-                <a:tc>
-                  <a:txBody>
-                    <a:bodyPr/>
-                    <a:lstStyle/>
-                    <a:p>
-                      <a:pPr lvl="0" indent="0" marL="0">
-                        <a:buNone/>
-                      </a:pPr>
-                      <a:r>
-                        <a:rPr/>
-                        <a:t>4</a:t>
-                      </a:r>
-                    </a:p>
-                  </a:txBody>
-                </a:tc>
-                <a:tc>
-                  <a:txBody>
-                    <a:bodyPr/>
-                    <a:lstStyle/>
-                    <a:p>
-                      <a:pPr lvl="0" indent="0" marL="0">
-                        <a:buNone/>
-                      </a:pPr>
-                      <a:r>
-                        <a:rPr/>
-                        <a:t>15</a:t>
-                      </a:r>
-                    </a:p>
-                  </a:txBody>
-                </a:tc>
-                <a:tc>
-                  <a:txBody>
-                    <a:bodyPr/>
-                    <a:lstStyle/>
-                    <a:p>
-                      <a:pPr lvl="0" indent="0" marL="0">
-                        <a:buNone/>
-                      </a:pPr>
-                      <a:r>
-                        <a:rPr/>
-                        <a:t>white fir</a:t>
-                      </a:r>
-                    </a:p>
-                  </a:txBody>
-                </a:tc>
-              </a:tr>
-            </a:tbl>
-          </a:graphicData>
-        </a:graphic>
-      </p:graphicFrame>
+        </p:nvSpPr>
+        <p:spPr/>
+        <p:txBody>
+          <a:bodyPr/>
+          <a:lstStyle/>
+          <a:p>
+            <a:pPr lvl="0"/>
+            <a:r>
+              <a:rPr/>
+              <a:t>Overview of data manipulation</a:t>
+            </a:r>
+          </a:p>
+          <a:p>
+            <a:pPr lvl="0"/>
+            <a:r>
+              <a:rPr/>
+              <a:t>Split and filtering methods</a:t>
+            </a:r>
+          </a:p>
+          <a:p>
+            <a:pPr lvl="0"/>
+            <a:r>
+              <a:rPr/>
+              <a:t>Feature engineering (what worked and what didn’t)</a:t>
+            </a:r>
+          </a:p>
+          <a:p>
+            <a:pPr lvl="0"/>
+            <a:r>
+              <a:rPr/>
+              <a:t>Tuning k for the best model</a:t>
+            </a:r>
+          </a:p>
+          <a:p>
+            <a:pPr lvl="0"/>
+            <a:r>
+              <a:rPr/>
+              <a:t>The final “best” model and error</a:t>
+            </a:r>
+          </a:p>
+        </p:txBody>
+      </p:sp>
     </p:spTree>
   </p:cSld>
 </p:sld>
@@ -5704,7 +4971,7 @@
             </a:pPr>
             <a:r>
               <a:rPr/>
-              <a:t>Combined Dataset (species mapped onto bigger dataset):</a:t>
+              <a:t>Tree Measurement Data:</a:t>
             </a:r>
           </a:p>
         </p:txBody>
@@ -5730,12 +4997,11 @@
                 <a:tableStyleId>{5C22544A-7EE6-4342-B048-85BDC9FD1C3A}</a:tableStyleId>
               </a:tblPr>
               <a:tblGrid>
-                <a:gridCol w="1371600"/>
-                <a:gridCol w="1371600"/>
-                <a:gridCol w="1371600"/>
-                <a:gridCol w="1371600"/>
-                <a:gridCol w="1371600"/>
-                <a:gridCol w="1371600"/>
+                <a:gridCol w="1638300"/>
+                <a:gridCol w="1638300"/>
+                <a:gridCol w="1638300"/>
+                <a:gridCol w="1638300"/>
+                <a:gridCol w="1638300"/>
               </a:tblGrid>
               <a:tr h="0">
                 <a:tc>
@@ -5812,22 +5078,6 @@
                   </a:txBody>
                   <a:tcPr/>
                 </a:tc>
-                <a:tc>
-                  <a:txBody>
-                    <a:bodyPr/>
-                    <a:lstStyle/>
-                    <a:p>
-                      <a:pPr lvl="0" indent="0" marL="0">
-                        <a:buNone/>
-                      </a:pPr>
-                      <a:r>
-                        <a:rPr/>
-                        <a:t>COMMON_NAME</a:t>
-                      </a:r>
-                    </a:p>
-                  </a:txBody>
-                  <a:tcPr/>
-                </a:tc>
               </a:tr>
               <a:tr h="0">
                 <a:tc>
@@ -5905,21 +5155,6 @@
                     </a:p>
                   </a:txBody>
                 </a:tc>
-                <a:tc>
-                  <a:txBody>
-                    <a:bodyPr/>
-                    <a:lstStyle/>
-                    <a:p>
-                      <a:pPr lvl="0" indent="0" marL="0">
-                        <a:buNone/>
-                      </a:pPr>
-                      <a:r>
-                        <a:rPr/>
-                        <a:t>balsam fir</a:t>
-                      </a:r>
-                    </a:p>
-                  </a:txBody>
-                </a:tc>
               </a:tr>
               <a:tr h="0">
                 <a:tc>
@@ -5997,21 +5232,6 @@
                     </a:p>
                   </a:txBody>
                 </a:tc>
-                <a:tc>
-                  <a:txBody>
-                    <a:bodyPr/>
-                    <a:lstStyle/>
-                    <a:p>
-                      <a:pPr lvl="0" indent="0" marL="0">
-                        <a:buNone/>
-                      </a:pPr>
-                      <a:r>
-                        <a:rPr/>
-                        <a:t>balsam fir</a:t>
-                      </a:r>
-                    </a:p>
-                  </a:txBody>
-                </a:tc>
               </a:tr>
               <a:tr h="0">
                 <a:tc>
@@ -6089,21 +5309,6 @@
                     </a:p>
                   </a:txBody>
                 </a:tc>
-                <a:tc>
-                  <a:txBody>
-                    <a:bodyPr/>
-                    <a:lstStyle/>
-                    <a:p>
-                      <a:pPr lvl="0" indent="0" marL="0">
-                        <a:buNone/>
-                      </a:pPr>
-                      <a:r>
-                        <a:rPr/>
-                        <a:t>balsam fir</a:t>
-                      </a:r>
-                    </a:p>
-                  </a:txBody>
-                </a:tc>
               </a:tr>
               <a:tr h="0">
                 <a:tc>
@@ -6181,21 +5386,6 @@
                     </a:p>
                   </a:txBody>
                 </a:tc>
-                <a:tc>
-                  <a:txBody>
-                    <a:bodyPr/>
-                    <a:lstStyle/>
-                    <a:p>
-                      <a:pPr lvl="0" indent="0" marL="0">
-                        <a:buNone/>
-                      </a:pPr>
-                      <a:r>
-                        <a:rPr/>
-                        <a:t>balsam fir</a:t>
-                      </a:r>
-                    </a:p>
-                  </a:txBody>
-                </a:tc>
               </a:tr>
               <a:tr h="0">
                 <a:tc>
@@ -6269,21 +5459,6 @@
                       <a:r>
                         <a:rPr/>
                         <a:t>113.92</a:t>
-                      </a:r>
-                    </a:p>
-                  </a:txBody>
-                </a:tc>
-                <a:tc>
-                  <a:txBody>
-                    <a:bodyPr/>
-                    <a:lstStyle/>
-                    <a:p>
-                      <a:pPr lvl="0" indent="0" marL="0">
-                        <a:buNone/>
-                      </a:pPr>
-                      <a:r>
-                        <a:rPr/>
-                        <a:t>balsam fir</a:t>
                       </a:r>
                     </a:p>
                   </a:txBody>
@@ -6335,7 +5510,7 @@
             </a:pPr>
             <a:r>
               <a:rPr/>
-              <a:t>Filtered data</a:t>
+              <a:t>Tree Species Name Data:</a:t>
             </a:r>
           </a:p>
         </p:txBody>
@@ -6361,12 +5536,9 @@
                 <a:tableStyleId>{5C22544A-7EE6-4342-B048-85BDC9FD1C3A}</a:tableStyleId>
               </a:tblPr>
               <a:tblGrid>
-                <a:gridCol w="1371600"/>
-                <a:gridCol w="1371600"/>
-                <a:gridCol w="1371600"/>
-                <a:gridCol w="1371600"/>
-                <a:gridCol w="1371600"/>
-                <a:gridCol w="1371600"/>
+                <a:gridCol w="2743200"/>
+                <a:gridCol w="2743200"/>
+                <a:gridCol w="2743200"/>
               </a:tblGrid>
               <a:tr h="0">
                 <a:tc>
@@ -6405,54 +5577,6 @@
                       </a:pPr>
                       <a:r>
                         <a:rPr/>
-                        <a:t>DO_BH</a:t>
-                      </a:r>
-                    </a:p>
-                  </a:txBody>
-                  <a:tcPr/>
-                </a:tc>
-                <a:tc>
-                  <a:txBody>
-                    <a:bodyPr/>
-                    <a:lstStyle/>
-                    <a:p>
-                      <a:pPr lvl="0" indent="0" marL="0">
-                        <a:buNone/>
-                      </a:pPr>
-                      <a:r>
-                        <a:rPr/>
-                        <a:t>HT_TOT</a:t>
-                      </a:r>
-                    </a:p>
-                  </a:txBody>
-                  <a:tcPr/>
-                </a:tc>
-                <a:tc>
-                  <a:txBody>
-                    <a:bodyPr/>
-                    <a:lstStyle/>
-                    <a:p>
-                      <a:pPr lvl="0" indent="0" marL="0">
-                        <a:buNone/>
-                      </a:pPr>
-                      <a:r>
-                        <a:rPr/>
-                        <a:t>TT_DW_CRM</a:t>
-                      </a:r>
-                    </a:p>
-                  </a:txBody>
-                  <a:tcPr/>
-                </a:tc>
-                <a:tc>
-                  <a:txBody>
-                    <a:bodyPr/>
-                    <a:lstStyle/>
-                    <a:p>
-                      <a:pPr lvl="0" indent="0" marL="0">
-                        <a:buNone/>
-                      </a:pPr>
-                      <a:r>
-                        <a:rPr/>
                         <a:t>COMMON_NAME</a:t>
                       </a:r>
                     </a:p>
@@ -6486,67 +5610,22 @@
                       </a:pPr>
                       <a:r>
                         <a:rPr/>
-                        <a:t>12</a:t>
-                      </a:r>
-                    </a:p>
-                  </a:txBody>
-                </a:tc>
-                <a:tc>
-                  <a:txBody>
-                    <a:bodyPr/>
-                    <a:lstStyle/>
-                    <a:p>
-                      <a:pPr lvl="0" indent="0" marL="0">
-                        <a:buNone/>
-                      </a:pPr>
-                      <a:r>
-                        <a:rPr/>
-                        <a:t>7.5</a:t>
-                      </a:r>
-                    </a:p>
-                  </a:txBody>
-                </a:tc>
-                <a:tc>
-                  <a:txBody>
-                    <a:bodyPr/>
-                    <a:lstStyle/>
-                    <a:p>
-                      <a:pPr lvl="0" indent="0" marL="0">
-                        <a:buNone/>
-                      </a:pPr>
-                      <a:r>
-                        <a:rPr/>
-                        <a:t>45.2</a:t>
-                      </a:r>
-                    </a:p>
-                  </a:txBody>
-                </a:tc>
-                <a:tc>
-                  <a:txBody>
-                    <a:bodyPr/>
-                    <a:lstStyle/>
-                    <a:p>
-                      <a:pPr lvl="0" indent="0" marL="0">
-                        <a:buNone/>
-                      </a:pPr>
-                      <a:r>
-                        <a:rPr/>
-                        <a:t>178.86</a:t>
-                      </a:r>
-                    </a:p>
-                  </a:txBody>
-                </a:tc>
-                <a:tc>
-                  <a:txBody>
-                    <a:bodyPr/>
-                    <a:lstStyle/>
-                    <a:p>
-                      <a:pPr lvl="0" indent="0" marL="0">
-                        <a:buNone/>
-                      </a:pPr>
-                      <a:r>
-                        <a:rPr/>
-                        <a:t>balsam fir</a:t>
+                        <a:t>10</a:t>
+                      </a:r>
+                    </a:p>
+                  </a:txBody>
+                </a:tc>
+                <a:tc>
+                  <a:txBody>
+                    <a:bodyPr/>
+                    <a:lstStyle/>
+                    <a:p>
+                      <a:pPr lvl="0" indent="0" marL="0">
+                        <a:buNone/>
+                      </a:pPr>
+                      <a:r>
+                        <a:rPr/>
+                        <a:t>fir spp.</a:t>
                       </a:r>
                     </a:p>
                   </a:txBody>
@@ -6578,67 +5657,22 @@
                       </a:pPr>
                       <a:r>
                         <a:rPr/>
-                        <a:t>12</a:t>
-                      </a:r>
-                    </a:p>
-                  </a:txBody>
-                </a:tc>
-                <a:tc>
-                  <a:txBody>
-                    <a:bodyPr/>
-                    <a:lstStyle/>
-                    <a:p>
-                      <a:pPr lvl="0" indent="0" marL="0">
-                        <a:buNone/>
-                      </a:pPr>
-                      <a:r>
-                        <a:rPr/>
-                        <a:t>9.3</a:t>
-                      </a:r>
-                    </a:p>
-                  </a:txBody>
-                </a:tc>
-                <a:tc>
-                  <a:txBody>
-                    <a:bodyPr/>
-                    <a:lstStyle/>
-                    <a:p>
-                      <a:pPr lvl="0" indent="0" marL="0">
-                        <a:buNone/>
-                      </a:pPr>
-                      <a:r>
-                        <a:rPr/>
-                        <a:t>62.7</a:t>
-                      </a:r>
-                    </a:p>
-                  </a:txBody>
-                </a:tc>
-                <a:tc>
-                  <a:txBody>
-                    <a:bodyPr/>
-                    <a:lstStyle/>
-                    <a:p>
-                      <a:pPr lvl="0" indent="0" marL="0">
-                        <a:buNone/>
-                      </a:pPr>
-                      <a:r>
-                        <a:rPr/>
-                        <a:t>323.46</a:t>
-                      </a:r>
-                    </a:p>
-                  </a:txBody>
-                </a:tc>
-                <a:tc>
-                  <a:txBody>
-                    <a:bodyPr/>
-                    <a:lstStyle/>
-                    <a:p>
-                      <a:pPr lvl="0" indent="0" marL="0">
-                        <a:buNone/>
-                      </a:pPr>
-                      <a:r>
-                        <a:rPr/>
-                        <a:t>balsam fir</a:t>
+                        <a:t>11</a:t>
+                      </a:r>
+                    </a:p>
+                  </a:txBody>
+                </a:tc>
+                <a:tc>
+                  <a:txBody>
+                    <a:bodyPr/>
+                    <a:lstStyle/>
+                    <a:p>
+                      <a:pPr lvl="0" indent="0" marL="0">
+                        <a:buNone/>
+                      </a:pPr>
+                      <a:r>
+                        <a:rPr/>
+                        <a:t>Pacific silver fir</a:t>
                       </a:r>
                     </a:p>
                   </a:txBody>
@@ -6685,51 +5719,6 @@
                       </a:pPr>
                       <a:r>
                         <a:rPr/>
-                        <a:t>9.7</a:t>
-                      </a:r>
-                    </a:p>
-                  </a:txBody>
-                </a:tc>
-                <a:tc>
-                  <a:txBody>
-                    <a:bodyPr/>
-                    <a:lstStyle/>
-                    <a:p>
-                      <a:pPr lvl="0" indent="0" marL="0">
-                        <a:buNone/>
-                      </a:pPr>
-                      <a:r>
-                        <a:rPr/>
-                        <a:t>56.7</a:t>
-                      </a:r>
-                    </a:p>
-                  </a:txBody>
-                </a:tc>
-                <a:tc>
-                  <a:txBody>
-                    <a:bodyPr/>
-                    <a:lstStyle/>
-                    <a:p>
-                      <a:pPr lvl="0" indent="0" marL="0">
-                        <a:buNone/>
-                      </a:pPr>
-                      <a:r>
-                        <a:rPr/>
-                        <a:t>342.47</a:t>
-                      </a:r>
-                    </a:p>
-                  </a:txBody>
-                </a:tc>
-                <a:tc>
-                  <a:txBody>
-                    <a:bodyPr/>
-                    <a:lstStyle/>
-                    <a:p>
-                      <a:pPr lvl="0" indent="0" marL="0">
-                        <a:buNone/>
-                      </a:pPr>
-                      <a:r>
-                        <a:rPr/>
                         <a:t>balsam fir</a:t>
                       </a:r>
                     </a:p>
@@ -6762,67 +5751,22 @@
                       </a:pPr>
                       <a:r>
                         <a:rPr/>
-                        <a:t>12</a:t>
-                      </a:r>
-                    </a:p>
-                  </a:txBody>
-                </a:tc>
-                <a:tc>
-                  <a:txBody>
-                    <a:bodyPr/>
-                    <a:lstStyle/>
-                    <a:p>
-                      <a:pPr lvl="0" indent="0" marL="0">
-                        <a:buNone/>
-                      </a:pPr>
-                      <a:r>
-                        <a:rPr/>
-                        <a:t>11.4</a:t>
-                      </a:r>
-                    </a:p>
-                  </a:txBody>
-                </a:tc>
-                <a:tc>
-                  <a:txBody>
-                    <a:bodyPr/>
-                    <a:lstStyle/>
-                    <a:p>
-                      <a:pPr lvl="0" indent="0" marL="0">
-                        <a:buNone/>
-                      </a:pPr>
-                      <a:r>
-                        <a:rPr/>
-                        <a:t>66.1</a:t>
-                      </a:r>
-                    </a:p>
-                  </a:txBody>
-                </a:tc>
-                <a:tc>
-                  <a:txBody>
-                    <a:bodyPr/>
-                    <a:lstStyle/>
-                    <a:p>
-                      <a:pPr lvl="0" indent="0" marL="0">
-                        <a:buNone/>
-                      </a:pPr>
-                      <a:r>
-                        <a:rPr/>
-                        <a:t>499.35</a:t>
-                      </a:r>
-                    </a:p>
-                  </a:txBody>
-                </a:tc>
-                <a:tc>
-                  <a:txBody>
-                    <a:bodyPr/>
-                    <a:lstStyle/>
-                    <a:p>
-                      <a:pPr lvl="0" indent="0" marL="0">
-                        <a:buNone/>
-                      </a:pPr>
-                      <a:r>
-                        <a:rPr/>
-                        <a:t>balsam fir</a:t>
+                        <a:t>14</a:t>
+                      </a:r>
+                    </a:p>
+                  </a:txBody>
+                </a:tc>
+                <a:tc>
+                  <a:txBody>
+                    <a:bodyPr/>
+                    <a:lstStyle/>
+                    <a:p>
+                      <a:pPr lvl="0" indent="0" marL="0">
+                        <a:buNone/>
+                      </a:pPr>
+                      <a:r>
+                        <a:rPr/>
+                        <a:t>Santa Lucia or bristlecone fir</a:t>
                       </a:r>
                     </a:p>
                   </a:txBody>
@@ -6854,67 +5798,22 @@
                       </a:pPr>
                       <a:r>
                         <a:rPr/>
-                        <a:t>12</a:t>
-                      </a:r>
-                    </a:p>
-                  </a:txBody>
-                </a:tc>
-                <a:tc>
-                  <a:txBody>
-                    <a:bodyPr/>
-                    <a:lstStyle/>
-                    <a:p>
-                      <a:pPr lvl="0" indent="0" marL="0">
-                        <a:buNone/>
-                      </a:pPr>
-                      <a:r>
-                        <a:rPr/>
-                        <a:t>6.4</a:t>
-                      </a:r>
-                    </a:p>
-                  </a:txBody>
-                </a:tc>
-                <a:tc>
-                  <a:txBody>
-                    <a:bodyPr/>
-                    <a:lstStyle/>
-                    <a:p>
-                      <a:pPr lvl="0" indent="0" marL="0">
-                        <a:buNone/>
-                      </a:pPr>
-                      <a:r>
-                        <a:rPr/>
-                        <a:t>51.8</a:t>
-                      </a:r>
-                    </a:p>
-                  </a:txBody>
-                </a:tc>
-                <a:tc>
-                  <a:txBody>
-                    <a:bodyPr/>
-                    <a:lstStyle/>
-                    <a:p>
-                      <a:pPr lvl="0" indent="0" marL="0">
-                        <a:buNone/>
-                      </a:pPr>
-                      <a:r>
-                        <a:rPr/>
-                        <a:t>113.92</a:t>
-                      </a:r>
-                    </a:p>
-                  </a:txBody>
-                </a:tc>
-                <a:tc>
-                  <a:txBody>
-                    <a:bodyPr/>
-                    <a:lstStyle/>
-                    <a:p>
-                      <a:pPr lvl="0" indent="0" marL="0">
-                        <a:buNone/>
-                      </a:pPr>
-                      <a:r>
-                        <a:rPr/>
-                        <a:t>balsam fir</a:t>
+                        <a:t>15</a:t>
+                      </a:r>
+                    </a:p>
+                  </a:txBody>
+                </a:tc>
+                <a:tc>
+                  <a:txBody>
+                    <a:bodyPr/>
+                    <a:lstStyle/>
+                    <a:p>
+                      <a:pPr lvl="0" indent="0" marL="0">
+                        <a:buNone/>
+                      </a:pPr>
+                      <a:r>
+                        <a:rPr/>
+                        <a:t>white fir</a:t>
                       </a:r>
                     </a:p>
                   </a:txBody>
@@ -6966,11 +5865,595 @@
             </a:pPr>
             <a:r>
               <a:rPr/>
-              <a:t>Quality Assurance</a:t>
+              <a:t>Combined Dataset (species mapped onto bigger dataset):</a:t>
             </a:r>
           </a:p>
         </p:txBody>
       </p:sp>
+      <p:graphicFrame>
+        <p:nvGraphicFramePr>
+          <p:cNvPr id="6" name="Content Placeholder 5"/>
+          <p:cNvGraphicFramePr>
+            <a:graphicFrameLocks noGrp="1"/>
+          </p:cNvGraphicFramePr>
+          <p:nvPr>
+            <p:ph idx="1"/>
+          </p:nvPr>
+        </p:nvGraphicFramePr>
+        <p:xfrm>
+          <a:off x="457200" y="1193800"/>
+          <a:ext cx="8229600" cy="3390900"/>
+        </p:xfrm>
+        <a:graphic>
+          <a:graphicData uri="http://schemas.openxmlformats.org/drawingml/2006/table">
+            <a:tbl>
+              <a:tblPr firstRow="1" bandRow="1">
+                <a:tableStyleId>{5C22544A-7EE6-4342-B048-85BDC9FD1C3A}</a:tableStyleId>
+              </a:tblPr>
+              <a:tblGrid>
+                <a:gridCol w="1371600"/>
+                <a:gridCol w="1371600"/>
+                <a:gridCol w="1371600"/>
+                <a:gridCol w="1371600"/>
+                <a:gridCol w="1371600"/>
+                <a:gridCol w="1371600"/>
+              </a:tblGrid>
+              <a:tr h="0">
+                <a:tc>
+                  <a:txBody>
+                    <a:bodyPr/>
+                    <a:lstStyle/>
+                    <a:p>
+                      <a:endParaRPr/>
+                    </a:p>
+                  </a:txBody>
+                  <a:tcPr/>
+                </a:tc>
+                <a:tc>
+                  <a:txBody>
+                    <a:bodyPr/>
+                    <a:lstStyle/>
+                    <a:p>
+                      <a:pPr lvl="0" indent="0" marL="0">
+                        <a:buNone/>
+                      </a:pPr>
+                      <a:r>
+                        <a:rPr/>
+                        <a:t>SPCD</a:t>
+                      </a:r>
+                    </a:p>
+                  </a:txBody>
+                  <a:tcPr/>
+                </a:tc>
+                <a:tc>
+                  <a:txBody>
+                    <a:bodyPr/>
+                    <a:lstStyle/>
+                    <a:p>
+                      <a:pPr lvl="0" indent="0" marL="0">
+                        <a:buNone/>
+                      </a:pPr>
+                      <a:r>
+                        <a:rPr/>
+                        <a:t>DO_BH</a:t>
+                      </a:r>
+                    </a:p>
+                  </a:txBody>
+                  <a:tcPr/>
+                </a:tc>
+                <a:tc>
+                  <a:txBody>
+                    <a:bodyPr/>
+                    <a:lstStyle/>
+                    <a:p>
+                      <a:pPr lvl="0" indent="0" marL="0">
+                        <a:buNone/>
+                      </a:pPr>
+                      <a:r>
+                        <a:rPr/>
+                        <a:t>HT_TOT</a:t>
+                      </a:r>
+                    </a:p>
+                  </a:txBody>
+                  <a:tcPr/>
+                </a:tc>
+                <a:tc>
+                  <a:txBody>
+                    <a:bodyPr/>
+                    <a:lstStyle/>
+                    <a:p>
+                      <a:pPr lvl="0" indent="0" marL="0">
+                        <a:buNone/>
+                      </a:pPr>
+                      <a:r>
+                        <a:rPr/>
+                        <a:t>TT_DW_CRM</a:t>
+                      </a:r>
+                    </a:p>
+                  </a:txBody>
+                  <a:tcPr/>
+                </a:tc>
+                <a:tc>
+                  <a:txBody>
+                    <a:bodyPr/>
+                    <a:lstStyle/>
+                    <a:p>
+                      <a:pPr lvl="0" indent="0" marL="0">
+                        <a:buNone/>
+                      </a:pPr>
+                      <a:r>
+                        <a:rPr/>
+                        <a:t>COMMON_NAME</a:t>
+                      </a:r>
+                    </a:p>
+                  </a:txBody>
+                  <a:tcPr/>
+                </a:tc>
+              </a:tr>
+              <a:tr h="0">
+                <a:tc>
+                  <a:txBody>
+                    <a:bodyPr/>
+                    <a:lstStyle/>
+                    <a:p>
+                      <a:pPr lvl="0" indent="0" marL="0">
+                        <a:buNone/>
+                      </a:pPr>
+                      <a:r>
+                        <a:rPr/>
+                        <a:t>0</a:t>
+                      </a:r>
+                    </a:p>
+                  </a:txBody>
+                </a:tc>
+                <a:tc>
+                  <a:txBody>
+                    <a:bodyPr/>
+                    <a:lstStyle/>
+                    <a:p>
+                      <a:pPr lvl="0" indent="0" marL="0">
+                        <a:buNone/>
+                      </a:pPr>
+                      <a:r>
+                        <a:rPr/>
+                        <a:t>12</a:t>
+                      </a:r>
+                    </a:p>
+                  </a:txBody>
+                </a:tc>
+                <a:tc>
+                  <a:txBody>
+                    <a:bodyPr/>
+                    <a:lstStyle/>
+                    <a:p>
+                      <a:pPr lvl="0" indent="0" marL="0">
+                        <a:buNone/>
+                      </a:pPr>
+                      <a:r>
+                        <a:rPr/>
+                        <a:t>7.5</a:t>
+                      </a:r>
+                    </a:p>
+                  </a:txBody>
+                </a:tc>
+                <a:tc>
+                  <a:txBody>
+                    <a:bodyPr/>
+                    <a:lstStyle/>
+                    <a:p>
+                      <a:pPr lvl="0" indent="0" marL="0">
+                        <a:buNone/>
+                      </a:pPr>
+                      <a:r>
+                        <a:rPr/>
+                        <a:t>45.2</a:t>
+                      </a:r>
+                    </a:p>
+                  </a:txBody>
+                </a:tc>
+                <a:tc>
+                  <a:txBody>
+                    <a:bodyPr/>
+                    <a:lstStyle/>
+                    <a:p>
+                      <a:pPr lvl="0" indent="0" marL="0">
+                        <a:buNone/>
+                      </a:pPr>
+                      <a:r>
+                        <a:rPr/>
+                        <a:t>178.86</a:t>
+                      </a:r>
+                    </a:p>
+                  </a:txBody>
+                </a:tc>
+                <a:tc>
+                  <a:txBody>
+                    <a:bodyPr/>
+                    <a:lstStyle/>
+                    <a:p>
+                      <a:pPr lvl="0" indent="0" marL="0">
+                        <a:buNone/>
+                      </a:pPr>
+                      <a:r>
+                        <a:rPr/>
+                        <a:t>balsam fir</a:t>
+                      </a:r>
+                    </a:p>
+                  </a:txBody>
+                </a:tc>
+              </a:tr>
+              <a:tr h="0">
+                <a:tc>
+                  <a:txBody>
+                    <a:bodyPr/>
+                    <a:lstStyle/>
+                    <a:p>
+                      <a:pPr lvl="0" indent="0" marL="0">
+                        <a:buNone/>
+                      </a:pPr>
+                      <a:r>
+                        <a:rPr/>
+                        <a:t>1</a:t>
+                      </a:r>
+                    </a:p>
+                  </a:txBody>
+                </a:tc>
+                <a:tc>
+                  <a:txBody>
+                    <a:bodyPr/>
+                    <a:lstStyle/>
+                    <a:p>
+                      <a:pPr lvl="0" indent="0" marL="0">
+                        <a:buNone/>
+                      </a:pPr>
+                      <a:r>
+                        <a:rPr/>
+                        <a:t>12</a:t>
+                      </a:r>
+                    </a:p>
+                  </a:txBody>
+                </a:tc>
+                <a:tc>
+                  <a:txBody>
+                    <a:bodyPr/>
+                    <a:lstStyle/>
+                    <a:p>
+                      <a:pPr lvl="0" indent="0" marL="0">
+                        <a:buNone/>
+                      </a:pPr>
+                      <a:r>
+                        <a:rPr/>
+                        <a:t>9.3</a:t>
+                      </a:r>
+                    </a:p>
+                  </a:txBody>
+                </a:tc>
+                <a:tc>
+                  <a:txBody>
+                    <a:bodyPr/>
+                    <a:lstStyle/>
+                    <a:p>
+                      <a:pPr lvl="0" indent="0" marL="0">
+                        <a:buNone/>
+                      </a:pPr>
+                      <a:r>
+                        <a:rPr/>
+                        <a:t>62.7</a:t>
+                      </a:r>
+                    </a:p>
+                  </a:txBody>
+                </a:tc>
+                <a:tc>
+                  <a:txBody>
+                    <a:bodyPr/>
+                    <a:lstStyle/>
+                    <a:p>
+                      <a:pPr lvl="0" indent="0" marL="0">
+                        <a:buNone/>
+                      </a:pPr>
+                      <a:r>
+                        <a:rPr/>
+                        <a:t>323.46</a:t>
+                      </a:r>
+                    </a:p>
+                  </a:txBody>
+                </a:tc>
+                <a:tc>
+                  <a:txBody>
+                    <a:bodyPr/>
+                    <a:lstStyle/>
+                    <a:p>
+                      <a:pPr lvl="0" indent="0" marL="0">
+                        <a:buNone/>
+                      </a:pPr>
+                      <a:r>
+                        <a:rPr/>
+                        <a:t>balsam fir</a:t>
+                      </a:r>
+                    </a:p>
+                  </a:txBody>
+                </a:tc>
+              </a:tr>
+              <a:tr h="0">
+                <a:tc>
+                  <a:txBody>
+                    <a:bodyPr/>
+                    <a:lstStyle/>
+                    <a:p>
+                      <a:pPr lvl="0" indent="0" marL="0">
+                        <a:buNone/>
+                      </a:pPr>
+                      <a:r>
+                        <a:rPr/>
+                        <a:t>2</a:t>
+                      </a:r>
+                    </a:p>
+                  </a:txBody>
+                </a:tc>
+                <a:tc>
+                  <a:txBody>
+                    <a:bodyPr/>
+                    <a:lstStyle/>
+                    <a:p>
+                      <a:pPr lvl="0" indent="0" marL="0">
+                        <a:buNone/>
+                      </a:pPr>
+                      <a:r>
+                        <a:rPr/>
+                        <a:t>12</a:t>
+                      </a:r>
+                    </a:p>
+                  </a:txBody>
+                </a:tc>
+                <a:tc>
+                  <a:txBody>
+                    <a:bodyPr/>
+                    <a:lstStyle/>
+                    <a:p>
+                      <a:pPr lvl="0" indent="0" marL="0">
+                        <a:buNone/>
+                      </a:pPr>
+                      <a:r>
+                        <a:rPr/>
+                        <a:t>9.7</a:t>
+                      </a:r>
+                    </a:p>
+                  </a:txBody>
+                </a:tc>
+                <a:tc>
+                  <a:txBody>
+                    <a:bodyPr/>
+                    <a:lstStyle/>
+                    <a:p>
+                      <a:pPr lvl="0" indent="0" marL="0">
+                        <a:buNone/>
+                      </a:pPr>
+                      <a:r>
+                        <a:rPr/>
+                        <a:t>56.7</a:t>
+                      </a:r>
+                    </a:p>
+                  </a:txBody>
+                </a:tc>
+                <a:tc>
+                  <a:txBody>
+                    <a:bodyPr/>
+                    <a:lstStyle/>
+                    <a:p>
+                      <a:pPr lvl="0" indent="0" marL="0">
+                        <a:buNone/>
+                      </a:pPr>
+                      <a:r>
+                        <a:rPr/>
+                        <a:t>342.47</a:t>
+                      </a:r>
+                    </a:p>
+                  </a:txBody>
+                </a:tc>
+                <a:tc>
+                  <a:txBody>
+                    <a:bodyPr/>
+                    <a:lstStyle/>
+                    <a:p>
+                      <a:pPr lvl="0" indent="0" marL="0">
+                        <a:buNone/>
+                      </a:pPr>
+                      <a:r>
+                        <a:rPr/>
+                        <a:t>balsam fir</a:t>
+                      </a:r>
+                    </a:p>
+                  </a:txBody>
+                </a:tc>
+              </a:tr>
+              <a:tr h="0">
+                <a:tc>
+                  <a:txBody>
+                    <a:bodyPr/>
+                    <a:lstStyle/>
+                    <a:p>
+                      <a:pPr lvl="0" indent="0" marL="0">
+                        <a:buNone/>
+                      </a:pPr>
+                      <a:r>
+                        <a:rPr/>
+                        <a:t>3</a:t>
+                      </a:r>
+                    </a:p>
+                  </a:txBody>
+                </a:tc>
+                <a:tc>
+                  <a:txBody>
+                    <a:bodyPr/>
+                    <a:lstStyle/>
+                    <a:p>
+                      <a:pPr lvl="0" indent="0" marL="0">
+                        <a:buNone/>
+                      </a:pPr>
+                      <a:r>
+                        <a:rPr/>
+                        <a:t>12</a:t>
+                      </a:r>
+                    </a:p>
+                  </a:txBody>
+                </a:tc>
+                <a:tc>
+                  <a:txBody>
+                    <a:bodyPr/>
+                    <a:lstStyle/>
+                    <a:p>
+                      <a:pPr lvl="0" indent="0" marL="0">
+                        <a:buNone/>
+                      </a:pPr>
+                      <a:r>
+                        <a:rPr/>
+                        <a:t>11.4</a:t>
+                      </a:r>
+                    </a:p>
+                  </a:txBody>
+                </a:tc>
+                <a:tc>
+                  <a:txBody>
+                    <a:bodyPr/>
+                    <a:lstStyle/>
+                    <a:p>
+                      <a:pPr lvl="0" indent="0" marL="0">
+                        <a:buNone/>
+                      </a:pPr>
+                      <a:r>
+                        <a:rPr/>
+                        <a:t>66.1</a:t>
+                      </a:r>
+                    </a:p>
+                  </a:txBody>
+                </a:tc>
+                <a:tc>
+                  <a:txBody>
+                    <a:bodyPr/>
+                    <a:lstStyle/>
+                    <a:p>
+                      <a:pPr lvl="0" indent="0" marL="0">
+                        <a:buNone/>
+                      </a:pPr>
+                      <a:r>
+                        <a:rPr/>
+                        <a:t>499.35</a:t>
+                      </a:r>
+                    </a:p>
+                  </a:txBody>
+                </a:tc>
+                <a:tc>
+                  <a:txBody>
+                    <a:bodyPr/>
+                    <a:lstStyle/>
+                    <a:p>
+                      <a:pPr lvl="0" indent="0" marL="0">
+                        <a:buNone/>
+                      </a:pPr>
+                      <a:r>
+                        <a:rPr/>
+                        <a:t>balsam fir</a:t>
+                      </a:r>
+                    </a:p>
+                  </a:txBody>
+                </a:tc>
+              </a:tr>
+              <a:tr h="0">
+                <a:tc>
+                  <a:txBody>
+                    <a:bodyPr/>
+                    <a:lstStyle/>
+                    <a:p>
+                      <a:pPr lvl="0" indent="0" marL="0">
+                        <a:buNone/>
+                      </a:pPr>
+                      <a:r>
+                        <a:rPr/>
+                        <a:t>4</a:t>
+                      </a:r>
+                    </a:p>
+                  </a:txBody>
+                </a:tc>
+                <a:tc>
+                  <a:txBody>
+                    <a:bodyPr/>
+                    <a:lstStyle/>
+                    <a:p>
+                      <a:pPr lvl="0" indent="0" marL="0">
+                        <a:buNone/>
+                      </a:pPr>
+                      <a:r>
+                        <a:rPr/>
+                        <a:t>12</a:t>
+                      </a:r>
+                    </a:p>
+                  </a:txBody>
+                </a:tc>
+                <a:tc>
+                  <a:txBody>
+                    <a:bodyPr/>
+                    <a:lstStyle/>
+                    <a:p>
+                      <a:pPr lvl="0" indent="0" marL="0">
+                        <a:buNone/>
+                      </a:pPr>
+                      <a:r>
+                        <a:rPr/>
+                        <a:t>6.4</a:t>
+                      </a:r>
+                    </a:p>
+                  </a:txBody>
+                </a:tc>
+                <a:tc>
+                  <a:txBody>
+                    <a:bodyPr/>
+                    <a:lstStyle/>
+                    <a:p>
+                      <a:pPr lvl="0" indent="0" marL="0">
+                        <a:buNone/>
+                      </a:pPr>
+                      <a:r>
+                        <a:rPr/>
+                        <a:t>51.8</a:t>
+                      </a:r>
+                    </a:p>
+                  </a:txBody>
+                </a:tc>
+                <a:tc>
+                  <a:txBody>
+                    <a:bodyPr/>
+                    <a:lstStyle/>
+                    <a:p>
+                      <a:pPr lvl="0" indent="0" marL="0">
+                        <a:buNone/>
+                      </a:pPr>
+                      <a:r>
+                        <a:rPr/>
+                        <a:t>113.92</a:t>
+                      </a:r>
+                    </a:p>
+                  </a:txBody>
+                </a:tc>
+                <a:tc>
+                  <a:txBody>
+                    <a:bodyPr/>
+                    <a:lstStyle/>
+                    <a:p>
+                      <a:pPr lvl="0" indent="0" marL="0">
+                        <a:buNone/>
+                      </a:pPr>
+                      <a:r>
+                        <a:rPr/>
+                        <a:t>balsam fir</a:t>
+                      </a:r>
+                    </a:p>
+                  </a:txBody>
+                </a:tc>
+              </a:tr>
+            </a:tbl>
+          </a:graphicData>
+        </a:graphic>
+      </p:graphicFrame>
     </p:spTree>
   </p:cSld>
 </p:sld>
@@ -7052,6 +6535,1310 @@
             <a:r>
               <a:rPr/>
               <a:t>.</a:t>
+            </a:r>
+          </a:p>
+        </p:txBody>
+      </p:sp>
+    </p:spTree>
+  </p:cSld>
+</p:sld>
+</file>
+
+<file path=ppt/slides/slide20.xml><?xml version="1.0" encoding="utf-8"?>
+<p:sld xmlns:a="http://schemas.openxmlformats.org/drawingml/2006/main" xmlns:r="http://schemas.openxmlformats.org/officeDocument/2006/relationships" xmlns:p="http://schemas.openxmlformats.org/presentationml/2006/main">
+  <p:cSld>
+    <p:spTree>
+      <p:nvGrpSpPr>
+        <p:cNvPr id="1" name=""/>
+        <p:cNvGrpSpPr/>
+        <p:nvPr/>
+      </p:nvGrpSpPr>
+      <p:grpSpPr>
+        <a:xfrm>
+          <a:off x="0" y="0"/>
+          <a:ext cx="0" cy="0"/>
+          <a:chOff x="0" y="0"/>
+          <a:chExt cx="0" cy="0"/>
+        </a:xfrm>
+      </p:grpSpPr>
+      <p:sp>
+        <p:nvSpPr>
+          <p:cNvPr id="2" name="Title 1"/>
+          <p:cNvSpPr>
+            <a:spLocks noGrp="1"/>
+          </p:cNvSpPr>
+          <p:nvPr>
+            <p:ph type="title"/>
+          </p:nvPr>
+        </p:nvSpPr>
+        <p:spPr/>
+        <p:txBody>
+          <a:bodyPr/>
+          <a:lstStyle/>
+          <a:p>
+            <a:pPr lvl="0" indent="0" marL="0">
+              <a:buNone/>
+            </a:pPr>
+            <a:r>
+              <a:rPr/>
+              <a:t>Filtered data (minimum 100 data points)</a:t>
+            </a:r>
+          </a:p>
+        </p:txBody>
+      </p:sp>
+      <p:graphicFrame>
+        <p:nvGraphicFramePr>
+          <p:cNvPr id="6" name="Content Placeholder 5"/>
+          <p:cNvGraphicFramePr>
+            <a:graphicFrameLocks noGrp="1"/>
+          </p:cNvGraphicFramePr>
+          <p:nvPr>
+            <p:ph idx="1"/>
+          </p:nvPr>
+        </p:nvGraphicFramePr>
+        <p:xfrm>
+          <a:off x="457200" y="1193800"/>
+          <a:ext cx="8229600" cy="3390900"/>
+        </p:xfrm>
+        <a:graphic>
+          <a:graphicData uri="http://schemas.openxmlformats.org/drawingml/2006/table">
+            <a:tbl>
+              <a:tblPr firstRow="1" bandRow="1">
+                <a:tableStyleId>{5C22544A-7EE6-4342-B048-85BDC9FD1C3A}</a:tableStyleId>
+              </a:tblPr>
+              <a:tblGrid>
+                <a:gridCol w="1371600"/>
+                <a:gridCol w="1371600"/>
+                <a:gridCol w="1371600"/>
+                <a:gridCol w="1371600"/>
+                <a:gridCol w="1371600"/>
+                <a:gridCol w="1371600"/>
+              </a:tblGrid>
+              <a:tr h="0">
+                <a:tc>
+                  <a:txBody>
+                    <a:bodyPr/>
+                    <a:lstStyle/>
+                    <a:p>
+                      <a:endParaRPr/>
+                    </a:p>
+                  </a:txBody>
+                  <a:tcPr/>
+                </a:tc>
+                <a:tc>
+                  <a:txBody>
+                    <a:bodyPr/>
+                    <a:lstStyle/>
+                    <a:p>
+                      <a:pPr lvl="0" indent="0" marL="0">
+                        <a:buNone/>
+                      </a:pPr>
+                      <a:r>
+                        <a:rPr/>
+                        <a:t>SPCD</a:t>
+                      </a:r>
+                    </a:p>
+                  </a:txBody>
+                  <a:tcPr/>
+                </a:tc>
+                <a:tc>
+                  <a:txBody>
+                    <a:bodyPr/>
+                    <a:lstStyle/>
+                    <a:p>
+                      <a:pPr lvl="0" indent="0" marL="0">
+                        <a:buNone/>
+                      </a:pPr>
+                      <a:r>
+                        <a:rPr/>
+                        <a:t>DO_BH</a:t>
+                      </a:r>
+                    </a:p>
+                  </a:txBody>
+                  <a:tcPr/>
+                </a:tc>
+                <a:tc>
+                  <a:txBody>
+                    <a:bodyPr/>
+                    <a:lstStyle/>
+                    <a:p>
+                      <a:pPr lvl="0" indent="0" marL="0">
+                        <a:buNone/>
+                      </a:pPr>
+                      <a:r>
+                        <a:rPr/>
+                        <a:t>HT_TOT</a:t>
+                      </a:r>
+                    </a:p>
+                  </a:txBody>
+                  <a:tcPr/>
+                </a:tc>
+                <a:tc>
+                  <a:txBody>
+                    <a:bodyPr/>
+                    <a:lstStyle/>
+                    <a:p>
+                      <a:pPr lvl="0" indent="0" marL="0">
+                        <a:buNone/>
+                      </a:pPr>
+                      <a:r>
+                        <a:rPr/>
+                        <a:t>TT_DW_CRM</a:t>
+                      </a:r>
+                    </a:p>
+                  </a:txBody>
+                  <a:tcPr/>
+                </a:tc>
+                <a:tc>
+                  <a:txBody>
+                    <a:bodyPr/>
+                    <a:lstStyle/>
+                    <a:p>
+                      <a:pPr lvl="0" indent="0" marL="0">
+                        <a:buNone/>
+                      </a:pPr>
+                      <a:r>
+                        <a:rPr/>
+                        <a:t>COMMON_NAME</a:t>
+                      </a:r>
+                    </a:p>
+                  </a:txBody>
+                  <a:tcPr/>
+                </a:tc>
+              </a:tr>
+              <a:tr h="0">
+                <a:tc>
+                  <a:txBody>
+                    <a:bodyPr/>
+                    <a:lstStyle/>
+                    <a:p>
+                      <a:pPr lvl="0" indent="0" marL="0">
+                        <a:buNone/>
+                      </a:pPr>
+                      <a:r>
+                        <a:rPr/>
+                        <a:t>0</a:t>
+                      </a:r>
+                    </a:p>
+                  </a:txBody>
+                </a:tc>
+                <a:tc>
+                  <a:txBody>
+                    <a:bodyPr/>
+                    <a:lstStyle/>
+                    <a:p>
+                      <a:pPr lvl="0" indent="0" marL="0">
+                        <a:buNone/>
+                      </a:pPr>
+                      <a:r>
+                        <a:rPr/>
+                        <a:t>12</a:t>
+                      </a:r>
+                    </a:p>
+                  </a:txBody>
+                </a:tc>
+                <a:tc>
+                  <a:txBody>
+                    <a:bodyPr/>
+                    <a:lstStyle/>
+                    <a:p>
+                      <a:pPr lvl="0" indent="0" marL="0">
+                        <a:buNone/>
+                      </a:pPr>
+                      <a:r>
+                        <a:rPr/>
+                        <a:t>7.5</a:t>
+                      </a:r>
+                    </a:p>
+                  </a:txBody>
+                </a:tc>
+                <a:tc>
+                  <a:txBody>
+                    <a:bodyPr/>
+                    <a:lstStyle/>
+                    <a:p>
+                      <a:pPr lvl="0" indent="0" marL="0">
+                        <a:buNone/>
+                      </a:pPr>
+                      <a:r>
+                        <a:rPr/>
+                        <a:t>45.2</a:t>
+                      </a:r>
+                    </a:p>
+                  </a:txBody>
+                </a:tc>
+                <a:tc>
+                  <a:txBody>
+                    <a:bodyPr/>
+                    <a:lstStyle/>
+                    <a:p>
+                      <a:pPr lvl="0" indent="0" marL="0">
+                        <a:buNone/>
+                      </a:pPr>
+                      <a:r>
+                        <a:rPr/>
+                        <a:t>178.86</a:t>
+                      </a:r>
+                    </a:p>
+                  </a:txBody>
+                </a:tc>
+                <a:tc>
+                  <a:txBody>
+                    <a:bodyPr/>
+                    <a:lstStyle/>
+                    <a:p>
+                      <a:pPr lvl="0" indent="0" marL="0">
+                        <a:buNone/>
+                      </a:pPr>
+                      <a:r>
+                        <a:rPr/>
+                        <a:t>balsam fir</a:t>
+                      </a:r>
+                    </a:p>
+                  </a:txBody>
+                </a:tc>
+              </a:tr>
+              <a:tr h="0">
+                <a:tc>
+                  <a:txBody>
+                    <a:bodyPr/>
+                    <a:lstStyle/>
+                    <a:p>
+                      <a:pPr lvl="0" indent="0" marL="0">
+                        <a:buNone/>
+                      </a:pPr>
+                      <a:r>
+                        <a:rPr/>
+                        <a:t>1</a:t>
+                      </a:r>
+                    </a:p>
+                  </a:txBody>
+                </a:tc>
+                <a:tc>
+                  <a:txBody>
+                    <a:bodyPr/>
+                    <a:lstStyle/>
+                    <a:p>
+                      <a:pPr lvl="0" indent="0" marL="0">
+                        <a:buNone/>
+                      </a:pPr>
+                      <a:r>
+                        <a:rPr/>
+                        <a:t>12</a:t>
+                      </a:r>
+                    </a:p>
+                  </a:txBody>
+                </a:tc>
+                <a:tc>
+                  <a:txBody>
+                    <a:bodyPr/>
+                    <a:lstStyle/>
+                    <a:p>
+                      <a:pPr lvl="0" indent="0" marL="0">
+                        <a:buNone/>
+                      </a:pPr>
+                      <a:r>
+                        <a:rPr/>
+                        <a:t>9.3</a:t>
+                      </a:r>
+                    </a:p>
+                  </a:txBody>
+                </a:tc>
+                <a:tc>
+                  <a:txBody>
+                    <a:bodyPr/>
+                    <a:lstStyle/>
+                    <a:p>
+                      <a:pPr lvl="0" indent="0" marL="0">
+                        <a:buNone/>
+                      </a:pPr>
+                      <a:r>
+                        <a:rPr/>
+                        <a:t>62.7</a:t>
+                      </a:r>
+                    </a:p>
+                  </a:txBody>
+                </a:tc>
+                <a:tc>
+                  <a:txBody>
+                    <a:bodyPr/>
+                    <a:lstStyle/>
+                    <a:p>
+                      <a:pPr lvl="0" indent="0" marL="0">
+                        <a:buNone/>
+                      </a:pPr>
+                      <a:r>
+                        <a:rPr/>
+                        <a:t>323.46</a:t>
+                      </a:r>
+                    </a:p>
+                  </a:txBody>
+                </a:tc>
+                <a:tc>
+                  <a:txBody>
+                    <a:bodyPr/>
+                    <a:lstStyle/>
+                    <a:p>
+                      <a:pPr lvl="0" indent="0" marL="0">
+                        <a:buNone/>
+                      </a:pPr>
+                      <a:r>
+                        <a:rPr/>
+                        <a:t>balsam fir</a:t>
+                      </a:r>
+                    </a:p>
+                  </a:txBody>
+                </a:tc>
+              </a:tr>
+              <a:tr h="0">
+                <a:tc>
+                  <a:txBody>
+                    <a:bodyPr/>
+                    <a:lstStyle/>
+                    <a:p>
+                      <a:pPr lvl="0" indent="0" marL="0">
+                        <a:buNone/>
+                      </a:pPr>
+                      <a:r>
+                        <a:rPr/>
+                        <a:t>2</a:t>
+                      </a:r>
+                    </a:p>
+                  </a:txBody>
+                </a:tc>
+                <a:tc>
+                  <a:txBody>
+                    <a:bodyPr/>
+                    <a:lstStyle/>
+                    <a:p>
+                      <a:pPr lvl="0" indent="0" marL="0">
+                        <a:buNone/>
+                      </a:pPr>
+                      <a:r>
+                        <a:rPr/>
+                        <a:t>12</a:t>
+                      </a:r>
+                    </a:p>
+                  </a:txBody>
+                </a:tc>
+                <a:tc>
+                  <a:txBody>
+                    <a:bodyPr/>
+                    <a:lstStyle/>
+                    <a:p>
+                      <a:pPr lvl="0" indent="0" marL="0">
+                        <a:buNone/>
+                      </a:pPr>
+                      <a:r>
+                        <a:rPr/>
+                        <a:t>9.7</a:t>
+                      </a:r>
+                    </a:p>
+                  </a:txBody>
+                </a:tc>
+                <a:tc>
+                  <a:txBody>
+                    <a:bodyPr/>
+                    <a:lstStyle/>
+                    <a:p>
+                      <a:pPr lvl="0" indent="0" marL="0">
+                        <a:buNone/>
+                      </a:pPr>
+                      <a:r>
+                        <a:rPr/>
+                        <a:t>56.7</a:t>
+                      </a:r>
+                    </a:p>
+                  </a:txBody>
+                </a:tc>
+                <a:tc>
+                  <a:txBody>
+                    <a:bodyPr/>
+                    <a:lstStyle/>
+                    <a:p>
+                      <a:pPr lvl="0" indent="0" marL="0">
+                        <a:buNone/>
+                      </a:pPr>
+                      <a:r>
+                        <a:rPr/>
+                        <a:t>342.47</a:t>
+                      </a:r>
+                    </a:p>
+                  </a:txBody>
+                </a:tc>
+                <a:tc>
+                  <a:txBody>
+                    <a:bodyPr/>
+                    <a:lstStyle/>
+                    <a:p>
+                      <a:pPr lvl="0" indent="0" marL="0">
+                        <a:buNone/>
+                      </a:pPr>
+                      <a:r>
+                        <a:rPr/>
+                        <a:t>balsam fir</a:t>
+                      </a:r>
+                    </a:p>
+                  </a:txBody>
+                </a:tc>
+              </a:tr>
+              <a:tr h="0">
+                <a:tc>
+                  <a:txBody>
+                    <a:bodyPr/>
+                    <a:lstStyle/>
+                    <a:p>
+                      <a:pPr lvl="0" indent="0" marL="0">
+                        <a:buNone/>
+                      </a:pPr>
+                      <a:r>
+                        <a:rPr/>
+                        <a:t>3</a:t>
+                      </a:r>
+                    </a:p>
+                  </a:txBody>
+                </a:tc>
+                <a:tc>
+                  <a:txBody>
+                    <a:bodyPr/>
+                    <a:lstStyle/>
+                    <a:p>
+                      <a:pPr lvl="0" indent="0" marL="0">
+                        <a:buNone/>
+                      </a:pPr>
+                      <a:r>
+                        <a:rPr/>
+                        <a:t>12</a:t>
+                      </a:r>
+                    </a:p>
+                  </a:txBody>
+                </a:tc>
+                <a:tc>
+                  <a:txBody>
+                    <a:bodyPr/>
+                    <a:lstStyle/>
+                    <a:p>
+                      <a:pPr lvl="0" indent="0" marL="0">
+                        <a:buNone/>
+                      </a:pPr>
+                      <a:r>
+                        <a:rPr/>
+                        <a:t>11.4</a:t>
+                      </a:r>
+                    </a:p>
+                  </a:txBody>
+                </a:tc>
+                <a:tc>
+                  <a:txBody>
+                    <a:bodyPr/>
+                    <a:lstStyle/>
+                    <a:p>
+                      <a:pPr lvl="0" indent="0" marL="0">
+                        <a:buNone/>
+                      </a:pPr>
+                      <a:r>
+                        <a:rPr/>
+                        <a:t>66.1</a:t>
+                      </a:r>
+                    </a:p>
+                  </a:txBody>
+                </a:tc>
+                <a:tc>
+                  <a:txBody>
+                    <a:bodyPr/>
+                    <a:lstStyle/>
+                    <a:p>
+                      <a:pPr lvl="0" indent="0" marL="0">
+                        <a:buNone/>
+                      </a:pPr>
+                      <a:r>
+                        <a:rPr/>
+                        <a:t>499.35</a:t>
+                      </a:r>
+                    </a:p>
+                  </a:txBody>
+                </a:tc>
+                <a:tc>
+                  <a:txBody>
+                    <a:bodyPr/>
+                    <a:lstStyle/>
+                    <a:p>
+                      <a:pPr lvl="0" indent="0" marL="0">
+                        <a:buNone/>
+                      </a:pPr>
+                      <a:r>
+                        <a:rPr/>
+                        <a:t>balsam fir</a:t>
+                      </a:r>
+                    </a:p>
+                  </a:txBody>
+                </a:tc>
+              </a:tr>
+              <a:tr h="0">
+                <a:tc>
+                  <a:txBody>
+                    <a:bodyPr/>
+                    <a:lstStyle/>
+                    <a:p>
+                      <a:pPr lvl="0" indent="0" marL="0">
+                        <a:buNone/>
+                      </a:pPr>
+                      <a:r>
+                        <a:rPr/>
+                        <a:t>4</a:t>
+                      </a:r>
+                    </a:p>
+                  </a:txBody>
+                </a:tc>
+                <a:tc>
+                  <a:txBody>
+                    <a:bodyPr/>
+                    <a:lstStyle/>
+                    <a:p>
+                      <a:pPr lvl="0" indent="0" marL="0">
+                        <a:buNone/>
+                      </a:pPr>
+                      <a:r>
+                        <a:rPr/>
+                        <a:t>12</a:t>
+                      </a:r>
+                    </a:p>
+                  </a:txBody>
+                </a:tc>
+                <a:tc>
+                  <a:txBody>
+                    <a:bodyPr/>
+                    <a:lstStyle/>
+                    <a:p>
+                      <a:pPr lvl="0" indent="0" marL="0">
+                        <a:buNone/>
+                      </a:pPr>
+                      <a:r>
+                        <a:rPr/>
+                        <a:t>6.4</a:t>
+                      </a:r>
+                    </a:p>
+                  </a:txBody>
+                </a:tc>
+                <a:tc>
+                  <a:txBody>
+                    <a:bodyPr/>
+                    <a:lstStyle/>
+                    <a:p>
+                      <a:pPr lvl="0" indent="0" marL="0">
+                        <a:buNone/>
+                      </a:pPr>
+                      <a:r>
+                        <a:rPr/>
+                        <a:t>51.8</a:t>
+                      </a:r>
+                    </a:p>
+                  </a:txBody>
+                </a:tc>
+                <a:tc>
+                  <a:txBody>
+                    <a:bodyPr/>
+                    <a:lstStyle/>
+                    <a:p>
+                      <a:pPr lvl="0" indent="0" marL="0">
+                        <a:buNone/>
+                      </a:pPr>
+                      <a:r>
+                        <a:rPr/>
+                        <a:t>113.92</a:t>
+                      </a:r>
+                    </a:p>
+                  </a:txBody>
+                </a:tc>
+                <a:tc>
+                  <a:txBody>
+                    <a:bodyPr/>
+                    <a:lstStyle/>
+                    <a:p>
+                      <a:pPr lvl="0" indent="0" marL="0">
+                        <a:buNone/>
+                      </a:pPr>
+                      <a:r>
+                        <a:rPr/>
+                        <a:t>balsam fir</a:t>
+                      </a:r>
+                    </a:p>
+                  </a:txBody>
+                </a:tc>
+              </a:tr>
+              <a:tr h="0">
+                <a:tc>
+                  <a:txBody>
+                    <a:bodyPr/>
+                    <a:lstStyle/>
+                    <a:p>
+                      <a:pPr lvl="0" indent="0" marL="0">
+                        <a:buNone/>
+                      </a:pPr>
+                      <a:r>
+                        <a:rPr/>
+                        <a:t>...</a:t>
+                      </a:r>
+                    </a:p>
+                  </a:txBody>
+                </a:tc>
+                <a:tc>
+                  <a:txBody>
+                    <a:bodyPr/>
+                    <a:lstStyle/>
+                    <a:p>
+                      <a:pPr lvl="0" indent="0" marL="0">
+                        <a:buNone/>
+                      </a:pPr>
+                      <a:r>
+                        <a:rPr/>
+                        <a:t>...</a:t>
+                      </a:r>
+                    </a:p>
+                  </a:txBody>
+                </a:tc>
+                <a:tc>
+                  <a:txBody>
+                    <a:bodyPr/>
+                    <a:lstStyle/>
+                    <a:p>
+                      <a:pPr lvl="0" indent="0" marL="0">
+                        <a:buNone/>
+                      </a:pPr>
+                      <a:r>
+                        <a:rPr/>
+                        <a:t>...</a:t>
+                      </a:r>
+                    </a:p>
+                  </a:txBody>
+                </a:tc>
+                <a:tc>
+                  <a:txBody>
+                    <a:bodyPr/>
+                    <a:lstStyle/>
+                    <a:p>
+                      <a:pPr lvl="0" indent="0" marL="0">
+                        <a:buNone/>
+                      </a:pPr>
+                      <a:r>
+                        <a:rPr/>
+                        <a:t>...</a:t>
+                      </a:r>
+                    </a:p>
+                  </a:txBody>
+                </a:tc>
+                <a:tc>
+                  <a:txBody>
+                    <a:bodyPr/>
+                    <a:lstStyle/>
+                    <a:p>
+                      <a:pPr lvl="0" indent="0" marL="0">
+                        <a:buNone/>
+                      </a:pPr>
+                      <a:r>
+                        <a:rPr/>
+                        <a:t>...</a:t>
+                      </a:r>
+                    </a:p>
+                  </a:txBody>
+                </a:tc>
+                <a:tc>
+                  <a:txBody>
+                    <a:bodyPr/>
+                    <a:lstStyle/>
+                    <a:p>
+                      <a:pPr lvl="0" indent="0" marL="0">
+                        <a:buNone/>
+                      </a:pPr>
+                      <a:r>
+                        <a:rPr/>
+                        <a:t>...</a:t>
+                      </a:r>
+                    </a:p>
+                  </a:txBody>
+                </a:tc>
+              </a:tr>
+              <a:tr h="0">
+                <a:tc>
+                  <a:txBody>
+                    <a:bodyPr/>
+                    <a:lstStyle/>
+                    <a:p>
+                      <a:pPr lvl="0" indent="0" marL="0">
+                        <a:buNone/>
+                      </a:pPr>
+                      <a:r>
+                        <a:rPr/>
+                        <a:t>137035</a:t>
+                      </a:r>
+                    </a:p>
+                  </a:txBody>
+                </a:tc>
+                <a:tc>
+                  <a:txBody>
+                    <a:bodyPr/>
+                    <a:lstStyle/>
+                    <a:p>
+                      <a:pPr lvl="0" indent="0" marL="0">
+                        <a:buNone/>
+                      </a:pPr>
+                      <a:r>
+                        <a:rPr/>
+                        <a:t>691</a:t>
+                      </a:r>
+                    </a:p>
+                  </a:txBody>
+                </a:tc>
+                <a:tc>
+                  <a:txBody>
+                    <a:bodyPr/>
+                    <a:lstStyle/>
+                    <a:p>
+                      <a:pPr lvl="0" indent="0" marL="0">
+                        <a:buNone/>
+                      </a:pPr>
+                      <a:r>
+                        <a:rPr/>
+                        <a:t>3.7</a:t>
+                      </a:r>
+                    </a:p>
+                  </a:txBody>
+                </a:tc>
+                <a:tc>
+                  <a:txBody>
+                    <a:bodyPr/>
+                    <a:lstStyle/>
+                    <a:p>
+                      <a:pPr lvl="0" indent="0" marL="0">
+                        <a:buNone/>
+                      </a:pPr>
+                      <a:r>
+                        <a:rPr/>
+                        <a:t>25.4</a:t>
+                      </a:r>
+                    </a:p>
+                  </a:txBody>
+                </a:tc>
+                <a:tc>
+                  <a:txBody>
+                    <a:bodyPr/>
+                    <a:lstStyle/>
+                    <a:p>
+                      <a:pPr lvl="0" indent="0" marL="0">
+                        <a:buNone/>
+                      </a:pPr>
+                      <a:r>
+                        <a:rPr/>
+                        <a:t>40.76</a:t>
+                      </a:r>
+                    </a:p>
+                  </a:txBody>
+                </a:tc>
+                <a:tc>
+                  <a:txBody>
+                    <a:bodyPr/>
+                    <a:lstStyle/>
+                    <a:p>
+                      <a:pPr lvl="0" indent="0" marL="0">
+                        <a:buNone/>
+                      </a:pPr>
+                      <a:r>
+                        <a:rPr/>
+                        <a:t>water tupelo</a:t>
+                      </a:r>
+                    </a:p>
+                  </a:txBody>
+                </a:tc>
+              </a:tr>
+              <a:tr h="0">
+                <a:tc>
+                  <a:txBody>
+                    <a:bodyPr/>
+                    <a:lstStyle/>
+                    <a:p>
+                      <a:pPr lvl="0" indent="0" marL="0">
+                        <a:buNone/>
+                      </a:pPr>
+                      <a:r>
+                        <a:rPr/>
+                        <a:t>137036</a:t>
+                      </a:r>
+                    </a:p>
+                  </a:txBody>
+                </a:tc>
+                <a:tc>
+                  <a:txBody>
+                    <a:bodyPr/>
+                    <a:lstStyle/>
+                    <a:p>
+                      <a:pPr lvl="0" indent="0" marL="0">
+                        <a:buNone/>
+                      </a:pPr>
+                      <a:r>
+                        <a:rPr/>
+                        <a:t>691</a:t>
+                      </a:r>
+                    </a:p>
+                  </a:txBody>
+                </a:tc>
+                <a:tc>
+                  <a:txBody>
+                    <a:bodyPr/>
+                    <a:lstStyle/>
+                    <a:p>
+                      <a:pPr lvl="0" indent="0" marL="0">
+                        <a:buNone/>
+                      </a:pPr>
+                      <a:r>
+                        <a:rPr/>
+                        <a:t>3.2</a:t>
+                      </a:r>
+                    </a:p>
+                  </a:txBody>
+                </a:tc>
+                <a:tc>
+                  <a:txBody>
+                    <a:bodyPr/>
+                    <a:lstStyle/>
+                    <a:p>
+                      <a:pPr lvl="0" indent="0" marL="0">
+                        <a:buNone/>
+                      </a:pPr>
+                      <a:r>
+                        <a:rPr/>
+                        <a:t>28.8</a:t>
+                      </a:r>
+                    </a:p>
+                  </a:txBody>
+                </a:tc>
+                <a:tc>
+                  <a:txBody>
+                    <a:bodyPr/>
+                    <a:lstStyle/>
+                    <a:p>
+                      <a:pPr lvl="0" indent="0" marL="0">
+                        <a:buNone/>
+                      </a:pPr>
+                      <a:r>
+                        <a:rPr/>
+                        <a:t>28.44</a:t>
+                      </a:r>
+                    </a:p>
+                  </a:txBody>
+                </a:tc>
+                <a:tc>
+                  <a:txBody>
+                    <a:bodyPr/>
+                    <a:lstStyle/>
+                    <a:p>
+                      <a:pPr lvl="0" indent="0" marL="0">
+                        <a:buNone/>
+                      </a:pPr>
+                      <a:r>
+                        <a:rPr/>
+                        <a:t>water tupelo</a:t>
+                      </a:r>
+                    </a:p>
+                  </a:txBody>
+                </a:tc>
+              </a:tr>
+              <a:tr h="0">
+                <a:tc>
+                  <a:txBody>
+                    <a:bodyPr/>
+                    <a:lstStyle/>
+                    <a:p>
+                      <a:pPr lvl="0" indent="0" marL="0">
+                        <a:buNone/>
+                      </a:pPr>
+                      <a:r>
+                        <a:rPr/>
+                        <a:t>137037</a:t>
+                      </a:r>
+                    </a:p>
+                  </a:txBody>
+                </a:tc>
+                <a:tc>
+                  <a:txBody>
+                    <a:bodyPr/>
+                    <a:lstStyle/>
+                    <a:p>
+                      <a:pPr lvl="0" indent="0" marL="0">
+                        <a:buNone/>
+                      </a:pPr>
+                      <a:r>
+                        <a:rPr/>
+                        <a:t>691</a:t>
+                      </a:r>
+                    </a:p>
+                  </a:txBody>
+                </a:tc>
+                <a:tc>
+                  <a:txBody>
+                    <a:bodyPr/>
+                    <a:lstStyle/>
+                    <a:p>
+                      <a:pPr lvl="0" indent="0" marL="0">
+                        <a:buNone/>
+                      </a:pPr>
+                      <a:r>
+                        <a:rPr/>
+                        <a:t>4.7</a:t>
+                      </a:r>
+                    </a:p>
+                  </a:txBody>
+                </a:tc>
+                <a:tc>
+                  <a:txBody>
+                    <a:bodyPr/>
+                    <a:lstStyle/>
+                    <a:p>
+                      <a:pPr lvl="0" indent="0" marL="0">
+                        <a:buNone/>
+                      </a:pPr>
+                      <a:r>
+                        <a:rPr/>
+                        <a:t>31.4</a:t>
+                      </a:r>
+                    </a:p>
+                  </a:txBody>
+                </a:tc>
+                <a:tc>
+                  <a:txBody>
+                    <a:bodyPr/>
+                    <a:lstStyle/>
+                    <a:p>
+                      <a:pPr lvl="0" indent="0" marL="0">
+                        <a:buNone/>
+                      </a:pPr>
+                      <a:r>
+                        <a:rPr/>
+                        <a:t>73.78</a:t>
+                      </a:r>
+                    </a:p>
+                  </a:txBody>
+                </a:tc>
+                <a:tc>
+                  <a:txBody>
+                    <a:bodyPr/>
+                    <a:lstStyle/>
+                    <a:p>
+                      <a:pPr lvl="0" indent="0" marL="0">
+                        <a:buNone/>
+                      </a:pPr>
+                      <a:r>
+                        <a:rPr/>
+                        <a:t>water tupelo</a:t>
+                      </a:r>
+                    </a:p>
+                  </a:txBody>
+                </a:tc>
+              </a:tr>
+              <a:tr h="0">
+                <a:tc>
+                  <a:txBody>
+                    <a:bodyPr/>
+                    <a:lstStyle/>
+                    <a:p>
+                      <a:pPr lvl="0" indent="0" marL="0">
+                        <a:buNone/>
+                      </a:pPr>
+                      <a:r>
+                        <a:rPr/>
+                        <a:t>137038</a:t>
+                      </a:r>
+                    </a:p>
+                  </a:txBody>
+                </a:tc>
+                <a:tc>
+                  <a:txBody>
+                    <a:bodyPr/>
+                    <a:lstStyle/>
+                    <a:p>
+                      <a:pPr lvl="0" indent="0" marL="0">
+                        <a:buNone/>
+                      </a:pPr>
+                      <a:r>
+                        <a:rPr/>
+                        <a:t>691</a:t>
+                      </a:r>
+                    </a:p>
+                  </a:txBody>
+                </a:tc>
+                <a:tc>
+                  <a:txBody>
+                    <a:bodyPr/>
+                    <a:lstStyle/>
+                    <a:p>
+                      <a:pPr lvl="0" indent="0" marL="0">
+                        <a:buNone/>
+                      </a:pPr>
+                      <a:r>
+                        <a:rPr/>
+                        <a:t>4.4</a:t>
+                      </a:r>
+                    </a:p>
+                  </a:txBody>
+                </a:tc>
+                <a:tc>
+                  <a:txBody>
+                    <a:bodyPr/>
+                    <a:lstStyle/>
+                    <a:p>
+                      <a:pPr lvl="0" indent="0" marL="0">
+                        <a:buNone/>
+                      </a:pPr>
+                      <a:r>
+                        <a:rPr/>
+                        <a:t>26.9</a:t>
+                      </a:r>
+                    </a:p>
+                  </a:txBody>
+                </a:tc>
+                <a:tc>
+                  <a:txBody>
+                    <a:bodyPr/>
+                    <a:lstStyle/>
+                    <a:p>
+                      <a:pPr lvl="0" indent="0" marL="0">
+                        <a:buNone/>
+                      </a:pPr>
+                      <a:r>
+                        <a:rPr/>
+                        <a:t>62.64</a:t>
+                      </a:r>
+                    </a:p>
+                  </a:txBody>
+                </a:tc>
+                <a:tc>
+                  <a:txBody>
+                    <a:bodyPr/>
+                    <a:lstStyle/>
+                    <a:p>
+                      <a:pPr lvl="0" indent="0" marL="0">
+                        <a:buNone/>
+                      </a:pPr>
+                      <a:r>
+                        <a:rPr/>
+                        <a:t>water tupelo</a:t>
+                      </a:r>
+                    </a:p>
+                  </a:txBody>
+                </a:tc>
+              </a:tr>
+              <a:tr h="0">
+                <a:tc>
+                  <a:txBody>
+                    <a:bodyPr/>
+                    <a:lstStyle/>
+                    <a:p>
+                      <a:pPr lvl="0" indent="0" marL="0">
+                        <a:buNone/>
+                      </a:pPr>
+                      <a:r>
+                        <a:rPr/>
+                        <a:t>137039</a:t>
+                      </a:r>
+                    </a:p>
+                  </a:txBody>
+                </a:tc>
+                <a:tc>
+                  <a:txBody>
+                    <a:bodyPr/>
+                    <a:lstStyle/>
+                    <a:p>
+                      <a:pPr lvl="0" indent="0" marL="0">
+                        <a:buNone/>
+                      </a:pPr>
+                      <a:r>
+                        <a:rPr/>
+                        <a:t>691</a:t>
+                      </a:r>
+                    </a:p>
+                  </a:txBody>
+                </a:tc>
+                <a:tc>
+                  <a:txBody>
+                    <a:bodyPr/>
+                    <a:lstStyle/>
+                    <a:p>
+                      <a:pPr lvl="0" indent="0" marL="0">
+                        <a:buNone/>
+                      </a:pPr>
+                      <a:r>
+                        <a:rPr/>
+                        <a:t>4.2</a:t>
+                      </a:r>
+                    </a:p>
+                  </a:txBody>
+                </a:tc>
+                <a:tc>
+                  <a:txBody>
+                    <a:bodyPr/>
+                    <a:lstStyle/>
+                    <a:p>
+                      <a:pPr lvl="0" indent="0" marL="0">
+                        <a:buNone/>
+                      </a:pPr>
+                      <a:r>
+                        <a:rPr/>
+                        <a:t>28.1</a:t>
+                      </a:r>
+                    </a:p>
+                  </a:txBody>
+                </a:tc>
+                <a:tc>
+                  <a:txBody>
+                    <a:bodyPr/>
+                    <a:lstStyle/>
+                    <a:p>
+                      <a:pPr lvl="0" indent="0" marL="0">
+                        <a:buNone/>
+                      </a:pPr>
+                      <a:r>
+                        <a:rPr/>
+                        <a:t>55.82</a:t>
+                      </a:r>
+                    </a:p>
+                  </a:txBody>
+                </a:tc>
+                <a:tc>
+                  <a:txBody>
+                    <a:bodyPr/>
+                    <a:lstStyle/>
+                    <a:p>
+                      <a:pPr lvl="0" indent="0" marL="0">
+                        <a:buNone/>
+                      </a:pPr>
+                      <a:r>
+                        <a:rPr/>
+                        <a:t>water tupelo</a:t>
+                      </a:r>
+                    </a:p>
+                  </a:txBody>
+                </a:tc>
+              </a:tr>
+            </a:tbl>
+          </a:graphicData>
+        </a:graphic>
+      </p:graphicFrame>
+    </p:spTree>
+  </p:cSld>
+</p:sld>
+</file>
+
+<file path=ppt/slides/slide21.xml><?xml version="1.0" encoding="utf-8"?>
+<p:sld xmlns:a="http://schemas.openxmlformats.org/drawingml/2006/main" xmlns:r="http://schemas.openxmlformats.org/officeDocument/2006/relationships" xmlns:p="http://schemas.openxmlformats.org/presentationml/2006/main">
+  <p:cSld>
+    <p:spTree>
+      <p:nvGrpSpPr>
+        <p:cNvPr id="1" name=""/>
+        <p:cNvGrpSpPr/>
+        <p:nvPr/>
+      </p:nvGrpSpPr>
+      <p:grpSpPr>
+        <a:xfrm>
+          <a:off x="0" y="0"/>
+          <a:ext cx="0" cy="0"/>
+          <a:chOff x="0" y="0"/>
+          <a:chExt cx="0" cy="0"/>
+        </a:xfrm>
+      </p:grpSpPr>
+      <p:sp>
+        <p:nvSpPr>
+          <p:cNvPr id="2" name="Title 1"/>
+          <p:cNvSpPr>
+            <a:spLocks noGrp="1"/>
+          </p:cNvSpPr>
+          <p:nvPr>
+            <p:ph type="title"/>
+          </p:nvPr>
+        </p:nvSpPr>
+        <p:spPr/>
+        <p:txBody>
+          <a:bodyPr/>
+          <a:lstStyle/>
+          <a:p>
+            <a:pPr lvl="0" indent="0" marL="0">
+              <a:buNone/>
+            </a:pPr>
+            <a:r>
+              <a:rPr/>
+              <a:t>Base datset calculations:</a:t>
+            </a:r>
+          </a:p>
+        </p:txBody>
+      </p:sp>
+      <p:sp>
+        <p:nvSpPr>
+          <p:cNvPr id="3" name="Content Placeholder 2"/>
+          <p:cNvSpPr>
+            <a:spLocks noGrp="1"/>
+          </p:cNvSpPr>
+          <p:nvPr>
+            <p:ph idx="1"/>
+          </p:nvPr>
+        </p:nvSpPr>
+        <p:spPr/>
+        <p:txBody>
+          <a:bodyPr/>
+          <a:lstStyle/>
+          <a:p>
+            <a:pPr lvl="0" indent="0">
+              <a:buNone/>
+            </a:pPr>
+            <a:r>
+              <a:rPr>
+                <a:latin typeface="Courier"/>
+              </a:rPr>
+              <a:t>Average Root Mean Squared Log Error (RMSLE) for k = 3: 0.15805917967387384</a:t>
+            </a:r>
+          </a:p>
+        </p:txBody>
+      </p:sp>
+    </p:spTree>
+  </p:cSld>
+</p:sld>
+</file>
+
+<file path=ppt/slides/slide22.xml><?xml version="1.0" encoding="utf-8"?>
+<p:sld xmlns:a="http://schemas.openxmlformats.org/drawingml/2006/main" xmlns:r="http://schemas.openxmlformats.org/officeDocument/2006/relationships" xmlns:p="http://schemas.openxmlformats.org/presentationml/2006/main">
+  <p:cSld>
+    <p:spTree>
+      <p:nvGrpSpPr>
+        <p:cNvPr id="1" name=""/>
+        <p:cNvGrpSpPr/>
+        <p:nvPr/>
+      </p:nvGrpSpPr>
+      <p:grpSpPr>
+        <a:xfrm>
+          <a:off x="0" y="0"/>
+          <a:ext cx="0" cy="0"/>
+          <a:chOff x="0" y="0"/>
+          <a:chExt cx="0" cy="0"/>
+        </a:xfrm>
+      </p:grpSpPr>
+      <p:sp>
+        <p:nvSpPr>
+          <p:cNvPr id="2" name="Title 1"/>
+          <p:cNvSpPr>
+            <a:spLocks noGrp="1"/>
+          </p:cNvSpPr>
+          <p:nvPr>
+            <p:ph type="title"/>
+          </p:nvPr>
+        </p:nvSpPr>
+        <p:spPr/>
+        <p:txBody>
+          <a:bodyPr/>
+          <a:lstStyle/>
+          <a:p>
+            <a:pPr lvl="0" indent="0" marL="0">
+              <a:buNone/>
+            </a:pPr>
+            <a:r>
+              <a:rPr/>
+              <a:t>Quality Assurance</a:t>
             </a:r>
           </a:p>
         </p:txBody>

--- a/Project-3/presentation.pptx
+++ b/Project-3/presentation.pptx
@@ -27,6 +27,8 @@
     <p:sldId id="275" r:id="rId21"/>
     <p:sldId id="276" r:id="rId22"/>
     <p:sldId id="277" r:id="rId23"/>
+    <p:sldId id="278" r:id="rId24"/>
+    <p:sldId id="279" r:id="rId25"/>
   </p:sldIdLst>
   <p:sldSz cx="9144000" cy="5143500" type="screen16x9"/>
   <p:notesSz cx="6858000" cy="9144000"/>
@@ -3485,14 +3487,14 @@
             <a:pPr lvl="0"/>
             <a:r>
               <a:rPr/>
-              <a:t>When predicting tree biomass, employ the performance metric root mean square logarithmic error since biomass data varies greatly, ranging from tiny saplings to enormous trees, majority of trees having exponential growth.</a:t>
+              <a:t>We choose kNN regression over linear regression because when looking at the graphs Dean made, we saw that the tree diameter/height vs. biomass graphs all have exponential growth.</a:t>
             </a:r>
           </a:p>
           <a:p>
             <a:pPr lvl="0"/>
             <a:r>
               <a:rPr/>
-              <a:t>We chose kNN regression over linear regression because when looking at the graphs Dean presented, we saw that the tree diameter/height vs. biomass graphs all have exponential growth.</a:t>
+              <a:t>When relations between biomass and trees’ diameter and height are complex and nonlinear, data is abundant, and the model needs to be adaptive without making major changes in the model. kNN excels in capturing patterns and irregular patterns.</a:t>
             </a:r>
           </a:p>
         </p:txBody>
@@ -3539,7 +3541,7 @@
             </a:pPr>
             <a:r>
               <a:rPr/>
-              <a:t>Consultation pt 2</a:t>
+              <a:t>Performance Metric</a:t>
             </a:r>
           </a:p>
         </p:txBody>
@@ -3562,7 +3564,18 @@
             <a:pPr lvl="0"/>
             <a:r>
               <a:rPr/>
-              <a:t>When relations between biomass and trees diameter and height are complex and non linear, data is abundent, and the model needs to be adaptive with out maksing major changes in the model. kNN excels in capturing patterns and irregular patterns.</a:t>
+              <a:t>When predicting tree biomass, we chose Root Mean Square Logarithmic Error for our performance metric since biomass data varies greatly, ranging from tiny saplings to enormous trees, and trees have exponential growth.</a:t>
+            </a:r>
+          </a:p>
+          <a:p>
+            <a:pPr lvl="0"/>
+            <a:r>
+              <a:rPr b="1"/>
+              <a:t>RMSLE over RMSE</a:t>
+            </a:r>
+            <a:r>
+              <a:rPr/>
+              <a:t>: focuses on percentage errors, making it fair to both small and large trees, unlike RMSE, which we believe penalizes errors on big trees. Fitting biomass estimations where scale matters more than absolute error. RMSLE provides a more balanced evaluation that considers the unique characteristics of tree biomass data.</a:t>
             </a:r>
           </a:p>
         </p:txBody>
@@ -3609,45 +3622,963 @@
             </a:pPr>
             <a:r>
               <a:rPr/>
-              <a:t>Performance Metric</a:t>
+              <a:t>Project Manager Model</a:t>
             </a:r>
           </a:p>
         </p:txBody>
       </p:sp>
-      <p:sp>
-        <p:nvSpPr>
-          <p:cNvPr id="3" name="Content Placeholder 2"/>
-          <p:cNvSpPr>
-            <a:spLocks noGrp="1"/>
-          </p:cNvSpPr>
+      <p:graphicFrame>
+        <p:nvGraphicFramePr>
+          <p:cNvPr id="6" name="Content Placeholder 5"/>
+          <p:cNvGraphicFramePr>
+            <a:graphicFrameLocks noGrp="1"/>
+          </p:cNvGraphicFramePr>
           <p:nvPr>
             <p:ph idx="1"/>
           </p:nvPr>
-        </p:nvSpPr>
-        <p:spPr/>
-        <p:txBody>
-          <a:bodyPr/>
-          <a:lstStyle/>
-          <a:p>
-            <a:pPr lvl="0"/>
-            <a:r>
-              <a:rPr b="1"/>
-              <a:t>RMSLE over RMSE</a:t>
-            </a:r>
-            <a:r>
-              <a:rPr/>
-              <a:t>: focuses on percentage errors, making it fair to both small and large trees, unlike RMSE, which we believe penalizes errors on big trees. Fitting biomass estimations where scale matters more than absolute error.</a:t>
-            </a:r>
-          </a:p>
-          <a:p>
-            <a:pPr lvl="0"/>
-            <a:r>
-              <a:rPr/>
-              <a:t>By prioritizing percentage errors, RMSLE provides a more balanced evaluation that considers the unique characteristics of tree biomass data.</a:t>
-            </a:r>
-          </a:p>
-        </p:txBody>
-      </p:sp>
+        </p:nvGraphicFramePr>
+        <p:xfrm>
+          <a:off x="457200" y="1193800"/>
+          <a:ext cx="8229600" cy="3390900"/>
+        </p:xfrm>
+        <a:graphic>
+          <a:graphicData uri="http://schemas.openxmlformats.org/drawingml/2006/table">
+            <a:tbl>
+              <a:tblPr firstRow="1" bandRow="1">
+                <a:tableStyleId>{5C22544A-7EE6-4342-B048-85BDC9FD1C3A}</a:tableStyleId>
+              </a:tblPr>
+              <a:tblGrid>
+                <a:gridCol w="1371600"/>
+                <a:gridCol w="1371600"/>
+                <a:gridCol w="1371600"/>
+                <a:gridCol w="1371600"/>
+                <a:gridCol w="1371600"/>
+                <a:gridCol w="1371600"/>
+              </a:tblGrid>
+              <a:tr h="0">
+                <a:tc>
+                  <a:txBody>
+                    <a:bodyPr/>
+                    <a:lstStyle/>
+                    <a:p>
+                      <a:endParaRPr/>
+                    </a:p>
+                  </a:txBody>
+                  <a:tcPr/>
+                </a:tc>
+                <a:tc>
+                  <a:txBody>
+                    <a:bodyPr/>
+                    <a:lstStyle/>
+                    <a:p>
+                      <a:pPr lvl="0" indent="0" marL="0">
+                        <a:buNone/>
+                      </a:pPr>
+                      <a:r>
+                        <a:rPr/>
+                        <a:t>Species</a:t>
+                      </a:r>
+                    </a:p>
+                  </a:txBody>
+                  <a:tcPr/>
+                </a:tc>
+                <a:tc>
+                  <a:txBody>
+                    <a:bodyPr/>
+                    <a:lstStyle/>
+                    <a:p>
+                      <a:pPr lvl="0" indent="0" marL="0">
+                        <a:buNone/>
+                      </a:pPr>
+                      <a:r>
+                        <a:rPr/>
+                        <a:t>k</a:t>
+                      </a:r>
+                    </a:p>
+                  </a:txBody>
+                  <a:tcPr/>
+                </a:tc>
+                <a:tc>
+                  <a:txBody>
+                    <a:bodyPr/>
+                    <a:lstStyle/>
+                    <a:p>
+                      <a:pPr lvl="0" indent="0" marL="0">
+                        <a:buNone/>
+                      </a:pPr>
+                      <a:r>
+                        <a:rPr/>
+                        <a:t>RMSE</a:t>
+                      </a:r>
+                    </a:p>
+                  </a:txBody>
+                  <a:tcPr/>
+                </a:tc>
+                <a:tc>
+                  <a:txBody>
+                    <a:bodyPr/>
+                    <a:lstStyle/>
+                    <a:p>
+                      <a:pPr lvl="0" indent="0" marL="0">
+                        <a:buNone/>
+                      </a:pPr>
+                      <a:r>
+                        <a:rPr/>
+                        <a:t>MAE</a:t>
+                      </a:r>
+                    </a:p>
+                  </a:txBody>
+                  <a:tcPr/>
+                </a:tc>
+                <a:tc>
+                  <a:txBody>
+                    <a:bodyPr/>
+                    <a:lstStyle/>
+                    <a:p>
+                      <a:pPr lvl="0" indent="0" marL="0">
+                        <a:buNone/>
+                      </a:pPr>
+                      <a:r>
+                        <a:rPr/>
+                        <a:t>RMSLE</a:t>
+                      </a:r>
+                    </a:p>
+                  </a:txBody>
+                  <a:tcPr/>
+                </a:tc>
+              </a:tr>
+              <a:tr h="0">
+                <a:tc>
+                  <a:txBody>
+                    <a:bodyPr/>
+                    <a:lstStyle/>
+                    <a:p>
+                      <a:pPr lvl="0" indent="0" marL="0">
+                        <a:buNone/>
+                      </a:pPr>
+                      <a:r>
+                        <a:rPr/>
+                        <a:t>0</a:t>
+                      </a:r>
+                    </a:p>
+                  </a:txBody>
+                </a:tc>
+                <a:tc>
+                  <a:txBody>
+                    <a:bodyPr/>
+                    <a:lstStyle/>
+                    <a:p>
+                      <a:pPr lvl="0" indent="0" marL="0">
+                        <a:buNone/>
+                      </a:pPr>
+                      <a:r>
+                        <a:rPr/>
+                        <a:t>balsam fir</a:t>
+                      </a:r>
+                    </a:p>
+                  </a:txBody>
+                </a:tc>
+                <a:tc>
+                  <a:txBody>
+                    <a:bodyPr/>
+                    <a:lstStyle/>
+                    <a:p>
+                      <a:pPr lvl="0" indent="0" marL="0">
+                        <a:buNone/>
+                      </a:pPr>
+                      <a:r>
+                        <a:rPr/>
+                        <a:t>2</a:t>
+                      </a:r>
+                    </a:p>
+                  </a:txBody>
+                </a:tc>
+                <a:tc>
+                  <a:txBody>
+                    <a:bodyPr/>
+                    <a:lstStyle/>
+                    <a:p>
+                      <a:pPr lvl="0" indent="0" marL="0">
+                        <a:buNone/>
+                      </a:pPr>
+                      <a:r>
+                        <a:rPr/>
+                        <a:t>125.825473</a:t>
+                      </a:r>
+                    </a:p>
+                  </a:txBody>
+                </a:tc>
+                <a:tc>
+                  <a:txBody>
+                    <a:bodyPr/>
+                    <a:lstStyle/>
+                    <a:p>
+                      <a:pPr lvl="0" indent="0" marL="0">
+                        <a:buNone/>
+                      </a:pPr>
+                      <a:r>
+                        <a:rPr/>
+                        <a:t>34.801913</a:t>
+                      </a:r>
+                    </a:p>
+                  </a:txBody>
+                </a:tc>
+                <a:tc>
+                  <a:txBody>
+                    <a:bodyPr/>
+                    <a:lstStyle/>
+                    <a:p>
+                      <a:pPr lvl="0" indent="0" marL="0">
+                        <a:buNone/>
+                      </a:pPr>
+                      <a:r>
+                        <a:rPr/>
+                        <a:t>0.119574</a:t>
+                      </a:r>
+                    </a:p>
+                  </a:txBody>
+                </a:tc>
+              </a:tr>
+              <a:tr h="0">
+                <a:tc>
+                  <a:txBody>
+                    <a:bodyPr/>
+                    <a:lstStyle/>
+                    <a:p>
+                      <a:pPr lvl="0" indent="0" marL="0">
+                        <a:buNone/>
+                      </a:pPr>
+                      <a:r>
+                        <a:rPr/>
+                        <a:t>1</a:t>
+                      </a:r>
+                    </a:p>
+                  </a:txBody>
+                </a:tc>
+                <a:tc>
+                  <a:txBody>
+                    <a:bodyPr/>
+                    <a:lstStyle/>
+                    <a:p>
+                      <a:pPr lvl="0" indent="0" marL="0">
+                        <a:buNone/>
+                      </a:pPr>
+                      <a:r>
+                        <a:rPr/>
+                        <a:t>balsam fir</a:t>
+                      </a:r>
+                    </a:p>
+                  </a:txBody>
+                </a:tc>
+                <a:tc>
+                  <a:txBody>
+                    <a:bodyPr/>
+                    <a:lstStyle/>
+                    <a:p>
+                      <a:pPr lvl="0" indent="0" marL="0">
+                        <a:buNone/>
+                      </a:pPr>
+                      <a:r>
+                        <a:rPr/>
+                        <a:t>3</a:t>
+                      </a:r>
+                    </a:p>
+                  </a:txBody>
+                </a:tc>
+                <a:tc>
+                  <a:txBody>
+                    <a:bodyPr/>
+                    <a:lstStyle/>
+                    <a:p>
+                      <a:pPr lvl="0" indent="0" marL="0">
+                        <a:buNone/>
+                      </a:pPr>
+                      <a:r>
+                        <a:rPr/>
+                        <a:t>129.651479</a:t>
+                      </a:r>
+                    </a:p>
+                  </a:txBody>
+                </a:tc>
+                <a:tc>
+                  <a:txBody>
+                    <a:bodyPr/>
+                    <a:lstStyle/>
+                    <a:p>
+                      <a:pPr lvl="0" indent="0" marL="0">
+                        <a:buNone/>
+                      </a:pPr>
+                      <a:r>
+                        <a:rPr/>
+                        <a:t>36.646493</a:t>
+                      </a:r>
+                    </a:p>
+                  </a:txBody>
+                </a:tc>
+                <a:tc>
+                  <a:txBody>
+                    <a:bodyPr/>
+                    <a:lstStyle/>
+                    <a:p>
+                      <a:pPr lvl="0" indent="0" marL="0">
+                        <a:buNone/>
+                      </a:pPr>
+                      <a:r>
+                        <a:rPr/>
+                        <a:t>0.123724</a:t>
+                      </a:r>
+                    </a:p>
+                  </a:txBody>
+                </a:tc>
+              </a:tr>
+              <a:tr h="0">
+                <a:tc>
+                  <a:txBody>
+                    <a:bodyPr/>
+                    <a:lstStyle/>
+                    <a:p>
+                      <a:pPr lvl="0" indent="0" marL="0">
+                        <a:buNone/>
+                      </a:pPr>
+                      <a:r>
+                        <a:rPr/>
+                        <a:t>2</a:t>
+                      </a:r>
+                    </a:p>
+                  </a:txBody>
+                </a:tc>
+                <a:tc>
+                  <a:txBody>
+                    <a:bodyPr/>
+                    <a:lstStyle/>
+                    <a:p>
+                      <a:pPr lvl="0" indent="0" marL="0">
+                        <a:buNone/>
+                      </a:pPr>
+                      <a:r>
+                        <a:rPr/>
+                        <a:t>balsam fir</a:t>
+                      </a:r>
+                    </a:p>
+                  </a:txBody>
+                </a:tc>
+                <a:tc>
+                  <a:txBody>
+                    <a:bodyPr/>
+                    <a:lstStyle/>
+                    <a:p>
+                      <a:pPr lvl="0" indent="0" marL="0">
+                        <a:buNone/>
+                      </a:pPr>
+                      <a:r>
+                        <a:rPr/>
+                        <a:t>4</a:t>
+                      </a:r>
+                    </a:p>
+                  </a:txBody>
+                </a:tc>
+                <a:tc>
+                  <a:txBody>
+                    <a:bodyPr/>
+                    <a:lstStyle/>
+                    <a:p>
+                      <a:pPr lvl="0" indent="0" marL="0">
+                        <a:buNone/>
+                      </a:pPr>
+                      <a:r>
+                        <a:rPr/>
+                        <a:t>134.599829</a:t>
+                      </a:r>
+                    </a:p>
+                  </a:txBody>
+                </a:tc>
+                <a:tc>
+                  <a:txBody>
+                    <a:bodyPr/>
+                    <a:lstStyle/>
+                    <a:p>
+                      <a:pPr lvl="0" indent="0" marL="0">
+                        <a:buNone/>
+                      </a:pPr>
+                      <a:r>
+                        <a:rPr/>
+                        <a:t>38.884870</a:t>
+                      </a:r>
+                    </a:p>
+                  </a:txBody>
+                </a:tc>
+                <a:tc>
+                  <a:txBody>
+                    <a:bodyPr/>
+                    <a:lstStyle/>
+                    <a:p>
+                      <a:pPr lvl="0" indent="0" marL="0">
+                        <a:buNone/>
+                      </a:pPr>
+                      <a:r>
+                        <a:rPr/>
+                        <a:t>0.133858</a:t>
+                      </a:r>
+                    </a:p>
+                  </a:txBody>
+                </a:tc>
+              </a:tr>
+              <a:tr h="0">
+                <a:tc>
+                  <a:txBody>
+                    <a:bodyPr/>
+                    <a:lstStyle/>
+                    <a:p>
+                      <a:pPr lvl="0" indent="0" marL="0">
+                        <a:buNone/>
+                      </a:pPr>
+                      <a:r>
+                        <a:rPr/>
+                        <a:t>3</a:t>
+                      </a:r>
+                    </a:p>
+                  </a:txBody>
+                </a:tc>
+                <a:tc>
+                  <a:txBody>
+                    <a:bodyPr/>
+                    <a:lstStyle/>
+                    <a:p>
+                      <a:pPr lvl="0" indent="0" marL="0">
+                        <a:buNone/>
+                      </a:pPr>
+                      <a:r>
+                        <a:rPr/>
+                        <a:t>balsam fir</a:t>
+                      </a:r>
+                    </a:p>
+                  </a:txBody>
+                </a:tc>
+                <a:tc>
+                  <a:txBody>
+                    <a:bodyPr/>
+                    <a:lstStyle/>
+                    <a:p>
+                      <a:pPr lvl="0" indent="0" marL="0">
+                        <a:buNone/>
+                      </a:pPr>
+                      <a:r>
+                        <a:rPr/>
+                        <a:t>5</a:t>
+                      </a:r>
+                    </a:p>
+                  </a:txBody>
+                </a:tc>
+                <a:tc>
+                  <a:txBody>
+                    <a:bodyPr/>
+                    <a:lstStyle/>
+                    <a:p>
+                      <a:pPr lvl="0" indent="0" marL="0">
+                        <a:buNone/>
+                      </a:pPr>
+                      <a:r>
+                        <a:rPr/>
+                        <a:t>145.003601</a:t>
+                      </a:r>
+                    </a:p>
+                  </a:txBody>
+                </a:tc>
+                <a:tc>
+                  <a:txBody>
+                    <a:bodyPr/>
+                    <a:lstStyle/>
+                    <a:p>
+                      <a:pPr lvl="0" indent="0" marL="0">
+                        <a:buNone/>
+                      </a:pPr>
+                      <a:r>
+                        <a:rPr/>
+                        <a:t>41.209530</a:t>
+                      </a:r>
+                    </a:p>
+                  </a:txBody>
+                </a:tc>
+                <a:tc>
+                  <a:txBody>
+                    <a:bodyPr/>
+                    <a:lstStyle/>
+                    <a:p>
+                      <a:pPr lvl="0" indent="0" marL="0">
+                        <a:buNone/>
+                      </a:pPr>
+                      <a:r>
+                        <a:rPr/>
+                        <a:t>0.144063</a:t>
+                      </a:r>
+                    </a:p>
+                  </a:txBody>
+                </a:tc>
+              </a:tr>
+              <a:tr h="0">
+                <a:tc>
+                  <a:txBody>
+                    <a:bodyPr/>
+                    <a:lstStyle/>
+                    <a:p>
+                      <a:pPr lvl="0" indent="0" marL="0">
+                        <a:buNone/>
+                      </a:pPr>
+                      <a:r>
+                        <a:rPr/>
+                        <a:t>4</a:t>
+                      </a:r>
+                    </a:p>
+                  </a:txBody>
+                </a:tc>
+                <a:tc>
+                  <a:txBody>
+                    <a:bodyPr/>
+                    <a:lstStyle/>
+                    <a:p>
+                      <a:pPr lvl="0" indent="0" marL="0">
+                        <a:buNone/>
+                      </a:pPr>
+                      <a:r>
+                        <a:rPr/>
+                        <a:t>balsam fir</a:t>
+                      </a:r>
+                    </a:p>
+                  </a:txBody>
+                </a:tc>
+                <a:tc>
+                  <a:txBody>
+                    <a:bodyPr/>
+                    <a:lstStyle/>
+                    <a:p>
+                      <a:pPr lvl="0" indent="0" marL="0">
+                        <a:buNone/>
+                      </a:pPr>
+                      <a:r>
+                        <a:rPr/>
+                        <a:t>6</a:t>
+                      </a:r>
+                    </a:p>
+                  </a:txBody>
+                </a:tc>
+                <a:tc>
+                  <a:txBody>
+                    <a:bodyPr/>
+                    <a:lstStyle/>
+                    <a:p>
+                      <a:pPr lvl="0" indent="0" marL="0">
+                        <a:buNone/>
+                      </a:pPr>
+                      <a:r>
+                        <a:rPr/>
+                        <a:t>147.451321</a:t>
+                      </a:r>
+                    </a:p>
+                  </a:txBody>
+                </a:tc>
+                <a:tc>
+                  <a:txBody>
+                    <a:bodyPr/>
+                    <a:lstStyle/>
+                    <a:p>
+                      <a:pPr lvl="0" indent="0" marL="0">
+                        <a:buNone/>
+                      </a:pPr>
+                      <a:r>
+                        <a:rPr/>
+                        <a:t>40.791681</a:t>
+                      </a:r>
+                    </a:p>
+                  </a:txBody>
+                </a:tc>
+                <a:tc>
+                  <a:txBody>
+                    <a:bodyPr/>
+                    <a:lstStyle/>
+                    <a:p>
+                      <a:pPr lvl="0" indent="0" marL="0">
+                        <a:buNone/>
+                      </a:pPr>
+                      <a:r>
+                        <a:rPr/>
+                        <a:t>0.142862</a:t>
+                      </a:r>
+                    </a:p>
+                  </a:txBody>
+                </a:tc>
+              </a:tr>
+              <a:tr h="0">
+                <a:tc>
+                  <a:txBody>
+                    <a:bodyPr/>
+                    <a:lstStyle/>
+                    <a:p>
+                      <a:pPr lvl="0" indent="0" marL="0">
+                        <a:buNone/>
+                      </a:pPr>
+                      <a:r>
+                        <a:rPr/>
+                        <a:t>5</a:t>
+                      </a:r>
+                    </a:p>
+                  </a:txBody>
+                </a:tc>
+                <a:tc>
+                  <a:txBody>
+                    <a:bodyPr/>
+                    <a:lstStyle/>
+                    <a:p>
+                      <a:pPr lvl="0" indent="0" marL="0">
+                        <a:buNone/>
+                      </a:pPr>
+                      <a:r>
+                        <a:rPr/>
+                        <a:t>balsam fir</a:t>
+                      </a:r>
+                    </a:p>
+                  </a:txBody>
+                </a:tc>
+                <a:tc>
+                  <a:txBody>
+                    <a:bodyPr/>
+                    <a:lstStyle/>
+                    <a:p>
+                      <a:pPr lvl="0" indent="0" marL="0">
+                        <a:buNone/>
+                      </a:pPr>
+                      <a:r>
+                        <a:rPr/>
+                        <a:t>7</a:t>
+                      </a:r>
+                    </a:p>
+                  </a:txBody>
+                </a:tc>
+                <a:tc>
+                  <a:txBody>
+                    <a:bodyPr/>
+                    <a:lstStyle/>
+                    <a:p>
+                      <a:pPr lvl="0" indent="0" marL="0">
+                        <a:buNone/>
+                      </a:pPr>
+                      <a:r>
+                        <a:rPr/>
+                        <a:t>153.497849</a:t>
+                      </a:r>
+                    </a:p>
+                  </a:txBody>
+                </a:tc>
+                <a:tc>
+                  <a:txBody>
+                    <a:bodyPr/>
+                    <a:lstStyle/>
+                    <a:p>
+                      <a:pPr lvl="0" indent="0" marL="0">
+                        <a:buNone/>
+                      </a:pPr>
+                      <a:r>
+                        <a:rPr/>
+                        <a:t>42.310385</a:t>
+                      </a:r>
+                    </a:p>
+                  </a:txBody>
+                </a:tc>
+                <a:tc>
+                  <a:txBody>
+                    <a:bodyPr/>
+                    <a:lstStyle/>
+                    <a:p>
+                      <a:pPr lvl="0" indent="0" marL="0">
+                        <a:buNone/>
+                      </a:pPr>
+                      <a:r>
+                        <a:rPr/>
+                        <a:t>0.150128</a:t>
+                      </a:r>
+                    </a:p>
+                  </a:txBody>
+                </a:tc>
+              </a:tr>
+              <a:tr h="0">
+                <a:tc>
+                  <a:txBody>
+                    <a:bodyPr/>
+                    <a:lstStyle/>
+                    <a:p>
+                      <a:pPr lvl="0" indent="0" marL="0">
+                        <a:buNone/>
+                      </a:pPr>
+                      <a:r>
+                        <a:rPr/>
+                        <a:t>6</a:t>
+                      </a:r>
+                    </a:p>
+                  </a:txBody>
+                </a:tc>
+                <a:tc>
+                  <a:txBody>
+                    <a:bodyPr/>
+                    <a:lstStyle/>
+                    <a:p>
+                      <a:pPr lvl="0" indent="0" marL="0">
+                        <a:buNone/>
+                      </a:pPr>
+                      <a:r>
+                        <a:rPr/>
+                        <a:t>balsam fir</a:t>
+                      </a:r>
+                    </a:p>
+                  </a:txBody>
+                </a:tc>
+                <a:tc>
+                  <a:txBody>
+                    <a:bodyPr/>
+                    <a:lstStyle/>
+                    <a:p>
+                      <a:pPr lvl="0" indent="0" marL="0">
+                        <a:buNone/>
+                      </a:pPr>
+                      <a:r>
+                        <a:rPr/>
+                        <a:t>8</a:t>
+                      </a:r>
+                    </a:p>
+                  </a:txBody>
+                </a:tc>
+                <a:tc>
+                  <a:txBody>
+                    <a:bodyPr/>
+                    <a:lstStyle/>
+                    <a:p>
+                      <a:pPr lvl="0" indent="0" marL="0">
+                        <a:buNone/>
+                      </a:pPr>
+                      <a:r>
+                        <a:rPr/>
+                        <a:t>156.757283</a:t>
+                      </a:r>
+                    </a:p>
+                  </a:txBody>
+                </a:tc>
+                <a:tc>
+                  <a:txBody>
+                    <a:bodyPr/>
+                    <a:lstStyle/>
+                    <a:p>
+                      <a:pPr lvl="0" indent="0" marL="0">
+                        <a:buNone/>
+                      </a:pPr>
+                      <a:r>
+                        <a:rPr/>
+                        <a:t>43.465652</a:t>
+                      </a:r>
+                    </a:p>
+                  </a:txBody>
+                </a:tc>
+                <a:tc>
+                  <a:txBody>
+                    <a:bodyPr/>
+                    <a:lstStyle/>
+                    <a:p>
+                      <a:pPr lvl="0" indent="0" marL="0">
+                        <a:buNone/>
+                      </a:pPr>
+                      <a:r>
+                        <a:rPr/>
+                        <a:t>0.154785</a:t>
+                      </a:r>
+                    </a:p>
+                  </a:txBody>
+                </a:tc>
+              </a:tr>
+              <a:tr h="0">
+                <a:tc>
+                  <a:txBody>
+                    <a:bodyPr/>
+                    <a:lstStyle/>
+                    <a:p>
+                      <a:pPr lvl="0" indent="0" marL="0">
+                        <a:buNone/>
+                      </a:pPr>
+                      <a:r>
+                        <a:rPr/>
+                        <a:t>7</a:t>
+                      </a:r>
+                    </a:p>
+                  </a:txBody>
+                </a:tc>
+                <a:tc>
+                  <a:txBody>
+                    <a:bodyPr/>
+                    <a:lstStyle/>
+                    <a:p>
+                      <a:pPr lvl="0" indent="0" marL="0">
+                        <a:buNone/>
+                      </a:pPr>
+                      <a:r>
+                        <a:rPr/>
+                        <a:t>balsam fir</a:t>
+                      </a:r>
+                    </a:p>
+                  </a:txBody>
+                </a:tc>
+                <a:tc>
+                  <a:txBody>
+                    <a:bodyPr/>
+                    <a:lstStyle/>
+                    <a:p>
+                      <a:pPr lvl="0" indent="0" marL="0">
+                        <a:buNone/>
+                      </a:pPr>
+                      <a:r>
+                        <a:rPr/>
+                        <a:t>9</a:t>
+                      </a:r>
+                    </a:p>
+                  </a:txBody>
+                </a:tc>
+                <a:tc>
+                  <a:txBody>
+                    <a:bodyPr/>
+                    <a:lstStyle/>
+                    <a:p>
+                      <a:pPr lvl="0" indent="0" marL="0">
+                        <a:buNone/>
+                      </a:pPr>
+                      <a:r>
+                        <a:rPr/>
+                        <a:t>161.016352</a:t>
+                      </a:r>
+                    </a:p>
+                  </a:txBody>
+                </a:tc>
+                <a:tc>
+                  <a:txBody>
+                    <a:bodyPr/>
+                    <a:lstStyle/>
+                    <a:p>
+                      <a:pPr lvl="0" indent="0" marL="0">
+                        <a:buNone/>
+                      </a:pPr>
+                      <a:r>
+                        <a:rPr/>
+                        <a:t>44.758889</a:t>
+                      </a:r>
+                    </a:p>
+                  </a:txBody>
+                </a:tc>
+                <a:tc>
+                  <a:txBody>
+                    <a:bodyPr/>
+                    <a:lstStyle/>
+                    <a:p>
+                      <a:pPr lvl="0" indent="0" marL="0">
+                        <a:buNone/>
+                      </a:pPr>
+                      <a:r>
+                        <a:rPr/>
+                        <a:t>0.160937</a:t>
+                      </a:r>
+                    </a:p>
+                  </a:txBody>
+                </a:tc>
+              </a:tr>
+              <a:tr h="0">
+                <a:tc>
+                  <a:txBody>
+                    <a:bodyPr/>
+                    <a:lstStyle/>
+                    <a:p>
+                      <a:pPr lvl="0" indent="0" marL="0">
+                        <a:buNone/>
+                      </a:pPr>
+                      <a:r>
+                        <a:rPr/>
+                        <a:t>8</a:t>
+                      </a:r>
+                    </a:p>
+                  </a:txBody>
+                </a:tc>
+                <a:tc>
+                  <a:txBody>
+                    <a:bodyPr/>
+                    <a:lstStyle/>
+                    <a:p>
+                      <a:pPr lvl="0" indent="0" marL="0">
+                        <a:buNone/>
+                      </a:pPr>
+                      <a:r>
+                        <a:rPr/>
+                        <a:t>balsam fir</a:t>
+                      </a:r>
+                    </a:p>
+                  </a:txBody>
+                </a:tc>
+                <a:tc>
+                  <a:txBody>
+                    <a:bodyPr/>
+                    <a:lstStyle/>
+                    <a:p>
+                      <a:pPr lvl="0" indent="0" marL="0">
+                        <a:buNone/>
+                      </a:pPr>
+                      <a:r>
+                        <a:rPr/>
+                        <a:t>10</a:t>
+                      </a:r>
+                    </a:p>
+                  </a:txBody>
+                </a:tc>
+                <a:tc>
+                  <a:txBody>
+                    <a:bodyPr/>
+                    <a:lstStyle/>
+                    <a:p>
+                      <a:pPr lvl="0" indent="0" marL="0">
+                        <a:buNone/>
+                      </a:pPr>
+                      <a:r>
+                        <a:rPr/>
+                        <a:t>157.999921</a:t>
+                      </a:r>
+                    </a:p>
+                  </a:txBody>
+                </a:tc>
+                <a:tc>
+                  <a:txBody>
+                    <a:bodyPr/>
+                    <a:lstStyle/>
+                    <a:p>
+                      <a:pPr lvl="0" indent="0" marL="0">
+                        <a:buNone/>
+                      </a:pPr>
+                      <a:r>
+                        <a:rPr/>
+                        <a:t>44.694861</a:t>
+                      </a:r>
+                    </a:p>
+                  </a:txBody>
+                </a:tc>
+                <a:tc>
+                  <a:txBody>
+                    <a:bodyPr/>
+                    <a:lstStyle/>
+                    <a:p>
+                      <a:pPr lvl="0" indent="0" marL="0">
+                        <a:buNone/>
+                      </a:pPr>
+                      <a:r>
+                        <a:rPr/>
+                        <a:t>0.160057</a:t>
+                      </a:r>
+                    </a:p>
+                  </a:txBody>
+                </a:tc>
+              </a:tr>
+            </a:tbl>
+          </a:graphicData>
+        </a:graphic>
+      </p:graphicFrame>
     </p:spTree>
   </p:cSld>
 </p:sld>
@@ -3690,1147 +4621,47 @@
             </a:pPr>
             <a:r>
               <a:rPr/>
-              <a:t>Model</a:t>
+              <a:t>Average Root Mean Square Logarithmic Error</a:t>
             </a:r>
           </a:p>
         </p:txBody>
       </p:sp>
-      <p:graphicFrame>
-        <p:nvGraphicFramePr>
-          <p:cNvPr id="6" name="Content Placeholder 5"/>
-          <p:cNvGraphicFramePr>
-            <a:graphicFrameLocks noGrp="1"/>
-          </p:cNvGraphicFramePr>
+      <p:sp>
+        <p:nvSpPr>
+          <p:cNvPr id="3" name="Content Placeholder 2"/>
+          <p:cNvSpPr>
+            <a:spLocks noGrp="1"/>
+          </p:cNvSpPr>
           <p:nvPr>
             <p:ph idx="1"/>
           </p:nvPr>
-        </p:nvGraphicFramePr>
-        <p:xfrm>
-          <a:off x="457200" y="1193800"/>
-          <a:ext cx="8229600" cy="3390900"/>
-        </p:xfrm>
-        <a:graphic>
-          <a:graphicData uri="http://schemas.openxmlformats.org/drawingml/2006/table">
-            <a:tbl>
-              <a:tblPr firstRow="1" bandRow="1">
-                <a:tableStyleId>{5C22544A-7EE6-4342-B048-85BDC9FD1C3A}</a:tableStyleId>
-              </a:tblPr>
-              <a:tblGrid>
-                <a:gridCol w="1371600"/>
-                <a:gridCol w="1371600"/>
-                <a:gridCol w="1371600"/>
-                <a:gridCol w="1371600"/>
-                <a:gridCol w="1371600"/>
-                <a:gridCol w="1371600"/>
-              </a:tblGrid>
-              <a:tr h="0">
-                <a:tc>
-                  <a:txBody>
-                    <a:bodyPr/>
-                    <a:lstStyle/>
-                    <a:p>
-                      <a:endParaRPr/>
-                    </a:p>
-                  </a:txBody>
-                  <a:tcPr/>
-                </a:tc>
-                <a:tc>
-                  <a:txBody>
-                    <a:bodyPr/>
-                    <a:lstStyle/>
-                    <a:p>
-                      <a:pPr lvl="0" indent="0" marL="0">
-                        <a:buNone/>
-                      </a:pPr>
-                      <a:r>
-                        <a:rPr/>
-                        <a:t>Species</a:t>
-                      </a:r>
-                    </a:p>
-                  </a:txBody>
-                  <a:tcPr/>
-                </a:tc>
-                <a:tc>
-                  <a:txBody>
-                    <a:bodyPr/>
-                    <a:lstStyle/>
-                    <a:p>
-                      <a:pPr lvl="0" indent="0" marL="0">
-                        <a:buNone/>
-                      </a:pPr>
-                      <a:r>
-                        <a:rPr/>
-                        <a:t>k</a:t>
-                      </a:r>
-                    </a:p>
-                  </a:txBody>
-                  <a:tcPr/>
-                </a:tc>
-                <a:tc>
-                  <a:txBody>
-                    <a:bodyPr/>
-                    <a:lstStyle/>
-                    <a:p>
-                      <a:pPr lvl="0" indent="0" marL="0">
-                        <a:buNone/>
-                      </a:pPr>
-                      <a:r>
-                        <a:rPr/>
-                        <a:t>RMSE</a:t>
-                      </a:r>
-                    </a:p>
-                  </a:txBody>
-                  <a:tcPr/>
-                </a:tc>
-                <a:tc>
-                  <a:txBody>
-                    <a:bodyPr/>
-                    <a:lstStyle/>
-                    <a:p>
-                      <a:pPr lvl="0" indent="0" marL="0">
-                        <a:buNone/>
-                      </a:pPr>
-                      <a:r>
-                        <a:rPr/>
-                        <a:t>MAE</a:t>
-                      </a:r>
-                    </a:p>
-                  </a:txBody>
-                  <a:tcPr/>
-                </a:tc>
-                <a:tc>
-                  <a:txBody>
-                    <a:bodyPr/>
-                    <a:lstStyle/>
-                    <a:p>
-                      <a:pPr lvl="0" indent="0" marL="0">
-                        <a:buNone/>
-                      </a:pPr>
-                      <a:r>
-                        <a:rPr/>
-                        <a:t>RMSLE</a:t>
-                      </a:r>
-                    </a:p>
-                  </a:txBody>
-                  <a:tcPr/>
-                </a:tc>
-              </a:tr>
-              <a:tr h="0">
-                <a:tc>
-                  <a:txBody>
-                    <a:bodyPr/>
-                    <a:lstStyle/>
-                    <a:p>
-                      <a:pPr lvl="0" indent="0" marL="0">
-                        <a:buNone/>
-                      </a:pPr>
-                      <a:r>
-                        <a:rPr/>
-                        <a:t>0</a:t>
-                      </a:r>
-                    </a:p>
-                  </a:txBody>
-                </a:tc>
-                <a:tc>
-                  <a:txBody>
-                    <a:bodyPr/>
-                    <a:lstStyle/>
-                    <a:p>
-                      <a:pPr lvl="0" indent="0" marL="0">
-                        <a:buNone/>
-                      </a:pPr>
-                      <a:r>
-                        <a:rPr/>
-                        <a:t>balsam fir</a:t>
-                      </a:r>
-                    </a:p>
-                  </a:txBody>
-                </a:tc>
-                <a:tc>
-                  <a:txBody>
-                    <a:bodyPr/>
-                    <a:lstStyle/>
-                    <a:p>
-                      <a:pPr lvl="0" indent="0" marL="0">
-                        <a:buNone/>
-                      </a:pPr>
-                      <a:r>
-                        <a:rPr/>
-                        <a:t>2</a:t>
-                      </a:r>
-                    </a:p>
-                  </a:txBody>
-                </a:tc>
-                <a:tc>
-                  <a:txBody>
-                    <a:bodyPr/>
-                    <a:lstStyle/>
-                    <a:p>
-                      <a:pPr lvl="0" indent="0" marL="0">
-                        <a:buNone/>
-                      </a:pPr>
-                      <a:r>
-                        <a:rPr/>
-                        <a:t>125.825473</a:t>
-                      </a:r>
-                    </a:p>
-                  </a:txBody>
-                </a:tc>
-                <a:tc>
-                  <a:txBody>
-                    <a:bodyPr/>
-                    <a:lstStyle/>
-                    <a:p>
-                      <a:pPr lvl="0" indent="0" marL="0">
-                        <a:buNone/>
-                      </a:pPr>
-                      <a:r>
-                        <a:rPr/>
-                        <a:t>34.801913</a:t>
-                      </a:r>
-                    </a:p>
-                  </a:txBody>
-                </a:tc>
-                <a:tc>
-                  <a:txBody>
-                    <a:bodyPr/>
-                    <a:lstStyle/>
-                    <a:p>
-                      <a:pPr lvl="0" indent="0" marL="0">
-                        <a:buNone/>
-                      </a:pPr>
-                      <a:r>
-                        <a:rPr/>
-                        <a:t>0.119574</a:t>
-                      </a:r>
-                    </a:p>
-                  </a:txBody>
-                </a:tc>
-              </a:tr>
-              <a:tr h="0">
-                <a:tc>
-                  <a:txBody>
-                    <a:bodyPr/>
-                    <a:lstStyle/>
-                    <a:p>
-                      <a:pPr lvl="0" indent="0" marL="0">
-                        <a:buNone/>
-                      </a:pPr>
-                      <a:r>
-                        <a:rPr/>
-                        <a:t>1</a:t>
-                      </a:r>
-                    </a:p>
-                  </a:txBody>
-                </a:tc>
-                <a:tc>
-                  <a:txBody>
-                    <a:bodyPr/>
-                    <a:lstStyle/>
-                    <a:p>
-                      <a:pPr lvl="0" indent="0" marL="0">
-                        <a:buNone/>
-                      </a:pPr>
-                      <a:r>
-                        <a:rPr/>
-                        <a:t>balsam fir</a:t>
-                      </a:r>
-                    </a:p>
-                  </a:txBody>
-                </a:tc>
-                <a:tc>
-                  <a:txBody>
-                    <a:bodyPr/>
-                    <a:lstStyle/>
-                    <a:p>
-                      <a:pPr lvl="0" indent="0" marL="0">
-                        <a:buNone/>
-                      </a:pPr>
-                      <a:r>
-                        <a:rPr/>
-                        <a:t>3</a:t>
-                      </a:r>
-                    </a:p>
-                  </a:txBody>
-                </a:tc>
-                <a:tc>
-                  <a:txBody>
-                    <a:bodyPr/>
-                    <a:lstStyle/>
-                    <a:p>
-                      <a:pPr lvl="0" indent="0" marL="0">
-                        <a:buNone/>
-                      </a:pPr>
-                      <a:r>
-                        <a:rPr/>
-                        <a:t>129.651479</a:t>
-                      </a:r>
-                    </a:p>
-                  </a:txBody>
-                </a:tc>
-                <a:tc>
-                  <a:txBody>
-                    <a:bodyPr/>
-                    <a:lstStyle/>
-                    <a:p>
-                      <a:pPr lvl="0" indent="0" marL="0">
-                        <a:buNone/>
-                      </a:pPr>
-                      <a:r>
-                        <a:rPr/>
-                        <a:t>36.646493</a:t>
-                      </a:r>
-                    </a:p>
-                  </a:txBody>
-                </a:tc>
-                <a:tc>
-                  <a:txBody>
-                    <a:bodyPr/>
-                    <a:lstStyle/>
-                    <a:p>
-                      <a:pPr lvl="0" indent="0" marL="0">
-                        <a:buNone/>
-                      </a:pPr>
-                      <a:r>
-                        <a:rPr/>
-                        <a:t>0.123724</a:t>
-                      </a:r>
-                    </a:p>
-                  </a:txBody>
-                </a:tc>
-              </a:tr>
-              <a:tr h="0">
-                <a:tc>
-                  <a:txBody>
-                    <a:bodyPr/>
-                    <a:lstStyle/>
-                    <a:p>
-                      <a:pPr lvl="0" indent="0" marL="0">
-                        <a:buNone/>
-                      </a:pPr>
-                      <a:r>
-                        <a:rPr/>
-                        <a:t>2</a:t>
-                      </a:r>
-                    </a:p>
-                  </a:txBody>
-                </a:tc>
-                <a:tc>
-                  <a:txBody>
-                    <a:bodyPr/>
-                    <a:lstStyle/>
-                    <a:p>
-                      <a:pPr lvl="0" indent="0" marL="0">
-                        <a:buNone/>
-                      </a:pPr>
-                      <a:r>
-                        <a:rPr/>
-                        <a:t>balsam fir</a:t>
-                      </a:r>
-                    </a:p>
-                  </a:txBody>
-                </a:tc>
-                <a:tc>
-                  <a:txBody>
-                    <a:bodyPr/>
-                    <a:lstStyle/>
-                    <a:p>
-                      <a:pPr lvl="0" indent="0" marL="0">
-                        <a:buNone/>
-                      </a:pPr>
-                      <a:r>
-                        <a:rPr/>
-                        <a:t>4</a:t>
-                      </a:r>
-                    </a:p>
-                  </a:txBody>
-                </a:tc>
-                <a:tc>
-                  <a:txBody>
-                    <a:bodyPr/>
-                    <a:lstStyle/>
-                    <a:p>
-                      <a:pPr lvl="0" indent="0" marL="0">
-                        <a:buNone/>
-                      </a:pPr>
-                      <a:r>
-                        <a:rPr/>
-                        <a:t>134.599829</a:t>
-                      </a:r>
-                    </a:p>
-                  </a:txBody>
-                </a:tc>
-                <a:tc>
-                  <a:txBody>
-                    <a:bodyPr/>
-                    <a:lstStyle/>
-                    <a:p>
-                      <a:pPr lvl="0" indent="0" marL="0">
-                        <a:buNone/>
-                      </a:pPr>
-                      <a:r>
-                        <a:rPr/>
-                        <a:t>38.884870</a:t>
-                      </a:r>
-                    </a:p>
-                  </a:txBody>
-                </a:tc>
-                <a:tc>
-                  <a:txBody>
-                    <a:bodyPr/>
-                    <a:lstStyle/>
-                    <a:p>
-                      <a:pPr lvl="0" indent="0" marL="0">
-                        <a:buNone/>
-                      </a:pPr>
-                      <a:r>
-                        <a:rPr/>
-                        <a:t>0.133858</a:t>
-                      </a:r>
-                    </a:p>
-                  </a:txBody>
-                </a:tc>
-              </a:tr>
-              <a:tr h="0">
-                <a:tc>
-                  <a:txBody>
-                    <a:bodyPr/>
-                    <a:lstStyle/>
-                    <a:p>
-                      <a:pPr lvl="0" indent="0" marL="0">
-                        <a:buNone/>
-                      </a:pPr>
-                      <a:r>
-                        <a:rPr/>
-                        <a:t>3</a:t>
-                      </a:r>
-                    </a:p>
-                  </a:txBody>
-                </a:tc>
-                <a:tc>
-                  <a:txBody>
-                    <a:bodyPr/>
-                    <a:lstStyle/>
-                    <a:p>
-                      <a:pPr lvl="0" indent="0" marL="0">
-                        <a:buNone/>
-                      </a:pPr>
-                      <a:r>
-                        <a:rPr/>
-                        <a:t>balsam fir</a:t>
-                      </a:r>
-                    </a:p>
-                  </a:txBody>
-                </a:tc>
-                <a:tc>
-                  <a:txBody>
-                    <a:bodyPr/>
-                    <a:lstStyle/>
-                    <a:p>
-                      <a:pPr lvl="0" indent="0" marL="0">
-                        <a:buNone/>
-                      </a:pPr>
-                      <a:r>
-                        <a:rPr/>
-                        <a:t>5</a:t>
-                      </a:r>
-                    </a:p>
-                  </a:txBody>
-                </a:tc>
-                <a:tc>
-                  <a:txBody>
-                    <a:bodyPr/>
-                    <a:lstStyle/>
-                    <a:p>
-                      <a:pPr lvl="0" indent="0" marL="0">
-                        <a:buNone/>
-                      </a:pPr>
-                      <a:r>
-                        <a:rPr/>
-                        <a:t>145.003601</a:t>
-                      </a:r>
-                    </a:p>
-                  </a:txBody>
-                </a:tc>
-                <a:tc>
-                  <a:txBody>
-                    <a:bodyPr/>
-                    <a:lstStyle/>
-                    <a:p>
-                      <a:pPr lvl="0" indent="0" marL="0">
-                        <a:buNone/>
-                      </a:pPr>
-                      <a:r>
-                        <a:rPr/>
-                        <a:t>41.209530</a:t>
-                      </a:r>
-                    </a:p>
-                  </a:txBody>
-                </a:tc>
-                <a:tc>
-                  <a:txBody>
-                    <a:bodyPr/>
-                    <a:lstStyle/>
-                    <a:p>
-                      <a:pPr lvl="0" indent="0" marL="0">
-                        <a:buNone/>
-                      </a:pPr>
-                      <a:r>
-                        <a:rPr/>
-                        <a:t>0.144063</a:t>
-                      </a:r>
-                    </a:p>
-                  </a:txBody>
-                </a:tc>
-              </a:tr>
-              <a:tr h="0">
-                <a:tc>
-                  <a:txBody>
-                    <a:bodyPr/>
-                    <a:lstStyle/>
-                    <a:p>
-                      <a:pPr lvl="0" indent="0" marL="0">
-                        <a:buNone/>
-                      </a:pPr>
-                      <a:r>
-                        <a:rPr/>
-                        <a:t>4</a:t>
-                      </a:r>
-                    </a:p>
-                  </a:txBody>
-                </a:tc>
-                <a:tc>
-                  <a:txBody>
-                    <a:bodyPr/>
-                    <a:lstStyle/>
-                    <a:p>
-                      <a:pPr lvl="0" indent="0" marL="0">
-                        <a:buNone/>
-                      </a:pPr>
-                      <a:r>
-                        <a:rPr/>
-                        <a:t>balsam fir</a:t>
-                      </a:r>
-                    </a:p>
-                  </a:txBody>
-                </a:tc>
-                <a:tc>
-                  <a:txBody>
-                    <a:bodyPr/>
-                    <a:lstStyle/>
-                    <a:p>
-                      <a:pPr lvl="0" indent="0" marL="0">
-                        <a:buNone/>
-                      </a:pPr>
-                      <a:r>
-                        <a:rPr/>
-                        <a:t>6</a:t>
-                      </a:r>
-                    </a:p>
-                  </a:txBody>
-                </a:tc>
-                <a:tc>
-                  <a:txBody>
-                    <a:bodyPr/>
-                    <a:lstStyle/>
-                    <a:p>
-                      <a:pPr lvl="0" indent="0" marL="0">
-                        <a:buNone/>
-                      </a:pPr>
-                      <a:r>
-                        <a:rPr/>
-                        <a:t>147.451321</a:t>
-                      </a:r>
-                    </a:p>
-                  </a:txBody>
-                </a:tc>
-                <a:tc>
-                  <a:txBody>
-                    <a:bodyPr/>
-                    <a:lstStyle/>
-                    <a:p>
-                      <a:pPr lvl="0" indent="0" marL="0">
-                        <a:buNone/>
-                      </a:pPr>
-                      <a:r>
-                        <a:rPr/>
-                        <a:t>40.791681</a:t>
-                      </a:r>
-                    </a:p>
-                  </a:txBody>
-                </a:tc>
-                <a:tc>
-                  <a:txBody>
-                    <a:bodyPr/>
-                    <a:lstStyle/>
-                    <a:p>
-                      <a:pPr lvl="0" indent="0" marL="0">
-                        <a:buNone/>
-                      </a:pPr>
-                      <a:r>
-                        <a:rPr/>
-                        <a:t>0.142862</a:t>
-                      </a:r>
-                    </a:p>
-                  </a:txBody>
-                </a:tc>
-              </a:tr>
-              <a:tr h="0">
-                <a:tc>
-                  <a:txBody>
-                    <a:bodyPr/>
-                    <a:lstStyle/>
-                    <a:p>
-                      <a:pPr lvl="0" indent="0" marL="0">
-                        <a:buNone/>
-                      </a:pPr>
-                      <a:r>
-                        <a:rPr/>
-                        <a:t>...</a:t>
-                      </a:r>
-                    </a:p>
-                  </a:txBody>
-                </a:tc>
-                <a:tc>
-                  <a:txBody>
-                    <a:bodyPr/>
-                    <a:lstStyle/>
-                    <a:p>
-                      <a:pPr lvl="0" indent="0" marL="0">
-                        <a:buNone/>
-                      </a:pPr>
-                      <a:r>
-                        <a:rPr/>
-                        <a:t>...</a:t>
-                      </a:r>
-                    </a:p>
-                  </a:txBody>
-                </a:tc>
-                <a:tc>
-                  <a:txBody>
-                    <a:bodyPr/>
-                    <a:lstStyle/>
-                    <a:p>
-                      <a:pPr lvl="0" indent="0" marL="0">
-                        <a:buNone/>
-                      </a:pPr>
-                      <a:r>
-                        <a:rPr/>
-                        <a:t>...</a:t>
-                      </a:r>
-                    </a:p>
-                  </a:txBody>
-                </a:tc>
-                <a:tc>
-                  <a:txBody>
-                    <a:bodyPr/>
-                    <a:lstStyle/>
-                    <a:p>
-                      <a:pPr lvl="0" indent="0" marL="0">
-                        <a:buNone/>
-                      </a:pPr>
-                      <a:r>
-                        <a:rPr/>
-                        <a:t>...</a:t>
-                      </a:r>
-                    </a:p>
-                  </a:txBody>
-                </a:tc>
-                <a:tc>
-                  <a:txBody>
-                    <a:bodyPr/>
-                    <a:lstStyle/>
-                    <a:p>
-                      <a:pPr lvl="0" indent="0" marL="0">
-                        <a:buNone/>
-                      </a:pPr>
-                      <a:r>
-                        <a:rPr/>
-                        <a:t>...</a:t>
-                      </a:r>
-                    </a:p>
-                  </a:txBody>
-                </a:tc>
-                <a:tc>
-                  <a:txBody>
-                    <a:bodyPr/>
-                    <a:lstStyle/>
-                    <a:p>
-                      <a:pPr lvl="0" indent="0" marL="0">
-                        <a:buNone/>
-                      </a:pPr>
-                      <a:r>
-                        <a:rPr/>
-                        <a:t>...</a:t>
-                      </a:r>
-                    </a:p>
-                  </a:txBody>
-                </a:tc>
-              </a:tr>
-              <a:tr h="0">
-                <a:tc>
-                  <a:txBody>
-                    <a:bodyPr/>
-                    <a:lstStyle/>
-                    <a:p>
-                      <a:pPr lvl="0" indent="0" marL="0">
-                        <a:buNone/>
-                      </a:pPr>
-                      <a:r>
-                        <a:rPr/>
-                        <a:t>895</a:t>
-                      </a:r>
-                    </a:p>
-                  </a:txBody>
-                </a:tc>
-                <a:tc>
-                  <a:txBody>
-                    <a:bodyPr/>
-                    <a:lstStyle/>
-                    <a:p>
-                      <a:pPr lvl="0" indent="0" marL="0">
-                        <a:buNone/>
-                      </a:pPr>
-                      <a:r>
-                        <a:rPr/>
-                        <a:t>sugarberry</a:t>
-                      </a:r>
-                    </a:p>
-                  </a:txBody>
-                </a:tc>
-                <a:tc>
-                  <a:txBody>
-                    <a:bodyPr/>
-                    <a:lstStyle/>
-                    <a:p>
-                      <a:pPr lvl="0" indent="0" marL="0">
-                        <a:buNone/>
-                      </a:pPr>
-                      <a:r>
-                        <a:rPr/>
-                        <a:t>6</a:t>
-                      </a:r>
-                    </a:p>
-                  </a:txBody>
-                </a:tc>
-                <a:tc>
-                  <a:txBody>
-                    <a:bodyPr/>
-                    <a:lstStyle/>
-                    <a:p>
-                      <a:pPr lvl="0" indent="0" marL="0">
-                        <a:buNone/>
-                      </a:pPr>
-                      <a:r>
-                        <a:rPr/>
-                        <a:t>32.431052</a:t>
-                      </a:r>
-                    </a:p>
-                  </a:txBody>
-                </a:tc>
-                <a:tc>
-                  <a:txBody>
-                    <a:bodyPr/>
-                    <a:lstStyle/>
-                    <a:p>
-                      <a:pPr lvl="0" indent="0" marL="0">
-                        <a:buNone/>
-                      </a:pPr>
-                      <a:r>
-                        <a:rPr/>
-                        <a:t>20.969306</a:t>
-                      </a:r>
-                    </a:p>
-                  </a:txBody>
-                </a:tc>
-                <a:tc>
-                  <a:txBody>
-                    <a:bodyPr/>
-                    <a:lstStyle/>
-                    <a:p>
-                      <a:pPr lvl="0" indent="0" marL="0">
-                        <a:buNone/>
-                      </a:pPr>
-                      <a:r>
-                        <a:rPr/>
-                        <a:t>0.565727</a:t>
-                      </a:r>
-                    </a:p>
-                  </a:txBody>
-                </a:tc>
-              </a:tr>
-              <a:tr h="0">
-                <a:tc>
-                  <a:txBody>
-                    <a:bodyPr/>
-                    <a:lstStyle/>
-                    <a:p>
-                      <a:pPr lvl="0" indent="0" marL="0">
-                        <a:buNone/>
-                      </a:pPr>
-                      <a:r>
-                        <a:rPr/>
-                        <a:t>896</a:t>
-                      </a:r>
-                    </a:p>
-                  </a:txBody>
-                </a:tc>
-                <a:tc>
-                  <a:txBody>
-                    <a:bodyPr/>
-                    <a:lstStyle/>
-                    <a:p>
-                      <a:pPr lvl="0" indent="0" marL="0">
-                        <a:buNone/>
-                      </a:pPr>
-                      <a:r>
-                        <a:rPr/>
-                        <a:t>sugarberry</a:t>
-                      </a:r>
-                    </a:p>
-                  </a:txBody>
-                </a:tc>
-                <a:tc>
-                  <a:txBody>
-                    <a:bodyPr/>
-                    <a:lstStyle/>
-                    <a:p>
-                      <a:pPr lvl="0" indent="0" marL="0">
-                        <a:buNone/>
-                      </a:pPr>
-                      <a:r>
-                        <a:rPr/>
-                        <a:t>7</a:t>
-                      </a:r>
-                    </a:p>
-                  </a:txBody>
-                </a:tc>
-                <a:tc>
-                  <a:txBody>
-                    <a:bodyPr/>
-                    <a:lstStyle/>
-                    <a:p>
-                      <a:pPr lvl="0" indent="0" marL="0">
-                        <a:buNone/>
-                      </a:pPr>
-                      <a:r>
-                        <a:rPr/>
-                        <a:t>37.324259</a:t>
-                      </a:r>
-                    </a:p>
-                  </a:txBody>
-                </a:tc>
-                <a:tc>
-                  <a:txBody>
-                    <a:bodyPr/>
-                    <a:lstStyle/>
-                    <a:p>
-                      <a:pPr lvl="0" indent="0" marL="0">
-                        <a:buNone/>
-                      </a:pPr>
-                      <a:r>
-                        <a:rPr/>
-                        <a:t>25.037024</a:t>
-                      </a:r>
-                    </a:p>
-                  </a:txBody>
-                </a:tc>
-                <a:tc>
-                  <a:txBody>
-                    <a:bodyPr/>
-                    <a:lstStyle/>
-                    <a:p>
-                      <a:pPr lvl="0" indent="0" marL="0">
-                        <a:buNone/>
-                      </a:pPr>
-                      <a:r>
-                        <a:rPr/>
-                        <a:t>0.637629</a:t>
-                      </a:r>
-                    </a:p>
-                  </a:txBody>
-                </a:tc>
-              </a:tr>
-              <a:tr h="0">
-                <a:tc>
-                  <a:txBody>
-                    <a:bodyPr/>
-                    <a:lstStyle/>
-                    <a:p>
-                      <a:pPr lvl="0" indent="0" marL="0">
-                        <a:buNone/>
-                      </a:pPr>
-                      <a:r>
-                        <a:rPr/>
-                        <a:t>897</a:t>
-                      </a:r>
-                    </a:p>
-                  </a:txBody>
-                </a:tc>
-                <a:tc>
-                  <a:txBody>
-                    <a:bodyPr/>
-                    <a:lstStyle/>
-                    <a:p>
-                      <a:pPr lvl="0" indent="0" marL="0">
-                        <a:buNone/>
-                      </a:pPr>
-                      <a:r>
-                        <a:rPr/>
-                        <a:t>sugarberry</a:t>
-                      </a:r>
-                    </a:p>
-                  </a:txBody>
-                </a:tc>
-                <a:tc>
-                  <a:txBody>
-                    <a:bodyPr/>
-                    <a:lstStyle/>
-                    <a:p>
-                      <a:pPr lvl="0" indent="0" marL="0">
-                        <a:buNone/>
-                      </a:pPr>
-                      <a:r>
-                        <a:rPr/>
-                        <a:t>8</a:t>
-                      </a:r>
-                    </a:p>
-                  </a:txBody>
-                </a:tc>
-                <a:tc>
-                  <a:txBody>
-                    <a:bodyPr/>
-                    <a:lstStyle/>
-                    <a:p>
-                      <a:pPr lvl="0" indent="0" marL="0">
-                        <a:buNone/>
-                      </a:pPr>
-                      <a:r>
-                        <a:rPr/>
-                        <a:t>38.144756</a:t>
-                      </a:r>
-                    </a:p>
-                  </a:txBody>
-                </a:tc>
-                <a:tc>
-                  <a:txBody>
-                    <a:bodyPr/>
-                    <a:lstStyle/>
-                    <a:p>
-                      <a:pPr lvl="0" indent="0" marL="0">
-                        <a:buNone/>
-                      </a:pPr>
-                      <a:r>
-                        <a:rPr/>
-                        <a:t>26.680208</a:t>
-                      </a:r>
-                    </a:p>
-                  </a:txBody>
-                </a:tc>
-                <a:tc>
-                  <a:txBody>
-                    <a:bodyPr/>
-                    <a:lstStyle/>
-                    <a:p>
-                      <a:pPr lvl="0" indent="0" marL="0">
-                        <a:buNone/>
-                      </a:pPr>
-                      <a:r>
-                        <a:rPr/>
-                        <a:t>0.665159</a:t>
-                      </a:r>
-                    </a:p>
-                  </a:txBody>
-                </a:tc>
-              </a:tr>
-              <a:tr h="0">
-                <a:tc>
-                  <a:txBody>
-                    <a:bodyPr/>
-                    <a:lstStyle/>
-                    <a:p>
-                      <a:pPr lvl="0" indent="0" marL="0">
-                        <a:buNone/>
-                      </a:pPr>
-                      <a:r>
-                        <a:rPr/>
-                        <a:t>898</a:t>
-                      </a:r>
-                    </a:p>
-                  </a:txBody>
-                </a:tc>
-                <a:tc>
-                  <a:txBody>
-                    <a:bodyPr/>
-                    <a:lstStyle/>
-                    <a:p>
-                      <a:pPr lvl="0" indent="0" marL="0">
-                        <a:buNone/>
-                      </a:pPr>
-                      <a:r>
-                        <a:rPr/>
-                        <a:t>sugarberry</a:t>
-                      </a:r>
-                    </a:p>
-                  </a:txBody>
-                </a:tc>
-                <a:tc>
-                  <a:txBody>
-                    <a:bodyPr/>
-                    <a:lstStyle/>
-                    <a:p>
-                      <a:pPr lvl="0" indent="0" marL="0">
-                        <a:buNone/>
-                      </a:pPr>
-                      <a:r>
-                        <a:rPr/>
-                        <a:t>9</a:t>
-                      </a:r>
-                    </a:p>
-                  </a:txBody>
-                </a:tc>
-                <a:tc>
-                  <a:txBody>
-                    <a:bodyPr/>
-                    <a:lstStyle/>
-                    <a:p>
-                      <a:pPr lvl="0" indent="0" marL="0">
-                        <a:buNone/>
-                      </a:pPr>
-                      <a:r>
-                        <a:rPr/>
-                        <a:t>36.853245</a:t>
-                      </a:r>
-                    </a:p>
-                  </a:txBody>
-                </a:tc>
-                <a:tc>
-                  <a:txBody>
-                    <a:bodyPr/>
-                    <a:lstStyle/>
-                    <a:p>
-                      <a:pPr lvl="0" indent="0" marL="0">
-                        <a:buNone/>
-                      </a:pPr>
-                      <a:r>
-                        <a:rPr/>
-                        <a:t>21.021667</a:t>
-                      </a:r>
-                    </a:p>
-                  </a:txBody>
-                </a:tc>
-                <a:tc>
-                  <a:txBody>
-                    <a:bodyPr/>
-                    <a:lstStyle/>
-                    <a:p>
-                      <a:pPr lvl="0" indent="0" marL="0">
-                        <a:buNone/>
-                      </a:pPr>
-                      <a:r>
-                        <a:rPr/>
-                        <a:t>0.685162</a:t>
-                      </a:r>
-                    </a:p>
-                  </a:txBody>
-                </a:tc>
-              </a:tr>
-              <a:tr h="0">
-                <a:tc>
-                  <a:txBody>
-                    <a:bodyPr/>
-                    <a:lstStyle/>
-                    <a:p>
-                      <a:pPr lvl="0" indent="0" marL="0">
-                        <a:buNone/>
-                      </a:pPr>
-                      <a:r>
-                        <a:rPr/>
-                        <a:t>899</a:t>
-                      </a:r>
-                    </a:p>
-                  </a:txBody>
-                </a:tc>
-                <a:tc>
-                  <a:txBody>
-                    <a:bodyPr/>
-                    <a:lstStyle/>
-                    <a:p>
-                      <a:pPr lvl="0" indent="0" marL="0">
-                        <a:buNone/>
-                      </a:pPr>
-                      <a:r>
-                        <a:rPr/>
-                        <a:t>sugarberry</a:t>
-                      </a:r>
-                    </a:p>
-                  </a:txBody>
-                </a:tc>
-                <a:tc>
-                  <a:txBody>
-                    <a:bodyPr/>
-                    <a:lstStyle/>
-                    <a:p>
-                      <a:pPr lvl="0" indent="0" marL="0">
-                        <a:buNone/>
-                      </a:pPr>
-                      <a:r>
-                        <a:rPr/>
-                        <a:t>10</a:t>
-                      </a:r>
-                    </a:p>
-                  </a:txBody>
-                </a:tc>
-                <a:tc>
-                  <a:txBody>
-                    <a:bodyPr/>
-                    <a:lstStyle/>
-                    <a:p>
-                      <a:pPr lvl="0" indent="0" marL="0">
-                        <a:buNone/>
-                      </a:pPr>
-                      <a:r>
-                        <a:rPr/>
-                        <a:t>40.091106</a:t>
-                      </a:r>
-                    </a:p>
-                  </a:txBody>
-                </a:tc>
-                <a:tc>
-                  <a:txBody>
-                    <a:bodyPr/>
-                    <a:lstStyle/>
-                    <a:p>
-                      <a:pPr lvl="0" indent="0" marL="0">
-                        <a:buNone/>
-                      </a:pPr>
-                      <a:r>
-                        <a:rPr/>
-                        <a:t>23.172083</a:t>
-                      </a:r>
-                    </a:p>
-                  </a:txBody>
-                </a:tc>
-                <a:tc>
-                  <a:txBody>
-                    <a:bodyPr/>
-                    <a:lstStyle/>
-                    <a:p>
-                      <a:pPr lvl="0" indent="0" marL="0">
-                        <a:buNone/>
-                      </a:pPr>
-                      <a:r>
-                        <a:rPr/>
-                        <a:t>0.677519</a:t>
-                      </a:r>
-                    </a:p>
-                  </a:txBody>
-                </a:tc>
-              </a:tr>
-            </a:tbl>
-          </a:graphicData>
-        </a:graphic>
-      </p:graphicFrame>
+        </p:nvSpPr>
+        <p:spPr/>
+        <p:txBody>
+          <a:bodyPr/>
+          <a:lstStyle/>
+          <a:p>
+            <a:pPr lvl="0" indent="0">
+              <a:buNone/>
+            </a:pPr>
+            <a:r>
+              <a:rPr>
+                <a:latin typeface="Courier"/>
+              </a:rPr>
+              <a:t>    k  Avg_RMSLE
+0   2   0.152872
+1   3   0.158059
+2   4   0.162102
+3   5   0.167931
+4   6   0.174191
+5   7   0.180289
+6   8   0.185042
+7   9   0.190129
+8  10   0.196823</a:t>
+            </a:r>
+          </a:p>
+        </p:txBody>
+      </p:sp>
     </p:spTree>
   </p:cSld>
 </p:sld>
@@ -4910,14 +4741,14 @@
             <a:pPr lvl="0"/>
             <a:r>
               <a:rPr/>
-              <a:t>Feature engineering (what worked and what didn’t)</a:t>
+              <a:t>Tuning k for the best model</a:t>
             </a:r>
           </a:p>
           <a:p>
             <a:pPr lvl="0"/>
             <a:r>
               <a:rPr/>
-              <a:t>Tuning k for the best model</a:t>
+              <a:t>Feature engineering (what worked and what didn’t)</a:t>
             </a:r>
           </a:p>
           <a:p>
@@ -5459,6 +5290,468 @@
                       <a:r>
                         <a:rPr/>
                         <a:t>113.92</a:t>
+                      </a:r>
+                    </a:p>
+                  </a:txBody>
+                </a:tc>
+              </a:tr>
+              <a:tr h="0">
+                <a:tc>
+                  <a:txBody>
+                    <a:bodyPr/>
+                    <a:lstStyle/>
+                    <a:p>
+                      <a:pPr lvl="0" indent="0" marL="0">
+                        <a:buNone/>
+                      </a:pPr>
+                      <a:r>
+                        <a:rPr/>
+                        <a:t>...</a:t>
+                      </a:r>
+                    </a:p>
+                  </a:txBody>
+                </a:tc>
+                <a:tc>
+                  <a:txBody>
+                    <a:bodyPr/>
+                    <a:lstStyle/>
+                    <a:p>
+                      <a:pPr lvl="0" indent="0" marL="0">
+                        <a:buNone/>
+                      </a:pPr>
+                      <a:r>
+                        <a:rPr/>
+                        <a:t>...</a:t>
+                      </a:r>
+                    </a:p>
+                  </a:txBody>
+                </a:tc>
+                <a:tc>
+                  <a:txBody>
+                    <a:bodyPr/>
+                    <a:lstStyle/>
+                    <a:p>
+                      <a:pPr lvl="0" indent="0" marL="0">
+                        <a:buNone/>
+                      </a:pPr>
+                      <a:r>
+                        <a:rPr/>
+                        <a:t>...</a:t>
+                      </a:r>
+                    </a:p>
+                  </a:txBody>
+                </a:tc>
+                <a:tc>
+                  <a:txBody>
+                    <a:bodyPr/>
+                    <a:lstStyle/>
+                    <a:p>
+                      <a:pPr lvl="0" indent="0" marL="0">
+                        <a:buNone/>
+                      </a:pPr>
+                      <a:r>
+                        <a:rPr/>
+                        <a:t>...</a:t>
+                      </a:r>
+                    </a:p>
+                  </a:txBody>
+                </a:tc>
+                <a:tc>
+                  <a:txBody>
+                    <a:bodyPr/>
+                    <a:lstStyle/>
+                    <a:p>
+                      <a:pPr lvl="0" indent="0" marL="0">
+                        <a:buNone/>
+                      </a:pPr>
+                      <a:r>
+                        <a:rPr/>
+                        <a:t>...</a:t>
+                      </a:r>
+                    </a:p>
+                  </a:txBody>
+                </a:tc>
+              </a:tr>
+              <a:tr h="0">
+                <a:tc>
+                  <a:txBody>
+                    <a:bodyPr/>
+                    <a:lstStyle/>
+                    <a:p>
+                      <a:pPr lvl="0" indent="0" marL="0">
+                        <a:buNone/>
+                      </a:pPr>
+                      <a:r>
+                        <a:rPr/>
+                        <a:t>137074</a:t>
+                      </a:r>
+                    </a:p>
+                  </a:txBody>
+                </a:tc>
+                <a:tc>
+                  <a:txBody>
+                    <a:bodyPr/>
+                    <a:lstStyle/>
+                    <a:p>
+                      <a:pPr lvl="0" indent="0" marL="0">
+                        <a:buNone/>
+                      </a:pPr>
+                      <a:r>
+                        <a:rPr/>
+                        <a:t>922</a:t>
+                      </a:r>
+                    </a:p>
+                  </a:txBody>
+                </a:tc>
+                <a:tc>
+                  <a:txBody>
+                    <a:bodyPr/>
+                    <a:lstStyle/>
+                    <a:p>
+                      <a:pPr lvl="0" indent="0" marL="0">
+                        <a:buNone/>
+                      </a:pPr>
+                      <a:r>
+                        <a:rPr/>
+                        <a:t>2.5</a:t>
+                      </a:r>
+                    </a:p>
+                  </a:txBody>
+                </a:tc>
+                <a:tc>
+                  <a:txBody>
+                    <a:bodyPr/>
+                    <a:lstStyle/>
+                    <a:p>
+                      <a:pPr lvl="0" indent="0" marL="0">
+                        <a:buNone/>
+                      </a:pPr>
+                      <a:r>
+                        <a:rPr/>
+                        <a:t>24.8</a:t>
+                      </a:r>
+                    </a:p>
+                  </a:txBody>
+                </a:tc>
+                <a:tc>
+                  <a:txBody>
+                    <a:bodyPr/>
+                    <a:lstStyle/>
+                    <a:p>
+                      <a:pPr lvl="0" indent="0" marL="0">
+                        <a:buNone/>
+                      </a:pPr>
+                      <a:r>
+                        <a:rPr/>
+                        <a:t>15.98</a:t>
+                      </a:r>
+                    </a:p>
+                  </a:txBody>
+                </a:tc>
+              </a:tr>
+              <a:tr h="0">
+                <a:tc>
+                  <a:txBody>
+                    <a:bodyPr/>
+                    <a:lstStyle/>
+                    <a:p>
+                      <a:pPr lvl="0" indent="0" marL="0">
+                        <a:buNone/>
+                      </a:pPr>
+                      <a:r>
+                        <a:rPr/>
+                        <a:t>137075</a:t>
+                      </a:r>
+                    </a:p>
+                  </a:txBody>
+                </a:tc>
+                <a:tc>
+                  <a:txBody>
+                    <a:bodyPr/>
+                    <a:lstStyle/>
+                    <a:p>
+                      <a:pPr lvl="0" indent="0" marL="0">
+                        <a:buNone/>
+                      </a:pPr>
+                      <a:r>
+                        <a:rPr/>
+                        <a:t>922</a:t>
+                      </a:r>
+                    </a:p>
+                  </a:txBody>
+                </a:tc>
+                <a:tc>
+                  <a:txBody>
+                    <a:bodyPr/>
+                    <a:lstStyle/>
+                    <a:p>
+                      <a:pPr lvl="0" indent="0" marL="0">
+                        <a:buNone/>
+                      </a:pPr>
+                      <a:r>
+                        <a:rPr/>
+                        <a:t>3.7</a:t>
+                      </a:r>
+                    </a:p>
+                  </a:txBody>
+                </a:tc>
+                <a:tc>
+                  <a:txBody>
+                    <a:bodyPr/>
+                    <a:lstStyle/>
+                    <a:p>
+                      <a:pPr lvl="0" indent="0" marL="0">
+                        <a:buNone/>
+                      </a:pPr>
+                      <a:r>
+                        <a:rPr/>
+                        <a:t>23.7</a:t>
+                      </a:r>
+                    </a:p>
+                  </a:txBody>
+                </a:tc>
+                <a:tc>
+                  <a:txBody>
+                    <a:bodyPr/>
+                    <a:lstStyle/>
+                    <a:p>
+                      <a:pPr lvl="0" indent="0" marL="0">
+                        <a:buNone/>
+                      </a:pPr>
+                      <a:r>
+                        <a:rPr/>
+                        <a:t>40.62</a:t>
+                      </a:r>
+                    </a:p>
+                  </a:txBody>
+                </a:tc>
+              </a:tr>
+              <a:tr h="0">
+                <a:tc>
+                  <a:txBody>
+                    <a:bodyPr/>
+                    <a:lstStyle/>
+                    <a:p>
+                      <a:pPr lvl="0" indent="0" marL="0">
+                        <a:buNone/>
+                      </a:pPr>
+                      <a:r>
+                        <a:rPr/>
+                        <a:t>137076</a:t>
+                      </a:r>
+                    </a:p>
+                  </a:txBody>
+                </a:tc>
+                <a:tc>
+                  <a:txBody>
+                    <a:bodyPr/>
+                    <a:lstStyle/>
+                    <a:p>
+                      <a:pPr lvl="0" indent="0" marL="0">
+                        <a:buNone/>
+                      </a:pPr>
+                      <a:r>
+                        <a:rPr/>
+                        <a:t>922</a:t>
+                      </a:r>
+                    </a:p>
+                  </a:txBody>
+                </a:tc>
+                <a:tc>
+                  <a:txBody>
+                    <a:bodyPr/>
+                    <a:lstStyle/>
+                    <a:p>
+                      <a:pPr lvl="0" indent="0" marL="0">
+                        <a:buNone/>
+                      </a:pPr>
+                      <a:r>
+                        <a:rPr/>
+                        <a:t>2.9</a:t>
+                      </a:r>
+                    </a:p>
+                  </a:txBody>
+                </a:tc>
+                <a:tc>
+                  <a:txBody>
+                    <a:bodyPr/>
+                    <a:lstStyle/>
+                    <a:p>
+                      <a:pPr lvl="0" indent="0" marL="0">
+                        <a:buNone/>
+                      </a:pPr>
+                      <a:r>
+                        <a:rPr/>
+                        <a:t>30.9</a:t>
+                      </a:r>
+                    </a:p>
+                  </a:txBody>
+                </a:tc>
+                <a:tc>
+                  <a:txBody>
+                    <a:bodyPr/>
+                    <a:lstStyle/>
+                    <a:p>
+                      <a:pPr lvl="0" indent="0" marL="0">
+                        <a:buNone/>
+                      </a:pPr>
+                      <a:r>
+                        <a:rPr/>
+                        <a:t>22.74</a:t>
+                      </a:r>
+                    </a:p>
+                  </a:txBody>
+                </a:tc>
+              </a:tr>
+              <a:tr h="0">
+                <a:tc>
+                  <a:txBody>
+                    <a:bodyPr/>
+                    <a:lstStyle/>
+                    <a:p>
+                      <a:pPr lvl="0" indent="0" marL="0">
+                        <a:buNone/>
+                      </a:pPr>
+                      <a:r>
+                        <a:rPr/>
+                        <a:t>137077</a:t>
+                      </a:r>
+                    </a:p>
+                  </a:txBody>
+                </a:tc>
+                <a:tc>
+                  <a:txBody>
+                    <a:bodyPr/>
+                    <a:lstStyle/>
+                    <a:p>
+                      <a:pPr lvl="0" indent="0" marL="0">
+                        <a:buNone/>
+                      </a:pPr>
+                      <a:r>
+                        <a:rPr/>
+                        <a:t>922</a:t>
+                      </a:r>
+                    </a:p>
+                  </a:txBody>
+                </a:tc>
+                <a:tc>
+                  <a:txBody>
+                    <a:bodyPr/>
+                    <a:lstStyle/>
+                    <a:p>
+                      <a:pPr lvl="0" indent="0" marL="0">
+                        <a:buNone/>
+                      </a:pPr>
+                      <a:r>
+                        <a:rPr/>
+                        <a:t>5.6</a:t>
+                      </a:r>
+                    </a:p>
+                  </a:txBody>
+                </a:tc>
+                <a:tc>
+                  <a:txBody>
+                    <a:bodyPr/>
+                    <a:lstStyle/>
+                    <a:p>
+                      <a:pPr lvl="0" indent="0" marL="0">
+                        <a:buNone/>
+                      </a:pPr>
+                      <a:r>
+                        <a:rPr/>
+                        <a:t>40.0</a:t>
+                      </a:r>
+                    </a:p>
+                  </a:txBody>
+                </a:tc>
+                <a:tc>
+                  <a:txBody>
+                    <a:bodyPr/>
+                    <a:lstStyle/>
+                    <a:p>
+                      <a:pPr lvl="0" indent="0" marL="0">
+                        <a:buNone/>
+                      </a:pPr>
+                      <a:r>
+                        <a:rPr/>
+                        <a:t>87.79</a:t>
+                      </a:r>
+                    </a:p>
+                  </a:txBody>
+                </a:tc>
+              </a:tr>
+              <a:tr h="0">
+                <a:tc>
+                  <a:txBody>
+                    <a:bodyPr/>
+                    <a:lstStyle/>
+                    <a:p>
+                      <a:pPr lvl="0" indent="0" marL="0">
+                        <a:buNone/>
+                      </a:pPr>
+                      <a:r>
+                        <a:rPr/>
+                        <a:t>137078</a:t>
+                      </a:r>
+                    </a:p>
+                  </a:txBody>
+                </a:tc>
+                <a:tc>
+                  <a:txBody>
+                    <a:bodyPr/>
+                    <a:lstStyle/>
+                    <a:p>
+                      <a:pPr lvl="0" indent="0" marL="0">
+                        <a:buNone/>
+                      </a:pPr>
+                      <a:r>
+                        <a:rPr/>
+                        <a:t>922</a:t>
+                      </a:r>
+                    </a:p>
+                  </a:txBody>
+                </a:tc>
+                <a:tc>
+                  <a:txBody>
+                    <a:bodyPr/>
+                    <a:lstStyle/>
+                    <a:p>
+                      <a:pPr lvl="0" indent="0" marL="0">
+                        <a:buNone/>
+                      </a:pPr>
+                      <a:r>
+                        <a:rPr/>
+                        <a:t>1.9</a:t>
+                      </a:r>
+                    </a:p>
+                  </a:txBody>
+                </a:tc>
+                <a:tc>
+                  <a:txBody>
+                    <a:bodyPr/>
+                    <a:lstStyle/>
+                    <a:p>
+                      <a:pPr lvl="0" indent="0" marL="0">
+                        <a:buNone/>
+                      </a:pPr>
+                      <a:r>
+                        <a:rPr/>
+                        <a:t>25.1</a:t>
+                      </a:r>
+                    </a:p>
+                  </a:txBody>
+                </a:tc>
+                <a:tc>
+                  <a:txBody>
+                    <a:bodyPr/>
+                    <a:lstStyle/>
+                    <a:p>
+                      <a:pPr lvl="0" indent="0" marL="0">
+                        <a:buNone/>
+                      </a:pPr>
+                      <a:r>
+                        <a:rPr/>
+                        <a:t>8.33</a:t>
                       </a:r>
                     </a:p>
                   </a:txBody>
@@ -5819,6 +6112,288 @@
                   </a:txBody>
                 </a:tc>
               </a:tr>
+              <a:tr h="0">
+                <a:tc>
+                  <a:txBody>
+                    <a:bodyPr/>
+                    <a:lstStyle/>
+                    <a:p>
+                      <a:pPr lvl="0" indent="0" marL="0">
+                        <a:buNone/>
+                      </a:pPr>
+                      <a:r>
+                        <a:rPr/>
+                        <a:t>...</a:t>
+                      </a:r>
+                    </a:p>
+                  </a:txBody>
+                </a:tc>
+                <a:tc>
+                  <a:txBody>
+                    <a:bodyPr/>
+                    <a:lstStyle/>
+                    <a:p>
+                      <a:pPr lvl="0" indent="0" marL="0">
+                        <a:buNone/>
+                      </a:pPr>
+                      <a:r>
+                        <a:rPr/>
+                        <a:t>...</a:t>
+                      </a:r>
+                    </a:p>
+                  </a:txBody>
+                </a:tc>
+                <a:tc>
+                  <a:txBody>
+                    <a:bodyPr/>
+                    <a:lstStyle/>
+                    <a:p>
+                      <a:pPr lvl="0" indent="0" marL="0">
+                        <a:buNone/>
+                      </a:pPr>
+                      <a:r>
+                        <a:rPr/>
+                        <a:t>...</a:t>
+                      </a:r>
+                    </a:p>
+                  </a:txBody>
+                </a:tc>
+              </a:tr>
+              <a:tr h="0">
+                <a:tc>
+                  <a:txBody>
+                    <a:bodyPr/>
+                    <a:lstStyle/>
+                    <a:p>
+                      <a:pPr lvl="0" indent="0" marL="0">
+                        <a:buNone/>
+                      </a:pPr>
+                      <a:r>
+                        <a:rPr/>
+                        <a:t>453</a:t>
+                      </a:r>
+                    </a:p>
+                  </a:txBody>
+                </a:tc>
+                <a:tc>
+                  <a:txBody>
+                    <a:bodyPr/>
+                    <a:lstStyle/>
+                    <a:p>
+                      <a:pPr lvl="0" indent="0" marL="0">
+                        <a:buNone/>
+                      </a:pPr>
+                      <a:r>
+                        <a:rPr/>
+                        <a:t>995</a:t>
+                      </a:r>
+                    </a:p>
+                  </a:txBody>
+                </a:tc>
+                <a:tc>
+                  <a:txBody>
+                    <a:bodyPr/>
+                    <a:lstStyle/>
+                    <a:p>
+                      <a:pPr lvl="0" indent="0" marL="0">
+                        <a:buNone/>
+                      </a:pPr>
+                      <a:r>
+                        <a:rPr/>
+                        <a:t>tungoil tree</a:t>
+                      </a:r>
+                    </a:p>
+                  </a:txBody>
+                </a:tc>
+              </a:tr>
+              <a:tr h="0">
+                <a:tc>
+                  <a:txBody>
+                    <a:bodyPr/>
+                    <a:lstStyle/>
+                    <a:p>
+                      <a:pPr lvl="0" indent="0" marL="0">
+                        <a:buNone/>
+                      </a:pPr>
+                      <a:r>
+                        <a:rPr/>
+                        <a:t>454</a:t>
+                      </a:r>
+                    </a:p>
+                  </a:txBody>
+                </a:tc>
+                <a:tc>
+                  <a:txBody>
+                    <a:bodyPr/>
+                    <a:lstStyle/>
+                    <a:p>
+                      <a:pPr lvl="0" indent="0" marL="0">
+                        <a:buNone/>
+                      </a:pPr>
+                      <a:r>
+                        <a:rPr/>
+                        <a:t>996</a:t>
+                      </a:r>
+                    </a:p>
+                  </a:txBody>
+                </a:tc>
+                <a:tc>
+                  <a:txBody>
+                    <a:bodyPr/>
+                    <a:lstStyle/>
+                    <a:p>
+                      <a:pPr lvl="0" indent="0" marL="0">
+                        <a:buNone/>
+                      </a:pPr>
+                      <a:r>
+                        <a:rPr/>
+                        <a:t>smoketree</a:t>
+                      </a:r>
+                    </a:p>
+                  </a:txBody>
+                </a:tc>
+              </a:tr>
+              <a:tr h="0">
+                <a:tc>
+                  <a:txBody>
+                    <a:bodyPr/>
+                    <a:lstStyle/>
+                    <a:p>
+                      <a:pPr lvl="0" indent="0" marL="0">
+                        <a:buNone/>
+                      </a:pPr>
+                      <a:r>
+                        <a:rPr/>
+                        <a:t>455</a:t>
+                      </a:r>
+                    </a:p>
+                  </a:txBody>
+                </a:tc>
+                <a:tc>
+                  <a:txBody>
+                    <a:bodyPr/>
+                    <a:lstStyle/>
+                    <a:p>
+                      <a:pPr lvl="0" indent="0" marL="0">
+                        <a:buNone/>
+                      </a:pPr>
+                      <a:r>
+                        <a:rPr/>
+                        <a:t>997</a:t>
+                      </a:r>
+                    </a:p>
+                  </a:txBody>
+                </a:tc>
+                <a:tc>
+                  <a:txBody>
+                    <a:bodyPr/>
+                    <a:lstStyle/>
+                    <a:p>
+                      <a:pPr lvl="0" indent="0" marL="0">
+                        <a:buNone/>
+                      </a:pPr>
+                      <a:r>
+                        <a:rPr/>
+                        <a:t>Russian-olive</a:t>
+                      </a:r>
+                    </a:p>
+                  </a:txBody>
+                </a:tc>
+              </a:tr>
+              <a:tr h="0">
+                <a:tc>
+                  <a:txBody>
+                    <a:bodyPr/>
+                    <a:lstStyle/>
+                    <a:p>
+                      <a:pPr lvl="0" indent="0" marL="0">
+                        <a:buNone/>
+                      </a:pPr>
+                      <a:r>
+                        <a:rPr/>
+                        <a:t>456</a:t>
+                      </a:r>
+                    </a:p>
+                  </a:txBody>
+                </a:tc>
+                <a:tc>
+                  <a:txBody>
+                    <a:bodyPr/>
+                    <a:lstStyle/>
+                    <a:p>
+                      <a:pPr lvl="0" indent="0" marL="0">
+                        <a:buNone/>
+                      </a:pPr>
+                      <a:r>
+                        <a:rPr/>
+                        <a:t>998</a:t>
+                      </a:r>
+                    </a:p>
+                  </a:txBody>
+                </a:tc>
+                <a:tc>
+                  <a:txBody>
+                    <a:bodyPr/>
+                    <a:lstStyle/>
+                    <a:p>
+                      <a:pPr lvl="0" indent="0" marL="0">
+                        <a:buNone/>
+                      </a:pPr>
+                      <a:r>
+                        <a:rPr/>
+                        <a:t>Unknown dead hardwood</a:t>
+                      </a:r>
+                    </a:p>
+                  </a:txBody>
+                </a:tc>
+              </a:tr>
+              <a:tr h="0">
+                <a:tc>
+                  <a:txBody>
+                    <a:bodyPr/>
+                    <a:lstStyle/>
+                    <a:p>
+                      <a:pPr lvl="0" indent="0" marL="0">
+                        <a:buNone/>
+                      </a:pPr>
+                      <a:r>
+                        <a:rPr/>
+                        <a:t>457</a:t>
+                      </a:r>
+                    </a:p>
+                  </a:txBody>
+                </a:tc>
+                <a:tc>
+                  <a:txBody>
+                    <a:bodyPr/>
+                    <a:lstStyle/>
+                    <a:p>
+                      <a:pPr lvl="0" indent="0" marL="0">
+                        <a:buNone/>
+                      </a:pPr>
+                      <a:r>
+                        <a:rPr/>
+                        <a:t>999</a:t>
+                      </a:r>
+                    </a:p>
+                  </a:txBody>
+                </a:tc>
+                <a:tc>
+                  <a:txBody>
+                    <a:bodyPr/>
+                    <a:lstStyle/>
+                    <a:p>
+                      <a:pPr lvl="0" indent="0" marL="0">
+                        <a:buNone/>
+                      </a:pPr>
+                      <a:r>
+                        <a:rPr/>
+                        <a:t>Other or unknown live tree</a:t>
+                      </a:r>
+                    </a:p>
+                  </a:txBody>
+                </a:tc>
+              </a:tr>
             </a:tbl>
           </a:graphicData>
         </a:graphic>
@@ -6445,6 +7020,558 @@
                       <a:r>
                         <a:rPr/>
                         <a:t>balsam fir</a:t>
+                      </a:r>
+                    </a:p>
+                  </a:txBody>
+                </a:tc>
+              </a:tr>
+              <a:tr h="0">
+                <a:tc>
+                  <a:txBody>
+                    <a:bodyPr/>
+                    <a:lstStyle/>
+                    <a:p>
+                      <a:pPr lvl="0" indent="0" marL="0">
+                        <a:buNone/>
+                      </a:pPr>
+                      <a:r>
+                        <a:rPr/>
+                        <a:t>...</a:t>
+                      </a:r>
+                    </a:p>
+                  </a:txBody>
+                </a:tc>
+                <a:tc>
+                  <a:txBody>
+                    <a:bodyPr/>
+                    <a:lstStyle/>
+                    <a:p>
+                      <a:pPr lvl="0" indent="0" marL="0">
+                        <a:buNone/>
+                      </a:pPr>
+                      <a:r>
+                        <a:rPr/>
+                        <a:t>...</a:t>
+                      </a:r>
+                    </a:p>
+                  </a:txBody>
+                </a:tc>
+                <a:tc>
+                  <a:txBody>
+                    <a:bodyPr/>
+                    <a:lstStyle/>
+                    <a:p>
+                      <a:pPr lvl="0" indent="0" marL="0">
+                        <a:buNone/>
+                      </a:pPr>
+                      <a:r>
+                        <a:rPr/>
+                        <a:t>...</a:t>
+                      </a:r>
+                    </a:p>
+                  </a:txBody>
+                </a:tc>
+                <a:tc>
+                  <a:txBody>
+                    <a:bodyPr/>
+                    <a:lstStyle/>
+                    <a:p>
+                      <a:pPr lvl="0" indent="0" marL="0">
+                        <a:buNone/>
+                      </a:pPr>
+                      <a:r>
+                        <a:rPr/>
+                        <a:t>...</a:t>
+                      </a:r>
+                    </a:p>
+                  </a:txBody>
+                </a:tc>
+                <a:tc>
+                  <a:txBody>
+                    <a:bodyPr/>
+                    <a:lstStyle/>
+                    <a:p>
+                      <a:pPr lvl="0" indent="0" marL="0">
+                        <a:buNone/>
+                      </a:pPr>
+                      <a:r>
+                        <a:rPr/>
+                        <a:t>...</a:t>
+                      </a:r>
+                    </a:p>
+                  </a:txBody>
+                </a:tc>
+                <a:tc>
+                  <a:txBody>
+                    <a:bodyPr/>
+                    <a:lstStyle/>
+                    <a:p>
+                      <a:pPr lvl="0" indent="0" marL="0">
+                        <a:buNone/>
+                      </a:pPr>
+                      <a:r>
+                        <a:rPr/>
+                        <a:t>...</a:t>
+                      </a:r>
+                    </a:p>
+                  </a:txBody>
+                </a:tc>
+              </a:tr>
+              <a:tr h="0">
+                <a:tc>
+                  <a:txBody>
+                    <a:bodyPr/>
+                    <a:lstStyle/>
+                    <a:p>
+                      <a:pPr lvl="0" indent="0" marL="0">
+                        <a:buNone/>
+                      </a:pPr>
+                      <a:r>
+                        <a:rPr/>
+                        <a:t>137074</a:t>
+                      </a:r>
+                    </a:p>
+                  </a:txBody>
+                </a:tc>
+                <a:tc>
+                  <a:txBody>
+                    <a:bodyPr/>
+                    <a:lstStyle/>
+                    <a:p>
+                      <a:pPr lvl="0" indent="0" marL="0">
+                        <a:buNone/>
+                      </a:pPr>
+                      <a:r>
+                        <a:rPr/>
+                        <a:t>922</a:t>
+                      </a:r>
+                    </a:p>
+                  </a:txBody>
+                </a:tc>
+                <a:tc>
+                  <a:txBody>
+                    <a:bodyPr/>
+                    <a:lstStyle/>
+                    <a:p>
+                      <a:pPr lvl="0" indent="0" marL="0">
+                        <a:buNone/>
+                      </a:pPr>
+                      <a:r>
+                        <a:rPr/>
+                        <a:t>2.5</a:t>
+                      </a:r>
+                    </a:p>
+                  </a:txBody>
+                </a:tc>
+                <a:tc>
+                  <a:txBody>
+                    <a:bodyPr/>
+                    <a:lstStyle/>
+                    <a:p>
+                      <a:pPr lvl="0" indent="0" marL="0">
+                        <a:buNone/>
+                      </a:pPr>
+                      <a:r>
+                        <a:rPr/>
+                        <a:t>24.8</a:t>
+                      </a:r>
+                    </a:p>
+                  </a:txBody>
+                </a:tc>
+                <a:tc>
+                  <a:txBody>
+                    <a:bodyPr/>
+                    <a:lstStyle/>
+                    <a:p>
+                      <a:pPr lvl="0" indent="0" marL="0">
+                        <a:buNone/>
+                      </a:pPr>
+                      <a:r>
+                        <a:rPr/>
+                        <a:t>15.98</a:t>
+                      </a:r>
+                    </a:p>
+                  </a:txBody>
+                </a:tc>
+                <a:tc>
+                  <a:txBody>
+                    <a:bodyPr/>
+                    <a:lstStyle/>
+                    <a:p>
+                      <a:pPr lvl="0" indent="0" marL="0">
+                        <a:buNone/>
+                      </a:pPr>
+                      <a:r>
+                        <a:rPr/>
+                        <a:t>black willow</a:t>
+                      </a:r>
+                    </a:p>
+                  </a:txBody>
+                </a:tc>
+              </a:tr>
+              <a:tr h="0">
+                <a:tc>
+                  <a:txBody>
+                    <a:bodyPr/>
+                    <a:lstStyle/>
+                    <a:p>
+                      <a:pPr lvl="0" indent="0" marL="0">
+                        <a:buNone/>
+                      </a:pPr>
+                      <a:r>
+                        <a:rPr/>
+                        <a:t>137075</a:t>
+                      </a:r>
+                    </a:p>
+                  </a:txBody>
+                </a:tc>
+                <a:tc>
+                  <a:txBody>
+                    <a:bodyPr/>
+                    <a:lstStyle/>
+                    <a:p>
+                      <a:pPr lvl="0" indent="0" marL="0">
+                        <a:buNone/>
+                      </a:pPr>
+                      <a:r>
+                        <a:rPr/>
+                        <a:t>922</a:t>
+                      </a:r>
+                    </a:p>
+                  </a:txBody>
+                </a:tc>
+                <a:tc>
+                  <a:txBody>
+                    <a:bodyPr/>
+                    <a:lstStyle/>
+                    <a:p>
+                      <a:pPr lvl="0" indent="0" marL="0">
+                        <a:buNone/>
+                      </a:pPr>
+                      <a:r>
+                        <a:rPr/>
+                        <a:t>3.7</a:t>
+                      </a:r>
+                    </a:p>
+                  </a:txBody>
+                </a:tc>
+                <a:tc>
+                  <a:txBody>
+                    <a:bodyPr/>
+                    <a:lstStyle/>
+                    <a:p>
+                      <a:pPr lvl="0" indent="0" marL="0">
+                        <a:buNone/>
+                      </a:pPr>
+                      <a:r>
+                        <a:rPr/>
+                        <a:t>23.7</a:t>
+                      </a:r>
+                    </a:p>
+                  </a:txBody>
+                </a:tc>
+                <a:tc>
+                  <a:txBody>
+                    <a:bodyPr/>
+                    <a:lstStyle/>
+                    <a:p>
+                      <a:pPr lvl="0" indent="0" marL="0">
+                        <a:buNone/>
+                      </a:pPr>
+                      <a:r>
+                        <a:rPr/>
+                        <a:t>40.62</a:t>
+                      </a:r>
+                    </a:p>
+                  </a:txBody>
+                </a:tc>
+                <a:tc>
+                  <a:txBody>
+                    <a:bodyPr/>
+                    <a:lstStyle/>
+                    <a:p>
+                      <a:pPr lvl="0" indent="0" marL="0">
+                        <a:buNone/>
+                      </a:pPr>
+                      <a:r>
+                        <a:rPr/>
+                        <a:t>black willow</a:t>
+                      </a:r>
+                    </a:p>
+                  </a:txBody>
+                </a:tc>
+              </a:tr>
+              <a:tr h="0">
+                <a:tc>
+                  <a:txBody>
+                    <a:bodyPr/>
+                    <a:lstStyle/>
+                    <a:p>
+                      <a:pPr lvl="0" indent="0" marL="0">
+                        <a:buNone/>
+                      </a:pPr>
+                      <a:r>
+                        <a:rPr/>
+                        <a:t>137076</a:t>
+                      </a:r>
+                    </a:p>
+                  </a:txBody>
+                </a:tc>
+                <a:tc>
+                  <a:txBody>
+                    <a:bodyPr/>
+                    <a:lstStyle/>
+                    <a:p>
+                      <a:pPr lvl="0" indent="0" marL="0">
+                        <a:buNone/>
+                      </a:pPr>
+                      <a:r>
+                        <a:rPr/>
+                        <a:t>922</a:t>
+                      </a:r>
+                    </a:p>
+                  </a:txBody>
+                </a:tc>
+                <a:tc>
+                  <a:txBody>
+                    <a:bodyPr/>
+                    <a:lstStyle/>
+                    <a:p>
+                      <a:pPr lvl="0" indent="0" marL="0">
+                        <a:buNone/>
+                      </a:pPr>
+                      <a:r>
+                        <a:rPr/>
+                        <a:t>2.9</a:t>
+                      </a:r>
+                    </a:p>
+                  </a:txBody>
+                </a:tc>
+                <a:tc>
+                  <a:txBody>
+                    <a:bodyPr/>
+                    <a:lstStyle/>
+                    <a:p>
+                      <a:pPr lvl="0" indent="0" marL="0">
+                        <a:buNone/>
+                      </a:pPr>
+                      <a:r>
+                        <a:rPr/>
+                        <a:t>30.9</a:t>
+                      </a:r>
+                    </a:p>
+                  </a:txBody>
+                </a:tc>
+                <a:tc>
+                  <a:txBody>
+                    <a:bodyPr/>
+                    <a:lstStyle/>
+                    <a:p>
+                      <a:pPr lvl="0" indent="0" marL="0">
+                        <a:buNone/>
+                      </a:pPr>
+                      <a:r>
+                        <a:rPr/>
+                        <a:t>22.74</a:t>
+                      </a:r>
+                    </a:p>
+                  </a:txBody>
+                </a:tc>
+                <a:tc>
+                  <a:txBody>
+                    <a:bodyPr/>
+                    <a:lstStyle/>
+                    <a:p>
+                      <a:pPr lvl="0" indent="0" marL="0">
+                        <a:buNone/>
+                      </a:pPr>
+                      <a:r>
+                        <a:rPr/>
+                        <a:t>black willow</a:t>
+                      </a:r>
+                    </a:p>
+                  </a:txBody>
+                </a:tc>
+              </a:tr>
+              <a:tr h="0">
+                <a:tc>
+                  <a:txBody>
+                    <a:bodyPr/>
+                    <a:lstStyle/>
+                    <a:p>
+                      <a:pPr lvl="0" indent="0" marL="0">
+                        <a:buNone/>
+                      </a:pPr>
+                      <a:r>
+                        <a:rPr/>
+                        <a:t>137077</a:t>
+                      </a:r>
+                    </a:p>
+                  </a:txBody>
+                </a:tc>
+                <a:tc>
+                  <a:txBody>
+                    <a:bodyPr/>
+                    <a:lstStyle/>
+                    <a:p>
+                      <a:pPr lvl="0" indent="0" marL="0">
+                        <a:buNone/>
+                      </a:pPr>
+                      <a:r>
+                        <a:rPr/>
+                        <a:t>922</a:t>
+                      </a:r>
+                    </a:p>
+                  </a:txBody>
+                </a:tc>
+                <a:tc>
+                  <a:txBody>
+                    <a:bodyPr/>
+                    <a:lstStyle/>
+                    <a:p>
+                      <a:pPr lvl="0" indent="0" marL="0">
+                        <a:buNone/>
+                      </a:pPr>
+                      <a:r>
+                        <a:rPr/>
+                        <a:t>5.6</a:t>
+                      </a:r>
+                    </a:p>
+                  </a:txBody>
+                </a:tc>
+                <a:tc>
+                  <a:txBody>
+                    <a:bodyPr/>
+                    <a:lstStyle/>
+                    <a:p>
+                      <a:pPr lvl="0" indent="0" marL="0">
+                        <a:buNone/>
+                      </a:pPr>
+                      <a:r>
+                        <a:rPr/>
+                        <a:t>40.0</a:t>
+                      </a:r>
+                    </a:p>
+                  </a:txBody>
+                </a:tc>
+                <a:tc>
+                  <a:txBody>
+                    <a:bodyPr/>
+                    <a:lstStyle/>
+                    <a:p>
+                      <a:pPr lvl="0" indent="0" marL="0">
+                        <a:buNone/>
+                      </a:pPr>
+                      <a:r>
+                        <a:rPr/>
+                        <a:t>87.79</a:t>
+                      </a:r>
+                    </a:p>
+                  </a:txBody>
+                </a:tc>
+                <a:tc>
+                  <a:txBody>
+                    <a:bodyPr/>
+                    <a:lstStyle/>
+                    <a:p>
+                      <a:pPr lvl="0" indent="0" marL="0">
+                        <a:buNone/>
+                      </a:pPr>
+                      <a:r>
+                        <a:rPr/>
+                        <a:t>black willow</a:t>
+                      </a:r>
+                    </a:p>
+                  </a:txBody>
+                </a:tc>
+              </a:tr>
+              <a:tr h="0">
+                <a:tc>
+                  <a:txBody>
+                    <a:bodyPr/>
+                    <a:lstStyle/>
+                    <a:p>
+                      <a:pPr lvl="0" indent="0" marL="0">
+                        <a:buNone/>
+                      </a:pPr>
+                      <a:r>
+                        <a:rPr/>
+                        <a:t>137078</a:t>
+                      </a:r>
+                    </a:p>
+                  </a:txBody>
+                </a:tc>
+                <a:tc>
+                  <a:txBody>
+                    <a:bodyPr/>
+                    <a:lstStyle/>
+                    <a:p>
+                      <a:pPr lvl="0" indent="0" marL="0">
+                        <a:buNone/>
+                      </a:pPr>
+                      <a:r>
+                        <a:rPr/>
+                        <a:t>922</a:t>
+                      </a:r>
+                    </a:p>
+                  </a:txBody>
+                </a:tc>
+                <a:tc>
+                  <a:txBody>
+                    <a:bodyPr/>
+                    <a:lstStyle/>
+                    <a:p>
+                      <a:pPr lvl="0" indent="0" marL="0">
+                        <a:buNone/>
+                      </a:pPr>
+                      <a:r>
+                        <a:rPr/>
+                        <a:t>1.9</a:t>
+                      </a:r>
+                    </a:p>
+                  </a:txBody>
+                </a:tc>
+                <a:tc>
+                  <a:txBody>
+                    <a:bodyPr/>
+                    <a:lstStyle/>
+                    <a:p>
+                      <a:pPr lvl="0" indent="0" marL="0">
+                        <a:buNone/>
+                      </a:pPr>
+                      <a:r>
+                        <a:rPr/>
+                        <a:t>25.1</a:t>
+                      </a:r>
+                    </a:p>
+                  </a:txBody>
+                </a:tc>
+                <a:tc>
+                  <a:txBody>
+                    <a:bodyPr/>
+                    <a:lstStyle/>
+                    <a:p>
+                      <a:pPr lvl="0" indent="0" marL="0">
+                        <a:buNone/>
+                      </a:pPr>
+                      <a:r>
+                        <a:rPr/>
+                        <a:t>8.33</a:t>
+                      </a:r>
+                    </a:p>
+                  </a:txBody>
+                </a:tc>
+                <a:tc>
+                  <a:txBody>
+                    <a:bodyPr/>
+                    <a:lstStyle/>
+                    <a:p>
+                      <a:pPr lvl="0" indent="0" marL="0">
+                        <a:buNone/>
+                      </a:pPr>
+                      <a:r>
+                        <a:rPr/>
+                        <a:t>black willow</a:t>
                       </a:r>
                     </a:p>
                   </a:txBody>
@@ -7764,7 +8891,7 @@
             </a:pPr>
             <a:r>
               <a:rPr/>
-              <a:t>Base datset calculations:</a:t>
+              <a:t>Testing k values</a:t>
             </a:r>
           </a:p>
         </p:txBody>
@@ -7791,7 +8918,11 @@
               <a:rPr>
                 <a:latin typeface="Courier"/>
               </a:rPr>
-              <a:t>Average Root Mean Squared Log Error (RMSLE) for k = 3: 0.15805917967387384</a:t>
+              <a:t>Average (RMSLE) for k = 3: 0.15805917967387384
+Average (RMSLE) for k = 4: 0.16210180527022203
+Average (RMSLE) for k = 5: 0.16793082822322966
+Average (RMSLE) for k = 6: 0.17419090936308976
+Average (RMSLE) for k = 7: 0.18028949487962886</a:t>
             </a:r>
           </a:p>
         </p:txBody>
@@ -7802,6 +8933,1811 @@
 </file>
 
 <file path=ppt/slides/slide22.xml><?xml version="1.0" encoding="utf-8"?>
+<p:sld xmlns:a="http://schemas.openxmlformats.org/drawingml/2006/main" xmlns:r="http://schemas.openxmlformats.org/officeDocument/2006/relationships" xmlns:p="http://schemas.openxmlformats.org/presentationml/2006/main">
+  <p:cSld>
+    <p:spTree>
+      <p:nvGrpSpPr>
+        <p:cNvPr id="1" name=""/>
+        <p:cNvGrpSpPr/>
+        <p:nvPr/>
+      </p:nvGrpSpPr>
+      <p:grpSpPr>
+        <a:xfrm>
+          <a:off x="0" y="0"/>
+          <a:ext cx="0" cy="0"/>
+          <a:chOff x="0" y="0"/>
+          <a:chExt cx="0" cy="0"/>
+        </a:xfrm>
+      </p:grpSpPr>
+      <p:sp>
+        <p:nvSpPr>
+          <p:cNvPr id="2" name="Title 1"/>
+          <p:cNvSpPr>
+            <a:spLocks noGrp="1"/>
+          </p:cNvSpPr>
+          <p:nvPr>
+            <p:ph type="title"/>
+          </p:nvPr>
+        </p:nvSpPr>
+        <p:spPr/>
+        <p:txBody>
+          <a:bodyPr/>
+          <a:lstStyle/>
+          <a:p>
+            <a:pPr lvl="0" indent="0" marL="0">
+              <a:buNone/>
+            </a:pPr>
+            <a:r>
+              <a:rPr/>
+              <a:t>Adding features</a:t>
+            </a:r>
+          </a:p>
+        </p:txBody>
+      </p:sp>
+      <p:graphicFrame>
+        <p:nvGraphicFramePr>
+          <p:cNvPr id="6" name="Content Placeholder 5"/>
+          <p:cNvGraphicFramePr>
+            <a:graphicFrameLocks noGrp="1"/>
+          </p:cNvGraphicFramePr>
+          <p:nvPr>
+            <p:ph idx="1"/>
+          </p:nvPr>
+        </p:nvGraphicFramePr>
+        <p:xfrm>
+          <a:off x="457200" y="1193800"/>
+          <a:ext cx="8229600" cy="3390900"/>
+        </p:xfrm>
+        <a:graphic>
+          <a:graphicData uri="http://schemas.openxmlformats.org/drawingml/2006/table">
+            <a:tbl>
+              <a:tblPr firstRow="1" bandRow="1">
+                <a:tableStyleId>{5C22544A-7EE6-4342-B048-85BDC9FD1C3A}</a:tableStyleId>
+              </a:tblPr>
+              <a:tblGrid>
+                <a:gridCol w="914400"/>
+                <a:gridCol w="914400"/>
+                <a:gridCol w="914400"/>
+                <a:gridCol w="914400"/>
+                <a:gridCol w="914400"/>
+                <a:gridCol w="914400"/>
+                <a:gridCol w="914400"/>
+                <a:gridCol w="914400"/>
+                <a:gridCol w="914400"/>
+              </a:tblGrid>
+              <a:tr h="0">
+                <a:tc>
+                  <a:txBody>
+                    <a:bodyPr/>
+                    <a:lstStyle/>
+                    <a:p>
+                      <a:endParaRPr/>
+                    </a:p>
+                  </a:txBody>
+                  <a:tcPr/>
+                </a:tc>
+                <a:tc>
+                  <a:txBody>
+                    <a:bodyPr/>
+                    <a:lstStyle/>
+                    <a:p>
+                      <a:pPr lvl="0" indent="0" marL="0">
+                        <a:buNone/>
+                      </a:pPr>
+                      <a:r>
+                        <a:rPr/>
+                        <a:t>SPCD</a:t>
+                      </a:r>
+                    </a:p>
+                  </a:txBody>
+                  <a:tcPr/>
+                </a:tc>
+                <a:tc>
+                  <a:txBody>
+                    <a:bodyPr/>
+                    <a:lstStyle/>
+                    <a:p>
+                      <a:pPr lvl="0" indent="0" marL="0">
+                        <a:buNone/>
+                      </a:pPr>
+                      <a:r>
+                        <a:rPr/>
+                        <a:t>DO_BH</a:t>
+                      </a:r>
+                    </a:p>
+                  </a:txBody>
+                  <a:tcPr/>
+                </a:tc>
+                <a:tc>
+                  <a:txBody>
+                    <a:bodyPr/>
+                    <a:lstStyle/>
+                    <a:p>
+                      <a:pPr lvl="0" indent="0" marL="0">
+                        <a:buNone/>
+                      </a:pPr>
+                      <a:r>
+                        <a:rPr/>
+                        <a:t>HT_TOT</a:t>
+                      </a:r>
+                    </a:p>
+                  </a:txBody>
+                  <a:tcPr/>
+                </a:tc>
+                <a:tc>
+                  <a:txBody>
+                    <a:bodyPr/>
+                    <a:lstStyle/>
+                    <a:p>
+                      <a:pPr lvl="0" indent="0" marL="0">
+                        <a:buNone/>
+                      </a:pPr>
+                      <a:r>
+                        <a:rPr/>
+                        <a:t>TT_DW_CRM</a:t>
+                      </a:r>
+                    </a:p>
+                  </a:txBody>
+                  <a:tcPr/>
+                </a:tc>
+                <a:tc>
+                  <a:txBody>
+                    <a:bodyPr/>
+                    <a:lstStyle/>
+                    <a:p>
+                      <a:pPr lvl="0" indent="0" marL="0">
+                        <a:buNone/>
+                      </a:pPr>
+                      <a:r>
+                        <a:rPr/>
+                        <a:t>COMMON_NAME</a:t>
+                      </a:r>
+                    </a:p>
+                  </a:txBody>
+                  <a:tcPr/>
+                </a:tc>
+                <a:tc>
+                  <a:txBody>
+                    <a:bodyPr/>
+                    <a:lstStyle/>
+                    <a:p>
+                      <a:pPr lvl="0" indent="0" marL="0">
+                        <a:buNone/>
+                      </a:pPr>
+                      <a:r>
+                        <a:rPr/>
+                        <a:t>VOLUME</a:t>
+                      </a:r>
+                    </a:p>
+                  </a:txBody>
+                  <a:tcPr/>
+                </a:tc>
+                <a:tc>
+                  <a:txBody>
+                    <a:bodyPr/>
+                    <a:lstStyle/>
+                    <a:p>
+                      <a:pPr lvl="0" indent="0" marL="0">
+                        <a:buNone/>
+                      </a:pPr>
+                      <a:r>
+                        <a:rPr/>
+                        <a:t>H_D_INT</a:t>
+                      </a:r>
+                    </a:p>
+                  </a:txBody>
+                  <a:tcPr/>
+                </a:tc>
+                <a:tc>
+                  <a:txBody>
+                    <a:bodyPr/>
+                    <a:lstStyle/>
+                    <a:p>
+                      <a:pPr lvl="0" indent="0" marL="0">
+                        <a:buNone/>
+                      </a:pPr>
+                      <a:r>
+                        <a:rPr/>
+                        <a:t>H_SQUARED</a:t>
+                      </a:r>
+                    </a:p>
+                  </a:txBody>
+                  <a:tcPr/>
+                </a:tc>
+              </a:tr>
+              <a:tr h="0">
+                <a:tc>
+                  <a:txBody>
+                    <a:bodyPr/>
+                    <a:lstStyle/>
+                    <a:p>
+                      <a:pPr lvl="0" indent="0" marL="0">
+                        <a:buNone/>
+                      </a:pPr>
+                      <a:r>
+                        <a:rPr/>
+                        <a:t>0</a:t>
+                      </a:r>
+                    </a:p>
+                  </a:txBody>
+                </a:tc>
+                <a:tc>
+                  <a:txBody>
+                    <a:bodyPr/>
+                    <a:lstStyle/>
+                    <a:p>
+                      <a:pPr lvl="0" indent="0" marL="0">
+                        <a:buNone/>
+                      </a:pPr>
+                      <a:r>
+                        <a:rPr/>
+                        <a:t>12</a:t>
+                      </a:r>
+                    </a:p>
+                  </a:txBody>
+                </a:tc>
+                <a:tc>
+                  <a:txBody>
+                    <a:bodyPr/>
+                    <a:lstStyle/>
+                    <a:p>
+                      <a:pPr lvl="0" indent="0" marL="0">
+                        <a:buNone/>
+                      </a:pPr>
+                      <a:r>
+                        <a:rPr/>
+                        <a:t>7.5</a:t>
+                      </a:r>
+                    </a:p>
+                  </a:txBody>
+                </a:tc>
+                <a:tc>
+                  <a:txBody>
+                    <a:bodyPr/>
+                    <a:lstStyle/>
+                    <a:p>
+                      <a:pPr lvl="0" indent="0" marL="0">
+                        <a:buNone/>
+                      </a:pPr>
+                      <a:r>
+                        <a:rPr/>
+                        <a:t>45.2</a:t>
+                      </a:r>
+                    </a:p>
+                  </a:txBody>
+                </a:tc>
+                <a:tc>
+                  <a:txBody>
+                    <a:bodyPr/>
+                    <a:lstStyle/>
+                    <a:p>
+                      <a:pPr lvl="0" indent="0" marL="0">
+                        <a:buNone/>
+                      </a:pPr>
+                      <a:r>
+                        <a:rPr/>
+                        <a:t>178.86</a:t>
+                      </a:r>
+                    </a:p>
+                  </a:txBody>
+                </a:tc>
+                <a:tc>
+                  <a:txBody>
+                    <a:bodyPr/>
+                    <a:lstStyle/>
+                    <a:p>
+                      <a:pPr lvl="0" indent="0" marL="0">
+                        <a:buNone/>
+                      </a:pPr>
+                      <a:r>
+                        <a:rPr/>
+                        <a:t>balsam fir</a:t>
+                      </a:r>
+                    </a:p>
+                  </a:txBody>
+                </a:tc>
+                <a:tc>
+                  <a:txBody>
+                    <a:bodyPr/>
+                    <a:lstStyle/>
+                    <a:p>
+                      <a:pPr lvl="0" indent="0" marL="0">
+                        <a:buNone/>
+                      </a:pPr>
+                      <a:r>
+                        <a:rPr/>
+                        <a:t>1996.873144</a:t>
+                      </a:r>
+                    </a:p>
+                  </a:txBody>
+                </a:tc>
+                <a:tc>
+                  <a:txBody>
+                    <a:bodyPr/>
+                    <a:lstStyle/>
+                    <a:p>
+                      <a:pPr lvl="0" indent="0" marL="0">
+                        <a:buNone/>
+                      </a:pPr>
+                      <a:r>
+                        <a:rPr/>
+                        <a:t>339.00</a:t>
+                      </a:r>
+                    </a:p>
+                  </a:txBody>
+                </a:tc>
+                <a:tc>
+                  <a:txBody>
+                    <a:bodyPr/>
+                    <a:lstStyle/>
+                    <a:p>
+                      <a:pPr lvl="0" indent="0" marL="0">
+                        <a:buNone/>
+                      </a:pPr>
+                      <a:r>
+                        <a:rPr/>
+                        <a:t>2043.04</a:t>
+                      </a:r>
+                    </a:p>
+                  </a:txBody>
+                </a:tc>
+              </a:tr>
+              <a:tr h="0">
+                <a:tc>
+                  <a:txBody>
+                    <a:bodyPr/>
+                    <a:lstStyle/>
+                    <a:p>
+                      <a:pPr lvl="0" indent="0" marL="0">
+                        <a:buNone/>
+                      </a:pPr>
+                      <a:r>
+                        <a:rPr/>
+                        <a:t>1</a:t>
+                      </a:r>
+                    </a:p>
+                  </a:txBody>
+                </a:tc>
+                <a:tc>
+                  <a:txBody>
+                    <a:bodyPr/>
+                    <a:lstStyle/>
+                    <a:p>
+                      <a:pPr lvl="0" indent="0" marL="0">
+                        <a:buNone/>
+                      </a:pPr>
+                      <a:r>
+                        <a:rPr/>
+                        <a:t>12</a:t>
+                      </a:r>
+                    </a:p>
+                  </a:txBody>
+                </a:tc>
+                <a:tc>
+                  <a:txBody>
+                    <a:bodyPr/>
+                    <a:lstStyle/>
+                    <a:p>
+                      <a:pPr lvl="0" indent="0" marL="0">
+                        <a:buNone/>
+                      </a:pPr>
+                      <a:r>
+                        <a:rPr/>
+                        <a:t>9.3</a:t>
+                      </a:r>
+                    </a:p>
+                  </a:txBody>
+                </a:tc>
+                <a:tc>
+                  <a:txBody>
+                    <a:bodyPr/>
+                    <a:lstStyle/>
+                    <a:p>
+                      <a:pPr lvl="0" indent="0" marL="0">
+                        <a:buNone/>
+                      </a:pPr>
+                      <a:r>
+                        <a:rPr/>
+                        <a:t>62.7</a:t>
+                      </a:r>
+                    </a:p>
+                  </a:txBody>
+                </a:tc>
+                <a:tc>
+                  <a:txBody>
+                    <a:bodyPr/>
+                    <a:lstStyle/>
+                    <a:p>
+                      <a:pPr lvl="0" indent="0" marL="0">
+                        <a:buNone/>
+                      </a:pPr>
+                      <a:r>
+                        <a:rPr/>
+                        <a:t>323.46</a:t>
+                      </a:r>
+                    </a:p>
+                  </a:txBody>
+                </a:tc>
+                <a:tc>
+                  <a:txBody>
+                    <a:bodyPr/>
+                    <a:lstStyle/>
+                    <a:p>
+                      <a:pPr lvl="0" indent="0" marL="0">
+                        <a:buNone/>
+                      </a:pPr>
+                      <a:r>
+                        <a:rPr/>
+                        <a:t>balsam fir</a:t>
+                      </a:r>
+                    </a:p>
+                  </a:txBody>
+                </a:tc>
+                <a:tc>
+                  <a:txBody>
+                    <a:bodyPr/>
+                    <a:lstStyle/>
+                    <a:p>
+                      <a:pPr lvl="0" indent="0" marL="0">
+                        <a:buNone/>
+                      </a:pPr>
+                      <a:r>
+                        <a:rPr/>
+                        <a:t>4259.150167</a:t>
+                      </a:r>
+                    </a:p>
+                  </a:txBody>
+                </a:tc>
+                <a:tc>
+                  <a:txBody>
+                    <a:bodyPr/>
+                    <a:lstStyle/>
+                    <a:p>
+                      <a:pPr lvl="0" indent="0" marL="0">
+                        <a:buNone/>
+                      </a:pPr>
+                      <a:r>
+                        <a:rPr/>
+                        <a:t>583.11</a:t>
+                      </a:r>
+                    </a:p>
+                  </a:txBody>
+                </a:tc>
+                <a:tc>
+                  <a:txBody>
+                    <a:bodyPr/>
+                    <a:lstStyle/>
+                    <a:p>
+                      <a:pPr lvl="0" indent="0" marL="0">
+                        <a:buNone/>
+                      </a:pPr>
+                      <a:r>
+                        <a:rPr/>
+                        <a:t>3931.29</a:t>
+                      </a:r>
+                    </a:p>
+                  </a:txBody>
+                </a:tc>
+              </a:tr>
+              <a:tr h="0">
+                <a:tc>
+                  <a:txBody>
+                    <a:bodyPr/>
+                    <a:lstStyle/>
+                    <a:p>
+                      <a:pPr lvl="0" indent="0" marL="0">
+                        <a:buNone/>
+                      </a:pPr>
+                      <a:r>
+                        <a:rPr/>
+                        <a:t>2</a:t>
+                      </a:r>
+                    </a:p>
+                  </a:txBody>
+                </a:tc>
+                <a:tc>
+                  <a:txBody>
+                    <a:bodyPr/>
+                    <a:lstStyle/>
+                    <a:p>
+                      <a:pPr lvl="0" indent="0" marL="0">
+                        <a:buNone/>
+                      </a:pPr>
+                      <a:r>
+                        <a:rPr/>
+                        <a:t>12</a:t>
+                      </a:r>
+                    </a:p>
+                  </a:txBody>
+                </a:tc>
+                <a:tc>
+                  <a:txBody>
+                    <a:bodyPr/>
+                    <a:lstStyle/>
+                    <a:p>
+                      <a:pPr lvl="0" indent="0" marL="0">
+                        <a:buNone/>
+                      </a:pPr>
+                      <a:r>
+                        <a:rPr/>
+                        <a:t>9.7</a:t>
+                      </a:r>
+                    </a:p>
+                  </a:txBody>
+                </a:tc>
+                <a:tc>
+                  <a:txBody>
+                    <a:bodyPr/>
+                    <a:lstStyle/>
+                    <a:p>
+                      <a:pPr lvl="0" indent="0" marL="0">
+                        <a:buNone/>
+                      </a:pPr>
+                      <a:r>
+                        <a:rPr/>
+                        <a:t>56.7</a:t>
+                      </a:r>
+                    </a:p>
+                  </a:txBody>
+                </a:tc>
+                <a:tc>
+                  <a:txBody>
+                    <a:bodyPr/>
+                    <a:lstStyle/>
+                    <a:p>
+                      <a:pPr lvl="0" indent="0" marL="0">
+                        <a:buNone/>
+                      </a:pPr>
+                      <a:r>
+                        <a:rPr/>
+                        <a:t>342.47</a:t>
+                      </a:r>
+                    </a:p>
+                  </a:txBody>
+                </a:tc>
+                <a:tc>
+                  <a:txBody>
+                    <a:bodyPr/>
+                    <a:lstStyle/>
+                    <a:p>
+                      <a:pPr lvl="0" indent="0" marL="0">
+                        <a:buNone/>
+                      </a:pPr>
+                      <a:r>
+                        <a:rPr/>
+                        <a:t>balsam fir</a:t>
+                      </a:r>
+                    </a:p>
+                  </a:txBody>
+                </a:tc>
+                <a:tc>
+                  <a:txBody>
+                    <a:bodyPr/>
+                    <a:lstStyle/>
+                    <a:p>
+                      <a:pPr lvl="0" indent="0" marL="0">
+                        <a:buNone/>
+                      </a:pPr>
+                      <a:r>
+                        <a:rPr/>
+                        <a:t>4190.019479</a:t>
+                      </a:r>
+                    </a:p>
+                  </a:txBody>
+                </a:tc>
+                <a:tc>
+                  <a:txBody>
+                    <a:bodyPr/>
+                    <a:lstStyle/>
+                    <a:p>
+                      <a:pPr lvl="0" indent="0" marL="0">
+                        <a:buNone/>
+                      </a:pPr>
+                      <a:r>
+                        <a:rPr/>
+                        <a:t>549.99</a:t>
+                      </a:r>
+                    </a:p>
+                  </a:txBody>
+                </a:tc>
+                <a:tc>
+                  <a:txBody>
+                    <a:bodyPr/>
+                    <a:lstStyle/>
+                    <a:p>
+                      <a:pPr lvl="0" indent="0" marL="0">
+                        <a:buNone/>
+                      </a:pPr>
+                      <a:r>
+                        <a:rPr/>
+                        <a:t>3214.89</a:t>
+                      </a:r>
+                    </a:p>
+                  </a:txBody>
+                </a:tc>
+              </a:tr>
+              <a:tr h="0">
+                <a:tc>
+                  <a:txBody>
+                    <a:bodyPr/>
+                    <a:lstStyle/>
+                    <a:p>
+                      <a:pPr lvl="0" indent="0" marL="0">
+                        <a:buNone/>
+                      </a:pPr>
+                      <a:r>
+                        <a:rPr/>
+                        <a:t>3</a:t>
+                      </a:r>
+                    </a:p>
+                  </a:txBody>
+                </a:tc>
+                <a:tc>
+                  <a:txBody>
+                    <a:bodyPr/>
+                    <a:lstStyle/>
+                    <a:p>
+                      <a:pPr lvl="0" indent="0" marL="0">
+                        <a:buNone/>
+                      </a:pPr>
+                      <a:r>
+                        <a:rPr/>
+                        <a:t>12</a:t>
+                      </a:r>
+                    </a:p>
+                  </a:txBody>
+                </a:tc>
+                <a:tc>
+                  <a:txBody>
+                    <a:bodyPr/>
+                    <a:lstStyle/>
+                    <a:p>
+                      <a:pPr lvl="0" indent="0" marL="0">
+                        <a:buNone/>
+                      </a:pPr>
+                      <a:r>
+                        <a:rPr/>
+                        <a:t>11.4</a:t>
+                      </a:r>
+                    </a:p>
+                  </a:txBody>
+                </a:tc>
+                <a:tc>
+                  <a:txBody>
+                    <a:bodyPr/>
+                    <a:lstStyle/>
+                    <a:p>
+                      <a:pPr lvl="0" indent="0" marL="0">
+                        <a:buNone/>
+                      </a:pPr>
+                      <a:r>
+                        <a:rPr/>
+                        <a:t>66.1</a:t>
+                      </a:r>
+                    </a:p>
+                  </a:txBody>
+                </a:tc>
+                <a:tc>
+                  <a:txBody>
+                    <a:bodyPr/>
+                    <a:lstStyle/>
+                    <a:p>
+                      <a:pPr lvl="0" indent="0" marL="0">
+                        <a:buNone/>
+                      </a:pPr>
+                      <a:r>
+                        <a:rPr/>
+                        <a:t>499.35</a:t>
+                      </a:r>
+                    </a:p>
+                  </a:txBody>
+                </a:tc>
+                <a:tc>
+                  <a:txBody>
+                    <a:bodyPr/>
+                    <a:lstStyle/>
+                    <a:p>
+                      <a:pPr lvl="0" indent="0" marL="0">
+                        <a:buNone/>
+                      </a:pPr>
+                      <a:r>
+                        <a:rPr/>
+                        <a:t>balsam fir</a:t>
+                      </a:r>
+                    </a:p>
+                  </a:txBody>
+                </a:tc>
+                <a:tc>
+                  <a:txBody>
+                    <a:bodyPr/>
+                    <a:lstStyle/>
+                    <a:p>
+                      <a:pPr lvl="0" indent="0" marL="0">
+                        <a:buNone/>
+                      </a:pPr>
+                      <a:r>
+                        <a:rPr/>
+                        <a:t>6746.844127</a:t>
+                      </a:r>
+                    </a:p>
+                  </a:txBody>
+                </a:tc>
+                <a:tc>
+                  <a:txBody>
+                    <a:bodyPr/>
+                    <a:lstStyle/>
+                    <a:p>
+                      <a:pPr lvl="0" indent="0" marL="0">
+                        <a:buNone/>
+                      </a:pPr>
+                      <a:r>
+                        <a:rPr/>
+                        <a:t>753.54</a:t>
+                      </a:r>
+                    </a:p>
+                  </a:txBody>
+                </a:tc>
+                <a:tc>
+                  <a:txBody>
+                    <a:bodyPr/>
+                    <a:lstStyle/>
+                    <a:p>
+                      <a:pPr lvl="0" indent="0" marL="0">
+                        <a:buNone/>
+                      </a:pPr>
+                      <a:r>
+                        <a:rPr/>
+                        <a:t>4369.21</a:t>
+                      </a:r>
+                    </a:p>
+                  </a:txBody>
+                </a:tc>
+              </a:tr>
+              <a:tr h="0">
+                <a:tc>
+                  <a:txBody>
+                    <a:bodyPr/>
+                    <a:lstStyle/>
+                    <a:p>
+                      <a:pPr lvl="0" indent="0" marL="0">
+                        <a:buNone/>
+                      </a:pPr>
+                      <a:r>
+                        <a:rPr/>
+                        <a:t>4</a:t>
+                      </a:r>
+                    </a:p>
+                  </a:txBody>
+                </a:tc>
+                <a:tc>
+                  <a:txBody>
+                    <a:bodyPr/>
+                    <a:lstStyle/>
+                    <a:p>
+                      <a:pPr lvl="0" indent="0" marL="0">
+                        <a:buNone/>
+                      </a:pPr>
+                      <a:r>
+                        <a:rPr/>
+                        <a:t>12</a:t>
+                      </a:r>
+                    </a:p>
+                  </a:txBody>
+                </a:tc>
+                <a:tc>
+                  <a:txBody>
+                    <a:bodyPr/>
+                    <a:lstStyle/>
+                    <a:p>
+                      <a:pPr lvl="0" indent="0" marL="0">
+                        <a:buNone/>
+                      </a:pPr>
+                      <a:r>
+                        <a:rPr/>
+                        <a:t>6.4</a:t>
+                      </a:r>
+                    </a:p>
+                  </a:txBody>
+                </a:tc>
+                <a:tc>
+                  <a:txBody>
+                    <a:bodyPr/>
+                    <a:lstStyle/>
+                    <a:p>
+                      <a:pPr lvl="0" indent="0" marL="0">
+                        <a:buNone/>
+                      </a:pPr>
+                      <a:r>
+                        <a:rPr/>
+                        <a:t>51.8</a:t>
+                      </a:r>
+                    </a:p>
+                  </a:txBody>
+                </a:tc>
+                <a:tc>
+                  <a:txBody>
+                    <a:bodyPr/>
+                    <a:lstStyle/>
+                    <a:p>
+                      <a:pPr lvl="0" indent="0" marL="0">
+                        <a:buNone/>
+                      </a:pPr>
+                      <a:r>
+                        <a:rPr/>
+                        <a:t>113.92</a:t>
+                      </a:r>
+                    </a:p>
+                  </a:txBody>
+                </a:tc>
+                <a:tc>
+                  <a:txBody>
+                    <a:bodyPr/>
+                    <a:lstStyle/>
+                    <a:p>
+                      <a:pPr lvl="0" indent="0" marL="0">
+                        <a:buNone/>
+                      </a:pPr>
+                      <a:r>
+                        <a:rPr/>
+                        <a:t>balsam fir</a:t>
+                      </a:r>
+                    </a:p>
+                  </a:txBody>
+                </a:tc>
+                <a:tc>
+                  <a:txBody>
+                    <a:bodyPr/>
+                    <a:lstStyle/>
+                    <a:p>
+                      <a:pPr lvl="0" indent="0" marL="0">
+                        <a:buNone/>
+                      </a:pPr>
+                      <a:r>
+                        <a:rPr/>
+                        <a:t>1666.399867</a:t>
+                      </a:r>
+                    </a:p>
+                  </a:txBody>
+                </a:tc>
+                <a:tc>
+                  <a:txBody>
+                    <a:bodyPr/>
+                    <a:lstStyle/>
+                    <a:p>
+                      <a:pPr lvl="0" indent="0" marL="0">
+                        <a:buNone/>
+                      </a:pPr>
+                      <a:r>
+                        <a:rPr/>
+                        <a:t>331.52</a:t>
+                      </a:r>
+                    </a:p>
+                  </a:txBody>
+                </a:tc>
+                <a:tc>
+                  <a:txBody>
+                    <a:bodyPr/>
+                    <a:lstStyle/>
+                    <a:p>
+                      <a:pPr lvl="0" indent="0" marL="0">
+                        <a:buNone/>
+                      </a:pPr>
+                      <a:r>
+                        <a:rPr/>
+                        <a:t>2683.24</a:t>
+                      </a:r>
+                    </a:p>
+                  </a:txBody>
+                </a:tc>
+              </a:tr>
+              <a:tr h="0">
+                <a:tc>
+                  <a:txBody>
+                    <a:bodyPr/>
+                    <a:lstStyle/>
+                    <a:p>
+                      <a:pPr lvl="0" indent="0" marL="0">
+                        <a:buNone/>
+                      </a:pPr>
+                      <a:r>
+                        <a:rPr/>
+                        <a:t>...</a:t>
+                      </a:r>
+                    </a:p>
+                  </a:txBody>
+                </a:tc>
+                <a:tc>
+                  <a:txBody>
+                    <a:bodyPr/>
+                    <a:lstStyle/>
+                    <a:p>
+                      <a:pPr lvl="0" indent="0" marL="0">
+                        <a:buNone/>
+                      </a:pPr>
+                      <a:r>
+                        <a:rPr/>
+                        <a:t>...</a:t>
+                      </a:r>
+                    </a:p>
+                  </a:txBody>
+                </a:tc>
+                <a:tc>
+                  <a:txBody>
+                    <a:bodyPr/>
+                    <a:lstStyle/>
+                    <a:p>
+                      <a:pPr lvl="0" indent="0" marL="0">
+                        <a:buNone/>
+                      </a:pPr>
+                      <a:r>
+                        <a:rPr/>
+                        <a:t>...</a:t>
+                      </a:r>
+                    </a:p>
+                  </a:txBody>
+                </a:tc>
+                <a:tc>
+                  <a:txBody>
+                    <a:bodyPr/>
+                    <a:lstStyle/>
+                    <a:p>
+                      <a:pPr lvl="0" indent="0" marL="0">
+                        <a:buNone/>
+                      </a:pPr>
+                      <a:r>
+                        <a:rPr/>
+                        <a:t>...</a:t>
+                      </a:r>
+                    </a:p>
+                  </a:txBody>
+                </a:tc>
+                <a:tc>
+                  <a:txBody>
+                    <a:bodyPr/>
+                    <a:lstStyle/>
+                    <a:p>
+                      <a:pPr lvl="0" indent="0" marL="0">
+                        <a:buNone/>
+                      </a:pPr>
+                      <a:r>
+                        <a:rPr/>
+                        <a:t>...</a:t>
+                      </a:r>
+                    </a:p>
+                  </a:txBody>
+                </a:tc>
+                <a:tc>
+                  <a:txBody>
+                    <a:bodyPr/>
+                    <a:lstStyle/>
+                    <a:p>
+                      <a:pPr lvl="0" indent="0" marL="0">
+                        <a:buNone/>
+                      </a:pPr>
+                      <a:r>
+                        <a:rPr/>
+                        <a:t>...</a:t>
+                      </a:r>
+                    </a:p>
+                  </a:txBody>
+                </a:tc>
+                <a:tc>
+                  <a:txBody>
+                    <a:bodyPr/>
+                    <a:lstStyle/>
+                    <a:p>
+                      <a:pPr lvl="0" indent="0" marL="0">
+                        <a:buNone/>
+                      </a:pPr>
+                      <a:r>
+                        <a:rPr/>
+                        <a:t>...</a:t>
+                      </a:r>
+                    </a:p>
+                  </a:txBody>
+                </a:tc>
+                <a:tc>
+                  <a:txBody>
+                    <a:bodyPr/>
+                    <a:lstStyle/>
+                    <a:p>
+                      <a:pPr lvl="0" indent="0" marL="0">
+                        <a:buNone/>
+                      </a:pPr>
+                      <a:r>
+                        <a:rPr/>
+                        <a:t>...</a:t>
+                      </a:r>
+                    </a:p>
+                  </a:txBody>
+                </a:tc>
+                <a:tc>
+                  <a:txBody>
+                    <a:bodyPr/>
+                    <a:lstStyle/>
+                    <a:p>
+                      <a:pPr lvl="0" indent="0" marL="0">
+                        <a:buNone/>
+                      </a:pPr>
+                      <a:r>
+                        <a:rPr/>
+                        <a:t>...</a:t>
+                      </a:r>
+                    </a:p>
+                  </a:txBody>
+                </a:tc>
+              </a:tr>
+              <a:tr h="0">
+                <a:tc>
+                  <a:txBody>
+                    <a:bodyPr/>
+                    <a:lstStyle/>
+                    <a:p>
+                      <a:pPr lvl="0" indent="0" marL="0">
+                        <a:buNone/>
+                      </a:pPr>
+                      <a:r>
+                        <a:rPr/>
+                        <a:t>107641</a:t>
+                      </a:r>
+                    </a:p>
+                  </a:txBody>
+                </a:tc>
+                <a:tc>
+                  <a:txBody>
+                    <a:bodyPr/>
+                    <a:lstStyle/>
+                    <a:p>
+                      <a:pPr lvl="0" indent="0" marL="0">
+                        <a:buNone/>
+                      </a:pPr>
+                      <a:r>
+                        <a:rPr/>
+                        <a:t>461</a:t>
+                      </a:r>
+                    </a:p>
+                  </a:txBody>
+                </a:tc>
+                <a:tc>
+                  <a:txBody>
+                    <a:bodyPr/>
+                    <a:lstStyle/>
+                    <a:p>
+                      <a:pPr lvl="0" indent="0" marL="0">
+                        <a:buNone/>
+                      </a:pPr>
+                      <a:r>
+                        <a:rPr/>
+                        <a:t>17.5</a:t>
+                      </a:r>
+                    </a:p>
+                  </a:txBody>
+                </a:tc>
+                <a:tc>
+                  <a:txBody>
+                    <a:bodyPr/>
+                    <a:lstStyle/>
+                    <a:p>
+                      <a:pPr lvl="0" indent="0" marL="0">
+                        <a:buNone/>
+                      </a:pPr>
+                      <a:r>
+                        <a:rPr/>
+                        <a:t>87.4</a:t>
+                      </a:r>
+                    </a:p>
+                  </a:txBody>
+                </a:tc>
+                <a:tc>
+                  <a:txBody>
+                    <a:bodyPr/>
+                    <a:lstStyle/>
+                    <a:p>
+                      <a:pPr lvl="0" indent="0" marL="0">
+                        <a:buNone/>
+                      </a:pPr>
+                      <a:r>
+                        <a:rPr/>
+                        <a:t>2042.09</a:t>
+                      </a:r>
+                    </a:p>
+                  </a:txBody>
+                </a:tc>
+                <a:tc>
+                  <a:txBody>
+                    <a:bodyPr/>
+                    <a:lstStyle/>
+                    <a:p>
+                      <a:pPr lvl="0" indent="0" marL="0">
+                        <a:buNone/>
+                      </a:pPr>
+                      <a:r>
+                        <a:rPr/>
+                        <a:t>sugarberry</a:t>
+                      </a:r>
+                    </a:p>
+                  </a:txBody>
+                </a:tc>
+                <a:tc>
+                  <a:txBody>
+                    <a:bodyPr/>
+                    <a:lstStyle/>
+                    <a:p>
+                      <a:pPr lvl="0" indent="0" marL="0">
+                        <a:buNone/>
+                      </a:pPr>
+                      <a:r>
+                        <a:rPr/>
+                        <a:t>21022.145834</a:t>
+                      </a:r>
+                    </a:p>
+                  </a:txBody>
+                </a:tc>
+                <a:tc>
+                  <a:txBody>
+                    <a:bodyPr/>
+                    <a:lstStyle/>
+                    <a:p>
+                      <a:pPr lvl="0" indent="0" marL="0">
+                        <a:buNone/>
+                      </a:pPr>
+                      <a:r>
+                        <a:rPr/>
+                        <a:t>1529.50</a:t>
+                      </a:r>
+                    </a:p>
+                  </a:txBody>
+                </a:tc>
+                <a:tc>
+                  <a:txBody>
+                    <a:bodyPr/>
+                    <a:lstStyle/>
+                    <a:p>
+                      <a:pPr lvl="0" indent="0" marL="0">
+                        <a:buNone/>
+                      </a:pPr>
+                      <a:r>
+                        <a:rPr/>
+                        <a:t>7638.76</a:t>
+                      </a:r>
+                    </a:p>
+                  </a:txBody>
+                </a:tc>
+              </a:tr>
+              <a:tr h="0">
+                <a:tc>
+                  <a:txBody>
+                    <a:bodyPr/>
+                    <a:lstStyle/>
+                    <a:p>
+                      <a:pPr lvl="0" indent="0" marL="0">
+                        <a:buNone/>
+                      </a:pPr>
+                      <a:r>
+                        <a:rPr/>
+                        <a:t>107642</a:t>
+                      </a:r>
+                    </a:p>
+                  </a:txBody>
+                </a:tc>
+                <a:tc>
+                  <a:txBody>
+                    <a:bodyPr/>
+                    <a:lstStyle/>
+                    <a:p>
+                      <a:pPr lvl="0" indent="0" marL="0">
+                        <a:buNone/>
+                      </a:pPr>
+                      <a:r>
+                        <a:rPr/>
+                        <a:t>461</a:t>
+                      </a:r>
+                    </a:p>
+                  </a:txBody>
+                </a:tc>
+                <a:tc>
+                  <a:txBody>
+                    <a:bodyPr/>
+                    <a:lstStyle/>
+                    <a:p>
+                      <a:pPr lvl="0" indent="0" marL="0">
+                        <a:buNone/>
+                      </a:pPr>
+                      <a:r>
+                        <a:rPr/>
+                        <a:t>10.0</a:t>
+                      </a:r>
+                    </a:p>
+                  </a:txBody>
+                </a:tc>
+                <a:tc>
+                  <a:txBody>
+                    <a:bodyPr/>
+                    <a:lstStyle/>
+                    <a:p>
+                      <a:pPr lvl="0" indent="0" marL="0">
+                        <a:buNone/>
+                      </a:pPr>
+                      <a:r>
+                        <a:rPr/>
+                        <a:t>66.5</a:t>
+                      </a:r>
+                    </a:p>
+                  </a:txBody>
+                </a:tc>
+                <a:tc>
+                  <a:txBody>
+                    <a:bodyPr/>
+                    <a:lstStyle/>
+                    <a:p>
+                      <a:pPr lvl="0" indent="0" marL="0">
+                        <a:buNone/>
+                      </a:pPr>
+                      <a:r>
+                        <a:rPr/>
+                        <a:t>565.80</a:t>
+                      </a:r>
+                    </a:p>
+                  </a:txBody>
+                </a:tc>
+                <a:tc>
+                  <a:txBody>
+                    <a:bodyPr/>
+                    <a:lstStyle/>
+                    <a:p>
+                      <a:pPr lvl="0" indent="0" marL="0">
+                        <a:buNone/>
+                      </a:pPr>
+                      <a:r>
+                        <a:rPr/>
+                        <a:t>sugarberry</a:t>
+                      </a:r>
+                    </a:p>
+                  </a:txBody>
+                </a:tc>
+                <a:tc>
+                  <a:txBody>
+                    <a:bodyPr/>
+                    <a:lstStyle/>
+                    <a:p>
+                      <a:pPr lvl="0" indent="0" marL="0">
+                        <a:buNone/>
+                      </a:pPr>
+                      <a:r>
+                        <a:rPr/>
+                        <a:t>5222.893375</a:t>
+                      </a:r>
+                    </a:p>
+                  </a:txBody>
+                </a:tc>
+                <a:tc>
+                  <a:txBody>
+                    <a:bodyPr/>
+                    <a:lstStyle/>
+                    <a:p>
+                      <a:pPr lvl="0" indent="0" marL="0">
+                        <a:buNone/>
+                      </a:pPr>
+                      <a:r>
+                        <a:rPr/>
+                        <a:t>665.00</a:t>
+                      </a:r>
+                    </a:p>
+                  </a:txBody>
+                </a:tc>
+                <a:tc>
+                  <a:txBody>
+                    <a:bodyPr/>
+                    <a:lstStyle/>
+                    <a:p>
+                      <a:pPr lvl="0" indent="0" marL="0">
+                        <a:buNone/>
+                      </a:pPr>
+                      <a:r>
+                        <a:rPr/>
+                        <a:t>4422.25</a:t>
+                      </a:r>
+                    </a:p>
+                  </a:txBody>
+                </a:tc>
+              </a:tr>
+              <a:tr h="0">
+                <a:tc>
+                  <a:txBody>
+                    <a:bodyPr/>
+                    <a:lstStyle/>
+                    <a:p>
+                      <a:pPr lvl="0" indent="0" marL="0">
+                        <a:buNone/>
+                      </a:pPr>
+                      <a:r>
+                        <a:rPr/>
+                        <a:t>107643</a:t>
+                      </a:r>
+                    </a:p>
+                  </a:txBody>
+                </a:tc>
+                <a:tc>
+                  <a:txBody>
+                    <a:bodyPr/>
+                    <a:lstStyle/>
+                    <a:p>
+                      <a:pPr lvl="0" indent="0" marL="0">
+                        <a:buNone/>
+                      </a:pPr>
+                      <a:r>
+                        <a:rPr/>
+                        <a:t>461</a:t>
+                      </a:r>
+                    </a:p>
+                  </a:txBody>
+                </a:tc>
+                <a:tc>
+                  <a:txBody>
+                    <a:bodyPr/>
+                    <a:lstStyle/>
+                    <a:p>
+                      <a:pPr lvl="0" indent="0" marL="0">
+                        <a:buNone/>
+                      </a:pPr>
+                      <a:r>
+                        <a:rPr/>
+                        <a:t>6.2</a:t>
+                      </a:r>
+                    </a:p>
+                  </a:txBody>
+                </a:tc>
+                <a:tc>
+                  <a:txBody>
+                    <a:bodyPr/>
+                    <a:lstStyle/>
+                    <a:p>
+                      <a:pPr lvl="0" indent="0" marL="0">
+                        <a:buNone/>
+                      </a:pPr>
+                      <a:r>
+                        <a:rPr/>
+                        <a:t>54.2</a:t>
+                      </a:r>
+                    </a:p>
+                  </a:txBody>
+                </a:tc>
+                <a:tc>
+                  <a:txBody>
+                    <a:bodyPr/>
+                    <a:lstStyle/>
+                    <a:p>
+                      <a:pPr lvl="0" indent="0" marL="0">
+                        <a:buNone/>
+                      </a:pPr>
+                      <a:r>
+                        <a:rPr/>
+                        <a:t>191.04</a:t>
+                      </a:r>
+                    </a:p>
+                  </a:txBody>
+                </a:tc>
+                <a:tc>
+                  <a:txBody>
+                    <a:bodyPr/>
+                    <a:lstStyle/>
+                    <a:p>
+                      <a:pPr lvl="0" indent="0" marL="0">
+                        <a:buNone/>
+                      </a:pPr>
+                      <a:r>
+                        <a:rPr/>
+                        <a:t>sugarberry</a:t>
+                      </a:r>
+                    </a:p>
+                  </a:txBody>
+                </a:tc>
+                <a:tc>
+                  <a:txBody>
+                    <a:bodyPr/>
+                    <a:lstStyle/>
+                    <a:p>
+                      <a:pPr lvl="0" indent="0" marL="0">
+                        <a:buNone/>
+                      </a:pPr>
+                      <a:r>
+                        <a:rPr/>
+                        <a:t>1636.334851</a:t>
+                      </a:r>
+                    </a:p>
+                  </a:txBody>
+                </a:tc>
+                <a:tc>
+                  <a:txBody>
+                    <a:bodyPr/>
+                    <a:lstStyle/>
+                    <a:p>
+                      <a:pPr lvl="0" indent="0" marL="0">
+                        <a:buNone/>
+                      </a:pPr>
+                      <a:r>
+                        <a:rPr/>
+                        <a:t>336.04</a:t>
+                      </a:r>
+                    </a:p>
+                  </a:txBody>
+                </a:tc>
+                <a:tc>
+                  <a:txBody>
+                    <a:bodyPr/>
+                    <a:lstStyle/>
+                    <a:p>
+                      <a:pPr lvl="0" indent="0" marL="0">
+                        <a:buNone/>
+                      </a:pPr>
+                      <a:r>
+                        <a:rPr/>
+                        <a:t>2937.64</a:t>
+                      </a:r>
+                    </a:p>
+                  </a:txBody>
+                </a:tc>
+              </a:tr>
+              <a:tr h="0">
+                <a:tc>
+                  <a:txBody>
+                    <a:bodyPr/>
+                    <a:lstStyle/>
+                    <a:p>
+                      <a:pPr lvl="0" indent="0" marL="0">
+                        <a:buNone/>
+                      </a:pPr>
+                      <a:r>
+                        <a:rPr/>
+                        <a:t>107644</a:t>
+                      </a:r>
+                    </a:p>
+                  </a:txBody>
+                </a:tc>
+                <a:tc>
+                  <a:txBody>
+                    <a:bodyPr/>
+                    <a:lstStyle/>
+                    <a:p>
+                      <a:pPr lvl="0" indent="0" marL="0">
+                        <a:buNone/>
+                      </a:pPr>
+                      <a:r>
+                        <a:rPr/>
+                        <a:t>461</a:t>
+                      </a:r>
+                    </a:p>
+                  </a:txBody>
+                </a:tc>
+                <a:tc>
+                  <a:txBody>
+                    <a:bodyPr/>
+                    <a:lstStyle/>
+                    <a:p>
+                      <a:pPr lvl="0" indent="0" marL="0">
+                        <a:buNone/>
+                      </a:pPr>
+                      <a:r>
+                        <a:rPr/>
+                        <a:t>16.0</a:t>
+                      </a:r>
+                    </a:p>
+                  </a:txBody>
+                </a:tc>
+                <a:tc>
+                  <a:txBody>
+                    <a:bodyPr/>
+                    <a:lstStyle/>
+                    <a:p>
+                      <a:pPr lvl="0" indent="0" marL="0">
+                        <a:buNone/>
+                      </a:pPr>
+                      <a:r>
+                        <a:rPr/>
+                        <a:t>82.5</a:t>
+                      </a:r>
+                    </a:p>
+                  </a:txBody>
+                </a:tc>
+                <a:tc>
+                  <a:txBody>
+                    <a:bodyPr/>
+                    <a:lstStyle/>
+                    <a:p>
+                      <a:pPr lvl="0" indent="0" marL="0">
+                        <a:buNone/>
+                      </a:pPr>
+                      <a:r>
+                        <a:rPr/>
+                        <a:t>1632.64</a:t>
+                      </a:r>
+                    </a:p>
+                  </a:txBody>
+                </a:tc>
+                <a:tc>
+                  <a:txBody>
+                    <a:bodyPr/>
+                    <a:lstStyle/>
+                    <a:p>
+                      <a:pPr lvl="0" indent="0" marL="0">
+                        <a:buNone/>
+                      </a:pPr>
+                      <a:r>
+                        <a:rPr/>
+                        <a:t>sugarberry</a:t>
+                      </a:r>
+                    </a:p>
+                  </a:txBody>
+                </a:tc>
+                <a:tc>
+                  <a:txBody>
+                    <a:bodyPr/>
+                    <a:lstStyle/>
+                    <a:p>
+                      <a:pPr lvl="0" indent="0" marL="0">
+                        <a:buNone/>
+                      </a:pPr>
+                      <a:r>
+                        <a:rPr/>
+                        <a:t>16587.595200</a:t>
+                      </a:r>
+                    </a:p>
+                  </a:txBody>
+                </a:tc>
+                <a:tc>
+                  <a:txBody>
+                    <a:bodyPr/>
+                    <a:lstStyle/>
+                    <a:p>
+                      <a:pPr lvl="0" indent="0" marL="0">
+                        <a:buNone/>
+                      </a:pPr>
+                      <a:r>
+                        <a:rPr/>
+                        <a:t>1320.00</a:t>
+                      </a:r>
+                    </a:p>
+                  </a:txBody>
+                </a:tc>
+                <a:tc>
+                  <a:txBody>
+                    <a:bodyPr/>
+                    <a:lstStyle/>
+                    <a:p>
+                      <a:pPr lvl="0" indent="0" marL="0">
+                        <a:buNone/>
+                      </a:pPr>
+                      <a:r>
+                        <a:rPr/>
+                        <a:t>6806.25</a:t>
+                      </a:r>
+                    </a:p>
+                  </a:txBody>
+                </a:tc>
+              </a:tr>
+              <a:tr h="0">
+                <a:tc>
+                  <a:txBody>
+                    <a:bodyPr/>
+                    <a:lstStyle/>
+                    <a:p>
+                      <a:pPr lvl="0" indent="0" marL="0">
+                        <a:buNone/>
+                      </a:pPr>
+                      <a:r>
+                        <a:rPr/>
+                        <a:t>107645</a:t>
+                      </a:r>
+                    </a:p>
+                  </a:txBody>
+                </a:tc>
+                <a:tc>
+                  <a:txBody>
+                    <a:bodyPr/>
+                    <a:lstStyle/>
+                    <a:p>
+                      <a:pPr lvl="0" indent="0" marL="0">
+                        <a:buNone/>
+                      </a:pPr>
+                      <a:r>
+                        <a:rPr/>
+                        <a:t>461</a:t>
+                      </a:r>
+                    </a:p>
+                  </a:txBody>
+                </a:tc>
+                <a:tc>
+                  <a:txBody>
+                    <a:bodyPr/>
+                    <a:lstStyle/>
+                    <a:p>
+                      <a:pPr lvl="0" indent="0" marL="0">
+                        <a:buNone/>
+                      </a:pPr>
+                      <a:r>
+                        <a:rPr/>
+                        <a:t>16.7</a:t>
+                      </a:r>
+                    </a:p>
+                  </a:txBody>
+                </a:tc>
+                <a:tc>
+                  <a:txBody>
+                    <a:bodyPr/>
+                    <a:lstStyle/>
+                    <a:p>
+                      <a:pPr lvl="0" indent="0" marL="0">
+                        <a:buNone/>
+                      </a:pPr>
+                      <a:r>
+                        <a:rPr/>
+                        <a:t>76.5</a:t>
+                      </a:r>
+                    </a:p>
+                  </a:txBody>
+                </a:tc>
+                <a:tc>
+                  <a:txBody>
+                    <a:bodyPr/>
+                    <a:lstStyle/>
+                    <a:p>
+                      <a:pPr lvl="0" indent="0" marL="0">
+                        <a:buNone/>
+                      </a:pPr>
+                      <a:r>
+                        <a:rPr/>
+                        <a:t>1644.66</a:t>
+                      </a:r>
+                    </a:p>
+                  </a:txBody>
+                </a:tc>
+                <a:tc>
+                  <a:txBody>
+                    <a:bodyPr/>
+                    <a:lstStyle/>
+                    <a:p>
+                      <a:pPr lvl="0" indent="0" marL="0">
+                        <a:buNone/>
+                      </a:pPr>
+                      <a:r>
+                        <a:rPr/>
+                        <a:t>sugarberry</a:t>
+                      </a:r>
+                    </a:p>
+                  </a:txBody>
+                </a:tc>
+                <a:tc>
+                  <a:txBody>
+                    <a:bodyPr/>
+                    <a:lstStyle/>
+                    <a:p>
+                      <a:pPr lvl="0" indent="0" marL="0">
+                        <a:buNone/>
+                      </a:pPr>
+                      <a:r>
+                        <a:rPr/>
+                        <a:t>16756.522421</a:t>
+                      </a:r>
+                    </a:p>
+                  </a:txBody>
+                </a:tc>
+                <a:tc>
+                  <a:txBody>
+                    <a:bodyPr/>
+                    <a:lstStyle/>
+                    <a:p>
+                      <a:pPr lvl="0" indent="0" marL="0">
+                        <a:buNone/>
+                      </a:pPr>
+                      <a:r>
+                        <a:rPr/>
+                        <a:t>1277.55</a:t>
+                      </a:r>
+                    </a:p>
+                  </a:txBody>
+                </a:tc>
+                <a:tc>
+                  <a:txBody>
+                    <a:bodyPr/>
+                    <a:lstStyle/>
+                    <a:p>
+                      <a:pPr lvl="0" indent="0" marL="0">
+                        <a:buNone/>
+                      </a:pPr>
+                      <a:r>
+                        <a:rPr/>
+                        <a:t>5852.25</a:t>
+                      </a:r>
+                    </a:p>
+                  </a:txBody>
+                </a:tc>
+              </a:tr>
+            </a:tbl>
+          </a:graphicData>
+        </a:graphic>
+      </p:graphicFrame>
+    </p:spTree>
+  </p:cSld>
+</p:sld>
+</file>
+
+<file path=ppt/slides/slide23.xml><?xml version="1.0" encoding="utf-8"?>
+<p:sld xmlns:a="http://schemas.openxmlformats.org/drawingml/2006/main" xmlns:r="http://schemas.openxmlformats.org/officeDocument/2006/relationships" xmlns:p="http://schemas.openxmlformats.org/presentationml/2006/main">
+  <p:cSld>
+    <p:spTree>
+      <p:nvGrpSpPr>
+        <p:cNvPr id="1" name=""/>
+        <p:cNvGrpSpPr/>
+        <p:nvPr/>
+      </p:nvGrpSpPr>
+      <p:grpSpPr>
+        <a:xfrm>
+          <a:off x="0" y="0"/>
+          <a:ext cx="0" cy="0"/>
+          <a:chOff x="0" y="0"/>
+          <a:chExt cx="0" cy="0"/>
+        </a:xfrm>
+      </p:grpSpPr>
+      <p:sp>
+        <p:nvSpPr>
+          <p:cNvPr id="2" name="Title 1"/>
+          <p:cNvSpPr>
+            <a:spLocks noGrp="1"/>
+          </p:cNvSpPr>
+          <p:nvPr>
+            <p:ph type="title"/>
+          </p:nvPr>
+        </p:nvSpPr>
+        <p:spPr/>
+        <p:txBody>
+          <a:bodyPr/>
+          <a:lstStyle/>
+          <a:p>
+            <a:pPr lvl="0" indent="0" marL="0">
+              <a:buNone/>
+            </a:pPr>
+            <a:r>
+              <a:rPr/>
+              <a:t>Testing and comparing models</a:t>
+            </a:r>
+          </a:p>
+        </p:txBody>
+      </p:sp>
+      <p:sp>
+        <p:nvSpPr>
+          <p:cNvPr id="3" name="Content Placeholder 2"/>
+          <p:cNvSpPr>
+            <a:spLocks noGrp="1"/>
+          </p:cNvSpPr>
+          <p:nvPr>
+            <p:ph idx="1"/>
+          </p:nvPr>
+        </p:nvSpPr>
+        <p:spPr/>
+        <p:txBody>
+          <a:bodyPr/>
+          <a:lstStyle/>
+          <a:p>
+            <a:pPr lvl="0" indent="0">
+              <a:buNone/>
+            </a:pPr>
+            <a:r>
+              <a:rPr>
+                <a:latin typeface="Courier"/>
+              </a:rPr>
+              <a:t>Height squared average RMSLE: 0.1718436576886068
+Height * diameter interacion average RMSLE: 0.15623129644085285
+Volume feature average RMSLE: 0.15545015821636968</a:t>
+            </a:r>
+          </a:p>
+        </p:txBody>
+      </p:sp>
+    </p:spTree>
+  </p:cSld>
+</p:sld>
+</file>
+
+<file path=ppt/slides/slide24.xml><?xml version="1.0" encoding="utf-8"?>
 <p:sld xmlns:a="http://schemas.openxmlformats.org/drawingml/2006/main" xmlns:r="http://schemas.openxmlformats.org/officeDocument/2006/relationships" xmlns:p="http://schemas.openxmlformats.org/presentationml/2006/main">
   <p:cSld>
     <p:spTree>

--- a/Project-3/presentation.pptx
+++ b/Project-3/presentation.pptx
@@ -27,6 +27,9 @@
     <p:sldId id="275" r:id="rId21"/>
     <p:sldId id="276" r:id="rId22"/>
     <p:sldId id="277" r:id="rId23"/>
+    <p:sldId id="278" r:id="rId24"/>
+    <p:sldId id="279" r:id="rId25"/>
+    <p:sldId id="280" r:id="rId26"/>
   </p:sldIdLst>
   <p:sldSz cx="9144000" cy="5143500" type="screen16x9"/>
   <p:notesSz cx="6858000" cy="9144000"/>
@@ -3485,14 +3488,14 @@
             <a:pPr lvl="0"/>
             <a:r>
               <a:rPr/>
-              <a:t>When predicting tree biomass, employ the performance metric root mean square logarithmic error since biomass data varies greatly, ranging from tiny saplings to enormous trees, majority of trees having exponential growth.</a:t>
+              <a:t>We choose kNN regression over linear regression because when looking at the graphs Dean made, we saw that the tree diameter/height vs. biomass graphs all have exponential growth.</a:t>
             </a:r>
           </a:p>
           <a:p>
             <a:pPr lvl="0"/>
             <a:r>
               <a:rPr/>
-              <a:t>We chose kNN regression over linear regression because when looking at the graphs Dean presented, we saw that the tree diameter/height vs. biomass graphs all have exponential growth.</a:t>
+              <a:t>When relations between biomass and trees’ diameter and height are complex and nonlinear, data is abundant, and the model needs to be adaptive without making major changes in the model. kNN excels in capturing patterns and irregular patterns.</a:t>
             </a:r>
           </a:p>
         </p:txBody>
@@ -3539,7 +3542,7 @@
             </a:pPr>
             <a:r>
               <a:rPr/>
-              <a:t>Consultation pt 2</a:t>
+              <a:t>Performance Metric</a:t>
             </a:r>
           </a:p>
         </p:txBody>
@@ -3562,7 +3565,18 @@
             <a:pPr lvl="0"/>
             <a:r>
               <a:rPr/>
-              <a:t>When relations between biomass and trees diameter and height are complex and non linear, data is abundent, and the model needs to be adaptive with out maksing major changes in the model. kNN excels in capturing patterns and irregular patterns.</a:t>
+              <a:t>When predicting tree biomass, we chose Root Mean Square Logarithmic Error for our performance metric since biomass data varies greatly, ranging from tiny saplings to enormous trees, and trees have exponential growth.</a:t>
+            </a:r>
+          </a:p>
+          <a:p>
+            <a:pPr lvl="0"/>
+            <a:r>
+              <a:rPr b="1"/>
+              <a:t>RMSLE over RMSE</a:t>
+            </a:r>
+            <a:r>
+              <a:rPr/>
+              <a:t>: focuses on percentage errors, making it fair to both small and large trees, unlike RMSE, which we believe penalizes errors on big trees. Fitting biomass estimations where scale matters more than absolute error. RMSLE provides a more balanced evaluation that considers the unique characteristics of tree biomass data.</a:t>
             </a:r>
           </a:p>
         </p:txBody>
@@ -3609,45 +3623,963 @@
             </a:pPr>
             <a:r>
               <a:rPr/>
-              <a:t>Performance Metric</a:t>
+              <a:t>Project Manager Model</a:t>
             </a:r>
           </a:p>
         </p:txBody>
       </p:sp>
-      <p:sp>
-        <p:nvSpPr>
-          <p:cNvPr id="3" name="Content Placeholder 2"/>
-          <p:cNvSpPr>
-            <a:spLocks noGrp="1"/>
-          </p:cNvSpPr>
+      <p:graphicFrame>
+        <p:nvGraphicFramePr>
+          <p:cNvPr id="6" name="Content Placeholder 5"/>
+          <p:cNvGraphicFramePr>
+            <a:graphicFrameLocks noGrp="1"/>
+          </p:cNvGraphicFramePr>
           <p:nvPr>
             <p:ph idx="1"/>
           </p:nvPr>
-        </p:nvSpPr>
-        <p:spPr/>
-        <p:txBody>
-          <a:bodyPr/>
-          <a:lstStyle/>
-          <a:p>
-            <a:pPr lvl="0"/>
-            <a:r>
-              <a:rPr b="1"/>
-              <a:t>RMSLE over RMSE</a:t>
-            </a:r>
-            <a:r>
-              <a:rPr/>
-              <a:t>: focuses on percentage errors, making it fair to both small and large trees, unlike RMSE, which we believe penalizes errors on big trees. Fitting biomass estimations where scale matters more than absolute error.</a:t>
-            </a:r>
-          </a:p>
-          <a:p>
-            <a:pPr lvl="0"/>
-            <a:r>
-              <a:rPr/>
-              <a:t>By prioritizing percentage errors, RMSLE provides a more balanced evaluation that considers the unique characteristics of tree biomass data.</a:t>
-            </a:r>
-          </a:p>
-        </p:txBody>
-      </p:sp>
+        </p:nvGraphicFramePr>
+        <p:xfrm>
+          <a:off x="457200" y="1193800"/>
+          <a:ext cx="8229600" cy="3390900"/>
+        </p:xfrm>
+        <a:graphic>
+          <a:graphicData uri="http://schemas.openxmlformats.org/drawingml/2006/table">
+            <a:tbl>
+              <a:tblPr firstRow="1" bandRow="1">
+                <a:tableStyleId>{5C22544A-7EE6-4342-B048-85BDC9FD1C3A}</a:tableStyleId>
+              </a:tblPr>
+              <a:tblGrid>
+                <a:gridCol w="1371600"/>
+                <a:gridCol w="1371600"/>
+                <a:gridCol w="1371600"/>
+                <a:gridCol w="1371600"/>
+                <a:gridCol w="1371600"/>
+                <a:gridCol w="1371600"/>
+              </a:tblGrid>
+              <a:tr h="0">
+                <a:tc>
+                  <a:txBody>
+                    <a:bodyPr/>
+                    <a:lstStyle/>
+                    <a:p>
+                      <a:endParaRPr/>
+                    </a:p>
+                  </a:txBody>
+                  <a:tcPr/>
+                </a:tc>
+                <a:tc>
+                  <a:txBody>
+                    <a:bodyPr/>
+                    <a:lstStyle/>
+                    <a:p>
+                      <a:pPr lvl="0" indent="0" marL="0">
+                        <a:buNone/>
+                      </a:pPr>
+                      <a:r>
+                        <a:rPr/>
+                        <a:t>Species</a:t>
+                      </a:r>
+                    </a:p>
+                  </a:txBody>
+                  <a:tcPr/>
+                </a:tc>
+                <a:tc>
+                  <a:txBody>
+                    <a:bodyPr/>
+                    <a:lstStyle/>
+                    <a:p>
+                      <a:pPr lvl="0" indent="0" marL="0">
+                        <a:buNone/>
+                      </a:pPr>
+                      <a:r>
+                        <a:rPr/>
+                        <a:t>k</a:t>
+                      </a:r>
+                    </a:p>
+                  </a:txBody>
+                  <a:tcPr/>
+                </a:tc>
+                <a:tc>
+                  <a:txBody>
+                    <a:bodyPr/>
+                    <a:lstStyle/>
+                    <a:p>
+                      <a:pPr lvl="0" indent="0" marL="0">
+                        <a:buNone/>
+                      </a:pPr>
+                      <a:r>
+                        <a:rPr/>
+                        <a:t>RMSE</a:t>
+                      </a:r>
+                    </a:p>
+                  </a:txBody>
+                  <a:tcPr/>
+                </a:tc>
+                <a:tc>
+                  <a:txBody>
+                    <a:bodyPr/>
+                    <a:lstStyle/>
+                    <a:p>
+                      <a:pPr lvl="0" indent="0" marL="0">
+                        <a:buNone/>
+                      </a:pPr>
+                      <a:r>
+                        <a:rPr/>
+                        <a:t>MAE</a:t>
+                      </a:r>
+                    </a:p>
+                  </a:txBody>
+                  <a:tcPr/>
+                </a:tc>
+                <a:tc>
+                  <a:txBody>
+                    <a:bodyPr/>
+                    <a:lstStyle/>
+                    <a:p>
+                      <a:pPr lvl="0" indent="0" marL="0">
+                        <a:buNone/>
+                      </a:pPr>
+                      <a:r>
+                        <a:rPr/>
+                        <a:t>RMSLE</a:t>
+                      </a:r>
+                    </a:p>
+                  </a:txBody>
+                  <a:tcPr/>
+                </a:tc>
+              </a:tr>
+              <a:tr h="0">
+                <a:tc>
+                  <a:txBody>
+                    <a:bodyPr/>
+                    <a:lstStyle/>
+                    <a:p>
+                      <a:pPr lvl="0" indent="0" marL="0">
+                        <a:buNone/>
+                      </a:pPr>
+                      <a:r>
+                        <a:rPr/>
+                        <a:t>0</a:t>
+                      </a:r>
+                    </a:p>
+                  </a:txBody>
+                </a:tc>
+                <a:tc>
+                  <a:txBody>
+                    <a:bodyPr/>
+                    <a:lstStyle/>
+                    <a:p>
+                      <a:pPr lvl="0" indent="0" marL="0">
+                        <a:buNone/>
+                      </a:pPr>
+                      <a:r>
+                        <a:rPr/>
+                        <a:t>balsam fir</a:t>
+                      </a:r>
+                    </a:p>
+                  </a:txBody>
+                </a:tc>
+                <a:tc>
+                  <a:txBody>
+                    <a:bodyPr/>
+                    <a:lstStyle/>
+                    <a:p>
+                      <a:pPr lvl="0" indent="0" marL="0">
+                        <a:buNone/>
+                      </a:pPr>
+                      <a:r>
+                        <a:rPr/>
+                        <a:t>2</a:t>
+                      </a:r>
+                    </a:p>
+                  </a:txBody>
+                </a:tc>
+                <a:tc>
+                  <a:txBody>
+                    <a:bodyPr/>
+                    <a:lstStyle/>
+                    <a:p>
+                      <a:pPr lvl="0" indent="0" marL="0">
+                        <a:buNone/>
+                      </a:pPr>
+                      <a:r>
+                        <a:rPr/>
+                        <a:t>125.827396</a:t>
+                      </a:r>
+                    </a:p>
+                  </a:txBody>
+                </a:tc>
+                <a:tc>
+                  <a:txBody>
+                    <a:bodyPr/>
+                    <a:lstStyle/>
+                    <a:p>
+                      <a:pPr lvl="0" indent="0" marL="0">
+                        <a:buNone/>
+                      </a:pPr>
+                      <a:r>
+                        <a:rPr/>
+                        <a:t>34.820565</a:t>
+                      </a:r>
+                    </a:p>
+                  </a:txBody>
+                </a:tc>
+                <a:tc>
+                  <a:txBody>
+                    <a:bodyPr/>
+                    <a:lstStyle/>
+                    <a:p>
+                      <a:pPr lvl="0" indent="0" marL="0">
+                        <a:buNone/>
+                      </a:pPr>
+                      <a:r>
+                        <a:rPr/>
+                        <a:t>0.119617</a:t>
+                      </a:r>
+                    </a:p>
+                  </a:txBody>
+                </a:tc>
+              </a:tr>
+              <a:tr h="0">
+                <a:tc>
+                  <a:txBody>
+                    <a:bodyPr/>
+                    <a:lstStyle/>
+                    <a:p>
+                      <a:pPr lvl="0" indent="0" marL="0">
+                        <a:buNone/>
+                      </a:pPr>
+                      <a:r>
+                        <a:rPr/>
+                        <a:t>1</a:t>
+                      </a:r>
+                    </a:p>
+                  </a:txBody>
+                </a:tc>
+                <a:tc>
+                  <a:txBody>
+                    <a:bodyPr/>
+                    <a:lstStyle/>
+                    <a:p>
+                      <a:pPr lvl="0" indent="0" marL="0">
+                        <a:buNone/>
+                      </a:pPr>
+                      <a:r>
+                        <a:rPr/>
+                        <a:t>balsam fir</a:t>
+                      </a:r>
+                    </a:p>
+                  </a:txBody>
+                </a:tc>
+                <a:tc>
+                  <a:txBody>
+                    <a:bodyPr/>
+                    <a:lstStyle/>
+                    <a:p>
+                      <a:pPr lvl="0" indent="0" marL="0">
+                        <a:buNone/>
+                      </a:pPr>
+                      <a:r>
+                        <a:rPr/>
+                        <a:t>3</a:t>
+                      </a:r>
+                    </a:p>
+                  </a:txBody>
+                </a:tc>
+                <a:tc>
+                  <a:txBody>
+                    <a:bodyPr/>
+                    <a:lstStyle/>
+                    <a:p>
+                      <a:pPr lvl="0" indent="0" marL="0">
+                        <a:buNone/>
+                      </a:pPr>
+                      <a:r>
+                        <a:rPr/>
+                        <a:t>129.650855</a:t>
+                      </a:r>
+                    </a:p>
+                  </a:txBody>
+                </a:tc>
+                <a:tc>
+                  <a:txBody>
+                    <a:bodyPr/>
+                    <a:lstStyle/>
+                    <a:p>
+                      <a:pPr lvl="0" indent="0" marL="0">
+                        <a:buNone/>
+                      </a:pPr>
+                      <a:r>
+                        <a:rPr/>
+                        <a:t>36.628377</a:t>
+                      </a:r>
+                    </a:p>
+                  </a:txBody>
+                </a:tc>
+                <a:tc>
+                  <a:txBody>
+                    <a:bodyPr/>
+                    <a:lstStyle/>
+                    <a:p>
+                      <a:pPr lvl="0" indent="0" marL="0">
+                        <a:buNone/>
+                      </a:pPr>
+                      <a:r>
+                        <a:rPr/>
+                        <a:t>0.123679</a:t>
+                      </a:r>
+                    </a:p>
+                  </a:txBody>
+                </a:tc>
+              </a:tr>
+              <a:tr h="0">
+                <a:tc>
+                  <a:txBody>
+                    <a:bodyPr/>
+                    <a:lstStyle/>
+                    <a:p>
+                      <a:pPr lvl="0" indent="0" marL="0">
+                        <a:buNone/>
+                      </a:pPr>
+                      <a:r>
+                        <a:rPr/>
+                        <a:t>2</a:t>
+                      </a:r>
+                    </a:p>
+                  </a:txBody>
+                </a:tc>
+                <a:tc>
+                  <a:txBody>
+                    <a:bodyPr/>
+                    <a:lstStyle/>
+                    <a:p>
+                      <a:pPr lvl="0" indent="0" marL="0">
+                        <a:buNone/>
+                      </a:pPr>
+                      <a:r>
+                        <a:rPr/>
+                        <a:t>balsam fir</a:t>
+                      </a:r>
+                    </a:p>
+                  </a:txBody>
+                </a:tc>
+                <a:tc>
+                  <a:txBody>
+                    <a:bodyPr/>
+                    <a:lstStyle/>
+                    <a:p>
+                      <a:pPr lvl="0" indent="0" marL="0">
+                        <a:buNone/>
+                      </a:pPr>
+                      <a:r>
+                        <a:rPr/>
+                        <a:t>4</a:t>
+                      </a:r>
+                    </a:p>
+                  </a:txBody>
+                </a:tc>
+                <a:tc>
+                  <a:txBody>
+                    <a:bodyPr/>
+                    <a:lstStyle/>
+                    <a:p>
+                      <a:pPr lvl="0" indent="0" marL="0">
+                        <a:buNone/>
+                      </a:pPr>
+                      <a:r>
+                        <a:rPr/>
+                        <a:t>134.599829</a:t>
+                      </a:r>
+                    </a:p>
+                  </a:txBody>
+                </a:tc>
+                <a:tc>
+                  <a:txBody>
+                    <a:bodyPr/>
+                    <a:lstStyle/>
+                    <a:p>
+                      <a:pPr lvl="0" indent="0" marL="0">
+                        <a:buNone/>
+                      </a:pPr>
+                      <a:r>
+                        <a:rPr/>
+                        <a:t>38.884870</a:t>
+                      </a:r>
+                    </a:p>
+                  </a:txBody>
+                </a:tc>
+                <a:tc>
+                  <a:txBody>
+                    <a:bodyPr/>
+                    <a:lstStyle/>
+                    <a:p>
+                      <a:pPr lvl="0" indent="0" marL="0">
+                        <a:buNone/>
+                      </a:pPr>
+                      <a:r>
+                        <a:rPr/>
+                        <a:t>0.133858</a:t>
+                      </a:r>
+                    </a:p>
+                  </a:txBody>
+                </a:tc>
+              </a:tr>
+              <a:tr h="0">
+                <a:tc>
+                  <a:txBody>
+                    <a:bodyPr/>
+                    <a:lstStyle/>
+                    <a:p>
+                      <a:pPr lvl="0" indent="0" marL="0">
+                        <a:buNone/>
+                      </a:pPr>
+                      <a:r>
+                        <a:rPr/>
+                        <a:t>3</a:t>
+                      </a:r>
+                    </a:p>
+                  </a:txBody>
+                </a:tc>
+                <a:tc>
+                  <a:txBody>
+                    <a:bodyPr/>
+                    <a:lstStyle/>
+                    <a:p>
+                      <a:pPr lvl="0" indent="0" marL="0">
+                        <a:buNone/>
+                      </a:pPr>
+                      <a:r>
+                        <a:rPr/>
+                        <a:t>balsam fir</a:t>
+                      </a:r>
+                    </a:p>
+                  </a:txBody>
+                </a:tc>
+                <a:tc>
+                  <a:txBody>
+                    <a:bodyPr/>
+                    <a:lstStyle/>
+                    <a:p>
+                      <a:pPr lvl="0" indent="0" marL="0">
+                        <a:buNone/>
+                      </a:pPr>
+                      <a:r>
+                        <a:rPr/>
+                        <a:t>5</a:t>
+                      </a:r>
+                    </a:p>
+                  </a:txBody>
+                </a:tc>
+                <a:tc>
+                  <a:txBody>
+                    <a:bodyPr/>
+                    <a:lstStyle/>
+                    <a:p>
+                      <a:pPr lvl="0" indent="0" marL="0">
+                        <a:buNone/>
+                      </a:pPr>
+                      <a:r>
+                        <a:rPr/>
+                        <a:t>145.002852</a:t>
+                      </a:r>
+                    </a:p>
+                  </a:txBody>
+                </a:tc>
+                <a:tc>
+                  <a:txBody>
+                    <a:bodyPr/>
+                    <a:lstStyle/>
+                    <a:p>
+                      <a:pPr lvl="0" indent="0" marL="0">
+                        <a:buNone/>
+                      </a:pPr>
+                      <a:r>
+                        <a:rPr/>
+                        <a:t>41.168470</a:t>
+                      </a:r>
+                    </a:p>
+                  </a:txBody>
+                </a:tc>
+                <a:tc>
+                  <a:txBody>
+                    <a:bodyPr/>
+                    <a:lstStyle/>
+                    <a:p>
+                      <a:pPr lvl="0" indent="0" marL="0">
+                        <a:buNone/>
+                      </a:pPr>
+                      <a:r>
+                        <a:rPr/>
+                        <a:t>0.144052</a:t>
+                      </a:r>
+                    </a:p>
+                  </a:txBody>
+                </a:tc>
+              </a:tr>
+              <a:tr h="0">
+                <a:tc>
+                  <a:txBody>
+                    <a:bodyPr/>
+                    <a:lstStyle/>
+                    <a:p>
+                      <a:pPr lvl="0" indent="0" marL="0">
+                        <a:buNone/>
+                      </a:pPr>
+                      <a:r>
+                        <a:rPr/>
+                        <a:t>4</a:t>
+                      </a:r>
+                    </a:p>
+                  </a:txBody>
+                </a:tc>
+                <a:tc>
+                  <a:txBody>
+                    <a:bodyPr/>
+                    <a:lstStyle/>
+                    <a:p>
+                      <a:pPr lvl="0" indent="0" marL="0">
+                        <a:buNone/>
+                      </a:pPr>
+                      <a:r>
+                        <a:rPr/>
+                        <a:t>balsam fir</a:t>
+                      </a:r>
+                    </a:p>
+                  </a:txBody>
+                </a:tc>
+                <a:tc>
+                  <a:txBody>
+                    <a:bodyPr/>
+                    <a:lstStyle/>
+                    <a:p>
+                      <a:pPr lvl="0" indent="0" marL="0">
+                        <a:buNone/>
+                      </a:pPr>
+                      <a:r>
+                        <a:rPr/>
+                        <a:t>6</a:t>
+                      </a:r>
+                    </a:p>
+                  </a:txBody>
+                </a:tc>
+                <a:tc>
+                  <a:txBody>
+                    <a:bodyPr/>
+                    <a:lstStyle/>
+                    <a:p>
+                      <a:pPr lvl="0" indent="0" marL="0">
+                        <a:buNone/>
+                      </a:pPr>
+                      <a:r>
+                        <a:rPr/>
+                        <a:t>147.449208</a:t>
+                      </a:r>
+                    </a:p>
+                  </a:txBody>
+                </a:tc>
+                <a:tc>
+                  <a:txBody>
+                    <a:bodyPr/>
+                    <a:lstStyle/>
+                    <a:p>
+                      <a:pPr lvl="0" indent="0" marL="0">
+                        <a:buNone/>
+                      </a:pPr>
+                      <a:r>
+                        <a:rPr/>
+                        <a:t>40.728609</a:t>
+                      </a:r>
+                    </a:p>
+                  </a:txBody>
+                </a:tc>
+                <a:tc>
+                  <a:txBody>
+                    <a:bodyPr/>
+                    <a:lstStyle/>
+                    <a:p>
+                      <a:pPr lvl="0" indent="0" marL="0">
+                        <a:buNone/>
+                      </a:pPr>
+                      <a:r>
+                        <a:rPr/>
+                        <a:t>0.142813</a:t>
+                      </a:r>
+                    </a:p>
+                  </a:txBody>
+                </a:tc>
+              </a:tr>
+              <a:tr h="0">
+                <a:tc>
+                  <a:txBody>
+                    <a:bodyPr/>
+                    <a:lstStyle/>
+                    <a:p>
+                      <a:pPr lvl="0" indent="0" marL="0">
+                        <a:buNone/>
+                      </a:pPr>
+                      <a:r>
+                        <a:rPr/>
+                        <a:t>5</a:t>
+                      </a:r>
+                    </a:p>
+                  </a:txBody>
+                </a:tc>
+                <a:tc>
+                  <a:txBody>
+                    <a:bodyPr/>
+                    <a:lstStyle/>
+                    <a:p>
+                      <a:pPr lvl="0" indent="0" marL="0">
+                        <a:buNone/>
+                      </a:pPr>
+                      <a:r>
+                        <a:rPr/>
+                        <a:t>balsam fir</a:t>
+                      </a:r>
+                    </a:p>
+                  </a:txBody>
+                </a:tc>
+                <a:tc>
+                  <a:txBody>
+                    <a:bodyPr/>
+                    <a:lstStyle/>
+                    <a:p>
+                      <a:pPr lvl="0" indent="0" marL="0">
+                        <a:buNone/>
+                      </a:pPr>
+                      <a:r>
+                        <a:rPr/>
+                        <a:t>7</a:t>
+                      </a:r>
+                    </a:p>
+                  </a:txBody>
+                </a:tc>
+                <a:tc>
+                  <a:txBody>
+                    <a:bodyPr/>
+                    <a:lstStyle/>
+                    <a:p>
+                      <a:pPr lvl="0" indent="0" marL="0">
+                        <a:buNone/>
+                      </a:pPr>
+                      <a:r>
+                        <a:rPr/>
+                        <a:t>153.474421</a:t>
+                      </a:r>
+                    </a:p>
+                  </a:txBody>
+                </a:tc>
+                <a:tc>
+                  <a:txBody>
+                    <a:bodyPr/>
+                    <a:lstStyle/>
+                    <a:p>
+                      <a:pPr lvl="0" indent="0" marL="0">
+                        <a:buNone/>
+                      </a:pPr>
+                      <a:r>
+                        <a:rPr/>
+                        <a:t>42.215118</a:t>
+                      </a:r>
+                    </a:p>
+                  </a:txBody>
+                </a:tc>
+                <a:tc>
+                  <a:txBody>
+                    <a:bodyPr/>
+                    <a:lstStyle/>
+                    <a:p>
+                      <a:pPr lvl="0" indent="0" marL="0">
+                        <a:buNone/>
+                      </a:pPr>
+                      <a:r>
+                        <a:rPr/>
+                        <a:t>0.149516</a:t>
+                      </a:r>
+                    </a:p>
+                  </a:txBody>
+                </a:tc>
+              </a:tr>
+              <a:tr h="0">
+                <a:tc>
+                  <a:txBody>
+                    <a:bodyPr/>
+                    <a:lstStyle/>
+                    <a:p>
+                      <a:pPr lvl="0" indent="0" marL="0">
+                        <a:buNone/>
+                      </a:pPr>
+                      <a:r>
+                        <a:rPr/>
+                        <a:t>6</a:t>
+                      </a:r>
+                    </a:p>
+                  </a:txBody>
+                </a:tc>
+                <a:tc>
+                  <a:txBody>
+                    <a:bodyPr/>
+                    <a:lstStyle/>
+                    <a:p>
+                      <a:pPr lvl="0" indent="0" marL="0">
+                        <a:buNone/>
+                      </a:pPr>
+                      <a:r>
+                        <a:rPr/>
+                        <a:t>balsam fir</a:t>
+                      </a:r>
+                    </a:p>
+                  </a:txBody>
+                </a:tc>
+                <a:tc>
+                  <a:txBody>
+                    <a:bodyPr/>
+                    <a:lstStyle/>
+                    <a:p>
+                      <a:pPr lvl="0" indent="0" marL="0">
+                        <a:buNone/>
+                      </a:pPr>
+                      <a:r>
+                        <a:rPr/>
+                        <a:t>8</a:t>
+                      </a:r>
+                    </a:p>
+                  </a:txBody>
+                </a:tc>
+                <a:tc>
+                  <a:txBody>
+                    <a:bodyPr/>
+                    <a:lstStyle/>
+                    <a:p>
+                      <a:pPr lvl="0" indent="0" marL="0">
+                        <a:buNone/>
+                      </a:pPr>
+                      <a:r>
+                        <a:rPr/>
+                        <a:t>156.768710</a:t>
+                      </a:r>
+                    </a:p>
+                  </a:txBody>
+                </a:tc>
+                <a:tc>
+                  <a:txBody>
+                    <a:bodyPr/>
+                    <a:lstStyle/>
+                    <a:p>
+                      <a:pPr lvl="0" indent="0" marL="0">
+                        <a:buNone/>
+                      </a:pPr>
+                      <a:r>
+                        <a:rPr/>
+                        <a:t>43.559217</a:t>
+                      </a:r>
+                    </a:p>
+                  </a:txBody>
+                </a:tc>
+                <a:tc>
+                  <a:txBody>
+                    <a:bodyPr/>
+                    <a:lstStyle/>
+                    <a:p>
+                      <a:pPr lvl="0" indent="0" marL="0">
+                        <a:buNone/>
+                      </a:pPr>
+                      <a:r>
+                        <a:rPr/>
+                        <a:t>0.154670</a:t>
+                      </a:r>
+                    </a:p>
+                  </a:txBody>
+                </a:tc>
+              </a:tr>
+              <a:tr h="0">
+                <a:tc>
+                  <a:txBody>
+                    <a:bodyPr/>
+                    <a:lstStyle/>
+                    <a:p>
+                      <a:pPr lvl="0" indent="0" marL="0">
+                        <a:buNone/>
+                      </a:pPr>
+                      <a:r>
+                        <a:rPr/>
+                        <a:t>7</a:t>
+                      </a:r>
+                    </a:p>
+                  </a:txBody>
+                </a:tc>
+                <a:tc>
+                  <a:txBody>
+                    <a:bodyPr/>
+                    <a:lstStyle/>
+                    <a:p>
+                      <a:pPr lvl="0" indent="0" marL="0">
+                        <a:buNone/>
+                      </a:pPr>
+                      <a:r>
+                        <a:rPr/>
+                        <a:t>balsam fir</a:t>
+                      </a:r>
+                    </a:p>
+                  </a:txBody>
+                </a:tc>
+                <a:tc>
+                  <a:txBody>
+                    <a:bodyPr/>
+                    <a:lstStyle/>
+                    <a:p>
+                      <a:pPr lvl="0" indent="0" marL="0">
+                        <a:buNone/>
+                      </a:pPr>
+                      <a:r>
+                        <a:rPr/>
+                        <a:t>9</a:t>
+                      </a:r>
+                    </a:p>
+                  </a:txBody>
+                </a:tc>
+                <a:tc>
+                  <a:txBody>
+                    <a:bodyPr/>
+                    <a:lstStyle/>
+                    <a:p>
+                      <a:pPr lvl="0" indent="0" marL="0">
+                        <a:buNone/>
+                      </a:pPr>
+                      <a:r>
+                        <a:rPr/>
+                        <a:t>161.016214</a:t>
+                      </a:r>
+                    </a:p>
+                  </a:txBody>
+                </a:tc>
+                <a:tc>
+                  <a:txBody>
+                    <a:bodyPr/>
+                    <a:lstStyle/>
+                    <a:p>
+                      <a:pPr lvl="0" indent="0" marL="0">
+                        <a:buNone/>
+                      </a:pPr>
+                      <a:r>
+                        <a:rPr/>
+                        <a:t>44.751469</a:t>
+                      </a:r>
+                    </a:p>
+                  </a:txBody>
+                </a:tc>
+                <a:tc>
+                  <a:txBody>
+                    <a:bodyPr/>
+                    <a:lstStyle/>
+                    <a:p>
+                      <a:pPr lvl="0" indent="0" marL="0">
+                        <a:buNone/>
+                      </a:pPr>
+                      <a:r>
+                        <a:rPr/>
+                        <a:t>0.160504</a:t>
+                      </a:r>
+                    </a:p>
+                  </a:txBody>
+                </a:tc>
+              </a:tr>
+              <a:tr h="0">
+                <a:tc>
+                  <a:txBody>
+                    <a:bodyPr/>
+                    <a:lstStyle/>
+                    <a:p>
+                      <a:pPr lvl="0" indent="0" marL="0">
+                        <a:buNone/>
+                      </a:pPr>
+                      <a:r>
+                        <a:rPr/>
+                        <a:t>8</a:t>
+                      </a:r>
+                    </a:p>
+                  </a:txBody>
+                </a:tc>
+                <a:tc>
+                  <a:txBody>
+                    <a:bodyPr/>
+                    <a:lstStyle/>
+                    <a:p>
+                      <a:pPr lvl="0" indent="0" marL="0">
+                        <a:buNone/>
+                      </a:pPr>
+                      <a:r>
+                        <a:rPr/>
+                        <a:t>balsam fir</a:t>
+                      </a:r>
+                    </a:p>
+                  </a:txBody>
+                </a:tc>
+                <a:tc>
+                  <a:txBody>
+                    <a:bodyPr/>
+                    <a:lstStyle/>
+                    <a:p>
+                      <a:pPr lvl="0" indent="0" marL="0">
+                        <a:buNone/>
+                      </a:pPr>
+                      <a:r>
+                        <a:rPr/>
+                        <a:t>10</a:t>
+                      </a:r>
+                    </a:p>
+                  </a:txBody>
+                </a:tc>
+                <a:tc>
+                  <a:txBody>
+                    <a:bodyPr/>
+                    <a:lstStyle/>
+                    <a:p>
+                      <a:pPr lvl="0" indent="0" marL="0">
+                        <a:buNone/>
+                      </a:pPr>
+                      <a:r>
+                        <a:rPr/>
+                        <a:t>157.999921</a:t>
+                      </a:r>
+                    </a:p>
+                  </a:txBody>
+                </a:tc>
+                <a:tc>
+                  <a:txBody>
+                    <a:bodyPr/>
+                    <a:lstStyle/>
+                    <a:p>
+                      <a:pPr lvl="0" indent="0" marL="0">
+                        <a:buNone/>
+                      </a:pPr>
+                      <a:r>
+                        <a:rPr/>
+                        <a:t>44.694861</a:t>
+                      </a:r>
+                    </a:p>
+                  </a:txBody>
+                </a:tc>
+                <a:tc>
+                  <a:txBody>
+                    <a:bodyPr/>
+                    <a:lstStyle/>
+                    <a:p>
+                      <a:pPr lvl="0" indent="0" marL="0">
+                        <a:buNone/>
+                      </a:pPr>
+                      <a:r>
+                        <a:rPr/>
+                        <a:t>0.160057</a:t>
+                      </a:r>
+                    </a:p>
+                  </a:txBody>
+                </a:tc>
+              </a:tr>
+            </a:tbl>
+          </a:graphicData>
+        </a:graphic>
+      </p:graphicFrame>
     </p:spTree>
   </p:cSld>
 </p:sld>
@@ -3690,1147 +4622,47 @@
             </a:pPr>
             <a:r>
               <a:rPr/>
-              <a:t>Model</a:t>
+              <a:t>Average Root Mean Square Logarithmic Error</a:t>
             </a:r>
           </a:p>
         </p:txBody>
       </p:sp>
-      <p:graphicFrame>
-        <p:nvGraphicFramePr>
-          <p:cNvPr id="6" name="Content Placeholder 5"/>
-          <p:cNvGraphicFramePr>
-            <a:graphicFrameLocks noGrp="1"/>
-          </p:cNvGraphicFramePr>
+      <p:sp>
+        <p:nvSpPr>
+          <p:cNvPr id="3" name="Content Placeholder 2"/>
+          <p:cNvSpPr>
+            <a:spLocks noGrp="1"/>
+          </p:cNvSpPr>
           <p:nvPr>
             <p:ph idx="1"/>
           </p:nvPr>
-        </p:nvGraphicFramePr>
-        <p:xfrm>
-          <a:off x="457200" y="1193800"/>
-          <a:ext cx="8229600" cy="3390900"/>
-        </p:xfrm>
-        <a:graphic>
-          <a:graphicData uri="http://schemas.openxmlformats.org/drawingml/2006/table">
-            <a:tbl>
-              <a:tblPr firstRow="1" bandRow="1">
-                <a:tableStyleId>{5C22544A-7EE6-4342-B048-85BDC9FD1C3A}</a:tableStyleId>
-              </a:tblPr>
-              <a:tblGrid>
-                <a:gridCol w="1371600"/>
-                <a:gridCol w="1371600"/>
-                <a:gridCol w="1371600"/>
-                <a:gridCol w="1371600"/>
-                <a:gridCol w="1371600"/>
-                <a:gridCol w="1371600"/>
-              </a:tblGrid>
-              <a:tr h="0">
-                <a:tc>
-                  <a:txBody>
-                    <a:bodyPr/>
-                    <a:lstStyle/>
-                    <a:p>
-                      <a:endParaRPr/>
-                    </a:p>
-                  </a:txBody>
-                  <a:tcPr/>
-                </a:tc>
-                <a:tc>
-                  <a:txBody>
-                    <a:bodyPr/>
-                    <a:lstStyle/>
-                    <a:p>
-                      <a:pPr lvl="0" indent="0" marL="0">
-                        <a:buNone/>
-                      </a:pPr>
-                      <a:r>
-                        <a:rPr/>
-                        <a:t>Species</a:t>
-                      </a:r>
-                    </a:p>
-                  </a:txBody>
-                  <a:tcPr/>
-                </a:tc>
-                <a:tc>
-                  <a:txBody>
-                    <a:bodyPr/>
-                    <a:lstStyle/>
-                    <a:p>
-                      <a:pPr lvl="0" indent="0" marL="0">
-                        <a:buNone/>
-                      </a:pPr>
-                      <a:r>
-                        <a:rPr/>
-                        <a:t>k</a:t>
-                      </a:r>
-                    </a:p>
-                  </a:txBody>
-                  <a:tcPr/>
-                </a:tc>
-                <a:tc>
-                  <a:txBody>
-                    <a:bodyPr/>
-                    <a:lstStyle/>
-                    <a:p>
-                      <a:pPr lvl="0" indent="0" marL="0">
-                        <a:buNone/>
-                      </a:pPr>
-                      <a:r>
-                        <a:rPr/>
-                        <a:t>RMSE</a:t>
-                      </a:r>
-                    </a:p>
-                  </a:txBody>
-                  <a:tcPr/>
-                </a:tc>
-                <a:tc>
-                  <a:txBody>
-                    <a:bodyPr/>
-                    <a:lstStyle/>
-                    <a:p>
-                      <a:pPr lvl="0" indent="0" marL="0">
-                        <a:buNone/>
-                      </a:pPr>
-                      <a:r>
-                        <a:rPr/>
-                        <a:t>MAE</a:t>
-                      </a:r>
-                    </a:p>
-                  </a:txBody>
-                  <a:tcPr/>
-                </a:tc>
-                <a:tc>
-                  <a:txBody>
-                    <a:bodyPr/>
-                    <a:lstStyle/>
-                    <a:p>
-                      <a:pPr lvl="0" indent="0" marL="0">
-                        <a:buNone/>
-                      </a:pPr>
-                      <a:r>
-                        <a:rPr/>
-                        <a:t>RMSLE</a:t>
-                      </a:r>
-                    </a:p>
-                  </a:txBody>
-                  <a:tcPr/>
-                </a:tc>
-              </a:tr>
-              <a:tr h="0">
-                <a:tc>
-                  <a:txBody>
-                    <a:bodyPr/>
-                    <a:lstStyle/>
-                    <a:p>
-                      <a:pPr lvl="0" indent="0" marL="0">
-                        <a:buNone/>
-                      </a:pPr>
-                      <a:r>
-                        <a:rPr/>
-                        <a:t>0</a:t>
-                      </a:r>
-                    </a:p>
-                  </a:txBody>
-                </a:tc>
-                <a:tc>
-                  <a:txBody>
-                    <a:bodyPr/>
-                    <a:lstStyle/>
-                    <a:p>
-                      <a:pPr lvl="0" indent="0" marL="0">
-                        <a:buNone/>
-                      </a:pPr>
-                      <a:r>
-                        <a:rPr/>
-                        <a:t>balsam fir</a:t>
-                      </a:r>
-                    </a:p>
-                  </a:txBody>
-                </a:tc>
-                <a:tc>
-                  <a:txBody>
-                    <a:bodyPr/>
-                    <a:lstStyle/>
-                    <a:p>
-                      <a:pPr lvl="0" indent="0" marL="0">
-                        <a:buNone/>
-                      </a:pPr>
-                      <a:r>
-                        <a:rPr/>
-                        <a:t>2</a:t>
-                      </a:r>
-                    </a:p>
-                  </a:txBody>
-                </a:tc>
-                <a:tc>
-                  <a:txBody>
-                    <a:bodyPr/>
-                    <a:lstStyle/>
-                    <a:p>
-                      <a:pPr lvl="0" indent="0" marL="0">
-                        <a:buNone/>
-                      </a:pPr>
-                      <a:r>
-                        <a:rPr/>
-                        <a:t>125.825473</a:t>
-                      </a:r>
-                    </a:p>
-                  </a:txBody>
-                </a:tc>
-                <a:tc>
-                  <a:txBody>
-                    <a:bodyPr/>
-                    <a:lstStyle/>
-                    <a:p>
-                      <a:pPr lvl="0" indent="0" marL="0">
-                        <a:buNone/>
-                      </a:pPr>
-                      <a:r>
-                        <a:rPr/>
-                        <a:t>34.801913</a:t>
-                      </a:r>
-                    </a:p>
-                  </a:txBody>
-                </a:tc>
-                <a:tc>
-                  <a:txBody>
-                    <a:bodyPr/>
-                    <a:lstStyle/>
-                    <a:p>
-                      <a:pPr lvl="0" indent="0" marL="0">
-                        <a:buNone/>
-                      </a:pPr>
-                      <a:r>
-                        <a:rPr/>
-                        <a:t>0.119574</a:t>
-                      </a:r>
-                    </a:p>
-                  </a:txBody>
-                </a:tc>
-              </a:tr>
-              <a:tr h="0">
-                <a:tc>
-                  <a:txBody>
-                    <a:bodyPr/>
-                    <a:lstStyle/>
-                    <a:p>
-                      <a:pPr lvl="0" indent="0" marL="0">
-                        <a:buNone/>
-                      </a:pPr>
-                      <a:r>
-                        <a:rPr/>
-                        <a:t>1</a:t>
-                      </a:r>
-                    </a:p>
-                  </a:txBody>
-                </a:tc>
-                <a:tc>
-                  <a:txBody>
-                    <a:bodyPr/>
-                    <a:lstStyle/>
-                    <a:p>
-                      <a:pPr lvl="0" indent="0" marL="0">
-                        <a:buNone/>
-                      </a:pPr>
-                      <a:r>
-                        <a:rPr/>
-                        <a:t>balsam fir</a:t>
-                      </a:r>
-                    </a:p>
-                  </a:txBody>
-                </a:tc>
-                <a:tc>
-                  <a:txBody>
-                    <a:bodyPr/>
-                    <a:lstStyle/>
-                    <a:p>
-                      <a:pPr lvl="0" indent="0" marL="0">
-                        <a:buNone/>
-                      </a:pPr>
-                      <a:r>
-                        <a:rPr/>
-                        <a:t>3</a:t>
-                      </a:r>
-                    </a:p>
-                  </a:txBody>
-                </a:tc>
-                <a:tc>
-                  <a:txBody>
-                    <a:bodyPr/>
-                    <a:lstStyle/>
-                    <a:p>
-                      <a:pPr lvl="0" indent="0" marL="0">
-                        <a:buNone/>
-                      </a:pPr>
-                      <a:r>
-                        <a:rPr/>
-                        <a:t>129.651479</a:t>
-                      </a:r>
-                    </a:p>
-                  </a:txBody>
-                </a:tc>
-                <a:tc>
-                  <a:txBody>
-                    <a:bodyPr/>
-                    <a:lstStyle/>
-                    <a:p>
-                      <a:pPr lvl="0" indent="0" marL="0">
-                        <a:buNone/>
-                      </a:pPr>
-                      <a:r>
-                        <a:rPr/>
-                        <a:t>36.646493</a:t>
-                      </a:r>
-                    </a:p>
-                  </a:txBody>
-                </a:tc>
-                <a:tc>
-                  <a:txBody>
-                    <a:bodyPr/>
-                    <a:lstStyle/>
-                    <a:p>
-                      <a:pPr lvl="0" indent="0" marL="0">
-                        <a:buNone/>
-                      </a:pPr>
-                      <a:r>
-                        <a:rPr/>
-                        <a:t>0.123724</a:t>
-                      </a:r>
-                    </a:p>
-                  </a:txBody>
-                </a:tc>
-              </a:tr>
-              <a:tr h="0">
-                <a:tc>
-                  <a:txBody>
-                    <a:bodyPr/>
-                    <a:lstStyle/>
-                    <a:p>
-                      <a:pPr lvl="0" indent="0" marL="0">
-                        <a:buNone/>
-                      </a:pPr>
-                      <a:r>
-                        <a:rPr/>
-                        <a:t>2</a:t>
-                      </a:r>
-                    </a:p>
-                  </a:txBody>
-                </a:tc>
-                <a:tc>
-                  <a:txBody>
-                    <a:bodyPr/>
-                    <a:lstStyle/>
-                    <a:p>
-                      <a:pPr lvl="0" indent="0" marL="0">
-                        <a:buNone/>
-                      </a:pPr>
-                      <a:r>
-                        <a:rPr/>
-                        <a:t>balsam fir</a:t>
-                      </a:r>
-                    </a:p>
-                  </a:txBody>
-                </a:tc>
-                <a:tc>
-                  <a:txBody>
-                    <a:bodyPr/>
-                    <a:lstStyle/>
-                    <a:p>
-                      <a:pPr lvl="0" indent="0" marL="0">
-                        <a:buNone/>
-                      </a:pPr>
-                      <a:r>
-                        <a:rPr/>
-                        <a:t>4</a:t>
-                      </a:r>
-                    </a:p>
-                  </a:txBody>
-                </a:tc>
-                <a:tc>
-                  <a:txBody>
-                    <a:bodyPr/>
-                    <a:lstStyle/>
-                    <a:p>
-                      <a:pPr lvl="0" indent="0" marL="0">
-                        <a:buNone/>
-                      </a:pPr>
-                      <a:r>
-                        <a:rPr/>
-                        <a:t>134.599829</a:t>
-                      </a:r>
-                    </a:p>
-                  </a:txBody>
-                </a:tc>
-                <a:tc>
-                  <a:txBody>
-                    <a:bodyPr/>
-                    <a:lstStyle/>
-                    <a:p>
-                      <a:pPr lvl="0" indent="0" marL="0">
-                        <a:buNone/>
-                      </a:pPr>
-                      <a:r>
-                        <a:rPr/>
-                        <a:t>38.884870</a:t>
-                      </a:r>
-                    </a:p>
-                  </a:txBody>
-                </a:tc>
-                <a:tc>
-                  <a:txBody>
-                    <a:bodyPr/>
-                    <a:lstStyle/>
-                    <a:p>
-                      <a:pPr lvl="0" indent="0" marL="0">
-                        <a:buNone/>
-                      </a:pPr>
-                      <a:r>
-                        <a:rPr/>
-                        <a:t>0.133858</a:t>
-                      </a:r>
-                    </a:p>
-                  </a:txBody>
-                </a:tc>
-              </a:tr>
-              <a:tr h="0">
-                <a:tc>
-                  <a:txBody>
-                    <a:bodyPr/>
-                    <a:lstStyle/>
-                    <a:p>
-                      <a:pPr lvl="0" indent="0" marL="0">
-                        <a:buNone/>
-                      </a:pPr>
-                      <a:r>
-                        <a:rPr/>
-                        <a:t>3</a:t>
-                      </a:r>
-                    </a:p>
-                  </a:txBody>
-                </a:tc>
-                <a:tc>
-                  <a:txBody>
-                    <a:bodyPr/>
-                    <a:lstStyle/>
-                    <a:p>
-                      <a:pPr lvl="0" indent="0" marL="0">
-                        <a:buNone/>
-                      </a:pPr>
-                      <a:r>
-                        <a:rPr/>
-                        <a:t>balsam fir</a:t>
-                      </a:r>
-                    </a:p>
-                  </a:txBody>
-                </a:tc>
-                <a:tc>
-                  <a:txBody>
-                    <a:bodyPr/>
-                    <a:lstStyle/>
-                    <a:p>
-                      <a:pPr lvl="0" indent="0" marL="0">
-                        <a:buNone/>
-                      </a:pPr>
-                      <a:r>
-                        <a:rPr/>
-                        <a:t>5</a:t>
-                      </a:r>
-                    </a:p>
-                  </a:txBody>
-                </a:tc>
-                <a:tc>
-                  <a:txBody>
-                    <a:bodyPr/>
-                    <a:lstStyle/>
-                    <a:p>
-                      <a:pPr lvl="0" indent="0" marL="0">
-                        <a:buNone/>
-                      </a:pPr>
-                      <a:r>
-                        <a:rPr/>
-                        <a:t>145.003601</a:t>
-                      </a:r>
-                    </a:p>
-                  </a:txBody>
-                </a:tc>
-                <a:tc>
-                  <a:txBody>
-                    <a:bodyPr/>
-                    <a:lstStyle/>
-                    <a:p>
-                      <a:pPr lvl="0" indent="0" marL="0">
-                        <a:buNone/>
-                      </a:pPr>
-                      <a:r>
-                        <a:rPr/>
-                        <a:t>41.209530</a:t>
-                      </a:r>
-                    </a:p>
-                  </a:txBody>
-                </a:tc>
-                <a:tc>
-                  <a:txBody>
-                    <a:bodyPr/>
-                    <a:lstStyle/>
-                    <a:p>
-                      <a:pPr lvl="0" indent="0" marL="0">
-                        <a:buNone/>
-                      </a:pPr>
-                      <a:r>
-                        <a:rPr/>
-                        <a:t>0.144063</a:t>
-                      </a:r>
-                    </a:p>
-                  </a:txBody>
-                </a:tc>
-              </a:tr>
-              <a:tr h="0">
-                <a:tc>
-                  <a:txBody>
-                    <a:bodyPr/>
-                    <a:lstStyle/>
-                    <a:p>
-                      <a:pPr lvl="0" indent="0" marL="0">
-                        <a:buNone/>
-                      </a:pPr>
-                      <a:r>
-                        <a:rPr/>
-                        <a:t>4</a:t>
-                      </a:r>
-                    </a:p>
-                  </a:txBody>
-                </a:tc>
-                <a:tc>
-                  <a:txBody>
-                    <a:bodyPr/>
-                    <a:lstStyle/>
-                    <a:p>
-                      <a:pPr lvl="0" indent="0" marL="0">
-                        <a:buNone/>
-                      </a:pPr>
-                      <a:r>
-                        <a:rPr/>
-                        <a:t>balsam fir</a:t>
-                      </a:r>
-                    </a:p>
-                  </a:txBody>
-                </a:tc>
-                <a:tc>
-                  <a:txBody>
-                    <a:bodyPr/>
-                    <a:lstStyle/>
-                    <a:p>
-                      <a:pPr lvl="0" indent="0" marL="0">
-                        <a:buNone/>
-                      </a:pPr>
-                      <a:r>
-                        <a:rPr/>
-                        <a:t>6</a:t>
-                      </a:r>
-                    </a:p>
-                  </a:txBody>
-                </a:tc>
-                <a:tc>
-                  <a:txBody>
-                    <a:bodyPr/>
-                    <a:lstStyle/>
-                    <a:p>
-                      <a:pPr lvl="0" indent="0" marL="0">
-                        <a:buNone/>
-                      </a:pPr>
-                      <a:r>
-                        <a:rPr/>
-                        <a:t>147.451321</a:t>
-                      </a:r>
-                    </a:p>
-                  </a:txBody>
-                </a:tc>
-                <a:tc>
-                  <a:txBody>
-                    <a:bodyPr/>
-                    <a:lstStyle/>
-                    <a:p>
-                      <a:pPr lvl="0" indent="0" marL="0">
-                        <a:buNone/>
-                      </a:pPr>
-                      <a:r>
-                        <a:rPr/>
-                        <a:t>40.791681</a:t>
-                      </a:r>
-                    </a:p>
-                  </a:txBody>
-                </a:tc>
-                <a:tc>
-                  <a:txBody>
-                    <a:bodyPr/>
-                    <a:lstStyle/>
-                    <a:p>
-                      <a:pPr lvl="0" indent="0" marL="0">
-                        <a:buNone/>
-                      </a:pPr>
-                      <a:r>
-                        <a:rPr/>
-                        <a:t>0.142862</a:t>
-                      </a:r>
-                    </a:p>
-                  </a:txBody>
-                </a:tc>
-              </a:tr>
-              <a:tr h="0">
-                <a:tc>
-                  <a:txBody>
-                    <a:bodyPr/>
-                    <a:lstStyle/>
-                    <a:p>
-                      <a:pPr lvl="0" indent="0" marL="0">
-                        <a:buNone/>
-                      </a:pPr>
-                      <a:r>
-                        <a:rPr/>
-                        <a:t>...</a:t>
-                      </a:r>
-                    </a:p>
-                  </a:txBody>
-                </a:tc>
-                <a:tc>
-                  <a:txBody>
-                    <a:bodyPr/>
-                    <a:lstStyle/>
-                    <a:p>
-                      <a:pPr lvl="0" indent="0" marL="0">
-                        <a:buNone/>
-                      </a:pPr>
-                      <a:r>
-                        <a:rPr/>
-                        <a:t>...</a:t>
-                      </a:r>
-                    </a:p>
-                  </a:txBody>
-                </a:tc>
-                <a:tc>
-                  <a:txBody>
-                    <a:bodyPr/>
-                    <a:lstStyle/>
-                    <a:p>
-                      <a:pPr lvl="0" indent="0" marL="0">
-                        <a:buNone/>
-                      </a:pPr>
-                      <a:r>
-                        <a:rPr/>
-                        <a:t>...</a:t>
-                      </a:r>
-                    </a:p>
-                  </a:txBody>
-                </a:tc>
-                <a:tc>
-                  <a:txBody>
-                    <a:bodyPr/>
-                    <a:lstStyle/>
-                    <a:p>
-                      <a:pPr lvl="0" indent="0" marL="0">
-                        <a:buNone/>
-                      </a:pPr>
-                      <a:r>
-                        <a:rPr/>
-                        <a:t>...</a:t>
-                      </a:r>
-                    </a:p>
-                  </a:txBody>
-                </a:tc>
-                <a:tc>
-                  <a:txBody>
-                    <a:bodyPr/>
-                    <a:lstStyle/>
-                    <a:p>
-                      <a:pPr lvl="0" indent="0" marL="0">
-                        <a:buNone/>
-                      </a:pPr>
-                      <a:r>
-                        <a:rPr/>
-                        <a:t>...</a:t>
-                      </a:r>
-                    </a:p>
-                  </a:txBody>
-                </a:tc>
-                <a:tc>
-                  <a:txBody>
-                    <a:bodyPr/>
-                    <a:lstStyle/>
-                    <a:p>
-                      <a:pPr lvl="0" indent="0" marL="0">
-                        <a:buNone/>
-                      </a:pPr>
-                      <a:r>
-                        <a:rPr/>
-                        <a:t>...</a:t>
-                      </a:r>
-                    </a:p>
-                  </a:txBody>
-                </a:tc>
-              </a:tr>
-              <a:tr h="0">
-                <a:tc>
-                  <a:txBody>
-                    <a:bodyPr/>
-                    <a:lstStyle/>
-                    <a:p>
-                      <a:pPr lvl="0" indent="0" marL="0">
-                        <a:buNone/>
-                      </a:pPr>
-                      <a:r>
-                        <a:rPr/>
-                        <a:t>895</a:t>
-                      </a:r>
-                    </a:p>
-                  </a:txBody>
-                </a:tc>
-                <a:tc>
-                  <a:txBody>
-                    <a:bodyPr/>
-                    <a:lstStyle/>
-                    <a:p>
-                      <a:pPr lvl="0" indent="0" marL="0">
-                        <a:buNone/>
-                      </a:pPr>
-                      <a:r>
-                        <a:rPr/>
-                        <a:t>sugarberry</a:t>
-                      </a:r>
-                    </a:p>
-                  </a:txBody>
-                </a:tc>
-                <a:tc>
-                  <a:txBody>
-                    <a:bodyPr/>
-                    <a:lstStyle/>
-                    <a:p>
-                      <a:pPr lvl="0" indent="0" marL="0">
-                        <a:buNone/>
-                      </a:pPr>
-                      <a:r>
-                        <a:rPr/>
-                        <a:t>6</a:t>
-                      </a:r>
-                    </a:p>
-                  </a:txBody>
-                </a:tc>
-                <a:tc>
-                  <a:txBody>
-                    <a:bodyPr/>
-                    <a:lstStyle/>
-                    <a:p>
-                      <a:pPr lvl="0" indent="0" marL="0">
-                        <a:buNone/>
-                      </a:pPr>
-                      <a:r>
-                        <a:rPr/>
-                        <a:t>32.431052</a:t>
-                      </a:r>
-                    </a:p>
-                  </a:txBody>
-                </a:tc>
-                <a:tc>
-                  <a:txBody>
-                    <a:bodyPr/>
-                    <a:lstStyle/>
-                    <a:p>
-                      <a:pPr lvl="0" indent="0" marL="0">
-                        <a:buNone/>
-                      </a:pPr>
-                      <a:r>
-                        <a:rPr/>
-                        <a:t>20.969306</a:t>
-                      </a:r>
-                    </a:p>
-                  </a:txBody>
-                </a:tc>
-                <a:tc>
-                  <a:txBody>
-                    <a:bodyPr/>
-                    <a:lstStyle/>
-                    <a:p>
-                      <a:pPr lvl="0" indent="0" marL="0">
-                        <a:buNone/>
-                      </a:pPr>
-                      <a:r>
-                        <a:rPr/>
-                        <a:t>0.565727</a:t>
-                      </a:r>
-                    </a:p>
-                  </a:txBody>
-                </a:tc>
-              </a:tr>
-              <a:tr h="0">
-                <a:tc>
-                  <a:txBody>
-                    <a:bodyPr/>
-                    <a:lstStyle/>
-                    <a:p>
-                      <a:pPr lvl="0" indent="0" marL="0">
-                        <a:buNone/>
-                      </a:pPr>
-                      <a:r>
-                        <a:rPr/>
-                        <a:t>896</a:t>
-                      </a:r>
-                    </a:p>
-                  </a:txBody>
-                </a:tc>
-                <a:tc>
-                  <a:txBody>
-                    <a:bodyPr/>
-                    <a:lstStyle/>
-                    <a:p>
-                      <a:pPr lvl="0" indent="0" marL="0">
-                        <a:buNone/>
-                      </a:pPr>
-                      <a:r>
-                        <a:rPr/>
-                        <a:t>sugarberry</a:t>
-                      </a:r>
-                    </a:p>
-                  </a:txBody>
-                </a:tc>
-                <a:tc>
-                  <a:txBody>
-                    <a:bodyPr/>
-                    <a:lstStyle/>
-                    <a:p>
-                      <a:pPr lvl="0" indent="0" marL="0">
-                        <a:buNone/>
-                      </a:pPr>
-                      <a:r>
-                        <a:rPr/>
-                        <a:t>7</a:t>
-                      </a:r>
-                    </a:p>
-                  </a:txBody>
-                </a:tc>
-                <a:tc>
-                  <a:txBody>
-                    <a:bodyPr/>
-                    <a:lstStyle/>
-                    <a:p>
-                      <a:pPr lvl="0" indent="0" marL="0">
-                        <a:buNone/>
-                      </a:pPr>
-                      <a:r>
-                        <a:rPr/>
-                        <a:t>37.324259</a:t>
-                      </a:r>
-                    </a:p>
-                  </a:txBody>
-                </a:tc>
-                <a:tc>
-                  <a:txBody>
-                    <a:bodyPr/>
-                    <a:lstStyle/>
-                    <a:p>
-                      <a:pPr lvl="0" indent="0" marL="0">
-                        <a:buNone/>
-                      </a:pPr>
-                      <a:r>
-                        <a:rPr/>
-                        <a:t>25.037024</a:t>
-                      </a:r>
-                    </a:p>
-                  </a:txBody>
-                </a:tc>
-                <a:tc>
-                  <a:txBody>
-                    <a:bodyPr/>
-                    <a:lstStyle/>
-                    <a:p>
-                      <a:pPr lvl="0" indent="0" marL="0">
-                        <a:buNone/>
-                      </a:pPr>
-                      <a:r>
-                        <a:rPr/>
-                        <a:t>0.637629</a:t>
-                      </a:r>
-                    </a:p>
-                  </a:txBody>
-                </a:tc>
-              </a:tr>
-              <a:tr h="0">
-                <a:tc>
-                  <a:txBody>
-                    <a:bodyPr/>
-                    <a:lstStyle/>
-                    <a:p>
-                      <a:pPr lvl="0" indent="0" marL="0">
-                        <a:buNone/>
-                      </a:pPr>
-                      <a:r>
-                        <a:rPr/>
-                        <a:t>897</a:t>
-                      </a:r>
-                    </a:p>
-                  </a:txBody>
-                </a:tc>
-                <a:tc>
-                  <a:txBody>
-                    <a:bodyPr/>
-                    <a:lstStyle/>
-                    <a:p>
-                      <a:pPr lvl="0" indent="0" marL="0">
-                        <a:buNone/>
-                      </a:pPr>
-                      <a:r>
-                        <a:rPr/>
-                        <a:t>sugarberry</a:t>
-                      </a:r>
-                    </a:p>
-                  </a:txBody>
-                </a:tc>
-                <a:tc>
-                  <a:txBody>
-                    <a:bodyPr/>
-                    <a:lstStyle/>
-                    <a:p>
-                      <a:pPr lvl="0" indent="0" marL="0">
-                        <a:buNone/>
-                      </a:pPr>
-                      <a:r>
-                        <a:rPr/>
-                        <a:t>8</a:t>
-                      </a:r>
-                    </a:p>
-                  </a:txBody>
-                </a:tc>
-                <a:tc>
-                  <a:txBody>
-                    <a:bodyPr/>
-                    <a:lstStyle/>
-                    <a:p>
-                      <a:pPr lvl="0" indent="0" marL="0">
-                        <a:buNone/>
-                      </a:pPr>
-                      <a:r>
-                        <a:rPr/>
-                        <a:t>38.144756</a:t>
-                      </a:r>
-                    </a:p>
-                  </a:txBody>
-                </a:tc>
-                <a:tc>
-                  <a:txBody>
-                    <a:bodyPr/>
-                    <a:lstStyle/>
-                    <a:p>
-                      <a:pPr lvl="0" indent="0" marL="0">
-                        <a:buNone/>
-                      </a:pPr>
-                      <a:r>
-                        <a:rPr/>
-                        <a:t>26.680208</a:t>
-                      </a:r>
-                    </a:p>
-                  </a:txBody>
-                </a:tc>
-                <a:tc>
-                  <a:txBody>
-                    <a:bodyPr/>
-                    <a:lstStyle/>
-                    <a:p>
-                      <a:pPr lvl="0" indent="0" marL="0">
-                        <a:buNone/>
-                      </a:pPr>
-                      <a:r>
-                        <a:rPr/>
-                        <a:t>0.665159</a:t>
-                      </a:r>
-                    </a:p>
-                  </a:txBody>
-                </a:tc>
-              </a:tr>
-              <a:tr h="0">
-                <a:tc>
-                  <a:txBody>
-                    <a:bodyPr/>
-                    <a:lstStyle/>
-                    <a:p>
-                      <a:pPr lvl="0" indent="0" marL="0">
-                        <a:buNone/>
-                      </a:pPr>
-                      <a:r>
-                        <a:rPr/>
-                        <a:t>898</a:t>
-                      </a:r>
-                    </a:p>
-                  </a:txBody>
-                </a:tc>
-                <a:tc>
-                  <a:txBody>
-                    <a:bodyPr/>
-                    <a:lstStyle/>
-                    <a:p>
-                      <a:pPr lvl="0" indent="0" marL="0">
-                        <a:buNone/>
-                      </a:pPr>
-                      <a:r>
-                        <a:rPr/>
-                        <a:t>sugarberry</a:t>
-                      </a:r>
-                    </a:p>
-                  </a:txBody>
-                </a:tc>
-                <a:tc>
-                  <a:txBody>
-                    <a:bodyPr/>
-                    <a:lstStyle/>
-                    <a:p>
-                      <a:pPr lvl="0" indent="0" marL="0">
-                        <a:buNone/>
-                      </a:pPr>
-                      <a:r>
-                        <a:rPr/>
-                        <a:t>9</a:t>
-                      </a:r>
-                    </a:p>
-                  </a:txBody>
-                </a:tc>
-                <a:tc>
-                  <a:txBody>
-                    <a:bodyPr/>
-                    <a:lstStyle/>
-                    <a:p>
-                      <a:pPr lvl="0" indent="0" marL="0">
-                        <a:buNone/>
-                      </a:pPr>
-                      <a:r>
-                        <a:rPr/>
-                        <a:t>36.853245</a:t>
-                      </a:r>
-                    </a:p>
-                  </a:txBody>
-                </a:tc>
-                <a:tc>
-                  <a:txBody>
-                    <a:bodyPr/>
-                    <a:lstStyle/>
-                    <a:p>
-                      <a:pPr lvl="0" indent="0" marL="0">
-                        <a:buNone/>
-                      </a:pPr>
-                      <a:r>
-                        <a:rPr/>
-                        <a:t>21.021667</a:t>
-                      </a:r>
-                    </a:p>
-                  </a:txBody>
-                </a:tc>
-                <a:tc>
-                  <a:txBody>
-                    <a:bodyPr/>
-                    <a:lstStyle/>
-                    <a:p>
-                      <a:pPr lvl="0" indent="0" marL="0">
-                        <a:buNone/>
-                      </a:pPr>
-                      <a:r>
-                        <a:rPr/>
-                        <a:t>0.685162</a:t>
-                      </a:r>
-                    </a:p>
-                  </a:txBody>
-                </a:tc>
-              </a:tr>
-              <a:tr h="0">
-                <a:tc>
-                  <a:txBody>
-                    <a:bodyPr/>
-                    <a:lstStyle/>
-                    <a:p>
-                      <a:pPr lvl="0" indent="0" marL="0">
-                        <a:buNone/>
-                      </a:pPr>
-                      <a:r>
-                        <a:rPr/>
-                        <a:t>899</a:t>
-                      </a:r>
-                    </a:p>
-                  </a:txBody>
-                </a:tc>
-                <a:tc>
-                  <a:txBody>
-                    <a:bodyPr/>
-                    <a:lstStyle/>
-                    <a:p>
-                      <a:pPr lvl="0" indent="0" marL="0">
-                        <a:buNone/>
-                      </a:pPr>
-                      <a:r>
-                        <a:rPr/>
-                        <a:t>sugarberry</a:t>
-                      </a:r>
-                    </a:p>
-                  </a:txBody>
-                </a:tc>
-                <a:tc>
-                  <a:txBody>
-                    <a:bodyPr/>
-                    <a:lstStyle/>
-                    <a:p>
-                      <a:pPr lvl="0" indent="0" marL="0">
-                        <a:buNone/>
-                      </a:pPr>
-                      <a:r>
-                        <a:rPr/>
-                        <a:t>10</a:t>
-                      </a:r>
-                    </a:p>
-                  </a:txBody>
-                </a:tc>
-                <a:tc>
-                  <a:txBody>
-                    <a:bodyPr/>
-                    <a:lstStyle/>
-                    <a:p>
-                      <a:pPr lvl="0" indent="0" marL="0">
-                        <a:buNone/>
-                      </a:pPr>
-                      <a:r>
-                        <a:rPr/>
-                        <a:t>40.091106</a:t>
-                      </a:r>
-                    </a:p>
-                  </a:txBody>
-                </a:tc>
-                <a:tc>
-                  <a:txBody>
-                    <a:bodyPr/>
-                    <a:lstStyle/>
-                    <a:p>
-                      <a:pPr lvl="0" indent="0" marL="0">
-                        <a:buNone/>
-                      </a:pPr>
-                      <a:r>
-                        <a:rPr/>
-                        <a:t>23.172083</a:t>
-                      </a:r>
-                    </a:p>
-                  </a:txBody>
-                </a:tc>
-                <a:tc>
-                  <a:txBody>
-                    <a:bodyPr/>
-                    <a:lstStyle/>
-                    <a:p>
-                      <a:pPr lvl="0" indent="0" marL="0">
-                        <a:buNone/>
-                      </a:pPr>
-                      <a:r>
-                        <a:rPr/>
-                        <a:t>0.677519</a:t>
-                      </a:r>
-                    </a:p>
-                  </a:txBody>
-                </a:tc>
-              </a:tr>
-            </a:tbl>
-          </a:graphicData>
-        </a:graphic>
-      </p:graphicFrame>
+        </p:nvSpPr>
+        <p:spPr/>
+        <p:txBody>
+          <a:bodyPr/>
+          <a:lstStyle/>
+          <a:p>
+            <a:pPr lvl="0" indent="0">
+              <a:buNone/>
+            </a:pPr>
+            <a:r>
+              <a:rPr>
+                <a:latin typeface="Courier"/>
+              </a:rPr>
+              <a:t>    k  Avg_RMSLE
+0   2   0.152781
+1   3   0.158063
+2   4   0.162117
+3   5   0.168000
+4   6   0.174246
+5   7   0.180280
+6   8   0.185069
+7   9   0.190148
+8  10   0.196827</a:t>
+            </a:r>
+          </a:p>
+        </p:txBody>
+      </p:sp>
     </p:spTree>
   </p:cSld>
 </p:sld>
@@ -4910,14 +4742,14 @@
             <a:pPr lvl="0"/>
             <a:r>
               <a:rPr/>
+              <a:t>Tuning k for the best model</a:t>
+            </a:r>
+          </a:p>
+          <a:p>
+            <a:pPr lvl="0"/>
+            <a:r>
+              <a:rPr/>
               <a:t>Feature engineering (what worked and what didn’t)</a:t>
-            </a:r>
-          </a:p>
-          <a:p>
-            <a:pPr lvl="0"/>
-            <a:r>
-              <a:rPr/>
-              <a:t>Tuning k for the best model</a:t>
             </a:r>
           </a:p>
           <a:p>
@@ -5459,6 +5291,468 @@
                       <a:r>
                         <a:rPr/>
                         <a:t>113.92</a:t>
+                      </a:r>
+                    </a:p>
+                  </a:txBody>
+                </a:tc>
+              </a:tr>
+              <a:tr h="0">
+                <a:tc>
+                  <a:txBody>
+                    <a:bodyPr/>
+                    <a:lstStyle/>
+                    <a:p>
+                      <a:pPr lvl="0" indent="0" marL="0">
+                        <a:buNone/>
+                      </a:pPr>
+                      <a:r>
+                        <a:rPr/>
+                        <a:t>...</a:t>
+                      </a:r>
+                    </a:p>
+                  </a:txBody>
+                </a:tc>
+                <a:tc>
+                  <a:txBody>
+                    <a:bodyPr/>
+                    <a:lstStyle/>
+                    <a:p>
+                      <a:pPr lvl="0" indent="0" marL="0">
+                        <a:buNone/>
+                      </a:pPr>
+                      <a:r>
+                        <a:rPr/>
+                        <a:t>...</a:t>
+                      </a:r>
+                    </a:p>
+                  </a:txBody>
+                </a:tc>
+                <a:tc>
+                  <a:txBody>
+                    <a:bodyPr/>
+                    <a:lstStyle/>
+                    <a:p>
+                      <a:pPr lvl="0" indent="0" marL="0">
+                        <a:buNone/>
+                      </a:pPr>
+                      <a:r>
+                        <a:rPr/>
+                        <a:t>...</a:t>
+                      </a:r>
+                    </a:p>
+                  </a:txBody>
+                </a:tc>
+                <a:tc>
+                  <a:txBody>
+                    <a:bodyPr/>
+                    <a:lstStyle/>
+                    <a:p>
+                      <a:pPr lvl="0" indent="0" marL="0">
+                        <a:buNone/>
+                      </a:pPr>
+                      <a:r>
+                        <a:rPr/>
+                        <a:t>...</a:t>
+                      </a:r>
+                    </a:p>
+                  </a:txBody>
+                </a:tc>
+                <a:tc>
+                  <a:txBody>
+                    <a:bodyPr/>
+                    <a:lstStyle/>
+                    <a:p>
+                      <a:pPr lvl="0" indent="0" marL="0">
+                        <a:buNone/>
+                      </a:pPr>
+                      <a:r>
+                        <a:rPr/>
+                        <a:t>...</a:t>
+                      </a:r>
+                    </a:p>
+                  </a:txBody>
+                </a:tc>
+              </a:tr>
+              <a:tr h="0">
+                <a:tc>
+                  <a:txBody>
+                    <a:bodyPr/>
+                    <a:lstStyle/>
+                    <a:p>
+                      <a:pPr lvl="0" indent="0" marL="0">
+                        <a:buNone/>
+                      </a:pPr>
+                      <a:r>
+                        <a:rPr/>
+                        <a:t>137074</a:t>
+                      </a:r>
+                    </a:p>
+                  </a:txBody>
+                </a:tc>
+                <a:tc>
+                  <a:txBody>
+                    <a:bodyPr/>
+                    <a:lstStyle/>
+                    <a:p>
+                      <a:pPr lvl="0" indent="0" marL="0">
+                        <a:buNone/>
+                      </a:pPr>
+                      <a:r>
+                        <a:rPr/>
+                        <a:t>922</a:t>
+                      </a:r>
+                    </a:p>
+                  </a:txBody>
+                </a:tc>
+                <a:tc>
+                  <a:txBody>
+                    <a:bodyPr/>
+                    <a:lstStyle/>
+                    <a:p>
+                      <a:pPr lvl="0" indent="0" marL="0">
+                        <a:buNone/>
+                      </a:pPr>
+                      <a:r>
+                        <a:rPr/>
+                        <a:t>2.5</a:t>
+                      </a:r>
+                    </a:p>
+                  </a:txBody>
+                </a:tc>
+                <a:tc>
+                  <a:txBody>
+                    <a:bodyPr/>
+                    <a:lstStyle/>
+                    <a:p>
+                      <a:pPr lvl="0" indent="0" marL="0">
+                        <a:buNone/>
+                      </a:pPr>
+                      <a:r>
+                        <a:rPr/>
+                        <a:t>24.8</a:t>
+                      </a:r>
+                    </a:p>
+                  </a:txBody>
+                </a:tc>
+                <a:tc>
+                  <a:txBody>
+                    <a:bodyPr/>
+                    <a:lstStyle/>
+                    <a:p>
+                      <a:pPr lvl="0" indent="0" marL="0">
+                        <a:buNone/>
+                      </a:pPr>
+                      <a:r>
+                        <a:rPr/>
+                        <a:t>15.98</a:t>
+                      </a:r>
+                    </a:p>
+                  </a:txBody>
+                </a:tc>
+              </a:tr>
+              <a:tr h="0">
+                <a:tc>
+                  <a:txBody>
+                    <a:bodyPr/>
+                    <a:lstStyle/>
+                    <a:p>
+                      <a:pPr lvl="0" indent="0" marL="0">
+                        <a:buNone/>
+                      </a:pPr>
+                      <a:r>
+                        <a:rPr/>
+                        <a:t>137075</a:t>
+                      </a:r>
+                    </a:p>
+                  </a:txBody>
+                </a:tc>
+                <a:tc>
+                  <a:txBody>
+                    <a:bodyPr/>
+                    <a:lstStyle/>
+                    <a:p>
+                      <a:pPr lvl="0" indent="0" marL="0">
+                        <a:buNone/>
+                      </a:pPr>
+                      <a:r>
+                        <a:rPr/>
+                        <a:t>922</a:t>
+                      </a:r>
+                    </a:p>
+                  </a:txBody>
+                </a:tc>
+                <a:tc>
+                  <a:txBody>
+                    <a:bodyPr/>
+                    <a:lstStyle/>
+                    <a:p>
+                      <a:pPr lvl="0" indent="0" marL="0">
+                        <a:buNone/>
+                      </a:pPr>
+                      <a:r>
+                        <a:rPr/>
+                        <a:t>3.7</a:t>
+                      </a:r>
+                    </a:p>
+                  </a:txBody>
+                </a:tc>
+                <a:tc>
+                  <a:txBody>
+                    <a:bodyPr/>
+                    <a:lstStyle/>
+                    <a:p>
+                      <a:pPr lvl="0" indent="0" marL="0">
+                        <a:buNone/>
+                      </a:pPr>
+                      <a:r>
+                        <a:rPr/>
+                        <a:t>23.7</a:t>
+                      </a:r>
+                    </a:p>
+                  </a:txBody>
+                </a:tc>
+                <a:tc>
+                  <a:txBody>
+                    <a:bodyPr/>
+                    <a:lstStyle/>
+                    <a:p>
+                      <a:pPr lvl="0" indent="0" marL="0">
+                        <a:buNone/>
+                      </a:pPr>
+                      <a:r>
+                        <a:rPr/>
+                        <a:t>40.62</a:t>
+                      </a:r>
+                    </a:p>
+                  </a:txBody>
+                </a:tc>
+              </a:tr>
+              <a:tr h="0">
+                <a:tc>
+                  <a:txBody>
+                    <a:bodyPr/>
+                    <a:lstStyle/>
+                    <a:p>
+                      <a:pPr lvl="0" indent="0" marL="0">
+                        <a:buNone/>
+                      </a:pPr>
+                      <a:r>
+                        <a:rPr/>
+                        <a:t>137076</a:t>
+                      </a:r>
+                    </a:p>
+                  </a:txBody>
+                </a:tc>
+                <a:tc>
+                  <a:txBody>
+                    <a:bodyPr/>
+                    <a:lstStyle/>
+                    <a:p>
+                      <a:pPr lvl="0" indent="0" marL="0">
+                        <a:buNone/>
+                      </a:pPr>
+                      <a:r>
+                        <a:rPr/>
+                        <a:t>922</a:t>
+                      </a:r>
+                    </a:p>
+                  </a:txBody>
+                </a:tc>
+                <a:tc>
+                  <a:txBody>
+                    <a:bodyPr/>
+                    <a:lstStyle/>
+                    <a:p>
+                      <a:pPr lvl="0" indent="0" marL="0">
+                        <a:buNone/>
+                      </a:pPr>
+                      <a:r>
+                        <a:rPr/>
+                        <a:t>2.9</a:t>
+                      </a:r>
+                    </a:p>
+                  </a:txBody>
+                </a:tc>
+                <a:tc>
+                  <a:txBody>
+                    <a:bodyPr/>
+                    <a:lstStyle/>
+                    <a:p>
+                      <a:pPr lvl="0" indent="0" marL="0">
+                        <a:buNone/>
+                      </a:pPr>
+                      <a:r>
+                        <a:rPr/>
+                        <a:t>30.9</a:t>
+                      </a:r>
+                    </a:p>
+                  </a:txBody>
+                </a:tc>
+                <a:tc>
+                  <a:txBody>
+                    <a:bodyPr/>
+                    <a:lstStyle/>
+                    <a:p>
+                      <a:pPr lvl="0" indent="0" marL="0">
+                        <a:buNone/>
+                      </a:pPr>
+                      <a:r>
+                        <a:rPr/>
+                        <a:t>22.74</a:t>
+                      </a:r>
+                    </a:p>
+                  </a:txBody>
+                </a:tc>
+              </a:tr>
+              <a:tr h="0">
+                <a:tc>
+                  <a:txBody>
+                    <a:bodyPr/>
+                    <a:lstStyle/>
+                    <a:p>
+                      <a:pPr lvl="0" indent="0" marL="0">
+                        <a:buNone/>
+                      </a:pPr>
+                      <a:r>
+                        <a:rPr/>
+                        <a:t>137077</a:t>
+                      </a:r>
+                    </a:p>
+                  </a:txBody>
+                </a:tc>
+                <a:tc>
+                  <a:txBody>
+                    <a:bodyPr/>
+                    <a:lstStyle/>
+                    <a:p>
+                      <a:pPr lvl="0" indent="0" marL="0">
+                        <a:buNone/>
+                      </a:pPr>
+                      <a:r>
+                        <a:rPr/>
+                        <a:t>922</a:t>
+                      </a:r>
+                    </a:p>
+                  </a:txBody>
+                </a:tc>
+                <a:tc>
+                  <a:txBody>
+                    <a:bodyPr/>
+                    <a:lstStyle/>
+                    <a:p>
+                      <a:pPr lvl="0" indent="0" marL="0">
+                        <a:buNone/>
+                      </a:pPr>
+                      <a:r>
+                        <a:rPr/>
+                        <a:t>5.6</a:t>
+                      </a:r>
+                    </a:p>
+                  </a:txBody>
+                </a:tc>
+                <a:tc>
+                  <a:txBody>
+                    <a:bodyPr/>
+                    <a:lstStyle/>
+                    <a:p>
+                      <a:pPr lvl="0" indent="0" marL="0">
+                        <a:buNone/>
+                      </a:pPr>
+                      <a:r>
+                        <a:rPr/>
+                        <a:t>40.0</a:t>
+                      </a:r>
+                    </a:p>
+                  </a:txBody>
+                </a:tc>
+                <a:tc>
+                  <a:txBody>
+                    <a:bodyPr/>
+                    <a:lstStyle/>
+                    <a:p>
+                      <a:pPr lvl="0" indent="0" marL="0">
+                        <a:buNone/>
+                      </a:pPr>
+                      <a:r>
+                        <a:rPr/>
+                        <a:t>87.79</a:t>
+                      </a:r>
+                    </a:p>
+                  </a:txBody>
+                </a:tc>
+              </a:tr>
+              <a:tr h="0">
+                <a:tc>
+                  <a:txBody>
+                    <a:bodyPr/>
+                    <a:lstStyle/>
+                    <a:p>
+                      <a:pPr lvl="0" indent="0" marL="0">
+                        <a:buNone/>
+                      </a:pPr>
+                      <a:r>
+                        <a:rPr/>
+                        <a:t>137078</a:t>
+                      </a:r>
+                    </a:p>
+                  </a:txBody>
+                </a:tc>
+                <a:tc>
+                  <a:txBody>
+                    <a:bodyPr/>
+                    <a:lstStyle/>
+                    <a:p>
+                      <a:pPr lvl="0" indent="0" marL="0">
+                        <a:buNone/>
+                      </a:pPr>
+                      <a:r>
+                        <a:rPr/>
+                        <a:t>922</a:t>
+                      </a:r>
+                    </a:p>
+                  </a:txBody>
+                </a:tc>
+                <a:tc>
+                  <a:txBody>
+                    <a:bodyPr/>
+                    <a:lstStyle/>
+                    <a:p>
+                      <a:pPr lvl="0" indent="0" marL="0">
+                        <a:buNone/>
+                      </a:pPr>
+                      <a:r>
+                        <a:rPr/>
+                        <a:t>1.9</a:t>
+                      </a:r>
+                    </a:p>
+                  </a:txBody>
+                </a:tc>
+                <a:tc>
+                  <a:txBody>
+                    <a:bodyPr/>
+                    <a:lstStyle/>
+                    <a:p>
+                      <a:pPr lvl="0" indent="0" marL="0">
+                        <a:buNone/>
+                      </a:pPr>
+                      <a:r>
+                        <a:rPr/>
+                        <a:t>25.1</a:t>
+                      </a:r>
+                    </a:p>
+                  </a:txBody>
+                </a:tc>
+                <a:tc>
+                  <a:txBody>
+                    <a:bodyPr/>
+                    <a:lstStyle/>
+                    <a:p>
+                      <a:pPr lvl="0" indent="0" marL="0">
+                        <a:buNone/>
+                      </a:pPr>
+                      <a:r>
+                        <a:rPr/>
+                        <a:t>8.33</a:t>
                       </a:r>
                     </a:p>
                   </a:txBody>
@@ -5819,6 +6113,288 @@
                   </a:txBody>
                 </a:tc>
               </a:tr>
+              <a:tr h="0">
+                <a:tc>
+                  <a:txBody>
+                    <a:bodyPr/>
+                    <a:lstStyle/>
+                    <a:p>
+                      <a:pPr lvl="0" indent="0" marL="0">
+                        <a:buNone/>
+                      </a:pPr>
+                      <a:r>
+                        <a:rPr/>
+                        <a:t>...</a:t>
+                      </a:r>
+                    </a:p>
+                  </a:txBody>
+                </a:tc>
+                <a:tc>
+                  <a:txBody>
+                    <a:bodyPr/>
+                    <a:lstStyle/>
+                    <a:p>
+                      <a:pPr lvl="0" indent="0" marL="0">
+                        <a:buNone/>
+                      </a:pPr>
+                      <a:r>
+                        <a:rPr/>
+                        <a:t>...</a:t>
+                      </a:r>
+                    </a:p>
+                  </a:txBody>
+                </a:tc>
+                <a:tc>
+                  <a:txBody>
+                    <a:bodyPr/>
+                    <a:lstStyle/>
+                    <a:p>
+                      <a:pPr lvl="0" indent="0" marL="0">
+                        <a:buNone/>
+                      </a:pPr>
+                      <a:r>
+                        <a:rPr/>
+                        <a:t>...</a:t>
+                      </a:r>
+                    </a:p>
+                  </a:txBody>
+                </a:tc>
+              </a:tr>
+              <a:tr h="0">
+                <a:tc>
+                  <a:txBody>
+                    <a:bodyPr/>
+                    <a:lstStyle/>
+                    <a:p>
+                      <a:pPr lvl="0" indent="0" marL="0">
+                        <a:buNone/>
+                      </a:pPr>
+                      <a:r>
+                        <a:rPr/>
+                        <a:t>453</a:t>
+                      </a:r>
+                    </a:p>
+                  </a:txBody>
+                </a:tc>
+                <a:tc>
+                  <a:txBody>
+                    <a:bodyPr/>
+                    <a:lstStyle/>
+                    <a:p>
+                      <a:pPr lvl="0" indent="0" marL="0">
+                        <a:buNone/>
+                      </a:pPr>
+                      <a:r>
+                        <a:rPr/>
+                        <a:t>995</a:t>
+                      </a:r>
+                    </a:p>
+                  </a:txBody>
+                </a:tc>
+                <a:tc>
+                  <a:txBody>
+                    <a:bodyPr/>
+                    <a:lstStyle/>
+                    <a:p>
+                      <a:pPr lvl="0" indent="0" marL="0">
+                        <a:buNone/>
+                      </a:pPr>
+                      <a:r>
+                        <a:rPr/>
+                        <a:t>tungoil tree</a:t>
+                      </a:r>
+                    </a:p>
+                  </a:txBody>
+                </a:tc>
+              </a:tr>
+              <a:tr h="0">
+                <a:tc>
+                  <a:txBody>
+                    <a:bodyPr/>
+                    <a:lstStyle/>
+                    <a:p>
+                      <a:pPr lvl="0" indent="0" marL="0">
+                        <a:buNone/>
+                      </a:pPr>
+                      <a:r>
+                        <a:rPr/>
+                        <a:t>454</a:t>
+                      </a:r>
+                    </a:p>
+                  </a:txBody>
+                </a:tc>
+                <a:tc>
+                  <a:txBody>
+                    <a:bodyPr/>
+                    <a:lstStyle/>
+                    <a:p>
+                      <a:pPr lvl="0" indent="0" marL="0">
+                        <a:buNone/>
+                      </a:pPr>
+                      <a:r>
+                        <a:rPr/>
+                        <a:t>996</a:t>
+                      </a:r>
+                    </a:p>
+                  </a:txBody>
+                </a:tc>
+                <a:tc>
+                  <a:txBody>
+                    <a:bodyPr/>
+                    <a:lstStyle/>
+                    <a:p>
+                      <a:pPr lvl="0" indent="0" marL="0">
+                        <a:buNone/>
+                      </a:pPr>
+                      <a:r>
+                        <a:rPr/>
+                        <a:t>smoketree</a:t>
+                      </a:r>
+                    </a:p>
+                  </a:txBody>
+                </a:tc>
+              </a:tr>
+              <a:tr h="0">
+                <a:tc>
+                  <a:txBody>
+                    <a:bodyPr/>
+                    <a:lstStyle/>
+                    <a:p>
+                      <a:pPr lvl="0" indent="0" marL="0">
+                        <a:buNone/>
+                      </a:pPr>
+                      <a:r>
+                        <a:rPr/>
+                        <a:t>455</a:t>
+                      </a:r>
+                    </a:p>
+                  </a:txBody>
+                </a:tc>
+                <a:tc>
+                  <a:txBody>
+                    <a:bodyPr/>
+                    <a:lstStyle/>
+                    <a:p>
+                      <a:pPr lvl="0" indent="0" marL="0">
+                        <a:buNone/>
+                      </a:pPr>
+                      <a:r>
+                        <a:rPr/>
+                        <a:t>997</a:t>
+                      </a:r>
+                    </a:p>
+                  </a:txBody>
+                </a:tc>
+                <a:tc>
+                  <a:txBody>
+                    <a:bodyPr/>
+                    <a:lstStyle/>
+                    <a:p>
+                      <a:pPr lvl="0" indent="0" marL="0">
+                        <a:buNone/>
+                      </a:pPr>
+                      <a:r>
+                        <a:rPr/>
+                        <a:t>Russian-olive</a:t>
+                      </a:r>
+                    </a:p>
+                  </a:txBody>
+                </a:tc>
+              </a:tr>
+              <a:tr h="0">
+                <a:tc>
+                  <a:txBody>
+                    <a:bodyPr/>
+                    <a:lstStyle/>
+                    <a:p>
+                      <a:pPr lvl="0" indent="0" marL="0">
+                        <a:buNone/>
+                      </a:pPr>
+                      <a:r>
+                        <a:rPr/>
+                        <a:t>456</a:t>
+                      </a:r>
+                    </a:p>
+                  </a:txBody>
+                </a:tc>
+                <a:tc>
+                  <a:txBody>
+                    <a:bodyPr/>
+                    <a:lstStyle/>
+                    <a:p>
+                      <a:pPr lvl="0" indent="0" marL="0">
+                        <a:buNone/>
+                      </a:pPr>
+                      <a:r>
+                        <a:rPr/>
+                        <a:t>998</a:t>
+                      </a:r>
+                    </a:p>
+                  </a:txBody>
+                </a:tc>
+                <a:tc>
+                  <a:txBody>
+                    <a:bodyPr/>
+                    <a:lstStyle/>
+                    <a:p>
+                      <a:pPr lvl="0" indent="0" marL="0">
+                        <a:buNone/>
+                      </a:pPr>
+                      <a:r>
+                        <a:rPr/>
+                        <a:t>Unknown dead hardwood</a:t>
+                      </a:r>
+                    </a:p>
+                  </a:txBody>
+                </a:tc>
+              </a:tr>
+              <a:tr h="0">
+                <a:tc>
+                  <a:txBody>
+                    <a:bodyPr/>
+                    <a:lstStyle/>
+                    <a:p>
+                      <a:pPr lvl="0" indent="0" marL="0">
+                        <a:buNone/>
+                      </a:pPr>
+                      <a:r>
+                        <a:rPr/>
+                        <a:t>457</a:t>
+                      </a:r>
+                    </a:p>
+                  </a:txBody>
+                </a:tc>
+                <a:tc>
+                  <a:txBody>
+                    <a:bodyPr/>
+                    <a:lstStyle/>
+                    <a:p>
+                      <a:pPr lvl="0" indent="0" marL="0">
+                        <a:buNone/>
+                      </a:pPr>
+                      <a:r>
+                        <a:rPr/>
+                        <a:t>999</a:t>
+                      </a:r>
+                    </a:p>
+                  </a:txBody>
+                </a:tc>
+                <a:tc>
+                  <a:txBody>
+                    <a:bodyPr/>
+                    <a:lstStyle/>
+                    <a:p>
+                      <a:pPr lvl="0" indent="0" marL="0">
+                        <a:buNone/>
+                      </a:pPr>
+                      <a:r>
+                        <a:rPr/>
+                        <a:t>Other or unknown live tree</a:t>
+                      </a:r>
+                    </a:p>
+                  </a:txBody>
+                </a:tc>
+              </a:tr>
             </a:tbl>
           </a:graphicData>
         </a:graphic>
@@ -6445,6 +7021,558 @@
                       <a:r>
                         <a:rPr/>
                         <a:t>balsam fir</a:t>
+                      </a:r>
+                    </a:p>
+                  </a:txBody>
+                </a:tc>
+              </a:tr>
+              <a:tr h="0">
+                <a:tc>
+                  <a:txBody>
+                    <a:bodyPr/>
+                    <a:lstStyle/>
+                    <a:p>
+                      <a:pPr lvl="0" indent="0" marL="0">
+                        <a:buNone/>
+                      </a:pPr>
+                      <a:r>
+                        <a:rPr/>
+                        <a:t>...</a:t>
+                      </a:r>
+                    </a:p>
+                  </a:txBody>
+                </a:tc>
+                <a:tc>
+                  <a:txBody>
+                    <a:bodyPr/>
+                    <a:lstStyle/>
+                    <a:p>
+                      <a:pPr lvl="0" indent="0" marL="0">
+                        <a:buNone/>
+                      </a:pPr>
+                      <a:r>
+                        <a:rPr/>
+                        <a:t>...</a:t>
+                      </a:r>
+                    </a:p>
+                  </a:txBody>
+                </a:tc>
+                <a:tc>
+                  <a:txBody>
+                    <a:bodyPr/>
+                    <a:lstStyle/>
+                    <a:p>
+                      <a:pPr lvl="0" indent="0" marL="0">
+                        <a:buNone/>
+                      </a:pPr>
+                      <a:r>
+                        <a:rPr/>
+                        <a:t>...</a:t>
+                      </a:r>
+                    </a:p>
+                  </a:txBody>
+                </a:tc>
+                <a:tc>
+                  <a:txBody>
+                    <a:bodyPr/>
+                    <a:lstStyle/>
+                    <a:p>
+                      <a:pPr lvl="0" indent="0" marL="0">
+                        <a:buNone/>
+                      </a:pPr>
+                      <a:r>
+                        <a:rPr/>
+                        <a:t>...</a:t>
+                      </a:r>
+                    </a:p>
+                  </a:txBody>
+                </a:tc>
+                <a:tc>
+                  <a:txBody>
+                    <a:bodyPr/>
+                    <a:lstStyle/>
+                    <a:p>
+                      <a:pPr lvl="0" indent="0" marL="0">
+                        <a:buNone/>
+                      </a:pPr>
+                      <a:r>
+                        <a:rPr/>
+                        <a:t>...</a:t>
+                      </a:r>
+                    </a:p>
+                  </a:txBody>
+                </a:tc>
+                <a:tc>
+                  <a:txBody>
+                    <a:bodyPr/>
+                    <a:lstStyle/>
+                    <a:p>
+                      <a:pPr lvl="0" indent="0" marL="0">
+                        <a:buNone/>
+                      </a:pPr>
+                      <a:r>
+                        <a:rPr/>
+                        <a:t>...</a:t>
+                      </a:r>
+                    </a:p>
+                  </a:txBody>
+                </a:tc>
+              </a:tr>
+              <a:tr h="0">
+                <a:tc>
+                  <a:txBody>
+                    <a:bodyPr/>
+                    <a:lstStyle/>
+                    <a:p>
+                      <a:pPr lvl="0" indent="0" marL="0">
+                        <a:buNone/>
+                      </a:pPr>
+                      <a:r>
+                        <a:rPr/>
+                        <a:t>137074</a:t>
+                      </a:r>
+                    </a:p>
+                  </a:txBody>
+                </a:tc>
+                <a:tc>
+                  <a:txBody>
+                    <a:bodyPr/>
+                    <a:lstStyle/>
+                    <a:p>
+                      <a:pPr lvl="0" indent="0" marL="0">
+                        <a:buNone/>
+                      </a:pPr>
+                      <a:r>
+                        <a:rPr/>
+                        <a:t>922</a:t>
+                      </a:r>
+                    </a:p>
+                  </a:txBody>
+                </a:tc>
+                <a:tc>
+                  <a:txBody>
+                    <a:bodyPr/>
+                    <a:lstStyle/>
+                    <a:p>
+                      <a:pPr lvl="0" indent="0" marL="0">
+                        <a:buNone/>
+                      </a:pPr>
+                      <a:r>
+                        <a:rPr/>
+                        <a:t>2.5</a:t>
+                      </a:r>
+                    </a:p>
+                  </a:txBody>
+                </a:tc>
+                <a:tc>
+                  <a:txBody>
+                    <a:bodyPr/>
+                    <a:lstStyle/>
+                    <a:p>
+                      <a:pPr lvl="0" indent="0" marL="0">
+                        <a:buNone/>
+                      </a:pPr>
+                      <a:r>
+                        <a:rPr/>
+                        <a:t>24.8</a:t>
+                      </a:r>
+                    </a:p>
+                  </a:txBody>
+                </a:tc>
+                <a:tc>
+                  <a:txBody>
+                    <a:bodyPr/>
+                    <a:lstStyle/>
+                    <a:p>
+                      <a:pPr lvl="0" indent="0" marL="0">
+                        <a:buNone/>
+                      </a:pPr>
+                      <a:r>
+                        <a:rPr/>
+                        <a:t>15.98</a:t>
+                      </a:r>
+                    </a:p>
+                  </a:txBody>
+                </a:tc>
+                <a:tc>
+                  <a:txBody>
+                    <a:bodyPr/>
+                    <a:lstStyle/>
+                    <a:p>
+                      <a:pPr lvl="0" indent="0" marL="0">
+                        <a:buNone/>
+                      </a:pPr>
+                      <a:r>
+                        <a:rPr/>
+                        <a:t>black willow</a:t>
+                      </a:r>
+                    </a:p>
+                  </a:txBody>
+                </a:tc>
+              </a:tr>
+              <a:tr h="0">
+                <a:tc>
+                  <a:txBody>
+                    <a:bodyPr/>
+                    <a:lstStyle/>
+                    <a:p>
+                      <a:pPr lvl="0" indent="0" marL="0">
+                        <a:buNone/>
+                      </a:pPr>
+                      <a:r>
+                        <a:rPr/>
+                        <a:t>137075</a:t>
+                      </a:r>
+                    </a:p>
+                  </a:txBody>
+                </a:tc>
+                <a:tc>
+                  <a:txBody>
+                    <a:bodyPr/>
+                    <a:lstStyle/>
+                    <a:p>
+                      <a:pPr lvl="0" indent="0" marL="0">
+                        <a:buNone/>
+                      </a:pPr>
+                      <a:r>
+                        <a:rPr/>
+                        <a:t>922</a:t>
+                      </a:r>
+                    </a:p>
+                  </a:txBody>
+                </a:tc>
+                <a:tc>
+                  <a:txBody>
+                    <a:bodyPr/>
+                    <a:lstStyle/>
+                    <a:p>
+                      <a:pPr lvl="0" indent="0" marL="0">
+                        <a:buNone/>
+                      </a:pPr>
+                      <a:r>
+                        <a:rPr/>
+                        <a:t>3.7</a:t>
+                      </a:r>
+                    </a:p>
+                  </a:txBody>
+                </a:tc>
+                <a:tc>
+                  <a:txBody>
+                    <a:bodyPr/>
+                    <a:lstStyle/>
+                    <a:p>
+                      <a:pPr lvl="0" indent="0" marL="0">
+                        <a:buNone/>
+                      </a:pPr>
+                      <a:r>
+                        <a:rPr/>
+                        <a:t>23.7</a:t>
+                      </a:r>
+                    </a:p>
+                  </a:txBody>
+                </a:tc>
+                <a:tc>
+                  <a:txBody>
+                    <a:bodyPr/>
+                    <a:lstStyle/>
+                    <a:p>
+                      <a:pPr lvl="0" indent="0" marL="0">
+                        <a:buNone/>
+                      </a:pPr>
+                      <a:r>
+                        <a:rPr/>
+                        <a:t>40.62</a:t>
+                      </a:r>
+                    </a:p>
+                  </a:txBody>
+                </a:tc>
+                <a:tc>
+                  <a:txBody>
+                    <a:bodyPr/>
+                    <a:lstStyle/>
+                    <a:p>
+                      <a:pPr lvl="0" indent="0" marL="0">
+                        <a:buNone/>
+                      </a:pPr>
+                      <a:r>
+                        <a:rPr/>
+                        <a:t>black willow</a:t>
+                      </a:r>
+                    </a:p>
+                  </a:txBody>
+                </a:tc>
+              </a:tr>
+              <a:tr h="0">
+                <a:tc>
+                  <a:txBody>
+                    <a:bodyPr/>
+                    <a:lstStyle/>
+                    <a:p>
+                      <a:pPr lvl="0" indent="0" marL="0">
+                        <a:buNone/>
+                      </a:pPr>
+                      <a:r>
+                        <a:rPr/>
+                        <a:t>137076</a:t>
+                      </a:r>
+                    </a:p>
+                  </a:txBody>
+                </a:tc>
+                <a:tc>
+                  <a:txBody>
+                    <a:bodyPr/>
+                    <a:lstStyle/>
+                    <a:p>
+                      <a:pPr lvl="0" indent="0" marL="0">
+                        <a:buNone/>
+                      </a:pPr>
+                      <a:r>
+                        <a:rPr/>
+                        <a:t>922</a:t>
+                      </a:r>
+                    </a:p>
+                  </a:txBody>
+                </a:tc>
+                <a:tc>
+                  <a:txBody>
+                    <a:bodyPr/>
+                    <a:lstStyle/>
+                    <a:p>
+                      <a:pPr lvl="0" indent="0" marL="0">
+                        <a:buNone/>
+                      </a:pPr>
+                      <a:r>
+                        <a:rPr/>
+                        <a:t>2.9</a:t>
+                      </a:r>
+                    </a:p>
+                  </a:txBody>
+                </a:tc>
+                <a:tc>
+                  <a:txBody>
+                    <a:bodyPr/>
+                    <a:lstStyle/>
+                    <a:p>
+                      <a:pPr lvl="0" indent="0" marL="0">
+                        <a:buNone/>
+                      </a:pPr>
+                      <a:r>
+                        <a:rPr/>
+                        <a:t>30.9</a:t>
+                      </a:r>
+                    </a:p>
+                  </a:txBody>
+                </a:tc>
+                <a:tc>
+                  <a:txBody>
+                    <a:bodyPr/>
+                    <a:lstStyle/>
+                    <a:p>
+                      <a:pPr lvl="0" indent="0" marL="0">
+                        <a:buNone/>
+                      </a:pPr>
+                      <a:r>
+                        <a:rPr/>
+                        <a:t>22.74</a:t>
+                      </a:r>
+                    </a:p>
+                  </a:txBody>
+                </a:tc>
+                <a:tc>
+                  <a:txBody>
+                    <a:bodyPr/>
+                    <a:lstStyle/>
+                    <a:p>
+                      <a:pPr lvl="0" indent="0" marL="0">
+                        <a:buNone/>
+                      </a:pPr>
+                      <a:r>
+                        <a:rPr/>
+                        <a:t>black willow</a:t>
+                      </a:r>
+                    </a:p>
+                  </a:txBody>
+                </a:tc>
+              </a:tr>
+              <a:tr h="0">
+                <a:tc>
+                  <a:txBody>
+                    <a:bodyPr/>
+                    <a:lstStyle/>
+                    <a:p>
+                      <a:pPr lvl="0" indent="0" marL="0">
+                        <a:buNone/>
+                      </a:pPr>
+                      <a:r>
+                        <a:rPr/>
+                        <a:t>137077</a:t>
+                      </a:r>
+                    </a:p>
+                  </a:txBody>
+                </a:tc>
+                <a:tc>
+                  <a:txBody>
+                    <a:bodyPr/>
+                    <a:lstStyle/>
+                    <a:p>
+                      <a:pPr lvl="0" indent="0" marL="0">
+                        <a:buNone/>
+                      </a:pPr>
+                      <a:r>
+                        <a:rPr/>
+                        <a:t>922</a:t>
+                      </a:r>
+                    </a:p>
+                  </a:txBody>
+                </a:tc>
+                <a:tc>
+                  <a:txBody>
+                    <a:bodyPr/>
+                    <a:lstStyle/>
+                    <a:p>
+                      <a:pPr lvl="0" indent="0" marL="0">
+                        <a:buNone/>
+                      </a:pPr>
+                      <a:r>
+                        <a:rPr/>
+                        <a:t>5.6</a:t>
+                      </a:r>
+                    </a:p>
+                  </a:txBody>
+                </a:tc>
+                <a:tc>
+                  <a:txBody>
+                    <a:bodyPr/>
+                    <a:lstStyle/>
+                    <a:p>
+                      <a:pPr lvl="0" indent="0" marL="0">
+                        <a:buNone/>
+                      </a:pPr>
+                      <a:r>
+                        <a:rPr/>
+                        <a:t>40.0</a:t>
+                      </a:r>
+                    </a:p>
+                  </a:txBody>
+                </a:tc>
+                <a:tc>
+                  <a:txBody>
+                    <a:bodyPr/>
+                    <a:lstStyle/>
+                    <a:p>
+                      <a:pPr lvl="0" indent="0" marL="0">
+                        <a:buNone/>
+                      </a:pPr>
+                      <a:r>
+                        <a:rPr/>
+                        <a:t>87.79</a:t>
+                      </a:r>
+                    </a:p>
+                  </a:txBody>
+                </a:tc>
+                <a:tc>
+                  <a:txBody>
+                    <a:bodyPr/>
+                    <a:lstStyle/>
+                    <a:p>
+                      <a:pPr lvl="0" indent="0" marL="0">
+                        <a:buNone/>
+                      </a:pPr>
+                      <a:r>
+                        <a:rPr/>
+                        <a:t>black willow</a:t>
+                      </a:r>
+                    </a:p>
+                  </a:txBody>
+                </a:tc>
+              </a:tr>
+              <a:tr h="0">
+                <a:tc>
+                  <a:txBody>
+                    <a:bodyPr/>
+                    <a:lstStyle/>
+                    <a:p>
+                      <a:pPr lvl="0" indent="0" marL="0">
+                        <a:buNone/>
+                      </a:pPr>
+                      <a:r>
+                        <a:rPr/>
+                        <a:t>137078</a:t>
+                      </a:r>
+                    </a:p>
+                  </a:txBody>
+                </a:tc>
+                <a:tc>
+                  <a:txBody>
+                    <a:bodyPr/>
+                    <a:lstStyle/>
+                    <a:p>
+                      <a:pPr lvl="0" indent="0" marL="0">
+                        <a:buNone/>
+                      </a:pPr>
+                      <a:r>
+                        <a:rPr/>
+                        <a:t>922</a:t>
+                      </a:r>
+                    </a:p>
+                  </a:txBody>
+                </a:tc>
+                <a:tc>
+                  <a:txBody>
+                    <a:bodyPr/>
+                    <a:lstStyle/>
+                    <a:p>
+                      <a:pPr lvl="0" indent="0" marL="0">
+                        <a:buNone/>
+                      </a:pPr>
+                      <a:r>
+                        <a:rPr/>
+                        <a:t>1.9</a:t>
+                      </a:r>
+                    </a:p>
+                  </a:txBody>
+                </a:tc>
+                <a:tc>
+                  <a:txBody>
+                    <a:bodyPr/>
+                    <a:lstStyle/>
+                    <a:p>
+                      <a:pPr lvl="0" indent="0" marL="0">
+                        <a:buNone/>
+                      </a:pPr>
+                      <a:r>
+                        <a:rPr/>
+                        <a:t>25.1</a:t>
+                      </a:r>
+                    </a:p>
+                  </a:txBody>
+                </a:tc>
+                <a:tc>
+                  <a:txBody>
+                    <a:bodyPr/>
+                    <a:lstStyle/>
+                    <a:p>
+                      <a:pPr lvl="0" indent="0" marL="0">
+                        <a:buNone/>
+                      </a:pPr>
+                      <a:r>
+                        <a:rPr/>
+                        <a:t>8.33</a:t>
+                      </a:r>
+                    </a:p>
+                  </a:txBody>
+                </a:tc>
+                <a:tc>
+                  <a:txBody>
+                    <a:bodyPr/>
+                    <a:lstStyle/>
+                    <a:p>
+                      <a:pPr lvl="0" indent="0" marL="0">
+                        <a:buNone/>
+                      </a:pPr>
+                      <a:r>
+                        <a:rPr/>
+                        <a:t>black willow</a:t>
                       </a:r>
                     </a:p>
                   </a:txBody>
@@ -7764,7 +8892,7 @@
             </a:pPr>
             <a:r>
               <a:rPr/>
-              <a:t>Base datset calculations:</a:t>
+              <a:t>Testing k values</a:t>
             </a:r>
           </a:p>
         </p:txBody>
@@ -7791,7 +8919,11 @@
               <a:rPr>
                 <a:latin typeface="Courier"/>
               </a:rPr>
-              <a:t>Average Root Mean Squared Log Error (RMSLE) for k = 3: 0.15805917967387384</a:t>
+              <a:t>Average (RMSLE) for k = 3: 0.1580629318243207
+Average (RMSLE) for k = 4: 0.16211701677056745
+Average (RMSLE) for k = 5: 0.16799989948813462
+Average (RMSLE) for k = 6: 0.17424643902227938
+Average (RMSLE) for k = 7: 0.18028016714992606</a:t>
             </a:r>
           </a:p>
         </p:txBody>
@@ -7838,11 +8970,1951 @@
             </a:pPr>
             <a:r>
               <a:rPr/>
-              <a:t>Quality Assurance</a:t>
+              <a:t>Adding features</a:t>
             </a:r>
           </a:p>
         </p:txBody>
       </p:sp>
+      <p:graphicFrame>
+        <p:nvGraphicFramePr>
+          <p:cNvPr id="6" name="Content Placeholder 5"/>
+          <p:cNvGraphicFramePr>
+            <a:graphicFrameLocks noGrp="1"/>
+          </p:cNvGraphicFramePr>
+          <p:nvPr>
+            <p:ph idx="1"/>
+          </p:nvPr>
+        </p:nvGraphicFramePr>
+        <p:xfrm>
+          <a:off x="457200" y="1193800"/>
+          <a:ext cx="8229600" cy="3390900"/>
+        </p:xfrm>
+        <a:graphic>
+          <a:graphicData uri="http://schemas.openxmlformats.org/drawingml/2006/table">
+            <a:tbl>
+              <a:tblPr firstRow="1" bandRow="1">
+                <a:tableStyleId>{5C22544A-7EE6-4342-B048-85BDC9FD1C3A}</a:tableStyleId>
+              </a:tblPr>
+              <a:tblGrid>
+                <a:gridCol w="914400"/>
+                <a:gridCol w="914400"/>
+                <a:gridCol w="914400"/>
+                <a:gridCol w="914400"/>
+                <a:gridCol w="914400"/>
+                <a:gridCol w="914400"/>
+                <a:gridCol w="914400"/>
+                <a:gridCol w="914400"/>
+                <a:gridCol w="914400"/>
+              </a:tblGrid>
+              <a:tr h="0">
+                <a:tc>
+                  <a:txBody>
+                    <a:bodyPr/>
+                    <a:lstStyle/>
+                    <a:p>
+                      <a:endParaRPr/>
+                    </a:p>
+                  </a:txBody>
+                  <a:tcPr/>
+                </a:tc>
+                <a:tc>
+                  <a:txBody>
+                    <a:bodyPr/>
+                    <a:lstStyle/>
+                    <a:p>
+                      <a:pPr lvl="0" indent="0" marL="0">
+                        <a:buNone/>
+                      </a:pPr>
+                      <a:r>
+                        <a:rPr/>
+                        <a:t>SPCD</a:t>
+                      </a:r>
+                    </a:p>
+                  </a:txBody>
+                  <a:tcPr/>
+                </a:tc>
+                <a:tc>
+                  <a:txBody>
+                    <a:bodyPr/>
+                    <a:lstStyle/>
+                    <a:p>
+                      <a:pPr lvl="0" indent="0" marL="0">
+                        <a:buNone/>
+                      </a:pPr>
+                      <a:r>
+                        <a:rPr/>
+                        <a:t>DO_BH</a:t>
+                      </a:r>
+                    </a:p>
+                  </a:txBody>
+                  <a:tcPr/>
+                </a:tc>
+                <a:tc>
+                  <a:txBody>
+                    <a:bodyPr/>
+                    <a:lstStyle/>
+                    <a:p>
+                      <a:pPr lvl="0" indent="0" marL="0">
+                        <a:buNone/>
+                      </a:pPr>
+                      <a:r>
+                        <a:rPr/>
+                        <a:t>HT_TOT</a:t>
+                      </a:r>
+                    </a:p>
+                  </a:txBody>
+                  <a:tcPr/>
+                </a:tc>
+                <a:tc>
+                  <a:txBody>
+                    <a:bodyPr/>
+                    <a:lstStyle/>
+                    <a:p>
+                      <a:pPr lvl="0" indent="0" marL="0">
+                        <a:buNone/>
+                      </a:pPr>
+                      <a:r>
+                        <a:rPr/>
+                        <a:t>TT_DW_CRM</a:t>
+                      </a:r>
+                    </a:p>
+                  </a:txBody>
+                  <a:tcPr/>
+                </a:tc>
+                <a:tc>
+                  <a:txBody>
+                    <a:bodyPr/>
+                    <a:lstStyle/>
+                    <a:p>
+                      <a:pPr lvl="0" indent="0" marL="0">
+                        <a:buNone/>
+                      </a:pPr>
+                      <a:r>
+                        <a:rPr/>
+                        <a:t>COMMON_NAME</a:t>
+                      </a:r>
+                    </a:p>
+                  </a:txBody>
+                  <a:tcPr/>
+                </a:tc>
+                <a:tc>
+                  <a:txBody>
+                    <a:bodyPr/>
+                    <a:lstStyle/>
+                    <a:p>
+                      <a:pPr lvl="0" indent="0" marL="0">
+                        <a:buNone/>
+                      </a:pPr>
+                      <a:r>
+                        <a:rPr/>
+                        <a:t>VOLUME</a:t>
+                      </a:r>
+                    </a:p>
+                  </a:txBody>
+                  <a:tcPr/>
+                </a:tc>
+                <a:tc>
+                  <a:txBody>
+                    <a:bodyPr/>
+                    <a:lstStyle/>
+                    <a:p>
+                      <a:pPr lvl="0" indent="0" marL="0">
+                        <a:buNone/>
+                      </a:pPr>
+                      <a:r>
+                        <a:rPr/>
+                        <a:t>H_D_INT</a:t>
+                      </a:r>
+                    </a:p>
+                  </a:txBody>
+                  <a:tcPr/>
+                </a:tc>
+                <a:tc>
+                  <a:txBody>
+                    <a:bodyPr/>
+                    <a:lstStyle/>
+                    <a:p>
+                      <a:pPr lvl="0" indent="0" marL="0">
+                        <a:buNone/>
+                      </a:pPr>
+                      <a:r>
+                        <a:rPr/>
+                        <a:t>H_SQUARED</a:t>
+                      </a:r>
+                    </a:p>
+                  </a:txBody>
+                  <a:tcPr/>
+                </a:tc>
+              </a:tr>
+              <a:tr h="0">
+                <a:tc>
+                  <a:txBody>
+                    <a:bodyPr/>
+                    <a:lstStyle/>
+                    <a:p>
+                      <a:pPr lvl="0" indent="0" marL="0">
+                        <a:buNone/>
+                      </a:pPr>
+                      <a:r>
+                        <a:rPr/>
+                        <a:t>0</a:t>
+                      </a:r>
+                    </a:p>
+                  </a:txBody>
+                </a:tc>
+                <a:tc>
+                  <a:txBody>
+                    <a:bodyPr/>
+                    <a:lstStyle/>
+                    <a:p>
+                      <a:pPr lvl="0" indent="0" marL="0">
+                        <a:buNone/>
+                      </a:pPr>
+                      <a:r>
+                        <a:rPr/>
+                        <a:t>12</a:t>
+                      </a:r>
+                    </a:p>
+                  </a:txBody>
+                </a:tc>
+                <a:tc>
+                  <a:txBody>
+                    <a:bodyPr/>
+                    <a:lstStyle/>
+                    <a:p>
+                      <a:pPr lvl="0" indent="0" marL="0">
+                        <a:buNone/>
+                      </a:pPr>
+                      <a:r>
+                        <a:rPr/>
+                        <a:t>7.5</a:t>
+                      </a:r>
+                    </a:p>
+                  </a:txBody>
+                </a:tc>
+                <a:tc>
+                  <a:txBody>
+                    <a:bodyPr/>
+                    <a:lstStyle/>
+                    <a:p>
+                      <a:pPr lvl="0" indent="0" marL="0">
+                        <a:buNone/>
+                      </a:pPr>
+                      <a:r>
+                        <a:rPr/>
+                        <a:t>45.2</a:t>
+                      </a:r>
+                    </a:p>
+                  </a:txBody>
+                </a:tc>
+                <a:tc>
+                  <a:txBody>
+                    <a:bodyPr/>
+                    <a:lstStyle/>
+                    <a:p>
+                      <a:pPr lvl="0" indent="0" marL="0">
+                        <a:buNone/>
+                      </a:pPr>
+                      <a:r>
+                        <a:rPr/>
+                        <a:t>178.86</a:t>
+                      </a:r>
+                    </a:p>
+                  </a:txBody>
+                </a:tc>
+                <a:tc>
+                  <a:txBody>
+                    <a:bodyPr/>
+                    <a:lstStyle/>
+                    <a:p>
+                      <a:pPr lvl="0" indent="0" marL="0">
+                        <a:buNone/>
+                      </a:pPr>
+                      <a:r>
+                        <a:rPr/>
+                        <a:t>balsam fir</a:t>
+                      </a:r>
+                    </a:p>
+                  </a:txBody>
+                </a:tc>
+                <a:tc>
+                  <a:txBody>
+                    <a:bodyPr/>
+                    <a:lstStyle/>
+                    <a:p>
+                      <a:pPr lvl="0" indent="0" marL="0">
+                        <a:buNone/>
+                      </a:pPr>
+                      <a:r>
+                        <a:rPr/>
+                        <a:t>1996.873144</a:t>
+                      </a:r>
+                    </a:p>
+                  </a:txBody>
+                </a:tc>
+                <a:tc>
+                  <a:txBody>
+                    <a:bodyPr/>
+                    <a:lstStyle/>
+                    <a:p>
+                      <a:pPr lvl="0" indent="0" marL="0">
+                        <a:buNone/>
+                      </a:pPr>
+                      <a:r>
+                        <a:rPr/>
+                        <a:t>339.00</a:t>
+                      </a:r>
+                    </a:p>
+                  </a:txBody>
+                </a:tc>
+                <a:tc>
+                  <a:txBody>
+                    <a:bodyPr/>
+                    <a:lstStyle/>
+                    <a:p>
+                      <a:pPr lvl="0" indent="0" marL="0">
+                        <a:buNone/>
+                      </a:pPr>
+                      <a:r>
+                        <a:rPr/>
+                        <a:t>2043.04</a:t>
+                      </a:r>
+                    </a:p>
+                  </a:txBody>
+                </a:tc>
+              </a:tr>
+              <a:tr h="0">
+                <a:tc>
+                  <a:txBody>
+                    <a:bodyPr/>
+                    <a:lstStyle/>
+                    <a:p>
+                      <a:pPr lvl="0" indent="0" marL="0">
+                        <a:buNone/>
+                      </a:pPr>
+                      <a:r>
+                        <a:rPr/>
+                        <a:t>1</a:t>
+                      </a:r>
+                    </a:p>
+                  </a:txBody>
+                </a:tc>
+                <a:tc>
+                  <a:txBody>
+                    <a:bodyPr/>
+                    <a:lstStyle/>
+                    <a:p>
+                      <a:pPr lvl="0" indent="0" marL="0">
+                        <a:buNone/>
+                      </a:pPr>
+                      <a:r>
+                        <a:rPr/>
+                        <a:t>12</a:t>
+                      </a:r>
+                    </a:p>
+                  </a:txBody>
+                </a:tc>
+                <a:tc>
+                  <a:txBody>
+                    <a:bodyPr/>
+                    <a:lstStyle/>
+                    <a:p>
+                      <a:pPr lvl="0" indent="0" marL="0">
+                        <a:buNone/>
+                      </a:pPr>
+                      <a:r>
+                        <a:rPr/>
+                        <a:t>9.3</a:t>
+                      </a:r>
+                    </a:p>
+                  </a:txBody>
+                </a:tc>
+                <a:tc>
+                  <a:txBody>
+                    <a:bodyPr/>
+                    <a:lstStyle/>
+                    <a:p>
+                      <a:pPr lvl="0" indent="0" marL="0">
+                        <a:buNone/>
+                      </a:pPr>
+                      <a:r>
+                        <a:rPr/>
+                        <a:t>62.7</a:t>
+                      </a:r>
+                    </a:p>
+                  </a:txBody>
+                </a:tc>
+                <a:tc>
+                  <a:txBody>
+                    <a:bodyPr/>
+                    <a:lstStyle/>
+                    <a:p>
+                      <a:pPr lvl="0" indent="0" marL="0">
+                        <a:buNone/>
+                      </a:pPr>
+                      <a:r>
+                        <a:rPr/>
+                        <a:t>323.46</a:t>
+                      </a:r>
+                    </a:p>
+                  </a:txBody>
+                </a:tc>
+                <a:tc>
+                  <a:txBody>
+                    <a:bodyPr/>
+                    <a:lstStyle/>
+                    <a:p>
+                      <a:pPr lvl="0" indent="0" marL="0">
+                        <a:buNone/>
+                      </a:pPr>
+                      <a:r>
+                        <a:rPr/>
+                        <a:t>balsam fir</a:t>
+                      </a:r>
+                    </a:p>
+                  </a:txBody>
+                </a:tc>
+                <a:tc>
+                  <a:txBody>
+                    <a:bodyPr/>
+                    <a:lstStyle/>
+                    <a:p>
+                      <a:pPr lvl="0" indent="0" marL="0">
+                        <a:buNone/>
+                      </a:pPr>
+                      <a:r>
+                        <a:rPr/>
+                        <a:t>4259.150167</a:t>
+                      </a:r>
+                    </a:p>
+                  </a:txBody>
+                </a:tc>
+                <a:tc>
+                  <a:txBody>
+                    <a:bodyPr/>
+                    <a:lstStyle/>
+                    <a:p>
+                      <a:pPr lvl="0" indent="0" marL="0">
+                        <a:buNone/>
+                      </a:pPr>
+                      <a:r>
+                        <a:rPr/>
+                        <a:t>583.11</a:t>
+                      </a:r>
+                    </a:p>
+                  </a:txBody>
+                </a:tc>
+                <a:tc>
+                  <a:txBody>
+                    <a:bodyPr/>
+                    <a:lstStyle/>
+                    <a:p>
+                      <a:pPr lvl="0" indent="0" marL="0">
+                        <a:buNone/>
+                      </a:pPr>
+                      <a:r>
+                        <a:rPr/>
+                        <a:t>3931.29</a:t>
+                      </a:r>
+                    </a:p>
+                  </a:txBody>
+                </a:tc>
+              </a:tr>
+              <a:tr h="0">
+                <a:tc>
+                  <a:txBody>
+                    <a:bodyPr/>
+                    <a:lstStyle/>
+                    <a:p>
+                      <a:pPr lvl="0" indent="0" marL="0">
+                        <a:buNone/>
+                      </a:pPr>
+                      <a:r>
+                        <a:rPr/>
+                        <a:t>2</a:t>
+                      </a:r>
+                    </a:p>
+                  </a:txBody>
+                </a:tc>
+                <a:tc>
+                  <a:txBody>
+                    <a:bodyPr/>
+                    <a:lstStyle/>
+                    <a:p>
+                      <a:pPr lvl="0" indent="0" marL="0">
+                        <a:buNone/>
+                      </a:pPr>
+                      <a:r>
+                        <a:rPr/>
+                        <a:t>12</a:t>
+                      </a:r>
+                    </a:p>
+                  </a:txBody>
+                </a:tc>
+                <a:tc>
+                  <a:txBody>
+                    <a:bodyPr/>
+                    <a:lstStyle/>
+                    <a:p>
+                      <a:pPr lvl="0" indent="0" marL="0">
+                        <a:buNone/>
+                      </a:pPr>
+                      <a:r>
+                        <a:rPr/>
+                        <a:t>9.7</a:t>
+                      </a:r>
+                    </a:p>
+                  </a:txBody>
+                </a:tc>
+                <a:tc>
+                  <a:txBody>
+                    <a:bodyPr/>
+                    <a:lstStyle/>
+                    <a:p>
+                      <a:pPr lvl="0" indent="0" marL="0">
+                        <a:buNone/>
+                      </a:pPr>
+                      <a:r>
+                        <a:rPr/>
+                        <a:t>56.7</a:t>
+                      </a:r>
+                    </a:p>
+                  </a:txBody>
+                </a:tc>
+                <a:tc>
+                  <a:txBody>
+                    <a:bodyPr/>
+                    <a:lstStyle/>
+                    <a:p>
+                      <a:pPr lvl="0" indent="0" marL="0">
+                        <a:buNone/>
+                      </a:pPr>
+                      <a:r>
+                        <a:rPr/>
+                        <a:t>342.47</a:t>
+                      </a:r>
+                    </a:p>
+                  </a:txBody>
+                </a:tc>
+                <a:tc>
+                  <a:txBody>
+                    <a:bodyPr/>
+                    <a:lstStyle/>
+                    <a:p>
+                      <a:pPr lvl="0" indent="0" marL="0">
+                        <a:buNone/>
+                      </a:pPr>
+                      <a:r>
+                        <a:rPr/>
+                        <a:t>balsam fir</a:t>
+                      </a:r>
+                    </a:p>
+                  </a:txBody>
+                </a:tc>
+                <a:tc>
+                  <a:txBody>
+                    <a:bodyPr/>
+                    <a:lstStyle/>
+                    <a:p>
+                      <a:pPr lvl="0" indent="0" marL="0">
+                        <a:buNone/>
+                      </a:pPr>
+                      <a:r>
+                        <a:rPr/>
+                        <a:t>4190.019479</a:t>
+                      </a:r>
+                    </a:p>
+                  </a:txBody>
+                </a:tc>
+                <a:tc>
+                  <a:txBody>
+                    <a:bodyPr/>
+                    <a:lstStyle/>
+                    <a:p>
+                      <a:pPr lvl="0" indent="0" marL="0">
+                        <a:buNone/>
+                      </a:pPr>
+                      <a:r>
+                        <a:rPr/>
+                        <a:t>549.99</a:t>
+                      </a:r>
+                    </a:p>
+                  </a:txBody>
+                </a:tc>
+                <a:tc>
+                  <a:txBody>
+                    <a:bodyPr/>
+                    <a:lstStyle/>
+                    <a:p>
+                      <a:pPr lvl="0" indent="0" marL="0">
+                        <a:buNone/>
+                      </a:pPr>
+                      <a:r>
+                        <a:rPr/>
+                        <a:t>3214.89</a:t>
+                      </a:r>
+                    </a:p>
+                  </a:txBody>
+                </a:tc>
+              </a:tr>
+              <a:tr h="0">
+                <a:tc>
+                  <a:txBody>
+                    <a:bodyPr/>
+                    <a:lstStyle/>
+                    <a:p>
+                      <a:pPr lvl="0" indent="0" marL="0">
+                        <a:buNone/>
+                      </a:pPr>
+                      <a:r>
+                        <a:rPr/>
+                        <a:t>3</a:t>
+                      </a:r>
+                    </a:p>
+                  </a:txBody>
+                </a:tc>
+                <a:tc>
+                  <a:txBody>
+                    <a:bodyPr/>
+                    <a:lstStyle/>
+                    <a:p>
+                      <a:pPr lvl="0" indent="0" marL="0">
+                        <a:buNone/>
+                      </a:pPr>
+                      <a:r>
+                        <a:rPr/>
+                        <a:t>12</a:t>
+                      </a:r>
+                    </a:p>
+                  </a:txBody>
+                </a:tc>
+                <a:tc>
+                  <a:txBody>
+                    <a:bodyPr/>
+                    <a:lstStyle/>
+                    <a:p>
+                      <a:pPr lvl="0" indent="0" marL="0">
+                        <a:buNone/>
+                      </a:pPr>
+                      <a:r>
+                        <a:rPr/>
+                        <a:t>11.4</a:t>
+                      </a:r>
+                    </a:p>
+                  </a:txBody>
+                </a:tc>
+                <a:tc>
+                  <a:txBody>
+                    <a:bodyPr/>
+                    <a:lstStyle/>
+                    <a:p>
+                      <a:pPr lvl="0" indent="0" marL="0">
+                        <a:buNone/>
+                      </a:pPr>
+                      <a:r>
+                        <a:rPr/>
+                        <a:t>66.1</a:t>
+                      </a:r>
+                    </a:p>
+                  </a:txBody>
+                </a:tc>
+                <a:tc>
+                  <a:txBody>
+                    <a:bodyPr/>
+                    <a:lstStyle/>
+                    <a:p>
+                      <a:pPr lvl="0" indent="0" marL="0">
+                        <a:buNone/>
+                      </a:pPr>
+                      <a:r>
+                        <a:rPr/>
+                        <a:t>499.35</a:t>
+                      </a:r>
+                    </a:p>
+                  </a:txBody>
+                </a:tc>
+                <a:tc>
+                  <a:txBody>
+                    <a:bodyPr/>
+                    <a:lstStyle/>
+                    <a:p>
+                      <a:pPr lvl="0" indent="0" marL="0">
+                        <a:buNone/>
+                      </a:pPr>
+                      <a:r>
+                        <a:rPr/>
+                        <a:t>balsam fir</a:t>
+                      </a:r>
+                    </a:p>
+                  </a:txBody>
+                </a:tc>
+                <a:tc>
+                  <a:txBody>
+                    <a:bodyPr/>
+                    <a:lstStyle/>
+                    <a:p>
+                      <a:pPr lvl="0" indent="0" marL="0">
+                        <a:buNone/>
+                      </a:pPr>
+                      <a:r>
+                        <a:rPr/>
+                        <a:t>6746.844127</a:t>
+                      </a:r>
+                    </a:p>
+                  </a:txBody>
+                </a:tc>
+                <a:tc>
+                  <a:txBody>
+                    <a:bodyPr/>
+                    <a:lstStyle/>
+                    <a:p>
+                      <a:pPr lvl="0" indent="0" marL="0">
+                        <a:buNone/>
+                      </a:pPr>
+                      <a:r>
+                        <a:rPr/>
+                        <a:t>753.54</a:t>
+                      </a:r>
+                    </a:p>
+                  </a:txBody>
+                </a:tc>
+                <a:tc>
+                  <a:txBody>
+                    <a:bodyPr/>
+                    <a:lstStyle/>
+                    <a:p>
+                      <a:pPr lvl="0" indent="0" marL="0">
+                        <a:buNone/>
+                      </a:pPr>
+                      <a:r>
+                        <a:rPr/>
+                        <a:t>4369.21</a:t>
+                      </a:r>
+                    </a:p>
+                  </a:txBody>
+                </a:tc>
+              </a:tr>
+              <a:tr h="0">
+                <a:tc>
+                  <a:txBody>
+                    <a:bodyPr/>
+                    <a:lstStyle/>
+                    <a:p>
+                      <a:pPr lvl="0" indent="0" marL="0">
+                        <a:buNone/>
+                      </a:pPr>
+                      <a:r>
+                        <a:rPr/>
+                        <a:t>4</a:t>
+                      </a:r>
+                    </a:p>
+                  </a:txBody>
+                </a:tc>
+                <a:tc>
+                  <a:txBody>
+                    <a:bodyPr/>
+                    <a:lstStyle/>
+                    <a:p>
+                      <a:pPr lvl="0" indent="0" marL="0">
+                        <a:buNone/>
+                      </a:pPr>
+                      <a:r>
+                        <a:rPr/>
+                        <a:t>12</a:t>
+                      </a:r>
+                    </a:p>
+                  </a:txBody>
+                </a:tc>
+                <a:tc>
+                  <a:txBody>
+                    <a:bodyPr/>
+                    <a:lstStyle/>
+                    <a:p>
+                      <a:pPr lvl="0" indent="0" marL="0">
+                        <a:buNone/>
+                      </a:pPr>
+                      <a:r>
+                        <a:rPr/>
+                        <a:t>6.4</a:t>
+                      </a:r>
+                    </a:p>
+                  </a:txBody>
+                </a:tc>
+                <a:tc>
+                  <a:txBody>
+                    <a:bodyPr/>
+                    <a:lstStyle/>
+                    <a:p>
+                      <a:pPr lvl="0" indent="0" marL="0">
+                        <a:buNone/>
+                      </a:pPr>
+                      <a:r>
+                        <a:rPr/>
+                        <a:t>51.8</a:t>
+                      </a:r>
+                    </a:p>
+                  </a:txBody>
+                </a:tc>
+                <a:tc>
+                  <a:txBody>
+                    <a:bodyPr/>
+                    <a:lstStyle/>
+                    <a:p>
+                      <a:pPr lvl="0" indent="0" marL="0">
+                        <a:buNone/>
+                      </a:pPr>
+                      <a:r>
+                        <a:rPr/>
+                        <a:t>113.92</a:t>
+                      </a:r>
+                    </a:p>
+                  </a:txBody>
+                </a:tc>
+                <a:tc>
+                  <a:txBody>
+                    <a:bodyPr/>
+                    <a:lstStyle/>
+                    <a:p>
+                      <a:pPr lvl="0" indent="0" marL="0">
+                        <a:buNone/>
+                      </a:pPr>
+                      <a:r>
+                        <a:rPr/>
+                        <a:t>balsam fir</a:t>
+                      </a:r>
+                    </a:p>
+                  </a:txBody>
+                </a:tc>
+                <a:tc>
+                  <a:txBody>
+                    <a:bodyPr/>
+                    <a:lstStyle/>
+                    <a:p>
+                      <a:pPr lvl="0" indent="0" marL="0">
+                        <a:buNone/>
+                      </a:pPr>
+                      <a:r>
+                        <a:rPr/>
+                        <a:t>1666.399867</a:t>
+                      </a:r>
+                    </a:p>
+                  </a:txBody>
+                </a:tc>
+                <a:tc>
+                  <a:txBody>
+                    <a:bodyPr/>
+                    <a:lstStyle/>
+                    <a:p>
+                      <a:pPr lvl="0" indent="0" marL="0">
+                        <a:buNone/>
+                      </a:pPr>
+                      <a:r>
+                        <a:rPr/>
+                        <a:t>331.52</a:t>
+                      </a:r>
+                    </a:p>
+                  </a:txBody>
+                </a:tc>
+                <a:tc>
+                  <a:txBody>
+                    <a:bodyPr/>
+                    <a:lstStyle/>
+                    <a:p>
+                      <a:pPr lvl="0" indent="0" marL="0">
+                        <a:buNone/>
+                      </a:pPr>
+                      <a:r>
+                        <a:rPr/>
+                        <a:t>2683.24</a:t>
+                      </a:r>
+                    </a:p>
+                  </a:txBody>
+                </a:tc>
+              </a:tr>
+              <a:tr h="0">
+                <a:tc>
+                  <a:txBody>
+                    <a:bodyPr/>
+                    <a:lstStyle/>
+                    <a:p>
+                      <a:pPr lvl="0" indent="0" marL="0">
+                        <a:buNone/>
+                      </a:pPr>
+                      <a:r>
+                        <a:rPr/>
+                        <a:t>...</a:t>
+                      </a:r>
+                    </a:p>
+                  </a:txBody>
+                </a:tc>
+                <a:tc>
+                  <a:txBody>
+                    <a:bodyPr/>
+                    <a:lstStyle/>
+                    <a:p>
+                      <a:pPr lvl="0" indent="0" marL="0">
+                        <a:buNone/>
+                      </a:pPr>
+                      <a:r>
+                        <a:rPr/>
+                        <a:t>...</a:t>
+                      </a:r>
+                    </a:p>
+                  </a:txBody>
+                </a:tc>
+                <a:tc>
+                  <a:txBody>
+                    <a:bodyPr/>
+                    <a:lstStyle/>
+                    <a:p>
+                      <a:pPr lvl="0" indent="0" marL="0">
+                        <a:buNone/>
+                      </a:pPr>
+                      <a:r>
+                        <a:rPr/>
+                        <a:t>...</a:t>
+                      </a:r>
+                    </a:p>
+                  </a:txBody>
+                </a:tc>
+                <a:tc>
+                  <a:txBody>
+                    <a:bodyPr/>
+                    <a:lstStyle/>
+                    <a:p>
+                      <a:pPr lvl="0" indent="0" marL="0">
+                        <a:buNone/>
+                      </a:pPr>
+                      <a:r>
+                        <a:rPr/>
+                        <a:t>...</a:t>
+                      </a:r>
+                    </a:p>
+                  </a:txBody>
+                </a:tc>
+                <a:tc>
+                  <a:txBody>
+                    <a:bodyPr/>
+                    <a:lstStyle/>
+                    <a:p>
+                      <a:pPr lvl="0" indent="0" marL="0">
+                        <a:buNone/>
+                      </a:pPr>
+                      <a:r>
+                        <a:rPr/>
+                        <a:t>...</a:t>
+                      </a:r>
+                    </a:p>
+                  </a:txBody>
+                </a:tc>
+                <a:tc>
+                  <a:txBody>
+                    <a:bodyPr/>
+                    <a:lstStyle/>
+                    <a:p>
+                      <a:pPr lvl="0" indent="0" marL="0">
+                        <a:buNone/>
+                      </a:pPr>
+                      <a:r>
+                        <a:rPr/>
+                        <a:t>...</a:t>
+                      </a:r>
+                    </a:p>
+                  </a:txBody>
+                </a:tc>
+                <a:tc>
+                  <a:txBody>
+                    <a:bodyPr/>
+                    <a:lstStyle/>
+                    <a:p>
+                      <a:pPr lvl="0" indent="0" marL="0">
+                        <a:buNone/>
+                      </a:pPr>
+                      <a:r>
+                        <a:rPr/>
+                        <a:t>...</a:t>
+                      </a:r>
+                    </a:p>
+                  </a:txBody>
+                </a:tc>
+                <a:tc>
+                  <a:txBody>
+                    <a:bodyPr/>
+                    <a:lstStyle/>
+                    <a:p>
+                      <a:pPr lvl="0" indent="0" marL="0">
+                        <a:buNone/>
+                      </a:pPr>
+                      <a:r>
+                        <a:rPr/>
+                        <a:t>...</a:t>
+                      </a:r>
+                    </a:p>
+                  </a:txBody>
+                </a:tc>
+                <a:tc>
+                  <a:txBody>
+                    <a:bodyPr/>
+                    <a:lstStyle/>
+                    <a:p>
+                      <a:pPr lvl="0" indent="0" marL="0">
+                        <a:buNone/>
+                      </a:pPr>
+                      <a:r>
+                        <a:rPr/>
+                        <a:t>...</a:t>
+                      </a:r>
+                    </a:p>
+                  </a:txBody>
+                </a:tc>
+              </a:tr>
+              <a:tr h="0">
+                <a:tc>
+                  <a:txBody>
+                    <a:bodyPr/>
+                    <a:lstStyle/>
+                    <a:p>
+                      <a:pPr lvl="0" indent="0" marL="0">
+                        <a:buNone/>
+                      </a:pPr>
+                      <a:r>
+                        <a:rPr/>
+                        <a:t>107641</a:t>
+                      </a:r>
+                    </a:p>
+                  </a:txBody>
+                </a:tc>
+                <a:tc>
+                  <a:txBody>
+                    <a:bodyPr/>
+                    <a:lstStyle/>
+                    <a:p>
+                      <a:pPr lvl="0" indent="0" marL="0">
+                        <a:buNone/>
+                      </a:pPr>
+                      <a:r>
+                        <a:rPr/>
+                        <a:t>461</a:t>
+                      </a:r>
+                    </a:p>
+                  </a:txBody>
+                </a:tc>
+                <a:tc>
+                  <a:txBody>
+                    <a:bodyPr/>
+                    <a:lstStyle/>
+                    <a:p>
+                      <a:pPr lvl="0" indent="0" marL="0">
+                        <a:buNone/>
+                      </a:pPr>
+                      <a:r>
+                        <a:rPr/>
+                        <a:t>17.5</a:t>
+                      </a:r>
+                    </a:p>
+                  </a:txBody>
+                </a:tc>
+                <a:tc>
+                  <a:txBody>
+                    <a:bodyPr/>
+                    <a:lstStyle/>
+                    <a:p>
+                      <a:pPr lvl="0" indent="0" marL="0">
+                        <a:buNone/>
+                      </a:pPr>
+                      <a:r>
+                        <a:rPr/>
+                        <a:t>87.4</a:t>
+                      </a:r>
+                    </a:p>
+                  </a:txBody>
+                </a:tc>
+                <a:tc>
+                  <a:txBody>
+                    <a:bodyPr/>
+                    <a:lstStyle/>
+                    <a:p>
+                      <a:pPr lvl="0" indent="0" marL="0">
+                        <a:buNone/>
+                      </a:pPr>
+                      <a:r>
+                        <a:rPr/>
+                        <a:t>2042.09</a:t>
+                      </a:r>
+                    </a:p>
+                  </a:txBody>
+                </a:tc>
+                <a:tc>
+                  <a:txBody>
+                    <a:bodyPr/>
+                    <a:lstStyle/>
+                    <a:p>
+                      <a:pPr lvl="0" indent="0" marL="0">
+                        <a:buNone/>
+                      </a:pPr>
+                      <a:r>
+                        <a:rPr/>
+                        <a:t>sugarberry</a:t>
+                      </a:r>
+                    </a:p>
+                  </a:txBody>
+                </a:tc>
+                <a:tc>
+                  <a:txBody>
+                    <a:bodyPr/>
+                    <a:lstStyle/>
+                    <a:p>
+                      <a:pPr lvl="0" indent="0" marL="0">
+                        <a:buNone/>
+                      </a:pPr>
+                      <a:r>
+                        <a:rPr/>
+                        <a:t>21022.145834</a:t>
+                      </a:r>
+                    </a:p>
+                  </a:txBody>
+                </a:tc>
+                <a:tc>
+                  <a:txBody>
+                    <a:bodyPr/>
+                    <a:lstStyle/>
+                    <a:p>
+                      <a:pPr lvl="0" indent="0" marL="0">
+                        <a:buNone/>
+                      </a:pPr>
+                      <a:r>
+                        <a:rPr/>
+                        <a:t>1529.50</a:t>
+                      </a:r>
+                    </a:p>
+                  </a:txBody>
+                </a:tc>
+                <a:tc>
+                  <a:txBody>
+                    <a:bodyPr/>
+                    <a:lstStyle/>
+                    <a:p>
+                      <a:pPr lvl="0" indent="0" marL="0">
+                        <a:buNone/>
+                      </a:pPr>
+                      <a:r>
+                        <a:rPr/>
+                        <a:t>7638.76</a:t>
+                      </a:r>
+                    </a:p>
+                  </a:txBody>
+                </a:tc>
+              </a:tr>
+              <a:tr h="0">
+                <a:tc>
+                  <a:txBody>
+                    <a:bodyPr/>
+                    <a:lstStyle/>
+                    <a:p>
+                      <a:pPr lvl="0" indent="0" marL="0">
+                        <a:buNone/>
+                      </a:pPr>
+                      <a:r>
+                        <a:rPr/>
+                        <a:t>107642</a:t>
+                      </a:r>
+                    </a:p>
+                  </a:txBody>
+                </a:tc>
+                <a:tc>
+                  <a:txBody>
+                    <a:bodyPr/>
+                    <a:lstStyle/>
+                    <a:p>
+                      <a:pPr lvl="0" indent="0" marL="0">
+                        <a:buNone/>
+                      </a:pPr>
+                      <a:r>
+                        <a:rPr/>
+                        <a:t>461</a:t>
+                      </a:r>
+                    </a:p>
+                  </a:txBody>
+                </a:tc>
+                <a:tc>
+                  <a:txBody>
+                    <a:bodyPr/>
+                    <a:lstStyle/>
+                    <a:p>
+                      <a:pPr lvl="0" indent="0" marL="0">
+                        <a:buNone/>
+                      </a:pPr>
+                      <a:r>
+                        <a:rPr/>
+                        <a:t>10.0</a:t>
+                      </a:r>
+                    </a:p>
+                  </a:txBody>
+                </a:tc>
+                <a:tc>
+                  <a:txBody>
+                    <a:bodyPr/>
+                    <a:lstStyle/>
+                    <a:p>
+                      <a:pPr lvl="0" indent="0" marL="0">
+                        <a:buNone/>
+                      </a:pPr>
+                      <a:r>
+                        <a:rPr/>
+                        <a:t>66.5</a:t>
+                      </a:r>
+                    </a:p>
+                  </a:txBody>
+                </a:tc>
+                <a:tc>
+                  <a:txBody>
+                    <a:bodyPr/>
+                    <a:lstStyle/>
+                    <a:p>
+                      <a:pPr lvl="0" indent="0" marL="0">
+                        <a:buNone/>
+                      </a:pPr>
+                      <a:r>
+                        <a:rPr/>
+                        <a:t>565.80</a:t>
+                      </a:r>
+                    </a:p>
+                  </a:txBody>
+                </a:tc>
+                <a:tc>
+                  <a:txBody>
+                    <a:bodyPr/>
+                    <a:lstStyle/>
+                    <a:p>
+                      <a:pPr lvl="0" indent="0" marL="0">
+                        <a:buNone/>
+                      </a:pPr>
+                      <a:r>
+                        <a:rPr/>
+                        <a:t>sugarberry</a:t>
+                      </a:r>
+                    </a:p>
+                  </a:txBody>
+                </a:tc>
+                <a:tc>
+                  <a:txBody>
+                    <a:bodyPr/>
+                    <a:lstStyle/>
+                    <a:p>
+                      <a:pPr lvl="0" indent="0" marL="0">
+                        <a:buNone/>
+                      </a:pPr>
+                      <a:r>
+                        <a:rPr/>
+                        <a:t>5222.893375</a:t>
+                      </a:r>
+                    </a:p>
+                  </a:txBody>
+                </a:tc>
+                <a:tc>
+                  <a:txBody>
+                    <a:bodyPr/>
+                    <a:lstStyle/>
+                    <a:p>
+                      <a:pPr lvl="0" indent="0" marL="0">
+                        <a:buNone/>
+                      </a:pPr>
+                      <a:r>
+                        <a:rPr/>
+                        <a:t>665.00</a:t>
+                      </a:r>
+                    </a:p>
+                  </a:txBody>
+                </a:tc>
+                <a:tc>
+                  <a:txBody>
+                    <a:bodyPr/>
+                    <a:lstStyle/>
+                    <a:p>
+                      <a:pPr lvl="0" indent="0" marL="0">
+                        <a:buNone/>
+                      </a:pPr>
+                      <a:r>
+                        <a:rPr/>
+                        <a:t>4422.25</a:t>
+                      </a:r>
+                    </a:p>
+                  </a:txBody>
+                </a:tc>
+              </a:tr>
+              <a:tr h="0">
+                <a:tc>
+                  <a:txBody>
+                    <a:bodyPr/>
+                    <a:lstStyle/>
+                    <a:p>
+                      <a:pPr lvl="0" indent="0" marL="0">
+                        <a:buNone/>
+                      </a:pPr>
+                      <a:r>
+                        <a:rPr/>
+                        <a:t>107643</a:t>
+                      </a:r>
+                    </a:p>
+                  </a:txBody>
+                </a:tc>
+                <a:tc>
+                  <a:txBody>
+                    <a:bodyPr/>
+                    <a:lstStyle/>
+                    <a:p>
+                      <a:pPr lvl="0" indent="0" marL="0">
+                        <a:buNone/>
+                      </a:pPr>
+                      <a:r>
+                        <a:rPr/>
+                        <a:t>461</a:t>
+                      </a:r>
+                    </a:p>
+                  </a:txBody>
+                </a:tc>
+                <a:tc>
+                  <a:txBody>
+                    <a:bodyPr/>
+                    <a:lstStyle/>
+                    <a:p>
+                      <a:pPr lvl="0" indent="0" marL="0">
+                        <a:buNone/>
+                      </a:pPr>
+                      <a:r>
+                        <a:rPr/>
+                        <a:t>6.2</a:t>
+                      </a:r>
+                    </a:p>
+                  </a:txBody>
+                </a:tc>
+                <a:tc>
+                  <a:txBody>
+                    <a:bodyPr/>
+                    <a:lstStyle/>
+                    <a:p>
+                      <a:pPr lvl="0" indent="0" marL="0">
+                        <a:buNone/>
+                      </a:pPr>
+                      <a:r>
+                        <a:rPr/>
+                        <a:t>54.2</a:t>
+                      </a:r>
+                    </a:p>
+                  </a:txBody>
+                </a:tc>
+                <a:tc>
+                  <a:txBody>
+                    <a:bodyPr/>
+                    <a:lstStyle/>
+                    <a:p>
+                      <a:pPr lvl="0" indent="0" marL="0">
+                        <a:buNone/>
+                      </a:pPr>
+                      <a:r>
+                        <a:rPr/>
+                        <a:t>191.04</a:t>
+                      </a:r>
+                    </a:p>
+                  </a:txBody>
+                </a:tc>
+                <a:tc>
+                  <a:txBody>
+                    <a:bodyPr/>
+                    <a:lstStyle/>
+                    <a:p>
+                      <a:pPr lvl="0" indent="0" marL="0">
+                        <a:buNone/>
+                      </a:pPr>
+                      <a:r>
+                        <a:rPr/>
+                        <a:t>sugarberry</a:t>
+                      </a:r>
+                    </a:p>
+                  </a:txBody>
+                </a:tc>
+                <a:tc>
+                  <a:txBody>
+                    <a:bodyPr/>
+                    <a:lstStyle/>
+                    <a:p>
+                      <a:pPr lvl="0" indent="0" marL="0">
+                        <a:buNone/>
+                      </a:pPr>
+                      <a:r>
+                        <a:rPr/>
+                        <a:t>1636.334851</a:t>
+                      </a:r>
+                    </a:p>
+                  </a:txBody>
+                </a:tc>
+                <a:tc>
+                  <a:txBody>
+                    <a:bodyPr/>
+                    <a:lstStyle/>
+                    <a:p>
+                      <a:pPr lvl="0" indent="0" marL="0">
+                        <a:buNone/>
+                      </a:pPr>
+                      <a:r>
+                        <a:rPr/>
+                        <a:t>336.04</a:t>
+                      </a:r>
+                    </a:p>
+                  </a:txBody>
+                </a:tc>
+                <a:tc>
+                  <a:txBody>
+                    <a:bodyPr/>
+                    <a:lstStyle/>
+                    <a:p>
+                      <a:pPr lvl="0" indent="0" marL="0">
+                        <a:buNone/>
+                      </a:pPr>
+                      <a:r>
+                        <a:rPr/>
+                        <a:t>2937.64</a:t>
+                      </a:r>
+                    </a:p>
+                  </a:txBody>
+                </a:tc>
+              </a:tr>
+              <a:tr h="0">
+                <a:tc>
+                  <a:txBody>
+                    <a:bodyPr/>
+                    <a:lstStyle/>
+                    <a:p>
+                      <a:pPr lvl="0" indent="0" marL="0">
+                        <a:buNone/>
+                      </a:pPr>
+                      <a:r>
+                        <a:rPr/>
+                        <a:t>107644</a:t>
+                      </a:r>
+                    </a:p>
+                  </a:txBody>
+                </a:tc>
+                <a:tc>
+                  <a:txBody>
+                    <a:bodyPr/>
+                    <a:lstStyle/>
+                    <a:p>
+                      <a:pPr lvl="0" indent="0" marL="0">
+                        <a:buNone/>
+                      </a:pPr>
+                      <a:r>
+                        <a:rPr/>
+                        <a:t>461</a:t>
+                      </a:r>
+                    </a:p>
+                  </a:txBody>
+                </a:tc>
+                <a:tc>
+                  <a:txBody>
+                    <a:bodyPr/>
+                    <a:lstStyle/>
+                    <a:p>
+                      <a:pPr lvl="0" indent="0" marL="0">
+                        <a:buNone/>
+                      </a:pPr>
+                      <a:r>
+                        <a:rPr/>
+                        <a:t>16.0</a:t>
+                      </a:r>
+                    </a:p>
+                  </a:txBody>
+                </a:tc>
+                <a:tc>
+                  <a:txBody>
+                    <a:bodyPr/>
+                    <a:lstStyle/>
+                    <a:p>
+                      <a:pPr lvl="0" indent="0" marL="0">
+                        <a:buNone/>
+                      </a:pPr>
+                      <a:r>
+                        <a:rPr/>
+                        <a:t>82.5</a:t>
+                      </a:r>
+                    </a:p>
+                  </a:txBody>
+                </a:tc>
+                <a:tc>
+                  <a:txBody>
+                    <a:bodyPr/>
+                    <a:lstStyle/>
+                    <a:p>
+                      <a:pPr lvl="0" indent="0" marL="0">
+                        <a:buNone/>
+                      </a:pPr>
+                      <a:r>
+                        <a:rPr/>
+                        <a:t>1632.64</a:t>
+                      </a:r>
+                    </a:p>
+                  </a:txBody>
+                </a:tc>
+                <a:tc>
+                  <a:txBody>
+                    <a:bodyPr/>
+                    <a:lstStyle/>
+                    <a:p>
+                      <a:pPr lvl="0" indent="0" marL="0">
+                        <a:buNone/>
+                      </a:pPr>
+                      <a:r>
+                        <a:rPr/>
+                        <a:t>sugarberry</a:t>
+                      </a:r>
+                    </a:p>
+                  </a:txBody>
+                </a:tc>
+                <a:tc>
+                  <a:txBody>
+                    <a:bodyPr/>
+                    <a:lstStyle/>
+                    <a:p>
+                      <a:pPr lvl="0" indent="0" marL="0">
+                        <a:buNone/>
+                      </a:pPr>
+                      <a:r>
+                        <a:rPr/>
+                        <a:t>16587.595200</a:t>
+                      </a:r>
+                    </a:p>
+                  </a:txBody>
+                </a:tc>
+                <a:tc>
+                  <a:txBody>
+                    <a:bodyPr/>
+                    <a:lstStyle/>
+                    <a:p>
+                      <a:pPr lvl="0" indent="0" marL="0">
+                        <a:buNone/>
+                      </a:pPr>
+                      <a:r>
+                        <a:rPr/>
+                        <a:t>1320.00</a:t>
+                      </a:r>
+                    </a:p>
+                  </a:txBody>
+                </a:tc>
+                <a:tc>
+                  <a:txBody>
+                    <a:bodyPr/>
+                    <a:lstStyle/>
+                    <a:p>
+                      <a:pPr lvl="0" indent="0" marL="0">
+                        <a:buNone/>
+                      </a:pPr>
+                      <a:r>
+                        <a:rPr/>
+                        <a:t>6806.25</a:t>
+                      </a:r>
+                    </a:p>
+                  </a:txBody>
+                </a:tc>
+              </a:tr>
+              <a:tr h="0">
+                <a:tc>
+                  <a:txBody>
+                    <a:bodyPr/>
+                    <a:lstStyle/>
+                    <a:p>
+                      <a:pPr lvl="0" indent="0" marL="0">
+                        <a:buNone/>
+                      </a:pPr>
+                      <a:r>
+                        <a:rPr/>
+                        <a:t>107645</a:t>
+                      </a:r>
+                    </a:p>
+                  </a:txBody>
+                </a:tc>
+                <a:tc>
+                  <a:txBody>
+                    <a:bodyPr/>
+                    <a:lstStyle/>
+                    <a:p>
+                      <a:pPr lvl="0" indent="0" marL="0">
+                        <a:buNone/>
+                      </a:pPr>
+                      <a:r>
+                        <a:rPr/>
+                        <a:t>461</a:t>
+                      </a:r>
+                    </a:p>
+                  </a:txBody>
+                </a:tc>
+                <a:tc>
+                  <a:txBody>
+                    <a:bodyPr/>
+                    <a:lstStyle/>
+                    <a:p>
+                      <a:pPr lvl="0" indent="0" marL="0">
+                        <a:buNone/>
+                      </a:pPr>
+                      <a:r>
+                        <a:rPr/>
+                        <a:t>16.7</a:t>
+                      </a:r>
+                    </a:p>
+                  </a:txBody>
+                </a:tc>
+                <a:tc>
+                  <a:txBody>
+                    <a:bodyPr/>
+                    <a:lstStyle/>
+                    <a:p>
+                      <a:pPr lvl="0" indent="0" marL="0">
+                        <a:buNone/>
+                      </a:pPr>
+                      <a:r>
+                        <a:rPr/>
+                        <a:t>76.5</a:t>
+                      </a:r>
+                    </a:p>
+                  </a:txBody>
+                </a:tc>
+                <a:tc>
+                  <a:txBody>
+                    <a:bodyPr/>
+                    <a:lstStyle/>
+                    <a:p>
+                      <a:pPr lvl="0" indent="0" marL="0">
+                        <a:buNone/>
+                      </a:pPr>
+                      <a:r>
+                        <a:rPr/>
+                        <a:t>1644.66</a:t>
+                      </a:r>
+                    </a:p>
+                  </a:txBody>
+                </a:tc>
+                <a:tc>
+                  <a:txBody>
+                    <a:bodyPr/>
+                    <a:lstStyle/>
+                    <a:p>
+                      <a:pPr lvl="0" indent="0" marL="0">
+                        <a:buNone/>
+                      </a:pPr>
+                      <a:r>
+                        <a:rPr/>
+                        <a:t>sugarberry</a:t>
+                      </a:r>
+                    </a:p>
+                  </a:txBody>
+                </a:tc>
+                <a:tc>
+                  <a:txBody>
+                    <a:bodyPr/>
+                    <a:lstStyle/>
+                    <a:p>
+                      <a:pPr lvl="0" indent="0" marL="0">
+                        <a:buNone/>
+                      </a:pPr>
+                      <a:r>
+                        <a:rPr/>
+                        <a:t>16756.522421</a:t>
+                      </a:r>
+                    </a:p>
+                  </a:txBody>
+                </a:tc>
+                <a:tc>
+                  <a:txBody>
+                    <a:bodyPr/>
+                    <a:lstStyle/>
+                    <a:p>
+                      <a:pPr lvl="0" indent="0" marL="0">
+                        <a:buNone/>
+                      </a:pPr>
+                      <a:r>
+                        <a:rPr/>
+                        <a:t>1277.55</a:t>
+                      </a:r>
+                    </a:p>
+                  </a:txBody>
+                </a:tc>
+                <a:tc>
+                  <a:txBody>
+                    <a:bodyPr/>
+                    <a:lstStyle/>
+                    <a:p>
+                      <a:pPr lvl="0" indent="0" marL="0">
+                        <a:buNone/>
+                      </a:pPr>
+                      <a:r>
+                        <a:rPr/>
+                        <a:t>5852.25</a:t>
+                      </a:r>
+                    </a:p>
+                  </a:txBody>
+                </a:tc>
+              </a:tr>
+            </a:tbl>
+          </a:graphicData>
+        </a:graphic>
+      </p:graphicFrame>
+    </p:spTree>
+  </p:cSld>
+</p:sld>
+</file>
+
+<file path=ppt/slides/slide23.xml><?xml version="1.0" encoding="utf-8"?>
+<p:sld xmlns:a="http://schemas.openxmlformats.org/drawingml/2006/main" xmlns:r="http://schemas.openxmlformats.org/officeDocument/2006/relationships" xmlns:p="http://schemas.openxmlformats.org/presentationml/2006/main">
+  <p:cSld>
+    <p:spTree>
+      <p:nvGrpSpPr>
+        <p:cNvPr id="1" name=""/>
+        <p:cNvGrpSpPr/>
+        <p:nvPr/>
+      </p:nvGrpSpPr>
+      <p:grpSpPr>
+        <a:xfrm>
+          <a:off x="0" y="0"/>
+          <a:ext cx="0" cy="0"/>
+          <a:chOff x="0" y="0"/>
+          <a:chExt cx="0" cy="0"/>
+        </a:xfrm>
+      </p:grpSpPr>
+      <p:sp>
+        <p:nvSpPr>
+          <p:cNvPr id="2" name="Title 1"/>
+          <p:cNvSpPr>
+            <a:spLocks noGrp="1"/>
+          </p:cNvSpPr>
+          <p:nvPr>
+            <p:ph type="title"/>
+          </p:nvPr>
+        </p:nvSpPr>
+        <p:spPr/>
+        <p:txBody>
+          <a:bodyPr/>
+          <a:lstStyle/>
+          <a:p>
+            <a:pPr lvl="0" indent="0" marL="0">
+              <a:buNone/>
+            </a:pPr>
+            <a:r>
+              <a:rPr/>
+              <a:t>Testing and comparing models</a:t>
+            </a:r>
+          </a:p>
+        </p:txBody>
+      </p:sp>
+      <p:sp>
+        <p:nvSpPr>
+          <p:cNvPr id="3" name="Content Placeholder 2"/>
+          <p:cNvSpPr>
+            <a:spLocks noGrp="1"/>
+          </p:cNvSpPr>
+          <p:nvPr>
+            <p:ph idx="1"/>
+          </p:nvPr>
+        </p:nvSpPr>
+        <p:spPr/>
+        <p:txBody>
+          <a:bodyPr/>
+          <a:lstStyle/>
+          <a:p>
+            <a:pPr lvl="0" indent="0">
+              <a:buNone/>
+            </a:pPr>
+            <a:r>
+              <a:rPr>
+                <a:latin typeface="Courier"/>
+              </a:rPr>
+              <a:t>Height squared average RMSLE: 0.17182461751440922
+Height * diameter interacion average RMSLE: 0.15621192802587167
+Volume feature average RMSLE: 0.1554593982967315</a:t>
+            </a:r>
+          </a:p>
+        </p:txBody>
+      </p:sp>
+    </p:spTree>
+  </p:cSld>
+</p:sld>
+</file>
+
+<file path=ppt/slides/slide24.xml><?xml version="1.0" encoding="utf-8"?>
+<p:sld xmlns:a="http://schemas.openxmlformats.org/drawingml/2006/main" xmlns:r="http://schemas.openxmlformats.org/officeDocument/2006/relationships" xmlns:p="http://schemas.openxmlformats.org/presentationml/2006/main">
+  <p:cSld>
+    <p:spTree>
+      <p:nvGrpSpPr>
+        <p:cNvPr id="1" name=""/>
+        <p:cNvGrpSpPr/>
+        <p:nvPr/>
+      </p:nvGrpSpPr>
+      <p:grpSpPr>
+        <a:xfrm>
+          <a:off x="0" y="0"/>
+          <a:ext cx="0" cy="0"/>
+          <a:chOff x="0" y="0"/>
+          <a:chExt cx="0" cy="0"/>
+        </a:xfrm>
+      </p:grpSpPr>
+      <p:sp>
+        <p:nvSpPr>
+          <p:cNvPr id="2" name="Title 1"/>
+          <p:cNvSpPr>
+            <a:spLocks noGrp="1"/>
+          </p:cNvSpPr>
+          <p:nvPr>
+            <p:ph type="title"/>
+          </p:nvPr>
+        </p:nvSpPr>
+        <p:spPr/>
+        <p:txBody>
+          <a:bodyPr/>
+          <a:lstStyle/>
+          <a:p>
+            <a:pPr lvl="0" indent="0" marL="0">
+              <a:buNone/>
+            </a:pPr>
+            <a:r>
+              <a:rPr/>
+              <a:t>Quality Assurance</a:t>
+            </a:r>
+          </a:p>
+        </p:txBody>
+      </p:sp>
+      <p:sp>
+        <p:nvSpPr>
+          <p:cNvPr id="3" name="Content Placeholder 2"/>
+          <p:cNvSpPr>
+            <a:spLocks noGrp="1"/>
+          </p:cNvSpPr>
+          <p:nvPr>
+            <p:ph idx="1"/>
+          </p:nvPr>
+        </p:nvSpPr>
+        <p:spPr/>
+        <p:txBody>
+          <a:bodyPr/>
+          <a:lstStyle/>
+          <a:p>
+            <a:pPr lvl="0"/>
+            <a:r>
+              <a:rPr/>
+              <a:t>Testing uncertainty quantification methods for our prediction intervals</a:t>
+            </a:r>
+          </a:p>
+          <a:p>
+            <a:pPr lvl="0"/>
+            <a:r>
+              <a:rPr/>
+              <a:t>We did not use a linear model, so t-based prediction intervals couldn’t be made</a:t>
+            </a:r>
+          </a:p>
+          <a:p>
+            <a:pPr lvl="0"/>
+            <a:r>
+              <a:rPr/>
+              <a:t>Compared the other three methods</a:t>
+            </a:r>
+          </a:p>
+          <a:p>
+            <a:pPr lvl="1"/>
+            <a:r>
+              <a:rPr/>
+              <a:t>Conformal Prediction Intervals</a:t>
+            </a:r>
+          </a:p>
+          <a:p>
+            <a:pPr lvl="1"/>
+            <a:r>
+              <a:rPr/>
+              <a:t>Quantile Regression Prediction Intervals</a:t>
+            </a:r>
+          </a:p>
+          <a:p>
+            <a:pPr lvl="1"/>
+            <a:r>
+              <a:rPr/>
+              <a:t>Conformalized Quantile Regression (CQR) Prediction Intervals</a:t>
+            </a:r>
+          </a:p>
+        </p:txBody>
+      </p:sp>
+    </p:spTree>
+  </p:cSld>
+</p:sld>
+</file>
+
+<file path=ppt/slides/slide25.xml><?xml version="1.0" encoding="utf-8"?>
+<p:sld xmlns:a="http://schemas.openxmlformats.org/drawingml/2006/main" xmlns:r="http://schemas.openxmlformats.org/officeDocument/2006/relationships" xmlns:p="http://schemas.openxmlformats.org/presentationml/2006/main">
+  <p:cSld>
+    <p:spTree>
+      <p:nvGrpSpPr>
+        <p:cNvPr id="1" name=""/>
+        <p:cNvGrpSpPr/>
+        <p:nvPr/>
+      </p:nvGrpSpPr>
+      <p:grpSpPr>
+        <a:xfrm>
+          <a:off x="0" y="0"/>
+          <a:ext cx="0" cy="0"/>
+          <a:chOff x="0" y="0"/>
+          <a:chExt cx="0" cy="0"/>
+        </a:xfrm>
+      </p:grpSpPr>
+      <p:sp>
+        <p:nvSpPr>
+          <p:cNvPr id="2" name="Title 1"/>
+          <p:cNvSpPr>
+            <a:spLocks noGrp="1"/>
+          </p:cNvSpPr>
+          <p:nvPr>
+            <p:ph type="title"/>
+          </p:nvPr>
+        </p:nvSpPr>
+        <p:spPr/>
+        <p:txBody>
+          <a:bodyPr/>
+          <a:lstStyle/>
+          <a:p>
+            <a:pPr lvl="0" indent="0" marL="0">
+              <a:buNone/>
+            </a:pPr>
+            <a:r>
+              <a:rPr/>
+              <a:t>Conformal Prediction Intervals</a:t>
+            </a:r>
+          </a:p>
+        </p:txBody>
+      </p:sp>
+      <p:pic>
+        <p:nvPicPr>
+          <p:cNvPr descr="presentation_files/figure-pptx/cell-20-output-1.png" id="0" name="Picture 1"/>
+          <p:cNvPicPr>
+            <a:picLocks noGrp="1" noChangeAspect="1"/>
+          </p:cNvPicPr>
+          <p:nvPr/>
+        </p:nvPicPr>
+        <p:blipFill>
+          <a:blip r:embed="rId2"/>
+          <a:stretch>
+            <a:fillRect/>
+          </a:stretch>
+        </p:blipFill>
+        <p:spPr bwMode="auto">
+          <a:xfrm>
+            <a:off x="2197100" y="1193800"/>
+            <a:ext cx="4762500" cy="3390900"/>
+          </a:xfrm>
+          <a:prstGeom prst="rect">
+            <a:avLst/>
+          </a:prstGeom>
+          <a:noFill/>
+          <a:ln w="9525">
+            <a:noFill/>
+            <a:headEnd/>
+            <a:tailEnd/>
+          </a:ln>
+        </p:spPr>
+      </p:pic>
     </p:spTree>
   </p:cSld>
 </p:sld>
@@ -9691,7 +12763,7 @@
         <p:spPr bwMode="auto">
           <a:xfrm>
             <a:off x="1397000" y="1193800"/>
-            <a:ext cx="6350000" cy="3390900"/>
+            <a:ext cx="6337300" cy="3390900"/>
           </a:xfrm>
           <a:prstGeom prst="rect">
             <a:avLst/>
@@ -9844,8 +12916,8 @@
         </p:blipFill>
         <p:spPr bwMode="auto">
           <a:xfrm>
-            <a:off x="1435100" y="1193800"/>
-            <a:ext cx="6273800" cy="3390900"/>
+            <a:off x="1447800" y="1193800"/>
+            <a:ext cx="6248400" cy="3390900"/>
           </a:xfrm>
           <a:prstGeom prst="rect">
             <a:avLst/>

--- a/Project-3/presentation.pptx
+++ b/Project-3/presentation.pptx
@@ -30,6 +30,10 @@
     <p:sldId id="278" r:id="rId24"/>
     <p:sldId id="279" r:id="rId25"/>
     <p:sldId id="280" r:id="rId26"/>
+    <p:sldId id="281" r:id="rId27"/>
+    <p:sldId id="282" r:id="rId28"/>
+    <p:sldId id="283" r:id="rId29"/>
+    <p:sldId id="284" r:id="rId30"/>
   </p:sldIdLst>
   <p:sldSz cx="9144000" cy="5143500" type="screen16x9"/>
   <p:notesSz cx="6858000" cy="9144000"/>
@@ -7654,7 +7658,7 @@
             <a:pPr lvl="0"/>
             <a:r>
               <a:rPr/>
-              <a:t>DO_BH (Diameter at Breast Height): Diameter of the tree stem measured at breast height (4.5 feet or 1.37 meters above ground) including bark. This is the standard foresty measurement “DBH (outside bark)” and is the primary size variable used in nearly all allometric biomass models. This is measured in </a:t>
+              <a:t>DO_BH (Diameter at Breast Height): Diameter of the tree stem measured at breast height (4.5 feet or 1.37 meters above ground) including bark. This is the standard forestry measurement “DBH (outside bark)” and is the primary size variable used in nearly all allometric biomass models. This is measured in </a:t>
             </a:r>
             <a:r>
               <a:rPr b="1"/>
@@ -10915,6 +10919,373 @@
           </a:ln>
         </p:spPr>
       </p:pic>
+    </p:spTree>
+  </p:cSld>
+</p:sld>
+</file>
+
+<file path=ppt/slides/slide26.xml><?xml version="1.0" encoding="utf-8"?>
+<p:sld xmlns:a="http://schemas.openxmlformats.org/drawingml/2006/main" xmlns:r="http://schemas.openxmlformats.org/officeDocument/2006/relationships" xmlns:p="http://schemas.openxmlformats.org/presentationml/2006/main">
+  <p:cSld>
+    <p:spTree>
+      <p:nvGrpSpPr>
+        <p:cNvPr id="1" name=""/>
+        <p:cNvGrpSpPr/>
+        <p:nvPr/>
+      </p:nvGrpSpPr>
+      <p:grpSpPr>
+        <a:xfrm>
+          <a:off x="0" y="0"/>
+          <a:ext cx="0" cy="0"/>
+          <a:chOff x="0" y="0"/>
+          <a:chExt cx="0" cy="0"/>
+        </a:xfrm>
+      </p:grpSpPr>
+      <p:sp>
+        <p:nvSpPr>
+          <p:cNvPr id="2" name="Title 1"/>
+          <p:cNvSpPr>
+            <a:spLocks noGrp="1"/>
+          </p:cNvSpPr>
+          <p:nvPr>
+            <p:ph type="title"/>
+          </p:nvPr>
+        </p:nvSpPr>
+        <p:spPr/>
+        <p:txBody>
+          <a:bodyPr/>
+          <a:lstStyle/>
+          <a:p>
+            <a:pPr lvl="0" indent="0" marL="0">
+              <a:buNone/>
+            </a:pPr>
+            <a:r>
+              <a:rPr/>
+              <a:t>Quantile Regression Prediciton Intervals</a:t>
+            </a:r>
+          </a:p>
+        </p:txBody>
+      </p:sp>
+      <p:pic>
+        <p:nvPicPr>
+          <p:cNvPr descr="presentation_files/figure-pptx/cell-21-output-1.png" id="0" name="Picture 1"/>
+          <p:cNvPicPr>
+            <a:picLocks noGrp="1" noChangeAspect="1"/>
+          </p:cNvPicPr>
+          <p:nvPr/>
+        </p:nvPicPr>
+        <p:blipFill>
+          <a:blip r:embed="rId2"/>
+          <a:stretch>
+            <a:fillRect/>
+          </a:stretch>
+        </p:blipFill>
+        <p:spPr bwMode="auto">
+          <a:xfrm>
+            <a:off x="1155700" y="1193800"/>
+            <a:ext cx="6832600" cy="3390900"/>
+          </a:xfrm>
+          <a:prstGeom prst="rect">
+            <a:avLst/>
+          </a:prstGeom>
+          <a:noFill/>
+          <a:ln w="9525">
+            <a:noFill/>
+            <a:headEnd/>
+            <a:tailEnd/>
+          </a:ln>
+        </p:spPr>
+      </p:pic>
+    </p:spTree>
+  </p:cSld>
+</p:sld>
+</file>
+
+<file path=ppt/slides/slide27.xml><?xml version="1.0" encoding="utf-8"?>
+<p:sld xmlns:a="http://schemas.openxmlformats.org/drawingml/2006/main" xmlns:r="http://schemas.openxmlformats.org/officeDocument/2006/relationships" xmlns:p="http://schemas.openxmlformats.org/presentationml/2006/main">
+  <p:cSld>
+    <p:spTree>
+      <p:nvGrpSpPr>
+        <p:cNvPr id="1" name=""/>
+        <p:cNvGrpSpPr/>
+        <p:nvPr/>
+      </p:nvGrpSpPr>
+      <p:grpSpPr>
+        <a:xfrm>
+          <a:off x="0" y="0"/>
+          <a:ext cx="0" cy="0"/>
+          <a:chOff x="0" y="0"/>
+          <a:chExt cx="0" cy="0"/>
+        </a:xfrm>
+      </p:grpSpPr>
+      <p:sp>
+        <p:nvSpPr>
+          <p:cNvPr id="2" name="Title 1"/>
+          <p:cNvSpPr>
+            <a:spLocks noGrp="1"/>
+          </p:cNvSpPr>
+          <p:nvPr>
+            <p:ph type="title"/>
+          </p:nvPr>
+        </p:nvSpPr>
+        <p:spPr/>
+        <p:txBody>
+          <a:bodyPr/>
+          <a:lstStyle/>
+          <a:p>
+            <a:pPr lvl="0" indent="0" marL="0">
+              <a:buNone/>
+            </a:pPr>
+            <a:r>
+              <a:rPr/>
+              <a:t>CQR Prediction Intervals</a:t>
+            </a:r>
+          </a:p>
+        </p:txBody>
+      </p:sp>
+    </p:spTree>
+  </p:cSld>
+</p:sld>
+</file>
+
+<file path=ppt/slides/slide28.xml><?xml version="1.0" encoding="utf-8"?>
+<p:sld xmlns:a="http://schemas.openxmlformats.org/drawingml/2006/main" xmlns:r="http://schemas.openxmlformats.org/officeDocument/2006/relationships" xmlns:p="http://schemas.openxmlformats.org/presentationml/2006/main">
+  <p:cSld>
+    <p:spTree>
+      <p:nvGrpSpPr>
+        <p:cNvPr id="1" name=""/>
+        <p:cNvGrpSpPr/>
+        <p:nvPr/>
+      </p:nvGrpSpPr>
+      <p:grpSpPr>
+        <a:xfrm>
+          <a:off x="0" y="0"/>
+          <a:ext cx="0" cy="0"/>
+          <a:chOff x="0" y="0"/>
+          <a:chExt cx="0" cy="0"/>
+        </a:xfrm>
+      </p:grpSpPr>
+      <p:sp>
+        <p:nvSpPr>
+          <p:cNvPr id="2" name="Title 1"/>
+          <p:cNvSpPr>
+            <a:spLocks noGrp="1"/>
+          </p:cNvSpPr>
+          <p:nvPr>
+            <p:ph type="title"/>
+          </p:nvPr>
+        </p:nvSpPr>
+        <p:spPr/>
+        <p:txBody>
+          <a:bodyPr/>
+          <a:lstStyle/>
+          <a:p>
+            <a:pPr lvl="0" indent="0" marL="0">
+              <a:buNone/>
+            </a:pPr>
+            <a:r>
+              <a:rPr/>
+              <a:t>setting up data for CQR</a:t>
+            </a:r>
+          </a:p>
+        </p:txBody>
+      </p:sp>
+      <p:sp>
+        <p:nvSpPr>
+          <p:cNvPr id="3" name="Content Placeholder 2"/>
+          <p:cNvSpPr>
+            <a:spLocks noGrp="1"/>
+          </p:cNvSpPr>
+          <p:nvPr>
+            <p:ph idx="1"/>
+          </p:nvPr>
+        </p:nvSpPr>
+        <p:spPr/>
+        <p:txBody>
+          <a:bodyPr/>
+          <a:lstStyle/>
+          <a:p>
+            <a:pPr lvl="0" indent="0" marL="0">
+              <a:buNone/>
+            </a:pPr>
+            <a:r>
+              <a:rPr/>
+              <a:t>all_species_cqr_results = [] alpha = 0.05 k = 3</a:t>
+            </a:r>
+          </a:p>
+          <a:p>
+            <a:pPr lvl="0" indent="0" marL="0">
+              <a:buNone/>
+            </a:pPr>
+            <a:r>
+              <a:rPr/>
+              <a:t>for tree_name in unique_species: tree_subset = df_volume[df_volume[‘COMMON_NAME’] == tree_name].copy()</a:t>
+            </a:r>
+          </a:p>
+          <a:p>
+            <a:pPr lvl="0" indent="0">
+              <a:buNone/>
+            </a:pPr>
+            <a:r>
+              <a:rPr>
+                <a:latin typeface="Courier"/>
+              </a:rPr>
+              <a:t>train_split_ratio = 0.8
+cal_split_ratio = 0.10
+train_size = int(len(tree_subset) * train_split_ratio)
+cal_size = int(len(tree_subset) * cal_split_ratio)
+train_species = tree_subset.iloc[:train_size]
+calibration_species = tree_subset.iloc[train_size : train_size + cal_size]
+features = ['DO_BH', 'HT_TOT', 'VOLUME']
+target = 'TT_DW_CRM'
+X_train_species = train_species[features]
+y_train_species = train_species[target]
+X_calibration_species = calibration_species[features]
+y_calibration_species = calibration_species[target]
+scaler = StandardScaler()
+X_train_scaled = scaler.fit_transform(X_train_species)
+X_calibration_scaled = scaler.transform(X_calibration_species)
+X_full_species_scaled = scaler.transform(tree_subset[features]) 
+X_train_scaled_df = pd.DataFrame(X_train_scaled, columns=features)
+X_calibration_scaled_df = pd.DataFrame(X_calibration_scaled, columns=features)
+X_full_species_scaled_df = pd.DataFrame(X_full_species_scaled, columns=features)
+q_lower_cal_base = quantile_knn_predict(X_train_scaled_df, y_train_species,
+                                        X_calibration_scaled_df, k, alpha / 2)
+q_upper_cal_base = quantile_knn_predict(X_train_scaled_df, y_train_species,
+                                        X_calibration_scaled_df, k, 1 - alpha / 2)
+non_conformity_scores_cal = np.maximum(q_lower_cal_base - y_calibration_species.values,
+                                       y_calibration_species.values - q_upper_cal_base)
+non_conformity_scores_cal[non_conformity_scores_cal &lt; 0] = 0
+q_conformal_cqr = np.quantile(non_conformity_scores_cal, 1 - alpha)
+q_lower_full_base = quantile_knn_predict(X_train_scaled_df, y_train_species, X_full_species_scaled_df, k, alpha / 2)
+q_upper_full_base = quantile_knn_predict(X_train_scaled_df, y_train_species, X_full_species_scaled_df, k, 1 - alpha / 2)
+pi_lower_cqr = q_lower_full_base - q_conformal_cqr
+pi_upper_cqr = q_upper_full_base + q_conformal_cqr
+y_pred_median_full = quantile_knn_predict(X_train_scaled_df, y_train_species, X_full_species_scaled_df, k, 0.5)
+avg_actual = tree_subset[target].mean()
+avg_predicted = y_pred_median_full.mean()
+avg_lower_bound = pi_lower_cqr.mean()
+avg_upper_bound = pi_upper_cqr.mean()
+species_results = {
+    'tree_name': tree_name,
+    'average_actual_biomass': avg_actual,
+    'average_predicted_biomass': avg_predicted,
+    'average_lower_bound_cqr': avg_lower_bound,
+    'average_upper_bound_cqr': avg_upper_bound
+}
+all_species_cqr_results.append(species_results)</a:t>
+            </a:r>
+          </a:p>
+          <a:p>
+            <a:pPr lvl="0" indent="0" marL="0">
+              <a:buNone/>
+            </a:pPr>
+            <a:r>
+              <a:rPr/>
+              <a:t>cqr_prediction_intervals_df = pd.DataFrame(all_species_cqr_results) cqr_prediction_intervals_df.columns = [ ‘Species Name’, ‘Average Actual Biomass’, ‘Average Predicted Biomass’, ‘Average Lower Bound CQR’, ‘Average Upper Bound CQR’]</a:t>
+            </a:r>
+          </a:p>
+          <a:p>
+            <a:pPr lvl="0" indent="0" marL="0">
+              <a:buNone/>
+            </a:pPr>
+            <a:r>
+              <a:rPr/>
+              <a:t>cqr_prediction_intervals_df_sorted = cqr_prediction_intervals_df.sort_values(by=‘Average Predicted Biomass’).reset_index(drop=True) cqr_prediction_intervals_df_filtered = cqr_prediction_intervals_df_sorted[cqr_prediction_intervals_df_sorted[‘Average Actual Biomass’] &lt;= 1000]</a:t>
+            </a:r>
+          </a:p>
+          <a:p>
+            <a:pPr lvl="0" indent="0" marL="0">
+              <a:buNone/>
+            </a:pPr>
+            <a:r>
+              <a:rPr/>
+              <a:t>plt.figure(figsize=(14, 7))</a:t>
+            </a:r>
+          </a:p>
+        </p:txBody>
+      </p:sp>
+    </p:spTree>
+  </p:cSld>
+</p:sld>
+</file>
+
+<file path=ppt/slides/slide29.xml><?xml version="1.0" encoding="utf-8"?>
+<p:sld xmlns:a="http://schemas.openxmlformats.org/drawingml/2006/main" xmlns:r="http://schemas.openxmlformats.org/officeDocument/2006/relationships" xmlns:p="http://schemas.openxmlformats.org/presentationml/2006/main">
+  <p:cSld>
+    <p:spTree>
+      <p:nvGrpSpPr>
+        <p:cNvPr id="1" name=""/>
+        <p:cNvGrpSpPr/>
+        <p:nvPr/>
+      </p:nvGrpSpPr>
+      <p:grpSpPr>
+        <a:xfrm>
+          <a:off x="0" y="0"/>
+          <a:ext cx="0" cy="0"/>
+          <a:chOff x="0" y="0"/>
+          <a:chExt cx="0" cy="0"/>
+        </a:xfrm>
+      </p:grpSpPr>
+      <p:sp>
+        <p:nvSpPr>
+          <p:cNvPr id="2" name="Title 1"/>
+          <p:cNvSpPr>
+            <a:spLocks noGrp="1"/>
+          </p:cNvSpPr>
+          <p:nvPr>
+            <p:ph type="title"/>
+          </p:nvPr>
+        </p:nvSpPr>
+        <p:spPr/>
+        <p:txBody>
+          <a:bodyPr/>
+          <a:lstStyle/>
+          <a:p>
+            <a:pPr lvl="0" indent="0" marL="0">
+              <a:buNone/>
+            </a:pPr>
+            <a:r>
+              <a:rPr/>
+              <a:t>CQR Plot</a:t>
+            </a:r>
+          </a:p>
+        </p:txBody>
+      </p:sp>
+      <p:sp>
+        <p:nvSpPr>
+          <p:cNvPr id="3" name="Content Placeholder 2"/>
+          <p:cNvSpPr>
+            <a:spLocks noGrp="1"/>
+          </p:cNvSpPr>
+          <p:nvPr>
+            <p:ph idx="1"/>
+          </p:nvPr>
+        </p:nvSpPr>
+        <p:spPr/>
+        <p:txBody>
+          <a:bodyPr/>
+          <a:lstStyle/>
+          <a:p>
+            <a:pPr lvl="0" indent="0" marL="0">
+              <a:buNone/>
+            </a:pPr>
+            <a:r>
+              <a:rPr/>
+              <a:t>plt.plot(cqr_prediction_intervals_df_filtered.index, cqr_prediction_intervals_df_filtered[‘Average Actual Biomass’], ‘o’, label=‘Average Actual Biomass’, markersize=8, color=‘black’, alpha=0.7) plt.plot(cqr_prediction_intervals_df_filtered.index, cqr_prediction_intervals_df_filtered[‘Average Predicted Biomass’], ‘o-’, label=‘Average CQR Predicted Biomass (Median)’, linewidth=2, markersize=6, color=‘purple’, alpha=0.7) plt.fill_between(cqr_prediction_intervals_df_filtered.index, cqr_prediction_intervals_df_filtered[‘Average Lower Bound CQR’], cqr_prediction_intervals_df_filtered[‘Average Upper Bound CQR’], alpha=0.3, label=‘95% CQR Prediction Interval’, color=‘orange’)</a:t>
+            </a:r>
+          </a:p>
+          <a:p>
+            <a:pPr lvl="0" indent="0" marL="0">
+              <a:buNone/>
+            </a:pPr>
+            <a:r>
+              <a:rPr/>
+              <a:t>plt.xlabel(‘Species Index (Sorted by Average Predicted Biomass)’, fontsize=11) plt.ylabel(‘Average Biomass’, fontsize=11) plt.title(‘kNN Conformalized Quantile Regression: Average Prediction Intervals per Species (Biomass &lt; 1000)’, fontsize=14, fontweight=‘bold’) plt.legend(fontsize=9) plt.grid(True, alpha=0.3) plt.tight_layout() plt.show()</a:t>
+            </a:r>
+          </a:p>
+        </p:txBody>
+      </p:sp>
     </p:spTree>
   </p:cSld>
 </p:sld>

--- a/Project-3/presentation.pptx
+++ b/Project-3/presentation.pptx
@@ -30,6 +30,8 @@
     <p:sldId id="278" r:id="rId24"/>
     <p:sldId id="279" r:id="rId25"/>
     <p:sldId id="280" r:id="rId26"/>
+    <p:sldId id="281" r:id="rId27"/>
+    <p:sldId id="282" r:id="rId28"/>
   </p:sldIdLst>
   <p:sldSz cx="9144000" cy="5143500" type="screen16x9"/>
   <p:notesSz cx="6858000" cy="9144000"/>
@@ -3804,37 +3806,37 @@
                       </a:pPr>
                       <a:r>
                         <a:rPr/>
-                        <a:t>125.827396</a:t>
-                      </a:r>
-                    </a:p>
-                  </a:txBody>
-                </a:tc>
-                <a:tc>
-                  <a:txBody>
-                    <a:bodyPr/>
-                    <a:lstStyle/>
-                    <a:p>
-                      <a:pPr lvl="0" indent="0" marL="0">
-                        <a:buNone/>
-                      </a:pPr>
-                      <a:r>
-                        <a:rPr/>
-                        <a:t>34.820565</a:t>
-                      </a:r>
-                    </a:p>
-                  </a:txBody>
-                </a:tc>
-                <a:tc>
-                  <a:txBody>
-                    <a:bodyPr/>
-                    <a:lstStyle/>
-                    <a:p>
-                      <a:pPr lvl="0" indent="0" marL="0">
-                        <a:buNone/>
-                      </a:pPr>
-                      <a:r>
-                        <a:rPr/>
-                        <a:t>0.119617</a:t>
+                        <a:t>125.825473</a:t>
+                      </a:r>
+                    </a:p>
+                  </a:txBody>
+                </a:tc>
+                <a:tc>
+                  <a:txBody>
+                    <a:bodyPr/>
+                    <a:lstStyle/>
+                    <a:p>
+                      <a:pPr lvl="0" indent="0" marL="0">
+                        <a:buNone/>
+                      </a:pPr>
+                      <a:r>
+                        <a:rPr/>
+                        <a:t>34.801913</a:t>
+                      </a:r>
+                    </a:p>
+                  </a:txBody>
+                </a:tc>
+                <a:tc>
+                  <a:txBody>
+                    <a:bodyPr/>
+                    <a:lstStyle/>
+                    <a:p>
+                      <a:pPr lvl="0" indent="0" marL="0">
+                        <a:buNone/>
+                      </a:pPr>
+                      <a:r>
+                        <a:rPr/>
+                        <a:t>0.119574</a:t>
                       </a:r>
                     </a:p>
                   </a:txBody>
@@ -3896,37 +3898,37 @@
                       </a:pPr>
                       <a:r>
                         <a:rPr/>
-                        <a:t>129.650855</a:t>
-                      </a:r>
-                    </a:p>
-                  </a:txBody>
-                </a:tc>
-                <a:tc>
-                  <a:txBody>
-                    <a:bodyPr/>
-                    <a:lstStyle/>
-                    <a:p>
-                      <a:pPr lvl="0" indent="0" marL="0">
-                        <a:buNone/>
-                      </a:pPr>
-                      <a:r>
-                        <a:rPr/>
-                        <a:t>36.628377</a:t>
-                      </a:r>
-                    </a:p>
-                  </a:txBody>
-                </a:tc>
-                <a:tc>
-                  <a:txBody>
-                    <a:bodyPr/>
-                    <a:lstStyle/>
-                    <a:p>
-                      <a:pPr lvl="0" indent="0" marL="0">
-                        <a:buNone/>
-                      </a:pPr>
-                      <a:r>
-                        <a:rPr/>
-                        <a:t>0.123679</a:t>
+                        <a:t>129.651479</a:t>
+                      </a:r>
+                    </a:p>
+                  </a:txBody>
+                </a:tc>
+                <a:tc>
+                  <a:txBody>
+                    <a:bodyPr/>
+                    <a:lstStyle/>
+                    <a:p>
+                      <a:pPr lvl="0" indent="0" marL="0">
+                        <a:buNone/>
+                      </a:pPr>
+                      <a:r>
+                        <a:rPr/>
+                        <a:t>36.646493</a:t>
+                      </a:r>
+                    </a:p>
+                  </a:txBody>
+                </a:tc>
+                <a:tc>
+                  <a:txBody>
+                    <a:bodyPr/>
+                    <a:lstStyle/>
+                    <a:p>
+                      <a:pPr lvl="0" indent="0" marL="0">
+                        <a:buNone/>
+                      </a:pPr>
+                      <a:r>
+                        <a:rPr/>
+                        <a:t>0.123724</a:t>
                       </a:r>
                     </a:p>
                   </a:txBody>
@@ -4080,37 +4082,37 @@
                       </a:pPr>
                       <a:r>
                         <a:rPr/>
-                        <a:t>145.002852</a:t>
-                      </a:r>
-                    </a:p>
-                  </a:txBody>
-                </a:tc>
-                <a:tc>
-                  <a:txBody>
-                    <a:bodyPr/>
-                    <a:lstStyle/>
-                    <a:p>
-                      <a:pPr lvl="0" indent="0" marL="0">
-                        <a:buNone/>
-                      </a:pPr>
-                      <a:r>
-                        <a:rPr/>
-                        <a:t>41.168470</a:t>
-                      </a:r>
-                    </a:p>
-                  </a:txBody>
-                </a:tc>
-                <a:tc>
-                  <a:txBody>
-                    <a:bodyPr/>
-                    <a:lstStyle/>
-                    <a:p>
-                      <a:pPr lvl="0" indent="0" marL="0">
-                        <a:buNone/>
-                      </a:pPr>
-                      <a:r>
-                        <a:rPr/>
-                        <a:t>0.144052</a:t>
+                        <a:t>145.003601</a:t>
+                      </a:r>
+                    </a:p>
+                  </a:txBody>
+                </a:tc>
+                <a:tc>
+                  <a:txBody>
+                    <a:bodyPr/>
+                    <a:lstStyle/>
+                    <a:p>
+                      <a:pPr lvl="0" indent="0" marL="0">
+                        <a:buNone/>
+                      </a:pPr>
+                      <a:r>
+                        <a:rPr/>
+                        <a:t>41.209530</a:t>
+                      </a:r>
+                    </a:p>
+                  </a:txBody>
+                </a:tc>
+                <a:tc>
+                  <a:txBody>
+                    <a:bodyPr/>
+                    <a:lstStyle/>
+                    <a:p>
+                      <a:pPr lvl="0" indent="0" marL="0">
+                        <a:buNone/>
+                      </a:pPr>
+                      <a:r>
+                        <a:rPr/>
+                        <a:t>0.144063</a:t>
                       </a:r>
                     </a:p>
                   </a:txBody>
@@ -4172,37 +4174,37 @@
                       </a:pPr>
                       <a:r>
                         <a:rPr/>
-                        <a:t>147.449208</a:t>
-                      </a:r>
-                    </a:p>
-                  </a:txBody>
-                </a:tc>
-                <a:tc>
-                  <a:txBody>
-                    <a:bodyPr/>
-                    <a:lstStyle/>
-                    <a:p>
-                      <a:pPr lvl="0" indent="0" marL="0">
-                        <a:buNone/>
-                      </a:pPr>
-                      <a:r>
-                        <a:rPr/>
-                        <a:t>40.728609</a:t>
-                      </a:r>
-                    </a:p>
-                  </a:txBody>
-                </a:tc>
-                <a:tc>
-                  <a:txBody>
-                    <a:bodyPr/>
-                    <a:lstStyle/>
-                    <a:p>
-                      <a:pPr lvl="0" indent="0" marL="0">
-                        <a:buNone/>
-                      </a:pPr>
-                      <a:r>
-                        <a:rPr/>
-                        <a:t>0.142813</a:t>
+                        <a:t>147.451321</a:t>
+                      </a:r>
+                    </a:p>
+                  </a:txBody>
+                </a:tc>
+                <a:tc>
+                  <a:txBody>
+                    <a:bodyPr/>
+                    <a:lstStyle/>
+                    <a:p>
+                      <a:pPr lvl="0" indent="0" marL="0">
+                        <a:buNone/>
+                      </a:pPr>
+                      <a:r>
+                        <a:rPr/>
+                        <a:t>40.791681</a:t>
+                      </a:r>
+                    </a:p>
+                  </a:txBody>
+                </a:tc>
+                <a:tc>
+                  <a:txBody>
+                    <a:bodyPr/>
+                    <a:lstStyle/>
+                    <a:p>
+                      <a:pPr lvl="0" indent="0" marL="0">
+                        <a:buNone/>
+                      </a:pPr>
+                      <a:r>
+                        <a:rPr/>
+                        <a:t>0.142862</a:t>
                       </a:r>
                     </a:p>
                   </a:txBody>
@@ -4264,37 +4266,37 @@
                       </a:pPr>
                       <a:r>
                         <a:rPr/>
-                        <a:t>153.474421</a:t>
-                      </a:r>
-                    </a:p>
-                  </a:txBody>
-                </a:tc>
-                <a:tc>
-                  <a:txBody>
-                    <a:bodyPr/>
-                    <a:lstStyle/>
-                    <a:p>
-                      <a:pPr lvl="0" indent="0" marL="0">
-                        <a:buNone/>
-                      </a:pPr>
-                      <a:r>
-                        <a:rPr/>
-                        <a:t>42.215118</a:t>
-                      </a:r>
-                    </a:p>
-                  </a:txBody>
-                </a:tc>
-                <a:tc>
-                  <a:txBody>
-                    <a:bodyPr/>
-                    <a:lstStyle/>
-                    <a:p>
-                      <a:pPr lvl="0" indent="0" marL="0">
-                        <a:buNone/>
-                      </a:pPr>
-                      <a:r>
-                        <a:rPr/>
-                        <a:t>0.149516</a:t>
+                        <a:t>153.497849</a:t>
+                      </a:r>
+                    </a:p>
+                  </a:txBody>
+                </a:tc>
+                <a:tc>
+                  <a:txBody>
+                    <a:bodyPr/>
+                    <a:lstStyle/>
+                    <a:p>
+                      <a:pPr lvl="0" indent="0" marL="0">
+                        <a:buNone/>
+                      </a:pPr>
+                      <a:r>
+                        <a:rPr/>
+                        <a:t>42.310385</a:t>
+                      </a:r>
+                    </a:p>
+                  </a:txBody>
+                </a:tc>
+                <a:tc>
+                  <a:txBody>
+                    <a:bodyPr/>
+                    <a:lstStyle/>
+                    <a:p>
+                      <a:pPr lvl="0" indent="0" marL="0">
+                        <a:buNone/>
+                      </a:pPr>
+                      <a:r>
+                        <a:rPr/>
+                        <a:t>0.150128</a:t>
                       </a:r>
                     </a:p>
                   </a:txBody>
@@ -4356,37 +4358,37 @@
                       </a:pPr>
                       <a:r>
                         <a:rPr/>
-                        <a:t>156.768710</a:t>
-                      </a:r>
-                    </a:p>
-                  </a:txBody>
-                </a:tc>
-                <a:tc>
-                  <a:txBody>
-                    <a:bodyPr/>
-                    <a:lstStyle/>
-                    <a:p>
-                      <a:pPr lvl="0" indent="0" marL="0">
-                        <a:buNone/>
-                      </a:pPr>
-                      <a:r>
-                        <a:rPr/>
-                        <a:t>43.559217</a:t>
-                      </a:r>
-                    </a:p>
-                  </a:txBody>
-                </a:tc>
-                <a:tc>
-                  <a:txBody>
-                    <a:bodyPr/>
-                    <a:lstStyle/>
-                    <a:p>
-                      <a:pPr lvl="0" indent="0" marL="0">
-                        <a:buNone/>
-                      </a:pPr>
-                      <a:r>
-                        <a:rPr/>
-                        <a:t>0.154670</a:t>
+                        <a:t>156.757283</a:t>
+                      </a:r>
+                    </a:p>
+                  </a:txBody>
+                </a:tc>
+                <a:tc>
+                  <a:txBody>
+                    <a:bodyPr/>
+                    <a:lstStyle/>
+                    <a:p>
+                      <a:pPr lvl="0" indent="0" marL="0">
+                        <a:buNone/>
+                      </a:pPr>
+                      <a:r>
+                        <a:rPr/>
+                        <a:t>43.465652</a:t>
+                      </a:r>
+                    </a:p>
+                  </a:txBody>
+                </a:tc>
+                <a:tc>
+                  <a:txBody>
+                    <a:bodyPr/>
+                    <a:lstStyle/>
+                    <a:p>
+                      <a:pPr lvl="0" indent="0" marL="0">
+                        <a:buNone/>
+                      </a:pPr>
+                      <a:r>
+                        <a:rPr/>
+                        <a:t>0.154785</a:t>
                       </a:r>
                     </a:p>
                   </a:txBody>
@@ -4448,37 +4450,37 @@
                       </a:pPr>
                       <a:r>
                         <a:rPr/>
-                        <a:t>161.016214</a:t>
-                      </a:r>
-                    </a:p>
-                  </a:txBody>
-                </a:tc>
-                <a:tc>
-                  <a:txBody>
-                    <a:bodyPr/>
-                    <a:lstStyle/>
-                    <a:p>
-                      <a:pPr lvl="0" indent="0" marL="0">
-                        <a:buNone/>
-                      </a:pPr>
-                      <a:r>
-                        <a:rPr/>
-                        <a:t>44.751469</a:t>
-                      </a:r>
-                    </a:p>
-                  </a:txBody>
-                </a:tc>
-                <a:tc>
-                  <a:txBody>
-                    <a:bodyPr/>
-                    <a:lstStyle/>
-                    <a:p>
-                      <a:pPr lvl="0" indent="0" marL="0">
-                        <a:buNone/>
-                      </a:pPr>
-                      <a:r>
-                        <a:rPr/>
-                        <a:t>0.160504</a:t>
+                        <a:t>161.016352</a:t>
+                      </a:r>
+                    </a:p>
+                  </a:txBody>
+                </a:tc>
+                <a:tc>
+                  <a:txBody>
+                    <a:bodyPr/>
+                    <a:lstStyle/>
+                    <a:p>
+                      <a:pPr lvl="0" indent="0" marL="0">
+                        <a:buNone/>
+                      </a:pPr>
+                      <a:r>
+                        <a:rPr/>
+                        <a:t>44.758889</a:t>
+                      </a:r>
+                    </a:p>
+                  </a:txBody>
+                </a:tc>
+                <a:tc>
+                  <a:txBody>
+                    <a:bodyPr/>
+                    <a:lstStyle/>
+                    <a:p>
+                      <a:pPr lvl="0" indent="0" marL="0">
+                        <a:buNone/>
+                      </a:pPr>
+                      <a:r>
+                        <a:rPr/>
+                        <a:t>0.160937</a:t>
                       </a:r>
                     </a:p>
                   </a:txBody>
@@ -4650,15 +4652,15 @@
                 <a:latin typeface="Courier"/>
               </a:rPr>
               <a:t>    k  Avg_RMSLE
-0   2   0.152781
-1   3   0.158063
-2   4   0.162117
-3   5   0.168000
-4   6   0.174246
-5   7   0.180280
-6   8   0.185069
-7   9   0.190148
-8  10   0.196827</a:t>
+0   2   0.152872
+1   3   0.158059
+2   4   0.162102
+3   5   0.167931
+4   6   0.174191
+5   7   0.180289
+6   8   0.185042
+7   9   0.190129
+8  10   0.196823</a:t>
             </a:r>
           </a:p>
         </p:txBody>
@@ -7654,7 +7656,7 @@
             <a:pPr lvl="0"/>
             <a:r>
               <a:rPr/>
-              <a:t>DO_BH (Diameter at Breast Height): Diameter of the tree stem measured at breast height (4.5 feet or 1.37 meters above ground) including bark. This is the standard foresty measurement “DBH (outside bark)” and is the primary size variable used in nearly all allometric biomass models. This is measured in </a:t>
+              <a:t>DO_BH (Diameter at Breast Height): Diameter of the tree stem measured at breast height (4.5 feet or 1.37 meters above ground) including bark. This is the standard forestry measurement “DBH (outside bark)” and is the primary size variable used in nearly all allometric biomass models. This is measured in </a:t>
             </a:r>
             <a:r>
               <a:rPr b="1"/>
@@ -8919,11 +8921,11 @@
               <a:rPr>
                 <a:latin typeface="Courier"/>
               </a:rPr>
-              <a:t>Average (RMSLE) for k = 3: 0.1580629318243207
-Average (RMSLE) for k = 4: 0.16211701677056745
-Average (RMSLE) for k = 5: 0.16799989948813462
-Average (RMSLE) for k = 6: 0.17424643902227938
-Average (RMSLE) for k = 7: 0.18028016714992606</a:t>
+              <a:t>Average (RMSLE) for k = 3: 0.15805917967387384
+Average (RMSLE) for k = 4: 0.16210180527022203
+Average (RMSLE) for k = 5: 0.16793082822322966
+Average (RMSLE) for k = 6: 0.17419090936308976
+Average (RMSLE) for k = 7: 0.18028949487962886</a:t>
             </a:r>
           </a:p>
         </p:txBody>
@@ -10726,9 +10728,9 @@
               <a:rPr>
                 <a:latin typeface="Courier"/>
               </a:rPr>
-              <a:t>Height squared average RMSLE: 0.17182461751440922
-Height * diameter interacion average RMSLE: 0.15621192802587167
-Volume feature average RMSLE: 0.1554593982967315</a:t>
+              <a:t>Height squared average RMSLE: 0.1718436576886068
+Height * diameter interacion average RMSLE: 0.15623129644085285
+Volume feature average RMSLE: 0.15545015821636968</a:t>
             </a:r>
           </a:p>
         </p:txBody>
@@ -10915,6 +10917,130 @@
           </a:ln>
         </p:spPr>
       </p:pic>
+    </p:spTree>
+  </p:cSld>
+</p:sld>
+</file>
+
+<file path=ppt/slides/slide26.xml><?xml version="1.0" encoding="utf-8"?>
+<p:sld xmlns:a="http://schemas.openxmlformats.org/drawingml/2006/main" xmlns:r="http://schemas.openxmlformats.org/officeDocument/2006/relationships" xmlns:p="http://schemas.openxmlformats.org/presentationml/2006/main">
+  <p:cSld>
+    <p:spTree>
+      <p:nvGrpSpPr>
+        <p:cNvPr id="1" name=""/>
+        <p:cNvGrpSpPr/>
+        <p:nvPr/>
+      </p:nvGrpSpPr>
+      <p:grpSpPr>
+        <a:xfrm>
+          <a:off x="0" y="0"/>
+          <a:ext cx="0" cy="0"/>
+          <a:chOff x="0" y="0"/>
+          <a:chExt cx="0" cy="0"/>
+        </a:xfrm>
+      </p:grpSpPr>
+      <p:sp>
+        <p:nvSpPr>
+          <p:cNvPr id="2" name="Title 1"/>
+          <p:cNvSpPr>
+            <a:spLocks noGrp="1"/>
+          </p:cNvSpPr>
+          <p:nvPr>
+            <p:ph type="title"/>
+          </p:nvPr>
+        </p:nvSpPr>
+        <p:spPr/>
+        <p:txBody>
+          <a:bodyPr/>
+          <a:lstStyle/>
+          <a:p>
+            <a:pPr lvl="0" indent="0" marL="0">
+              <a:buNone/>
+            </a:pPr>
+            <a:r>
+              <a:rPr/>
+              <a:t>Quantile Regression Prediciton Intervals</a:t>
+            </a:r>
+          </a:p>
+        </p:txBody>
+      </p:sp>
+      <p:pic>
+        <p:nvPicPr>
+          <p:cNvPr descr="presentation_files/figure-pptx/cell-21-output-1.png" id="0" name="Picture 1"/>
+          <p:cNvPicPr>
+            <a:picLocks noGrp="1" noChangeAspect="1"/>
+          </p:cNvPicPr>
+          <p:nvPr/>
+        </p:nvPicPr>
+        <p:blipFill>
+          <a:blip r:embed="rId2"/>
+          <a:stretch>
+            <a:fillRect/>
+          </a:stretch>
+        </p:blipFill>
+        <p:spPr bwMode="auto">
+          <a:xfrm>
+            <a:off x="1155700" y="1193800"/>
+            <a:ext cx="6832600" cy="3390900"/>
+          </a:xfrm>
+          <a:prstGeom prst="rect">
+            <a:avLst/>
+          </a:prstGeom>
+          <a:noFill/>
+          <a:ln w="9525">
+            <a:noFill/>
+            <a:headEnd/>
+            <a:tailEnd/>
+          </a:ln>
+        </p:spPr>
+      </p:pic>
+    </p:spTree>
+  </p:cSld>
+</p:sld>
+</file>
+
+<file path=ppt/slides/slide27.xml><?xml version="1.0" encoding="utf-8"?>
+<p:sld xmlns:a="http://schemas.openxmlformats.org/drawingml/2006/main" xmlns:r="http://schemas.openxmlformats.org/officeDocument/2006/relationships" xmlns:p="http://schemas.openxmlformats.org/presentationml/2006/main">
+  <p:cSld>
+    <p:spTree>
+      <p:nvGrpSpPr>
+        <p:cNvPr id="1" name=""/>
+        <p:cNvGrpSpPr/>
+        <p:nvPr/>
+      </p:nvGrpSpPr>
+      <p:grpSpPr>
+        <a:xfrm>
+          <a:off x="0" y="0"/>
+          <a:ext cx="0" cy="0"/>
+          <a:chOff x="0" y="0"/>
+          <a:chExt cx="0" cy="0"/>
+        </a:xfrm>
+      </p:grpSpPr>
+      <p:sp>
+        <p:nvSpPr>
+          <p:cNvPr id="2" name="Title 1"/>
+          <p:cNvSpPr>
+            <a:spLocks noGrp="1"/>
+          </p:cNvSpPr>
+          <p:nvPr>
+            <p:ph type="title"/>
+          </p:nvPr>
+        </p:nvSpPr>
+        <p:spPr/>
+        <p:txBody>
+          <a:bodyPr/>
+          <a:lstStyle/>
+          <a:p>
+            <a:pPr lvl="0" indent="0" marL="0">
+              <a:buNone/>
+            </a:pPr>
+            <a:r>
+              <a:rPr/>
+              <a:t>CQR Prediction Intervals</a:t>
+            </a:r>
+          </a:p>
+        </p:txBody>
+      </p:sp>
     </p:spTree>
   </p:cSld>
 </p:sld>
@@ -12763,7 +12889,7 @@
         <p:spPr bwMode="auto">
           <a:xfrm>
             <a:off x="1397000" y="1193800"/>
-            <a:ext cx="6337300" cy="3390900"/>
+            <a:ext cx="6350000" cy="3390900"/>
           </a:xfrm>
           <a:prstGeom prst="rect">
             <a:avLst/>
@@ -12916,8 +13042,8 @@
         </p:blipFill>
         <p:spPr bwMode="auto">
           <a:xfrm>
-            <a:off x="1447800" y="1193800"/>
-            <a:ext cx="6248400" cy="3390900"/>
+            <a:off x="1435100" y="1193800"/>
+            <a:ext cx="6273800" cy="3390900"/>
           </a:xfrm>
           <a:prstGeom prst="rect">
             <a:avLst/>

--- a/Project-3/presentation.pptx
+++ b/Project-3/presentation.pptx
@@ -11041,6 +11041,36 @@
           </a:p>
         </p:txBody>
       </p:sp>
+      <p:pic>
+        <p:nvPicPr>
+          <p:cNvPr descr="presentation_files/figure-pptx/cell-22-output-1.png" id="0" name="Picture 1"/>
+          <p:cNvPicPr>
+            <a:picLocks noGrp="1" noChangeAspect="1"/>
+          </p:cNvPicPr>
+          <p:nvPr/>
+        </p:nvPicPr>
+        <p:blipFill>
+          <a:blip r:embed="rId2"/>
+          <a:stretch>
+            <a:fillRect/>
+          </a:stretch>
+        </p:blipFill>
+        <p:spPr bwMode="auto">
+          <a:xfrm>
+            <a:off x="1155700" y="1193800"/>
+            <a:ext cx="6832600" cy="3390900"/>
+          </a:xfrm>
+          <a:prstGeom prst="rect">
+            <a:avLst/>
+          </a:prstGeom>
+          <a:noFill/>
+          <a:ln w="9525">
+            <a:noFill/>
+            <a:headEnd/>
+            <a:tailEnd/>
+          </a:ln>
+        </p:spPr>
+      </p:pic>
     </p:spTree>
   </p:cSld>
 </p:sld>
